--- a/output/slides/ooad-checkpoint-draft/OOAD_Checkpoint_ZH_Draft.pptx
+++ b/output/slides/ooad-checkpoint-draft/OOAD_Checkpoint_ZH_Draft.pptx
@@ -2,25 +2,26 @@
 <file path=ppt/presentation.xml><?xml version="1.0" encoding="utf-8"?>
 <p:presentation xmlns:p="http://schemas.openxmlformats.org/presentationml/2006/main">
   <p:sldMasterIdLst>
-    <p:sldMasterId xmlns:r="http://schemas.openxmlformats.org/officeDocument/2006/relationships" id="2147483648" r:id="R4921b857b6e84b57"/>
+    <p:sldMasterId xmlns:r="http://schemas.openxmlformats.org/officeDocument/2006/relationships" id="2147483648" r:id="R85a9ced2a195467b"/>
   </p:sldMasterIdLst>
   <p:notesMasterIdLst>
-    <p:notesMasterId xmlns:r="http://schemas.openxmlformats.org/officeDocument/2006/relationships" r:id="R06b2c6daf80f4a3c"/>
+    <p:notesMasterId xmlns:r="http://schemas.openxmlformats.org/officeDocument/2006/relationships" r:id="R41ee0fa6dc554d15"/>
   </p:notesMasterIdLst>
   <p:sldIdLst>
-    <p:sldId xmlns:r="http://schemas.openxmlformats.org/officeDocument/2006/relationships" id="256" r:id="Rbd9a6519baa34fb1"/>
-    <p:sldId xmlns:r="http://schemas.openxmlformats.org/officeDocument/2006/relationships" id="257" r:id="R7740ec6bfd1c49d8"/>
-    <p:sldId xmlns:r="http://schemas.openxmlformats.org/officeDocument/2006/relationships" id="258" r:id="R53e7982ddd794a73"/>
-    <p:sldId xmlns:r="http://schemas.openxmlformats.org/officeDocument/2006/relationships" id="259" r:id="R088e8d62df5d447f"/>
-    <p:sldId xmlns:r="http://schemas.openxmlformats.org/officeDocument/2006/relationships" id="260" r:id="R2c53dc4dc8304eea"/>
-    <p:sldId xmlns:r="http://schemas.openxmlformats.org/officeDocument/2006/relationships" id="261" r:id="R044a65dcb7144bb8"/>
-    <p:sldId xmlns:r="http://schemas.openxmlformats.org/officeDocument/2006/relationships" id="262" r:id="R64fe7c76aa06488b"/>
-    <p:sldId xmlns:r="http://schemas.openxmlformats.org/officeDocument/2006/relationships" id="263" r:id="Rb115f85dee29402c"/>
-    <p:sldId xmlns:r="http://schemas.openxmlformats.org/officeDocument/2006/relationships" id="264" r:id="R731d651f684d4471"/>
-    <p:sldId xmlns:r="http://schemas.openxmlformats.org/officeDocument/2006/relationships" id="265" r:id="R9aaf9bb1318e4c21"/>
-    <p:sldId xmlns:r="http://schemas.openxmlformats.org/officeDocument/2006/relationships" id="266" r:id="R96b2175b47214c16"/>
-    <p:sldId xmlns:r="http://schemas.openxmlformats.org/officeDocument/2006/relationships" id="267" r:id="R9b5838637ead44d0"/>
-    <p:sldId xmlns:r="http://schemas.openxmlformats.org/officeDocument/2006/relationships" id="268" r:id="R942c90963b6140dc"/>
+    <p:sldId xmlns:r="http://schemas.openxmlformats.org/officeDocument/2006/relationships" id="256" r:id="Rc294694d86c0476b"/>
+    <p:sldId xmlns:r="http://schemas.openxmlformats.org/officeDocument/2006/relationships" id="257" r:id="R1b1f57c704ee455a"/>
+    <p:sldId xmlns:r="http://schemas.openxmlformats.org/officeDocument/2006/relationships" id="258" r:id="Ra351f8b671fe4c42"/>
+    <p:sldId xmlns:r="http://schemas.openxmlformats.org/officeDocument/2006/relationships" id="259" r:id="R2273ddfc044d4bae"/>
+    <p:sldId xmlns:r="http://schemas.openxmlformats.org/officeDocument/2006/relationships" id="260" r:id="R7bec64d972bb4734"/>
+    <p:sldId xmlns:r="http://schemas.openxmlformats.org/officeDocument/2006/relationships" id="261" r:id="Rcbdd32e8d6694ef8"/>
+    <p:sldId xmlns:r="http://schemas.openxmlformats.org/officeDocument/2006/relationships" id="262" r:id="R2c8cdc48a2e94b26"/>
+    <p:sldId xmlns:r="http://schemas.openxmlformats.org/officeDocument/2006/relationships" id="263" r:id="R1ef7b1b4fff041af"/>
+    <p:sldId xmlns:r="http://schemas.openxmlformats.org/officeDocument/2006/relationships" id="264" r:id="R14d3220ad0784259"/>
+    <p:sldId xmlns:r="http://schemas.openxmlformats.org/officeDocument/2006/relationships" id="265" r:id="R25d298d583fb4856"/>
+    <p:sldId xmlns:r="http://schemas.openxmlformats.org/officeDocument/2006/relationships" id="266" r:id="R264cd04743d241ed"/>
+    <p:sldId xmlns:r="http://schemas.openxmlformats.org/officeDocument/2006/relationships" id="267" r:id="R958882dcfa4a46c2"/>
+    <p:sldId xmlns:r="http://schemas.openxmlformats.org/officeDocument/2006/relationships" id="268" r:id="Reed62b5135cd4cdf"/>
+    <p:sldId xmlns:r="http://schemas.openxmlformats.org/officeDocument/2006/relationships" id="269" r:id="Ra5fc941eecc94b45"/>
   </p:sldIdLst>
   <p:sldSz cx="12192000" cy="6858000"/>
   <p:notesSz cx="6858000" cy="9144000"/>
@@ -813,6 +814,76 @@
 </p:notes>
 </file>
 
+<file path=ppt/notesSlides/notesSlide14.xml><?xml version="1.0" encoding="utf-8"?>
+<p:notes xmlns:p="http://schemas.openxmlformats.org/presentationml/2006/main">
+  <p:cSld>
+    <p:spTree>
+      <p:nvGrpSpPr>
+        <p:cNvPr id="1" name=""/>
+        <p:cNvGrpSpPr/>
+        <p:nvPr/>
+      </p:nvGrpSpPr>
+      <p:grpSpPr>
+        <a:xfrm xmlns:a="http://schemas.openxmlformats.org/drawingml/2006/main"/>
+      </p:grpSpPr>
+      <p:sp>
+        <p:nvSpPr>
+          <p:cNvPr id="2" name="Slide Image Placeholder 1"/>
+          <p:cNvSpPr>
+            <a:spLocks xmlns:a="http://schemas.openxmlformats.org/drawingml/2006/main" noGrp="1"/>
+          </p:cNvSpPr>
+          <p:nvPr>
+            <p:ph type="sldImg" idx="0"/>
+          </p:nvPr>
+        </p:nvSpPr>
+        <p:spPr/>
+      </p:sp>
+      <p:sp>
+        <p:nvSpPr>
+          <p:cNvPr id="3" name="Notes Placeholder 2"/>
+          <p:cNvSpPr>
+            <a:spLocks xmlns:a="http://schemas.openxmlformats.org/drawingml/2006/main" noGrp="1"/>
+          </p:cNvSpPr>
+          <p:nvPr>
+            <p:ph type="body" idx="1"/>
+          </p:nvPr>
+        </p:nvSpPr>
+        <p:spPr/>
+        <p:txBody>
+          <a:bodyPr xmlns:a="http://schemas.openxmlformats.org/drawingml/2006/main"/>
+          <a:lstStyle xmlns:a="http://schemas.openxmlformats.org/drawingml/2006/main"/>
+          <a:p xmlns:a="http://schemas.openxmlformats.org/drawingml/2006/main">
+            <a:r>
+              <a:t>這一頁是備援 use cases。若老師現場質疑某一項不夠獨立，就從這頁挑一個已完成的候選項目立即替換。</a:t>
+            </a:r>
+          </a:p>
+        </p:txBody>
+      </p:sp>
+      <p:sp>
+        <p:nvSpPr>
+          <p:cNvPr id="4" name="Slide Number Placeholder 3"/>
+          <p:cNvSpPr>
+            <a:spLocks xmlns:a="http://schemas.openxmlformats.org/drawingml/2006/main" noGrp="1"/>
+          </p:cNvSpPr>
+          <p:nvPr>
+            <p:ph type="sldNum" idx="5"/>
+          </p:nvPr>
+        </p:nvSpPr>
+        <p:spPr/>
+        <p:txBody>
+          <a:bodyPr xmlns:a="http://schemas.openxmlformats.org/drawingml/2006/main"/>
+          <a:lstStyle xmlns:a="http://schemas.openxmlformats.org/drawingml/2006/main"/>
+          <a:p xmlns:a="http://schemas.openxmlformats.org/drawingml/2006/main"/>
+        </p:txBody>
+      </p:sp>
+    </p:spTree>
+  </p:cSld>
+  <p:clrMapOvr>
+    <a:masterClrMapping xmlns:a="http://schemas.openxmlformats.org/drawingml/2006/main"/>
+  </p:clrMapOvr>
+</p:notes>
+</file>
+
 <file path=ppt/notesSlides/notesSlide2.xml><?xml version="1.0" encoding="utf-8"?>
 <p:notes xmlns:p="http://schemas.openxmlformats.org/presentationml/2006/main">
   <p:cSld>
@@ -991,7 +1062,11 @@
         <p:txBody>
           <a:bodyPr xmlns:a="http://schemas.openxmlformats.org/drawingml/2006/main"/>
           <a:lstStyle xmlns:a="http://schemas.openxmlformats.org/drawingml/2006/main"/>
-          <a:p xmlns:a="http://schemas.openxmlformats.org/drawingml/2006/main"/>
+          <a:p xmlns:a="http://schemas.openxmlformats.org/drawingml/2006/main">
+            <a:r>
+              <a:t>這次把使用案例圖從 8 個擴充為 11 個，將交易與警示生命週期拆成更具體的 user tasks，讓 use cases 更符合 OOAD 對功能獨立性的要求。</a:t>
+            </a:r>
+          </a:p>
         </p:txBody>
       </p:sp>
       <p:sp>
@@ -1407,7 +1482,7 @@
   </p:cSld>
   <p:clrMap bg1="lt1" tx1="dk1" bg2="lt2" tx2="dk2" accent1="accent1" accent2="accent2" accent3="accent3" accent4="accent4" accent5="accent5" accent6="accent6" hlink="hlink" folHlink="folHlink"/>
   <p:sldLayoutIdLst>
-    <p:sldLayoutId xmlns:r="http://schemas.openxmlformats.org/officeDocument/2006/relationships" id="2147483649" r:id="R4d0ad948f1a94f5b"/>
+    <p:sldLayoutId xmlns:r="http://schemas.openxmlformats.org/officeDocument/2006/relationships" id="2147483649" r:id="R8f1c815193054224"/>
   </p:sldLayoutIdLst>
   <p:txStyles>
     <p:titleStyle>
@@ -1713,7 +1788,7 @@
           <p:cNvPr id="1" name="">
             <a:extLst xmlns:a="http://schemas.openxmlformats.org/drawingml/2006/main">
               <a:ext uri="{FF2B5EF4-FFF2-40B4-BE49-F238E27FC236}">
-                <a16:creationId xmlns:a16="http://schemas.microsoft.com/office/drawing/2014/main" id="{E447A91D-F5B6-4237-A86F-9B890449691C}"/>
+                <a16:creationId xmlns:a16="http://schemas.microsoft.com/office/drawing/2014/main" id="{A06BAE62-ECE4-4FE3-96BF-4FE25BA9F943}"/>
               </a:ext>
             </a:extLst>
           </p:cNvPr>
@@ -1748,7 +1823,7 @@
           <p:cNvPr id="2" name="">
             <a:extLst xmlns:a="http://schemas.openxmlformats.org/drawingml/2006/main">
               <a:ext uri="{FF2B5EF4-FFF2-40B4-BE49-F238E27FC236}">
-                <a16:creationId xmlns:a16="http://schemas.microsoft.com/office/drawing/2014/main" id="{EDF2B0E5-DC99-466F-A32F-C37CC83DBB95}"/>
+                <a16:creationId xmlns:a16="http://schemas.microsoft.com/office/drawing/2014/main" id="{9E7AD942-1EAB-4CBD-96CD-1C1FDD4AAD3E}"/>
               </a:ext>
             </a:extLst>
           </p:cNvPr>
@@ -1783,7 +1858,7 @@
           <p:cNvPr id="3" name="">
             <a:extLst xmlns:a="http://schemas.openxmlformats.org/drawingml/2006/main">
               <a:ext uri="{FF2B5EF4-FFF2-40B4-BE49-F238E27FC236}">
-                <a16:creationId xmlns:a16="http://schemas.microsoft.com/office/drawing/2014/main" id="{D3EABE98-B57D-4233-AAC5-50205D87717D}"/>
+                <a16:creationId xmlns:a16="http://schemas.microsoft.com/office/drawing/2014/main" id="{AC7E4037-9021-4836-9F6E-D96C270D12DB}"/>
               </a:ext>
             </a:extLst>
           </p:cNvPr>
@@ -1818,7 +1893,7 @@
           <p:cNvPr id="4" name="">
             <a:extLst xmlns:a="http://schemas.openxmlformats.org/drawingml/2006/main">
               <a:ext uri="{FF2B5EF4-FFF2-40B4-BE49-F238E27FC236}">
-                <a16:creationId xmlns:a16="http://schemas.microsoft.com/office/drawing/2014/main" id="{ACB048DD-E09A-4070-815A-6BD86BE1C2C1}"/>
+                <a16:creationId xmlns:a16="http://schemas.microsoft.com/office/drawing/2014/main" id="{11CBBAC8-3CDA-4C92-81DB-A0A3F8216E28}"/>
               </a:ext>
             </a:extLst>
           </p:cNvPr>
@@ -1853,7 +1928,7 @@
           <p:cNvPr id="5" name="">
             <a:extLst xmlns:a="http://schemas.openxmlformats.org/drawingml/2006/main">
               <a:ext uri="{FF2B5EF4-FFF2-40B4-BE49-F238E27FC236}">
-                <a16:creationId xmlns:a16="http://schemas.microsoft.com/office/drawing/2014/main" id="{0BA2FFD9-0C33-44DB-BEA3-E22C7A80A659}"/>
+                <a16:creationId xmlns:a16="http://schemas.microsoft.com/office/drawing/2014/main" id="{972FDC07-C916-4DB2-AC69-833319564B87}"/>
               </a:ext>
             </a:extLst>
           </p:cNvPr>
@@ -1911,7 +1986,7 @@
           <p:cNvPr id="6" name="">
             <a:extLst xmlns:a="http://schemas.openxmlformats.org/drawingml/2006/main">
               <a:ext uri="{FF2B5EF4-FFF2-40B4-BE49-F238E27FC236}">
-                <a16:creationId xmlns:a16="http://schemas.microsoft.com/office/drawing/2014/main" id="{EC5B5D90-E67D-404A-9CF5-36A9F54A6B93}"/>
+                <a16:creationId xmlns:a16="http://schemas.microsoft.com/office/drawing/2014/main" id="{2765D182-6FCE-42E7-946E-0C9C5B8816B8}"/>
               </a:ext>
             </a:extLst>
           </p:cNvPr>
@@ -1969,7 +2044,7 @@
           <p:cNvPr id="7" name="">
             <a:extLst xmlns:a="http://schemas.openxmlformats.org/drawingml/2006/main">
               <a:ext uri="{FF2B5EF4-FFF2-40B4-BE49-F238E27FC236}">
-                <a16:creationId xmlns:a16="http://schemas.microsoft.com/office/drawing/2014/main" id="{5EF34E8F-17D7-4FBF-A7B6-95D0DDB11566}"/>
+                <a16:creationId xmlns:a16="http://schemas.microsoft.com/office/drawing/2014/main" id="{FA54B390-A6E4-4A3C-9A0A-83EF93AF72E5}"/>
               </a:ext>
             </a:extLst>
           </p:cNvPr>
@@ -2044,7 +2119,7 @@
           <p:cNvPr id="8" name="">
             <a:extLst xmlns:a="http://schemas.openxmlformats.org/drawingml/2006/main">
               <a:ext uri="{FF2B5EF4-FFF2-40B4-BE49-F238E27FC236}">
-                <a16:creationId xmlns:a16="http://schemas.microsoft.com/office/drawing/2014/main" id="{7C49A189-97FA-4D07-858F-ED6D6B91C2EC}"/>
+                <a16:creationId xmlns:a16="http://schemas.microsoft.com/office/drawing/2014/main" id="{18D7B389-6AE6-4CCC-B6B0-83AB84A4AAE9}"/>
               </a:ext>
             </a:extLst>
           </p:cNvPr>
@@ -2079,7 +2154,7 @@
           <p:cNvPr id="9" name="">
             <a:extLst xmlns:a="http://schemas.openxmlformats.org/drawingml/2006/main">
               <a:ext uri="{FF2B5EF4-FFF2-40B4-BE49-F238E27FC236}">
-                <a16:creationId xmlns:a16="http://schemas.microsoft.com/office/drawing/2014/main" id="{5B4F9135-1342-4206-8B71-28189B2D8530}"/>
+                <a16:creationId xmlns:a16="http://schemas.microsoft.com/office/drawing/2014/main" id="{D58F9D56-404D-4D86-8AAA-9C9EDD5D0934}"/>
               </a:ext>
             </a:extLst>
           </p:cNvPr>
@@ -2114,7 +2189,7 @@
           <p:cNvPr id="10" name="">
             <a:extLst xmlns:a="http://schemas.openxmlformats.org/drawingml/2006/main">
               <a:ext uri="{FF2B5EF4-FFF2-40B4-BE49-F238E27FC236}">
-                <a16:creationId xmlns:a16="http://schemas.microsoft.com/office/drawing/2014/main" id="{DF8D64D0-7846-4894-991B-26BDEDA2728A}"/>
+                <a16:creationId xmlns:a16="http://schemas.microsoft.com/office/drawing/2014/main" id="{3F18A06F-F7BA-4C8F-A1B1-51B712235107}"/>
               </a:ext>
             </a:extLst>
           </p:cNvPr>
@@ -2172,7 +2247,7 @@
           <p:cNvPr id="11" name="">
             <a:extLst xmlns:a="http://schemas.openxmlformats.org/drawingml/2006/main">
               <a:ext uri="{FF2B5EF4-FFF2-40B4-BE49-F238E27FC236}">
-                <a16:creationId xmlns:a16="http://schemas.microsoft.com/office/drawing/2014/main" id="{79F73E33-5907-416E-8C49-60643C05DC94}"/>
+                <a16:creationId xmlns:a16="http://schemas.microsoft.com/office/drawing/2014/main" id="{442C6DDA-380C-41A1-8F1A-588DCBDEDF68}"/>
               </a:ext>
             </a:extLst>
           </p:cNvPr>
@@ -2264,7 +2339,7 @@
           <p:cNvPr id="12" name="">
             <a:extLst xmlns:a="http://schemas.openxmlformats.org/drawingml/2006/main">
               <a:ext uri="{FF2B5EF4-FFF2-40B4-BE49-F238E27FC236}">
-                <a16:creationId xmlns:a16="http://schemas.microsoft.com/office/drawing/2014/main" id="{EEF21E66-0A6C-4B33-8AFE-FF3875CD8DEA}"/>
+                <a16:creationId xmlns:a16="http://schemas.microsoft.com/office/drawing/2014/main" id="{92AA93FE-2DD8-4E4A-A801-EC8DED1A34B3}"/>
               </a:ext>
             </a:extLst>
           </p:cNvPr>
@@ -2299,7 +2374,7 @@
           <p:cNvPr id="13" name="">
             <a:extLst xmlns:a="http://schemas.openxmlformats.org/drawingml/2006/main">
               <a:ext uri="{FF2B5EF4-FFF2-40B4-BE49-F238E27FC236}">
-                <a16:creationId xmlns:a16="http://schemas.microsoft.com/office/drawing/2014/main" id="{74B34A64-1644-4288-9FED-AD7CEAA004D5}"/>
+                <a16:creationId xmlns:a16="http://schemas.microsoft.com/office/drawing/2014/main" id="{9409B048-80C0-4944-ADB6-ABBC84559EBD}"/>
               </a:ext>
             </a:extLst>
           </p:cNvPr>
@@ -2334,7 +2409,7 @@
           <p:cNvPr id="14" name="">
             <a:extLst xmlns:a="http://schemas.openxmlformats.org/drawingml/2006/main">
               <a:ext uri="{FF2B5EF4-FFF2-40B4-BE49-F238E27FC236}">
-                <a16:creationId xmlns:a16="http://schemas.microsoft.com/office/drawing/2014/main" id="{7048A6E5-DB8E-4127-BC9E-98440AF8EEB7}"/>
+                <a16:creationId xmlns:a16="http://schemas.microsoft.com/office/drawing/2014/main" id="{FD72220A-75D6-47E0-B7F0-85C1622E6B45}"/>
               </a:ext>
             </a:extLst>
           </p:cNvPr>
@@ -2392,7 +2467,7 @@
           <p:cNvPr id="15" name="">
             <a:extLst xmlns:a="http://schemas.openxmlformats.org/drawingml/2006/main">
               <a:ext uri="{FF2B5EF4-FFF2-40B4-BE49-F238E27FC236}">
-                <a16:creationId xmlns:a16="http://schemas.microsoft.com/office/drawing/2014/main" id="{12270FBA-A2D9-4CEF-B8E8-A3737DD34E3E}"/>
+                <a16:creationId xmlns:a16="http://schemas.microsoft.com/office/drawing/2014/main" id="{D770C080-6336-4F9B-8032-85719B94F40A}"/>
               </a:ext>
             </a:extLst>
           </p:cNvPr>
@@ -2484,7 +2559,7 @@
           <p:cNvPr id="16" name="">
             <a:extLst xmlns:a="http://schemas.openxmlformats.org/drawingml/2006/main">
               <a:ext uri="{FF2B5EF4-FFF2-40B4-BE49-F238E27FC236}">
-                <a16:creationId xmlns:a16="http://schemas.microsoft.com/office/drawing/2014/main" id="{7C99339E-7DBB-4879-A97A-D71A8B9B6A88}"/>
+                <a16:creationId xmlns:a16="http://schemas.microsoft.com/office/drawing/2014/main" id="{6DB77C1C-8399-48DA-9FA5-F5808F96B1DB}"/>
               </a:ext>
             </a:extLst>
           </p:cNvPr>
@@ -2519,7 +2594,7 @@
           <p:cNvPr id="17" name="">
             <a:extLst xmlns:a="http://schemas.openxmlformats.org/drawingml/2006/main">
               <a:ext uri="{FF2B5EF4-FFF2-40B4-BE49-F238E27FC236}">
-                <a16:creationId xmlns:a16="http://schemas.microsoft.com/office/drawing/2014/main" id="{42B1846E-EF07-4051-93DA-5BC51E2DF008}"/>
+                <a16:creationId xmlns:a16="http://schemas.microsoft.com/office/drawing/2014/main" id="{C333D43C-2F66-4956-B3EA-9CD2C2F1D647}"/>
               </a:ext>
             </a:extLst>
           </p:cNvPr>
@@ -2554,7 +2629,7 @@
           <p:cNvPr id="18" name="">
             <a:extLst xmlns:a="http://schemas.openxmlformats.org/drawingml/2006/main">
               <a:ext uri="{FF2B5EF4-FFF2-40B4-BE49-F238E27FC236}">
-                <a16:creationId xmlns:a16="http://schemas.microsoft.com/office/drawing/2014/main" id="{EABE00E7-9960-4247-80C7-3318D1AE6006}"/>
+                <a16:creationId xmlns:a16="http://schemas.microsoft.com/office/drawing/2014/main" id="{BA4144CB-4DDF-4001-8E6C-04808377FC44}"/>
               </a:ext>
             </a:extLst>
           </p:cNvPr>
@@ -2612,7 +2687,7 @@
           <p:cNvPr id="19" name="">
             <a:extLst xmlns:a="http://schemas.openxmlformats.org/drawingml/2006/main">
               <a:ext uri="{FF2B5EF4-FFF2-40B4-BE49-F238E27FC236}">
-                <a16:creationId xmlns:a16="http://schemas.microsoft.com/office/drawing/2014/main" id="{CD19ED8F-151E-44EE-837C-ACEDF6385750}"/>
+                <a16:creationId xmlns:a16="http://schemas.microsoft.com/office/drawing/2014/main" id="{62286998-BF59-4813-AB59-38DD67958F4B}"/>
               </a:ext>
             </a:extLst>
           </p:cNvPr>
@@ -2704,7 +2779,7 @@
           <p:cNvPr id="20" name="">
             <a:extLst xmlns:a="http://schemas.openxmlformats.org/drawingml/2006/main">
               <a:ext uri="{FF2B5EF4-FFF2-40B4-BE49-F238E27FC236}">
-                <a16:creationId xmlns:a16="http://schemas.microsoft.com/office/drawing/2014/main" id="{549C9A43-2C6D-45CF-9BAD-1EA903ABC34D}"/>
+                <a16:creationId xmlns:a16="http://schemas.microsoft.com/office/drawing/2014/main" id="{898973D4-CE05-43BF-BAB4-01777985DBEF}"/>
               </a:ext>
             </a:extLst>
           </p:cNvPr>
@@ -2739,7 +2814,7 @@
           <p:cNvPr id="21" name="">
             <a:extLst xmlns:a="http://schemas.openxmlformats.org/drawingml/2006/main">
               <a:ext uri="{FF2B5EF4-FFF2-40B4-BE49-F238E27FC236}">
-                <a16:creationId xmlns:a16="http://schemas.microsoft.com/office/drawing/2014/main" id="{64F0347A-1056-4FBE-9443-C121D06904AA}"/>
+                <a16:creationId xmlns:a16="http://schemas.microsoft.com/office/drawing/2014/main" id="{D45E5039-C8DA-4E90-88B0-5BCFB94C37A6}"/>
               </a:ext>
             </a:extLst>
           </p:cNvPr>
@@ -2774,7 +2849,7 @@
           <p:cNvPr id="22" name="">
             <a:extLst xmlns:a="http://schemas.openxmlformats.org/drawingml/2006/main">
               <a:ext uri="{FF2B5EF4-FFF2-40B4-BE49-F238E27FC236}">
-                <a16:creationId xmlns:a16="http://schemas.microsoft.com/office/drawing/2014/main" id="{5B4F9861-A5C5-41D5-9A58-BEB40E49A62D}"/>
+                <a16:creationId xmlns:a16="http://schemas.microsoft.com/office/drawing/2014/main" id="{BBBAE97C-4BD1-42E6-94C9-337B34FDC097}"/>
               </a:ext>
             </a:extLst>
           </p:cNvPr>
@@ -2832,7 +2907,7 @@
           <p:cNvPr id="23" name="">
             <a:extLst xmlns:a="http://schemas.openxmlformats.org/drawingml/2006/main">
               <a:ext uri="{FF2B5EF4-FFF2-40B4-BE49-F238E27FC236}">
-                <a16:creationId xmlns:a16="http://schemas.microsoft.com/office/drawing/2014/main" id="{E5023D13-9440-41A7-8C14-35595754FF6F}"/>
+                <a16:creationId xmlns:a16="http://schemas.microsoft.com/office/drawing/2014/main" id="{C4C2CF6F-DDC8-4655-A059-330F971DACE3}"/>
               </a:ext>
             </a:extLst>
           </p:cNvPr>
@@ -2890,7 +2965,7 @@
           <p:cNvPr id="24" name="">
             <a:extLst xmlns:a="http://schemas.openxmlformats.org/drawingml/2006/main">
               <a:ext uri="{FF2B5EF4-FFF2-40B4-BE49-F238E27FC236}">
-                <a16:creationId xmlns:a16="http://schemas.microsoft.com/office/drawing/2014/main" id="{B7CDAD9D-B106-48D2-A867-877455B90AAF}"/>
+                <a16:creationId xmlns:a16="http://schemas.microsoft.com/office/drawing/2014/main" id="{CFDD2045-9B93-4F36-9645-F34AB6BE6E4C}"/>
               </a:ext>
             </a:extLst>
           </p:cNvPr>
@@ -2946,7 +3021,7 @@
     </p:spTree>
     <p:extLst>
       <p:ext uri="{BB962C8B-B14F-4D97-AF65-F5344CB8AC3E}">
-        <p14:creationId xmlns:p14="http://schemas.microsoft.com/office/powerpoint/2010/main" val="1266056249"/>
+        <p14:creationId xmlns:p14="http://schemas.microsoft.com/office/powerpoint/2010/main" val="1500817136"/>
       </p:ext>
     </p:extLst>
   </p:cSld>
@@ -2977,7 +3052,7 @@
           <p:cNvPr id="1" name="">
             <a:extLst xmlns:a="http://schemas.openxmlformats.org/drawingml/2006/main">
               <a:ext uri="{FF2B5EF4-FFF2-40B4-BE49-F238E27FC236}">
-                <a16:creationId xmlns:a16="http://schemas.microsoft.com/office/drawing/2014/main" id="{86FA7B43-8A27-4ED5-B6E1-D924756C97A3}"/>
+                <a16:creationId xmlns:a16="http://schemas.microsoft.com/office/drawing/2014/main" id="{30CAE54F-21FB-47B3-A9D4-90BBF4D8B420}"/>
               </a:ext>
             </a:extLst>
           </p:cNvPr>
@@ -3012,7 +3087,7 @@
           <p:cNvPr id="2" name="">
             <a:extLst xmlns:a="http://schemas.openxmlformats.org/drawingml/2006/main">
               <a:ext uri="{FF2B5EF4-FFF2-40B4-BE49-F238E27FC236}">
-                <a16:creationId xmlns:a16="http://schemas.microsoft.com/office/drawing/2014/main" id="{26C8ED18-73B9-49E6-8799-82A272D8D3AE}"/>
+                <a16:creationId xmlns:a16="http://schemas.microsoft.com/office/drawing/2014/main" id="{775EFC4C-38D5-471E-B339-79C3F34829BD}"/>
               </a:ext>
             </a:extLst>
           </p:cNvPr>
@@ -3047,7 +3122,7 @@
           <p:cNvPr id="3" name="">
             <a:extLst xmlns:a="http://schemas.openxmlformats.org/drawingml/2006/main">
               <a:ext uri="{FF2B5EF4-FFF2-40B4-BE49-F238E27FC236}">
-                <a16:creationId xmlns:a16="http://schemas.microsoft.com/office/drawing/2014/main" id="{5F87164F-EB60-452B-BF36-11120B82CD77}"/>
+                <a16:creationId xmlns:a16="http://schemas.microsoft.com/office/drawing/2014/main" id="{E2DCD511-2F0D-4101-B5CB-7AEBA0B8E84C}"/>
               </a:ext>
             </a:extLst>
           </p:cNvPr>
@@ -3105,7 +3180,7 @@
           <p:cNvPr id="4" name="">
             <a:extLst xmlns:a="http://schemas.openxmlformats.org/drawingml/2006/main">
               <a:ext uri="{FF2B5EF4-FFF2-40B4-BE49-F238E27FC236}">
-                <a16:creationId xmlns:a16="http://schemas.microsoft.com/office/drawing/2014/main" id="{D6AC5D64-175A-4BF5-A93E-FA14F1F0B2F0}"/>
+                <a16:creationId xmlns:a16="http://schemas.microsoft.com/office/drawing/2014/main" id="{F7127AF2-E854-476A-BA3E-42E76AF15585}"/>
               </a:ext>
             </a:extLst>
           </p:cNvPr>
@@ -3163,7 +3238,7 @@
           <p:cNvPr id="5" name="">
             <a:extLst xmlns:a="http://schemas.openxmlformats.org/drawingml/2006/main">
               <a:ext uri="{FF2B5EF4-FFF2-40B4-BE49-F238E27FC236}">
-                <a16:creationId xmlns:a16="http://schemas.microsoft.com/office/drawing/2014/main" id="{3FF032B5-0B94-4AF2-970E-9F149BB18724}"/>
+                <a16:creationId xmlns:a16="http://schemas.microsoft.com/office/drawing/2014/main" id="{D6C665DD-B185-43E0-856C-C1F8D374126F}"/>
               </a:ext>
             </a:extLst>
           </p:cNvPr>
@@ -3198,7 +3273,7 @@
           <p:cNvPr id="6" name="">
             <a:extLst xmlns:a="http://schemas.openxmlformats.org/drawingml/2006/main">
               <a:ext uri="{FF2B5EF4-FFF2-40B4-BE49-F238E27FC236}">
-                <a16:creationId xmlns:a16="http://schemas.microsoft.com/office/drawing/2014/main" id="{EB8ADD1F-F503-4BB6-9F87-9C739D2D6C71}"/>
+                <a16:creationId xmlns:a16="http://schemas.microsoft.com/office/drawing/2014/main" id="{9F79E0A3-77CD-4A31-A979-D62A78B16324}"/>
               </a:ext>
             </a:extLst>
           </p:cNvPr>
@@ -3256,7 +3331,7 @@
           <p:cNvPr id="7" name="">
             <a:extLst xmlns:a="http://schemas.openxmlformats.org/drawingml/2006/main">
               <a:ext uri="{FF2B5EF4-FFF2-40B4-BE49-F238E27FC236}">
-                <a16:creationId xmlns:a16="http://schemas.microsoft.com/office/drawing/2014/main" id="{688F09FB-0E65-44EF-8613-A8CAEC857255}"/>
+                <a16:creationId xmlns:a16="http://schemas.microsoft.com/office/drawing/2014/main" id="{82698B26-1D08-494F-A4BF-6438AFE7B31E}"/>
               </a:ext>
             </a:extLst>
           </p:cNvPr>
@@ -3314,7 +3389,7 @@
           <p:cNvPr id="8" name="">
             <a:extLst xmlns:a="http://schemas.openxmlformats.org/drawingml/2006/main">
               <a:ext uri="{FF2B5EF4-FFF2-40B4-BE49-F238E27FC236}">
-                <a16:creationId xmlns:a16="http://schemas.microsoft.com/office/drawing/2014/main" id="{33C66E12-0D06-46DC-9BFE-7336218CED61}"/>
+                <a16:creationId xmlns:a16="http://schemas.microsoft.com/office/drawing/2014/main" id="{9EC03BF6-4D6E-4364-82A7-1A58C490A225}"/>
               </a:ext>
             </a:extLst>
           </p:cNvPr>
@@ -3349,7 +3424,7 @@
           <p:cNvPr id="9" name="">
             <a:extLst xmlns:a="http://schemas.openxmlformats.org/drawingml/2006/main">
               <a:ext uri="{FF2B5EF4-FFF2-40B4-BE49-F238E27FC236}">
-                <a16:creationId xmlns:a16="http://schemas.microsoft.com/office/drawing/2014/main" id="{DA6C01F3-F4E1-4A95-B2CF-C0AE310D0F74}"/>
+                <a16:creationId xmlns:a16="http://schemas.microsoft.com/office/drawing/2014/main" id="{A97FD9E4-B41F-4E03-BE2A-C18789BAD64A}"/>
               </a:ext>
             </a:extLst>
           </p:cNvPr>
@@ -3384,7 +3459,7 @@
           <p:cNvPr id="10" name="">
             <a:extLst xmlns:a="http://schemas.openxmlformats.org/drawingml/2006/main">
               <a:ext uri="{FF2B5EF4-FFF2-40B4-BE49-F238E27FC236}">
-                <a16:creationId xmlns:a16="http://schemas.microsoft.com/office/drawing/2014/main" id="{A8914893-EFE5-4A0A-932F-40A5077F6055}"/>
+                <a16:creationId xmlns:a16="http://schemas.microsoft.com/office/drawing/2014/main" id="{5719741A-AD9E-4D84-AFE2-B67A2C9BC0FF}"/>
               </a:ext>
             </a:extLst>
           </p:cNvPr>
@@ -3442,7 +3517,7 @@
           <p:cNvPr id="11" name="">
             <a:extLst xmlns:a="http://schemas.openxmlformats.org/drawingml/2006/main">
               <a:ext uri="{FF2B5EF4-FFF2-40B4-BE49-F238E27FC236}">
-                <a16:creationId xmlns:a16="http://schemas.microsoft.com/office/drawing/2014/main" id="{7768EC00-FC69-4CC1-8CF8-A29699AB290D}"/>
+                <a16:creationId xmlns:a16="http://schemas.microsoft.com/office/drawing/2014/main" id="{4D441FA6-6736-4A07-B629-F1C593FFF14D}"/>
               </a:ext>
             </a:extLst>
           </p:cNvPr>
@@ -3477,7 +3552,7 @@
           <p:cNvPr id="12" name="">
             <a:extLst xmlns:a="http://schemas.openxmlformats.org/drawingml/2006/main">
               <a:ext uri="{FF2B5EF4-FFF2-40B4-BE49-F238E27FC236}">
-                <a16:creationId xmlns:a16="http://schemas.microsoft.com/office/drawing/2014/main" id="{0C75F65D-E8F3-4E08-95DF-D0569B1697F9}"/>
+                <a16:creationId xmlns:a16="http://schemas.microsoft.com/office/drawing/2014/main" id="{9CFEBF4D-D357-41AC-BB19-877996AE0DC7}"/>
               </a:ext>
             </a:extLst>
           </p:cNvPr>
@@ -3569,7 +3644,7 @@
           <p:cNvPr id="13" name="">
             <a:extLst xmlns:a="http://schemas.openxmlformats.org/drawingml/2006/main">
               <a:ext uri="{FF2B5EF4-FFF2-40B4-BE49-F238E27FC236}">
-                <a16:creationId xmlns:a16="http://schemas.microsoft.com/office/drawing/2014/main" id="{0F05DE83-49CB-476D-AB75-FDA62D1108C7}"/>
+                <a16:creationId xmlns:a16="http://schemas.microsoft.com/office/drawing/2014/main" id="{9456B8E3-74DB-48E2-BCED-AADB2C1CED71}"/>
               </a:ext>
             </a:extLst>
           </p:cNvPr>
@@ -3604,7 +3679,7 @@
           <p:cNvPr id="14" name="">
             <a:extLst xmlns:a="http://schemas.openxmlformats.org/drawingml/2006/main">
               <a:ext uri="{FF2B5EF4-FFF2-40B4-BE49-F238E27FC236}">
-                <a16:creationId xmlns:a16="http://schemas.microsoft.com/office/drawing/2014/main" id="{1A71E10B-AD07-4790-9625-D1B14EECF4CF}"/>
+                <a16:creationId xmlns:a16="http://schemas.microsoft.com/office/drawing/2014/main" id="{38B1380E-9F8F-466D-A490-C90BBB8D5F63}"/>
               </a:ext>
             </a:extLst>
           </p:cNvPr>
@@ -3696,7 +3771,7 @@
           <p:cNvPr id="15" name="">
             <a:extLst xmlns:a="http://schemas.openxmlformats.org/drawingml/2006/main">
               <a:ext uri="{FF2B5EF4-FFF2-40B4-BE49-F238E27FC236}">
-                <a16:creationId xmlns:a16="http://schemas.microsoft.com/office/drawing/2014/main" id="{9ED81376-7E93-4E0D-A140-EBDD9CB76C9E}"/>
+                <a16:creationId xmlns:a16="http://schemas.microsoft.com/office/drawing/2014/main" id="{9004D5B1-0F46-49C9-907C-53F035E12194}"/>
               </a:ext>
             </a:extLst>
           </p:cNvPr>
@@ -3731,7 +3806,7 @@
           <p:cNvPr id="16" name="">
             <a:extLst xmlns:a="http://schemas.openxmlformats.org/drawingml/2006/main">
               <a:ext uri="{FF2B5EF4-FFF2-40B4-BE49-F238E27FC236}">
-                <a16:creationId xmlns:a16="http://schemas.microsoft.com/office/drawing/2014/main" id="{910827B0-6080-4166-95B2-5E007235568E}"/>
+                <a16:creationId xmlns:a16="http://schemas.microsoft.com/office/drawing/2014/main" id="{1EC01CBC-DD61-4ECC-9964-395BEE71953A}"/>
               </a:ext>
             </a:extLst>
           </p:cNvPr>
@@ -3766,7 +3841,7 @@
           <p:cNvPr id="17" name="">
             <a:extLst xmlns:a="http://schemas.openxmlformats.org/drawingml/2006/main">
               <a:ext uri="{FF2B5EF4-FFF2-40B4-BE49-F238E27FC236}">
-                <a16:creationId xmlns:a16="http://schemas.microsoft.com/office/drawing/2014/main" id="{A5A043DA-E5B0-411C-8A06-2ED174601C9B}"/>
+                <a16:creationId xmlns:a16="http://schemas.microsoft.com/office/drawing/2014/main" id="{DDAF27F8-67C2-437A-80E2-B99B0976B070}"/>
               </a:ext>
             </a:extLst>
           </p:cNvPr>
@@ -3841,7 +3916,7 @@
           <p:cNvPr id="18" name="">
             <a:extLst xmlns:a="http://schemas.openxmlformats.org/drawingml/2006/main">
               <a:ext uri="{FF2B5EF4-FFF2-40B4-BE49-F238E27FC236}">
-                <a16:creationId xmlns:a16="http://schemas.microsoft.com/office/drawing/2014/main" id="{C2EE6927-ADA5-4A05-951D-6FD8DE04A5A0}"/>
+                <a16:creationId xmlns:a16="http://schemas.microsoft.com/office/drawing/2014/main" id="{7551F97C-792A-4E11-8A09-B51B618F9384}"/>
               </a:ext>
             </a:extLst>
           </p:cNvPr>
@@ -3876,7 +3951,7 @@
           <p:cNvPr id="19" name="">
             <a:extLst xmlns:a="http://schemas.openxmlformats.org/drawingml/2006/main">
               <a:ext uri="{FF2B5EF4-FFF2-40B4-BE49-F238E27FC236}">
-                <a16:creationId xmlns:a16="http://schemas.microsoft.com/office/drawing/2014/main" id="{5E15A4B5-990D-4E20-8542-4E5384E48D09}"/>
+                <a16:creationId xmlns:a16="http://schemas.microsoft.com/office/drawing/2014/main" id="{0E3116A0-3F5F-4B85-8FE3-1C2A1A0B300E}"/>
               </a:ext>
             </a:extLst>
           </p:cNvPr>
@@ -3934,7 +4009,7 @@
           <p:cNvPr id="20" name="">
             <a:extLst xmlns:a="http://schemas.openxmlformats.org/drawingml/2006/main">
               <a:ext uri="{FF2B5EF4-FFF2-40B4-BE49-F238E27FC236}">
-                <a16:creationId xmlns:a16="http://schemas.microsoft.com/office/drawing/2014/main" id="{D5D762E4-465A-48E5-ABCE-98008C729D27}"/>
+                <a16:creationId xmlns:a16="http://schemas.microsoft.com/office/drawing/2014/main" id="{BD5AF855-F535-4D2C-9E9F-95727FB04D92}"/>
               </a:ext>
             </a:extLst>
           </p:cNvPr>
@@ -3969,7 +4044,7 @@
           <p:cNvPr id="21" name="">
             <a:extLst xmlns:a="http://schemas.openxmlformats.org/drawingml/2006/main">
               <a:ext uri="{FF2B5EF4-FFF2-40B4-BE49-F238E27FC236}">
-                <a16:creationId xmlns:a16="http://schemas.microsoft.com/office/drawing/2014/main" id="{A7C2C948-0D38-401F-8B3E-DF40F690C979}"/>
+                <a16:creationId xmlns:a16="http://schemas.microsoft.com/office/drawing/2014/main" id="{19A69E49-1210-48BF-AFB7-1DE69087F959}"/>
               </a:ext>
             </a:extLst>
           </p:cNvPr>
@@ -4027,7 +4102,7 @@
           <p:cNvPr id="22" name="">
             <a:extLst xmlns:a="http://schemas.openxmlformats.org/drawingml/2006/main">
               <a:ext uri="{FF2B5EF4-FFF2-40B4-BE49-F238E27FC236}">
-                <a16:creationId xmlns:a16="http://schemas.microsoft.com/office/drawing/2014/main" id="{6977F591-0A93-4E36-A67E-281CCA311A87}"/>
+                <a16:creationId xmlns:a16="http://schemas.microsoft.com/office/drawing/2014/main" id="{E5AB85B9-B657-43D8-B8C5-31B875229988}"/>
               </a:ext>
             </a:extLst>
           </p:cNvPr>
@@ -4062,7 +4137,7 @@
           <p:cNvPr id="23" name="">
             <a:extLst xmlns:a="http://schemas.openxmlformats.org/drawingml/2006/main">
               <a:ext uri="{FF2B5EF4-FFF2-40B4-BE49-F238E27FC236}">
-                <a16:creationId xmlns:a16="http://schemas.microsoft.com/office/drawing/2014/main" id="{D33116DE-5EFB-4C54-8F74-6C880A05F1D0}"/>
+                <a16:creationId xmlns:a16="http://schemas.microsoft.com/office/drawing/2014/main" id="{65620B62-E73F-4A98-AA58-ABB3A7481ACE}"/>
               </a:ext>
             </a:extLst>
           </p:cNvPr>
@@ -4097,7 +4172,7 @@
           <p:cNvPr id="24" name="">
             <a:extLst xmlns:a="http://schemas.openxmlformats.org/drawingml/2006/main">
               <a:ext uri="{FF2B5EF4-FFF2-40B4-BE49-F238E27FC236}">
-                <a16:creationId xmlns:a16="http://schemas.microsoft.com/office/drawing/2014/main" id="{937298AE-D190-4253-AC7E-B56C76C704DD}"/>
+                <a16:creationId xmlns:a16="http://schemas.microsoft.com/office/drawing/2014/main" id="{5BB8C5AD-9178-4472-8604-30816BEE9021}"/>
               </a:ext>
             </a:extLst>
           </p:cNvPr>
@@ -4155,7 +4230,7 @@
           <p:cNvPr id="25" name="">
             <a:extLst xmlns:a="http://schemas.openxmlformats.org/drawingml/2006/main">
               <a:ext uri="{FF2B5EF4-FFF2-40B4-BE49-F238E27FC236}">
-                <a16:creationId xmlns:a16="http://schemas.microsoft.com/office/drawing/2014/main" id="{2004DE12-9A90-49E3-B925-73DA34432E97}"/>
+                <a16:creationId xmlns:a16="http://schemas.microsoft.com/office/drawing/2014/main" id="{B8B45553-4E90-40DA-8DC6-B643C33BDED4}"/>
               </a:ext>
             </a:extLst>
           </p:cNvPr>
@@ -4190,7 +4265,7 @@
           <p:cNvPr id="26" name="">
             <a:extLst xmlns:a="http://schemas.openxmlformats.org/drawingml/2006/main">
               <a:ext uri="{FF2B5EF4-FFF2-40B4-BE49-F238E27FC236}">
-                <a16:creationId xmlns:a16="http://schemas.microsoft.com/office/drawing/2014/main" id="{237FB5BF-6BDB-4239-869E-E83DC17A7C92}"/>
+                <a16:creationId xmlns:a16="http://schemas.microsoft.com/office/drawing/2014/main" id="{63F07B00-F794-4FD3-9F4B-2ACA8D9CA7A1}"/>
               </a:ext>
             </a:extLst>
           </p:cNvPr>
@@ -4248,7 +4323,7 @@
           <p:cNvPr id="27" name="">
             <a:extLst xmlns:a="http://schemas.openxmlformats.org/drawingml/2006/main">
               <a:ext uri="{FF2B5EF4-FFF2-40B4-BE49-F238E27FC236}">
-                <a16:creationId xmlns:a16="http://schemas.microsoft.com/office/drawing/2014/main" id="{A0704220-5DB5-4DBD-8AE3-AC91AF4C40E8}"/>
+                <a16:creationId xmlns:a16="http://schemas.microsoft.com/office/drawing/2014/main" id="{7DB75A10-613A-4E55-B225-A1B85394CDD8}"/>
               </a:ext>
             </a:extLst>
           </p:cNvPr>
@@ -4283,7 +4358,7 @@
           <p:cNvPr id="28" name="">
             <a:extLst xmlns:a="http://schemas.openxmlformats.org/drawingml/2006/main">
               <a:ext uri="{FF2B5EF4-FFF2-40B4-BE49-F238E27FC236}">
-                <a16:creationId xmlns:a16="http://schemas.microsoft.com/office/drawing/2014/main" id="{029A986E-7F2D-41A3-A785-B2C3903907F7}"/>
+                <a16:creationId xmlns:a16="http://schemas.microsoft.com/office/drawing/2014/main" id="{0E85CCAF-6A47-4502-A8E2-E3AEB5C66B2E}"/>
               </a:ext>
             </a:extLst>
           </p:cNvPr>
@@ -4358,7 +4433,7 @@
           <p:cNvPr id="29" name="">
             <a:extLst xmlns:a="http://schemas.openxmlformats.org/drawingml/2006/main">
               <a:ext uri="{FF2B5EF4-FFF2-40B4-BE49-F238E27FC236}">
-                <a16:creationId xmlns:a16="http://schemas.microsoft.com/office/drawing/2014/main" id="{E2A75812-3171-46C7-9EF5-1A4625887708}"/>
+                <a16:creationId xmlns:a16="http://schemas.microsoft.com/office/drawing/2014/main" id="{BE4F081C-75FD-4C8D-9448-3ABD5E05394A}"/>
               </a:ext>
             </a:extLst>
           </p:cNvPr>
@@ -4393,7 +4468,7 @@
           <p:cNvPr id="30" name="">
             <a:extLst xmlns:a="http://schemas.openxmlformats.org/drawingml/2006/main">
               <a:ext uri="{FF2B5EF4-FFF2-40B4-BE49-F238E27FC236}">
-                <a16:creationId xmlns:a16="http://schemas.microsoft.com/office/drawing/2014/main" id="{019CB52E-BEA6-4FFD-84BC-2FBA2152A899}"/>
+                <a16:creationId xmlns:a16="http://schemas.microsoft.com/office/drawing/2014/main" id="{B129A601-3BAC-434C-851D-88F8BC0DA82D}"/>
               </a:ext>
             </a:extLst>
           </p:cNvPr>
@@ -4428,7 +4503,7 @@
           <p:cNvPr id="31" name="">
             <a:extLst xmlns:a="http://schemas.openxmlformats.org/drawingml/2006/main">
               <a:ext uri="{FF2B5EF4-FFF2-40B4-BE49-F238E27FC236}">
-                <a16:creationId xmlns:a16="http://schemas.microsoft.com/office/drawing/2014/main" id="{AB0B42F0-5CEC-4220-8493-58F38921C66B}"/>
+                <a16:creationId xmlns:a16="http://schemas.microsoft.com/office/drawing/2014/main" id="{F7E73C62-CCE1-4676-93C1-9FB6F8A87BDA}"/>
               </a:ext>
             </a:extLst>
           </p:cNvPr>
@@ -4486,7 +4561,7 @@
           <p:cNvPr id="32" name="">
             <a:extLst xmlns:a="http://schemas.openxmlformats.org/drawingml/2006/main">
               <a:ext uri="{FF2B5EF4-FFF2-40B4-BE49-F238E27FC236}">
-                <a16:creationId xmlns:a16="http://schemas.microsoft.com/office/drawing/2014/main" id="{E8CA6C98-9D2E-4E93-BAFD-F24F4F860E53}"/>
+                <a16:creationId xmlns:a16="http://schemas.microsoft.com/office/drawing/2014/main" id="{7DD934D4-8A71-4DB5-B08E-5A1C679CE4E6}"/>
               </a:ext>
             </a:extLst>
           </p:cNvPr>
@@ -4521,7 +4596,7 @@
           <p:cNvPr id="33" name="">
             <a:extLst xmlns:a="http://schemas.openxmlformats.org/drawingml/2006/main">
               <a:ext uri="{FF2B5EF4-FFF2-40B4-BE49-F238E27FC236}">
-                <a16:creationId xmlns:a16="http://schemas.microsoft.com/office/drawing/2014/main" id="{9C3EC6BA-B25E-4E0D-85C5-23B930893C22}"/>
+                <a16:creationId xmlns:a16="http://schemas.microsoft.com/office/drawing/2014/main" id="{8CB26EF8-2268-4FB5-B995-F6AA8699E89A}"/>
               </a:ext>
             </a:extLst>
           </p:cNvPr>
@@ -4579,7 +4654,7 @@
           <p:cNvPr id="34" name="">
             <a:extLst xmlns:a="http://schemas.openxmlformats.org/drawingml/2006/main">
               <a:ext uri="{FF2B5EF4-FFF2-40B4-BE49-F238E27FC236}">
-                <a16:creationId xmlns:a16="http://schemas.microsoft.com/office/drawing/2014/main" id="{57C7DE75-1E06-4C53-BE1C-970B7EEF85A1}"/>
+                <a16:creationId xmlns:a16="http://schemas.microsoft.com/office/drawing/2014/main" id="{13C7B441-8437-40E2-9725-77D04C2260BB}"/>
               </a:ext>
             </a:extLst>
           </p:cNvPr>
@@ -4614,7 +4689,7 @@
           <p:cNvPr id="35" name="">
             <a:extLst xmlns:a="http://schemas.openxmlformats.org/drawingml/2006/main">
               <a:ext uri="{FF2B5EF4-FFF2-40B4-BE49-F238E27FC236}">
-                <a16:creationId xmlns:a16="http://schemas.microsoft.com/office/drawing/2014/main" id="{74A9EE0E-C4F0-4E3B-B952-EF6D8A2EDBCF}"/>
+                <a16:creationId xmlns:a16="http://schemas.microsoft.com/office/drawing/2014/main" id="{EED2FD2E-031D-4F1F-B138-3F6769645912}"/>
               </a:ext>
             </a:extLst>
           </p:cNvPr>
@@ -4672,7 +4747,7 @@
           <p:cNvPr id="36" name="">
             <a:extLst xmlns:a="http://schemas.openxmlformats.org/drawingml/2006/main">
               <a:ext uri="{FF2B5EF4-FFF2-40B4-BE49-F238E27FC236}">
-                <a16:creationId xmlns:a16="http://schemas.microsoft.com/office/drawing/2014/main" id="{B86F1C7B-6DA9-477D-A10A-E6EBE0F55B47}"/>
+                <a16:creationId xmlns:a16="http://schemas.microsoft.com/office/drawing/2014/main" id="{64030446-69B7-4972-81BA-5DC70C9EA91B}"/>
               </a:ext>
             </a:extLst>
           </p:cNvPr>
@@ -4707,7 +4782,7 @@
           <p:cNvPr id="37" name="">
             <a:extLst xmlns:a="http://schemas.openxmlformats.org/drawingml/2006/main">
               <a:ext uri="{FF2B5EF4-FFF2-40B4-BE49-F238E27FC236}">
-                <a16:creationId xmlns:a16="http://schemas.microsoft.com/office/drawing/2014/main" id="{0465B52D-EBF3-4BD3-8C81-42FCAD68F670}"/>
+                <a16:creationId xmlns:a16="http://schemas.microsoft.com/office/drawing/2014/main" id="{EADCFEF8-141B-46D6-9219-60ECD787E2D6}"/>
               </a:ext>
             </a:extLst>
           </p:cNvPr>
@@ -4742,7 +4817,7 @@
           <p:cNvPr id="38" name="">
             <a:extLst xmlns:a="http://schemas.openxmlformats.org/drawingml/2006/main">
               <a:ext uri="{FF2B5EF4-FFF2-40B4-BE49-F238E27FC236}">
-                <a16:creationId xmlns:a16="http://schemas.microsoft.com/office/drawing/2014/main" id="{AC70B473-BC8A-414D-A13F-901D9ABA45BA}"/>
+                <a16:creationId xmlns:a16="http://schemas.microsoft.com/office/drawing/2014/main" id="{1F1A7CC7-FD39-4F61-A00A-700353264C96}"/>
               </a:ext>
             </a:extLst>
           </p:cNvPr>
@@ -4817,7 +4892,7 @@
           <p:cNvPr id="39" name="">
             <a:extLst xmlns:a="http://schemas.openxmlformats.org/drawingml/2006/main">
               <a:ext uri="{FF2B5EF4-FFF2-40B4-BE49-F238E27FC236}">
-                <a16:creationId xmlns:a16="http://schemas.microsoft.com/office/drawing/2014/main" id="{DA48CD0A-AD37-44EB-899C-928507EFB919}"/>
+                <a16:creationId xmlns:a16="http://schemas.microsoft.com/office/drawing/2014/main" id="{010AE6E7-B6EC-4CB9-9913-F21272D1FEC5}"/>
               </a:ext>
             </a:extLst>
           </p:cNvPr>
@@ -4852,7 +4927,7 @@
           <p:cNvPr id="40" name="">
             <a:extLst xmlns:a="http://schemas.openxmlformats.org/drawingml/2006/main">
               <a:ext uri="{FF2B5EF4-FFF2-40B4-BE49-F238E27FC236}">
-                <a16:creationId xmlns:a16="http://schemas.microsoft.com/office/drawing/2014/main" id="{B44A5424-7593-458E-A5DB-D4196D5A061A}"/>
+                <a16:creationId xmlns:a16="http://schemas.microsoft.com/office/drawing/2014/main" id="{FFAB5B21-9235-4FC4-8DAF-5912C1FFAE27}"/>
               </a:ext>
             </a:extLst>
           </p:cNvPr>
@@ -4927,7 +5002,7 @@
           <p:cNvPr id="41" name="">
             <a:extLst xmlns:a="http://schemas.openxmlformats.org/drawingml/2006/main">
               <a:ext uri="{FF2B5EF4-FFF2-40B4-BE49-F238E27FC236}">
-                <a16:creationId xmlns:a16="http://schemas.microsoft.com/office/drawing/2014/main" id="{C2E9D3EA-C299-4282-89F8-892A110EFBF9}"/>
+                <a16:creationId xmlns:a16="http://schemas.microsoft.com/office/drawing/2014/main" id="{0954ECE6-B775-4FC9-B913-FF8DA3D659D2}"/>
               </a:ext>
             </a:extLst>
           </p:cNvPr>
@@ -4962,7 +5037,7 @@
           <p:cNvPr id="42" name="">
             <a:extLst xmlns:a="http://schemas.openxmlformats.org/drawingml/2006/main">
               <a:ext uri="{FF2B5EF4-FFF2-40B4-BE49-F238E27FC236}">
-                <a16:creationId xmlns:a16="http://schemas.microsoft.com/office/drawing/2014/main" id="{242A44B6-0B55-44EB-BEE7-7D8CAA14361E}"/>
+                <a16:creationId xmlns:a16="http://schemas.microsoft.com/office/drawing/2014/main" id="{49C8A1B0-1070-45D0-B1F6-30E3A9723518}"/>
               </a:ext>
             </a:extLst>
           </p:cNvPr>
@@ -5020,7 +5095,7 @@
           <p:cNvPr id="43" name="">
             <a:extLst xmlns:a="http://schemas.openxmlformats.org/drawingml/2006/main">
               <a:ext uri="{FF2B5EF4-FFF2-40B4-BE49-F238E27FC236}">
-                <a16:creationId xmlns:a16="http://schemas.microsoft.com/office/drawing/2014/main" id="{4CCBAA19-032E-4E0E-9389-84909EB23B97}"/>
+                <a16:creationId xmlns:a16="http://schemas.microsoft.com/office/drawing/2014/main" id="{B6E81C2E-3764-4A93-8AA4-B9024E486FC3}"/>
               </a:ext>
             </a:extLst>
           </p:cNvPr>
@@ -5055,7 +5130,7 @@
           <p:cNvPr id="44" name="">
             <a:extLst xmlns:a="http://schemas.openxmlformats.org/drawingml/2006/main">
               <a:ext uri="{FF2B5EF4-FFF2-40B4-BE49-F238E27FC236}">
-                <a16:creationId xmlns:a16="http://schemas.microsoft.com/office/drawing/2014/main" id="{E4AA3154-528D-484D-AFBA-A319BCFC700A}"/>
+                <a16:creationId xmlns:a16="http://schemas.microsoft.com/office/drawing/2014/main" id="{99047244-BA3F-4A42-8010-73ED89C7DE27}"/>
               </a:ext>
             </a:extLst>
           </p:cNvPr>
@@ -5090,7 +5165,7 @@
           <p:cNvPr id="45" name="">
             <a:extLst xmlns:a="http://schemas.openxmlformats.org/drawingml/2006/main">
               <a:ext uri="{FF2B5EF4-FFF2-40B4-BE49-F238E27FC236}">
-                <a16:creationId xmlns:a16="http://schemas.microsoft.com/office/drawing/2014/main" id="{FECC9AEC-7B3B-4052-95C9-E43C6024B299}"/>
+                <a16:creationId xmlns:a16="http://schemas.microsoft.com/office/drawing/2014/main" id="{660D236F-E277-4327-A7CE-5E0F2E77D942}"/>
               </a:ext>
             </a:extLst>
           </p:cNvPr>
@@ -5165,7 +5240,7 @@
           <p:cNvPr id="46" name="">
             <a:extLst xmlns:a="http://schemas.openxmlformats.org/drawingml/2006/main">
               <a:ext uri="{FF2B5EF4-FFF2-40B4-BE49-F238E27FC236}">
-                <a16:creationId xmlns:a16="http://schemas.microsoft.com/office/drawing/2014/main" id="{F7BC5FB1-31A5-491A-B3E5-09F4A7BB7324}"/>
+                <a16:creationId xmlns:a16="http://schemas.microsoft.com/office/drawing/2014/main" id="{80ED9530-86DC-4E86-B065-C8CB6C07C2F3}"/>
               </a:ext>
             </a:extLst>
           </p:cNvPr>
@@ -5200,7 +5275,7 @@
           <p:cNvPr id="47" name="">
             <a:extLst xmlns:a="http://schemas.openxmlformats.org/drawingml/2006/main">
               <a:ext uri="{FF2B5EF4-FFF2-40B4-BE49-F238E27FC236}">
-                <a16:creationId xmlns:a16="http://schemas.microsoft.com/office/drawing/2014/main" id="{1AE7C3DB-39FE-46E0-948E-03475D797084}"/>
+                <a16:creationId xmlns:a16="http://schemas.microsoft.com/office/drawing/2014/main" id="{0A0E8C77-B2EA-43AC-947A-9CE456ADB413}"/>
               </a:ext>
             </a:extLst>
           </p:cNvPr>
@@ -5275,7 +5350,7 @@
           <p:cNvPr id="48" name="">
             <a:extLst xmlns:a="http://schemas.openxmlformats.org/drawingml/2006/main">
               <a:ext uri="{FF2B5EF4-FFF2-40B4-BE49-F238E27FC236}">
-                <a16:creationId xmlns:a16="http://schemas.microsoft.com/office/drawing/2014/main" id="{DAD3C7AF-956E-4525-A078-FD857B110047}"/>
+                <a16:creationId xmlns:a16="http://schemas.microsoft.com/office/drawing/2014/main" id="{D8B48FB0-8379-445C-900A-A7E919D8FF02}"/>
               </a:ext>
             </a:extLst>
           </p:cNvPr>
@@ -5310,7 +5385,7 @@
           <p:cNvPr id="49" name="">
             <a:extLst xmlns:a="http://schemas.openxmlformats.org/drawingml/2006/main">
               <a:ext uri="{FF2B5EF4-FFF2-40B4-BE49-F238E27FC236}">
-                <a16:creationId xmlns:a16="http://schemas.microsoft.com/office/drawing/2014/main" id="{482D4B4F-5F9D-49E4-9F74-B5741B3905E6}"/>
+                <a16:creationId xmlns:a16="http://schemas.microsoft.com/office/drawing/2014/main" id="{84AA4B29-D726-41FF-BD62-7F8BCC91F572}"/>
               </a:ext>
             </a:extLst>
           </p:cNvPr>
@@ -5368,7 +5443,7 @@
           <p:cNvPr id="50" name="">
             <a:extLst xmlns:a="http://schemas.openxmlformats.org/drawingml/2006/main">
               <a:ext uri="{FF2B5EF4-FFF2-40B4-BE49-F238E27FC236}">
-                <a16:creationId xmlns:a16="http://schemas.microsoft.com/office/drawing/2014/main" id="{A71D5018-AAD6-4D88-9A68-F73AB7427E63}"/>
+                <a16:creationId xmlns:a16="http://schemas.microsoft.com/office/drawing/2014/main" id="{5C4DF2AD-A286-4948-9628-001D75114430}"/>
               </a:ext>
             </a:extLst>
           </p:cNvPr>
@@ -5403,7 +5478,7 @@
           <p:cNvPr id="51" name="">
             <a:extLst xmlns:a="http://schemas.openxmlformats.org/drawingml/2006/main">
               <a:ext uri="{FF2B5EF4-FFF2-40B4-BE49-F238E27FC236}">
-                <a16:creationId xmlns:a16="http://schemas.microsoft.com/office/drawing/2014/main" id="{57B7C142-151F-4663-8E79-47A3F789ABDE}"/>
+                <a16:creationId xmlns:a16="http://schemas.microsoft.com/office/drawing/2014/main" id="{38978539-878B-4EA2-A0FC-0C8BA41B80A7}"/>
               </a:ext>
             </a:extLst>
           </p:cNvPr>
@@ -5438,7 +5513,7 @@
           <p:cNvPr id="52" name="">
             <a:extLst xmlns:a="http://schemas.openxmlformats.org/drawingml/2006/main">
               <a:ext uri="{FF2B5EF4-FFF2-40B4-BE49-F238E27FC236}">
-                <a16:creationId xmlns:a16="http://schemas.microsoft.com/office/drawing/2014/main" id="{A1492AEE-B5E5-4548-BEEC-DE3F26B0FD2F}"/>
+                <a16:creationId xmlns:a16="http://schemas.microsoft.com/office/drawing/2014/main" id="{782ED659-34DC-4D9A-AA60-D523D59C6994}"/>
               </a:ext>
             </a:extLst>
           </p:cNvPr>
@@ -5496,7 +5571,7 @@
           <p:cNvPr id="53" name="">
             <a:extLst xmlns:a="http://schemas.openxmlformats.org/drawingml/2006/main">
               <a:ext uri="{FF2B5EF4-FFF2-40B4-BE49-F238E27FC236}">
-                <a16:creationId xmlns:a16="http://schemas.microsoft.com/office/drawing/2014/main" id="{9F708B70-7C5F-497F-9D76-1C724BBC0FD4}"/>
+                <a16:creationId xmlns:a16="http://schemas.microsoft.com/office/drawing/2014/main" id="{CA68D184-61D1-411D-9E49-BE8244DF8BC9}"/>
               </a:ext>
             </a:extLst>
           </p:cNvPr>
@@ -5531,7 +5606,7 @@
           <p:cNvPr id="54" name="">
             <a:extLst xmlns:a="http://schemas.openxmlformats.org/drawingml/2006/main">
               <a:ext uri="{FF2B5EF4-FFF2-40B4-BE49-F238E27FC236}">
-                <a16:creationId xmlns:a16="http://schemas.microsoft.com/office/drawing/2014/main" id="{17D289B2-C0AD-42A5-A412-8E3F322E5372}"/>
+                <a16:creationId xmlns:a16="http://schemas.microsoft.com/office/drawing/2014/main" id="{CF10B694-37AD-46E5-888E-0C0743B7C709}"/>
               </a:ext>
             </a:extLst>
           </p:cNvPr>
@@ -5606,7 +5681,7 @@
           <p:cNvPr id="55" name="">
             <a:extLst xmlns:a="http://schemas.openxmlformats.org/drawingml/2006/main">
               <a:ext uri="{FF2B5EF4-FFF2-40B4-BE49-F238E27FC236}">
-                <a16:creationId xmlns:a16="http://schemas.microsoft.com/office/drawing/2014/main" id="{73699798-B15A-46F3-85CE-F9E15B84A69D}"/>
+                <a16:creationId xmlns:a16="http://schemas.microsoft.com/office/drawing/2014/main" id="{439277AF-7C18-4235-9395-542F6780E46F}"/>
               </a:ext>
             </a:extLst>
           </p:cNvPr>
@@ -5641,7 +5716,7 @@
           <p:cNvPr id="56" name="">
             <a:extLst xmlns:a="http://schemas.openxmlformats.org/drawingml/2006/main">
               <a:ext uri="{FF2B5EF4-FFF2-40B4-BE49-F238E27FC236}">
-                <a16:creationId xmlns:a16="http://schemas.microsoft.com/office/drawing/2014/main" id="{4D832F87-8914-4F09-8A41-3244BBD70994}"/>
+                <a16:creationId xmlns:a16="http://schemas.microsoft.com/office/drawing/2014/main" id="{51566289-EA64-40D1-B6B1-B236EBCCE877}"/>
               </a:ext>
             </a:extLst>
           </p:cNvPr>
@@ -5716,7 +5791,7 @@
           <p:cNvPr id="57" name="">
             <a:extLst xmlns:a="http://schemas.openxmlformats.org/drawingml/2006/main">
               <a:ext uri="{FF2B5EF4-FFF2-40B4-BE49-F238E27FC236}">
-                <a16:creationId xmlns:a16="http://schemas.microsoft.com/office/drawing/2014/main" id="{F60FF38C-6221-476A-8F72-4374C2F0808F}"/>
+                <a16:creationId xmlns:a16="http://schemas.microsoft.com/office/drawing/2014/main" id="{8876CE95-25FA-45D0-A98E-995616AD2ADE}"/>
               </a:ext>
             </a:extLst>
           </p:cNvPr>
@@ -5751,7 +5826,7 @@
           <p:cNvPr id="58" name="">
             <a:extLst xmlns:a="http://schemas.openxmlformats.org/drawingml/2006/main">
               <a:ext uri="{FF2B5EF4-FFF2-40B4-BE49-F238E27FC236}">
-                <a16:creationId xmlns:a16="http://schemas.microsoft.com/office/drawing/2014/main" id="{4B255C37-DA45-4BD7-8637-14F4AFB3C714}"/>
+                <a16:creationId xmlns:a16="http://schemas.microsoft.com/office/drawing/2014/main" id="{E82325D6-82ED-43AF-AA73-26DAA75B2D39}"/>
               </a:ext>
             </a:extLst>
           </p:cNvPr>
@@ -5786,7 +5861,7 @@
           <p:cNvPr id="59" name="">
             <a:extLst xmlns:a="http://schemas.openxmlformats.org/drawingml/2006/main">
               <a:ext uri="{FF2B5EF4-FFF2-40B4-BE49-F238E27FC236}">
-                <a16:creationId xmlns:a16="http://schemas.microsoft.com/office/drawing/2014/main" id="{994ABE87-69F8-47CD-87D8-9CBC5FB533F2}"/>
+                <a16:creationId xmlns:a16="http://schemas.microsoft.com/office/drawing/2014/main" id="{986550D4-F810-475F-A01F-BA8B72097639}"/>
               </a:ext>
             </a:extLst>
           </p:cNvPr>
@@ -5844,7 +5919,7 @@
           <p:cNvPr id="60" name="">
             <a:extLst xmlns:a="http://schemas.openxmlformats.org/drawingml/2006/main">
               <a:ext uri="{FF2B5EF4-FFF2-40B4-BE49-F238E27FC236}">
-                <a16:creationId xmlns:a16="http://schemas.microsoft.com/office/drawing/2014/main" id="{70DC1D47-3954-48E2-8C1E-244D9D93754F}"/>
+                <a16:creationId xmlns:a16="http://schemas.microsoft.com/office/drawing/2014/main" id="{7556DA46-314F-4768-8C8A-06F2BDF05986}"/>
               </a:ext>
             </a:extLst>
           </p:cNvPr>
@@ -5879,7 +5954,7 @@
           <p:cNvPr id="61" name="">
             <a:extLst xmlns:a="http://schemas.openxmlformats.org/drawingml/2006/main">
               <a:ext uri="{FF2B5EF4-FFF2-40B4-BE49-F238E27FC236}">
-                <a16:creationId xmlns:a16="http://schemas.microsoft.com/office/drawing/2014/main" id="{387D089A-F0C0-49EF-9209-1BBEBB6FB7E8}"/>
+                <a16:creationId xmlns:a16="http://schemas.microsoft.com/office/drawing/2014/main" id="{714D06DF-255A-4903-BC08-01AA36BD40B4}"/>
               </a:ext>
             </a:extLst>
           </p:cNvPr>
@@ -5988,7 +6063,7 @@
           <p:cNvPr id="62" name="">
             <a:extLst xmlns:a="http://schemas.openxmlformats.org/drawingml/2006/main">
               <a:ext uri="{FF2B5EF4-FFF2-40B4-BE49-F238E27FC236}">
-                <a16:creationId xmlns:a16="http://schemas.microsoft.com/office/drawing/2014/main" id="{60A1CCD1-3372-483E-8F40-26F2E750DBED}"/>
+                <a16:creationId xmlns:a16="http://schemas.microsoft.com/office/drawing/2014/main" id="{8A6585B0-EABF-4190-AC3B-C90B557C9493}"/>
               </a:ext>
             </a:extLst>
           </p:cNvPr>
@@ -6023,7 +6098,7 @@
           <p:cNvPr id="63" name="">
             <a:extLst xmlns:a="http://schemas.openxmlformats.org/drawingml/2006/main">
               <a:ext uri="{FF2B5EF4-FFF2-40B4-BE49-F238E27FC236}">
-                <a16:creationId xmlns:a16="http://schemas.microsoft.com/office/drawing/2014/main" id="{AA7672CA-6765-4858-A2F5-3CCDAD2B1F04}"/>
+                <a16:creationId xmlns:a16="http://schemas.microsoft.com/office/drawing/2014/main" id="{FB8F53B7-03EF-4BF7-941A-F7697FE9CEAE}"/>
               </a:ext>
             </a:extLst>
           </p:cNvPr>
@@ -6081,7 +6156,7 @@
           <p:cNvPr id="64" name="">
             <a:extLst xmlns:a="http://schemas.openxmlformats.org/drawingml/2006/main">
               <a:ext uri="{FF2B5EF4-FFF2-40B4-BE49-F238E27FC236}">
-                <a16:creationId xmlns:a16="http://schemas.microsoft.com/office/drawing/2014/main" id="{31B1A1E2-5F5E-4A62-B3F8-71C73F13FAC8}"/>
+                <a16:creationId xmlns:a16="http://schemas.microsoft.com/office/drawing/2014/main" id="{9A381E15-47DD-4C13-B957-4D7E2A87422C}"/>
               </a:ext>
             </a:extLst>
           </p:cNvPr>
@@ -6116,7 +6191,7 @@
           <p:cNvPr id="65" name="">
             <a:extLst xmlns:a="http://schemas.openxmlformats.org/drawingml/2006/main">
               <a:ext uri="{FF2B5EF4-FFF2-40B4-BE49-F238E27FC236}">
-                <a16:creationId xmlns:a16="http://schemas.microsoft.com/office/drawing/2014/main" id="{6A21BB82-ADD4-4975-9A84-102268DF0175}"/>
+                <a16:creationId xmlns:a16="http://schemas.microsoft.com/office/drawing/2014/main" id="{3DAA0B46-4D63-41A0-8506-5E22A62F1C89}"/>
               </a:ext>
             </a:extLst>
           </p:cNvPr>
@@ -6151,7 +6226,7 @@
           <p:cNvPr id="66" name="">
             <a:extLst xmlns:a="http://schemas.openxmlformats.org/drawingml/2006/main">
               <a:ext uri="{FF2B5EF4-FFF2-40B4-BE49-F238E27FC236}">
-                <a16:creationId xmlns:a16="http://schemas.microsoft.com/office/drawing/2014/main" id="{3A4D22F5-D183-46AF-B235-1679E6FF622E}"/>
+                <a16:creationId xmlns:a16="http://schemas.microsoft.com/office/drawing/2014/main" id="{3B1420D9-F107-4BEF-B255-70A6AEE882B6}"/>
               </a:ext>
             </a:extLst>
           </p:cNvPr>
@@ -6209,7 +6284,7 @@
           <p:cNvPr id="67" name="">
             <a:extLst xmlns:a="http://schemas.openxmlformats.org/drawingml/2006/main">
               <a:ext uri="{FF2B5EF4-FFF2-40B4-BE49-F238E27FC236}">
-                <a16:creationId xmlns:a16="http://schemas.microsoft.com/office/drawing/2014/main" id="{44AD2490-6154-49E2-88E7-3B1CB5DC940D}"/>
+                <a16:creationId xmlns:a16="http://schemas.microsoft.com/office/drawing/2014/main" id="{0CD2FF42-F334-456A-A73D-E50733F57A72}"/>
               </a:ext>
             </a:extLst>
           </p:cNvPr>
@@ -6244,7 +6319,7 @@
           <p:cNvPr id="68" name="">
             <a:extLst xmlns:a="http://schemas.openxmlformats.org/drawingml/2006/main">
               <a:ext uri="{FF2B5EF4-FFF2-40B4-BE49-F238E27FC236}">
-                <a16:creationId xmlns:a16="http://schemas.microsoft.com/office/drawing/2014/main" id="{F817EFF9-85D5-487A-AF9F-E125985CF606}"/>
+                <a16:creationId xmlns:a16="http://schemas.microsoft.com/office/drawing/2014/main" id="{8DE89CF3-1134-4314-A244-543991D8AA47}"/>
               </a:ext>
             </a:extLst>
           </p:cNvPr>
@@ -6336,7 +6411,7 @@
           <p:cNvPr id="69" name="">
             <a:extLst xmlns:a="http://schemas.openxmlformats.org/drawingml/2006/main">
               <a:ext uri="{FF2B5EF4-FFF2-40B4-BE49-F238E27FC236}">
-                <a16:creationId xmlns:a16="http://schemas.microsoft.com/office/drawing/2014/main" id="{23FA807B-70C3-46DA-849B-30A2E090B520}"/>
+                <a16:creationId xmlns:a16="http://schemas.microsoft.com/office/drawing/2014/main" id="{41B9A85F-A7E3-4FDB-A64F-E3D5F0F9185E}"/>
               </a:ext>
             </a:extLst>
           </p:cNvPr>
@@ -6371,7 +6446,7 @@
           <p:cNvPr id="70" name="">
             <a:extLst xmlns:a="http://schemas.openxmlformats.org/drawingml/2006/main">
               <a:ext uri="{FF2B5EF4-FFF2-40B4-BE49-F238E27FC236}">
-                <a16:creationId xmlns:a16="http://schemas.microsoft.com/office/drawing/2014/main" id="{D9D63DF5-E790-4763-8986-BE3A52BA2682}"/>
+                <a16:creationId xmlns:a16="http://schemas.microsoft.com/office/drawing/2014/main" id="{1A8F85D7-EB0D-4E49-9020-40807EA92EA3}"/>
               </a:ext>
             </a:extLst>
           </p:cNvPr>
@@ -6429,7 +6504,7 @@
           <p:cNvPr id="71" name="">
             <a:extLst xmlns:a="http://schemas.openxmlformats.org/drawingml/2006/main">
               <a:ext uri="{FF2B5EF4-FFF2-40B4-BE49-F238E27FC236}">
-                <a16:creationId xmlns:a16="http://schemas.microsoft.com/office/drawing/2014/main" id="{CCB6A3E4-BAFB-4009-9F6A-400271D84E8A}"/>
+                <a16:creationId xmlns:a16="http://schemas.microsoft.com/office/drawing/2014/main" id="{2719C693-D8D0-463B-925B-3E9EF1E7D3EC}"/>
               </a:ext>
             </a:extLst>
           </p:cNvPr>
@@ -6462,7 +6537,7 @@
           <p:cNvPr id="72" name="">
             <a:extLst xmlns:a="http://schemas.openxmlformats.org/drawingml/2006/main">
               <a:ext uri="{FF2B5EF4-FFF2-40B4-BE49-F238E27FC236}">
-                <a16:creationId xmlns:a16="http://schemas.microsoft.com/office/drawing/2014/main" id="{1DC6ABE0-3A9C-45F9-8EA2-245D018F0C28}"/>
+                <a16:creationId xmlns:a16="http://schemas.microsoft.com/office/drawing/2014/main" id="{1F5A6D93-570F-42B5-9066-FE62C1C70D0B}"/>
               </a:ext>
             </a:extLst>
           </p:cNvPr>
@@ -6520,7 +6595,7 @@
           <p:cNvPr id="73" name="">
             <a:extLst xmlns:a="http://schemas.openxmlformats.org/drawingml/2006/main">
               <a:ext uri="{FF2B5EF4-FFF2-40B4-BE49-F238E27FC236}">
-                <a16:creationId xmlns:a16="http://schemas.microsoft.com/office/drawing/2014/main" id="{70B4A284-ECDF-43DA-A71E-B57BC77327AC}"/>
+                <a16:creationId xmlns:a16="http://schemas.microsoft.com/office/drawing/2014/main" id="{AF7F7B40-0BDC-4B2A-871D-2D71150520C3}"/>
               </a:ext>
             </a:extLst>
           </p:cNvPr>
@@ -6553,7 +6628,7 @@
           <p:cNvPr id="74" name="">
             <a:extLst xmlns:a="http://schemas.openxmlformats.org/drawingml/2006/main">
               <a:ext uri="{FF2B5EF4-FFF2-40B4-BE49-F238E27FC236}">
-                <a16:creationId xmlns:a16="http://schemas.microsoft.com/office/drawing/2014/main" id="{DF23DE01-2D1A-487A-895A-1C831DBA4E0C}"/>
+                <a16:creationId xmlns:a16="http://schemas.microsoft.com/office/drawing/2014/main" id="{40C63605-9DC1-4E3E-B96E-060D8F0EB21F}"/>
               </a:ext>
             </a:extLst>
           </p:cNvPr>
@@ -6611,7 +6686,7 @@
           <p:cNvPr id="75" name="">
             <a:extLst xmlns:a="http://schemas.openxmlformats.org/drawingml/2006/main">
               <a:ext uri="{FF2B5EF4-FFF2-40B4-BE49-F238E27FC236}">
-                <a16:creationId xmlns:a16="http://schemas.microsoft.com/office/drawing/2014/main" id="{833F049F-5BD2-40F1-B52F-66A73DDE6373}"/>
+                <a16:creationId xmlns:a16="http://schemas.microsoft.com/office/drawing/2014/main" id="{3B284F23-D7C2-476F-9F16-85202F55365C}"/>
               </a:ext>
             </a:extLst>
           </p:cNvPr>
@@ -6644,7 +6719,7 @@
           <p:cNvPr id="76" name="">
             <a:extLst xmlns:a="http://schemas.openxmlformats.org/drawingml/2006/main">
               <a:ext uri="{FF2B5EF4-FFF2-40B4-BE49-F238E27FC236}">
-                <a16:creationId xmlns:a16="http://schemas.microsoft.com/office/drawing/2014/main" id="{DB1384C5-D65D-4336-A33A-E7B7ED68252F}"/>
+                <a16:creationId xmlns:a16="http://schemas.microsoft.com/office/drawing/2014/main" id="{00437FA0-6133-4F72-8F1F-7629A64DC8EB}"/>
               </a:ext>
             </a:extLst>
           </p:cNvPr>
@@ -6702,7 +6777,7 @@
           <p:cNvPr id="77" name="">
             <a:extLst xmlns:a="http://schemas.openxmlformats.org/drawingml/2006/main">
               <a:ext uri="{FF2B5EF4-FFF2-40B4-BE49-F238E27FC236}">
-                <a16:creationId xmlns:a16="http://schemas.microsoft.com/office/drawing/2014/main" id="{7EA54AA8-E1E3-4DBF-AB32-4EB882B33A01}"/>
+                <a16:creationId xmlns:a16="http://schemas.microsoft.com/office/drawing/2014/main" id="{18FA3EF6-AED2-4AA3-8DB9-F0D254A73C31}"/>
               </a:ext>
             </a:extLst>
           </p:cNvPr>
@@ -6735,7 +6810,7 @@
           <p:cNvPr id="78" name="">
             <a:extLst xmlns:a="http://schemas.openxmlformats.org/drawingml/2006/main">
               <a:ext uri="{FF2B5EF4-FFF2-40B4-BE49-F238E27FC236}">
-                <a16:creationId xmlns:a16="http://schemas.microsoft.com/office/drawing/2014/main" id="{F7CA0F65-2913-4013-B1A4-AFCB624AF457}"/>
+                <a16:creationId xmlns:a16="http://schemas.microsoft.com/office/drawing/2014/main" id="{DA4F6D43-E95A-4941-8717-02D5EE505696}"/>
               </a:ext>
             </a:extLst>
           </p:cNvPr>
@@ -6793,7 +6868,7 @@
           <p:cNvPr id="79" name="">
             <a:extLst xmlns:a="http://schemas.openxmlformats.org/drawingml/2006/main">
               <a:ext uri="{FF2B5EF4-FFF2-40B4-BE49-F238E27FC236}">
-                <a16:creationId xmlns:a16="http://schemas.microsoft.com/office/drawing/2014/main" id="{6792C5D7-6BD1-4E66-858B-A70648D3BD05}"/>
+                <a16:creationId xmlns:a16="http://schemas.microsoft.com/office/drawing/2014/main" id="{61870DD2-05DE-4AA8-BAB6-672697C23423}"/>
               </a:ext>
             </a:extLst>
           </p:cNvPr>
@@ -6826,7 +6901,7 @@
           <p:cNvPr id="80" name="">
             <a:extLst xmlns:a="http://schemas.openxmlformats.org/drawingml/2006/main">
               <a:ext uri="{FF2B5EF4-FFF2-40B4-BE49-F238E27FC236}">
-                <a16:creationId xmlns:a16="http://schemas.microsoft.com/office/drawing/2014/main" id="{14528BE5-AB46-4CCD-AD41-0AD42FC824AC}"/>
+                <a16:creationId xmlns:a16="http://schemas.microsoft.com/office/drawing/2014/main" id="{2E6A9949-98A7-491D-B5CD-E95D0C2DD15B}"/>
               </a:ext>
             </a:extLst>
           </p:cNvPr>
@@ -6884,7 +6959,7 @@
           <p:cNvPr id="81" name="">
             <a:extLst xmlns:a="http://schemas.openxmlformats.org/drawingml/2006/main">
               <a:ext uri="{FF2B5EF4-FFF2-40B4-BE49-F238E27FC236}">
-                <a16:creationId xmlns:a16="http://schemas.microsoft.com/office/drawing/2014/main" id="{351351F1-953D-4365-8CA5-00E6A708991D}"/>
+                <a16:creationId xmlns:a16="http://schemas.microsoft.com/office/drawing/2014/main" id="{2A8BC8B3-4F19-469D-99F5-38A7248CCEE8}"/>
               </a:ext>
             </a:extLst>
           </p:cNvPr>
@@ -6917,7 +6992,7 @@
           <p:cNvPr id="82" name="">
             <a:extLst xmlns:a="http://schemas.openxmlformats.org/drawingml/2006/main">
               <a:ext uri="{FF2B5EF4-FFF2-40B4-BE49-F238E27FC236}">
-                <a16:creationId xmlns:a16="http://schemas.microsoft.com/office/drawing/2014/main" id="{7B223CE1-FF62-4F68-A358-77556DB2EF74}"/>
+                <a16:creationId xmlns:a16="http://schemas.microsoft.com/office/drawing/2014/main" id="{8831054A-C296-46AF-B175-6EFCEA151E7C}"/>
               </a:ext>
             </a:extLst>
           </p:cNvPr>
@@ -6975,7 +7050,7 @@
           <p:cNvPr id="83" name="">
             <a:extLst xmlns:a="http://schemas.openxmlformats.org/drawingml/2006/main">
               <a:ext uri="{FF2B5EF4-FFF2-40B4-BE49-F238E27FC236}">
-                <a16:creationId xmlns:a16="http://schemas.microsoft.com/office/drawing/2014/main" id="{8E0BCDFA-ED4F-4424-9913-8288DBBA381C}"/>
+                <a16:creationId xmlns:a16="http://schemas.microsoft.com/office/drawing/2014/main" id="{361712BF-92AD-4A02-A58F-73BAF1B68A7B}"/>
               </a:ext>
             </a:extLst>
           </p:cNvPr>
@@ -7008,7 +7083,7 @@
           <p:cNvPr id="84" name="">
             <a:extLst xmlns:a="http://schemas.openxmlformats.org/drawingml/2006/main">
               <a:ext uri="{FF2B5EF4-FFF2-40B4-BE49-F238E27FC236}">
-                <a16:creationId xmlns:a16="http://schemas.microsoft.com/office/drawing/2014/main" id="{386FC4B8-6AB3-4CFE-A621-FC469831AD86}"/>
+                <a16:creationId xmlns:a16="http://schemas.microsoft.com/office/drawing/2014/main" id="{C785B7EE-AC4F-4FD5-B9BE-E18D6C382F3C}"/>
               </a:ext>
             </a:extLst>
           </p:cNvPr>
@@ -7066,7 +7141,7 @@
           <p:cNvPr id="85" name="">
             <a:extLst xmlns:a="http://schemas.openxmlformats.org/drawingml/2006/main">
               <a:ext uri="{FF2B5EF4-FFF2-40B4-BE49-F238E27FC236}">
-                <a16:creationId xmlns:a16="http://schemas.microsoft.com/office/drawing/2014/main" id="{87A08497-A9DE-441D-B185-EAB71E45EF6E}"/>
+                <a16:creationId xmlns:a16="http://schemas.microsoft.com/office/drawing/2014/main" id="{01007240-923E-42AE-8DEF-093680B97FC5}"/>
               </a:ext>
             </a:extLst>
           </p:cNvPr>
@@ -7122,7 +7197,7 @@
     </p:spTree>
     <p:extLst>
       <p:ext uri="{BB962C8B-B14F-4D97-AF65-F5344CB8AC3E}">
-        <p14:creationId xmlns:p14="http://schemas.microsoft.com/office/powerpoint/2010/main" val="938385303"/>
+        <p14:creationId xmlns:p14="http://schemas.microsoft.com/office/powerpoint/2010/main" val="1293042121"/>
       </p:ext>
     </p:extLst>
   </p:cSld>
@@ -7153,7 +7228,7 @@
           <p:cNvPr id="1" name="">
             <a:extLst xmlns:a="http://schemas.openxmlformats.org/drawingml/2006/main">
               <a:ext uri="{FF2B5EF4-FFF2-40B4-BE49-F238E27FC236}">
-                <a16:creationId xmlns:a16="http://schemas.microsoft.com/office/drawing/2014/main" id="{20DCE7C6-BDFC-401D-8C69-7F2684F0E1E7}"/>
+                <a16:creationId xmlns:a16="http://schemas.microsoft.com/office/drawing/2014/main" id="{F9C38E45-A063-45CF-A286-2F645AA48FD2}"/>
               </a:ext>
             </a:extLst>
           </p:cNvPr>
@@ -7188,7 +7263,7 @@
           <p:cNvPr id="2" name="">
             <a:extLst xmlns:a="http://schemas.openxmlformats.org/drawingml/2006/main">
               <a:ext uri="{FF2B5EF4-FFF2-40B4-BE49-F238E27FC236}">
-                <a16:creationId xmlns:a16="http://schemas.microsoft.com/office/drawing/2014/main" id="{224D402D-73F1-4701-AAE2-3956784A06DD}"/>
+                <a16:creationId xmlns:a16="http://schemas.microsoft.com/office/drawing/2014/main" id="{034ED923-F372-4CA7-B26C-40841869D7A1}"/>
               </a:ext>
             </a:extLst>
           </p:cNvPr>
@@ -7223,7 +7298,7 @@
           <p:cNvPr id="3" name="">
             <a:extLst xmlns:a="http://schemas.openxmlformats.org/drawingml/2006/main">
               <a:ext uri="{FF2B5EF4-FFF2-40B4-BE49-F238E27FC236}">
-                <a16:creationId xmlns:a16="http://schemas.microsoft.com/office/drawing/2014/main" id="{1E47A3E5-F95F-4CE4-B701-16DE2467415C}"/>
+                <a16:creationId xmlns:a16="http://schemas.microsoft.com/office/drawing/2014/main" id="{F30ACBAB-65F1-4917-AFCF-480C74FE0746}"/>
               </a:ext>
             </a:extLst>
           </p:cNvPr>
@@ -7281,7 +7356,7 @@
           <p:cNvPr id="4" name="">
             <a:extLst xmlns:a="http://schemas.openxmlformats.org/drawingml/2006/main">
               <a:ext uri="{FF2B5EF4-FFF2-40B4-BE49-F238E27FC236}">
-                <a16:creationId xmlns:a16="http://schemas.microsoft.com/office/drawing/2014/main" id="{CB081785-91A3-466A-8A6E-3E527B43E539}"/>
+                <a16:creationId xmlns:a16="http://schemas.microsoft.com/office/drawing/2014/main" id="{C55D553E-A138-4BD6-B209-F4F7CD8B2452}"/>
               </a:ext>
             </a:extLst>
           </p:cNvPr>
@@ -7339,7 +7414,7 @@
           <p:cNvPr id="5" name="">
             <a:extLst xmlns:a="http://schemas.openxmlformats.org/drawingml/2006/main">
               <a:ext uri="{FF2B5EF4-FFF2-40B4-BE49-F238E27FC236}">
-                <a16:creationId xmlns:a16="http://schemas.microsoft.com/office/drawing/2014/main" id="{9CDE4D9E-1DDD-49A4-9C18-CCCF03357D4B}"/>
+                <a16:creationId xmlns:a16="http://schemas.microsoft.com/office/drawing/2014/main" id="{B73C0302-0145-49B3-A1BC-6847F9461F7B}"/>
               </a:ext>
             </a:extLst>
           </p:cNvPr>
@@ -7374,7 +7449,7 @@
           <p:cNvPr id="6" name="">
             <a:extLst xmlns:a="http://schemas.openxmlformats.org/drawingml/2006/main">
               <a:ext uri="{FF2B5EF4-FFF2-40B4-BE49-F238E27FC236}">
-                <a16:creationId xmlns:a16="http://schemas.microsoft.com/office/drawing/2014/main" id="{5819C81B-F9A2-461B-9655-C528ECA30526}"/>
+                <a16:creationId xmlns:a16="http://schemas.microsoft.com/office/drawing/2014/main" id="{1EA1A96F-6371-4EBC-97AD-AE7170C4EB92}"/>
               </a:ext>
             </a:extLst>
           </p:cNvPr>
@@ -7432,7 +7507,7 @@
           <p:cNvPr id="7" name="">
             <a:extLst xmlns:a="http://schemas.openxmlformats.org/drawingml/2006/main">
               <a:ext uri="{FF2B5EF4-FFF2-40B4-BE49-F238E27FC236}">
-                <a16:creationId xmlns:a16="http://schemas.microsoft.com/office/drawing/2014/main" id="{053207A3-FF38-40F2-8332-582F269B822A}"/>
+                <a16:creationId xmlns:a16="http://schemas.microsoft.com/office/drawing/2014/main" id="{21682CD4-7941-4E3E-9ACA-F0C99EA8A745}"/>
               </a:ext>
             </a:extLst>
           </p:cNvPr>
@@ -7490,7 +7565,7 @@
           <p:cNvPr id="8" name="">
             <a:extLst xmlns:a="http://schemas.openxmlformats.org/drawingml/2006/main">
               <a:ext uri="{FF2B5EF4-FFF2-40B4-BE49-F238E27FC236}">
-                <a16:creationId xmlns:a16="http://schemas.microsoft.com/office/drawing/2014/main" id="{F25A9226-17EC-4B1A-BA23-A7492A509ECD}"/>
+                <a16:creationId xmlns:a16="http://schemas.microsoft.com/office/drawing/2014/main" id="{B32327ED-416F-4BB4-86E1-4BF010960A47}"/>
               </a:ext>
             </a:extLst>
           </p:cNvPr>
@@ -7525,7 +7600,7 @@
           <p:cNvPr id="9" name="">
             <a:extLst xmlns:a="http://schemas.openxmlformats.org/drawingml/2006/main">
               <a:ext uri="{FF2B5EF4-FFF2-40B4-BE49-F238E27FC236}">
-                <a16:creationId xmlns:a16="http://schemas.microsoft.com/office/drawing/2014/main" id="{45AE38A1-F9DA-4659-9A88-446101FDF2F5}"/>
+                <a16:creationId xmlns:a16="http://schemas.microsoft.com/office/drawing/2014/main" id="{9BBACA5C-BD2E-4FC4-B2AE-6AA8A96773D4}"/>
               </a:ext>
             </a:extLst>
           </p:cNvPr>
@@ -7560,7 +7635,7 @@
           <p:cNvPr id="10" name="">
             <a:extLst xmlns:a="http://schemas.openxmlformats.org/drawingml/2006/main">
               <a:ext uri="{FF2B5EF4-FFF2-40B4-BE49-F238E27FC236}">
-                <a16:creationId xmlns:a16="http://schemas.microsoft.com/office/drawing/2014/main" id="{BDEFEEB7-ECBE-4841-BE9A-8BA281745F45}"/>
+                <a16:creationId xmlns:a16="http://schemas.microsoft.com/office/drawing/2014/main" id="{091E4028-3FE9-4609-B548-F4AA4584EA15}"/>
               </a:ext>
             </a:extLst>
           </p:cNvPr>
@@ -7618,7 +7693,7 @@
           <p:cNvPr id="11" name="">
             <a:extLst xmlns:a="http://schemas.openxmlformats.org/drawingml/2006/main">
               <a:ext uri="{FF2B5EF4-FFF2-40B4-BE49-F238E27FC236}">
-                <a16:creationId xmlns:a16="http://schemas.microsoft.com/office/drawing/2014/main" id="{C74162E8-A4BE-4B7F-A298-56BACC306294}"/>
+                <a16:creationId xmlns:a16="http://schemas.microsoft.com/office/drawing/2014/main" id="{8E8070BD-DC08-4880-A47C-8CC5460ED4BF}"/>
               </a:ext>
             </a:extLst>
           </p:cNvPr>
@@ -7698,7 +7773,7 @@
           <p:cNvPr id="12" name="">
             <a:extLst xmlns:a="http://schemas.openxmlformats.org/drawingml/2006/main">
               <a:ext uri="{FF2B5EF4-FFF2-40B4-BE49-F238E27FC236}">
-                <a16:creationId xmlns:a16="http://schemas.microsoft.com/office/drawing/2014/main" id="{6A2FE21D-BF3A-40FC-A5C8-2CD4E2F2F831}"/>
+                <a16:creationId xmlns:a16="http://schemas.microsoft.com/office/drawing/2014/main" id="{1C9956F4-6522-4F20-9245-5C8EDC1CBEDE}"/>
               </a:ext>
             </a:extLst>
           </p:cNvPr>
@@ -7733,7 +7808,7 @@
           <p:cNvPr id="13" name="">
             <a:extLst xmlns:a="http://schemas.openxmlformats.org/drawingml/2006/main">
               <a:ext uri="{FF2B5EF4-FFF2-40B4-BE49-F238E27FC236}">
-                <a16:creationId xmlns:a16="http://schemas.microsoft.com/office/drawing/2014/main" id="{692E3DC2-0469-4509-B0D2-10C0F83AD5C8}"/>
+                <a16:creationId xmlns:a16="http://schemas.microsoft.com/office/drawing/2014/main" id="{CFD8C614-F772-4EA8-A17B-1780BCFCD4A2}"/>
               </a:ext>
             </a:extLst>
           </p:cNvPr>
@@ -7768,7 +7843,7 @@
           <p:cNvPr id="14" name="">
             <a:extLst xmlns:a="http://schemas.openxmlformats.org/drawingml/2006/main">
               <a:ext uri="{FF2B5EF4-FFF2-40B4-BE49-F238E27FC236}">
-                <a16:creationId xmlns:a16="http://schemas.microsoft.com/office/drawing/2014/main" id="{DE53D9FA-73BC-4676-AEEE-458F060B23A7}"/>
+                <a16:creationId xmlns:a16="http://schemas.microsoft.com/office/drawing/2014/main" id="{DC013751-EF8E-4EBA-80D5-F757CF6A636F}"/>
               </a:ext>
             </a:extLst>
           </p:cNvPr>
@@ -7826,7 +7901,7 @@
           <p:cNvPr id="15" name="">
             <a:extLst xmlns:a="http://schemas.openxmlformats.org/drawingml/2006/main">
               <a:ext uri="{FF2B5EF4-FFF2-40B4-BE49-F238E27FC236}">
-                <a16:creationId xmlns:a16="http://schemas.microsoft.com/office/drawing/2014/main" id="{612DFBD5-D022-4A23-A8FE-22124CE89B52}"/>
+                <a16:creationId xmlns:a16="http://schemas.microsoft.com/office/drawing/2014/main" id="{13030FC8-4DA8-432B-8DA7-099F460D1B7F}"/>
               </a:ext>
             </a:extLst>
           </p:cNvPr>
@@ -7940,7 +8015,7 @@
           <p:cNvPr id="16" name="">
             <a:extLst xmlns:a="http://schemas.openxmlformats.org/drawingml/2006/main">
               <a:ext uri="{FF2B5EF4-FFF2-40B4-BE49-F238E27FC236}">
-                <a16:creationId xmlns:a16="http://schemas.microsoft.com/office/drawing/2014/main" id="{1C95226A-BDDB-40D3-B50A-CF4E6D5FE4D8}"/>
+                <a16:creationId xmlns:a16="http://schemas.microsoft.com/office/drawing/2014/main" id="{307B6D11-C847-406A-859C-77C9B4619D95}"/>
               </a:ext>
             </a:extLst>
           </p:cNvPr>
@@ -7975,7 +8050,7 @@
           <p:cNvPr id="17" name="">
             <a:extLst xmlns:a="http://schemas.openxmlformats.org/drawingml/2006/main">
               <a:ext uri="{FF2B5EF4-FFF2-40B4-BE49-F238E27FC236}">
-                <a16:creationId xmlns:a16="http://schemas.microsoft.com/office/drawing/2014/main" id="{6DA8D945-F283-48F3-8693-013F52D3591A}"/>
+                <a16:creationId xmlns:a16="http://schemas.microsoft.com/office/drawing/2014/main" id="{65685334-5184-467D-A330-0EE3E6D8EE97}"/>
               </a:ext>
             </a:extLst>
           </p:cNvPr>
@@ -8010,7 +8085,7 @@
           <p:cNvPr id="18" name="">
             <a:extLst xmlns:a="http://schemas.openxmlformats.org/drawingml/2006/main">
               <a:ext uri="{FF2B5EF4-FFF2-40B4-BE49-F238E27FC236}">
-                <a16:creationId xmlns:a16="http://schemas.microsoft.com/office/drawing/2014/main" id="{9BC967B8-2823-46F0-8725-CE1C303AA18F}"/>
+                <a16:creationId xmlns:a16="http://schemas.microsoft.com/office/drawing/2014/main" id="{BC061F29-D187-48D0-AF66-FAB8B75232B5}"/>
               </a:ext>
             </a:extLst>
           </p:cNvPr>
@@ -8068,7 +8143,7 @@
           <p:cNvPr id="19" name="">
             <a:extLst xmlns:a="http://schemas.openxmlformats.org/drawingml/2006/main">
               <a:ext uri="{FF2B5EF4-FFF2-40B4-BE49-F238E27FC236}">
-                <a16:creationId xmlns:a16="http://schemas.microsoft.com/office/drawing/2014/main" id="{C411072A-4740-4188-84B1-B7D2FC88780C}"/>
+                <a16:creationId xmlns:a16="http://schemas.microsoft.com/office/drawing/2014/main" id="{18CFD846-40DC-4481-8154-3E5431177F40}"/>
               </a:ext>
             </a:extLst>
           </p:cNvPr>
@@ -8177,7 +8252,7 @@
           <p:cNvPr id="20" name="">
             <a:extLst xmlns:a="http://schemas.openxmlformats.org/drawingml/2006/main">
               <a:ext uri="{FF2B5EF4-FFF2-40B4-BE49-F238E27FC236}">
-                <a16:creationId xmlns:a16="http://schemas.microsoft.com/office/drawing/2014/main" id="{B48BEE57-BC3B-4961-B430-4B5F2E623100}"/>
+                <a16:creationId xmlns:a16="http://schemas.microsoft.com/office/drawing/2014/main" id="{A878A12C-E67A-45FF-AB41-836C4A9F3B15}"/>
               </a:ext>
             </a:extLst>
           </p:cNvPr>
@@ -8212,7 +8287,7 @@
           <p:cNvPr id="21" name="">
             <a:extLst xmlns:a="http://schemas.openxmlformats.org/drawingml/2006/main">
               <a:ext uri="{FF2B5EF4-FFF2-40B4-BE49-F238E27FC236}">
-                <a16:creationId xmlns:a16="http://schemas.microsoft.com/office/drawing/2014/main" id="{96A56954-7259-4195-9D2A-7A9D0609328B}"/>
+                <a16:creationId xmlns:a16="http://schemas.microsoft.com/office/drawing/2014/main" id="{B4B08118-DD57-4086-AB76-D53D50A9545E}"/>
               </a:ext>
             </a:extLst>
           </p:cNvPr>
@@ -8270,7 +8345,7 @@
           <p:cNvPr id="22" name="">
             <a:extLst xmlns:a="http://schemas.openxmlformats.org/drawingml/2006/main">
               <a:ext uri="{FF2B5EF4-FFF2-40B4-BE49-F238E27FC236}">
-                <a16:creationId xmlns:a16="http://schemas.microsoft.com/office/drawing/2014/main" id="{1D3575B8-90F8-446F-B21B-25EACF1AFA7F}"/>
+                <a16:creationId xmlns:a16="http://schemas.microsoft.com/office/drawing/2014/main" id="{EBB3119D-F72A-48A0-872A-48A5AF160F83}"/>
               </a:ext>
             </a:extLst>
           </p:cNvPr>
@@ -8303,7 +8378,7 @@
           <p:cNvPr id="23" name="">
             <a:extLst xmlns:a="http://schemas.openxmlformats.org/drawingml/2006/main">
               <a:ext uri="{FF2B5EF4-FFF2-40B4-BE49-F238E27FC236}">
-                <a16:creationId xmlns:a16="http://schemas.microsoft.com/office/drawing/2014/main" id="{D5042D66-FE59-498C-93A1-05CC612CA009}"/>
+                <a16:creationId xmlns:a16="http://schemas.microsoft.com/office/drawing/2014/main" id="{8E895AA7-4A63-4B9E-A8C4-1972627BFC13}"/>
               </a:ext>
             </a:extLst>
           </p:cNvPr>
@@ -8338,7 +8413,7 @@
           <p:cNvPr id="24" name="">
             <a:extLst xmlns:a="http://schemas.openxmlformats.org/drawingml/2006/main">
               <a:ext uri="{FF2B5EF4-FFF2-40B4-BE49-F238E27FC236}">
-                <a16:creationId xmlns:a16="http://schemas.microsoft.com/office/drawing/2014/main" id="{0E95F2C9-39B0-429B-8ADA-BB83A02FC7EF}"/>
+                <a16:creationId xmlns:a16="http://schemas.microsoft.com/office/drawing/2014/main" id="{0F879C00-1A70-4EE2-95D0-D3C80BADDC78}"/>
               </a:ext>
             </a:extLst>
           </p:cNvPr>
@@ -8396,7 +8471,7 @@
           <p:cNvPr id="25" name="">
             <a:extLst xmlns:a="http://schemas.openxmlformats.org/drawingml/2006/main">
               <a:ext uri="{FF2B5EF4-FFF2-40B4-BE49-F238E27FC236}">
-                <a16:creationId xmlns:a16="http://schemas.microsoft.com/office/drawing/2014/main" id="{29E2FAF6-A4C0-4A4B-8557-83EFEAFADB53}"/>
+                <a16:creationId xmlns:a16="http://schemas.microsoft.com/office/drawing/2014/main" id="{BDCD955C-783E-4DF6-B9F9-370CD07E1FE0}"/>
               </a:ext>
             </a:extLst>
           </p:cNvPr>
@@ -8431,7 +8506,7 @@
           <p:cNvPr id="26" name="">
             <a:extLst xmlns:a="http://schemas.openxmlformats.org/drawingml/2006/main">
               <a:ext uri="{FF2B5EF4-FFF2-40B4-BE49-F238E27FC236}">
-                <a16:creationId xmlns:a16="http://schemas.microsoft.com/office/drawing/2014/main" id="{5971C1F3-1097-4103-8145-79E110184E57}"/>
+                <a16:creationId xmlns:a16="http://schemas.microsoft.com/office/drawing/2014/main" id="{9951525E-3F72-447A-90C1-2BD363ADBB96}"/>
               </a:ext>
             </a:extLst>
           </p:cNvPr>
@@ -8489,7 +8564,7 @@
           <p:cNvPr id="27" name="">
             <a:extLst xmlns:a="http://schemas.openxmlformats.org/drawingml/2006/main">
               <a:ext uri="{FF2B5EF4-FFF2-40B4-BE49-F238E27FC236}">
-                <a16:creationId xmlns:a16="http://schemas.microsoft.com/office/drawing/2014/main" id="{A8ED5EF5-45A9-4E84-8ACE-913EACDFE6AD}"/>
+                <a16:creationId xmlns:a16="http://schemas.microsoft.com/office/drawing/2014/main" id="{C4ECD1C5-2D93-4B41-8683-88665F76F73D}"/>
               </a:ext>
             </a:extLst>
           </p:cNvPr>
@@ -8545,7 +8620,7 @@
     </p:spTree>
     <p:extLst>
       <p:ext uri="{BB962C8B-B14F-4D97-AF65-F5344CB8AC3E}">
-        <p14:creationId xmlns:p14="http://schemas.microsoft.com/office/powerpoint/2010/main" val="1280224304"/>
+        <p14:creationId xmlns:p14="http://schemas.microsoft.com/office/powerpoint/2010/main" val="559135732"/>
       </p:ext>
     </p:extLst>
   </p:cSld>
@@ -8576,7 +8651,7 @@
           <p:cNvPr id="1" name="">
             <a:extLst xmlns:a="http://schemas.openxmlformats.org/drawingml/2006/main">
               <a:ext uri="{FF2B5EF4-FFF2-40B4-BE49-F238E27FC236}">
-                <a16:creationId xmlns:a16="http://schemas.microsoft.com/office/drawing/2014/main" id="{EADDDEF1-D64A-46BA-BDF8-EEAB42528245}"/>
+                <a16:creationId xmlns:a16="http://schemas.microsoft.com/office/drawing/2014/main" id="{313BEFF7-4FCF-48CF-B2D4-4E0E20623AF1}"/>
               </a:ext>
             </a:extLst>
           </p:cNvPr>
@@ -8611,7 +8686,7 @@
           <p:cNvPr id="2" name="">
             <a:extLst xmlns:a="http://schemas.openxmlformats.org/drawingml/2006/main">
               <a:ext uri="{FF2B5EF4-FFF2-40B4-BE49-F238E27FC236}">
-                <a16:creationId xmlns:a16="http://schemas.microsoft.com/office/drawing/2014/main" id="{A52C874E-ACA1-44B1-90CD-EC84A85943B9}"/>
+                <a16:creationId xmlns:a16="http://schemas.microsoft.com/office/drawing/2014/main" id="{1F56007C-4563-4B63-962B-EFEB7EC4857B}"/>
               </a:ext>
             </a:extLst>
           </p:cNvPr>
@@ -8646,7 +8721,7 @@
           <p:cNvPr id="3" name="">
             <a:extLst xmlns:a="http://schemas.openxmlformats.org/drawingml/2006/main">
               <a:ext uri="{FF2B5EF4-FFF2-40B4-BE49-F238E27FC236}">
-                <a16:creationId xmlns:a16="http://schemas.microsoft.com/office/drawing/2014/main" id="{EFA55819-9864-478D-89F1-BB444860FE3A}"/>
+                <a16:creationId xmlns:a16="http://schemas.microsoft.com/office/drawing/2014/main" id="{D28F5A1E-7963-4F24-9643-620389E99F8F}"/>
               </a:ext>
             </a:extLst>
           </p:cNvPr>
@@ -8704,7 +8779,7 @@
           <p:cNvPr id="4" name="">
             <a:extLst xmlns:a="http://schemas.openxmlformats.org/drawingml/2006/main">
               <a:ext uri="{FF2B5EF4-FFF2-40B4-BE49-F238E27FC236}">
-                <a16:creationId xmlns:a16="http://schemas.microsoft.com/office/drawing/2014/main" id="{67ACE342-91AE-4269-94CB-4AAF16B874EC}"/>
+                <a16:creationId xmlns:a16="http://schemas.microsoft.com/office/drawing/2014/main" id="{4D22E98A-F37A-40E3-97F2-28B98C9BD667}"/>
               </a:ext>
             </a:extLst>
           </p:cNvPr>
@@ -8762,7 +8837,7 @@
           <p:cNvPr id="5" name="">
             <a:extLst xmlns:a="http://schemas.openxmlformats.org/drawingml/2006/main">
               <a:ext uri="{FF2B5EF4-FFF2-40B4-BE49-F238E27FC236}">
-                <a16:creationId xmlns:a16="http://schemas.microsoft.com/office/drawing/2014/main" id="{331B1423-B92F-428D-90E5-3A9C743787BB}"/>
+                <a16:creationId xmlns:a16="http://schemas.microsoft.com/office/drawing/2014/main" id="{0E0E27A3-3AF5-4E1F-97AB-8AA31A4F3521}"/>
               </a:ext>
             </a:extLst>
           </p:cNvPr>
@@ -8797,7 +8872,7 @@
           <p:cNvPr id="6" name="">
             <a:extLst xmlns:a="http://schemas.openxmlformats.org/drawingml/2006/main">
               <a:ext uri="{FF2B5EF4-FFF2-40B4-BE49-F238E27FC236}">
-                <a16:creationId xmlns:a16="http://schemas.microsoft.com/office/drawing/2014/main" id="{7AA0E31E-1B39-4BD6-BE92-F38EC546D115}"/>
+                <a16:creationId xmlns:a16="http://schemas.microsoft.com/office/drawing/2014/main" id="{1E1B03FA-8318-449F-A6F4-A1836108C631}"/>
               </a:ext>
             </a:extLst>
           </p:cNvPr>
@@ -8855,7 +8930,7 @@
           <p:cNvPr id="7" name="">
             <a:extLst xmlns:a="http://schemas.openxmlformats.org/drawingml/2006/main">
               <a:ext uri="{FF2B5EF4-FFF2-40B4-BE49-F238E27FC236}">
-                <a16:creationId xmlns:a16="http://schemas.microsoft.com/office/drawing/2014/main" id="{7FF35360-90EC-4BED-8E9E-18EF240BD105}"/>
+                <a16:creationId xmlns:a16="http://schemas.microsoft.com/office/drawing/2014/main" id="{73E539BA-09F8-4ACA-BB63-56616AAB19E4}"/>
               </a:ext>
             </a:extLst>
           </p:cNvPr>
@@ -8913,7 +8988,7 @@
           <p:cNvPr id="8" name="">
             <a:extLst xmlns:a="http://schemas.openxmlformats.org/drawingml/2006/main">
               <a:ext uri="{FF2B5EF4-FFF2-40B4-BE49-F238E27FC236}">
-                <a16:creationId xmlns:a16="http://schemas.microsoft.com/office/drawing/2014/main" id="{A6AEC412-CD4B-430E-9667-923F1C7EBDC3}"/>
+                <a16:creationId xmlns:a16="http://schemas.microsoft.com/office/drawing/2014/main" id="{BFABE04A-B042-46F6-AEDF-8171F6D7442D}"/>
               </a:ext>
             </a:extLst>
           </p:cNvPr>
@@ -8948,7 +9023,7 @@
           <p:cNvPr id="9" name="">
             <a:extLst xmlns:a="http://schemas.openxmlformats.org/drawingml/2006/main">
               <a:ext uri="{FF2B5EF4-FFF2-40B4-BE49-F238E27FC236}">
-                <a16:creationId xmlns:a16="http://schemas.microsoft.com/office/drawing/2014/main" id="{F16E39A8-5235-4740-BF0B-32AE3AB81FAE}"/>
+                <a16:creationId xmlns:a16="http://schemas.microsoft.com/office/drawing/2014/main" id="{59C9078B-2088-4B99-9195-76B2877A5262}"/>
               </a:ext>
             </a:extLst>
           </p:cNvPr>
@@ -8983,7 +9058,7 @@
           <p:cNvPr id="10" name="">
             <a:extLst xmlns:a="http://schemas.openxmlformats.org/drawingml/2006/main">
               <a:ext uri="{FF2B5EF4-FFF2-40B4-BE49-F238E27FC236}">
-                <a16:creationId xmlns:a16="http://schemas.microsoft.com/office/drawing/2014/main" id="{1B491C80-A717-4257-84F2-9D5D3AB71CF2}"/>
+                <a16:creationId xmlns:a16="http://schemas.microsoft.com/office/drawing/2014/main" id="{29903355-1F3C-43BA-B7D9-9EB7B1B738F8}"/>
               </a:ext>
             </a:extLst>
           </p:cNvPr>
@@ -9041,7 +9116,7 @@
           <p:cNvPr id="11" name="">
             <a:extLst xmlns:a="http://schemas.openxmlformats.org/drawingml/2006/main">
               <a:ext uri="{FF2B5EF4-FFF2-40B4-BE49-F238E27FC236}">
-                <a16:creationId xmlns:a16="http://schemas.microsoft.com/office/drawing/2014/main" id="{FFD1BD6B-53DB-4C0F-B32F-55A2A4705E50}"/>
+                <a16:creationId xmlns:a16="http://schemas.microsoft.com/office/drawing/2014/main" id="{620B8658-8CFF-4E30-B3DD-2E436B8A7D79}"/>
               </a:ext>
             </a:extLst>
           </p:cNvPr>
@@ -9121,7 +9196,7 @@
           <p:cNvPr id="12" name="">
             <a:extLst xmlns:a="http://schemas.openxmlformats.org/drawingml/2006/main">
               <a:ext uri="{FF2B5EF4-FFF2-40B4-BE49-F238E27FC236}">
-                <a16:creationId xmlns:a16="http://schemas.microsoft.com/office/drawing/2014/main" id="{04812809-8C8E-4A20-B867-9F4540F975C9}"/>
+                <a16:creationId xmlns:a16="http://schemas.microsoft.com/office/drawing/2014/main" id="{8F8BB681-E874-44CC-9C9A-82FBF0C1B10A}"/>
               </a:ext>
             </a:extLst>
           </p:cNvPr>
@@ -9156,7 +9231,7 @@
           <p:cNvPr id="13" name="">
             <a:extLst xmlns:a="http://schemas.openxmlformats.org/drawingml/2006/main">
               <a:ext uri="{FF2B5EF4-FFF2-40B4-BE49-F238E27FC236}">
-                <a16:creationId xmlns:a16="http://schemas.microsoft.com/office/drawing/2014/main" id="{2D73EFAD-CF50-41B4-9620-55BD5A630DF6}"/>
+                <a16:creationId xmlns:a16="http://schemas.microsoft.com/office/drawing/2014/main" id="{A65D42B4-5D33-4E4A-AD6D-66D8531D7064}"/>
               </a:ext>
             </a:extLst>
           </p:cNvPr>
@@ -9191,7 +9266,7 @@
           <p:cNvPr id="14" name="">
             <a:extLst xmlns:a="http://schemas.openxmlformats.org/drawingml/2006/main">
               <a:ext uri="{FF2B5EF4-FFF2-40B4-BE49-F238E27FC236}">
-                <a16:creationId xmlns:a16="http://schemas.microsoft.com/office/drawing/2014/main" id="{B4B54AE0-5562-4BB3-929E-AC3E230FFD9E}"/>
+                <a16:creationId xmlns:a16="http://schemas.microsoft.com/office/drawing/2014/main" id="{66CA31C3-D9C4-4AAF-9B33-A63EA7F6D559}"/>
               </a:ext>
             </a:extLst>
           </p:cNvPr>
@@ -9249,7 +9324,7 @@
           <p:cNvPr id="15" name="">
             <a:extLst xmlns:a="http://schemas.openxmlformats.org/drawingml/2006/main">
               <a:ext uri="{FF2B5EF4-FFF2-40B4-BE49-F238E27FC236}">
-                <a16:creationId xmlns:a16="http://schemas.microsoft.com/office/drawing/2014/main" id="{FEB39BD8-C132-4CFF-8961-DBB86F77EE4B}"/>
+                <a16:creationId xmlns:a16="http://schemas.microsoft.com/office/drawing/2014/main" id="{6B0338E6-A3ED-4AB3-8B43-98945153D622}"/>
               </a:ext>
             </a:extLst>
           </p:cNvPr>
@@ -9368,7 +9443,7 @@
           <p:cNvPr id="16" name="">
             <a:extLst xmlns:a="http://schemas.openxmlformats.org/drawingml/2006/main">
               <a:ext uri="{FF2B5EF4-FFF2-40B4-BE49-F238E27FC236}">
-                <a16:creationId xmlns:a16="http://schemas.microsoft.com/office/drawing/2014/main" id="{ABC71F83-91A5-4E9E-9246-4A14D758619F}"/>
+                <a16:creationId xmlns:a16="http://schemas.microsoft.com/office/drawing/2014/main" id="{0D25F979-D18B-47FA-881D-962BBAACCDA7}"/>
               </a:ext>
             </a:extLst>
           </p:cNvPr>
@@ -9403,7 +9478,7 @@
           <p:cNvPr id="17" name="">
             <a:extLst xmlns:a="http://schemas.openxmlformats.org/drawingml/2006/main">
               <a:ext uri="{FF2B5EF4-FFF2-40B4-BE49-F238E27FC236}">
-                <a16:creationId xmlns:a16="http://schemas.microsoft.com/office/drawing/2014/main" id="{68A07451-22C8-43F4-9995-5FFC5DB230FF}"/>
+                <a16:creationId xmlns:a16="http://schemas.microsoft.com/office/drawing/2014/main" id="{F42622DC-05C5-4957-B470-133F063278D5}"/>
               </a:ext>
             </a:extLst>
           </p:cNvPr>
@@ -9438,7 +9513,7 @@
           <p:cNvPr id="18" name="">
             <a:extLst xmlns:a="http://schemas.openxmlformats.org/drawingml/2006/main">
               <a:ext uri="{FF2B5EF4-FFF2-40B4-BE49-F238E27FC236}">
-                <a16:creationId xmlns:a16="http://schemas.microsoft.com/office/drawing/2014/main" id="{5722EBE1-B23C-4FD4-AFAD-3E4D617967FD}"/>
+                <a16:creationId xmlns:a16="http://schemas.microsoft.com/office/drawing/2014/main" id="{6E8597A3-5144-428B-BDDF-764121B765EB}"/>
               </a:ext>
             </a:extLst>
           </p:cNvPr>
@@ -9496,7 +9571,7 @@
           <p:cNvPr id="19" name="">
             <a:extLst xmlns:a="http://schemas.openxmlformats.org/drawingml/2006/main">
               <a:ext uri="{FF2B5EF4-FFF2-40B4-BE49-F238E27FC236}">
-                <a16:creationId xmlns:a16="http://schemas.microsoft.com/office/drawing/2014/main" id="{1E6AB9F0-4F9C-4FB3-AC6D-C70D0B3D56CF}"/>
+                <a16:creationId xmlns:a16="http://schemas.microsoft.com/office/drawing/2014/main" id="{58EF8774-F7A8-4348-878C-EE6111441256}"/>
               </a:ext>
             </a:extLst>
           </p:cNvPr>
@@ -9605,7 +9680,7 @@
           <p:cNvPr id="20" name="">
             <a:extLst xmlns:a="http://schemas.openxmlformats.org/drawingml/2006/main">
               <a:ext uri="{FF2B5EF4-FFF2-40B4-BE49-F238E27FC236}">
-                <a16:creationId xmlns:a16="http://schemas.microsoft.com/office/drawing/2014/main" id="{5B426A50-F52F-4638-A9DA-3FDD514B3F86}"/>
+                <a16:creationId xmlns:a16="http://schemas.microsoft.com/office/drawing/2014/main" id="{043CCC53-A793-4F51-8E44-71F3D4D928AA}"/>
               </a:ext>
             </a:extLst>
           </p:cNvPr>
@@ -9640,7 +9715,7 @@
           <p:cNvPr id="21" name="">
             <a:extLst xmlns:a="http://schemas.openxmlformats.org/drawingml/2006/main">
               <a:ext uri="{FF2B5EF4-FFF2-40B4-BE49-F238E27FC236}">
-                <a16:creationId xmlns:a16="http://schemas.microsoft.com/office/drawing/2014/main" id="{1051A18C-6209-4F82-9728-435A8F90EBFD}"/>
+                <a16:creationId xmlns:a16="http://schemas.microsoft.com/office/drawing/2014/main" id="{953DC822-9500-4F27-8016-EB3B8785958B}"/>
               </a:ext>
             </a:extLst>
           </p:cNvPr>
@@ -9698,7 +9773,7 @@
           <p:cNvPr id="22" name="">
             <a:extLst xmlns:a="http://schemas.openxmlformats.org/drawingml/2006/main">
               <a:ext uri="{FF2B5EF4-FFF2-40B4-BE49-F238E27FC236}">
-                <a16:creationId xmlns:a16="http://schemas.microsoft.com/office/drawing/2014/main" id="{64675535-31B5-4F85-A30B-19E2A950481B}"/>
+                <a16:creationId xmlns:a16="http://schemas.microsoft.com/office/drawing/2014/main" id="{DB288ECB-5BD3-4FB1-BD5C-4C072F2A665B}"/>
               </a:ext>
             </a:extLst>
           </p:cNvPr>
@@ -9731,7 +9806,7 @@
           <p:cNvPr id="23" name="">
             <a:extLst xmlns:a="http://schemas.openxmlformats.org/drawingml/2006/main">
               <a:ext uri="{FF2B5EF4-FFF2-40B4-BE49-F238E27FC236}">
-                <a16:creationId xmlns:a16="http://schemas.microsoft.com/office/drawing/2014/main" id="{B7D77593-A4C3-487A-BA08-AA6BF7B3A5AB}"/>
+                <a16:creationId xmlns:a16="http://schemas.microsoft.com/office/drawing/2014/main" id="{58B461E4-341A-472F-B21C-40263637DAAA}"/>
               </a:ext>
             </a:extLst>
           </p:cNvPr>
@@ -9766,7 +9841,7 @@
           <p:cNvPr id="24" name="">
             <a:extLst xmlns:a="http://schemas.openxmlformats.org/drawingml/2006/main">
               <a:ext uri="{FF2B5EF4-FFF2-40B4-BE49-F238E27FC236}">
-                <a16:creationId xmlns:a16="http://schemas.microsoft.com/office/drawing/2014/main" id="{863DAACE-DCD1-458D-AFC9-A2EBC8379396}"/>
+                <a16:creationId xmlns:a16="http://schemas.microsoft.com/office/drawing/2014/main" id="{E7275861-8014-40CB-8823-B3CC0F191C9F}"/>
               </a:ext>
             </a:extLst>
           </p:cNvPr>
@@ -9824,7 +9899,7 @@
           <p:cNvPr id="25" name="">
             <a:extLst xmlns:a="http://schemas.openxmlformats.org/drawingml/2006/main">
               <a:ext uri="{FF2B5EF4-FFF2-40B4-BE49-F238E27FC236}">
-                <a16:creationId xmlns:a16="http://schemas.microsoft.com/office/drawing/2014/main" id="{E47FC372-54AC-4A9D-87D9-96389D809E68}"/>
+                <a16:creationId xmlns:a16="http://schemas.microsoft.com/office/drawing/2014/main" id="{471BD88F-58DE-4F00-8C5C-711A923A6FD9}"/>
               </a:ext>
             </a:extLst>
           </p:cNvPr>
@@ -9857,7 +9932,7 @@
           <p:cNvPr id="26" name="">
             <a:extLst xmlns:a="http://schemas.openxmlformats.org/drawingml/2006/main">
               <a:ext uri="{FF2B5EF4-FFF2-40B4-BE49-F238E27FC236}">
-                <a16:creationId xmlns:a16="http://schemas.microsoft.com/office/drawing/2014/main" id="{51D57C71-E696-44EF-9FD5-8FADF6A4661F}"/>
+                <a16:creationId xmlns:a16="http://schemas.microsoft.com/office/drawing/2014/main" id="{8DD876E5-DFD2-41D5-8249-E96DC4176D9E}"/>
               </a:ext>
             </a:extLst>
           </p:cNvPr>
@@ -9892,7 +9967,7 @@
           <p:cNvPr id="27" name="">
             <a:extLst xmlns:a="http://schemas.openxmlformats.org/drawingml/2006/main">
               <a:ext uri="{FF2B5EF4-FFF2-40B4-BE49-F238E27FC236}">
-                <a16:creationId xmlns:a16="http://schemas.microsoft.com/office/drawing/2014/main" id="{535AAF5E-F37B-47D4-84DC-41D93F4A54A0}"/>
+                <a16:creationId xmlns:a16="http://schemas.microsoft.com/office/drawing/2014/main" id="{31A3A3F1-D903-41A9-BEDF-312E61247537}"/>
               </a:ext>
             </a:extLst>
           </p:cNvPr>
@@ -9950,7 +10025,7 @@
           <p:cNvPr id="28" name="">
             <a:extLst xmlns:a="http://schemas.openxmlformats.org/drawingml/2006/main">
               <a:ext uri="{FF2B5EF4-FFF2-40B4-BE49-F238E27FC236}">
-                <a16:creationId xmlns:a16="http://schemas.microsoft.com/office/drawing/2014/main" id="{F40441AF-DCBC-4C17-AA70-9EC699CA2E7A}"/>
+                <a16:creationId xmlns:a16="http://schemas.microsoft.com/office/drawing/2014/main" id="{4DFDBA37-3E7D-4EE2-AF6E-BBFE2B57DEA8}"/>
               </a:ext>
             </a:extLst>
           </p:cNvPr>
@@ -9985,7 +10060,7 @@
           <p:cNvPr id="29" name="">
             <a:extLst xmlns:a="http://schemas.openxmlformats.org/drawingml/2006/main">
               <a:ext uri="{FF2B5EF4-FFF2-40B4-BE49-F238E27FC236}">
-                <a16:creationId xmlns:a16="http://schemas.microsoft.com/office/drawing/2014/main" id="{86BE0361-E30E-4DAF-B8BC-66D6A816147B}"/>
+                <a16:creationId xmlns:a16="http://schemas.microsoft.com/office/drawing/2014/main" id="{E87A6408-43B3-433F-9596-53EBAA3F4FCF}"/>
               </a:ext>
             </a:extLst>
           </p:cNvPr>
@@ -10043,7 +10118,7 @@
           <p:cNvPr id="30" name="">
             <a:extLst xmlns:a="http://schemas.openxmlformats.org/drawingml/2006/main">
               <a:ext uri="{FF2B5EF4-FFF2-40B4-BE49-F238E27FC236}">
-                <a16:creationId xmlns:a16="http://schemas.microsoft.com/office/drawing/2014/main" id="{C86DB97B-014C-4811-ADEF-5CA61814ECC9}"/>
+                <a16:creationId xmlns:a16="http://schemas.microsoft.com/office/drawing/2014/main" id="{7B7FCA60-C356-44BD-A7B8-2671405B163D}"/>
               </a:ext>
             </a:extLst>
           </p:cNvPr>
@@ -10099,7 +10174,7 @@
     </p:spTree>
     <p:extLst>
       <p:ext uri="{BB962C8B-B14F-4D97-AF65-F5344CB8AC3E}">
-        <p14:creationId xmlns:p14="http://schemas.microsoft.com/office/powerpoint/2010/main" val="99460604"/>
+        <p14:creationId xmlns:p14="http://schemas.microsoft.com/office/powerpoint/2010/main" val="1218315081"/>
       </p:ext>
     </p:extLst>
   </p:cSld>
@@ -10130,7 +10205,7 @@
           <p:cNvPr id="1" name="">
             <a:extLst xmlns:a="http://schemas.openxmlformats.org/drawingml/2006/main">
               <a:ext uri="{FF2B5EF4-FFF2-40B4-BE49-F238E27FC236}">
-                <a16:creationId xmlns:a16="http://schemas.microsoft.com/office/drawing/2014/main" id="{BF77C5C0-9535-4BCA-B590-CBF068957087}"/>
+                <a16:creationId xmlns:a16="http://schemas.microsoft.com/office/drawing/2014/main" id="{36F7909F-D40C-4708-AD54-0113BBBB7028}"/>
               </a:ext>
             </a:extLst>
           </p:cNvPr>
@@ -10165,7 +10240,7 @@
           <p:cNvPr id="2" name="">
             <a:extLst xmlns:a="http://schemas.openxmlformats.org/drawingml/2006/main">
               <a:ext uri="{FF2B5EF4-FFF2-40B4-BE49-F238E27FC236}">
-                <a16:creationId xmlns:a16="http://schemas.microsoft.com/office/drawing/2014/main" id="{5B8823DE-7340-4B25-A0BC-BCCE0246384B}"/>
+                <a16:creationId xmlns:a16="http://schemas.microsoft.com/office/drawing/2014/main" id="{CE051A34-4042-4148-B655-F345A12DB87D}"/>
               </a:ext>
             </a:extLst>
           </p:cNvPr>
@@ -10200,7 +10275,7 @@
           <p:cNvPr id="3" name="">
             <a:extLst xmlns:a="http://schemas.openxmlformats.org/drawingml/2006/main">
               <a:ext uri="{FF2B5EF4-FFF2-40B4-BE49-F238E27FC236}">
-                <a16:creationId xmlns:a16="http://schemas.microsoft.com/office/drawing/2014/main" id="{AF49244E-A65F-4739-93E0-BAE53F1742A4}"/>
+                <a16:creationId xmlns:a16="http://schemas.microsoft.com/office/drawing/2014/main" id="{85B8472C-E1A9-43FB-B856-F8041E2325C1}"/>
               </a:ext>
             </a:extLst>
           </p:cNvPr>
@@ -10258,7 +10333,7 @@
           <p:cNvPr id="4" name="">
             <a:extLst xmlns:a="http://schemas.openxmlformats.org/drawingml/2006/main">
               <a:ext uri="{FF2B5EF4-FFF2-40B4-BE49-F238E27FC236}">
-                <a16:creationId xmlns:a16="http://schemas.microsoft.com/office/drawing/2014/main" id="{F2BC6AD9-2D6D-4A87-9278-E5CAD10CD36C}"/>
+                <a16:creationId xmlns:a16="http://schemas.microsoft.com/office/drawing/2014/main" id="{B7463942-7C78-478B-80EA-C72FEAD0A4D4}"/>
               </a:ext>
             </a:extLst>
           </p:cNvPr>
@@ -10316,7 +10391,7 @@
           <p:cNvPr id="5" name="">
             <a:extLst xmlns:a="http://schemas.openxmlformats.org/drawingml/2006/main">
               <a:ext uri="{FF2B5EF4-FFF2-40B4-BE49-F238E27FC236}">
-                <a16:creationId xmlns:a16="http://schemas.microsoft.com/office/drawing/2014/main" id="{5D080513-437A-4F1B-8CFB-35339AE18EF2}"/>
+                <a16:creationId xmlns:a16="http://schemas.microsoft.com/office/drawing/2014/main" id="{22A3F58F-AA5A-46F4-B4A2-656932AF1B21}"/>
               </a:ext>
             </a:extLst>
           </p:cNvPr>
@@ -10351,7 +10426,7 @@
           <p:cNvPr id="6" name="">
             <a:extLst xmlns:a="http://schemas.openxmlformats.org/drawingml/2006/main">
               <a:ext uri="{FF2B5EF4-FFF2-40B4-BE49-F238E27FC236}">
-                <a16:creationId xmlns:a16="http://schemas.microsoft.com/office/drawing/2014/main" id="{AB90E7C2-13DD-416F-AF16-CFD5743B37E1}"/>
+                <a16:creationId xmlns:a16="http://schemas.microsoft.com/office/drawing/2014/main" id="{0E3D6451-5422-4C42-8398-F7BD35551936}"/>
               </a:ext>
             </a:extLst>
           </p:cNvPr>
@@ -10409,7 +10484,7 @@
           <p:cNvPr id="7" name="">
             <a:extLst xmlns:a="http://schemas.openxmlformats.org/drawingml/2006/main">
               <a:ext uri="{FF2B5EF4-FFF2-40B4-BE49-F238E27FC236}">
-                <a16:creationId xmlns:a16="http://schemas.microsoft.com/office/drawing/2014/main" id="{0E6F1D7F-4E07-4C8B-A2AB-F76E5D2DDD35}"/>
+                <a16:creationId xmlns:a16="http://schemas.microsoft.com/office/drawing/2014/main" id="{B7BF5965-4FBE-43F3-9A21-FFB0B0A59C5C}"/>
               </a:ext>
             </a:extLst>
           </p:cNvPr>
@@ -10467,7 +10542,7 @@
           <p:cNvPr id="8" name="">
             <a:extLst xmlns:a="http://schemas.openxmlformats.org/drawingml/2006/main">
               <a:ext uri="{FF2B5EF4-FFF2-40B4-BE49-F238E27FC236}">
-                <a16:creationId xmlns:a16="http://schemas.microsoft.com/office/drawing/2014/main" id="{2DE7E261-4574-4936-8D2C-463E83FEF232}"/>
+                <a16:creationId xmlns:a16="http://schemas.microsoft.com/office/drawing/2014/main" id="{D84BBEBD-AAD9-4578-8A05-5C9D9F236FCD}"/>
               </a:ext>
             </a:extLst>
           </p:cNvPr>
@@ -10502,7 +10577,7 @@
           <p:cNvPr id="9" name="">
             <a:extLst xmlns:a="http://schemas.openxmlformats.org/drawingml/2006/main">
               <a:ext uri="{FF2B5EF4-FFF2-40B4-BE49-F238E27FC236}">
-                <a16:creationId xmlns:a16="http://schemas.microsoft.com/office/drawing/2014/main" id="{41C35E69-5292-4C44-B40F-E0C130953E8B}"/>
+                <a16:creationId xmlns:a16="http://schemas.microsoft.com/office/drawing/2014/main" id="{B3093F8B-0AF7-4E92-A2A8-649DE91E4FD2}"/>
               </a:ext>
             </a:extLst>
           </p:cNvPr>
@@ -10537,7 +10612,7 @@
           <p:cNvPr id="10" name="">
             <a:extLst xmlns:a="http://schemas.openxmlformats.org/drawingml/2006/main">
               <a:ext uri="{FF2B5EF4-FFF2-40B4-BE49-F238E27FC236}">
-                <a16:creationId xmlns:a16="http://schemas.microsoft.com/office/drawing/2014/main" id="{6D75EAE5-AD0B-4783-9FE1-EDD7F317EC87}"/>
+                <a16:creationId xmlns:a16="http://schemas.microsoft.com/office/drawing/2014/main" id="{CF9EFFAF-6FF7-466E-9974-7DCD501F03F8}"/>
               </a:ext>
             </a:extLst>
           </p:cNvPr>
@@ -10595,7 +10670,7 @@
           <p:cNvPr id="11" name="">
             <a:extLst xmlns:a="http://schemas.openxmlformats.org/drawingml/2006/main">
               <a:ext uri="{FF2B5EF4-FFF2-40B4-BE49-F238E27FC236}">
-                <a16:creationId xmlns:a16="http://schemas.microsoft.com/office/drawing/2014/main" id="{35421502-1C16-4B48-876A-58A65EDC6026}"/>
+                <a16:creationId xmlns:a16="http://schemas.microsoft.com/office/drawing/2014/main" id="{C8F320FA-5D59-4749-BDF5-F4CF7650507E}"/>
               </a:ext>
             </a:extLst>
           </p:cNvPr>
@@ -10675,7 +10750,7 @@
           <p:cNvPr id="12" name="">
             <a:extLst xmlns:a="http://schemas.openxmlformats.org/drawingml/2006/main">
               <a:ext uri="{FF2B5EF4-FFF2-40B4-BE49-F238E27FC236}">
-                <a16:creationId xmlns:a16="http://schemas.microsoft.com/office/drawing/2014/main" id="{E3674498-5EA0-47F9-B60B-063EC998F029}"/>
+                <a16:creationId xmlns:a16="http://schemas.microsoft.com/office/drawing/2014/main" id="{B661F4A7-4290-4D31-9313-A598DDC91CED}"/>
               </a:ext>
             </a:extLst>
           </p:cNvPr>
@@ -10710,7 +10785,7 @@
           <p:cNvPr id="13" name="">
             <a:extLst xmlns:a="http://schemas.openxmlformats.org/drawingml/2006/main">
               <a:ext uri="{FF2B5EF4-FFF2-40B4-BE49-F238E27FC236}">
-                <a16:creationId xmlns:a16="http://schemas.microsoft.com/office/drawing/2014/main" id="{3EBE5993-554B-4BEF-88AD-6EA467B7ACB8}"/>
+                <a16:creationId xmlns:a16="http://schemas.microsoft.com/office/drawing/2014/main" id="{CB5AA9F7-CDCA-4CB1-8E87-706D008C3889}"/>
               </a:ext>
             </a:extLst>
           </p:cNvPr>
@@ -10745,7 +10820,7 @@
           <p:cNvPr id="14" name="">
             <a:extLst xmlns:a="http://schemas.openxmlformats.org/drawingml/2006/main">
               <a:ext uri="{FF2B5EF4-FFF2-40B4-BE49-F238E27FC236}">
-                <a16:creationId xmlns:a16="http://schemas.microsoft.com/office/drawing/2014/main" id="{7ED427CC-E678-4175-8F73-0010F889A9D6}"/>
+                <a16:creationId xmlns:a16="http://schemas.microsoft.com/office/drawing/2014/main" id="{30DCEDB4-9D98-485A-869F-2A7D39C8C674}"/>
               </a:ext>
             </a:extLst>
           </p:cNvPr>
@@ -10803,7 +10878,7 @@
           <p:cNvPr id="15" name="">
             <a:extLst xmlns:a="http://schemas.openxmlformats.org/drawingml/2006/main">
               <a:ext uri="{FF2B5EF4-FFF2-40B4-BE49-F238E27FC236}">
-                <a16:creationId xmlns:a16="http://schemas.microsoft.com/office/drawing/2014/main" id="{096A130E-4A3B-462C-891E-35FAFE22A490}"/>
+                <a16:creationId xmlns:a16="http://schemas.microsoft.com/office/drawing/2014/main" id="{9F68C234-AAA7-4CE4-A5FA-2B17187190D8}"/>
               </a:ext>
             </a:extLst>
           </p:cNvPr>
@@ -10919,7 +10994,7 @@
                   <a:srgbClr val="172026"/>
                 </a:solidFill>
               </a:rPr>
-              <a:t>- Dashboard 導覽已更新</a:t>
+              <a:t>- 已整理為 11 個主要 use cases</a:t>
             </a:r>
           </a:p>
         </p:txBody>
@@ -10929,7 +11004,7 @@
           <p:cNvPr id="16" name="">
             <a:extLst xmlns:a="http://schemas.openxmlformats.org/drawingml/2006/main">
               <a:ext uri="{FF2B5EF4-FFF2-40B4-BE49-F238E27FC236}">
-                <a16:creationId xmlns:a16="http://schemas.microsoft.com/office/drawing/2014/main" id="{CA62DA73-E602-460E-B0C6-AE9A3796E0E2}"/>
+                <a16:creationId xmlns:a16="http://schemas.microsoft.com/office/drawing/2014/main" id="{90164FCA-65F6-4CA0-95DA-5CB320C35C7A}"/>
               </a:ext>
             </a:extLst>
           </p:cNvPr>
@@ -10964,7 +11039,7 @@
           <p:cNvPr id="17" name="">
             <a:extLst xmlns:a="http://schemas.openxmlformats.org/drawingml/2006/main">
               <a:ext uri="{FF2B5EF4-FFF2-40B4-BE49-F238E27FC236}">
-                <a16:creationId xmlns:a16="http://schemas.microsoft.com/office/drawing/2014/main" id="{8EB57CEF-AC73-41D5-94CC-CA84D75AAE79}"/>
+                <a16:creationId xmlns:a16="http://schemas.microsoft.com/office/drawing/2014/main" id="{78B68840-1185-432E-93F6-9DB7A4981B73}"/>
               </a:ext>
             </a:extLst>
           </p:cNvPr>
@@ -10999,7 +11074,7 @@
           <p:cNvPr id="18" name="">
             <a:extLst xmlns:a="http://schemas.openxmlformats.org/drawingml/2006/main">
               <a:ext uri="{FF2B5EF4-FFF2-40B4-BE49-F238E27FC236}">
-                <a16:creationId xmlns:a16="http://schemas.microsoft.com/office/drawing/2014/main" id="{7394DFFD-7A04-45C8-A009-BFDC81A19533}"/>
+                <a16:creationId xmlns:a16="http://schemas.microsoft.com/office/drawing/2014/main" id="{050D7527-0B2B-4666-A4E3-3147AD990806}"/>
               </a:ext>
             </a:extLst>
           </p:cNvPr>
@@ -11057,7 +11132,7 @@
           <p:cNvPr id="19" name="">
             <a:extLst xmlns:a="http://schemas.openxmlformats.org/drawingml/2006/main">
               <a:ext uri="{FF2B5EF4-FFF2-40B4-BE49-F238E27FC236}">
-                <a16:creationId xmlns:a16="http://schemas.microsoft.com/office/drawing/2014/main" id="{060D5489-FA6F-40C2-B82D-A1A8C61AE612}"/>
+                <a16:creationId xmlns:a16="http://schemas.microsoft.com/office/drawing/2014/main" id="{46D905ED-409E-4F1B-9864-B97FFAC3D679}"/>
               </a:ext>
             </a:extLst>
           </p:cNvPr>
@@ -11166,7 +11241,7 @@
           <p:cNvPr id="20" name="">
             <a:extLst xmlns:a="http://schemas.openxmlformats.org/drawingml/2006/main">
               <a:ext uri="{FF2B5EF4-FFF2-40B4-BE49-F238E27FC236}">
-                <a16:creationId xmlns:a16="http://schemas.microsoft.com/office/drawing/2014/main" id="{1F1A7DD8-7459-4C74-BA2A-9BCEBB89824A}"/>
+                <a16:creationId xmlns:a16="http://schemas.microsoft.com/office/drawing/2014/main" id="{12C75B66-C7E0-45CD-9255-7E0391BDDFB5}"/>
               </a:ext>
             </a:extLst>
           </p:cNvPr>
@@ -11201,7 +11276,7 @@
           <p:cNvPr id="21" name="">
             <a:extLst xmlns:a="http://schemas.openxmlformats.org/drawingml/2006/main">
               <a:ext uri="{FF2B5EF4-FFF2-40B4-BE49-F238E27FC236}">
-                <a16:creationId xmlns:a16="http://schemas.microsoft.com/office/drawing/2014/main" id="{14216D03-31A0-4298-95E1-7CFCEF167AD1}"/>
+                <a16:creationId xmlns:a16="http://schemas.microsoft.com/office/drawing/2014/main" id="{CB3714F6-A483-4D0D-8B9F-E597C42C28E1}"/>
               </a:ext>
             </a:extLst>
           </p:cNvPr>
@@ -11276,7 +11351,7 @@
           <p:cNvPr id="22" name="">
             <a:extLst xmlns:a="http://schemas.openxmlformats.org/drawingml/2006/main">
               <a:ext uri="{FF2B5EF4-FFF2-40B4-BE49-F238E27FC236}">
-                <a16:creationId xmlns:a16="http://schemas.microsoft.com/office/drawing/2014/main" id="{688E08C0-758C-45E9-AC8A-C3769AD7D891}"/>
+                <a16:creationId xmlns:a16="http://schemas.microsoft.com/office/drawing/2014/main" id="{8B241B23-29CF-4C41-BF5C-3580146E1127}"/>
               </a:ext>
             </a:extLst>
           </p:cNvPr>
@@ -11332,7 +11407,1555 @@
     </p:spTree>
     <p:extLst>
       <p:ext uri="{BB962C8B-B14F-4D97-AF65-F5344CB8AC3E}">
-        <p14:creationId xmlns:p14="http://schemas.microsoft.com/office/powerpoint/2010/main" val="121793181"/>
+        <p14:creationId xmlns:p14="http://schemas.microsoft.com/office/powerpoint/2010/main" val="1594479212"/>
+      </p:ext>
+    </p:extLst>
+  </p:cSld>
+</p:sld>
+</file>
+
+<file path=ppt/slides/slide14.xml><?xml version="1.0" encoding="utf-8"?>
+<p:sld xmlns:p="http://schemas.openxmlformats.org/presentationml/2006/main">
+  <p:cSld>
+    <p:bg>
+      <p:bgPr>
+        <a:solidFill xmlns:a="http://schemas.openxmlformats.org/drawingml/2006/main">
+          <a:srgbClr val="F5F1E8"/>
+        </a:solidFill>
+      </p:bgPr>
+    </p:bg>
+    <p:spTree>
+      <p:nvGrpSpPr>
+        <p:cNvPr id="1" name=""/>
+        <p:cNvGrpSpPr/>
+        <p:nvPr/>
+      </p:nvGrpSpPr>
+      <p:grpSpPr>
+        <a:xfrm xmlns:a="http://schemas.openxmlformats.org/drawingml/2006/main"/>
+      </p:grpSpPr>
+      <p:sp>
+        <p:nvSpPr>
+          <p:cNvPr id="1" name="">
+            <a:extLst xmlns:a="http://schemas.openxmlformats.org/drawingml/2006/main">
+              <a:ext uri="{FF2B5EF4-FFF2-40B4-BE49-F238E27FC236}">
+                <a16:creationId xmlns:a16="http://schemas.microsoft.com/office/drawing/2014/main" id="{79511747-9B20-4156-8D70-82BC561BAB03}"/>
+              </a:ext>
+            </a:extLst>
+          </p:cNvPr>
+          <p:cNvSpPr>
+            <a:spLocks xmlns:a="http://schemas.openxmlformats.org/drawingml/2006/main" noGrp="1"/>
+          </p:cNvSpPr>
+          <p:nvPr/>
+        </p:nvSpPr>
+        <p:spPr>
+          <a:xfrm xmlns:a="http://schemas.openxmlformats.org/drawingml/2006/main" rot="0">
+            <a:off x="9620250" y="-857250"/>
+            <a:ext cx="3429000" cy="3429000"/>
+          </a:xfrm>
+          <a:prstGeom xmlns:a="http://schemas.openxmlformats.org/drawingml/2006/main" prst="ellipse">
+            <a:avLst/>
+          </a:prstGeom>
+          <a:solidFill xmlns:a="http://schemas.openxmlformats.org/drawingml/2006/main">
+            <a:srgbClr val="DFF5EC"/>
+          </a:solidFill>
+          <a:ln xmlns:a="http://schemas.openxmlformats.org/drawingml/2006/main" w="0">
+            <a:solidFill>
+              <a:srgbClr val="000000">
+                <a:alpha val="0"/>
+              </a:srgbClr>
+            </a:solidFill>
+            <a:prstDash val="solid"/>
+          </a:ln>
+        </p:spPr>
+      </p:sp>
+      <p:sp>
+        <p:nvSpPr>
+          <p:cNvPr id="2" name="">
+            <a:extLst xmlns:a="http://schemas.openxmlformats.org/drawingml/2006/main">
+              <a:ext uri="{FF2B5EF4-FFF2-40B4-BE49-F238E27FC236}">
+                <a16:creationId xmlns:a16="http://schemas.microsoft.com/office/drawing/2014/main" id="{A4BDB330-B012-457E-9EE0-64BA079B2E6E}"/>
+              </a:ext>
+            </a:extLst>
+          </p:cNvPr>
+          <p:cNvSpPr>
+            <a:spLocks xmlns:a="http://schemas.openxmlformats.org/drawingml/2006/main" noGrp="1"/>
+          </p:cNvSpPr>
+          <p:nvPr/>
+        </p:nvSpPr>
+        <p:spPr>
+          <a:xfrm xmlns:a="http://schemas.openxmlformats.org/drawingml/2006/main" rot="0">
+            <a:off x="-857250" y="5334000"/>
+            <a:ext cx="2286000" cy="2286000"/>
+          </a:xfrm>
+          <a:prstGeom xmlns:a="http://schemas.openxmlformats.org/drawingml/2006/main" prst="ellipse">
+            <a:avLst/>
+          </a:prstGeom>
+          <a:solidFill xmlns:a="http://schemas.openxmlformats.org/drawingml/2006/main">
+            <a:srgbClr val="FAEFD9"/>
+          </a:solidFill>
+          <a:ln xmlns:a="http://schemas.openxmlformats.org/drawingml/2006/main" w="0">
+            <a:solidFill>
+              <a:srgbClr val="000000">
+                <a:alpha val="0"/>
+              </a:srgbClr>
+            </a:solidFill>
+            <a:prstDash val="solid"/>
+          </a:ln>
+        </p:spPr>
+      </p:sp>
+      <p:sp>
+        <p:nvSpPr>
+          <p:cNvPr id="3" name="">
+            <a:extLst xmlns:a="http://schemas.openxmlformats.org/drawingml/2006/main">
+              <a:ext uri="{FF2B5EF4-FFF2-40B4-BE49-F238E27FC236}">
+                <a16:creationId xmlns:a16="http://schemas.microsoft.com/office/drawing/2014/main" id="{5D129864-72B6-41F7-B7D2-752752C36C9B}"/>
+              </a:ext>
+            </a:extLst>
+          </p:cNvPr>
+          <p:cNvSpPr>
+            <a:spLocks xmlns:a="http://schemas.openxmlformats.org/drawingml/2006/main" noGrp="1"/>
+          </p:cNvSpPr>
+          <p:nvPr/>
+        </p:nvSpPr>
+        <p:spPr>
+          <a:xfrm xmlns:a="http://schemas.openxmlformats.org/drawingml/2006/main" rot="0">
+            <a:off x="609600" y="266700"/>
+            <a:ext cx="3429000" cy="171450"/>
+          </a:xfrm>
+          <a:prstGeom xmlns:a="http://schemas.openxmlformats.org/drawingml/2006/main" prst="rect">
+            <a:avLst/>
+          </a:prstGeom>
+          <a:solidFill xmlns:a="http://schemas.openxmlformats.org/drawingml/2006/main">
+            <a:srgbClr val="000000">
+              <a:alpha val="0"/>
+            </a:srgbClr>
+          </a:solidFill>
+          <a:ln xmlns:a="http://schemas.openxmlformats.org/drawingml/2006/main" w="0">
+            <a:solidFill>
+              <a:srgbClr val="000000">
+                <a:alpha val="0"/>
+              </a:srgbClr>
+            </a:solidFill>
+            <a:prstDash val="solid"/>
+          </a:ln>
+        </p:spPr>
+        <p:txBody>
+          <a:bodyPr xmlns:a="http://schemas.openxmlformats.org/drawingml/2006/main" lIns="0" tIns="0" rIns="0" bIns="0" anchor="t"/>
+          <a:lstStyle xmlns:a="http://schemas.openxmlformats.org/drawingml/2006/main"/>
+          <a:p xmlns:a="http://schemas.openxmlformats.org/drawingml/2006/main">
+            <a:pPr algn="l">
+              <a:defRPr sz="825" b="1">
+                <a:solidFill>
+                  <a:srgbClr val="0E6B52"/>
+                </a:solidFill>
+              </a:defRPr>
+            </a:pPr>
+            <a:r>
+              <a:rPr sz="825" b="1">
+                <a:solidFill>
+                  <a:srgbClr val="0E6B52"/>
+                </a:solidFill>
+              </a:rPr>
+              <a:t>CSC0005 專題期中檢查</a:t>
+            </a:r>
+          </a:p>
+        </p:txBody>
+      </p:sp>
+      <p:sp>
+        <p:nvSpPr>
+          <p:cNvPr id="4" name="">
+            <a:extLst xmlns:a="http://schemas.openxmlformats.org/drawingml/2006/main">
+              <a:ext uri="{FF2B5EF4-FFF2-40B4-BE49-F238E27FC236}">
+                <a16:creationId xmlns:a16="http://schemas.microsoft.com/office/drawing/2014/main" id="{AD136858-1DF5-40F9-ACF0-68EA31EE7F6E}"/>
+              </a:ext>
+            </a:extLst>
+          </p:cNvPr>
+          <p:cNvSpPr>
+            <a:spLocks xmlns:a="http://schemas.openxmlformats.org/drawingml/2006/main" noGrp="1"/>
+          </p:cNvSpPr>
+          <p:nvPr/>
+        </p:nvSpPr>
+        <p:spPr>
+          <a:xfrm xmlns:a="http://schemas.openxmlformats.org/drawingml/2006/main" rot="0">
+            <a:off x="11163300" y="247650"/>
+            <a:ext cx="419100" cy="190500"/>
+          </a:xfrm>
+          <a:prstGeom xmlns:a="http://schemas.openxmlformats.org/drawingml/2006/main" prst="rect">
+            <a:avLst/>
+          </a:prstGeom>
+          <a:solidFill xmlns:a="http://schemas.openxmlformats.org/drawingml/2006/main">
+            <a:srgbClr val="000000">
+              <a:alpha val="0"/>
+            </a:srgbClr>
+          </a:solidFill>
+          <a:ln xmlns:a="http://schemas.openxmlformats.org/drawingml/2006/main" w="0">
+            <a:solidFill>
+              <a:srgbClr val="000000">
+                <a:alpha val="0"/>
+              </a:srgbClr>
+            </a:solidFill>
+            <a:prstDash val="solid"/>
+          </a:ln>
+        </p:spPr>
+        <p:txBody>
+          <a:bodyPr xmlns:a="http://schemas.openxmlformats.org/drawingml/2006/main" lIns="0" tIns="0" rIns="0" bIns="0" anchor="t"/>
+          <a:lstStyle xmlns:a="http://schemas.openxmlformats.org/drawingml/2006/main"/>
+          <a:p xmlns:a="http://schemas.openxmlformats.org/drawingml/2006/main">
+            <a:pPr algn="r">
+              <a:defRPr sz="900" b="1">
+                <a:solidFill>
+                  <a:srgbClr val="0E6B52"/>
+                </a:solidFill>
+              </a:defRPr>
+            </a:pPr>
+            <a:r>
+              <a:rPr sz="900" b="1">
+                <a:solidFill>
+                  <a:srgbClr val="0E6B52"/>
+                </a:solidFill>
+              </a:rPr>
+              <a:t>14</a:t>
+            </a:r>
+          </a:p>
+        </p:txBody>
+      </p:sp>
+      <p:sp>
+        <p:nvSpPr>
+          <p:cNvPr id="5" name="">
+            <a:extLst xmlns:a="http://schemas.openxmlformats.org/drawingml/2006/main">
+              <a:ext uri="{FF2B5EF4-FFF2-40B4-BE49-F238E27FC236}">
+                <a16:creationId xmlns:a16="http://schemas.microsoft.com/office/drawing/2014/main" id="{A87D7271-BEE6-4FD2-B5F6-2C466F19FCD2}"/>
+              </a:ext>
+            </a:extLst>
+          </p:cNvPr>
+          <p:cNvSpPr>
+            <a:spLocks xmlns:a="http://schemas.openxmlformats.org/drawingml/2006/main" noGrp="1"/>
+          </p:cNvSpPr>
+          <p:nvPr/>
+        </p:nvSpPr>
+        <p:spPr>
+          <a:xfrm xmlns:a="http://schemas.openxmlformats.org/drawingml/2006/main" rot="0">
+            <a:off x="609600" y="514350"/>
+            <a:ext cx="10972800" cy="19050"/>
+          </a:xfrm>
+          <a:prstGeom xmlns:a="http://schemas.openxmlformats.org/drawingml/2006/main" prst="rect">
+            <a:avLst/>
+          </a:prstGeom>
+          <a:solidFill xmlns:a="http://schemas.openxmlformats.org/drawingml/2006/main">
+            <a:srgbClr val="23313B"/>
+          </a:solidFill>
+          <a:ln xmlns:a="http://schemas.openxmlformats.org/drawingml/2006/main" w="0">
+            <a:solidFill>
+              <a:srgbClr val="000000">
+                <a:alpha val="0"/>
+              </a:srgbClr>
+            </a:solidFill>
+            <a:prstDash val="solid"/>
+          </a:ln>
+        </p:spPr>
+      </p:sp>
+      <p:sp>
+        <p:nvSpPr>
+          <p:cNvPr id="6" name="">
+            <a:extLst xmlns:a="http://schemas.openxmlformats.org/drawingml/2006/main">
+              <a:ext uri="{FF2B5EF4-FFF2-40B4-BE49-F238E27FC236}">
+                <a16:creationId xmlns:a16="http://schemas.microsoft.com/office/drawing/2014/main" id="{7F16B994-6C2F-42E3-8F07-2CD3BA061F23}"/>
+              </a:ext>
+            </a:extLst>
+          </p:cNvPr>
+          <p:cNvSpPr>
+            <a:spLocks xmlns:a="http://schemas.openxmlformats.org/drawingml/2006/main" noGrp="1"/>
+          </p:cNvSpPr>
+          <p:nvPr/>
+        </p:nvSpPr>
+        <p:spPr>
+          <a:xfrm xmlns:a="http://schemas.openxmlformats.org/drawingml/2006/main" rot="0">
+            <a:off x="609600" y="781050"/>
+            <a:ext cx="8858250" cy="514350"/>
+          </a:xfrm>
+          <a:prstGeom xmlns:a="http://schemas.openxmlformats.org/drawingml/2006/main" prst="rect">
+            <a:avLst/>
+          </a:prstGeom>
+          <a:solidFill xmlns:a="http://schemas.openxmlformats.org/drawingml/2006/main">
+            <a:srgbClr val="000000">
+              <a:alpha val="0"/>
+            </a:srgbClr>
+          </a:solidFill>
+          <a:ln xmlns:a="http://schemas.openxmlformats.org/drawingml/2006/main" w="0">
+            <a:solidFill>
+              <a:srgbClr val="000000">
+                <a:alpha val="0"/>
+              </a:srgbClr>
+            </a:solidFill>
+            <a:prstDash val="solid"/>
+          </a:ln>
+        </p:spPr>
+        <p:txBody>
+          <a:bodyPr xmlns:a="http://schemas.openxmlformats.org/drawingml/2006/main" lIns="0" tIns="0" rIns="0" bIns="0" anchor="t"/>
+          <a:lstStyle xmlns:a="http://schemas.openxmlformats.org/drawingml/2006/main"/>
+          <a:p xmlns:a="http://schemas.openxmlformats.org/drawingml/2006/main">
+            <a:pPr algn="l">
+              <a:defRPr sz="2400" b="1">
+                <a:solidFill>
+                  <a:srgbClr val="172026"/>
+                </a:solidFill>
+              </a:defRPr>
+            </a:pPr>
+            <a:r>
+              <a:rPr sz="2400" b="1">
+                <a:solidFill>
+                  <a:srgbClr val="172026"/>
+                </a:solidFill>
+              </a:rPr>
+              <a:t>候選 Use Cases</a:t>
+            </a:r>
+          </a:p>
+        </p:txBody>
+      </p:sp>
+      <p:sp>
+        <p:nvSpPr>
+          <p:cNvPr id="7" name="">
+            <a:extLst xmlns:a="http://schemas.openxmlformats.org/drawingml/2006/main">
+              <a:ext uri="{FF2B5EF4-FFF2-40B4-BE49-F238E27FC236}">
+                <a16:creationId xmlns:a16="http://schemas.microsoft.com/office/drawing/2014/main" id="{A4EA8A70-EC23-457E-AC45-83DDC5EE66E3}"/>
+              </a:ext>
+            </a:extLst>
+          </p:cNvPr>
+          <p:cNvSpPr>
+            <a:spLocks xmlns:a="http://schemas.openxmlformats.org/drawingml/2006/main" noGrp="1"/>
+          </p:cNvSpPr>
+          <p:nvPr/>
+        </p:nvSpPr>
+        <p:spPr>
+          <a:xfrm xmlns:a="http://schemas.openxmlformats.org/drawingml/2006/main" rot="0">
+            <a:off x="628650" y="1257300"/>
+            <a:ext cx="9334500" cy="400050"/>
+          </a:xfrm>
+          <a:prstGeom xmlns:a="http://schemas.openxmlformats.org/drawingml/2006/main" prst="rect">
+            <a:avLst/>
+          </a:prstGeom>
+          <a:solidFill xmlns:a="http://schemas.openxmlformats.org/drawingml/2006/main">
+            <a:srgbClr val="000000">
+              <a:alpha val="0"/>
+            </a:srgbClr>
+          </a:solidFill>
+          <a:ln xmlns:a="http://schemas.openxmlformats.org/drawingml/2006/main" w="0">
+            <a:solidFill>
+              <a:srgbClr val="000000">
+                <a:alpha val="0"/>
+              </a:srgbClr>
+            </a:solidFill>
+            <a:prstDash val="solid"/>
+          </a:ln>
+        </p:spPr>
+        <p:txBody>
+          <a:bodyPr xmlns:a="http://schemas.openxmlformats.org/drawingml/2006/main" lIns="0" tIns="0" rIns="0" bIns="0" anchor="t"/>
+          <a:lstStyle xmlns:a="http://schemas.openxmlformats.org/drawingml/2006/main"/>
+          <a:p xmlns:a="http://schemas.openxmlformats.org/drawingml/2006/main">
+            <a:pPr algn="l">
+              <a:defRPr sz="1200" b="0">
+                <a:solidFill>
+                  <a:srgbClr val="4F5B66"/>
+                </a:solidFill>
+              </a:defRPr>
+            </a:pPr>
+            <a:r>
+              <a:rPr sz="1200" b="0">
+                <a:solidFill>
+                  <a:srgbClr val="4F5B66"/>
+                </a:solidFill>
+              </a:rPr>
+              <a:t>作為備援清單，避免現場若有 use case 被認定過大或過小時缺少替換項目。</a:t>
+            </a:r>
+          </a:p>
+        </p:txBody>
+      </p:sp>
+      <p:sp>
+        <p:nvSpPr>
+          <p:cNvPr id="8" name="">
+            <a:extLst xmlns:a="http://schemas.openxmlformats.org/drawingml/2006/main">
+              <a:ext uri="{FF2B5EF4-FFF2-40B4-BE49-F238E27FC236}">
+                <a16:creationId xmlns:a16="http://schemas.microsoft.com/office/drawing/2014/main" id="{2BD11A9B-EEF7-48FD-B3CB-B733CCAEEF3D}"/>
+              </a:ext>
+            </a:extLst>
+          </p:cNvPr>
+          <p:cNvSpPr>
+            <a:spLocks xmlns:a="http://schemas.openxmlformats.org/drawingml/2006/main" noGrp="1"/>
+          </p:cNvSpPr>
+          <p:nvPr/>
+        </p:nvSpPr>
+        <p:spPr>
+          <a:xfrm xmlns:a="http://schemas.openxmlformats.org/drawingml/2006/main" rot="0">
+            <a:off x="609600" y="1885950"/>
+            <a:ext cx="3352800" cy="1562100"/>
+          </a:xfrm>
+          <a:prstGeom xmlns:a="http://schemas.openxmlformats.org/drawingml/2006/main" prst="roundRect">
+            <a:avLst>
+              <a:gd name="adj" fmla="val 4878"/>
+            </a:avLst>
+          </a:prstGeom>
+          <a:solidFill xmlns:a="http://schemas.openxmlformats.org/drawingml/2006/main">
+            <a:srgbClr val="FFFDF8"/>
+          </a:solidFill>
+          <a:ln xmlns:a="http://schemas.openxmlformats.org/drawingml/2006/main" w="11430">
+            <a:solidFill>
+              <a:srgbClr val="23313B"/>
+            </a:solidFill>
+            <a:prstDash val="solid"/>
+          </a:ln>
+        </p:spPr>
+      </p:sp>
+      <p:sp>
+        <p:nvSpPr>
+          <p:cNvPr id="9" name="">
+            <a:extLst xmlns:a="http://schemas.openxmlformats.org/drawingml/2006/main">
+              <a:ext uri="{FF2B5EF4-FFF2-40B4-BE49-F238E27FC236}">
+                <a16:creationId xmlns:a16="http://schemas.microsoft.com/office/drawing/2014/main" id="{6291373D-06CA-47E8-8C68-C5F561F6368E}"/>
+              </a:ext>
+            </a:extLst>
+          </p:cNvPr>
+          <p:cNvSpPr>
+            <a:spLocks xmlns:a="http://schemas.openxmlformats.org/drawingml/2006/main" noGrp="1"/>
+          </p:cNvSpPr>
+          <p:nvPr/>
+        </p:nvSpPr>
+        <p:spPr>
+          <a:xfrm xmlns:a="http://schemas.openxmlformats.org/drawingml/2006/main" rot="0">
+            <a:off x="609600" y="1885950"/>
+            <a:ext cx="3352800" cy="76200"/>
+          </a:xfrm>
+          <a:prstGeom xmlns:a="http://schemas.openxmlformats.org/drawingml/2006/main" prst="rect">
+            <a:avLst/>
+          </a:prstGeom>
+          <a:solidFill xmlns:a="http://schemas.openxmlformats.org/drawingml/2006/main">
+            <a:srgbClr val="E57B62"/>
+          </a:solidFill>
+          <a:ln xmlns:a="http://schemas.openxmlformats.org/drawingml/2006/main" w="0">
+            <a:solidFill>
+              <a:srgbClr val="000000">
+                <a:alpha val="0"/>
+              </a:srgbClr>
+            </a:solidFill>
+            <a:prstDash val="solid"/>
+          </a:ln>
+        </p:spPr>
+      </p:sp>
+      <p:sp>
+        <p:nvSpPr>
+          <p:cNvPr id="10" name="">
+            <a:extLst xmlns:a="http://schemas.openxmlformats.org/drawingml/2006/main">
+              <a:ext uri="{FF2B5EF4-FFF2-40B4-BE49-F238E27FC236}">
+                <a16:creationId xmlns:a16="http://schemas.microsoft.com/office/drawing/2014/main" id="{C07CF745-02A1-4A1F-9EB3-9C70A25E7A21}"/>
+              </a:ext>
+            </a:extLst>
+          </p:cNvPr>
+          <p:cNvSpPr>
+            <a:spLocks xmlns:a="http://schemas.openxmlformats.org/drawingml/2006/main" noGrp="1"/>
+          </p:cNvSpPr>
+          <p:nvPr/>
+        </p:nvSpPr>
+        <p:spPr>
+          <a:xfrm xmlns:a="http://schemas.openxmlformats.org/drawingml/2006/main" rot="0">
+            <a:off x="800100" y="2057400"/>
+            <a:ext cx="2971800" cy="266700"/>
+          </a:xfrm>
+          <a:prstGeom xmlns:a="http://schemas.openxmlformats.org/drawingml/2006/main" prst="rect">
+            <a:avLst/>
+          </a:prstGeom>
+          <a:solidFill xmlns:a="http://schemas.openxmlformats.org/drawingml/2006/main">
+            <a:srgbClr val="000000">
+              <a:alpha val="0"/>
+            </a:srgbClr>
+          </a:solidFill>
+          <a:ln xmlns:a="http://schemas.openxmlformats.org/drawingml/2006/main" w="0">
+            <a:solidFill>
+              <a:srgbClr val="000000">
+                <a:alpha val="0"/>
+              </a:srgbClr>
+            </a:solidFill>
+            <a:prstDash val="solid"/>
+          </a:ln>
+        </p:spPr>
+        <p:txBody>
+          <a:bodyPr xmlns:a="http://schemas.openxmlformats.org/drawingml/2006/main" lIns="0" tIns="0" rIns="0" bIns="0" anchor="t"/>
+          <a:lstStyle xmlns:a="http://schemas.openxmlformats.org/drawingml/2006/main"/>
+          <a:p xmlns:a="http://schemas.openxmlformats.org/drawingml/2006/main">
+            <a:pPr algn="l">
+              <a:defRPr sz="1350" b="1">
+                <a:solidFill>
+                  <a:srgbClr val="172026"/>
+                </a:solidFill>
+              </a:defRPr>
+            </a:pPr>
+            <a:r>
+              <a:rPr sz="1350" b="1">
+                <a:solidFill>
+                  <a:srgbClr val="172026"/>
+                </a:solidFill>
+              </a:rPr>
+              <a:t>ALT01 刪除警示規則</a:t>
+            </a:r>
+          </a:p>
+        </p:txBody>
+      </p:sp>
+      <p:sp>
+        <p:nvSpPr>
+          <p:cNvPr id="11" name="">
+            <a:extLst xmlns:a="http://schemas.openxmlformats.org/drawingml/2006/main">
+              <a:ext uri="{FF2B5EF4-FFF2-40B4-BE49-F238E27FC236}">
+                <a16:creationId xmlns:a16="http://schemas.microsoft.com/office/drawing/2014/main" id="{A9900D66-F70A-4D0D-A962-B8C64ACE6C43}"/>
+              </a:ext>
+            </a:extLst>
+          </p:cNvPr>
+          <p:cNvSpPr>
+            <a:spLocks xmlns:a="http://schemas.openxmlformats.org/drawingml/2006/main" noGrp="1"/>
+          </p:cNvSpPr>
+          <p:nvPr/>
+        </p:nvSpPr>
+        <p:spPr>
+          <a:xfrm xmlns:a="http://schemas.openxmlformats.org/drawingml/2006/main" rot="0">
+            <a:off x="800100" y="2419350"/>
+            <a:ext cx="2971800" cy="876300"/>
+          </a:xfrm>
+          <a:prstGeom xmlns:a="http://schemas.openxmlformats.org/drawingml/2006/main" prst="rect">
+            <a:avLst/>
+          </a:prstGeom>
+          <a:solidFill xmlns:a="http://schemas.openxmlformats.org/drawingml/2006/main">
+            <a:srgbClr val="000000">
+              <a:alpha val="0"/>
+            </a:srgbClr>
+          </a:solidFill>
+          <a:ln xmlns:a="http://schemas.openxmlformats.org/drawingml/2006/main" w="0">
+            <a:solidFill>
+              <a:srgbClr val="000000">
+                <a:alpha val="0"/>
+              </a:srgbClr>
+            </a:solidFill>
+            <a:prstDash val="solid"/>
+          </a:ln>
+        </p:spPr>
+        <p:txBody>
+          <a:bodyPr xmlns:a="http://schemas.openxmlformats.org/drawingml/2006/main" lIns="0" tIns="0" rIns="0" bIns="0" anchor="t"/>
+          <a:lstStyle xmlns:a="http://schemas.openxmlformats.org/drawingml/2006/main"/>
+          <a:p xmlns:a="http://schemas.openxmlformats.org/drawingml/2006/main">
+            <a:pPr algn="l">
+              <a:defRPr sz="1125" b="0">
+                <a:solidFill>
+                  <a:srgbClr val="4F5B66"/>
+                </a:solidFill>
+              </a:defRPr>
+            </a:pPr>
+            <a:r>
+              <a:rPr sz="1125" b="0">
+                <a:solidFill>
+                  <a:srgbClr val="4F5B66"/>
+                </a:solidFill>
+              </a:rPr>
+              <a:t>已完成。</a:t>
+            </a:r>
+          </a:p>
+          <a:p xmlns:a="http://schemas.openxmlformats.org/drawingml/2006/main">
+            <a:pPr algn="l">
+              <a:defRPr sz="1125" b="0">
+                <a:solidFill>
+                  <a:srgbClr val="4F5B66"/>
+                </a:solidFill>
+              </a:defRPr>
+            </a:pPr>
+            <a:r>
+              <a:rPr sz="1125" b="0">
+                <a:solidFill>
+                  <a:srgbClr val="4F5B66"/>
+                </a:solidFill>
+              </a:rPr>
+              <a:t>可替換 alert lifecycle 相關項目，獨立性高。</a:t>
+            </a:r>
+          </a:p>
+        </p:txBody>
+      </p:sp>
+      <p:sp>
+        <p:nvSpPr>
+          <p:cNvPr id="12" name="">
+            <a:extLst xmlns:a="http://schemas.openxmlformats.org/drawingml/2006/main">
+              <a:ext uri="{FF2B5EF4-FFF2-40B4-BE49-F238E27FC236}">
+                <a16:creationId xmlns:a16="http://schemas.microsoft.com/office/drawing/2014/main" id="{49F7778A-794A-457E-B7DA-5BE2CA6EA64A}"/>
+              </a:ext>
+            </a:extLst>
+          </p:cNvPr>
+          <p:cNvSpPr>
+            <a:spLocks xmlns:a="http://schemas.openxmlformats.org/drawingml/2006/main" noGrp="1"/>
+          </p:cNvSpPr>
+          <p:nvPr/>
+        </p:nvSpPr>
+        <p:spPr>
+          <a:xfrm xmlns:a="http://schemas.openxmlformats.org/drawingml/2006/main" rot="0">
+            <a:off x="4419600" y="1885950"/>
+            <a:ext cx="3352800" cy="1562100"/>
+          </a:xfrm>
+          <a:prstGeom xmlns:a="http://schemas.openxmlformats.org/drawingml/2006/main" prst="roundRect">
+            <a:avLst>
+              <a:gd name="adj" fmla="val 4878"/>
+            </a:avLst>
+          </a:prstGeom>
+          <a:solidFill xmlns:a="http://schemas.openxmlformats.org/drawingml/2006/main">
+            <a:srgbClr val="FFFDF8"/>
+          </a:solidFill>
+          <a:ln xmlns:a="http://schemas.openxmlformats.org/drawingml/2006/main" w="11430">
+            <a:solidFill>
+              <a:srgbClr val="23313B"/>
+            </a:solidFill>
+            <a:prstDash val="solid"/>
+          </a:ln>
+        </p:spPr>
+      </p:sp>
+      <p:sp>
+        <p:nvSpPr>
+          <p:cNvPr id="13" name="">
+            <a:extLst xmlns:a="http://schemas.openxmlformats.org/drawingml/2006/main">
+              <a:ext uri="{FF2B5EF4-FFF2-40B4-BE49-F238E27FC236}">
+                <a16:creationId xmlns:a16="http://schemas.microsoft.com/office/drawing/2014/main" id="{53EE5C31-E510-4DE6-80D4-6E724DCCBDC5}"/>
+              </a:ext>
+            </a:extLst>
+          </p:cNvPr>
+          <p:cNvSpPr>
+            <a:spLocks xmlns:a="http://schemas.openxmlformats.org/drawingml/2006/main" noGrp="1"/>
+          </p:cNvSpPr>
+          <p:nvPr/>
+        </p:nvSpPr>
+        <p:spPr>
+          <a:xfrm xmlns:a="http://schemas.openxmlformats.org/drawingml/2006/main" rot="0">
+            <a:off x="4419600" y="1885950"/>
+            <a:ext cx="3352800" cy="76200"/>
+          </a:xfrm>
+          <a:prstGeom xmlns:a="http://schemas.openxmlformats.org/drawingml/2006/main" prst="rect">
+            <a:avLst/>
+          </a:prstGeom>
+          <a:solidFill xmlns:a="http://schemas.openxmlformats.org/drawingml/2006/main">
+            <a:srgbClr val="38B58A"/>
+          </a:solidFill>
+          <a:ln xmlns:a="http://schemas.openxmlformats.org/drawingml/2006/main" w="0">
+            <a:solidFill>
+              <a:srgbClr val="000000">
+                <a:alpha val="0"/>
+              </a:srgbClr>
+            </a:solidFill>
+            <a:prstDash val="solid"/>
+          </a:ln>
+        </p:spPr>
+      </p:sp>
+      <p:sp>
+        <p:nvSpPr>
+          <p:cNvPr id="14" name="">
+            <a:extLst xmlns:a="http://schemas.openxmlformats.org/drawingml/2006/main">
+              <a:ext uri="{FF2B5EF4-FFF2-40B4-BE49-F238E27FC236}">
+                <a16:creationId xmlns:a16="http://schemas.microsoft.com/office/drawing/2014/main" id="{60E77888-F807-4020-B1D4-F4FBEF6E7548}"/>
+              </a:ext>
+            </a:extLst>
+          </p:cNvPr>
+          <p:cNvSpPr>
+            <a:spLocks xmlns:a="http://schemas.openxmlformats.org/drawingml/2006/main" noGrp="1"/>
+          </p:cNvSpPr>
+          <p:nvPr/>
+        </p:nvSpPr>
+        <p:spPr>
+          <a:xfrm xmlns:a="http://schemas.openxmlformats.org/drawingml/2006/main" rot="0">
+            <a:off x="4610100" y="2057400"/>
+            <a:ext cx="2971800" cy="266700"/>
+          </a:xfrm>
+          <a:prstGeom xmlns:a="http://schemas.openxmlformats.org/drawingml/2006/main" prst="rect">
+            <a:avLst/>
+          </a:prstGeom>
+          <a:solidFill xmlns:a="http://schemas.openxmlformats.org/drawingml/2006/main">
+            <a:srgbClr val="000000">
+              <a:alpha val="0"/>
+            </a:srgbClr>
+          </a:solidFill>
+          <a:ln xmlns:a="http://schemas.openxmlformats.org/drawingml/2006/main" w="0">
+            <a:solidFill>
+              <a:srgbClr val="000000">
+                <a:alpha val="0"/>
+              </a:srgbClr>
+            </a:solidFill>
+            <a:prstDash val="solid"/>
+          </a:ln>
+        </p:spPr>
+        <p:txBody>
+          <a:bodyPr xmlns:a="http://schemas.openxmlformats.org/drawingml/2006/main" lIns="0" tIns="0" rIns="0" bIns="0" anchor="t"/>
+          <a:lstStyle xmlns:a="http://schemas.openxmlformats.org/drawingml/2006/main"/>
+          <a:p xmlns:a="http://schemas.openxmlformats.org/drawingml/2006/main">
+            <a:pPr algn="l">
+              <a:defRPr sz="1350" b="1">
+                <a:solidFill>
+                  <a:srgbClr val="172026"/>
+                </a:solidFill>
+              </a:defRPr>
+            </a:pPr>
+            <a:r>
+              <a:rPr sz="1350" b="1">
+                <a:solidFill>
+                  <a:srgbClr val="172026"/>
+                </a:solidFill>
+              </a:rPr>
+              <a:t>ALT02 查看投資組合摘要</a:t>
+            </a:r>
+          </a:p>
+        </p:txBody>
+      </p:sp>
+      <p:sp>
+        <p:nvSpPr>
+          <p:cNvPr id="15" name="">
+            <a:extLst xmlns:a="http://schemas.openxmlformats.org/drawingml/2006/main">
+              <a:ext uri="{FF2B5EF4-FFF2-40B4-BE49-F238E27FC236}">
+                <a16:creationId xmlns:a16="http://schemas.microsoft.com/office/drawing/2014/main" id="{E6ED5496-0540-418B-A9FF-3BE3AFAAEEA5}"/>
+              </a:ext>
+            </a:extLst>
+          </p:cNvPr>
+          <p:cNvSpPr>
+            <a:spLocks xmlns:a="http://schemas.openxmlformats.org/drawingml/2006/main" noGrp="1"/>
+          </p:cNvSpPr>
+          <p:nvPr/>
+        </p:nvSpPr>
+        <p:spPr>
+          <a:xfrm xmlns:a="http://schemas.openxmlformats.org/drawingml/2006/main" rot="0">
+            <a:off x="4610100" y="2419350"/>
+            <a:ext cx="2971800" cy="876300"/>
+          </a:xfrm>
+          <a:prstGeom xmlns:a="http://schemas.openxmlformats.org/drawingml/2006/main" prst="rect">
+            <a:avLst/>
+          </a:prstGeom>
+          <a:solidFill xmlns:a="http://schemas.openxmlformats.org/drawingml/2006/main">
+            <a:srgbClr val="000000">
+              <a:alpha val="0"/>
+            </a:srgbClr>
+          </a:solidFill>
+          <a:ln xmlns:a="http://schemas.openxmlformats.org/drawingml/2006/main" w="0">
+            <a:solidFill>
+              <a:srgbClr val="000000">
+                <a:alpha val="0"/>
+              </a:srgbClr>
+            </a:solidFill>
+            <a:prstDash val="solid"/>
+          </a:ln>
+        </p:spPr>
+        <p:txBody>
+          <a:bodyPr xmlns:a="http://schemas.openxmlformats.org/drawingml/2006/main" lIns="0" tIns="0" rIns="0" bIns="0" anchor="t"/>
+          <a:lstStyle xmlns:a="http://schemas.openxmlformats.org/drawingml/2006/main"/>
+          <a:p xmlns:a="http://schemas.openxmlformats.org/drawingml/2006/main">
+            <a:pPr algn="l">
+              <a:defRPr sz="1125" b="0">
+                <a:solidFill>
+                  <a:srgbClr val="4F5B66"/>
+                </a:solidFill>
+              </a:defRPr>
+            </a:pPr>
+            <a:r>
+              <a:rPr sz="1125" b="0">
+                <a:solidFill>
+                  <a:srgbClr val="4F5B66"/>
+                </a:solidFill>
+              </a:rPr>
+              <a:t>已完成。</a:t>
+            </a:r>
+          </a:p>
+          <a:p xmlns:a="http://schemas.openxmlformats.org/drawingml/2006/main">
+            <a:pPr algn="l">
+              <a:defRPr sz="1125" b="0">
+                <a:solidFill>
+                  <a:srgbClr val="4F5B66"/>
+                </a:solidFill>
+              </a:defRPr>
+            </a:pPr>
+            <a:r>
+              <a:rPr sz="1125" b="0">
+                <a:solidFill>
+                  <a:srgbClr val="4F5B66"/>
+                </a:solidFill>
+              </a:rPr>
+              <a:t>若老師認為「管理投資組合」太泛，可改用此任務。</a:t>
+            </a:r>
+          </a:p>
+        </p:txBody>
+      </p:sp>
+      <p:sp>
+        <p:nvSpPr>
+          <p:cNvPr id="16" name="">
+            <a:extLst xmlns:a="http://schemas.openxmlformats.org/drawingml/2006/main">
+              <a:ext uri="{FF2B5EF4-FFF2-40B4-BE49-F238E27FC236}">
+                <a16:creationId xmlns:a16="http://schemas.microsoft.com/office/drawing/2014/main" id="{F8C5A6BE-74D4-4B6F-B9ED-65066C96F137}"/>
+              </a:ext>
+            </a:extLst>
+          </p:cNvPr>
+          <p:cNvSpPr>
+            <a:spLocks xmlns:a="http://schemas.openxmlformats.org/drawingml/2006/main" noGrp="1"/>
+          </p:cNvSpPr>
+          <p:nvPr/>
+        </p:nvSpPr>
+        <p:spPr>
+          <a:xfrm xmlns:a="http://schemas.openxmlformats.org/drawingml/2006/main" rot="0">
+            <a:off x="8229600" y="1885950"/>
+            <a:ext cx="3352800" cy="1562100"/>
+          </a:xfrm>
+          <a:prstGeom xmlns:a="http://schemas.openxmlformats.org/drawingml/2006/main" prst="roundRect">
+            <a:avLst>
+              <a:gd name="adj" fmla="val 4878"/>
+            </a:avLst>
+          </a:prstGeom>
+          <a:solidFill xmlns:a="http://schemas.openxmlformats.org/drawingml/2006/main">
+            <a:srgbClr val="FFFDF8"/>
+          </a:solidFill>
+          <a:ln xmlns:a="http://schemas.openxmlformats.org/drawingml/2006/main" w="11430">
+            <a:solidFill>
+              <a:srgbClr val="23313B"/>
+            </a:solidFill>
+            <a:prstDash val="solid"/>
+          </a:ln>
+        </p:spPr>
+      </p:sp>
+      <p:sp>
+        <p:nvSpPr>
+          <p:cNvPr id="17" name="">
+            <a:extLst xmlns:a="http://schemas.openxmlformats.org/drawingml/2006/main">
+              <a:ext uri="{FF2B5EF4-FFF2-40B4-BE49-F238E27FC236}">
+                <a16:creationId xmlns:a16="http://schemas.microsoft.com/office/drawing/2014/main" id="{A8169F44-D1F3-4A1F-B48E-38BA673FD144}"/>
+              </a:ext>
+            </a:extLst>
+          </p:cNvPr>
+          <p:cNvSpPr>
+            <a:spLocks xmlns:a="http://schemas.openxmlformats.org/drawingml/2006/main" noGrp="1"/>
+          </p:cNvSpPr>
+          <p:nvPr/>
+        </p:nvSpPr>
+        <p:spPr>
+          <a:xfrm xmlns:a="http://schemas.openxmlformats.org/drawingml/2006/main" rot="0">
+            <a:off x="8229600" y="1885950"/>
+            <a:ext cx="3352800" cy="76200"/>
+          </a:xfrm>
+          <a:prstGeom xmlns:a="http://schemas.openxmlformats.org/drawingml/2006/main" prst="rect">
+            <a:avLst/>
+          </a:prstGeom>
+          <a:solidFill xmlns:a="http://schemas.openxmlformats.org/drawingml/2006/main">
+            <a:srgbClr val="5E9BFF"/>
+          </a:solidFill>
+          <a:ln xmlns:a="http://schemas.openxmlformats.org/drawingml/2006/main" w="0">
+            <a:solidFill>
+              <a:srgbClr val="000000">
+                <a:alpha val="0"/>
+              </a:srgbClr>
+            </a:solidFill>
+            <a:prstDash val="solid"/>
+          </a:ln>
+        </p:spPr>
+      </p:sp>
+      <p:sp>
+        <p:nvSpPr>
+          <p:cNvPr id="18" name="">
+            <a:extLst xmlns:a="http://schemas.openxmlformats.org/drawingml/2006/main">
+              <a:ext uri="{FF2B5EF4-FFF2-40B4-BE49-F238E27FC236}">
+                <a16:creationId xmlns:a16="http://schemas.microsoft.com/office/drawing/2014/main" id="{50CFC86E-CFAF-4F74-9B7E-977C566FF2C0}"/>
+              </a:ext>
+            </a:extLst>
+          </p:cNvPr>
+          <p:cNvSpPr>
+            <a:spLocks xmlns:a="http://schemas.openxmlformats.org/drawingml/2006/main" noGrp="1"/>
+          </p:cNvSpPr>
+          <p:nvPr/>
+        </p:nvSpPr>
+        <p:spPr>
+          <a:xfrm xmlns:a="http://schemas.openxmlformats.org/drawingml/2006/main" rot="0">
+            <a:off x="8420100" y="2057400"/>
+            <a:ext cx="2971800" cy="266700"/>
+          </a:xfrm>
+          <a:prstGeom xmlns:a="http://schemas.openxmlformats.org/drawingml/2006/main" prst="rect">
+            <a:avLst/>
+          </a:prstGeom>
+          <a:solidFill xmlns:a="http://schemas.openxmlformats.org/drawingml/2006/main">
+            <a:srgbClr val="000000">
+              <a:alpha val="0"/>
+            </a:srgbClr>
+          </a:solidFill>
+          <a:ln xmlns:a="http://schemas.openxmlformats.org/drawingml/2006/main" w="0">
+            <a:solidFill>
+              <a:srgbClr val="000000">
+                <a:alpha val="0"/>
+              </a:srgbClr>
+            </a:solidFill>
+            <a:prstDash val="solid"/>
+          </a:ln>
+        </p:spPr>
+        <p:txBody>
+          <a:bodyPr xmlns:a="http://schemas.openxmlformats.org/drawingml/2006/main" lIns="0" tIns="0" rIns="0" bIns="0" anchor="t"/>
+          <a:lstStyle xmlns:a="http://schemas.openxmlformats.org/drawingml/2006/main"/>
+          <a:p xmlns:a="http://schemas.openxmlformats.org/drawingml/2006/main">
+            <a:pPr algn="l">
+              <a:defRPr sz="1350" b="1">
+                <a:solidFill>
+                  <a:srgbClr val="172026"/>
+                </a:solidFill>
+              </a:defRPr>
+            </a:pPr>
+            <a:r>
+              <a:rPr sz="1350" b="1">
+                <a:solidFill>
+                  <a:srgbClr val="172026"/>
+                </a:solidFill>
+              </a:rPr>
+              <a:t>ALT03 查看投資組合交易紀錄</a:t>
+            </a:r>
+          </a:p>
+        </p:txBody>
+      </p:sp>
+      <p:sp>
+        <p:nvSpPr>
+          <p:cNvPr id="19" name="">
+            <a:extLst xmlns:a="http://schemas.openxmlformats.org/drawingml/2006/main">
+              <a:ext uri="{FF2B5EF4-FFF2-40B4-BE49-F238E27FC236}">
+                <a16:creationId xmlns:a16="http://schemas.microsoft.com/office/drawing/2014/main" id="{6E77E9FD-5AE6-429B-8131-8E7CBBAE444D}"/>
+              </a:ext>
+            </a:extLst>
+          </p:cNvPr>
+          <p:cNvSpPr>
+            <a:spLocks xmlns:a="http://schemas.openxmlformats.org/drawingml/2006/main" noGrp="1"/>
+          </p:cNvSpPr>
+          <p:nvPr/>
+        </p:nvSpPr>
+        <p:spPr>
+          <a:xfrm xmlns:a="http://schemas.openxmlformats.org/drawingml/2006/main" rot="0">
+            <a:off x="8420100" y="2419350"/>
+            <a:ext cx="2971800" cy="876300"/>
+          </a:xfrm>
+          <a:prstGeom xmlns:a="http://schemas.openxmlformats.org/drawingml/2006/main" prst="rect">
+            <a:avLst/>
+          </a:prstGeom>
+          <a:solidFill xmlns:a="http://schemas.openxmlformats.org/drawingml/2006/main">
+            <a:srgbClr val="000000">
+              <a:alpha val="0"/>
+            </a:srgbClr>
+          </a:solidFill>
+          <a:ln xmlns:a="http://schemas.openxmlformats.org/drawingml/2006/main" w="0">
+            <a:solidFill>
+              <a:srgbClr val="000000">
+                <a:alpha val="0"/>
+              </a:srgbClr>
+            </a:solidFill>
+            <a:prstDash val="solid"/>
+          </a:ln>
+        </p:spPr>
+        <p:txBody>
+          <a:bodyPr xmlns:a="http://schemas.openxmlformats.org/drawingml/2006/main" lIns="0" tIns="0" rIns="0" bIns="0" anchor="t"/>
+          <a:lstStyle xmlns:a="http://schemas.openxmlformats.org/drawingml/2006/main"/>
+          <a:p xmlns:a="http://schemas.openxmlformats.org/drawingml/2006/main">
+            <a:pPr algn="l">
+              <a:defRPr sz="1125" b="0">
+                <a:solidFill>
+                  <a:srgbClr val="4F5B66"/>
+                </a:solidFill>
+              </a:defRPr>
+            </a:pPr>
+            <a:r>
+              <a:rPr sz="1125" b="0">
+                <a:solidFill>
+                  <a:srgbClr val="4F5B66"/>
+                </a:solidFill>
+              </a:rPr>
+              <a:t>已完成。</a:t>
+            </a:r>
+          </a:p>
+          <a:p xmlns:a="http://schemas.openxmlformats.org/drawingml/2006/main">
+            <a:pPr algn="l">
+              <a:defRPr sz="1125" b="0">
+                <a:solidFill>
+                  <a:srgbClr val="4F5B66"/>
+                </a:solidFill>
+              </a:defRPr>
+            </a:pPr>
+            <a:r>
+              <a:rPr sz="1125" b="0">
+                <a:solidFill>
+                  <a:srgbClr val="4F5B66"/>
+                </a:solidFill>
+              </a:rPr>
+              <a:t>可用來替換較偏管理者或系統型的 use case。</a:t>
+            </a:r>
+          </a:p>
+        </p:txBody>
+      </p:sp>
+      <p:sp>
+        <p:nvSpPr>
+          <p:cNvPr id="20" name="">
+            <a:extLst xmlns:a="http://schemas.openxmlformats.org/drawingml/2006/main">
+              <a:ext uri="{FF2B5EF4-FFF2-40B4-BE49-F238E27FC236}">
+                <a16:creationId xmlns:a16="http://schemas.microsoft.com/office/drawing/2014/main" id="{BDC2B917-DF62-48AD-B8A9-52131E87A6A9}"/>
+              </a:ext>
+            </a:extLst>
+          </p:cNvPr>
+          <p:cNvSpPr>
+            <a:spLocks xmlns:a="http://schemas.openxmlformats.org/drawingml/2006/main" noGrp="1"/>
+          </p:cNvSpPr>
+          <p:nvPr/>
+        </p:nvSpPr>
+        <p:spPr>
+          <a:xfrm xmlns:a="http://schemas.openxmlformats.org/drawingml/2006/main" rot="0">
+            <a:off x="1562100" y="3848100"/>
+            <a:ext cx="3352800" cy="1562100"/>
+          </a:xfrm>
+          <a:prstGeom xmlns:a="http://schemas.openxmlformats.org/drawingml/2006/main" prst="roundRect">
+            <a:avLst>
+              <a:gd name="adj" fmla="val 4878"/>
+            </a:avLst>
+          </a:prstGeom>
+          <a:solidFill xmlns:a="http://schemas.openxmlformats.org/drawingml/2006/main">
+            <a:srgbClr val="FFFDF8"/>
+          </a:solidFill>
+          <a:ln xmlns:a="http://schemas.openxmlformats.org/drawingml/2006/main" w="11430">
+            <a:solidFill>
+              <a:srgbClr val="23313B"/>
+            </a:solidFill>
+            <a:prstDash val="solid"/>
+          </a:ln>
+        </p:spPr>
+      </p:sp>
+      <p:sp>
+        <p:nvSpPr>
+          <p:cNvPr id="21" name="">
+            <a:extLst xmlns:a="http://schemas.openxmlformats.org/drawingml/2006/main">
+              <a:ext uri="{FF2B5EF4-FFF2-40B4-BE49-F238E27FC236}">
+                <a16:creationId xmlns:a16="http://schemas.microsoft.com/office/drawing/2014/main" id="{F8CAB74B-5D4B-446D-92AD-C0FA5E6C4552}"/>
+              </a:ext>
+            </a:extLst>
+          </p:cNvPr>
+          <p:cNvSpPr>
+            <a:spLocks xmlns:a="http://schemas.openxmlformats.org/drawingml/2006/main" noGrp="1"/>
+          </p:cNvSpPr>
+          <p:nvPr/>
+        </p:nvSpPr>
+        <p:spPr>
+          <a:xfrm xmlns:a="http://schemas.openxmlformats.org/drawingml/2006/main" rot="0">
+            <a:off x="1562100" y="3848100"/>
+            <a:ext cx="3352800" cy="76200"/>
+          </a:xfrm>
+          <a:prstGeom xmlns:a="http://schemas.openxmlformats.org/drawingml/2006/main" prst="rect">
+            <a:avLst/>
+          </a:prstGeom>
+          <a:solidFill xmlns:a="http://schemas.openxmlformats.org/drawingml/2006/main">
+            <a:srgbClr val="D6A04B"/>
+          </a:solidFill>
+          <a:ln xmlns:a="http://schemas.openxmlformats.org/drawingml/2006/main" w="0">
+            <a:solidFill>
+              <a:srgbClr val="000000">
+                <a:alpha val="0"/>
+              </a:srgbClr>
+            </a:solidFill>
+            <a:prstDash val="solid"/>
+          </a:ln>
+        </p:spPr>
+      </p:sp>
+      <p:sp>
+        <p:nvSpPr>
+          <p:cNvPr id="22" name="">
+            <a:extLst xmlns:a="http://schemas.openxmlformats.org/drawingml/2006/main">
+              <a:ext uri="{FF2B5EF4-FFF2-40B4-BE49-F238E27FC236}">
+                <a16:creationId xmlns:a16="http://schemas.microsoft.com/office/drawing/2014/main" id="{91147C06-5777-42A6-95F6-F882E5610FEA}"/>
+              </a:ext>
+            </a:extLst>
+          </p:cNvPr>
+          <p:cNvSpPr>
+            <a:spLocks xmlns:a="http://schemas.openxmlformats.org/drawingml/2006/main" noGrp="1"/>
+          </p:cNvSpPr>
+          <p:nvPr/>
+        </p:nvSpPr>
+        <p:spPr>
+          <a:xfrm xmlns:a="http://schemas.openxmlformats.org/drawingml/2006/main" rot="0">
+            <a:off x="1752600" y="4019550"/>
+            <a:ext cx="2971800" cy="266700"/>
+          </a:xfrm>
+          <a:prstGeom xmlns:a="http://schemas.openxmlformats.org/drawingml/2006/main" prst="rect">
+            <a:avLst/>
+          </a:prstGeom>
+          <a:solidFill xmlns:a="http://schemas.openxmlformats.org/drawingml/2006/main">
+            <a:srgbClr val="000000">
+              <a:alpha val="0"/>
+            </a:srgbClr>
+          </a:solidFill>
+          <a:ln xmlns:a="http://schemas.openxmlformats.org/drawingml/2006/main" w="0">
+            <a:solidFill>
+              <a:srgbClr val="000000">
+                <a:alpha val="0"/>
+              </a:srgbClr>
+            </a:solidFill>
+            <a:prstDash val="solid"/>
+          </a:ln>
+        </p:spPr>
+        <p:txBody>
+          <a:bodyPr xmlns:a="http://schemas.openxmlformats.org/drawingml/2006/main" lIns="0" tIns="0" rIns="0" bIns="0" anchor="t"/>
+          <a:lstStyle xmlns:a="http://schemas.openxmlformats.org/drawingml/2006/main"/>
+          <a:p xmlns:a="http://schemas.openxmlformats.org/drawingml/2006/main">
+            <a:pPr algn="l">
+              <a:defRPr sz="1350" b="1">
+                <a:solidFill>
+                  <a:srgbClr val="172026"/>
+                </a:solidFill>
+              </a:defRPr>
+            </a:pPr>
+            <a:r>
+              <a:rPr sz="1350" b="1">
+                <a:solidFill>
+                  <a:srgbClr val="172026"/>
+                </a:solidFill>
+              </a:rPr>
+              <a:t>ALT04 手動執行警示評估</a:t>
+            </a:r>
+          </a:p>
+        </p:txBody>
+      </p:sp>
+      <p:sp>
+        <p:nvSpPr>
+          <p:cNvPr id="23" name="">
+            <a:extLst xmlns:a="http://schemas.openxmlformats.org/drawingml/2006/main">
+              <a:ext uri="{FF2B5EF4-FFF2-40B4-BE49-F238E27FC236}">
+                <a16:creationId xmlns:a16="http://schemas.microsoft.com/office/drawing/2014/main" id="{35EE9159-5F97-4EC3-BCA8-77FB278F4BA7}"/>
+              </a:ext>
+            </a:extLst>
+          </p:cNvPr>
+          <p:cNvSpPr>
+            <a:spLocks xmlns:a="http://schemas.openxmlformats.org/drawingml/2006/main" noGrp="1"/>
+          </p:cNvSpPr>
+          <p:nvPr/>
+        </p:nvSpPr>
+        <p:spPr>
+          <a:xfrm xmlns:a="http://schemas.openxmlformats.org/drawingml/2006/main" rot="0">
+            <a:off x="1752600" y="4381500"/>
+            <a:ext cx="2971800" cy="876300"/>
+          </a:xfrm>
+          <a:prstGeom xmlns:a="http://schemas.openxmlformats.org/drawingml/2006/main" prst="rect">
+            <a:avLst/>
+          </a:prstGeom>
+          <a:solidFill xmlns:a="http://schemas.openxmlformats.org/drawingml/2006/main">
+            <a:srgbClr val="000000">
+              <a:alpha val="0"/>
+            </a:srgbClr>
+          </a:solidFill>
+          <a:ln xmlns:a="http://schemas.openxmlformats.org/drawingml/2006/main" w="0">
+            <a:solidFill>
+              <a:srgbClr val="000000">
+                <a:alpha val="0"/>
+              </a:srgbClr>
+            </a:solidFill>
+            <a:prstDash val="solid"/>
+          </a:ln>
+        </p:spPr>
+        <p:txBody>
+          <a:bodyPr xmlns:a="http://schemas.openxmlformats.org/drawingml/2006/main" lIns="0" tIns="0" rIns="0" bIns="0" anchor="t"/>
+          <a:lstStyle xmlns:a="http://schemas.openxmlformats.org/drawingml/2006/main"/>
+          <a:p xmlns:a="http://schemas.openxmlformats.org/drawingml/2006/main">
+            <a:pPr algn="l">
+              <a:defRPr sz="1125" b="0">
+                <a:solidFill>
+                  <a:srgbClr val="4F5B66"/>
+                </a:solidFill>
+              </a:defRPr>
+            </a:pPr>
+            <a:r>
+              <a:rPr sz="1125" b="0">
+                <a:solidFill>
+                  <a:srgbClr val="4F5B66"/>
+                </a:solidFill>
+              </a:rPr>
+              <a:t>已完成。</a:t>
+            </a:r>
+          </a:p>
+          <a:p xmlns:a="http://schemas.openxmlformats.org/drawingml/2006/main">
+            <a:pPr algn="l">
+              <a:defRPr sz="1125" b="0">
+                <a:solidFill>
+                  <a:srgbClr val="4F5B66"/>
+                </a:solidFill>
+              </a:defRPr>
+            </a:pPr>
+            <a:r>
+              <a:rPr sz="1125" b="0">
+                <a:solidFill>
+                  <a:srgbClr val="4F5B66"/>
+                </a:solidFill>
+              </a:rPr>
+              <a:t>直接對應 evaluate route，能展示規則批次評估流程。</a:t>
+            </a:r>
+          </a:p>
+        </p:txBody>
+      </p:sp>
+      <p:sp>
+        <p:nvSpPr>
+          <p:cNvPr id="24" name="">
+            <a:extLst xmlns:a="http://schemas.openxmlformats.org/drawingml/2006/main">
+              <a:ext uri="{FF2B5EF4-FFF2-40B4-BE49-F238E27FC236}">
+                <a16:creationId xmlns:a16="http://schemas.microsoft.com/office/drawing/2014/main" id="{6621BDBE-C515-4229-80D2-54F55B83D445}"/>
+              </a:ext>
+            </a:extLst>
+          </p:cNvPr>
+          <p:cNvSpPr>
+            <a:spLocks xmlns:a="http://schemas.openxmlformats.org/drawingml/2006/main" noGrp="1"/>
+          </p:cNvSpPr>
+          <p:nvPr/>
+        </p:nvSpPr>
+        <p:spPr>
+          <a:xfrm xmlns:a="http://schemas.openxmlformats.org/drawingml/2006/main" rot="0">
+            <a:off x="5372100" y="3848100"/>
+            <a:ext cx="4648200" cy="1562100"/>
+          </a:xfrm>
+          <a:prstGeom xmlns:a="http://schemas.openxmlformats.org/drawingml/2006/main" prst="roundRect">
+            <a:avLst>
+              <a:gd name="adj" fmla="val 4878"/>
+            </a:avLst>
+          </a:prstGeom>
+          <a:solidFill xmlns:a="http://schemas.openxmlformats.org/drawingml/2006/main">
+            <a:srgbClr val="FFFDF8"/>
+          </a:solidFill>
+          <a:ln xmlns:a="http://schemas.openxmlformats.org/drawingml/2006/main" w="11430">
+            <a:solidFill>
+              <a:srgbClr val="23313B"/>
+            </a:solidFill>
+            <a:prstDash val="solid"/>
+          </a:ln>
+        </p:spPr>
+      </p:sp>
+      <p:sp>
+        <p:nvSpPr>
+          <p:cNvPr id="25" name="">
+            <a:extLst xmlns:a="http://schemas.openxmlformats.org/drawingml/2006/main">
+              <a:ext uri="{FF2B5EF4-FFF2-40B4-BE49-F238E27FC236}">
+                <a16:creationId xmlns:a16="http://schemas.microsoft.com/office/drawing/2014/main" id="{AA77288A-4B69-4315-8B2D-70583421717A}"/>
+              </a:ext>
+            </a:extLst>
+          </p:cNvPr>
+          <p:cNvSpPr>
+            <a:spLocks xmlns:a="http://schemas.openxmlformats.org/drawingml/2006/main" noGrp="1"/>
+          </p:cNvSpPr>
+          <p:nvPr/>
+        </p:nvSpPr>
+        <p:spPr>
+          <a:xfrm xmlns:a="http://schemas.openxmlformats.org/drawingml/2006/main" rot="0">
+            <a:off x="5372100" y="3848100"/>
+            <a:ext cx="4648200" cy="76200"/>
+          </a:xfrm>
+          <a:prstGeom xmlns:a="http://schemas.openxmlformats.org/drawingml/2006/main" prst="rect">
+            <a:avLst/>
+          </a:prstGeom>
+          <a:solidFill xmlns:a="http://schemas.openxmlformats.org/drawingml/2006/main">
+            <a:srgbClr val="0E6B52"/>
+          </a:solidFill>
+          <a:ln xmlns:a="http://schemas.openxmlformats.org/drawingml/2006/main" w="0">
+            <a:solidFill>
+              <a:srgbClr val="000000">
+                <a:alpha val="0"/>
+              </a:srgbClr>
+            </a:solidFill>
+            <a:prstDash val="solid"/>
+          </a:ln>
+        </p:spPr>
+      </p:sp>
+      <p:sp>
+        <p:nvSpPr>
+          <p:cNvPr id="26" name="">
+            <a:extLst xmlns:a="http://schemas.openxmlformats.org/drawingml/2006/main">
+              <a:ext uri="{FF2B5EF4-FFF2-40B4-BE49-F238E27FC236}">
+                <a16:creationId xmlns:a16="http://schemas.microsoft.com/office/drawing/2014/main" id="{40C2F351-DDA6-4965-BCE8-0BD6DBF41C3F}"/>
+              </a:ext>
+            </a:extLst>
+          </p:cNvPr>
+          <p:cNvSpPr>
+            <a:spLocks xmlns:a="http://schemas.openxmlformats.org/drawingml/2006/main" noGrp="1"/>
+          </p:cNvSpPr>
+          <p:nvPr/>
+        </p:nvSpPr>
+        <p:spPr>
+          <a:xfrm xmlns:a="http://schemas.openxmlformats.org/drawingml/2006/main" rot="0">
+            <a:off x="5562600" y="4019550"/>
+            <a:ext cx="4267200" cy="266700"/>
+          </a:xfrm>
+          <a:prstGeom xmlns:a="http://schemas.openxmlformats.org/drawingml/2006/main" prst="rect">
+            <a:avLst/>
+          </a:prstGeom>
+          <a:solidFill xmlns:a="http://schemas.openxmlformats.org/drawingml/2006/main">
+            <a:srgbClr val="000000">
+              <a:alpha val="0"/>
+            </a:srgbClr>
+          </a:solidFill>
+          <a:ln xmlns:a="http://schemas.openxmlformats.org/drawingml/2006/main" w="0">
+            <a:solidFill>
+              <a:srgbClr val="000000">
+                <a:alpha val="0"/>
+              </a:srgbClr>
+            </a:solidFill>
+            <a:prstDash val="solid"/>
+          </a:ln>
+        </p:spPr>
+        <p:txBody>
+          <a:bodyPr xmlns:a="http://schemas.openxmlformats.org/drawingml/2006/main" lIns="0" tIns="0" rIns="0" bIns="0" anchor="t"/>
+          <a:lstStyle xmlns:a="http://schemas.openxmlformats.org/drawingml/2006/main"/>
+          <a:p xmlns:a="http://schemas.openxmlformats.org/drawingml/2006/main">
+            <a:pPr algn="l">
+              <a:defRPr sz="1350" b="1">
+                <a:solidFill>
+                  <a:srgbClr val="172026"/>
+                </a:solidFill>
+              </a:defRPr>
+            </a:pPr>
+            <a:r>
+              <a:rPr sz="1350" b="1">
+                <a:solidFill>
+                  <a:srgbClr val="172026"/>
+                </a:solidFill>
+              </a:rPr>
+              <a:t>ALT05 比較不同回測參數結果</a:t>
+            </a:r>
+          </a:p>
+        </p:txBody>
+      </p:sp>
+      <p:sp>
+        <p:nvSpPr>
+          <p:cNvPr id="27" name="">
+            <a:extLst xmlns:a="http://schemas.openxmlformats.org/drawingml/2006/main">
+              <a:ext uri="{FF2B5EF4-FFF2-40B4-BE49-F238E27FC236}">
+                <a16:creationId xmlns:a16="http://schemas.microsoft.com/office/drawing/2014/main" id="{D7C26519-7599-4904-BB48-8F92D70F9381}"/>
+              </a:ext>
+            </a:extLst>
+          </p:cNvPr>
+          <p:cNvSpPr>
+            <a:spLocks xmlns:a="http://schemas.openxmlformats.org/drawingml/2006/main" noGrp="1"/>
+          </p:cNvSpPr>
+          <p:nvPr/>
+        </p:nvSpPr>
+        <p:spPr>
+          <a:xfrm xmlns:a="http://schemas.openxmlformats.org/drawingml/2006/main" rot="0">
+            <a:off x="5562600" y="4381500"/>
+            <a:ext cx="4267200" cy="876300"/>
+          </a:xfrm>
+          <a:prstGeom xmlns:a="http://schemas.openxmlformats.org/drawingml/2006/main" prst="rect">
+            <a:avLst/>
+          </a:prstGeom>
+          <a:solidFill xmlns:a="http://schemas.openxmlformats.org/drawingml/2006/main">
+            <a:srgbClr val="000000">
+              <a:alpha val="0"/>
+            </a:srgbClr>
+          </a:solidFill>
+          <a:ln xmlns:a="http://schemas.openxmlformats.org/drawingml/2006/main" w="0">
+            <a:solidFill>
+              <a:srgbClr val="000000">
+                <a:alpha val="0"/>
+              </a:srgbClr>
+            </a:solidFill>
+            <a:prstDash val="solid"/>
+          </a:ln>
+        </p:spPr>
+        <p:txBody>
+          <a:bodyPr xmlns:a="http://schemas.openxmlformats.org/drawingml/2006/main" lIns="0" tIns="0" rIns="0" bIns="0" anchor="t"/>
+          <a:lstStyle xmlns:a="http://schemas.openxmlformats.org/drawingml/2006/main"/>
+          <a:p xmlns:a="http://schemas.openxmlformats.org/drawingml/2006/main">
+            <a:pPr algn="l">
+              <a:defRPr sz="1125" b="0">
+                <a:solidFill>
+                  <a:srgbClr val="4F5B66"/>
+                </a:solidFill>
+              </a:defRPr>
+            </a:pPr>
+            <a:r>
+              <a:rPr sz="1125" b="0">
+                <a:solidFill>
+                  <a:srgbClr val="4F5B66"/>
+                </a:solidFill>
+              </a:rPr>
+              <a:t>尚未完成。</a:t>
+            </a:r>
+          </a:p>
+          <a:p xmlns:a="http://schemas.openxmlformats.org/drawingml/2006/main">
+            <a:pPr algn="l">
+              <a:defRPr sz="1125" b="0">
+                <a:solidFill>
+                  <a:srgbClr val="4F5B66"/>
+                </a:solidFill>
+              </a:defRPr>
+            </a:pPr>
+            <a:r>
+              <a:rPr sz="1125" b="0">
+                <a:solidFill>
+                  <a:srgbClr val="4F5B66"/>
+                </a:solidFill>
+              </a:rPr>
+              <a:t>若後續補做成功，最適合提升策略與報告物件的複雜度。</a:t>
+            </a:r>
+          </a:p>
+        </p:txBody>
+      </p:sp>
+      <p:sp>
+        <p:nvSpPr>
+          <p:cNvPr id="28" name="">
+            <a:extLst xmlns:a="http://schemas.openxmlformats.org/drawingml/2006/main">
+              <a:ext uri="{FF2B5EF4-FFF2-40B4-BE49-F238E27FC236}">
+                <a16:creationId xmlns:a16="http://schemas.microsoft.com/office/drawing/2014/main" id="{C6121963-C85D-4482-A5F4-C363E99A92EB}"/>
+              </a:ext>
+            </a:extLst>
+          </p:cNvPr>
+          <p:cNvSpPr>
+            <a:spLocks xmlns:a="http://schemas.openxmlformats.org/drawingml/2006/main" noGrp="1"/>
+          </p:cNvSpPr>
+          <p:nvPr/>
+        </p:nvSpPr>
+        <p:spPr>
+          <a:xfrm xmlns:a="http://schemas.openxmlformats.org/drawingml/2006/main" rot="0">
+            <a:off x="781050" y="5810250"/>
+            <a:ext cx="10763250" cy="533400"/>
+          </a:xfrm>
+          <a:prstGeom xmlns:a="http://schemas.openxmlformats.org/drawingml/2006/main" prst="rect">
+            <a:avLst/>
+          </a:prstGeom>
+          <a:solidFill xmlns:a="http://schemas.openxmlformats.org/drawingml/2006/main">
+            <a:srgbClr val="000000">
+              <a:alpha val="0"/>
+            </a:srgbClr>
+          </a:solidFill>
+          <a:ln xmlns:a="http://schemas.openxmlformats.org/drawingml/2006/main" w="0">
+            <a:solidFill>
+              <a:srgbClr val="000000">
+                <a:alpha val="0"/>
+              </a:srgbClr>
+            </a:solidFill>
+            <a:prstDash val="solid"/>
+          </a:ln>
+        </p:spPr>
+        <p:txBody>
+          <a:bodyPr xmlns:a="http://schemas.openxmlformats.org/drawingml/2006/main" lIns="0" tIns="0" rIns="0" bIns="0" anchor="t"/>
+          <a:lstStyle xmlns:a="http://schemas.openxmlformats.org/drawingml/2006/main"/>
+          <a:p xmlns:a="http://schemas.openxmlformats.org/drawingml/2006/main">
+            <a:pPr algn="l">
+              <a:defRPr sz="1125" b="0">
+                <a:solidFill>
+                  <a:srgbClr val="172026"/>
+                </a:solidFill>
+              </a:defRPr>
+            </a:pPr>
+            <a:r>
+              <a:rPr sz="1125" b="0">
+                <a:solidFill>
+                  <a:srgbClr val="172026"/>
+                </a:solidFill>
+              </a:rPr>
+              <a:t>替換建議：</a:t>
+            </a:r>
+          </a:p>
+          <a:p xmlns:a="http://schemas.openxmlformats.org/drawingml/2006/main">
+            <a:pPr algn="l">
+              <a:defRPr sz="1125" b="0">
+                <a:solidFill>
+                  <a:srgbClr val="172026"/>
+                </a:solidFill>
+              </a:defRPr>
+            </a:pPr>
+            <a:r>
+              <a:rPr sz="1125" b="0">
+                <a:solidFill>
+                  <a:srgbClr val="172026"/>
+                </a:solidFill>
+              </a:rPr>
+              <a:t>1. 若「查看通知與標記已讀」太像結果頁，可改成「手動執行警示評估」。</a:t>
+            </a:r>
+          </a:p>
+          <a:p xmlns:a="http://schemas.openxmlformats.org/drawingml/2006/main">
+            <a:pPr algn="l">
+              <a:defRPr sz="1125" b="0">
+                <a:solidFill>
+                  <a:srgbClr val="172026"/>
+                </a:solidFill>
+              </a:defRPr>
+            </a:pPr>
+            <a:r>
+              <a:rPr sz="1125" b="0">
+                <a:solidFill>
+                  <a:srgbClr val="172026"/>
+                </a:solidFill>
+              </a:rPr>
+              <a:t>2. 若「管理投資組合」太大，可拆成「查看投資組合摘要」。</a:t>
+            </a:r>
+          </a:p>
+          <a:p xmlns:a="http://schemas.openxmlformats.org/drawingml/2006/main">
+            <a:pPr algn="l">
+              <a:defRPr sz="1125" b="0">
+                <a:solidFill>
+                  <a:srgbClr val="172026"/>
+                </a:solidFill>
+              </a:defRPr>
+            </a:pPr>
+            <a:r>
+              <a:rPr sz="1125" b="0">
+                <a:solidFill>
+                  <a:srgbClr val="172026"/>
+                </a:solidFill>
+              </a:rPr>
+              <a:t>3. 若「更新市場資料」太偏維護，可改成「查看投資組合交易紀錄」。</a:t>
+            </a:r>
+          </a:p>
+        </p:txBody>
+      </p:sp>
+      <p:sp>
+        <p:nvSpPr>
+          <p:cNvPr id="29" name="">
+            <a:extLst xmlns:a="http://schemas.openxmlformats.org/drawingml/2006/main">
+              <a:ext uri="{FF2B5EF4-FFF2-40B4-BE49-F238E27FC236}">
+                <a16:creationId xmlns:a16="http://schemas.microsoft.com/office/drawing/2014/main" id="{8504C146-8ABF-4B6C-B93C-2A321CA90AE3}"/>
+              </a:ext>
+            </a:extLst>
+          </p:cNvPr>
+          <p:cNvSpPr>
+            <a:spLocks xmlns:a="http://schemas.openxmlformats.org/drawingml/2006/main" noGrp="1"/>
+          </p:cNvSpPr>
+          <p:nvPr/>
+        </p:nvSpPr>
+        <p:spPr>
+          <a:xfrm xmlns:a="http://schemas.openxmlformats.org/drawingml/2006/main" rot="0">
+            <a:off x="609600" y="6534150"/>
+            <a:ext cx="9715500" cy="171450"/>
+          </a:xfrm>
+          <a:prstGeom xmlns:a="http://schemas.openxmlformats.org/drawingml/2006/main" prst="rect">
+            <a:avLst/>
+          </a:prstGeom>
+          <a:solidFill xmlns:a="http://schemas.openxmlformats.org/drawingml/2006/main">
+            <a:srgbClr val="000000">
+              <a:alpha val="0"/>
+            </a:srgbClr>
+          </a:solidFill>
+          <a:ln xmlns:a="http://schemas.openxmlformats.org/drawingml/2006/main" w="0">
+            <a:solidFill>
+              <a:srgbClr val="000000">
+                <a:alpha val="0"/>
+              </a:srgbClr>
+            </a:solidFill>
+            <a:prstDash val="solid"/>
+          </a:ln>
+        </p:spPr>
+        <p:txBody>
+          <a:bodyPr xmlns:a="http://schemas.openxmlformats.org/drawingml/2006/main" lIns="0" tIns="0" rIns="0" bIns="0" anchor="t"/>
+          <a:lstStyle xmlns:a="http://schemas.openxmlformats.org/drawingml/2006/main"/>
+          <a:p xmlns:a="http://schemas.openxmlformats.org/drawingml/2006/main">
+            <a:pPr algn="l">
+              <a:defRPr sz="750" b="0">
+                <a:solidFill>
+                  <a:srgbClr val="4F5B66"/>
+                </a:solidFill>
+              </a:defRPr>
+            </a:pPr>
+            <a:r>
+              <a:rPr sz="750" b="0">
+                <a:solidFill>
+                  <a:srgbClr val="4F5B66"/>
+                </a:solidFill>
+              </a:rPr>
+              <a:t>此頁可放在最後作為口頭備援，不一定要逐項詳細講解。</a:t>
+            </a:r>
+          </a:p>
+        </p:txBody>
+      </p:sp>
+    </p:spTree>
+    <p:extLst>
+      <p:ext uri="{BB962C8B-B14F-4D97-AF65-F5344CB8AC3E}">
+        <p14:creationId xmlns:p14="http://schemas.microsoft.com/office/powerpoint/2010/main" val="1944784840"/>
       </p:ext>
     </p:extLst>
   </p:cSld>
@@ -11363,7 +12986,7 @@
           <p:cNvPr id="1" name="">
             <a:extLst xmlns:a="http://schemas.openxmlformats.org/drawingml/2006/main">
               <a:ext uri="{FF2B5EF4-FFF2-40B4-BE49-F238E27FC236}">
-                <a16:creationId xmlns:a16="http://schemas.microsoft.com/office/drawing/2014/main" id="{D5CEA6DB-41C6-4745-BDB8-E82ED453AD3F}"/>
+                <a16:creationId xmlns:a16="http://schemas.microsoft.com/office/drawing/2014/main" id="{78457EDD-0E97-435D-A620-0DB20DD6F1E9}"/>
               </a:ext>
             </a:extLst>
           </p:cNvPr>
@@ -11398,7 +13021,7 @@
           <p:cNvPr id="2" name="">
             <a:extLst xmlns:a="http://schemas.openxmlformats.org/drawingml/2006/main">
               <a:ext uri="{FF2B5EF4-FFF2-40B4-BE49-F238E27FC236}">
-                <a16:creationId xmlns:a16="http://schemas.microsoft.com/office/drawing/2014/main" id="{EC725F68-BD67-42BA-8D31-788A6442822A}"/>
+                <a16:creationId xmlns:a16="http://schemas.microsoft.com/office/drawing/2014/main" id="{11CA9D1B-2A4E-4209-9FF9-03C2769BB81A}"/>
               </a:ext>
             </a:extLst>
           </p:cNvPr>
@@ -11433,7 +13056,7 @@
           <p:cNvPr id="3" name="">
             <a:extLst xmlns:a="http://schemas.openxmlformats.org/drawingml/2006/main">
               <a:ext uri="{FF2B5EF4-FFF2-40B4-BE49-F238E27FC236}">
-                <a16:creationId xmlns:a16="http://schemas.microsoft.com/office/drawing/2014/main" id="{D193B621-7587-4AB5-90E7-DC8BCBE8BFFD}"/>
+                <a16:creationId xmlns:a16="http://schemas.microsoft.com/office/drawing/2014/main" id="{91B627FA-76F2-41C7-884F-06646C2733C7}"/>
               </a:ext>
             </a:extLst>
           </p:cNvPr>
@@ -11491,7 +13114,7 @@
           <p:cNvPr id="4" name="">
             <a:extLst xmlns:a="http://schemas.openxmlformats.org/drawingml/2006/main">
               <a:ext uri="{FF2B5EF4-FFF2-40B4-BE49-F238E27FC236}">
-                <a16:creationId xmlns:a16="http://schemas.microsoft.com/office/drawing/2014/main" id="{2AC08287-395B-409E-A1B0-C7EEFA2D9026}"/>
+                <a16:creationId xmlns:a16="http://schemas.microsoft.com/office/drawing/2014/main" id="{8CE73B35-A132-4CD3-9885-C5F900A13E27}"/>
               </a:ext>
             </a:extLst>
           </p:cNvPr>
@@ -11549,7 +13172,7 @@
           <p:cNvPr id="5" name="">
             <a:extLst xmlns:a="http://schemas.openxmlformats.org/drawingml/2006/main">
               <a:ext uri="{FF2B5EF4-FFF2-40B4-BE49-F238E27FC236}">
-                <a16:creationId xmlns:a16="http://schemas.microsoft.com/office/drawing/2014/main" id="{B35E4DD7-2B42-4E57-9093-D066F204E3A5}"/>
+                <a16:creationId xmlns:a16="http://schemas.microsoft.com/office/drawing/2014/main" id="{85ABA2DA-264D-4ED8-95CC-3A5C36DBC4E2}"/>
               </a:ext>
             </a:extLst>
           </p:cNvPr>
@@ -11584,7 +13207,7 @@
           <p:cNvPr id="6" name="">
             <a:extLst xmlns:a="http://schemas.openxmlformats.org/drawingml/2006/main">
               <a:ext uri="{FF2B5EF4-FFF2-40B4-BE49-F238E27FC236}">
-                <a16:creationId xmlns:a16="http://schemas.microsoft.com/office/drawing/2014/main" id="{ABE8A6E3-EE38-4C00-AC8B-5FE1D7351BE2}"/>
+                <a16:creationId xmlns:a16="http://schemas.microsoft.com/office/drawing/2014/main" id="{62E26BEA-3CF7-4B19-85FB-6ACBBC734B23}"/>
               </a:ext>
             </a:extLst>
           </p:cNvPr>
@@ -11642,7 +13265,7 @@
           <p:cNvPr id="7" name="">
             <a:extLst xmlns:a="http://schemas.openxmlformats.org/drawingml/2006/main">
               <a:ext uri="{FF2B5EF4-FFF2-40B4-BE49-F238E27FC236}">
-                <a16:creationId xmlns:a16="http://schemas.microsoft.com/office/drawing/2014/main" id="{D37E2362-7936-4712-A4B4-918427234B5D}"/>
+                <a16:creationId xmlns:a16="http://schemas.microsoft.com/office/drawing/2014/main" id="{791569E1-9646-4487-B6C4-906FEEAC2F72}"/>
               </a:ext>
             </a:extLst>
           </p:cNvPr>
@@ -11700,7 +13323,7 @@
           <p:cNvPr id="8" name="">
             <a:extLst xmlns:a="http://schemas.openxmlformats.org/drawingml/2006/main">
               <a:ext uri="{FF2B5EF4-FFF2-40B4-BE49-F238E27FC236}">
-                <a16:creationId xmlns:a16="http://schemas.microsoft.com/office/drawing/2014/main" id="{0EE3D4BF-01D3-4992-B4A4-963577B147FA}"/>
+                <a16:creationId xmlns:a16="http://schemas.microsoft.com/office/drawing/2014/main" id="{AB5F0BBE-4C85-4729-BDC5-629C9E10B1A4}"/>
               </a:ext>
             </a:extLst>
           </p:cNvPr>
@@ -11735,7 +13358,7 @@
           <p:cNvPr id="9" name="">
             <a:extLst xmlns:a="http://schemas.openxmlformats.org/drawingml/2006/main">
               <a:ext uri="{FF2B5EF4-FFF2-40B4-BE49-F238E27FC236}">
-                <a16:creationId xmlns:a16="http://schemas.microsoft.com/office/drawing/2014/main" id="{A963A349-13CB-4009-A9A2-BB698D76C318}"/>
+                <a16:creationId xmlns:a16="http://schemas.microsoft.com/office/drawing/2014/main" id="{961AFF1C-C856-47E9-88D7-D9A0DE9D67BA}"/>
               </a:ext>
             </a:extLst>
           </p:cNvPr>
@@ -11770,7 +13393,7 @@
           <p:cNvPr id="10" name="">
             <a:extLst xmlns:a="http://schemas.openxmlformats.org/drawingml/2006/main">
               <a:ext uri="{FF2B5EF4-FFF2-40B4-BE49-F238E27FC236}">
-                <a16:creationId xmlns:a16="http://schemas.microsoft.com/office/drawing/2014/main" id="{5990B696-3524-4CE7-9D31-1C2FFD594720}"/>
+                <a16:creationId xmlns:a16="http://schemas.microsoft.com/office/drawing/2014/main" id="{C0DCE36C-517C-4923-B5A8-6E98CFEFFAD5}"/>
               </a:ext>
             </a:extLst>
           </p:cNvPr>
@@ -11828,7 +13451,7 @@
           <p:cNvPr id="11" name="">
             <a:extLst xmlns:a="http://schemas.openxmlformats.org/drawingml/2006/main">
               <a:ext uri="{FF2B5EF4-FFF2-40B4-BE49-F238E27FC236}">
-                <a16:creationId xmlns:a16="http://schemas.microsoft.com/office/drawing/2014/main" id="{EAFEB619-3E77-49F7-9BF8-EEFE78F8FD1C}"/>
+                <a16:creationId xmlns:a16="http://schemas.microsoft.com/office/drawing/2014/main" id="{3DC8E44B-F9BF-45AC-BC37-CAA9F3633618}"/>
               </a:ext>
             </a:extLst>
           </p:cNvPr>
@@ -11937,7 +13560,7 @@
           <p:cNvPr id="12" name="">
             <a:extLst xmlns:a="http://schemas.openxmlformats.org/drawingml/2006/main">
               <a:ext uri="{FF2B5EF4-FFF2-40B4-BE49-F238E27FC236}">
-                <a16:creationId xmlns:a16="http://schemas.microsoft.com/office/drawing/2014/main" id="{61C08925-6DBC-4127-A0D1-A9E1929C2446}"/>
+                <a16:creationId xmlns:a16="http://schemas.microsoft.com/office/drawing/2014/main" id="{61791181-E356-4FF4-833C-EFAAB230BC8E}"/>
               </a:ext>
             </a:extLst>
           </p:cNvPr>
@@ -11972,7 +13595,7 @@
           <p:cNvPr id="13" name="">
             <a:extLst xmlns:a="http://schemas.openxmlformats.org/drawingml/2006/main">
               <a:ext uri="{FF2B5EF4-FFF2-40B4-BE49-F238E27FC236}">
-                <a16:creationId xmlns:a16="http://schemas.microsoft.com/office/drawing/2014/main" id="{E1E06E2D-CD10-4FEE-A9FC-03AB5BAEEEE8}"/>
+                <a16:creationId xmlns:a16="http://schemas.microsoft.com/office/drawing/2014/main" id="{5DAE0CFE-FAC0-45BD-8D4D-AF19646593D3}"/>
               </a:ext>
             </a:extLst>
           </p:cNvPr>
@@ -12007,7 +13630,7 @@
           <p:cNvPr id="14" name="">
             <a:extLst xmlns:a="http://schemas.openxmlformats.org/drawingml/2006/main">
               <a:ext uri="{FF2B5EF4-FFF2-40B4-BE49-F238E27FC236}">
-                <a16:creationId xmlns:a16="http://schemas.microsoft.com/office/drawing/2014/main" id="{ED2AA7EE-A711-4840-A011-D82B00D05119}"/>
+                <a16:creationId xmlns:a16="http://schemas.microsoft.com/office/drawing/2014/main" id="{0CF07DF4-07CD-40B8-98E6-05C78E51EBC1}"/>
               </a:ext>
             </a:extLst>
           </p:cNvPr>
@@ -12065,7 +13688,7 @@
           <p:cNvPr id="15" name="">
             <a:extLst xmlns:a="http://schemas.openxmlformats.org/drawingml/2006/main">
               <a:ext uri="{FF2B5EF4-FFF2-40B4-BE49-F238E27FC236}">
-                <a16:creationId xmlns:a16="http://schemas.microsoft.com/office/drawing/2014/main" id="{BF76A9DB-CD75-40F2-AC0C-54E299228A3F}"/>
+                <a16:creationId xmlns:a16="http://schemas.microsoft.com/office/drawing/2014/main" id="{5E07A434-6D04-4FC3-8A53-5FD166C3D13D}"/>
               </a:ext>
             </a:extLst>
           </p:cNvPr>
@@ -12145,7 +13768,7 @@
           <p:cNvPr id="16" name="">
             <a:extLst xmlns:a="http://schemas.openxmlformats.org/drawingml/2006/main">
               <a:ext uri="{FF2B5EF4-FFF2-40B4-BE49-F238E27FC236}">
-                <a16:creationId xmlns:a16="http://schemas.microsoft.com/office/drawing/2014/main" id="{55CB72E4-2EDD-4412-AAE4-AC5E57ACFAFE}"/>
+                <a16:creationId xmlns:a16="http://schemas.microsoft.com/office/drawing/2014/main" id="{BFD6D13F-3707-4492-9E7C-9C562515D237}"/>
               </a:ext>
             </a:extLst>
           </p:cNvPr>
@@ -12180,7 +13803,7 @@
           <p:cNvPr id="17" name="">
             <a:extLst xmlns:a="http://schemas.openxmlformats.org/drawingml/2006/main">
               <a:ext uri="{FF2B5EF4-FFF2-40B4-BE49-F238E27FC236}">
-                <a16:creationId xmlns:a16="http://schemas.microsoft.com/office/drawing/2014/main" id="{19FF7075-0ACF-4CD2-83CE-4C0BBDA3A9D9}"/>
+                <a16:creationId xmlns:a16="http://schemas.microsoft.com/office/drawing/2014/main" id="{B368A65C-7AEF-4F31-9A7A-1C0E7A502557}"/>
               </a:ext>
             </a:extLst>
           </p:cNvPr>
@@ -12215,7 +13838,7 @@
           <p:cNvPr id="18" name="">
             <a:extLst xmlns:a="http://schemas.openxmlformats.org/drawingml/2006/main">
               <a:ext uri="{FF2B5EF4-FFF2-40B4-BE49-F238E27FC236}">
-                <a16:creationId xmlns:a16="http://schemas.microsoft.com/office/drawing/2014/main" id="{6ED5977E-CB29-4973-8E73-C2489DD246BD}"/>
+                <a16:creationId xmlns:a16="http://schemas.microsoft.com/office/drawing/2014/main" id="{A7B86CC7-9F24-4B9D-A3F4-D7B0B912919F}"/>
               </a:ext>
             </a:extLst>
           </p:cNvPr>
@@ -12273,7 +13896,7 @@
           <p:cNvPr id="19" name="">
             <a:extLst xmlns:a="http://schemas.openxmlformats.org/drawingml/2006/main">
               <a:ext uri="{FF2B5EF4-FFF2-40B4-BE49-F238E27FC236}">
-                <a16:creationId xmlns:a16="http://schemas.microsoft.com/office/drawing/2014/main" id="{A1BDDBF1-5E08-4088-B646-9DBAFC377B0D}"/>
+                <a16:creationId xmlns:a16="http://schemas.microsoft.com/office/drawing/2014/main" id="{4FFEF71A-CED7-40D6-A55E-41246400CD7C}"/>
               </a:ext>
             </a:extLst>
           </p:cNvPr>
@@ -12382,7 +14005,7 @@
           <p:cNvPr id="20" name="">
             <a:extLst xmlns:a="http://schemas.openxmlformats.org/drawingml/2006/main">
               <a:ext uri="{FF2B5EF4-FFF2-40B4-BE49-F238E27FC236}">
-                <a16:creationId xmlns:a16="http://schemas.microsoft.com/office/drawing/2014/main" id="{AA2C119C-59B2-47E5-BEA9-BCB3DE4E5264}"/>
+                <a16:creationId xmlns:a16="http://schemas.microsoft.com/office/drawing/2014/main" id="{618A5BB1-B453-41CE-8FCF-72147ECDAE4E}"/>
               </a:ext>
             </a:extLst>
           </p:cNvPr>
@@ -12417,7 +14040,7 @@
           <p:cNvPr id="21" name="">
             <a:extLst xmlns:a="http://schemas.openxmlformats.org/drawingml/2006/main">
               <a:ext uri="{FF2B5EF4-FFF2-40B4-BE49-F238E27FC236}">
-                <a16:creationId xmlns:a16="http://schemas.microsoft.com/office/drawing/2014/main" id="{D656A84B-6AD5-4182-8398-9E5F1E2CA4D6}"/>
+                <a16:creationId xmlns:a16="http://schemas.microsoft.com/office/drawing/2014/main" id="{B237A0CB-5ED8-490A-850A-9058CB9C4C28}"/>
               </a:ext>
             </a:extLst>
           </p:cNvPr>
@@ -12492,7 +14115,7 @@
           <p:cNvPr id="22" name="">
             <a:extLst xmlns:a="http://schemas.openxmlformats.org/drawingml/2006/main">
               <a:ext uri="{FF2B5EF4-FFF2-40B4-BE49-F238E27FC236}">
-                <a16:creationId xmlns:a16="http://schemas.microsoft.com/office/drawing/2014/main" id="{79D867DE-96FE-4336-9C21-F6F0BE7B2551}"/>
+                <a16:creationId xmlns:a16="http://schemas.microsoft.com/office/drawing/2014/main" id="{203F3036-8A1B-49CE-A5C1-B2DADA8FA277}"/>
               </a:ext>
             </a:extLst>
           </p:cNvPr>
@@ -12525,7 +14148,7 @@
           <p:cNvPr id="23" name="">
             <a:extLst xmlns:a="http://schemas.openxmlformats.org/drawingml/2006/main">
               <a:ext uri="{FF2B5EF4-FFF2-40B4-BE49-F238E27FC236}">
-                <a16:creationId xmlns:a16="http://schemas.microsoft.com/office/drawing/2014/main" id="{5B41C888-9D97-4886-B440-4BA1E8BB31BF}"/>
+                <a16:creationId xmlns:a16="http://schemas.microsoft.com/office/drawing/2014/main" id="{66F7E2F5-2DB4-4A65-AE04-84763C848510}"/>
               </a:ext>
             </a:extLst>
           </p:cNvPr>
@@ -12560,7 +14183,7 @@
           <p:cNvPr id="24" name="">
             <a:extLst xmlns:a="http://schemas.openxmlformats.org/drawingml/2006/main">
               <a:ext uri="{FF2B5EF4-FFF2-40B4-BE49-F238E27FC236}">
-                <a16:creationId xmlns:a16="http://schemas.microsoft.com/office/drawing/2014/main" id="{86F874B0-BDFF-4D21-8168-1D603AEB9B93}"/>
+                <a16:creationId xmlns:a16="http://schemas.microsoft.com/office/drawing/2014/main" id="{C2365F61-45E8-4E1C-A5DD-D8C7AB71C960}"/>
               </a:ext>
             </a:extLst>
           </p:cNvPr>
@@ -12635,7 +14258,7 @@
           <p:cNvPr id="25" name="">
             <a:extLst xmlns:a="http://schemas.openxmlformats.org/drawingml/2006/main">
               <a:ext uri="{FF2B5EF4-FFF2-40B4-BE49-F238E27FC236}">
-                <a16:creationId xmlns:a16="http://schemas.microsoft.com/office/drawing/2014/main" id="{F1990CD2-7869-45CF-B8E0-155A9B5D485D}"/>
+                <a16:creationId xmlns:a16="http://schemas.microsoft.com/office/drawing/2014/main" id="{0F7AEEE2-C4E4-44DC-935A-1EA723E43D08}"/>
               </a:ext>
             </a:extLst>
           </p:cNvPr>
@@ -12668,7 +14291,7 @@
           <p:cNvPr id="26" name="">
             <a:extLst xmlns:a="http://schemas.openxmlformats.org/drawingml/2006/main">
               <a:ext uri="{FF2B5EF4-FFF2-40B4-BE49-F238E27FC236}">
-                <a16:creationId xmlns:a16="http://schemas.microsoft.com/office/drawing/2014/main" id="{56936831-C9D4-46F8-9A82-14124A515E71}"/>
+                <a16:creationId xmlns:a16="http://schemas.microsoft.com/office/drawing/2014/main" id="{34986B08-ED06-4963-9042-5403E769AF2F}"/>
               </a:ext>
             </a:extLst>
           </p:cNvPr>
@@ -12703,7 +14326,7 @@
           <p:cNvPr id="27" name="">
             <a:extLst xmlns:a="http://schemas.openxmlformats.org/drawingml/2006/main">
               <a:ext uri="{FF2B5EF4-FFF2-40B4-BE49-F238E27FC236}">
-                <a16:creationId xmlns:a16="http://schemas.microsoft.com/office/drawing/2014/main" id="{6143B022-3BE7-47EB-84B6-593AD1A6FFD3}"/>
+                <a16:creationId xmlns:a16="http://schemas.microsoft.com/office/drawing/2014/main" id="{DF38AEC1-108F-4EAA-A912-8A36E7367043}"/>
               </a:ext>
             </a:extLst>
           </p:cNvPr>
@@ -12778,7 +14401,7 @@
           <p:cNvPr id="28" name="">
             <a:extLst xmlns:a="http://schemas.openxmlformats.org/drawingml/2006/main">
               <a:ext uri="{FF2B5EF4-FFF2-40B4-BE49-F238E27FC236}">
-                <a16:creationId xmlns:a16="http://schemas.microsoft.com/office/drawing/2014/main" id="{4391B75A-6912-4EFE-BC0B-3280037BE911}"/>
+                <a16:creationId xmlns:a16="http://schemas.microsoft.com/office/drawing/2014/main" id="{B3E05B27-E176-435B-B717-F49C91ABE861}"/>
               </a:ext>
             </a:extLst>
           </p:cNvPr>
@@ -12834,7 +14457,7 @@
     </p:spTree>
     <p:extLst>
       <p:ext uri="{BB962C8B-B14F-4D97-AF65-F5344CB8AC3E}">
-        <p14:creationId xmlns:p14="http://schemas.microsoft.com/office/powerpoint/2010/main" val="1808881847"/>
+        <p14:creationId xmlns:p14="http://schemas.microsoft.com/office/powerpoint/2010/main" val="309403498"/>
       </p:ext>
     </p:extLst>
   </p:cSld>
@@ -12865,7 +14488,7 @@
           <p:cNvPr id="1" name="">
             <a:extLst xmlns:a="http://schemas.openxmlformats.org/drawingml/2006/main">
               <a:ext uri="{FF2B5EF4-FFF2-40B4-BE49-F238E27FC236}">
-                <a16:creationId xmlns:a16="http://schemas.microsoft.com/office/drawing/2014/main" id="{FCBAE3DA-1708-464E-8FBD-82C5A57F1DF8}"/>
+                <a16:creationId xmlns:a16="http://schemas.microsoft.com/office/drawing/2014/main" id="{C8C9DF52-20A8-4C14-BD84-F4E6A7111E23}"/>
               </a:ext>
             </a:extLst>
           </p:cNvPr>
@@ -12900,7 +14523,7 @@
           <p:cNvPr id="2" name="">
             <a:extLst xmlns:a="http://schemas.openxmlformats.org/drawingml/2006/main">
               <a:ext uri="{FF2B5EF4-FFF2-40B4-BE49-F238E27FC236}">
-                <a16:creationId xmlns:a16="http://schemas.microsoft.com/office/drawing/2014/main" id="{D2513BEB-2318-4FED-A23A-5030879427F3}"/>
+                <a16:creationId xmlns:a16="http://schemas.microsoft.com/office/drawing/2014/main" id="{C1FA605B-9FC5-43E2-B459-8887F3ECE73F}"/>
               </a:ext>
             </a:extLst>
           </p:cNvPr>
@@ -12935,7 +14558,7 @@
           <p:cNvPr id="3" name="">
             <a:extLst xmlns:a="http://schemas.openxmlformats.org/drawingml/2006/main">
               <a:ext uri="{FF2B5EF4-FFF2-40B4-BE49-F238E27FC236}">
-                <a16:creationId xmlns:a16="http://schemas.microsoft.com/office/drawing/2014/main" id="{2E9E2FEE-D219-4E27-829E-61CF01E9C0CB}"/>
+                <a16:creationId xmlns:a16="http://schemas.microsoft.com/office/drawing/2014/main" id="{169E2D2B-75FB-40BE-A6FF-FA955513E64D}"/>
               </a:ext>
             </a:extLst>
           </p:cNvPr>
@@ -12993,7 +14616,7 @@
           <p:cNvPr id="4" name="">
             <a:extLst xmlns:a="http://schemas.openxmlformats.org/drawingml/2006/main">
               <a:ext uri="{FF2B5EF4-FFF2-40B4-BE49-F238E27FC236}">
-                <a16:creationId xmlns:a16="http://schemas.microsoft.com/office/drawing/2014/main" id="{F8D4F6B5-25FB-40FD-9AD5-A9CEAAB277ED}"/>
+                <a16:creationId xmlns:a16="http://schemas.microsoft.com/office/drawing/2014/main" id="{FA0779B4-EF98-49DF-BAD1-7DEE511F883A}"/>
               </a:ext>
             </a:extLst>
           </p:cNvPr>
@@ -13051,7 +14674,7 @@
           <p:cNvPr id="5" name="">
             <a:extLst xmlns:a="http://schemas.openxmlformats.org/drawingml/2006/main">
               <a:ext uri="{FF2B5EF4-FFF2-40B4-BE49-F238E27FC236}">
-                <a16:creationId xmlns:a16="http://schemas.microsoft.com/office/drawing/2014/main" id="{4C335FCF-751D-420B-BD19-70ADE0BD07CD}"/>
+                <a16:creationId xmlns:a16="http://schemas.microsoft.com/office/drawing/2014/main" id="{B3E366BB-CD1B-4C0A-A3DE-B2A0FCD55C8C}"/>
               </a:ext>
             </a:extLst>
           </p:cNvPr>
@@ -13086,7 +14709,7 @@
           <p:cNvPr id="6" name="">
             <a:extLst xmlns:a="http://schemas.openxmlformats.org/drawingml/2006/main">
               <a:ext uri="{FF2B5EF4-FFF2-40B4-BE49-F238E27FC236}">
-                <a16:creationId xmlns:a16="http://schemas.microsoft.com/office/drawing/2014/main" id="{2C732747-7EC2-4638-84B2-59C2AB7F014B}"/>
+                <a16:creationId xmlns:a16="http://schemas.microsoft.com/office/drawing/2014/main" id="{A217A8D3-365D-4099-95E9-FAB5124F3305}"/>
               </a:ext>
             </a:extLst>
           </p:cNvPr>
@@ -13144,7 +14767,7 @@
           <p:cNvPr id="7" name="">
             <a:extLst xmlns:a="http://schemas.openxmlformats.org/drawingml/2006/main">
               <a:ext uri="{FF2B5EF4-FFF2-40B4-BE49-F238E27FC236}">
-                <a16:creationId xmlns:a16="http://schemas.microsoft.com/office/drawing/2014/main" id="{C8836F26-9230-4F00-B7A3-784BD150109A}"/>
+                <a16:creationId xmlns:a16="http://schemas.microsoft.com/office/drawing/2014/main" id="{22D9E7FD-4BC4-4E18-94A6-1DC6CC44990A}"/>
               </a:ext>
             </a:extLst>
           </p:cNvPr>
@@ -13202,7 +14825,7 @@
           <p:cNvPr id="8" name="">
             <a:extLst xmlns:a="http://schemas.openxmlformats.org/drawingml/2006/main">
               <a:ext uri="{FF2B5EF4-FFF2-40B4-BE49-F238E27FC236}">
-                <a16:creationId xmlns:a16="http://schemas.microsoft.com/office/drawing/2014/main" id="{05CA4AE1-9C51-4D7A-810E-9C796811DE42}"/>
+                <a16:creationId xmlns:a16="http://schemas.microsoft.com/office/drawing/2014/main" id="{01D4FAA0-7D93-4F1A-B71E-FAE7DCBFD12C}"/>
               </a:ext>
             </a:extLst>
           </p:cNvPr>
@@ -13237,7 +14860,7 @@
           <p:cNvPr id="9" name="">
             <a:extLst xmlns:a="http://schemas.openxmlformats.org/drawingml/2006/main">
               <a:ext uri="{FF2B5EF4-FFF2-40B4-BE49-F238E27FC236}">
-                <a16:creationId xmlns:a16="http://schemas.microsoft.com/office/drawing/2014/main" id="{05F35A28-854B-44D0-84E7-5D1FE0F02743}"/>
+                <a16:creationId xmlns:a16="http://schemas.microsoft.com/office/drawing/2014/main" id="{783B7081-C060-48E7-ABA6-AE82CAD47F15}"/>
               </a:ext>
             </a:extLst>
           </p:cNvPr>
@@ -13272,7 +14895,7 @@
           <p:cNvPr id="10" name="">
             <a:extLst xmlns:a="http://schemas.openxmlformats.org/drawingml/2006/main">
               <a:ext uri="{FF2B5EF4-FFF2-40B4-BE49-F238E27FC236}">
-                <a16:creationId xmlns:a16="http://schemas.microsoft.com/office/drawing/2014/main" id="{0717D541-C581-435C-962D-D6071E794ACA}"/>
+                <a16:creationId xmlns:a16="http://schemas.microsoft.com/office/drawing/2014/main" id="{36585DD5-0D13-4760-8F85-1FF1356942EA}"/>
               </a:ext>
             </a:extLst>
           </p:cNvPr>
@@ -13330,7 +14953,7 @@
           <p:cNvPr id="11" name="">
             <a:extLst xmlns:a="http://schemas.openxmlformats.org/drawingml/2006/main">
               <a:ext uri="{FF2B5EF4-FFF2-40B4-BE49-F238E27FC236}">
-                <a16:creationId xmlns:a16="http://schemas.microsoft.com/office/drawing/2014/main" id="{50DF9398-723C-4B37-8333-AF444CCC32A7}"/>
+                <a16:creationId xmlns:a16="http://schemas.microsoft.com/office/drawing/2014/main" id="{F47FB737-F765-4E6C-BEEE-2728F31F96CA}"/>
               </a:ext>
             </a:extLst>
           </p:cNvPr>
@@ -13422,7 +15045,7 @@
           <p:cNvPr id="12" name="">
             <a:extLst xmlns:a="http://schemas.openxmlformats.org/drawingml/2006/main">
               <a:ext uri="{FF2B5EF4-FFF2-40B4-BE49-F238E27FC236}">
-                <a16:creationId xmlns:a16="http://schemas.microsoft.com/office/drawing/2014/main" id="{C48C59CF-3B6F-4D39-88D7-72C6D51F6629}"/>
+                <a16:creationId xmlns:a16="http://schemas.microsoft.com/office/drawing/2014/main" id="{A0DAB3D3-D951-4E35-863A-4E8D69C5BE24}"/>
               </a:ext>
             </a:extLst>
           </p:cNvPr>
@@ -13457,7 +15080,7 @@
           <p:cNvPr id="13" name="">
             <a:extLst xmlns:a="http://schemas.openxmlformats.org/drawingml/2006/main">
               <a:ext uri="{FF2B5EF4-FFF2-40B4-BE49-F238E27FC236}">
-                <a16:creationId xmlns:a16="http://schemas.microsoft.com/office/drawing/2014/main" id="{AFA312B2-1016-4F8A-81B9-EA690335DA2E}"/>
+                <a16:creationId xmlns:a16="http://schemas.microsoft.com/office/drawing/2014/main" id="{3A17810E-5FCA-490C-8296-1303CFDA65CE}"/>
               </a:ext>
             </a:extLst>
           </p:cNvPr>
@@ -13492,7 +15115,7 @@
           <p:cNvPr id="14" name="">
             <a:extLst xmlns:a="http://schemas.openxmlformats.org/drawingml/2006/main">
               <a:ext uri="{FF2B5EF4-FFF2-40B4-BE49-F238E27FC236}">
-                <a16:creationId xmlns:a16="http://schemas.microsoft.com/office/drawing/2014/main" id="{213DD3F5-F01B-4419-AF83-64B0BD987743}"/>
+                <a16:creationId xmlns:a16="http://schemas.microsoft.com/office/drawing/2014/main" id="{DBF404C6-E509-405A-8F77-8FA616620570}"/>
               </a:ext>
             </a:extLst>
           </p:cNvPr>
@@ -13550,7 +15173,7 @@
           <p:cNvPr id="15" name="">
             <a:extLst xmlns:a="http://schemas.openxmlformats.org/drawingml/2006/main">
               <a:ext uri="{FF2B5EF4-FFF2-40B4-BE49-F238E27FC236}">
-                <a16:creationId xmlns:a16="http://schemas.microsoft.com/office/drawing/2014/main" id="{F0621272-A6BF-4978-8FB4-D656BEBB5E62}"/>
+                <a16:creationId xmlns:a16="http://schemas.microsoft.com/office/drawing/2014/main" id="{8FF8C534-30C4-4831-AB97-0B905CB60457}"/>
               </a:ext>
             </a:extLst>
           </p:cNvPr>
@@ -13642,7 +15265,7 @@
           <p:cNvPr id="16" name="">
             <a:extLst xmlns:a="http://schemas.openxmlformats.org/drawingml/2006/main">
               <a:ext uri="{FF2B5EF4-FFF2-40B4-BE49-F238E27FC236}">
-                <a16:creationId xmlns:a16="http://schemas.microsoft.com/office/drawing/2014/main" id="{D7DE0B85-6041-41BF-A466-BF9D490C1906}"/>
+                <a16:creationId xmlns:a16="http://schemas.microsoft.com/office/drawing/2014/main" id="{06B4DD56-DA16-4459-A407-728844F7194D}"/>
               </a:ext>
             </a:extLst>
           </p:cNvPr>
@@ -13677,7 +15300,7 @@
           <p:cNvPr id="17" name="">
             <a:extLst xmlns:a="http://schemas.openxmlformats.org/drawingml/2006/main">
               <a:ext uri="{FF2B5EF4-FFF2-40B4-BE49-F238E27FC236}">
-                <a16:creationId xmlns:a16="http://schemas.microsoft.com/office/drawing/2014/main" id="{A53150C3-1BFB-4DBF-A953-90DE4264E29F}"/>
+                <a16:creationId xmlns:a16="http://schemas.microsoft.com/office/drawing/2014/main" id="{113F0918-BE30-4930-B77F-58AD7C9144E3}"/>
               </a:ext>
             </a:extLst>
           </p:cNvPr>
@@ -13712,7 +15335,7 @@
           <p:cNvPr id="18" name="">
             <a:extLst xmlns:a="http://schemas.openxmlformats.org/drawingml/2006/main">
               <a:ext uri="{FF2B5EF4-FFF2-40B4-BE49-F238E27FC236}">
-                <a16:creationId xmlns:a16="http://schemas.microsoft.com/office/drawing/2014/main" id="{31026161-782F-4202-8661-0DC921BADCE0}"/>
+                <a16:creationId xmlns:a16="http://schemas.microsoft.com/office/drawing/2014/main" id="{938C4E4F-DB98-4010-9C8D-59D24CD68B48}"/>
               </a:ext>
             </a:extLst>
           </p:cNvPr>
@@ -13770,7 +15393,7 @@
           <p:cNvPr id="19" name="">
             <a:extLst xmlns:a="http://schemas.openxmlformats.org/drawingml/2006/main">
               <a:ext uri="{FF2B5EF4-FFF2-40B4-BE49-F238E27FC236}">
-                <a16:creationId xmlns:a16="http://schemas.microsoft.com/office/drawing/2014/main" id="{B06BBC18-1551-47D1-9764-F8FED833E66A}"/>
+                <a16:creationId xmlns:a16="http://schemas.microsoft.com/office/drawing/2014/main" id="{E946DCDD-AB39-45A7-8BB3-7D8FD70AD11B}"/>
               </a:ext>
             </a:extLst>
           </p:cNvPr>
@@ -13879,7 +15502,7 @@
           <p:cNvPr id="20" name="">
             <a:extLst xmlns:a="http://schemas.openxmlformats.org/drawingml/2006/main">
               <a:ext uri="{FF2B5EF4-FFF2-40B4-BE49-F238E27FC236}">
-                <a16:creationId xmlns:a16="http://schemas.microsoft.com/office/drawing/2014/main" id="{8559D606-BA75-4EF5-A047-05EF9587A308}"/>
+                <a16:creationId xmlns:a16="http://schemas.microsoft.com/office/drawing/2014/main" id="{6F7DFDF7-86A6-4BD3-83D5-047CECEAF25E}"/>
               </a:ext>
             </a:extLst>
           </p:cNvPr>
@@ -13914,7 +15537,7 @@
           <p:cNvPr id="21" name="">
             <a:extLst xmlns:a="http://schemas.openxmlformats.org/drawingml/2006/main">
               <a:ext uri="{FF2B5EF4-FFF2-40B4-BE49-F238E27FC236}">
-                <a16:creationId xmlns:a16="http://schemas.microsoft.com/office/drawing/2014/main" id="{D2853171-0210-4D69-896F-CE82214D6A1D}"/>
+                <a16:creationId xmlns:a16="http://schemas.microsoft.com/office/drawing/2014/main" id="{4F23506B-4AB4-40FA-B712-8529B31DD83A}"/>
               </a:ext>
             </a:extLst>
           </p:cNvPr>
@@ -13949,7 +15572,7 @@
           <p:cNvPr id="22" name="">
             <a:extLst xmlns:a="http://schemas.openxmlformats.org/drawingml/2006/main">
               <a:ext uri="{FF2B5EF4-FFF2-40B4-BE49-F238E27FC236}">
-                <a16:creationId xmlns:a16="http://schemas.microsoft.com/office/drawing/2014/main" id="{623A033D-6CF0-4041-88C7-1D1233B9DF46}"/>
+                <a16:creationId xmlns:a16="http://schemas.microsoft.com/office/drawing/2014/main" id="{D249D57B-3474-4E4C-88C0-AF1AAD7292D6}"/>
               </a:ext>
             </a:extLst>
           </p:cNvPr>
@@ -14007,7 +15630,7 @@
           <p:cNvPr id="23" name="">
             <a:extLst xmlns:a="http://schemas.openxmlformats.org/drawingml/2006/main">
               <a:ext uri="{FF2B5EF4-FFF2-40B4-BE49-F238E27FC236}">
-                <a16:creationId xmlns:a16="http://schemas.microsoft.com/office/drawing/2014/main" id="{402ED8C3-3626-4E02-9A48-AFF04CF3CAF7}"/>
+                <a16:creationId xmlns:a16="http://schemas.microsoft.com/office/drawing/2014/main" id="{6A0BBD60-4A6E-434E-B891-0F296F5DE932}"/>
               </a:ext>
             </a:extLst>
           </p:cNvPr>
@@ -14116,7 +15739,7 @@
           <p:cNvPr id="24" name="">
             <a:extLst xmlns:a="http://schemas.openxmlformats.org/drawingml/2006/main">
               <a:ext uri="{FF2B5EF4-FFF2-40B4-BE49-F238E27FC236}">
-                <a16:creationId xmlns:a16="http://schemas.microsoft.com/office/drawing/2014/main" id="{70D81A53-A2EF-4917-911F-98B7B9A032A9}"/>
+                <a16:creationId xmlns:a16="http://schemas.microsoft.com/office/drawing/2014/main" id="{A3D7B608-12AE-4225-9C55-D9F6A8798793}"/>
               </a:ext>
             </a:extLst>
           </p:cNvPr>
@@ -14151,7 +15774,7 @@
           <p:cNvPr id="25" name="">
             <a:extLst xmlns:a="http://schemas.openxmlformats.org/drawingml/2006/main">
               <a:ext uri="{FF2B5EF4-FFF2-40B4-BE49-F238E27FC236}">
-                <a16:creationId xmlns:a16="http://schemas.microsoft.com/office/drawing/2014/main" id="{49A13AF6-404E-46C3-9C2E-D72BCA9F498B}"/>
+                <a16:creationId xmlns:a16="http://schemas.microsoft.com/office/drawing/2014/main" id="{22BA354F-EC2C-4C95-9DCE-65D3F414D371}"/>
               </a:ext>
             </a:extLst>
           </p:cNvPr>
@@ -14186,7 +15809,7 @@
           <p:cNvPr id="26" name="">
             <a:extLst xmlns:a="http://schemas.openxmlformats.org/drawingml/2006/main">
               <a:ext uri="{FF2B5EF4-FFF2-40B4-BE49-F238E27FC236}">
-                <a16:creationId xmlns:a16="http://schemas.microsoft.com/office/drawing/2014/main" id="{1515E9B1-D0C7-4DB9-BA5F-0C9965EE361E}"/>
+                <a16:creationId xmlns:a16="http://schemas.microsoft.com/office/drawing/2014/main" id="{F1DEFEC9-B346-4BE5-836B-088ED1D06EF2}"/>
               </a:ext>
             </a:extLst>
           </p:cNvPr>
@@ -14244,7 +15867,7 @@
           <p:cNvPr id="27" name="">
             <a:extLst xmlns:a="http://schemas.openxmlformats.org/drawingml/2006/main">
               <a:ext uri="{FF2B5EF4-FFF2-40B4-BE49-F238E27FC236}">
-                <a16:creationId xmlns:a16="http://schemas.microsoft.com/office/drawing/2014/main" id="{05D20872-A4F7-4FE2-8354-4AA17388CD57}"/>
+                <a16:creationId xmlns:a16="http://schemas.microsoft.com/office/drawing/2014/main" id="{39BB8F8E-410D-4633-A4CA-57FE5B3022E6}"/>
               </a:ext>
             </a:extLst>
           </p:cNvPr>
@@ -14319,7 +15942,7 @@
           <p:cNvPr id="28" name="">
             <a:extLst xmlns:a="http://schemas.openxmlformats.org/drawingml/2006/main">
               <a:ext uri="{FF2B5EF4-FFF2-40B4-BE49-F238E27FC236}">
-                <a16:creationId xmlns:a16="http://schemas.microsoft.com/office/drawing/2014/main" id="{3C58D69C-3EB4-4D8F-9F7F-58536C6B81A5}"/>
+                <a16:creationId xmlns:a16="http://schemas.microsoft.com/office/drawing/2014/main" id="{834E9C4F-2E31-484A-A3F3-1F9F4E6D8475}"/>
               </a:ext>
             </a:extLst>
           </p:cNvPr>
@@ -14354,7 +15977,7 @@
           <p:cNvPr id="29" name="">
             <a:extLst xmlns:a="http://schemas.openxmlformats.org/drawingml/2006/main">
               <a:ext uri="{FF2B5EF4-FFF2-40B4-BE49-F238E27FC236}">
-                <a16:creationId xmlns:a16="http://schemas.microsoft.com/office/drawing/2014/main" id="{A469EB1E-E46A-4559-95B2-BF4334BBBBA2}"/>
+                <a16:creationId xmlns:a16="http://schemas.microsoft.com/office/drawing/2014/main" id="{E5D1AF06-1149-4153-BB26-95B346A85291}"/>
               </a:ext>
             </a:extLst>
           </p:cNvPr>
@@ -14389,7 +16012,7 @@
           <p:cNvPr id="30" name="">
             <a:extLst xmlns:a="http://schemas.openxmlformats.org/drawingml/2006/main">
               <a:ext uri="{FF2B5EF4-FFF2-40B4-BE49-F238E27FC236}">
-                <a16:creationId xmlns:a16="http://schemas.microsoft.com/office/drawing/2014/main" id="{D05DF4F8-1E7C-4B88-B321-5F60065B0FC9}"/>
+                <a16:creationId xmlns:a16="http://schemas.microsoft.com/office/drawing/2014/main" id="{ADF22DE0-680F-4B21-A948-E4B23869B917}"/>
               </a:ext>
             </a:extLst>
           </p:cNvPr>
@@ -14447,7 +16070,7 @@
           <p:cNvPr id="31" name="">
             <a:extLst xmlns:a="http://schemas.openxmlformats.org/drawingml/2006/main">
               <a:ext uri="{FF2B5EF4-FFF2-40B4-BE49-F238E27FC236}">
-                <a16:creationId xmlns:a16="http://schemas.microsoft.com/office/drawing/2014/main" id="{09465311-340D-443D-8836-B6D50DCD9FAF}"/>
+                <a16:creationId xmlns:a16="http://schemas.microsoft.com/office/drawing/2014/main" id="{590A0B88-7977-4E53-A2A3-0C3B70EC899E}"/>
               </a:ext>
             </a:extLst>
           </p:cNvPr>
@@ -14556,7 +16179,7 @@
           <p:cNvPr id="32" name="">
             <a:extLst xmlns:a="http://schemas.openxmlformats.org/drawingml/2006/main">
               <a:ext uri="{FF2B5EF4-FFF2-40B4-BE49-F238E27FC236}">
-                <a16:creationId xmlns:a16="http://schemas.microsoft.com/office/drawing/2014/main" id="{43A17813-D2D5-4BD1-9DB8-DE12BB8D2E44}"/>
+                <a16:creationId xmlns:a16="http://schemas.microsoft.com/office/drawing/2014/main" id="{192086DF-9557-48CA-A00C-BAE9090BA615}"/>
               </a:ext>
             </a:extLst>
           </p:cNvPr>
@@ -14591,7 +16214,7 @@
           <p:cNvPr id="33" name="">
             <a:extLst xmlns:a="http://schemas.openxmlformats.org/drawingml/2006/main">
               <a:ext uri="{FF2B5EF4-FFF2-40B4-BE49-F238E27FC236}">
-                <a16:creationId xmlns:a16="http://schemas.microsoft.com/office/drawing/2014/main" id="{ADAF4B45-8D93-45CF-8669-D8EBA387ABAD}"/>
+                <a16:creationId xmlns:a16="http://schemas.microsoft.com/office/drawing/2014/main" id="{E442BE84-AE93-42F5-82DA-BD17AE1E2340}"/>
               </a:ext>
             </a:extLst>
           </p:cNvPr>
@@ -14626,7 +16249,7 @@
           <p:cNvPr id="34" name="">
             <a:extLst xmlns:a="http://schemas.openxmlformats.org/drawingml/2006/main">
               <a:ext uri="{FF2B5EF4-FFF2-40B4-BE49-F238E27FC236}">
-                <a16:creationId xmlns:a16="http://schemas.microsoft.com/office/drawing/2014/main" id="{50E5218B-34BA-4B8C-84C1-E3C2B47563EF}"/>
+                <a16:creationId xmlns:a16="http://schemas.microsoft.com/office/drawing/2014/main" id="{30D885D5-F036-414C-B773-65A7F340A277}"/>
               </a:ext>
             </a:extLst>
           </p:cNvPr>
@@ -14684,7 +16307,7 @@
           <p:cNvPr id="35" name="">
             <a:extLst xmlns:a="http://schemas.openxmlformats.org/drawingml/2006/main">
               <a:ext uri="{FF2B5EF4-FFF2-40B4-BE49-F238E27FC236}">
-                <a16:creationId xmlns:a16="http://schemas.microsoft.com/office/drawing/2014/main" id="{1EFDDA6E-9740-46FB-84FB-532B9F5121DD}"/>
+                <a16:creationId xmlns:a16="http://schemas.microsoft.com/office/drawing/2014/main" id="{9362549D-F081-4974-BAA1-64F03612CCA7}"/>
               </a:ext>
             </a:extLst>
           </p:cNvPr>
@@ -14793,7 +16416,7 @@
           <p:cNvPr id="36" name="">
             <a:extLst xmlns:a="http://schemas.openxmlformats.org/drawingml/2006/main">
               <a:ext uri="{FF2B5EF4-FFF2-40B4-BE49-F238E27FC236}">
-                <a16:creationId xmlns:a16="http://schemas.microsoft.com/office/drawing/2014/main" id="{29CC10F2-B198-4FD2-88CA-0E0BC7B09151}"/>
+                <a16:creationId xmlns:a16="http://schemas.microsoft.com/office/drawing/2014/main" id="{9CAE96C6-C7AE-4910-9BE2-6D01B6631082}"/>
               </a:ext>
             </a:extLst>
           </p:cNvPr>
@@ -14828,7 +16451,7 @@
           <p:cNvPr id="37" name="">
             <a:extLst xmlns:a="http://schemas.openxmlformats.org/drawingml/2006/main">
               <a:ext uri="{FF2B5EF4-FFF2-40B4-BE49-F238E27FC236}">
-                <a16:creationId xmlns:a16="http://schemas.microsoft.com/office/drawing/2014/main" id="{ED4CDE77-F909-4786-8A9B-91D1B829434E}"/>
+                <a16:creationId xmlns:a16="http://schemas.microsoft.com/office/drawing/2014/main" id="{44C910DD-FAE5-46F4-8A0C-EEF1854578BB}"/>
               </a:ext>
             </a:extLst>
           </p:cNvPr>
@@ -14863,7 +16486,7 @@
           <p:cNvPr id="38" name="">
             <a:extLst xmlns:a="http://schemas.openxmlformats.org/drawingml/2006/main">
               <a:ext uri="{FF2B5EF4-FFF2-40B4-BE49-F238E27FC236}">
-                <a16:creationId xmlns:a16="http://schemas.microsoft.com/office/drawing/2014/main" id="{61BBE5AB-F4FC-4713-A4A4-508AAC41208B}"/>
+                <a16:creationId xmlns:a16="http://schemas.microsoft.com/office/drawing/2014/main" id="{69712934-6A31-4AAD-B728-0524316DDEA7}"/>
               </a:ext>
             </a:extLst>
           </p:cNvPr>
@@ -14921,7 +16544,7 @@
           <p:cNvPr id="39" name="">
             <a:extLst xmlns:a="http://schemas.openxmlformats.org/drawingml/2006/main">
               <a:ext uri="{FF2B5EF4-FFF2-40B4-BE49-F238E27FC236}">
-                <a16:creationId xmlns:a16="http://schemas.microsoft.com/office/drawing/2014/main" id="{2A2B96FE-5913-40FF-898E-B4E97267FC9F}"/>
+                <a16:creationId xmlns:a16="http://schemas.microsoft.com/office/drawing/2014/main" id="{20602D8F-9E52-4B9D-8A7F-0009BFA463BA}"/>
               </a:ext>
             </a:extLst>
           </p:cNvPr>
@@ -15030,7 +16653,7 @@
           <p:cNvPr id="40" name="">
             <a:extLst xmlns:a="http://schemas.openxmlformats.org/drawingml/2006/main">
               <a:ext uri="{FF2B5EF4-FFF2-40B4-BE49-F238E27FC236}">
-                <a16:creationId xmlns:a16="http://schemas.microsoft.com/office/drawing/2014/main" id="{46F4F2C1-0F3B-4262-B4C7-49ADB28E491E}"/>
+                <a16:creationId xmlns:a16="http://schemas.microsoft.com/office/drawing/2014/main" id="{6C747821-EF23-4564-AA31-F5FE62044E1E}"/>
               </a:ext>
             </a:extLst>
           </p:cNvPr>
@@ -15086,7 +16709,7 @@
     </p:spTree>
     <p:extLst>
       <p:ext uri="{BB962C8B-B14F-4D97-AF65-F5344CB8AC3E}">
-        <p14:creationId xmlns:p14="http://schemas.microsoft.com/office/powerpoint/2010/main" val="562253570"/>
+        <p14:creationId xmlns:p14="http://schemas.microsoft.com/office/powerpoint/2010/main" val="1437655356"/>
       </p:ext>
     </p:extLst>
   </p:cSld>
@@ -15117,7 +16740,7 @@
           <p:cNvPr id="1" name="">
             <a:extLst xmlns:a="http://schemas.openxmlformats.org/drawingml/2006/main">
               <a:ext uri="{FF2B5EF4-FFF2-40B4-BE49-F238E27FC236}">
-                <a16:creationId xmlns:a16="http://schemas.microsoft.com/office/drawing/2014/main" id="{56E26583-BDC5-468F-8A27-650D7F1F010C}"/>
+                <a16:creationId xmlns:a16="http://schemas.microsoft.com/office/drawing/2014/main" id="{F8C79458-3D15-44E0-9C2F-7A54E93A7DDA}"/>
               </a:ext>
             </a:extLst>
           </p:cNvPr>
@@ -15152,7 +16775,7 @@
           <p:cNvPr id="2" name="">
             <a:extLst xmlns:a="http://schemas.openxmlformats.org/drawingml/2006/main">
               <a:ext uri="{FF2B5EF4-FFF2-40B4-BE49-F238E27FC236}">
-                <a16:creationId xmlns:a16="http://schemas.microsoft.com/office/drawing/2014/main" id="{9D08BA31-4184-4E92-AE79-E089A66DB3AA}"/>
+                <a16:creationId xmlns:a16="http://schemas.microsoft.com/office/drawing/2014/main" id="{A1F55BF8-4520-4033-9688-F2F5BBEA55A3}"/>
               </a:ext>
             </a:extLst>
           </p:cNvPr>
@@ -15187,7 +16810,7 @@
           <p:cNvPr id="3" name="">
             <a:extLst xmlns:a="http://schemas.openxmlformats.org/drawingml/2006/main">
               <a:ext uri="{FF2B5EF4-FFF2-40B4-BE49-F238E27FC236}">
-                <a16:creationId xmlns:a16="http://schemas.microsoft.com/office/drawing/2014/main" id="{4A3140ED-AA96-40FE-A9C4-FD138923AF25}"/>
+                <a16:creationId xmlns:a16="http://schemas.microsoft.com/office/drawing/2014/main" id="{208D1220-039A-44F7-8D54-283B3E8A0657}"/>
               </a:ext>
             </a:extLst>
           </p:cNvPr>
@@ -15245,7 +16868,7 @@
           <p:cNvPr id="4" name="">
             <a:extLst xmlns:a="http://schemas.openxmlformats.org/drawingml/2006/main">
               <a:ext uri="{FF2B5EF4-FFF2-40B4-BE49-F238E27FC236}">
-                <a16:creationId xmlns:a16="http://schemas.microsoft.com/office/drawing/2014/main" id="{5C830A3B-DA04-4F85-8FF1-B8B35686C455}"/>
+                <a16:creationId xmlns:a16="http://schemas.microsoft.com/office/drawing/2014/main" id="{D61D0DB7-F0C2-418D-9E52-1E9044B2FD38}"/>
               </a:ext>
             </a:extLst>
           </p:cNvPr>
@@ -15303,7 +16926,7 @@
           <p:cNvPr id="5" name="">
             <a:extLst xmlns:a="http://schemas.openxmlformats.org/drawingml/2006/main">
               <a:ext uri="{FF2B5EF4-FFF2-40B4-BE49-F238E27FC236}">
-                <a16:creationId xmlns:a16="http://schemas.microsoft.com/office/drawing/2014/main" id="{9CE9AA4C-A4EE-44EA-A1FC-B40770ED9A1A}"/>
+                <a16:creationId xmlns:a16="http://schemas.microsoft.com/office/drawing/2014/main" id="{FCD29EF3-57A0-4AF0-80CB-60706CAF4A67}"/>
               </a:ext>
             </a:extLst>
           </p:cNvPr>
@@ -15338,7 +16961,7 @@
           <p:cNvPr id="6" name="">
             <a:extLst xmlns:a="http://schemas.openxmlformats.org/drawingml/2006/main">
               <a:ext uri="{FF2B5EF4-FFF2-40B4-BE49-F238E27FC236}">
-                <a16:creationId xmlns:a16="http://schemas.microsoft.com/office/drawing/2014/main" id="{9B6BB825-1751-458E-B3C6-82C2A7139B52}"/>
+                <a16:creationId xmlns:a16="http://schemas.microsoft.com/office/drawing/2014/main" id="{A347FE8C-1A70-40C5-8E2F-F9CD58DB22E6}"/>
               </a:ext>
             </a:extLst>
           </p:cNvPr>
@@ -15396,7 +17019,7 @@
           <p:cNvPr id="7" name="">
             <a:extLst xmlns:a="http://schemas.openxmlformats.org/drawingml/2006/main">
               <a:ext uri="{FF2B5EF4-FFF2-40B4-BE49-F238E27FC236}">
-                <a16:creationId xmlns:a16="http://schemas.microsoft.com/office/drawing/2014/main" id="{CEC21FF3-BA52-4CB0-8E28-047899A2D30D}"/>
+                <a16:creationId xmlns:a16="http://schemas.microsoft.com/office/drawing/2014/main" id="{9F85B5DC-534A-4795-88FF-6245C08BD40E}"/>
               </a:ext>
             </a:extLst>
           </p:cNvPr>
@@ -15454,7 +17077,7 @@
           <p:cNvPr id="8" name="">
             <a:extLst xmlns:a="http://schemas.openxmlformats.org/drawingml/2006/main">
               <a:ext uri="{FF2B5EF4-FFF2-40B4-BE49-F238E27FC236}">
-                <a16:creationId xmlns:a16="http://schemas.microsoft.com/office/drawing/2014/main" id="{3A43D5CA-61D6-465A-8140-3E8E9944DC85}"/>
+                <a16:creationId xmlns:a16="http://schemas.microsoft.com/office/drawing/2014/main" id="{44434D04-1912-4C1A-967C-E71DCB57097E}"/>
               </a:ext>
             </a:extLst>
           </p:cNvPr>
@@ -15489,7 +17112,7 @@
           <p:cNvPr id="9" name="">
             <a:extLst xmlns:a="http://schemas.openxmlformats.org/drawingml/2006/main">
               <a:ext uri="{FF2B5EF4-FFF2-40B4-BE49-F238E27FC236}">
-                <a16:creationId xmlns:a16="http://schemas.microsoft.com/office/drawing/2014/main" id="{EA6A0069-5913-4C3F-940E-DB66A344F754}"/>
+                <a16:creationId xmlns:a16="http://schemas.microsoft.com/office/drawing/2014/main" id="{B7021F2C-1E3A-485B-9972-089E3500B360}"/>
               </a:ext>
             </a:extLst>
           </p:cNvPr>
@@ -15547,7 +17170,7 @@
           <p:cNvPr id="10" name="">
             <a:extLst xmlns:a="http://schemas.openxmlformats.org/drawingml/2006/main">
               <a:ext uri="{FF2B5EF4-FFF2-40B4-BE49-F238E27FC236}">
-                <a16:creationId xmlns:a16="http://schemas.microsoft.com/office/drawing/2014/main" id="{AEFEFC20-5D58-474D-8D3F-513552EC7128}"/>
+                <a16:creationId xmlns:a16="http://schemas.microsoft.com/office/drawing/2014/main" id="{93540B8A-F577-40BB-9F4D-E85571D259F9}"/>
               </a:ext>
             </a:extLst>
           </p:cNvPr>
@@ -15580,7 +17203,7 @@
           <p:cNvPr id="11" name="">
             <a:extLst xmlns:a="http://schemas.openxmlformats.org/drawingml/2006/main">
               <a:ext uri="{FF2B5EF4-FFF2-40B4-BE49-F238E27FC236}">
-                <a16:creationId xmlns:a16="http://schemas.microsoft.com/office/drawing/2014/main" id="{F6D2D383-D12B-4E4B-AC82-19393091278D}"/>
+                <a16:creationId xmlns:a16="http://schemas.microsoft.com/office/drawing/2014/main" id="{5749F805-1BBF-4ADE-8884-47D55A013D3D}"/>
               </a:ext>
             </a:extLst>
           </p:cNvPr>
@@ -15615,7 +17238,7 @@
           <p:cNvPr id="12" name="">
             <a:extLst xmlns:a="http://schemas.openxmlformats.org/drawingml/2006/main">
               <a:ext uri="{FF2B5EF4-FFF2-40B4-BE49-F238E27FC236}">
-                <a16:creationId xmlns:a16="http://schemas.microsoft.com/office/drawing/2014/main" id="{A1E80B14-CAEE-4A6E-9B03-E298BF6B00B3}"/>
+                <a16:creationId xmlns:a16="http://schemas.microsoft.com/office/drawing/2014/main" id="{47E85C4D-95AE-446F-9C95-DCC251D1F3CF}"/>
               </a:ext>
             </a:extLst>
           </p:cNvPr>
@@ -15650,7 +17273,7 @@
           <p:cNvPr id="13" name="">
             <a:extLst xmlns:a="http://schemas.openxmlformats.org/drawingml/2006/main">
               <a:ext uri="{FF2B5EF4-FFF2-40B4-BE49-F238E27FC236}">
-                <a16:creationId xmlns:a16="http://schemas.microsoft.com/office/drawing/2014/main" id="{BBB9D950-50C4-447D-9A12-586A7610B3AD}"/>
+                <a16:creationId xmlns:a16="http://schemas.microsoft.com/office/drawing/2014/main" id="{0A2DB20C-296E-49BA-83BC-BBFD2CA80C75}"/>
               </a:ext>
             </a:extLst>
           </p:cNvPr>
@@ -15685,7 +17308,7 @@
           <p:cNvPr id="14" name="">
             <a:extLst xmlns:a="http://schemas.openxmlformats.org/drawingml/2006/main">
               <a:ext uri="{FF2B5EF4-FFF2-40B4-BE49-F238E27FC236}">
-                <a16:creationId xmlns:a16="http://schemas.microsoft.com/office/drawing/2014/main" id="{E73DE377-E2C8-4860-8BCD-D5BCBF6A2D19}"/>
+                <a16:creationId xmlns:a16="http://schemas.microsoft.com/office/drawing/2014/main" id="{2017EEAB-4FF1-4CD6-B8BB-C0BEF0A6A25D}"/>
               </a:ext>
             </a:extLst>
           </p:cNvPr>
@@ -15720,7 +17343,7 @@
           <p:cNvPr id="15" name="">
             <a:extLst xmlns:a="http://schemas.openxmlformats.org/drawingml/2006/main">
               <a:ext uri="{FF2B5EF4-FFF2-40B4-BE49-F238E27FC236}">
-                <a16:creationId xmlns:a16="http://schemas.microsoft.com/office/drawing/2014/main" id="{FD48539A-79D9-495E-B513-990F8C66E3C6}"/>
+                <a16:creationId xmlns:a16="http://schemas.microsoft.com/office/drawing/2014/main" id="{1296E252-08B1-477D-B148-4E44FF46C850}"/>
               </a:ext>
             </a:extLst>
           </p:cNvPr>
@@ -15755,7 +17378,7 @@
           <p:cNvPr id="16" name="">
             <a:extLst xmlns:a="http://schemas.openxmlformats.org/drawingml/2006/main">
               <a:ext uri="{FF2B5EF4-FFF2-40B4-BE49-F238E27FC236}">
-                <a16:creationId xmlns:a16="http://schemas.microsoft.com/office/drawing/2014/main" id="{602CA6EE-987E-4129-B524-2345C3B5314D}"/>
+                <a16:creationId xmlns:a16="http://schemas.microsoft.com/office/drawing/2014/main" id="{5FFBAC25-19BB-4493-AEB4-E78498F93B31}"/>
               </a:ext>
             </a:extLst>
           </p:cNvPr>
@@ -15813,7 +17436,7 @@
           <p:cNvPr id="17" name="">
             <a:extLst xmlns:a="http://schemas.openxmlformats.org/drawingml/2006/main">
               <a:ext uri="{FF2B5EF4-FFF2-40B4-BE49-F238E27FC236}">
-                <a16:creationId xmlns:a16="http://schemas.microsoft.com/office/drawing/2014/main" id="{27F7C9E1-14E6-47F8-8BAD-BE9D7EDA8F8F}"/>
+                <a16:creationId xmlns:a16="http://schemas.microsoft.com/office/drawing/2014/main" id="{25BCE482-4366-4A3A-A151-C65D5EF8DB20}"/>
               </a:ext>
             </a:extLst>
           </p:cNvPr>
@@ -15846,7 +17469,7 @@
           <p:cNvPr id="18" name="">
             <a:extLst xmlns:a="http://schemas.openxmlformats.org/drawingml/2006/main">
               <a:ext uri="{FF2B5EF4-FFF2-40B4-BE49-F238E27FC236}">
-                <a16:creationId xmlns:a16="http://schemas.microsoft.com/office/drawing/2014/main" id="{3EC48541-EE0F-4C8D-B863-C85471DAC84F}"/>
+                <a16:creationId xmlns:a16="http://schemas.microsoft.com/office/drawing/2014/main" id="{086E6145-0FC8-4B39-A79A-7B750F6C4DFF}"/>
               </a:ext>
             </a:extLst>
           </p:cNvPr>
@@ -15881,7 +17504,7 @@
           <p:cNvPr id="19" name="">
             <a:extLst xmlns:a="http://schemas.openxmlformats.org/drawingml/2006/main">
               <a:ext uri="{FF2B5EF4-FFF2-40B4-BE49-F238E27FC236}">
-                <a16:creationId xmlns:a16="http://schemas.microsoft.com/office/drawing/2014/main" id="{8A249EBF-EAF8-4A1B-90A7-8E1547E84D4F}"/>
+                <a16:creationId xmlns:a16="http://schemas.microsoft.com/office/drawing/2014/main" id="{9E69EB30-C130-4386-9E42-588437EA2C66}"/>
               </a:ext>
             </a:extLst>
           </p:cNvPr>
@@ -15916,7 +17539,7 @@
           <p:cNvPr id="20" name="">
             <a:extLst xmlns:a="http://schemas.openxmlformats.org/drawingml/2006/main">
               <a:ext uri="{FF2B5EF4-FFF2-40B4-BE49-F238E27FC236}">
-                <a16:creationId xmlns:a16="http://schemas.microsoft.com/office/drawing/2014/main" id="{AB76C85F-21DE-4241-9F75-494B359C11D5}"/>
+                <a16:creationId xmlns:a16="http://schemas.microsoft.com/office/drawing/2014/main" id="{FA83CE99-C3AA-46FC-8946-57FAFA5766B8}"/>
               </a:ext>
             </a:extLst>
           </p:cNvPr>
@@ -15951,7 +17574,7 @@
           <p:cNvPr id="21" name="">
             <a:extLst xmlns:a="http://schemas.openxmlformats.org/drawingml/2006/main">
               <a:ext uri="{FF2B5EF4-FFF2-40B4-BE49-F238E27FC236}">
-                <a16:creationId xmlns:a16="http://schemas.microsoft.com/office/drawing/2014/main" id="{254801D1-996F-4F44-A6DA-D2E098C572ED}"/>
+                <a16:creationId xmlns:a16="http://schemas.microsoft.com/office/drawing/2014/main" id="{C7D9A49A-B10E-4C4F-BCED-769A3E756A95}"/>
               </a:ext>
             </a:extLst>
           </p:cNvPr>
@@ -15986,7 +17609,7 @@
           <p:cNvPr id="22" name="">
             <a:extLst xmlns:a="http://schemas.openxmlformats.org/drawingml/2006/main">
               <a:ext uri="{FF2B5EF4-FFF2-40B4-BE49-F238E27FC236}">
-                <a16:creationId xmlns:a16="http://schemas.microsoft.com/office/drawing/2014/main" id="{42A601DA-73EA-4AD3-A9AA-9BE88635FD93}"/>
+                <a16:creationId xmlns:a16="http://schemas.microsoft.com/office/drawing/2014/main" id="{E835EF50-66C6-45AC-8F14-E586D2790340}"/>
               </a:ext>
             </a:extLst>
           </p:cNvPr>
@@ -16021,7 +17644,7 @@
           <p:cNvPr id="23" name="">
             <a:extLst xmlns:a="http://schemas.openxmlformats.org/drawingml/2006/main">
               <a:ext uri="{FF2B5EF4-FFF2-40B4-BE49-F238E27FC236}">
-                <a16:creationId xmlns:a16="http://schemas.microsoft.com/office/drawing/2014/main" id="{5E2FF6B4-AB24-4091-9733-768B5B03DFDF}"/>
+                <a16:creationId xmlns:a16="http://schemas.microsoft.com/office/drawing/2014/main" id="{F1777411-3CFB-4E6D-BA70-131B160390F7}"/>
               </a:ext>
             </a:extLst>
           </p:cNvPr>
@@ -16079,7 +17702,7 @@
           <p:cNvPr id="24" name="">
             <a:extLst xmlns:a="http://schemas.openxmlformats.org/drawingml/2006/main">
               <a:ext uri="{FF2B5EF4-FFF2-40B4-BE49-F238E27FC236}">
-                <a16:creationId xmlns:a16="http://schemas.microsoft.com/office/drawing/2014/main" id="{40E924C1-EC89-4B06-A768-B50FCE0AE2A1}"/>
+                <a16:creationId xmlns:a16="http://schemas.microsoft.com/office/drawing/2014/main" id="{4FF0DC77-8690-4F11-814B-010E41D47EF2}"/>
               </a:ext>
             </a:extLst>
           </p:cNvPr>
@@ -16112,7 +17735,7 @@
           <p:cNvPr id="25" name="">
             <a:extLst xmlns:a="http://schemas.openxmlformats.org/drawingml/2006/main">
               <a:ext uri="{FF2B5EF4-FFF2-40B4-BE49-F238E27FC236}">
-                <a16:creationId xmlns:a16="http://schemas.microsoft.com/office/drawing/2014/main" id="{88322D30-2CA1-4095-81A9-38666CD49D14}"/>
+                <a16:creationId xmlns:a16="http://schemas.microsoft.com/office/drawing/2014/main" id="{4372D32B-6B92-4A9E-87B8-2660E5DAAC90}"/>
               </a:ext>
             </a:extLst>
           </p:cNvPr>
@@ -16147,7 +17770,7 @@
           <p:cNvPr id="26" name="">
             <a:extLst xmlns:a="http://schemas.openxmlformats.org/drawingml/2006/main">
               <a:ext uri="{FF2B5EF4-FFF2-40B4-BE49-F238E27FC236}">
-                <a16:creationId xmlns:a16="http://schemas.microsoft.com/office/drawing/2014/main" id="{1B16FED1-E49E-4A02-A1F3-B05CBBA69A65}"/>
+                <a16:creationId xmlns:a16="http://schemas.microsoft.com/office/drawing/2014/main" id="{DA462BBF-BD65-457E-9A97-5228C943BE03}"/>
               </a:ext>
             </a:extLst>
           </p:cNvPr>
@@ -16182,7 +17805,7 @@
           <p:cNvPr id="27" name="">
             <a:extLst xmlns:a="http://schemas.openxmlformats.org/drawingml/2006/main">
               <a:ext uri="{FF2B5EF4-FFF2-40B4-BE49-F238E27FC236}">
-                <a16:creationId xmlns:a16="http://schemas.microsoft.com/office/drawing/2014/main" id="{6800668D-0DD6-4CBB-88BC-5A8A6E829C7D}"/>
+                <a16:creationId xmlns:a16="http://schemas.microsoft.com/office/drawing/2014/main" id="{FDB6F031-51D8-4105-BFEA-44A9E49BF4D0}"/>
               </a:ext>
             </a:extLst>
           </p:cNvPr>
@@ -16217,7 +17840,7 @@
           <p:cNvPr id="28" name="">
             <a:extLst xmlns:a="http://schemas.openxmlformats.org/drawingml/2006/main">
               <a:ext uri="{FF2B5EF4-FFF2-40B4-BE49-F238E27FC236}">
-                <a16:creationId xmlns:a16="http://schemas.microsoft.com/office/drawing/2014/main" id="{D599A40D-93D4-41C2-9392-A510BABFA13C}"/>
+                <a16:creationId xmlns:a16="http://schemas.microsoft.com/office/drawing/2014/main" id="{B3B74F51-70DD-44B0-9996-C885F3A0A78C}"/>
               </a:ext>
             </a:extLst>
           </p:cNvPr>
@@ -16252,7 +17875,7 @@
           <p:cNvPr id="29" name="">
             <a:extLst xmlns:a="http://schemas.openxmlformats.org/drawingml/2006/main">
               <a:ext uri="{FF2B5EF4-FFF2-40B4-BE49-F238E27FC236}">
-                <a16:creationId xmlns:a16="http://schemas.microsoft.com/office/drawing/2014/main" id="{AF8BCF3A-F77C-46E7-86C6-ABF7C451314A}"/>
+                <a16:creationId xmlns:a16="http://schemas.microsoft.com/office/drawing/2014/main" id="{E2E42E8D-FC16-4170-B8AD-8832962FDE7B}"/>
               </a:ext>
             </a:extLst>
           </p:cNvPr>
@@ -16287,7 +17910,7 @@
           <p:cNvPr id="30" name="">
             <a:extLst xmlns:a="http://schemas.openxmlformats.org/drawingml/2006/main">
               <a:ext uri="{FF2B5EF4-FFF2-40B4-BE49-F238E27FC236}">
-                <a16:creationId xmlns:a16="http://schemas.microsoft.com/office/drawing/2014/main" id="{1A8192CE-2B7D-4A6D-9B18-462189E4A522}"/>
+                <a16:creationId xmlns:a16="http://schemas.microsoft.com/office/drawing/2014/main" id="{FA5D05BF-F527-42CA-9FF6-761C78C19D16}"/>
               </a:ext>
             </a:extLst>
           </p:cNvPr>
@@ -16345,19 +17968,19 @@
           <p:cNvPr id="31" name="">
             <a:extLst xmlns:a="http://schemas.openxmlformats.org/drawingml/2006/main">
               <a:ext uri="{FF2B5EF4-FFF2-40B4-BE49-F238E27FC236}">
-                <a16:creationId xmlns:a16="http://schemas.microsoft.com/office/drawing/2014/main" id="{2B045B9C-40F8-4608-9794-12DD13B32497}"/>
-              </a:ext>
-            </a:extLst>
-          </p:cNvPr>
-          <p:cNvSpPr>
-            <a:spLocks xmlns:a="http://schemas.openxmlformats.org/drawingml/2006/main" noGrp="1"/>
-          </p:cNvSpPr>
-          <p:nvPr/>
-        </p:nvSpPr>
-        <p:spPr>
-          <a:xfrm xmlns:a="http://schemas.openxmlformats.org/drawingml/2006/main" rot="0">
-            <a:off x="2876550" y="2343150"/>
-            <a:ext cx="2000250" cy="590550"/>
+                <a16:creationId xmlns:a16="http://schemas.microsoft.com/office/drawing/2014/main" id="{AA919426-1488-4120-8B1C-818124A44E1F}"/>
+              </a:ext>
+            </a:extLst>
+          </p:cNvPr>
+          <p:cNvSpPr>
+            <a:spLocks xmlns:a="http://schemas.openxmlformats.org/drawingml/2006/main" noGrp="1"/>
+          </p:cNvSpPr>
+          <p:nvPr/>
+        </p:nvSpPr>
+        <p:spPr>
+          <a:xfrm xmlns:a="http://schemas.openxmlformats.org/drawingml/2006/main" rot="0">
+            <a:off x="2724150" y="2228850"/>
+            <a:ext cx="1790700" cy="495300"/>
           </a:xfrm>
           <a:prstGeom xmlns:a="http://schemas.openxmlformats.org/drawingml/2006/main" prst="ellipse">
             <a:avLst/>
@@ -16378,19 +18001,19 @@
           <p:cNvPr id="32" name="">
             <a:extLst xmlns:a="http://schemas.openxmlformats.org/drawingml/2006/main">
               <a:ext uri="{FF2B5EF4-FFF2-40B4-BE49-F238E27FC236}">
-                <a16:creationId xmlns:a16="http://schemas.microsoft.com/office/drawing/2014/main" id="{DADABD8D-D561-4E74-BEA5-530E8C4CBB1D}"/>
-              </a:ext>
-            </a:extLst>
-          </p:cNvPr>
-          <p:cNvSpPr>
-            <a:spLocks xmlns:a="http://schemas.openxmlformats.org/drawingml/2006/main" noGrp="1"/>
-          </p:cNvSpPr>
-          <p:nvPr/>
-        </p:nvSpPr>
-        <p:spPr>
-          <a:xfrm xmlns:a="http://schemas.openxmlformats.org/drawingml/2006/main" rot="0">
-            <a:off x="2971800" y="2476500"/>
-            <a:ext cx="1809750" cy="323850"/>
+                <a16:creationId xmlns:a16="http://schemas.microsoft.com/office/drawing/2014/main" id="{4503508D-2065-4784-9C35-F82B585C80E7}"/>
+              </a:ext>
+            </a:extLst>
+          </p:cNvPr>
+          <p:cNvSpPr>
+            <a:spLocks xmlns:a="http://schemas.openxmlformats.org/drawingml/2006/main" noGrp="1"/>
+          </p:cNvSpPr>
+          <p:nvPr/>
+        </p:nvSpPr>
+        <p:spPr>
+          <a:xfrm xmlns:a="http://schemas.openxmlformats.org/drawingml/2006/main" rot="0">
+            <a:off x="2819400" y="2362200"/>
+            <a:ext cx="1600200" cy="228600"/>
           </a:xfrm>
           <a:prstGeom xmlns:a="http://schemas.openxmlformats.org/drawingml/2006/main" prst="rect">
             <a:avLst/>
@@ -16436,19 +18059,19 @@
           <p:cNvPr id="33" name="">
             <a:extLst xmlns:a="http://schemas.openxmlformats.org/drawingml/2006/main">
               <a:ext uri="{FF2B5EF4-FFF2-40B4-BE49-F238E27FC236}">
-                <a16:creationId xmlns:a16="http://schemas.microsoft.com/office/drawing/2014/main" id="{3BFD8BA5-341F-4875-B0AF-71B9E2FB1307}"/>
-              </a:ext>
-            </a:extLst>
-          </p:cNvPr>
-          <p:cNvSpPr>
-            <a:spLocks xmlns:a="http://schemas.openxmlformats.org/drawingml/2006/main" noGrp="1"/>
-          </p:cNvSpPr>
-          <p:nvPr/>
-        </p:nvSpPr>
-        <p:spPr>
-          <a:xfrm xmlns:a="http://schemas.openxmlformats.org/drawingml/2006/main" rot="0">
-            <a:off x="5334000" y="2343150"/>
-            <a:ext cx="1733550" cy="590550"/>
+                <a16:creationId xmlns:a16="http://schemas.microsoft.com/office/drawing/2014/main" id="{7D14E734-E3FA-44B4-A852-C7C2421B5DAF}"/>
+              </a:ext>
+            </a:extLst>
+          </p:cNvPr>
+          <p:cNvSpPr>
+            <a:spLocks xmlns:a="http://schemas.openxmlformats.org/drawingml/2006/main" noGrp="1"/>
+          </p:cNvSpPr>
+          <p:nvPr/>
+        </p:nvSpPr>
+        <p:spPr>
+          <a:xfrm xmlns:a="http://schemas.openxmlformats.org/drawingml/2006/main" rot="0">
+            <a:off x="4991100" y="2228850"/>
+            <a:ext cx="1790700" cy="495300"/>
           </a:xfrm>
           <a:prstGeom xmlns:a="http://schemas.openxmlformats.org/drawingml/2006/main" prst="ellipse">
             <a:avLst/>
@@ -16469,19 +18092,19 @@
           <p:cNvPr id="34" name="">
             <a:extLst xmlns:a="http://schemas.openxmlformats.org/drawingml/2006/main">
               <a:ext uri="{FF2B5EF4-FFF2-40B4-BE49-F238E27FC236}">
-                <a16:creationId xmlns:a16="http://schemas.microsoft.com/office/drawing/2014/main" id="{EED87A65-744E-4D73-A80B-8AB0569CB098}"/>
-              </a:ext>
-            </a:extLst>
-          </p:cNvPr>
-          <p:cNvSpPr>
-            <a:spLocks xmlns:a="http://schemas.openxmlformats.org/drawingml/2006/main" noGrp="1"/>
-          </p:cNvSpPr>
-          <p:nvPr/>
-        </p:nvSpPr>
-        <p:spPr>
-          <a:xfrm xmlns:a="http://schemas.openxmlformats.org/drawingml/2006/main" rot="0">
-            <a:off x="5429250" y="2476500"/>
-            <a:ext cx="1543050" cy="323850"/>
+                <a16:creationId xmlns:a16="http://schemas.microsoft.com/office/drawing/2014/main" id="{F82A599D-A167-47C6-B4D1-A4A3486F260B}"/>
+              </a:ext>
+            </a:extLst>
+          </p:cNvPr>
+          <p:cNvSpPr>
+            <a:spLocks xmlns:a="http://schemas.openxmlformats.org/drawingml/2006/main" noGrp="1"/>
+          </p:cNvSpPr>
+          <p:nvPr/>
+        </p:nvSpPr>
+        <p:spPr>
+          <a:xfrm xmlns:a="http://schemas.openxmlformats.org/drawingml/2006/main" rot="0">
+            <a:off x="5086350" y="2362200"/>
+            <a:ext cx="1600200" cy="228600"/>
           </a:xfrm>
           <a:prstGeom xmlns:a="http://schemas.openxmlformats.org/drawingml/2006/main" prst="rect">
             <a:avLst/>
@@ -16527,19 +18150,19 @@
           <p:cNvPr id="35" name="">
             <a:extLst xmlns:a="http://schemas.openxmlformats.org/drawingml/2006/main">
               <a:ext uri="{FF2B5EF4-FFF2-40B4-BE49-F238E27FC236}">
-                <a16:creationId xmlns:a16="http://schemas.microsoft.com/office/drawing/2014/main" id="{E950C153-1AD3-4A52-8B5E-FC1AAA41735F}"/>
-              </a:ext>
-            </a:extLst>
-          </p:cNvPr>
-          <p:cNvSpPr>
-            <a:spLocks xmlns:a="http://schemas.openxmlformats.org/drawingml/2006/main" noGrp="1"/>
-          </p:cNvSpPr>
-          <p:nvPr/>
-        </p:nvSpPr>
-        <p:spPr>
-          <a:xfrm xmlns:a="http://schemas.openxmlformats.org/drawingml/2006/main" rot="0">
-            <a:off x="7429500" y="2343150"/>
-            <a:ext cx="1676400" cy="590550"/>
+                <a16:creationId xmlns:a16="http://schemas.microsoft.com/office/drawing/2014/main" id="{CC049A26-F6CD-4CBD-8770-E4E8FD1DFF56}"/>
+              </a:ext>
+            </a:extLst>
+          </p:cNvPr>
+          <p:cNvSpPr>
+            <a:spLocks xmlns:a="http://schemas.openxmlformats.org/drawingml/2006/main" noGrp="1"/>
+          </p:cNvSpPr>
+          <p:nvPr/>
+        </p:nvSpPr>
+        <p:spPr>
+          <a:xfrm xmlns:a="http://schemas.openxmlformats.org/drawingml/2006/main" rot="0">
+            <a:off x="7258050" y="2228850"/>
+            <a:ext cx="1790700" cy="495300"/>
           </a:xfrm>
           <a:prstGeom xmlns:a="http://schemas.openxmlformats.org/drawingml/2006/main" prst="ellipse">
             <a:avLst/>
@@ -16560,19 +18183,19 @@
           <p:cNvPr id="36" name="">
             <a:extLst xmlns:a="http://schemas.openxmlformats.org/drawingml/2006/main">
               <a:ext uri="{FF2B5EF4-FFF2-40B4-BE49-F238E27FC236}">
-                <a16:creationId xmlns:a16="http://schemas.microsoft.com/office/drawing/2014/main" id="{976A3A33-AE8A-4B82-B3C5-3F015D995ECD}"/>
-              </a:ext>
-            </a:extLst>
-          </p:cNvPr>
-          <p:cNvSpPr>
-            <a:spLocks xmlns:a="http://schemas.openxmlformats.org/drawingml/2006/main" noGrp="1"/>
-          </p:cNvSpPr>
-          <p:nvPr/>
-        </p:nvSpPr>
-        <p:spPr>
-          <a:xfrm xmlns:a="http://schemas.openxmlformats.org/drawingml/2006/main" rot="0">
-            <a:off x="7524750" y="2476500"/>
-            <a:ext cx="1485900" cy="323850"/>
+                <a16:creationId xmlns:a16="http://schemas.microsoft.com/office/drawing/2014/main" id="{772C6D69-CC9B-4BEB-8763-A328CA15C691}"/>
+              </a:ext>
+            </a:extLst>
+          </p:cNvPr>
+          <p:cNvSpPr>
+            <a:spLocks xmlns:a="http://schemas.openxmlformats.org/drawingml/2006/main" noGrp="1"/>
+          </p:cNvSpPr>
+          <p:nvPr/>
+        </p:nvSpPr>
+        <p:spPr>
+          <a:xfrm xmlns:a="http://schemas.openxmlformats.org/drawingml/2006/main" rot="0">
+            <a:off x="7353300" y="2362200"/>
+            <a:ext cx="1600200" cy="228600"/>
           </a:xfrm>
           <a:prstGeom xmlns:a="http://schemas.openxmlformats.org/drawingml/2006/main" prst="rect">
             <a:avLst/>
@@ -16618,19 +18241,19 @@
           <p:cNvPr id="37" name="">
             <a:extLst xmlns:a="http://schemas.openxmlformats.org/drawingml/2006/main">
               <a:ext uri="{FF2B5EF4-FFF2-40B4-BE49-F238E27FC236}">
-                <a16:creationId xmlns:a16="http://schemas.microsoft.com/office/drawing/2014/main" id="{5FAB2BFC-A1DD-4271-8511-FC126639E4E9}"/>
-              </a:ext>
-            </a:extLst>
-          </p:cNvPr>
-          <p:cNvSpPr>
-            <a:spLocks xmlns:a="http://schemas.openxmlformats.org/drawingml/2006/main" noGrp="1"/>
-          </p:cNvSpPr>
-          <p:nvPr/>
-        </p:nvSpPr>
-        <p:spPr>
-          <a:xfrm xmlns:a="http://schemas.openxmlformats.org/drawingml/2006/main" rot="0">
-            <a:off x="3238500" y="3352800"/>
-            <a:ext cx="1809750" cy="590550"/>
+                <a16:creationId xmlns:a16="http://schemas.microsoft.com/office/drawing/2014/main" id="{CFB1DC9D-4388-4674-B10E-8525B4C61BD9}"/>
+              </a:ext>
+            </a:extLst>
+          </p:cNvPr>
+          <p:cNvSpPr>
+            <a:spLocks xmlns:a="http://schemas.openxmlformats.org/drawingml/2006/main" noGrp="1"/>
+          </p:cNvSpPr>
+          <p:nvPr/>
+        </p:nvSpPr>
+        <p:spPr>
+          <a:xfrm xmlns:a="http://schemas.openxmlformats.org/drawingml/2006/main" rot="0">
+            <a:off x="2724150" y="3009900"/>
+            <a:ext cx="1790700" cy="495300"/>
           </a:xfrm>
           <a:prstGeom xmlns:a="http://schemas.openxmlformats.org/drawingml/2006/main" prst="ellipse">
             <a:avLst/>
@@ -16651,19 +18274,19 @@
           <p:cNvPr id="38" name="">
             <a:extLst xmlns:a="http://schemas.openxmlformats.org/drawingml/2006/main">
               <a:ext uri="{FF2B5EF4-FFF2-40B4-BE49-F238E27FC236}">
-                <a16:creationId xmlns:a16="http://schemas.microsoft.com/office/drawing/2014/main" id="{73790262-0E38-4377-8AFC-92AF1F408DE7}"/>
-              </a:ext>
-            </a:extLst>
-          </p:cNvPr>
-          <p:cNvSpPr>
-            <a:spLocks xmlns:a="http://schemas.openxmlformats.org/drawingml/2006/main" noGrp="1"/>
-          </p:cNvSpPr>
-          <p:nvPr/>
-        </p:nvSpPr>
-        <p:spPr>
-          <a:xfrm xmlns:a="http://schemas.openxmlformats.org/drawingml/2006/main" rot="0">
-            <a:off x="3333750" y="3486150"/>
-            <a:ext cx="1619250" cy="323850"/>
+                <a16:creationId xmlns:a16="http://schemas.microsoft.com/office/drawing/2014/main" id="{96912689-8F1F-4102-BB02-A7905811BF86}"/>
+              </a:ext>
+            </a:extLst>
+          </p:cNvPr>
+          <p:cNvSpPr>
+            <a:spLocks xmlns:a="http://schemas.openxmlformats.org/drawingml/2006/main" noGrp="1"/>
+          </p:cNvSpPr>
+          <p:nvPr/>
+        </p:nvSpPr>
+        <p:spPr>
+          <a:xfrm xmlns:a="http://schemas.openxmlformats.org/drawingml/2006/main" rot="0">
+            <a:off x="2819400" y="3143250"/>
+            <a:ext cx="1600200" cy="228600"/>
           </a:xfrm>
           <a:prstGeom xmlns:a="http://schemas.openxmlformats.org/drawingml/2006/main" prst="rect">
             <a:avLst/>
@@ -16699,7 +18322,7 @@
                   <a:srgbClr val="172026"/>
                 </a:solidFill>
               </a:rPr>
-              <a:t>建立警示規則</a:t>
+              <a:t>記錄買進交易</a:t>
             </a:r>
           </a:p>
         </p:txBody>
@@ -16709,19 +18332,19 @@
           <p:cNvPr id="39" name="">
             <a:extLst xmlns:a="http://schemas.openxmlformats.org/drawingml/2006/main">
               <a:ext uri="{FF2B5EF4-FFF2-40B4-BE49-F238E27FC236}">
-                <a16:creationId xmlns:a16="http://schemas.microsoft.com/office/drawing/2014/main" id="{7729FE3A-C225-4509-90DC-066BBA027ED9}"/>
-              </a:ext>
-            </a:extLst>
-          </p:cNvPr>
-          <p:cNvSpPr>
-            <a:spLocks xmlns:a="http://schemas.openxmlformats.org/drawingml/2006/main" noGrp="1"/>
-          </p:cNvSpPr>
-          <p:nvPr/>
-        </p:nvSpPr>
-        <p:spPr>
-          <a:xfrm xmlns:a="http://schemas.openxmlformats.org/drawingml/2006/main" rot="0">
-            <a:off x="5391150" y="3352800"/>
-            <a:ext cx="1676400" cy="590550"/>
+                <a16:creationId xmlns:a16="http://schemas.microsoft.com/office/drawing/2014/main" id="{F27E422C-32AC-42F3-A1BA-C60CE5D79818}"/>
+              </a:ext>
+            </a:extLst>
+          </p:cNvPr>
+          <p:cNvSpPr>
+            <a:spLocks xmlns:a="http://schemas.openxmlformats.org/drawingml/2006/main" noGrp="1"/>
+          </p:cNvSpPr>
+          <p:nvPr/>
+        </p:nvSpPr>
+        <p:spPr>
+          <a:xfrm xmlns:a="http://schemas.openxmlformats.org/drawingml/2006/main" rot="0">
+            <a:off x="4991100" y="3009900"/>
+            <a:ext cx="1790700" cy="495300"/>
           </a:xfrm>
           <a:prstGeom xmlns:a="http://schemas.openxmlformats.org/drawingml/2006/main" prst="ellipse">
             <a:avLst/>
@@ -16742,19 +18365,19 @@
           <p:cNvPr id="40" name="">
             <a:extLst xmlns:a="http://schemas.openxmlformats.org/drawingml/2006/main">
               <a:ext uri="{FF2B5EF4-FFF2-40B4-BE49-F238E27FC236}">
-                <a16:creationId xmlns:a16="http://schemas.microsoft.com/office/drawing/2014/main" id="{5E238328-E3D1-417A-AFCF-A9018AFB1A02}"/>
-              </a:ext>
-            </a:extLst>
-          </p:cNvPr>
-          <p:cNvSpPr>
-            <a:spLocks xmlns:a="http://schemas.openxmlformats.org/drawingml/2006/main" noGrp="1"/>
-          </p:cNvSpPr>
-          <p:nvPr/>
-        </p:nvSpPr>
-        <p:spPr>
-          <a:xfrm xmlns:a="http://schemas.openxmlformats.org/drawingml/2006/main" rot="0">
-            <a:off x="5486400" y="3486150"/>
-            <a:ext cx="1485900" cy="323850"/>
+                <a16:creationId xmlns:a16="http://schemas.microsoft.com/office/drawing/2014/main" id="{375B2C9D-4A3E-4042-B8C3-F7731F7F6C68}"/>
+              </a:ext>
+            </a:extLst>
+          </p:cNvPr>
+          <p:cNvSpPr>
+            <a:spLocks xmlns:a="http://schemas.openxmlformats.org/drawingml/2006/main" noGrp="1"/>
+          </p:cNvSpPr>
+          <p:nvPr/>
+        </p:nvSpPr>
+        <p:spPr>
+          <a:xfrm xmlns:a="http://schemas.openxmlformats.org/drawingml/2006/main" rot="0">
+            <a:off x="5086350" y="3143250"/>
+            <a:ext cx="1600200" cy="228600"/>
           </a:xfrm>
           <a:prstGeom xmlns:a="http://schemas.openxmlformats.org/drawingml/2006/main" prst="rect">
             <a:avLst/>
@@ -16790,7 +18413,7 @@
                   <a:srgbClr val="172026"/>
                 </a:solidFill>
               </a:rPr>
-              <a:t>接收通知</a:t>
+              <a:t>記錄賣出交易</a:t>
             </a:r>
           </a:p>
         </p:txBody>
@@ -16800,19 +18423,19 @@
           <p:cNvPr id="41" name="">
             <a:extLst xmlns:a="http://schemas.openxmlformats.org/drawingml/2006/main">
               <a:ext uri="{FF2B5EF4-FFF2-40B4-BE49-F238E27FC236}">
-                <a16:creationId xmlns:a16="http://schemas.microsoft.com/office/drawing/2014/main" id="{D4FC0501-0508-4522-92CF-C9336021B7E2}"/>
-              </a:ext>
-            </a:extLst>
-          </p:cNvPr>
-          <p:cNvSpPr>
-            <a:spLocks xmlns:a="http://schemas.openxmlformats.org/drawingml/2006/main" noGrp="1"/>
-          </p:cNvSpPr>
-          <p:nvPr/>
-        </p:nvSpPr>
-        <p:spPr>
-          <a:xfrm xmlns:a="http://schemas.openxmlformats.org/drawingml/2006/main" rot="0">
-            <a:off x="7429500" y="3352800"/>
-            <a:ext cx="1676400" cy="590550"/>
+                <a16:creationId xmlns:a16="http://schemas.microsoft.com/office/drawing/2014/main" id="{2C00F7D5-3062-4C43-BDE0-70FAB2FC9B26}"/>
+              </a:ext>
+            </a:extLst>
+          </p:cNvPr>
+          <p:cNvSpPr>
+            <a:spLocks xmlns:a="http://schemas.openxmlformats.org/drawingml/2006/main" noGrp="1"/>
+          </p:cNvSpPr>
+          <p:nvPr/>
+        </p:nvSpPr>
+        <p:spPr>
+          <a:xfrm xmlns:a="http://schemas.openxmlformats.org/drawingml/2006/main" rot="0">
+            <a:off x="7258050" y="3009900"/>
+            <a:ext cx="1790700" cy="495300"/>
           </a:xfrm>
           <a:prstGeom xmlns:a="http://schemas.openxmlformats.org/drawingml/2006/main" prst="ellipse">
             <a:avLst/>
@@ -16833,19 +18456,19 @@
           <p:cNvPr id="42" name="">
             <a:extLst xmlns:a="http://schemas.openxmlformats.org/drawingml/2006/main">
               <a:ext uri="{FF2B5EF4-FFF2-40B4-BE49-F238E27FC236}">
-                <a16:creationId xmlns:a16="http://schemas.microsoft.com/office/drawing/2014/main" id="{CCFD2775-6D0A-4B48-9887-0CDAB8C87D36}"/>
-              </a:ext>
-            </a:extLst>
-          </p:cNvPr>
-          <p:cNvSpPr>
-            <a:spLocks xmlns:a="http://schemas.openxmlformats.org/drawingml/2006/main" noGrp="1"/>
-          </p:cNvSpPr>
-          <p:nvPr/>
-        </p:nvSpPr>
-        <p:spPr>
-          <a:xfrm xmlns:a="http://schemas.openxmlformats.org/drawingml/2006/main" rot="0">
-            <a:off x="7524750" y="3486150"/>
-            <a:ext cx="1485900" cy="323850"/>
+                <a16:creationId xmlns:a16="http://schemas.microsoft.com/office/drawing/2014/main" id="{93FEAFF1-3869-4165-BF0B-744DF4F5EA50}"/>
+              </a:ext>
+            </a:extLst>
+          </p:cNvPr>
+          <p:cNvSpPr>
+            <a:spLocks xmlns:a="http://schemas.openxmlformats.org/drawingml/2006/main" noGrp="1"/>
+          </p:cNvSpPr>
+          <p:nvPr/>
+        </p:nvSpPr>
+        <p:spPr>
+          <a:xfrm xmlns:a="http://schemas.openxmlformats.org/drawingml/2006/main" rot="0">
+            <a:off x="7353300" y="3143250"/>
+            <a:ext cx="1600200" cy="228600"/>
           </a:xfrm>
           <a:prstGeom xmlns:a="http://schemas.openxmlformats.org/drawingml/2006/main" prst="rect">
             <a:avLst/>
@@ -16881,7 +18504,7 @@
                   <a:srgbClr val="172026"/>
                 </a:solidFill>
               </a:rPr>
-              <a:t>執行策略回測</a:t>
+              <a:t>建立警示規則</a:t>
             </a:r>
           </a:p>
         </p:txBody>
@@ -16891,19 +18514,19 @@
           <p:cNvPr id="43" name="">
             <a:extLst xmlns:a="http://schemas.openxmlformats.org/drawingml/2006/main">
               <a:ext uri="{FF2B5EF4-FFF2-40B4-BE49-F238E27FC236}">
-                <a16:creationId xmlns:a16="http://schemas.microsoft.com/office/drawing/2014/main" id="{316DCD51-EB04-4668-A738-72776D37BCDB}"/>
-              </a:ext>
-            </a:extLst>
-          </p:cNvPr>
-          <p:cNvSpPr>
-            <a:spLocks xmlns:a="http://schemas.openxmlformats.org/drawingml/2006/main" noGrp="1"/>
-          </p:cNvSpPr>
-          <p:nvPr/>
-        </p:nvSpPr>
-        <p:spPr>
-          <a:xfrm xmlns:a="http://schemas.openxmlformats.org/drawingml/2006/main" rot="0">
-            <a:off x="4171950" y="4381500"/>
-            <a:ext cx="1962150" cy="590550"/>
+                <a16:creationId xmlns:a16="http://schemas.microsoft.com/office/drawing/2014/main" id="{3A6AE70D-B363-4B09-9B53-D80A3F4373BC}"/>
+              </a:ext>
+            </a:extLst>
+          </p:cNvPr>
+          <p:cNvSpPr>
+            <a:spLocks xmlns:a="http://schemas.openxmlformats.org/drawingml/2006/main" noGrp="1"/>
+          </p:cNvSpPr>
+          <p:nvPr/>
+        </p:nvSpPr>
+        <p:spPr>
+          <a:xfrm xmlns:a="http://schemas.openxmlformats.org/drawingml/2006/main" rot="0">
+            <a:off x="2724150" y="3790950"/>
+            <a:ext cx="1790700" cy="495300"/>
           </a:xfrm>
           <a:prstGeom xmlns:a="http://schemas.openxmlformats.org/drawingml/2006/main" prst="ellipse">
             <a:avLst/>
@@ -16924,19 +18547,19 @@
           <p:cNvPr id="44" name="">
             <a:extLst xmlns:a="http://schemas.openxmlformats.org/drawingml/2006/main">
               <a:ext uri="{FF2B5EF4-FFF2-40B4-BE49-F238E27FC236}">
-                <a16:creationId xmlns:a16="http://schemas.microsoft.com/office/drawing/2014/main" id="{83F76D63-AA2C-4CBD-B7F3-31CA4CA5D02A}"/>
-              </a:ext>
-            </a:extLst>
-          </p:cNvPr>
-          <p:cNvSpPr>
-            <a:spLocks xmlns:a="http://schemas.openxmlformats.org/drawingml/2006/main" noGrp="1"/>
-          </p:cNvSpPr>
-          <p:nvPr/>
-        </p:nvSpPr>
-        <p:spPr>
-          <a:xfrm xmlns:a="http://schemas.openxmlformats.org/drawingml/2006/main" rot="0">
-            <a:off x="4267200" y="4514850"/>
-            <a:ext cx="1771650" cy="323850"/>
+                <a16:creationId xmlns:a16="http://schemas.microsoft.com/office/drawing/2014/main" id="{6739AEF2-65D2-429F-B503-78407400AFF4}"/>
+              </a:ext>
+            </a:extLst>
+          </p:cNvPr>
+          <p:cNvSpPr>
+            <a:spLocks xmlns:a="http://schemas.openxmlformats.org/drawingml/2006/main" noGrp="1"/>
+          </p:cNvSpPr>
+          <p:nvPr/>
+        </p:nvSpPr>
+        <p:spPr>
+          <a:xfrm xmlns:a="http://schemas.openxmlformats.org/drawingml/2006/main" rot="0">
+            <a:off x="2819400" y="3924300"/>
+            <a:ext cx="1600200" cy="228600"/>
           </a:xfrm>
           <a:prstGeom xmlns:a="http://schemas.openxmlformats.org/drawingml/2006/main" prst="rect">
             <a:avLst/>
@@ -16972,7 +18595,7 @@
                   <a:srgbClr val="172026"/>
                 </a:solidFill>
               </a:rPr>
-              <a:t>查看回測結果</a:t>
+              <a:t>啟用 / 停用警示</a:t>
             </a:r>
           </a:p>
         </p:txBody>
@@ -16982,19 +18605,19 @@
           <p:cNvPr id="45" name="">
             <a:extLst xmlns:a="http://schemas.openxmlformats.org/drawingml/2006/main">
               <a:ext uri="{FF2B5EF4-FFF2-40B4-BE49-F238E27FC236}">
-                <a16:creationId xmlns:a16="http://schemas.microsoft.com/office/drawing/2014/main" id="{FCB6AB73-0613-49C7-B410-147582B4FD81}"/>
-              </a:ext>
-            </a:extLst>
-          </p:cNvPr>
-          <p:cNvSpPr>
-            <a:spLocks xmlns:a="http://schemas.openxmlformats.org/drawingml/2006/main" noGrp="1"/>
-          </p:cNvSpPr>
-          <p:nvPr/>
-        </p:nvSpPr>
-        <p:spPr>
-          <a:xfrm xmlns:a="http://schemas.openxmlformats.org/drawingml/2006/main" rot="0">
-            <a:off x="6743700" y="4381500"/>
-            <a:ext cx="1981200" cy="590550"/>
+                <a16:creationId xmlns:a16="http://schemas.microsoft.com/office/drawing/2014/main" id="{B93EF994-CAA5-4321-84CC-E6CCC5C56E9D}"/>
+              </a:ext>
+            </a:extLst>
+          </p:cNvPr>
+          <p:cNvSpPr>
+            <a:spLocks xmlns:a="http://schemas.openxmlformats.org/drawingml/2006/main" noGrp="1"/>
+          </p:cNvSpPr>
+          <p:nvPr/>
+        </p:nvSpPr>
+        <p:spPr>
+          <a:xfrm xmlns:a="http://schemas.openxmlformats.org/drawingml/2006/main" rot="0">
+            <a:off x="4991100" y="3790950"/>
+            <a:ext cx="1790700" cy="495300"/>
           </a:xfrm>
           <a:prstGeom xmlns:a="http://schemas.openxmlformats.org/drawingml/2006/main" prst="ellipse">
             <a:avLst/>
@@ -17015,19 +18638,19 @@
           <p:cNvPr id="46" name="">
             <a:extLst xmlns:a="http://schemas.openxmlformats.org/drawingml/2006/main">
               <a:ext uri="{FF2B5EF4-FFF2-40B4-BE49-F238E27FC236}">
-                <a16:creationId xmlns:a16="http://schemas.microsoft.com/office/drawing/2014/main" id="{34A617F2-316E-4ACB-87EA-FB50CD372E3D}"/>
-              </a:ext>
-            </a:extLst>
-          </p:cNvPr>
-          <p:cNvSpPr>
-            <a:spLocks xmlns:a="http://schemas.openxmlformats.org/drawingml/2006/main" noGrp="1"/>
-          </p:cNvSpPr>
-          <p:nvPr/>
-        </p:nvSpPr>
-        <p:spPr>
-          <a:xfrm xmlns:a="http://schemas.openxmlformats.org/drawingml/2006/main" rot="0">
-            <a:off x="6838950" y="4514850"/>
-            <a:ext cx="1790700" cy="323850"/>
+                <a16:creationId xmlns:a16="http://schemas.microsoft.com/office/drawing/2014/main" id="{E72D4448-B370-4321-BC6B-5A5D297CADB6}"/>
+              </a:ext>
+            </a:extLst>
+          </p:cNvPr>
+          <p:cNvSpPr>
+            <a:spLocks xmlns:a="http://schemas.openxmlformats.org/drawingml/2006/main" noGrp="1"/>
+          </p:cNvSpPr>
+          <p:nvPr/>
+        </p:nvSpPr>
+        <p:spPr>
+          <a:xfrm xmlns:a="http://schemas.openxmlformats.org/drawingml/2006/main" rot="0">
+            <a:off x="5086350" y="3924300"/>
+            <a:ext cx="1600200" cy="228600"/>
           </a:xfrm>
           <a:prstGeom xmlns:a="http://schemas.openxmlformats.org/drawingml/2006/main" prst="rect">
             <a:avLst/>
@@ -17063,7 +18686,7 @@
                   <a:srgbClr val="172026"/>
                 </a:solidFill>
               </a:rPr>
-              <a:t>更新市場資料</a:t>
+              <a:t>查看通知與已讀</a:t>
             </a:r>
           </a:p>
         </p:txBody>
@@ -17073,29 +18696,29 @@
           <p:cNvPr id="47" name="">
             <a:extLst xmlns:a="http://schemas.openxmlformats.org/drawingml/2006/main">
               <a:ext uri="{FF2B5EF4-FFF2-40B4-BE49-F238E27FC236}">
-                <a16:creationId xmlns:a16="http://schemas.microsoft.com/office/drawing/2014/main" id="{1C69A8E0-8703-4C49-95A0-1207583D6115}"/>
-              </a:ext>
-            </a:extLst>
-          </p:cNvPr>
-          <p:cNvSpPr>
-            <a:spLocks xmlns:a="http://schemas.openxmlformats.org/drawingml/2006/main" noGrp="1"/>
-          </p:cNvSpPr>
-          <p:nvPr/>
-        </p:nvSpPr>
-        <p:spPr>
-          <a:xfrm xmlns:a="http://schemas.openxmlformats.org/drawingml/2006/main" rot="0">
-            <a:off x="1847850" y="2571750"/>
-            <a:ext cx="876300" cy="209550"/>
-          </a:xfrm>
-          <a:prstGeom xmlns:a="http://schemas.openxmlformats.org/drawingml/2006/main" prst="rightArrow">
-            <a:avLst/>
-          </a:prstGeom>
-          <a:solidFill xmlns:a="http://schemas.openxmlformats.org/drawingml/2006/main">
-            <a:srgbClr val="172026"/>
-          </a:solidFill>
-          <a:ln xmlns:a="http://schemas.openxmlformats.org/drawingml/2006/main" w="0">
-            <a:solidFill>
-              <a:srgbClr val="172026"/>
+                <a16:creationId xmlns:a16="http://schemas.microsoft.com/office/drawing/2014/main" id="{331BCA49-8C7B-4946-B3F4-16D84D658DAB}"/>
+              </a:ext>
+            </a:extLst>
+          </p:cNvPr>
+          <p:cNvSpPr>
+            <a:spLocks xmlns:a="http://schemas.openxmlformats.org/drawingml/2006/main" noGrp="1"/>
+          </p:cNvSpPr>
+          <p:nvPr/>
+        </p:nvSpPr>
+        <p:spPr>
+          <a:xfrm xmlns:a="http://schemas.openxmlformats.org/drawingml/2006/main" rot="0">
+            <a:off x="7258050" y="3790950"/>
+            <a:ext cx="1790700" cy="495300"/>
+          </a:xfrm>
+          <a:prstGeom xmlns:a="http://schemas.openxmlformats.org/drawingml/2006/main" prst="ellipse">
+            <a:avLst/>
+          </a:prstGeom>
+          <a:solidFill xmlns:a="http://schemas.openxmlformats.org/drawingml/2006/main">
+            <a:srgbClr val="FFFDF8"/>
+          </a:solidFill>
+          <a:ln xmlns:a="http://schemas.openxmlformats.org/drawingml/2006/main" w="11430">
+            <a:solidFill>
+              <a:srgbClr val="23313B"/>
             </a:solidFill>
             <a:prstDash val="solid"/>
           </a:ln>
@@ -17106,184 +18729,19 @@
           <p:cNvPr id="48" name="">
             <a:extLst xmlns:a="http://schemas.openxmlformats.org/drawingml/2006/main">
               <a:ext uri="{FF2B5EF4-FFF2-40B4-BE49-F238E27FC236}">
-                <a16:creationId xmlns:a16="http://schemas.microsoft.com/office/drawing/2014/main" id="{78ED980E-CF55-435E-B343-AFF5ACB6F981}"/>
-              </a:ext>
-            </a:extLst>
-          </p:cNvPr>
-          <p:cNvSpPr>
-            <a:spLocks xmlns:a="http://schemas.openxmlformats.org/drawingml/2006/main" noGrp="1"/>
-          </p:cNvSpPr>
-          <p:nvPr/>
-        </p:nvSpPr>
-        <p:spPr>
-          <a:xfrm xmlns:a="http://schemas.openxmlformats.org/drawingml/2006/main" rot="0">
-            <a:off x="1847850" y="2743200"/>
-            <a:ext cx="876300" cy="209550"/>
-          </a:xfrm>
-          <a:prstGeom xmlns:a="http://schemas.openxmlformats.org/drawingml/2006/main" prst="rightArrow">
-            <a:avLst/>
-          </a:prstGeom>
-          <a:solidFill xmlns:a="http://schemas.openxmlformats.org/drawingml/2006/main">
-            <a:srgbClr val="172026"/>
-          </a:solidFill>
-          <a:ln xmlns:a="http://schemas.openxmlformats.org/drawingml/2006/main" w="0">
-            <a:solidFill>
-              <a:srgbClr val="172026"/>
-            </a:solidFill>
-            <a:prstDash val="solid"/>
-          </a:ln>
-        </p:spPr>
-      </p:sp>
-      <p:sp>
-        <p:nvSpPr>
-          <p:cNvPr id="49" name="">
-            <a:extLst xmlns:a="http://schemas.openxmlformats.org/drawingml/2006/main">
-              <a:ext uri="{FF2B5EF4-FFF2-40B4-BE49-F238E27FC236}">
-                <a16:creationId xmlns:a16="http://schemas.microsoft.com/office/drawing/2014/main" id="{A4EFECC9-DF2D-47FB-9B08-4985D64E9515}"/>
-              </a:ext>
-            </a:extLst>
-          </p:cNvPr>
-          <p:cNvSpPr>
-            <a:spLocks xmlns:a="http://schemas.openxmlformats.org/drawingml/2006/main" noGrp="1"/>
-          </p:cNvSpPr>
-          <p:nvPr/>
-        </p:nvSpPr>
-        <p:spPr>
-          <a:xfrm xmlns:a="http://schemas.openxmlformats.org/drawingml/2006/main" rot="0">
-            <a:off x="1847850" y="3733800"/>
-            <a:ext cx="1219200" cy="209550"/>
-          </a:xfrm>
-          <a:prstGeom xmlns:a="http://schemas.openxmlformats.org/drawingml/2006/main" prst="rightArrow">
-            <a:avLst/>
-          </a:prstGeom>
-          <a:solidFill xmlns:a="http://schemas.openxmlformats.org/drawingml/2006/main">
-            <a:srgbClr val="172026"/>
-          </a:solidFill>
-          <a:ln xmlns:a="http://schemas.openxmlformats.org/drawingml/2006/main" w="0">
-            <a:solidFill>
-              <a:srgbClr val="172026"/>
-            </a:solidFill>
-            <a:prstDash val="solid"/>
-          </a:ln>
-        </p:spPr>
-      </p:sp>
-      <p:sp>
-        <p:nvSpPr>
-          <p:cNvPr id="50" name="">
-            <a:extLst xmlns:a="http://schemas.openxmlformats.org/drawingml/2006/main">
-              <a:ext uri="{FF2B5EF4-FFF2-40B4-BE49-F238E27FC236}">
-                <a16:creationId xmlns:a16="http://schemas.microsoft.com/office/drawing/2014/main" id="{0FBD6A21-0559-49E1-834B-1B7D7B35299F}"/>
-              </a:ext>
-            </a:extLst>
-          </p:cNvPr>
-          <p:cNvSpPr>
-            <a:spLocks xmlns:a="http://schemas.openxmlformats.org/drawingml/2006/main" noGrp="1"/>
-          </p:cNvSpPr>
-          <p:nvPr/>
-        </p:nvSpPr>
-        <p:spPr>
-          <a:xfrm xmlns:a="http://schemas.openxmlformats.org/drawingml/2006/main" rot="0">
-            <a:off x="1847850" y="4819650"/>
-            <a:ext cx="1219200" cy="209550"/>
-          </a:xfrm>
-          <a:prstGeom xmlns:a="http://schemas.openxmlformats.org/drawingml/2006/main" prst="rightArrow">
-            <a:avLst/>
-          </a:prstGeom>
-          <a:solidFill xmlns:a="http://schemas.openxmlformats.org/drawingml/2006/main">
-            <a:srgbClr val="172026"/>
-          </a:solidFill>
-          <a:ln xmlns:a="http://schemas.openxmlformats.org/drawingml/2006/main" w="0">
-            <a:solidFill>
-              <a:srgbClr val="172026"/>
-            </a:solidFill>
-            <a:prstDash val="solid"/>
-          </a:ln>
-        </p:spPr>
-      </p:sp>
-      <p:sp>
-        <p:nvSpPr>
-          <p:cNvPr id="51" name="">
-            <a:extLst xmlns:a="http://schemas.openxmlformats.org/drawingml/2006/main">
-              <a:ext uri="{FF2B5EF4-FFF2-40B4-BE49-F238E27FC236}">
-                <a16:creationId xmlns:a16="http://schemas.microsoft.com/office/drawing/2014/main" id="{0E63B3FE-17F6-498E-A68F-C6B7F911DF1B}"/>
-              </a:ext>
-            </a:extLst>
-          </p:cNvPr>
-          <p:cNvSpPr>
-            <a:spLocks xmlns:a="http://schemas.openxmlformats.org/drawingml/2006/main" noGrp="1"/>
-          </p:cNvSpPr>
-          <p:nvPr/>
-        </p:nvSpPr>
-        <p:spPr>
-          <a:xfrm xmlns:a="http://schemas.openxmlformats.org/drawingml/2006/main" rot="0">
-            <a:off x="9163050" y="4552950"/>
-            <a:ext cx="876300" cy="209550"/>
-          </a:xfrm>
-          <a:prstGeom xmlns:a="http://schemas.openxmlformats.org/drawingml/2006/main" prst="rightArrow">
-            <a:avLst/>
-          </a:prstGeom>
-          <a:solidFill xmlns:a="http://schemas.openxmlformats.org/drawingml/2006/main">
-            <a:srgbClr val="172026"/>
-          </a:solidFill>
-          <a:ln xmlns:a="http://schemas.openxmlformats.org/drawingml/2006/main" w="0">
-            <a:solidFill>
-              <a:srgbClr val="172026"/>
-            </a:solidFill>
-            <a:prstDash val="solid"/>
-          </a:ln>
-        </p:spPr>
-      </p:sp>
-      <p:sp>
-        <p:nvSpPr>
-          <p:cNvPr id="52" name="">
-            <a:extLst xmlns:a="http://schemas.openxmlformats.org/drawingml/2006/main">
-              <a:ext uri="{FF2B5EF4-FFF2-40B4-BE49-F238E27FC236}">
-                <a16:creationId xmlns:a16="http://schemas.microsoft.com/office/drawing/2014/main" id="{0F89B353-8ABD-446B-8DCA-E5F7FBC86C8E}"/>
-              </a:ext>
-            </a:extLst>
-          </p:cNvPr>
-          <p:cNvSpPr>
-            <a:spLocks xmlns:a="http://schemas.openxmlformats.org/drawingml/2006/main" noGrp="1"/>
-          </p:cNvSpPr>
-          <p:nvPr/>
-        </p:nvSpPr>
-        <p:spPr>
-          <a:xfrm xmlns:a="http://schemas.openxmlformats.org/drawingml/2006/main" rot="0">
-            <a:off x="9353550" y="3543300"/>
-            <a:ext cx="876300" cy="209550"/>
-          </a:xfrm>
-          <a:prstGeom xmlns:a="http://schemas.openxmlformats.org/drawingml/2006/main" prst="rightArrow">
-            <a:avLst/>
-          </a:prstGeom>
-          <a:solidFill xmlns:a="http://schemas.openxmlformats.org/drawingml/2006/main">
-            <a:srgbClr val="172026"/>
-          </a:solidFill>
-          <a:ln xmlns:a="http://schemas.openxmlformats.org/drawingml/2006/main" w="0">
-            <a:solidFill>
-              <a:srgbClr val="172026"/>
-            </a:solidFill>
-            <a:prstDash val="solid"/>
-          </a:ln>
-        </p:spPr>
-      </p:sp>
-      <p:sp>
-        <p:nvSpPr>
-          <p:cNvPr id="53" name="">
-            <a:extLst xmlns:a="http://schemas.openxmlformats.org/drawingml/2006/main">
-              <a:ext uri="{FF2B5EF4-FFF2-40B4-BE49-F238E27FC236}">
-                <a16:creationId xmlns:a16="http://schemas.microsoft.com/office/drawing/2014/main" id="{62BC749D-5BAB-40A0-8191-21C67FB2945F}"/>
-              </a:ext>
-            </a:extLst>
-          </p:cNvPr>
-          <p:cNvSpPr>
-            <a:spLocks xmlns:a="http://schemas.openxmlformats.org/drawingml/2006/main" noGrp="1"/>
-          </p:cNvSpPr>
-          <p:nvPr/>
-        </p:nvSpPr>
-        <p:spPr>
-          <a:xfrm xmlns:a="http://schemas.openxmlformats.org/drawingml/2006/main" rot="0">
-            <a:off x="609600" y="6000750"/>
-            <a:ext cx="6096000" cy="342900"/>
+                <a16:creationId xmlns:a16="http://schemas.microsoft.com/office/drawing/2014/main" id="{973F886F-6755-400D-84D8-40C0F32B447B}"/>
+              </a:ext>
+            </a:extLst>
+          </p:cNvPr>
+          <p:cNvSpPr>
+            <a:spLocks xmlns:a="http://schemas.openxmlformats.org/drawingml/2006/main" noGrp="1"/>
+          </p:cNvSpPr>
+          <p:nvPr/>
+        </p:nvSpPr>
+        <p:spPr>
+          <a:xfrm xmlns:a="http://schemas.openxmlformats.org/drawingml/2006/main" rot="0">
+            <a:off x="7353300" y="3924300"/>
+            <a:ext cx="1600200" cy="228600"/>
           </a:xfrm>
           <a:prstGeom xmlns:a="http://schemas.openxmlformats.org/drawingml/2006/main" prst="rect">
             <a:avLst/>
@@ -17303,45 +18761,78 @@
           </a:ln>
         </p:spPr>
         <p:txBody>
-          <a:bodyPr xmlns:a="http://schemas.openxmlformats.org/drawingml/2006/main" lIns="0" tIns="0" rIns="0" bIns="0" anchor="t"/>
+          <a:bodyPr xmlns:a="http://schemas.openxmlformats.org/drawingml/2006/main" lIns="0" tIns="0" rIns="0" bIns="0" anchor="ctr"/>
           <a:lstStyle xmlns:a="http://schemas.openxmlformats.org/drawingml/2006/main"/>
           <a:p xmlns:a="http://schemas.openxmlformats.org/drawingml/2006/main">
-            <a:pPr algn="l">
-              <a:defRPr sz="975" b="0">
-                <a:solidFill>
-                  <a:srgbClr val="4F5B66"/>
-                </a:solidFill>
-              </a:defRPr>
-            </a:pPr>
-            <a:r>
-              <a:rPr sz="975" b="0">
-                <a:solidFill>
-                  <a:srgbClr val="4F5B66"/>
-                </a:solidFill>
-              </a:rPr>
-              <a:t>使用者可查詢股票、管理投資組合、建立警示規則，並執行與查看策略回測。</a:t>
+            <a:pPr algn="ctr">
+              <a:defRPr sz="1050" b="1">
+                <a:solidFill>
+                  <a:srgbClr val="172026"/>
+                </a:solidFill>
+              </a:defRPr>
+            </a:pPr>
+            <a:r>
+              <a:rPr sz="1050" b="1">
+                <a:solidFill>
+                  <a:srgbClr val="172026"/>
+                </a:solidFill>
+              </a:rPr>
+              <a:t>執行策略回測</a:t>
             </a:r>
           </a:p>
         </p:txBody>
       </p:sp>
       <p:sp>
         <p:nvSpPr>
-          <p:cNvPr id="54" name="">
-            <a:extLst xmlns:a="http://schemas.openxmlformats.org/drawingml/2006/main">
-              <a:ext uri="{FF2B5EF4-FFF2-40B4-BE49-F238E27FC236}">
-                <a16:creationId xmlns:a16="http://schemas.microsoft.com/office/drawing/2014/main" id="{1777B692-A3A6-4693-9F28-F866352F782C}"/>
-              </a:ext>
-            </a:extLst>
-          </p:cNvPr>
-          <p:cNvSpPr>
-            <a:spLocks xmlns:a="http://schemas.openxmlformats.org/drawingml/2006/main" noGrp="1"/>
-          </p:cNvSpPr>
-          <p:nvPr/>
-        </p:nvSpPr>
-        <p:spPr>
-          <a:xfrm xmlns:a="http://schemas.openxmlformats.org/drawingml/2006/main" rot="0">
-            <a:off x="6724650" y="6000750"/>
-            <a:ext cx="4857750" cy="342900"/>
+          <p:cNvPr id="49" name="">
+            <a:extLst xmlns:a="http://schemas.openxmlformats.org/drawingml/2006/main">
+              <a:ext uri="{FF2B5EF4-FFF2-40B4-BE49-F238E27FC236}">
+                <a16:creationId xmlns:a16="http://schemas.microsoft.com/office/drawing/2014/main" id="{A1C5C18C-8BAE-4C58-B048-E11216D336AA}"/>
+              </a:ext>
+            </a:extLst>
+          </p:cNvPr>
+          <p:cNvSpPr>
+            <a:spLocks xmlns:a="http://schemas.openxmlformats.org/drawingml/2006/main" noGrp="1"/>
+          </p:cNvSpPr>
+          <p:nvPr/>
+        </p:nvSpPr>
+        <p:spPr>
+          <a:xfrm xmlns:a="http://schemas.openxmlformats.org/drawingml/2006/main" rot="0">
+            <a:off x="3867150" y="4572000"/>
+            <a:ext cx="1866900" cy="495300"/>
+          </a:xfrm>
+          <a:prstGeom xmlns:a="http://schemas.openxmlformats.org/drawingml/2006/main" prst="ellipse">
+            <a:avLst/>
+          </a:prstGeom>
+          <a:solidFill xmlns:a="http://schemas.openxmlformats.org/drawingml/2006/main">
+            <a:srgbClr val="FFFDF8"/>
+          </a:solidFill>
+          <a:ln xmlns:a="http://schemas.openxmlformats.org/drawingml/2006/main" w="11430">
+            <a:solidFill>
+              <a:srgbClr val="23313B"/>
+            </a:solidFill>
+            <a:prstDash val="solid"/>
+          </a:ln>
+        </p:spPr>
+      </p:sp>
+      <p:sp>
+        <p:nvSpPr>
+          <p:cNvPr id="50" name="">
+            <a:extLst xmlns:a="http://schemas.openxmlformats.org/drawingml/2006/main">
+              <a:ext uri="{FF2B5EF4-FFF2-40B4-BE49-F238E27FC236}">
+                <a16:creationId xmlns:a16="http://schemas.microsoft.com/office/drawing/2014/main" id="{A2A0903E-3363-46E2-A579-9D4888D7D0B2}"/>
+              </a:ext>
+            </a:extLst>
+          </p:cNvPr>
+          <p:cNvSpPr>
+            <a:spLocks xmlns:a="http://schemas.openxmlformats.org/drawingml/2006/main" noGrp="1"/>
+          </p:cNvSpPr>
+          <p:nvPr/>
+        </p:nvSpPr>
+        <p:spPr>
+          <a:xfrm xmlns:a="http://schemas.openxmlformats.org/drawingml/2006/main" rot="0">
+            <a:off x="3962400" y="4705350"/>
+            <a:ext cx="1676400" cy="228600"/>
           </a:xfrm>
           <a:prstGeom xmlns:a="http://schemas.openxmlformats.org/drawingml/2006/main" prst="rect">
             <a:avLst/>
@@ -17361,45 +18852,78 @@
           </a:ln>
         </p:spPr>
         <p:txBody>
-          <a:bodyPr xmlns:a="http://schemas.openxmlformats.org/drawingml/2006/main" lIns="0" tIns="0" rIns="0" bIns="0" anchor="t"/>
+          <a:bodyPr xmlns:a="http://schemas.openxmlformats.org/drawingml/2006/main" lIns="0" tIns="0" rIns="0" bIns="0" anchor="ctr"/>
           <a:lstStyle xmlns:a="http://schemas.openxmlformats.org/drawingml/2006/main"/>
           <a:p xmlns:a="http://schemas.openxmlformats.org/drawingml/2006/main">
-            <a:pPr algn="r">
-              <a:defRPr sz="975" b="0">
-                <a:solidFill>
-                  <a:srgbClr val="4F5B66"/>
-                </a:solidFill>
-              </a:defRPr>
-            </a:pPr>
-            <a:r>
-              <a:rPr sz="975" b="0">
-                <a:solidFill>
-                  <a:srgbClr val="4F5B66"/>
-                </a:solidFill>
-              </a:rPr>
-              <a:t>管理者與 FinLab 資料來源負責市場資料更新。</a:t>
+            <a:pPr algn="ctr">
+              <a:defRPr sz="1050" b="1">
+                <a:solidFill>
+                  <a:srgbClr val="172026"/>
+                </a:solidFill>
+              </a:defRPr>
+            </a:pPr>
+            <a:r>
+              <a:rPr sz="1050" b="1">
+                <a:solidFill>
+                  <a:srgbClr val="172026"/>
+                </a:solidFill>
+              </a:rPr>
+              <a:t>查看回測結果</a:t>
             </a:r>
           </a:p>
         </p:txBody>
       </p:sp>
       <p:sp>
         <p:nvSpPr>
-          <p:cNvPr id="55" name="">
-            <a:extLst xmlns:a="http://schemas.openxmlformats.org/drawingml/2006/main">
-              <a:ext uri="{FF2B5EF4-FFF2-40B4-BE49-F238E27FC236}">
-                <a16:creationId xmlns:a16="http://schemas.microsoft.com/office/drawing/2014/main" id="{D15EABDC-BEEC-4C14-9034-3AC10B3F03A8}"/>
-              </a:ext>
-            </a:extLst>
-          </p:cNvPr>
-          <p:cNvSpPr>
-            <a:spLocks xmlns:a="http://schemas.openxmlformats.org/drawingml/2006/main" noGrp="1"/>
-          </p:cNvSpPr>
-          <p:nvPr/>
-        </p:nvSpPr>
-        <p:spPr>
-          <a:xfrm xmlns:a="http://schemas.openxmlformats.org/drawingml/2006/main" rot="0">
-            <a:off x="609600" y="6534150"/>
-            <a:ext cx="9715500" cy="171450"/>
+          <p:cNvPr id="51" name="">
+            <a:extLst xmlns:a="http://schemas.openxmlformats.org/drawingml/2006/main">
+              <a:ext uri="{FF2B5EF4-FFF2-40B4-BE49-F238E27FC236}">
+                <a16:creationId xmlns:a16="http://schemas.microsoft.com/office/drawing/2014/main" id="{CC111CB8-2BE3-4A87-ABB6-8C36E819F0E6}"/>
+              </a:ext>
+            </a:extLst>
+          </p:cNvPr>
+          <p:cNvSpPr>
+            <a:spLocks xmlns:a="http://schemas.openxmlformats.org/drawingml/2006/main" noGrp="1"/>
+          </p:cNvSpPr>
+          <p:nvPr/>
+        </p:nvSpPr>
+        <p:spPr>
+          <a:xfrm xmlns:a="http://schemas.openxmlformats.org/drawingml/2006/main" rot="0">
+            <a:off x="6324600" y="4572000"/>
+            <a:ext cx="1866900" cy="495300"/>
+          </a:xfrm>
+          <a:prstGeom xmlns:a="http://schemas.openxmlformats.org/drawingml/2006/main" prst="ellipse">
+            <a:avLst/>
+          </a:prstGeom>
+          <a:solidFill xmlns:a="http://schemas.openxmlformats.org/drawingml/2006/main">
+            <a:srgbClr val="FFFDF8"/>
+          </a:solidFill>
+          <a:ln xmlns:a="http://schemas.openxmlformats.org/drawingml/2006/main" w="11430">
+            <a:solidFill>
+              <a:srgbClr val="23313B"/>
+            </a:solidFill>
+            <a:prstDash val="solid"/>
+          </a:ln>
+        </p:spPr>
+      </p:sp>
+      <p:sp>
+        <p:nvSpPr>
+          <p:cNvPr id="52" name="">
+            <a:extLst xmlns:a="http://schemas.openxmlformats.org/drawingml/2006/main">
+              <a:ext uri="{FF2B5EF4-FFF2-40B4-BE49-F238E27FC236}">
+                <a16:creationId xmlns:a16="http://schemas.microsoft.com/office/drawing/2014/main" id="{76BD015E-E3BC-4D2D-AC03-1B544DBDD02E}"/>
+              </a:ext>
+            </a:extLst>
+          </p:cNvPr>
+          <p:cNvSpPr>
+            <a:spLocks xmlns:a="http://schemas.openxmlformats.org/drawingml/2006/main" noGrp="1"/>
+          </p:cNvSpPr>
+          <p:nvPr/>
+        </p:nvSpPr>
+        <p:spPr>
+          <a:xfrm xmlns:a="http://schemas.openxmlformats.org/drawingml/2006/main" rot="0">
+            <a:off x="6419850" y="4705350"/>
+            <a:ext cx="1676400" cy="228600"/>
           </a:xfrm>
           <a:prstGeom xmlns:a="http://schemas.openxmlformats.org/drawingml/2006/main" prst="rect">
             <a:avLst/>
@@ -17419,6 +18943,378 @@
           </a:ln>
         </p:spPr>
         <p:txBody>
+          <a:bodyPr xmlns:a="http://schemas.openxmlformats.org/drawingml/2006/main" lIns="0" tIns="0" rIns="0" bIns="0" anchor="ctr"/>
+          <a:lstStyle xmlns:a="http://schemas.openxmlformats.org/drawingml/2006/main"/>
+          <a:p xmlns:a="http://schemas.openxmlformats.org/drawingml/2006/main">
+            <a:pPr algn="ctr">
+              <a:defRPr sz="1050" b="1">
+                <a:solidFill>
+                  <a:srgbClr val="172026"/>
+                </a:solidFill>
+              </a:defRPr>
+            </a:pPr>
+            <a:r>
+              <a:rPr sz="1050" b="1">
+                <a:solidFill>
+                  <a:srgbClr val="172026"/>
+                </a:solidFill>
+              </a:rPr>
+              <a:t>更新市場資料</a:t>
+            </a:r>
+          </a:p>
+        </p:txBody>
+      </p:sp>
+      <p:sp>
+        <p:nvSpPr>
+          <p:cNvPr id="53" name="">
+            <a:extLst xmlns:a="http://schemas.openxmlformats.org/drawingml/2006/main">
+              <a:ext uri="{FF2B5EF4-FFF2-40B4-BE49-F238E27FC236}">
+                <a16:creationId xmlns:a16="http://schemas.microsoft.com/office/drawing/2014/main" id="{D3183048-FCE2-4B7F-9ECE-2CC1E44AE254}"/>
+              </a:ext>
+            </a:extLst>
+          </p:cNvPr>
+          <p:cNvSpPr>
+            <a:spLocks xmlns:a="http://schemas.openxmlformats.org/drawingml/2006/main" noGrp="1"/>
+          </p:cNvSpPr>
+          <p:nvPr/>
+        </p:nvSpPr>
+        <p:spPr>
+          <a:xfrm xmlns:a="http://schemas.openxmlformats.org/drawingml/2006/main" rot="0">
+            <a:off x="1847850" y="2400300"/>
+            <a:ext cx="800100" cy="190500"/>
+          </a:xfrm>
+          <a:prstGeom xmlns:a="http://schemas.openxmlformats.org/drawingml/2006/main" prst="rightArrow">
+            <a:avLst/>
+          </a:prstGeom>
+          <a:solidFill xmlns:a="http://schemas.openxmlformats.org/drawingml/2006/main">
+            <a:srgbClr val="172026"/>
+          </a:solidFill>
+          <a:ln xmlns:a="http://schemas.openxmlformats.org/drawingml/2006/main" w="0">
+            <a:solidFill>
+              <a:srgbClr val="172026"/>
+            </a:solidFill>
+            <a:prstDash val="solid"/>
+          </a:ln>
+        </p:spPr>
+      </p:sp>
+      <p:sp>
+        <p:nvSpPr>
+          <p:cNvPr id="54" name="">
+            <a:extLst xmlns:a="http://schemas.openxmlformats.org/drawingml/2006/main">
+              <a:ext uri="{FF2B5EF4-FFF2-40B4-BE49-F238E27FC236}">
+                <a16:creationId xmlns:a16="http://schemas.microsoft.com/office/drawing/2014/main" id="{AAB0256A-C1A0-466B-B950-8AAB889B1EEA}"/>
+              </a:ext>
+            </a:extLst>
+          </p:cNvPr>
+          <p:cNvSpPr>
+            <a:spLocks xmlns:a="http://schemas.openxmlformats.org/drawingml/2006/main" noGrp="1"/>
+          </p:cNvSpPr>
+          <p:nvPr/>
+        </p:nvSpPr>
+        <p:spPr>
+          <a:xfrm xmlns:a="http://schemas.openxmlformats.org/drawingml/2006/main" rot="0">
+            <a:off x="1847850" y="3181350"/>
+            <a:ext cx="800100" cy="190500"/>
+          </a:xfrm>
+          <a:prstGeom xmlns:a="http://schemas.openxmlformats.org/drawingml/2006/main" prst="rightArrow">
+            <a:avLst/>
+          </a:prstGeom>
+          <a:solidFill xmlns:a="http://schemas.openxmlformats.org/drawingml/2006/main">
+            <a:srgbClr val="172026"/>
+          </a:solidFill>
+          <a:ln xmlns:a="http://schemas.openxmlformats.org/drawingml/2006/main" w="0">
+            <a:solidFill>
+              <a:srgbClr val="172026"/>
+            </a:solidFill>
+            <a:prstDash val="solid"/>
+          </a:ln>
+        </p:spPr>
+      </p:sp>
+      <p:sp>
+        <p:nvSpPr>
+          <p:cNvPr id="55" name="">
+            <a:extLst xmlns:a="http://schemas.openxmlformats.org/drawingml/2006/main">
+              <a:ext uri="{FF2B5EF4-FFF2-40B4-BE49-F238E27FC236}">
+                <a16:creationId xmlns:a16="http://schemas.microsoft.com/office/drawing/2014/main" id="{E9A8D28A-88E9-42CE-ACEA-E93434E58EBB}"/>
+              </a:ext>
+            </a:extLst>
+          </p:cNvPr>
+          <p:cNvSpPr>
+            <a:spLocks xmlns:a="http://schemas.openxmlformats.org/drawingml/2006/main" noGrp="1"/>
+          </p:cNvSpPr>
+          <p:nvPr/>
+        </p:nvSpPr>
+        <p:spPr>
+          <a:xfrm xmlns:a="http://schemas.openxmlformats.org/drawingml/2006/main" rot="0">
+            <a:off x="1847850" y="3962400"/>
+            <a:ext cx="800100" cy="190500"/>
+          </a:xfrm>
+          <a:prstGeom xmlns:a="http://schemas.openxmlformats.org/drawingml/2006/main" prst="rightArrow">
+            <a:avLst/>
+          </a:prstGeom>
+          <a:solidFill xmlns:a="http://schemas.openxmlformats.org/drawingml/2006/main">
+            <a:srgbClr val="172026"/>
+          </a:solidFill>
+          <a:ln xmlns:a="http://schemas.openxmlformats.org/drawingml/2006/main" w="0">
+            <a:solidFill>
+              <a:srgbClr val="172026"/>
+            </a:solidFill>
+            <a:prstDash val="solid"/>
+          </a:ln>
+        </p:spPr>
+      </p:sp>
+      <p:sp>
+        <p:nvSpPr>
+          <p:cNvPr id="56" name="">
+            <a:extLst xmlns:a="http://schemas.openxmlformats.org/drawingml/2006/main">
+              <a:ext uri="{FF2B5EF4-FFF2-40B4-BE49-F238E27FC236}">
+                <a16:creationId xmlns:a16="http://schemas.microsoft.com/office/drawing/2014/main" id="{61813404-7459-4432-8797-7CCC78D79554}"/>
+              </a:ext>
+            </a:extLst>
+          </p:cNvPr>
+          <p:cNvSpPr>
+            <a:spLocks xmlns:a="http://schemas.openxmlformats.org/drawingml/2006/main" noGrp="1"/>
+          </p:cNvSpPr>
+          <p:nvPr/>
+        </p:nvSpPr>
+        <p:spPr>
+          <a:xfrm xmlns:a="http://schemas.openxmlformats.org/drawingml/2006/main" rot="0">
+            <a:off x="1847850" y="4762500"/>
+            <a:ext cx="1066800" cy="190500"/>
+          </a:xfrm>
+          <a:prstGeom xmlns:a="http://schemas.openxmlformats.org/drawingml/2006/main" prst="rightArrow">
+            <a:avLst/>
+          </a:prstGeom>
+          <a:solidFill xmlns:a="http://schemas.openxmlformats.org/drawingml/2006/main">
+            <a:srgbClr val="172026"/>
+          </a:solidFill>
+          <a:ln xmlns:a="http://schemas.openxmlformats.org/drawingml/2006/main" w="0">
+            <a:solidFill>
+              <a:srgbClr val="172026"/>
+            </a:solidFill>
+            <a:prstDash val="solid"/>
+          </a:ln>
+        </p:spPr>
+      </p:sp>
+      <p:sp>
+        <p:nvSpPr>
+          <p:cNvPr id="57" name="">
+            <a:extLst xmlns:a="http://schemas.openxmlformats.org/drawingml/2006/main">
+              <a:ext uri="{FF2B5EF4-FFF2-40B4-BE49-F238E27FC236}">
+                <a16:creationId xmlns:a16="http://schemas.microsoft.com/office/drawing/2014/main" id="{00A10040-7632-4F5D-9140-841D92648620}"/>
+              </a:ext>
+            </a:extLst>
+          </p:cNvPr>
+          <p:cNvSpPr>
+            <a:spLocks xmlns:a="http://schemas.openxmlformats.org/drawingml/2006/main" noGrp="1"/>
+          </p:cNvSpPr>
+          <p:nvPr/>
+        </p:nvSpPr>
+        <p:spPr>
+          <a:xfrm xmlns:a="http://schemas.openxmlformats.org/drawingml/2006/main" rot="0">
+            <a:off x="9163050" y="4762500"/>
+            <a:ext cx="876300" cy="190500"/>
+          </a:xfrm>
+          <a:prstGeom xmlns:a="http://schemas.openxmlformats.org/drawingml/2006/main" prst="rightArrow">
+            <a:avLst/>
+          </a:prstGeom>
+          <a:solidFill xmlns:a="http://schemas.openxmlformats.org/drawingml/2006/main">
+            <a:srgbClr val="172026"/>
+          </a:solidFill>
+          <a:ln xmlns:a="http://schemas.openxmlformats.org/drawingml/2006/main" w="0">
+            <a:solidFill>
+              <a:srgbClr val="172026"/>
+            </a:solidFill>
+            <a:prstDash val="solid"/>
+          </a:ln>
+        </p:spPr>
+      </p:sp>
+      <p:sp>
+        <p:nvSpPr>
+          <p:cNvPr id="58" name="">
+            <a:extLst xmlns:a="http://schemas.openxmlformats.org/drawingml/2006/main">
+              <a:ext uri="{FF2B5EF4-FFF2-40B4-BE49-F238E27FC236}">
+                <a16:creationId xmlns:a16="http://schemas.microsoft.com/office/drawing/2014/main" id="{9B8A4CEF-3133-4B77-944C-ADFF494522B3}"/>
+              </a:ext>
+            </a:extLst>
+          </p:cNvPr>
+          <p:cNvSpPr>
+            <a:spLocks xmlns:a="http://schemas.openxmlformats.org/drawingml/2006/main" noGrp="1"/>
+          </p:cNvSpPr>
+          <p:nvPr/>
+        </p:nvSpPr>
+        <p:spPr>
+          <a:xfrm xmlns:a="http://schemas.openxmlformats.org/drawingml/2006/main" rot="0">
+            <a:off x="9353550" y="4762500"/>
+            <a:ext cx="685800" cy="190500"/>
+          </a:xfrm>
+          <a:prstGeom xmlns:a="http://schemas.openxmlformats.org/drawingml/2006/main" prst="rightArrow">
+            <a:avLst/>
+          </a:prstGeom>
+          <a:solidFill xmlns:a="http://schemas.openxmlformats.org/drawingml/2006/main">
+            <a:srgbClr val="172026"/>
+          </a:solidFill>
+          <a:ln xmlns:a="http://schemas.openxmlformats.org/drawingml/2006/main" w="0">
+            <a:solidFill>
+              <a:srgbClr val="172026"/>
+            </a:solidFill>
+            <a:prstDash val="solid"/>
+          </a:ln>
+        </p:spPr>
+      </p:sp>
+      <p:sp>
+        <p:nvSpPr>
+          <p:cNvPr id="59" name="">
+            <a:extLst xmlns:a="http://schemas.openxmlformats.org/drawingml/2006/main">
+              <a:ext uri="{FF2B5EF4-FFF2-40B4-BE49-F238E27FC236}">
+                <a16:creationId xmlns:a16="http://schemas.microsoft.com/office/drawing/2014/main" id="{5ADDBF21-0BCB-4E96-BD87-53D4D55136CF}"/>
+              </a:ext>
+            </a:extLst>
+          </p:cNvPr>
+          <p:cNvSpPr>
+            <a:spLocks xmlns:a="http://schemas.openxmlformats.org/drawingml/2006/main" noGrp="1"/>
+          </p:cNvSpPr>
+          <p:nvPr/>
+        </p:nvSpPr>
+        <p:spPr>
+          <a:xfrm xmlns:a="http://schemas.openxmlformats.org/drawingml/2006/main" rot="0">
+            <a:off x="609600" y="6000750"/>
+            <a:ext cx="6667500" cy="342900"/>
+          </a:xfrm>
+          <a:prstGeom xmlns:a="http://schemas.openxmlformats.org/drawingml/2006/main" prst="rect">
+            <a:avLst/>
+          </a:prstGeom>
+          <a:solidFill xmlns:a="http://schemas.openxmlformats.org/drawingml/2006/main">
+            <a:srgbClr val="000000">
+              <a:alpha val="0"/>
+            </a:srgbClr>
+          </a:solidFill>
+          <a:ln xmlns:a="http://schemas.openxmlformats.org/drawingml/2006/main" w="0">
+            <a:solidFill>
+              <a:srgbClr val="000000">
+                <a:alpha val="0"/>
+              </a:srgbClr>
+            </a:solidFill>
+            <a:prstDash val="solid"/>
+          </a:ln>
+        </p:spPr>
+        <p:txBody>
+          <a:bodyPr xmlns:a="http://schemas.openxmlformats.org/drawingml/2006/main" lIns="0" tIns="0" rIns="0" bIns="0" anchor="t"/>
+          <a:lstStyle xmlns:a="http://schemas.openxmlformats.org/drawingml/2006/main"/>
+          <a:p xmlns:a="http://schemas.openxmlformats.org/drawingml/2006/main">
+            <a:pPr algn="l">
+              <a:defRPr sz="975" b="0">
+                <a:solidFill>
+                  <a:srgbClr val="4F5B66"/>
+                </a:solidFill>
+              </a:defRPr>
+            </a:pPr>
+            <a:r>
+              <a:rPr sz="975" b="0">
+                <a:solidFill>
+                  <a:srgbClr val="4F5B66"/>
+                </a:solidFill>
+              </a:rPr>
+              <a:t>主清單共 11 個 use cases，已涵蓋查詢、交易、警示、通知、回測與資料維護。</a:t>
+            </a:r>
+          </a:p>
+        </p:txBody>
+      </p:sp>
+      <p:sp>
+        <p:nvSpPr>
+          <p:cNvPr id="60" name="">
+            <a:extLst xmlns:a="http://schemas.openxmlformats.org/drawingml/2006/main">
+              <a:ext uri="{FF2B5EF4-FFF2-40B4-BE49-F238E27FC236}">
+                <a16:creationId xmlns:a16="http://schemas.microsoft.com/office/drawing/2014/main" id="{567CE5A1-09E1-49E4-B33D-23DCEF0C0BD8}"/>
+              </a:ext>
+            </a:extLst>
+          </p:cNvPr>
+          <p:cNvSpPr>
+            <a:spLocks xmlns:a="http://schemas.openxmlformats.org/drawingml/2006/main" noGrp="1"/>
+          </p:cNvSpPr>
+          <p:nvPr/>
+        </p:nvSpPr>
+        <p:spPr>
+          <a:xfrm xmlns:a="http://schemas.openxmlformats.org/drawingml/2006/main" rot="0">
+            <a:off x="6724650" y="6000750"/>
+            <a:ext cx="4857750" cy="342900"/>
+          </a:xfrm>
+          <a:prstGeom xmlns:a="http://schemas.openxmlformats.org/drawingml/2006/main" prst="rect">
+            <a:avLst/>
+          </a:prstGeom>
+          <a:solidFill xmlns:a="http://schemas.openxmlformats.org/drawingml/2006/main">
+            <a:srgbClr val="000000">
+              <a:alpha val="0"/>
+            </a:srgbClr>
+          </a:solidFill>
+          <a:ln xmlns:a="http://schemas.openxmlformats.org/drawingml/2006/main" w="0">
+            <a:solidFill>
+              <a:srgbClr val="000000">
+                <a:alpha val="0"/>
+              </a:srgbClr>
+            </a:solidFill>
+            <a:prstDash val="solid"/>
+          </a:ln>
+        </p:spPr>
+        <p:txBody>
+          <a:bodyPr xmlns:a="http://schemas.openxmlformats.org/drawingml/2006/main" lIns="0" tIns="0" rIns="0" bIns="0" anchor="t"/>
+          <a:lstStyle xmlns:a="http://schemas.openxmlformats.org/drawingml/2006/main"/>
+          <a:p xmlns:a="http://schemas.openxmlformats.org/drawingml/2006/main">
+            <a:pPr algn="r">
+              <a:defRPr sz="975" b="0">
+                <a:solidFill>
+                  <a:srgbClr val="4F5B66"/>
+                </a:solidFill>
+              </a:defRPr>
+            </a:pPr>
+            <a:r>
+              <a:rPr sz="975" b="0">
+                <a:solidFill>
+                  <a:srgbClr val="4F5B66"/>
+                </a:solidFill>
+              </a:rPr>
+              <a:t>其中交易驗證與警示啟停能更明確展示 OOAD 的流程與物件責任。</a:t>
+            </a:r>
+          </a:p>
+        </p:txBody>
+      </p:sp>
+      <p:sp>
+        <p:nvSpPr>
+          <p:cNvPr id="61" name="">
+            <a:extLst xmlns:a="http://schemas.openxmlformats.org/drawingml/2006/main">
+              <a:ext uri="{FF2B5EF4-FFF2-40B4-BE49-F238E27FC236}">
+                <a16:creationId xmlns:a16="http://schemas.microsoft.com/office/drawing/2014/main" id="{BC40F155-4EC3-479C-A9BB-ACFE6363FD20}"/>
+              </a:ext>
+            </a:extLst>
+          </p:cNvPr>
+          <p:cNvSpPr>
+            <a:spLocks xmlns:a="http://schemas.openxmlformats.org/drawingml/2006/main" noGrp="1"/>
+          </p:cNvSpPr>
+          <p:nvPr/>
+        </p:nvSpPr>
+        <p:spPr>
+          <a:xfrm xmlns:a="http://schemas.openxmlformats.org/drawingml/2006/main" rot="0">
+            <a:off x="609600" y="6534150"/>
+            <a:ext cx="9715500" cy="171450"/>
+          </a:xfrm>
+          <a:prstGeom xmlns:a="http://schemas.openxmlformats.org/drawingml/2006/main" prst="rect">
+            <a:avLst/>
+          </a:prstGeom>
+          <a:solidFill xmlns:a="http://schemas.openxmlformats.org/drawingml/2006/main">
+            <a:srgbClr val="000000">
+              <a:alpha val="0"/>
+            </a:srgbClr>
+          </a:solidFill>
+          <a:ln xmlns:a="http://schemas.openxmlformats.org/drawingml/2006/main" w="0">
+            <a:solidFill>
+              <a:srgbClr val="000000">
+                <a:alpha val="0"/>
+              </a:srgbClr>
+            </a:solidFill>
+            <a:prstDash val="solid"/>
+          </a:ln>
+        </p:spPr>
+        <p:txBody>
           <a:bodyPr xmlns:a="http://schemas.openxmlformats.org/drawingml/2006/main" lIns="0" tIns="0" rIns="0" bIns="0" anchor="t"/>
           <a:lstStyle xmlns:a="http://schemas.openxmlformats.org/drawingml/2006/main"/>
           <a:p xmlns:a="http://schemas.openxmlformats.org/drawingml/2006/main">
@@ -17443,7 +19339,7 @@
     </p:spTree>
     <p:extLst>
       <p:ext uri="{BB962C8B-B14F-4D97-AF65-F5344CB8AC3E}">
-        <p14:creationId xmlns:p14="http://schemas.microsoft.com/office/powerpoint/2010/main" val="1948808572"/>
+        <p14:creationId xmlns:p14="http://schemas.microsoft.com/office/powerpoint/2010/main" val="748234966"/>
       </p:ext>
     </p:extLst>
   </p:cSld>
@@ -17474,7 +19370,7 @@
           <p:cNvPr id="1" name="">
             <a:extLst xmlns:a="http://schemas.openxmlformats.org/drawingml/2006/main">
               <a:ext uri="{FF2B5EF4-FFF2-40B4-BE49-F238E27FC236}">
-                <a16:creationId xmlns:a16="http://schemas.microsoft.com/office/drawing/2014/main" id="{E0E40663-47ED-493C-B792-32FD6C3514DA}"/>
+                <a16:creationId xmlns:a16="http://schemas.microsoft.com/office/drawing/2014/main" id="{2A5163F7-1911-4B87-953F-048568560079}"/>
               </a:ext>
             </a:extLst>
           </p:cNvPr>
@@ -17509,7 +19405,7 @@
           <p:cNvPr id="2" name="">
             <a:extLst xmlns:a="http://schemas.openxmlformats.org/drawingml/2006/main">
               <a:ext uri="{FF2B5EF4-FFF2-40B4-BE49-F238E27FC236}">
-                <a16:creationId xmlns:a16="http://schemas.microsoft.com/office/drawing/2014/main" id="{5919AA6A-1A0F-4862-9969-0B1E6E8E4154}"/>
+                <a16:creationId xmlns:a16="http://schemas.microsoft.com/office/drawing/2014/main" id="{EE603F60-E5F0-4DA2-ADD8-2439F2B59B2D}"/>
               </a:ext>
             </a:extLst>
           </p:cNvPr>
@@ -17544,7 +19440,7 @@
           <p:cNvPr id="3" name="">
             <a:extLst xmlns:a="http://schemas.openxmlformats.org/drawingml/2006/main">
               <a:ext uri="{FF2B5EF4-FFF2-40B4-BE49-F238E27FC236}">
-                <a16:creationId xmlns:a16="http://schemas.microsoft.com/office/drawing/2014/main" id="{0CFC1A66-A3ED-4BDF-880F-B7E69723737C}"/>
+                <a16:creationId xmlns:a16="http://schemas.microsoft.com/office/drawing/2014/main" id="{333F22FC-427C-49F6-90D1-BBBC43D329F4}"/>
               </a:ext>
             </a:extLst>
           </p:cNvPr>
@@ -17602,7 +19498,7 @@
           <p:cNvPr id="4" name="">
             <a:extLst xmlns:a="http://schemas.openxmlformats.org/drawingml/2006/main">
               <a:ext uri="{FF2B5EF4-FFF2-40B4-BE49-F238E27FC236}">
-                <a16:creationId xmlns:a16="http://schemas.microsoft.com/office/drawing/2014/main" id="{DB34E347-E698-4818-AF6B-C5D273A12E9E}"/>
+                <a16:creationId xmlns:a16="http://schemas.microsoft.com/office/drawing/2014/main" id="{AC02927D-DAE9-4B60-87FE-92C313342A1E}"/>
               </a:ext>
             </a:extLst>
           </p:cNvPr>
@@ -17660,7 +19556,7 @@
           <p:cNvPr id="5" name="">
             <a:extLst xmlns:a="http://schemas.openxmlformats.org/drawingml/2006/main">
               <a:ext uri="{FF2B5EF4-FFF2-40B4-BE49-F238E27FC236}">
-                <a16:creationId xmlns:a16="http://schemas.microsoft.com/office/drawing/2014/main" id="{635727FF-6CB2-4908-A658-53612D35EE4D}"/>
+                <a16:creationId xmlns:a16="http://schemas.microsoft.com/office/drawing/2014/main" id="{B0C76F25-958A-4EEE-841A-F30E39FD730E}"/>
               </a:ext>
             </a:extLst>
           </p:cNvPr>
@@ -17695,7 +19591,7 @@
           <p:cNvPr id="6" name="">
             <a:extLst xmlns:a="http://schemas.openxmlformats.org/drawingml/2006/main">
               <a:ext uri="{FF2B5EF4-FFF2-40B4-BE49-F238E27FC236}">
-                <a16:creationId xmlns:a16="http://schemas.microsoft.com/office/drawing/2014/main" id="{47B22D01-0611-4986-90DE-0F0347C88FDE}"/>
+                <a16:creationId xmlns:a16="http://schemas.microsoft.com/office/drawing/2014/main" id="{D37343D9-11CC-41C5-900B-9E21693B7628}"/>
               </a:ext>
             </a:extLst>
           </p:cNvPr>
@@ -17753,7 +19649,7 @@
           <p:cNvPr id="7" name="">
             <a:extLst xmlns:a="http://schemas.openxmlformats.org/drawingml/2006/main">
               <a:ext uri="{FF2B5EF4-FFF2-40B4-BE49-F238E27FC236}">
-                <a16:creationId xmlns:a16="http://schemas.microsoft.com/office/drawing/2014/main" id="{A4905F5E-F840-45BE-B866-41CA68CECFF6}"/>
+                <a16:creationId xmlns:a16="http://schemas.microsoft.com/office/drawing/2014/main" id="{3BA3F395-394D-45B2-8E77-97888228A8DE}"/>
               </a:ext>
             </a:extLst>
           </p:cNvPr>
@@ -17811,7 +19707,7 @@
           <p:cNvPr id="8" name="">
             <a:extLst xmlns:a="http://schemas.openxmlformats.org/drawingml/2006/main">
               <a:ext uri="{FF2B5EF4-FFF2-40B4-BE49-F238E27FC236}">
-                <a16:creationId xmlns:a16="http://schemas.microsoft.com/office/drawing/2014/main" id="{5CF2BFD8-D562-4F00-8CD6-92DA62DC1E57}"/>
+                <a16:creationId xmlns:a16="http://schemas.microsoft.com/office/drawing/2014/main" id="{5297071F-AF06-4CAC-A0EA-7D0D99662A08}"/>
               </a:ext>
             </a:extLst>
           </p:cNvPr>
@@ -17844,7 +19740,7 @@
           <p:cNvPr id="9" name="">
             <a:extLst xmlns:a="http://schemas.openxmlformats.org/drawingml/2006/main">
               <a:ext uri="{FF2B5EF4-FFF2-40B4-BE49-F238E27FC236}">
-                <a16:creationId xmlns:a16="http://schemas.microsoft.com/office/drawing/2014/main" id="{A245073F-8517-4A4D-8E90-B1584E8054A1}"/>
+                <a16:creationId xmlns:a16="http://schemas.microsoft.com/office/drawing/2014/main" id="{9A45A51B-B489-4E6B-BAD8-C406026AA02D}"/>
               </a:ext>
             </a:extLst>
           </p:cNvPr>
@@ -17902,7 +19798,7 @@
           <p:cNvPr id="10" name="">
             <a:extLst xmlns:a="http://schemas.openxmlformats.org/drawingml/2006/main">
               <a:ext uri="{FF2B5EF4-FFF2-40B4-BE49-F238E27FC236}">
-                <a16:creationId xmlns:a16="http://schemas.microsoft.com/office/drawing/2014/main" id="{89CF9D0B-DA44-4E76-ACB8-7E465543295D}"/>
+                <a16:creationId xmlns:a16="http://schemas.microsoft.com/office/drawing/2014/main" id="{4BBAAAF9-28E4-4B1E-8BDF-1FF802EFEEA3}"/>
               </a:ext>
             </a:extLst>
           </p:cNvPr>
@@ -17937,7 +19833,7 @@
           <p:cNvPr id="11" name="">
             <a:extLst xmlns:a="http://schemas.openxmlformats.org/drawingml/2006/main">
               <a:ext uri="{FF2B5EF4-FFF2-40B4-BE49-F238E27FC236}">
-                <a16:creationId xmlns:a16="http://schemas.microsoft.com/office/drawing/2014/main" id="{BC84CC45-C048-4981-9946-AEBBEE0B05DE}"/>
+                <a16:creationId xmlns:a16="http://schemas.microsoft.com/office/drawing/2014/main" id="{CBB58B9B-8574-4729-87E2-E118995A1BCD}"/>
               </a:ext>
             </a:extLst>
           </p:cNvPr>
@@ -18012,7 +19908,7 @@
           <p:cNvPr id="12" name="">
             <a:extLst xmlns:a="http://schemas.openxmlformats.org/drawingml/2006/main">
               <a:ext uri="{FF2B5EF4-FFF2-40B4-BE49-F238E27FC236}">
-                <a16:creationId xmlns:a16="http://schemas.microsoft.com/office/drawing/2014/main" id="{5B5E812B-D954-4E84-8A77-C59C13C6E488}"/>
+                <a16:creationId xmlns:a16="http://schemas.microsoft.com/office/drawing/2014/main" id="{A4E73469-2B5E-4FDB-8A5F-7269EBACD02A}"/>
               </a:ext>
             </a:extLst>
           </p:cNvPr>
@@ -18047,7 +19943,7 @@
           <p:cNvPr id="13" name="">
             <a:extLst xmlns:a="http://schemas.openxmlformats.org/drawingml/2006/main">
               <a:ext uri="{FF2B5EF4-FFF2-40B4-BE49-F238E27FC236}">
-                <a16:creationId xmlns:a16="http://schemas.microsoft.com/office/drawing/2014/main" id="{33F4E192-6C2E-4B0B-AF52-3596E5387E3D}"/>
+                <a16:creationId xmlns:a16="http://schemas.microsoft.com/office/drawing/2014/main" id="{35D82D43-BC42-47A8-AB3C-FEC62ACCD0C4}"/>
               </a:ext>
             </a:extLst>
           </p:cNvPr>
@@ -18122,7 +20018,7 @@
           <p:cNvPr id="14" name="">
             <a:extLst xmlns:a="http://schemas.openxmlformats.org/drawingml/2006/main">
               <a:ext uri="{FF2B5EF4-FFF2-40B4-BE49-F238E27FC236}">
-                <a16:creationId xmlns:a16="http://schemas.microsoft.com/office/drawing/2014/main" id="{F0329C55-3A6A-4DCF-B06A-C40B3C93D77A}"/>
+                <a16:creationId xmlns:a16="http://schemas.microsoft.com/office/drawing/2014/main" id="{5CABEA0A-F8AD-44D9-8BEB-CCE81415F3F3}"/>
               </a:ext>
             </a:extLst>
           </p:cNvPr>
@@ -18157,7 +20053,7 @@
           <p:cNvPr id="15" name="">
             <a:extLst xmlns:a="http://schemas.openxmlformats.org/drawingml/2006/main">
               <a:ext uri="{FF2B5EF4-FFF2-40B4-BE49-F238E27FC236}">
-                <a16:creationId xmlns:a16="http://schemas.microsoft.com/office/drawing/2014/main" id="{1A3253D7-F17C-4B59-A800-9B2ADC536C1B}"/>
+                <a16:creationId xmlns:a16="http://schemas.microsoft.com/office/drawing/2014/main" id="{7CD61133-C758-4B74-8F09-AEE19A418D72}"/>
               </a:ext>
             </a:extLst>
           </p:cNvPr>
@@ -18232,7 +20128,7 @@
           <p:cNvPr id="16" name="">
             <a:extLst xmlns:a="http://schemas.openxmlformats.org/drawingml/2006/main">
               <a:ext uri="{FF2B5EF4-FFF2-40B4-BE49-F238E27FC236}">
-                <a16:creationId xmlns:a16="http://schemas.microsoft.com/office/drawing/2014/main" id="{81404318-933D-4A37-A6BF-8992D2307792}"/>
+                <a16:creationId xmlns:a16="http://schemas.microsoft.com/office/drawing/2014/main" id="{48E82FE3-E76E-4822-8F71-DAB6108E2C37}"/>
               </a:ext>
             </a:extLst>
           </p:cNvPr>
@@ -18267,7 +20163,7 @@
           <p:cNvPr id="17" name="">
             <a:extLst xmlns:a="http://schemas.openxmlformats.org/drawingml/2006/main">
               <a:ext uri="{FF2B5EF4-FFF2-40B4-BE49-F238E27FC236}">
-                <a16:creationId xmlns:a16="http://schemas.microsoft.com/office/drawing/2014/main" id="{CAFA2BDD-9992-4F70-B7F2-0859406015AA}"/>
+                <a16:creationId xmlns:a16="http://schemas.microsoft.com/office/drawing/2014/main" id="{68A3C13C-4E4D-42FC-A604-D85DDCB33F0E}"/>
               </a:ext>
             </a:extLst>
           </p:cNvPr>
@@ -18342,7 +20238,7 @@
           <p:cNvPr id="18" name="">
             <a:extLst xmlns:a="http://schemas.openxmlformats.org/drawingml/2006/main">
               <a:ext uri="{FF2B5EF4-FFF2-40B4-BE49-F238E27FC236}">
-                <a16:creationId xmlns:a16="http://schemas.microsoft.com/office/drawing/2014/main" id="{A480EA41-F457-4B9D-BDEE-B648EECB7F9D}"/>
+                <a16:creationId xmlns:a16="http://schemas.microsoft.com/office/drawing/2014/main" id="{CD7CE637-42C7-4F70-854A-881494013034}"/>
               </a:ext>
             </a:extLst>
           </p:cNvPr>
@@ -18377,7 +20273,7 @@
           <p:cNvPr id="19" name="">
             <a:extLst xmlns:a="http://schemas.openxmlformats.org/drawingml/2006/main">
               <a:ext uri="{FF2B5EF4-FFF2-40B4-BE49-F238E27FC236}">
-                <a16:creationId xmlns:a16="http://schemas.microsoft.com/office/drawing/2014/main" id="{F52015DA-0130-42FF-A0CB-A1FBF7A1BFD4}"/>
+                <a16:creationId xmlns:a16="http://schemas.microsoft.com/office/drawing/2014/main" id="{0AE134D0-9AA8-4866-A7C6-A7B800D804DF}"/>
               </a:ext>
             </a:extLst>
           </p:cNvPr>
@@ -18452,7 +20348,7 @@
           <p:cNvPr id="20" name="">
             <a:extLst xmlns:a="http://schemas.openxmlformats.org/drawingml/2006/main">
               <a:ext uri="{FF2B5EF4-FFF2-40B4-BE49-F238E27FC236}">
-                <a16:creationId xmlns:a16="http://schemas.microsoft.com/office/drawing/2014/main" id="{265ADBBD-B92B-499F-B618-410A8DB61479}"/>
+                <a16:creationId xmlns:a16="http://schemas.microsoft.com/office/drawing/2014/main" id="{14ABECD6-8DBA-404F-8399-3CEBD1EF5F07}"/>
               </a:ext>
             </a:extLst>
           </p:cNvPr>
@@ -18485,7 +20381,7 @@
           <p:cNvPr id="21" name="">
             <a:extLst xmlns:a="http://schemas.openxmlformats.org/drawingml/2006/main">
               <a:ext uri="{FF2B5EF4-FFF2-40B4-BE49-F238E27FC236}">
-                <a16:creationId xmlns:a16="http://schemas.microsoft.com/office/drawing/2014/main" id="{A85459A7-0CFC-464F-932F-3A018934575D}"/>
+                <a16:creationId xmlns:a16="http://schemas.microsoft.com/office/drawing/2014/main" id="{0992B308-6DDE-4EB5-81A1-5BE2FC93E43A}"/>
               </a:ext>
             </a:extLst>
           </p:cNvPr>
@@ -18518,7 +20414,7 @@
           <p:cNvPr id="22" name="">
             <a:extLst xmlns:a="http://schemas.openxmlformats.org/drawingml/2006/main">
               <a:ext uri="{FF2B5EF4-FFF2-40B4-BE49-F238E27FC236}">
-                <a16:creationId xmlns:a16="http://schemas.microsoft.com/office/drawing/2014/main" id="{4D56C5A7-18FB-4C91-ABEC-E29C3D583564}"/>
+                <a16:creationId xmlns:a16="http://schemas.microsoft.com/office/drawing/2014/main" id="{BCDAE9AD-A3EB-498F-B200-048EDC91F396}"/>
               </a:ext>
             </a:extLst>
           </p:cNvPr>
@@ -18593,7 +20489,7 @@
           <p:cNvPr id="23" name="">
             <a:extLst xmlns:a="http://schemas.openxmlformats.org/drawingml/2006/main">
               <a:ext uri="{FF2B5EF4-FFF2-40B4-BE49-F238E27FC236}">
-                <a16:creationId xmlns:a16="http://schemas.microsoft.com/office/drawing/2014/main" id="{51307EB8-91BD-4AFA-8178-4969DD7753B8}"/>
+                <a16:creationId xmlns:a16="http://schemas.microsoft.com/office/drawing/2014/main" id="{6054539E-837F-4EF4-8B59-C03CE7016851}"/>
               </a:ext>
             </a:extLst>
           </p:cNvPr>
@@ -18626,7 +20522,7 @@
           <p:cNvPr id="24" name="">
             <a:extLst xmlns:a="http://schemas.openxmlformats.org/drawingml/2006/main">
               <a:ext uri="{FF2B5EF4-FFF2-40B4-BE49-F238E27FC236}">
-                <a16:creationId xmlns:a16="http://schemas.microsoft.com/office/drawing/2014/main" id="{BB9F9336-5AAF-4378-B164-EB89B66A2E7C}"/>
+                <a16:creationId xmlns:a16="http://schemas.microsoft.com/office/drawing/2014/main" id="{C6D39A10-2BF7-4485-96F5-C9F5AD5A410F}"/>
               </a:ext>
             </a:extLst>
           </p:cNvPr>
@@ -18659,7 +20555,7 @@
           <p:cNvPr id="25" name="">
             <a:extLst xmlns:a="http://schemas.openxmlformats.org/drawingml/2006/main">
               <a:ext uri="{FF2B5EF4-FFF2-40B4-BE49-F238E27FC236}">
-                <a16:creationId xmlns:a16="http://schemas.microsoft.com/office/drawing/2014/main" id="{27F3CA1B-A274-440C-938F-61A7223BD21F}"/>
+                <a16:creationId xmlns:a16="http://schemas.microsoft.com/office/drawing/2014/main" id="{279BF6E2-5CB6-49EA-8C32-78108764385D}"/>
               </a:ext>
             </a:extLst>
           </p:cNvPr>
@@ -18692,7 +20588,7 @@
           <p:cNvPr id="26" name="">
             <a:extLst xmlns:a="http://schemas.openxmlformats.org/drawingml/2006/main">
               <a:ext uri="{FF2B5EF4-FFF2-40B4-BE49-F238E27FC236}">
-                <a16:creationId xmlns:a16="http://schemas.microsoft.com/office/drawing/2014/main" id="{FFB91B20-47DB-4C94-B2B6-5F726F8518BB}"/>
+                <a16:creationId xmlns:a16="http://schemas.microsoft.com/office/drawing/2014/main" id="{8FA38D0B-4B88-4665-8BFF-04AD50AF984B}"/>
               </a:ext>
             </a:extLst>
           </p:cNvPr>
@@ -18767,7 +20663,7 @@
           <p:cNvPr id="27" name="">
             <a:extLst xmlns:a="http://schemas.openxmlformats.org/drawingml/2006/main">
               <a:ext uri="{FF2B5EF4-FFF2-40B4-BE49-F238E27FC236}">
-                <a16:creationId xmlns:a16="http://schemas.microsoft.com/office/drawing/2014/main" id="{214006DA-64E4-4E58-A7A7-0D85807669C2}"/>
+                <a16:creationId xmlns:a16="http://schemas.microsoft.com/office/drawing/2014/main" id="{0A1E9D9A-E3EA-46B4-8834-85763F5BE99F}"/>
               </a:ext>
             </a:extLst>
           </p:cNvPr>
@@ -18800,7 +20696,7 @@
           <p:cNvPr id="28" name="">
             <a:extLst xmlns:a="http://schemas.openxmlformats.org/drawingml/2006/main">
               <a:ext uri="{FF2B5EF4-FFF2-40B4-BE49-F238E27FC236}">
-                <a16:creationId xmlns:a16="http://schemas.microsoft.com/office/drawing/2014/main" id="{FFB0F7B3-DBBB-418F-AB6C-13431EDBE7C2}"/>
+                <a16:creationId xmlns:a16="http://schemas.microsoft.com/office/drawing/2014/main" id="{D99DD886-0C87-4B69-BF4E-82BCF961DFAC}"/>
               </a:ext>
             </a:extLst>
           </p:cNvPr>
@@ -18833,7 +20729,7 @@
           <p:cNvPr id="29" name="">
             <a:extLst xmlns:a="http://schemas.openxmlformats.org/drawingml/2006/main">
               <a:ext uri="{FF2B5EF4-FFF2-40B4-BE49-F238E27FC236}">
-                <a16:creationId xmlns:a16="http://schemas.microsoft.com/office/drawing/2014/main" id="{6CABB9C5-910C-4E3E-B7B1-351FA8BE4A15}"/>
+                <a16:creationId xmlns:a16="http://schemas.microsoft.com/office/drawing/2014/main" id="{224FE282-BBD7-4678-80B0-90991D2152EB}"/>
               </a:ext>
             </a:extLst>
           </p:cNvPr>
@@ -18866,7 +20762,7 @@
           <p:cNvPr id="30" name="">
             <a:extLst xmlns:a="http://schemas.openxmlformats.org/drawingml/2006/main">
               <a:ext uri="{FF2B5EF4-FFF2-40B4-BE49-F238E27FC236}">
-                <a16:creationId xmlns:a16="http://schemas.microsoft.com/office/drawing/2014/main" id="{181CB801-B0E6-4A7A-9B82-36D453C663A7}"/>
+                <a16:creationId xmlns:a16="http://schemas.microsoft.com/office/drawing/2014/main" id="{A9473C82-458D-4CE9-968D-00AD45337694}"/>
               </a:ext>
             </a:extLst>
           </p:cNvPr>
@@ -18899,7 +20795,7 @@
           <p:cNvPr id="31" name="">
             <a:extLst xmlns:a="http://schemas.openxmlformats.org/drawingml/2006/main">
               <a:ext uri="{FF2B5EF4-FFF2-40B4-BE49-F238E27FC236}">
-                <a16:creationId xmlns:a16="http://schemas.microsoft.com/office/drawing/2014/main" id="{B8CED528-2790-4B07-BF9D-AF44E11F3BBC}"/>
+                <a16:creationId xmlns:a16="http://schemas.microsoft.com/office/drawing/2014/main" id="{21F87153-7450-40BB-86A8-9F77BC45D2A1}"/>
               </a:ext>
             </a:extLst>
           </p:cNvPr>
@@ -18932,7 +20828,7 @@
           <p:cNvPr id="32" name="">
             <a:extLst xmlns:a="http://schemas.openxmlformats.org/drawingml/2006/main">
               <a:ext uri="{FF2B5EF4-FFF2-40B4-BE49-F238E27FC236}">
-                <a16:creationId xmlns:a16="http://schemas.microsoft.com/office/drawing/2014/main" id="{42364081-12D9-414F-982A-3781C60A0816}"/>
+                <a16:creationId xmlns:a16="http://schemas.microsoft.com/office/drawing/2014/main" id="{A6012CB8-6659-4EB5-99A9-1DCE8E3B6387}"/>
               </a:ext>
             </a:extLst>
           </p:cNvPr>
@@ -18990,7 +20886,7 @@
           <p:cNvPr id="33" name="">
             <a:extLst xmlns:a="http://schemas.openxmlformats.org/drawingml/2006/main">
               <a:ext uri="{FF2B5EF4-FFF2-40B4-BE49-F238E27FC236}">
-                <a16:creationId xmlns:a16="http://schemas.microsoft.com/office/drawing/2014/main" id="{ECCCF605-4C88-41B7-89CB-18B2D4036F97}"/>
+                <a16:creationId xmlns:a16="http://schemas.microsoft.com/office/drawing/2014/main" id="{50ED5CB9-501E-4A78-A6C4-CA43A0862DC9}"/>
               </a:ext>
             </a:extLst>
           </p:cNvPr>
@@ -19025,7 +20921,7 @@
           <p:cNvPr id="34" name="">
             <a:extLst xmlns:a="http://schemas.openxmlformats.org/drawingml/2006/main">
               <a:ext uri="{FF2B5EF4-FFF2-40B4-BE49-F238E27FC236}">
-                <a16:creationId xmlns:a16="http://schemas.microsoft.com/office/drawing/2014/main" id="{9BDD4F40-27B6-4E63-BBF1-C5789738F013}"/>
+                <a16:creationId xmlns:a16="http://schemas.microsoft.com/office/drawing/2014/main" id="{055E1FB2-FBB5-4CF5-8173-6DF912FDF172}"/>
               </a:ext>
             </a:extLst>
           </p:cNvPr>
@@ -19060,7 +20956,7 @@
           <p:cNvPr id="35" name="">
             <a:extLst xmlns:a="http://schemas.openxmlformats.org/drawingml/2006/main">
               <a:ext uri="{FF2B5EF4-FFF2-40B4-BE49-F238E27FC236}">
-                <a16:creationId xmlns:a16="http://schemas.microsoft.com/office/drawing/2014/main" id="{C0218AA2-A5E2-40A2-984A-F5C904D5AFB2}"/>
+                <a16:creationId xmlns:a16="http://schemas.microsoft.com/office/drawing/2014/main" id="{41D96D75-A23C-4283-927D-EC1E59566B05}"/>
               </a:ext>
             </a:extLst>
           </p:cNvPr>
@@ -19118,7 +21014,7 @@
           <p:cNvPr id="36" name="">
             <a:extLst xmlns:a="http://schemas.openxmlformats.org/drawingml/2006/main">
               <a:ext uri="{FF2B5EF4-FFF2-40B4-BE49-F238E27FC236}">
-                <a16:creationId xmlns:a16="http://schemas.microsoft.com/office/drawing/2014/main" id="{13B9984A-8635-4EBA-A589-892A680C2ACC}"/>
+                <a16:creationId xmlns:a16="http://schemas.microsoft.com/office/drawing/2014/main" id="{E2ECD605-5BF8-4CE7-A40E-EA8A337474B8}"/>
               </a:ext>
             </a:extLst>
           </p:cNvPr>
@@ -19176,7 +21072,7 @@
           <p:cNvPr id="37" name="">
             <a:extLst xmlns:a="http://schemas.openxmlformats.org/drawingml/2006/main">
               <a:ext uri="{FF2B5EF4-FFF2-40B4-BE49-F238E27FC236}">
-                <a16:creationId xmlns:a16="http://schemas.microsoft.com/office/drawing/2014/main" id="{252215CE-B016-4835-AE26-98BBF1B248AF}"/>
+                <a16:creationId xmlns:a16="http://schemas.microsoft.com/office/drawing/2014/main" id="{E824A3ED-4073-4A24-8D12-78292E3CBA69}"/>
               </a:ext>
             </a:extLst>
           </p:cNvPr>
@@ -19209,7 +21105,7 @@
           <p:cNvPr id="38" name="">
             <a:extLst xmlns:a="http://schemas.openxmlformats.org/drawingml/2006/main">
               <a:ext uri="{FF2B5EF4-FFF2-40B4-BE49-F238E27FC236}">
-                <a16:creationId xmlns:a16="http://schemas.microsoft.com/office/drawing/2014/main" id="{43AD29D4-D1A3-40BF-9FDC-65729B53C427}"/>
+                <a16:creationId xmlns:a16="http://schemas.microsoft.com/office/drawing/2014/main" id="{8D1DA14D-BA94-43AD-8010-D573BC403F0B}"/>
               </a:ext>
             </a:extLst>
           </p:cNvPr>
@@ -19244,7 +21140,7 @@
           <p:cNvPr id="39" name="">
             <a:extLst xmlns:a="http://schemas.openxmlformats.org/drawingml/2006/main">
               <a:ext uri="{FF2B5EF4-FFF2-40B4-BE49-F238E27FC236}">
-                <a16:creationId xmlns:a16="http://schemas.microsoft.com/office/drawing/2014/main" id="{CDF04A70-6F0B-4F26-B6A3-3953303540FF}"/>
+                <a16:creationId xmlns:a16="http://schemas.microsoft.com/office/drawing/2014/main" id="{9EF8BD11-900D-4280-9616-DC6712302DFD}"/>
               </a:ext>
             </a:extLst>
           </p:cNvPr>
@@ -19279,7 +21175,7 @@
           <p:cNvPr id="40" name="">
             <a:extLst xmlns:a="http://schemas.openxmlformats.org/drawingml/2006/main">
               <a:ext uri="{FF2B5EF4-FFF2-40B4-BE49-F238E27FC236}">
-                <a16:creationId xmlns:a16="http://schemas.microsoft.com/office/drawing/2014/main" id="{5BD95E53-A211-43D2-A3F9-1179EE5B21D3}"/>
+                <a16:creationId xmlns:a16="http://schemas.microsoft.com/office/drawing/2014/main" id="{6D7E3CD8-AC68-4E8C-921B-99D4FB255A8D}"/>
               </a:ext>
             </a:extLst>
           </p:cNvPr>
@@ -19337,7 +21233,7 @@
           <p:cNvPr id="41" name="">
             <a:extLst xmlns:a="http://schemas.openxmlformats.org/drawingml/2006/main">
               <a:ext uri="{FF2B5EF4-FFF2-40B4-BE49-F238E27FC236}">
-                <a16:creationId xmlns:a16="http://schemas.microsoft.com/office/drawing/2014/main" id="{68EF0038-8107-4AD8-9E8D-E64D4AFFEA3A}"/>
+                <a16:creationId xmlns:a16="http://schemas.microsoft.com/office/drawing/2014/main" id="{5A06842F-8D82-4A37-BCC1-64D17A12407F}"/>
               </a:ext>
             </a:extLst>
           </p:cNvPr>
@@ -19395,7 +21291,7 @@
           <p:cNvPr id="42" name="">
             <a:extLst xmlns:a="http://schemas.openxmlformats.org/drawingml/2006/main">
               <a:ext uri="{FF2B5EF4-FFF2-40B4-BE49-F238E27FC236}">
-                <a16:creationId xmlns:a16="http://schemas.microsoft.com/office/drawing/2014/main" id="{411B8502-1775-41DF-B2BD-3B60290F28CD}"/>
+                <a16:creationId xmlns:a16="http://schemas.microsoft.com/office/drawing/2014/main" id="{1A707238-EFAB-48E4-8FE2-801CEEB4B7C3}"/>
               </a:ext>
             </a:extLst>
           </p:cNvPr>
@@ -19428,7 +21324,7 @@
           <p:cNvPr id="43" name="">
             <a:extLst xmlns:a="http://schemas.openxmlformats.org/drawingml/2006/main">
               <a:ext uri="{FF2B5EF4-FFF2-40B4-BE49-F238E27FC236}">
-                <a16:creationId xmlns:a16="http://schemas.microsoft.com/office/drawing/2014/main" id="{C3A033BC-EE88-4C1A-BD91-F89D0C9185C5}"/>
+                <a16:creationId xmlns:a16="http://schemas.microsoft.com/office/drawing/2014/main" id="{B1869384-B5EF-4AC3-A6E6-A6B0E602E675}"/>
               </a:ext>
             </a:extLst>
           </p:cNvPr>
@@ -19486,7 +21382,7 @@
           <p:cNvPr id="44" name="">
             <a:extLst xmlns:a="http://schemas.openxmlformats.org/drawingml/2006/main">
               <a:ext uri="{FF2B5EF4-FFF2-40B4-BE49-F238E27FC236}">
-                <a16:creationId xmlns:a16="http://schemas.microsoft.com/office/drawing/2014/main" id="{3AD6E070-2F90-4AA0-9BE8-5EC3A03A2397}"/>
+                <a16:creationId xmlns:a16="http://schemas.microsoft.com/office/drawing/2014/main" id="{D1AFFB63-4DCC-47EA-A5F3-7BEC99E12833}"/>
               </a:ext>
             </a:extLst>
           </p:cNvPr>
@@ -19544,7 +21440,7 @@
           <p:cNvPr id="45" name="">
             <a:extLst xmlns:a="http://schemas.openxmlformats.org/drawingml/2006/main">
               <a:ext uri="{FF2B5EF4-FFF2-40B4-BE49-F238E27FC236}">
-                <a16:creationId xmlns:a16="http://schemas.microsoft.com/office/drawing/2014/main" id="{1B12DDEE-76A2-4186-A5D8-BE32219D1CBE}"/>
+                <a16:creationId xmlns:a16="http://schemas.microsoft.com/office/drawing/2014/main" id="{7AA33F90-B1BE-469B-AEE3-2D67F90D8190}"/>
               </a:ext>
             </a:extLst>
           </p:cNvPr>
@@ -19602,7 +21498,7 @@
           <p:cNvPr id="46" name="">
             <a:extLst xmlns:a="http://schemas.openxmlformats.org/drawingml/2006/main">
               <a:ext uri="{FF2B5EF4-FFF2-40B4-BE49-F238E27FC236}">
-                <a16:creationId xmlns:a16="http://schemas.microsoft.com/office/drawing/2014/main" id="{FA82DFB4-3289-4B75-A408-858D73ADF5CF}"/>
+                <a16:creationId xmlns:a16="http://schemas.microsoft.com/office/drawing/2014/main" id="{0B3F55FC-3CC7-4E24-9675-AD2B934DF865}"/>
               </a:ext>
             </a:extLst>
           </p:cNvPr>
@@ -19660,7 +21556,7 @@
           <p:cNvPr id="47" name="">
             <a:extLst xmlns:a="http://schemas.openxmlformats.org/drawingml/2006/main">
               <a:ext uri="{FF2B5EF4-FFF2-40B4-BE49-F238E27FC236}">
-                <a16:creationId xmlns:a16="http://schemas.microsoft.com/office/drawing/2014/main" id="{80737933-3488-4CEB-A1AA-BAA7BCCA39CD}"/>
+                <a16:creationId xmlns:a16="http://schemas.microsoft.com/office/drawing/2014/main" id="{AC5F9369-834C-4D38-BBC1-33A88694051A}"/>
               </a:ext>
             </a:extLst>
           </p:cNvPr>
@@ -19716,7 +21612,7 @@
     </p:spTree>
     <p:extLst>
       <p:ext uri="{BB962C8B-B14F-4D97-AF65-F5344CB8AC3E}">
-        <p14:creationId xmlns:p14="http://schemas.microsoft.com/office/powerpoint/2010/main" val="167563192"/>
+        <p14:creationId xmlns:p14="http://schemas.microsoft.com/office/powerpoint/2010/main" val="1684948281"/>
       </p:ext>
     </p:extLst>
   </p:cSld>
@@ -19747,7 +21643,7 @@
           <p:cNvPr id="1" name="">
             <a:extLst xmlns:a="http://schemas.openxmlformats.org/drawingml/2006/main">
               <a:ext uri="{FF2B5EF4-FFF2-40B4-BE49-F238E27FC236}">
-                <a16:creationId xmlns:a16="http://schemas.microsoft.com/office/drawing/2014/main" id="{3C98A352-16E4-44F1-B84E-49A9121F47B7}"/>
+                <a16:creationId xmlns:a16="http://schemas.microsoft.com/office/drawing/2014/main" id="{67010628-A8BC-4C78-B688-7C4CB2D599C9}"/>
               </a:ext>
             </a:extLst>
           </p:cNvPr>
@@ -19782,7 +21678,7 @@
           <p:cNvPr id="2" name="">
             <a:extLst xmlns:a="http://schemas.openxmlformats.org/drawingml/2006/main">
               <a:ext uri="{FF2B5EF4-FFF2-40B4-BE49-F238E27FC236}">
-                <a16:creationId xmlns:a16="http://schemas.microsoft.com/office/drawing/2014/main" id="{C958BE23-6138-4D76-B8E5-0B22CEA02261}"/>
+                <a16:creationId xmlns:a16="http://schemas.microsoft.com/office/drawing/2014/main" id="{9BEC0F31-A860-4D9E-ABFB-D359AB271D66}"/>
               </a:ext>
             </a:extLst>
           </p:cNvPr>
@@ -19817,7 +21713,7 @@
           <p:cNvPr id="3" name="">
             <a:extLst xmlns:a="http://schemas.openxmlformats.org/drawingml/2006/main">
               <a:ext uri="{FF2B5EF4-FFF2-40B4-BE49-F238E27FC236}">
-                <a16:creationId xmlns:a16="http://schemas.microsoft.com/office/drawing/2014/main" id="{AFA458E6-A837-4D81-B819-9301E17FA296}"/>
+                <a16:creationId xmlns:a16="http://schemas.microsoft.com/office/drawing/2014/main" id="{D84C4B6A-BE71-41E5-9FEF-6BA9019387F4}"/>
               </a:ext>
             </a:extLst>
           </p:cNvPr>
@@ -19875,7 +21771,7 @@
           <p:cNvPr id="4" name="">
             <a:extLst xmlns:a="http://schemas.openxmlformats.org/drawingml/2006/main">
               <a:ext uri="{FF2B5EF4-FFF2-40B4-BE49-F238E27FC236}">
-                <a16:creationId xmlns:a16="http://schemas.microsoft.com/office/drawing/2014/main" id="{6834ADBA-00FE-471B-91E5-FA0DC581E9C9}"/>
+                <a16:creationId xmlns:a16="http://schemas.microsoft.com/office/drawing/2014/main" id="{07A7F697-30DC-4CCE-A003-067C4C64D413}"/>
               </a:ext>
             </a:extLst>
           </p:cNvPr>
@@ -19933,7 +21829,7 @@
           <p:cNvPr id="5" name="">
             <a:extLst xmlns:a="http://schemas.openxmlformats.org/drawingml/2006/main">
               <a:ext uri="{FF2B5EF4-FFF2-40B4-BE49-F238E27FC236}">
-                <a16:creationId xmlns:a16="http://schemas.microsoft.com/office/drawing/2014/main" id="{4B6FC45C-5635-43C3-BF17-8958D3563E75}"/>
+                <a16:creationId xmlns:a16="http://schemas.microsoft.com/office/drawing/2014/main" id="{7B304C6B-68A1-45C0-A49A-1AB27CFAF307}"/>
               </a:ext>
             </a:extLst>
           </p:cNvPr>
@@ -19968,7 +21864,7 @@
           <p:cNvPr id="6" name="">
             <a:extLst xmlns:a="http://schemas.openxmlformats.org/drawingml/2006/main">
               <a:ext uri="{FF2B5EF4-FFF2-40B4-BE49-F238E27FC236}">
-                <a16:creationId xmlns:a16="http://schemas.microsoft.com/office/drawing/2014/main" id="{CB52EA92-3931-4B5B-A00B-46820F3FE3EB}"/>
+                <a16:creationId xmlns:a16="http://schemas.microsoft.com/office/drawing/2014/main" id="{A7D96FAF-6FB7-430A-B296-72977AE55568}"/>
               </a:ext>
             </a:extLst>
           </p:cNvPr>
@@ -20026,7 +21922,7 @@
           <p:cNvPr id="7" name="">
             <a:extLst xmlns:a="http://schemas.openxmlformats.org/drawingml/2006/main">
               <a:ext uri="{FF2B5EF4-FFF2-40B4-BE49-F238E27FC236}">
-                <a16:creationId xmlns:a16="http://schemas.microsoft.com/office/drawing/2014/main" id="{F52D8093-FE7F-43D9-ABD9-261DADDF0D50}"/>
+                <a16:creationId xmlns:a16="http://schemas.microsoft.com/office/drawing/2014/main" id="{8F320298-5C77-49CD-AC04-30FEB3323109}"/>
               </a:ext>
             </a:extLst>
           </p:cNvPr>
@@ -20084,7 +21980,7 @@
           <p:cNvPr id="8" name="">
             <a:extLst xmlns:a="http://schemas.openxmlformats.org/drawingml/2006/main">
               <a:ext uri="{FF2B5EF4-FFF2-40B4-BE49-F238E27FC236}">
-                <a16:creationId xmlns:a16="http://schemas.microsoft.com/office/drawing/2014/main" id="{93A40439-8832-4F1F-A95D-B557A645E9E4}"/>
+                <a16:creationId xmlns:a16="http://schemas.microsoft.com/office/drawing/2014/main" id="{287C2588-0295-46AA-B83F-C930B3B143BF}"/>
               </a:ext>
             </a:extLst>
           </p:cNvPr>
@@ -20119,7 +22015,7 @@
           <p:cNvPr id="9" name="">
             <a:extLst xmlns:a="http://schemas.openxmlformats.org/drawingml/2006/main">
               <a:ext uri="{FF2B5EF4-FFF2-40B4-BE49-F238E27FC236}">
-                <a16:creationId xmlns:a16="http://schemas.microsoft.com/office/drawing/2014/main" id="{26C39C34-2F6C-41FD-8C7A-3B1C2C84E8E7}"/>
+                <a16:creationId xmlns:a16="http://schemas.microsoft.com/office/drawing/2014/main" id="{0E844990-89CD-47A1-A36E-31783085B961}"/>
               </a:ext>
             </a:extLst>
           </p:cNvPr>
@@ -20177,7 +22073,7 @@
           <p:cNvPr id="10" name="">
             <a:extLst xmlns:a="http://schemas.openxmlformats.org/drawingml/2006/main">
               <a:ext uri="{FF2B5EF4-FFF2-40B4-BE49-F238E27FC236}">
-                <a16:creationId xmlns:a16="http://schemas.microsoft.com/office/drawing/2014/main" id="{E3706F64-87C2-4AF1-B3F0-A908A118B816}"/>
+                <a16:creationId xmlns:a16="http://schemas.microsoft.com/office/drawing/2014/main" id="{52F27F0D-84A0-4CA4-99DB-A2C3CEFE27BC}"/>
               </a:ext>
             </a:extLst>
           </p:cNvPr>
@@ -20212,7 +22108,7 @@
           <p:cNvPr id="11" name="">
             <a:extLst xmlns:a="http://schemas.openxmlformats.org/drawingml/2006/main">
               <a:ext uri="{FF2B5EF4-FFF2-40B4-BE49-F238E27FC236}">
-                <a16:creationId xmlns:a16="http://schemas.microsoft.com/office/drawing/2014/main" id="{F84DC196-24FA-4CDE-8619-EC84052A1C1E}"/>
+                <a16:creationId xmlns:a16="http://schemas.microsoft.com/office/drawing/2014/main" id="{5E51A882-DE4A-48D0-94A1-8122E93FDEC5}"/>
               </a:ext>
             </a:extLst>
           </p:cNvPr>
@@ -20287,7 +22183,7 @@
           <p:cNvPr id="12" name="">
             <a:extLst xmlns:a="http://schemas.openxmlformats.org/drawingml/2006/main">
               <a:ext uri="{FF2B5EF4-FFF2-40B4-BE49-F238E27FC236}">
-                <a16:creationId xmlns:a16="http://schemas.microsoft.com/office/drawing/2014/main" id="{75342983-517E-4B53-8513-723908A01805}"/>
+                <a16:creationId xmlns:a16="http://schemas.microsoft.com/office/drawing/2014/main" id="{CA26252F-E1AE-45D7-958D-2BF8F967D595}"/>
               </a:ext>
             </a:extLst>
           </p:cNvPr>
@@ -20322,7 +22218,7 @@
           <p:cNvPr id="13" name="">
             <a:extLst xmlns:a="http://schemas.openxmlformats.org/drawingml/2006/main">
               <a:ext uri="{FF2B5EF4-FFF2-40B4-BE49-F238E27FC236}">
-                <a16:creationId xmlns:a16="http://schemas.microsoft.com/office/drawing/2014/main" id="{29D8E5F5-B07C-43A7-BB48-1265CCC5EA45}"/>
+                <a16:creationId xmlns:a16="http://schemas.microsoft.com/office/drawing/2014/main" id="{0234C233-DBD4-4CDF-A815-DA6A1E20105C}"/>
               </a:ext>
             </a:extLst>
           </p:cNvPr>
@@ -20397,7 +22293,7 @@
           <p:cNvPr id="14" name="">
             <a:extLst xmlns:a="http://schemas.openxmlformats.org/drawingml/2006/main">
               <a:ext uri="{FF2B5EF4-FFF2-40B4-BE49-F238E27FC236}">
-                <a16:creationId xmlns:a16="http://schemas.microsoft.com/office/drawing/2014/main" id="{5AABD10A-4D2E-4A52-A261-76E9CE3047BC}"/>
+                <a16:creationId xmlns:a16="http://schemas.microsoft.com/office/drawing/2014/main" id="{88961095-80FC-4271-B051-1BE81F21FED0}"/>
               </a:ext>
             </a:extLst>
           </p:cNvPr>
@@ -20432,7 +22328,7 @@
           <p:cNvPr id="15" name="">
             <a:extLst xmlns:a="http://schemas.openxmlformats.org/drawingml/2006/main">
               <a:ext uri="{FF2B5EF4-FFF2-40B4-BE49-F238E27FC236}">
-                <a16:creationId xmlns:a16="http://schemas.microsoft.com/office/drawing/2014/main" id="{5DAD70EF-356A-4500-9FD8-1F42BF70B1EE}"/>
+                <a16:creationId xmlns:a16="http://schemas.microsoft.com/office/drawing/2014/main" id="{84D36512-A274-4C25-94D3-C27EBA9B9969}"/>
               </a:ext>
             </a:extLst>
           </p:cNvPr>
@@ -20524,7 +22420,7 @@
           <p:cNvPr id="16" name="">
             <a:extLst xmlns:a="http://schemas.openxmlformats.org/drawingml/2006/main">
               <a:ext uri="{FF2B5EF4-FFF2-40B4-BE49-F238E27FC236}">
-                <a16:creationId xmlns:a16="http://schemas.microsoft.com/office/drawing/2014/main" id="{8FBF73DC-943F-4E50-91B5-B6FE7A752041}"/>
+                <a16:creationId xmlns:a16="http://schemas.microsoft.com/office/drawing/2014/main" id="{8C1905C2-2BEA-4CC2-A603-9E79036AA747}"/>
               </a:ext>
             </a:extLst>
           </p:cNvPr>
@@ -20559,7 +22455,7 @@
           <p:cNvPr id="17" name="">
             <a:extLst xmlns:a="http://schemas.openxmlformats.org/drawingml/2006/main">
               <a:ext uri="{FF2B5EF4-FFF2-40B4-BE49-F238E27FC236}">
-                <a16:creationId xmlns:a16="http://schemas.microsoft.com/office/drawing/2014/main" id="{C81AB125-6880-427D-B562-D48E04A5AE7D}"/>
+                <a16:creationId xmlns:a16="http://schemas.microsoft.com/office/drawing/2014/main" id="{620AA475-B019-4FF5-8292-C01675E1AE43}"/>
               </a:ext>
             </a:extLst>
           </p:cNvPr>
@@ -20617,7 +22513,7 @@
           <p:cNvPr id="18" name="">
             <a:extLst xmlns:a="http://schemas.openxmlformats.org/drawingml/2006/main">
               <a:ext uri="{FF2B5EF4-FFF2-40B4-BE49-F238E27FC236}">
-                <a16:creationId xmlns:a16="http://schemas.microsoft.com/office/drawing/2014/main" id="{9FA6E736-7FF3-49B4-B9C9-4F07FDFD8C96}"/>
+                <a16:creationId xmlns:a16="http://schemas.microsoft.com/office/drawing/2014/main" id="{2AFCCB29-0703-4DC8-9978-70C17C8A62D4}"/>
               </a:ext>
             </a:extLst>
           </p:cNvPr>
@@ -20652,7 +22548,7 @@
           <p:cNvPr id="19" name="">
             <a:extLst xmlns:a="http://schemas.openxmlformats.org/drawingml/2006/main">
               <a:ext uri="{FF2B5EF4-FFF2-40B4-BE49-F238E27FC236}">
-                <a16:creationId xmlns:a16="http://schemas.microsoft.com/office/drawing/2014/main" id="{AAFB4EA2-0796-4EAA-AD1E-A940841A2758}"/>
+                <a16:creationId xmlns:a16="http://schemas.microsoft.com/office/drawing/2014/main" id="{DE0BBAA4-4B4D-4451-BA15-817E58390D36}"/>
               </a:ext>
             </a:extLst>
           </p:cNvPr>
@@ -20710,7 +22606,7 @@
           <p:cNvPr id="20" name="">
             <a:extLst xmlns:a="http://schemas.openxmlformats.org/drawingml/2006/main">
               <a:ext uri="{FF2B5EF4-FFF2-40B4-BE49-F238E27FC236}">
-                <a16:creationId xmlns:a16="http://schemas.microsoft.com/office/drawing/2014/main" id="{64CDA45A-9B9F-4617-80EE-32012DCB6629}"/>
+                <a16:creationId xmlns:a16="http://schemas.microsoft.com/office/drawing/2014/main" id="{3EBF3D52-A5EE-4D19-B79B-F7F7BA7ECC46}"/>
               </a:ext>
             </a:extLst>
           </p:cNvPr>
@@ -20743,7 +22639,7 @@
           <p:cNvPr id="21" name="">
             <a:extLst xmlns:a="http://schemas.openxmlformats.org/drawingml/2006/main">
               <a:ext uri="{FF2B5EF4-FFF2-40B4-BE49-F238E27FC236}">
-                <a16:creationId xmlns:a16="http://schemas.microsoft.com/office/drawing/2014/main" id="{3B6B4762-C4F9-4AD1-89E9-72E0A6A3A41F}"/>
+                <a16:creationId xmlns:a16="http://schemas.microsoft.com/office/drawing/2014/main" id="{2203CD10-FA87-417B-8357-23FA830739C3}"/>
               </a:ext>
             </a:extLst>
           </p:cNvPr>
@@ -20776,7 +22672,7 @@
           <p:cNvPr id="22" name="">
             <a:extLst xmlns:a="http://schemas.openxmlformats.org/drawingml/2006/main">
               <a:ext uri="{FF2B5EF4-FFF2-40B4-BE49-F238E27FC236}">
-                <a16:creationId xmlns:a16="http://schemas.microsoft.com/office/drawing/2014/main" id="{4E05C306-F917-40CE-B626-8B4F9B9F85DD}"/>
+                <a16:creationId xmlns:a16="http://schemas.microsoft.com/office/drawing/2014/main" id="{9CD192C6-BFBD-4CF5-9A29-51B9F3C4A98B}"/>
               </a:ext>
             </a:extLst>
           </p:cNvPr>
@@ -20809,7 +22705,7 @@
           <p:cNvPr id="23" name="">
             <a:extLst xmlns:a="http://schemas.openxmlformats.org/drawingml/2006/main">
               <a:ext uri="{FF2B5EF4-FFF2-40B4-BE49-F238E27FC236}">
-                <a16:creationId xmlns:a16="http://schemas.microsoft.com/office/drawing/2014/main" id="{C092F392-0AE2-4D82-967F-41EE15D3907F}"/>
+                <a16:creationId xmlns:a16="http://schemas.microsoft.com/office/drawing/2014/main" id="{3ABA7732-B518-4C29-9031-A17415FDBCE1}"/>
               </a:ext>
             </a:extLst>
           </p:cNvPr>
@@ -20842,7 +22738,7 @@
           <p:cNvPr id="24" name="">
             <a:extLst xmlns:a="http://schemas.openxmlformats.org/drawingml/2006/main">
               <a:ext uri="{FF2B5EF4-FFF2-40B4-BE49-F238E27FC236}">
-                <a16:creationId xmlns:a16="http://schemas.microsoft.com/office/drawing/2014/main" id="{CD12F3B4-EBE0-4A66-A035-C87865C7F600}"/>
+                <a16:creationId xmlns:a16="http://schemas.microsoft.com/office/drawing/2014/main" id="{1949BDF4-CDD2-4BAD-9CDA-887133E15136}"/>
               </a:ext>
             </a:extLst>
           </p:cNvPr>
@@ -20875,7 +22771,7 @@
           <p:cNvPr id="25" name="">
             <a:extLst xmlns:a="http://schemas.openxmlformats.org/drawingml/2006/main">
               <a:ext uri="{FF2B5EF4-FFF2-40B4-BE49-F238E27FC236}">
-                <a16:creationId xmlns:a16="http://schemas.microsoft.com/office/drawing/2014/main" id="{BDA94BFB-9E79-4F2C-BE4C-55EB28403380}"/>
+                <a16:creationId xmlns:a16="http://schemas.microsoft.com/office/drawing/2014/main" id="{9CD1A105-4F7E-48AE-ACA9-622B810B9A86}"/>
               </a:ext>
             </a:extLst>
           </p:cNvPr>
@@ -20910,7 +22806,7 @@
           <p:cNvPr id="26" name="">
             <a:extLst xmlns:a="http://schemas.openxmlformats.org/drawingml/2006/main">
               <a:ext uri="{FF2B5EF4-FFF2-40B4-BE49-F238E27FC236}">
-                <a16:creationId xmlns:a16="http://schemas.microsoft.com/office/drawing/2014/main" id="{396BBB50-5E77-4A24-9AAB-9B2E130B364E}"/>
+                <a16:creationId xmlns:a16="http://schemas.microsoft.com/office/drawing/2014/main" id="{EA11EFB7-AFAB-44A6-8DC7-05A84C5A28E2}"/>
               </a:ext>
             </a:extLst>
           </p:cNvPr>
@@ -20945,7 +22841,7 @@
           <p:cNvPr id="27" name="">
             <a:extLst xmlns:a="http://schemas.openxmlformats.org/drawingml/2006/main">
               <a:ext uri="{FF2B5EF4-FFF2-40B4-BE49-F238E27FC236}">
-                <a16:creationId xmlns:a16="http://schemas.microsoft.com/office/drawing/2014/main" id="{F60CD8EF-7A01-4101-84E0-37A0AFEED477}"/>
+                <a16:creationId xmlns:a16="http://schemas.microsoft.com/office/drawing/2014/main" id="{F912A12D-1F07-4AC5-B92F-1CCBAC15F38E}"/>
               </a:ext>
             </a:extLst>
           </p:cNvPr>
@@ -21003,7 +22899,7 @@
           <p:cNvPr id="28" name="">
             <a:extLst xmlns:a="http://schemas.openxmlformats.org/drawingml/2006/main">
               <a:ext uri="{FF2B5EF4-FFF2-40B4-BE49-F238E27FC236}">
-                <a16:creationId xmlns:a16="http://schemas.microsoft.com/office/drawing/2014/main" id="{192D15E1-BC23-43CE-A781-1FE8990A7BBC}"/>
+                <a16:creationId xmlns:a16="http://schemas.microsoft.com/office/drawing/2014/main" id="{31B22053-5112-4489-A554-0D8867AF7719}"/>
               </a:ext>
             </a:extLst>
           </p:cNvPr>
@@ -21061,7 +22957,7 @@
           <p:cNvPr id="29" name="">
             <a:extLst xmlns:a="http://schemas.openxmlformats.org/drawingml/2006/main">
               <a:ext uri="{FF2B5EF4-FFF2-40B4-BE49-F238E27FC236}">
-                <a16:creationId xmlns:a16="http://schemas.microsoft.com/office/drawing/2014/main" id="{35739345-BEE7-4A0F-B625-9F373679881E}"/>
+                <a16:creationId xmlns:a16="http://schemas.microsoft.com/office/drawing/2014/main" id="{E9CE9E63-ED3B-4D58-A5DB-12F47620F1A0}"/>
               </a:ext>
             </a:extLst>
           </p:cNvPr>
@@ -21094,7 +22990,7 @@
           <p:cNvPr id="30" name="">
             <a:extLst xmlns:a="http://schemas.openxmlformats.org/drawingml/2006/main">
               <a:ext uri="{FF2B5EF4-FFF2-40B4-BE49-F238E27FC236}">
-                <a16:creationId xmlns:a16="http://schemas.microsoft.com/office/drawing/2014/main" id="{271D072F-3CA0-47C2-9DD0-986DB15D3807}"/>
+                <a16:creationId xmlns:a16="http://schemas.microsoft.com/office/drawing/2014/main" id="{64484640-EDC1-46CC-A9BF-0FCAB85E1DB3}"/>
               </a:ext>
             </a:extLst>
           </p:cNvPr>
@@ -21129,7 +23025,7 @@
           <p:cNvPr id="31" name="">
             <a:extLst xmlns:a="http://schemas.openxmlformats.org/drawingml/2006/main">
               <a:ext uri="{FF2B5EF4-FFF2-40B4-BE49-F238E27FC236}">
-                <a16:creationId xmlns:a16="http://schemas.microsoft.com/office/drawing/2014/main" id="{1CE4AB90-A519-43D6-A16C-461C24C5AFFC}"/>
+                <a16:creationId xmlns:a16="http://schemas.microsoft.com/office/drawing/2014/main" id="{262E8A06-B8E9-4A92-9686-05737C83069B}"/>
               </a:ext>
             </a:extLst>
           </p:cNvPr>
@@ -21164,7 +23060,7 @@
           <p:cNvPr id="32" name="">
             <a:extLst xmlns:a="http://schemas.openxmlformats.org/drawingml/2006/main">
               <a:ext uri="{FF2B5EF4-FFF2-40B4-BE49-F238E27FC236}">
-                <a16:creationId xmlns:a16="http://schemas.microsoft.com/office/drawing/2014/main" id="{F35D10E9-E66D-4150-B675-987BBEDCC8F8}"/>
+                <a16:creationId xmlns:a16="http://schemas.microsoft.com/office/drawing/2014/main" id="{6D2B60AF-0751-4A98-A184-81D314E63F67}"/>
               </a:ext>
             </a:extLst>
           </p:cNvPr>
@@ -21222,7 +23118,7 @@
           <p:cNvPr id="33" name="">
             <a:extLst xmlns:a="http://schemas.openxmlformats.org/drawingml/2006/main">
               <a:ext uri="{FF2B5EF4-FFF2-40B4-BE49-F238E27FC236}">
-                <a16:creationId xmlns:a16="http://schemas.microsoft.com/office/drawing/2014/main" id="{A4A7F9B4-8691-4F93-AFE3-B6631A1905D8}"/>
+                <a16:creationId xmlns:a16="http://schemas.microsoft.com/office/drawing/2014/main" id="{65FE1F5C-9003-435E-B1B6-FC3BB9B07298}"/>
               </a:ext>
             </a:extLst>
           </p:cNvPr>
@@ -21280,7 +23176,7 @@
           <p:cNvPr id="34" name="">
             <a:extLst xmlns:a="http://schemas.openxmlformats.org/drawingml/2006/main">
               <a:ext uri="{FF2B5EF4-FFF2-40B4-BE49-F238E27FC236}">
-                <a16:creationId xmlns:a16="http://schemas.microsoft.com/office/drawing/2014/main" id="{D814C602-AA73-4A69-9216-88B9430E8397}"/>
+                <a16:creationId xmlns:a16="http://schemas.microsoft.com/office/drawing/2014/main" id="{1C8B001B-5554-4F27-8366-88813FCB8F83}"/>
               </a:ext>
             </a:extLst>
           </p:cNvPr>
@@ -21313,7 +23209,7 @@
           <p:cNvPr id="35" name="">
             <a:extLst xmlns:a="http://schemas.openxmlformats.org/drawingml/2006/main">
               <a:ext uri="{FF2B5EF4-FFF2-40B4-BE49-F238E27FC236}">
-                <a16:creationId xmlns:a16="http://schemas.microsoft.com/office/drawing/2014/main" id="{7F0DB701-7A61-4CB1-85A4-0246DA2490C3}"/>
+                <a16:creationId xmlns:a16="http://schemas.microsoft.com/office/drawing/2014/main" id="{713D19A0-86EB-4705-A5B1-DA6AD63998C8}"/>
               </a:ext>
             </a:extLst>
           </p:cNvPr>
@@ -21371,7 +23267,7 @@
           <p:cNvPr id="36" name="">
             <a:extLst xmlns:a="http://schemas.openxmlformats.org/drawingml/2006/main">
               <a:ext uri="{FF2B5EF4-FFF2-40B4-BE49-F238E27FC236}">
-                <a16:creationId xmlns:a16="http://schemas.microsoft.com/office/drawing/2014/main" id="{00B4E333-BBE4-4AFE-B4BE-B553EADB2AD9}"/>
+                <a16:creationId xmlns:a16="http://schemas.microsoft.com/office/drawing/2014/main" id="{F392C098-22DD-4ADE-988F-D781C376FE9B}"/>
               </a:ext>
             </a:extLst>
           </p:cNvPr>
@@ -21429,7 +23325,7 @@
           <p:cNvPr id="37" name="">
             <a:extLst xmlns:a="http://schemas.openxmlformats.org/drawingml/2006/main">
               <a:ext uri="{FF2B5EF4-FFF2-40B4-BE49-F238E27FC236}">
-                <a16:creationId xmlns:a16="http://schemas.microsoft.com/office/drawing/2014/main" id="{B7BE46B4-8292-4649-A68D-4F91ABACB8CF}"/>
+                <a16:creationId xmlns:a16="http://schemas.microsoft.com/office/drawing/2014/main" id="{E222A04D-6354-4C87-B6E3-DA06E5C54C1B}"/>
               </a:ext>
             </a:extLst>
           </p:cNvPr>
@@ -21485,7 +23381,7 @@
     </p:spTree>
     <p:extLst>
       <p:ext uri="{BB962C8B-B14F-4D97-AF65-F5344CB8AC3E}">
-        <p14:creationId xmlns:p14="http://schemas.microsoft.com/office/powerpoint/2010/main" val="1877528099"/>
+        <p14:creationId xmlns:p14="http://schemas.microsoft.com/office/powerpoint/2010/main" val="292693938"/>
       </p:ext>
     </p:extLst>
   </p:cSld>
@@ -21516,7 +23412,7 @@
           <p:cNvPr id="1" name="">
             <a:extLst xmlns:a="http://schemas.openxmlformats.org/drawingml/2006/main">
               <a:ext uri="{FF2B5EF4-FFF2-40B4-BE49-F238E27FC236}">
-                <a16:creationId xmlns:a16="http://schemas.microsoft.com/office/drawing/2014/main" id="{96CFCB9D-5FB9-45C6-8621-00DBE7625C68}"/>
+                <a16:creationId xmlns:a16="http://schemas.microsoft.com/office/drawing/2014/main" id="{244F160D-0038-472C-8577-E784257835D1}"/>
               </a:ext>
             </a:extLst>
           </p:cNvPr>
@@ -21551,7 +23447,7 @@
           <p:cNvPr id="2" name="">
             <a:extLst xmlns:a="http://schemas.openxmlformats.org/drawingml/2006/main">
               <a:ext uri="{FF2B5EF4-FFF2-40B4-BE49-F238E27FC236}">
-                <a16:creationId xmlns:a16="http://schemas.microsoft.com/office/drawing/2014/main" id="{CD205DF0-EA28-4952-BD40-3F8141FC7E78}"/>
+                <a16:creationId xmlns:a16="http://schemas.microsoft.com/office/drawing/2014/main" id="{AF5B4B04-4942-4BF5-9952-27130C3DF080}"/>
               </a:ext>
             </a:extLst>
           </p:cNvPr>
@@ -21586,7 +23482,7 @@
           <p:cNvPr id="3" name="">
             <a:extLst xmlns:a="http://schemas.openxmlformats.org/drawingml/2006/main">
               <a:ext uri="{FF2B5EF4-FFF2-40B4-BE49-F238E27FC236}">
-                <a16:creationId xmlns:a16="http://schemas.microsoft.com/office/drawing/2014/main" id="{07D9BD9B-D8ED-4A23-A6B4-3330E7B723B7}"/>
+                <a16:creationId xmlns:a16="http://schemas.microsoft.com/office/drawing/2014/main" id="{A258D97B-AF2C-4504-BF06-BE5C439D63CC}"/>
               </a:ext>
             </a:extLst>
           </p:cNvPr>
@@ -21644,7 +23540,7 @@
           <p:cNvPr id="4" name="">
             <a:extLst xmlns:a="http://schemas.openxmlformats.org/drawingml/2006/main">
               <a:ext uri="{FF2B5EF4-FFF2-40B4-BE49-F238E27FC236}">
-                <a16:creationId xmlns:a16="http://schemas.microsoft.com/office/drawing/2014/main" id="{B2C227A7-C940-475E-BE04-EAEEC553BC95}"/>
+                <a16:creationId xmlns:a16="http://schemas.microsoft.com/office/drawing/2014/main" id="{E434FEC3-C46E-4A00-BA11-06636CE390F9}"/>
               </a:ext>
             </a:extLst>
           </p:cNvPr>
@@ -21702,7 +23598,7 @@
           <p:cNvPr id="5" name="">
             <a:extLst xmlns:a="http://schemas.openxmlformats.org/drawingml/2006/main">
               <a:ext uri="{FF2B5EF4-FFF2-40B4-BE49-F238E27FC236}">
-                <a16:creationId xmlns:a16="http://schemas.microsoft.com/office/drawing/2014/main" id="{3FD2085A-FCF6-4170-9660-F87CCE602076}"/>
+                <a16:creationId xmlns:a16="http://schemas.microsoft.com/office/drawing/2014/main" id="{C7DB822A-7789-42F2-B6A4-DFA7F9EE7883}"/>
               </a:ext>
             </a:extLst>
           </p:cNvPr>
@@ -21737,7 +23633,7 @@
           <p:cNvPr id="6" name="">
             <a:extLst xmlns:a="http://schemas.openxmlformats.org/drawingml/2006/main">
               <a:ext uri="{FF2B5EF4-FFF2-40B4-BE49-F238E27FC236}">
-                <a16:creationId xmlns:a16="http://schemas.microsoft.com/office/drawing/2014/main" id="{2D7F1851-9E5E-4FFB-8F9C-0534EF69ECAF}"/>
+                <a16:creationId xmlns:a16="http://schemas.microsoft.com/office/drawing/2014/main" id="{2E08D890-2151-43C6-974B-CF37DF7E200C}"/>
               </a:ext>
             </a:extLst>
           </p:cNvPr>
@@ -21795,7 +23691,7 @@
           <p:cNvPr id="7" name="">
             <a:extLst xmlns:a="http://schemas.openxmlformats.org/drawingml/2006/main">
               <a:ext uri="{FF2B5EF4-FFF2-40B4-BE49-F238E27FC236}">
-                <a16:creationId xmlns:a16="http://schemas.microsoft.com/office/drawing/2014/main" id="{19083E6C-1F21-4885-B2C8-8648A9F7797B}"/>
+                <a16:creationId xmlns:a16="http://schemas.microsoft.com/office/drawing/2014/main" id="{E881324F-1B58-4F85-82B5-15216DFD08DC}"/>
               </a:ext>
             </a:extLst>
           </p:cNvPr>
@@ -21853,7 +23749,7 @@
           <p:cNvPr id="8" name="">
             <a:extLst xmlns:a="http://schemas.openxmlformats.org/drawingml/2006/main">
               <a:ext uri="{FF2B5EF4-FFF2-40B4-BE49-F238E27FC236}">
-                <a16:creationId xmlns:a16="http://schemas.microsoft.com/office/drawing/2014/main" id="{781C5AE3-6C05-4091-8E99-0A27ADFEBB7D}"/>
+                <a16:creationId xmlns:a16="http://schemas.microsoft.com/office/drawing/2014/main" id="{943EAE8D-FA7A-44D3-8AC2-4168BFD3FA91}"/>
               </a:ext>
             </a:extLst>
           </p:cNvPr>
@@ -21888,7 +23784,7 @@
           <p:cNvPr id="9" name="">
             <a:extLst xmlns:a="http://schemas.openxmlformats.org/drawingml/2006/main">
               <a:ext uri="{FF2B5EF4-FFF2-40B4-BE49-F238E27FC236}">
-                <a16:creationId xmlns:a16="http://schemas.microsoft.com/office/drawing/2014/main" id="{435C6D8D-3B3D-4527-A8B0-82A3E015FA7A}"/>
+                <a16:creationId xmlns:a16="http://schemas.microsoft.com/office/drawing/2014/main" id="{6949E373-EE24-4881-ADBF-0E5E4A94BD05}"/>
               </a:ext>
             </a:extLst>
           </p:cNvPr>
@@ -21923,7 +23819,7 @@
           <p:cNvPr id="10" name="">
             <a:extLst xmlns:a="http://schemas.openxmlformats.org/drawingml/2006/main">
               <a:ext uri="{FF2B5EF4-FFF2-40B4-BE49-F238E27FC236}">
-                <a16:creationId xmlns:a16="http://schemas.microsoft.com/office/drawing/2014/main" id="{BC5CDC1E-5B07-470C-B8E9-78D5B1E58689}"/>
+                <a16:creationId xmlns:a16="http://schemas.microsoft.com/office/drawing/2014/main" id="{1E62E1CB-90F2-4D18-B55B-0C4A1E9FFC25}"/>
               </a:ext>
             </a:extLst>
           </p:cNvPr>
@@ -21981,7 +23877,7 @@
           <p:cNvPr id="11" name="">
             <a:extLst xmlns:a="http://schemas.openxmlformats.org/drawingml/2006/main">
               <a:ext uri="{FF2B5EF4-FFF2-40B4-BE49-F238E27FC236}">
-                <a16:creationId xmlns:a16="http://schemas.microsoft.com/office/drawing/2014/main" id="{929D8A39-5E6B-42FC-A301-367BF1D7D605}"/>
+                <a16:creationId xmlns:a16="http://schemas.microsoft.com/office/drawing/2014/main" id="{81D3BE1C-1F6B-4952-A70F-78B86FAD4CD9}"/>
               </a:ext>
             </a:extLst>
           </p:cNvPr>
@@ -22197,7 +24093,7 @@
           <p:cNvPr id="12" name="">
             <a:extLst xmlns:a="http://schemas.openxmlformats.org/drawingml/2006/main">
               <a:ext uri="{FF2B5EF4-FFF2-40B4-BE49-F238E27FC236}">
-                <a16:creationId xmlns:a16="http://schemas.microsoft.com/office/drawing/2014/main" id="{15415BA8-94F0-4A07-9B66-66D306CB2B55}"/>
+                <a16:creationId xmlns:a16="http://schemas.microsoft.com/office/drawing/2014/main" id="{9CC104B0-70AB-45E0-AC8E-B1CCD2465AF4}"/>
               </a:ext>
             </a:extLst>
           </p:cNvPr>
@@ -22232,7 +24128,7 @@
           <p:cNvPr id="13" name="">
             <a:extLst xmlns:a="http://schemas.openxmlformats.org/drawingml/2006/main">
               <a:ext uri="{FF2B5EF4-FFF2-40B4-BE49-F238E27FC236}">
-                <a16:creationId xmlns:a16="http://schemas.microsoft.com/office/drawing/2014/main" id="{24B7A7BC-DAC5-406B-8E8B-F47CF3482969}"/>
+                <a16:creationId xmlns:a16="http://schemas.microsoft.com/office/drawing/2014/main" id="{6BFC2D9D-99FB-4640-B156-3062F424C891}"/>
               </a:ext>
             </a:extLst>
           </p:cNvPr>
@@ -22267,7 +24163,7 @@
           <p:cNvPr id="14" name="">
             <a:extLst xmlns:a="http://schemas.openxmlformats.org/drawingml/2006/main">
               <a:ext uri="{FF2B5EF4-FFF2-40B4-BE49-F238E27FC236}">
-                <a16:creationId xmlns:a16="http://schemas.microsoft.com/office/drawing/2014/main" id="{83CB5CCD-BE9B-466A-965B-0D82AF3FBBE9}"/>
+                <a16:creationId xmlns:a16="http://schemas.microsoft.com/office/drawing/2014/main" id="{F50D1C76-B4C8-4DDE-8A50-CFC46DA356BE}"/>
               </a:ext>
             </a:extLst>
           </p:cNvPr>
@@ -22325,7 +24221,7 @@
           <p:cNvPr id="15" name="">
             <a:extLst xmlns:a="http://schemas.openxmlformats.org/drawingml/2006/main">
               <a:ext uri="{FF2B5EF4-FFF2-40B4-BE49-F238E27FC236}">
-                <a16:creationId xmlns:a16="http://schemas.microsoft.com/office/drawing/2014/main" id="{33846C6E-B712-46F3-AD70-953B06944A86}"/>
+                <a16:creationId xmlns:a16="http://schemas.microsoft.com/office/drawing/2014/main" id="{A029958D-4A81-434B-AB60-7CC5A788EC54}"/>
               </a:ext>
             </a:extLst>
           </p:cNvPr>
@@ -22541,7 +24437,7 @@
           <p:cNvPr id="16" name="">
             <a:extLst xmlns:a="http://schemas.openxmlformats.org/drawingml/2006/main">
               <a:ext uri="{FF2B5EF4-FFF2-40B4-BE49-F238E27FC236}">
-                <a16:creationId xmlns:a16="http://schemas.microsoft.com/office/drawing/2014/main" id="{4211AC0D-54D9-419B-8C5E-3ECD9B1B6C54}"/>
+                <a16:creationId xmlns:a16="http://schemas.microsoft.com/office/drawing/2014/main" id="{E413F1E4-66A3-4948-ABAD-78327BAC50B4}"/>
               </a:ext>
             </a:extLst>
           </p:cNvPr>
@@ -22576,7 +24472,7 @@
           <p:cNvPr id="17" name="">
             <a:extLst xmlns:a="http://schemas.openxmlformats.org/drawingml/2006/main">
               <a:ext uri="{FF2B5EF4-FFF2-40B4-BE49-F238E27FC236}">
-                <a16:creationId xmlns:a16="http://schemas.microsoft.com/office/drawing/2014/main" id="{E85425A2-10F4-44C3-A044-0C1995A4EC41}"/>
+                <a16:creationId xmlns:a16="http://schemas.microsoft.com/office/drawing/2014/main" id="{C3527127-42E8-4129-87F4-150A6BC682C2}"/>
               </a:ext>
             </a:extLst>
           </p:cNvPr>
@@ -22611,7 +24507,7 @@
           <p:cNvPr id="18" name="">
             <a:extLst xmlns:a="http://schemas.openxmlformats.org/drawingml/2006/main">
               <a:ext uri="{FF2B5EF4-FFF2-40B4-BE49-F238E27FC236}">
-                <a16:creationId xmlns:a16="http://schemas.microsoft.com/office/drawing/2014/main" id="{F8C796F6-3CD0-496F-BB4A-2E8EA29DD7AD}"/>
+                <a16:creationId xmlns:a16="http://schemas.microsoft.com/office/drawing/2014/main" id="{3AECEC64-03D4-48DD-90DB-969FACE9F700}"/>
               </a:ext>
             </a:extLst>
           </p:cNvPr>
@@ -22669,7 +24565,7 @@
           <p:cNvPr id="19" name="">
             <a:extLst xmlns:a="http://schemas.openxmlformats.org/drawingml/2006/main">
               <a:ext uri="{FF2B5EF4-FFF2-40B4-BE49-F238E27FC236}">
-                <a16:creationId xmlns:a16="http://schemas.microsoft.com/office/drawing/2014/main" id="{5EF3AB33-4F64-4E44-A697-41EA02986B5D}"/>
+                <a16:creationId xmlns:a16="http://schemas.microsoft.com/office/drawing/2014/main" id="{7AC2E71A-C858-456A-B0B7-37FA47D5EF3A}"/>
               </a:ext>
             </a:extLst>
           </p:cNvPr>
@@ -22834,7 +24730,7 @@
           <p:cNvPr id="20" name="">
             <a:extLst xmlns:a="http://schemas.openxmlformats.org/drawingml/2006/main">
               <a:ext uri="{FF2B5EF4-FFF2-40B4-BE49-F238E27FC236}">
-                <a16:creationId xmlns:a16="http://schemas.microsoft.com/office/drawing/2014/main" id="{43EF41B8-30D8-41D9-A4E9-947451669556}"/>
+                <a16:creationId xmlns:a16="http://schemas.microsoft.com/office/drawing/2014/main" id="{E134F2B0-9505-4965-9B5E-D7E7335666C4}"/>
               </a:ext>
             </a:extLst>
           </p:cNvPr>
@@ -22869,7 +24765,7 @@
           <p:cNvPr id="21" name="">
             <a:extLst xmlns:a="http://schemas.openxmlformats.org/drawingml/2006/main">
               <a:ext uri="{FF2B5EF4-FFF2-40B4-BE49-F238E27FC236}">
-                <a16:creationId xmlns:a16="http://schemas.microsoft.com/office/drawing/2014/main" id="{415C5564-0E5A-42ED-8DCF-4761FCA13F88}"/>
+                <a16:creationId xmlns:a16="http://schemas.microsoft.com/office/drawing/2014/main" id="{22F517CA-2A06-4CF4-AE24-DC07A8A34984}"/>
               </a:ext>
             </a:extLst>
           </p:cNvPr>
@@ -22904,7 +24800,7 @@
           <p:cNvPr id="22" name="">
             <a:extLst xmlns:a="http://schemas.openxmlformats.org/drawingml/2006/main">
               <a:ext uri="{FF2B5EF4-FFF2-40B4-BE49-F238E27FC236}">
-                <a16:creationId xmlns:a16="http://schemas.microsoft.com/office/drawing/2014/main" id="{9C6083A9-C8F1-475C-A17B-3B48EEAAD314}"/>
+                <a16:creationId xmlns:a16="http://schemas.microsoft.com/office/drawing/2014/main" id="{A9706309-8463-46A8-942E-8D7F3BEA0B55}"/>
               </a:ext>
             </a:extLst>
           </p:cNvPr>
@@ -22962,7 +24858,7 @@
           <p:cNvPr id="23" name="">
             <a:extLst xmlns:a="http://schemas.openxmlformats.org/drawingml/2006/main">
               <a:ext uri="{FF2B5EF4-FFF2-40B4-BE49-F238E27FC236}">
-                <a16:creationId xmlns:a16="http://schemas.microsoft.com/office/drawing/2014/main" id="{1C240B04-20A4-4886-981A-0DC72B38F634}"/>
+                <a16:creationId xmlns:a16="http://schemas.microsoft.com/office/drawing/2014/main" id="{96F53B07-05DE-4122-956D-F345FBE853E8}"/>
               </a:ext>
             </a:extLst>
           </p:cNvPr>
@@ -23127,7 +25023,7 @@
           <p:cNvPr id="24" name="">
             <a:extLst xmlns:a="http://schemas.openxmlformats.org/drawingml/2006/main">
               <a:ext uri="{FF2B5EF4-FFF2-40B4-BE49-F238E27FC236}">
-                <a16:creationId xmlns:a16="http://schemas.microsoft.com/office/drawing/2014/main" id="{72CAC10F-84BD-45F8-B885-7609C93FFD78}"/>
+                <a16:creationId xmlns:a16="http://schemas.microsoft.com/office/drawing/2014/main" id="{EFFFD32B-CB43-4E6E-891E-43A20076CEA3}"/>
               </a:ext>
             </a:extLst>
           </p:cNvPr>
@@ -23183,7 +25079,7 @@
     </p:spTree>
     <p:extLst>
       <p:ext uri="{BB962C8B-B14F-4D97-AF65-F5344CB8AC3E}">
-        <p14:creationId xmlns:p14="http://schemas.microsoft.com/office/powerpoint/2010/main" val="1728445697"/>
+        <p14:creationId xmlns:p14="http://schemas.microsoft.com/office/powerpoint/2010/main" val="1223762555"/>
       </p:ext>
     </p:extLst>
   </p:cSld>
@@ -23214,7 +25110,7 @@
           <p:cNvPr id="1" name="">
             <a:extLst xmlns:a="http://schemas.openxmlformats.org/drawingml/2006/main">
               <a:ext uri="{FF2B5EF4-FFF2-40B4-BE49-F238E27FC236}">
-                <a16:creationId xmlns:a16="http://schemas.microsoft.com/office/drawing/2014/main" id="{66D1E806-BF37-45F1-9E7D-76BA11F481B2}"/>
+                <a16:creationId xmlns:a16="http://schemas.microsoft.com/office/drawing/2014/main" id="{56D5CE11-2319-4155-B04A-4DB9A6712092}"/>
               </a:ext>
             </a:extLst>
           </p:cNvPr>
@@ -23249,7 +25145,7 @@
           <p:cNvPr id="2" name="">
             <a:extLst xmlns:a="http://schemas.openxmlformats.org/drawingml/2006/main">
               <a:ext uri="{FF2B5EF4-FFF2-40B4-BE49-F238E27FC236}">
-                <a16:creationId xmlns:a16="http://schemas.microsoft.com/office/drawing/2014/main" id="{627D4622-99DC-403F-A9A3-899A347830DB}"/>
+                <a16:creationId xmlns:a16="http://schemas.microsoft.com/office/drawing/2014/main" id="{2D396983-BC0A-41E0-B044-34B3E9D500CA}"/>
               </a:ext>
             </a:extLst>
           </p:cNvPr>
@@ -23284,7 +25180,7 @@
           <p:cNvPr id="3" name="">
             <a:extLst xmlns:a="http://schemas.openxmlformats.org/drawingml/2006/main">
               <a:ext uri="{FF2B5EF4-FFF2-40B4-BE49-F238E27FC236}">
-                <a16:creationId xmlns:a16="http://schemas.microsoft.com/office/drawing/2014/main" id="{C0AB8419-47A4-4DFC-BBAF-CD70C9F8088C}"/>
+                <a16:creationId xmlns:a16="http://schemas.microsoft.com/office/drawing/2014/main" id="{73D3187A-A7A0-486F-9D63-5258C7AFF034}"/>
               </a:ext>
             </a:extLst>
           </p:cNvPr>
@@ -23342,7 +25238,7 @@
           <p:cNvPr id="4" name="">
             <a:extLst xmlns:a="http://schemas.openxmlformats.org/drawingml/2006/main">
               <a:ext uri="{FF2B5EF4-FFF2-40B4-BE49-F238E27FC236}">
-                <a16:creationId xmlns:a16="http://schemas.microsoft.com/office/drawing/2014/main" id="{247A188B-F0C2-4146-A3DA-E05086FDBE69}"/>
+                <a16:creationId xmlns:a16="http://schemas.microsoft.com/office/drawing/2014/main" id="{9E0669CF-D542-42CE-A9A6-FD4ECCD02362}"/>
               </a:ext>
             </a:extLst>
           </p:cNvPr>
@@ -23400,7 +25296,7 @@
           <p:cNvPr id="5" name="">
             <a:extLst xmlns:a="http://schemas.openxmlformats.org/drawingml/2006/main">
               <a:ext uri="{FF2B5EF4-FFF2-40B4-BE49-F238E27FC236}">
-                <a16:creationId xmlns:a16="http://schemas.microsoft.com/office/drawing/2014/main" id="{CF1B8FA1-43BD-4251-BDDE-AB3C0117C8F7}"/>
+                <a16:creationId xmlns:a16="http://schemas.microsoft.com/office/drawing/2014/main" id="{AD9392ED-3962-4096-9481-C753B2EF20AA}"/>
               </a:ext>
             </a:extLst>
           </p:cNvPr>
@@ -23435,7 +25331,7 @@
           <p:cNvPr id="6" name="">
             <a:extLst xmlns:a="http://schemas.openxmlformats.org/drawingml/2006/main">
               <a:ext uri="{FF2B5EF4-FFF2-40B4-BE49-F238E27FC236}">
-                <a16:creationId xmlns:a16="http://schemas.microsoft.com/office/drawing/2014/main" id="{08AE5E85-4437-4966-B7F9-64E72740C475}"/>
+                <a16:creationId xmlns:a16="http://schemas.microsoft.com/office/drawing/2014/main" id="{4B62CFE7-D1A9-4315-8464-B63489C8A206}"/>
               </a:ext>
             </a:extLst>
           </p:cNvPr>
@@ -23493,7 +25389,7 @@
           <p:cNvPr id="7" name="">
             <a:extLst xmlns:a="http://schemas.openxmlformats.org/drawingml/2006/main">
               <a:ext uri="{FF2B5EF4-FFF2-40B4-BE49-F238E27FC236}">
-                <a16:creationId xmlns:a16="http://schemas.microsoft.com/office/drawing/2014/main" id="{0E97CF30-FCD6-45BD-9B5E-C51F3CF3C9AE}"/>
+                <a16:creationId xmlns:a16="http://schemas.microsoft.com/office/drawing/2014/main" id="{7EB455FF-002F-4200-98B2-A442451DEC5C}"/>
               </a:ext>
             </a:extLst>
           </p:cNvPr>
@@ -23551,7 +25447,7 @@
           <p:cNvPr id="8" name="">
             <a:extLst xmlns:a="http://schemas.openxmlformats.org/drawingml/2006/main">
               <a:ext uri="{FF2B5EF4-FFF2-40B4-BE49-F238E27FC236}">
-                <a16:creationId xmlns:a16="http://schemas.microsoft.com/office/drawing/2014/main" id="{6A38F2CA-4B5D-4608-9314-A452090A5A4E}"/>
+                <a16:creationId xmlns:a16="http://schemas.microsoft.com/office/drawing/2014/main" id="{50EE43E9-8586-420E-A797-014BAAFD1586}"/>
               </a:ext>
             </a:extLst>
           </p:cNvPr>
@@ -23586,7 +25482,7 @@
           <p:cNvPr id="9" name="">
             <a:extLst xmlns:a="http://schemas.openxmlformats.org/drawingml/2006/main">
               <a:ext uri="{FF2B5EF4-FFF2-40B4-BE49-F238E27FC236}">
-                <a16:creationId xmlns:a16="http://schemas.microsoft.com/office/drawing/2014/main" id="{16C432F8-746D-4D13-B12D-E561D3DECDE2}"/>
+                <a16:creationId xmlns:a16="http://schemas.microsoft.com/office/drawing/2014/main" id="{7B3FE9F0-B9A1-45C6-A8A8-1045D81F9E67}"/>
               </a:ext>
             </a:extLst>
           </p:cNvPr>
@@ -23621,7 +25517,7 @@
           <p:cNvPr id="10" name="">
             <a:extLst xmlns:a="http://schemas.openxmlformats.org/drawingml/2006/main">
               <a:ext uri="{FF2B5EF4-FFF2-40B4-BE49-F238E27FC236}">
-                <a16:creationId xmlns:a16="http://schemas.microsoft.com/office/drawing/2014/main" id="{04B2FA29-2841-437B-83C7-57C8A450A371}"/>
+                <a16:creationId xmlns:a16="http://schemas.microsoft.com/office/drawing/2014/main" id="{65ED8F0C-5820-4663-A227-37969F7EDB89}"/>
               </a:ext>
             </a:extLst>
           </p:cNvPr>
@@ -23679,7 +25575,7 @@
           <p:cNvPr id="11" name="">
             <a:extLst xmlns:a="http://schemas.openxmlformats.org/drawingml/2006/main">
               <a:ext uri="{FF2B5EF4-FFF2-40B4-BE49-F238E27FC236}">
-                <a16:creationId xmlns:a16="http://schemas.microsoft.com/office/drawing/2014/main" id="{31E3B600-09CB-48BD-A3AF-575605DD3CF2}"/>
+                <a16:creationId xmlns:a16="http://schemas.microsoft.com/office/drawing/2014/main" id="{85CDB088-7EAE-4FCF-84AC-72434C728561}"/>
               </a:ext>
             </a:extLst>
           </p:cNvPr>
@@ -23716,7 +25612,7 @@
           <p:cNvPr id="12" name="">
             <a:extLst xmlns:a="http://schemas.openxmlformats.org/drawingml/2006/main">
               <a:ext uri="{FF2B5EF4-FFF2-40B4-BE49-F238E27FC236}">
-                <a16:creationId xmlns:a16="http://schemas.microsoft.com/office/drawing/2014/main" id="{69B23641-8DF3-4821-9C78-E1AE0E3A5640}"/>
+                <a16:creationId xmlns:a16="http://schemas.microsoft.com/office/drawing/2014/main" id="{A225F14A-709E-457A-96C1-F1E2A8124CB5}"/>
               </a:ext>
             </a:extLst>
           </p:cNvPr>
@@ -23751,7 +25647,7 @@
           <p:cNvPr id="13" name="">
             <a:extLst xmlns:a="http://schemas.openxmlformats.org/drawingml/2006/main">
               <a:ext uri="{FF2B5EF4-FFF2-40B4-BE49-F238E27FC236}">
-                <a16:creationId xmlns:a16="http://schemas.microsoft.com/office/drawing/2014/main" id="{E21B68CD-020C-4DB6-974F-2928BE1871A7}"/>
+                <a16:creationId xmlns:a16="http://schemas.microsoft.com/office/drawing/2014/main" id="{C19E9628-44B1-4971-BDD3-29DF55CAB8C1}"/>
               </a:ext>
             </a:extLst>
           </p:cNvPr>
@@ -23786,7 +25682,7 @@
           <p:cNvPr id="14" name="">
             <a:extLst xmlns:a="http://schemas.openxmlformats.org/drawingml/2006/main">
               <a:ext uri="{FF2B5EF4-FFF2-40B4-BE49-F238E27FC236}">
-                <a16:creationId xmlns:a16="http://schemas.microsoft.com/office/drawing/2014/main" id="{6CBCB2D6-E7E1-41C8-9D17-AA6C1C350850}"/>
+                <a16:creationId xmlns:a16="http://schemas.microsoft.com/office/drawing/2014/main" id="{8419DDD9-F65E-4D10-876A-FDF261E96EB4}"/>
               </a:ext>
             </a:extLst>
           </p:cNvPr>
@@ -23821,7 +25717,7 @@
           <p:cNvPr id="15" name="">
             <a:extLst xmlns:a="http://schemas.openxmlformats.org/drawingml/2006/main">
               <a:ext uri="{FF2B5EF4-FFF2-40B4-BE49-F238E27FC236}">
-                <a16:creationId xmlns:a16="http://schemas.microsoft.com/office/drawing/2014/main" id="{1B4ADC22-7050-4105-A87F-F6D23ACB0556}"/>
+                <a16:creationId xmlns:a16="http://schemas.microsoft.com/office/drawing/2014/main" id="{C961C5C8-4BBC-4801-9B48-F683E76B7F43}"/>
               </a:ext>
             </a:extLst>
           </p:cNvPr>
@@ -23856,7 +25752,7 @@
           <p:cNvPr id="16" name="">
             <a:extLst xmlns:a="http://schemas.openxmlformats.org/drawingml/2006/main">
               <a:ext uri="{FF2B5EF4-FFF2-40B4-BE49-F238E27FC236}">
-                <a16:creationId xmlns:a16="http://schemas.microsoft.com/office/drawing/2014/main" id="{7A43DFCE-3E24-45B3-A819-5FEB3F3552D6}"/>
+                <a16:creationId xmlns:a16="http://schemas.microsoft.com/office/drawing/2014/main" id="{8808D21C-8F72-4943-8CC7-647550F97E71}"/>
               </a:ext>
             </a:extLst>
           </p:cNvPr>
@@ -23891,7 +25787,7 @@
           <p:cNvPr id="17" name="">
             <a:extLst xmlns:a="http://schemas.openxmlformats.org/drawingml/2006/main">
               <a:ext uri="{FF2B5EF4-FFF2-40B4-BE49-F238E27FC236}">
-                <a16:creationId xmlns:a16="http://schemas.microsoft.com/office/drawing/2014/main" id="{0B7093B3-AA8C-48B3-8FE5-7900E172DBD7}"/>
+                <a16:creationId xmlns:a16="http://schemas.microsoft.com/office/drawing/2014/main" id="{80F67C01-B058-40CA-BAC1-701A33B73F32}"/>
               </a:ext>
             </a:extLst>
           </p:cNvPr>
@@ -23926,7 +25822,7 @@
           <p:cNvPr id="18" name="">
             <a:extLst xmlns:a="http://schemas.openxmlformats.org/drawingml/2006/main">
               <a:ext uri="{FF2B5EF4-FFF2-40B4-BE49-F238E27FC236}">
-                <a16:creationId xmlns:a16="http://schemas.microsoft.com/office/drawing/2014/main" id="{8135810F-FCC6-4BCC-B52A-06840D4FC5EB}"/>
+                <a16:creationId xmlns:a16="http://schemas.microsoft.com/office/drawing/2014/main" id="{BF041DB3-31EE-4BE2-916B-F2637181F3E1}"/>
               </a:ext>
             </a:extLst>
           </p:cNvPr>
@@ -23961,7 +25857,7 @@
           <p:cNvPr id="19" name="">
             <a:extLst xmlns:a="http://schemas.openxmlformats.org/drawingml/2006/main">
               <a:ext uri="{FF2B5EF4-FFF2-40B4-BE49-F238E27FC236}">
-                <a16:creationId xmlns:a16="http://schemas.microsoft.com/office/drawing/2014/main" id="{89755FD6-9E05-40B8-8220-A16B3BFF6656}"/>
+                <a16:creationId xmlns:a16="http://schemas.microsoft.com/office/drawing/2014/main" id="{67DFEA00-B439-40AC-94B6-EF6BE1FBD009}"/>
               </a:ext>
             </a:extLst>
           </p:cNvPr>
@@ -23996,7 +25892,7 @@
           <p:cNvPr id="20" name="">
             <a:extLst xmlns:a="http://schemas.openxmlformats.org/drawingml/2006/main">
               <a:ext uri="{FF2B5EF4-FFF2-40B4-BE49-F238E27FC236}">
-                <a16:creationId xmlns:a16="http://schemas.microsoft.com/office/drawing/2014/main" id="{EAF8B013-2FC1-4E94-A314-E09965D34C19}"/>
+                <a16:creationId xmlns:a16="http://schemas.microsoft.com/office/drawing/2014/main" id="{06017B50-C11E-43BB-820A-A6B20DDEDE6C}"/>
               </a:ext>
             </a:extLst>
           </p:cNvPr>
@@ -24054,7 +25950,7 @@
           <p:cNvPr id="21" name="">
             <a:extLst xmlns:a="http://schemas.openxmlformats.org/drawingml/2006/main">
               <a:ext uri="{FF2B5EF4-FFF2-40B4-BE49-F238E27FC236}">
-                <a16:creationId xmlns:a16="http://schemas.microsoft.com/office/drawing/2014/main" id="{BE95CD22-7D0E-4B88-9FC2-4780C6CBB454}"/>
+                <a16:creationId xmlns:a16="http://schemas.microsoft.com/office/drawing/2014/main" id="{1333F706-DEFE-4008-BD2B-738F9CA53DD5}"/>
               </a:ext>
             </a:extLst>
           </p:cNvPr>
@@ -24091,7 +25987,7 @@
           <p:cNvPr id="22" name="">
             <a:extLst xmlns:a="http://schemas.openxmlformats.org/drawingml/2006/main">
               <a:ext uri="{FF2B5EF4-FFF2-40B4-BE49-F238E27FC236}">
-                <a16:creationId xmlns:a16="http://schemas.microsoft.com/office/drawing/2014/main" id="{DDFC66B6-24C3-40B9-8949-C15E5903A5B3}"/>
+                <a16:creationId xmlns:a16="http://schemas.microsoft.com/office/drawing/2014/main" id="{F91E6CD0-9316-4234-B98D-1D07F1BE892E}"/>
               </a:ext>
             </a:extLst>
           </p:cNvPr>
@@ -24126,7 +26022,7 @@
           <p:cNvPr id="23" name="">
             <a:extLst xmlns:a="http://schemas.openxmlformats.org/drawingml/2006/main">
               <a:ext uri="{FF2B5EF4-FFF2-40B4-BE49-F238E27FC236}">
-                <a16:creationId xmlns:a16="http://schemas.microsoft.com/office/drawing/2014/main" id="{F830FB22-43EC-4B69-BAE8-329762B23852}"/>
+                <a16:creationId xmlns:a16="http://schemas.microsoft.com/office/drawing/2014/main" id="{B11689E1-CBFC-4676-9180-8B569FEE76E6}"/>
               </a:ext>
             </a:extLst>
           </p:cNvPr>
@@ -24161,7 +26057,7 @@
           <p:cNvPr id="24" name="">
             <a:extLst xmlns:a="http://schemas.openxmlformats.org/drawingml/2006/main">
               <a:ext uri="{FF2B5EF4-FFF2-40B4-BE49-F238E27FC236}">
-                <a16:creationId xmlns:a16="http://schemas.microsoft.com/office/drawing/2014/main" id="{34B52A8A-1746-4FF5-B831-683AB321CB56}"/>
+                <a16:creationId xmlns:a16="http://schemas.microsoft.com/office/drawing/2014/main" id="{FAE93ECE-95D7-4428-8837-FDA8432BCAE8}"/>
               </a:ext>
             </a:extLst>
           </p:cNvPr>
@@ -24196,7 +26092,7 @@
           <p:cNvPr id="25" name="">
             <a:extLst xmlns:a="http://schemas.openxmlformats.org/drawingml/2006/main">
               <a:ext uri="{FF2B5EF4-FFF2-40B4-BE49-F238E27FC236}">
-                <a16:creationId xmlns:a16="http://schemas.microsoft.com/office/drawing/2014/main" id="{2B3C954D-0AE0-4045-9EC2-93AB26EDF981}"/>
+                <a16:creationId xmlns:a16="http://schemas.microsoft.com/office/drawing/2014/main" id="{FAE42FDB-71DB-429B-9CB0-BF743A590B01}"/>
               </a:ext>
             </a:extLst>
           </p:cNvPr>
@@ -24231,7 +26127,7 @@
           <p:cNvPr id="26" name="">
             <a:extLst xmlns:a="http://schemas.openxmlformats.org/drawingml/2006/main">
               <a:ext uri="{FF2B5EF4-FFF2-40B4-BE49-F238E27FC236}">
-                <a16:creationId xmlns:a16="http://schemas.microsoft.com/office/drawing/2014/main" id="{88D69C5B-63B1-45FC-81A9-038195FBC47F}"/>
+                <a16:creationId xmlns:a16="http://schemas.microsoft.com/office/drawing/2014/main" id="{FDF51125-C80E-4B95-89BD-E937177EDB9D}"/>
               </a:ext>
             </a:extLst>
           </p:cNvPr>
@@ -24266,7 +26162,7 @@
           <p:cNvPr id="27" name="">
             <a:extLst xmlns:a="http://schemas.openxmlformats.org/drawingml/2006/main">
               <a:ext uri="{FF2B5EF4-FFF2-40B4-BE49-F238E27FC236}">
-                <a16:creationId xmlns:a16="http://schemas.microsoft.com/office/drawing/2014/main" id="{FD5F0A90-48E5-46F1-B8BF-C6BD824162B2}"/>
+                <a16:creationId xmlns:a16="http://schemas.microsoft.com/office/drawing/2014/main" id="{194F8798-5529-43DE-8996-E1E8CF4B94BE}"/>
               </a:ext>
             </a:extLst>
           </p:cNvPr>
@@ -24301,7 +26197,7 @@
           <p:cNvPr id="28" name="">
             <a:extLst xmlns:a="http://schemas.openxmlformats.org/drawingml/2006/main">
               <a:ext uri="{FF2B5EF4-FFF2-40B4-BE49-F238E27FC236}">
-                <a16:creationId xmlns:a16="http://schemas.microsoft.com/office/drawing/2014/main" id="{111CCF54-B412-43B6-B1F2-487105300384}"/>
+                <a16:creationId xmlns:a16="http://schemas.microsoft.com/office/drawing/2014/main" id="{39F33466-6DA7-4E51-837A-AA2903CD0DDA}"/>
               </a:ext>
             </a:extLst>
           </p:cNvPr>
@@ -24336,7 +26232,7 @@
           <p:cNvPr id="29" name="">
             <a:extLst xmlns:a="http://schemas.openxmlformats.org/drawingml/2006/main">
               <a:ext uri="{FF2B5EF4-FFF2-40B4-BE49-F238E27FC236}">
-                <a16:creationId xmlns:a16="http://schemas.microsoft.com/office/drawing/2014/main" id="{B68282FD-793B-4378-9E36-BEF2398B963F}"/>
+                <a16:creationId xmlns:a16="http://schemas.microsoft.com/office/drawing/2014/main" id="{2AE967A8-207A-4190-A3C3-8B242721892C}"/>
               </a:ext>
             </a:extLst>
           </p:cNvPr>
@@ -24371,7 +26267,7 @@
           <p:cNvPr id="30" name="">
             <a:extLst xmlns:a="http://schemas.openxmlformats.org/drawingml/2006/main">
               <a:ext uri="{FF2B5EF4-FFF2-40B4-BE49-F238E27FC236}">
-                <a16:creationId xmlns:a16="http://schemas.microsoft.com/office/drawing/2014/main" id="{8A653523-9A95-4CF1-BD44-0574FD286920}"/>
+                <a16:creationId xmlns:a16="http://schemas.microsoft.com/office/drawing/2014/main" id="{94E593E2-7343-45EE-882A-34D56EF0AB7E}"/>
               </a:ext>
             </a:extLst>
           </p:cNvPr>
@@ -24406,7 +26302,7 @@
           <p:cNvPr id="31" name="">
             <a:extLst xmlns:a="http://schemas.openxmlformats.org/drawingml/2006/main">
               <a:ext uri="{FF2B5EF4-FFF2-40B4-BE49-F238E27FC236}">
-                <a16:creationId xmlns:a16="http://schemas.microsoft.com/office/drawing/2014/main" id="{593C74AB-B49A-451F-90E1-764C0C55E4E9}"/>
+                <a16:creationId xmlns:a16="http://schemas.microsoft.com/office/drawing/2014/main" id="{2C492711-A022-4486-AE56-C877D2903EC3}"/>
               </a:ext>
             </a:extLst>
           </p:cNvPr>
@@ -24464,7 +26360,7 @@
           <p:cNvPr id="32" name="">
             <a:extLst xmlns:a="http://schemas.openxmlformats.org/drawingml/2006/main">
               <a:ext uri="{FF2B5EF4-FFF2-40B4-BE49-F238E27FC236}">
-                <a16:creationId xmlns:a16="http://schemas.microsoft.com/office/drawing/2014/main" id="{C9C6BB53-16E3-4C33-9810-256C8A8EC9A5}"/>
+                <a16:creationId xmlns:a16="http://schemas.microsoft.com/office/drawing/2014/main" id="{078EFEF7-42F7-42E0-A0ED-2307E3A9591E}"/>
               </a:ext>
             </a:extLst>
           </p:cNvPr>
@@ -24501,7 +26397,7 @@
           <p:cNvPr id="33" name="">
             <a:extLst xmlns:a="http://schemas.openxmlformats.org/drawingml/2006/main">
               <a:ext uri="{FF2B5EF4-FFF2-40B4-BE49-F238E27FC236}">
-                <a16:creationId xmlns:a16="http://schemas.microsoft.com/office/drawing/2014/main" id="{3A2427F6-AB77-453A-9997-5D94547930C3}"/>
+                <a16:creationId xmlns:a16="http://schemas.microsoft.com/office/drawing/2014/main" id="{6BC20F1E-FC7D-4918-BB26-6D9CDA4740EB}"/>
               </a:ext>
             </a:extLst>
           </p:cNvPr>
@@ -24536,7 +26432,7 @@
           <p:cNvPr id="34" name="">
             <a:extLst xmlns:a="http://schemas.openxmlformats.org/drawingml/2006/main">
               <a:ext uri="{FF2B5EF4-FFF2-40B4-BE49-F238E27FC236}">
-                <a16:creationId xmlns:a16="http://schemas.microsoft.com/office/drawing/2014/main" id="{6FFAE24D-7562-4B90-A855-1F36427F9909}"/>
+                <a16:creationId xmlns:a16="http://schemas.microsoft.com/office/drawing/2014/main" id="{ECD7A033-5D11-44AB-95B0-209E54142818}"/>
               </a:ext>
             </a:extLst>
           </p:cNvPr>
@@ -24571,7 +26467,7 @@
           <p:cNvPr id="35" name="">
             <a:extLst xmlns:a="http://schemas.openxmlformats.org/drawingml/2006/main">
               <a:ext uri="{FF2B5EF4-FFF2-40B4-BE49-F238E27FC236}">
-                <a16:creationId xmlns:a16="http://schemas.microsoft.com/office/drawing/2014/main" id="{BBD4E6B8-DA6C-46B4-B9D4-C80314217F90}"/>
+                <a16:creationId xmlns:a16="http://schemas.microsoft.com/office/drawing/2014/main" id="{B65B3B55-C771-4C75-9202-F14904911946}"/>
               </a:ext>
             </a:extLst>
           </p:cNvPr>
@@ -24606,7 +26502,7 @@
           <p:cNvPr id="36" name="">
             <a:extLst xmlns:a="http://schemas.openxmlformats.org/drawingml/2006/main">
               <a:ext uri="{FF2B5EF4-FFF2-40B4-BE49-F238E27FC236}">
-                <a16:creationId xmlns:a16="http://schemas.microsoft.com/office/drawing/2014/main" id="{DBF555EF-6A17-4769-9FE2-55CADF37E72E}"/>
+                <a16:creationId xmlns:a16="http://schemas.microsoft.com/office/drawing/2014/main" id="{E8A8F96C-BFA8-430E-A6F1-937D92B18D3E}"/>
               </a:ext>
             </a:extLst>
           </p:cNvPr>
@@ -24641,7 +26537,7 @@
           <p:cNvPr id="37" name="">
             <a:extLst xmlns:a="http://schemas.openxmlformats.org/drawingml/2006/main">
               <a:ext uri="{FF2B5EF4-FFF2-40B4-BE49-F238E27FC236}">
-                <a16:creationId xmlns:a16="http://schemas.microsoft.com/office/drawing/2014/main" id="{91F4378E-E7C0-4310-90DB-DBF538A0059B}"/>
+                <a16:creationId xmlns:a16="http://schemas.microsoft.com/office/drawing/2014/main" id="{BEF54831-5E1D-41F5-B16D-445FEB44B019}"/>
               </a:ext>
             </a:extLst>
           </p:cNvPr>
@@ -24676,7 +26572,7 @@
           <p:cNvPr id="38" name="">
             <a:extLst xmlns:a="http://schemas.openxmlformats.org/drawingml/2006/main">
               <a:ext uri="{FF2B5EF4-FFF2-40B4-BE49-F238E27FC236}">
-                <a16:creationId xmlns:a16="http://schemas.microsoft.com/office/drawing/2014/main" id="{96B07B89-A882-49BF-8B20-72634263397E}"/>
+                <a16:creationId xmlns:a16="http://schemas.microsoft.com/office/drawing/2014/main" id="{207A604C-CAF0-4CC9-8680-7D2116C0110C}"/>
               </a:ext>
             </a:extLst>
           </p:cNvPr>
@@ -24711,7 +26607,7 @@
           <p:cNvPr id="39" name="">
             <a:extLst xmlns:a="http://schemas.openxmlformats.org/drawingml/2006/main">
               <a:ext uri="{FF2B5EF4-FFF2-40B4-BE49-F238E27FC236}">
-                <a16:creationId xmlns:a16="http://schemas.microsoft.com/office/drawing/2014/main" id="{848C4C64-6086-4F04-B2D1-0650B944E00E}"/>
+                <a16:creationId xmlns:a16="http://schemas.microsoft.com/office/drawing/2014/main" id="{F2B6873F-9BD5-4A55-BEA0-5437CF8FD9E3}"/>
               </a:ext>
             </a:extLst>
           </p:cNvPr>
@@ -24746,7 +26642,7 @@
           <p:cNvPr id="40" name="">
             <a:extLst xmlns:a="http://schemas.openxmlformats.org/drawingml/2006/main">
               <a:ext uri="{FF2B5EF4-FFF2-40B4-BE49-F238E27FC236}">
-                <a16:creationId xmlns:a16="http://schemas.microsoft.com/office/drawing/2014/main" id="{9F3168CC-0D2D-4921-8BAD-76F9B7B16CAC}"/>
+                <a16:creationId xmlns:a16="http://schemas.microsoft.com/office/drawing/2014/main" id="{37E38F16-47E9-454B-B6BA-4234F809261C}"/>
               </a:ext>
             </a:extLst>
           </p:cNvPr>
@@ -24781,7 +26677,7 @@
           <p:cNvPr id="41" name="">
             <a:extLst xmlns:a="http://schemas.openxmlformats.org/drawingml/2006/main">
               <a:ext uri="{FF2B5EF4-FFF2-40B4-BE49-F238E27FC236}">
-                <a16:creationId xmlns:a16="http://schemas.microsoft.com/office/drawing/2014/main" id="{CB42E4DA-3FD0-4D03-B29C-8C3F98A60BE4}"/>
+                <a16:creationId xmlns:a16="http://schemas.microsoft.com/office/drawing/2014/main" id="{A1B97815-8420-4CA4-BA2F-79A0ACCEB88B}"/>
               </a:ext>
             </a:extLst>
           </p:cNvPr>
@@ -24839,7 +26735,7 @@
           <p:cNvPr id="42" name="">
             <a:extLst xmlns:a="http://schemas.openxmlformats.org/drawingml/2006/main">
               <a:ext uri="{FF2B5EF4-FFF2-40B4-BE49-F238E27FC236}">
-                <a16:creationId xmlns:a16="http://schemas.microsoft.com/office/drawing/2014/main" id="{A7D5AB91-2AD8-4B0A-9BB3-B360FEDCC51A}"/>
+                <a16:creationId xmlns:a16="http://schemas.microsoft.com/office/drawing/2014/main" id="{B27C9E7A-EDF9-447E-A78F-081EAA0F4EDD}"/>
               </a:ext>
             </a:extLst>
           </p:cNvPr>
@@ -24876,7 +26772,7 @@
           <p:cNvPr id="43" name="">
             <a:extLst xmlns:a="http://schemas.openxmlformats.org/drawingml/2006/main">
               <a:ext uri="{FF2B5EF4-FFF2-40B4-BE49-F238E27FC236}">
-                <a16:creationId xmlns:a16="http://schemas.microsoft.com/office/drawing/2014/main" id="{81375399-2183-405E-99B9-EDDBCE99650E}"/>
+                <a16:creationId xmlns:a16="http://schemas.microsoft.com/office/drawing/2014/main" id="{4084B366-5901-4094-93F8-1F850004834B}"/>
               </a:ext>
             </a:extLst>
           </p:cNvPr>
@@ -24911,7 +26807,7 @@
           <p:cNvPr id="44" name="">
             <a:extLst xmlns:a="http://schemas.openxmlformats.org/drawingml/2006/main">
               <a:ext uri="{FF2B5EF4-FFF2-40B4-BE49-F238E27FC236}">
-                <a16:creationId xmlns:a16="http://schemas.microsoft.com/office/drawing/2014/main" id="{070C5E3E-66CD-4374-80EE-C16D6FDAADA8}"/>
+                <a16:creationId xmlns:a16="http://schemas.microsoft.com/office/drawing/2014/main" id="{12BC96EE-D187-4110-86C9-224BC3B63ABB}"/>
               </a:ext>
             </a:extLst>
           </p:cNvPr>
@@ -24946,7 +26842,7 @@
           <p:cNvPr id="45" name="">
             <a:extLst xmlns:a="http://schemas.openxmlformats.org/drawingml/2006/main">
               <a:ext uri="{FF2B5EF4-FFF2-40B4-BE49-F238E27FC236}">
-                <a16:creationId xmlns:a16="http://schemas.microsoft.com/office/drawing/2014/main" id="{FEDBDC5F-03B9-4FCF-81C5-B3AE2A598661}"/>
+                <a16:creationId xmlns:a16="http://schemas.microsoft.com/office/drawing/2014/main" id="{A2086841-94E1-4382-A41D-AEDF70508D58}"/>
               </a:ext>
             </a:extLst>
           </p:cNvPr>
@@ -24981,7 +26877,7 @@
           <p:cNvPr id="46" name="">
             <a:extLst xmlns:a="http://schemas.openxmlformats.org/drawingml/2006/main">
               <a:ext uri="{FF2B5EF4-FFF2-40B4-BE49-F238E27FC236}">
-                <a16:creationId xmlns:a16="http://schemas.microsoft.com/office/drawing/2014/main" id="{32A93747-433D-4592-9078-5113B78DECF2}"/>
+                <a16:creationId xmlns:a16="http://schemas.microsoft.com/office/drawing/2014/main" id="{5AF1ECD4-3FDC-432E-B785-631A215F3735}"/>
               </a:ext>
             </a:extLst>
           </p:cNvPr>
@@ -25016,7 +26912,7 @@
           <p:cNvPr id="47" name="">
             <a:extLst xmlns:a="http://schemas.openxmlformats.org/drawingml/2006/main">
               <a:ext uri="{FF2B5EF4-FFF2-40B4-BE49-F238E27FC236}">
-                <a16:creationId xmlns:a16="http://schemas.microsoft.com/office/drawing/2014/main" id="{52D383C8-C028-46DF-BDA8-71C673414ACC}"/>
+                <a16:creationId xmlns:a16="http://schemas.microsoft.com/office/drawing/2014/main" id="{8B68A284-1F11-450F-907F-702D416A54D6}"/>
               </a:ext>
             </a:extLst>
           </p:cNvPr>
@@ -25051,7 +26947,7 @@
           <p:cNvPr id="48" name="">
             <a:extLst xmlns:a="http://schemas.openxmlformats.org/drawingml/2006/main">
               <a:ext uri="{FF2B5EF4-FFF2-40B4-BE49-F238E27FC236}">
-                <a16:creationId xmlns:a16="http://schemas.microsoft.com/office/drawing/2014/main" id="{173EEDAC-0979-49E4-9D41-F285C8A11361}"/>
+                <a16:creationId xmlns:a16="http://schemas.microsoft.com/office/drawing/2014/main" id="{48C5F7C6-61A2-474C-8F5D-60DF1DCC37B5}"/>
               </a:ext>
             </a:extLst>
           </p:cNvPr>
@@ -25086,7 +26982,7 @@
           <p:cNvPr id="49" name="">
             <a:extLst xmlns:a="http://schemas.openxmlformats.org/drawingml/2006/main">
               <a:ext uri="{FF2B5EF4-FFF2-40B4-BE49-F238E27FC236}">
-                <a16:creationId xmlns:a16="http://schemas.microsoft.com/office/drawing/2014/main" id="{1ED5A2B7-CECD-43A0-8FC5-635A1EF186E3}"/>
+                <a16:creationId xmlns:a16="http://schemas.microsoft.com/office/drawing/2014/main" id="{7D87CCC2-0A90-435F-8FC3-B6D2013C7C61}"/>
               </a:ext>
             </a:extLst>
           </p:cNvPr>
@@ -25121,7 +27017,7 @@
           <p:cNvPr id="50" name="">
             <a:extLst xmlns:a="http://schemas.openxmlformats.org/drawingml/2006/main">
               <a:ext uri="{FF2B5EF4-FFF2-40B4-BE49-F238E27FC236}">
-                <a16:creationId xmlns:a16="http://schemas.microsoft.com/office/drawing/2014/main" id="{1E55825C-25D7-44BF-822D-43EE342A01D2}"/>
+                <a16:creationId xmlns:a16="http://schemas.microsoft.com/office/drawing/2014/main" id="{D89C2C98-342A-4364-93F0-83B7EEA858BB}"/>
               </a:ext>
             </a:extLst>
           </p:cNvPr>
@@ -25156,7 +27052,7 @@
           <p:cNvPr id="51" name="">
             <a:extLst xmlns:a="http://schemas.openxmlformats.org/drawingml/2006/main">
               <a:ext uri="{FF2B5EF4-FFF2-40B4-BE49-F238E27FC236}">
-                <a16:creationId xmlns:a16="http://schemas.microsoft.com/office/drawing/2014/main" id="{64ED2C75-C586-4D7C-A4FE-2F28843692DA}"/>
+                <a16:creationId xmlns:a16="http://schemas.microsoft.com/office/drawing/2014/main" id="{DDD1A15B-CDA2-46BD-898C-5FBFA1539888}"/>
               </a:ext>
             </a:extLst>
           </p:cNvPr>
@@ -25214,7 +27110,7 @@
           <p:cNvPr id="52" name="">
             <a:extLst xmlns:a="http://schemas.openxmlformats.org/drawingml/2006/main">
               <a:ext uri="{FF2B5EF4-FFF2-40B4-BE49-F238E27FC236}">
-                <a16:creationId xmlns:a16="http://schemas.microsoft.com/office/drawing/2014/main" id="{8E224F6F-4A59-4ED2-851D-76BD9F090E53}"/>
+                <a16:creationId xmlns:a16="http://schemas.microsoft.com/office/drawing/2014/main" id="{81F181DE-BD4A-49D5-BBD2-B5A10B51D555}"/>
               </a:ext>
             </a:extLst>
           </p:cNvPr>
@@ -25272,7 +27168,7 @@
           <p:cNvPr id="53" name="">
             <a:extLst xmlns:a="http://schemas.openxmlformats.org/drawingml/2006/main">
               <a:ext uri="{FF2B5EF4-FFF2-40B4-BE49-F238E27FC236}">
-                <a16:creationId xmlns:a16="http://schemas.microsoft.com/office/drawing/2014/main" id="{9512582A-86E4-4502-A38E-B5373FC91C0F}"/>
+                <a16:creationId xmlns:a16="http://schemas.microsoft.com/office/drawing/2014/main" id="{66B62642-19EC-4CA2-8591-224F11B56620}"/>
               </a:ext>
             </a:extLst>
           </p:cNvPr>
@@ -25307,7 +27203,7 @@
           <p:cNvPr id="54" name="">
             <a:extLst xmlns:a="http://schemas.openxmlformats.org/drawingml/2006/main">
               <a:ext uri="{FF2B5EF4-FFF2-40B4-BE49-F238E27FC236}">
-                <a16:creationId xmlns:a16="http://schemas.microsoft.com/office/drawing/2014/main" id="{2D4F0789-93DF-4503-93C3-EE097C17DFE4}"/>
+                <a16:creationId xmlns:a16="http://schemas.microsoft.com/office/drawing/2014/main" id="{E471DF9F-8921-40F8-A1D9-5347A7B92FA3}"/>
               </a:ext>
             </a:extLst>
           </p:cNvPr>
@@ -25342,7 +27238,7 @@
           <p:cNvPr id="55" name="">
             <a:extLst xmlns:a="http://schemas.openxmlformats.org/drawingml/2006/main">
               <a:ext uri="{FF2B5EF4-FFF2-40B4-BE49-F238E27FC236}">
-                <a16:creationId xmlns:a16="http://schemas.microsoft.com/office/drawing/2014/main" id="{6DDD63A3-B092-4902-93AD-AB8F2EACA769}"/>
+                <a16:creationId xmlns:a16="http://schemas.microsoft.com/office/drawing/2014/main" id="{BB238B8A-9F9A-4D13-AD2B-9E377E5CC8D4}"/>
               </a:ext>
             </a:extLst>
           </p:cNvPr>
@@ -25400,7 +27296,7 @@
           <p:cNvPr id="56" name="">
             <a:extLst xmlns:a="http://schemas.openxmlformats.org/drawingml/2006/main">
               <a:ext uri="{FF2B5EF4-FFF2-40B4-BE49-F238E27FC236}">
-                <a16:creationId xmlns:a16="http://schemas.microsoft.com/office/drawing/2014/main" id="{F9852830-46B7-4690-9A4A-FE7899F1271D}"/>
+                <a16:creationId xmlns:a16="http://schemas.microsoft.com/office/drawing/2014/main" id="{053D8153-F0F2-4146-A1C0-EB5E8E94B25A}"/>
               </a:ext>
             </a:extLst>
           </p:cNvPr>
@@ -25458,7 +27354,7 @@
           <p:cNvPr id="57" name="">
             <a:extLst xmlns:a="http://schemas.openxmlformats.org/drawingml/2006/main">
               <a:ext uri="{FF2B5EF4-FFF2-40B4-BE49-F238E27FC236}">
-                <a16:creationId xmlns:a16="http://schemas.microsoft.com/office/drawing/2014/main" id="{DF8E0548-3DA7-4BF4-A104-9404B9BB44A3}"/>
+                <a16:creationId xmlns:a16="http://schemas.microsoft.com/office/drawing/2014/main" id="{CB0D071F-3DC1-40C0-B1E5-AE7F13A1306F}"/>
               </a:ext>
             </a:extLst>
           </p:cNvPr>
@@ -25493,7 +27389,7 @@
           <p:cNvPr id="58" name="">
             <a:extLst xmlns:a="http://schemas.openxmlformats.org/drawingml/2006/main">
               <a:ext uri="{FF2B5EF4-FFF2-40B4-BE49-F238E27FC236}">
-                <a16:creationId xmlns:a16="http://schemas.microsoft.com/office/drawing/2014/main" id="{4BB47C5F-986B-44D4-9DEB-6170DB0479AD}"/>
+                <a16:creationId xmlns:a16="http://schemas.microsoft.com/office/drawing/2014/main" id="{297BA319-3C01-43E1-8601-A2A544214D0B}"/>
               </a:ext>
             </a:extLst>
           </p:cNvPr>
@@ -25528,7 +27424,7 @@
           <p:cNvPr id="59" name="">
             <a:extLst xmlns:a="http://schemas.openxmlformats.org/drawingml/2006/main">
               <a:ext uri="{FF2B5EF4-FFF2-40B4-BE49-F238E27FC236}">
-                <a16:creationId xmlns:a16="http://schemas.microsoft.com/office/drawing/2014/main" id="{D4703CB0-7A36-429F-B906-CCF7370146EA}"/>
+                <a16:creationId xmlns:a16="http://schemas.microsoft.com/office/drawing/2014/main" id="{0995C020-A96B-46D6-A8CF-5BE0F47C18D0}"/>
               </a:ext>
             </a:extLst>
           </p:cNvPr>
@@ -25586,7 +27482,7 @@
           <p:cNvPr id="60" name="">
             <a:extLst xmlns:a="http://schemas.openxmlformats.org/drawingml/2006/main">
               <a:ext uri="{FF2B5EF4-FFF2-40B4-BE49-F238E27FC236}">
-                <a16:creationId xmlns:a16="http://schemas.microsoft.com/office/drawing/2014/main" id="{BC4339E0-8C0C-4F20-9DA9-CD8D90E130AA}"/>
+                <a16:creationId xmlns:a16="http://schemas.microsoft.com/office/drawing/2014/main" id="{23ABCD3C-5B63-4680-ABB7-C4C1231E47AF}"/>
               </a:ext>
             </a:extLst>
           </p:cNvPr>
@@ -25644,7 +27540,7 @@
           <p:cNvPr id="61" name="">
             <a:extLst xmlns:a="http://schemas.openxmlformats.org/drawingml/2006/main">
               <a:ext uri="{FF2B5EF4-FFF2-40B4-BE49-F238E27FC236}">
-                <a16:creationId xmlns:a16="http://schemas.microsoft.com/office/drawing/2014/main" id="{25EB5CA4-7E6C-469B-962C-EFE4ADB08694}"/>
+                <a16:creationId xmlns:a16="http://schemas.microsoft.com/office/drawing/2014/main" id="{65389998-86F1-477D-BF80-EF089BDE0EA9}"/>
               </a:ext>
             </a:extLst>
           </p:cNvPr>
@@ -25700,7 +27596,7 @@
     </p:spTree>
     <p:extLst>
       <p:ext uri="{BB962C8B-B14F-4D97-AF65-F5344CB8AC3E}">
-        <p14:creationId xmlns:p14="http://schemas.microsoft.com/office/powerpoint/2010/main" val="535912237"/>
+        <p14:creationId xmlns:p14="http://schemas.microsoft.com/office/powerpoint/2010/main" val="1045249999"/>
       </p:ext>
     </p:extLst>
   </p:cSld>
@@ -25731,7 +27627,7 @@
           <p:cNvPr id="1" name="">
             <a:extLst xmlns:a="http://schemas.openxmlformats.org/drawingml/2006/main">
               <a:ext uri="{FF2B5EF4-FFF2-40B4-BE49-F238E27FC236}">
-                <a16:creationId xmlns:a16="http://schemas.microsoft.com/office/drawing/2014/main" id="{3F518E77-5CB5-4E63-BE05-3345222330FE}"/>
+                <a16:creationId xmlns:a16="http://schemas.microsoft.com/office/drawing/2014/main" id="{0A44A04C-3CC3-456A-BBEF-314B37687B6B}"/>
               </a:ext>
             </a:extLst>
           </p:cNvPr>
@@ -25766,7 +27662,7 @@
           <p:cNvPr id="2" name="">
             <a:extLst xmlns:a="http://schemas.openxmlformats.org/drawingml/2006/main">
               <a:ext uri="{FF2B5EF4-FFF2-40B4-BE49-F238E27FC236}">
-                <a16:creationId xmlns:a16="http://schemas.microsoft.com/office/drawing/2014/main" id="{4AEDBA1D-BCC5-43AA-979B-5249C4A33E42}"/>
+                <a16:creationId xmlns:a16="http://schemas.microsoft.com/office/drawing/2014/main" id="{504811C4-3224-4CE1-8E39-ACE73A796BC6}"/>
               </a:ext>
             </a:extLst>
           </p:cNvPr>
@@ -25801,7 +27697,7 @@
           <p:cNvPr id="3" name="">
             <a:extLst xmlns:a="http://schemas.openxmlformats.org/drawingml/2006/main">
               <a:ext uri="{FF2B5EF4-FFF2-40B4-BE49-F238E27FC236}">
-                <a16:creationId xmlns:a16="http://schemas.microsoft.com/office/drawing/2014/main" id="{9E3EEA56-0E2F-4056-959B-7DAAD696C0ED}"/>
+                <a16:creationId xmlns:a16="http://schemas.microsoft.com/office/drawing/2014/main" id="{AE8C115F-6E60-45DA-9946-B79CF81E78E9}"/>
               </a:ext>
             </a:extLst>
           </p:cNvPr>
@@ -25859,7 +27755,7 @@
           <p:cNvPr id="4" name="">
             <a:extLst xmlns:a="http://schemas.openxmlformats.org/drawingml/2006/main">
               <a:ext uri="{FF2B5EF4-FFF2-40B4-BE49-F238E27FC236}">
-                <a16:creationId xmlns:a16="http://schemas.microsoft.com/office/drawing/2014/main" id="{0D6FCEF6-B01C-4F8B-89C8-64509194EA3D}"/>
+                <a16:creationId xmlns:a16="http://schemas.microsoft.com/office/drawing/2014/main" id="{C6C323C5-4213-48F1-9EFB-B682613DDDB0}"/>
               </a:ext>
             </a:extLst>
           </p:cNvPr>
@@ -25917,7 +27813,7 @@
           <p:cNvPr id="5" name="">
             <a:extLst xmlns:a="http://schemas.openxmlformats.org/drawingml/2006/main">
               <a:ext uri="{FF2B5EF4-FFF2-40B4-BE49-F238E27FC236}">
-                <a16:creationId xmlns:a16="http://schemas.microsoft.com/office/drawing/2014/main" id="{F07DE3CA-9202-4B20-A6E5-DFB7C6AE481F}"/>
+                <a16:creationId xmlns:a16="http://schemas.microsoft.com/office/drawing/2014/main" id="{84613D89-28E7-474F-A1F1-19A773355829}"/>
               </a:ext>
             </a:extLst>
           </p:cNvPr>
@@ -25952,7 +27848,7 @@
           <p:cNvPr id="6" name="">
             <a:extLst xmlns:a="http://schemas.openxmlformats.org/drawingml/2006/main">
               <a:ext uri="{FF2B5EF4-FFF2-40B4-BE49-F238E27FC236}">
-                <a16:creationId xmlns:a16="http://schemas.microsoft.com/office/drawing/2014/main" id="{0948A750-C5F4-455C-8713-AA917468E88A}"/>
+                <a16:creationId xmlns:a16="http://schemas.microsoft.com/office/drawing/2014/main" id="{D3599F53-0754-46D6-A493-313990EC3D43}"/>
               </a:ext>
             </a:extLst>
           </p:cNvPr>
@@ -26010,7 +27906,7 @@
           <p:cNvPr id="7" name="">
             <a:extLst xmlns:a="http://schemas.openxmlformats.org/drawingml/2006/main">
               <a:ext uri="{FF2B5EF4-FFF2-40B4-BE49-F238E27FC236}">
-                <a16:creationId xmlns:a16="http://schemas.microsoft.com/office/drawing/2014/main" id="{0A3A95F5-B3DF-4AE8-BAE7-717A4A8D9155}"/>
+                <a16:creationId xmlns:a16="http://schemas.microsoft.com/office/drawing/2014/main" id="{D3DFF10F-F042-447A-80B6-B2D2734C3F92}"/>
               </a:ext>
             </a:extLst>
           </p:cNvPr>
@@ -26068,7 +27964,7 @@
           <p:cNvPr id="8" name="">
             <a:extLst xmlns:a="http://schemas.openxmlformats.org/drawingml/2006/main">
               <a:ext uri="{FF2B5EF4-FFF2-40B4-BE49-F238E27FC236}">
-                <a16:creationId xmlns:a16="http://schemas.microsoft.com/office/drawing/2014/main" id="{24A528F8-CB2A-4945-B3F6-FA3E0BD7C493}"/>
+                <a16:creationId xmlns:a16="http://schemas.microsoft.com/office/drawing/2014/main" id="{7B427CA4-2FE2-40A2-8805-432E7A04CB3C}"/>
               </a:ext>
             </a:extLst>
           </p:cNvPr>
@@ -26103,7 +27999,7 @@
           <p:cNvPr id="9" name="">
             <a:extLst xmlns:a="http://schemas.openxmlformats.org/drawingml/2006/main">
               <a:ext uri="{FF2B5EF4-FFF2-40B4-BE49-F238E27FC236}">
-                <a16:creationId xmlns:a16="http://schemas.microsoft.com/office/drawing/2014/main" id="{ED700FBE-5514-4499-AF40-D799204551EC}"/>
+                <a16:creationId xmlns:a16="http://schemas.microsoft.com/office/drawing/2014/main" id="{A51EBF0E-A89E-49F3-9D98-44F1B4E65D1F}"/>
               </a:ext>
             </a:extLst>
           </p:cNvPr>
@@ -26138,7 +28034,7 @@
           <p:cNvPr id="10" name="">
             <a:extLst xmlns:a="http://schemas.openxmlformats.org/drawingml/2006/main">
               <a:ext uri="{FF2B5EF4-FFF2-40B4-BE49-F238E27FC236}">
-                <a16:creationId xmlns:a16="http://schemas.microsoft.com/office/drawing/2014/main" id="{CED40FA0-4210-4B80-A839-B0F6FB28B2D9}"/>
+                <a16:creationId xmlns:a16="http://schemas.microsoft.com/office/drawing/2014/main" id="{84178186-B4EB-4CB9-B7AB-BC28D291DD4E}"/>
               </a:ext>
             </a:extLst>
           </p:cNvPr>
@@ -26196,7 +28092,7 @@
           <p:cNvPr id="11" name="">
             <a:extLst xmlns:a="http://schemas.openxmlformats.org/drawingml/2006/main">
               <a:ext uri="{FF2B5EF4-FFF2-40B4-BE49-F238E27FC236}">
-                <a16:creationId xmlns:a16="http://schemas.microsoft.com/office/drawing/2014/main" id="{EEA29FA1-53E9-4C56-A567-C74BE5E4F174}"/>
+                <a16:creationId xmlns:a16="http://schemas.microsoft.com/office/drawing/2014/main" id="{2A4ACD7E-2FBA-43CA-97F1-94DDC12618C5}"/>
               </a:ext>
             </a:extLst>
           </p:cNvPr>
@@ -26231,7 +28127,7 @@
           <p:cNvPr id="12" name="">
             <a:extLst xmlns:a="http://schemas.openxmlformats.org/drawingml/2006/main">
               <a:ext uri="{FF2B5EF4-FFF2-40B4-BE49-F238E27FC236}">
-                <a16:creationId xmlns:a16="http://schemas.microsoft.com/office/drawing/2014/main" id="{F17074EF-4E52-48C4-B9C1-B1E88405B2FA}"/>
+                <a16:creationId xmlns:a16="http://schemas.microsoft.com/office/drawing/2014/main" id="{E45DF1B3-0B19-4510-AA86-A5851FFED433}"/>
               </a:ext>
             </a:extLst>
           </p:cNvPr>
@@ -26323,7 +28219,7 @@
           <p:cNvPr id="13" name="">
             <a:extLst xmlns:a="http://schemas.openxmlformats.org/drawingml/2006/main">
               <a:ext uri="{FF2B5EF4-FFF2-40B4-BE49-F238E27FC236}">
-                <a16:creationId xmlns:a16="http://schemas.microsoft.com/office/drawing/2014/main" id="{B81F3A7A-930C-43BE-8129-86E33A4243A6}"/>
+                <a16:creationId xmlns:a16="http://schemas.microsoft.com/office/drawing/2014/main" id="{7710DC8F-07C0-46D9-83EF-6B7992C0B12B}"/>
               </a:ext>
             </a:extLst>
           </p:cNvPr>
@@ -26358,7 +28254,7 @@
           <p:cNvPr id="14" name="">
             <a:extLst xmlns:a="http://schemas.openxmlformats.org/drawingml/2006/main">
               <a:ext uri="{FF2B5EF4-FFF2-40B4-BE49-F238E27FC236}">
-                <a16:creationId xmlns:a16="http://schemas.microsoft.com/office/drawing/2014/main" id="{DB87D6E3-0659-4916-AAA4-45FE5933C55B}"/>
+                <a16:creationId xmlns:a16="http://schemas.microsoft.com/office/drawing/2014/main" id="{4983FD15-0370-468A-B7A3-B82E70420A0D}"/>
               </a:ext>
             </a:extLst>
           </p:cNvPr>
@@ -26433,7 +28329,7 @@
           <p:cNvPr id="15" name="">
             <a:extLst xmlns:a="http://schemas.openxmlformats.org/drawingml/2006/main">
               <a:ext uri="{FF2B5EF4-FFF2-40B4-BE49-F238E27FC236}">
-                <a16:creationId xmlns:a16="http://schemas.microsoft.com/office/drawing/2014/main" id="{41EFE68B-AE75-4D8A-B2B8-CC618F57D20F}"/>
+                <a16:creationId xmlns:a16="http://schemas.microsoft.com/office/drawing/2014/main" id="{AEBB8DF7-8D69-47DC-B0E9-5C1DF7C30CA4}"/>
               </a:ext>
             </a:extLst>
           </p:cNvPr>
@@ -26468,7 +28364,7 @@
           <p:cNvPr id="16" name="">
             <a:extLst xmlns:a="http://schemas.openxmlformats.org/drawingml/2006/main">
               <a:ext uri="{FF2B5EF4-FFF2-40B4-BE49-F238E27FC236}">
-                <a16:creationId xmlns:a16="http://schemas.microsoft.com/office/drawing/2014/main" id="{8512D5F4-EE13-4C87-91BD-8D32635E6AE9}"/>
+                <a16:creationId xmlns:a16="http://schemas.microsoft.com/office/drawing/2014/main" id="{747D7315-1D6D-4AD9-A5AB-EC7A17D53991}"/>
               </a:ext>
             </a:extLst>
           </p:cNvPr>
@@ -26503,7 +28399,7 @@
           <p:cNvPr id="17" name="">
             <a:extLst xmlns:a="http://schemas.openxmlformats.org/drawingml/2006/main">
               <a:ext uri="{FF2B5EF4-FFF2-40B4-BE49-F238E27FC236}">
-                <a16:creationId xmlns:a16="http://schemas.microsoft.com/office/drawing/2014/main" id="{3E80FADD-0382-4AF2-8599-F46ECD7B2C9B}"/>
+                <a16:creationId xmlns:a16="http://schemas.microsoft.com/office/drawing/2014/main" id="{A4E98C9C-3E3E-44EC-97D7-29718BA38A1D}"/>
               </a:ext>
             </a:extLst>
           </p:cNvPr>
@@ -26561,7 +28457,7 @@
           <p:cNvPr id="18" name="">
             <a:extLst xmlns:a="http://schemas.openxmlformats.org/drawingml/2006/main">
               <a:ext uri="{FF2B5EF4-FFF2-40B4-BE49-F238E27FC236}">
-                <a16:creationId xmlns:a16="http://schemas.microsoft.com/office/drawing/2014/main" id="{72B91438-43B9-4936-9182-A15312A7F94D}"/>
+                <a16:creationId xmlns:a16="http://schemas.microsoft.com/office/drawing/2014/main" id="{8764ED42-C77A-45B6-82FE-53828C8DA552}"/>
               </a:ext>
             </a:extLst>
           </p:cNvPr>
@@ -26596,7 +28492,7 @@
           <p:cNvPr id="19" name="">
             <a:extLst xmlns:a="http://schemas.openxmlformats.org/drawingml/2006/main">
               <a:ext uri="{FF2B5EF4-FFF2-40B4-BE49-F238E27FC236}">
-                <a16:creationId xmlns:a16="http://schemas.microsoft.com/office/drawing/2014/main" id="{D4DE6421-02BC-4D20-B076-2E3A339E83E9}"/>
+                <a16:creationId xmlns:a16="http://schemas.microsoft.com/office/drawing/2014/main" id="{08271ED6-9952-4FC2-BC4F-294D48701E7F}"/>
               </a:ext>
             </a:extLst>
           </p:cNvPr>
@@ -26705,7 +28601,7 @@
           <p:cNvPr id="20" name="">
             <a:extLst xmlns:a="http://schemas.openxmlformats.org/drawingml/2006/main">
               <a:ext uri="{FF2B5EF4-FFF2-40B4-BE49-F238E27FC236}">
-                <a16:creationId xmlns:a16="http://schemas.microsoft.com/office/drawing/2014/main" id="{0ADDB0F5-FBAE-46EF-B841-8A933D5EF802}"/>
+                <a16:creationId xmlns:a16="http://schemas.microsoft.com/office/drawing/2014/main" id="{72488183-27CE-4C3C-828A-968327F5A74A}"/>
               </a:ext>
             </a:extLst>
           </p:cNvPr>
@@ -26740,7 +28636,7 @@
           <p:cNvPr id="21" name="">
             <a:extLst xmlns:a="http://schemas.openxmlformats.org/drawingml/2006/main">
               <a:ext uri="{FF2B5EF4-FFF2-40B4-BE49-F238E27FC236}">
-                <a16:creationId xmlns:a16="http://schemas.microsoft.com/office/drawing/2014/main" id="{2269B3F8-D65C-4ABE-B13A-AE20FB3D1997}"/>
+                <a16:creationId xmlns:a16="http://schemas.microsoft.com/office/drawing/2014/main" id="{C99A7251-EB95-4A8F-91D5-45DC12E44445}"/>
               </a:ext>
             </a:extLst>
           </p:cNvPr>
@@ -26832,7 +28728,7 @@
           <p:cNvPr id="22" name="">
             <a:extLst xmlns:a="http://schemas.openxmlformats.org/drawingml/2006/main">
               <a:ext uri="{FF2B5EF4-FFF2-40B4-BE49-F238E27FC236}">
-                <a16:creationId xmlns:a16="http://schemas.microsoft.com/office/drawing/2014/main" id="{CEA1F6C7-C886-49C8-90F6-D9542D7A11BC}"/>
+                <a16:creationId xmlns:a16="http://schemas.microsoft.com/office/drawing/2014/main" id="{6C4E783E-C90E-4DA5-8E97-A4DB72DC1CE8}"/>
               </a:ext>
             </a:extLst>
           </p:cNvPr>
@@ -26867,7 +28763,7 @@
           <p:cNvPr id="23" name="">
             <a:extLst xmlns:a="http://schemas.openxmlformats.org/drawingml/2006/main">
               <a:ext uri="{FF2B5EF4-FFF2-40B4-BE49-F238E27FC236}">
-                <a16:creationId xmlns:a16="http://schemas.microsoft.com/office/drawing/2014/main" id="{F757B45F-C9AD-4020-AD18-181D8CB2A0B3}"/>
+                <a16:creationId xmlns:a16="http://schemas.microsoft.com/office/drawing/2014/main" id="{171D3B71-18D5-4D84-8E9E-C3E91DB554D1}"/>
               </a:ext>
             </a:extLst>
           </p:cNvPr>
@@ -26902,7 +28798,7 @@
           <p:cNvPr id="24" name="">
             <a:extLst xmlns:a="http://schemas.openxmlformats.org/drawingml/2006/main">
               <a:ext uri="{FF2B5EF4-FFF2-40B4-BE49-F238E27FC236}">
-                <a16:creationId xmlns:a16="http://schemas.microsoft.com/office/drawing/2014/main" id="{D10113BC-8716-476D-9DB4-95BF9FE1FBD2}"/>
+                <a16:creationId xmlns:a16="http://schemas.microsoft.com/office/drawing/2014/main" id="{202F96C2-75A0-43F7-969C-F20CBF135854}"/>
               </a:ext>
             </a:extLst>
           </p:cNvPr>
@@ -26960,7 +28856,7 @@
           <p:cNvPr id="25" name="">
             <a:extLst xmlns:a="http://schemas.openxmlformats.org/drawingml/2006/main">
               <a:ext uri="{FF2B5EF4-FFF2-40B4-BE49-F238E27FC236}">
-                <a16:creationId xmlns:a16="http://schemas.microsoft.com/office/drawing/2014/main" id="{D3A968A0-F0D3-4967-9D6C-512FBFDE8852}"/>
+                <a16:creationId xmlns:a16="http://schemas.microsoft.com/office/drawing/2014/main" id="{A874819A-B695-4B66-BEB1-4EB75FBB449A}"/>
               </a:ext>
             </a:extLst>
           </p:cNvPr>
@@ -26995,7 +28891,7 @@
           <p:cNvPr id="26" name="">
             <a:extLst xmlns:a="http://schemas.openxmlformats.org/drawingml/2006/main">
               <a:ext uri="{FF2B5EF4-FFF2-40B4-BE49-F238E27FC236}">
-                <a16:creationId xmlns:a16="http://schemas.microsoft.com/office/drawing/2014/main" id="{81365767-F0CD-4EAB-A00E-BC27EF7849C3}"/>
+                <a16:creationId xmlns:a16="http://schemas.microsoft.com/office/drawing/2014/main" id="{4A418BEC-284E-4F8A-A8CC-BB3ED54FAA90}"/>
               </a:ext>
             </a:extLst>
           </p:cNvPr>
@@ -27104,7 +29000,7 @@
           <p:cNvPr id="27" name="">
             <a:extLst xmlns:a="http://schemas.openxmlformats.org/drawingml/2006/main">
               <a:ext uri="{FF2B5EF4-FFF2-40B4-BE49-F238E27FC236}">
-                <a16:creationId xmlns:a16="http://schemas.microsoft.com/office/drawing/2014/main" id="{A2A73F38-9362-46CB-9367-12DB981E55C9}"/>
+                <a16:creationId xmlns:a16="http://schemas.microsoft.com/office/drawing/2014/main" id="{67CD32F4-63D1-46FB-8750-E351E1A64433}"/>
               </a:ext>
             </a:extLst>
           </p:cNvPr>
@@ -27139,7 +29035,7 @@
           <p:cNvPr id="28" name="">
             <a:extLst xmlns:a="http://schemas.openxmlformats.org/drawingml/2006/main">
               <a:ext uri="{FF2B5EF4-FFF2-40B4-BE49-F238E27FC236}">
-                <a16:creationId xmlns:a16="http://schemas.microsoft.com/office/drawing/2014/main" id="{CEDA53E2-56AC-49A4-82DD-4AE491025063}"/>
+                <a16:creationId xmlns:a16="http://schemas.microsoft.com/office/drawing/2014/main" id="{140E4594-6874-4058-9930-60BA7CC78717}"/>
               </a:ext>
             </a:extLst>
           </p:cNvPr>
@@ -27214,7 +29110,7 @@
           <p:cNvPr id="29" name="">
             <a:extLst xmlns:a="http://schemas.openxmlformats.org/drawingml/2006/main">
               <a:ext uri="{FF2B5EF4-FFF2-40B4-BE49-F238E27FC236}">
-                <a16:creationId xmlns:a16="http://schemas.microsoft.com/office/drawing/2014/main" id="{4410B9F3-C1A2-4C12-A177-D74B4DC7B63E}"/>
+                <a16:creationId xmlns:a16="http://schemas.microsoft.com/office/drawing/2014/main" id="{000D0446-30FF-4906-BCF2-153B250F67E1}"/>
               </a:ext>
             </a:extLst>
           </p:cNvPr>
@@ -27249,7 +29145,7 @@
           <p:cNvPr id="30" name="">
             <a:extLst xmlns:a="http://schemas.openxmlformats.org/drawingml/2006/main">
               <a:ext uri="{FF2B5EF4-FFF2-40B4-BE49-F238E27FC236}">
-                <a16:creationId xmlns:a16="http://schemas.microsoft.com/office/drawing/2014/main" id="{A41CA929-585E-43AF-89E6-5709384CEA81}"/>
+                <a16:creationId xmlns:a16="http://schemas.microsoft.com/office/drawing/2014/main" id="{E003449A-E456-487B-B939-E146DC0FD2EA}"/>
               </a:ext>
             </a:extLst>
           </p:cNvPr>
@@ -27284,7 +29180,7 @@
           <p:cNvPr id="31" name="">
             <a:extLst xmlns:a="http://schemas.openxmlformats.org/drawingml/2006/main">
               <a:ext uri="{FF2B5EF4-FFF2-40B4-BE49-F238E27FC236}">
-                <a16:creationId xmlns:a16="http://schemas.microsoft.com/office/drawing/2014/main" id="{40DB99C9-3870-4A0F-946C-F01101C91369}"/>
+                <a16:creationId xmlns:a16="http://schemas.microsoft.com/office/drawing/2014/main" id="{945E43EB-47EA-4B0D-BD7C-AFF4EA7B0840}"/>
               </a:ext>
             </a:extLst>
           </p:cNvPr>
@@ -27342,7 +29238,7 @@
           <p:cNvPr id="32" name="">
             <a:extLst xmlns:a="http://schemas.openxmlformats.org/drawingml/2006/main">
               <a:ext uri="{FF2B5EF4-FFF2-40B4-BE49-F238E27FC236}">
-                <a16:creationId xmlns:a16="http://schemas.microsoft.com/office/drawing/2014/main" id="{1EA5A7EB-CE6E-4A9C-9E0E-ECF1BD178F07}"/>
+                <a16:creationId xmlns:a16="http://schemas.microsoft.com/office/drawing/2014/main" id="{94BC6E57-7254-4A2E-B405-EE6DBA269948}"/>
               </a:ext>
             </a:extLst>
           </p:cNvPr>
@@ -27377,7 +29273,7 @@
           <p:cNvPr id="33" name="">
             <a:extLst xmlns:a="http://schemas.openxmlformats.org/drawingml/2006/main">
               <a:ext uri="{FF2B5EF4-FFF2-40B4-BE49-F238E27FC236}">
-                <a16:creationId xmlns:a16="http://schemas.microsoft.com/office/drawing/2014/main" id="{872924AB-B6E2-4654-8025-822D2F941BDC}"/>
+                <a16:creationId xmlns:a16="http://schemas.microsoft.com/office/drawing/2014/main" id="{B86BDBFE-090F-4B7E-B1EE-D2E1354AFE0F}"/>
               </a:ext>
             </a:extLst>
           </p:cNvPr>
@@ -27503,7 +29399,7 @@
           <p:cNvPr id="34" name="">
             <a:extLst xmlns:a="http://schemas.openxmlformats.org/drawingml/2006/main">
               <a:ext uri="{FF2B5EF4-FFF2-40B4-BE49-F238E27FC236}">
-                <a16:creationId xmlns:a16="http://schemas.microsoft.com/office/drawing/2014/main" id="{57DFD4DE-D14D-486D-9233-A30F99D4D3D4}"/>
+                <a16:creationId xmlns:a16="http://schemas.microsoft.com/office/drawing/2014/main" id="{FD20FD3B-9C3B-4C12-8895-1D9873ED89F2}"/>
               </a:ext>
             </a:extLst>
           </p:cNvPr>
@@ -27538,7 +29434,7 @@
           <p:cNvPr id="35" name="">
             <a:extLst xmlns:a="http://schemas.openxmlformats.org/drawingml/2006/main">
               <a:ext uri="{FF2B5EF4-FFF2-40B4-BE49-F238E27FC236}">
-                <a16:creationId xmlns:a16="http://schemas.microsoft.com/office/drawing/2014/main" id="{32702E1B-AE1E-4DBF-8927-843B3B8101D3}"/>
+                <a16:creationId xmlns:a16="http://schemas.microsoft.com/office/drawing/2014/main" id="{BDC64FAE-0628-421F-884C-9A2F9BC7CE4C}"/>
               </a:ext>
             </a:extLst>
           </p:cNvPr>
@@ -27613,7 +29509,7 @@
           <p:cNvPr id="36" name="">
             <a:extLst xmlns:a="http://schemas.openxmlformats.org/drawingml/2006/main">
               <a:ext uri="{FF2B5EF4-FFF2-40B4-BE49-F238E27FC236}">
-                <a16:creationId xmlns:a16="http://schemas.microsoft.com/office/drawing/2014/main" id="{C1E522F5-DD4B-48FD-BBA4-7447B9DB732E}"/>
+                <a16:creationId xmlns:a16="http://schemas.microsoft.com/office/drawing/2014/main" id="{7F994CFA-754C-435A-A24E-29A705B3DA4C}"/>
               </a:ext>
             </a:extLst>
           </p:cNvPr>
@@ -27648,7 +29544,7 @@
           <p:cNvPr id="37" name="">
             <a:extLst xmlns:a="http://schemas.openxmlformats.org/drawingml/2006/main">
               <a:ext uri="{FF2B5EF4-FFF2-40B4-BE49-F238E27FC236}">
-                <a16:creationId xmlns:a16="http://schemas.microsoft.com/office/drawing/2014/main" id="{8F3C0042-D016-4417-A590-1162F0839514}"/>
+                <a16:creationId xmlns:a16="http://schemas.microsoft.com/office/drawing/2014/main" id="{56B0CA05-0B97-49D8-BB0E-4B53D2C29999}"/>
               </a:ext>
             </a:extLst>
           </p:cNvPr>
@@ -27683,7 +29579,7 @@
           <p:cNvPr id="38" name="">
             <a:extLst xmlns:a="http://schemas.openxmlformats.org/drawingml/2006/main">
               <a:ext uri="{FF2B5EF4-FFF2-40B4-BE49-F238E27FC236}">
-                <a16:creationId xmlns:a16="http://schemas.microsoft.com/office/drawing/2014/main" id="{9053BD2A-66FA-46B4-8CCF-6529040A150E}"/>
+                <a16:creationId xmlns:a16="http://schemas.microsoft.com/office/drawing/2014/main" id="{D5300904-8AB4-42E6-A2E5-484A7CBA54DA}"/>
               </a:ext>
             </a:extLst>
           </p:cNvPr>
@@ -27741,7 +29637,7 @@
           <p:cNvPr id="39" name="">
             <a:extLst xmlns:a="http://schemas.openxmlformats.org/drawingml/2006/main">
               <a:ext uri="{FF2B5EF4-FFF2-40B4-BE49-F238E27FC236}">
-                <a16:creationId xmlns:a16="http://schemas.microsoft.com/office/drawing/2014/main" id="{5670EEC5-736C-4B18-A124-99649285AAD4}"/>
+                <a16:creationId xmlns:a16="http://schemas.microsoft.com/office/drawing/2014/main" id="{4A4E64BA-ECE5-4B1D-BA43-658BB53639A0}"/>
               </a:ext>
             </a:extLst>
           </p:cNvPr>
@@ -27776,7 +29672,7 @@
           <p:cNvPr id="40" name="">
             <a:extLst xmlns:a="http://schemas.openxmlformats.org/drawingml/2006/main">
               <a:ext uri="{FF2B5EF4-FFF2-40B4-BE49-F238E27FC236}">
-                <a16:creationId xmlns:a16="http://schemas.microsoft.com/office/drawing/2014/main" id="{57F60127-BDB4-47E3-A8C0-10D593A0459D}"/>
+                <a16:creationId xmlns:a16="http://schemas.microsoft.com/office/drawing/2014/main" id="{D8992956-5A5C-476F-BE8A-C107D89ED54E}"/>
               </a:ext>
             </a:extLst>
           </p:cNvPr>
@@ -27851,7 +29747,7 @@
           <p:cNvPr id="41" name="">
             <a:extLst xmlns:a="http://schemas.openxmlformats.org/drawingml/2006/main">
               <a:ext uri="{FF2B5EF4-FFF2-40B4-BE49-F238E27FC236}">
-                <a16:creationId xmlns:a16="http://schemas.microsoft.com/office/drawing/2014/main" id="{508E81BE-09CD-476D-9928-E5DF0FDC049F}"/>
+                <a16:creationId xmlns:a16="http://schemas.microsoft.com/office/drawing/2014/main" id="{8EC07033-C681-4E09-A197-E5C0A689A490}"/>
               </a:ext>
             </a:extLst>
           </p:cNvPr>
@@ -27886,7 +29782,7 @@
           <p:cNvPr id="42" name="">
             <a:extLst xmlns:a="http://schemas.openxmlformats.org/drawingml/2006/main">
               <a:ext uri="{FF2B5EF4-FFF2-40B4-BE49-F238E27FC236}">
-                <a16:creationId xmlns:a16="http://schemas.microsoft.com/office/drawing/2014/main" id="{5C983C64-F7A8-4B24-9E79-2B8CDDE5DA52}"/>
+                <a16:creationId xmlns:a16="http://schemas.microsoft.com/office/drawing/2014/main" id="{4671551E-F8F2-427E-A346-926BAA9DBF52}"/>
               </a:ext>
             </a:extLst>
           </p:cNvPr>
@@ -27961,7 +29857,7 @@
           <p:cNvPr id="43" name="">
             <a:extLst xmlns:a="http://schemas.openxmlformats.org/drawingml/2006/main">
               <a:ext uri="{FF2B5EF4-FFF2-40B4-BE49-F238E27FC236}">
-                <a16:creationId xmlns:a16="http://schemas.microsoft.com/office/drawing/2014/main" id="{2C9BE666-35A6-49A3-AE12-4472C36B6E7F}"/>
+                <a16:creationId xmlns:a16="http://schemas.microsoft.com/office/drawing/2014/main" id="{B2E73B6C-FD94-4752-98E4-7FCB2BCEC5FD}"/>
               </a:ext>
             </a:extLst>
           </p:cNvPr>
@@ -27996,7 +29892,7 @@
           <p:cNvPr id="44" name="">
             <a:extLst xmlns:a="http://schemas.openxmlformats.org/drawingml/2006/main">
               <a:ext uri="{FF2B5EF4-FFF2-40B4-BE49-F238E27FC236}">
-                <a16:creationId xmlns:a16="http://schemas.microsoft.com/office/drawing/2014/main" id="{44D7030A-C28F-44E0-96C9-DC29BB35C5BD}"/>
+                <a16:creationId xmlns:a16="http://schemas.microsoft.com/office/drawing/2014/main" id="{642F4A59-1024-4A57-8C49-B0E91E32C543}"/>
               </a:ext>
             </a:extLst>
           </p:cNvPr>
@@ -28031,7 +29927,7 @@
           <p:cNvPr id="45" name="">
             <a:extLst xmlns:a="http://schemas.openxmlformats.org/drawingml/2006/main">
               <a:ext uri="{FF2B5EF4-FFF2-40B4-BE49-F238E27FC236}">
-                <a16:creationId xmlns:a16="http://schemas.microsoft.com/office/drawing/2014/main" id="{E643DDBD-05A4-4DAC-AAB9-E6314686586D}"/>
+                <a16:creationId xmlns:a16="http://schemas.microsoft.com/office/drawing/2014/main" id="{26488068-91F7-4F23-9C45-0D6ABA076944}"/>
               </a:ext>
             </a:extLst>
           </p:cNvPr>
@@ -28089,7 +29985,7 @@
           <p:cNvPr id="46" name="">
             <a:extLst xmlns:a="http://schemas.openxmlformats.org/drawingml/2006/main">
               <a:ext uri="{FF2B5EF4-FFF2-40B4-BE49-F238E27FC236}">
-                <a16:creationId xmlns:a16="http://schemas.microsoft.com/office/drawing/2014/main" id="{AAFB0689-E05F-4BED-8E2B-B782A468B5E8}"/>
+                <a16:creationId xmlns:a16="http://schemas.microsoft.com/office/drawing/2014/main" id="{C9D6CA6C-BEE8-4018-A48C-C87A82223737}"/>
               </a:ext>
             </a:extLst>
           </p:cNvPr>
@@ -28124,7 +30020,7 @@
           <p:cNvPr id="47" name="">
             <a:extLst xmlns:a="http://schemas.openxmlformats.org/drawingml/2006/main">
               <a:ext uri="{FF2B5EF4-FFF2-40B4-BE49-F238E27FC236}">
-                <a16:creationId xmlns:a16="http://schemas.microsoft.com/office/drawing/2014/main" id="{7F5CE085-76BF-46BD-9AA4-39DF6F25AA82}"/>
+                <a16:creationId xmlns:a16="http://schemas.microsoft.com/office/drawing/2014/main" id="{EB105E1E-DC77-4C18-9257-9E6CC10ADC90}"/>
               </a:ext>
             </a:extLst>
           </p:cNvPr>
@@ -28182,7 +30078,7 @@
           <p:cNvPr id="48" name="">
             <a:extLst xmlns:a="http://schemas.openxmlformats.org/drawingml/2006/main">
               <a:ext uri="{FF2B5EF4-FFF2-40B4-BE49-F238E27FC236}">
-                <a16:creationId xmlns:a16="http://schemas.microsoft.com/office/drawing/2014/main" id="{6C72B190-ECFE-420B-AA31-E88CB70FDC41}"/>
+                <a16:creationId xmlns:a16="http://schemas.microsoft.com/office/drawing/2014/main" id="{54BC3857-4F5B-4822-B498-7430B3F85AF4}"/>
               </a:ext>
             </a:extLst>
           </p:cNvPr>
@@ -28217,7 +30113,7 @@
           <p:cNvPr id="49" name="">
             <a:extLst xmlns:a="http://schemas.openxmlformats.org/drawingml/2006/main">
               <a:ext uri="{FF2B5EF4-FFF2-40B4-BE49-F238E27FC236}">
-                <a16:creationId xmlns:a16="http://schemas.microsoft.com/office/drawing/2014/main" id="{BA5DD798-F336-4A18-A649-917209EC0D49}"/>
+                <a16:creationId xmlns:a16="http://schemas.microsoft.com/office/drawing/2014/main" id="{AB911CDF-9828-4A29-BB13-51B8EB9B9F43}"/>
               </a:ext>
             </a:extLst>
           </p:cNvPr>
@@ -28275,7 +30171,7 @@
           <p:cNvPr id="50" name="">
             <a:extLst xmlns:a="http://schemas.openxmlformats.org/drawingml/2006/main">
               <a:ext uri="{FF2B5EF4-FFF2-40B4-BE49-F238E27FC236}">
-                <a16:creationId xmlns:a16="http://schemas.microsoft.com/office/drawing/2014/main" id="{A282BAB6-E478-4FA6-A8AB-AB6D22228B25}"/>
+                <a16:creationId xmlns:a16="http://schemas.microsoft.com/office/drawing/2014/main" id="{378933B6-2AE4-4EF3-894B-E0879660AF9C}"/>
               </a:ext>
             </a:extLst>
           </p:cNvPr>
@@ -28308,7 +30204,7 @@
           <p:cNvPr id="51" name="">
             <a:extLst xmlns:a="http://schemas.openxmlformats.org/drawingml/2006/main">
               <a:ext uri="{FF2B5EF4-FFF2-40B4-BE49-F238E27FC236}">
-                <a16:creationId xmlns:a16="http://schemas.microsoft.com/office/drawing/2014/main" id="{5EA7612A-BECB-4C83-8DF3-D50EF07AFC57}"/>
+                <a16:creationId xmlns:a16="http://schemas.microsoft.com/office/drawing/2014/main" id="{244545FC-F230-4ECB-9711-3D9B36D60ACD}"/>
               </a:ext>
             </a:extLst>
           </p:cNvPr>
@@ -28366,7 +30262,7 @@
           <p:cNvPr id="52" name="">
             <a:extLst xmlns:a="http://schemas.openxmlformats.org/drawingml/2006/main">
               <a:ext uri="{FF2B5EF4-FFF2-40B4-BE49-F238E27FC236}">
-                <a16:creationId xmlns:a16="http://schemas.microsoft.com/office/drawing/2014/main" id="{14950BFB-F692-46C9-A26D-0F298F049474}"/>
+                <a16:creationId xmlns:a16="http://schemas.microsoft.com/office/drawing/2014/main" id="{B2645366-32CF-4124-B83A-7D61D0B80F3C}"/>
               </a:ext>
             </a:extLst>
           </p:cNvPr>
@@ -28399,7 +30295,7 @@
           <p:cNvPr id="53" name="">
             <a:extLst xmlns:a="http://schemas.openxmlformats.org/drawingml/2006/main">
               <a:ext uri="{FF2B5EF4-FFF2-40B4-BE49-F238E27FC236}">
-                <a16:creationId xmlns:a16="http://schemas.microsoft.com/office/drawing/2014/main" id="{12E2C5E1-4ED6-4207-B5C5-331987659B74}"/>
+                <a16:creationId xmlns:a16="http://schemas.microsoft.com/office/drawing/2014/main" id="{208CC627-A09C-4AA0-9E1A-BA87D2227317}"/>
               </a:ext>
             </a:extLst>
           </p:cNvPr>
@@ -28457,7 +30353,7 @@
           <p:cNvPr id="54" name="">
             <a:extLst xmlns:a="http://schemas.openxmlformats.org/drawingml/2006/main">
               <a:ext uri="{FF2B5EF4-FFF2-40B4-BE49-F238E27FC236}">
-                <a16:creationId xmlns:a16="http://schemas.microsoft.com/office/drawing/2014/main" id="{E001EB89-04C9-48CC-9D35-B47C0FB65B2C}"/>
+                <a16:creationId xmlns:a16="http://schemas.microsoft.com/office/drawing/2014/main" id="{6D07C648-CAA4-4349-8CA9-B84A88589335}"/>
               </a:ext>
             </a:extLst>
           </p:cNvPr>
@@ -28490,7 +30386,7 @@
           <p:cNvPr id="55" name="">
             <a:extLst xmlns:a="http://schemas.openxmlformats.org/drawingml/2006/main">
               <a:ext uri="{FF2B5EF4-FFF2-40B4-BE49-F238E27FC236}">
-                <a16:creationId xmlns:a16="http://schemas.microsoft.com/office/drawing/2014/main" id="{35A78B7C-8576-4CAF-9277-924F850BAABF}"/>
+                <a16:creationId xmlns:a16="http://schemas.microsoft.com/office/drawing/2014/main" id="{EF608952-0B4D-45AB-A954-D08525D7819F}"/>
               </a:ext>
             </a:extLst>
           </p:cNvPr>
@@ -28548,7 +30444,7 @@
           <p:cNvPr id="56" name="">
             <a:extLst xmlns:a="http://schemas.openxmlformats.org/drawingml/2006/main">
               <a:ext uri="{FF2B5EF4-FFF2-40B4-BE49-F238E27FC236}">
-                <a16:creationId xmlns:a16="http://schemas.microsoft.com/office/drawing/2014/main" id="{A5429942-4D7C-4A85-9085-76D2E8E79552}"/>
+                <a16:creationId xmlns:a16="http://schemas.microsoft.com/office/drawing/2014/main" id="{A6A5BE44-A609-4333-957B-E77B17E9BDA6}"/>
               </a:ext>
             </a:extLst>
           </p:cNvPr>
@@ -28581,7 +30477,7 @@
           <p:cNvPr id="57" name="">
             <a:extLst xmlns:a="http://schemas.openxmlformats.org/drawingml/2006/main">
               <a:ext uri="{FF2B5EF4-FFF2-40B4-BE49-F238E27FC236}">
-                <a16:creationId xmlns:a16="http://schemas.microsoft.com/office/drawing/2014/main" id="{D6E2CCD4-68A7-45EA-9143-6228C8D9A542}"/>
+                <a16:creationId xmlns:a16="http://schemas.microsoft.com/office/drawing/2014/main" id="{A2FA95D4-61BD-4538-BA6E-297F5D5B1184}"/>
               </a:ext>
             </a:extLst>
           </p:cNvPr>
@@ -28614,7 +30510,7 @@
           <p:cNvPr id="58" name="">
             <a:extLst xmlns:a="http://schemas.openxmlformats.org/drawingml/2006/main">
               <a:ext uri="{FF2B5EF4-FFF2-40B4-BE49-F238E27FC236}">
-                <a16:creationId xmlns:a16="http://schemas.microsoft.com/office/drawing/2014/main" id="{2A946F63-8C80-4F2D-9974-89D86BE05D1A}"/>
+                <a16:creationId xmlns:a16="http://schemas.microsoft.com/office/drawing/2014/main" id="{3AA43B22-C906-455F-A92E-67DC512BA4D6}"/>
               </a:ext>
             </a:extLst>
           </p:cNvPr>
@@ -28689,7 +30585,7 @@
           <p:cNvPr id="59" name="">
             <a:extLst xmlns:a="http://schemas.openxmlformats.org/drawingml/2006/main">
               <a:ext uri="{FF2B5EF4-FFF2-40B4-BE49-F238E27FC236}">
-                <a16:creationId xmlns:a16="http://schemas.microsoft.com/office/drawing/2014/main" id="{8B3CFD49-47B8-42A5-BC7E-CBE46C158046}"/>
+                <a16:creationId xmlns:a16="http://schemas.microsoft.com/office/drawing/2014/main" id="{85E83704-E207-4F93-BB76-2A723509EE41}"/>
               </a:ext>
             </a:extLst>
           </p:cNvPr>
@@ -28745,7 +30641,7 @@
     </p:spTree>
     <p:extLst>
       <p:ext uri="{BB962C8B-B14F-4D97-AF65-F5344CB8AC3E}">
-        <p14:creationId xmlns:p14="http://schemas.microsoft.com/office/powerpoint/2010/main" val="1674733109"/>
+        <p14:creationId xmlns:p14="http://schemas.microsoft.com/office/powerpoint/2010/main" val="371168449"/>
       </p:ext>
     </p:extLst>
   </p:cSld>

--- a/output/slides/ooad-checkpoint-draft/OOAD_Checkpoint_ZH_Draft.pptx
+++ b/output/slides/ooad-checkpoint-draft/OOAD_Checkpoint_ZH_Draft.pptx
@@ -2,26 +2,26 @@
 <file path=ppt/presentation.xml><?xml version="1.0" encoding="utf-8"?>
 <p:presentation xmlns:p="http://schemas.openxmlformats.org/presentationml/2006/main">
   <p:sldMasterIdLst>
-    <p:sldMasterId xmlns:r="http://schemas.openxmlformats.org/officeDocument/2006/relationships" id="2147483648" r:id="R85a9ced2a195467b"/>
+    <p:sldMasterId xmlns:r="http://schemas.openxmlformats.org/officeDocument/2006/relationships" id="2147483648" r:id="R59c1a3c29f7a4017"/>
   </p:sldMasterIdLst>
   <p:notesMasterIdLst>
-    <p:notesMasterId xmlns:r="http://schemas.openxmlformats.org/officeDocument/2006/relationships" r:id="R41ee0fa6dc554d15"/>
+    <p:notesMasterId xmlns:r="http://schemas.openxmlformats.org/officeDocument/2006/relationships" r:id="Rd90ae9d2bfbf4984"/>
   </p:notesMasterIdLst>
   <p:sldIdLst>
-    <p:sldId xmlns:r="http://schemas.openxmlformats.org/officeDocument/2006/relationships" id="256" r:id="Rc294694d86c0476b"/>
-    <p:sldId xmlns:r="http://schemas.openxmlformats.org/officeDocument/2006/relationships" id="257" r:id="R1b1f57c704ee455a"/>
-    <p:sldId xmlns:r="http://schemas.openxmlformats.org/officeDocument/2006/relationships" id="258" r:id="Ra351f8b671fe4c42"/>
-    <p:sldId xmlns:r="http://schemas.openxmlformats.org/officeDocument/2006/relationships" id="259" r:id="R2273ddfc044d4bae"/>
-    <p:sldId xmlns:r="http://schemas.openxmlformats.org/officeDocument/2006/relationships" id="260" r:id="R7bec64d972bb4734"/>
-    <p:sldId xmlns:r="http://schemas.openxmlformats.org/officeDocument/2006/relationships" id="261" r:id="Rcbdd32e8d6694ef8"/>
-    <p:sldId xmlns:r="http://schemas.openxmlformats.org/officeDocument/2006/relationships" id="262" r:id="R2c8cdc48a2e94b26"/>
-    <p:sldId xmlns:r="http://schemas.openxmlformats.org/officeDocument/2006/relationships" id="263" r:id="R1ef7b1b4fff041af"/>
-    <p:sldId xmlns:r="http://schemas.openxmlformats.org/officeDocument/2006/relationships" id="264" r:id="R14d3220ad0784259"/>
-    <p:sldId xmlns:r="http://schemas.openxmlformats.org/officeDocument/2006/relationships" id="265" r:id="R25d298d583fb4856"/>
-    <p:sldId xmlns:r="http://schemas.openxmlformats.org/officeDocument/2006/relationships" id="266" r:id="R264cd04743d241ed"/>
-    <p:sldId xmlns:r="http://schemas.openxmlformats.org/officeDocument/2006/relationships" id="267" r:id="R958882dcfa4a46c2"/>
-    <p:sldId xmlns:r="http://schemas.openxmlformats.org/officeDocument/2006/relationships" id="268" r:id="Reed62b5135cd4cdf"/>
-    <p:sldId xmlns:r="http://schemas.openxmlformats.org/officeDocument/2006/relationships" id="269" r:id="Ra5fc941eecc94b45"/>
+    <p:sldId xmlns:r="http://schemas.openxmlformats.org/officeDocument/2006/relationships" id="256" r:id="R4e2ab2a2be5d44ce"/>
+    <p:sldId xmlns:r="http://schemas.openxmlformats.org/officeDocument/2006/relationships" id="257" r:id="Reff4039a21ef487b"/>
+    <p:sldId xmlns:r="http://schemas.openxmlformats.org/officeDocument/2006/relationships" id="258" r:id="R1a5d71a24d85471a"/>
+    <p:sldId xmlns:r="http://schemas.openxmlformats.org/officeDocument/2006/relationships" id="259" r:id="R5db51cc4f3f640ce"/>
+    <p:sldId xmlns:r="http://schemas.openxmlformats.org/officeDocument/2006/relationships" id="260" r:id="R652d5727359c47c4"/>
+    <p:sldId xmlns:r="http://schemas.openxmlformats.org/officeDocument/2006/relationships" id="261" r:id="R23ce6c02850244b8"/>
+    <p:sldId xmlns:r="http://schemas.openxmlformats.org/officeDocument/2006/relationships" id="262" r:id="R81bf828922db4e43"/>
+    <p:sldId xmlns:r="http://schemas.openxmlformats.org/officeDocument/2006/relationships" id="263" r:id="R2eb8291ebe6849a5"/>
+    <p:sldId xmlns:r="http://schemas.openxmlformats.org/officeDocument/2006/relationships" id="264" r:id="Rc255826ed7234a8f"/>
+    <p:sldId xmlns:r="http://schemas.openxmlformats.org/officeDocument/2006/relationships" id="265" r:id="R6b5671285cb54c05"/>
+    <p:sldId xmlns:r="http://schemas.openxmlformats.org/officeDocument/2006/relationships" id="266" r:id="R2d499803f69243b0"/>
+    <p:sldId xmlns:r="http://schemas.openxmlformats.org/officeDocument/2006/relationships" id="267" r:id="Rdf70c3db977f46d4"/>
+    <p:sldId xmlns:r="http://schemas.openxmlformats.org/officeDocument/2006/relationships" id="268" r:id="R397a5874d1414079"/>
+    <p:sldId xmlns:r="http://schemas.openxmlformats.org/officeDocument/2006/relationships" id="269" r:id="R833e663142884bdf"/>
   </p:sldIdLst>
   <p:sldSz cx="12192000" cy="6858000"/>
   <p:notesSz cx="6858000" cy="9144000"/>
@@ -1482,7 +1482,7 @@
   </p:cSld>
   <p:clrMap bg1="lt1" tx1="dk1" bg2="lt2" tx2="dk2" accent1="accent1" accent2="accent2" accent3="accent3" accent4="accent4" accent5="accent5" accent6="accent6" hlink="hlink" folHlink="folHlink"/>
   <p:sldLayoutIdLst>
-    <p:sldLayoutId xmlns:r="http://schemas.openxmlformats.org/officeDocument/2006/relationships" id="2147483649" r:id="R8f1c815193054224"/>
+    <p:sldLayoutId xmlns:r="http://schemas.openxmlformats.org/officeDocument/2006/relationships" id="2147483649" r:id="R1f5249a46d394d02"/>
   </p:sldLayoutIdLst>
   <p:txStyles>
     <p:titleStyle>
@@ -1788,7 +1788,7 @@
           <p:cNvPr id="1" name="">
             <a:extLst xmlns:a="http://schemas.openxmlformats.org/drawingml/2006/main">
               <a:ext uri="{FF2B5EF4-FFF2-40B4-BE49-F238E27FC236}">
-                <a16:creationId xmlns:a16="http://schemas.microsoft.com/office/drawing/2014/main" id="{A06BAE62-ECE4-4FE3-96BF-4FE25BA9F943}"/>
+                <a16:creationId xmlns:a16="http://schemas.microsoft.com/office/drawing/2014/main" id="{7B13DD9F-7C2C-45F4-A455-1F7F449A67A0}"/>
               </a:ext>
             </a:extLst>
           </p:cNvPr>
@@ -1823,7 +1823,7 @@
           <p:cNvPr id="2" name="">
             <a:extLst xmlns:a="http://schemas.openxmlformats.org/drawingml/2006/main">
               <a:ext uri="{FF2B5EF4-FFF2-40B4-BE49-F238E27FC236}">
-                <a16:creationId xmlns:a16="http://schemas.microsoft.com/office/drawing/2014/main" id="{9E7AD942-1EAB-4CBD-96CD-1C1FDD4AAD3E}"/>
+                <a16:creationId xmlns:a16="http://schemas.microsoft.com/office/drawing/2014/main" id="{ABDB41E8-99E5-4852-B2F1-83D46871FC27}"/>
               </a:ext>
             </a:extLst>
           </p:cNvPr>
@@ -1858,7 +1858,7 @@
           <p:cNvPr id="3" name="">
             <a:extLst xmlns:a="http://schemas.openxmlformats.org/drawingml/2006/main">
               <a:ext uri="{FF2B5EF4-FFF2-40B4-BE49-F238E27FC236}">
-                <a16:creationId xmlns:a16="http://schemas.microsoft.com/office/drawing/2014/main" id="{AC7E4037-9021-4836-9F6E-D96C270D12DB}"/>
+                <a16:creationId xmlns:a16="http://schemas.microsoft.com/office/drawing/2014/main" id="{3BDF1B09-D800-408D-A57F-9AC159B8EED2}"/>
               </a:ext>
             </a:extLst>
           </p:cNvPr>
@@ -1893,7 +1893,7 @@
           <p:cNvPr id="4" name="">
             <a:extLst xmlns:a="http://schemas.openxmlformats.org/drawingml/2006/main">
               <a:ext uri="{FF2B5EF4-FFF2-40B4-BE49-F238E27FC236}">
-                <a16:creationId xmlns:a16="http://schemas.microsoft.com/office/drawing/2014/main" id="{11CBBAC8-3CDA-4C92-81DB-A0A3F8216E28}"/>
+                <a16:creationId xmlns:a16="http://schemas.microsoft.com/office/drawing/2014/main" id="{4AF83B80-26A1-457A-9013-F00F745F48B0}"/>
               </a:ext>
             </a:extLst>
           </p:cNvPr>
@@ -1928,7 +1928,7 @@
           <p:cNvPr id="5" name="">
             <a:extLst xmlns:a="http://schemas.openxmlformats.org/drawingml/2006/main">
               <a:ext uri="{FF2B5EF4-FFF2-40B4-BE49-F238E27FC236}">
-                <a16:creationId xmlns:a16="http://schemas.microsoft.com/office/drawing/2014/main" id="{972FDC07-C916-4DB2-AC69-833319564B87}"/>
+                <a16:creationId xmlns:a16="http://schemas.microsoft.com/office/drawing/2014/main" id="{5E5EC6D5-0499-45C0-8632-CC777FDB0C76}"/>
               </a:ext>
             </a:extLst>
           </p:cNvPr>
@@ -1986,7 +1986,7 @@
           <p:cNvPr id="6" name="">
             <a:extLst xmlns:a="http://schemas.openxmlformats.org/drawingml/2006/main">
               <a:ext uri="{FF2B5EF4-FFF2-40B4-BE49-F238E27FC236}">
-                <a16:creationId xmlns:a16="http://schemas.microsoft.com/office/drawing/2014/main" id="{2765D182-6FCE-42E7-946E-0C9C5B8816B8}"/>
+                <a16:creationId xmlns:a16="http://schemas.microsoft.com/office/drawing/2014/main" id="{B0A9062D-95D0-42D0-8FAF-6EA3238D0CF2}"/>
               </a:ext>
             </a:extLst>
           </p:cNvPr>
@@ -2044,7 +2044,7 @@
           <p:cNvPr id="7" name="">
             <a:extLst xmlns:a="http://schemas.openxmlformats.org/drawingml/2006/main">
               <a:ext uri="{FF2B5EF4-FFF2-40B4-BE49-F238E27FC236}">
-                <a16:creationId xmlns:a16="http://schemas.microsoft.com/office/drawing/2014/main" id="{FA54B390-A6E4-4A3C-9A0A-83EF93AF72E5}"/>
+                <a16:creationId xmlns:a16="http://schemas.microsoft.com/office/drawing/2014/main" id="{BEE32F96-191D-42F4-980F-CA011B2F87D3}"/>
               </a:ext>
             </a:extLst>
           </p:cNvPr>
@@ -2119,7 +2119,7 @@
           <p:cNvPr id="8" name="">
             <a:extLst xmlns:a="http://schemas.openxmlformats.org/drawingml/2006/main">
               <a:ext uri="{FF2B5EF4-FFF2-40B4-BE49-F238E27FC236}">
-                <a16:creationId xmlns:a16="http://schemas.microsoft.com/office/drawing/2014/main" id="{18D7B389-6AE6-4CCC-B6B0-83AB84A4AAE9}"/>
+                <a16:creationId xmlns:a16="http://schemas.microsoft.com/office/drawing/2014/main" id="{3781A940-134A-4083-BA8D-AC2FC502569B}"/>
               </a:ext>
             </a:extLst>
           </p:cNvPr>
@@ -2154,7 +2154,7 @@
           <p:cNvPr id="9" name="">
             <a:extLst xmlns:a="http://schemas.openxmlformats.org/drawingml/2006/main">
               <a:ext uri="{FF2B5EF4-FFF2-40B4-BE49-F238E27FC236}">
-                <a16:creationId xmlns:a16="http://schemas.microsoft.com/office/drawing/2014/main" id="{D58F9D56-404D-4D86-8AAA-9C9EDD5D0934}"/>
+                <a16:creationId xmlns:a16="http://schemas.microsoft.com/office/drawing/2014/main" id="{CF7FF2F4-9D59-446B-832B-B3222EC9704C}"/>
               </a:ext>
             </a:extLst>
           </p:cNvPr>
@@ -2189,7 +2189,7 @@
           <p:cNvPr id="10" name="">
             <a:extLst xmlns:a="http://schemas.openxmlformats.org/drawingml/2006/main">
               <a:ext uri="{FF2B5EF4-FFF2-40B4-BE49-F238E27FC236}">
-                <a16:creationId xmlns:a16="http://schemas.microsoft.com/office/drawing/2014/main" id="{3F18A06F-F7BA-4C8F-A1B1-51B712235107}"/>
+                <a16:creationId xmlns:a16="http://schemas.microsoft.com/office/drawing/2014/main" id="{4DD04838-3F34-4F6A-83E9-10890621BFB1}"/>
               </a:ext>
             </a:extLst>
           </p:cNvPr>
@@ -2247,7 +2247,7 @@
           <p:cNvPr id="11" name="">
             <a:extLst xmlns:a="http://schemas.openxmlformats.org/drawingml/2006/main">
               <a:ext uri="{FF2B5EF4-FFF2-40B4-BE49-F238E27FC236}">
-                <a16:creationId xmlns:a16="http://schemas.microsoft.com/office/drawing/2014/main" id="{442C6DDA-380C-41A1-8F1A-588DCBDEDF68}"/>
+                <a16:creationId xmlns:a16="http://schemas.microsoft.com/office/drawing/2014/main" id="{74345B4C-A1E6-47D2-AF60-4886819123EA}"/>
               </a:ext>
             </a:extLst>
           </p:cNvPr>
@@ -2339,7 +2339,7 @@
           <p:cNvPr id="12" name="">
             <a:extLst xmlns:a="http://schemas.openxmlformats.org/drawingml/2006/main">
               <a:ext uri="{FF2B5EF4-FFF2-40B4-BE49-F238E27FC236}">
-                <a16:creationId xmlns:a16="http://schemas.microsoft.com/office/drawing/2014/main" id="{92AA93FE-2DD8-4E4A-A801-EC8DED1A34B3}"/>
+                <a16:creationId xmlns:a16="http://schemas.microsoft.com/office/drawing/2014/main" id="{8DC6E33C-208F-434C-A607-EEA3BBD9EA16}"/>
               </a:ext>
             </a:extLst>
           </p:cNvPr>
@@ -2374,7 +2374,7 @@
           <p:cNvPr id="13" name="">
             <a:extLst xmlns:a="http://schemas.openxmlformats.org/drawingml/2006/main">
               <a:ext uri="{FF2B5EF4-FFF2-40B4-BE49-F238E27FC236}">
-                <a16:creationId xmlns:a16="http://schemas.microsoft.com/office/drawing/2014/main" id="{9409B048-80C0-4944-ADB6-ABBC84559EBD}"/>
+                <a16:creationId xmlns:a16="http://schemas.microsoft.com/office/drawing/2014/main" id="{DDDA5861-8A10-45B3-B646-2D28202B84A0}"/>
               </a:ext>
             </a:extLst>
           </p:cNvPr>
@@ -2409,7 +2409,7 @@
           <p:cNvPr id="14" name="">
             <a:extLst xmlns:a="http://schemas.openxmlformats.org/drawingml/2006/main">
               <a:ext uri="{FF2B5EF4-FFF2-40B4-BE49-F238E27FC236}">
-                <a16:creationId xmlns:a16="http://schemas.microsoft.com/office/drawing/2014/main" id="{FD72220A-75D6-47E0-B7F0-85C1622E6B45}"/>
+                <a16:creationId xmlns:a16="http://schemas.microsoft.com/office/drawing/2014/main" id="{CF6D39F8-8E30-4A7B-A27C-7D7F0FB2DDF3}"/>
               </a:ext>
             </a:extLst>
           </p:cNvPr>
@@ -2467,7 +2467,7 @@
           <p:cNvPr id="15" name="">
             <a:extLst xmlns:a="http://schemas.openxmlformats.org/drawingml/2006/main">
               <a:ext uri="{FF2B5EF4-FFF2-40B4-BE49-F238E27FC236}">
-                <a16:creationId xmlns:a16="http://schemas.microsoft.com/office/drawing/2014/main" id="{D770C080-6336-4F9B-8032-85719B94F40A}"/>
+                <a16:creationId xmlns:a16="http://schemas.microsoft.com/office/drawing/2014/main" id="{23D1ECA1-4A3B-4933-8E67-DEE2C89DFC12}"/>
               </a:ext>
             </a:extLst>
           </p:cNvPr>
@@ -2559,7 +2559,7 @@
           <p:cNvPr id="16" name="">
             <a:extLst xmlns:a="http://schemas.openxmlformats.org/drawingml/2006/main">
               <a:ext uri="{FF2B5EF4-FFF2-40B4-BE49-F238E27FC236}">
-                <a16:creationId xmlns:a16="http://schemas.microsoft.com/office/drawing/2014/main" id="{6DB77C1C-8399-48DA-9FA5-F5808F96B1DB}"/>
+                <a16:creationId xmlns:a16="http://schemas.microsoft.com/office/drawing/2014/main" id="{68B60963-AF7E-4EFA-9E78-E4A760EBC0BC}"/>
               </a:ext>
             </a:extLst>
           </p:cNvPr>
@@ -2594,7 +2594,7 @@
           <p:cNvPr id="17" name="">
             <a:extLst xmlns:a="http://schemas.openxmlformats.org/drawingml/2006/main">
               <a:ext uri="{FF2B5EF4-FFF2-40B4-BE49-F238E27FC236}">
-                <a16:creationId xmlns:a16="http://schemas.microsoft.com/office/drawing/2014/main" id="{C333D43C-2F66-4956-B3EA-9CD2C2F1D647}"/>
+                <a16:creationId xmlns:a16="http://schemas.microsoft.com/office/drawing/2014/main" id="{0349291F-F68A-406C-8892-3D403F1ECFB9}"/>
               </a:ext>
             </a:extLst>
           </p:cNvPr>
@@ -2629,7 +2629,7 @@
           <p:cNvPr id="18" name="">
             <a:extLst xmlns:a="http://schemas.openxmlformats.org/drawingml/2006/main">
               <a:ext uri="{FF2B5EF4-FFF2-40B4-BE49-F238E27FC236}">
-                <a16:creationId xmlns:a16="http://schemas.microsoft.com/office/drawing/2014/main" id="{BA4144CB-4DDF-4001-8E6C-04808377FC44}"/>
+                <a16:creationId xmlns:a16="http://schemas.microsoft.com/office/drawing/2014/main" id="{B69DB356-77C1-4836-8471-65D4C515C29E}"/>
               </a:ext>
             </a:extLst>
           </p:cNvPr>
@@ -2687,7 +2687,7 @@
           <p:cNvPr id="19" name="">
             <a:extLst xmlns:a="http://schemas.openxmlformats.org/drawingml/2006/main">
               <a:ext uri="{FF2B5EF4-FFF2-40B4-BE49-F238E27FC236}">
-                <a16:creationId xmlns:a16="http://schemas.microsoft.com/office/drawing/2014/main" id="{62286998-BF59-4813-AB59-38DD67958F4B}"/>
+                <a16:creationId xmlns:a16="http://schemas.microsoft.com/office/drawing/2014/main" id="{C46881B4-EC02-4530-9564-87FC8436E6B8}"/>
               </a:ext>
             </a:extLst>
           </p:cNvPr>
@@ -2779,7 +2779,7 @@
           <p:cNvPr id="20" name="">
             <a:extLst xmlns:a="http://schemas.openxmlformats.org/drawingml/2006/main">
               <a:ext uri="{FF2B5EF4-FFF2-40B4-BE49-F238E27FC236}">
-                <a16:creationId xmlns:a16="http://schemas.microsoft.com/office/drawing/2014/main" id="{898973D4-CE05-43BF-BAB4-01777985DBEF}"/>
+                <a16:creationId xmlns:a16="http://schemas.microsoft.com/office/drawing/2014/main" id="{53B36C46-AC54-4F45-BD5B-D76F90691AEC}"/>
               </a:ext>
             </a:extLst>
           </p:cNvPr>
@@ -2814,7 +2814,7 @@
           <p:cNvPr id="21" name="">
             <a:extLst xmlns:a="http://schemas.openxmlformats.org/drawingml/2006/main">
               <a:ext uri="{FF2B5EF4-FFF2-40B4-BE49-F238E27FC236}">
-                <a16:creationId xmlns:a16="http://schemas.microsoft.com/office/drawing/2014/main" id="{D45E5039-C8DA-4E90-88B0-5BCFB94C37A6}"/>
+                <a16:creationId xmlns:a16="http://schemas.microsoft.com/office/drawing/2014/main" id="{83263F5C-6592-4A0A-8B19-7FE5105127DE}"/>
               </a:ext>
             </a:extLst>
           </p:cNvPr>
@@ -2849,7 +2849,7 @@
           <p:cNvPr id="22" name="">
             <a:extLst xmlns:a="http://schemas.openxmlformats.org/drawingml/2006/main">
               <a:ext uri="{FF2B5EF4-FFF2-40B4-BE49-F238E27FC236}">
-                <a16:creationId xmlns:a16="http://schemas.microsoft.com/office/drawing/2014/main" id="{BBBAE97C-4BD1-42E6-94C9-337B34FDC097}"/>
+                <a16:creationId xmlns:a16="http://schemas.microsoft.com/office/drawing/2014/main" id="{41065DCF-27CB-4838-9438-FFF71411A4EB}"/>
               </a:ext>
             </a:extLst>
           </p:cNvPr>
@@ -2907,7 +2907,7 @@
           <p:cNvPr id="23" name="">
             <a:extLst xmlns:a="http://schemas.openxmlformats.org/drawingml/2006/main">
               <a:ext uri="{FF2B5EF4-FFF2-40B4-BE49-F238E27FC236}">
-                <a16:creationId xmlns:a16="http://schemas.microsoft.com/office/drawing/2014/main" id="{C4C2CF6F-DDC8-4655-A059-330F971DACE3}"/>
+                <a16:creationId xmlns:a16="http://schemas.microsoft.com/office/drawing/2014/main" id="{A077652F-7255-4510-8C7F-9B6F25F623EE}"/>
               </a:ext>
             </a:extLst>
           </p:cNvPr>
@@ -2965,7 +2965,7 @@
           <p:cNvPr id="24" name="">
             <a:extLst xmlns:a="http://schemas.openxmlformats.org/drawingml/2006/main">
               <a:ext uri="{FF2B5EF4-FFF2-40B4-BE49-F238E27FC236}">
-                <a16:creationId xmlns:a16="http://schemas.microsoft.com/office/drawing/2014/main" id="{CFDD2045-9B93-4F36-9645-F34AB6BE6E4C}"/>
+                <a16:creationId xmlns:a16="http://schemas.microsoft.com/office/drawing/2014/main" id="{3D34D839-9FCF-4C90-92B9-942FB5532B79}"/>
               </a:ext>
             </a:extLst>
           </p:cNvPr>
@@ -3021,7 +3021,7 @@
     </p:spTree>
     <p:extLst>
       <p:ext uri="{BB962C8B-B14F-4D97-AF65-F5344CB8AC3E}">
-        <p14:creationId xmlns:p14="http://schemas.microsoft.com/office/powerpoint/2010/main" val="1500817136"/>
+        <p14:creationId xmlns:p14="http://schemas.microsoft.com/office/powerpoint/2010/main" val="1264645520"/>
       </p:ext>
     </p:extLst>
   </p:cSld>
@@ -3052,7 +3052,7 @@
           <p:cNvPr id="1" name="">
             <a:extLst xmlns:a="http://schemas.openxmlformats.org/drawingml/2006/main">
               <a:ext uri="{FF2B5EF4-FFF2-40B4-BE49-F238E27FC236}">
-                <a16:creationId xmlns:a16="http://schemas.microsoft.com/office/drawing/2014/main" id="{30CAE54F-21FB-47B3-A9D4-90BBF4D8B420}"/>
+                <a16:creationId xmlns:a16="http://schemas.microsoft.com/office/drawing/2014/main" id="{A8FD7074-305B-41DE-A3D6-9822366633BF}"/>
               </a:ext>
             </a:extLst>
           </p:cNvPr>
@@ -3087,7 +3087,7 @@
           <p:cNvPr id="2" name="">
             <a:extLst xmlns:a="http://schemas.openxmlformats.org/drawingml/2006/main">
               <a:ext uri="{FF2B5EF4-FFF2-40B4-BE49-F238E27FC236}">
-                <a16:creationId xmlns:a16="http://schemas.microsoft.com/office/drawing/2014/main" id="{775EFC4C-38D5-471E-B339-79C3F34829BD}"/>
+                <a16:creationId xmlns:a16="http://schemas.microsoft.com/office/drawing/2014/main" id="{84E50E21-3FCF-472C-8BBF-4AD63208518D}"/>
               </a:ext>
             </a:extLst>
           </p:cNvPr>
@@ -3122,7 +3122,7 @@
           <p:cNvPr id="3" name="">
             <a:extLst xmlns:a="http://schemas.openxmlformats.org/drawingml/2006/main">
               <a:ext uri="{FF2B5EF4-FFF2-40B4-BE49-F238E27FC236}">
-                <a16:creationId xmlns:a16="http://schemas.microsoft.com/office/drawing/2014/main" id="{E2DCD511-2F0D-4101-B5CB-7AEBA0B8E84C}"/>
+                <a16:creationId xmlns:a16="http://schemas.microsoft.com/office/drawing/2014/main" id="{8650E64A-6E5E-405C-B26D-2C1D4593688A}"/>
               </a:ext>
             </a:extLst>
           </p:cNvPr>
@@ -3180,7 +3180,7 @@
           <p:cNvPr id="4" name="">
             <a:extLst xmlns:a="http://schemas.openxmlformats.org/drawingml/2006/main">
               <a:ext uri="{FF2B5EF4-FFF2-40B4-BE49-F238E27FC236}">
-                <a16:creationId xmlns:a16="http://schemas.microsoft.com/office/drawing/2014/main" id="{F7127AF2-E854-476A-BA3E-42E76AF15585}"/>
+                <a16:creationId xmlns:a16="http://schemas.microsoft.com/office/drawing/2014/main" id="{EFCA4BAE-A5D0-43E3-8F99-9E4F9DC1D7F2}"/>
               </a:ext>
             </a:extLst>
           </p:cNvPr>
@@ -3238,7 +3238,7 @@
           <p:cNvPr id="5" name="">
             <a:extLst xmlns:a="http://schemas.openxmlformats.org/drawingml/2006/main">
               <a:ext uri="{FF2B5EF4-FFF2-40B4-BE49-F238E27FC236}">
-                <a16:creationId xmlns:a16="http://schemas.microsoft.com/office/drawing/2014/main" id="{D6C665DD-B185-43E0-856C-C1F8D374126F}"/>
+                <a16:creationId xmlns:a16="http://schemas.microsoft.com/office/drawing/2014/main" id="{06760CC0-2E34-45A9-9B80-BC6E6B638A55}"/>
               </a:ext>
             </a:extLst>
           </p:cNvPr>
@@ -3273,7 +3273,7 @@
           <p:cNvPr id="6" name="">
             <a:extLst xmlns:a="http://schemas.openxmlformats.org/drawingml/2006/main">
               <a:ext uri="{FF2B5EF4-FFF2-40B4-BE49-F238E27FC236}">
-                <a16:creationId xmlns:a16="http://schemas.microsoft.com/office/drawing/2014/main" id="{9F79E0A3-77CD-4A31-A979-D62A78B16324}"/>
+                <a16:creationId xmlns:a16="http://schemas.microsoft.com/office/drawing/2014/main" id="{33DFDBA3-0706-405D-958D-88812E086C99}"/>
               </a:ext>
             </a:extLst>
           </p:cNvPr>
@@ -3331,7 +3331,7 @@
           <p:cNvPr id="7" name="">
             <a:extLst xmlns:a="http://schemas.openxmlformats.org/drawingml/2006/main">
               <a:ext uri="{FF2B5EF4-FFF2-40B4-BE49-F238E27FC236}">
-                <a16:creationId xmlns:a16="http://schemas.microsoft.com/office/drawing/2014/main" id="{82698B26-1D08-494F-A4BF-6438AFE7B31E}"/>
+                <a16:creationId xmlns:a16="http://schemas.microsoft.com/office/drawing/2014/main" id="{E232DBE2-679D-4806-BEA2-9AEC17C85611}"/>
               </a:ext>
             </a:extLst>
           </p:cNvPr>
@@ -3389,7 +3389,7 @@
           <p:cNvPr id="8" name="">
             <a:extLst xmlns:a="http://schemas.openxmlformats.org/drawingml/2006/main">
               <a:ext uri="{FF2B5EF4-FFF2-40B4-BE49-F238E27FC236}">
-                <a16:creationId xmlns:a16="http://schemas.microsoft.com/office/drawing/2014/main" id="{9EC03BF6-4D6E-4364-82A7-1A58C490A225}"/>
+                <a16:creationId xmlns:a16="http://schemas.microsoft.com/office/drawing/2014/main" id="{E29003B2-EB4E-4D34-8103-F72A872A2420}"/>
               </a:ext>
             </a:extLst>
           </p:cNvPr>
@@ -3424,7 +3424,7 @@
           <p:cNvPr id="9" name="">
             <a:extLst xmlns:a="http://schemas.openxmlformats.org/drawingml/2006/main">
               <a:ext uri="{FF2B5EF4-FFF2-40B4-BE49-F238E27FC236}">
-                <a16:creationId xmlns:a16="http://schemas.microsoft.com/office/drawing/2014/main" id="{A97FD9E4-B41F-4E03-BE2A-C18789BAD64A}"/>
+                <a16:creationId xmlns:a16="http://schemas.microsoft.com/office/drawing/2014/main" id="{DBAABDCD-C35F-4AF9-BFDA-D25F553E5A9D}"/>
               </a:ext>
             </a:extLst>
           </p:cNvPr>
@@ -3459,7 +3459,7 @@
           <p:cNvPr id="10" name="">
             <a:extLst xmlns:a="http://schemas.openxmlformats.org/drawingml/2006/main">
               <a:ext uri="{FF2B5EF4-FFF2-40B4-BE49-F238E27FC236}">
-                <a16:creationId xmlns:a16="http://schemas.microsoft.com/office/drawing/2014/main" id="{5719741A-AD9E-4D84-AFE2-B67A2C9BC0FF}"/>
+                <a16:creationId xmlns:a16="http://schemas.microsoft.com/office/drawing/2014/main" id="{73B44C1F-0DD9-4FAE-8CDD-EACD70E3D763}"/>
               </a:ext>
             </a:extLst>
           </p:cNvPr>
@@ -3517,7 +3517,7 @@
           <p:cNvPr id="11" name="">
             <a:extLst xmlns:a="http://schemas.openxmlformats.org/drawingml/2006/main">
               <a:ext uri="{FF2B5EF4-FFF2-40B4-BE49-F238E27FC236}">
-                <a16:creationId xmlns:a16="http://schemas.microsoft.com/office/drawing/2014/main" id="{4D441FA6-6736-4A07-B629-F1C593FFF14D}"/>
+                <a16:creationId xmlns:a16="http://schemas.microsoft.com/office/drawing/2014/main" id="{CDC62E5A-2E34-4FD0-81CC-7D2020D66EFA}"/>
               </a:ext>
             </a:extLst>
           </p:cNvPr>
@@ -3552,7 +3552,7 @@
           <p:cNvPr id="12" name="">
             <a:extLst xmlns:a="http://schemas.openxmlformats.org/drawingml/2006/main">
               <a:ext uri="{FF2B5EF4-FFF2-40B4-BE49-F238E27FC236}">
-                <a16:creationId xmlns:a16="http://schemas.microsoft.com/office/drawing/2014/main" id="{9CFEBF4D-D357-41AC-BB19-877996AE0DC7}"/>
+                <a16:creationId xmlns:a16="http://schemas.microsoft.com/office/drawing/2014/main" id="{902B7A10-18DD-46A8-9D0C-CACED517F6B4}"/>
               </a:ext>
             </a:extLst>
           </p:cNvPr>
@@ -3644,7 +3644,7 @@
           <p:cNvPr id="13" name="">
             <a:extLst xmlns:a="http://schemas.openxmlformats.org/drawingml/2006/main">
               <a:ext uri="{FF2B5EF4-FFF2-40B4-BE49-F238E27FC236}">
-                <a16:creationId xmlns:a16="http://schemas.microsoft.com/office/drawing/2014/main" id="{9456B8E3-74DB-48E2-BCED-AADB2C1CED71}"/>
+                <a16:creationId xmlns:a16="http://schemas.microsoft.com/office/drawing/2014/main" id="{DC633620-8B73-4681-B7DA-1FD8B2B91821}"/>
               </a:ext>
             </a:extLst>
           </p:cNvPr>
@@ -3679,7 +3679,7 @@
           <p:cNvPr id="14" name="">
             <a:extLst xmlns:a="http://schemas.openxmlformats.org/drawingml/2006/main">
               <a:ext uri="{FF2B5EF4-FFF2-40B4-BE49-F238E27FC236}">
-                <a16:creationId xmlns:a16="http://schemas.microsoft.com/office/drawing/2014/main" id="{38B1380E-9F8F-466D-A490-C90BBB8D5F63}"/>
+                <a16:creationId xmlns:a16="http://schemas.microsoft.com/office/drawing/2014/main" id="{1AA48D33-826C-43EE-8592-ED95FBA79CE5}"/>
               </a:ext>
             </a:extLst>
           </p:cNvPr>
@@ -3771,7 +3771,7 @@
           <p:cNvPr id="15" name="">
             <a:extLst xmlns:a="http://schemas.openxmlformats.org/drawingml/2006/main">
               <a:ext uri="{FF2B5EF4-FFF2-40B4-BE49-F238E27FC236}">
-                <a16:creationId xmlns:a16="http://schemas.microsoft.com/office/drawing/2014/main" id="{9004D5B1-0F46-49C9-907C-53F035E12194}"/>
+                <a16:creationId xmlns:a16="http://schemas.microsoft.com/office/drawing/2014/main" id="{38914869-2877-45CB-A4A6-2C9E54713B70}"/>
               </a:ext>
             </a:extLst>
           </p:cNvPr>
@@ -3806,7 +3806,7 @@
           <p:cNvPr id="16" name="">
             <a:extLst xmlns:a="http://schemas.openxmlformats.org/drawingml/2006/main">
               <a:ext uri="{FF2B5EF4-FFF2-40B4-BE49-F238E27FC236}">
-                <a16:creationId xmlns:a16="http://schemas.microsoft.com/office/drawing/2014/main" id="{1EC01CBC-DD61-4ECC-9964-395BEE71953A}"/>
+                <a16:creationId xmlns:a16="http://schemas.microsoft.com/office/drawing/2014/main" id="{66332DE5-B9BA-4E3A-B057-BA8ACFB85C3B}"/>
               </a:ext>
             </a:extLst>
           </p:cNvPr>
@@ -3841,7 +3841,7 @@
           <p:cNvPr id="17" name="">
             <a:extLst xmlns:a="http://schemas.openxmlformats.org/drawingml/2006/main">
               <a:ext uri="{FF2B5EF4-FFF2-40B4-BE49-F238E27FC236}">
-                <a16:creationId xmlns:a16="http://schemas.microsoft.com/office/drawing/2014/main" id="{DDAF27F8-67C2-437A-80E2-B99B0976B070}"/>
+                <a16:creationId xmlns:a16="http://schemas.microsoft.com/office/drawing/2014/main" id="{B3B7EDFE-B4E7-48CF-AF49-37E26A453EE2}"/>
               </a:ext>
             </a:extLst>
           </p:cNvPr>
@@ -3916,7 +3916,7 @@
           <p:cNvPr id="18" name="">
             <a:extLst xmlns:a="http://schemas.openxmlformats.org/drawingml/2006/main">
               <a:ext uri="{FF2B5EF4-FFF2-40B4-BE49-F238E27FC236}">
-                <a16:creationId xmlns:a16="http://schemas.microsoft.com/office/drawing/2014/main" id="{7551F97C-792A-4E11-8A09-B51B618F9384}"/>
+                <a16:creationId xmlns:a16="http://schemas.microsoft.com/office/drawing/2014/main" id="{7090FDA0-735E-48A7-AAFB-4BC8154FECCE}"/>
               </a:ext>
             </a:extLst>
           </p:cNvPr>
@@ -3951,7 +3951,7 @@
           <p:cNvPr id="19" name="">
             <a:extLst xmlns:a="http://schemas.openxmlformats.org/drawingml/2006/main">
               <a:ext uri="{FF2B5EF4-FFF2-40B4-BE49-F238E27FC236}">
-                <a16:creationId xmlns:a16="http://schemas.microsoft.com/office/drawing/2014/main" id="{0E3116A0-3F5F-4B85-8FE3-1C2A1A0B300E}"/>
+                <a16:creationId xmlns:a16="http://schemas.microsoft.com/office/drawing/2014/main" id="{FB134441-3655-480D-B11A-47DA39935F4E}"/>
               </a:ext>
             </a:extLst>
           </p:cNvPr>
@@ -4009,7 +4009,7 @@
           <p:cNvPr id="20" name="">
             <a:extLst xmlns:a="http://schemas.openxmlformats.org/drawingml/2006/main">
               <a:ext uri="{FF2B5EF4-FFF2-40B4-BE49-F238E27FC236}">
-                <a16:creationId xmlns:a16="http://schemas.microsoft.com/office/drawing/2014/main" id="{BD5AF855-F535-4D2C-9E9F-95727FB04D92}"/>
+                <a16:creationId xmlns:a16="http://schemas.microsoft.com/office/drawing/2014/main" id="{1F5E2742-2119-43F7-B588-399BEC74969E}"/>
               </a:ext>
             </a:extLst>
           </p:cNvPr>
@@ -4044,7 +4044,7 @@
           <p:cNvPr id="21" name="">
             <a:extLst xmlns:a="http://schemas.openxmlformats.org/drawingml/2006/main">
               <a:ext uri="{FF2B5EF4-FFF2-40B4-BE49-F238E27FC236}">
-                <a16:creationId xmlns:a16="http://schemas.microsoft.com/office/drawing/2014/main" id="{19A69E49-1210-48BF-AFB7-1DE69087F959}"/>
+                <a16:creationId xmlns:a16="http://schemas.microsoft.com/office/drawing/2014/main" id="{9A476852-52F8-4841-A72D-13884E2C2F83}"/>
               </a:ext>
             </a:extLst>
           </p:cNvPr>
@@ -4102,7 +4102,7 @@
           <p:cNvPr id="22" name="">
             <a:extLst xmlns:a="http://schemas.openxmlformats.org/drawingml/2006/main">
               <a:ext uri="{FF2B5EF4-FFF2-40B4-BE49-F238E27FC236}">
-                <a16:creationId xmlns:a16="http://schemas.microsoft.com/office/drawing/2014/main" id="{E5AB85B9-B657-43D8-B8C5-31B875229988}"/>
+                <a16:creationId xmlns:a16="http://schemas.microsoft.com/office/drawing/2014/main" id="{BABDE052-8FF8-4A84-8D07-0F1F0EC73DC7}"/>
               </a:ext>
             </a:extLst>
           </p:cNvPr>
@@ -4137,7 +4137,7 @@
           <p:cNvPr id="23" name="">
             <a:extLst xmlns:a="http://schemas.openxmlformats.org/drawingml/2006/main">
               <a:ext uri="{FF2B5EF4-FFF2-40B4-BE49-F238E27FC236}">
-                <a16:creationId xmlns:a16="http://schemas.microsoft.com/office/drawing/2014/main" id="{65620B62-E73F-4A98-AA58-ABB3A7481ACE}"/>
+                <a16:creationId xmlns:a16="http://schemas.microsoft.com/office/drawing/2014/main" id="{BCC58A6A-3125-4A9D-8FAB-B281A954AAD5}"/>
               </a:ext>
             </a:extLst>
           </p:cNvPr>
@@ -4172,7 +4172,7 @@
           <p:cNvPr id="24" name="">
             <a:extLst xmlns:a="http://schemas.openxmlformats.org/drawingml/2006/main">
               <a:ext uri="{FF2B5EF4-FFF2-40B4-BE49-F238E27FC236}">
-                <a16:creationId xmlns:a16="http://schemas.microsoft.com/office/drawing/2014/main" id="{5BB8C5AD-9178-4472-8604-30816BEE9021}"/>
+                <a16:creationId xmlns:a16="http://schemas.microsoft.com/office/drawing/2014/main" id="{5570E41F-7A5D-48AA-AB6A-7ED81FF3EE75}"/>
               </a:ext>
             </a:extLst>
           </p:cNvPr>
@@ -4230,7 +4230,7 @@
           <p:cNvPr id="25" name="">
             <a:extLst xmlns:a="http://schemas.openxmlformats.org/drawingml/2006/main">
               <a:ext uri="{FF2B5EF4-FFF2-40B4-BE49-F238E27FC236}">
-                <a16:creationId xmlns:a16="http://schemas.microsoft.com/office/drawing/2014/main" id="{B8B45553-4E90-40DA-8DC6-B643C33BDED4}"/>
+                <a16:creationId xmlns:a16="http://schemas.microsoft.com/office/drawing/2014/main" id="{97E8EE44-DA04-4403-A1BD-D7B5F36F0016}"/>
               </a:ext>
             </a:extLst>
           </p:cNvPr>
@@ -4265,7 +4265,7 @@
           <p:cNvPr id="26" name="">
             <a:extLst xmlns:a="http://schemas.openxmlformats.org/drawingml/2006/main">
               <a:ext uri="{FF2B5EF4-FFF2-40B4-BE49-F238E27FC236}">
-                <a16:creationId xmlns:a16="http://schemas.microsoft.com/office/drawing/2014/main" id="{63F07B00-F794-4FD3-9F4B-2ACA8D9CA7A1}"/>
+                <a16:creationId xmlns:a16="http://schemas.microsoft.com/office/drawing/2014/main" id="{439C3C98-47B2-436D-94F0-5E9128B28D32}"/>
               </a:ext>
             </a:extLst>
           </p:cNvPr>
@@ -4323,7 +4323,7 @@
           <p:cNvPr id="27" name="">
             <a:extLst xmlns:a="http://schemas.openxmlformats.org/drawingml/2006/main">
               <a:ext uri="{FF2B5EF4-FFF2-40B4-BE49-F238E27FC236}">
-                <a16:creationId xmlns:a16="http://schemas.microsoft.com/office/drawing/2014/main" id="{7DB75A10-613A-4E55-B225-A1B85394CDD8}"/>
+                <a16:creationId xmlns:a16="http://schemas.microsoft.com/office/drawing/2014/main" id="{765FEA43-6CDD-4C14-A432-E0CDDEFD7A3A}"/>
               </a:ext>
             </a:extLst>
           </p:cNvPr>
@@ -4358,7 +4358,7 @@
           <p:cNvPr id="28" name="">
             <a:extLst xmlns:a="http://schemas.openxmlformats.org/drawingml/2006/main">
               <a:ext uri="{FF2B5EF4-FFF2-40B4-BE49-F238E27FC236}">
-                <a16:creationId xmlns:a16="http://schemas.microsoft.com/office/drawing/2014/main" id="{0E85CCAF-6A47-4502-A8E2-E3AEB5C66B2E}"/>
+                <a16:creationId xmlns:a16="http://schemas.microsoft.com/office/drawing/2014/main" id="{E923D796-E8DE-4C1B-B158-4C6079510789}"/>
               </a:ext>
             </a:extLst>
           </p:cNvPr>
@@ -4433,7 +4433,7 @@
           <p:cNvPr id="29" name="">
             <a:extLst xmlns:a="http://schemas.openxmlformats.org/drawingml/2006/main">
               <a:ext uri="{FF2B5EF4-FFF2-40B4-BE49-F238E27FC236}">
-                <a16:creationId xmlns:a16="http://schemas.microsoft.com/office/drawing/2014/main" id="{BE4F081C-75FD-4C8D-9448-3ABD5E05394A}"/>
+                <a16:creationId xmlns:a16="http://schemas.microsoft.com/office/drawing/2014/main" id="{44FD8905-640E-47AB-AD7E-98FF527A31B3}"/>
               </a:ext>
             </a:extLst>
           </p:cNvPr>
@@ -4468,7 +4468,7 @@
           <p:cNvPr id="30" name="">
             <a:extLst xmlns:a="http://schemas.openxmlformats.org/drawingml/2006/main">
               <a:ext uri="{FF2B5EF4-FFF2-40B4-BE49-F238E27FC236}">
-                <a16:creationId xmlns:a16="http://schemas.microsoft.com/office/drawing/2014/main" id="{B129A601-3BAC-434C-851D-88F8BC0DA82D}"/>
+                <a16:creationId xmlns:a16="http://schemas.microsoft.com/office/drawing/2014/main" id="{257D4E40-D6F8-47A2-9B62-DEAD0441C245}"/>
               </a:ext>
             </a:extLst>
           </p:cNvPr>
@@ -4503,7 +4503,7 @@
           <p:cNvPr id="31" name="">
             <a:extLst xmlns:a="http://schemas.openxmlformats.org/drawingml/2006/main">
               <a:ext uri="{FF2B5EF4-FFF2-40B4-BE49-F238E27FC236}">
-                <a16:creationId xmlns:a16="http://schemas.microsoft.com/office/drawing/2014/main" id="{F7E73C62-CCE1-4676-93C1-9FB6F8A87BDA}"/>
+                <a16:creationId xmlns:a16="http://schemas.microsoft.com/office/drawing/2014/main" id="{DED7FB94-8650-48AB-AF56-B4DA3E8ED921}"/>
               </a:ext>
             </a:extLst>
           </p:cNvPr>
@@ -4561,7 +4561,7 @@
           <p:cNvPr id="32" name="">
             <a:extLst xmlns:a="http://schemas.openxmlformats.org/drawingml/2006/main">
               <a:ext uri="{FF2B5EF4-FFF2-40B4-BE49-F238E27FC236}">
-                <a16:creationId xmlns:a16="http://schemas.microsoft.com/office/drawing/2014/main" id="{7DD934D4-8A71-4DB5-B08E-5A1C679CE4E6}"/>
+                <a16:creationId xmlns:a16="http://schemas.microsoft.com/office/drawing/2014/main" id="{95FFB10B-5733-4AE5-8264-B5BD99C590F3}"/>
               </a:ext>
             </a:extLst>
           </p:cNvPr>
@@ -4596,7 +4596,7 @@
           <p:cNvPr id="33" name="">
             <a:extLst xmlns:a="http://schemas.openxmlformats.org/drawingml/2006/main">
               <a:ext uri="{FF2B5EF4-FFF2-40B4-BE49-F238E27FC236}">
-                <a16:creationId xmlns:a16="http://schemas.microsoft.com/office/drawing/2014/main" id="{8CB26EF8-2268-4FB5-B995-F6AA8699E89A}"/>
+                <a16:creationId xmlns:a16="http://schemas.microsoft.com/office/drawing/2014/main" id="{66B81543-E66A-4483-95E9-19A8D5E98DC7}"/>
               </a:ext>
             </a:extLst>
           </p:cNvPr>
@@ -4654,7 +4654,7 @@
           <p:cNvPr id="34" name="">
             <a:extLst xmlns:a="http://schemas.openxmlformats.org/drawingml/2006/main">
               <a:ext uri="{FF2B5EF4-FFF2-40B4-BE49-F238E27FC236}">
-                <a16:creationId xmlns:a16="http://schemas.microsoft.com/office/drawing/2014/main" id="{13C7B441-8437-40E2-9725-77D04C2260BB}"/>
+                <a16:creationId xmlns:a16="http://schemas.microsoft.com/office/drawing/2014/main" id="{3A28B1D1-CCC4-4744-AE80-B054DCD1414D}"/>
               </a:ext>
             </a:extLst>
           </p:cNvPr>
@@ -4689,7 +4689,7 @@
           <p:cNvPr id="35" name="">
             <a:extLst xmlns:a="http://schemas.openxmlformats.org/drawingml/2006/main">
               <a:ext uri="{FF2B5EF4-FFF2-40B4-BE49-F238E27FC236}">
-                <a16:creationId xmlns:a16="http://schemas.microsoft.com/office/drawing/2014/main" id="{EED2FD2E-031D-4F1F-B138-3F6769645912}"/>
+                <a16:creationId xmlns:a16="http://schemas.microsoft.com/office/drawing/2014/main" id="{FD52DFA5-CE29-43DE-8FFC-189EAEAFEDFC}"/>
               </a:ext>
             </a:extLst>
           </p:cNvPr>
@@ -4747,7 +4747,7 @@
           <p:cNvPr id="36" name="">
             <a:extLst xmlns:a="http://schemas.openxmlformats.org/drawingml/2006/main">
               <a:ext uri="{FF2B5EF4-FFF2-40B4-BE49-F238E27FC236}">
-                <a16:creationId xmlns:a16="http://schemas.microsoft.com/office/drawing/2014/main" id="{64030446-69B7-4972-81BA-5DC70C9EA91B}"/>
+                <a16:creationId xmlns:a16="http://schemas.microsoft.com/office/drawing/2014/main" id="{745EDE78-99C5-41AC-849D-01320509CEBF}"/>
               </a:ext>
             </a:extLst>
           </p:cNvPr>
@@ -4782,7 +4782,7 @@
           <p:cNvPr id="37" name="">
             <a:extLst xmlns:a="http://schemas.openxmlformats.org/drawingml/2006/main">
               <a:ext uri="{FF2B5EF4-FFF2-40B4-BE49-F238E27FC236}">
-                <a16:creationId xmlns:a16="http://schemas.microsoft.com/office/drawing/2014/main" id="{EADCFEF8-141B-46D6-9219-60ECD787E2D6}"/>
+                <a16:creationId xmlns:a16="http://schemas.microsoft.com/office/drawing/2014/main" id="{8147615B-F0E2-47EE-A9A2-C6D750FCCAB5}"/>
               </a:ext>
             </a:extLst>
           </p:cNvPr>
@@ -4817,7 +4817,7 @@
           <p:cNvPr id="38" name="">
             <a:extLst xmlns:a="http://schemas.openxmlformats.org/drawingml/2006/main">
               <a:ext uri="{FF2B5EF4-FFF2-40B4-BE49-F238E27FC236}">
-                <a16:creationId xmlns:a16="http://schemas.microsoft.com/office/drawing/2014/main" id="{1F1A7CC7-FD39-4F61-A00A-700353264C96}"/>
+                <a16:creationId xmlns:a16="http://schemas.microsoft.com/office/drawing/2014/main" id="{8D6E080A-10F1-4A6A-BA6C-1DA8E119B5A5}"/>
               </a:ext>
             </a:extLst>
           </p:cNvPr>
@@ -4892,7 +4892,7 @@
           <p:cNvPr id="39" name="">
             <a:extLst xmlns:a="http://schemas.openxmlformats.org/drawingml/2006/main">
               <a:ext uri="{FF2B5EF4-FFF2-40B4-BE49-F238E27FC236}">
-                <a16:creationId xmlns:a16="http://schemas.microsoft.com/office/drawing/2014/main" id="{010AE6E7-B6EC-4CB9-9913-F21272D1FEC5}"/>
+                <a16:creationId xmlns:a16="http://schemas.microsoft.com/office/drawing/2014/main" id="{C82A6117-47C2-427B-B9D1-772C637DFD39}"/>
               </a:ext>
             </a:extLst>
           </p:cNvPr>
@@ -4927,7 +4927,7 @@
           <p:cNvPr id="40" name="">
             <a:extLst xmlns:a="http://schemas.openxmlformats.org/drawingml/2006/main">
               <a:ext uri="{FF2B5EF4-FFF2-40B4-BE49-F238E27FC236}">
-                <a16:creationId xmlns:a16="http://schemas.microsoft.com/office/drawing/2014/main" id="{FFAB5B21-9235-4FC4-8DAF-5912C1FFAE27}"/>
+                <a16:creationId xmlns:a16="http://schemas.microsoft.com/office/drawing/2014/main" id="{84B141BA-0D50-4816-B1AE-87C9D9995BFF}"/>
               </a:ext>
             </a:extLst>
           </p:cNvPr>
@@ -5002,7 +5002,7 @@
           <p:cNvPr id="41" name="">
             <a:extLst xmlns:a="http://schemas.openxmlformats.org/drawingml/2006/main">
               <a:ext uri="{FF2B5EF4-FFF2-40B4-BE49-F238E27FC236}">
-                <a16:creationId xmlns:a16="http://schemas.microsoft.com/office/drawing/2014/main" id="{0954ECE6-B775-4FC9-B913-FF8DA3D659D2}"/>
+                <a16:creationId xmlns:a16="http://schemas.microsoft.com/office/drawing/2014/main" id="{40416A6C-A060-4D49-966B-8CFCDDD497A3}"/>
               </a:ext>
             </a:extLst>
           </p:cNvPr>
@@ -5037,7 +5037,7 @@
           <p:cNvPr id="42" name="">
             <a:extLst xmlns:a="http://schemas.openxmlformats.org/drawingml/2006/main">
               <a:ext uri="{FF2B5EF4-FFF2-40B4-BE49-F238E27FC236}">
-                <a16:creationId xmlns:a16="http://schemas.microsoft.com/office/drawing/2014/main" id="{49C8A1B0-1070-45D0-B1F6-30E3A9723518}"/>
+                <a16:creationId xmlns:a16="http://schemas.microsoft.com/office/drawing/2014/main" id="{83A82B8F-A4CA-400B-92DE-3BADEB8454E7}"/>
               </a:ext>
             </a:extLst>
           </p:cNvPr>
@@ -5095,7 +5095,7 @@
           <p:cNvPr id="43" name="">
             <a:extLst xmlns:a="http://schemas.openxmlformats.org/drawingml/2006/main">
               <a:ext uri="{FF2B5EF4-FFF2-40B4-BE49-F238E27FC236}">
-                <a16:creationId xmlns:a16="http://schemas.microsoft.com/office/drawing/2014/main" id="{B6E81C2E-3764-4A93-8AA4-B9024E486FC3}"/>
+                <a16:creationId xmlns:a16="http://schemas.microsoft.com/office/drawing/2014/main" id="{BC90A189-8D63-4843-84C7-8A5B7CA519A5}"/>
               </a:ext>
             </a:extLst>
           </p:cNvPr>
@@ -5130,7 +5130,7 @@
           <p:cNvPr id="44" name="">
             <a:extLst xmlns:a="http://schemas.openxmlformats.org/drawingml/2006/main">
               <a:ext uri="{FF2B5EF4-FFF2-40B4-BE49-F238E27FC236}">
-                <a16:creationId xmlns:a16="http://schemas.microsoft.com/office/drawing/2014/main" id="{99047244-BA3F-4A42-8010-73ED89C7DE27}"/>
+                <a16:creationId xmlns:a16="http://schemas.microsoft.com/office/drawing/2014/main" id="{63B8E077-BF67-4D09-8A8C-775220874579}"/>
               </a:ext>
             </a:extLst>
           </p:cNvPr>
@@ -5165,7 +5165,7 @@
           <p:cNvPr id="45" name="">
             <a:extLst xmlns:a="http://schemas.openxmlformats.org/drawingml/2006/main">
               <a:ext uri="{FF2B5EF4-FFF2-40B4-BE49-F238E27FC236}">
-                <a16:creationId xmlns:a16="http://schemas.microsoft.com/office/drawing/2014/main" id="{660D236F-E277-4327-A7CE-5E0F2E77D942}"/>
+                <a16:creationId xmlns:a16="http://schemas.microsoft.com/office/drawing/2014/main" id="{122476C1-F08B-4129-B5E3-B7F68343F913}"/>
               </a:ext>
             </a:extLst>
           </p:cNvPr>
@@ -5240,7 +5240,7 @@
           <p:cNvPr id="46" name="">
             <a:extLst xmlns:a="http://schemas.openxmlformats.org/drawingml/2006/main">
               <a:ext uri="{FF2B5EF4-FFF2-40B4-BE49-F238E27FC236}">
-                <a16:creationId xmlns:a16="http://schemas.microsoft.com/office/drawing/2014/main" id="{80ED9530-86DC-4E86-B065-C8CB6C07C2F3}"/>
+                <a16:creationId xmlns:a16="http://schemas.microsoft.com/office/drawing/2014/main" id="{0ADAF99C-7CA3-43CF-8F72-F0A517572876}"/>
               </a:ext>
             </a:extLst>
           </p:cNvPr>
@@ -5275,7 +5275,7 @@
           <p:cNvPr id="47" name="">
             <a:extLst xmlns:a="http://schemas.openxmlformats.org/drawingml/2006/main">
               <a:ext uri="{FF2B5EF4-FFF2-40B4-BE49-F238E27FC236}">
-                <a16:creationId xmlns:a16="http://schemas.microsoft.com/office/drawing/2014/main" id="{0A0E8C77-B2EA-43AC-947A-9CE456ADB413}"/>
+                <a16:creationId xmlns:a16="http://schemas.microsoft.com/office/drawing/2014/main" id="{A95A8BCF-DD37-4CBE-A33F-1DAA470FDD94}"/>
               </a:ext>
             </a:extLst>
           </p:cNvPr>
@@ -5350,7 +5350,7 @@
           <p:cNvPr id="48" name="">
             <a:extLst xmlns:a="http://schemas.openxmlformats.org/drawingml/2006/main">
               <a:ext uri="{FF2B5EF4-FFF2-40B4-BE49-F238E27FC236}">
-                <a16:creationId xmlns:a16="http://schemas.microsoft.com/office/drawing/2014/main" id="{D8B48FB0-8379-445C-900A-A7E919D8FF02}"/>
+                <a16:creationId xmlns:a16="http://schemas.microsoft.com/office/drawing/2014/main" id="{313EB254-8ABD-46CD-BDF1-16DB4AFB5297}"/>
               </a:ext>
             </a:extLst>
           </p:cNvPr>
@@ -5385,7 +5385,7 @@
           <p:cNvPr id="49" name="">
             <a:extLst xmlns:a="http://schemas.openxmlformats.org/drawingml/2006/main">
               <a:ext uri="{FF2B5EF4-FFF2-40B4-BE49-F238E27FC236}">
-                <a16:creationId xmlns:a16="http://schemas.microsoft.com/office/drawing/2014/main" id="{84AA4B29-D726-41FF-BD62-7F8BCC91F572}"/>
+                <a16:creationId xmlns:a16="http://schemas.microsoft.com/office/drawing/2014/main" id="{09F434B7-D3B5-4BB3-A947-090154FC099A}"/>
               </a:ext>
             </a:extLst>
           </p:cNvPr>
@@ -5443,7 +5443,7 @@
           <p:cNvPr id="50" name="">
             <a:extLst xmlns:a="http://schemas.openxmlformats.org/drawingml/2006/main">
               <a:ext uri="{FF2B5EF4-FFF2-40B4-BE49-F238E27FC236}">
-                <a16:creationId xmlns:a16="http://schemas.microsoft.com/office/drawing/2014/main" id="{5C4DF2AD-A286-4948-9628-001D75114430}"/>
+                <a16:creationId xmlns:a16="http://schemas.microsoft.com/office/drawing/2014/main" id="{4919C992-A318-4F26-8DE7-1DB6694E0A2A}"/>
               </a:ext>
             </a:extLst>
           </p:cNvPr>
@@ -5478,7 +5478,7 @@
           <p:cNvPr id="51" name="">
             <a:extLst xmlns:a="http://schemas.openxmlformats.org/drawingml/2006/main">
               <a:ext uri="{FF2B5EF4-FFF2-40B4-BE49-F238E27FC236}">
-                <a16:creationId xmlns:a16="http://schemas.microsoft.com/office/drawing/2014/main" id="{38978539-878B-4EA2-A0FC-0C8BA41B80A7}"/>
+                <a16:creationId xmlns:a16="http://schemas.microsoft.com/office/drawing/2014/main" id="{4019F6C1-9F67-4BFC-BB52-6FA064B32676}"/>
               </a:ext>
             </a:extLst>
           </p:cNvPr>
@@ -5513,7 +5513,7 @@
           <p:cNvPr id="52" name="">
             <a:extLst xmlns:a="http://schemas.openxmlformats.org/drawingml/2006/main">
               <a:ext uri="{FF2B5EF4-FFF2-40B4-BE49-F238E27FC236}">
-                <a16:creationId xmlns:a16="http://schemas.microsoft.com/office/drawing/2014/main" id="{782ED659-34DC-4D9A-AA60-D523D59C6994}"/>
+                <a16:creationId xmlns:a16="http://schemas.microsoft.com/office/drawing/2014/main" id="{23C932BD-B516-475E-9FF9-A51A0664E04B}"/>
               </a:ext>
             </a:extLst>
           </p:cNvPr>
@@ -5571,7 +5571,7 @@
           <p:cNvPr id="53" name="">
             <a:extLst xmlns:a="http://schemas.openxmlformats.org/drawingml/2006/main">
               <a:ext uri="{FF2B5EF4-FFF2-40B4-BE49-F238E27FC236}">
-                <a16:creationId xmlns:a16="http://schemas.microsoft.com/office/drawing/2014/main" id="{CA68D184-61D1-411D-9E49-BE8244DF8BC9}"/>
+                <a16:creationId xmlns:a16="http://schemas.microsoft.com/office/drawing/2014/main" id="{EA48C098-D3F5-44A2-907D-BB0677C7F2A5}"/>
               </a:ext>
             </a:extLst>
           </p:cNvPr>
@@ -5606,7 +5606,7 @@
           <p:cNvPr id="54" name="">
             <a:extLst xmlns:a="http://schemas.openxmlformats.org/drawingml/2006/main">
               <a:ext uri="{FF2B5EF4-FFF2-40B4-BE49-F238E27FC236}">
-                <a16:creationId xmlns:a16="http://schemas.microsoft.com/office/drawing/2014/main" id="{CF10B694-37AD-46E5-888E-0C0743B7C709}"/>
+                <a16:creationId xmlns:a16="http://schemas.microsoft.com/office/drawing/2014/main" id="{C9D3F043-FD70-463F-8EAD-02D1491F5133}"/>
               </a:ext>
             </a:extLst>
           </p:cNvPr>
@@ -5681,7 +5681,7 @@
           <p:cNvPr id="55" name="">
             <a:extLst xmlns:a="http://schemas.openxmlformats.org/drawingml/2006/main">
               <a:ext uri="{FF2B5EF4-FFF2-40B4-BE49-F238E27FC236}">
-                <a16:creationId xmlns:a16="http://schemas.microsoft.com/office/drawing/2014/main" id="{439277AF-7C18-4235-9395-542F6780E46F}"/>
+                <a16:creationId xmlns:a16="http://schemas.microsoft.com/office/drawing/2014/main" id="{2BE7279E-118E-41B2-A5B0-ADF542C11B59}"/>
               </a:ext>
             </a:extLst>
           </p:cNvPr>
@@ -5716,7 +5716,7 @@
           <p:cNvPr id="56" name="">
             <a:extLst xmlns:a="http://schemas.openxmlformats.org/drawingml/2006/main">
               <a:ext uri="{FF2B5EF4-FFF2-40B4-BE49-F238E27FC236}">
-                <a16:creationId xmlns:a16="http://schemas.microsoft.com/office/drawing/2014/main" id="{51566289-EA64-40D1-B6B1-B236EBCCE877}"/>
+                <a16:creationId xmlns:a16="http://schemas.microsoft.com/office/drawing/2014/main" id="{E195ADB7-4756-40E4-84C6-39D2CEEAE455}"/>
               </a:ext>
             </a:extLst>
           </p:cNvPr>
@@ -5791,7 +5791,7 @@
           <p:cNvPr id="57" name="">
             <a:extLst xmlns:a="http://schemas.openxmlformats.org/drawingml/2006/main">
               <a:ext uri="{FF2B5EF4-FFF2-40B4-BE49-F238E27FC236}">
-                <a16:creationId xmlns:a16="http://schemas.microsoft.com/office/drawing/2014/main" id="{8876CE95-25FA-45D0-A98E-995616AD2ADE}"/>
+                <a16:creationId xmlns:a16="http://schemas.microsoft.com/office/drawing/2014/main" id="{B9460ADA-935E-4666-BEE9-6ED74235B244}"/>
               </a:ext>
             </a:extLst>
           </p:cNvPr>
@@ -5826,7 +5826,7 @@
           <p:cNvPr id="58" name="">
             <a:extLst xmlns:a="http://schemas.openxmlformats.org/drawingml/2006/main">
               <a:ext uri="{FF2B5EF4-FFF2-40B4-BE49-F238E27FC236}">
-                <a16:creationId xmlns:a16="http://schemas.microsoft.com/office/drawing/2014/main" id="{E82325D6-82ED-43AF-AA73-26DAA75B2D39}"/>
+                <a16:creationId xmlns:a16="http://schemas.microsoft.com/office/drawing/2014/main" id="{1E88A0DD-4503-495B-8A7F-7C9D03B99053}"/>
               </a:ext>
             </a:extLst>
           </p:cNvPr>
@@ -5861,7 +5861,7 @@
           <p:cNvPr id="59" name="">
             <a:extLst xmlns:a="http://schemas.openxmlformats.org/drawingml/2006/main">
               <a:ext uri="{FF2B5EF4-FFF2-40B4-BE49-F238E27FC236}">
-                <a16:creationId xmlns:a16="http://schemas.microsoft.com/office/drawing/2014/main" id="{986550D4-F810-475F-A01F-BA8B72097639}"/>
+                <a16:creationId xmlns:a16="http://schemas.microsoft.com/office/drawing/2014/main" id="{B7D17363-A531-4117-B44E-B52AE1C73374}"/>
               </a:ext>
             </a:extLst>
           </p:cNvPr>
@@ -5919,7 +5919,7 @@
           <p:cNvPr id="60" name="">
             <a:extLst xmlns:a="http://schemas.openxmlformats.org/drawingml/2006/main">
               <a:ext uri="{FF2B5EF4-FFF2-40B4-BE49-F238E27FC236}">
-                <a16:creationId xmlns:a16="http://schemas.microsoft.com/office/drawing/2014/main" id="{7556DA46-314F-4768-8C8A-06F2BDF05986}"/>
+                <a16:creationId xmlns:a16="http://schemas.microsoft.com/office/drawing/2014/main" id="{700B2A19-B0FB-487A-9DF6-F209497FFD3A}"/>
               </a:ext>
             </a:extLst>
           </p:cNvPr>
@@ -5954,7 +5954,7 @@
           <p:cNvPr id="61" name="">
             <a:extLst xmlns:a="http://schemas.openxmlformats.org/drawingml/2006/main">
               <a:ext uri="{FF2B5EF4-FFF2-40B4-BE49-F238E27FC236}">
-                <a16:creationId xmlns:a16="http://schemas.microsoft.com/office/drawing/2014/main" id="{714D06DF-255A-4903-BC08-01AA36BD40B4}"/>
+                <a16:creationId xmlns:a16="http://schemas.microsoft.com/office/drawing/2014/main" id="{D73A3C09-9A85-4EEE-9189-17A7C0A13938}"/>
               </a:ext>
             </a:extLst>
           </p:cNvPr>
@@ -6063,7 +6063,7 @@
           <p:cNvPr id="62" name="">
             <a:extLst xmlns:a="http://schemas.openxmlformats.org/drawingml/2006/main">
               <a:ext uri="{FF2B5EF4-FFF2-40B4-BE49-F238E27FC236}">
-                <a16:creationId xmlns:a16="http://schemas.microsoft.com/office/drawing/2014/main" id="{8A6585B0-EABF-4190-AC3B-C90B557C9493}"/>
+                <a16:creationId xmlns:a16="http://schemas.microsoft.com/office/drawing/2014/main" id="{B58EAB33-FAB9-41A3-BFAE-50FCECBFFA3C}"/>
               </a:ext>
             </a:extLst>
           </p:cNvPr>
@@ -6098,7 +6098,7 @@
           <p:cNvPr id="63" name="">
             <a:extLst xmlns:a="http://schemas.openxmlformats.org/drawingml/2006/main">
               <a:ext uri="{FF2B5EF4-FFF2-40B4-BE49-F238E27FC236}">
-                <a16:creationId xmlns:a16="http://schemas.microsoft.com/office/drawing/2014/main" id="{FB8F53B7-03EF-4BF7-941A-F7697FE9CEAE}"/>
+                <a16:creationId xmlns:a16="http://schemas.microsoft.com/office/drawing/2014/main" id="{ADD70AA0-2101-48D1-9FB6-552A768C5440}"/>
               </a:ext>
             </a:extLst>
           </p:cNvPr>
@@ -6156,7 +6156,7 @@
           <p:cNvPr id="64" name="">
             <a:extLst xmlns:a="http://schemas.openxmlformats.org/drawingml/2006/main">
               <a:ext uri="{FF2B5EF4-FFF2-40B4-BE49-F238E27FC236}">
-                <a16:creationId xmlns:a16="http://schemas.microsoft.com/office/drawing/2014/main" id="{9A381E15-47DD-4C13-B957-4D7E2A87422C}"/>
+                <a16:creationId xmlns:a16="http://schemas.microsoft.com/office/drawing/2014/main" id="{54B1C530-27B2-458D-BC1D-6579EB5B8B60}"/>
               </a:ext>
             </a:extLst>
           </p:cNvPr>
@@ -6191,7 +6191,7 @@
           <p:cNvPr id="65" name="">
             <a:extLst xmlns:a="http://schemas.openxmlformats.org/drawingml/2006/main">
               <a:ext uri="{FF2B5EF4-FFF2-40B4-BE49-F238E27FC236}">
-                <a16:creationId xmlns:a16="http://schemas.microsoft.com/office/drawing/2014/main" id="{3DAA0B46-4D63-41A0-8506-5E22A62F1C89}"/>
+                <a16:creationId xmlns:a16="http://schemas.microsoft.com/office/drawing/2014/main" id="{F7DC731C-42DA-4CA4-9B88-FF8D3B108BED}"/>
               </a:ext>
             </a:extLst>
           </p:cNvPr>
@@ -6226,7 +6226,7 @@
           <p:cNvPr id="66" name="">
             <a:extLst xmlns:a="http://schemas.openxmlformats.org/drawingml/2006/main">
               <a:ext uri="{FF2B5EF4-FFF2-40B4-BE49-F238E27FC236}">
-                <a16:creationId xmlns:a16="http://schemas.microsoft.com/office/drawing/2014/main" id="{3B1420D9-F107-4BEF-B255-70A6AEE882B6}"/>
+                <a16:creationId xmlns:a16="http://schemas.microsoft.com/office/drawing/2014/main" id="{AD5826C5-DF40-41D3-B2DF-0F455F0457CC}"/>
               </a:ext>
             </a:extLst>
           </p:cNvPr>
@@ -6284,7 +6284,7 @@
           <p:cNvPr id="67" name="">
             <a:extLst xmlns:a="http://schemas.openxmlformats.org/drawingml/2006/main">
               <a:ext uri="{FF2B5EF4-FFF2-40B4-BE49-F238E27FC236}">
-                <a16:creationId xmlns:a16="http://schemas.microsoft.com/office/drawing/2014/main" id="{0CD2FF42-F334-456A-A73D-E50733F57A72}"/>
+                <a16:creationId xmlns:a16="http://schemas.microsoft.com/office/drawing/2014/main" id="{98E9E69B-AE63-453D-8B7B-EFD70E93E19F}"/>
               </a:ext>
             </a:extLst>
           </p:cNvPr>
@@ -6319,7 +6319,7 @@
           <p:cNvPr id="68" name="">
             <a:extLst xmlns:a="http://schemas.openxmlformats.org/drawingml/2006/main">
               <a:ext uri="{FF2B5EF4-FFF2-40B4-BE49-F238E27FC236}">
-                <a16:creationId xmlns:a16="http://schemas.microsoft.com/office/drawing/2014/main" id="{8DE89CF3-1134-4314-A244-543991D8AA47}"/>
+                <a16:creationId xmlns:a16="http://schemas.microsoft.com/office/drawing/2014/main" id="{9474B4A7-FCCB-4918-92DE-7799EB4CEAE3}"/>
               </a:ext>
             </a:extLst>
           </p:cNvPr>
@@ -6411,7 +6411,7 @@
           <p:cNvPr id="69" name="">
             <a:extLst xmlns:a="http://schemas.openxmlformats.org/drawingml/2006/main">
               <a:ext uri="{FF2B5EF4-FFF2-40B4-BE49-F238E27FC236}">
-                <a16:creationId xmlns:a16="http://schemas.microsoft.com/office/drawing/2014/main" id="{41B9A85F-A7E3-4FDB-A64F-E3D5F0F9185E}"/>
+                <a16:creationId xmlns:a16="http://schemas.microsoft.com/office/drawing/2014/main" id="{B74D7E4C-B654-4DBA-803E-95EA439A3AD0}"/>
               </a:ext>
             </a:extLst>
           </p:cNvPr>
@@ -6446,7 +6446,7 @@
           <p:cNvPr id="70" name="">
             <a:extLst xmlns:a="http://schemas.openxmlformats.org/drawingml/2006/main">
               <a:ext uri="{FF2B5EF4-FFF2-40B4-BE49-F238E27FC236}">
-                <a16:creationId xmlns:a16="http://schemas.microsoft.com/office/drawing/2014/main" id="{1A8F85D7-EB0D-4E49-9020-40807EA92EA3}"/>
+                <a16:creationId xmlns:a16="http://schemas.microsoft.com/office/drawing/2014/main" id="{9CED0B12-FC80-4C98-BB4A-26E78EC5BF61}"/>
               </a:ext>
             </a:extLst>
           </p:cNvPr>
@@ -6504,7 +6504,7 @@
           <p:cNvPr id="71" name="">
             <a:extLst xmlns:a="http://schemas.openxmlformats.org/drawingml/2006/main">
               <a:ext uri="{FF2B5EF4-FFF2-40B4-BE49-F238E27FC236}">
-                <a16:creationId xmlns:a16="http://schemas.microsoft.com/office/drawing/2014/main" id="{2719C693-D8D0-463B-925B-3E9EF1E7D3EC}"/>
+                <a16:creationId xmlns:a16="http://schemas.microsoft.com/office/drawing/2014/main" id="{BA1C20B6-F067-48CB-A09A-3D0A9EF3218B}"/>
               </a:ext>
             </a:extLst>
           </p:cNvPr>
@@ -6537,7 +6537,7 @@
           <p:cNvPr id="72" name="">
             <a:extLst xmlns:a="http://schemas.openxmlformats.org/drawingml/2006/main">
               <a:ext uri="{FF2B5EF4-FFF2-40B4-BE49-F238E27FC236}">
-                <a16:creationId xmlns:a16="http://schemas.microsoft.com/office/drawing/2014/main" id="{1F5A6D93-570F-42B5-9066-FE62C1C70D0B}"/>
+                <a16:creationId xmlns:a16="http://schemas.microsoft.com/office/drawing/2014/main" id="{B0CE0168-56BE-494E-B696-50BDC1143C67}"/>
               </a:ext>
             </a:extLst>
           </p:cNvPr>
@@ -6595,7 +6595,7 @@
           <p:cNvPr id="73" name="">
             <a:extLst xmlns:a="http://schemas.openxmlformats.org/drawingml/2006/main">
               <a:ext uri="{FF2B5EF4-FFF2-40B4-BE49-F238E27FC236}">
-                <a16:creationId xmlns:a16="http://schemas.microsoft.com/office/drawing/2014/main" id="{AF7F7B40-0BDC-4B2A-871D-2D71150520C3}"/>
+                <a16:creationId xmlns:a16="http://schemas.microsoft.com/office/drawing/2014/main" id="{6E947271-8BDF-44F3-8BD1-EAD162A82D72}"/>
               </a:ext>
             </a:extLst>
           </p:cNvPr>
@@ -6628,7 +6628,7 @@
           <p:cNvPr id="74" name="">
             <a:extLst xmlns:a="http://schemas.openxmlformats.org/drawingml/2006/main">
               <a:ext uri="{FF2B5EF4-FFF2-40B4-BE49-F238E27FC236}">
-                <a16:creationId xmlns:a16="http://schemas.microsoft.com/office/drawing/2014/main" id="{40C63605-9DC1-4E3E-B96E-060D8F0EB21F}"/>
+                <a16:creationId xmlns:a16="http://schemas.microsoft.com/office/drawing/2014/main" id="{647EF2A3-0A44-4502-95DE-C01DBA948C87}"/>
               </a:ext>
             </a:extLst>
           </p:cNvPr>
@@ -6686,7 +6686,7 @@
           <p:cNvPr id="75" name="">
             <a:extLst xmlns:a="http://schemas.openxmlformats.org/drawingml/2006/main">
               <a:ext uri="{FF2B5EF4-FFF2-40B4-BE49-F238E27FC236}">
-                <a16:creationId xmlns:a16="http://schemas.microsoft.com/office/drawing/2014/main" id="{3B284F23-D7C2-476F-9F16-85202F55365C}"/>
+                <a16:creationId xmlns:a16="http://schemas.microsoft.com/office/drawing/2014/main" id="{4DC98A43-FD52-46E7-8E62-B3C7F5F9D86C}"/>
               </a:ext>
             </a:extLst>
           </p:cNvPr>
@@ -6719,7 +6719,7 @@
           <p:cNvPr id="76" name="">
             <a:extLst xmlns:a="http://schemas.openxmlformats.org/drawingml/2006/main">
               <a:ext uri="{FF2B5EF4-FFF2-40B4-BE49-F238E27FC236}">
-                <a16:creationId xmlns:a16="http://schemas.microsoft.com/office/drawing/2014/main" id="{00437FA0-6133-4F72-8F1F-7629A64DC8EB}"/>
+                <a16:creationId xmlns:a16="http://schemas.microsoft.com/office/drawing/2014/main" id="{77068204-77C0-4D51-8791-797D99E86703}"/>
               </a:ext>
             </a:extLst>
           </p:cNvPr>
@@ -6777,7 +6777,7 @@
           <p:cNvPr id="77" name="">
             <a:extLst xmlns:a="http://schemas.openxmlformats.org/drawingml/2006/main">
               <a:ext uri="{FF2B5EF4-FFF2-40B4-BE49-F238E27FC236}">
-                <a16:creationId xmlns:a16="http://schemas.microsoft.com/office/drawing/2014/main" id="{18FA3EF6-AED2-4AA3-8DB9-F0D254A73C31}"/>
+                <a16:creationId xmlns:a16="http://schemas.microsoft.com/office/drawing/2014/main" id="{35EE3CE6-D3FF-4AEC-8ABA-9175114F99A8}"/>
               </a:ext>
             </a:extLst>
           </p:cNvPr>
@@ -6810,7 +6810,7 @@
           <p:cNvPr id="78" name="">
             <a:extLst xmlns:a="http://schemas.openxmlformats.org/drawingml/2006/main">
               <a:ext uri="{FF2B5EF4-FFF2-40B4-BE49-F238E27FC236}">
-                <a16:creationId xmlns:a16="http://schemas.microsoft.com/office/drawing/2014/main" id="{DA4F6D43-E95A-4941-8717-02D5EE505696}"/>
+                <a16:creationId xmlns:a16="http://schemas.microsoft.com/office/drawing/2014/main" id="{F2F96DCC-0462-4998-9E83-285EC473B58E}"/>
               </a:ext>
             </a:extLst>
           </p:cNvPr>
@@ -6868,7 +6868,7 @@
           <p:cNvPr id="79" name="">
             <a:extLst xmlns:a="http://schemas.openxmlformats.org/drawingml/2006/main">
               <a:ext uri="{FF2B5EF4-FFF2-40B4-BE49-F238E27FC236}">
-                <a16:creationId xmlns:a16="http://schemas.microsoft.com/office/drawing/2014/main" id="{61870DD2-05DE-4AA8-BAB6-672697C23423}"/>
+                <a16:creationId xmlns:a16="http://schemas.microsoft.com/office/drawing/2014/main" id="{8BAA20FB-1B04-4106-A173-D902554D8DCA}"/>
               </a:ext>
             </a:extLst>
           </p:cNvPr>
@@ -6901,7 +6901,7 @@
           <p:cNvPr id="80" name="">
             <a:extLst xmlns:a="http://schemas.openxmlformats.org/drawingml/2006/main">
               <a:ext uri="{FF2B5EF4-FFF2-40B4-BE49-F238E27FC236}">
-                <a16:creationId xmlns:a16="http://schemas.microsoft.com/office/drawing/2014/main" id="{2E6A9949-98A7-491D-B5CD-E95D0C2DD15B}"/>
+                <a16:creationId xmlns:a16="http://schemas.microsoft.com/office/drawing/2014/main" id="{F9C7058B-50CC-44E9-AAAA-608E6F92DA8F}"/>
               </a:ext>
             </a:extLst>
           </p:cNvPr>
@@ -6959,7 +6959,7 @@
           <p:cNvPr id="81" name="">
             <a:extLst xmlns:a="http://schemas.openxmlformats.org/drawingml/2006/main">
               <a:ext uri="{FF2B5EF4-FFF2-40B4-BE49-F238E27FC236}">
-                <a16:creationId xmlns:a16="http://schemas.microsoft.com/office/drawing/2014/main" id="{2A8BC8B3-4F19-469D-99F5-38A7248CCEE8}"/>
+                <a16:creationId xmlns:a16="http://schemas.microsoft.com/office/drawing/2014/main" id="{45ED1BC5-5FA9-47CB-8A24-855E8B08E8C6}"/>
               </a:ext>
             </a:extLst>
           </p:cNvPr>
@@ -6992,7 +6992,7 @@
           <p:cNvPr id="82" name="">
             <a:extLst xmlns:a="http://schemas.openxmlformats.org/drawingml/2006/main">
               <a:ext uri="{FF2B5EF4-FFF2-40B4-BE49-F238E27FC236}">
-                <a16:creationId xmlns:a16="http://schemas.microsoft.com/office/drawing/2014/main" id="{8831054A-C296-46AF-B175-6EFCEA151E7C}"/>
+                <a16:creationId xmlns:a16="http://schemas.microsoft.com/office/drawing/2014/main" id="{9B0DD272-49BF-4614-B00B-D83265524B3B}"/>
               </a:ext>
             </a:extLst>
           </p:cNvPr>
@@ -7050,7 +7050,7 @@
           <p:cNvPr id="83" name="">
             <a:extLst xmlns:a="http://schemas.openxmlformats.org/drawingml/2006/main">
               <a:ext uri="{FF2B5EF4-FFF2-40B4-BE49-F238E27FC236}">
-                <a16:creationId xmlns:a16="http://schemas.microsoft.com/office/drawing/2014/main" id="{361712BF-92AD-4A02-A58F-73BAF1B68A7B}"/>
+                <a16:creationId xmlns:a16="http://schemas.microsoft.com/office/drawing/2014/main" id="{87D28891-DAB9-4D53-9DAA-0109BDDCBEDD}"/>
               </a:ext>
             </a:extLst>
           </p:cNvPr>
@@ -7083,7 +7083,7 @@
           <p:cNvPr id="84" name="">
             <a:extLst xmlns:a="http://schemas.openxmlformats.org/drawingml/2006/main">
               <a:ext uri="{FF2B5EF4-FFF2-40B4-BE49-F238E27FC236}">
-                <a16:creationId xmlns:a16="http://schemas.microsoft.com/office/drawing/2014/main" id="{C785B7EE-AC4F-4FD5-B9BE-E18D6C382F3C}"/>
+                <a16:creationId xmlns:a16="http://schemas.microsoft.com/office/drawing/2014/main" id="{F72D17C0-25B3-44F0-B6E5-C659AB5D7E9A}"/>
               </a:ext>
             </a:extLst>
           </p:cNvPr>
@@ -7141,7 +7141,7 @@
           <p:cNvPr id="85" name="">
             <a:extLst xmlns:a="http://schemas.openxmlformats.org/drawingml/2006/main">
               <a:ext uri="{FF2B5EF4-FFF2-40B4-BE49-F238E27FC236}">
-                <a16:creationId xmlns:a16="http://schemas.microsoft.com/office/drawing/2014/main" id="{01007240-923E-42AE-8DEF-093680B97FC5}"/>
+                <a16:creationId xmlns:a16="http://schemas.microsoft.com/office/drawing/2014/main" id="{58950FD3-14E0-47AF-ADF6-B3B849FF8DF2}"/>
               </a:ext>
             </a:extLst>
           </p:cNvPr>
@@ -7197,7 +7197,7 @@
     </p:spTree>
     <p:extLst>
       <p:ext uri="{BB962C8B-B14F-4D97-AF65-F5344CB8AC3E}">
-        <p14:creationId xmlns:p14="http://schemas.microsoft.com/office/powerpoint/2010/main" val="1293042121"/>
+        <p14:creationId xmlns:p14="http://schemas.microsoft.com/office/powerpoint/2010/main" val="1854132457"/>
       </p:ext>
     </p:extLst>
   </p:cSld>
@@ -7228,7 +7228,7 @@
           <p:cNvPr id="1" name="">
             <a:extLst xmlns:a="http://schemas.openxmlformats.org/drawingml/2006/main">
               <a:ext uri="{FF2B5EF4-FFF2-40B4-BE49-F238E27FC236}">
-                <a16:creationId xmlns:a16="http://schemas.microsoft.com/office/drawing/2014/main" id="{F9C38E45-A063-45CF-A286-2F645AA48FD2}"/>
+                <a16:creationId xmlns:a16="http://schemas.microsoft.com/office/drawing/2014/main" id="{9B21418D-8775-46E9-B214-D87735B7B6F0}"/>
               </a:ext>
             </a:extLst>
           </p:cNvPr>
@@ -7263,7 +7263,7 @@
           <p:cNvPr id="2" name="">
             <a:extLst xmlns:a="http://schemas.openxmlformats.org/drawingml/2006/main">
               <a:ext uri="{FF2B5EF4-FFF2-40B4-BE49-F238E27FC236}">
-                <a16:creationId xmlns:a16="http://schemas.microsoft.com/office/drawing/2014/main" id="{034ED923-F372-4CA7-B26C-40841869D7A1}"/>
+                <a16:creationId xmlns:a16="http://schemas.microsoft.com/office/drawing/2014/main" id="{FE55FB57-B56A-4B83-A472-B09AFA062DF4}"/>
               </a:ext>
             </a:extLst>
           </p:cNvPr>
@@ -7298,7 +7298,7 @@
           <p:cNvPr id="3" name="">
             <a:extLst xmlns:a="http://schemas.openxmlformats.org/drawingml/2006/main">
               <a:ext uri="{FF2B5EF4-FFF2-40B4-BE49-F238E27FC236}">
-                <a16:creationId xmlns:a16="http://schemas.microsoft.com/office/drawing/2014/main" id="{F30ACBAB-65F1-4917-AFCF-480C74FE0746}"/>
+                <a16:creationId xmlns:a16="http://schemas.microsoft.com/office/drawing/2014/main" id="{89503C42-FA05-43C2-94A9-9B19478522B9}"/>
               </a:ext>
             </a:extLst>
           </p:cNvPr>
@@ -7356,7 +7356,7 @@
           <p:cNvPr id="4" name="">
             <a:extLst xmlns:a="http://schemas.openxmlformats.org/drawingml/2006/main">
               <a:ext uri="{FF2B5EF4-FFF2-40B4-BE49-F238E27FC236}">
-                <a16:creationId xmlns:a16="http://schemas.microsoft.com/office/drawing/2014/main" id="{C55D553E-A138-4BD6-B209-F4F7CD8B2452}"/>
+                <a16:creationId xmlns:a16="http://schemas.microsoft.com/office/drawing/2014/main" id="{7493DE88-3CE6-4D8C-AFE5-94951EA70D49}"/>
               </a:ext>
             </a:extLst>
           </p:cNvPr>
@@ -7414,7 +7414,7 @@
           <p:cNvPr id="5" name="">
             <a:extLst xmlns:a="http://schemas.openxmlformats.org/drawingml/2006/main">
               <a:ext uri="{FF2B5EF4-FFF2-40B4-BE49-F238E27FC236}">
-                <a16:creationId xmlns:a16="http://schemas.microsoft.com/office/drawing/2014/main" id="{B73C0302-0145-49B3-A1BC-6847F9461F7B}"/>
+                <a16:creationId xmlns:a16="http://schemas.microsoft.com/office/drawing/2014/main" id="{E91AB135-FD8F-480C-8473-BF69D5475461}"/>
               </a:ext>
             </a:extLst>
           </p:cNvPr>
@@ -7449,7 +7449,7 @@
           <p:cNvPr id="6" name="">
             <a:extLst xmlns:a="http://schemas.openxmlformats.org/drawingml/2006/main">
               <a:ext uri="{FF2B5EF4-FFF2-40B4-BE49-F238E27FC236}">
-                <a16:creationId xmlns:a16="http://schemas.microsoft.com/office/drawing/2014/main" id="{1EA1A96F-6371-4EBC-97AD-AE7170C4EB92}"/>
+                <a16:creationId xmlns:a16="http://schemas.microsoft.com/office/drawing/2014/main" id="{BA9A6106-DE76-4C54-96A6-D29B7F427818}"/>
               </a:ext>
             </a:extLst>
           </p:cNvPr>
@@ -7507,7 +7507,7 @@
           <p:cNvPr id="7" name="">
             <a:extLst xmlns:a="http://schemas.openxmlformats.org/drawingml/2006/main">
               <a:ext uri="{FF2B5EF4-FFF2-40B4-BE49-F238E27FC236}">
-                <a16:creationId xmlns:a16="http://schemas.microsoft.com/office/drawing/2014/main" id="{21682CD4-7941-4E3E-9ACA-F0C99EA8A745}"/>
+                <a16:creationId xmlns:a16="http://schemas.microsoft.com/office/drawing/2014/main" id="{3DA5996C-0339-4CAA-ADBF-84EDC0862BAE}"/>
               </a:ext>
             </a:extLst>
           </p:cNvPr>
@@ -7565,7 +7565,7 @@
           <p:cNvPr id="8" name="">
             <a:extLst xmlns:a="http://schemas.openxmlformats.org/drawingml/2006/main">
               <a:ext uri="{FF2B5EF4-FFF2-40B4-BE49-F238E27FC236}">
-                <a16:creationId xmlns:a16="http://schemas.microsoft.com/office/drawing/2014/main" id="{B32327ED-416F-4BB4-86E1-4BF010960A47}"/>
+                <a16:creationId xmlns:a16="http://schemas.microsoft.com/office/drawing/2014/main" id="{2358B644-A3DE-4161-A1EB-9535677CA49E}"/>
               </a:ext>
             </a:extLst>
           </p:cNvPr>
@@ -7600,7 +7600,7 @@
           <p:cNvPr id="9" name="">
             <a:extLst xmlns:a="http://schemas.openxmlformats.org/drawingml/2006/main">
               <a:ext uri="{FF2B5EF4-FFF2-40B4-BE49-F238E27FC236}">
-                <a16:creationId xmlns:a16="http://schemas.microsoft.com/office/drawing/2014/main" id="{9BBACA5C-BD2E-4FC4-B2AE-6AA8A96773D4}"/>
+                <a16:creationId xmlns:a16="http://schemas.microsoft.com/office/drawing/2014/main" id="{7B1D0159-A262-41B2-A34F-4FF62249F79B}"/>
               </a:ext>
             </a:extLst>
           </p:cNvPr>
@@ -7635,7 +7635,7 @@
           <p:cNvPr id="10" name="">
             <a:extLst xmlns:a="http://schemas.openxmlformats.org/drawingml/2006/main">
               <a:ext uri="{FF2B5EF4-FFF2-40B4-BE49-F238E27FC236}">
-                <a16:creationId xmlns:a16="http://schemas.microsoft.com/office/drawing/2014/main" id="{091E4028-3FE9-4609-B548-F4AA4584EA15}"/>
+                <a16:creationId xmlns:a16="http://schemas.microsoft.com/office/drawing/2014/main" id="{13A74677-422B-45EC-9A98-C8F17C57C86B}"/>
               </a:ext>
             </a:extLst>
           </p:cNvPr>
@@ -7693,7 +7693,7 @@
           <p:cNvPr id="11" name="">
             <a:extLst xmlns:a="http://schemas.openxmlformats.org/drawingml/2006/main">
               <a:ext uri="{FF2B5EF4-FFF2-40B4-BE49-F238E27FC236}">
-                <a16:creationId xmlns:a16="http://schemas.microsoft.com/office/drawing/2014/main" id="{8E8070BD-DC08-4880-A47C-8CC5460ED4BF}"/>
+                <a16:creationId xmlns:a16="http://schemas.microsoft.com/office/drawing/2014/main" id="{E622AEC4-B02D-455D-8EA8-F7073C32B5C2}"/>
               </a:ext>
             </a:extLst>
           </p:cNvPr>
@@ -7773,7 +7773,7 @@
           <p:cNvPr id="12" name="">
             <a:extLst xmlns:a="http://schemas.openxmlformats.org/drawingml/2006/main">
               <a:ext uri="{FF2B5EF4-FFF2-40B4-BE49-F238E27FC236}">
-                <a16:creationId xmlns:a16="http://schemas.microsoft.com/office/drawing/2014/main" id="{1C9956F4-6522-4F20-9245-5C8EDC1CBEDE}"/>
+                <a16:creationId xmlns:a16="http://schemas.microsoft.com/office/drawing/2014/main" id="{8FFA14BC-6917-4E43-954C-6E8870169A81}"/>
               </a:ext>
             </a:extLst>
           </p:cNvPr>
@@ -7808,7 +7808,7 @@
           <p:cNvPr id="13" name="">
             <a:extLst xmlns:a="http://schemas.openxmlformats.org/drawingml/2006/main">
               <a:ext uri="{FF2B5EF4-FFF2-40B4-BE49-F238E27FC236}">
-                <a16:creationId xmlns:a16="http://schemas.microsoft.com/office/drawing/2014/main" id="{CFD8C614-F772-4EA8-A17B-1780BCFCD4A2}"/>
+                <a16:creationId xmlns:a16="http://schemas.microsoft.com/office/drawing/2014/main" id="{A225729A-AB6F-4CCC-9695-812A69D9E922}"/>
               </a:ext>
             </a:extLst>
           </p:cNvPr>
@@ -7843,7 +7843,7 @@
           <p:cNvPr id="14" name="">
             <a:extLst xmlns:a="http://schemas.openxmlformats.org/drawingml/2006/main">
               <a:ext uri="{FF2B5EF4-FFF2-40B4-BE49-F238E27FC236}">
-                <a16:creationId xmlns:a16="http://schemas.microsoft.com/office/drawing/2014/main" id="{DC013751-EF8E-4EBA-80D5-F757CF6A636F}"/>
+                <a16:creationId xmlns:a16="http://schemas.microsoft.com/office/drawing/2014/main" id="{C9CBB52B-08C7-49F8-926A-BD71E7023215}"/>
               </a:ext>
             </a:extLst>
           </p:cNvPr>
@@ -7901,7 +7901,7 @@
           <p:cNvPr id="15" name="">
             <a:extLst xmlns:a="http://schemas.openxmlformats.org/drawingml/2006/main">
               <a:ext uri="{FF2B5EF4-FFF2-40B4-BE49-F238E27FC236}">
-                <a16:creationId xmlns:a16="http://schemas.microsoft.com/office/drawing/2014/main" id="{13030FC8-4DA8-432B-8DA7-099F460D1B7F}"/>
+                <a16:creationId xmlns:a16="http://schemas.microsoft.com/office/drawing/2014/main" id="{31A8289F-18EB-46E5-B2F6-FB10D7C8CD51}"/>
               </a:ext>
             </a:extLst>
           </p:cNvPr>
@@ -8015,7 +8015,7 @@
           <p:cNvPr id="16" name="">
             <a:extLst xmlns:a="http://schemas.openxmlformats.org/drawingml/2006/main">
               <a:ext uri="{FF2B5EF4-FFF2-40B4-BE49-F238E27FC236}">
-                <a16:creationId xmlns:a16="http://schemas.microsoft.com/office/drawing/2014/main" id="{307B6D11-C847-406A-859C-77C9B4619D95}"/>
+                <a16:creationId xmlns:a16="http://schemas.microsoft.com/office/drawing/2014/main" id="{B01A9F16-B7AD-4EF6-9A6B-51804007C60D}"/>
               </a:ext>
             </a:extLst>
           </p:cNvPr>
@@ -8050,7 +8050,7 @@
           <p:cNvPr id="17" name="">
             <a:extLst xmlns:a="http://schemas.openxmlformats.org/drawingml/2006/main">
               <a:ext uri="{FF2B5EF4-FFF2-40B4-BE49-F238E27FC236}">
-                <a16:creationId xmlns:a16="http://schemas.microsoft.com/office/drawing/2014/main" id="{65685334-5184-467D-A330-0EE3E6D8EE97}"/>
+                <a16:creationId xmlns:a16="http://schemas.microsoft.com/office/drawing/2014/main" id="{5A5A47A2-BAF3-40DA-831D-74FCA4A5E20A}"/>
               </a:ext>
             </a:extLst>
           </p:cNvPr>
@@ -8085,7 +8085,7 @@
           <p:cNvPr id="18" name="">
             <a:extLst xmlns:a="http://schemas.openxmlformats.org/drawingml/2006/main">
               <a:ext uri="{FF2B5EF4-FFF2-40B4-BE49-F238E27FC236}">
-                <a16:creationId xmlns:a16="http://schemas.microsoft.com/office/drawing/2014/main" id="{BC061F29-D187-48D0-AF66-FAB8B75232B5}"/>
+                <a16:creationId xmlns:a16="http://schemas.microsoft.com/office/drawing/2014/main" id="{914E18F6-0264-4F6F-AB9C-0A34A496E809}"/>
               </a:ext>
             </a:extLst>
           </p:cNvPr>
@@ -8143,7 +8143,7 @@
           <p:cNvPr id="19" name="">
             <a:extLst xmlns:a="http://schemas.openxmlformats.org/drawingml/2006/main">
               <a:ext uri="{FF2B5EF4-FFF2-40B4-BE49-F238E27FC236}">
-                <a16:creationId xmlns:a16="http://schemas.microsoft.com/office/drawing/2014/main" id="{18CFD846-40DC-4481-8154-3E5431177F40}"/>
+                <a16:creationId xmlns:a16="http://schemas.microsoft.com/office/drawing/2014/main" id="{E6E45B35-40CA-427D-B973-CC27AD9DA4B7}"/>
               </a:ext>
             </a:extLst>
           </p:cNvPr>
@@ -8252,7 +8252,7 @@
           <p:cNvPr id="20" name="">
             <a:extLst xmlns:a="http://schemas.openxmlformats.org/drawingml/2006/main">
               <a:ext uri="{FF2B5EF4-FFF2-40B4-BE49-F238E27FC236}">
-                <a16:creationId xmlns:a16="http://schemas.microsoft.com/office/drawing/2014/main" id="{A878A12C-E67A-45FF-AB41-836C4A9F3B15}"/>
+                <a16:creationId xmlns:a16="http://schemas.microsoft.com/office/drawing/2014/main" id="{F112E53B-08E4-4EE2-ADFF-25636A73DCBD}"/>
               </a:ext>
             </a:extLst>
           </p:cNvPr>
@@ -8287,7 +8287,7 @@
           <p:cNvPr id="21" name="">
             <a:extLst xmlns:a="http://schemas.openxmlformats.org/drawingml/2006/main">
               <a:ext uri="{FF2B5EF4-FFF2-40B4-BE49-F238E27FC236}">
-                <a16:creationId xmlns:a16="http://schemas.microsoft.com/office/drawing/2014/main" id="{B4B08118-DD57-4086-AB76-D53D50A9545E}"/>
+                <a16:creationId xmlns:a16="http://schemas.microsoft.com/office/drawing/2014/main" id="{93F142E7-D013-4583-973F-12A9F2FE341D}"/>
               </a:ext>
             </a:extLst>
           </p:cNvPr>
@@ -8345,7 +8345,7 @@
           <p:cNvPr id="22" name="">
             <a:extLst xmlns:a="http://schemas.openxmlformats.org/drawingml/2006/main">
               <a:ext uri="{FF2B5EF4-FFF2-40B4-BE49-F238E27FC236}">
-                <a16:creationId xmlns:a16="http://schemas.microsoft.com/office/drawing/2014/main" id="{EBB3119D-F72A-48A0-872A-48A5AF160F83}"/>
+                <a16:creationId xmlns:a16="http://schemas.microsoft.com/office/drawing/2014/main" id="{18799C67-BEB8-4CF3-B3F1-8B6423E0A16E}"/>
               </a:ext>
             </a:extLst>
           </p:cNvPr>
@@ -8378,7 +8378,7 @@
           <p:cNvPr id="23" name="">
             <a:extLst xmlns:a="http://schemas.openxmlformats.org/drawingml/2006/main">
               <a:ext uri="{FF2B5EF4-FFF2-40B4-BE49-F238E27FC236}">
-                <a16:creationId xmlns:a16="http://schemas.microsoft.com/office/drawing/2014/main" id="{8E895AA7-4A63-4B9E-A8C4-1972627BFC13}"/>
+                <a16:creationId xmlns:a16="http://schemas.microsoft.com/office/drawing/2014/main" id="{5A949F0D-292B-4F6B-9DBA-1CB0AF62C71F}"/>
               </a:ext>
             </a:extLst>
           </p:cNvPr>
@@ -8413,7 +8413,7 @@
           <p:cNvPr id="24" name="">
             <a:extLst xmlns:a="http://schemas.openxmlformats.org/drawingml/2006/main">
               <a:ext uri="{FF2B5EF4-FFF2-40B4-BE49-F238E27FC236}">
-                <a16:creationId xmlns:a16="http://schemas.microsoft.com/office/drawing/2014/main" id="{0F879C00-1A70-4EE2-95D0-D3C80BADDC78}"/>
+                <a16:creationId xmlns:a16="http://schemas.microsoft.com/office/drawing/2014/main" id="{56B8A818-DB1F-464F-8F87-ACB61421E1A0}"/>
               </a:ext>
             </a:extLst>
           </p:cNvPr>
@@ -8471,7 +8471,7 @@
           <p:cNvPr id="25" name="">
             <a:extLst xmlns:a="http://schemas.openxmlformats.org/drawingml/2006/main">
               <a:ext uri="{FF2B5EF4-FFF2-40B4-BE49-F238E27FC236}">
-                <a16:creationId xmlns:a16="http://schemas.microsoft.com/office/drawing/2014/main" id="{BDCD955C-783E-4DF6-B9F9-370CD07E1FE0}"/>
+                <a16:creationId xmlns:a16="http://schemas.microsoft.com/office/drawing/2014/main" id="{8DE2BE2D-E3B4-4FC8-AE7B-93C6841C1A21}"/>
               </a:ext>
             </a:extLst>
           </p:cNvPr>
@@ -8506,7 +8506,7 @@
           <p:cNvPr id="26" name="">
             <a:extLst xmlns:a="http://schemas.openxmlformats.org/drawingml/2006/main">
               <a:ext uri="{FF2B5EF4-FFF2-40B4-BE49-F238E27FC236}">
-                <a16:creationId xmlns:a16="http://schemas.microsoft.com/office/drawing/2014/main" id="{9951525E-3F72-447A-90C1-2BD363ADBB96}"/>
+                <a16:creationId xmlns:a16="http://schemas.microsoft.com/office/drawing/2014/main" id="{3495982F-EB64-480F-AED4-EC4BFBF2290E}"/>
               </a:ext>
             </a:extLst>
           </p:cNvPr>
@@ -8564,7 +8564,7 @@
           <p:cNvPr id="27" name="">
             <a:extLst xmlns:a="http://schemas.openxmlformats.org/drawingml/2006/main">
               <a:ext uri="{FF2B5EF4-FFF2-40B4-BE49-F238E27FC236}">
-                <a16:creationId xmlns:a16="http://schemas.microsoft.com/office/drawing/2014/main" id="{C4ECD1C5-2D93-4B41-8683-88665F76F73D}"/>
+                <a16:creationId xmlns:a16="http://schemas.microsoft.com/office/drawing/2014/main" id="{4C5A41E2-ECD4-4BA5-A282-EEC38B8A61F8}"/>
               </a:ext>
             </a:extLst>
           </p:cNvPr>
@@ -8620,7 +8620,7 @@
     </p:spTree>
     <p:extLst>
       <p:ext uri="{BB962C8B-B14F-4D97-AF65-F5344CB8AC3E}">
-        <p14:creationId xmlns:p14="http://schemas.microsoft.com/office/powerpoint/2010/main" val="559135732"/>
+        <p14:creationId xmlns:p14="http://schemas.microsoft.com/office/powerpoint/2010/main" val="2082472661"/>
       </p:ext>
     </p:extLst>
   </p:cSld>
@@ -8651,7 +8651,7 @@
           <p:cNvPr id="1" name="">
             <a:extLst xmlns:a="http://schemas.openxmlformats.org/drawingml/2006/main">
               <a:ext uri="{FF2B5EF4-FFF2-40B4-BE49-F238E27FC236}">
-                <a16:creationId xmlns:a16="http://schemas.microsoft.com/office/drawing/2014/main" id="{313BEFF7-4FCF-48CF-B2D4-4E0E20623AF1}"/>
+                <a16:creationId xmlns:a16="http://schemas.microsoft.com/office/drawing/2014/main" id="{D9EEAC5A-0CBF-46B8-B893-88DD6C454EAE}"/>
               </a:ext>
             </a:extLst>
           </p:cNvPr>
@@ -8686,7 +8686,7 @@
           <p:cNvPr id="2" name="">
             <a:extLst xmlns:a="http://schemas.openxmlformats.org/drawingml/2006/main">
               <a:ext uri="{FF2B5EF4-FFF2-40B4-BE49-F238E27FC236}">
-                <a16:creationId xmlns:a16="http://schemas.microsoft.com/office/drawing/2014/main" id="{1F56007C-4563-4B63-962B-EFEB7EC4857B}"/>
+                <a16:creationId xmlns:a16="http://schemas.microsoft.com/office/drawing/2014/main" id="{092B2F6A-ACAC-473F-B4FF-DDA33BB4F048}"/>
               </a:ext>
             </a:extLst>
           </p:cNvPr>
@@ -8721,7 +8721,7 @@
           <p:cNvPr id="3" name="">
             <a:extLst xmlns:a="http://schemas.openxmlformats.org/drawingml/2006/main">
               <a:ext uri="{FF2B5EF4-FFF2-40B4-BE49-F238E27FC236}">
-                <a16:creationId xmlns:a16="http://schemas.microsoft.com/office/drawing/2014/main" id="{D28F5A1E-7963-4F24-9643-620389E99F8F}"/>
+                <a16:creationId xmlns:a16="http://schemas.microsoft.com/office/drawing/2014/main" id="{87E35D70-635B-4AE7-B6FB-4E9377DC4FCE}"/>
               </a:ext>
             </a:extLst>
           </p:cNvPr>
@@ -8779,7 +8779,7 @@
           <p:cNvPr id="4" name="">
             <a:extLst xmlns:a="http://schemas.openxmlformats.org/drawingml/2006/main">
               <a:ext uri="{FF2B5EF4-FFF2-40B4-BE49-F238E27FC236}">
-                <a16:creationId xmlns:a16="http://schemas.microsoft.com/office/drawing/2014/main" id="{4D22E98A-F37A-40E3-97F2-28B98C9BD667}"/>
+                <a16:creationId xmlns:a16="http://schemas.microsoft.com/office/drawing/2014/main" id="{742A944D-B1F4-4CC0-8405-2DFEC980B3FF}"/>
               </a:ext>
             </a:extLst>
           </p:cNvPr>
@@ -8837,7 +8837,7 @@
           <p:cNvPr id="5" name="">
             <a:extLst xmlns:a="http://schemas.openxmlformats.org/drawingml/2006/main">
               <a:ext uri="{FF2B5EF4-FFF2-40B4-BE49-F238E27FC236}">
-                <a16:creationId xmlns:a16="http://schemas.microsoft.com/office/drawing/2014/main" id="{0E0E27A3-3AF5-4E1F-97AB-8AA31A4F3521}"/>
+                <a16:creationId xmlns:a16="http://schemas.microsoft.com/office/drawing/2014/main" id="{2ABC65D1-B35B-4393-AA31-B1B00572C7B4}"/>
               </a:ext>
             </a:extLst>
           </p:cNvPr>
@@ -8872,7 +8872,7 @@
           <p:cNvPr id="6" name="">
             <a:extLst xmlns:a="http://schemas.openxmlformats.org/drawingml/2006/main">
               <a:ext uri="{FF2B5EF4-FFF2-40B4-BE49-F238E27FC236}">
-                <a16:creationId xmlns:a16="http://schemas.microsoft.com/office/drawing/2014/main" id="{1E1B03FA-8318-449F-A6F4-A1836108C631}"/>
+                <a16:creationId xmlns:a16="http://schemas.microsoft.com/office/drawing/2014/main" id="{DB95E3A7-0B36-4E57-B4AF-DCB2F0A7917B}"/>
               </a:ext>
             </a:extLst>
           </p:cNvPr>
@@ -8930,7 +8930,7 @@
           <p:cNvPr id="7" name="">
             <a:extLst xmlns:a="http://schemas.openxmlformats.org/drawingml/2006/main">
               <a:ext uri="{FF2B5EF4-FFF2-40B4-BE49-F238E27FC236}">
-                <a16:creationId xmlns:a16="http://schemas.microsoft.com/office/drawing/2014/main" id="{73E539BA-09F8-4ACA-BB63-56616AAB19E4}"/>
+                <a16:creationId xmlns:a16="http://schemas.microsoft.com/office/drawing/2014/main" id="{6F7F23F8-DD43-40BA-A8E5-670C2E7B032E}"/>
               </a:ext>
             </a:extLst>
           </p:cNvPr>
@@ -8988,7 +8988,7 @@
           <p:cNvPr id="8" name="">
             <a:extLst xmlns:a="http://schemas.openxmlformats.org/drawingml/2006/main">
               <a:ext uri="{FF2B5EF4-FFF2-40B4-BE49-F238E27FC236}">
-                <a16:creationId xmlns:a16="http://schemas.microsoft.com/office/drawing/2014/main" id="{BFABE04A-B042-46F6-AEDF-8171F6D7442D}"/>
+                <a16:creationId xmlns:a16="http://schemas.microsoft.com/office/drawing/2014/main" id="{3CB2D097-0856-413C-ABAA-0933D7F70323}"/>
               </a:ext>
             </a:extLst>
           </p:cNvPr>
@@ -9023,7 +9023,7 @@
           <p:cNvPr id="9" name="">
             <a:extLst xmlns:a="http://schemas.openxmlformats.org/drawingml/2006/main">
               <a:ext uri="{FF2B5EF4-FFF2-40B4-BE49-F238E27FC236}">
-                <a16:creationId xmlns:a16="http://schemas.microsoft.com/office/drawing/2014/main" id="{59C9078B-2088-4B99-9195-76B2877A5262}"/>
+                <a16:creationId xmlns:a16="http://schemas.microsoft.com/office/drawing/2014/main" id="{400F716C-8109-4199-9311-05BD63FB1E1E}"/>
               </a:ext>
             </a:extLst>
           </p:cNvPr>
@@ -9058,7 +9058,7 @@
           <p:cNvPr id="10" name="">
             <a:extLst xmlns:a="http://schemas.openxmlformats.org/drawingml/2006/main">
               <a:ext uri="{FF2B5EF4-FFF2-40B4-BE49-F238E27FC236}">
-                <a16:creationId xmlns:a16="http://schemas.microsoft.com/office/drawing/2014/main" id="{29903355-1F3C-43BA-B7D9-9EB7B1B738F8}"/>
+                <a16:creationId xmlns:a16="http://schemas.microsoft.com/office/drawing/2014/main" id="{E814CE1B-59FF-4B48-933B-DDC8791E0AF4}"/>
               </a:ext>
             </a:extLst>
           </p:cNvPr>
@@ -9116,7 +9116,7 @@
           <p:cNvPr id="11" name="">
             <a:extLst xmlns:a="http://schemas.openxmlformats.org/drawingml/2006/main">
               <a:ext uri="{FF2B5EF4-FFF2-40B4-BE49-F238E27FC236}">
-                <a16:creationId xmlns:a16="http://schemas.microsoft.com/office/drawing/2014/main" id="{620B8658-8CFF-4E30-B3DD-2E436B8A7D79}"/>
+                <a16:creationId xmlns:a16="http://schemas.microsoft.com/office/drawing/2014/main" id="{DC035B2D-54DC-4071-9238-3B243CFAD058}"/>
               </a:ext>
             </a:extLst>
           </p:cNvPr>
@@ -9196,7 +9196,7 @@
           <p:cNvPr id="12" name="">
             <a:extLst xmlns:a="http://schemas.openxmlformats.org/drawingml/2006/main">
               <a:ext uri="{FF2B5EF4-FFF2-40B4-BE49-F238E27FC236}">
-                <a16:creationId xmlns:a16="http://schemas.microsoft.com/office/drawing/2014/main" id="{8F8BB681-E874-44CC-9C9A-82FBF0C1B10A}"/>
+                <a16:creationId xmlns:a16="http://schemas.microsoft.com/office/drawing/2014/main" id="{E0E2A931-F0C9-404C-9E8B-EE1CD888CEA7}"/>
               </a:ext>
             </a:extLst>
           </p:cNvPr>
@@ -9231,7 +9231,7 @@
           <p:cNvPr id="13" name="">
             <a:extLst xmlns:a="http://schemas.openxmlformats.org/drawingml/2006/main">
               <a:ext uri="{FF2B5EF4-FFF2-40B4-BE49-F238E27FC236}">
-                <a16:creationId xmlns:a16="http://schemas.microsoft.com/office/drawing/2014/main" id="{A65D42B4-5D33-4E4A-AD6D-66D8531D7064}"/>
+                <a16:creationId xmlns:a16="http://schemas.microsoft.com/office/drawing/2014/main" id="{29067122-85A4-4E69-A071-A8E013049AD0}"/>
               </a:ext>
             </a:extLst>
           </p:cNvPr>
@@ -9266,7 +9266,7 @@
           <p:cNvPr id="14" name="">
             <a:extLst xmlns:a="http://schemas.openxmlformats.org/drawingml/2006/main">
               <a:ext uri="{FF2B5EF4-FFF2-40B4-BE49-F238E27FC236}">
-                <a16:creationId xmlns:a16="http://schemas.microsoft.com/office/drawing/2014/main" id="{66CA31C3-D9C4-4AAF-9B33-A63EA7F6D559}"/>
+                <a16:creationId xmlns:a16="http://schemas.microsoft.com/office/drawing/2014/main" id="{B147D220-8984-4563-9D98-AB18C29A4905}"/>
               </a:ext>
             </a:extLst>
           </p:cNvPr>
@@ -9324,7 +9324,7 @@
           <p:cNvPr id="15" name="">
             <a:extLst xmlns:a="http://schemas.openxmlformats.org/drawingml/2006/main">
               <a:ext uri="{FF2B5EF4-FFF2-40B4-BE49-F238E27FC236}">
-                <a16:creationId xmlns:a16="http://schemas.microsoft.com/office/drawing/2014/main" id="{6B0338E6-A3ED-4AB3-8B43-98945153D622}"/>
+                <a16:creationId xmlns:a16="http://schemas.microsoft.com/office/drawing/2014/main" id="{1BE01AE5-A9A6-4753-8B61-FC59823770BB}"/>
               </a:ext>
             </a:extLst>
           </p:cNvPr>
@@ -9443,7 +9443,7 @@
           <p:cNvPr id="16" name="">
             <a:extLst xmlns:a="http://schemas.openxmlformats.org/drawingml/2006/main">
               <a:ext uri="{FF2B5EF4-FFF2-40B4-BE49-F238E27FC236}">
-                <a16:creationId xmlns:a16="http://schemas.microsoft.com/office/drawing/2014/main" id="{0D25F979-D18B-47FA-881D-962BBAACCDA7}"/>
+                <a16:creationId xmlns:a16="http://schemas.microsoft.com/office/drawing/2014/main" id="{35E52E3B-AF35-4DF3-BA9B-CB2C6D8F9997}"/>
               </a:ext>
             </a:extLst>
           </p:cNvPr>
@@ -9478,7 +9478,7 @@
           <p:cNvPr id="17" name="">
             <a:extLst xmlns:a="http://schemas.openxmlformats.org/drawingml/2006/main">
               <a:ext uri="{FF2B5EF4-FFF2-40B4-BE49-F238E27FC236}">
-                <a16:creationId xmlns:a16="http://schemas.microsoft.com/office/drawing/2014/main" id="{F42622DC-05C5-4957-B470-133F063278D5}"/>
+                <a16:creationId xmlns:a16="http://schemas.microsoft.com/office/drawing/2014/main" id="{B23B4F8F-B2A4-4E3A-BC37-3BEF2EEA5B9D}"/>
               </a:ext>
             </a:extLst>
           </p:cNvPr>
@@ -9513,7 +9513,7 @@
           <p:cNvPr id="18" name="">
             <a:extLst xmlns:a="http://schemas.openxmlformats.org/drawingml/2006/main">
               <a:ext uri="{FF2B5EF4-FFF2-40B4-BE49-F238E27FC236}">
-                <a16:creationId xmlns:a16="http://schemas.microsoft.com/office/drawing/2014/main" id="{6E8597A3-5144-428B-BDDF-764121B765EB}"/>
+                <a16:creationId xmlns:a16="http://schemas.microsoft.com/office/drawing/2014/main" id="{17851CFB-ABCD-4B29-9379-C1BFBFA2B108}"/>
               </a:ext>
             </a:extLst>
           </p:cNvPr>
@@ -9571,7 +9571,7 @@
           <p:cNvPr id="19" name="">
             <a:extLst xmlns:a="http://schemas.openxmlformats.org/drawingml/2006/main">
               <a:ext uri="{FF2B5EF4-FFF2-40B4-BE49-F238E27FC236}">
-                <a16:creationId xmlns:a16="http://schemas.microsoft.com/office/drawing/2014/main" id="{58EF8774-F7A8-4348-878C-EE6111441256}"/>
+                <a16:creationId xmlns:a16="http://schemas.microsoft.com/office/drawing/2014/main" id="{EF4B1087-16F3-451E-8E6E-92264AB57BBA}"/>
               </a:ext>
             </a:extLst>
           </p:cNvPr>
@@ -9680,7 +9680,7 @@
           <p:cNvPr id="20" name="">
             <a:extLst xmlns:a="http://schemas.openxmlformats.org/drawingml/2006/main">
               <a:ext uri="{FF2B5EF4-FFF2-40B4-BE49-F238E27FC236}">
-                <a16:creationId xmlns:a16="http://schemas.microsoft.com/office/drawing/2014/main" id="{043CCC53-A793-4F51-8E44-71F3D4D928AA}"/>
+                <a16:creationId xmlns:a16="http://schemas.microsoft.com/office/drawing/2014/main" id="{D8D4FBE6-D3B8-45E7-A3F1-822987FD87BF}"/>
               </a:ext>
             </a:extLst>
           </p:cNvPr>
@@ -9715,7 +9715,7 @@
           <p:cNvPr id="21" name="">
             <a:extLst xmlns:a="http://schemas.openxmlformats.org/drawingml/2006/main">
               <a:ext uri="{FF2B5EF4-FFF2-40B4-BE49-F238E27FC236}">
-                <a16:creationId xmlns:a16="http://schemas.microsoft.com/office/drawing/2014/main" id="{953DC822-9500-4F27-8016-EB3B8785958B}"/>
+                <a16:creationId xmlns:a16="http://schemas.microsoft.com/office/drawing/2014/main" id="{6AA5B1FD-F204-4AFA-B5B7-3158B904DBC5}"/>
               </a:ext>
             </a:extLst>
           </p:cNvPr>
@@ -9773,7 +9773,7 @@
           <p:cNvPr id="22" name="">
             <a:extLst xmlns:a="http://schemas.openxmlformats.org/drawingml/2006/main">
               <a:ext uri="{FF2B5EF4-FFF2-40B4-BE49-F238E27FC236}">
-                <a16:creationId xmlns:a16="http://schemas.microsoft.com/office/drawing/2014/main" id="{DB288ECB-5BD3-4FB1-BD5C-4C072F2A665B}"/>
+                <a16:creationId xmlns:a16="http://schemas.microsoft.com/office/drawing/2014/main" id="{D07C1F75-15CD-45F7-B34B-7D5A4E1BB9B3}"/>
               </a:ext>
             </a:extLst>
           </p:cNvPr>
@@ -9806,7 +9806,7 @@
           <p:cNvPr id="23" name="">
             <a:extLst xmlns:a="http://schemas.openxmlformats.org/drawingml/2006/main">
               <a:ext uri="{FF2B5EF4-FFF2-40B4-BE49-F238E27FC236}">
-                <a16:creationId xmlns:a16="http://schemas.microsoft.com/office/drawing/2014/main" id="{58B461E4-341A-472F-B21C-40263637DAAA}"/>
+                <a16:creationId xmlns:a16="http://schemas.microsoft.com/office/drawing/2014/main" id="{25B2D020-8286-4CA9-BE9C-963E80A80C5B}"/>
               </a:ext>
             </a:extLst>
           </p:cNvPr>
@@ -9841,7 +9841,7 @@
           <p:cNvPr id="24" name="">
             <a:extLst xmlns:a="http://schemas.openxmlformats.org/drawingml/2006/main">
               <a:ext uri="{FF2B5EF4-FFF2-40B4-BE49-F238E27FC236}">
-                <a16:creationId xmlns:a16="http://schemas.microsoft.com/office/drawing/2014/main" id="{E7275861-8014-40CB-8823-B3CC0F191C9F}"/>
+                <a16:creationId xmlns:a16="http://schemas.microsoft.com/office/drawing/2014/main" id="{55987E44-68CE-4733-998E-9CF41D0AC6C8}"/>
               </a:ext>
             </a:extLst>
           </p:cNvPr>
@@ -9899,7 +9899,7 @@
           <p:cNvPr id="25" name="">
             <a:extLst xmlns:a="http://schemas.openxmlformats.org/drawingml/2006/main">
               <a:ext uri="{FF2B5EF4-FFF2-40B4-BE49-F238E27FC236}">
-                <a16:creationId xmlns:a16="http://schemas.microsoft.com/office/drawing/2014/main" id="{471BD88F-58DE-4F00-8C5C-711A923A6FD9}"/>
+                <a16:creationId xmlns:a16="http://schemas.microsoft.com/office/drawing/2014/main" id="{64745C19-56B6-4D80-BD94-FE1350D3BB0D}"/>
               </a:ext>
             </a:extLst>
           </p:cNvPr>
@@ -9932,7 +9932,7 @@
           <p:cNvPr id="26" name="">
             <a:extLst xmlns:a="http://schemas.openxmlformats.org/drawingml/2006/main">
               <a:ext uri="{FF2B5EF4-FFF2-40B4-BE49-F238E27FC236}">
-                <a16:creationId xmlns:a16="http://schemas.microsoft.com/office/drawing/2014/main" id="{8DD876E5-DFD2-41D5-8249-E96DC4176D9E}"/>
+                <a16:creationId xmlns:a16="http://schemas.microsoft.com/office/drawing/2014/main" id="{728E3B49-5F60-4D26-924A-AF0F689B7F6D}"/>
               </a:ext>
             </a:extLst>
           </p:cNvPr>
@@ -9967,7 +9967,7 @@
           <p:cNvPr id="27" name="">
             <a:extLst xmlns:a="http://schemas.openxmlformats.org/drawingml/2006/main">
               <a:ext uri="{FF2B5EF4-FFF2-40B4-BE49-F238E27FC236}">
-                <a16:creationId xmlns:a16="http://schemas.microsoft.com/office/drawing/2014/main" id="{31A3A3F1-D903-41A9-BEDF-312E61247537}"/>
+                <a16:creationId xmlns:a16="http://schemas.microsoft.com/office/drawing/2014/main" id="{13C55250-C90E-4B8A-AEEF-4D60E4F8DE9A}"/>
               </a:ext>
             </a:extLst>
           </p:cNvPr>
@@ -10025,7 +10025,7 @@
           <p:cNvPr id="28" name="">
             <a:extLst xmlns:a="http://schemas.openxmlformats.org/drawingml/2006/main">
               <a:ext uri="{FF2B5EF4-FFF2-40B4-BE49-F238E27FC236}">
-                <a16:creationId xmlns:a16="http://schemas.microsoft.com/office/drawing/2014/main" id="{4DFDBA37-3E7D-4EE2-AF6E-BBFE2B57DEA8}"/>
+                <a16:creationId xmlns:a16="http://schemas.microsoft.com/office/drawing/2014/main" id="{D1A20E00-4173-4F6D-B54E-94B5487B386D}"/>
               </a:ext>
             </a:extLst>
           </p:cNvPr>
@@ -10060,7 +10060,7 @@
           <p:cNvPr id="29" name="">
             <a:extLst xmlns:a="http://schemas.openxmlformats.org/drawingml/2006/main">
               <a:ext uri="{FF2B5EF4-FFF2-40B4-BE49-F238E27FC236}">
-                <a16:creationId xmlns:a16="http://schemas.microsoft.com/office/drawing/2014/main" id="{E87A6408-43B3-433F-9596-53EBAA3F4FCF}"/>
+                <a16:creationId xmlns:a16="http://schemas.microsoft.com/office/drawing/2014/main" id="{23102483-0501-4406-B892-966C81C7A005}"/>
               </a:ext>
             </a:extLst>
           </p:cNvPr>
@@ -10118,7 +10118,7 @@
           <p:cNvPr id="30" name="">
             <a:extLst xmlns:a="http://schemas.openxmlformats.org/drawingml/2006/main">
               <a:ext uri="{FF2B5EF4-FFF2-40B4-BE49-F238E27FC236}">
-                <a16:creationId xmlns:a16="http://schemas.microsoft.com/office/drawing/2014/main" id="{7B7FCA60-C356-44BD-A7B8-2671405B163D}"/>
+                <a16:creationId xmlns:a16="http://schemas.microsoft.com/office/drawing/2014/main" id="{155185A2-0CF9-44D0-B6EA-AB937C51FB22}"/>
               </a:ext>
             </a:extLst>
           </p:cNvPr>
@@ -10174,7 +10174,7 @@
     </p:spTree>
     <p:extLst>
       <p:ext uri="{BB962C8B-B14F-4D97-AF65-F5344CB8AC3E}">
-        <p14:creationId xmlns:p14="http://schemas.microsoft.com/office/powerpoint/2010/main" val="1218315081"/>
+        <p14:creationId xmlns:p14="http://schemas.microsoft.com/office/powerpoint/2010/main" val="1905413061"/>
       </p:ext>
     </p:extLst>
   </p:cSld>
@@ -10205,7 +10205,7 @@
           <p:cNvPr id="1" name="">
             <a:extLst xmlns:a="http://schemas.openxmlformats.org/drawingml/2006/main">
               <a:ext uri="{FF2B5EF4-FFF2-40B4-BE49-F238E27FC236}">
-                <a16:creationId xmlns:a16="http://schemas.microsoft.com/office/drawing/2014/main" id="{36F7909F-D40C-4708-AD54-0113BBBB7028}"/>
+                <a16:creationId xmlns:a16="http://schemas.microsoft.com/office/drawing/2014/main" id="{170D95D5-A6F2-4A37-AAD9-0FD2F8BBB798}"/>
               </a:ext>
             </a:extLst>
           </p:cNvPr>
@@ -10240,7 +10240,7 @@
           <p:cNvPr id="2" name="">
             <a:extLst xmlns:a="http://schemas.openxmlformats.org/drawingml/2006/main">
               <a:ext uri="{FF2B5EF4-FFF2-40B4-BE49-F238E27FC236}">
-                <a16:creationId xmlns:a16="http://schemas.microsoft.com/office/drawing/2014/main" id="{CE051A34-4042-4148-B655-F345A12DB87D}"/>
+                <a16:creationId xmlns:a16="http://schemas.microsoft.com/office/drawing/2014/main" id="{12E73D7F-D26D-4C04-AB43-7BA9B91CC253}"/>
               </a:ext>
             </a:extLst>
           </p:cNvPr>
@@ -10275,7 +10275,7 @@
           <p:cNvPr id="3" name="">
             <a:extLst xmlns:a="http://schemas.openxmlformats.org/drawingml/2006/main">
               <a:ext uri="{FF2B5EF4-FFF2-40B4-BE49-F238E27FC236}">
-                <a16:creationId xmlns:a16="http://schemas.microsoft.com/office/drawing/2014/main" id="{85B8472C-E1A9-43FB-B856-F8041E2325C1}"/>
+                <a16:creationId xmlns:a16="http://schemas.microsoft.com/office/drawing/2014/main" id="{985EE043-411D-4989-9352-4812087CA45B}"/>
               </a:ext>
             </a:extLst>
           </p:cNvPr>
@@ -10333,7 +10333,7 @@
           <p:cNvPr id="4" name="">
             <a:extLst xmlns:a="http://schemas.openxmlformats.org/drawingml/2006/main">
               <a:ext uri="{FF2B5EF4-FFF2-40B4-BE49-F238E27FC236}">
-                <a16:creationId xmlns:a16="http://schemas.microsoft.com/office/drawing/2014/main" id="{B7463942-7C78-478B-80EA-C72FEAD0A4D4}"/>
+                <a16:creationId xmlns:a16="http://schemas.microsoft.com/office/drawing/2014/main" id="{50B616CF-8E16-4E4F-ADA6-98293E61CBE6}"/>
               </a:ext>
             </a:extLst>
           </p:cNvPr>
@@ -10391,7 +10391,7 @@
           <p:cNvPr id="5" name="">
             <a:extLst xmlns:a="http://schemas.openxmlformats.org/drawingml/2006/main">
               <a:ext uri="{FF2B5EF4-FFF2-40B4-BE49-F238E27FC236}">
-                <a16:creationId xmlns:a16="http://schemas.microsoft.com/office/drawing/2014/main" id="{22A3F58F-AA5A-46F4-B4A2-656932AF1B21}"/>
+                <a16:creationId xmlns:a16="http://schemas.microsoft.com/office/drawing/2014/main" id="{28111ACA-52AB-432A-BF3C-BF42178EB95E}"/>
               </a:ext>
             </a:extLst>
           </p:cNvPr>
@@ -10426,7 +10426,7 @@
           <p:cNvPr id="6" name="">
             <a:extLst xmlns:a="http://schemas.openxmlformats.org/drawingml/2006/main">
               <a:ext uri="{FF2B5EF4-FFF2-40B4-BE49-F238E27FC236}">
-                <a16:creationId xmlns:a16="http://schemas.microsoft.com/office/drawing/2014/main" id="{0E3D6451-5422-4C42-8398-F7BD35551936}"/>
+                <a16:creationId xmlns:a16="http://schemas.microsoft.com/office/drawing/2014/main" id="{2E58F469-6F23-43C5-9817-EE47087BDAA1}"/>
               </a:ext>
             </a:extLst>
           </p:cNvPr>
@@ -10484,7 +10484,7 @@
           <p:cNvPr id="7" name="">
             <a:extLst xmlns:a="http://schemas.openxmlformats.org/drawingml/2006/main">
               <a:ext uri="{FF2B5EF4-FFF2-40B4-BE49-F238E27FC236}">
-                <a16:creationId xmlns:a16="http://schemas.microsoft.com/office/drawing/2014/main" id="{B7BF5965-4FBE-43F3-9A21-FFB0B0A59C5C}"/>
+                <a16:creationId xmlns:a16="http://schemas.microsoft.com/office/drawing/2014/main" id="{D955141F-8333-429E-96AE-6BF3ED6FCB96}"/>
               </a:ext>
             </a:extLst>
           </p:cNvPr>
@@ -10542,7 +10542,7 @@
           <p:cNvPr id="8" name="">
             <a:extLst xmlns:a="http://schemas.openxmlformats.org/drawingml/2006/main">
               <a:ext uri="{FF2B5EF4-FFF2-40B4-BE49-F238E27FC236}">
-                <a16:creationId xmlns:a16="http://schemas.microsoft.com/office/drawing/2014/main" id="{D84BBEBD-AAD9-4578-8A05-5C9D9F236FCD}"/>
+                <a16:creationId xmlns:a16="http://schemas.microsoft.com/office/drawing/2014/main" id="{C746A9A3-4421-4457-90DE-1384E112DE34}"/>
               </a:ext>
             </a:extLst>
           </p:cNvPr>
@@ -10577,7 +10577,7 @@
           <p:cNvPr id="9" name="">
             <a:extLst xmlns:a="http://schemas.openxmlformats.org/drawingml/2006/main">
               <a:ext uri="{FF2B5EF4-FFF2-40B4-BE49-F238E27FC236}">
-                <a16:creationId xmlns:a16="http://schemas.microsoft.com/office/drawing/2014/main" id="{B3093F8B-0AF7-4E92-A2A8-649DE91E4FD2}"/>
+                <a16:creationId xmlns:a16="http://schemas.microsoft.com/office/drawing/2014/main" id="{EB6DB108-085E-4710-A7AA-91B9FEBBA22C}"/>
               </a:ext>
             </a:extLst>
           </p:cNvPr>
@@ -10612,7 +10612,7 @@
           <p:cNvPr id="10" name="">
             <a:extLst xmlns:a="http://schemas.openxmlformats.org/drawingml/2006/main">
               <a:ext uri="{FF2B5EF4-FFF2-40B4-BE49-F238E27FC236}">
-                <a16:creationId xmlns:a16="http://schemas.microsoft.com/office/drawing/2014/main" id="{CF9EFFAF-6FF7-466E-9974-7DCD501F03F8}"/>
+                <a16:creationId xmlns:a16="http://schemas.microsoft.com/office/drawing/2014/main" id="{6D4D88FA-6249-4707-A11D-272BEA48B8B1}"/>
               </a:ext>
             </a:extLst>
           </p:cNvPr>
@@ -10670,7 +10670,7 @@
           <p:cNvPr id="11" name="">
             <a:extLst xmlns:a="http://schemas.openxmlformats.org/drawingml/2006/main">
               <a:ext uri="{FF2B5EF4-FFF2-40B4-BE49-F238E27FC236}">
-                <a16:creationId xmlns:a16="http://schemas.microsoft.com/office/drawing/2014/main" id="{C8F320FA-5D59-4749-BDF5-F4CF7650507E}"/>
+                <a16:creationId xmlns:a16="http://schemas.microsoft.com/office/drawing/2014/main" id="{E610C3FF-0864-4F12-9B70-C39960CDCD31}"/>
               </a:ext>
             </a:extLst>
           </p:cNvPr>
@@ -10750,7 +10750,7 @@
           <p:cNvPr id="12" name="">
             <a:extLst xmlns:a="http://schemas.openxmlformats.org/drawingml/2006/main">
               <a:ext uri="{FF2B5EF4-FFF2-40B4-BE49-F238E27FC236}">
-                <a16:creationId xmlns:a16="http://schemas.microsoft.com/office/drawing/2014/main" id="{B661F4A7-4290-4D31-9313-A598DDC91CED}"/>
+                <a16:creationId xmlns:a16="http://schemas.microsoft.com/office/drawing/2014/main" id="{7C5EBA4D-D7D9-4774-9A58-14E20ACC02B4}"/>
               </a:ext>
             </a:extLst>
           </p:cNvPr>
@@ -10785,7 +10785,7 @@
           <p:cNvPr id="13" name="">
             <a:extLst xmlns:a="http://schemas.openxmlformats.org/drawingml/2006/main">
               <a:ext uri="{FF2B5EF4-FFF2-40B4-BE49-F238E27FC236}">
-                <a16:creationId xmlns:a16="http://schemas.microsoft.com/office/drawing/2014/main" id="{CB5AA9F7-CDCA-4CB1-8E87-706D008C3889}"/>
+                <a16:creationId xmlns:a16="http://schemas.microsoft.com/office/drawing/2014/main" id="{E79E1CA6-F52D-4D5C-ADE3-2292CFAFAFE1}"/>
               </a:ext>
             </a:extLst>
           </p:cNvPr>
@@ -10820,7 +10820,7 @@
           <p:cNvPr id="14" name="">
             <a:extLst xmlns:a="http://schemas.openxmlformats.org/drawingml/2006/main">
               <a:ext uri="{FF2B5EF4-FFF2-40B4-BE49-F238E27FC236}">
-                <a16:creationId xmlns:a16="http://schemas.microsoft.com/office/drawing/2014/main" id="{30DCEDB4-9D98-485A-869F-2A7D39C8C674}"/>
+                <a16:creationId xmlns:a16="http://schemas.microsoft.com/office/drawing/2014/main" id="{20247DA3-FBB8-4DD0-A0B0-7E211852890F}"/>
               </a:ext>
             </a:extLst>
           </p:cNvPr>
@@ -10878,7 +10878,7 @@
           <p:cNvPr id="15" name="">
             <a:extLst xmlns:a="http://schemas.openxmlformats.org/drawingml/2006/main">
               <a:ext uri="{FF2B5EF4-FFF2-40B4-BE49-F238E27FC236}">
-                <a16:creationId xmlns:a16="http://schemas.microsoft.com/office/drawing/2014/main" id="{9F68C234-AAA7-4CE4-A5FA-2B17187190D8}"/>
+                <a16:creationId xmlns:a16="http://schemas.microsoft.com/office/drawing/2014/main" id="{BF0DA7C0-AF2E-41A0-8C20-7263A5F96BC2}"/>
               </a:ext>
             </a:extLst>
           </p:cNvPr>
@@ -11004,7 +11004,7 @@
           <p:cNvPr id="16" name="">
             <a:extLst xmlns:a="http://schemas.openxmlformats.org/drawingml/2006/main">
               <a:ext uri="{FF2B5EF4-FFF2-40B4-BE49-F238E27FC236}">
-                <a16:creationId xmlns:a16="http://schemas.microsoft.com/office/drawing/2014/main" id="{90164FCA-65F6-4CA0-95DA-5CB320C35C7A}"/>
+                <a16:creationId xmlns:a16="http://schemas.microsoft.com/office/drawing/2014/main" id="{A8891657-2F3F-4357-A18D-66313E904AD0}"/>
               </a:ext>
             </a:extLst>
           </p:cNvPr>
@@ -11039,7 +11039,7 @@
           <p:cNvPr id="17" name="">
             <a:extLst xmlns:a="http://schemas.openxmlformats.org/drawingml/2006/main">
               <a:ext uri="{FF2B5EF4-FFF2-40B4-BE49-F238E27FC236}">
-                <a16:creationId xmlns:a16="http://schemas.microsoft.com/office/drawing/2014/main" id="{78B68840-1185-432E-93F6-9DB7A4981B73}"/>
+                <a16:creationId xmlns:a16="http://schemas.microsoft.com/office/drawing/2014/main" id="{97B46D2D-3586-45B1-AE10-9D69D60C71F0}"/>
               </a:ext>
             </a:extLst>
           </p:cNvPr>
@@ -11074,7 +11074,7 @@
           <p:cNvPr id="18" name="">
             <a:extLst xmlns:a="http://schemas.openxmlformats.org/drawingml/2006/main">
               <a:ext uri="{FF2B5EF4-FFF2-40B4-BE49-F238E27FC236}">
-                <a16:creationId xmlns:a16="http://schemas.microsoft.com/office/drawing/2014/main" id="{050D7527-0B2B-4666-A4E3-3147AD990806}"/>
+                <a16:creationId xmlns:a16="http://schemas.microsoft.com/office/drawing/2014/main" id="{80FE5EB0-FBCA-4ACF-9650-2CED763D7EF1}"/>
               </a:ext>
             </a:extLst>
           </p:cNvPr>
@@ -11132,7 +11132,7 @@
           <p:cNvPr id="19" name="">
             <a:extLst xmlns:a="http://schemas.openxmlformats.org/drawingml/2006/main">
               <a:ext uri="{FF2B5EF4-FFF2-40B4-BE49-F238E27FC236}">
-                <a16:creationId xmlns:a16="http://schemas.microsoft.com/office/drawing/2014/main" id="{46D905ED-409E-4F1B-9864-B97FFAC3D679}"/>
+                <a16:creationId xmlns:a16="http://schemas.microsoft.com/office/drawing/2014/main" id="{E3C80E48-088F-43C3-ABCA-966AA722D69F}"/>
               </a:ext>
             </a:extLst>
           </p:cNvPr>
@@ -11241,7 +11241,7 @@
           <p:cNvPr id="20" name="">
             <a:extLst xmlns:a="http://schemas.openxmlformats.org/drawingml/2006/main">
               <a:ext uri="{FF2B5EF4-FFF2-40B4-BE49-F238E27FC236}">
-                <a16:creationId xmlns:a16="http://schemas.microsoft.com/office/drawing/2014/main" id="{12C75B66-C7E0-45CD-9255-7E0391BDDFB5}"/>
+                <a16:creationId xmlns:a16="http://schemas.microsoft.com/office/drawing/2014/main" id="{4E30FD6D-5271-4AB4-84B6-3E0E9A409BFC}"/>
               </a:ext>
             </a:extLst>
           </p:cNvPr>
@@ -11276,7 +11276,7 @@
           <p:cNvPr id="21" name="">
             <a:extLst xmlns:a="http://schemas.openxmlformats.org/drawingml/2006/main">
               <a:ext uri="{FF2B5EF4-FFF2-40B4-BE49-F238E27FC236}">
-                <a16:creationId xmlns:a16="http://schemas.microsoft.com/office/drawing/2014/main" id="{CB3714F6-A483-4D0D-8B9F-E597C42C28E1}"/>
+                <a16:creationId xmlns:a16="http://schemas.microsoft.com/office/drawing/2014/main" id="{C6C049FC-11D1-4647-AAE1-642D4E09DBAB}"/>
               </a:ext>
             </a:extLst>
           </p:cNvPr>
@@ -11351,7 +11351,7 @@
           <p:cNvPr id="22" name="">
             <a:extLst xmlns:a="http://schemas.openxmlformats.org/drawingml/2006/main">
               <a:ext uri="{FF2B5EF4-FFF2-40B4-BE49-F238E27FC236}">
-                <a16:creationId xmlns:a16="http://schemas.microsoft.com/office/drawing/2014/main" id="{8B241B23-29CF-4C41-BF5C-3580146E1127}"/>
+                <a16:creationId xmlns:a16="http://schemas.microsoft.com/office/drawing/2014/main" id="{FFA9E0E5-28E2-4A37-AAF7-7C12CD21B267}"/>
               </a:ext>
             </a:extLst>
           </p:cNvPr>
@@ -11407,7 +11407,7 @@
     </p:spTree>
     <p:extLst>
       <p:ext uri="{BB962C8B-B14F-4D97-AF65-F5344CB8AC3E}">
-        <p14:creationId xmlns:p14="http://schemas.microsoft.com/office/powerpoint/2010/main" val="1594479212"/>
+        <p14:creationId xmlns:p14="http://schemas.microsoft.com/office/powerpoint/2010/main" val="1230097801"/>
       </p:ext>
     </p:extLst>
   </p:cSld>
@@ -11438,7 +11438,7 @@
           <p:cNvPr id="1" name="">
             <a:extLst xmlns:a="http://schemas.openxmlformats.org/drawingml/2006/main">
               <a:ext uri="{FF2B5EF4-FFF2-40B4-BE49-F238E27FC236}">
-                <a16:creationId xmlns:a16="http://schemas.microsoft.com/office/drawing/2014/main" id="{79511747-9B20-4156-8D70-82BC561BAB03}"/>
+                <a16:creationId xmlns:a16="http://schemas.microsoft.com/office/drawing/2014/main" id="{E20CF119-1E5F-46FB-9FAE-11E39BE8085C}"/>
               </a:ext>
             </a:extLst>
           </p:cNvPr>
@@ -11473,7 +11473,7 @@
           <p:cNvPr id="2" name="">
             <a:extLst xmlns:a="http://schemas.openxmlformats.org/drawingml/2006/main">
               <a:ext uri="{FF2B5EF4-FFF2-40B4-BE49-F238E27FC236}">
-                <a16:creationId xmlns:a16="http://schemas.microsoft.com/office/drawing/2014/main" id="{A4BDB330-B012-457E-9EE0-64BA079B2E6E}"/>
+                <a16:creationId xmlns:a16="http://schemas.microsoft.com/office/drawing/2014/main" id="{BC678622-B5D0-4DB2-A010-E6B95CC94F36}"/>
               </a:ext>
             </a:extLst>
           </p:cNvPr>
@@ -11508,7 +11508,7 @@
           <p:cNvPr id="3" name="">
             <a:extLst xmlns:a="http://schemas.openxmlformats.org/drawingml/2006/main">
               <a:ext uri="{FF2B5EF4-FFF2-40B4-BE49-F238E27FC236}">
-                <a16:creationId xmlns:a16="http://schemas.microsoft.com/office/drawing/2014/main" id="{5D129864-72B6-41F7-B7D2-752752C36C9B}"/>
+                <a16:creationId xmlns:a16="http://schemas.microsoft.com/office/drawing/2014/main" id="{00291531-902E-4424-9834-27667814A4E1}"/>
               </a:ext>
             </a:extLst>
           </p:cNvPr>
@@ -11566,7 +11566,7 @@
           <p:cNvPr id="4" name="">
             <a:extLst xmlns:a="http://schemas.openxmlformats.org/drawingml/2006/main">
               <a:ext uri="{FF2B5EF4-FFF2-40B4-BE49-F238E27FC236}">
-                <a16:creationId xmlns:a16="http://schemas.microsoft.com/office/drawing/2014/main" id="{AD136858-1DF5-40F9-ACF0-68EA31EE7F6E}"/>
+                <a16:creationId xmlns:a16="http://schemas.microsoft.com/office/drawing/2014/main" id="{9284A97C-FFB8-4F79-9F82-611E5761122E}"/>
               </a:ext>
             </a:extLst>
           </p:cNvPr>
@@ -11624,7 +11624,7 @@
           <p:cNvPr id="5" name="">
             <a:extLst xmlns:a="http://schemas.openxmlformats.org/drawingml/2006/main">
               <a:ext uri="{FF2B5EF4-FFF2-40B4-BE49-F238E27FC236}">
-                <a16:creationId xmlns:a16="http://schemas.microsoft.com/office/drawing/2014/main" id="{A87D7271-BEE6-4FD2-B5F6-2C466F19FCD2}"/>
+                <a16:creationId xmlns:a16="http://schemas.microsoft.com/office/drawing/2014/main" id="{46E36EA9-B04A-49A8-AD27-68EA9D2A16FF}"/>
               </a:ext>
             </a:extLst>
           </p:cNvPr>
@@ -11659,7 +11659,7 @@
           <p:cNvPr id="6" name="">
             <a:extLst xmlns:a="http://schemas.openxmlformats.org/drawingml/2006/main">
               <a:ext uri="{FF2B5EF4-FFF2-40B4-BE49-F238E27FC236}">
-                <a16:creationId xmlns:a16="http://schemas.microsoft.com/office/drawing/2014/main" id="{7F16B994-6C2F-42E3-8F07-2CD3BA061F23}"/>
+                <a16:creationId xmlns:a16="http://schemas.microsoft.com/office/drawing/2014/main" id="{0CF669BC-66DC-45DC-B24D-088754CBE0A1}"/>
               </a:ext>
             </a:extLst>
           </p:cNvPr>
@@ -11717,7 +11717,7 @@
           <p:cNvPr id="7" name="">
             <a:extLst xmlns:a="http://schemas.openxmlformats.org/drawingml/2006/main">
               <a:ext uri="{FF2B5EF4-FFF2-40B4-BE49-F238E27FC236}">
-                <a16:creationId xmlns:a16="http://schemas.microsoft.com/office/drawing/2014/main" id="{A4EA8A70-EC23-457E-AC45-83DDC5EE66E3}"/>
+                <a16:creationId xmlns:a16="http://schemas.microsoft.com/office/drawing/2014/main" id="{3E74BD3E-CFBC-4C39-9A38-CFF42F749358}"/>
               </a:ext>
             </a:extLst>
           </p:cNvPr>
@@ -11775,7 +11775,7 @@
           <p:cNvPr id="8" name="">
             <a:extLst xmlns:a="http://schemas.openxmlformats.org/drawingml/2006/main">
               <a:ext uri="{FF2B5EF4-FFF2-40B4-BE49-F238E27FC236}">
-                <a16:creationId xmlns:a16="http://schemas.microsoft.com/office/drawing/2014/main" id="{2BD11A9B-EEF7-48FD-B3CB-B733CCAEEF3D}"/>
+                <a16:creationId xmlns:a16="http://schemas.microsoft.com/office/drawing/2014/main" id="{73DA6814-9C65-44EC-B5E0-2AE99B9E8DF3}"/>
               </a:ext>
             </a:extLst>
           </p:cNvPr>
@@ -11810,7 +11810,7 @@
           <p:cNvPr id="9" name="">
             <a:extLst xmlns:a="http://schemas.openxmlformats.org/drawingml/2006/main">
               <a:ext uri="{FF2B5EF4-FFF2-40B4-BE49-F238E27FC236}">
-                <a16:creationId xmlns:a16="http://schemas.microsoft.com/office/drawing/2014/main" id="{6291373D-06CA-47E8-8C68-C5F561F6368E}"/>
+                <a16:creationId xmlns:a16="http://schemas.microsoft.com/office/drawing/2014/main" id="{AC4BFD26-7038-4157-9DD0-398435B3C760}"/>
               </a:ext>
             </a:extLst>
           </p:cNvPr>
@@ -11845,7 +11845,7 @@
           <p:cNvPr id="10" name="">
             <a:extLst xmlns:a="http://schemas.openxmlformats.org/drawingml/2006/main">
               <a:ext uri="{FF2B5EF4-FFF2-40B4-BE49-F238E27FC236}">
-                <a16:creationId xmlns:a16="http://schemas.microsoft.com/office/drawing/2014/main" id="{C07CF745-02A1-4A1F-9EB3-9C70A25E7A21}"/>
+                <a16:creationId xmlns:a16="http://schemas.microsoft.com/office/drawing/2014/main" id="{C192516D-BB01-4656-ACAB-4B144F3423A0}"/>
               </a:ext>
             </a:extLst>
           </p:cNvPr>
@@ -11903,7 +11903,7 @@
           <p:cNvPr id="11" name="">
             <a:extLst xmlns:a="http://schemas.openxmlformats.org/drawingml/2006/main">
               <a:ext uri="{FF2B5EF4-FFF2-40B4-BE49-F238E27FC236}">
-                <a16:creationId xmlns:a16="http://schemas.microsoft.com/office/drawing/2014/main" id="{A9900D66-F70A-4D0D-A962-B8C64ACE6C43}"/>
+                <a16:creationId xmlns:a16="http://schemas.microsoft.com/office/drawing/2014/main" id="{4A0F0B07-731C-4F3F-9F94-C4EA98A1855C}"/>
               </a:ext>
             </a:extLst>
           </p:cNvPr>
@@ -11978,7 +11978,7 @@
           <p:cNvPr id="12" name="">
             <a:extLst xmlns:a="http://schemas.openxmlformats.org/drawingml/2006/main">
               <a:ext uri="{FF2B5EF4-FFF2-40B4-BE49-F238E27FC236}">
-                <a16:creationId xmlns:a16="http://schemas.microsoft.com/office/drawing/2014/main" id="{49F7778A-794A-457E-B7DA-5BE2CA6EA64A}"/>
+                <a16:creationId xmlns:a16="http://schemas.microsoft.com/office/drawing/2014/main" id="{313B2034-1399-43B8-90DE-9B8DD86625C3}"/>
               </a:ext>
             </a:extLst>
           </p:cNvPr>
@@ -12013,7 +12013,7 @@
           <p:cNvPr id="13" name="">
             <a:extLst xmlns:a="http://schemas.openxmlformats.org/drawingml/2006/main">
               <a:ext uri="{FF2B5EF4-FFF2-40B4-BE49-F238E27FC236}">
-                <a16:creationId xmlns:a16="http://schemas.microsoft.com/office/drawing/2014/main" id="{53EE5C31-E510-4DE6-80D4-6E724DCCBDC5}"/>
+                <a16:creationId xmlns:a16="http://schemas.microsoft.com/office/drawing/2014/main" id="{F5B37A1A-3A8B-4860-B36E-A9B9BED3693C}"/>
               </a:ext>
             </a:extLst>
           </p:cNvPr>
@@ -12048,7 +12048,7 @@
           <p:cNvPr id="14" name="">
             <a:extLst xmlns:a="http://schemas.openxmlformats.org/drawingml/2006/main">
               <a:ext uri="{FF2B5EF4-FFF2-40B4-BE49-F238E27FC236}">
-                <a16:creationId xmlns:a16="http://schemas.microsoft.com/office/drawing/2014/main" id="{60E77888-F807-4020-B1D4-F4FBEF6E7548}"/>
+                <a16:creationId xmlns:a16="http://schemas.microsoft.com/office/drawing/2014/main" id="{E58C4470-D45A-4C87-A6D0-A0A5F1D052B8}"/>
               </a:ext>
             </a:extLst>
           </p:cNvPr>
@@ -12106,7 +12106,7 @@
           <p:cNvPr id="15" name="">
             <a:extLst xmlns:a="http://schemas.openxmlformats.org/drawingml/2006/main">
               <a:ext uri="{FF2B5EF4-FFF2-40B4-BE49-F238E27FC236}">
-                <a16:creationId xmlns:a16="http://schemas.microsoft.com/office/drawing/2014/main" id="{E6ED5496-0540-418B-A9FF-3BE3AFAAEEA5}"/>
+                <a16:creationId xmlns:a16="http://schemas.microsoft.com/office/drawing/2014/main" id="{194EAEA0-E02C-48F7-93CA-D9C08A8D5BBB}"/>
               </a:ext>
             </a:extLst>
           </p:cNvPr>
@@ -12181,7 +12181,7 @@
           <p:cNvPr id="16" name="">
             <a:extLst xmlns:a="http://schemas.openxmlformats.org/drawingml/2006/main">
               <a:ext uri="{FF2B5EF4-FFF2-40B4-BE49-F238E27FC236}">
-                <a16:creationId xmlns:a16="http://schemas.microsoft.com/office/drawing/2014/main" id="{F8C5A6BE-74D4-4B6F-B9ED-65066C96F137}"/>
+                <a16:creationId xmlns:a16="http://schemas.microsoft.com/office/drawing/2014/main" id="{940B6B83-B68C-4585-8245-E27196D68A75}"/>
               </a:ext>
             </a:extLst>
           </p:cNvPr>
@@ -12216,7 +12216,7 @@
           <p:cNvPr id="17" name="">
             <a:extLst xmlns:a="http://schemas.openxmlformats.org/drawingml/2006/main">
               <a:ext uri="{FF2B5EF4-FFF2-40B4-BE49-F238E27FC236}">
-                <a16:creationId xmlns:a16="http://schemas.microsoft.com/office/drawing/2014/main" id="{A8169F44-D1F3-4A1F-B48E-38BA673FD144}"/>
+                <a16:creationId xmlns:a16="http://schemas.microsoft.com/office/drawing/2014/main" id="{6BF8758D-7492-4E41-9C57-6D926BE31D59}"/>
               </a:ext>
             </a:extLst>
           </p:cNvPr>
@@ -12251,7 +12251,7 @@
           <p:cNvPr id="18" name="">
             <a:extLst xmlns:a="http://schemas.openxmlformats.org/drawingml/2006/main">
               <a:ext uri="{FF2B5EF4-FFF2-40B4-BE49-F238E27FC236}">
-                <a16:creationId xmlns:a16="http://schemas.microsoft.com/office/drawing/2014/main" id="{50CFC86E-CFAF-4F74-9B7E-977C566FF2C0}"/>
+                <a16:creationId xmlns:a16="http://schemas.microsoft.com/office/drawing/2014/main" id="{552A1840-4C22-4BE9-8C3A-FD33F862F765}"/>
               </a:ext>
             </a:extLst>
           </p:cNvPr>
@@ -12309,7 +12309,7 @@
           <p:cNvPr id="19" name="">
             <a:extLst xmlns:a="http://schemas.openxmlformats.org/drawingml/2006/main">
               <a:ext uri="{FF2B5EF4-FFF2-40B4-BE49-F238E27FC236}">
-                <a16:creationId xmlns:a16="http://schemas.microsoft.com/office/drawing/2014/main" id="{6E77E9FD-5AE6-429B-8131-8E7CBBAE444D}"/>
+                <a16:creationId xmlns:a16="http://schemas.microsoft.com/office/drawing/2014/main" id="{90B2F6C4-56DD-47E3-886C-09242777DC77}"/>
               </a:ext>
             </a:extLst>
           </p:cNvPr>
@@ -12384,7 +12384,7 @@
           <p:cNvPr id="20" name="">
             <a:extLst xmlns:a="http://schemas.openxmlformats.org/drawingml/2006/main">
               <a:ext uri="{FF2B5EF4-FFF2-40B4-BE49-F238E27FC236}">
-                <a16:creationId xmlns:a16="http://schemas.microsoft.com/office/drawing/2014/main" id="{BDC2B917-DF62-48AD-B8A9-52131E87A6A9}"/>
+                <a16:creationId xmlns:a16="http://schemas.microsoft.com/office/drawing/2014/main" id="{54D7630C-A4DB-4BCC-9C9B-06EBC397A542}"/>
               </a:ext>
             </a:extLst>
           </p:cNvPr>
@@ -12419,7 +12419,7 @@
           <p:cNvPr id="21" name="">
             <a:extLst xmlns:a="http://schemas.openxmlformats.org/drawingml/2006/main">
               <a:ext uri="{FF2B5EF4-FFF2-40B4-BE49-F238E27FC236}">
-                <a16:creationId xmlns:a16="http://schemas.microsoft.com/office/drawing/2014/main" id="{F8CAB74B-5D4B-446D-92AD-C0FA5E6C4552}"/>
+                <a16:creationId xmlns:a16="http://schemas.microsoft.com/office/drawing/2014/main" id="{C4702F43-20A6-43B0-B70B-3D8B47987592}"/>
               </a:ext>
             </a:extLst>
           </p:cNvPr>
@@ -12454,7 +12454,7 @@
           <p:cNvPr id="22" name="">
             <a:extLst xmlns:a="http://schemas.openxmlformats.org/drawingml/2006/main">
               <a:ext uri="{FF2B5EF4-FFF2-40B4-BE49-F238E27FC236}">
-                <a16:creationId xmlns:a16="http://schemas.microsoft.com/office/drawing/2014/main" id="{91147C06-5777-42A6-95F6-F882E5610FEA}"/>
+                <a16:creationId xmlns:a16="http://schemas.microsoft.com/office/drawing/2014/main" id="{3F2E109E-DD19-4198-A9CD-86673E81EE44}"/>
               </a:ext>
             </a:extLst>
           </p:cNvPr>
@@ -12512,7 +12512,7 @@
           <p:cNvPr id="23" name="">
             <a:extLst xmlns:a="http://schemas.openxmlformats.org/drawingml/2006/main">
               <a:ext uri="{FF2B5EF4-FFF2-40B4-BE49-F238E27FC236}">
-                <a16:creationId xmlns:a16="http://schemas.microsoft.com/office/drawing/2014/main" id="{35EE9159-5F97-4EC3-BCA8-77FB278F4BA7}"/>
+                <a16:creationId xmlns:a16="http://schemas.microsoft.com/office/drawing/2014/main" id="{C825DBC7-39E5-423D-8F85-685DEEC8FEF9}"/>
               </a:ext>
             </a:extLst>
           </p:cNvPr>
@@ -12587,7 +12587,7 @@
           <p:cNvPr id="24" name="">
             <a:extLst xmlns:a="http://schemas.openxmlformats.org/drawingml/2006/main">
               <a:ext uri="{FF2B5EF4-FFF2-40B4-BE49-F238E27FC236}">
-                <a16:creationId xmlns:a16="http://schemas.microsoft.com/office/drawing/2014/main" id="{6621BDBE-C515-4229-80D2-54F55B83D445}"/>
+                <a16:creationId xmlns:a16="http://schemas.microsoft.com/office/drawing/2014/main" id="{028C7CE4-6FF7-4332-8C33-A869D3C20CC3}"/>
               </a:ext>
             </a:extLst>
           </p:cNvPr>
@@ -12622,7 +12622,7 @@
           <p:cNvPr id="25" name="">
             <a:extLst xmlns:a="http://schemas.openxmlformats.org/drawingml/2006/main">
               <a:ext uri="{FF2B5EF4-FFF2-40B4-BE49-F238E27FC236}">
-                <a16:creationId xmlns:a16="http://schemas.microsoft.com/office/drawing/2014/main" id="{AA77288A-4B69-4315-8B2D-70583421717A}"/>
+                <a16:creationId xmlns:a16="http://schemas.microsoft.com/office/drawing/2014/main" id="{24CDE3BF-45AD-4D2D-AA3F-0317AA22B96E}"/>
               </a:ext>
             </a:extLst>
           </p:cNvPr>
@@ -12657,7 +12657,7 @@
           <p:cNvPr id="26" name="">
             <a:extLst xmlns:a="http://schemas.openxmlformats.org/drawingml/2006/main">
               <a:ext uri="{FF2B5EF4-FFF2-40B4-BE49-F238E27FC236}">
-                <a16:creationId xmlns:a16="http://schemas.microsoft.com/office/drawing/2014/main" id="{40C2F351-DDA6-4965-BCE8-0BD6DBF41C3F}"/>
+                <a16:creationId xmlns:a16="http://schemas.microsoft.com/office/drawing/2014/main" id="{B2E94556-9001-44C6-B28C-3AC79C7A5986}"/>
               </a:ext>
             </a:extLst>
           </p:cNvPr>
@@ -12715,7 +12715,7 @@
           <p:cNvPr id="27" name="">
             <a:extLst xmlns:a="http://schemas.openxmlformats.org/drawingml/2006/main">
               <a:ext uri="{FF2B5EF4-FFF2-40B4-BE49-F238E27FC236}">
-                <a16:creationId xmlns:a16="http://schemas.microsoft.com/office/drawing/2014/main" id="{D7C26519-7599-4904-BB48-8F92D70F9381}"/>
+                <a16:creationId xmlns:a16="http://schemas.microsoft.com/office/drawing/2014/main" id="{5E64AA7A-D20C-4D00-B7C5-E9A32BF24A08}"/>
               </a:ext>
             </a:extLst>
           </p:cNvPr>
@@ -12790,7 +12790,7 @@
           <p:cNvPr id="28" name="">
             <a:extLst xmlns:a="http://schemas.openxmlformats.org/drawingml/2006/main">
               <a:ext uri="{FF2B5EF4-FFF2-40B4-BE49-F238E27FC236}">
-                <a16:creationId xmlns:a16="http://schemas.microsoft.com/office/drawing/2014/main" id="{C6121963-C85D-4482-A5F4-C363E99A92EB}"/>
+                <a16:creationId xmlns:a16="http://schemas.microsoft.com/office/drawing/2014/main" id="{BCAD1E8E-7827-409A-9A11-4248563DEA22}"/>
               </a:ext>
             </a:extLst>
           </p:cNvPr>
@@ -12899,7 +12899,7 @@
           <p:cNvPr id="29" name="">
             <a:extLst xmlns:a="http://schemas.openxmlformats.org/drawingml/2006/main">
               <a:ext uri="{FF2B5EF4-FFF2-40B4-BE49-F238E27FC236}">
-                <a16:creationId xmlns:a16="http://schemas.microsoft.com/office/drawing/2014/main" id="{8504C146-8ABF-4B6C-B93C-2A321CA90AE3}"/>
+                <a16:creationId xmlns:a16="http://schemas.microsoft.com/office/drawing/2014/main" id="{43ACECEA-12B6-410E-A2F1-EF265993336B}"/>
               </a:ext>
             </a:extLst>
           </p:cNvPr>
@@ -12955,7 +12955,7 @@
     </p:spTree>
     <p:extLst>
       <p:ext uri="{BB962C8B-B14F-4D97-AF65-F5344CB8AC3E}">
-        <p14:creationId xmlns:p14="http://schemas.microsoft.com/office/powerpoint/2010/main" val="1944784840"/>
+        <p14:creationId xmlns:p14="http://schemas.microsoft.com/office/powerpoint/2010/main" val="229711466"/>
       </p:ext>
     </p:extLst>
   </p:cSld>
@@ -12986,7 +12986,7 @@
           <p:cNvPr id="1" name="">
             <a:extLst xmlns:a="http://schemas.openxmlformats.org/drawingml/2006/main">
               <a:ext uri="{FF2B5EF4-FFF2-40B4-BE49-F238E27FC236}">
-                <a16:creationId xmlns:a16="http://schemas.microsoft.com/office/drawing/2014/main" id="{78457EDD-0E97-435D-A620-0DB20DD6F1E9}"/>
+                <a16:creationId xmlns:a16="http://schemas.microsoft.com/office/drawing/2014/main" id="{4A50FDED-23CF-4024-9280-E74D7C0A51B7}"/>
               </a:ext>
             </a:extLst>
           </p:cNvPr>
@@ -13021,7 +13021,7 @@
           <p:cNvPr id="2" name="">
             <a:extLst xmlns:a="http://schemas.openxmlformats.org/drawingml/2006/main">
               <a:ext uri="{FF2B5EF4-FFF2-40B4-BE49-F238E27FC236}">
-                <a16:creationId xmlns:a16="http://schemas.microsoft.com/office/drawing/2014/main" id="{11CA9D1B-2A4E-4209-9FF9-03C2769BB81A}"/>
+                <a16:creationId xmlns:a16="http://schemas.microsoft.com/office/drawing/2014/main" id="{9D1987CA-3D2A-48A1-B653-45AB76FE276F}"/>
               </a:ext>
             </a:extLst>
           </p:cNvPr>
@@ -13056,7 +13056,7 @@
           <p:cNvPr id="3" name="">
             <a:extLst xmlns:a="http://schemas.openxmlformats.org/drawingml/2006/main">
               <a:ext uri="{FF2B5EF4-FFF2-40B4-BE49-F238E27FC236}">
-                <a16:creationId xmlns:a16="http://schemas.microsoft.com/office/drawing/2014/main" id="{91B627FA-76F2-41C7-884F-06646C2733C7}"/>
+                <a16:creationId xmlns:a16="http://schemas.microsoft.com/office/drawing/2014/main" id="{634243D5-F24A-4A79-B963-2C8C9161317C}"/>
               </a:ext>
             </a:extLst>
           </p:cNvPr>
@@ -13114,7 +13114,7 @@
           <p:cNvPr id="4" name="">
             <a:extLst xmlns:a="http://schemas.openxmlformats.org/drawingml/2006/main">
               <a:ext uri="{FF2B5EF4-FFF2-40B4-BE49-F238E27FC236}">
-                <a16:creationId xmlns:a16="http://schemas.microsoft.com/office/drawing/2014/main" id="{8CE73B35-A132-4CD3-9885-C5F900A13E27}"/>
+                <a16:creationId xmlns:a16="http://schemas.microsoft.com/office/drawing/2014/main" id="{5F2E5F62-F1DD-46B4-A0C3-46948B54D849}"/>
               </a:ext>
             </a:extLst>
           </p:cNvPr>
@@ -13172,7 +13172,7 @@
           <p:cNvPr id="5" name="">
             <a:extLst xmlns:a="http://schemas.openxmlformats.org/drawingml/2006/main">
               <a:ext uri="{FF2B5EF4-FFF2-40B4-BE49-F238E27FC236}">
-                <a16:creationId xmlns:a16="http://schemas.microsoft.com/office/drawing/2014/main" id="{85ABA2DA-264D-4ED8-95CC-3A5C36DBC4E2}"/>
+                <a16:creationId xmlns:a16="http://schemas.microsoft.com/office/drawing/2014/main" id="{FE79A224-C5F3-46EA-89E1-470E94B20AD4}"/>
               </a:ext>
             </a:extLst>
           </p:cNvPr>
@@ -13207,7 +13207,7 @@
           <p:cNvPr id="6" name="">
             <a:extLst xmlns:a="http://schemas.openxmlformats.org/drawingml/2006/main">
               <a:ext uri="{FF2B5EF4-FFF2-40B4-BE49-F238E27FC236}">
-                <a16:creationId xmlns:a16="http://schemas.microsoft.com/office/drawing/2014/main" id="{62E26BEA-3CF7-4B19-85FB-6ACBBC734B23}"/>
+                <a16:creationId xmlns:a16="http://schemas.microsoft.com/office/drawing/2014/main" id="{262B1D2B-A876-4744-AC88-28B1E340A4B1}"/>
               </a:ext>
             </a:extLst>
           </p:cNvPr>
@@ -13265,7 +13265,7 @@
           <p:cNvPr id="7" name="">
             <a:extLst xmlns:a="http://schemas.openxmlformats.org/drawingml/2006/main">
               <a:ext uri="{FF2B5EF4-FFF2-40B4-BE49-F238E27FC236}">
-                <a16:creationId xmlns:a16="http://schemas.microsoft.com/office/drawing/2014/main" id="{791569E1-9646-4487-B6C4-906FEEAC2F72}"/>
+                <a16:creationId xmlns:a16="http://schemas.microsoft.com/office/drawing/2014/main" id="{BB0A1C9C-68DB-4DC9-9989-D4F4CC585A25}"/>
               </a:ext>
             </a:extLst>
           </p:cNvPr>
@@ -13323,7 +13323,7 @@
           <p:cNvPr id="8" name="">
             <a:extLst xmlns:a="http://schemas.openxmlformats.org/drawingml/2006/main">
               <a:ext uri="{FF2B5EF4-FFF2-40B4-BE49-F238E27FC236}">
-                <a16:creationId xmlns:a16="http://schemas.microsoft.com/office/drawing/2014/main" id="{AB5F0BBE-4C85-4729-BDC5-629C9E10B1A4}"/>
+                <a16:creationId xmlns:a16="http://schemas.microsoft.com/office/drawing/2014/main" id="{CC3C3F17-F7AD-4E05-9160-0DD6CEF2CCE0}"/>
               </a:ext>
             </a:extLst>
           </p:cNvPr>
@@ -13358,7 +13358,7 @@
           <p:cNvPr id="9" name="">
             <a:extLst xmlns:a="http://schemas.openxmlformats.org/drawingml/2006/main">
               <a:ext uri="{FF2B5EF4-FFF2-40B4-BE49-F238E27FC236}">
-                <a16:creationId xmlns:a16="http://schemas.microsoft.com/office/drawing/2014/main" id="{961AFF1C-C856-47E9-88D7-D9A0DE9D67BA}"/>
+                <a16:creationId xmlns:a16="http://schemas.microsoft.com/office/drawing/2014/main" id="{C548792B-1FAE-44B0-8092-C733FF06E017}"/>
               </a:ext>
             </a:extLst>
           </p:cNvPr>
@@ -13393,7 +13393,7 @@
           <p:cNvPr id="10" name="">
             <a:extLst xmlns:a="http://schemas.openxmlformats.org/drawingml/2006/main">
               <a:ext uri="{FF2B5EF4-FFF2-40B4-BE49-F238E27FC236}">
-                <a16:creationId xmlns:a16="http://schemas.microsoft.com/office/drawing/2014/main" id="{C0DCE36C-517C-4923-B5A8-6E98CFEFFAD5}"/>
+                <a16:creationId xmlns:a16="http://schemas.microsoft.com/office/drawing/2014/main" id="{7BA058EC-55E5-47AF-95F8-3D22B087B145}"/>
               </a:ext>
             </a:extLst>
           </p:cNvPr>
@@ -13451,7 +13451,7 @@
           <p:cNvPr id="11" name="">
             <a:extLst xmlns:a="http://schemas.openxmlformats.org/drawingml/2006/main">
               <a:ext uri="{FF2B5EF4-FFF2-40B4-BE49-F238E27FC236}">
-                <a16:creationId xmlns:a16="http://schemas.microsoft.com/office/drawing/2014/main" id="{3DC8E44B-F9BF-45AC-BC37-CAA9F3633618}"/>
+                <a16:creationId xmlns:a16="http://schemas.microsoft.com/office/drawing/2014/main" id="{7E5BCC00-6401-4C23-81B6-15498A0F29CF}"/>
               </a:ext>
             </a:extLst>
           </p:cNvPr>
@@ -13560,7 +13560,7 @@
           <p:cNvPr id="12" name="">
             <a:extLst xmlns:a="http://schemas.openxmlformats.org/drawingml/2006/main">
               <a:ext uri="{FF2B5EF4-FFF2-40B4-BE49-F238E27FC236}">
-                <a16:creationId xmlns:a16="http://schemas.microsoft.com/office/drawing/2014/main" id="{61791181-E356-4FF4-833C-EFAAB230BC8E}"/>
+                <a16:creationId xmlns:a16="http://schemas.microsoft.com/office/drawing/2014/main" id="{F734A75A-60FD-4476-8411-F6F7FAAD9A89}"/>
               </a:ext>
             </a:extLst>
           </p:cNvPr>
@@ -13595,7 +13595,7 @@
           <p:cNvPr id="13" name="">
             <a:extLst xmlns:a="http://schemas.openxmlformats.org/drawingml/2006/main">
               <a:ext uri="{FF2B5EF4-FFF2-40B4-BE49-F238E27FC236}">
-                <a16:creationId xmlns:a16="http://schemas.microsoft.com/office/drawing/2014/main" id="{5DAE0CFE-FAC0-45BD-8D4D-AF19646593D3}"/>
+                <a16:creationId xmlns:a16="http://schemas.microsoft.com/office/drawing/2014/main" id="{61099144-869E-49CB-AFEA-4A8990A3746C}"/>
               </a:ext>
             </a:extLst>
           </p:cNvPr>
@@ -13630,7 +13630,7 @@
           <p:cNvPr id="14" name="">
             <a:extLst xmlns:a="http://schemas.openxmlformats.org/drawingml/2006/main">
               <a:ext uri="{FF2B5EF4-FFF2-40B4-BE49-F238E27FC236}">
-                <a16:creationId xmlns:a16="http://schemas.microsoft.com/office/drawing/2014/main" id="{0CF07DF4-07CD-40B8-98E6-05C78E51EBC1}"/>
+                <a16:creationId xmlns:a16="http://schemas.microsoft.com/office/drawing/2014/main" id="{7A11AA9C-91B8-4EF5-868E-457DC65D9405}"/>
               </a:ext>
             </a:extLst>
           </p:cNvPr>
@@ -13688,7 +13688,7 @@
           <p:cNvPr id="15" name="">
             <a:extLst xmlns:a="http://schemas.openxmlformats.org/drawingml/2006/main">
               <a:ext uri="{FF2B5EF4-FFF2-40B4-BE49-F238E27FC236}">
-                <a16:creationId xmlns:a16="http://schemas.microsoft.com/office/drawing/2014/main" id="{5E07A434-6D04-4FC3-8A53-5FD166C3D13D}"/>
+                <a16:creationId xmlns:a16="http://schemas.microsoft.com/office/drawing/2014/main" id="{83D89DFC-90C8-4ACE-9216-532DAA9090E3}"/>
               </a:ext>
             </a:extLst>
           </p:cNvPr>
@@ -13768,7 +13768,7 @@
           <p:cNvPr id="16" name="">
             <a:extLst xmlns:a="http://schemas.openxmlformats.org/drawingml/2006/main">
               <a:ext uri="{FF2B5EF4-FFF2-40B4-BE49-F238E27FC236}">
-                <a16:creationId xmlns:a16="http://schemas.microsoft.com/office/drawing/2014/main" id="{BFD6D13F-3707-4492-9E7C-9C562515D237}"/>
+                <a16:creationId xmlns:a16="http://schemas.microsoft.com/office/drawing/2014/main" id="{E7CA24AD-41B2-4A80-A00C-676D46BCC853}"/>
               </a:ext>
             </a:extLst>
           </p:cNvPr>
@@ -13803,7 +13803,7 @@
           <p:cNvPr id="17" name="">
             <a:extLst xmlns:a="http://schemas.openxmlformats.org/drawingml/2006/main">
               <a:ext uri="{FF2B5EF4-FFF2-40B4-BE49-F238E27FC236}">
-                <a16:creationId xmlns:a16="http://schemas.microsoft.com/office/drawing/2014/main" id="{B368A65C-7AEF-4F31-9A7A-1C0E7A502557}"/>
+                <a16:creationId xmlns:a16="http://schemas.microsoft.com/office/drawing/2014/main" id="{7494A2D2-E56E-4069-A763-6238578817B8}"/>
               </a:ext>
             </a:extLst>
           </p:cNvPr>
@@ -13838,7 +13838,7 @@
           <p:cNvPr id="18" name="">
             <a:extLst xmlns:a="http://schemas.openxmlformats.org/drawingml/2006/main">
               <a:ext uri="{FF2B5EF4-FFF2-40B4-BE49-F238E27FC236}">
-                <a16:creationId xmlns:a16="http://schemas.microsoft.com/office/drawing/2014/main" id="{A7B86CC7-9F24-4B9D-A3F4-D7B0B912919F}"/>
+                <a16:creationId xmlns:a16="http://schemas.microsoft.com/office/drawing/2014/main" id="{5276BE81-02A3-4667-BCA6-7BC2D79C269C}"/>
               </a:ext>
             </a:extLst>
           </p:cNvPr>
@@ -13896,7 +13896,7 @@
           <p:cNvPr id="19" name="">
             <a:extLst xmlns:a="http://schemas.openxmlformats.org/drawingml/2006/main">
               <a:ext uri="{FF2B5EF4-FFF2-40B4-BE49-F238E27FC236}">
-                <a16:creationId xmlns:a16="http://schemas.microsoft.com/office/drawing/2014/main" id="{4FFEF71A-CED7-40D6-A55E-41246400CD7C}"/>
+                <a16:creationId xmlns:a16="http://schemas.microsoft.com/office/drawing/2014/main" id="{0F3FEDFF-B126-40FE-9B79-C34171BA95B7}"/>
               </a:ext>
             </a:extLst>
           </p:cNvPr>
@@ -14005,7 +14005,7 @@
           <p:cNvPr id="20" name="">
             <a:extLst xmlns:a="http://schemas.openxmlformats.org/drawingml/2006/main">
               <a:ext uri="{FF2B5EF4-FFF2-40B4-BE49-F238E27FC236}">
-                <a16:creationId xmlns:a16="http://schemas.microsoft.com/office/drawing/2014/main" id="{618A5BB1-B453-41CE-8FCF-72147ECDAE4E}"/>
+                <a16:creationId xmlns:a16="http://schemas.microsoft.com/office/drawing/2014/main" id="{652F658B-32FA-48D5-B38B-9565BD1CB30E}"/>
               </a:ext>
             </a:extLst>
           </p:cNvPr>
@@ -14040,7 +14040,7 @@
           <p:cNvPr id="21" name="">
             <a:extLst xmlns:a="http://schemas.openxmlformats.org/drawingml/2006/main">
               <a:ext uri="{FF2B5EF4-FFF2-40B4-BE49-F238E27FC236}">
-                <a16:creationId xmlns:a16="http://schemas.microsoft.com/office/drawing/2014/main" id="{B237A0CB-5ED8-490A-850A-9058CB9C4C28}"/>
+                <a16:creationId xmlns:a16="http://schemas.microsoft.com/office/drawing/2014/main" id="{03F35432-3248-4BF7-99BC-DB958D825D72}"/>
               </a:ext>
             </a:extLst>
           </p:cNvPr>
@@ -14115,7 +14115,7 @@
           <p:cNvPr id="22" name="">
             <a:extLst xmlns:a="http://schemas.openxmlformats.org/drawingml/2006/main">
               <a:ext uri="{FF2B5EF4-FFF2-40B4-BE49-F238E27FC236}">
-                <a16:creationId xmlns:a16="http://schemas.microsoft.com/office/drawing/2014/main" id="{203F3036-8A1B-49CE-A5C1-B2DADA8FA277}"/>
+                <a16:creationId xmlns:a16="http://schemas.microsoft.com/office/drawing/2014/main" id="{D9C8BB20-3A95-4C2A-BFA0-2C8A5FFEFFD9}"/>
               </a:ext>
             </a:extLst>
           </p:cNvPr>
@@ -14148,7 +14148,7 @@
           <p:cNvPr id="23" name="">
             <a:extLst xmlns:a="http://schemas.openxmlformats.org/drawingml/2006/main">
               <a:ext uri="{FF2B5EF4-FFF2-40B4-BE49-F238E27FC236}">
-                <a16:creationId xmlns:a16="http://schemas.microsoft.com/office/drawing/2014/main" id="{66F7E2F5-2DB4-4A65-AE04-84763C848510}"/>
+                <a16:creationId xmlns:a16="http://schemas.microsoft.com/office/drawing/2014/main" id="{2311B758-FBCE-4B37-A0FD-CC1045DC7ABD}"/>
               </a:ext>
             </a:extLst>
           </p:cNvPr>
@@ -14183,7 +14183,7 @@
           <p:cNvPr id="24" name="">
             <a:extLst xmlns:a="http://schemas.openxmlformats.org/drawingml/2006/main">
               <a:ext uri="{FF2B5EF4-FFF2-40B4-BE49-F238E27FC236}">
-                <a16:creationId xmlns:a16="http://schemas.microsoft.com/office/drawing/2014/main" id="{C2365F61-45E8-4E1C-A5DD-D8C7AB71C960}"/>
+                <a16:creationId xmlns:a16="http://schemas.microsoft.com/office/drawing/2014/main" id="{670093AA-E8D9-4BBD-9E09-2AAE018224FA}"/>
               </a:ext>
             </a:extLst>
           </p:cNvPr>
@@ -14258,7 +14258,7 @@
           <p:cNvPr id="25" name="">
             <a:extLst xmlns:a="http://schemas.openxmlformats.org/drawingml/2006/main">
               <a:ext uri="{FF2B5EF4-FFF2-40B4-BE49-F238E27FC236}">
-                <a16:creationId xmlns:a16="http://schemas.microsoft.com/office/drawing/2014/main" id="{0F7AEEE2-C4E4-44DC-935A-1EA723E43D08}"/>
+                <a16:creationId xmlns:a16="http://schemas.microsoft.com/office/drawing/2014/main" id="{5B4981BB-AF53-47AA-9FCE-B53D1728B007}"/>
               </a:ext>
             </a:extLst>
           </p:cNvPr>
@@ -14291,7 +14291,7 @@
           <p:cNvPr id="26" name="">
             <a:extLst xmlns:a="http://schemas.openxmlformats.org/drawingml/2006/main">
               <a:ext uri="{FF2B5EF4-FFF2-40B4-BE49-F238E27FC236}">
-                <a16:creationId xmlns:a16="http://schemas.microsoft.com/office/drawing/2014/main" id="{34986B08-ED06-4963-9042-5403E769AF2F}"/>
+                <a16:creationId xmlns:a16="http://schemas.microsoft.com/office/drawing/2014/main" id="{DF492E27-FB88-49CC-A9F1-B3844BBBCB46}"/>
               </a:ext>
             </a:extLst>
           </p:cNvPr>
@@ -14326,7 +14326,7 @@
           <p:cNvPr id="27" name="">
             <a:extLst xmlns:a="http://schemas.openxmlformats.org/drawingml/2006/main">
               <a:ext uri="{FF2B5EF4-FFF2-40B4-BE49-F238E27FC236}">
-                <a16:creationId xmlns:a16="http://schemas.microsoft.com/office/drawing/2014/main" id="{DF38AEC1-108F-4EAA-A912-8A36E7367043}"/>
+                <a16:creationId xmlns:a16="http://schemas.microsoft.com/office/drawing/2014/main" id="{155101BF-9663-457B-ABE7-06379F96999D}"/>
               </a:ext>
             </a:extLst>
           </p:cNvPr>
@@ -14401,7 +14401,7 @@
           <p:cNvPr id="28" name="">
             <a:extLst xmlns:a="http://schemas.openxmlformats.org/drawingml/2006/main">
               <a:ext uri="{FF2B5EF4-FFF2-40B4-BE49-F238E27FC236}">
-                <a16:creationId xmlns:a16="http://schemas.microsoft.com/office/drawing/2014/main" id="{B3E05B27-E176-435B-B717-F49C91ABE861}"/>
+                <a16:creationId xmlns:a16="http://schemas.microsoft.com/office/drawing/2014/main" id="{52214829-D94A-4E1C-B049-8657167D01A7}"/>
               </a:ext>
             </a:extLst>
           </p:cNvPr>
@@ -14457,7 +14457,7 @@
     </p:spTree>
     <p:extLst>
       <p:ext uri="{BB962C8B-B14F-4D97-AF65-F5344CB8AC3E}">
-        <p14:creationId xmlns:p14="http://schemas.microsoft.com/office/powerpoint/2010/main" val="309403498"/>
+        <p14:creationId xmlns:p14="http://schemas.microsoft.com/office/powerpoint/2010/main" val="406573380"/>
       </p:ext>
     </p:extLst>
   </p:cSld>
@@ -14488,7 +14488,7 @@
           <p:cNvPr id="1" name="">
             <a:extLst xmlns:a="http://schemas.openxmlformats.org/drawingml/2006/main">
               <a:ext uri="{FF2B5EF4-FFF2-40B4-BE49-F238E27FC236}">
-                <a16:creationId xmlns:a16="http://schemas.microsoft.com/office/drawing/2014/main" id="{C8C9DF52-20A8-4C14-BD84-F4E6A7111E23}"/>
+                <a16:creationId xmlns:a16="http://schemas.microsoft.com/office/drawing/2014/main" id="{F3AF299F-B2CF-43D0-BA31-D9B8F3EE8952}"/>
               </a:ext>
             </a:extLst>
           </p:cNvPr>
@@ -14523,7 +14523,7 @@
           <p:cNvPr id="2" name="">
             <a:extLst xmlns:a="http://schemas.openxmlformats.org/drawingml/2006/main">
               <a:ext uri="{FF2B5EF4-FFF2-40B4-BE49-F238E27FC236}">
-                <a16:creationId xmlns:a16="http://schemas.microsoft.com/office/drawing/2014/main" id="{C1FA605B-9FC5-43E2-B459-8887F3ECE73F}"/>
+                <a16:creationId xmlns:a16="http://schemas.microsoft.com/office/drawing/2014/main" id="{216777D2-3B28-43D6-9707-79B82AE5500D}"/>
               </a:ext>
             </a:extLst>
           </p:cNvPr>
@@ -14558,7 +14558,7 @@
           <p:cNvPr id="3" name="">
             <a:extLst xmlns:a="http://schemas.openxmlformats.org/drawingml/2006/main">
               <a:ext uri="{FF2B5EF4-FFF2-40B4-BE49-F238E27FC236}">
-                <a16:creationId xmlns:a16="http://schemas.microsoft.com/office/drawing/2014/main" id="{169E2D2B-75FB-40BE-A6FF-FA955513E64D}"/>
+                <a16:creationId xmlns:a16="http://schemas.microsoft.com/office/drawing/2014/main" id="{C1CD6317-57AE-4773-A18D-8A8B1448E694}"/>
               </a:ext>
             </a:extLst>
           </p:cNvPr>
@@ -14616,7 +14616,7 @@
           <p:cNvPr id="4" name="">
             <a:extLst xmlns:a="http://schemas.openxmlformats.org/drawingml/2006/main">
               <a:ext uri="{FF2B5EF4-FFF2-40B4-BE49-F238E27FC236}">
-                <a16:creationId xmlns:a16="http://schemas.microsoft.com/office/drawing/2014/main" id="{FA0779B4-EF98-49DF-BAD1-7DEE511F883A}"/>
+                <a16:creationId xmlns:a16="http://schemas.microsoft.com/office/drawing/2014/main" id="{BFE5A36D-DF7B-43D7-B328-94EF6F7871AC}"/>
               </a:ext>
             </a:extLst>
           </p:cNvPr>
@@ -14674,7 +14674,7 @@
           <p:cNvPr id="5" name="">
             <a:extLst xmlns:a="http://schemas.openxmlformats.org/drawingml/2006/main">
               <a:ext uri="{FF2B5EF4-FFF2-40B4-BE49-F238E27FC236}">
-                <a16:creationId xmlns:a16="http://schemas.microsoft.com/office/drawing/2014/main" id="{B3E366BB-CD1B-4C0A-A3DE-B2A0FCD55C8C}"/>
+                <a16:creationId xmlns:a16="http://schemas.microsoft.com/office/drawing/2014/main" id="{ACAA6933-15C4-43FC-BE07-8F927E3DCF9D}"/>
               </a:ext>
             </a:extLst>
           </p:cNvPr>
@@ -14709,7 +14709,7 @@
           <p:cNvPr id="6" name="">
             <a:extLst xmlns:a="http://schemas.openxmlformats.org/drawingml/2006/main">
               <a:ext uri="{FF2B5EF4-FFF2-40B4-BE49-F238E27FC236}">
-                <a16:creationId xmlns:a16="http://schemas.microsoft.com/office/drawing/2014/main" id="{A217A8D3-365D-4099-95E9-FAB5124F3305}"/>
+                <a16:creationId xmlns:a16="http://schemas.microsoft.com/office/drawing/2014/main" id="{7BED6D43-113B-45AB-8E4A-C54DC1EC5C14}"/>
               </a:ext>
             </a:extLst>
           </p:cNvPr>
@@ -14767,7 +14767,7 @@
           <p:cNvPr id="7" name="">
             <a:extLst xmlns:a="http://schemas.openxmlformats.org/drawingml/2006/main">
               <a:ext uri="{FF2B5EF4-FFF2-40B4-BE49-F238E27FC236}">
-                <a16:creationId xmlns:a16="http://schemas.microsoft.com/office/drawing/2014/main" id="{22D9E7FD-4BC4-4E18-94A6-1DC6CC44990A}"/>
+                <a16:creationId xmlns:a16="http://schemas.microsoft.com/office/drawing/2014/main" id="{EBE1C903-3FE1-490C-BACA-70B2ECAE98ED}"/>
               </a:ext>
             </a:extLst>
           </p:cNvPr>
@@ -14825,7 +14825,7 @@
           <p:cNvPr id="8" name="">
             <a:extLst xmlns:a="http://schemas.openxmlformats.org/drawingml/2006/main">
               <a:ext uri="{FF2B5EF4-FFF2-40B4-BE49-F238E27FC236}">
-                <a16:creationId xmlns:a16="http://schemas.microsoft.com/office/drawing/2014/main" id="{01D4FAA0-7D93-4F1A-B71E-FAE7DCBFD12C}"/>
+                <a16:creationId xmlns:a16="http://schemas.microsoft.com/office/drawing/2014/main" id="{F7327F45-26A1-4807-8C29-DDE02FDBA193}"/>
               </a:ext>
             </a:extLst>
           </p:cNvPr>
@@ -14860,7 +14860,7 @@
           <p:cNvPr id="9" name="">
             <a:extLst xmlns:a="http://schemas.openxmlformats.org/drawingml/2006/main">
               <a:ext uri="{FF2B5EF4-FFF2-40B4-BE49-F238E27FC236}">
-                <a16:creationId xmlns:a16="http://schemas.microsoft.com/office/drawing/2014/main" id="{783B7081-C060-48E7-ABA6-AE82CAD47F15}"/>
+                <a16:creationId xmlns:a16="http://schemas.microsoft.com/office/drawing/2014/main" id="{73BFABA7-4399-4139-95DE-FC7BC86EDF61}"/>
               </a:ext>
             </a:extLst>
           </p:cNvPr>
@@ -14895,7 +14895,7 @@
           <p:cNvPr id="10" name="">
             <a:extLst xmlns:a="http://schemas.openxmlformats.org/drawingml/2006/main">
               <a:ext uri="{FF2B5EF4-FFF2-40B4-BE49-F238E27FC236}">
-                <a16:creationId xmlns:a16="http://schemas.microsoft.com/office/drawing/2014/main" id="{36585DD5-0D13-4760-8F85-1FF1356942EA}"/>
+                <a16:creationId xmlns:a16="http://schemas.microsoft.com/office/drawing/2014/main" id="{21F21696-26E6-4F70-B062-F3D67A16364F}"/>
               </a:ext>
             </a:extLst>
           </p:cNvPr>
@@ -14953,7 +14953,7 @@
           <p:cNvPr id="11" name="">
             <a:extLst xmlns:a="http://schemas.openxmlformats.org/drawingml/2006/main">
               <a:ext uri="{FF2B5EF4-FFF2-40B4-BE49-F238E27FC236}">
-                <a16:creationId xmlns:a16="http://schemas.microsoft.com/office/drawing/2014/main" id="{F47FB737-F765-4E6C-BEEE-2728F31F96CA}"/>
+                <a16:creationId xmlns:a16="http://schemas.microsoft.com/office/drawing/2014/main" id="{8CAC09A8-12E7-44CB-A6B2-4DE84637EBE4}"/>
               </a:ext>
             </a:extLst>
           </p:cNvPr>
@@ -15045,7 +15045,7 @@
           <p:cNvPr id="12" name="">
             <a:extLst xmlns:a="http://schemas.openxmlformats.org/drawingml/2006/main">
               <a:ext uri="{FF2B5EF4-FFF2-40B4-BE49-F238E27FC236}">
-                <a16:creationId xmlns:a16="http://schemas.microsoft.com/office/drawing/2014/main" id="{A0DAB3D3-D951-4E35-863A-4E8D69C5BE24}"/>
+                <a16:creationId xmlns:a16="http://schemas.microsoft.com/office/drawing/2014/main" id="{F1C0B046-ED8A-4731-B685-3487683591DD}"/>
               </a:ext>
             </a:extLst>
           </p:cNvPr>
@@ -15080,7 +15080,7 @@
           <p:cNvPr id="13" name="">
             <a:extLst xmlns:a="http://schemas.openxmlformats.org/drawingml/2006/main">
               <a:ext uri="{FF2B5EF4-FFF2-40B4-BE49-F238E27FC236}">
-                <a16:creationId xmlns:a16="http://schemas.microsoft.com/office/drawing/2014/main" id="{3A17810E-5FCA-490C-8296-1303CFDA65CE}"/>
+                <a16:creationId xmlns:a16="http://schemas.microsoft.com/office/drawing/2014/main" id="{DE0DC1A8-2F14-4D9A-ADF0-14C28603E30E}"/>
               </a:ext>
             </a:extLst>
           </p:cNvPr>
@@ -15115,7 +15115,7 @@
           <p:cNvPr id="14" name="">
             <a:extLst xmlns:a="http://schemas.openxmlformats.org/drawingml/2006/main">
               <a:ext uri="{FF2B5EF4-FFF2-40B4-BE49-F238E27FC236}">
-                <a16:creationId xmlns:a16="http://schemas.microsoft.com/office/drawing/2014/main" id="{DBF404C6-E509-405A-8F77-8FA616620570}"/>
+                <a16:creationId xmlns:a16="http://schemas.microsoft.com/office/drawing/2014/main" id="{CD5DEF3F-350F-4BF0-BD21-CF97D534C701}"/>
               </a:ext>
             </a:extLst>
           </p:cNvPr>
@@ -15173,7 +15173,7 @@
           <p:cNvPr id="15" name="">
             <a:extLst xmlns:a="http://schemas.openxmlformats.org/drawingml/2006/main">
               <a:ext uri="{FF2B5EF4-FFF2-40B4-BE49-F238E27FC236}">
-                <a16:creationId xmlns:a16="http://schemas.microsoft.com/office/drawing/2014/main" id="{8FF8C534-30C4-4831-AB97-0B905CB60457}"/>
+                <a16:creationId xmlns:a16="http://schemas.microsoft.com/office/drawing/2014/main" id="{0EC0D9E6-5941-43FE-BBE7-2B8CE1D181DF}"/>
               </a:ext>
             </a:extLst>
           </p:cNvPr>
@@ -15265,7 +15265,7 @@
           <p:cNvPr id="16" name="">
             <a:extLst xmlns:a="http://schemas.openxmlformats.org/drawingml/2006/main">
               <a:ext uri="{FF2B5EF4-FFF2-40B4-BE49-F238E27FC236}">
-                <a16:creationId xmlns:a16="http://schemas.microsoft.com/office/drawing/2014/main" id="{06B4DD56-DA16-4459-A407-728844F7194D}"/>
+                <a16:creationId xmlns:a16="http://schemas.microsoft.com/office/drawing/2014/main" id="{0B01817F-728B-45E0-A614-7C6D92A6F021}"/>
               </a:ext>
             </a:extLst>
           </p:cNvPr>
@@ -15300,7 +15300,7 @@
           <p:cNvPr id="17" name="">
             <a:extLst xmlns:a="http://schemas.openxmlformats.org/drawingml/2006/main">
               <a:ext uri="{FF2B5EF4-FFF2-40B4-BE49-F238E27FC236}">
-                <a16:creationId xmlns:a16="http://schemas.microsoft.com/office/drawing/2014/main" id="{113F0918-BE30-4930-B77F-58AD7C9144E3}"/>
+                <a16:creationId xmlns:a16="http://schemas.microsoft.com/office/drawing/2014/main" id="{79B96B8E-E43E-4DB8-9BF5-189C47A753D1}"/>
               </a:ext>
             </a:extLst>
           </p:cNvPr>
@@ -15335,7 +15335,7 @@
           <p:cNvPr id="18" name="">
             <a:extLst xmlns:a="http://schemas.openxmlformats.org/drawingml/2006/main">
               <a:ext uri="{FF2B5EF4-FFF2-40B4-BE49-F238E27FC236}">
-                <a16:creationId xmlns:a16="http://schemas.microsoft.com/office/drawing/2014/main" id="{938C4E4F-DB98-4010-9C8D-59D24CD68B48}"/>
+                <a16:creationId xmlns:a16="http://schemas.microsoft.com/office/drawing/2014/main" id="{B76EF932-6C19-4CB7-A15E-C54744293EC8}"/>
               </a:ext>
             </a:extLst>
           </p:cNvPr>
@@ -15393,7 +15393,7 @@
           <p:cNvPr id="19" name="">
             <a:extLst xmlns:a="http://schemas.openxmlformats.org/drawingml/2006/main">
               <a:ext uri="{FF2B5EF4-FFF2-40B4-BE49-F238E27FC236}">
-                <a16:creationId xmlns:a16="http://schemas.microsoft.com/office/drawing/2014/main" id="{E946DCDD-AB39-45A7-8BB3-7D8FD70AD11B}"/>
+                <a16:creationId xmlns:a16="http://schemas.microsoft.com/office/drawing/2014/main" id="{3C7A11A1-997D-4E33-BE4C-D9C5ECA0F775}"/>
               </a:ext>
             </a:extLst>
           </p:cNvPr>
@@ -15502,7 +15502,7 @@
           <p:cNvPr id="20" name="">
             <a:extLst xmlns:a="http://schemas.openxmlformats.org/drawingml/2006/main">
               <a:ext uri="{FF2B5EF4-FFF2-40B4-BE49-F238E27FC236}">
-                <a16:creationId xmlns:a16="http://schemas.microsoft.com/office/drawing/2014/main" id="{6F7DFDF7-86A6-4BD3-83D5-047CECEAF25E}"/>
+                <a16:creationId xmlns:a16="http://schemas.microsoft.com/office/drawing/2014/main" id="{F9A40C9C-A341-4024-9334-1BF66A2D113B}"/>
               </a:ext>
             </a:extLst>
           </p:cNvPr>
@@ -15537,7 +15537,7 @@
           <p:cNvPr id="21" name="">
             <a:extLst xmlns:a="http://schemas.openxmlformats.org/drawingml/2006/main">
               <a:ext uri="{FF2B5EF4-FFF2-40B4-BE49-F238E27FC236}">
-                <a16:creationId xmlns:a16="http://schemas.microsoft.com/office/drawing/2014/main" id="{4F23506B-4AB4-40FA-B712-8529B31DD83A}"/>
+                <a16:creationId xmlns:a16="http://schemas.microsoft.com/office/drawing/2014/main" id="{0AC0FDCB-F3F6-4762-8431-227D14C4B4B2}"/>
               </a:ext>
             </a:extLst>
           </p:cNvPr>
@@ -15572,7 +15572,7 @@
           <p:cNvPr id="22" name="">
             <a:extLst xmlns:a="http://schemas.openxmlformats.org/drawingml/2006/main">
               <a:ext uri="{FF2B5EF4-FFF2-40B4-BE49-F238E27FC236}">
-                <a16:creationId xmlns:a16="http://schemas.microsoft.com/office/drawing/2014/main" id="{D249D57B-3474-4E4C-88C0-AF1AAD7292D6}"/>
+                <a16:creationId xmlns:a16="http://schemas.microsoft.com/office/drawing/2014/main" id="{1C666F88-1B5C-4189-9E78-90C81D1AD458}"/>
               </a:ext>
             </a:extLst>
           </p:cNvPr>
@@ -15630,7 +15630,7 @@
           <p:cNvPr id="23" name="">
             <a:extLst xmlns:a="http://schemas.openxmlformats.org/drawingml/2006/main">
               <a:ext uri="{FF2B5EF4-FFF2-40B4-BE49-F238E27FC236}">
-                <a16:creationId xmlns:a16="http://schemas.microsoft.com/office/drawing/2014/main" id="{6A0BBD60-4A6E-434E-B891-0F296F5DE932}"/>
+                <a16:creationId xmlns:a16="http://schemas.microsoft.com/office/drawing/2014/main" id="{04E193D2-DA19-4225-8CC3-AAEA84792CEF}"/>
               </a:ext>
             </a:extLst>
           </p:cNvPr>
@@ -15739,7 +15739,7 @@
           <p:cNvPr id="24" name="">
             <a:extLst xmlns:a="http://schemas.openxmlformats.org/drawingml/2006/main">
               <a:ext uri="{FF2B5EF4-FFF2-40B4-BE49-F238E27FC236}">
-                <a16:creationId xmlns:a16="http://schemas.microsoft.com/office/drawing/2014/main" id="{A3D7B608-12AE-4225-9C55-D9F6A8798793}"/>
+                <a16:creationId xmlns:a16="http://schemas.microsoft.com/office/drawing/2014/main" id="{05B26AA6-911B-45E2-BAC1-C19F21B19AAA}"/>
               </a:ext>
             </a:extLst>
           </p:cNvPr>
@@ -15774,7 +15774,7 @@
           <p:cNvPr id="25" name="">
             <a:extLst xmlns:a="http://schemas.openxmlformats.org/drawingml/2006/main">
               <a:ext uri="{FF2B5EF4-FFF2-40B4-BE49-F238E27FC236}">
-                <a16:creationId xmlns:a16="http://schemas.microsoft.com/office/drawing/2014/main" id="{22BA354F-EC2C-4C95-9DCE-65D3F414D371}"/>
+                <a16:creationId xmlns:a16="http://schemas.microsoft.com/office/drawing/2014/main" id="{A8D654E3-AA84-4E8C-ADC8-271176C83803}"/>
               </a:ext>
             </a:extLst>
           </p:cNvPr>
@@ -15809,7 +15809,7 @@
           <p:cNvPr id="26" name="">
             <a:extLst xmlns:a="http://schemas.openxmlformats.org/drawingml/2006/main">
               <a:ext uri="{FF2B5EF4-FFF2-40B4-BE49-F238E27FC236}">
-                <a16:creationId xmlns:a16="http://schemas.microsoft.com/office/drawing/2014/main" id="{F1DEFEC9-B346-4BE5-836B-088ED1D06EF2}"/>
+                <a16:creationId xmlns:a16="http://schemas.microsoft.com/office/drawing/2014/main" id="{CD420781-FB58-403F-97FC-95106F71C079}"/>
               </a:ext>
             </a:extLst>
           </p:cNvPr>
@@ -15867,7 +15867,7 @@
           <p:cNvPr id="27" name="">
             <a:extLst xmlns:a="http://schemas.openxmlformats.org/drawingml/2006/main">
               <a:ext uri="{FF2B5EF4-FFF2-40B4-BE49-F238E27FC236}">
-                <a16:creationId xmlns:a16="http://schemas.microsoft.com/office/drawing/2014/main" id="{39BB8F8E-410D-4633-A4CA-57FE5B3022E6}"/>
+                <a16:creationId xmlns:a16="http://schemas.microsoft.com/office/drawing/2014/main" id="{40E3CE43-6286-49AE-AB00-173D34215491}"/>
               </a:ext>
             </a:extLst>
           </p:cNvPr>
@@ -15942,7 +15942,7 @@
           <p:cNvPr id="28" name="">
             <a:extLst xmlns:a="http://schemas.openxmlformats.org/drawingml/2006/main">
               <a:ext uri="{FF2B5EF4-FFF2-40B4-BE49-F238E27FC236}">
-                <a16:creationId xmlns:a16="http://schemas.microsoft.com/office/drawing/2014/main" id="{834E9C4F-2E31-484A-A3F3-1F9F4E6D8475}"/>
+                <a16:creationId xmlns:a16="http://schemas.microsoft.com/office/drawing/2014/main" id="{3038857D-3BDE-4170-9AA5-1C6F5A50B8BF}"/>
               </a:ext>
             </a:extLst>
           </p:cNvPr>
@@ -15954,11 +15954,11 @@
         <p:spPr>
           <a:xfrm xmlns:a="http://schemas.openxmlformats.org/drawingml/2006/main" rot="0">
             <a:off x="609600" y="3429000"/>
-            <a:ext cx="3429000" cy="2571750"/>
+            <a:ext cx="2514600" cy="2571750"/>
           </a:xfrm>
           <a:prstGeom xmlns:a="http://schemas.openxmlformats.org/drawingml/2006/main" prst="roundRect">
             <a:avLst>
-              <a:gd name="adj" fmla="val 2963"/>
+              <a:gd name="adj" fmla="val 3030"/>
             </a:avLst>
           </a:prstGeom>
           <a:solidFill xmlns:a="http://schemas.openxmlformats.org/drawingml/2006/main">
@@ -15977,7 +15977,7 @@
           <p:cNvPr id="29" name="">
             <a:extLst xmlns:a="http://schemas.openxmlformats.org/drawingml/2006/main">
               <a:ext uri="{FF2B5EF4-FFF2-40B4-BE49-F238E27FC236}">
-                <a16:creationId xmlns:a16="http://schemas.microsoft.com/office/drawing/2014/main" id="{E5D1AF06-1149-4153-BB26-95B346A85291}"/>
+                <a16:creationId xmlns:a16="http://schemas.microsoft.com/office/drawing/2014/main" id="{FCD23FF3-4612-40DD-B596-49B864278368}"/>
               </a:ext>
             </a:extLst>
           </p:cNvPr>
@@ -15989,7 +15989,7 @@
         <p:spPr>
           <a:xfrm xmlns:a="http://schemas.openxmlformats.org/drawingml/2006/main" rot="0">
             <a:off x="609600" y="3429000"/>
-            <a:ext cx="3429000" cy="76200"/>
+            <a:ext cx="2514600" cy="76200"/>
           </a:xfrm>
           <a:prstGeom xmlns:a="http://schemas.openxmlformats.org/drawingml/2006/main" prst="rect">
             <a:avLst/>
@@ -16012,7 +16012,7 @@
           <p:cNvPr id="30" name="">
             <a:extLst xmlns:a="http://schemas.openxmlformats.org/drawingml/2006/main">
               <a:ext uri="{FF2B5EF4-FFF2-40B4-BE49-F238E27FC236}">
-                <a16:creationId xmlns:a16="http://schemas.microsoft.com/office/drawing/2014/main" id="{ADF22DE0-680F-4B21-A948-E4B23869B917}"/>
+                <a16:creationId xmlns:a16="http://schemas.microsoft.com/office/drawing/2014/main" id="{174F0524-850B-4CCF-BAE0-001B21CD9BB3}"/>
               </a:ext>
             </a:extLst>
           </p:cNvPr>
@@ -16024,7 +16024,7 @@
         <p:spPr>
           <a:xfrm xmlns:a="http://schemas.openxmlformats.org/drawingml/2006/main" rot="0">
             <a:off x="800100" y="3600450"/>
-            <a:ext cx="3048000" cy="266700"/>
+            <a:ext cx="2133600" cy="266700"/>
           </a:xfrm>
           <a:prstGeom xmlns:a="http://schemas.openxmlformats.org/drawingml/2006/main" prst="rect">
             <a:avLst/>
@@ -16070,19 +16070,19 @@
           <p:cNvPr id="31" name="">
             <a:extLst xmlns:a="http://schemas.openxmlformats.org/drawingml/2006/main">
               <a:ext uri="{FF2B5EF4-FFF2-40B4-BE49-F238E27FC236}">
-                <a16:creationId xmlns:a16="http://schemas.microsoft.com/office/drawing/2014/main" id="{590A0B88-7977-4E53-A2A3-0C3B70EC899E}"/>
-              </a:ext>
-            </a:extLst>
-          </p:cNvPr>
-          <p:cNvSpPr>
-            <a:spLocks xmlns:a="http://schemas.openxmlformats.org/drawingml/2006/main" noGrp="1"/>
-          </p:cNvSpPr>
-          <p:nvPr/>
-        </p:nvSpPr>
-        <p:spPr>
-          <a:xfrm xmlns:a="http://schemas.openxmlformats.org/drawingml/2006/main" rot="0">
-            <a:off x="838200" y="3943350"/>
-            <a:ext cx="2952750" cy="1466850"/>
+                <a16:creationId xmlns:a16="http://schemas.microsoft.com/office/drawing/2014/main" id="{394B4E75-6790-45C3-B10D-A29E6BCE1134}"/>
+              </a:ext>
+            </a:extLst>
+          </p:cNvPr>
+          <p:cNvSpPr>
+            <a:spLocks xmlns:a="http://schemas.openxmlformats.org/drawingml/2006/main" noGrp="1"/>
+          </p:cNvSpPr>
+          <p:nvPr/>
+        </p:nvSpPr>
+        <p:spPr>
+          <a:xfrm xmlns:a="http://schemas.openxmlformats.org/drawingml/2006/main" rot="0">
+            <a:off x="819150" y="3943350"/>
+            <a:ext cx="2095500" cy="1466850"/>
           </a:xfrm>
           <a:prstGeom xmlns:a="http://schemas.openxmlformats.org/drawingml/2006/main" prst="rect">
             <a:avLst/>
@@ -16106,14 +16106,14 @@
           <a:lstStyle xmlns:a="http://schemas.openxmlformats.org/drawingml/2006/main"/>
           <a:p xmlns:a="http://schemas.openxmlformats.org/drawingml/2006/main">
             <a:pPr algn="l">
-              <a:defRPr sz="1200" b="0">
-                <a:solidFill>
-                  <a:srgbClr val="172026"/>
-                </a:solidFill>
-              </a:defRPr>
-            </a:pPr>
-            <a:r>
-              <a:rPr sz="1200" b="0">
+              <a:defRPr sz="1125" b="0">
+                <a:solidFill>
+                  <a:srgbClr val="172026"/>
+                </a:solidFill>
+              </a:defRPr>
+            </a:pPr>
+            <a:r>
+              <a:rPr sz="1125" b="0">
                 <a:solidFill>
                   <a:srgbClr val="172026"/>
                 </a:solidFill>
@@ -16123,14 +16123,14 @@
           </a:p>
           <a:p xmlns:a="http://schemas.openxmlformats.org/drawingml/2006/main">
             <a:pPr algn="l">
-              <a:defRPr sz="1200" b="0">
-                <a:solidFill>
-                  <a:srgbClr val="172026"/>
-                </a:solidFill>
-              </a:defRPr>
-            </a:pPr>
-            <a:r>
-              <a:rPr sz="1200" b="0">
+              <a:defRPr sz="1125" b="0">
+                <a:solidFill>
+                  <a:srgbClr val="172026"/>
+                </a:solidFill>
+              </a:defRPr>
+            </a:pPr>
+            <a:r>
+              <a:rPr sz="1125" b="0">
                 <a:solidFill>
                   <a:srgbClr val="172026"/>
                 </a:solidFill>
@@ -16140,14 +16140,14 @@
           </a:p>
           <a:p xmlns:a="http://schemas.openxmlformats.org/drawingml/2006/main">
             <a:pPr algn="l">
-              <a:defRPr sz="1200" b="0">
-                <a:solidFill>
-                  <a:srgbClr val="172026"/>
-                </a:solidFill>
-              </a:defRPr>
-            </a:pPr>
-            <a:r>
-              <a:rPr sz="1200" b="0">
+              <a:defRPr sz="1125" b="0">
+                <a:solidFill>
+                  <a:srgbClr val="172026"/>
+                </a:solidFill>
+              </a:defRPr>
+            </a:pPr>
+            <a:r>
+              <a:rPr sz="1125" b="0">
                 <a:solidFill>
                   <a:srgbClr val="172026"/>
                 </a:solidFill>
@@ -16157,14 +16157,14 @@
           </a:p>
           <a:p xmlns:a="http://schemas.openxmlformats.org/drawingml/2006/main">
             <a:pPr algn="l">
-              <a:defRPr sz="1200" b="0">
-                <a:solidFill>
-                  <a:srgbClr val="172026"/>
-                </a:solidFill>
-              </a:defRPr>
-            </a:pPr>
-            <a:r>
-              <a:rPr sz="1200" b="0">
+              <a:defRPr sz="1125" b="0">
+                <a:solidFill>
+                  <a:srgbClr val="172026"/>
+                </a:solidFill>
+              </a:defRPr>
+            </a:pPr>
+            <a:r>
+              <a:rPr sz="1125" b="0">
                 <a:solidFill>
                   <a:srgbClr val="172026"/>
                 </a:solidFill>
@@ -16179,23 +16179,23 @@
           <p:cNvPr id="32" name="">
             <a:extLst xmlns:a="http://schemas.openxmlformats.org/drawingml/2006/main">
               <a:ext uri="{FF2B5EF4-FFF2-40B4-BE49-F238E27FC236}">
-                <a16:creationId xmlns:a16="http://schemas.microsoft.com/office/drawing/2014/main" id="{192086DF-9557-48CA-A00C-BAE9090BA615}"/>
-              </a:ext>
-            </a:extLst>
-          </p:cNvPr>
-          <p:cNvSpPr>
-            <a:spLocks xmlns:a="http://schemas.openxmlformats.org/drawingml/2006/main" noGrp="1"/>
-          </p:cNvSpPr>
-          <p:nvPr/>
-        </p:nvSpPr>
-        <p:spPr>
-          <a:xfrm xmlns:a="http://schemas.openxmlformats.org/drawingml/2006/main" rot="0">
-            <a:off x="4381500" y="3429000"/>
-            <a:ext cx="3429000" cy="2571750"/>
+                <a16:creationId xmlns:a16="http://schemas.microsoft.com/office/drawing/2014/main" id="{A6ED3FE1-A0D0-49E0-B99F-693D31BFF802}"/>
+              </a:ext>
+            </a:extLst>
+          </p:cNvPr>
+          <p:cNvSpPr>
+            <a:spLocks xmlns:a="http://schemas.openxmlformats.org/drawingml/2006/main" noGrp="1"/>
+          </p:cNvSpPr>
+          <p:nvPr/>
+        </p:nvSpPr>
+        <p:spPr>
+          <a:xfrm xmlns:a="http://schemas.openxmlformats.org/drawingml/2006/main" rot="0">
+            <a:off x="3429000" y="3429000"/>
+            <a:ext cx="2514600" cy="2571750"/>
           </a:xfrm>
           <a:prstGeom xmlns:a="http://schemas.openxmlformats.org/drawingml/2006/main" prst="roundRect">
             <a:avLst>
-              <a:gd name="adj" fmla="val 2963"/>
+              <a:gd name="adj" fmla="val 3030"/>
             </a:avLst>
           </a:prstGeom>
           <a:solidFill xmlns:a="http://schemas.openxmlformats.org/drawingml/2006/main">
@@ -16214,19 +16214,19 @@
           <p:cNvPr id="33" name="">
             <a:extLst xmlns:a="http://schemas.openxmlformats.org/drawingml/2006/main">
               <a:ext uri="{FF2B5EF4-FFF2-40B4-BE49-F238E27FC236}">
-                <a16:creationId xmlns:a16="http://schemas.microsoft.com/office/drawing/2014/main" id="{E442BE84-AE93-42F5-82DA-BD17AE1E2340}"/>
-              </a:ext>
-            </a:extLst>
-          </p:cNvPr>
-          <p:cNvSpPr>
-            <a:spLocks xmlns:a="http://schemas.openxmlformats.org/drawingml/2006/main" noGrp="1"/>
-          </p:cNvSpPr>
-          <p:nvPr/>
-        </p:nvSpPr>
-        <p:spPr>
-          <a:xfrm xmlns:a="http://schemas.openxmlformats.org/drawingml/2006/main" rot="0">
-            <a:off x="4381500" y="3429000"/>
-            <a:ext cx="3429000" cy="76200"/>
+                <a16:creationId xmlns:a16="http://schemas.microsoft.com/office/drawing/2014/main" id="{220575B7-FD2D-45A2-94FB-8985EFDCEAD0}"/>
+              </a:ext>
+            </a:extLst>
+          </p:cNvPr>
+          <p:cNvSpPr>
+            <a:spLocks xmlns:a="http://schemas.openxmlformats.org/drawingml/2006/main" noGrp="1"/>
+          </p:cNvSpPr>
+          <p:nvPr/>
+        </p:nvSpPr>
+        <p:spPr>
+          <a:xfrm xmlns:a="http://schemas.openxmlformats.org/drawingml/2006/main" rot="0">
+            <a:off x="3429000" y="3429000"/>
+            <a:ext cx="2514600" cy="76200"/>
           </a:xfrm>
           <a:prstGeom xmlns:a="http://schemas.openxmlformats.org/drawingml/2006/main" prst="rect">
             <a:avLst/>
@@ -16249,19 +16249,19 @@
           <p:cNvPr id="34" name="">
             <a:extLst xmlns:a="http://schemas.openxmlformats.org/drawingml/2006/main">
               <a:ext uri="{FF2B5EF4-FFF2-40B4-BE49-F238E27FC236}">
-                <a16:creationId xmlns:a16="http://schemas.microsoft.com/office/drawing/2014/main" id="{30D885D5-F036-414C-B773-65A7F340A277}"/>
-              </a:ext>
-            </a:extLst>
-          </p:cNvPr>
-          <p:cNvSpPr>
-            <a:spLocks xmlns:a="http://schemas.openxmlformats.org/drawingml/2006/main" noGrp="1"/>
-          </p:cNvSpPr>
-          <p:nvPr/>
-        </p:nvSpPr>
-        <p:spPr>
-          <a:xfrm xmlns:a="http://schemas.openxmlformats.org/drawingml/2006/main" rot="0">
-            <a:off x="4572000" y="3600450"/>
-            <a:ext cx="3048000" cy="266700"/>
+                <a16:creationId xmlns:a16="http://schemas.microsoft.com/office/drawing/2014/main" id="{00E66201-0D14-4344-881E-969D9F768736}"/>
+              </a:ext>
+            </a:extLst>
+          </p:cNvPr>
+          <p:cNvSpPr>
+            <a:spLocks xmlns:a="http://schemas.openxmlformats.org/drawingml/2006/main" noGrp="1"/>
+          </p:cNvSpPr>
+          <p:nvPr/>
+        </p:nvSpPr>
+        <p:spPr>
+          <a:xfrm xmlns:a="http://schemas.openxmlformats.org/drawingml/2006/main" rot="0">
+            <a:off x="3619500" y="3600450"/>
+            <a:ext cx="2133600" cy="266700"/>
           </a:xfrm>
           <a:prstGeom xmlns:a="http://schemas.openxmlformats.org/drawingml/2006/main" prst="rect">
             <a:avLst/>
@@ -16307,19 +16307,19 @@
           <p:cNvPr id="35" name="">
             <a:extLst xmlns:a="http://schemas.openxmlformats.org/drawingml/2006/main">
               <a:ext uri="{FF2B5EF4-FFF2-40B4-BE49-F238E27FC236}">
-                <a16:creationId xmlns:a16="http://schemas.microsoft.com/office/drawing/2014/main" id="{9362549D-F081-4974-BAA1-64F03612CCA7}"/>
-              </a:ext>
-            </a:extLst>
-          </p:cNvPr>
-          <p:cNvSpPr>
-            <a:spLocks xmlns:a="http://schemas.openxmlformats.org/drawingml/2006/main" noGrp="1"/>
-          </p:cNvSpPr>
-          <p:nvPr/>
-        </p:nvSpPr>
-        <p:spPr>
-          <a:xfrm xmlns:a="http://schemas.openxmlformats.org/drawingml/2006/main" rot="0">
-            <a:off x="4610100" y="3943350"/>
-            <a:ext cx="2952750" cy="1466850"/>
+                <a16:creationId xmlns:a16="http://schemas.microsoft.com/office/drawing/2014/main" id="{151939B6-020C-4779-AEFF-33A74F32C8A4}"/>
+              </a:ext>
+            </a:extLst>
+          </p:cNvPr>
+          <p:cNvSpPr>
+            <a:spLocks xmlns:a="http://schemas.openxmlformats.org/drawingml/2006/main" noGrp="1"/>
+          </p:cNvSpPr>
+          <p:nvPr/>
+        </p:nvSpPr>
+        <p:spPr>
+          <a:xfrm xmlns:a="http://schemas.openxmlformats.org/drawingml/2006/main" rot="0">
+            <a:off x="3638550" y="3943350"/>
+            <a:ext cx="2095500" cy="1466850"/>
           </a:xfrm>
           <a:prstGeom xmlns:a="http://schemas.openxmlformats.org/drawingml/2006/main" prst="rect">
             <a:avLst/>
@@ -16343,14 +16343,14 @@
           <a:lstStyle xmlns:a="http://schemas.openxmlformats.org/drawingml/2006/main"/>
           <a:p xmlns:a="http://schemas.openxmlformats.org/drawingml/2006/main">
             <a:pPr algn="l">
-              <a:defRPr sz="1200" b="0">
-                <a:solidFill>
-                  <a:srgbClr val="172026"/>
-                </a:solidFill>
-              </a:defRPr>
-            </a:pPr>
-            <a:r>
-              <a:rPr sz="1200" b="0">
+              <a:defRPr sz="1125" b="0">
+                <a:solidFill>
+                  <a:srgbClr val="172026"/>
+                </a:solidFill>
+              </a:defRPr>
+            </a:pPr>
+            <a:r>
+              <a:rPr sz="1125" b="0">
                 <a:solidFill>
                   <a:srgbClr val="172026"/>
                 </a:solidFill>
@@ -16360,14 +16360,14 @@
           </a:p>
           <a:p xmlns:a="http://schemas.openxmlformats.org/drawingml/2006/main">
             <a:pPr algn="l">
-              <a:defRPr sz="1200" b="0">
-                <a:solidFill>
-                  <a:srgbClr val="172026"/>
-                </a:solidFill>
-              </a:defRPr>
-            </a:pPr>
-            <a:r>
-              <a:rPr sz="1200" b="0">
+              <a:defRPr sz="1125" b="0">
+                <a:solidFill>
+                  <a:srgbClr val="172026"/>
+                </a:solidFill>
+              </a:defRPr>
+            </a:pPr>
+            <a:r>
+              <a:rPr sz="1125" b="0">
                 <a:solidFill>
                   <a:srgbClr val="172026"/>
                 </a:solidFill>
@@ -16377,14 +16377,14 @@
           </a:p>
           <a:p xmlns:a="http://schemas.openxmlformats.org/drawingml/2006/main">
             <a:pPr algn="l">
-              <a:defRPr sz="1200" b="0">
-                <a:solidFill>
-                  <a:srgbClr val="172026"/>
-                </a:solidFill>
-              </a:defRPr>
-            </a:pPr>
-            <a:r>
-              <a:rPr sz="1200" b="0">
+              <a:defRPr sz="1125" b="0">
+                <a:solidFill>
+                  <a:srgbClr val="172026"/>
+                </a:solidFill>
+              </a:defRPr>
+            </a:pPr>
+            <a:r>
+              <a:rPr sz="1125" b="0">
                 <a:solidFill>
                   <a:srgbClr val="172026"/>
                 </a:solidFill>
@@ -16394,14 +16394,14 @@
           </a:p>
           <a:p xmlns:a="http://schemas.openxmlformats.org/drawingml/2006/main">
             <a:pPr algn="l">
-              <a:defRPr sz="1200" b="0">
-                <a:solidFill>
-                  <a:srgbClr val="172026"/>
-                </a:solidFill>
-              </a:defRPr>
-            </a:pPr>
-            <a:r>
-              <a:rPr sz="1200" b="0">
+              <a:defRPr sz="1125" b="0">
+                <a:solidFill>
+                  <a:srgbClr val="172026"/>
+                </a:solidFill>
+              </a:defRPr>
+            </a:pPr>
+            <a:r>
+              <a:rPr sz="1125" b="0">
                 <a:solidFill>
                   <a:srgbClr val="172026"/>
                 </a:solidFill>
@@ -16416,23 +16416,23 @@
           <p:cNvPr id="36" name="">
             <a:extLst xmlns:a="http://schemas.openxmlformats.org/drawingml/2006/main">
               <a:ext uri="{FF2B5EF4-FFF2-40B4-BE49-F238E27FC236}">
-                <a16:creationId xmlns:a16="http://schemas.microsoft.com/office/drawing/2014/main" id="{9CAE96C6-C7AE-4910-9BE2-6D01B6631082}"/>
-              </a:ext>
-            </a:extLst>
-          </p:cNvPr>
-          <p:cNvSpPr>
-            <a:spLocks xmlns:a="http://schemas.openxmlformats.org/drawingml/2006/main" noGrp="1"/>
-          </p:cNvSpPr>
-          <p:nvPr/>
-        </p:nvSpPr>
-        <p:spPr>
-          <a:xfrm xmlns:a="http://schemas.openxmlformats.org/drawingml/2006/main" rot="0">
-            <a:off x="8153400" y="3429000"/>
-            <a:ext cx="3429000" cy="2571750"/>
+                <a16:creationId xmlns:a16="http://schemas.microsoft.com/office/drawing/2014/main" id="{4E9AFB7E-C64F-4F9D-8A2A-30D90DF35DCE}"/>
+              </a:ext>
+            </a:extLst>
+          </p:cNvPr>
+          <p:cNvSpPr>
+            <a:spLocks xmlns:a="http://schemas.openxmlformats.org/drawingml/2006/main" noGrp="1"/>
+          </p:cNvSpPr>
+          <p:nvPr/>
+        </p:nvSpPr>
+        <p:spPr>
+          <a:xfrm xmlns:a="http://schemas.openxmlformats.org/drawingml/2006/main" rot="0">
+            <a:off x="6248400" y="3429000"/>
+            <a:ext cx="2514600" cy="2571750"/>
           </a:xfrm>
           <a:prstGeom xmlns:a="http://schemas.openxmlformats.org/drawingml/2006/main" prst="roundRect">
             <a:avLst>
-              <a:gd name="adj" fmla="val 2963"/>
+              <a:gd name="adj" fmla="val 3030"/>
             </a:avLst>
           </a:prstGeom>
           <a:solidFill xmlns:a="http://schemas.openxmlformats.org/drawingml/2006/main">
@@ -16451,19 +16451,19 @@
           <p:cNvPr id="37" name="">
             <a:extLst xmlns:a="http://schemas.openxmlformats.org/drawingml/2006/main">
               <a:ext uri="{FF2B5EF4-FFF2-40B4-BE49-F238E27FC236}">
-                <a16:creationId xmlns:a16="http://schemas.microsoft.com/office/drawing/2014/main" id="{44C910DD-FAE5-46F4-8A0C-EEF1854578BB}"/>
-              </a:ext>
-            </a:extLst>
-          </p:cNvPr>
-          <p:cNvSpPr>
-            <a:spLocks xmlns:a="http://schemas.openxmlformats.org/drawingml/2006/main" noGrp="1"/>
-          </p:cNvSpPr>
-          <p:nvPr/>
-        </p:nvSpPr>
-        <p:spPr>
-          <a:xfrm xmlns:a="http://schemas.openxmlformats.org/drawingml/2006/main" rot="0">
-            <a:off x="8153400" y="3429000"/>
-            <a:ext cx="3429000" cy="76200"/>
+                <a16:creationId xmlns:a16="http://schemas.microsoft.com/office/drawing/2014/main" id="{5C32EB0B-E09F-43A1-9299-E155AD923E9D}"/>
+              </a:ext>
+            </a:extLst>
+          </p:cNvPr>
+          <p:cNvSpPr>
+            <a:spLocks xmlns:a="http://schemas.openxmlformats.org/drawingml/2006/main" noGrp="1"/>
+          </p:cNvSpPr>
+          <p:nvPr/>
+        </p:nvSpPr>
+        <p:spPr>
+          <a:xfrm xmlns:a="http://schemas.openxmlformats.org/drawingml/2006/main" rot="0">
+            <a:off x="6248400" y="3429000"/>
+            <a:ext cx="2514600" cy="76200"/>
           </a:xfrm>
           <a:prstGeom xmlns:a="http://schemas.openxmlformats.org/drawingml/2006/main" prst="rect">
             <a:avLst/>
@@ -16486,19 +16486,19 @@
           <p:cNvPr id="38" name="">
             <a:extLst xmlns:a="http://schemas.openxmlformats.org/drawingml/2006/main">
               <a:ext uri="{FF2B5EF4-FFF2-40B4-BE49-F238E27FC236}">
-                <a16:creationId xmlns:a16="http://schemas.microsoft.com/office/drawing/2014/main" id="{69712934-6A31-4AAD-B728-0524316DDEA7}"/>
-              </a:ext>
-            </a:extLst>
-          </p:cNvPr>
-          <p:cNvSpPr>
-            <a:spLocks xmlns:a="http://schemas.openxmlformats.org/drawingml/2006/main" noGrp="1"/>
-          </p:cNvSpPr>
-          <p:nvPr/>
-        </p:nvSpPr>
-        <p:spPr>
-          <a:xfrm xmlns:a="http://schemas.openxmlformats.org/drawingml/2006/main" rot="0">
-            <a:off x="8343900" y="3600450"/>
-            <a:ext cx="3048000" cy="266700"/>
+                <a16:creationId xmlns:a16="http://schemas.microsoft.com/office/drawing/2014/main" id="{63BF0844-7162-43F1-ABE8-E6124E9ADDD5}"/>
+              </a:ext>
+            </a:extLst>
+          </p:cNvPr>
+          <p:cNvSpPr>
+            <a:spLocks xmlns:a="http://schemas.openxmlformats.org/drawingml/2006/main" noGrp="1"/>
+          </p:cNvSpPr>
+          <p:nvPr/>
+        </p:nvSpPr>
+        <p:spPr>
+          <a:xfrm xmlns:a="http://schemas.openxmlformats.org/drawingml/2006/main" rot="0">
+            <a:off x="6438900" y="3600450"/>
+            <a:ext cx="2133600" cy="266700"/>
           </a:xfrm>
           <a:prstGeom xmlns:a="http://schemas.openxmlformats.org/drawingml/2006/main" prst="rect">
             <a:avLst/>
@@ -16544,19 +16544,19 @@
           <p:cNvPr id="39" name="">
             <a:extLst xmlns:a="http://schemas.openxmlformats.org/drawingml/2006/main">
               <a:ext uri="{FF2B5EF4-FFF2-40B4-BE49-F238E27FC236}">
-                <a16:creationId xmlns:a16="http://schemas.microsoft.com/office/drawing/2014/main" id="{20602D8F-9E52-4B9D-8A7F-0009BFA463BA}"/>
-              </a:ext>
-            </a:extLst>
-          </p:cNvPr>
-          <p:cNvSpPr>
-            <a:spLocks xmlns:a="http://schemas.openxmlformats.org/drawingml/2006/main" noGrp="1"/>
-          </p:cNvSpPr>
-          <p:nvPr/>
-        </p:nvSpPr>
-        <p:spPr>
-          <a:xfrm xmlns:a="http://schemas.openxmlformats.org/drawingml/2006/main" rot="0">
-            <a:off x="8382000" y="3943350"/>
-            <a:ext cx="2952750" cy="1466850"/>
+                <a16:creationId xmlns:a16="http://schemas.microsoft.com/office/drawing/2014/main" id="{D37FC68A-B06A-4801-A048-5C1DD780791F}"/>
+              </a:ext>
+            </a:extLst>
+          </p:cNvPr>
+          <p:cNvSpPr>
+            <a:spLocks xmlns:a="http://schemas.openxmlformats.org/drawingml/2006/main" noGrp="1"/>
+          </p:cNvSpPr>
+          <p:nvPr/>
+        </p:nvSpPr>
+        <p:spPr>
+          <a:xfrm xmlns:a="http://schemas.openxmlformats.org/drawingml/2006/main" rot="0">
+            <a:off x="6457950" y="3943350"/>
+            <a:ext cx="2095500" cy="1466850"/>
           </a:xfrm>
           <a:prstGeom xmlns:a="http://schemas.openxmlformats.org/drawingml/2006/main" prst="rect">
             <a:avLst/>
@@ -16580,14 +16580,14 @@
           <a:lstStyle xmlns:a="http://schemas.openxmlformats.org/drawingml/2006/main"/>
           <a:p xmlns:a="http://schemas.openxmlformats.org/drawingml/2006/main">
             <a:pPr algn="l">
-              <a:defRPr sz="1200" b="0">
-                <a:solidFill>
-                  <a:srgbClr val="172026"/>
-                </a:solidFill>
-              </a:defRPr>
-            </a:pPr>
-            <a:r>
-              <a:rPr sz="1200" b="0">
+              <a:defRPr sz="1125" b="0">
+                <a:solidFill>
+                  <a:srgbClr val="172026"/>
+                </a:solidFill>
+              </a:defRPr>
+            </a:pPr>
+            <a:r>
+              <a:rPr sz="1125" b="0">
                 <a:solidFill>
                   <a:srgbClr val="172026"/>
                 </a:solidFill>
@@ -16597,14 +16597,14 @@
           </a:p>
           <a:p xmlns:a="http://schemas.openxmlformats.org/drawingml/2006/main">
             <a:pPr algn="l">
-              <a:defRPr sz="1200" b="0">
-                <a:solidFill>
-                  <a:srgbClr val="172026"/>
-                </a:solidFill>
-              </a:defRPr>
-            </a:pPr>
-            <a:r>
-              <a:rPr sz="1200" b="0">
+              <a:defRPr sz="1125" b="0">
+                <a:solidFill>
+                  <a:srgbClr val="172026"/>
+                </a:solidFill>
+              </a:defRPr>
+            </a:pPr>
+            <a:r>
+              <a:rPr sz="1125" b="0">
                 <a:solidFill>
                   <a:srgbClr val="172026"/>
                 </a:solidFill>
@@ -16614,36 +16614,36 @@
           </a:p>
           <a:p xmlns:a="http://schemas.openxmlformats.org/drawingml/2006/main">
             <a:pPr algn="l">
-              <a:defRPr sz="1200" b="0">
-                <a:solidFill>
-                  <a:srgbClr val="172026"/>
-                </a:solidFill>
-              </a:defRPr>
-            </a:pPr>
-            <a:r>
-              <a:rPr sz="1200" b="0">
-                <a:solidFill>
-                  <a:srgbClr val="172026"/>
-                </a:solidFill>
-              </a:rPr>
-              <a:t>- 策略與回測模組</a:t>
-            </a:r>
-          </a:p>
-          <a:p xmlns:a="http://schemas.openxmlformats.org/drawingml/2006/main">
-            <a:pPr algn="l">
-              <a:defRPr sz="1200" b="0">
-                <a:solidFill>
-                  <a:srgbClr val="172026"/>
-                </a:solidFill>
-              </a:defRPr>
-            </a:pPr>
-            <a:r>
-              <a:rPr sz="1200" b="0">
-                <a:solidFill>
-                  <a:srgbClr val="172026"/>
-                </a:solidFill>
-              </a:rPr>
-              <a:t>- 使用案例圖、類別圖與設計模式頁面</a:t>
+              <a:defRPr sz="1125" b="0">
+                <a:solidFill>
+                  <a:srgbClr val="172026"/>
+                </a:solidFill>
+              </a:defRPr>
+            </a:pPr>
+            <a:r>
+              <a:rPr sz="1125" b="0">
+                <a:solidFill>
+                  <a:srgbClr val="172026"/>
+                </a:solidFill>
+              </a:rPr>
+              <a:t>- 警示規則與通知流程</a:t>
+            </a:r>
+          </a:p>
+          <a:p xmlns:a="http://schemas.openxmlformats.org/drawingml/2006/main">
+            <a:pPr algn="l">
+              <a:defRPr sz="1125" b="0">
+                <a:solidFill>
+                  <a:srgbClr val="172026"/>
+                </a:solidFill>
+              </a:defRPr>
+            </a:pPr>
+            <a:r>
+              <a:rPr sz="1125" b="0">
+                <a:solidFill>
+                  <a:srgbClr val="172026"/>
+                </a:solidFill>
+              </a:rPr>
+              <a:t>- use case 與類別圖頁面</a:t>
             </a:r>
           </a:p>
         </p:txBody>
@@ -16653,19 +16653,89 @@
           <p:cNvPr id="40" name="">
             <a:extLst xmlns:a="http://schemas.openxmlformats.org/drawingml/2006/main">
               <a:ext uri="{FF2B5EF4-FFF2-40B4-BE49-F238E27FC236}">
-                <a16:creationId xmlns:a16="http://schemas.microsoft.com/office/drawing/2014/main" id="{6C747821-EF23-4564-AA31-F5FE62044E1E}"/>
-              </a:ext>
-            </a:extLst>
-          </p:cNvPr>
-          <p:cNvSpPr>
-            <a:spLocks xmlns:a="http://schemas.openxmlformats.org/drawingml/2006/main" noGrp="1"/>
-          </p:cNvSpPr>
-          <p:nvPr/>
-        </p:nvSpPr>
-        <p:spPr>
-          <a:xfrm xmlns:a="http://schemas.openxmlformats.org/drawingml/2006/main" rot="0">
-            <a:off x="609600" y="6534150"/>
-            <a:ext cx="9715500" cy="171450"/>
+                <a16:creationId xmlns:a16="http://schemas.microsoft.com/office/drawing/2014/main" id="{C3B26855-38E8-4D95-951A-8DF211E05F3C}"/>
+              </a:ext>
+            </a:extLst>
+          </p:cNvPr>
+          <p:cNvSpPr>
+            <a:spLocks xmlns:a="http://schemas.openxmlformats.org/drawingml/2006/main" noGrp="1"/>
+          </p:cNvSpPr>
+          <p:nvPr/>
+        </p:nvSpPr>
+        <p:spPr>
+          <a:xfrm xmlns:a="http://schemas.openxmlformats.org/drawingml/2006/main" rot="0">
+            <a:off x="9067800" y="3429000"/>
+            <a:ext cx="2514600" cy="2571750"/>
+          </a:xfrm>
+          <a:prstGeom xmlns:a="http://schemas.openxmlformats.org/drawingml/2006/main" prst="roundRect">
+            <a:avLst>
+              <a:gd name="adj" fmla="val 3030"/>
+            </a:avLst>
+          </a:prstGeom>
+          <a:solidFill xmlns:a="http://schemas.openxmlformats.org/drawingml/2006/main">
+            <a:srgbClr val="FFFDF8"/>
+          </a:solidFill>
+          <a:ln xmlns:a="http://schemas.openxmlformats.org/drawingml/2006/main" w="11430">
+            <a:solidFill>
+              <a:srgbClr val="23313B"/>
+            </a:solidFill>
+            <a:prstDash val="solid"/>
+          </a:ln>
+        </p:spPr>
+      </p:sp>
+      <p:sp>
+        <p:nvSpPr>
+          <p:cNvPr id="41" name="">
+            <a:extLst xmlns:a="http://schemas.openxmlformats.org/drawingml/2006/main">
+              <a:ext uri="{FF2B5EF4-FFF2-40B4-BE49-F238E27FC236}">
+                <a16:creationId xmlns:a16="http://schemas.microsoft.com/office/drawing/2014/main" id="{8584D660-F360-4CBF-B00E-EDBA5C155848}"/>
+              </a:ext>
+            </a:extLst>
+          </p:cNvPr>
+          <p:cNvSpPr>
+            <a:spLocks xmlns:a="http://schemas.openxmlformats.org/drawingml/2006/main" noGrp="1"/>
+          </p:cNvSpPr>
+          <p:nvPr/>
+        </p:nvSpPr>
+        <p:spPr>
+          <a:xfrm xmlns:a="http://schemas.openxmlformats.org/drawingml/2006/main" rot="0">
+            <a:off x="9067800" y="3429000"/>
+            <a:ext cx="2514600" cy="76200"/>
+          </a:xfrm>
+          <a:prstGeom xmlns:a="http://schemas.openxmlformats.org/drawingml/2006/main" prst="rect">
+            <a:avLst/>
+          </a:prstGeom>
+          <a:solidFill xmlns:a="http://schemas.openxmlformats.org/drawingml/2006/main">
+            <a:srgbClr val="5E9BFF"/>
+          </a:solidFill>
+          <a:ln xmlns:a="http://schemas.openxmlformats.org/drawingml/2006/main" w="0">
+            <a:solidFill>
+              <a:srgbClr val="000000">
+                <a:alpha val="0"/>
+              </a:srgbClr>
+            </a:solidFill>
+            <a:prstDash val="solid"/>
+          </a:ln>
+        </p:spPr>
+      </p:sp>
+      <p:sp>
+        <p:nvSpPr>
+          <p:cNvPr id="42" name="">
+            <a:extLst xmlns:a="http://schemas.openxmlformats.org/drawingml/2006/main">
+              <a:ext uri="{FF2B5EF4-FFF2-40B4-BE49-F238E27FC236}">
+                <a16:creationId xmlns:a16="http://schemas.microsoft.com/office/drawing/2014/main" id="{2525BE52-DFCA-40CB-9116-741330E837CB}"/>
+              </a:ext>
+            </a:extLst>
+          </p:cNvPr>
+          <p:cNvSpPr>
+            <a:spLocks xmlns:a="http://schemas.openxmlformats.org/drawingml/2006/main" noGrp="1"/>
+          </p:cNvSpPr>
+          <p:nvPr/>
+        </p:nvSpPr>
+        <p:spPr>
+          <a:xfrm xmlns:a="http://schemas.openxmlformats.org/drawingml/2006/main" rot="0">
+            <a:off x="9258300" y="3600450"/>
+            <a:ext cx="2133600" cy="266700"/>
           </a:xfrm>
           <a:prstGeom xmlns:a="http://schemas.openxmlformats.org/drawingml/2006/main" prst="rect">
             <a:avLst/>
@@ -16689,6 +16759,173 @@
           <a:lstStyle xmlns:a="http://schemas.openxmlformats.org/drawingml/2006/main"/>
           <a:p xmlns:a="http://schemas.openxmlformats.org/drawingml/2006/main">
             <a:pPr algn="l">
+              <a:defRPr sz="1350" b="1">
+                <a:solidFill>
+                  <a:srgbClr val="172026"/>
+                </a:solidFill>
+              </a:defRPr>
+            </a:pPr>
+            <a:r>
+              <a:rPr sz="1350" b="1">
+                <a:solidFill>
+                  <a:srgbClr val="172026"/>
+                </a:solidFill>
+              </a:rPr>
+              <a:t>組員 D - 請替換姓名</a:t>
+            </a:r>
+          </a:p>
+        </p:txBody>
+      </p:sp>
+      <p:sp>
+        <p:nvSpPr>
+          <p:cNvPr id="43" name="">
+            <a:extLst xmlns:a="http://schemas.openxmlformats.org/drawingml/2006/main">
+              <a:ext uri="{FF2B5EF4-FFF2-40B4-BE49-F238E27FC236}">
+                <a16:creationId xmlns:a16="http://schemas.microsoft.com/office/drawing/2014/main" id="{1FB3AEDB-5441-4C97-AF33-EC049C6D4FD7}"/>
+              </a:ext>
+            </a:extLst>
+          </p:cNvPr>
+          <p:cNvSpPr>
+            <a:spLocks xmlns:a="http://schemas.openxmlformats.org/drawingml/2006/main" noGrp="1"/>
+          </p:cNvSpPr>
+          <p:nvPr/>
+        </p:nvSpPr>
+        <p:spPr>
+          <a:xfrm xmlns:a="http://schemas.openxmlformats.org/drawingml/2006/main" rot="0">
+            <a:off x="9277350" y="3943350"/>
+            <a:ext cx="2095500" cy="1466850"/>
+          </a:xfrm>
+          <a:prstGeom xmlns:a="http://schemas.openxmlformats.org/drawingml/2006/main" prst="rect">
+            <a:avLst/>
+          </a:prstGeom>
+          <a:solidFill xmlns:a="http://schemas.openxmlformats.org/drawingml/2006/main">
+            <a:srgbClr val="000000">
+              <a:alpha val="0"/>
+            </a:srgbClr>
+          </a:solidFill>
+          <a:ln xmlns:a="http://schemas.openxmlformats.org/drawingml/2006/main" w="0">
+            <a:solidFill>
+              <a:srgbClr val="000000">
+                <a:alpha val="0"/>
+              </a:srgbClr>
+            </a:solidFill>
+            <a:prstDash val="solid"/>
+          </a:ln>
+        </p:spPr>
+        <p:txBody>
+          <a:bodyPr xmlns:a="http://schemas.openxmlformats.org/drawingml/2006/main" lIns="0" tIns="0" rIns="0" bIns="0" anchor="t"/>
+          <a:lstStyle xmlns:a="http://schemas.openxmlformats.org/drawingml/2006/main"/>
+          <a:p xmlns:a="http://schemas.openxmlformats.org/drawingml/2006/main">
+            <a:pPr algn="l">
+              <a:defRPr sz="1125" b="0">
+                <a:solidFill>
+                  <a:srgbClr val="172026"/>
+                </a:solidFill>
+              </a:defRPr>
+            </a:pPr>
+            <a:r>
+              <a:rPr sz="1125" b="0">
+                <a:solidFill>
+                  <a:srgbClr val="172026"/>
+                </a:solidFill>
+              </a:rPr>
+              <a:t>建議負責內容：</a:t>
+            </a:r>
+          </a:p>
+          <a:p xmlns:a="http://schemas.openxmlformats.org/drawingml/2006/main">
+            <a:pPr algn="l">
+              <a:defRPr sz="1125" b="0">
+                <a:solidFill>
+                  <a:srgbClr val="172026"/>
+                </a:solidFill>
+              </a:defRPr>
+            </a:pPr>
+            <a:r>
+              <a:rPr sz="1125" b="0">
+                <a:solidFill>
+                  <a:srgbClr val="172026"/>
+                </a:solidFill>
+              </a:rPr>
+              <a:t>- 策略與回測模組</a:t>
+            </a:r>
+          </a:p>
+          <a:p xmlns:a="http://schemas.openxmlformats.org/drawingml/2006/main">
+            <a:pPr algn="l">
+              <a:defRPr sz="1125" b="0">
+                <a:solidFill>
+                  <a:srgbClr val="172026"/>
+                </a:solidFill>
+              </a:defRPr>
+            </a:pPr>
+            <a:r>
+              <a:rPr sz="1125" b="0">
+                <a:solidFill>
+                  <a:srgbClr val="172026"/>
+                </a:solidFill>
+              </a:rPr>
+              <a:t>- Backtests UI 與結果呈現</a:t>
+            </a:r>
+          </a:p>
+          <a:p xmlns:a="http://schemas.openxmlformats.org/drawingml/2006/main">
+            <a:pPr algn="l">
+              <a:defRPr sz="1125" b="0">
+                <a:solidFill>
+                  <a:srgbClr val="172026"/>
+                </a:solidFill>
+              </a:defRPr>
+            </a:pPr>
+            <a:r>
+              <a:rPr sz="1125" b="0">
+                <a:solidFill>
+                  <a:srgbClr val="172026"/>
+                </a:solidFill>
+              </a:rPr>
+              <a:t>- 設計模式與簡報整合</a:t>
+            </a:r>
+          </a:p>
+        </p:txBody>
+      </p:sp>
+      <p:sp>
+        <p:nvSpPr>
+          <p:cNvPr id="44" name="">
+            <a:extLst xmlns:a="http://schemas.openxmlformats.org/drawingml/2006/main">
+              <a:ext uri="{FF2B5EF4-FFF2-40B4-BE49-F238E27FC236}">
+                <a16:creationId xmlns:a16="http://schemas.microsoft.com/office/drawing/2014/main" id="{7D2170E1-21F8-4D5A-A004-95E42F85E438}"/>
+              </a:ext>
+            </a:extLst>
+          </p:cNvPr>
+          <p:cNvSpPr>
+            <a:spLocks xmlns:a="http://schemas.openxmlformats.org/drawingml/2006/main" noGrp="1"/>
+          </p:cNvSpPr>
+          <p:nvPr/>
+        </p:nvSpPr>
+        <p:spPr>
+          <a:xfrm xmlns:a="http://schemas.openxmlformats.org/drawingml/2006/main" rot="0">
+            <a:off x="609600" y="6534150"/>
+            <a:ext cx="9715500" cy="171450"/>
+          </a:xfrm>
+          <a:prstGeom xmlns:a="http://schemas.openxmlformats.org/drawingml/2006/main" prst="rect">
+            <a:avLst/>
+          </a:prstGeom>
+          <a:solidFill xmlns:a="http://schemas.openxmlformats.org/drawingml/2006/main">
+            <a:srgbClr val="000000">
+              <a:alpha val="0"/>
+            </a:srgbClr>
+          </a:solidFill>
+          <a:ln xmlns:a="http://schemas.openxmlformats.org/drawingml/2006/main" w="0">
+            <a:solidFill>
+              <a:srgbClr val="000000">
+                <a:alpha val="0"/>
+              </a:srgbClr>
+            </a:solidFill>
+            <a:prstDash val="solid"/>
+          </a:ln>
+        </p:spPr>
+        <p:txBody>
+          <a:bodyPr xmlns:a="http://schemas.openxmlformats.org/drawingml/2006/main" lIns="0" tIns="0" rIns="0" bIns="0" anchor="t"/>
+          <a:lstStyle xmlns:a="http://schemas.openxmlformats.org/drawingml/2006/main"/>
+          <a:p xmlns:a="http://schemas.openxmlformats.org/drawingml/2006/main">
+            <a:pPr algn="l">
               <a:defRPr sz="750" b="0">
                 <a:solidFill>
                   <a:srgbClr val="4F5B66"/>
@@ -16701,7 +16938,7 @@
                   <a:srgbClr val="4F5B66"/>
                 </a:solidFill>
               </a:rPr>
-              <a:t>正式繳交前請將組員 A/B/C 替換為實際姓名與最終分工。</a:t>
+              <a:t>正式繳交前請將組員 A/B/C/D 替換為實際姓名與最終分工。</a:t>
             </a:r>
           </a:p>
         </p:txBody>
@@ -16709,7 +16946,7 @@
     </p:spTree>
     <p:extLst>
       <p:ext uri="{BB962C8B-B14F-4D97-AF65-F5344CB8AC3E}">
-        <p14:creationId xmlns:p14="http://schemas.microsoft.com/office/powerpoint/2010/main" val="1437655356"/>
+        <p14:creationId xmlns:p14="http://schemas.microsoft.com/office/powerpoint/2010/main" val="1253023795"/>
       </p:ext>
     </p:extLst>
   </p:cSld>
@@ -16740,7 +16977,7 @@
           <p:cNvPr id="1" name="">
             <a:extLst xmlns:a="http://schemas.openxmlformats.org/drawingml/2006/main">
               <a:ext uri="{FF2B5EF4-FFF2-40B4-BE49-F238E27FC236}">
-                <a16:creationId xmlns:a16="http://schemas.microsoft.com/office/drawing/2014/main" id="{F8C79458-3D15-44E0-9C2F-7A54E93A7DDA}"/>
+                <a16:creationId xmlns:a16="http://schemas.microsoft.com/office/drawing/2014/main" id="{F8C61C1B-88BC-4A7A-974B-9519BC61522B}"/>
               </a:ext>
             </a:extLst>
           </p:cNvPr>
@@ -16775,7 +17012,7 @@
           <p:cNvPr id="2" name="">
             <a:extLst xmlns:a="http://schemas.openxmlformats.org/drawingml/2006/main">
               <a:ext uri="{FF2B5EF4-FFF2-40B4-BE49-F238E27FC236}">
-                <a16:creationId xmlns:a16="http://schemas.microsoft.com/office/drawing/2014/main" id="{A1F55BF8-4520-4033-9688-F2F5BBEA55A3}"/>
+                <a16:creationId xmlns:a16="http://schemas.microsoft.com/office/drawing/2014/main" id="{F84A8485-F7CB-479B-90EA-DD0D5147341B}"/>
               </a:ext>
             </a:extLst>
           </p:cNvPr>
@@ -16810,7 +17047,7 @@
           <p:cNvPr id="3" name="">
             <a:extLst xmlns:a="http://schemas.openxmlformats.org/drawingml/2006/main">
               <a:ext uri="{FF2B5EF4-FFF2-40B4-BE49-F238E27FC236}">
-                <a16:creationId xmlns:a16="http://schemas.microsoft.com/office/drawing/2014/main" id="{208D1220-039A-44F7-8D54-283B3E8A0657}"/>
+                <a16:creationId xmlns:a16="http://schemas.microsoft.com/office/drawing/2014/main" id="{9B0B5C20-7512-48CC-905D-43C962A5B83B}"/>
               </a:ext>
             </a:extLst>
           </p:cNvPr>
@@ -16868,7 +17105,7 @@
           <p:cNvPr id="4" name="">
             <a:extLst xmlns:a="http://schemas.openxmlformats.org/drawingml/2006/main">
               <a:ext uri="{FF2B5EF4-FFF2-40B4-BE49-F238E27FC236}">
-                <a16:creationId xmlns:a16="http://schemas.microsoft.com/office/drawing/2014/main" id="{D61D0DB7-F0C2-418D-9E52-1E9044B2FD38}"/>
+                <a16:creationId xmlns:a16="http://schemas.microsoft.com/office/drawing/2014/main" id="{BF245302-3487-405F-BFD6-BA0CF9F2CDD2}"/>
               </a:ext>
             </a:extLst>
           </p:cNvPr>
@@ -16926,7 +17163,7 @@
           <p:cNvPr id="5" name="">
             <a:extLst xmlns:a="http://schemas.openxmlformats.org/drawingml/2006/main">
               <a:ext uri="{FF2B5EF4-FFF2-40B4-BE49-F238E27FC236}">
-                <a16:creationId xmlns:a16="http://schemas.microsoft.com/office/drawing/2014/main" id="{FCD29EF3-57A0-4AF0-80CB-60706CAF4A67}"/>
+                <a16:creationId xmlns:a16="http://schemas.microsoft.com/office/drawing/2014/main" id="{E2F2766D-A13E-4B78-BD55-906D0DCB6220}"/>
               </a:ext>
             </a:extLst>
           </p:cNvPr>
@@ -16961,7 +17198,7 @@
           <p:cNvPr id="6" name="">
             <a:extLst xmlns:a="http://schemas.openxmlformats.org/drawingml/2006/main">
               <a:ext uri="{FF2B5EF4-FFF2-40B4-BE49-F238E27FC236}">
-                <a16:creationId xmlns:a16="http://schemas.microsoft.com/office/drawing/2014/main" id="{A347FE8C-1A70-40C5-8E2F-F9CD58DB22E6}"/>
+                <a16:creationId xmlns:a16="http://schemas.microsoft.com/office/drawing/2014/main" id="{7DB40A8E-2A90-4C95-818E-D7FCAA4F48AC}"/>
               </a:ext>
             </a:extLst>
           </p:cNvPr>
@@ -17019,7 +17256,7 @@
           <p:cNvPr id="7" name="">
             <a:extLst xmlns:a="http://schemas.openxmlformats.org/drawingml/2006/main">
               <a:ext uri="{FF2B5EF4-FFF2-40B4-BE49-F238E27FC236}">
-                <a16:creationId xmlns:a16="http://schemas.microsoft.com/office/drawing/2014/main" id="{9F85B5DC-534A-4795-88FF-6245C08BD40E}"/>
+                <a16:creationId xmlns:a16="http://schemas.microsoft.com/office/drawing/2014/main" id="{D886B736-1401-41B4-8EE0-F1484CBACF31}"/>
               </a:ext>
             </a:extLst>
           </p:cNvPr>
@@ -17077,7 +17314,7 @@
           <p:cNvPr id="8" name="">
             <a:extLst xmlns:a="http://schemas.openxmlformats.org/drawingml/2006/main">
               <a:ext uri="{FF2B5EF4-FFF2-40B4-BE49-F238E27FC236}">
-                <a16:creationId xmlns:a16="http://schemas.microsoft.com/office/drawing/2014/main" id="{44434D04-1912-4C1A-967C-E71DCB57097E}"/>
+                <a16:creationId xmlns:a16="http://schemas.microsoft.com/office/drawing/2014/main" id="{A61179E7-B895-44F1-A62D-F220B9D36A7C}"/>
               </a:ext>
             </a:extLst>
           </p:cNvPr>
@@ -17112,7 +17349,7 @@
           <p:cNvPr id="9" name="">
             <a:extLst xmlns:a="http://schemas.openxmlformats.org/drawingml/2006/main">
               <a:ext uri="{FF2B5EF4-FFF2-40B4-BE49-F238E27FC236}">
-                <a16:creationId xmlns:a16="http://schemas.microsoft.com/office/drawing/2014/main" id="{B7021F2C-1E3A-485B-9972-089E3500B360}"/>
+                <a16:creationId xmlns:a16="http://schemas.microsoft.com/office/drawing/2014/main" id="{71FE1006-2720-4E11-8C82-3CF25F509F01}"/>
               </a:ext>
             </a:extLst>
           </p:cNvPr>
@@ -17170,7 +17407,7 @@
           <p:cNvPr id="10" name="">
             <a:extLst xmlns:a="http://schemas.openxmlformats.org/drawingml/2006/main">
               <a:ext uri="{FF2B5EF4-FFF2-40B4-BE49-F238E27FC236}">
-                <a16:creationId xmlns:a16="http://schemas.microsoft.com/office/drawing/2014/main" id="{93540B8A-F577-40BB-9F4D-E85571D259F9}"/>
+                <a16:creationId xmlns:a16="http://schemas.microsoft.com/office/drawing/2014/main" id="{BA2E4EF3-65FC-4CDC-8BF1-B346BA9C54C5}"/>
               </a:ext>
             </a:extLst>
           </p:cNvPr>
@@ -17203,7 +17440,7 @@
           <p:cNvPr id="11" name="">
             <a:extLst xmlns:a="http://schemas.openxmlformats.org/drawingml/2006/main">
               <a:ext uri="{FF2B5EF4-FFF2-40B4-BE49-F238E27FC236}">
-                <a16:creationId xmlns:a16="http://schemas.microsoft.com/office/drawing/2014/main" id="{5749F805-1BBF-4ADE-8884-47D55A013D3D}"/>
+                <a16:creationId xmlns:a16="http://schemas.microsoft.com/office/drawing/2014/main" id="{643AFFE5-7EA8-48F4-BD5E-7804B3ABA2C6}"/>
               </a:ext>
             </a:extLst>
           </p:cNvPr>
@@ -17238,7 +17475,7 @@
           <p:cNvPr id="12" name="">
             <a:extLst xmlns:a="http://schemas.openxmlformats.org/drawingml/2006/main">
               <a:ext uri="{FF2B5EF4-FFF2-40B4-BE49-F238E27FC236}">
-                <a16:creationId xmlns:a16="http://schemas.microsoft.com/office/drawing/2014/main" id="{47E85C4D-95AE-446F-9C95-DCC251D1F3CF}"/>
+                <a16:creationId xmlns:a16="http://schemas.microsoft.com/office/drawing/2014/main" id="{CD0532FF-9C2A-4E07-B98E-74457896ADF8}"/>
               </a:ext>
             </a:extLst>
           </p:cNvPr>
@@ -17273,7 +17510,7 @@
           <p:cNvPr id="13" name="">
             <a:extLst xmlns:a="http://schemas.openxmlformats.org/drawingml/2006/main">
               <a:ext uri="{FF2B5EF4-FFF2-40B4-BE49-F238E27FC236}">
-                <a16:creationId xmlns:a16="http://schemas.microsoft.com/office/drawing/2014/main" id="{0A2DB20C-296E-49BA-83BC-BBFD2CA80C75}"/>
+                <a16:creationId xmlns:a16="http://schemas.microsoft.com/office/drawing/2014/main" id="{A715A354-D8EA-45BF-A719-043FB808EABA}"/>
               </a:ext>
             </a:extLst>
           </p:cNvPr>
@@ -17308,7 +17545,7 @@
           <p:cNvPr id="14" name="">
             <a:extLst xmlns:a="http://schemas.openxmlformats.org/drawingml/2006/main">
               <a:ext uri="{FF2B5EF4-FFF2-40B4-BE49-F238E27FC236}">
-                <a16:creationId xmlns:a16="http://schemas.microsoft.com/office/drawing/2014/main" id="{2017EEAB-4FF1-4CD6-B8BB-C0BEF0A6A25D}"/>
+                <a16:creationId xmlns:a16="http://schemas.microsoft.com/office/drawing/2014/main" id="{5211CF35-1149-4874-BCA4-F49DC73721F4}"/>
               </a:ext>
             </a:extLst>
           </p:cNvPr>
@@ -17343,7 +17580,7 @@
           <p:cNvPr id="15" name="">
             <a:extLst xmlns:a="http://schemas.openxmlformats.org/drawingml/2006/main">
               <a:ext uri="{FF2B5EF4-FFF2-40B4-BE49-F238E27FC236}">
-                <a16:creationId xmlns:a16="http://schemas.microsoft.com/office/drawing/2014/main" id="{1296E252-08B1-477D-B148-4E44FF46C850}"/>
+                <a16:creationId xmlns:a16="http://schemas.microsoft.com/office/drawing/2014/main" id="{8D22F0F6-3367-40FB-8EDA-30E34CE1C379}"/>
               </a:ext>
             </a:extLst>
           </p:cNvPr>
@@ -17378,7 +17615,7 @@
           <p:cNvPr id="16" name="">
             <a:extLst xmlns:a="http://schemas.openxmlformats.org/drawingml/2006/main">
               <a:ext uri="{FF2B5EF4-FFF2-40B4-BE49-F238E27FC236}">
-                <a16:creationId xmlns:a16="http://schemas.microsoft.com/office/drawing/2014/main" id="{5FFBAC25-19BB-4493-AEB4-E78498F93B31}"/>
+                <a16:creationId xmlns:a16="http://schemas.microsoft.com/office/drawing/2014/main" id="{25347289-E0E6-4824-A96E-850330753368}"/>
               </a:ext>
             </a:extLst>
           </p:cNvPr>
@@ -17436,7 +17673,7 @@
           <p:cNvPr id="17" name="">
             <a:extLst xmlns:a="http://schemas.openxmlformats.org/drawingml/2006/main">
               <a:ext uri="{FF2B5EF4-FFF2-40B4-BE49-F238E27FC236}">
-                <a16:creationId xmlns:a16="http://schemas.microsoft.com/office/drawing/2014/main" id="{25BCE482-4366-4A3A-A151-C65D5EF8DB20}"/>
+                <a16:creationId xmlns:a16="http://schemas.microsoft.com/office/drawing/2014/main" id="{B40EEF23-D96E-4DB2-96A3-4EFB4C07785F}"/>
               </a:ext>
             </a:extLst>
           </p:cNvPr>
@@ -17469,7 +17706,7 @@
           <p:cNvPr id="18" name="">
             <a:extLst xmlns:a="http://schemas.openxmlformats.org/drawingml/2006/main">
               <a:ext uri="{FF2B5EF4-FFF2-40B4-BE49-F238E27FC236}">
-                <a16:creationId xmlns:a16="http://schemas.microsoft.com/office/drawing/2014/main" id="{086E6145-0FC8-4B39-A79A-7B750F6C4DFF}"/>
+                <a16:creationId xmlns:a16="http://schemas.microsoft.com/office/drawing/2014/main" id="{D9A33820-02DF-4DB7-88F3-4C65F009B5B1}"/>
               </a:ext>
             </a:extLst>
           </p:cNvPr>
@@ -17504,7 +17741,7 @@
           <p:cNvPr id="19" name="">
             <a:extLst xmlns:a="http://schemas.openxmlformats.org/drawingml/2006/main">
               <a:ext uri="{FF2B5EF4-FFF2-40B4-BE49-F238E27FC236}">
-                <a16:creationId xmlns:a16="http://schemas.microsoft.com/office/drawing/2014/main" id="{9E69EB30-C130-4386-9E42-588437EA2C66}"/>
+                <a16:creationId xmlns:a16="http://schemas.microsoft.com/office/drawing/2014/main" id="{27F2B5D4-9396-42F2-8998-6CF9E5DD52F5}"/>
               </a:ext>
             </a:extLst>
           </p:cNvPr>
@@ -17539,7 +17776,7 @@
           <p:cNvPr id="20" name="">
             <a:extLst xmlns:a="http://schemas.openxmlformats.org/drawingml/2006/main">
               <a:ext uri="{FF2B5EF4-FFF2-40B4-BE49-F238E27FC236}">
-                <a16:creationId xmlns:a16="http://schemas.microsoft.com/office/drawing/2014/main" id="{FA83CE99-C3AA-46FC-8946-57FAFA5766B8}"/>
+                <a16:creationId xmlns:a16="http://schemas.microsoft.com/office/drawing/2014/main" id="{1FC137DB-01AF-49B0-8EBE-507089386570}"/>
               </a:ext>
             </a:extLst>
           </p:cNvPr>
@@ -17574,7 +17811,7 @@
           <p:cNvPr id="21" name="">
             <a:extLst xmlns:a="http://schemas.openxmlformats.org/drawingml/2006/main">
               <a:ext uri="{FF2B5EF4-FFF2-40B4-BE49-F238E27FC236}">
-                <a16:creationId xmlns:a16="http://schemas.microsoft.com/office/drawing/2014/main" id="{C7D9A49A-B10E-4C4F-BCED-769A3E756A95}"/>
+                <a16:creationId xmlns:a16="http://schemas.microsoft.com/office/drawing/2014/main" id="{924C7480-6F80-4EE2-B75A-1608795B093B}"/>
               </a:ext>
             </a:extLst>
           </p:cNvPr>
@@ -17609,7 +17846,7 @@
           <p:cNvPr id="22" name="">
             <a:extLst xmlns:a="http://schemas.openxmlformats.org/drawingml/2006/main">
               <a:ext uri="{FF2B5EF4-FFF2-40B4-BE49-F238E27FC236}">
-                <a16:creationId xmlns:a16="http://schemas.microsoft.com/office/drawing/2014/main" id="{E835EF50-66C6-45AC-8F14-E586D2790340}"/>
+                <a16:creationId xmlns:a16="http://schemas.microsoft.com/office/drawing/2014/main" id="{2582121B-9D40-446E-A5C9-2A6BFE1313D2}"/>
               </a:ext>
             </a:extLst>
           </p:cNvPr>
@@ -17644,7 +17881,7 @@
           <p:cNvPr id="23" name="">
             <a:extLst xmlns:a="http://schemas.openxmlformats.org/drawingml/2006/main">
               <a:ext uri="{FF2B5EF4-FFF2-40B4-BE49-F238E27FC236}">
-                <a16:creationId xmlns:a16="http://schemas.microsoft.com/office/drawing/2014/main" id="{F1777411-3CFB-4E6D-BA70-131B160390F7}"/>
+                <a16:creationId xmlns:a16="http://schemas.microsoft.com/office/drawing/2014/main" id="{E0314D2B-D901-45C1-81C8-ADF0A2DC0985}"/>
               </a:ext>
             </a:extLst>
           </p:cNvPr>
@@ -17702,7 +17939,7 @@
           <p:cNvPr id="24" name="">
             <a:extLst xmlns:a="http://schemas.openxmlformats.org/drawingml/2006/main">
               <a:ext uri="{FF2B5EF4-FFF2-40B4-BE49-F238E27FC236}">
-                <a16:creationId xmlns:a16="http://schemas.microsoft.com/office/drawing/2014/main" id="{4FF0DC77-8690-4F11-814B-010E41D47EF2}"/>
+                <a16:creationId xmlns:a16="http://schemas.microsoft.com/office/drawing/2014/main" id="{773B6C6F-29AC-4C77-A257-6285C53F3BA9}"/>
               </a:ext>
             </a:extLst>
           </p:cNvPr>
@@ -17735,7 +17972,7 @@
           <p:cNvPr id="25" name="">
             <a:extLst xmlns:a="http://schemas.openxmlformats.org/drawingml/2006/main">
               <a:ext uri="{FF2B5EF4-FFF2-40B4-BE49-F238E27FC236}">
-                <a16:creationId xmlns:a16="http://schemas.microsoft.com/office/drawing/2014/main" id="{4372D32B-6B92-4A9E-87B8-2660E5DAAC90}"/>
+                <a16:creationId xmlns:a16="http://schemas.microsoft.com/office/drawing/2014/main" id="{EFDD9C5C-5C3C-40B3-BC68-27E26DD3B1B9}"/>
               </a:ext>
             </a:extLst>
           </p:cNvPr>
@@ -17770,7 +18007,7 @@
           <p:cNvPr id="26" name="">
             <a:extLst xmlns:a="http://schemas.openxmlformats.org/drawingml/2006/main">
               <a:ext uri="{FF2B5EF4-FFF2-40B4-BE49-F238E27FC236}">
-                <a16:creationId xmlns:a16="http://schemas.microsoft.com/office/drawing/2014/main" id="{DA462BBF-BD65-457E-9A97-5228C943BE03}"/>
+                <a16:creationId xmlns:a16="http://schemas.microsoft.com/office/drawing/2014/main" id="{7D804AD8-D9DA-4983-A87F-E6E7E76A76D1}"/>
               </a:ext>
             </a:extLst>
           </p:cNvPr>
@@ -17805,7 +18042,7 @@
           <p:cNvPr id="27" name="">
             <a:extLst xmlns:a="http://schemas.openxmlformats.org/drawingml/2006/main">
               <a:ext uri="{FF2B5EF4-FFF2-40B4-BE49-F238E27FC236}">
-                <a16:creationId xmlns:a16="http://schemas.microsoft.com/office/drawing/2014/main" id="{FDB6F031-51D8-4105-BFEA-44A9E49BF4D0}"/>
+                <a16:creationId xmlns:a16="http://schemas.microsoft.com/office/drawing/2014/main" id="{7FAAFC2B-28ED-40EC-9160-51AEF3E0A7C3}"/>
               </a:ext>
             </a:extLst>
           </p:cNvPr>
@@ -17840,7 +18077,7 @@
           <p:cNvPr id="28" name="">
             <a:extLst xmlns:a="http://schemas.openxmlformats.org/drawingml/2006/main">
               <a:ext uri="{FF2B5EF4-FFF2-40B4-BE49-F238E27FC236}">
-                <a16:creationId xmlns:a16="http://schemas.microsoft.com/office/drawing/2014/main" id="{B3B74F51-70DD-44B0-9996-C885F3A0A78C}"/>
+                <a16:creationId xmlns:a16="http://schemas.microsoft.com/office/drawing/2014/main" id="{E378C1FF-8616-438D-A59A-C70F02666FC3}"/>
               </a:ext>
             </a:extLst>
           </p:cNvPr>
@@ -17875,7 +18112,7 @@
           <p:cNvPr id="29" name="">
             <a:extLst xmlns:a="http://schemas.openxmlformats.org/drawingml/2006/main">
               <a:ext uri="{FF2B5EF4-FFF2-40B4-BE49-F238E27FC236}">
-                <a16:creationId xmlns:a16="http://schemas.microsoft.com/office/drawing/2014/main" id="{E2E42E8D-FC16-4170-B8AD-8832962FDE7B}"/>
+                <a16:creationId xmlns:a16="http://schemas.microsoft.com/office/drawing/2014/main" id="{71C161CD-4C8C-444D-A4A4-260985EF7E72}"/>
               </a:ext>
             </a:extLst>
           </p:cNvPr>
@@ -17910,7 +18147,7 @@
           <p:cNvPr id="30" name="">
             <a:extLst xmlns:a="http://schemas.openxmlformats.org/drawingml/2006/main">
               <a:ext uri="{FF2B5EF4-FFF2-40B4-BE49-F238E27FC236}">
-                <a16:creationId xmlns:a16="http://schemas.microsoft.com/office/drawing/2014/main" id="{FA5D05BF-F527-42CA-9FF6-761C78C19D16}"/>
+                <a16:creationId xmlns:a16="http://schemas.microsoft.com/office/drawing/2014/main" id="{BB81361D-BC8F-417D-932C-2C2CD0B5C481}"/>
               </a:ext>
             </a:extLst>
           </p:cNvPr>
@@ -17968,7 +18205,7 @@
           <p:cNvPr id="31" name="">
             <a:extLst xmlns:a="http://schemas.openxmlformats.org/drawingml/2006/main">
               <a:ext uri="{FF2B5EF4-FFF2-40B4-BE49-F238E27FC236}">
-                <a16:creationId xmlns:a16="http://schemas.microsoft.com/office/drawing/2014/main" id="{AA919426-1488-4120-8B1C-818124A44E1F}"/>
+                <a16:creationId xmlns:a16="http://schemas.microsoft.com/office/drawing/2014/main" id="{A7337D20-18FB-4597-9F39-6FA185136BAE}"/>
               </a:ext>
             </a:extLst>
           </p:cNvPr>
@@ -18001,7 +18238,7 @@
           <p:cNvPr id="32" name="">
             <a:extLst xmlns:a="http://schemas.openxmlformats.org/drawingml/2006/main">
               <a:ext uri="{FF2B5EF4-FFF2-40B4-BE49-F238E27FC236}">
-                <a16:creationId xmlns:a16="http://schemas.microsoft.com/office/drawing/2014/main" id="{4503508D-2065-4784-9C35-F82B585C80E7}"/>
+                <a16:creationId xmlns:a16="http://schemas.microsoft.com/office/drawing/2014/main" id="{DB60C081-A2CA-4920-BAFF-F4DEB14E039D}"/>
               </a:ext>
             </a:extLst>
           </p:cNvPr>
@@ -18059,7 +18296,7 @@
           <p:cNvPr id="33" name="">
             <a:extLst xmlns:a="http://schemas.openxmlformats.org/drawingml/2006/main">
               <a:ext uri="{FF2B5EF4-FFF2-40B4-BE49-F238E27FC236}">
-                <a16:creationId xmlns:a16="http://schemas.microsoft.com/office/drawing/2014/main" id="{7D14E734-E3FA-44B4-A852-C7C2421B5DAF}"/>
+                <a16:creationId xmlns:a16="http://schemas.microsoft.com/office/drawing/2014/main" id="{BB5B50EB-2A3E-42F0-A3C0-25E9921F3DFF}"/>
               </a:ext>
             </a:extLst>
           </p:cNvPr>
@@ -18092,7 +18329,7 @@
           <p:cNvPr id="34" name="">
             <a:extLst xmlns:a="http://schemas.openxmlformats.org/drawingml/2006/main">
               <a:ext uri="{FF2B5EF4-FFF2-40B4-BE49-F238E27FC236}">
-                <a16:creationId xmlns:a16="http://schemas.microsoft.com/office/drawing/2014/main" id="{F82A599D-A167-47C6-B4D1-A4A3486F260B}"/>
+                <a16:creationId xmlns:a16="http://schemas.microsoft.com/office/drawing/2014/main" id="{B8694DF2-73BA-4410-BD92-3B00F6BC5E4C}"/>
               </a:ext>
             </a:extLst>
           </p:cNvPr>
@@ -18150,7 +18387,7 @@
           <p:cNvPr id="35" name="">
             <a:extLst xmlns:a="http://schemas.openxmlformats.org/drawingml/2006/main">
               <a:ext uri="{FF2B5EF4-FFF2-40B4-BE49-F238E27FC236}">
-                <a16:creationId xmlns:a16="http://schemas.microsoft.com/office/drawing/2014/main" id="{CC049A26-F6CD-4CBD-8770-E4E8FD1DFF56}"/>
+                <a16:creationId xmlns:a16="http://schemas.microsoft.com/office/drawing/2014/main" id="{6F561094-EA8D-4534-A881-17DAA2272E76}"/>
               </a:ext>
             </a:extLst>
           </p:cNvPr>
@@ -18183,7 +18420,7 @@
           <p:cNvPr id="36" name="">
             <a:extLst xmlns:a="http://schemas.openxmlformats.org/drawingml/2006/main">
               <a:ext uri="{FF2B5EF4-FFF2-40B4-BE49-F238E27FC236}">
-                <a16:creationId xmlns:a16="http://schemas.microsoft.com/office/drawing/2014/main" id="{772C6D69-CC9B-4BEB-8763-A328CA15C691}"/>
+                <a16:creationId xmlns:a16="http://schemas.microsoft.com/office/drawing/2014/main" id="{58D5A41A-A4CE-46DB-AF5E-63D41B2DA98E}"/>
               </a:ext>
             </a:extLst>
           </p:cNvPr>
@@ -18241,7 +18478,7 @@
           <p:cNvPr id="37" name="">
             <a:extLst xmlns:a="http://schemas.openxmlformats.org/drawingml/2006/main">
               <a:ext uri="{FF2B5EF4-FFF2-40B4-BE49-F238E27FC236}">
-                <a16:creationId xmlns:a16="http://schemas.microsoft.com/office/drawing/2014/main" id="{CFB1DC9D-4388-4674-B10E-8525B4C61BD9}"/>
+                <a16:creationId xmlns:a16="http://schemas.microsoft.com/office/drawing/2014/main" id="{1CB0C0C5-40A7-403E-B3AA-CB702BB2C4FD}"/>
               </a:ext>
             </a:extLst>
           </p:cNvPr>
@@ -18274,7 +18511,7 @@
           <p:cNvPr id="38" name="">
             <a:extLst xmlns:a="http://schemas.openxmlformats.org/drawingml/2006/main">
               <a:ext uri="{FF2B5EF4-FFF2-40B4-BE49-F238E27FC236}">
-                <a16:creationId xmlns:a16="http://schemas.microsoft.com/office/drawing/2014/main" id="{96912689-8F1F-4102-BB02-A7905811BF86}"/>
+                <a16:creationId xmlns:a16="http://schemas.microsoft.com/office/drawing/2014/main" id="{9A7C8182-AE4E-4159-B935-2CB5FAEE98EF}"/>
               </a:ext>
             </a:extLst>
           </p:cNvPr>
@@ -18332,7 +18569,7 @@
           <p:cNvPr id="39" name="">
             <a:extLst xmlns:a="http://schemas.openxmlformats.org/drawingml/2006/main">
               <a:ext uri="{FF2B5EF4-FFF2-40B4-BE49-F238E27FC236}">
-                <a16:creationId xmlns:a16="http://schemas.microsoft.com/office/drawing/2014/main" id="{F27E422C-32AC-42F3-A1BA-C60CE5D79818}"/>
+                <a16:creationId xmlns:a16="http://schemas.microsoft.com/office/drawing/2014/main" id="{4BE5BAA6-69A7-4B0F-B21C-16444165AEF7}"/>
               </a:ext>
             </a:extLst>
           </p:cNvPr>
@@ -18365,7 +18602,7 @@
           <p:cNvPr id="40" name="">
             <a:extLst xmlns:a="http://schemas.openxmlformats.org/drawingml/2006/main">
               <a:ext uri="{FF2B5EF4-FFF2-40B4-BE49-F238E27FC236}">
-                <a16:creationId xmlns:a16="http://schemas.microsoft.com/office/drawing/2014/main" id="{375B2C9D-4A3E-4042-B8C3-F7731F7F6C68}"/>
+                <a16:creationId xmlns:a16="http://schemas.microsoft.com/office/drawing/2014/main" id="{727447C7-157C-4A68-A53B-D12999A596F8}"/>
               </a:ext>
             </a:extLst>
           </p:cNvPr>
@@ -18423,7 +18660,7 @@
           <p:cNvPr id="41" name="">
             <a:extLst xmlns:a="http://schemas.openxmlformats.org/drawingml/2006/main">
               <a:ext uri="{FF2B5EF4-FFF2-40B4-BE49-F238E27FC236}">
-                <a16:creationId xmlns:a16="http://schemas.microsoft.com/office/drawing/2014/main" id="{2C00F7D5-3062-4C43-BDE0-70FAB2FC9B26}"/>
+                <a16:creationId xmlns:a16="http://schemas.microsoft.com/office/drawing/2014/main" id="{39D52B7E-D6B9-4C73-B5AD-9F6BE3A84BC4}"/>
               </a:ext>
             </a:extLst>
           </p:cNvPr>
@@ -18456,7 +18693,7 @@
           <p:cNvPr id="42" name="">
             <a:extLst xmlns:a="http://schemas.openxmlformats.org/drawingml/2006/main">
               <a:ext uri="{FF2B5EF4-FFF2-40B4-BE49-F238E27FC236}">
-                <a16:creationId xmlns:a16="http://schemas.microsoft.com/office/drawing/2014/main" id="{93FEAFF1-3869-4165-BF0B-744DF4F5EA50}"/>
+                <a16:creationId xmlns:a16="http://schemas.microsoft.com/office/drawing/2014/main" id="{2452BB9E-4E78-4FD3-BF6D-87C7E7C1D424}"/>
               </a:ext>
             </a:extLst>
           </p:cNvPr>
@@ -18514,7 +18751,7 @@
           <p:cNvPr id="43" name="">
             <a:extLst xmlns:a="http://schemas.openxmlformats.org/drawingml/2006/main">
               <a:ext uri="{FF2B5EF4-FFF2-40B4-BE49-F238E27FC236}">
-                <a16:creationId xmlns:a16="http://schemas.microsoft.com/office/drawing/2014/main" id="{3A6AE70D-B363-4B09-9B53-D80A3F4373BC}"/>
+                <a16:creationId xmlns:a16="http://schemas.microsoft.com/office/drawing/2014/main" id="{7321BEF3-9BE8-4A28-9252-AB87D6070E30}"/>
               </a:ext>
             </a:extLst>
           </p:cNvPr>
@@ -18547,7 +18784,7 @@
           <p:cNvPr id="44" name="">
             <a:extLst xmlns:a="http://schemas.openxmlformats.org/drawingml/2006/main">
               <a:ext uri="{FF2B5EF4-FFF2-40B4-BE49-F238E27FC236}">
-                <a16:creationId xmlns:a16="http://schemas.microsoft.com/office/drawing/2014/main" id="{6739AEF2-65D2-429F-B503-78407400AFF4}"/>
+                <a16:creationId xmlns:a16="http://schemas.microsoft.com/office/drawing/2014/main" id="{AC211B6D-5A84-4C72-A0AC-71939CDB1F23}"/>
               </a:ext>
             </a:extLst>
           </p:cNvPr>
@@ -18605,7 +18842,7 @@
           <p:cNvPr id="45" name="">
             <a:extLst xmlns:a="http://schemas.openxmlformats.org/drawingml/2006/main">
               <a:ext uri="{FF2B5EF4-FFF2-40B4-BE49-F238E27FC236}">
-                <a16:creationId xmlns:a16="http://schemas.microsoft.com/office/drawing/2014/main" id="{B93EF994-CAA5-4321-84CC-E6CCC5C56E9D}"/>
+                <a16:creationId xmlns:a16="http://schemas.microsoft.com/office/drawing/2014/main" id="{E93AEFC3-2523-4277-A81F-09E05530AEEE}"/>
               </a:ext>
             </a:extLst>
           </p:cNvPr>
@@ -18638,7 +18875,7 @@
           <p:cNvPr id="46" name="">
             <a:extLst xmlns:a="http://schemas.openxmlformats.org/drawingml/2006/main">
               <a:ext uri="{FF2B5EF4-FFF2-40B4-BE49-F238E27FC236}">
-                <a16:creationId xmlns:a16="http://schemas.microsoft.com/office/drawing/2014/main" id="{E72D4448-B370-4321-BC6B-5A5D297CADB6}"/>
+                <a16:creationId xmlns:a16="http://schemas.microsoft.com/office/drawing/2014/main" id="{07F5D06A-DA82-4C3F-B554-F5E2587F58AA}"/>
               </a:ext>
             </a:extLst>
           </p:cNvPr>
@@ -18696,7 +18933,7 @@
           <p:cNvPr id="47" name="">
             <a:extLst xmlns:a="http://schemas.openxmlformats.org/drawingml/2006/main">
               <a:ext uri="{FF2B5EF4-FFF2-40B4-BE49-F238E27FC236}">
-                <a16:creationId xmlns:a16="http://schemas.microsoft.com/office/drawing/2014/main" id="{331BCA49-8C7B-4946-B3F4-16D84D658DAB}"/>
+                <a16:creationId xmlns:a16="http://schemas.microsoft.com/office/drawing/2014/main" id="{3667AADC-CE5F-4E42-8983-BBEC39646F2F}"/>
               </a:ext>
             </a:extLst>
           </p:cNvPr>
@@ -18729,7 +18966,7 @@
           <p:cNvPr id="48" name="">
             <a:extLst xmlns:a="http://schemas.openxmlformats.org/drawingml/2006/main">
               <a:ext uri="{FF2B5EF4-FFF2-40B4-BE49-F238E27FC236}">
-                <a16:creationId xmlns:a16="http://schemas.microsoft.com/office/drawing/2014/main" id="{973F886F-6755-400D-84D8-40C0F32B447B}"/>
+                <a16:creationId xmlns:a16="http://schemas.microsoft.com/office/drawing/2014/main" id="{730AE6CC-7DEC-46B5-81CF-B6CE8A48D4F3}"/>
               </a:ext>
             </a:extLst>
           </p:cNvPr>
@@ -18787,7 +19024,7 @@
           <p:cNvPr id="49" name="">
             <a:extLst xmlns:a="http://schemas.openxmlformats.org/drawingml/2006/main">
               <a:ext uri="{FF2B5EF4-FFF2-40B4-BE49-F238E27FC236}">
-                <a16:creationId xmlns:a16="http://schemas.microsoft.com/office/drawing/2014/main" id="{A1C5C18C-8BAE-4C58-B048-E11216D336AA}"/>
+                <a16:creationId xmlns:a16="http://schemas.microsoft.com/office/drawing/2014/main" id="{96E52A52-FEC4-4263-A83D-BD79FF0E3067}"/>
               </a:ext>
             </a:extLst>
           </p:cNvPr>
@@ -18820,7 +19057,7 @@
           <p:cNvPr id="50" name="">
             <a:extLst xmlns:a="http://schemas.openxmlformats.org/drawingml/2006/main">
               <a:ext uri="{FF2B5EF4-FFF2-40B4-BE49-F238E27FC236}">
-                <a16:creationId xmlns:a16="http://schemas.microsoft.com/office/drawing/2014/main" id="{A2A0903E-3363-46E2-A579-9D4888D7D0B2}"/>
+                <a16:creationId xmlns:a16="http://schemas.microsoft.com/office/drawing/2014/main" id="{BCED8A82-EAAD-4A4F-BA84-DD598CF65E11}"/>
               </a:ext>
             </a:extLst>
           </p:cNvPr>
@@ -18878,7 +19115,7 @@
           <p:cNvPr id="51" name="">
             <a:extLst xmlns:a="http://schemas.openxmlformats.org/drawingml/2006/main">
               <a:ext uri="{FF2B5EF4-FFF2-40B4-BE49-F238E27FC236}">
-                <a16:creationId xmlns:a16="http://schemas.microsoft.com/office/drawing/2014/main" id="{CC111CB8-2BE3-4A87-ABB6-8C36E819F0E6}"/>
+                <a16:creationId xmlns:a16="http://schemas.microsoft.com/office/drawing/2014/main" id="{74E1C01A-9236-4E8A-9825-3CC00AACA2A0}"/>
               </a:ext>
             </a:extLst>
           </p:cNvPr>
@@ -18911,7 +19148,7 @@
           <p:cNvPr id="52" name="">
             <a:extLst xmlns:a="http://schemas.openxmlformats.org/drawingml/2006/main">
               <a:ext uri="{FF2B5EF4-FFF2-40B4-BE49-F238E27FC236}">
-                <a16:creationId xmlns:a16="http://schemas.microsoft.com/office/drawing/2014/main" id="{76BD015E-E3BC-4D2D-AC03-1B544DBDD02E}"/>
+                <a16:creationId xmlns:a16="http://schemas.microsoft.com/office/drawing/2014/main" id="{CF413C09-7505-4922-9EDA-EFC6E1DDE227}"/>
               </a:ext>
             </a:extLst>
           </p:cNvPr>
@@ -18969,7 +19206,7 @@
           <p:cNvPr id="53" name="">
             <a:extLst xmlns:a="http://schemas.openxmlformats.org/drawingml/2006/main">
               <a:ext uri="{FF2B5EF4-FFF2-40B4-BE49-F238E27FC236}">
-                <a16:creationId xmlns:a16="http://schemas.microsoft.com/office/drawing/2014/main" id="{D3183048-FCE2-4B7F-9ECE-2CC1E44AE254}"/>
+                <a16:creationId xmlns:a16="http://schemas.microsoft.com/office/drawing/2014/main" id="{CB28EDBF-654A-4E21-92CB-5FDEB1BBFCB7}"/>
               </a:ext>
             </a:extLst>
           </p:cNvPr>
@@ -19002,7 +19239,7 @@
           <p:cNvPr id="54" name="">
             <a:extLst xmlns:a="http://schemas.openxmlformats.org/drawingml/2006/main">
               <a:ext uri="{FF2B5EF4-FFF2-40B4-BE49-F238E27FC236}">
-                <a16:creationId xmlns:a16="http://schemas.microsoft.com/office/drawing/2014/main" id="{AAB0256A-C1A0-466B-B950-8AAB889B1EEA}"/>
+                <a16:creationId xmlns:a16="http://schemas.microsoft.com/office/drawing/2014/main" id="{73815CF1-5852-4917-BB90-76561BBCDAA7}"/>
               </a:ext>
             </a:extLst>
           </p:cNvPr>
@@ -19035,7 +19272,7 @@
           <p:cNvPr id="55" name="">
             <a:extLst xmlns:a="http://schemas.openxmlformats.org/drawingml/2006/main">
               <a:ext uri="{FF2B5EF4-FFF2-40B4-BE49-F238E27FC236}">
-                <a16:creationId xmlns:a16="http://schemas.microsoft.com/office/drawing/2014/main" id="{E9A8D28A-88E9-42CE-ACEA-E93434E58EBB}"/>
+                <a16:creationId xmlns:a16="http://schemas.microsoft.com/office/drawing/2014/main" id="{E0A2E91D-CE43-4342-81EE-296A93238DD4}"/>
               </a:ext>
             </a:extLst>
           </p:cNvPr>
@@ -19068,7 +19305,7 @@
           <p:cNvPr id="56" name="">
             <a:extLst xmlns:a="http://schemas.openxmlformats.org/drawingml/2006/main">
               <a:ext uri="{FF2B5EF4-FFF2-40B4-BE49-F238E27FC236}">
-                <a16:creationId xmlns:a16="http://schemas.microsoft.com/office/drawing/2014/main" id="{61813404-7459-4432-8797-7CCC78D79554}"/>
+                <a16:creationId xmlns:a16="http://schemas.microsoft.com/office/drawing/2014/main" id="{78FFE7B4-2723-4E49-8349-022A9B0640BC}"/>
               </a:ext>
             </a:extLst>
           </p:cNvPr>
@@ -19101,7 +19338,7 @@
           <p:cNvPr id="57" name="">
             <a:extLst xmlns:a="http://schemas.openxmlformats.org/drawingml/2006/main">
               <a:ext uri="{FF2B5EF4-FFF2-40B4-BE49-F238E27FC236}">
-                <a16:creationId xmlns:a16="http://schemas.microsoft.com/office/drawing/2014/main" id="{00A10040-7632-4F5D-9140-841D92648620}"/>
+                <a16:creationId xmlns:a16="http://schemas.microsoft.com/office/drawing/2014/main" id="{C0577D70-E6BF-438C-8FC4-01F3EC2B920A}"/>
               </a:ext>
             </a:extLst>
           </p:cNvPr>
@@ -19134,7 +19371,7 @@
           <p:cNvPr id="58" name="">
             <a:extLst xmlns:a="http://schemas.openxmlformats.org/drawingml/2006/main">
               <a:ext uri="{FF2B5EF4-FFF2-40B4-BE49-F238E27FC236}">
-                <a16:creationId xmlns:a16="http://schemas.microsoft.com/office/drawing/2014/main" id="{9B8A4CEF-3133-4B77-944C-ADFF494522B3}"/>
+                <a16:creationId xmlns:a16="http://schemas.microsoft.com/office/drawing/2014/main" id="{0A4E2953-8E6F-476A-950A-E1698171F6B6}"/>
               </a:ext>
             </a:extLst>
           </p:cNvPr>
@@ -19167,7 +19404,7 @@
           <p:cNvPr id="59" name="">
             <a:extLst xmlns:a="http://schemas.openxmlformats.org/drawingml/2006/main">
               <a:ext uri="{FF2B5EF4-FFF2-40B4-BE49-F238E27FC236}">
-                <a16:creationId xmlns:a16="http://schemas.microsoft.com/office/drawing/2014/main" id="{5ADDBF21-0BCB-4E96-BD87-53D4D55136CF}"/>
+                <a16:creationId xmlns:a16="http://schemas.microsoft.com/office/drawing/2014/main" id="{C21C71DC-6A81-40BB-BE3C-3A4E9F1DBB6D}"/>
               </a:ext>
             </a:extLst>
           </p:cNvPr>
@@ -19225,7 +19462,7 @@
           <p:cNvPr id="60" name="">
             <a:extLst xmlns:a="http://schemas.openxmlformats.org/drawingml/2006/main">
               <a:ext uri="{FF2B5EF4-FFF2-40B4-BE49-F238E27FC236}">
-                <a16:creationId xmlns:a16="http://schemas.microsoft.com/office/drawing/2014/main" id="{567CE5A1-09E1-49E4-B33D-23DCEF0C0BD8}"/>
+                <a16:creationId xmlns:a16="http://schemas.microsoft.com/office/drawing/2014/main" id="{A5B8FC9B-CC74-4C2C-9DD0-8E47F5C058A4}"/>
               </a:ext>
             </a:extLst>
           </p:cNvPr>
@@ -19283,7 +19520,7 @@
           <p:cNvPr id="61" name="">
             <a:extLst xmlns:a="http://schemas.openxmlformats.org/drawingml/2006/main">
               <a:ext uri="{FF2B5EF4-FFF2-40B4-BE49-F238E27FC236}">
-                <a16:creationId xmlns:a16="http://schemas.microsoft.com/office/drawing/2014/main" id="{BC40F155-4EC3-479C-A9BB-ACFE6363FD20}"/>
+                <a16:creationId xmlns:a16="http://schemas.microsoft.com/office/drawing/2014/main" id="{0804F08C-EB1C-4333-800A-AC87E5379CB2}"/>
               </a:ext>
             </a:extLst>
           </p:cNvPr>
@@ -19339,7 +19576,7 @@
     </p:spTree>
     <p:extLst>
       <p:ext uri="{BB962C8B-B14F-4D97-AF65-F5344CB8AC3E}">
-        <p14:creationId xmlns:p14="http://schemas.microsoft.com/office/powerpoint/2010/main" val="748234966"/>
+        <p14:creationId xmlns:p14="http://schemas.microsoft.com/office/powerpoint/2010/main" val="145715124"/>
       </p:ext>
     </p:extLst>
   </p:cSld>
@@ -19370,7 +19607,7 @@
           <p:cNvPr id="1" name="">
             <a:extLst xmlns:a="http://schemas.openxmlformats.org/drawingml/2006/main">
               <a:ext uri="{FF2B5EF4-FFF2-40B4-BE49-F238E27FC236}">
-                <a16:creationId xmlns:a16="http://schemas.microsoft.com/office/drawing/2014/main" id="{2A5163F7-1911-4B87-953F-048568560079}"/>
+                <a16:creationId xmlns:a16="http://schemas.microsoft.com/office/drawing/2014/main" id="{2011C0B1-25D5-4528-AB09-6AFBF94ACB53}"/>
               </a:ext>
             </a:extLst>
           </p:cNvPr>
@@ -19405,7 +19642,7 @@
           <p:cNvPr id="2" name="">
             <a:extLst xmlns:a="http://schemas.openxmlformats.org/drawingml/2006/main">
               <a:ext uri="{FF2B5EF4-FFF2-40B4-BE49-F238E27FC236}">
-                <a16:creationId xmlns:a16="http://schemas.microsoft.com/office/drawing/2014/main" id="{EE603F60-E5F0-4DA2-ADD8-2439F2B59B2D}"/>
+                <a16:creationId xmlns:a16="http://schemas.microsoft.com/office/drawing/2014/main" id="{98076106-144A-4286-B0BB-14E568BC1845}"/>
               </a:ext>
             </a:extLst>
           </p:cNvPr>
@@ -19440,7 +19677,7 @@
           <p:cNvPr id="3" name="">
             <a:extLst xmlns:a="http://schemas.openxmlformats.org/drawingml/2006/main">
               <a:ext uri="{FF2B5EF4-FFF2-40B4-BE49-F238E27FC236}">
-                <a16:creationId xmlns:a16="http://schemas.microsoft.com/office/drawing/2014/main" id="{333F22FC-427C-49F6-90D1-BBBC43D329F4}"/>
+                <a16:creationId xmlns:a16="http://schemas.microsoft.com/office/drawing/2014/main" id="{EE963A0A-0A76-4795-8F79-17D4467BFB7B}"/>
               </a:ext>
             </a:extLst>
           </p:cNvPr>
@@ -19498,7 +19735,7 @@
           <p:cNvPr id="4" name="">
             <a:extLst xmlns:a="http://schemas.openxmlformats.org/drawingml/2006/main">
               <a:ext uri="{FF2B5EF4-FFF2-40B4-BE49-F238E27FC236}">
-                <a16:creationId xmlns:a16="http://schemas.microsoft.com/office/drawing/2014/main" id="{AC02927D-DAE9-4B60-87FE-92C313342A1E}"/>
+                <a16:creationId xmlns:a16="http://schemas.microsoft.com/office/drawing/2014/main" id="{7B4F6DD1-C7B6-47D6-97FD-B36B3E2EBD69}"/>
               </a:ext>
             </a:extLst>
           </p:cNvPr>
@@ -19556,7 +19793,7 @@
           <p:cNvPr id="5" name="">
             <a:extLst xmlns:a="http://schemas.openxmlformats.org/drawingml/2006/main">
               <a:ext uri="{FF2B5EF4-FFF2-40B4-BE49-F238E27FC236}">
-                <a16:creationId xmlns:a16="http://schemas.microsoft.com/office/drawing/2014/main" id="{B0C76F25-958A-4EEE-841A-F30E39FD730E}"/>
+                <a16:creationId xmlns:a16="http://schemas.microsoft.com/office/drawing/2014/main" id="{57CF2469-5160-4A76-8E73-9A388C22D5F1}"/>
               </a:ext>
             </a:extLst>
           </p:cNvPr>
@@ -19591,7 +19828,7 @@
           <p:cNvPr id="6" name="">
             <a:extLst xmlns:a="http://schemas.openxmlformats.org/drawingml/2006/main">
               <a:ext uri="{FF2B5EF4-FFF2-40B4-BE49-F238E27FC236}">
-                <a16:creationId xmlns:a16="http://schemas.microsoft.com/office/drawing/2014/main" id="{D37343D9-11CC-41C5-900B-9E21693B7628}"/>
+                <a16:creationId xmlns:a16="http://schemas.microsoft.com/office/drawing/2014/main" id="{D8A53CDC-0C1D-4407-882A-2D8D61B1BF21}"/>
               </a:ext>
             </a:extLst>
           </p:cNvPr>
@@ -19649,7 +19886,7 @@
           <p:cNvPr id="7" name="">
             <a:extLst xmlns:a="http://schemas.openxmlformats.org/drawingml/2006/main">
               <a:ext uri="{FF2B5EF4-FFF2-40B4-BE49-F238E27FC236}">
-                <a16:creationId xmlns:a16="http://schemas.microsoft.com/office/drawing/2014/main" id="{3BA3F395-394D-45B2-8E77-97888228A8DE}"/>
+                <a16:creationId xmlns:a16="http://schemas.microsoft.com/office/drawing/2014/main" id="{19F03DA3-C5E0-4178-B1E1-1AE9C07D79F6}"/>
               </a:ext>
             </a:extLst>
           </p:cNvPr>
@@ -19707,7 +19944,7 @@
           <p:cNvPr id="8" name="">
             <a:extLst xmlns:a="http://schemas.openxmlformats.org/drawingml/2006/main">
               <a:ext uri="{FF2B5EF4-FFF2-40B4-BE49-F238E27FC236}">
-                <a16:creationId xmlns:a16="http://schemas.microsoft.com/office/drawing/2014/main" id="{5297071F-AF06-4CAC-A0EA-7D0D99662A08}"/>
+                <a16:creationId xmlns:a16="http://schemas.microsoft.com/office/drawing/2014/main" id="{FDF19786-9130-4C22-A785-D455F995AD80}"/>
               </a:ext>
             </a:extLst>
           </p:cNvPr>
@@ -19740,7 +19977,7 @@
           <p:cNvPr id="9" name="">
             <a:extLst xmlns:a="http://schemas.openxmlformats.org/drawingml/2006/main">
               <a:ext uri="{FF2B5EF4-FFF2-40B4-BE49-F238E27FC236}">
-                <a16:creationId xmlns:a16="http://schemas.microsoft.com/office/drawing/2014/main" id="{9A45A51B-B489-4E6B-BAD8-C406026AA02D}"/>
+                <a16:creationId xmlns:a16="http://schemas.microsoft.com/office/drawing/2014/main" id="{1150B94E-EFE6-497B-B1AE-A4805304EBF0}"/>
               </a:ext>
             </a:extLst>
           </p:cNvPr>
@@ -19798,7 +20035,7 @@
           <p:cNvPr id="10" name="">
             <a:extLst xmlns:a="http://schemas.openxmlformats.org/drawingml/2006/main">
               <a:ext uri="{FF2B5EF4-FFF2-40B4-BE49-F238E27FC236}">
-                <a16:creationId xmlns:a16="http://schemas.microsoft.com/office/drawing/2014/main" id="{4BBAAAF9-28E4-4B1E-8BDF-1FF802EFEEA3}"/>
+                <a16:creationId xmlns:a16="http://schemas.microsoft.com/office/drawing/2014/main" id="{F4FA7594-DFF6-47EB-8214-D9BF8A526270}"/>
               </a:ext>
             </a:extLst>
           </p:cNvPr>
@@ -19833,7 +20070,7 @@
           <p:cNvPr id="11" name="">
             <a:extLst xmlns:a="http://schemas.openxmlformats.org/drawingml/2006/main">
               <a:ext uri="{FF2B5EF4-FFF2-40B4-BE49-F238E27FC236}">
-                <a16:creationId xmlns:a16="http://schemas.microsoft.com/office/drawing/2014/main" id="{CBB58B9B-8574-4729-87E2-E118995A1BCD}"/>
+                <a16:creationId xmlns:a16="http://schemas.microsoft.com/office/drawing/2014/main" id="{788BC0BA-894F-42E2-835C-28F7F515FAC9}"/>
               </a:ext>
             </a:extLst>
           </p:cNvPr>
@@ -19908,7 +20145,7 @@
           <p:cNvPr id="12" name="">
             <a:extLst xmlns:a="http://schemas.openxmlformats.org/drawingml/2006/main">
               <a:ext uri="{FF2B5EF4-FFF2-40B4-BE49-F238E27FC236}">
-                <a16:creationId xmlns:a16="http://schemas.microsoft.com/office/drawing/2014/main" id="{A4E73469-2B5E-4FDB-8A5F-7269EBACD02A}"/>
+                <a16:creationId xmlns:a16="http://schemas.microsoft.com/office/drawing/2014/main" id="{9D3EAA5D-37CF-4704-91F3-C58286F10098}"/>
               </a:ext>
             </a:extLst>
           </p:cNvPr>
@@ -19943,7 +20180,7 @@
           <p:cNvPr id="13" name="">
             <a:extLst xmlns:a="http://schemas.openxmlformats.org/drawingml/2006/main">
               <a:ext uri="{FF2B5EF4-FFF2-40B4-BE49-F238E27FC236}">
-                <a16:creationId xmlns:a16="http://schemas.microsoft.com/office/drawing/2014/main" id="{35D82D43-BC42-47A8-AB3C-FEC62ACCD0C4}"/>
+                <a16:creationId xmlns:a16="http://schemas.microsoft.com/office/drawing/2014/main" id="{0DE9C79D-B0FE-40CE-897C-7155232C14DF}"/>
               </a:ext>
             </a:extLst>
           </p:cNvPr>
@@ -20018,7 +20255,7 @@
           <p:cNvPr id="14" name="">
             <a:extLst xmlns:a="http://schemas.openxmlformats.org/drawingml/2006/main">
               <a:ext uri="{FF2B5EF4-FFF2-40B4-BE49-F238E27FC236}">
-                <a16:creationId xmlns:a16="http://schemas.microsoft.com/office/drawing/2014/main" id="{5CABEA0A-F8AD-44D9-8BEB-CCE81415F3F3}"/>
+                <a16:creationId xmlns:a16="http://schemas.microsoft.com/office/drawing/2014/main" id="{685F6DE7-56A6-4EE2-8330-A9E11C7F5D95}"/>
               </a:ext>
             </a:extLst>
           </p:cNvPr>
@@ -20053,7 +20290,7 @@
           <p:cNvPr id="15" name="">
             <a:extLst xmlns:a="http://schemas.openxmlformats.org/drawingml/2006/main">
               <a:ext uri="{FF2B5EF4-FFF2-40B4-BE49-F238E27FC236}">
-                <a16:creationId xmlns:a16="http://schemas.microsoft.com/office/drawing/2014/main" id="{7CD61133-C758-4B74-8F09-AEE19A418D72}"/>
+                <a16:creationId xmlns:a16="http://schemas.microsoft.com/office/drawing/2014/main" id="{DB1CD3F7-AC7D-4476-A615-8E61E6119F5E}"/>
               </a:ext>
             </a:extLst>
           </p:cNvPr>
@@ -20128,7 +20365,7 @@
           <p:cNvPr id="16" name="">
             <a:extLst xmlns:a="http://schemas.openxmlformats.org/drawingml/2006/main">
               <a:ext uri="{FF2B5EF4-FFF2-40B4-BE49-F238E27FC236}">
-                <a16:creationId xmlns:a16="http://schemas.microsoft.com/office/drawing/2014/main" id="{48E82FE3-E76E-4822-8F71-DAB6108E2C37}"/>
+                <a16:creationId xmlns:a16="http://schemas.microsoft.com/office/drawing/2014/main" id="{27FC736B-BADA-4195-B5A8-E471223C58FD}"/>
               </a:ext>
             </a:extLst>
           </p:cNvPr>
@@ -20163,7 +20400,7 @@
           <p:cNvPr id="17" name="">
             <a:extLst xmlns:a="http://schemas.openxmlformats.org/drawingml/2006/main">
               <a:ext uri="{FF2B5EF4-FFF2-40B4-BE49-F238E27FC236}">
-                <a16:creationId xmlns:a16="http://schemas.microsoft.com/office/drawing/2014/main" id="{68A3C13C-4E4D-42FC-A604-D85DDCB33F0E}"/>
+                <a16:creationId xmlns:a16="http://schemas.microsoft.com/office/drawing/2014/main" id="{12CF84F6-35CB-4681-ABB1-D0240E7D05DC}"/>
               </a:ext>
             </a:extLst>
           </p:cNvPr>
@@ -20238,7 +20475,7 @@
           <p:cNvPr id="18" name="">
             <a:extLst xmlns:a="http://schemas.openxmlformats.org/drawingml/2006/main">
               <a:ext uri="{FF2B5EF4-FFF2-40B4-BE49-F238E27FC236}">
-                <a16:creationId xmlns:a16="http://schemas.microsoft.com/office/drawing/2014/main" id="{CD7CE637-42C7-4F70-854A-881494013034}"/>
+                <a16:creationId xmlns:a16="http://schemas.microsoft.com/office/drawing/2014/main" id="{EB8E0B10-D85F-44FC-8939-25D40FE84D5E}"/>
               </a:ext>
             </a:extLst>
           </p:cNvPr>
@@ -20273,7 +20510,7 @@
           <p:cNvPr id="19" name="">
             <a:extLst xmlns:a="http://schemas.openxmlformats.org/drawingml/2006/main">
               <a:ext uri="{FF2B5EF4-FFF2-40B4-BE49-F238E27FC236}">
-                <a16:creationId xmlns:a16="http://schemas.microsoft.com/office/drawing/2014/main" id="{0AE134D0-9AA8-4866-A7C6-A7B800D804DF}"/>
+                <a16:creationId xmlns:a16="http://schemas.microsoft.com/office/drawing/2014/main" id="{AC55290F-20EC-4DD2-98C5-5A1C3863A720}"/>
               </a:ext>
             </a:extLst>
           </p:cNvPr>
@@ -20348,7 +20585,7 @@
           <p:cNvPr id="20" name="">
             <a:extLst xmlns:a="http://schemas.openxmlformats.org/drawingml/2006/main">
               <a:ext uri="{FF2B5EF4-FFF2-40B4-BE49-F238E27FC236}">
-                <a16:creationId xmlns:a16="http://schemas.microsoft.com/office/drawing/2014/main" id="{14ABECD6-8DBA-404F-8399-3CEBD1EF5F07}"/>
+                <a16:creationId xmlns:a16="http://schemas.microsoft.com/office/drawing/2014/main" id="{1990E682-1695-47AE-913B-906EC75F61F4}"/>
               </a:ext>
             </a:extLst>
           </p:cNvPr>
@@ -20381,7 +20618,7 @@
           <p:cNvPr id="21" name="">
             <a:extLst xmlns:a="http://schemas.openxmlformats.org/drawingml/2006/main">
               <a:ext uri="{FF2B5EF4-FFF2-40B4-BE49-F238E27FC236}">
-                <a16:creationId xmlns:a16="http://schemas.microsoft.com/office/drawing/2014/main" id="{0992B308-6DDE-4EB5-81A1-5BE2FC93E43A}"/>
+                <a16:creationId xmlns:a16="http://schemas.microsoft.com/office/drawing/2014/main" id="{9805781A-8F30-4078-8B80-C09E50DC2790}"/>
               </a:ext>
             </a:extLst>
           </p:cNvPr>
@@ -20414,7 +20651,7 @@
           <p:cNvPr id="22" name="">
             <a:extLst xmlns:a="http://schemas.openxmlformats.org/drawingml/2006/main">
               <a:ext uri="{FF2B5EF4-FFF2-40B4-BE49-F238E27FC236}">
-                <a16:creationId xmlns:a16="http://schemas.microsoft.com/office/drawing/2014/main" id="{BCDAE9AD-A3EB-498F-B200-048EDC91F396}"/>
+                <a16:creationId xmlns:a16="http://schemas.microsoft.com/office/drawing/2014/main" id="{DF38A121-E58E-4F75-AFAC-1F690AF2CC3A}"/>
               </a:ext>
             </a:extLst>
           </p:cNvPr>
@@ -20489,7 +20726,7 @@
           <p:cNvPr id="23" name="">
             <a:extLst xmlns:a="http://schemas.openxmlformats.org/drawingml/2006/main">
               <a:ext uri="{FF2B5EF4-FFF2-40B4-BE49-F238E27FC236}">
-                <a16:creationId xmlns:a16="http://schemas.microsoft.com/office/drawing/2014/main" id="{6054539E-837F-4EF4-8B59-C03CE7016851}"/>
+                <a16:creationId xmlns:a16="http://schemas.microsoft.com/office/drawing/2014/main" id="{EAA3AC0A-4719-4D58-A0B6-D6ACFB1F7970}"/>
               </a:ext>
             </a:extLst>
           </p:cNvPr>
@@ -20522,7 +20759,7 @@
           <p:cNvPr id="24" name="">
             <a:extLst xmlns:a="http://schemas.openxmlformats.org/drawingml/2006/main">
               <a:ext uri="{FF2B5EF4-FFF2-40B4-BE49-F238E27FC236}">
-                <a16:creationId xmlns:a16="http://schemas.microsoft.com/office/drawing/2014/main" id="{C6D39A10-2BF7-4485-96F5-C9F5AD5A410F}"/>
+                <a16:creationId xmlns:a16="http://schemas.microsoft.com/office/drawing/2014/main" id="{1B4AA71B-66E8-483B-A6AA-8D70BFD910AA}"/>
               </a:ext>
             </a:extLst>
           </p:cNvPr>
@@ -20555,7 +20792,7 @@
           <p:cNvPr id="25" name="">
             <a:extLst xmlns:a="http://schemas.openxmlformats.org/drawingml/2006/main">
               <a:ext uri="{FF2B5EF4-FFF2-40B4-BE49-F238E27FC236}">
-                <a16:creationId xmlns:a16="http://schemas.microsoft.com/office/drawing/2014/main" id="{279BF6E2-5CB6-49EA-8C32-78108764385D}"/>
+                <a16:creationId xmlns:a16="http://schemas.microsoft.com/office/drawing/2014/main" id="{3EBF6CD5-D4D2-4D57-8C24-84BE9E3AD6A8}"/>
               </a:ext>
             </a:extLst>
           </p:cNvPr>
@@ -20588,7 +20825,7 @@
           <p:cNvPr id="26" name="">
             <a:extLst xmlns:a="http://schemas.openxmlformats.org/drawingml/2006/main">
               <a:ext uri="{FF2B5EF4-FFF2-40B4-BE49-F238E27FC236}">
-                <a16:creationId xmlns:a16="http://schemas.microsoft.com/office/drawing/2014/main" id="{8FA38D0B-4B88-4665-8BFF-04AD50AF984B}"/>
+                <a16:creationId xmlns:a16="http://schemas.microsoft.com/office/drawing/2014/main" id="{8662A542-F371-4261-AE9E-5F99886A601E}"/>
               </a:ext>
             </a:extLst>
           </p:cNvPr>
@@ -20663,7 +20900,7 @@
           <p:cNvPr id="27" name="">
             <a:extLst xmlns:a="http://schemas.openxmlformats.org/drawingml/2006/main">
               <a:ext uri="{FF2B5EF4-FFF2-40B4-BE49-F238E27FC236}">
-                <a16:creationId xmlns:a16="http://schemas.microsoft.com/office/drawing/2014/main" id="{0A1E9D9A-E3EA-46B4-8834-85763F5BE99F}"/>
+                <a16:creationId xmlns:a16="http://schemas.microsoft.com/office/drawing/2014/main" id="{FF657398-DC01-438D-92C2-2E84C1AA5BD2}"/>
               </a:ext>
             </a:extLst>
           </p:cNvPr>
@@ -20696,7 +20933,7 @@
           <p:cNvPr id="28" name="">
             <a:extLst xmlns:a="http://schemas.openxmlformats.org/drawingml/2006/main">
               <a:ext uri="{FF2B5EF4-FFF2-40B4-BE49-F238E27FC236}">
-                <a16:creationId xmlns:a16="http://schemas.microsoft.com/office/drawing/2014/main" id="{D99DD886-0C87-4B69-BF4E-82BCF961DFAC}"/>
+                <a16:creationId xmlns:a16="http://schemas.microsoft.com/office/drawing/2014/main" id="{4425CBD8-34A5-4913-ABB0-492EF54BD5EF}"/>
               </a:ext>
             </a:extLst>
           </p:cNvPr>
@@ -20729,7 +20966,7 @@
           <p:cNvPr id="29" name="">
             <a:extLst xmlns:a="http://schemas.openxmlformats.org/drawingml/2006/main">
               <a:ext uri="{FF2B5EF4-FFF2-40B4-BE49-F238E27FC236}">
-                <a16:creationId xmlns:a16="http://schemas.microsoft.com/office/drawing/2014/main" id="{224FE282-BBD7-4678-80B0-90991D2152EB}"/>
+                <a16:creationId xmlns:a16="http://schemas.microsoft.com/office/drawing/2014/main" id="{F47B96E4-C51A-4C2C-B96D-29A5F989F70E}"/>
               </a:ext>
             </a:extLst>
           </p:cNvPr>
@@ -20762,7 +20999,7 @@
           <p:cNvPr id="30" name="">
             <a:extLst xmlns:a="http://schemas.openxmlformats.org/drawingml/2006/main">
               <a:ext uri="{FF2B5EF4-FFF2-40B4-BE49-F238E27FC236}">
-                <a16:creationId xmlns:a16="http://schemas.microsoft.com/office/drawing/2014/main" id="{A9473C82-458D-4CE9-968D-00AD45337694}"/>
+                <a16:creationId xmlns:a16="http://schemas.microsoft.com/office/drawing/2014/main" id="{F935307B-2607-403A-B5B4-F4B066417F99}"/>
               </a:ext>
             </a:extLst>
           </p:cNvPr>
@@ -20795,7 +21032,7 @@
           <p:cNvPr id="31" name="">
             <a:extLst xmlns:a="http://schemas.openxmlformats.org/drawingml/2006/main">
               <a:ext uri="{FF2B5EF4-FFF2-40B4-BE49-F238E27FC236}">
-                <a16:creationId xmlns:a16="http://schemas.microsoft.com/office/drawing/2014/main" id="{21F87153-7450-40BB-86A8-9F77BC45D2A1}"/>
+                <a16:creationId xmlns:a16="http://schemas.microsoft.com/office/drawing/2014/main" id="{708521E8-60E5-412D-89AB-9986A8DD6ABC}"/>
               </a:ext>
             </a:extLst>
           </p:cNvPr>
@@ -20828,7 +21065,7 @@
           <p:cNvPr id="32" name="">
             <a:extLst xmlns:a="http://schemas.openxmlformats.org/drawingml/2006/main">
               <a:ext uri="{FF2B5EF4-FFF2-40B4-BE49-F238E27FC236}">
-                <a16:creationId xmlns:a16="http://schemas.microsoft.com/office/drawing/2014/main" id="{A6012CB8-6659-4EB5-99A9-1DCE8E3B6387}"/>
+                <a16:creationId xmlns:a16="http://schemas.microsoft.com/office/drawing/2014/main" id="{974FF0E4-C0A8-4633-9327-CCBF00C0D7ED}"/>
               </a:ext>
             </a:extLst>
           </p:cNvPr>
@@ -20886,7 +21123,7 @@
           <p:cNvPr id="33" name="">
             <a:extLst xmlns:a="http://schemas.openxmlformats.org/drawingml/2006/main">
               <a:ext uri="{FF2B5EF4-FFF2-40B4-BE49-F238E27FC236}">
-                <a16:creationId xmlns:a16="http://schemas.microsoft.com/office/drawing/2014/main" id="{50ED5CB9-501E-4A78-A6C4-CA43A0862DC9}"/>
+                <a16:creationId xmlns:a16="http://schemas.microsoft.com/office/drawing/2014/main" id="{9EFF2710-8DEC-4265-A156-084ED3971EEF}"/>
               </a:ext>
             </a:extLst>
           </p:cNvPr>
@@ -20921,7 +21158,7 @@
           <p:cNvPr id="34" name="">
             <a:extLst xmlns:a="http://schemas.openxmlformats.org/drawingml/2006/main">
               <a:ext uri="{FF2B5EF4-FFF2-40B4-BE49-F238E27FC236}">
-                <a16:creationId xmlns:a16="http://schemas.microsoft.com/office/drawing/2014/main" id="{055E1FB2-FBB5-4CF5-8173-6DF912FDF172}"/>
+                <a16:creationId xmlns:a16="http://schemas.microsoft.com/office/drawing/2014/main" id="{AC3FB187-5F6E-4BB6-92F1-32454FF95F46}"/>
               </a:ext>
             </a:extLst>
           </p:cNvPr>
@@ -20956,7 +21193,7 @@
           <p:cNvPr id="35" name="">
             <a:extLst xmlns:a="http://schemas.openxmlformats.org/drawingml/2006/main">
               <a:ext uri="{FF2B5EF4-FFF2-40B4-BE49-F238E27FC236}">
-                <a16:creationId xmlns:a16="http://schemas.microsoft.com/office/drawing/2014/main" id="{41D96D75-A23C-4283-927D-EC1E59566B05}"/>
+                <a16:creationId xmlns:a16="http://schemas.microsoft.com/office/drawing/2014/main" id="{68D11BDD-4FAB-429C-B08B-C7A8E40A9D45}"/>
               </a:ext>
             </a:extLst>
           </p:cNvPr>
@@ -21014,7 +21251,7 @@
           <p:cNvPr id="36" name="">
             <a:extLst xmlns:a="http://schemas.openxmlformats.org/drawingml/2006/main">
               <a:ext uri="{FF2B5EF4-FFF2-40B4-BE49-F238E27FC236}">
-                <a16:creationId xmlns:a16="http://schemas.microsoft.com/office/drawing/2014/main" id="{E2ECD605-5BF8-4CE7-A40E-EA8A337474B8}"/>
+                <a16:creationId xmlns:a16="http://schemas.microsoft.com/office/drawing/2014/main" id="{7B570279-100F-4D37-A1F9-02E70F1DC640}"/>
               </a:ext>
             </a:extLst>
           </p:cNvPr>
@@ -21072,7 +21309,7 @@
           <p:cNvPr id="37" name="">
             <a:extLst xmlns:a="http://schemas.openxmlformats.org/drawingml/2006/main">
               <a:ext uri="{FF2B5EF4-FFF2-40B4-BE49-F238E27FC236}">
-                <a16:creationId xmlns:a16="http://schemas.microsoft.com/office/drawing/2014/main" id="{E824A3ED-4073-4A24-8D12-78292E3CBA69}"/>
+                <a16:creationId xmlns:a16="http://schemas.microsoft.com/office/drawing/2014/main" id="{3088F80B-6DB2-4E40-9BE1-DC26D1F3F64D}"/>
               </a:ext>
             </a:extLst>
           </p:cNvPr>
@@ -21105,7 +21342,7 @@
           <p:cNvPr id="38" name="">
             <a:extLst xmlns:a="http://schemas.openxmlformats.org/drawingml/2006/main">
               <a:ext uri="{FF2B5EF4-FFF2-40B4-BE49-F238E27FC236}">
-                <a16:creationId xmlns:a16="http://schemas.microsoft.com/office/drawing/2014/main" id="{8D1DA14D-BA94-43AD-8010-D573BC403F0B}"/>
+                <a16:creationId xmlns:a16="http://schemas.microsoft.com/office/drawing/2014/main" id="{96FFAFF8-E007-4F63-AA3F-9424B2BE7E1A}"/>
               </a:ext>
             </a:extLst>
           </p:cNvPr>
@@ -21140,7 +21377,7 @@
           <p:cNvPr id="39" name="">
             <a:extLst xmlns:a="http://schemas.openxmlformats.org/drawingml/2006/main">
               <a:ext uri="{FF2B5EF4-FFF2-40B4-BE49-F238E27FC236}">
-                <a16:creationId xmlns:a16="http://schemas.microsoft.com/office/drawing/2014/main" id="{9EF8BD11-900D-4280-9616-DC6712302DFD}"/>
+                <a16:creationId xmlns:a16="http://schemas.microsoft.com/office/drawing/2014/main" id="{C3595A7D-5CEE-43D4-B884-D0F90D2C7C91}"/>
               </a:ext>
             </a:extLst>
           </p:cNvPr>
@@ -21175,7 +21412,7 @@
           <p:cNvPr id="40" name="">
             <a:extLst xmlns:a="http://schemas.openxmlformats.org/drawingml/2006/main">
               <a:ext uri="{FF2B5EF4-FFF2-40B4-BE49-F238E27FC236}">
-                <a16:creationId xmlns:a16="http://schemas.microsoft.com/office/drawing/2014/main" id="{6D7E3CD8-AC68-4E8C-921B-99D4FB255A8D}"/>
+                <a16:creationId xmlns:a16="http://schemas.microsoft.com/office/drawing/2014/main" id="{BFC0789C-5365-47B1-8580-DC3A3D3F757A}"/>
               </a:ext>
             </a:extLst>
           </p:cNvPr>
@@ -21233,7 +21470,7 @@
           <p:cNvPr id="41" name="">
             <a:extLst xmlns:a="http://schemas.openxmlformats.org/drawingml/2006/main">
               <a:ext uri="{FF2B5EF4-FFF2-40B4-BE49-F238E27FC236}">
-                <a16:creationId xmlns:a16="http://schemas.microsoft.com/office/drawing/2014/main" id="{5A06842F-8D82-4A37-BCC1-64D17A12407F}"/>
+                <a16:creationId xmlns:a16="http://schemas.microsoft.com/office/drawing/2014/main" id="{0B85A26D-85D7-443A-8EF8-D5D9E6EC4CA0}"/>
               </a:ext>
             </a:extLst>
           </p:cNvPr>
@@ -21291,7 +21528,7 @@
           <p:cNvPr id="42" name="">
             <a:extLst xmlns:a="http://schemas.openxmlformats.org/drawingml/2006/main">
               <a:ext uri="{FF2B5EF4-FFF2-40B4-BE49-F238E27FC236}">
-                <a16:creationId xmlns:a16="http://schemas.microsoft.com/office/drawing/2014/main" id="{1A707238-EFAB-48E4-8FE2-801CEEB4B7C3}"/>
+                <a16:creationId xmlns:a16="http://schemas.microsoft.com/office/drawing/2014/main" id="{CE7C1E14-995A-42B3-A4A1-3F7A7ADC18F4}"/>
               </a:ext>
             </a:extLst>
           </p:cNvPr>
@@ -21324,7 +21561,7 @@
           <p:cNvPr id="43" name="">
             <a:extLst xmlns:a="http://schemas.openxmlformats.org/drawingml/2006/main">
               <a:ext uri="{FF2B5EF4-FFF2-40B4-BE49-F238E27FC236}">
-                <a16:creationId xmlns:a16="http://schemas.microsoft.com/office/drawing/2014/main" id="{B1869384-B5EF-4AC3-A6E6-A6B0E602E675}"/>
+                <a16:creationId xmlns:a16="http://schemas.microsoft.com/office/drawing/2014/main" id="{AF9FFCC3-0621-45D0-9D71-2FBCDDFF7380}"/>
               </a:ext>
             </a:extLst>
           </p:cNvPr>
@@ -21382,7 +21619,7 @@
           <p:cNvPr id="44" name="">
             <a:extLst xmlns:a="http://schemas.openxmlformats.org/drawingml/2006/main">
               <a:ext uri="{FF2B5EF4-FFF2-40B4-BE49-F238E27FC236}">
-                <a16:creationId xmlns:a16="http://schemas.microsoft.com/office/drawing/2014/main" id="{D1AFFB63-4DCC-47EA-A5F3-7BEC99E12833}"/>
+                <a16:creationId xmlns:a16="http://schemas.microsoft.com/office/drawing/2014/main" id="{B0EC54CE-6615-4427-B7BA-9C9BCC33B2AC}"/>
               </a:ext>
             </a:extLst>
           </p:cNvPr>
@@ -21440,7 +21677,7 @@
           <p:cNvPr id="45" name="">
             <a:extLst xmlns:a="http://schemas.openxmlformats.org/drawingml/2006/main">
               <a:ext uri="{FF2B5EF4-FFF2-40B4-BE49-F238E27FC236}">
-                <a16:creationId xmlns:a16="http://schemas.microsoft.com/office/drawing/2014/main" id="{7AA33F90-B1BE-469B-AEE3-2D67F90D8190}"/>
+                <a16:creationId xmlns:a16="http://schemas.microsoft.com/office/drawing/2014/main" id="{67A13272-7E2B-4DE8-B22C-4B1D85716FD7}"/>
               </a:ext>
             </a:extLst>
           </p:cNvPr>
@@ -21498,7 +21735,7 @@
           <p:cNvPr id="46" name="">
             <a:extLst xmlns:a="http://schemas.openxmlformats.org/drawingml/2006/main">
               <a:ext uri="{FF2B5EF4-FFF2-40B4-BE49-F238E27FC236}">
-                <a16:creationId xmlns:a16="http://schemas.microsoft.com/office/drawing/2014/main" id="{0B3F55FC-3CC7-4E24-9675-AD2B934DF865}"/>
+                <a16:creationId xmlns:a16="http://schemas.microsoft.com/office/drawing/2014/main" id="{15705F20-8D0B-4FF0-A1A6-A5313C13026F}"/>
               </a:ext>
             </a:extLst>
           </p:cNvPr>
@@ -21556,7 +21793,7 @@
           <p:cNvPr id="47" name="">
             <a:extLst xmlns:a="http://schemas.openxmlformats.org/drawingml/2006/main">
               <a:ext uri="{FF2B5EF4-FFF2-40B4-BE49-F238E27FC236}">
-                <a16:creationId xmlns:a16="http://schemas.microsoft.com/office/drawing/2014/main" id="{AC5F9369-834C-4D38-BBC1-33A88694051A}"/>
+                <a16:creationId xmlns:a16="http://schemas.microsoft.com/office/drawing/2014/main" id="{CA70C09A-B502-42D5-A7C4-A60150121232}"/>
               </a:ext>
             </a:extLst>
           </p:cNvPr>
@@ -21612,7 +21849,7 @@
     </p:spTree>
     <p:extLst>
       <p:ext uri="{BB962C8B-B14F-4D97-AF65-F5344CB8AC3E}">
-        <p14:creationId xmlns:p14="http://schemas.microsoft.com/office/powerpoint/2010/main" val="1684948281"/>
+        <p14:creationId xmlns:p14="http://schemas.microsoft.com/office/powerpoint/2010/main" val="685037781"/>
       </p:ext>
     </p:extLst>
   </p:cSld>
@@ -21643,7 +21880,7 @@
           <p:cNvPr id="1" name="">
             <a:extLst xmlns:a="http://schemas.openxmlformats.org/drawingml/2006/main">
               <a:ext uri="{FF2B5EF4-FFF2-40B4-BE49-F238E27FC236}">
-                <a16:creationId xmlns:a16="http://schemas.microsoft.com/office/drawing/2014/main" id="{67010628-A8BC-4C78-B688-7C4CB2D599C9}"/>
+                <a16:creationId xmlns:a16="http://schemas.microsoft.com/office/drawing/2014/main" id="{E45E15DC-0CB7-4001-A54A-0DA2EA6A9309}"/>
               </a:ext>
             </a:extLst>
           </p:cNvPr>
@@ -21678,7 +21915,7 @@
           <p:cNvPr id="2" name="">
             <a:extLst xmlns:a="http://schemas.openxmlformats.org/drawingml/2006/main">
               <a:ext uri="{FF2B5EF4-FFF2-40B4-BE49-F238E27FC236}">
-                <a16:creationId xmlns:a16="http://schemas.microsoft.com/office/drawing/2014/main" id="{9BEC0F31-A860-4D9E-ABFB-D359AB271D66}"/>
+                <a16:creationId xmlns:a16="http://schemas.microsoft.com/office/drawing/2014/main" id="{0E332337-692B-446D-864A-D48D8B779902}"/>
               </a:ext>
             </a:extLst>
           </p:cNvPr>
@@ -21713,7 +21950,7 @@
           <p:cNvPr id="3" name="">
             <a:extLst xmlns:a="http://schemas.openxmlformats.org/drawingml/2006/main">
               <a:ext uri="{FF2B5EF4-FFF2-40B4-BE49-F238E27FC236}">
-                <a16:creationId xmlns:a16="http://schemas.microsoft.com/office/drawing/2014/main" id="{D84C4B6A-BE71-41E5-9FEF-6BA9019387F4}"/>
+                <a16:creationId xmlns:a16="http://schemas.microsoft.com/office/drawing/2014/main" id="{E9C27ECC-A339-468F-AD3C-14E93D80BBFA}"/>
               </a:ext>
             </a:extLst>
           </p:cNvPr>
@@ -21771,7 +22008,7 @@
           <p:cNvPr id="4" name="">
             <a:extLst xmlns:a="http://schemas.openxmlformats.org/drawingml/2006/main">
               <a:ext uri="{FF2B5EF4-FFF2-40B4-BE49-F238E27FC236}">
-                <a16:creationId xmlns:a16="http://schemas.microsoft.com/office/drawing/2014/main" id="{07A7F697-30DC-4CCE-A003-067C4C64D413}"/>
+                <a16:creationId xmlns:a16="http://schemas.microsoft.com/office/drawing/2014/main" id="{07427D9B-41EE-41F1-A3A8-AE0CFB1DBF8C}"/>
               </a:ext>
             </a:extLst>
           </p:cNvPr>
@@ -21829,7 +22066,7 @@
           <p:cNvPr id="5" name="">
             <a:extLst xmlns:a="http://schemas.openxmlformats.org/drawingml/2006/main">
               <a:ext uri="{FF2B5EF4-FFF2-40B4-BE49-F238E27FC236}">
-                <a16:creationId xmlns:a16="http://schemas.microsoft.com/office/drawing/2014/main" id="{7B304C6B-68A1-45C0-A49A-1AB27CFAF307}"/>
+                <a16:creationId xmlns:a16="http://schemas.microsoft.com/office/drawing/2014/main" id="{569E293D-C6AC-4FBE-AC0E-BDA7A51B0C75}"/>
               </a:ext>
             </a:extLst>
           </p:cNvPr>
@@ -21864,7 +22101,7 @@
           <p:cNvPr id="6" name="">
             <a:extLst xmlns:a="http://schemas.openxmlformats.org/drawingml/2006/main">
               <a:ext uri="{FF2B5EF4-FFF2-40B4-BE49-F238E27FC236}">
-                <a16:creationId xmlns:a16="http://schemas.microsoft.com/office/drawing/2014/main" id="{A7D96FAF-6FB7-430A-B296-72977AE55568}"/>
+                <a16:creationId xmlns:a16="http://schemas.microsoft.com/office/drawing/2014/main" id="{5C13601C-B7A9-42A2-A057-D9E12A5EA0CA}"/>
               </a:ext>
             </a:extLst>
           </p:cNvPr>
@@ -21922,7 +22159,7 @@
           <p:cNvPr id="7" name="">
             <a:extLst xmlns:a="http://schemas.openxmlformats.org/drawingml/2006/main">
               <a:ext uri="{FF2B5EF4-FFF2-40B4-BE49-F238E27FC236}">
-                <a16:creationId xmlns:a16="http://schemas.microsoft.com/office/drawing/2014/main" id="{8F320298-5C77-49CD-AC04-30FEB3323109}"/>
+                <a16:creationId xmlns:a16="http://schemas.microsoft.com/office/drawing/2014/main" id="{BD104FC3-78B7-48E4-82F7-D29A30FED0EC}"/>
               </a:ext>
             </a:extLst>
           </p:cNvPr>
@@ -21980,7 +22217,7 @@
           <p:cNvPr id="8" name="">
             <a:extLst xmlns:a="http://schemas.openxmlformats.org/drawingml/2006/main">
               <a:ext uri="{FF2B5EF4-FFF2-40B4-BE49-F238E27FC236}">
-                <a16:creationId xmlns:a16="http://schemas.microsoft.com/office/drawing/2014/main" id="{287C2588-0295-46AA-B83F-C930B3B143BF}"/>
+                <a16:creationId xmlns:a16="http://schemas.microsoft.com/office/drawing/2014/main" id="{5B083BD0-92E7-4B16-8F09-6ABFB6BFEB81}"/>
               </a:ext>
             </a:extLst>
           </p:cNvPr>
@@ -22015,7 +22252,7 @@
           <p:cNvPr id="9" name="">
             <a:extLst xmlns:a="http://schemas.openxmlformats.org/drawingml/2006/main">
               <a:ext uri="{FF2B5EF4-FFF2-40B4-BE49-F238E27FC236}">
-                <a16:creationId xmlns:a16="http://schemas.microsoft.com/office/drawing/2014/main" id="{0E844990-89CD-47A1-A36E-31783085B961}"/>
+                <a16:creationId xmlns:a16="http://schemas.microsoft.com/office/drawing/2014/main" id="{4BEB6991-15FC-4052-8ABD-F7E157FB9D3C}"/>
               </a:ext>
             </a:extLst>
           </p:cNvPr>
@@ -22073,7 +22310,7 @@
           <p:cNvPr id="10" name="">
             <a:extLst xmlns:a="http://schemas.openxmlformats.org/drawingml/2006/main">
               <a:ext uri="{FF2B5EF4-FFF2-40B4-BE49-F238E27FC236}">
-                <a16:creationId xmlns:a16="http://schemas.microsoft.com/office/drawing/2014/main" id="{52F27F0D-84A0-4CA4-99DB-A2C3CEFE27BC}"/>
+                <a16:creationId xmlns:a16="http://schemas.microsoft.com/office/drawing/2014/main" id="{942AC705-1FF4-4728-8030-BBC7FC0157F2}"/>
               </a:ext>
             </a:extLst>
           </p:cNvPr>
@@ -22108,7 +22345,7 @@
           <p:cNvPr id="11" name="">
             <a:extLst xmlns:a="http://schemas.openxmlformats.org/drawingml/2006/main">
               <a:ext uri="{FF2B5EF4-FFF2-40B4-BE49-F238E27FC236}">
-                <a16:creationId xmlns:a16="http://schemas.microsoft.com/office/drawing/2014/main" id="{5E51A882-DE4A-48D0-94A1-8122E93FDEC5}"/>
+                <a16:creationId xmlns:a16="http://schemas.microsoft.com/office/drawing/2014/main" id="{52113313-6DE4-41E0-ADFC-8F7705993FBC}"/>
               </a:ext>
             </a:extLst>
           </p:cNvPr>
@@ -22183,7 +22420,7 @@
           <p:cNvPr id="12" name="">
             <a:extLst xmlns:a="http://schemas.openxmlformats.org/drawingml/2006/main">
               <a:ext uri="{FF2B5EF4-FFF2-40B4-BE49-F238E27FC236}">
-                <a16:creationId xmlns:a16="http://schemas.microsoft.com/office/drawing/2014/main" id="{CA26252F-E1AE-45D7-958D-2BF8F967D595}"/>
+                <a16:creationId xmlns:a16="http://schemas.microsoft.com/office/drawing/2014/main" id="{E5967FFB-BE48-4E73-B00B-E686A427EFDD}"/>
               </a:ext>
             </a:extLst>
           </p:cNvPr>
@@ -22218,7 +22455,7 @@
           <p:cNvPr id="13" name="">
             <a:extLst xmlns:a="http://schemas.openxmlformats.org/drawingml/2006/main">
               <a:ext uri="{FF2B5EF4-FFF2-40B4-BE49-F238E27FC236}">
-                <a16:creationId xmlns:a16="http://schemas.microsoft.com/office/drawing/2014/main" id="{0234C233-DBD4-4CDF-A815-DA6A1E20105C}"/>
+                <a16:creationId xmlns:a16="http://schemas.microsoft.com/office/drawing/2014/main" id="{490FBFE1-BC8C-414D-978C-626A94DC9C6F}"/>
               </a:ext>
             </a:extLst>
           </p:cNvPr>
@@ -22293,7 +22530,7 @@
           <p:cNvPr id="14" name="">
             <a:extLst xmlns:a="http://schemas.openxmlformats.org/drawingml/2006/main">
               <a:ext uri="{FF2B5EF4-FFF2-40B4-BE49-F238E27FC236}">
-                <a16:creationId xmlns:a16="http://schemas.microsoft.com/office/drawing/2014/main" id="{88961095-80FC-4271-B051-1BE81F21FED0}"/>
+                <a16:creationId xmlns:a16="http://schemas.microsoft.com/office/drawing/2014/main" id="{23DFD602-1192-44B5-9D04-C04BC3F1BD59}"/>
               </a:ext>
             </a:extLst>
           </p:cNvPr>
@@ -22328,7 +22565,7 @@
           <p:cNvPr id="15" name="">
             <a:extLst xmlns:a="http://schemas.openxmlformats.org/drawingml/2006/main">
               <a:ext uri="{FF2B5EF4-FFF2-40B4-BE49-F238E27FC236}">
-                <a16:creationId xmlns:a16="http://schemas.microsoft.com/office/drawing/2014/main" id="{84D36512-A274-4C25-94D3-C27EBA9B9969}"/>
+                <a16:creationId xmlns:a16="http://schemas.microsoft.com/office/drawing/2014/main" id="{1138CEC4-3DCA-40C7-A92C-8C2B3BCA713B}"/>
               </a:ext>
             </a:extLst>
           </p:cNvPr>
@@ -22420,7 +22657,7 @@
           <p:cNvPr id="16" name="">
             <a:extLst xmlns:a="http://schemas.openxmlformats.org/drawingml/2006/main">
               <a:ext uri="{FF2B5EF4-FFF2-40B4-BE49-F238E27FC236}">
-                <a16:creationId xmlns:a16="http://schemas.microsoft.com/office/drawing/2014/main" id="{8C1905C2-2BEA-4CC2-A603-9E79036AA747}"/>
+                <a16:creationId xmlns:a16="http://schemas.microsoft.com/office/drawing/2014/main" id="{97EB50F5-6E71-4185-A099-F5C9575F047E}"/>
               </a:ext>
             </a:extLst>
           </p:cNvPr>
@@ -22455,7 +22692,7 @@
           <p:cNvPr id="17" name="">
             <a:extLst xmlns:a="http://schemas.openxmlformats.org/drawingml/2006/main">
               <a:ext uri="{FF2B5EF4-FFF2-40B4-BE49-F238E27FC236}">
-                <a16:creationId xmlns:a16="http://schemas.microsoft.com/office/drawing/2014/main" id="{620AA475-B019-4FF5-8292-C01675E1AE43}"/>
+                <a16:creationId xmlns:a16="http://schemas.microsoft.com/office/drawing/2014/main" id="{FB699A5A-17DA-445A-8516-3762F9C1E268}"/>
               </a:ext>
             </a:extLst>
           </p:cNvPr>
@@ -22513,7 +22750,7 @@
           <p:cNvPr id="18" name="">
             <a:extLst xmlns:a="http://schemas.openxmlformats.org/drawingml/2006/main">
               <a:ext uri="{FF2B5EF4-FFF2-40B4-BE49-F238E27FC236}">
-                <a16:creationId xmlns:a16="http://schemas.microsoft.com/office/drawing/2014/main" id="{2AFCCB29-0703-4DC8-9978-70C17C8A62D4}"/>
+                <a16:creationId xmlns:a16="http://schemas.microsoft.com/office/drawing/2014/main" id="{60F7C28C-9116-44C8-8238-ADB07AF569B0}"/>
               </a:ext>
             </a:extLst>
           </p:cNvPr>
@@ -22548,7 +22785,7 @@
           <p:cNvPr id="19" name="">
             <a:extLst xmlns:a="http://schemas.openxmlformats.org/drawingml/2006/main">
               <a:ext uri="{FF2B5EF4-FFF2-40B4-BE49-F238E27FC236}">
-                <a16:creationId xmlns:a16="http://schemas.microsoft.com/office/drawing/2014/main" id="{DE0BBAA4-4B4D-4451-BA15-817E58390D36}"/>
+                <a16:creationId xmlns:a16="http://schemas.microsoft.com/office/drawing/2014/main" id="{18366414-1FDF-4686-88C3-3AA878FAFEB3}"/>
               </a:ext>
             </a:extLst>
           </p:cNvPr>
@@ -22606,7 +22843,7 @@
           <p:cNvPr id="20" name="">
             <a:extLst xmlns:a="http://schemas.openxmlformats.org/drawingml/2006/main">
               <a:ext uri="{FF2B5EF4-FFF2-40B4-BE49-F238E27FC236}">
-                <a16:creationId xmlns:a16="http://schemas.microsoft.com/office/drawing/2014/main" id="{3EBF3D52-A5EE-4D19-B79B-F7F7BA7ECC46}"/>
+                <a16:creationId xmlns:a16="http://schemas.microsoft.com/office/drawing/2014/main" id="{FEC457B9-C91C-493B-AA4C-07C5EF50C733}"/>
               </a:ext>
             </a:extLst>
           </p:cNvPr>
@@ -22639,7 +22876,7 @@
           <p:cNvPr id="21" name="">
             <a:extLst xmlns:a="http://schemas.openxmlformats.org/drawingml/2006/main">
               <a:ext uri="{FF2B5EF4-FFF2-40B4-BE49-F238E27FC236}">
-                <a16:creationId xmlns:a16="http://schemas.microsoft.com/office/drawing/2014/main" id="{2203CD10-FA87-417B-8357-23FA830739C3}"/>
+                <a16:creationId xmlns:a16="http://schemas.microsoft.com/office/drawing/2014/main" id="{0C086B12-ECD0-4DB9-B26D-28E629343ECA}"/>
               </a:ext>
             </a:extLst>
           </p:cNvPr>
@@ -22672,7 +22909,7 @@
           <p:cNvPr id="22" name="">
             <a:extLst xmlns:a="http://schemas.openxmlformats.org/drawingml/2006/main">
               <a:ext uri="{FF2B5EF4-FFF2-40B4-BE49-F238E27FC236}">
-                <a16:creationId xmlns:a16="http://schemas.microsoft.com/office/drawing/2014/main" id="{9CD192C6-BFBD-4CF5-9A29-51B9F3C4A98B}"/>
+                <a16:creationId xmlns:a16="http://schemas.microsoft.com/office/drawing/2014/main" id="{AB0D897A-EEF3-4866-9B58-BF2FB8B4F9DC}"/>
               </a:ext>
             </a:extLst>
           </p:cNvPr>
@@ -22705,7 +22942,7 @@
           <p:cNvPr id="23" name="">
             <a:extLst xmlns:a="http://schemas.openxmlformats.org/drawingml/2006/main">
               <a:ext uri="{FF2B5EF4-FFF2-40B4-BE49-F238E27FC236}">
-                <a16:creationId xmlns:a16="http://schemas.microsoft.com/office/drawing/2014/main" id="{3ABA7732-B518-4C29-9031-A17415FDBCE1}"/>
+                <a16:creationId xmlns:a16="http://schemas.microsoft.com/office/drawing/2014/main" id="{F11FB06A-8F05-4D39-873B-47BDF9977BDF}"/>
               </a:ext>
             </a:extLst>
           </p:cNvPr>
@@ -22738,7 +22975,7 @@
           <p:cNvPr id="24" name="">
             <a:extLst xmlns:a="http://schemas.openxmlformats.org/drawingml/2006/main">
               <a:ext uri="{FF2B5EF4-FFF2-40B4-BE49-F238E27FC236}">
-                <a16:creationId xmlns:a16="http://schemas.microsoft.com/office/drawing/2014/main" id="{1949BDF4-CDD2-4BAD-9CDA-887133E15136}"/>
+                <a16:creationId xmlns:a16="http://schemas.microsoft.com/office/drawing/2014/main" id="{0773D871-9279-46E4-91BE-0644B8E6512C}"/>
               </a:ext>
             </a:extLst>
           </p:cNvPr>
@@ -22771,7 +23008,7 @@
           <p:cNvPr id="25" name="">
             <a:extLst xmlns:a="http://schemas.openxmlformats.org/drawingml/2006/main">
               <a:ext uri="{FF2B5EF4-FFF2-40B4-BE49-F238E27FC236}">
-                <a16:creationId xmlns:a16="http://schemas.microsoft.com/office/drawing/2014/main" id="{9CD1A105-4F7E-48AE-ACA9-622B810B9A86}"/>
+                <a16:creationId xmlns:a16="http://schemas.microsoft.com/office/drawing/2014/main" id="{800A4795-3585-4E48-93AE-06406598FE20}"/>
               </a:ext>
             </a:extLst>
           </p:cNvPr>
@@ -22806,7 +23043,7 @@
           <p:cNvPr id="26" name="">
             <a:extLst xmlns:a="http://schemas.openxmlformats.org/drawingml/2006/main">
               <a:ext uri="{FF2B5EF4-FFF2-40B4-BE49-F238E27FC236}">
-                <a16:creationId xmlns:a16="http://schemas.microsoft.com/office/drawing/2014/main" id="{EA11EFB7-AFAB-44A6-8DC7-05A84C5A28E2}"/>
+                <a16:creationId xmlns:a16="http://schemas.microsoft.com/office/drawing/2014/main" id="{2A1E711C-7A41-467B-9B85-63F9F289F869}"/>
               </a:ext>
             </a:extLst>
           </p:cNvPr>
@@ -22841,7 +23078,7 @@
           <p:cNvPr id="27" name="">
             <a:extLst xmlns:a="http://schemas.openxmlformats.org/drawingml/2006/main">
               <a:ext uri="{FF2B5EF4-FFF2-40B4-BE49-F238E27FC236}">
-                <a16:creationId xmlns:a16="http://schemas.microsoft.com/office/drawing/2014/main" id="{F912A12D-1F07-4AC5-B92F-1CCBAC15F38E}"/>
+                <a16:creationId xmlns:a16="http://schemas.microsoft.com/office/drawing/2014/main" id="{D77B25E3-12F2-41DF-AAAE-4838C05746B2}"/>
               </a:ext>
             </a:extLst>
           </p:cNvPr>
@@ -22899,7 +23136,7 @@
           <p:cNvPr id="28" name="">
             <a:extLst xmlns:a="http://schemas.openxmlformats.org/drawingml/2006/main">
               <a:ext uri="{FF2B5EF4-FFF2-40B4-BE49-F238E27FC236}">
-                <a16:creationId xmlns:a16="http://schemas.microsoft.com/office/drawing/2014/main" id="{31B22053-5112-4489-A554-0D8867AF7719}"/>
+                <a16:creationId xmlns:a16="http://schemas.microsoft.com/office/drawing/2014/main" id="{7C57C0C3-6686-44BA-9E4F-5591801472A7}"/>
               </a:ext>
             </a:extLst>
           </p:cNvPr>
@@ -22957,7 +23194,7 @@
           <p:cNvPr id="29" name="">
             <a:extLst xmlns:a="http://schemas.openxmlformats.org/drawingml/2006/main">
               <a:ext uri="{FF2B5EF4-FFF2-40B4-BE49-F238E27FC236}">
-                <a16:creationId xmlns:a16="http://schemas.microsoft.com/office/drawing/2014/main" id="{E9CE9E63-ED3B-4D58-A5DB-12F47620F1A0}"/>
+                <a16:creationId xmlns:a16="http://schemas.microsoft.com/office/drawing/2014/main" id="{833F3350-3128-4840-842C-4E29E782D6E7}"/>
               </a:ext>
             </a:extLst>
           </p:cNvPr>
@@ -22990,7 +23227,7 @@
           <p:cNvPr id="30" name="">
             <a:extLst xmlns:a="http://schemas.openxmlformats.org/drawingml/2006/main">
               <a:ext uri="{FF2B5EF4-FFF2-40B4-BE49-F238E27FC236}">
-                <a16:creationId xmlns:a16="http://schemas.microsoft.com/office/drawing/2014/main" id="{64484640-EDC1-46CC-A9BF-0FCAB85E1DB3}"/>
+                <a16:creationId xmlns:a16="http://schemas.microsoft.com/office/drawing/2014/main" id="{B9F6DD15-75B3-4FEB-89D2-E9B5AB46CAA7}"/>
               </a:ext>
             </a:extLst>
           </p:cNvPr>
@@ -23025,7 +23262,7 @@
           <p:cNvPr id="31" name="">
             <a:extLst xmlns:a="http://schemas.openxmlformats.org/drawingml/2006/main">
               <a:ext uri="{FF2B5EF4-FFF2-40B4-BE49-F238E27FC236}">
-                <a16:creationId xmlns:a16="http://schemas.microsoft.com/office/drawing/2014/main" id="{262E8A06-B8E9-4A92-9686-05737C83069B}"/>
+                <a16:creationId xmlns:a16="http://schemas.microsoft.com/office/drawing/2014/main" id="{DEF05109-5C3E-4E7A-9A3B-47FAF3D405E7}"/>
               </a:ext>
             </a:extLst>
           </p:cNvPr>
@@ -23060,7 +23297,7 @@
           <p:cNvPr id="32" name="">
             <a:extLst xmlns:a="http://schemas.openxmlformats.org/drawingml/2006/main">
               <a:ext uri="{FF2B5EF4-FFF2-40B4-BE49-F238E27FC236}">
-                <a16:creationId xmlns:a16="http://schemas.microsoft.com/office/drawing/2014/main" id="{6D2B60AF-0751-4A98-A184-81D314E63F67}"/>
+                <a16:creationId xmlns:a16="http://schemas.microsoft.com/office/drawing/2014/main" id="{E0096F74-0A85-420D-B5B9-9D9ADA1148EB}"/>
               </a:ext>
             </a:extLst>
           </p:cNvPr>
@@ -23118,7 +23355,7 @@
           <p:cNvPr id="33" name="">
             <a:extLst xmlns:a="http://schemas.openxmlformats.org/drawingml/2006/main">
               <a:ext uri="{FF2B5EF4-FFF2-40B4-BE49-F238E27FC236}">
-                <a16:creationId xmlns:a16="http://schemas.microsoft.com/office/drawing/2014/main" id="{65FE1F5C-9003-435E-B1B6-FC3BB9B07298}"/>
+                <a16:creationId xmlns:a16="http://schemas.microsoft.com/office/drawing/2014/main" id="{1AB5FD47-45FF-4A1A-8723-9A8FE4D37762}"/>
               </a:ext>
             </a:extLst>
           </p:cNvPr>
@@ -23176,7 +23413,7 @@
           <p:cNvPr id="34" name="">
             <a:extLst xmlns:a="http://schemas.openxmlformats.org/drawingml/2006/main">
               <a:ext uri="{FF2B5EF4-FFF2-40B4-BE49-F238E27FC236}">
-                <a16:creationId xmlns:a16="http://schemas.microsoft.com/office/drawing/2014/main" id="{1C8B001B-5554-4F27-8366-88813FCB8F83}"/>
+                <a16:creationId xmlns:a16="http://schemas.microsoft.com/office/drawing/2014/main" id="{19387B73-7AA6-47A9-9230-8A1F6E1F60EC}"/>
               </a:ext>
             </a:extLst>
           </p:cNvPr>
@@ -23209,7 +23446,7 @@
           <p:cNvPr id="35" name="">
             <a:extLst xmlns:a="http://schemas.openxmlformats.org/drawingml/2006/main">
               <a:ext uri="{FF2B5EF4-FFF2-40B4-BE49-F238E27FC236}">
-                <a16:creationId xmlns:a16="http://schemas.microsoft.com/office/drawing/2014/main" id="{713D19A0-86EB-4705-A5B1-DA6AD63998C8}"/>
+                <a16:creationId xmlns:a16="http://schemas.microsoft.com/office/drawing/2014/main" id="{C9D8C9BC-3173-4621-9879-183E0F475EF7}"/>
               </a:ext>
             </a:extLst>
           </p:cNvPr>
@@ -23267,7 +23504,7 @@
           <p:cNvPr id="36" name="">
             <a:extLst xmlns:a="http://schemas.openxmlformats.org/drawingml/2006/main">
               <a:ext uri="{FF2B5EF4-FFF2-40B4-BE49-F238E27FC236}">
-                <a16:creationId xmlns:a16="http://schemas.microsoft.com/office/drawing/2014/main" id="{F392C098-22DD-4ADE-988F-D781C376FE9B}"/>
+                <a16:creationId xmlns:a16="http://schemas.microsoft.com/office/drawing/2014/main" id="{90DB29F4-8F16-4ACC-BCFD-FA50FD2FA1CD}"/>
               </a:ext>
             </a:extLst>
           </p:cNvPr>
@@ -23325,7 +23562,7 @@
           <p:cNvPr id="37" name="">
             <a:extLst xmlns:a="http://schemas.openxmlformats.org/drawingml/2006/main">
               <a:ext uri="{FF2B5EF4-FFF2-40B4-BE49-F238E27FC236}">
-                <a16:creationId xmlns:a16="http://schemas.microsoft.com/office/drawing/2014/main" id="{E222A04D-6354-4C87-B6E3-DA06E5C54C1B}"/>
+                <a16:creationId xmlns:a16="http://schemas.microsoft.com/office/drawing/2014/main" id="{88A3A801-3BA1-4FC9-8A58-99B77D1A7875}"/>
               </a:ext>
             </a:extLst>
           </p:cNvPr>
@@ -23381,7 +23618,7 @@
     </p:spTree>
     <p:extLst>
       <p:ext uri="{BB962C8B-B14F-4D97-AF65-F5344CB8AC3E}">
-        <p14:creationId xmlns:p14="http://schemas.microsoft.com/office/powerpoint/2010/main" val="292693938"/>
+        <p14:creationId xmlns:p14="http://schemas.microsoft.com/office/powerpoint/2010/main" val="616794121"/>
       </p:ext>
     </p:extLst>
   </p:cSld>
@@ -23412,7 +23649,7 @@
           <p:cNvPr id="1" name="">
             <a:extLst xmlns:a="http://schemas.openxmlformats.org/drawingml/2006/main">
               <a:ext uri="{FF2B5EF4-FFF2-40B4-BE49-F238E27FC236}">
-                <a16:creationId xmlns:a16="http://schemas.microsoft.com/office/drawing/2014/main" id="{244F160D-0038-472C-8577-E784257835D1}"/>
+                <a16:creationId xmlns:a16="http://schemas.microsoft.com/office/drawing/2014/main" id="{A6A43C98-DA15-40F2-9B0C-5EE9093ABE20}"/>
               </a:ext>
             </a:extLst>
           </p:cNvPr>
@@ -23447,7 +23684,7 @@
           <p:cNvPr id="2" name="">
             <a:extLst xmlns:a="http://schemas.openxmlformats.org/drawingml/2006/main">
               <a:ext uri="{FF2B5EF4-FFF2-40B4-BE49-F238E27FC236}">
-                <a16:creationId xmlns:a16="http://schemas.microsoft.com/office/drawing/2014/main" id="{AF5B4B04-4942-4BF5-9952-27130C3DF080}"/>
+                <a16:creationId xmlns:a16="http://schemas.microsoft.com/office/drawing/2014/main" id="{8FCF8DBF-C2B0-41B0-920F-6455E7D5A255}"/>
               </a:ext>
             </a:extLst>
           </p:cNvPr>
@@ -23482,7 +23719,7 @@
           <p:cNvPr id="3" name="">
             <a:extLst xmlns:a="http://schemas.openxmlformats.org/drawingml/2006/main">
               <a:ext uri="{FF2B5EF4-FFF2-40B4-BE49-F238E27FC236}">
-                <a16:creationId xmlns:a16="http://schemas.microsoft.com/office/drawing/2014/main" id="{A258D97B-AF2C-4504-BF06-BE5C439D63CC}"/>
+                <a16:creationId xmlns:a16="http://schemas.microsoft.com/office/drawing/2014/main" id="{91290DA8-A51D-48D6-BB6B-F4EA174CB630}"/>
               </a:ext>
             </a:extLst>
           </p:cNvPr>
@@ -23540,7 +23777,7 @@
           <p:cNvPr id="4" name="">
             <a:extLst xmlns:a="http://schemas.openxmlformats.org/drawingml/2006/main">
               <a:ext uri="{FF2B5EF4-FFF2-40B4-BE49-F238E27FC236}">
-                <a16:creationId xmlns:a16="http://schemas.microsoft.com/office/drawing/2014/main" id="{E434FEC3-C46E-4A00-BA11-06636CE390F9}"/>
+                <a16:creationId xmlns:a16="http://schemas.microsoft.com/office/drawing/2014/main" id="{5E63C5CC-6B2D-4898-8910-3D608E1E8E2A}"/>
               </a:ext>
             </a:extLst>
           </p:cNvPr>
@@ -23598,7 +23835,7 @@
           <p:cNvPr id="5" name="">
             <a:extLst xmlns:a="http://schemas.openxmlformats.org/drawingml/2006/main">
               <a:ext uri="{FF2B5EF4-FFF2-40B4-BE49-F238E27FC236}">
-                <a16:creationId xmlns:a16="http://schemas.microsoft.com/office/drawing/2014/main" id="{C7DB822A-7789-42F2-B6A4-DFA7F9EE7883}"/>
+                <a16:creationId xmlns:a16="http://schemas.microsoft.com/office/drawing/2014/main" id="{D3A1829B-87B8-4ECF-B12D-3A6504C4A75D}"/>
               </a:ext>
             </a:extLst>
           </p:cNvPr>
@@ -23633,7 +23870,7 @@
           <p:cNvPr id="6" name="">
             <a:extLst xmlns:a="http://schemas.openxmlformats.org/drawingml/2006/main">
               <a:ext uri="{FF2B5EF4-FFF2-40B4-BE49-F238E27FC236}">
-                <a16:creationId xmlns:a16="http://schemas.microsoft.com/office/drawing/2014/main" id="{2E08D890-2151-43C6-974B-CF37DF7E200C}"/>
+                <a16:creationId xmlns:a16="http://schemas.microsoft.com/office/drawing/2014/main" id="{3506C0EA-0DB0-4473-9197-21CF25E5FD9F}"/>
               </a:ext>
             </a:extLst>
           </p:cNvPr>
@@ -23691,7 +23928,7 @@
           <p:cNvPr id="7" name="">
             <a:extLst xmlns:a="http://schemas.openxmlformats.org/drawingml/2006/main">
               <a:ext uri="{FF2B5EF4-FFF2-40B4-BE49-F238E27FC236}">
-                <a16:creationId xmlns:a16="http://schemas.microsoft.com/office/drawing/2014/main" id="{E881324F-1B58-4F85-82B5-15216DFD08DC}"/>
+                <a16:creationId xmlns:a16="http://schemas.microsoft.com/office/drawing/2014/main" id="{D33E7ACE-6E80-4943-94B6-28777081F56B}"/>
               </a:ext>
             </a:extLst>
           </p:cNvPr>
@@ -23749,7 +23986,7 @@
           <p:cNvPr id="8" name="">
             <a:extLst xmlns:a="http://schemas.openxmlformats.org/drawingml/2006/main">
               <a:ext uri="{FF2B5EF4-FFF2-40B4-BE49-F238E27FC236}">
-                <a16:creationId xmlns:a16="http://schemas.microsoft.com/office/drawing/2014/main" id="{943EAE8D-FA7A-44D3-8AC2-4168BFD3FA91}"/>
+                <a16:creationId xmlns:a16="http://schemas.microsoft.com/office/drawing/2014/main" id="{73829EFA-E4B1-4738-B078-0CC1DA1AF9CC}"/>
               </a:ext>
             </a:extLst>
           </p:cNvPr>
@@ -23784,7 +24021,7 @@
           <p:cNvPr id="9" name="">
             <a:extLst xmlns:a="http://schemas.openxmlformats.org/drawingml/2006/main">
               <a:ext uri="{FF2B5EF4-FFF2-40B4-BE49-F238E27FC236}">
-                <a16:creationId xmlns:a16="http://schemas.microsoft.com/office/drawing/2014/main" id="{6949E373-EE24-4881-ADBF-0E5E4A94BD05}"/>
+                <a16:creationId xmlns:a16="http://schemas.microsoft.com/office/drawing/2014/main" id="{7D285EF0-1867-4CE2-93CE-332D5625A22E}"/>
               </a:ext>
             </a:extLst>
           </p:cNvPr>
@@ -23819,7 +24056,7 @@
           <p:cNvPr id="10" name="">
             <a:extLst xmlns:a="http://schemas.openxmlformats.org/drawingml/2006/main">
               <a:ext uri="{FF2B5EF4-FFF2-40B4-BE49-F238E27FC236}">
-                <a16:creationId xmlns:a16="http://schemas.microsoft.com/office/drawing/2014/main" id="{1E62E1CB-90F2-4D18-B55B-0C4A1E9FFC25}"/>
+                <a16:creationId xmlns:a16="http://schemas.microsoft.com/office/drawing/2014/main" id="{9D7B463A-796F-466B-A479-AB3114E31496}"/>
               </a:ext>
             </a:extLst>
           </p:cNvPr>
@@ -23877,7 +24114,7 @@
           <p:cNvPr id="11" name="">
             <a:extLst xmlns:a="http://schemas.openxmlformats.org/drawingml/2006/main">
               <a:ext uri="{FF2B5EF4-FFF2-40B4-BE49-F238E27FC236}">
-                <a16:creationId xmlns:a16="http://schemas.microsoft.com/office/drawing/2014/main" id="{81D3BE1C-1F6B-4952-A70F-78B86FAD4CD9}"/>
+                <a16:creationId xmlns:a16="http://schemas.microsoft.com/office/drawing/2014/main" id="{AEF12CBB-AE5E-47A0-824F-A8D9DFEC220A}"/>
               </a:ext>
             </a:extLst>
           </p:cNvPr>
@@ -24093,7 +24330,7 @@
           <p:cNvPr id="12" name="">
             <a:extLst xmlns:a="http://schemas.openxmlformats.org/drawingml/2006/main">
               <a:ext uri="{FF2B5EF4-FFF2-40B4-BE49-F238E27FC236}">
-                <a16:creationId xmlns:a16="http://schemas.microsoft.com/office/drawing/2014/main" id="{9CC104B0-70AB-45E0-AC8E-B1CCD2465AF4}"/>
+                <a16:creationId xmlns:a16="http://schemas.microsoft.com/office/drawing/2014/main" id="{7E946E97-F95B-4812-808F-F83C16F0FC35}"/>
               </a:ext>
             </a:extLst>
           </p:cNvPr>
@@ -24128,7 +24365,7 @@
           <p:cNvPr id="13" name="">
             <a:extLst xmlns:a="http://schemas.openxmlformats.org/drawingml/2006/main">
               <a:ext uri="{FF2B5EF4-FFF2-40B4-BE49-F238E27FC236}">
-                <a16:creationId xmlns:a16="http://schemas.microsoft.com/office/drawing/2014/main" id="{6BFC2D9D-99FB-4640-B156-3062F424C891}"/>
+                <a16:creationId xmlns:a16="http://schemas.microsoft.com/office/drawing/2014/main" id="{ED5EBDB0-9E1C-48FB-90E8-845636241B2A}"/>
               </a:ext>
             </a:extLst>
           </p:cNvPr>
@@ -24163,7 +24400,7 @@
           <p:cNvPr id="14" name="">
             <a:extLst xmlns:a="http://schemas.openxmlformats.org/drawingml/2006/main">
               <a:ext uri="{FF2B5EF4-FFF2-40B4-BE49-F238E27FC236}">
-                <a16:creationId xmlns:a16="http://schemas.microsoft.com/office/drawing/2014/main" id="{F50D1C76-B4C8-4DDE-8A50-CFC46DA356BE}"/>
+                <a16:creationId xmlns:a16="http://schemas.microsoft.com/office/drawing/2014/main" id="{5E74BBA9-AA40-45BE-A551-2B59EBFA2126}"/>
               </a:ext>
             </a:extLst>
           </p:cNvPr>
@@ -24221,7 +24458,7 @@
           <p:cNvPr id="15" name="">
             <a:extLst xmlns:a="http://schemas.openxmlformats.org/drawingml/2006/main">
               <a:ext uri="{FF2B5EF4-FFF2-40B4-BE49-F238E27FC236}">
-                <a16:creationId xmlns:a16="http://schemas.microsoft.com/office/drawing/2014/main" id="{A029958D-4A81-434B-AB60-7CC5A788EC54}"/>
+                <a16:creationId xmlns:a16="http://schemas.microsoft.com/office/drawing/2014/main" id="{8C75B1DA-11F8-430B-A5CF-834077189719}"/>
               </a:ext>
             </a:extLst>
           </p:cNvPr>
@@ -24437,7 +24674,7 @@
           <p:cNvPr id="16" name="">
             <a:extLst xmlns:a="http://schemas.openxmlformats.org/drawingml/2006/main">
               <a:ext uri="{FF2B5EF4-FFF2-40B4-BE49-F238E27FC236}">
-                <a16:creationId xmlns:a16="http://schemas.microsoft.com/office/drawing/2014/main" id="{E413F1E4-66A3-4948-ABAD-78327BAC50B4}"/>
+                <a16:creationId xmlns:a16="http://schemas.microsoft.com/office/drawing/2014/main" id="{D8A16FC7-45DD-4780-92D2-993705FE7FAC}"/>
               </a:ext>
             </a:extLst>
           </p:cNvPr>
@@ -24472,7 +24709,7 @@
           <p:cNvPr id="17" name="">
             <a:extLst xmlns:a="http://schemas.openxmlformats.org/drawingml/2006/main">
               <a:ext uri="{FF2B5EF4-FFF2-40B4-BE49-F238E27FC236}">
-                <a16:creationId xmlns:a16="http://schemas.microsoft.com/office/drawing/2014/main" id="{C3527127-42E8-4129-87F4-150A6BC682C2}"/>
+                <a16:creationId xmlns:a16="http://schemas.microsoft.com/office/drawing/2014/main" id="{C1E45036-EEB0-46DE-AFDC-0CC7AB5BF929}"/>
               </a:ext>
             </a:extLst>
           </p:cNvPr>
@@ -24507,7 +24744,7 @@
           <p:cNvPr id="18" name="">
             <a:extLst xmlns:a="http://schemas.openxmlformats.org/drawingml/2006/main">
               <a:ext uri="{FF2B5EF4-FFF2-40B4-BE49-F238E27FC236}">
-                <a16:creationId xmlns:a16="http://schemas.microsoft.com/office/drawing/2014/main" id="{3AECEC64-03D4-48DD-90DB-969FACE9F700}"/>
+                <a16:creationId xmlns:a16="http://schemas.microsoft.com/office/drawing/2014/main" id="{FCF95626-2BFD-4F12-9148-65446E40BD5C}"/>
               </a:ext>
             </a:extLst>
           </p:cNvPr>
@@ -24565,7 +24802,7 @@
           <p:cNvPr id="19" name="">
             <a:extLst xmlns:a="http://schemas.openxmlformats.org/drawingml/2006/main">
               <a:ext uri="{FF2B5EF4-FFF2-40B4-BE49-F238E27FC236}">
-                <a16:creationId xmlns:a16="http://schemas.microsoft.com/office/drawing/2014/main" id="{7AC2E71A-C858-456A-B0B7-37FA47D5EF3A}"/>
+                <a16:creationId xmlns:a16="http://schemas.microsoft.com/office/drawing/2014/main" id="{320CA42A-0B10-41B7-9179-7BCE384ACDF5}"/>
               </a:ext>
             </a:extLst>
           </p:cNvPr>
@@ -24730,7 +24967,7 @@
           <p:cNvPr id="20" name="">
             <a:extLst xmlns:a="http://schemas.openxmlformats.org/drawingml/2006/main">
               <a:ext uri="{FF2B5EF4-FFF2-40B4-BE49-F238E27FC236}">
-                <a16:creationId xmlns:a16="http://schemas.microsoft.com/office/drawing/2014/main" id="{E134F2B0-9505-4965-9B5E-D7E7335666C4}"/>
+                <a16:creationId xmlns:a16="http://schemas.microsoft.com/office/drawing/2014/main" id="{C91DB50F-18BC-4CC6-BF9C-A39A1FA710EC}"/>
               </a:ext>
             </a:extLst>
           </p:cNvPr>
@@ -24765,7 +25002,7 @@
           <p:cNvPr id="21" name="">
             <a:extLst xmlns:a="http://schemas.openxmlformats.org/drawingml/2006/main">
               <a:ext uri="{FF2B5EF4-FFF2-40B4-BE49-F238E27FC236}">
-                <a16:creationId xmlns:a16="http://schemas.microsoft.com/office/drawing/2014/main" id="{22F517CA-2A06-4CF4-AE24-DC07A8A34984}"/>
+                <a16:creationId xmlns:a16="http://schemas.microsoft.com/office/drawing/2014/main" id="{090A7672-9BB1-444D-AFE0-FD00605D8DCF}"/>
               </a:ext>
             </a:extLst>
           </p:cNvPr>
@@ -24800,7 +25037,7 @@
           <p:cNvPr id="22" name="">
             <a:extLst xmlns:a="http://schemas.openxmlformats.org/drawingml/2006/main">
               <a:ext uri="{FF2B5EF4-FFF2-40B4-BE49-F238E27FC236}">
-                <a16:creationId xmlns:a16="http://schemas.microsoft.com/office/drawing/2014/main" id="{A9706309-8463-46A8-942E-8D7F3BEA0B55}"/>
+                <a16:creationId xmlns:a16="http://schemas.microsoft.com/office/drawing/2014/main" id="{75446035-9C07-47F9-9EE5-DC2DC337E834}"/>
               </a:ext>
             </a:extLst>
           </p:cNvPr>
@@ -24858,7 +25095,7 @@
           <p:cNvPr id="23" name="">
             <a:extLst xmlns:a="http://schemas.openxmlformats.org/drawingml/2006/main">
               <a:ext uri="{FF2B5EF4-FFF2-40B4-BE49-F238E27FC236}">
-                <a16:creationId xmlns:a16="http://schemas.microsoft.com/office/drawing/2014/main" id="{96F53B07-05DE-4122-956D-F345FBE853E8}"/>
+                <a16:creationId xmlns:a16="http://schemas.microsoft.com/office/drawing/2014/main" id="{B181E2A8-C798-48D9-AD87-13F4FB170A2A}"/>
               </a:ext>
             </a:extLst>
           </p:cNvPr>
@@ -25023,7 +25260,7 @@
           <p:cNvPr id="24" name="">
             <a:extLst xmlns:a="http://schemas.openxmlformats.org/drawingml/2006/main">
               <a:ext uri="{FF2B5EF4-FFF2-40B4-BE49-F238E27FC236}">
-                <a16:creationId xmlns:a16="http://schemas.microsoft.com/office/drawing/2014/main" id="{EFFFD32B-CB43-4E6E-891E-43A20076CEA3}"/>
+                <a16:creationId xmlns:a16="http://schemas.microsoft.com/office/drawing/2014/main" id="{A2B9D314-0D2D-4A72-B8BE-E71C0A269B7D}"/>
               </a:ext>
             </a:extLst>
           </p:cNvPr>
@@ -25079,7 +25316,7 @@
     </p:spTree>
     <p:extLst>
       <p:ext uri="{BB962C8B-B14F-4D97-AF65-F5344CB8AC3E}">
-        <p14:creationId xmlns:p14="http://schemas.microsoft.com/office/powerpoint/2010/main" val="1223762555"/>
+        <p14:creationId xmlns:p14="http://schemas.microsoft.com/office/powerpoint/2010/main" val="742910272"/>
       </p:ext>
     </p:extLst>
   </p:cSld>
@@ -25110,7 +25347,7 @@
           <p:cNvPr id="1" name="">
             <a:extLst xmlns:a="http://schemas.openxmlformats.org/drawingml/2006/main">
               <a:ext uri="{FF2B5EF4-FFF2-40B4-BE49-F238E27FC236}">
-                <a16:creationId xmlns:a16="http://schemas.microsoft.com/office/drawing/2014/main" id="{56D5CE11-2319-4155-B04A-4DB9A6712092}"/>
+                <a16:creationId xmlns:a16="http://schemas.microsoft.com/office/drawing/2014/main" id="{EC811446-25B7-4787-B512-8C6116382EE6}"/>
               </a:ext>
             </a:extLst>
           </p:cNvPr>
@@ -25145,7 +25382,7 @@
           <p:cNvPr id="2" name="">
             <a:extLst xmlns:a="http://schemas.openxmlformats.org/drawingml/2006/main">
               <a:ext uri="{FF2B5EF4-FFF2-40B4-BE49-F238E27FC236}">
-                <a16:creationId xmlns:a16="http://schemas.microsoft.com/office/drawing/2014/main" id="{2D396983-BC0A-41E0-B044-34B3E9D500CA}"/>
+                <a16:creationId xmlns:a16="http://schemas.microsoft.com/office/drawing/2014/main" id="{CC19FB27-9B97-4084-9091-B7703EDB45E1}"/>
               </a:ext>
             </a:extLst>
           </p:cNvPr>
@@ -25180,7 +25417,7 @@
           <p:cNvPr id="3" name="">
             <a:extLst xmlns:a="http://schemas.openxmlformats.org/drawingml/2006/main">
               <a:ext uri="{FF2B5EF4-FFF2-40B4-BE49-F238E27FC236}">
-                <a16:creationId xmlns:a16="http://schemas.microsoft.com/office/drawing/2014/main" id="{73D3187A-A7A0-486F-9D63-5258C7AFF034}"/>
+                <a16:creationId xmlns:a16="http://schemas.microsoft.com/office/drawing/2014/main" id="{A51446A2-C894-4742-A4F9-344722249C32}"/>
               </a:ext>
             </a:extLst>
           </p:cNvPr>
@@ -25238,7 +25475,7 @@
           <p:cNvPr id="4" name="">
             <a:extLst xmlns:a="http://schemas.openxmlformats.org/drawingml/2006/main">
               <a:ext uri="{FF2B5EF4-FFF2-40B4-BE49-F238E27FC236}">
-                <a16:creationId xmlns:a16="http://schemas.microsoft.com/office/drawing/2014/main" id="{9E0669CF-D542-42CE-A9A6-FD4ECCD02362}"/>
+                <a16:creationId xmlns:a16="http://schemas.microsoft.com/office/drawing/2014/main" id="{B321EF17-BFC9-4F52-AA4F-4CEA11ED4C56}"/>
               </a:ext>
             </a:extLst>
           </p:cNvPr>
@@ -25296,7 +25533,7 @@
           <p:cNvPr id="5" name="">
             <a:extLst xmlns:a="http://schemas.openxmlformats.org/drawingml/2006/main">
               <a:ext uri="{FF2B5EF4-FFF2-40B4-BE49-F238E27FC236}">
-                <a16:creationId xmlns:a16="http://schemas.microsoft.com/office/drawing/2014/main" id="{AD9392ED-3962-4096-9481-C753B2EF20AA}"/>
+                <a16:creationId xmlns:a16="http://schemas.microsoft.com/office/drawing/2014/main" id="{A7AD87BC-581F-4E29-B379-B2B1B808B73D}"/>
               </a:ext>
             </a:extLst>
           </p:cNvPr>
@@ -25331,7 +25568,7 @@
           <p:cNvPr id="6" name="">
             <a:extLst xmlns:a="http://schemas.openxmlformats.org/drawingml/2006/main">
               <a:ext uri="{FF2B5EF4-FFF2-40B4-BE49-F238E27FC236}">
-                <a16:creationId xmlns:a16="http://schemas.microsoft.com/office/drawing/2014/main" id="{4B62CFE7-D1A9-4315-8464-B63489C8A206}"/>
+                <a16:creationId xmlns:a16="http://schemas.microsoft.com/office/drawing/2014/main" id="{1E27C21E-ED38-48D4-B13D-57FDA39F44FA}"/>
               </a:ext>
             </a:extLst>
           </p:cNvPr>
@@ -25389,7 +25626,7 @@
           <p:cNvPr id="7" name="">
             <a:extLst xmlns:a="http://schemas.openxmlformats.org/drawingml/2006/main">
               <a:ext uri="{FF2B5EF4-FFF2-40B4-BE49-F238E27FC236}">
-                <a16:creationId xmlns:a16="http://schemas.microsoft.com/office/drawing/2014/main" id="{7EB455FF-002F-4200-98B2-A442451DEC5C}"/>
+                <a16:creationId xmlns:a16="http://schemas.microsoft.com/office/drawing/2014/main" id="{6B6C7EA7-3DA4-4AD0-AE60-455132D92DB9}"/>
               </a:ext>
             </a:extLst>
           </p:cNvPr>
@@ -25447,7 +25684,7 @@
           <p:cNvPr id="8" name="">
             <a:extLst xmlns:a="http://schemas.openxmlformats.org/drawingml/2006/main">
               <a:ext uri="{FF2B5EF4-FFF2-40B4-BE49-F238E27FC236}">
-                <a16:creationId xmlns:a16="http://schemas.microsoft.com/office/drawing/2014/main" id="{50EE43E9-8586-420E-A797-014BAAFD1586}"/>
+                <a16:creationId xmlns:a16="http://schemas.microsoft.com/office/drawing/2014/main" id="{29FC0FCB-A9AA-4C1E-8CA5-E556296844E5}"/>
               </a:ext>
             </a:extLst>
           </p:cNvPr>
@@ -25482,7 +25719,7 @@
           <p:cNvPr id="9" name="">
             <a:extLst xmlns:a="http://schemas.openxmlformats.org/drawingml/2006/main">
               <a:ext uri="{FF2B5EF4-FFF2-40B4-BE49-F238E27FC236}">
-                <a16:creationId xmlns:a16="http://schemas.microsoft.com/office/drawing/2014/main" id="{7B3FE9F0-B9A1-45C6-A8A8-1045D81F9E67}"/>
+                <a16:creationId xmlns:a16="http://schemas.microsoft.com/office/drawing/2014/main" id="{1BF2EAC2-DCCD-4A46-92C3-12FEA9B09C0F}"/>
               </a:ext>
             </a:extLst>
           </p:cNvPr>
@@ -25517,7 +25754,7 @@
           <p:cNvPr id="10" name="">
             <a:extLst xmlns:a="http://schemas.openxmlformats.org/drawingml/2006/main">
               <a:ext uri="{FF2B5EF4-FFF2-40B4-BE49-F238E27FC236}">
-                <a16:creationId xmlns:a16="http://schemas.microsoft.com/office/drawing/2014/main" id="{65ED8F0C-5820-4663-A227-37969F7EDB89}"/>
+                <a16:creationId xmlns:a16="http://schemas.microsoft.com/office/drawing/2014/main" id="{EAC36960-F293-446E-A512-50FF5C55221E}"/>
               </a:ext>
             </a:extLst>
           </p:cNvPr>
@@ -25575,7 +25812,7 @@
           <p:cNvPr id="11" name="">
             <a:extLst xmlns:a="http://schemas.openxmlformats.org/drawingml/2006/main">
               <a:ext uri="{FF2B5EF4-FFF2-40B4-BE49-F238E27FC236}">
-                <a16:creationId xmlns:a16="http://schemas.microsoft.com/office/drawing/2014/main" id="{85CDB088-7EAE-4FCF-84AC-72434C728561}"/>
+                <a16:creationId xmlns:a16="http://schemas.microsoft.com/office/drawing/2014/main" id="{B7918791-3169-4F3C-8587-1A2C88340CC8}"/>
               </a:ext>
             </a:extLst>
           </p:cNvPr>
@@ -25612,7 +25849,7 @@
           <p:cNvPr id="12" name="">
             <a:extLst xmlns:a="http://schemas.openxmlformats.org/drawingml/2006/main">
               <a:ext uri="{FF2B5EF4-FFF2-40B4-BE49-F238E27FC236}">
-                <a16:creationId xmlns:a16="http://schemas.microsoft.com/office/drawing/2014/main" id="{A225F14A-709E-457A-96C1-F1E2A8124CB5}"/>
+                <a16:creationId xmlns:a16="http://schemas.microsoft.com/office/drawing/2014/main" id="{60CEEA1E-A9F4-4D49-BDA6-6D38E5BFCE25}"/>
               </a:ext>
             </a:extLst>
           </p:cNvPr>
@@ -25647,7 +25884,7 @@
           <p:cNvPr id="13" name="">
             <a:extLst xmlns:a="http://schemas.openxmlformats.org/drawingml/2006/main">
               <a:ext uri="{FF2B5EF4-FFF2-40B4-BE49-F238E27FC236}">
-                <a16:creationId xmlns:a16="http://schemas.microsoft.com/office/drawing/2014/main" id="{C19E9628-44B1-4971-BDD3-29DF55CAB8C1}"/>
+                <a16:creationId xmlns:a16="http://schemas.microsoft.com/office/drawing/2014/main" id="{5278C42D-DBA6-4EC6-B6A8-2538C38B8BDC}"/>
               </a:ext>
             </a:extLst>
           </p:cNvPr>
@@ -25682,7 +25919,7 @@
           <p:cNvPr id="14" name="">
             <a:extLst xmlns:a="http://schemas.openxmlformats.org/drawingml/2006/main">
               <a:ext uri="{FF2B5EF4-FFF2-40B4-BE49-F238E27FC236}">
-                <a16:creationId xmlns:a16="http://schemas.microsoft.com/office/drawing/2014/main" id="{8419DDD9-F65E-4D10-876A-FDF261E96EB4}"/>
+                <a16:creationId xmlns:a16="http://schemas.microsoft.com/office/drawing/2014/main" id="{D0D170DC-ACEE-4995-9458-D8545B7730BE}"/>
               </a:ext>
             </a:extLst>
           </p:cNvPr>
@@ -25717,7 +25954,7 @@
           <p:cNvPr id="15" name="">
             <a:extLst xmlns:a="http://schemas.openxmlformats.org/drawingml/2006/main">
               <a:ext uri="{FF2B5EF4-FFF2-40B4-BE49-F238E27FC236}">
-                <a16:creationId xmlns:a16="http://schemas.microsoft.com/office/drawing/2014/main" id="{C961C5C8-4BBC-4801-9B48-F683E76B7F43}"/>
+                <a16:creationId xmlns:a16="http://schemas.microsoft.com/office/drawing/2014/main" id="{D2A88678-2021-406F-A6A9-457302625A84}"/>
               </a:ext>
             </a:extLst>
           </p:cNvPr>
@@ -25752,7 +25989,7 @@
           <p:cNvPr id="16" name="">
             <a:extLst xmlns:a="http://schemas.openxmlformats.org/drawingml/2006/main">
               <a:ext uri="{FF2B5EF4-FFF2-40B4-BE49-F238E27FC236}">
-                <a16:creationId xmlns:a16="http://schemas.microsoft.com/office/drawing/2014/main" id="{8808D21C-8F72-4943-8CC7-647550F97E71}"/>
+                <a16:creationId xmlns:a16="http://schemas.microsoft.com/office/drawing/2014/main" id="{C0B1588E-81BA-4387-93D3-17036AB73CC6}"/>
               </a:ext>
             </a:extLst>
           </p:cNvPr>
@@ -25787,7 +26024,7 @@
           <p:cNvPr id="17" name="">
             <a:extLst xmlns:a="http://schemas.openxmlformats.org/drawingml/2006/main">
               <a:ext uri="{FF2B5EF4-FFF2-40B4-BE49-F238E27FC236}">
-                <a16:creationId xmlns:a16="http://schemas.microsoft.com/office/drawing/2014/main" id="{80F67C01-B058-40CA-BAC1-701A33B73F32}"/>
+                <a16:creationId xmlns:a16="http://schemas.microsoft.com/office/drawing/2014/main" id="{B0B72200-2B64-4D41-BB12-2573823A1351}"/>
               </a:ext>
             </a:extLst>
           </p:cNvPr>
@@ -25822,7 +26059,7 @@
           <p:cNvPr id="18" name="">
             <a:extLst xmlns:a="http://schemas.openxmlformats.org/drawingml/2006/main">
               <a:ext uri="{FF2B5EF4-FFF2-40B4-BE49-F238E27FC236}">
-                <a16:creationId xmlns:a16="http://schemas.microsoft.com/office/drawing/2014/main" id="{BF041DB3-31EE-4BE2-916B-F2637181F3E1}"/>
+                <a16:creationId xmlns:a16="http://schemas.microsoft.com/office/drawing/2014/main" id="{C9979E3D-1C54-4056-BD71-607E0EAFBF9A}"/>
               </a:ext>
             </a:extLst>
           </p:cNvPr>
@@ -25857,7 +26094,7 @@
           <p:cNvPr id="19" name="">
             <a:extLst xmlns:a="http://schemas.openxmlformats.org/drawingml/2006/main">
               <a:ext uri="{FF2B5EF4-FFF2-40B4-BE49-F238E27FC236}">
-                <a16:creationId xmlns:a16="http://schemas.microsoft.com/office/drawing/2014/main" id="{67DFEA00-B439-40AC-94B6-EF6BE1FBD009}"/>
+                <a16:creationId xmlns:a16="http://schemas.microsoft.com/office/drawing/2014/main" id="{2C8FECD1-F07C-40BE-A834-7882D7324ED5}"/>
               </a:ext>
             </a:extLst>
           </p:cNvPr>
@@ -25892,7 +26129,7 @@
           <p:cNvPr id="20" name="">
             <a:extLst xmlns:a="http://schemas.openxmlformats.org/drawingml/2006/main">
               <a:ext uri="{FF2B5EF4-FFF2-40B4-BE49-F238E27FC236}">
-                <a16:creationId xmlns:a16="http://schemas.microsoft.com/office/drawing/2014/main" id="{06017B50-C11E-43BB-820A-A6B20DDEDE6C}"/>
+                <a16:creationId xmlns:a16="http://schemas.microsoft.com/office/drawing/2014/main" id="{8A2A9D68-02CB-4D4F-9EA2-CE3AFD72CC09}"/>
               </a:ext>
             </a:extLst>
           </p:cNvPr>
@@ -25950,7 +26187,7 @@
           <p:cNvPr id="21" name="">
             <a:extLst xmlns:a="http://schemas.openxmlformats.org/drawingml/2006/main">
               <a:ext uri="{FF2B5EF4-FFF2-40B4-BE49-F238E27FC236}">
-                <a16:creationId xmlns:a16="http://schemas.microsoft.com/office/drawing/2014/main" id="{1333F706-DEFE-4008-BD2B-738F9CA53DD5}"/>
+                <a16:creationId xmlns:a16="http://schemas.microsoft.com/office/drawing/2014/main" id="{A72A63C7-6BBB-41A8-B111-261AC8294A66}"/>
               </a:ext>
             </a:extLst>
           </p:cNvPr>
@@ -25987,7 +26224,7 @@
           <p:cNvPr id="22" name="">
             <a:extLst xmlns:a="http://schemas.openxmlformats.org/drawingml/2006/main">
               <a:ext uri="{FF2B5EF4-FFF2-40B4-BE49-F238E27FC236}">
-                <a16:creationId xmlns:a16="http://schemas.microsoft.com/office/drawing/2014/main" id="{F91E6CD0-9316-4234-B98D-1D07F1BE892E}"/>
+                <a16:creationId xmlns:a16="http://schemas.microsoft.com/office/drawing/2014/main" id="{ADB1A4DF-5293-4E21-B5CE-64499316BEEF}"/>
               </a:ext>
             </a:extLst>
           </p:cNvPr>
@@ -26022,7 +26259,7 @@
           <p:cNvPr id="23" name="">
             <a:extLst xmlns:a="http://schemas.openxmlformats.org/drawingml/2006/main">
               <a:ext uri="{FF2B5EF4-FFF2-40B4-BE49-F238E27FC236}">
-                <a16:creationId xmlns:a16="http://schemas.microsoft.com/office/drawing/2014/main" id="{B11689E1-CBFC-4676-9180-8B569FEE76E6}"/>
+                <a16:creationId xmlns:a16="http://schemas.microsoft.com/office/drawing/2014/main" id="{1A780F80-F120-485C-B4A5-93561FE77751}"/>
               </a:ext>
             </a:extLst>
           </p:cNvPr>
@@ -26057,7 +26294,7 @@
           <p:cNvPr id="24" name="">
             <a:extLst xmlns:a="http://schemas.openxmlformats.org/drawingml/2006/main">
               <a:ext uri="{FF2B5EF4-FFF2-40B4-BE49-F238E27FC236}">
-                <a16:creationId xmlns:a16="http://schemas.microsoft.com/office/drawing/2014/main" id="{FAE93ECE-95D7-4428-8837-FDA8432BCAE8}"/>
+                <a16:creationId xmlns:a16="http://schemas.microsoft.com/office/drawing/2014/main" id="{FAB7E890-519B-4A34-BA9C-99BEF937A404}"/>
               </a:ext>
             </a:extLst>
           </p:cNvPr>
@@ -26092,7 +26329,7 @@
           <p:cNvPr id="25" name="">
             <a:extLst xmlns:a="http://schemas.openxmlformats.org/drawingml/2006/main">
               <a:ext uri="{FF2B5EF4-FFF2-40B4-BE49-F238E27FC236}">
-                <a16:creationId xmlns:a16="http://schemas.microsoft.com/office/drawing/2014/main" id="{FAE42FDB-71DB-429B-9CB0-BF743A590B01}"/>
+                <a16:creationId xmlns:a16="http://schemas.microsoft.com/office/drawing/2014/main" id="{71770583-577E-4A13-952E-23753D8E4977}"/>
               </a:ext>
             </a:extLst>
           </p:cNvPr>
@@ -26127,7 +26364,7 @@
           <p:cNvPr id="26" name="">
             <a:extLst xmlns:a="http://schemas.openxmlformats.org/drawingml/2006/main">
               <a:ext uri="{FF2B5EF4-FFF2-40B4-BE49-F238E27FC236}">
-                <a16:creationId xmlns:a16="http://schemas.microsoft.com/office/drawing/2014/main" id="{FDF51125-C80E-4B95-89BD-E937177EDB9D}"/>
+                <a16:creationId xmlns:a16="http://schemas.microsoft.com/office/drawing/2014/main" id="{98459232-744F-4C19-B252-A07DB84D0DF1}"/>
               </a:ext>
             </a:extLst>
           </p:cNvPr>
@@ -26162,7 +26399,7 @@
           <p:cNvPr id="27" name="">
             <a:extLst xmlns:a="http://schemas.openxmlformats.org/drawingml/2006/main">
               <a:ext uri="{FF2B5EF4-FFF2-40B4-BE49-F238E27FC236}">
-                <a16:creationId xmlns:a16="http://schemas.microsoft.com/office/drawing/2014/main" id="{194F8798-5529-43DE-8996-E1E8CF4B94BE}"/>
+                <a16:creationId xmlns:a16="http://schemas.microsoft.com/office/drawing/2014/main" id="{01BBB13D-0B27-47AE-BA39-03334FD7352D}"/>
               </a:ext>
             </a:extLst>
           </p:cNvPr>
@@ -26197,7 +26434,7 @@
           <p:cNvPr id="28" name="">
             <a:extLst xmlns:a="http://schemas.openxmlformats.org/drawingml/2006/main">
               <a:ext uri="{FF2B5EF4-FFF2-40B4-BE49-F238E27FC236}">
-                <a16:creationId xmlns:a16="http://schemas.microsoft.com/office/drawing/2014/main" id="{39F33466-6DA7-4E51-837A-AA2903CD0DDA}"/>
+                <a16:creationId xmlns:a16="http://schemas.microsoft.com/office/drawing/2014/main" id="{EE83334A-01F2-4AB2-AF7C-512F25B10173}"/>
               </a:ext>
             </a:extLst>
           </p:cNvPr>
@@ -26232,7 +26469,7 @@
           <p:cNvPr id="29" name="">
             <a:extLst xmlns:a="http://schemas.openxmlformats.org/drawingml/2006/main">
               <a:ext uri="{FF2B5EF4-FFF2-40B4-BE49-F238E27FC236}">
-                <a16:creationId xmlns:a16="http://schemas.microsoft.com/office/drawing/2014/main" id="{2AE967A8-207A-4190-A3C3-8B242721892C}"/>
+                <a16:creationId xmlns:a16="http://schemas.microsoft.com/office/drawing/2014/main" id="{DF5BF74A-F7CC-491F-8807-3E4D771C2FAE}"/>
               </a:ext>
             </a:extLst>
           </p:cNvPr>
@@ -26267,7 +26504,7 @@
           <p:cNvPr id="30" name="">
             <a:extLst xmlns:a="http://schemas.openxmlformats.org/drawingml/2006/main">
               <a:ext uri="{FF2B5EF4-FFF2-40B4-BE49-F238E27FC236}">
-                <a16:creationId xmlns:a16="http://schemas.microsoft.com/office/drawing/2014/main" id="{94E593E2-7343-45EE-882A-34D56EF0AB7E}"/>
+                <a16:creationId xmlns:a16="http://schemas.microsoft.com/office/drawing/2014/main" id="{896117C0-8A4E-4BB9-AC8C-C1F4F7F72846}"/>
               </a:ext>
             </a:extLst>
           </p:cNvPr>
@@ -26302,7 +26539,7 @@
           <p:cNvPr id="31" name="">
             <a:extLst xmlns:a="http://schemas.openxmlformats.org/drawingml/2006/main">
               <a:ext uri="{FF2B5EF4-FFF2-40B4-BE49-F238E27FC236}">
-                <a16:creationId xmlns:a16="http://schemas.microsoft.com/office/drawing/2014/main" id="{2C492711-A022-4486-AE56-C877D2903EC3}"/>
+                <a16:creationId xmlns:a16="http://schemas.microsoft.com/office/drawing/2014/main" id="{BA557A06-244B-46BF-946C-81951AE59332}"/>
               </a:ext>
             </a:extLst>
           </p:cNvPr>
@@ -26360,7 +26597,7 @@
           <p:cNvPr id="32" name="">
             <a:extLst xmlns:a="http://schemas.openxmlformats.org/drawingml/2006/main">
               <a:ext uri="{FF2B5EF4-FFF2-40B4-BE49-F238E27FC236}">
-                <a16:creationId xmlns:a16="http://schemas.microsoft.com/office/drawing/2014/main" id="{078EFEF7-42F7-42E0-A0ED-2307E3A9591E}"/>
+                <a16:creationId xmlns:a16="http://schemas.microsoft.com/office/drawing/2014/main" id="{7E369FF5-5332-4250-A25C-00E2DBA3E7C6}"/>
               </a:ext>
             </a:extLst>
           </p:cNvPr>
@@ -26397,7 +26634,7 @@
           <p:cNvPr id="33" name="">
             <a:extLst xmlns:a="http://schemas.openxmlformats.org/drawingml/2006/main">
               <a:ext uri="{FF2B5EF4-FFF2-40B4-BE49-F238E27FC236}">
-                <a16:creationId xmlns:a16="http://schemas.microsoft.com/office/drawing/2014/main" id="{6BC20F1E-FC7D-4918-BB26-6D9CDA4740EB}"/>
+                <a16:creationId xmlns:a16="http://schemas.microsoft.com/office/drawing/2014/main" id="{E9AA7C04-906E-4548-BBA6-9FB34E4E8FD7}"/>
               </a:ext>
             </a:extLst>
           </p:cNvPr>
@@ -26432,7 +26669,7 @@
           <p:cNvPr id="34" name="">
             <a:extLst xmlns:a="http://schemas.openxmlformats.org/drawingml/2006/main">
               <a:ext uri="{FF2B5EF4-FFF2-40B4-BE49-F238E27FC236}">
-                <a16:creationId xmlns:a16="http://schemas.microsoft.com/office/drawing/2014/main" id="{ECD7A033-5D11-44AB-95B0-209E54142818}"/>
+                <a16:creationId xmlns:a16="http://schemas.microsoft.com/office/drawing/2014/main" id="{A4F286B0-D8C5-467D-B794-B7A19613A412}"/>
               </a:ext>
             </a:extLst>
           </p:cNvPr>
@@ -26467,7 +26704,7 @@
           <p:cNvPr id="35" name="">
             <a:extLst xmlns:a="http://schemas.openxmlformats.org/drawingml/2006/main">
               <a:ext uri="{FF2B5EF4-FFF2-40B4-BE49-F238E27FC236}">
-                <a16:creationId xmlns:a16="http://schemas.microsoft.com/office/drawing/2014/main" id="{B65B3B55-C771-4C75-9202-F14904911946}"/>
+                <a16:creationId xmlns:a16="http://schemas.microsoft.com/office/drawing/2014/main" id="{58C2138A-6C3E-43E5-83B1-61B9FABF07A3}"/>
               </a:ext>
             </a:extLst>
           </p:cNvPr>
@@ -26502,7 +26739,7 @@
           <p:cNvPr id="36" name="">
             <a:extLst xmlns:a="http://schemas.openxmlformats.org/drawingml/2006/main">
               <a:ext uri="{FF2B5EF4-FFF2-40B4-BE49-F238E27FC236}">
-                <a16:creationId xmlns:a16="http://schemas.microsoft.com/office/drawing/2014/main" id="{E8A8F96C-BFA8-430E-A6F1-937D92B18D3E}"/>
+                <a16:creationId xmlns:a16="http://schemas.microsoft.com/office/drawing/2014/main" id="{F862D49C-A031-4A67-AAB4-3B7BC194F88F}"/>
               </a:ext>
             </a:extLst>
           </p:cNvPr>
@@ -26537,7 +26774,7 @@
           <p:cNvPr id="37" name="">
             <a:extLst xmlns:a="http://schemas.openxmlformats.org/drawingml/2006/main">
               <a:ext uri="{FF2B5EF4-FFF2-40B4-BE49-F238E27FC236}">
-                <a16:creationId xmlns:a16="http://schemas.microsoft.com/office/drawing/2014/main" id="{BEF54831-5E1D-41F5-B16D-445FEB44B019}"/>
+                <a16:creationId xmlns:a16="http://schemas.microsoft.com/office/drawing/2014/main" id="{795A64F5-2BC0-4C6A-B2CB-00FC90D7FC7C}"/>
               </a:ext>
             </a:extLst>
           </p:cNvPr>
@@ -26572,7 +26809,7 @@
           <p:cNvPr id="38" name="">
             <a:extLst xmlns:a="http://schemas.openxmlformats.org/drawingml/2006/main">
               <a:ext uri="{FF2B5EF4-FFF2-40B4-BE49-F238E27FC236}">
-                <a16:creationId xmlns:a16="http://schemas.microsoft.com/office/drawing/2014/main" id="{207A604C-CAF0-4CC9-8680-7D2116C0110C}"/>
+                <a16:creationId xmlns:a16="http://schemas.microsoft.com/office/drawing/2014/main" id="{A643E42C-E9CD-428B-B847-BF9035414E1C}"/>
               </a:ext>
             </a:extLst>
           </p:cNvPr>
@@ -26607,7 +26844,7 @@
           <p:cNvPr id="39" name="">
             <a:extLst xmlns:a="http://schemas.openxmlformats.org/drawingml/2006/main">
               <a:ext uri="{FF2B5EF4-FFF2-40B4-BE49-F238E27FC236}">
-                <a16:creationId xmlns:a16="http://schemas.microsoft.com/office/drawing/2014/main" id="{F2B6873F-9BD5-4A55-BEA0-5437CF8FD9E3}"/>
+                <a16:creationId xmlns:a16="http://schemas.microsoft.com/office/drawing/2014/main" id="{D0261506-7192-40A8-8D99-937CF465FADE}"/>
               </a:ext>
             </a:extLst>
           </p:cNvPr>
@@ -26642,7 +26879,7 @@
           <p:cNvPr id="40" name="">
             <a:extLst xmlns:a="http://schemas.openxmlformats.org/drawingml/2006/main">
               <a:ext uri="{FF2B5EF4-FFF2-40B4-BE49-F238E27FC236}">
-                <a16:creationId xmlns:a16="http://schemas.microsoft.com/office/drawing/2014/main" id="{37E38F16-47E9-454B-B6BA-4234F809261C}"/>
+                <a16:creationId xmlns:a16="http://schemas.microsoft.com/office/drawing/2014/main" id="{7683058A-8278-4251-A06B-BA1CE33B3B74}"/>
               </a:ext>
             </a:extLst>
           </p:cNvPr>
@@ -26677,7 +26914,7 @@
           <p:cNvPr id="41" name="">
             <a:extLst xmlns:a="http://schemas.openxmlformats.org/drawingml/2006/main">
               <a:ext uri="{FF2B5EF4-FFF2-40B4-BE49-F238E27FC236}">
-                <a16:creationId xmlns:a16="http://schemas.microsoft.com/office/drawing/2014/main" id="{A1B97815-8420-4CA4-BA2F-79A0ACCEB88B}"/>
+                <a16:creationId xmlns:a16="http://schemas.microsoft.com/office/drawing/2014/main" id="{0ED71157-32C9-4D1F-A02E-59CE15C252E6}"/>
               </a:ext>
             </a:extLst>
           </p:cNvPr>
@@ -26735,7 +26972,7 @@
           <p:cNvPr id="42" name="">
             <a:extLst xmlns:a="http://schemas.openxmlformats.org/drawingml/2006/main">
               <a:ext uri="{FF2B5EF4-FFF2-40B4-BE49-F238E27FC236}">
-                <a16:creationId xmlns:a16="http://schemas.microsoft.com/office/drawing/2014/main" id="{B27C9E7A-EDF9-447E-A78F-081EAA0F4EDD}"/>
+                <a16:creationId xmlns:a16="http://schemas.microsoft.com/office/drawing/2014/main" id="{0C2B44FA-5757-484A-B458-2FE7CB7C0526}"/>
               </a:ext>
             </a:extLst>
           </p:cNvPr>
@@ -26772,7 +27009,7 @@
           <p:cNvPr id="43" name="">
             <a:extLst xmlns:a="http://schemas.openxmlformats.org/drawingml/2006/main">
               <a:ext uri="{FF2B5EF4-FFF2-40B4-BE49-F238E27FC236}">
-                <a16:creationId xmlns:a16="http://schemas.microsoft.com/office/drawing/2014/main" id="{4084B366-5901-4094-93F8-1F850004834B}"/>
+                <a16:creationId xmlns:a16="http://schemas.microsoft.com/office/drawing/2014/main" id="{8B5E8E49-2772-47F9-AEC2-DF421808F602}"/>
               </a:ext>
             </a:extLst>
           </p:cNvPr>
@@ -26807,7 +27044,7 @@
           <p:cNvPr id="44" name="">
             <a:extLst xmlns:a="http://schemas.openxmlformats.org/drawingml/2006/main">
               <a:ext uri="{FF2B5EF4-FFF2-40B4-BE49-F238E27FC236}">
-                <a16:creationId xmlns:a16="http://schemas.microsoft.com/office/drawing/2014/main" id="{12BC96EE-D187-4110-86C9-224BC3B63ABB}"/>
+                <a16:creationId xmlns:a16="http://schemas.microsoft.com/office/drawing/2014/main" id="{80F15E1B-6D27-4DE1-B710-B206CCFB301A}"/>
               </a:ext>
             </a:extLst>
           </p:cNvPr>
@@ -26842,7 +27079,7 @@
           <p:cNvPr id="45" name="">
             <a:extLst xmlns:a="http://schemas.openxmlformats.org/drawingml/2006/main">
               <a:ext uri="{FF2B5EF4-FFF2-40B4-BE49-F238E27FC236}">
-                <a16:creationId xmlns:a16="http://schemas.microsoft.com/office/drawing/2014/main" id="{A2086841-94E1-4382-A41D-AEDF70508D58}"/>
+                <a16:creationId xmlns:a16="http://schemas.microsoft.com/office/drawing/2014/main" id="{6B073F9A-AC01-427A-A8F3-3C21F35AA75D}"/>
               </a:ext>
             </a:extLst>
           </p:cNvPr>
@@ -26877,7 +27114,7 @@
           <p:cNvPr id="46" name="">
             <a:extLst xmlns:a="http://schemas.openxmlformats.org/drawingml/2006/main">
               <a:ext uri="{FF2B5EF4-FFF2-40B4-BE49-F238E27FC236}">
-                <a16:creationId xmlns:a16="http://schemas.microsoft.com/office/drawing/2014/main" id="{5AF1ECD4-3FDC-432E-B785-631A215F3735}"/>
+                <a16:creationId xmlns:a16="http://schemas.microsoft.com/office/drawing/2014/main" id="{6A6FDB4E-A80F-40A0-8067-DBE2E7D59395}"/>
               </a:ext>
             </a:extLst>
           </p:cNvPr>
@@ -26912,7 +27149,7 @@
           <p:cNvPr id="47" name="">
             <a:extLst xmlns:a="http://schemas.openxmlformats.org/drawingml/2006/main">
               <a:ext uri="{FF2B5EF4-FFF2-40B4-BE49-F238E27FC236}">
-                <a16:creationId xmlns:a16="http://schemas.microsoft.com/office/drawing/2014/main" id="{8B68A284-1F11-450F-907F-702D416A54D6}"/>
+                <a16:creationId xmlns:a16="http://schemas.microsoft.com/office/drawing/2014/main" id="{3F08D246-DC8C-4F04-B09E-749DF49FEDB8}"/>
               </a:ext>
             </a:extLst>
           </p:cNvPr>
@@ -26947,7 +27184,7 @@
           <p:cNvPr id="48" name="">
             <a:extLst xmlns:a="http://schemas.openxmlformats.org/drawingml/2006/main">
               <a:ext uri="{FF2B5EF4-FFF2-40B4-BE49-F238E27FC236}">
-                <a16:creationId xmlns:a16="http://schemas.microsoft.com/office/drawing/2014/main" id="{48C5F7C6-61A2-474C-8F5D-60DF1DCC37B5}"/>
+                <a16:creationId xmlns:a16="http://schemas.microsoft.com/office/drawing/2014/main" id="{19FCA1E4-87E7-4B5E-AEDC-A476067309CD}"/>
               </a:ext>
             </a:extLst>
           </p:cNvPr>
@@ -26982,7 +27219,7 @@
           <p:cNvPr id="49" name="">
             <a:extLst xmlns:a="http://schemas.openxmlformats.org/drawingml/2006/main">
               <a:ext uri="{FF2B5EF4-FFF2-40B4-BE49-F238E27FC236}">
-                <a16:creationId xmlns:a16="http://schemas.microsoft.com/office/drawing/2014/main" id="{7D87CCC2-0A90-435F-8FC3-B6D2013C7C61}"/>
+                <a16:creationId xmlns:a16="http://schemas.microsoft.com/office/drawing/2014/main" id="{D1D3DD9E-F445-46BB-A09C-6EC5A114CA2A}"/>
               </a:ext>
             </a:extLst>
           </p:cNvPr>
@@ -27017,7 +27254,7 @@
           <p:cNvPr id="50" name="">
             <a:extLst xmlns:a="http://schemas.openxmlformats.org/drawingml/2006/main">
               <a:ext uri="{FF2B5EF4-FFF2-40B4-BE49-F238E27FC236}">
-                <a16:creationId xmlns:a16="http://schemas.microsoft.com/office/drawing/2014/main" id="{D89C2C98-342A-4364-93F0-83B7EEA858BB}"/>
+                <a16:creationId xmlns:a16="http://schemas.microsoft.com/office/drawing/2014/main" id="{55A7767B-B505-4AC6-8634-718943145610}"/>
               </a:ext>
             </a:extLst>
           </p:cNvPr>
@@ -27052,7 +27289,7 @@
           <p:cNvPr id="51" name="">
             <a:extLst xmlns:a="http://schemas.openxmlformats.org/drawingml/2006/main">
               <a:ext uri="{FF2B5EF4-FFF2-40B4-BE49-F238E27FC236}">
-                <a16:creationId xmlns:a16="http://schemas.microsoft.com/office/drawing/2014/main" id="{DDD1A15B-CDA2-46BD-898C-5FBFA1539888}"/>
+                <a16:creationId xmlns:a16="http://schemas.microsoft.com/office/drawing/2014/main" id="{9B431D67-2763-4D53-A1B3-C3E41FE7DED4}"/>
               </a:ext>
             </a:extLst>
           </p:cNvPr>
@@ -27110,7 +27347,7 @@
           <p:cNvPr id="52" name="">
             <a:extLst xmlns:a="http://schemas.openxmlformats.org/drawingml/2006/main">
               <a:ext uri="{FF2B5EF4-FFF2-40B4-BE49-F238E27FC236}">
-                <a16:creationId xmlns:a16="http://schemas.microsoft.com/office/drawing/2014/main" id="{81F181DE-BD4A-49D5-BBD2-B5A10B51D555}"/>
+                <a16:creationId xmlns:a16="http://schemas.microsoft.com/office/drawing/2014/main" id="{6F444D8C-1F3A-429C-ADCB-9C0A93606233}"/>
               </a:ext>
             </a:extLst>
           </p:cNvPr>
@@ -27168,7 +27405,7 @@
           <p:cNvPr id="53" name="">
             <a:extLst xmlns:a="http://schemas.openxmlformats.org/drawingml/2006/main">
               <a:ext uri="{FF2B5EF4-FFF2-40B4-BE49-F238E27FC236}">
-                <a16:creationId xmlns:a16="http://schemas.microsoft.com/office/drawing/2014/main" id="{66B62642-19EC-4CA2-8591-224F11B56620}"/>
+                <a16:creationId xmlns:a16="http://schemas.microsoft.com/office/drawing/2014/main" id="{9B80B9E8-D2D5-47BC-8663-AD80741F6649}"/>
               </a:ext>
             </a:extLst>
           </p:cNvPr>
@@ -27203,7 +27440,7 @@
           <p:cNvPr id="54" name="">
             <a:extLst xmlns:a="http://schemas.openxmlformats.org/drawingml/2006/main">
               <a:ext uri="{FF2B5EF4-FFF2-40B4-BE49-F238E27FC236}">
-                <a16:creationId xmlns:a16="http://schemas.microsoft.com/office/drawing/2014/main" id="{E471DF9F-8921-40F8-A1D9-5347A7B92FA3}"/>
+                <a16:creationId xmlns:a16="http://schemas.microsoft.com/office/drawing/2014/main" id="{9507E0A1-C8F4-4C9A-AAE1-D03B0FD72D09}"/>
               </a:ext>
             </a:extLst>
           </p:cNvPr>
@@ -27238,7 +27475,7 @@
           <p:cNvPr id="55" name="">
             <a:extLst xmlns:a="http://schemas.openxmlformats.org/drawingml/2006/main">
               <a:ext uri="{FF2B5EF4-FFF2-40B4-BE49-F238E27FC236}">
-                <a16:creationId xmlns:a16="http://schemas.microsoft.com/office/drawing/2014/main" id="{BB238B8A-9F9A-4D13-AD2B-9E377E5CC8D4}"/>
+                <a16:creationId xmlns:a16="http://schemas.microsoft.com/office/drawing/2014/main" id="{95F5C05A-EBAB-4A2D-B3CA-1733FCF0990A}"/>
               </a:ext>
             </a:extLst>
           </p:cNvPr>
@@ -27296,7 +27533,7 @@
           <p:cNvPr id="56" name="">
             <a:extLst xmlns:a="http://schemas.openxmlformats.org/drawingml/2006/main">
               <a:ext uri="{FF2B5EF4-FFF2-40B4-BE49-F238E27FC236}">
-                <a16:creationId xmlns:a16="http://schemas.microsoft.com/office/drawing/2014/main" id="{053D8153-F0F2-4146-A1C0-EB5E8E94B25A}"/>
+                <a16:creationId xmlns:a16="http://schemas.microsoft.com/office/drawing/2014/main" id="{5DB5FA23-DFF4-42AA-962C-70ECD7067E87}"/>
               </a:ext>
             </a:extLst>
           </p:cNvPr>
@@ -27354,7 +27591,7 @@
           <p:cNvPr id="57" name="">
             <a:extLst xmlns:a="http://schemas.openxmlformats.org/drawingml/2006/main">
               <a:ext uri="{FF2B5EF4-FFF2-40B4-BE49-F238E27FC236}">
-                <a16:creationId xmlns:a16="http://schemas.microsoft.com/office/drawing/2014/main" id="{CB0D071F-3DC1-40C0-B1E5-AE7F13A1306F}"/>
+                <a16:creationId xmlns:a16="http://schemas.microsoft.com/office/drawing/2014/main" id="{9BFFE4A3-3F96-48DF-B477-604B467A5985}"/>
               </a:ext>
             </a:extLst>
           </p:cNvPr>
@@ -27389,7 +27626,7 @@
           <p:cNvPr id="58" name="">
             <a:extLst xmlns:a="http://schemas.openxmlformats.org/drawingml/2006/main">
               <a:ext uri="{FF2B5EF4-FFF2-40B4-BE49-F238E27FC236}">
-                <a16:creationId xmlns:a16="http://schemas.microsoft.com/office/drawing/2014/main" id="{297BA319-3C01-43E1-8601-A2A544214D0B}"/>
+                <a16:creationId xmlns:a16="http://schemas.microsoft.com/office/drawing/2014/main" id="{45034719-9B6C-4DA6-992B-8E0868A385FE}"/>
               </a:ext>
             </a:extLst>
           </p:cNvPr>
@@ -27424,7 +27661,7 @@
           <p:cNvPr id="59" name="">
             <a:extLst xmlns:a="http://schemas.openxmlformats.org/drawingml/2006/main">
               <a:ext uri="{FF2B5EF4-FFF2-40B4-BE49-F238E27FC236}">
-                <a16:creationId xmlns:a16="http://schemas.microsoft.com/office/drawing/2014/main" id="{0995C020-A96B-46D6-A8CF-5BE0F47C18D0}"/>
+                <a16:creationId xmlns:a16="http://schemas.microsoft.com/office/drawing/2014/main" id="{28C5667C-0E27-465F-AB76-35383000F452}"/>
               </a:ext>
             </a:extLst>
           </p:cNvPr>
@@ -27482,7 +27719,7 @@
           <p:cNvPr id="60" name="">
             <a:extLst xmlns:a="http://schemas.openxmlformats.org/drawingml/2006/main">
               <a:ext uri="{FF2B5EF4-FFF2-40B4-BE49-F238E27FC236}">
-                <a16:creationId xmlns:a16="http://schemas.microsoft.com/office/drawing/2014/main" id="{23ABCD3C-5B63-4680-ABB7-C4C1231E47AF}"/>
+                <a16:creationId xmlns:a16="http://schemas.microsoft.com/office/drawing/2014/main" id="{7333AC3B-1F65-4198-A056-D630CE41DF10}"/>
               </a:ext>
             </a:extLst>
           </p:cNvPr>
@@ -27540,7 +27777,7 @@
           <p:cNvPr id="61" name="">
             <a:extLst xmlns:a="http://schemas.openxmlformats.org/drawingml/2006/main">
               <a:ext uri="{FF2B5EF4-FFF2-40B4-BE49-F238E27FC236}">
-                <a16:creationId xmlns:a16="http://schemas.microsoft.com/office/drawing/2014/main" id="{65389998-86F1-477D-BF80-EF089BDE0EA9}"/>
+                <a16:creationId xmlns:a16="http://schemas.microsoft.com/office/drawing/2014/main" id="{A7297DFF-03E1-467C-84AC-B3E61CB0C857}"/>
               </a:ext>
             </a:extLst>
           </p:cNvPr>
@@ -27596,7 +27833,7 @@
     </p:spTree>
     <p:extLst>
       <p:ext uri="{BB962C8B-B14F-4D97-AF65-F5344CB8AC3E}">
-        <p14:creationId xmlns:p14="http://schemas.microsoft.com/office/powerpoint/2010/main" val="1045249999"/>
+        <p14:creationId xmlns:p14="http://schemas.microsoft.com/office/powerpoint/2010/main" val="1651058901"/>
       </p:ext>
     </p:extLst>
   </p:cSld>
@@ -27627,7 +27864,7 @@
           <p:cNvPr id="1" name="">
             <a:extLst xmlns:a="http://schemas.openxmlformats.org/drawingml/2006/main">
               <a:ext uri="{FF2B5EF4-FFF2-40B4-BE49-F238E27FC236}">
-                <a16:creationId xmlns:a16="http://schemas.microsoft.com/office/drawing/2014/main" id="{0A44A04C-3CC3-456A-BBEF-314B37687B6B}"/>
+                <a16:creationId xmlns:a16="http://schemas.microsoft.com/office/drawing/2014/main" id="{62561C3C-9BFD-4146-81EB-F84ECFE2F52C}"/>
               </a:ext>
             </a:extLst>
           </p:cNvPr>
@@ -27662,7 +27899,7 @@
           <p:cNvPr id="2" name="">
             <a:extLst xmlns:a="http://schemas.openxmlformats.org/drawingml/2006/main">
               <a:ext uri="{FF2B5EF4-FFF2-40B4-BE49-F238E27FC236}">
-                <a16:creationId xmlns:a16="http://schemas.microsoft.com/office/drawing/2014/main" id="{504811C4-3224-4CE1-8E39-ACE73A796BC6}"/>
+                <a16:creationId xmlns:a16="http://schemas.microsoft.com/office/drawing/2014/main" id="{BAEF7522-B16D-473A-B051-97320EAABF92}"/>
               </a:ext>
             </a:extLst>
           </p:cNvPr>
@@ -27697,7 +27934,7 @@
           <p:cNvPr id="3" name="">
             <a:extLst xmlns:a="http://schemas.openxmlformats.org/drawingml/2006/main">
               <a:ext uri="{FF2B5EF4-FFF2-40B4-BE49-F238E27FC236}">
-                <a16:creationId xmlns:a16="http://schemas.microsoft.com/office/drawing/2014/main" id="{AE8C115F-6E60-45DA-9946-B79CF81E78E9}"/>
+                <a16:creationId xmlns:a16="http://schemas.microsoft.com/office/drawing/2014/main" id="{9CEC5F0B-B758-4B9C-89DC-1785B5B7876D}"/>
               </a:ext>
             </a:extLst>
           </p:cNvPr>
@@ -27755,7 +27992,7 @@
           <p:cNvPr id="4" name="">
             <a:extLst xmlns:a="http://schemas.openxmlformats.org/drawingml/2006/main">
               <a:ext uri="{FF2B5EF4-FFF2-40B4-BE49-F238E27FC236}">
-                <a16:creationId xmlns:a16="http://schemas.microsoft.com/office/drawing/2014/main" id="{C6C323C5-4213-48F1-9EFB-B682613DDDB0}"/>
+                <a16:creationId xmlns:a16="http://schemas.microsoft.com/office/drawing/2014/main" id="{4AA192A2-3FE2-4C02-8644-997F9FAD440E}"/>
               </a:ext>
             </a:extLst>
           </p:cNvPr>
@@ -27813,7 +28050,7 @@
           <p:cNvPr id="5" name="">
             <a:extLst xmlns:a="http://schemas.openxmlformats.org/drawingml/2006/main">
               <a:ext uri="{FF2B5EF4-FFF2-40B4-BE49-F238E27FC236}">
-                <a16:creationId xmlns:a16="http://schemas.microsoft.com/office/drawing/2014/main" id="{84613D89-28E7-474F-A1F1-19A773355829}"/>
+                <a16:creationId xmlns:a16="http://schemas.microsoft.com/office/drawing/2014/main" id="{DFF259C2-38A5-4580-B7CC-DB658DB3E723}"/>
               </a:ext>
             </a:extLst>
           </p:cNvPr>
@@ -27848,7 +28085,7 @@
           <p:cNvPr id="6" name="">
             <a:extLst xmlns:a="http://schemas.openxmlformats.org/drawingml/2006/main">
               <a:ext uri="{FF2B5EF4-FFF2-40B4-BE49-F238E27FC236}">
-                <a16:creationId xmlns:a16="http://schemas.microsoft.com/office/drawing/2014/main" id="{D3599F53-0754-46D6-A493-313990EC3D43}"/>
+                <a16:creationId xmlns:a16="http://schemas.microsoft.com/office/drawing/2014/main" id="{4435C296-D510-47CD-8472-4F5D9B1958C1}"/>
               </a:ext>
             </a:extLst>
           </p:cNvPr>
@@ -27906,7 +28143,7 @@
           <p:cNvPr id="7" name="">
             <a:extLst xmlns:a="http://schemas.openxmlformats.org/drawingml/2006/main">
               <a:ext uri="{FF2B5EF4-FFF2-40B4-BE49-F238E27FC236}">
-                <a16:creationId xmlns:a16="http://schemas.microsoft.com/office/drawing/2014/main" id="{D3DFF10F-F042-447A-80B6-B2D2734C3F92}"/>
+                <a16:creationId xmlns:a16="http://schemas.microsoft.com/office/drawing/2014/main" id="{1D35A973-F5DB-4C59-82EA-9AA7F5C17AA4}"/>
               </a:ext>
             </a:extLst>
           </p:cNvPr>
@@ -27964,7 +28201,7 @@
           <p:cNvPr id="8" name="">
             <a:extLst xmlns:a="http://schemas.openxmlformats.org/drawingml/2006/main">
               <a:ext uri="{FF2B5EF4-FFF2-40B4-BE49-F238E27FC236}">
-                <a16:creationId xmlns:a16="http://schemas.microsoft.com/office/drawing/2014/main" id="{7B427CA4-2FE2-40A2-8805-432E7A04CB3C}"/>
+                <a16:creationId xmlns:a16="http://schemas.microsoft.com/office/drawing/2014/main" id="{8CC0DA16-FF80-4D8F-9EE4-8556960F7B69}"/>
               </a:ext>
             </a:extLst>
           </p:cNvPr>
@@ -27999,7 +28236,7 @@
           <p:cNvPr id="9" name="">
             <a:extLst xmlns:a="http://schemas.openxmlformats.org/drawingml/2006/main">
               <a:ext uri="{FF2B5EF4-FFF2-40B4-BE49-F238E27FC236}">
-                <a16:creationId xmlns:a16="http://schemas.microsoft.com/office/drawing/2014/main" id="{A51EBF0E-A89E-49F3-9D98-44F1B4E65D1F}"/>
+                <a16:creationId xmlns:a16="http://schemas.microsoft.com/office/drawing/2014/main" id="{CCD723CB-8F02-41BA-9F75-730419BB5CF5}"/>
               </a:ext>
             </a:extLst>
           </p:cNvPr>
@@ -28034,7 +28271,7 @@
           <p:cNvPr id="10" name="">
             <a:extLst xmlns:a="http://schemas.openxmlformats.org/drawingml/2006/main">
               <a:ext uri="{FF2B5EF4-FFF2-40B4-BE49-F238E27FC236}">
-                <a16:creationId xmlns:a16="http://schemas.microsoft.com/office/drawing/2014/main" id="{84178186-B4EB-4CB9-B7AB-BC28D291DD4E}"/>
+                <a16:creationId xmlns:a16="http://schemas.microsoft.com/office/drawing/2014/main" id="{C78A88E5-2A86-492A-920D-0728BF4E9BDF}"/>
               </a:ext>
             </a:extLst>
           </p:cNvPr>
@@ -28092,7 +28329,7 @@
           <p:cNvPr id="11" name="">
             <a:extLst xmlns:a="http://schemas.openxmlformats.org/drawingml/2006/main">
               <a:ext uri="{FF2B5EF4-FFF2-40B4-BE49-F238E27FC236}">
-                <a16:creationId xmlns:a16="http://schemas.microsoft.com/office/drawing/2014/main" id="{2A4ACD7E-2FBA-43CA-97F1-94DDC12618C5}"/>
+                <a16:creationId xmlns:a16="http://schemas.microsoft.com/office/drawing/2014/main" id="{FECAC0D8-D47F-45DB-8395-8EA0F2DF094B}"/>
               </a:ext>
             </a:extLst>
           </p:cNvPr>
@@ -28127,7 +28364,7 @@
           <p:cNvPr id="12" name="">
             <a:extLst xmlns:a="http://schemas.openxmlformats.org/drawingml/2006/main">
               <a:ext uri="{FF2B5EF4-FFF2-40B4-BE49-F238E27FC236}">
-                <a16:creationId xmlns:a16="http://schemas.microsoft.com/office/drawing/2014/main" id="{E45DF1B3-0B19-4510-AA86-A5851FFED433}"/>
+                <a16:creationId xmlns:a16="http://schemas.microsoft.com/office/drawing/2014/main" id="{5E86641C-C4A5-4BAC-9D5A-00F060BE0D78}"/>
               </a:ext>
             </a:extLst>
           </p:cNvPr>
@@ -28219,7 +28456,7 @@
           <p:cNvPr id="13" name="">
             <a:extLst xmlns:a="http://schemas.openxmlformats.org/drawingml/2006/main">
               <a:ext uri="{FF2B5EF4-FFF2-40B4-BE49-F238E27FC236}">
-                <a16:creationId xmlns:a16="http://schemas.microsoft.com/office/drawing/2014/main" id="{7710DC8F-07C0-46D9-83EF-6B7992C0B12B}"/>
+                <a16:creationId xmlns:a16="http://schemas.microsoft.com/office/drawing/2014/main" id="{116A1E3E-E010-4B3B-A04B-1B48D9500B18}"/>
               </a:ext>
             </a:extLst>
           </p:cNvPr>
@@ -28254,7 +28491,7 @@
           <p:cNvPr id="14" name="">
             <a:extLst xmlns:a="http://schemas.openxmlformats.org/drawingml/2006/main">
               <a:ext uri="{FF2B5EF4-FFF2-40B4-BE49-F238E27FC236}">
-                <a16:creationId xmlns:a16="http://schemas.microsoft.com/office/drawing/2014/main" id="{4983FD15-0370-468A-B7A3-B82E70420A0D}"/>
+                <a16:creationId xmlns:a16="http://schemas.microsoft.com/office/drawing/2014/main" id="{0BBCB35D-E97D-42F9-AE0D-9B971991566A}"/>
               </a:ext>
             </a:extLst>
           </p:cNvPr>
@@ -28329,7 +28566,7 @@
           <p:cNvPr id="15" name="">
             <a:extLst xmlns:a="http://schemas.openxmlformats.org/drawingml/2006/main">
               <a:ext uri="{FF2B5EF4-FFF2-40B4-BE49-F238E27FC236}">
-                <a16:creationId xmlns:a16="http://schemas.microsoft.com/office/drawing/2014/main" id="{AEBB8DF7-8D69-47DC-B0E9-5C1DF7C30CA4}"/>
+                <a16:creationId xmlns:a16="http://schemas.microsoft.com/office/drawing/2014/main" id="{1BE78B58-BE2D-4AB2-93C1-44D8970735B0}"/>
               </a:ext>
             </a:extLst>
           </p:cNvPr>
@@ -28364,7 +28601,7 @@
           <p:cNvPr id="16" name="">
             <a:extLst xmlns:a="http://schemas.openxmlformats.org/drawingml/2006/main">
               <a:ext uri="{FF2B5EF4-FFF2-40B4-BE49-F238E27FC236}">
-                <a16:creationId xmlns:a16="http://schemas.microsoft.com/office/drawing/2014/main" id="{747D7315-1D6D-4AD9-A5AB-EC7A17D53991}"/>
+                <a16:creationId xmlns:a16="http://schemas.microsoft.com/office/drawing/2014/main" id="{027F51A6-3D51-4952-8A78-F270D4E11A4F}"/>
               </a:ext>
             </a:extLst>
           </p:cNvPr>
@@ -28399,7 +28636,7 @@
           <p:cNvPr id="17" name="">
             <a:extLst xmlns:a="http://schemas.openxmlformats.org/drawingml/2006/main">
               <a:ext uri="{FF2B5EF4-FFF2-40B4-BE49-F238E27FC236}">
-                <a16:creationId xmlns:a16="http://schemas.microsoft.com/office/drawing/2014/main" id="{A4E98C9C-3E3E-44EC-97D7-29718BA38A1D}"/>
+                <a16:creationId xmlns:a16="http://schemas.microsoft.com/office/drawing/2014/main" id="{0B72300F-E082-4CE4-AA4A-F93526D0846D}"/>
               </a:ext>
             </a:extLst>
           </p:cNvPr>
@@ -28457,7 +28694,7 @@
           <p:cNvPr id="18" name="">
             <a:extLst xmlns:a="http://schemas.openxmlformats.org/drawingml/2006/main">
               <a:ext uri="{FF2B5EF4-FFF2-40B4-BE49-F238E27FC236}">
-                <a16:creationId xmlns:a16="http://schemas.microsoft.com/office/drawing/2014/main" id="{8764ED42-C77A-45B6-82FE-53828C8DA552}"/>
+                <a16:creationId xmlns:a16="http://schemas.microsoft.com/office/drawing/2014/main" id="{34B694A7-A48F-4042-83F1-B907F669C83D}"/>
               </a:ext>
             </a:extLst>
           </p:cNvPr>
@@ -28492,7 +28729,7 @@
           <p:cNvPr id="19" name="">
             <a:extLst xmlns:a="http://schemas.openxmlformats.org/drawingml/2006/main">
               <a:ext uri="{FF2B5EF4-FFF2-40B4-BE49-F238E27FC236}">
-                <a16:creationId xmlns:a16="http://schemas.microsoft.com/office/drawing/2014/main" id="{08271ED6-9952-4FC2-BC4F-294D48701E7F}"/>
+                <a16:creationId xmlns:a16="http://schemas.microsoft.com/office/drawing/2014/main" id="{05073124-B3FD-4204-A95C-9EB0312981DF}"/>
               </a:ext>
             </a:extLst>
           </p:cNvPr>
@@ -28601,7 +28838,7 @@
           <p:cNvPr id="20" name="">
             <a:extLst xmlns:a="http://schemas.openxmlformats.org/drawingml/2006/main">
               <a:ext uri="{FF2B5EF4-FFF2-40B4-BE49-F238E27FC236}">
-                <a16:creationId xmlns:a16="http://schemas.microsoft.com/office/drawing/2014/main" id="{72488183-27CE-4C3C-828A-968327F5A74A}"/>
+                <a16:creationId xmlns:a16="http://schemas.microsoft.com/office/drawing/2014/main" id="{454797D6-6202-410F-B182-B4ABCB3E70C2}"/>
               </a:ext>
             </a:extLst>
           </p:cNvPr>
@@ -28636,7 +28873,7 @@
           <p:cNvPr id="21" name="">
             <a:extLst xmlns:a="http://schemas.openxmlformats.org/drawingml/2006/main">
               <a:ext uri="{FF2B5EF4-FFF2-40B4-BE49-F238E27FC236}">
-                <a16:creationId xmlns:a16="http://schemas.microsoft.com/office/drawing/2014/main" id="{C99A7251-EB95-4A8F-91D5-45DC12E44445}"/>
+                <a16:creationId xmlns:a16="http://schemas.microsoft.com/office/drawing/2014/main" id="{934AA5CC-DC1F-4922-B0AD-DBCC572A11CB}"/>
               </a:ext>
             </a:extLst>
           </p:cNvPr>
@@ -28728,7 +28965,7 @@
           <p:cNvPr id="22" name="">
             <a:extLst xmlns:a="http://schemas.openxmlformats.org/drawingml/2006/main">
               <a:ext uri="{FF2B5EF4-FFF2-40B4-BE49-F238E27FC236}">
-                <a16:creationId xmlns:a16="http://schemas.microsoft.com/office/drawing/2014/main" id="{6C4E783E-C90E-4DA5-8E97-A4DB72DC1CE8}"/>
+                <a16:creationId xmlns:a16="http://schemas.microsoft.com/office/drawing/2014/main" id="{1DB80D11-E05D-4661-874D-6DA4AE6C423E}"/>
               </a:ext>
             </a:extLst>
           </p:cNvPr>
@@ -28763,7 +29000,7 @@
           <p:cNvPr id="23" name="">
             <a:extLst xmlns:a="http://schemas.openxmlformats.org/drawingml/2006/main">
               <a:ext uri="{FF2B5EF4-FFF2-40B4-BE49-F238E27FC236}">
-                <a16:creationId xmlns:a16="http://schemas.microsoft.com/office/drawing/2014/main" id="{171D3B71-18D5-4D84-8E9E-C3E91DB554D1}"/>
+                <a16:creationId xmlns:a16="http://schemas.microsoft.com/office/drawing/2014/main" id="{17CEFAAA-1416-4478-B66F-397B063F7463}"/>
               </a:ext>
             </a:extLst>
           </p:cNvPr>
@@ -28798,7 +29035,7 @@
           <p:cNvPr id="24" name="">
             <a:extLst xmlns:a="http://schemas.openxmlformats.org/drawingml/2006/main">
               <a:ext uri="{FF2B5EF4-FFF2-40B4-BE49-F238E27FC236}">
-                <a16:creationId xmlns:a16="http://schemas.microsoft.com/office/drawing/2014/main" id="{202F96C2-75A0-43F7-969C-F20CBF135854}"/>
+                <a16:creationId xmlns:a16="http://schemas.microsoft.com/office/drawing/2014/main" id="{91519103-B3B2-467C-BCDF-1CE15C2B80A4}"/>
               </a:ext>
             </a:extLst>
           </p:cNvPr>
@@ -28856,7 +29093,7 @@
           <p:cNvPr id="25" name="">
             <a:extLst xmlns:a="http://schemas.openxmlformats.org/drawingml/2006/main">
               <a:ext uri="{FF2B5EF4-FFF2-40B4-BE49-F238E27FC236}">
-                <a16:creationId xmlns:a16="http://schemas.microsoft.com/office/drawing/2014/main" id="{A874819A-B695-4B66-BEB1-4EB75FBB449A}"/>
+                <a16:creationId xmlns:a16="http://schemas.microsoft.com/office/drawing/2014/main" id="{8EC4EDA1-9A97-4FF1-9B9F-7AB4BF67FC64}"/>
               </a:ext>
             </a:extLst>
           </p:cNvPr>
@@ -28891,7 +29128,7 @@
           <p:cNvPr id="26" name="">
             <a:extLst xmlns:a="http://schemas.openxmlformats.org/drawingml/2006/main">
               <a:ext uri="{FF2B5EF4-FFF2-40B4-BE49-F238E27FC236}">
-                <a16:creationId xmlns:a16="http://schemas.microsoft.com/office/drawing/2014/main" id="{4A418BEC-284E-4F8A-A8CC-BB3ED54FAA90}"/>
+                <a16:creationId xmlns:a16="http://schemas.microsoft.com/office/drawing/2014/main" id="{93F28923-D444-4C24-8BB2-3F9D2ADCCB57}"/>
               </a:ext>
             </a:extLst>
           </p:cNvPr>
@@ -29000,7 +29237,7 @@
           <p:cNvPr id="27" name="">
             <a:extLst xmlns:a="http://schemas.openxmlformats.org/drawingml/2006/main">
               <a:ext uri="{FF2B5EF4-FFF2-40B4-BE49-F238E27FC236}">
-                <a16:creationId xmlns:a16="http://schemas.microsoft.com/office/drawing/2014/main" id="{67CD32F4-63D1-46FB-8750-E351E1A64433}"/>
+                <a16:creationId xmlns:a16="http://schemas.microsoft.com/office/drawing/2014/main" id="{690EC6F2-8ACA-47DE-8494-32030A237943}"/>
               </a:ext>
             </a:extLst>
           </p:cNvPr>
@@ -29035,7 +29272,7 @@
           <p:cNvPr id="28" name="">
             <a:extLst xmlns:a="http://schemas.openxmlformats.org/drawingml/2006/main">
               <a:ext uri="{FF2B5EF4-FFF2-40B4-BE49-F238E27FC236}">
-                <a16:creationId xmlns:a16="http://schemas.microsoft.com/office/drawing/2014/main" id="{140E4594-6874-4058-9930-60BA7CC78717}"/>
+                <a16:creationId xmlns:a16="http://schemas.microsoft.com/office/drawing/2014/main" id="{7CA2BB61-A9D1-4CCF-A39C-AC8C8D46E74F}"/>
               </a:ext>
             </a:extLst>
           </p:cNvPr>
@@ -29110,7 +29347,7 @@
           <p:cNvPr id="29" name="">
             <a:extLst xmlns:a="http://schemas.openxmlformats.org/drawingml/2006/main">
               <a:ext uri="{FF2B5EF4-FFF2-40B4-BE49-F238E27FC236}">
-                <a16:creationId xmlns:a16="http://schemas.microsoft.com/office/drawing/2014/main" id="{000D0446-30FF-4906-BCF2-153B250F67E1}"/>
+                <a16:creationId xmlns:a16="http://schemas.microsoft.com/office/drawing/2014/main" id="{B4BA9E4A-9464-4918-8D1F-9FD4D613BED6}"/>
               </a:ext>
             </a:extLst>
           </p:cNvPr>
@@ -29145,7 +29382,7 @@
           <p:cNvPr id="30" name="">
             <a:extLst xmlns:a="http://schemas.openxmlformats.org/drawingml/2006/main">
               <a:ext uri="{FF2B5EF4-FFF2-40B4-BE49-F238E27FC236}">
-                <a16:creationId xmlns:a16="http://schemas.microsoft.com/office/drawing/2014/main" id="{E003449A-E456-487B-B939-E146DC0FD2EA}"/>
+                <a16:creationId xmlns:a16="http://schemas.microsoft.com/office/drawing/2014/main" id="{ED7D59E2-224C-4BD5-8141-B0835B98D48F}"/>
               </a:ext>
             </a:extLst>
           </p:cNvPr>
@@ -29180,7 +29417,7 @@
           <p:cNvPr id="31" name="">
             <a:extLst xmlns:a="http://schemas.openxmlformats.org/drawingml/2006/main">
               <a:ext uri="{FF2B5EF4-FFF2-40B4-BE49-F238E27FC236}">
-                <a16:creationId xmlns:a16="http://schemas.microsoft.com/office/drawing/2014/main" id="{945E43EB-47EA-4B0D-BD7C-AFF4EA7B0840}"/>
+                <a16:creationId xmlns:a16="http://schemas.microsoft.com/office/drawing/2014/main" id="{ABC79949-7ABB-4319-AA71-E538437D1D9E}"/>
               </a:ext>
             </a:extLst>
           </p:cNvPr>
@@ -29238,7 +29475,7 @@
           <p:cNvPr id="32" name="">
             <a:extLst xmlns:a="http://schemas.openxmlformats.org/drawingml/2006/main">
               <a:ext uri="{FF2B5EF4-FFF2-40B4-BE49-F238E27FC236}">
-                <a16:creationId xmlns:a16="http://schemas.microsoft.com/office/drawing/2014/main" id="{94BC6E57-7254-4A2E-B405-EE6DBA269948}"/>
+                <a16:creationId xmlns:a16="http://schemas.microsoft.com/office/drawing/2014/main" id="{3CFE29E2-D0CC-42E4-9A4D-2038C2DC45C9}"/>
               </a:ext>
             </a:extLst>
           </p:cNvPr>
@@ -29273,7 +29510,7 @@
           <p:cNvPr id="33" name="">
             <a:extLst xmlns:a="http://schemas.openxmlformats.org/drawingml/2006/main">
               <a:ext uri="{FF2B5EF4-FFF2-40B4-BE49-F238E27FC236}">
-                <a16:creationId xmlns:a16="http://schemas.microsoft.com/office/drawing/2014/main" id="{B86BDBFE-090F-4B7E-B1EE-D2E1354AFE0F}"/>
+                <a16:creationId xmlns:a16="http://schemas.microsoft.com/office/drawing/2014/main" id="{FE6F0345-958E-4328-8D71-369592C58B9C}"/>
               </a:ext>
             </a:extLst>
           </p:cNvPr>
@@ -29399,7 +29636,7 @@
           <p:cNvPr id="34" name="">
             <a:extLst xmlns:a="http://schemas.openxmlformats.org/drawingml/2006/main">
               <a:ext uri="{FF2B5EF4-FFF2-40B4-BE49-F238E27FC236}">
-                <a16:creationId xmlns:a16="http://schemas.microsoft.com/office/drawing/2014/main" id="{FD20FD3B-9C3B-4C12-8895-1D9873ED89F2}"/>
+                <a16:creationId xmlns:a16="http://schemas.microsoft.com/office/drawing/2014/main" id="{842B9AC9-7CDF-4F47-8F8D-A570934406E7}"/>
               </a:ext>
             </a:extLst>
           </p:cNvPr>
@@ -29434,7 +29671,7 @@
           <p:cNvPr id="35" name="">
             <a:extLst xmlns:a="http://schemas.openxmlformats.org/drawingml/2006/main">
               <a:ext uri="{FF2B5EF4-FFF2-40B4-BE49-F238E27FC236}">
-                <a16:creationId xmlns:a16="http://schemas.microsoft.com/office/drawing/2014/main" id="{BDC64FAE-0628-421F-884C-9A2F9BC7CE4C}"/>
+                <a16:creationId xmlns:a16="http://schemas.microsoft.com/office/drawing/2014/main" id="{6D75AE86-2CA3-4600-ADBF-5F258FD0AF45}"/>
               </a:ext>
             </a:extLst>
           </p:cNvPr>
@@ -29509,7 +29746,7 @@
           <p:cNvPr id="36" name="">
             <a:extLst xmlns:a="http://schemas.openxmlformats.org/drawingml/2006/main">
               <a:ext uri="{FF2B5EF4-FFF2-40B4-BE49-F238E27FC236}">
-                <a16:creationId xmlns:a16="http://schemas.microsoft.com/office/drawing/2014/main" id="{7F994CFA-754C-435A-A24E-29A705B3DA4C}"/>
+                <a16:creationId xmlns:a16="http://schemas.microsoft.com/office/drawing/2014/main" id="{90024478-A71F-4672-B010-85CEC60D448C}"/>
               </a:ext>
             </a:extLst>
           </p:cNvPr>
@@ -29544,7 +29781,7 @@
           <p:cNvPr id="37" name="">
             <a:extLst xmlns:a="http://schemas.openxmlformats.org/drawingml/2006/main">
               <a:ext uri="{FF2B5EF4-FFF2-40B4-BE49-F238E27FC236}">
-                <a16:creationId xmlns:a16="http://schemas.microsoft.com/office/drawing/2014/main" id="{56B0CA05-0B97-49D8-BB0E-4B53D2C29999}"/>
+                <a16:creationId xmlns:a16="http://schemas.microsoft.com/office/drawing/2014/main" id="{A3D55BBD-0B25-44C5-A2CE-8DF8812615CE}"/>
               </a:ext>
             </a:extLst>
           </p:cNvPr>
@@ -29579,7 +29816,7 @@
           <p:cNvPr id="38" name="">
             <a:extLst xmlns:a="http://schemas.openxmlformats.org/drawingml/2006/main">
               <a:ext uri="{FF2B5EF4-FFF2-40B4-BE49-F238E27FC236}">
-                <a16:creationId xmlns:a16="http://schemas.microsoft.com/office/drawing/2014/main" id="{D5300904-8AB4-42E6-A2E5-484A7CBA54DA}"/>
+                <a16:creationId xmlns:a16="http://schemas.microsoft.com/office/drawing/2014/main" id="{9633EF25-8476-493C-B503-8BEBCBD173E5}"/>
               </a:ext>
             </a:extLst>
           </p:cNvPr>
@@ -29637,7 +29874,7 @@
           <p:cNvPr id="39" name="">
             <a:extLst xmlns:a="http://schemas.openxmlformats.org/drawingml/2006/main">
               <a:ext uri="{FF2B5EF4-FFF2-40B4-BE49-F238E27FC236}">
-                <a16:creationId xmlns:a16="http://schemas.microsoft.com/office/drawing/2014/main" id="{4A4E64BA-ECE5-4B1D-BA43-658BB53639A0}"/>
+                <a16:creationId xmlns:a16="http://schemas.microsoft.com/office/drawing/2014/main" id="{A97C085C-14AF-4C94-A903-6801A148B354}"/>
               </a:ext>
             </a:extLst>
           </p:cNvPr>
@@ -29672,7 +29909,7 @@
           <p:cNvPr id="40" name="">
             <a:extLst xmlns:a="http://schemas.openxmlformats.org/drawingml/2006/main">
               <a:ext uri="{FF2B5EF4-FFF2-40B4-BE49-F238E27FC236}">
-                <a16:creationId xmlns:a16="http://schemas.microsoft.com/office/drawing/2014/main" id="{D8992956-5A5C-476F-BE8A-C107D89ED54E}"/>
+                <a16:creationId xmlns:a16="http://schemas.microsoft.com/office/drawing/2014/main" id="{03894404-BE2A-4267-AC2C-D08183061C52}"/>
               </a:ext>
             </a:extLst>
           </p:cNvPr>
@@ -29747,7 +29984,7 @@
           <p:cNvPr id="41" name="">
             <a:extLst xmlns:a="http://schemas.openxmlformats.org/drawingml/2006/main">
               <a:ext uri="{FF2B5EF4-FFF2-40B4-BE49-F238E27FC236}">
-                <a16:creationId xmlns:a16="http://schemas.microsoft.com/office/drawing/2014/main" id="{8EC07033-C681-4E09-A197-E5C0A689A490}"/>
+                <a16:creationId xmlns:a16="http://schemas.microsoft.com/office/drawing/2014/main" id="{755A3143-A3D3-4A88-ABEF-C09ADE810903}"/>
               </a:ext>
             </a:extLst>
           </p:cNvPr>
@@ -29782,7 +30019,7 @@
           <p:cNvPr id="42" name="">
             <a:extLst xmlns:a="http://schemas.openxmlformats.org/drawingml/2006/main">
               <a:ext uri="{FF2B5EF4-FFF2-40B4-BE49-F238E27FC236}">
-                <a16:creationId xmlns:a16="http://schemas.microsoft.com/office/drawing/2014/main" id="{4671551E-F8F2-427E-A346-926BAA9DBF52}"/>
+                <a16:creationId xmlns:a16="http://schemas.microsoft.com/office/drawing/2014/main" id="{A87A8A2E-EF53-45CD-A1F4-08EDD28EA914}"/>
               </a:ext>
             </a:extLst>
           </p:cNvPr>
@@ -29857,7 +30094,7 @@
           <p:cNvPr id="43" name="">
             <a:extLst xmlns:a="http://schemas.openxmlformats.org/drawingml/2006/main">
               <a:ext uri="{FF2B5EF4-FFF2-40B4-BE49-F238E27FC236}">
-                <a16:creationId xmlns:a16="http://schemas.microsoft.com/office/drawing/2014/main" id="{B2E73B6C-FD94-4752-98E4-7FCB2BCEC5FD}"/>
+                <a16:creationId xmlns:a16="http://schemas.microsoft.com/office/drawing/2014/main" id="{FA350A11-1ED7-42E5-93F8-AE21E0CD7EEF}"/>
               </a:ext>
             </a:extLst>
           </p:cNvPr>
@@ -29892,7 +30129,7 @@
           <p:cNvPr id="44" name="">
             <a:extLst xmlns:a="http://schemas.openxmlformats.org/drawingml/2006/main">
               <a:ext uri="{FF2B5EF4-FFF2-40B4-BE49-F238E27FC236}">
-                <a16:creationId xmlns:a16="http://schemas.microsoft.com/office/drawing/2014/main" id="{642F4A59-1024-4A57-8C49-B0E91E32C543}"/>
+                <a16:creationId xmlns:a16="http://schemas.microsoft.com/office/drawing/2014/main" id="{73B7DE29-1E71-4B35-8307-70391ADFD7AA}"/>
               </a:ext>
             </a:extLst>
           </p:cNvPr>
@@ -29927,7 +30164,7 @@
           <p:cNvPr id="45" name="">
             <a:extLst xmlns:a="http://schemas.openxmlformats.org/drawingml/2006/main">
               <a:ext uri="{FF2B5EF4-FFF2-40B4-BE49-F238E27FC236}">
-                <a16:creationId xmlns:a16="http://schemas.microsoft.com/office/drawing/2014/main" id="{26488068-91F7-4F23-9C45-0D6ABA076944}"/>
+                <a16:creationId xmlns:a16="http://schemas.microsoft.com/office/drawing/2014/main" id="{0420DA8F-25C5-4B34-A9D7-8BC15B6500EA}"/>
               </a:ext>
             </a:extLst>
           </p:cNvPr>
@@ -29985,7 +30222,7 @@
           <p:cNvPr id="46" name="">
             <a:extLst xmlns:a="http://schemas.openxmlformats.org/drawingml/2006/main">
               <a:ext uri="{FF2B5EF4-FFF2-40B4-BE49-F238E27FC236}">
-                <a16:creationId xmlns:a16="http://schemas.microsoft.com/office/drawing/2014/main" id="{C9D6CA6C-BEE8-4018-A48C-C87A82223737}"/>
+                <a16:creationId xmlns:a16="http://schemas.microsoft.com/office/drawing/2014/main" id="{CB8C13FE-F836-4E8E-8335-78FC7786BF28}"/>
               </a:ext>
             </a:extLst>
           </p:cNvPr>
@@ -30020,7 +30257,7 @@
           <p:cNvPr id="47" name="">
             <a:extLst xmlns:a="http://schemas.openxmlformats.org/drawingml/2006/main">
               <a:ext uri="{FF2B5EF4-FFF2-40B4-BE49-F238E27FC236}">
-                <a16:creationId xmlns:a16="http://schemas.microsoft.com/office/drawing/2014/main" id="{EB105E1E-DC77-4C18-9257-9E6CC10ADC90}"/>
+                <a16:creationId xmlns:a16="http://schemas.microsoft.com/office/drawing/2014/main" id="{35D01210-1DFB-4840-A0CB-C377FBF407BE}"/>
               </a:ext>
             </a:extLst>
           </p:cNvPr>
@@ -30078,7 +30315,7 @@
           <p:cNvPr id="48" name="">
             <a:extLst xmlns:a="http://schemas.openxmlformats.org/drawingml/2006/main">
               <a:ext uri="{FF2B5EF4-FFF2-40B4-BE49-F238E27FC236}">
-                <a16:creationId xmlns:a16="http://schemas.microsoft.com/office/drawing/2014/main" id="{54BC3857-4F5B-4822-B498-7430B3F85AF4}"/>
+                <a16:creationId xmlns:a16="http://schemas.microsoft.com/office/drawing/2014/main" id="{942B4A0F-4B1D-4A5C-90F2-6826EC5D67E7}"/>
               </a:ext>
             </a:extLst>
           </p:cNvPr>
@@ -30113,7 +30350,7 @@
           <p:cNvPr id="49" name="">
             <a:extLst xmlns:a="http://schemas.openxmlformats.org/drawingml/2006/main">
               <a:ext uri="{FF2B5EF4-FFF2-40B4-BE49-F238E27FC236}">
-                <a16:creationId xmlns:a16="http://schemas.microsoft.com/office/drawing/2014/main" id="{AB911CDF-9828-4A29-BB13-51B8EB9B9F43}"/>
+                <a16:creationId xmlns:a16="http://schemas.microsoft.com/office/drawing/2014/main" id="{30E4A6B7-4738-484F-992F-08825F9F08B3}"/>
               </a:ext>
             </a:extLst>
           </p:cNvPr>
@@ -30171,7 +30408,7 @@
           <p:cNvPr id="50" name="">
             <a:extLst xmlns:a="http://schemas.openxmlformats.org/drawingml/2006/main">
               <a:ext uri="{FF2B5EF4-FFF2-40B4-BE49-F238E27FC236}">
-                <a16:creationId xmlns:a16="http://schemas.microsoft.com/office/drawing/2014/main" id="{378933B6-2AE4-4EF3-894B-E0879660AF9C}"/>
+                <a16:creationId xmlns:a16="http://schemas.microsoft.com/office/drawing/2014/main" id="{F6AB818B-E848-417D-8EE6-C66D3A3DA2DA}"/>
               </a:ext>
             </a:extLst>
           </p:cNvPr>
@@ -30204,7 +30441,7 @@
           <p:cNvPr id="51" name="">
             <a:extLst xmlns:a="http://schemas.openxmlformats.org/drawingml/2006/main">
               <a:ext uri="{FF2B5EF4-FFF2-40B4-BE49-F238E27FC236}">
-                <a16:creationId xmlns:a16="http://schemas.microsoft.com/office/drawing/2014/main" id="{244545FC-F230-4ECB-9711-3D9B36D60ACD}"/>
+                <a16:creationId xmlns:a16="http://schemas.microsoft.com/office/drawing/2014/main" id="{122DD1E8-A79D-434E-974E-3B68D03E4243}"/>
               </a:ext>
             </a:extLst>
           </p:cNvPr>
@@ -30262,7 +30499,7 @@
           <p:cNvPr id="52" name="">
             <a:extLst xmlns:a="http://schemas.openxmlformats.org/drawingml/2006/main">
               <a:ext uri="{FF2B5EF4-FFF2-40B4-BE49-F238E27FC236}">
-                <a16:creationId xmlns:a16="http://schemas.microsoft.com/office/drawing/2014/main" id="{B2645366-32CF-4124-B83A-7D61D0B80F3C}"/>
+                <a16:creationId xmlns:a16="http://schemas.microsoft.com/office/drawing/2014/main" id="{CB6A4165-A7EB-4BF3-807D-7A5D82C9A483}"/>
               </a:ext>
             </a:extLst>
           </p:cNvPr>
@@ -30295,7 +30532,7 @@
           <p:cNvPr id="53" name="">
             <a:extLst xmlns:a="http://schemas.openxmlformats.org/drawingml/2006/main">
               <a:ext uri="{FF2B5EF4-FFF2-40B4-BE49-F238E27FC236}">
-                <a16:creationId xmlns:a16="http://schemas.microsoft.com/office/drawing/2014/main" id="{208CC627-A09C-4AA0-9E1A-BA87D2227317}"/>
+                <a16:creationId xmlns:a16="http://schemas.microsoft.com/office/drawing/2014/main" id="{6D8E5CAA-165F-4B97-B652-D0EE34E0EE1F}"/>
               </a:ext>
             </a:extLst>
           </p:cNvPr>
@@ -30353,7 +30590,7 @@
           <p:cNvPr id="54" name="">
             <a:extLst xmlns:a="http://schemas.openxmlformats.org/drawingml/2006/main">
               <a:ext uri="{FF2B5EF4-FFF2-40B4-BE49-F238E27FC236}">
-                <a16:creationId xmlns:a16="http://schemas.microsoft.com/office/drawing/2014/main" id="{6D07C648-CAA4-4349-8CA9-B84A88589335}"/>
+                <a16:creationId xmlns:a16="http://schemas.microsoft.com/office/drawing/2014/main" id="{C8999737-9F33-433F-934A-62F2E788B675}"/>
               </a:ext>
             </a:extLst>
           </p:cNvPr>
@@ -30386,7 +30623,7 @@
           <p:cNvPr id="55" name="">
             <a:extLst xmlns:a="http://schemas.openxmlformats.org/drawingml/2006/main">
               <a:ext uri="{FF2B5EF4-FFF2-40B4-BE49-F238E27FC236}">
-                <a16:creationId xmlns:a16="http://schemas.microsoft.com/office/drawing/2014/main" id="{EF608952-0B4D-45AB-A954-D08525D7819F}"/>
+                <a16:creationId xmlns:a16="http://schemas.microsoft.com/office/drawing/2014/main" id="{BA900B2F-316A-44CD-8A73-82D7D09BE1D0}"/>
               </a:ext>
             </a:extLst>
           </p:cNvPr>
@@ -30444,7 +30681,7 @@
           <p:cNvPr id="56" name="">
             <a:extLst xmlns:a="http://schemas.openxmlformats.org/drawingml/2006/main">
               <a:ext uri="{FF2B5EF4-FFF2-40B4-BE49-F238E27FC236}">
-                <a16:creationId xmlns:a16="http://schemas.microsoft.com/office/drawing/2014/main" id="{A6A5BE44-A609-4333-957B-E77B17E9BDA6}"/>
+                <a16:creationId xmlns:a16="http://schemas.microsoft.com/office/drawing/2014/main" id="{C9D6AA0B-1A0B-47A6-8046-3BFA7F830ED2}"/>
               </a:ext>
             </a:extLst>
           </p:cNvPr>
@@ -30477,7 +30714,7 @@
           <p:cNvPr id="57" name="">
             <a:extLst xmlns:a="http://schemas.openxmlformats.org/drawingml/2006/main">
               <a:ext uri="{FF2B5EF4-FFF2-40B4-BE49-F238E27FC236}">
-                <a16:creationId xmlns:a16="http://schemas.microsoft.com/office/drawing/2014/main" id="{A2FA95D4-61BD-4538-BA6E-297F5D5B1184}"/>
+                <a16:creationId xmlns:a16="http://schemas.microsoft.com/office/drawing/2014/main" id="{86B84DD5-5277-49AE-98D4-FE4BD5B15FFF}"/>
               </a:ext>
             </a:extLst>
           </p:cNvPr>
@@ -30510,7 +30747,7 @@
           <p:cNvPr id="58" name="">
             <a:extLst xmlns:a="http://schemas.openxmlformats.org/drawingml/2006/main">
               <a:ext uri="{FF2B5EF4-FFF2-40B4-BE49-F238E27FC236}">
-                <a16:creationId xmlns:a16="http://schemas.microsoft.com/office/drawing/2014/main" id="{3AA43B22-C906-455F-A92E-67DC512BA4D6}"/>
+                <a16:creationId xmlns:a16="http://schemas.microsoft.com/office/drawing/2014/main" id="{3E5C90BE-709C-47C3-8A73-7B775D418C31}"/>
               </a:ext>
             </a:extLst>
           </p:cNvPr>
@@ -30585,7 +30822,7 @@
           <p:cNvPr id="59" name="">
             <a:extLst xmlns:a="http://schemas.openxmlformats.org/drawingml/2006/main">
               <a:ext uri="{FF2B5EF4-FFF2-40B4-BE49-F238E27FC236}">
-                <a16:creationId xmlns:a16="http://schemas.microsoft.com/office/drawing/2014/main" id="{85E83704-E207-4F93-BB76-2A723509EE41}"/>
+                <a16:creationId xmlns:a16="http://schemas.microsoft.com/office/drawing/2014/main" id="{AB13C597-5D3D-4CBF-B906-87FC1C936635}"/>
               </a:ext>
             </a:extLst>
           </p:cNvPr>
@@ -30641,7 +30878,7 @@
     </p:spTree>
     <p:extLst>
       <p:ext uri="{BB962C8B-B14F-4D97-AF65-F5344CB8AC3E}">
-        <p14:creationId xmlns:p14="http://schemas.microsoft.com/office/powerpoint/2010/main" val="371168449"/>
+        <p14:creationId xmlns:p14="http://schemas.microsoft.com/office/powerpoint/2010/main" val="2038650734"/>
       </p:ext>
     </p:extLst>
   </p:cSld>

--- a/output/slides/ooad-checkpoint-draft/OOAD_Checkpoint_ZH_Draft.pptx
+++ b/output/slides/ooad-checkpoint-draft/OOAD_Checkpoint_ZH_Draft.pptx
@@ -2,26 +2,26 @@
 <file path=ppt/presentation.xml><?xml version="1.0" encoding="utf-8"?>
 <p:presentation xmlns:p="http://schemas.openxmlformats.org/presentationml/2006/main">
   <p:sldMasterIdLst>
-    <p:sldMasterId xmlns:r="http://schemas.openxmlformats.org/officeDocument/2006/relationships" id="2147483648" r:id="R59c1a3c29f7a4017"/>
+    <p:sldMasterId xmlns:r="http://schemas.openxmlformats.org/officeDocument/2006/relationships" id="2147483648" r:id="Rae626043e3ce484a"/>
   </p:sldMasterIdLst>
   <p:notesMasterIdLst>
-    <p:notesMasterId xmlns:r="http://schemas.openxmlformats.org/officeDocument/2006/relationships" r:id="Rd90ae9d2bfbf4984"/>
+    <p:notesMasterId xmlns:r="http://schemas.openxmlformats.org/officeDocument/2006/relationships" r:id="Rd558dbe198a84b83"/>
   </p:notesMasterIdLst>
   <p:sldIdLst>
-    <p:sldId xmlns:r="http://schemas.openxmlformats.org/officeDocument/2006/relationships" id="256" r:id="R4e2ab2a2be5d44ce"/>
-    <p:sldId xmlns:r="http://schemas.openxmlformats.org/officeDocument/2006/relationships" id="257" r:id="Reff4039a21ef487b"/>
-    <p:sldId xmlns:r="http://schemas.openxmlformats.org/officeDocument/2006/relationships" id="258" r:id="R1a5d71a24d85471a"/>
-    <p:sldId xmlns:r="http://schemas.openxmlformats.org/officeDocument/2006/relationships" id="259" r:id="R5db51cc4f3f640ce"/>
-    <p:sldId xmlns:r="http://schemas.openxmlformats.org/officeDocument/2006/relationships" id="260" r:id="R652d5727359c47c4"/>
-    <p:sldId xmlns:r="http://schemas.openxmlformats.org/officeDocument/2006/relationships" id="261" r:id="R23ce6c02850244b8"/>
-    <p:sldId xmlns:r="http://schemas.openxmlformats.org/officeDocument/2006/relationships" id="262" r:id="R81bf828922db4e43"/>
-    <p:sldId xmlns:r="http://schemas.openxmlformats.org/officeDocument/2006/relationships" id="263" r:id="R2eb8291ebe6849a5"/>
-    <p:sldId xmlns:r="http://schemas.openxmlformats.org/officeDocument/2006/relationships" id="264" r:id="Rc255826ed7234a8f"/>
-    <p:sldId xmlns:r="http://schemas.openxmlformats.org/officeDocument/2006/relationships" id="265" r:id="R6b5671285cb54c05"/>
-    <p:sldId xmlns:r="http://schemas.openxmlformats.org/officeDocument/2006/relationships" id="266" r:id="R2d499803f69243b0"/>
-    <p:sldId xmlns:r="http://schemas.openxmlformats.org/officeDocument/2006/relationships" id="267" r:id="Rdf70c3db977f46d4"/>
-    <p:sldId xmlns:r="http://schemas.openxmlformats.org/officeDocument/2006/relationships" id="268" r:id="R397a5874d1414079"/>
-    <p:sldId xmlns:r="http://schemas.openxmlformats.org/officeDocument/2006/relationships" id="269" r:id="R833e663142884bdf"/>
+    <p:sldId xmlns:r="http://schemas.openxmlformats.org/officeDocument/2006/relationships" id="256" r:id="R0f3620c1ce9e4cb4"/>
+    <p:sldId xmlns:r="http://schemas.openxmlformats.org/officeDocument/2006/relationships" id="257" r:id="R6aa292237c704743"/>
+    <p:sldId xmlns:r="http://schemas.openxmlformats.org/officeDocument/2006/relationships" id="258" r:id="R090e567a01004b6f"/>
+    <p:sldId xmlns:r="http://schemas.openxmlformats.org/officeDocument/2006/relationships" id="259" r:id="R439be707b19547de"/>
+    <p:sldId xmlns:r="http://schemas.openxmlformats.org/officeDocument/2006/relationships" id="260" r:id="R49279b1467c14299"/>
+    <p:sldId xmlns:r="http://schemas.openxmlformats.org/officeDocument/2006/relationships" id="261" r:id="Reff7b89b440f4c8a"/>
+    <p:sldId xmlns:r="http://schemas.openxmlformats.org/officeDocument/2006/relationships" id="262" r:id="R625ee12f085f4e10"/>
+    <p:sldId xmlns:r="http://schemas.openxmlformats.org/officeDocument/2006/relationships" id="263" r:id="Rb343b4a3b17b432d"/>
+    <p:sldId xmlns:r="http://schemas.openxmlformats.org/officeDocument/2006/relationships" id="264" r:id="R3ac5dd0d3f1e42a6"/>
+    <p:sldId xmlns:r="http://schemas.openxmlformats.org/officeDocument/2006/relationships" id="265" r:id="R36f20b3c871c4d97"/>
+    <p:sldId xmlns:r="http://schemas.openxmlformats.org/officeDocument/2006/relationships" id="266" r:id="Rdc51243e531640b7"/>
+    <p:sldId xmlns:r="http://schemas.openxmlformats.org/officeDocument/2006/relationships" id="267" r:id="R46358597395a4d82"/>
+    <p:sldId xmlns:r="http://schemas.openxmlformats.org/officeDocument/2006/relationships" id="268" r:id="R8222c5f91d084898"/>
+    <p:sldId xmlns:r="http://schemas.openxmlformats.org/officeDocument/2006/relationships" id="269" r:id="R1b71f5144877454a"/>
   </p:sldIdLst>
   <p:sldSz cx="12192000" cy="6858000"/>
   <p:notesSz cx="6858000" cy="9144000"/>
@@ -1482,7 +1482,7 @@
   </p:cSld>
   <p:clrMap bg1="lt1" tx1="dk1" bg2="lt2" tx2="dk2" accent1="accent1" accent2="accent2" accent3="accent3" accent4="accent4" accent5="accent5" accent6="accent6" hlink="hlink" folHlink="folHlink"/>
   <p:sldLayoutIdLst>
-    <p:sldLayoutId xmlns:r="http://schemas.openxmlformats.org/officeDocument/2006/relationships" id="2147483649" r:id="R1f5249a46d394d02"/>
+    <p:sldLayoutId xmlns:r="http://schemas.openxmlformats.org/officeDocument/2006/relationships" id="2147483649" r:id="R20042cd229f346b3"/>
   </p:sldLayoutIdLst>
   <p:txStyles>
     <p:titleStyle>
@@ -1788,7 +1788,7 @@
           <p:cNvPr id="1" name="">
             <a:extLst xmlns:a="http://schemas.openxmlformats.org/drawingml/2006/main">
               <a:ext uri="{FF2B5EF4-FFF2-40B4-BE49-F238E27FC236}">
-                <a16:creationId xmlns:a16="http://schemas.microsoft.com/office/drawing/2014/main" id="{7B13DD9F-7C2C-45F4-A455-1F7F449A67A0}"/>
+                <a16:creationId xmlns:a16="http://schemas.microsoft.com/office/drawing/2014/main" id="{9ACC14BB-493E-4701-AAAC-90E74F1E1A87}"/>
               </a:ext>
             </a:extLst>
           </p:cNvPr>
@@ -1823,7 +1823,7 @@
           <p:cNvPr id="2" name="">
             <a:extLst xmlns:a="http://schemas.openxmlformats.org/drawingml/2006/main">
               <a:ext uri="{FF2B5EF4-FFF2-40B4-BE49-F238E27FC236}">
-                <a16:creationId xmlns:a16="http://schemas.microsoft.com/office/drawing/2014/main" id="{ABDB41E8-99E5-4852-B2F1-83D46871FC27}"/>
+                <a16:creationId xmlns:a16="http://schemas.microsoft.com/office/drawing/2014/main" id="{217D4152-523A-4192-A859-EDC43A10162A}"/>
               </a:ext>
             </a:extLst>
           </p:cNvPr>
@@ -1858,7 +1858,7 @@
           <p:cNvPr id="3" name="">
             <a:extLst xmlns:a="http://schemas.openxmlformats.org/drawingml/2006/main">
               <a:ext uri="{FF2B5EF4-FFF2-40B4-BE49-F238E27FC236}">
-                <a16:creationId xmlns:a16="http://schemas.microsoft.com/office/drawing/2014/main" id="{3BDF1B09-D800-408D-A57F-9AC159B8EED2}"/>
+                <a16:creationId xmlns:a16="http://schemas.microsoft.com/office/drawing/2014/main" id="{3A1EDC6C-D594-43F9-A3A3-A693CF779BAF}"/>
               </a:ext>
             </a:extLst>
           </p:cNvPr>
@@ -1893,7 +1893,7 @@
           <p:cNvPr id="4" name="">
             <a:extLst xmlns:a="http://schemas.openxmlformats.org/drawingml/2006/main">
               <a:ext uri="{FF2B5EF4-FFF2-40B4-BE49-F238E27FC236}">
-                <a16:creationId xmlns:a16="http://schemas.microsoft.com/office/drawing/2014/main" id="{4AF83B80-26A1-457A-9013-F00F745F48B0}"/>
+                <a16:creationId xmlns:a16="http://schemas.microsoft.com/office/drawing/2014/main" id="{1A582D0C-8A19-45D2-9B16-78464197405B}"/>
               </a:ext>
             </a:extLst>
           </p:cNvPr>
@@ -1928,7 +1928,7 @@
           <p:cNvPr id="5" name="">
             <a:extLst xmlns:a="http://schemas.openxmlformats.org/drawingml/2006/main">
               <a:ext uri="{FF2B5EF4-FFF2-40B4-BE49-F238E27FC236}">
-                <a16:creationId xmlns:a16="http://schemas.microsoft.com/office/drawing/2014/main" id="{5E5EC6D5-0499-45C0-8632-CC777FDB0C76}"/>
+                <a16:creationId xmlns:a16="http://schemas.microsoft.com/office/drawing/2014/main" id="{7714E3EE-6489-467D-91EF-9CB2840BFA4E}"/>
               </a:ext>
             </a:extLst>
           </p:cNvPr>
@@ -1986,7 +1986,7 @@
           <p:cNvPr id="6" name="">
             <a:extLst xmlns:a="http://schemas.openxmlformats.org/drawingml/2006/main">
               <a:ext uri="{FF2B5EF4-FFF2-40B4-BE49-F238E27FC236}">
-                <a16:creationId xmlns:a16="http://schemas.microsoft.com/office/drawing/2014/main" id="{B0A9062D-95D0-42D0-8FAF-6EA3238D0CF2}"/>
+                <a16:creationId xmlns:a16="http://schemas.microsoft.com/office/drawing/2014/main" id="{0293762B-2D2E-4508-8B34-2186A44747AE}"/>
               </a:ext>
             </a:extLst>
           </p:cNvPr>
@@ -2044,7 +2044,7 @@
           <p:cNvPr id="7" name="">
             <a:extLst xmlns:a="http://schemas.openxmlformats.org/drawingml/2006/main">
               <a:ext uri="{FF2B5EF4-FFF2-40B4-BE49-F238E27FC236}">
-                <a16:creationId xmlns:a16="http://schemas.microsoft.com/office/drawing/2014/main" id="{BEE32F96-191D-42F4-980F-CA011B2F87D3}"/>
+                <a16:creationId xmlns:a16="http://schemas.microsoft.com/office/drawing/2014/main" id="{AFE203D6-230C-45BC-8C88-548C0514DA6B}"/>
               </a:ext>
             </a:extLst>
           </p:cNvPr>
@@ -2119,7 +2119,7 @@
           <p:cNvPr id="8" name="">
             <a:extLst xmlns:a="http://schemas.openxmlformats.org/drawingml/2006/main">
               <a:ext uri="{FF2B5EF4-FFF2-40B4-BE49-F238E27FC236}">
-                <a16:creationId xmlns:a16="http://schemas.microsoft.com/office/drawing/2014/main" id="{3781A940-134A-4083-BA8D-AC2FC502569B}"/>
+                <a16:creationId xmlns:a16="http://schemas.microsoft.com/office/drawing/2014/main" id="{35AF9935-8CAF-4DCD-B1A5-6BC6534C49D1}"/>
               </a:ext>
             </a:extLst>
           </p:cNvPr>
@@ -2154,7 +2154,7 @@
           <p:cNvPr id="9" name="">
             <a:extLst xmlns:a="http://schemas.openxmlformats.org/drawingml/2006/main">
               <a:ext uri="{FF2B5EF4-FFF2-40B4-BE49-F238E27FC236}">
-                <a16:creationId xmlns:a16="http://schemas.microsoft.com/office/drawing/2014/main" id="{CF7FF2F4-9D59-446B-832B-B3222EC9704C}"/>
+                <a16:creationId xmlns:a16="http://schemas.microsoft.com/office/drawing/2014/main" id="{04E44687-E25C-4C78-9E03-F46421F14846}"/>
               </a:ext>
             </a:extLst>
           </p:cNvPr>
@@ -2189,7 +2189,7 @@
           <p:cNvPr id="10" name="">
             <a:extLst xmlns:a="http://schemas.openxmlformats.org/drawingml/2006/main">
               <a:ext uri="{FF2B5EF4-FFF2-40B4-BE49-F238E27FC236}">
-                <a16:creationId xmlns:a16="http://schemas.microsoft.com/office/drawing/2014/main" id="{4DD04838-3F34-4F6A-83E9-10890621BFB1}"/>
+                <a16:creationId xmlns:a16="http://schemas.microsoft.com/office/drawing/2014/main" id="{BE1E7CCD-671E-4773-9507-3B50AE77F166}"/>
               </a:ext>
             </a:extLst>
           </p:cNvPr>
@@ -2247,7 +2247,7 @@
           <p:cNvPr id="11" name="">
             <a:extLst xmlns:a="http://schemas.openxmlformats.org/drawingml/2006/main">
               <a:ext uri="{FF2B5EF4-FFF2-40B4-BE49-F238E27FC236}">
-                <a16:creationId xmlns:a16="http://schemas.microsoft.com/office/drawing/2014/main" id="{74345B4C-A1E6-47D2-AF60-4886819123EA}"/>
+                <a16:creationId xmlns:a16="http://schemas.microsoft.com/office/drawing/2014/main" id="{DC340788-52FE-485F-B3C7-12D79F052F5B}"/>
               </a:ext>
             </a:extLst>
           </p:cNvPr>
@@ -2339,7 +2339,7 @@
           <p:cNvPr id="12" name="">
             <a:extLst xmlns:a="http://schemas.openxmlformats.org/drawingml/2006/main">
               <a:ext uri="{FF2B5EF4-FFF2-40B4-BE49-F238E27FC236}">
-                <a16:creationId xmlns:a16="http://schemas.microsoft.com/office/drawing/2014/main" id="{8DC6E33C-208F-434C-A607-EEA3BBD9EA16}"/>
+                <a16:creationId xmlns:a16="http://schemas.microsoft.com/office/drawing/2014/main" id="{48B73FCD-A0B1-42B8-AAA3-6F97E7828325}"/>
               </a:ext>
             </a:extLst>
           </p:cNvPr>
@@ -2374,7 +2374,7 @@
           <p:cNvPr id="13" name="">
             <a:extLst xmlns:a="http://schemas.openxmlformats.org/drawingml/2006/main">
               <a:ext uri="{FF2B5EF4-FFF2-40B4-BE49-F238E27FC236}">
-                <a16:creationId xmlns:a16="http://schemas.microsoft.com/office/drawing/2014/main" id="{DDDA5861-8A10-45B3-B646-2D28202B84A0}"/>
+                <a16:creationId xmlns:a16="http://schemas.microsoft.com/office/drawing/2014/main" id="{3B50C4BE-22B3-4734-80A6-94402753205A}"/>
               </a:ext>
             </a:extLst>
           </p:cNvPr>
@@ -2409,7 +2409,7 @@
           <p:cNvPr id="14" name="">
             <a:extLst xmlns:a="http://schemas.openxmlformats.org/drawingml/2006/main">
               <a:ext uri="{FF2B5EF4-FFF2-40B4-BE49-F238E27FC236}">
-                <a16:creationId xmlns:a16="http://schemas.microsoft.com/office/drawing/2014/main" id="{CF6D39F8-8E30-4A7B-A27C-7D7F0FB2DDF3}"/>
+                <a16:creationId xmlns:a16="http://schemas.microsoft.com/office/drawing/2014/main" id="{A9F1639E-2D93-428D-B0E5-57A718B5D4FA}"/>
               </a:ext>
             </a:extLst>
           </p:cNvPr>
@@ -2467,7 +2467,7 @@
           <p:cNvPr id="15" name="">
             <a:extLst xmlns:a="http://schemas.openxmlformats.org/drawingml/2006/main">
               <a:ext uri="{FF2B5EF4-FFF2-40B4-BE49-F238E27FC236}">
-                <a16:creationId xmlns:a16="http://schemas.microsoft.com/office/drawing/2014/main" id="{23D1ECA1-4A3B-4933-8E67-DEE2C89DFC12}"/>
+                <a16:creationId xmlns:a16="http://schemas.microsoft.com/office/drawing/2014/main" id="{E7F2FC0E-0BAE-4049-A68D-886B9D2DA126}"/>
               </a:ext>
             </a:extLst>
           </p:cNvPr>
@@ -2559,7 +2559,7 @@
           <p:cNvPr id="16" name="">
             <a:extLst xmlns:a="http://schemas.openxmlformats.org/drawingml/2006/main">
               <a:ext uri="{FF2B5EF4-FFF2-40B4-BE49-F238E27FC236}">
-                <a16:creationId xmlns:a16="http://schemas.microsoft.com/office/drawing/2014/main" id="{68B60963-AF7E-4EFA-9E78-E4A760EBC0BC}"/>
+                <a16:creationId xmlns:a16="http://schemas.microsoft.com/office/drawing/2014/main" id="{E8EE93D5-D874-4DB1-9572-2C82437B741F}"/>
               </a:ext>
             </a:extLst>
           </p:cNvPr>
@@ -2594,7 +2594,7 @@
           <p:cNvPr id="17" name="">
             <a:extLst xmlns:a="http://schemas.openxmlformats.org/drawingml/2006/main">
               <a:ext uri="{FF2B5EF4-FFF2-40B4-BE49-F238E27FC236}">
-                <a16:creationId xmlns:a16="http://schemas.microsoft.com/office/drawing/2014/main" id="{0349291F-F68A-406C-8892-3D403F1ECFB9}"/>
+                <a16:creationId xmlns:a16="http://schemas.microsoft.com/office/drawing/2014/main" id="{52583037-B7FB-413A-A7E5-6A9525C12600}"/>
               </a:ext>
             </a:extLst>
           </p:cNvPr>
@@ -2629,7 +2629,7 @@
           <p:cNvPr id="18" name="">
             <a:extLst xmlns:a="http://schemas.openxmlformats.org/drawingml/2006/main">
               <a:ext uri="{FF2B5EF4-FFF2-40B4-BE49-F238E27FC236}">
-                <a16:creationId xmlns:a16="http://schemas.microsoft.com/office/drawing/2014/main" id="{B69DB356-77C1-4836-8471-65D4C515C29E}"/>
+                <a16:creationId xmlns:a16="http://schemas.microsoft.com/office/drawing/2014/main" id="{BBCF4369-41D6-4C28-8B32-91289951200E}"/>
               </a:ext>
             </a:extLst>
           </p:cNvPr>
@@ -2687,7 +2687,7 @@
           <p:cNvPr id="19" name="">
             <a:extLst xmlns:a="http://schemas.openxmlformats.org/drawingml/2006/main">
               <a:ext uri="{FF2B5EF4-FFF2-40B4-BE49-F238E27FC236}">
-                <a16:creationId xmlns:a16="http://schemas.microsoft.com/office/drawing/2014/main" id="{C46881B4-EC02-4530-9564-87FC8436E6B8}"/>
+                <a16:creationId xmlns:a16="http://schemas.microsoft.com/office/drawing/2014/main" id="{64AD5E67-AD4D-49B2-9659-6B7D7EBF5D10}"/>
               </a:ext>
             </a:extLst>
           </p:cNvPr>
@@ -2779,7 +2779,7 @@
           <p:cNvPr id="20" name="">
             <a:extLst xmlns:a="http://schemas.openxmlformats.org/drawingml/2006/main">
               <a:ext uri="{FF2B5EF4-FFF2-40B4-BE49-F238E27FC236}">
-                <a16:creationId xmlns:a16="http://schemas.microsoft.com/office/drawing/2014/main" id="{53B36C46-AC54-4F45-BD5B-D76F90691AEC}"/>
+                <a16:creationId xmlns:a16="http://schemas.microsoft.com/office/drawing/2014/main" id="{D9027573-6CA5-4DCC-BB50-A1BFC9562D78}"/>
               </a:ext>
             </a:extLst>
           </p:cNvPr>
@@ -2814,7 +2814,7 @@
           <p:cNvPr id="21" name="">
             <a:extLst xmlns:a="http://schemas.openxmlformats.org/drawingml/2006/main">
               <a:ext uri="{FF2B5EF4-FFF2-40B4-BE49-F238E27FC236}">
-                <a16:creationId xmlns:a16="http://schemas.microsoft.com/office/drawing/2014/main" id="{83263F5C-6592-4A0A-8B19-7FE5105127DE}"/>
+                <a16:creationId xmlns:a16="http://schemas.microsoft.com/office/drawing/2014/main" id="{9384C416-B1B4-470B-958E-D4700D886694}"/>
               </a:ext>
             </a:extLst>
           </p:cNvPr>
@@ -2849,7 +2849,7 @@
           <p:cNvPr id="22" name="">
             <a:extLst xmlns:a="http://schemas.openxmlformats.org/drawingml/2006/main">
               <a:ext uri="{FF2B5EF4-FFF2-40B4-BE49-F238E27FC236}">
-                <a16:creationId xmlns:a16="http://schemas.microsoft.com/office/drawing/2014/main" id="{41065DCF-27CB-4838-9438-FFF71411A4EB}"/>
+                <a16:creationId xmlns:a16="http://schemas.microsoft.com/office/drawing/2014/main" id="{E7FB824B-68CE-4700-B3BF-7644736C46D0}"/>
               </a:ext>
             </a:extLst>
           </p:cNvPr>
@@ -2907,7 +2907,7 @@
           <p:cNvPr id="23" name="">
             <a:extLst xmlns:a="http://schemas.openxmlformats.org/drawingml/2006/main">
               <a:ext uri="{FF2B5EF4-FFF2-40B4-BE49-F238E27FC236}">
-                <a16:creationId xmlns:a16="http://schemas.microsoft.com/office/drawing/2014/main" id="{A077652F-7255-4510-8C7F-9B6F25F623EE}"/>
+                <a16:creationId xmlns:a16="http://schemas.microsoft.com/office/drawing/2014/main" id="{6474B3F8-BDD4-43A4-9716-4C00B1D4188C}"/>
               </a:ext>
             </a:extLst>
           </p:cNvPr>
@@ -2965,7 +2965,7 @@
           <p:cNvPr id="24" name="">
             <a:extLst xmlns:a="http://schemas.openxmlformats.org/drawingml/2006/main">
               <a:ext uri="{FF2B5EF4-FFF2-40B4-BE49-F238E27FC236}">
-                <a16:creationId xmlns:a16="http://schemas.microsoft.com/office/drawing/2014/main" id="{3D34D839-9FCF-4C90-92B9-942FB5532B79}"/>
+                <a16:creationId xmlns:a16="http://schemas.microsoft.com/office/drawing/2014/main" id="{146AE832-1B3D-41E1-AFD3-948C8D789B0B}"/>
               </a:ext>
             </a:extLst>
           </p:cNvPr>
@@ -3021,7 +3021,7 @@
     </p:spTree>
     <p:extLst>
       <p:ext uri="{BB962C8B-B14F-4D97-AF65-F5344CB8AC3E}">
-        <p14:creationId xmlns:p14="http://schemas.microsoft.com/office/powerpoint/2010/main" val="1264645520"/>
+        <p14:creationId xmlns:p14="http://schemas.microsoft.com/office/powerpoint/2010/main" val="1302244976"/>
       </p:ext>
     </p:extLst>
   </p:cSld>
@@ -3052,7 +3052,7 @@
           <p:cNvPr id="1" name="">
             <a:extLst xmlns:a="http://schemas.openxmlformats.org/drawingml/2006/main">
               <a:ext uri="{FF2B5EF4-FFF2-40B4-BE49-F238E27FC236}">
-                <a16:creationId xmlns:a16="http://schemas.microsoft.com/office/drawing/2014/main" id="{A8FD7074-305B-41DE-A3D6-9822366633BF}"/>
+                <a16:creationId xmlns:a16="http://schemas.microsoft.com/office/drawing/2014/main" id="{F6398FEF-E5C9-4CDB-B4B4-CAA85DE56932}"/>
               </a:ext>
             </a:extLst>
           </p:cNvPr>
@@ -3087,7 +3087,7 @@
           <p:cNvPr id="2" name="">
             <a:extLst xmlns:a="http://schemas.openxmlformats.org/drawingml/2006/main">
               <a:ext uri="{FF2B5EF4-FFF2-40B4-BE49-F238E27FC236}">
-                <a16:creationId xmlns:a16="http://schemas.microsoft.com/office/drawing/2014/main" id="{84E50E21-3FCF-472C-8BBF-4AD63208518D}"/>
+                <a16:creationId xmlns:a16="http://schemas.microsoft.com/office/drawing/2014/main" id="{0C79B18D-0FC5-4A29-B752-589009974500}"/>
               </a:ext>
             </a:extLst>
           </p:cNvPr>
@@ -3122,7 +3122,7 @@
           <p:cNvPr id="3" name="">
             <a:extLst xmlns:a="http://schemas.openxmlformats.org/drawingml/2006/main">
               <a:ext uri="{FF2B5EF4-FFF2-40B4-BE49-F238E27FC236}">
-                <a16:creationId xmlns:a16="http://schemas.microsoft.com/office/drawing/2014/main" id="{8650E64A-6E5E-405C-B26D-2C1D4593688A}"/>
+                <a16:creationId xmlns:a16="http://schemas.microsoft.com/office/drawing/2014/main" id="{E642DA85-5D8A-4D34-88EA-FEA1A99210B9}"/>
               </a:ext>
             </a:extLst>
           </p:cNvPr>
@@ -3180,7 +3180,7 @@
           <p:cNvPr id="4" name="">
             <a:extLst xmlns:a="http://schemas.openxmlformats.org/drawingml/2006/main">
               <a:ext uri="{FF2B5EF4-FFF2-40B4-BE49-F238E27FC236}">
-                <a16:creationId xmlns:a16="http://schemas.microsoft.com/office/drawing/2014/main" id="{EFCA4BAE-A5D0-43E3-8F99-9E4F9DC1D7F2}"/>
+                <a16:creationId xmlns:a16="http://schemas.microsoft.com/office/drawing/2014/main" id="{B7008494-2CDD-4788-AC34-ED495B27B9AE}"/>
               </a:ext>
             </a:extLst>
           </p:cNvPr>
@@ -3238,7 +3238,7 @@
           <p:cNvPr id="5" name="">
             <a:extLst xmlns:a="http://schemas.openxmlformats.org/drawingml/2006/main">
               <a:ext uri="{FF2B5EF4-FFF2-40B4-BE49-F238E27FC236}">
-                <a16:creationId xmlns:a16="http://schemas.microsoft.com/office/drawing/2014/main" id="{06760CC0-2E34-45A9-9B80-BC6E6B638A55}"/>
+                <a16:creationId xmlns:a16="http://schemas.microsoft.com/office/drawing/2014/main" id="{3B22E774-09A7-487C-9DA7-F8F5B185D629}"/>
               </a:ext>
             </a:extLst>
           </p:cNvPr>
@@ -3273,7 +3273,7 @@
           <p:cNvPr id="6" name="">
             <a:extLst xmlns:a="http://schemas.openxmlformats.org/drawingml/2006/main">
               <a:ext uri="{FF2B5EF4-FFF2-40B4-BE49-F238E27FC236}">
-                <a16:creationId xmlns:a16="http://schemas.microsoft.com/office/drawing/2014/main" id="{33DFDBA3-0706-405D-958D-88812E086C99}"/>
+                <a16:creationId xmlns:a16="http://schemas.microsoft.com/office/drawing/2014/main" id="{781D90AE-475B-4AE6-BA55-5B500D7A2FC1}"/>
               </a:ext>
             </a:extLst>
           </p:cNvPr>
@@ -3331,7 +3331,7 @@
           <p:cNvPr id="7" name="">
             <a:extLst xmlns:a="http://schemas.openxmlformats.org/drawingml/2006/main">
               <a:ext uri="{FF2B5EF4-FFF2-40B4-BE49-F238E27FC236}">
-                <a16:creationId xmlns:a16="http://schemas.microsoft.com/office/drawing/2014/main" id="{E232DBE2-679D-4806-BEA2-9AEC17C85611}"/>
+                <a16:creationId xmlns:a16="http://schemas.microsoft.com/office/drawing/2014/main" id="{16653A5C-C552-4DFB-A059-7D99B0B56F88}"/>
               </a:ext>
             </a:extLst>
           </p:cNvPr>
@@ -3389,7 +3389,7 @@
           <p:cNvPr id="8" name="">
             <a:extLst xmlns:a="http://schemas.openxmlformats.org/drawingml/2006/main">
               <a:ext uri="{FF2B5EF4-FFF2-40B4-BE49-F238E27FC236}">
-                <a16:creationId xmlns:a16="http://schemas.microsoft.com/office/drawing/2014/main" id="{E29003B2-EB4E-4D34-8103-F72A872A2420}"/>
+                <a16:creationId xmlns:a16="http://schemas.microsoft.com/office/drawing/2014/main" id="{77972C48-DD5C-4B43-BF50-78CBE703976C}"/>
               </a:ext>
             </a:extLst>
           </p:cNvPr>
@@ -3424,7 +3424,7 @@
           <p:cNvPr id="9" name="">
             <a:extLst xmlns:a="http://schemas.openxmlformats.org/drawingml/2006/main">
               <a:ext uri="{FF2B5EF4-FFF2-40B4-BE49-F238E27FC236}">
-                <a16:creationId xmlns:a16="http://schemas.microsoft.com/office/drawing/2014/main" id="{DBAABDCD-C35F-4AF9-BFDA-D25F553E5A9D}"/>
+                <a16:creationId xmlns:a16="http://schemas.microsoft.com/office/drawing/2014/main" id="{668B47FF-09A2-4A55-AAFE-0338FC6E9384}"/>
               </a:ext>
             </a:extLst>
           </p:cNvPr>
@@ -3459,7 +3459,7 @@
           <p:cNvPr id="10" name="">
             <a:extLst xmlns:a="http://schemas.openxmlformats.org/drawingml/2006/main">
               <a:ext uri="{FF2B5EF4-FFF2-40B4-BE49-F238E27FC236}">
-                <a16:creationId xmlns:a16="http://schemas.microsoft.com/office/drawing/2014/main" id="{73B44C1F-0DD9-4FAE-8CDD-EACD70E3D763}"/>
+                <a16:creationId xmlns:a16="http://schemas.microsoft.com/office/drawing/2014/main" id="{668DBC9A-70E5-4A7A-A58D-441650EE7FC5}"/>
               </a:ext>
             </a:extLst>
           </p:cNvPr>
@@ -3517,7 +3517,7 @@
           <p:cNvPr id="11" name="">
             <a:extLst xmlns:a="http://schemas.openxmlformats.org/drawingml/2006/main">
               <a:ext uri="{FF2B5EF4-FFF2-40B4-BE49-F238E27FC236}">
-                <a16:creationId xmlns:a16="http://schemas.microsoft.com/office/drawing/2014/main" id="{CDC62E5A-2E34-4FD0-81CC-7D2020D66EFA}"/>
+                <a16:creationId xmlns:a16="http://schemas.microsoft.com/office/drawing/2014/main" id="{337F853E-355D-403D-977C-A53696E2316B}"/>
               </a:ext>
             </a:extLst>
           </p:cNvPr>
@@ -3552,7 +3552,7 @@
           <p:cNvPr id="12" name="">
             <a:extLst xmlns:a="http://schemas.openxmlformats.org/drawingml/2006/main">
               <a:ext uri="{FF2B5EF4-FFF2-40B4-BE49-F238E27FC236}">
-                <a16:creationId xmlns:a16="http://schemas.microsoft.com/office/drawing/2014/main" id="{902B7A10-18DD-46A8-9D0C-CACED517F6B4}"/>
+                <a16:creationId xmlns:a16="http://schemas.microsoft.com/office/drawing/2014/main" id="{0385BA9C-B810-452B-8E86-AEE46B4EEF9A}"/>
               </a:ext>
             </a:extLst>
           </p:cNvPr>
@@ -3644,7 +3644,7 @@
           <p:cNvPr id="13" name="">
             <a:extLst xmlns:a="http://schemas.openxmlformats.org/drawingml/2006/main">
               <a:ext uri="{FF2B5EF4-FFF2-40B4-BE49-F238E27FC236}">
-                <a16:creationId xmlns:a16="http://schemas.microsoft.com/office/drawing/2014/main" id="{DC633620-8B73-4681-B7DA-1FD8B2B91821}"/>
+                <a16:creationId xmlns:a16="http://schemas.microsoft.com/office/drawing/2014/main" id="{591ADA1E-0124-4530-A584-3B58D782EB90}"/>
               </a:ext>
             </a:extLst>
           </p:cNvPr>
@@ -3679,7 +3679,7 @@
           <p:cNvPr id="14" name="">
             <a:extLst xmlns:a="http://schemas.openxmlformats.org/drawingml/2006/main">
               <a:ext uri="{FF2B5EF4-FFF2-40B4-BE49-F238E27FC236}">
-                <a16:creationId xmlns:a16="http://schemas.microsoft.com/office/drawing/2014/main" id="{1AA48D33-826C-43EE-8592-ED95FBA79CE5}"/>
+                <a16:creationId xmlns:a16="http://schemas.microsoft.com/office/drawing/2014/main" id="{4D0C7A69-19F8-4D84-BDE0-5EF54AF7DEDE}"/>
               </a:ext>
             </a:extLst>
           </p:cNvPr>
@@ -3771,7 +3771,7 @@
           <p:cNvPr id="15" name="">
             <a:extLst xmlns:a="http://schemas.openxmlformats.org/drawingml/2006/main">
               <a:ext uri="{FF2B5EF4-FFF2-40B4-BE49-F238E27FC236}">
-                <a16:creationId xmlns:a16="http://schemas.microsoft.com/office/drawing/2014/main" id="{38914869-2877-45CB-A4A6-2C9E54713B70}"/>
+                <a16:creationId xmlns:a16="http://schemas.microsoft.com/office/drawing/2014/main" id="{4020F7C2-95D0-41F5-8F4D-79D89C70EEDC}"/>
               </a:ext>
             </a:extLst>
           </p:cNvPr>
@@ -3806,7 +3806,7 @@
           <p:cNvPr id="16" name="">
             <a:extLst xmlns:a="http://schemas.openxmlformats.org/drawingml/2006/main">
               <a:ext uri="{FF2B5EF4-FFF2-40B4-BE49-F238E27FC236}">
-                <a16:creationId xmlns:a16="http://schemas.microsoft.com/office/drawing/2014/main" id="{66332DE5-B9BA-4E3A-B057-BA8ACFB85C3B}"/>
+                <a16:creationId xmlns:a16="http://schemas.microsoft.com/office/drawing/2014/main" id="{73EEDCC2-B7CA-468B-BE50-A016DAE683E5}"/>
               </a:ext>
             </a:extLst>
           </p:cNvPr>
@@ -3841,7 +3841,7 @@
           <p:cNvPr id="17" name="">
             <a:extLst xmlns:a="http://schemas.openxmlformats.org/drawingml/2006/main">
               <a:ext uri="{FF2B5EF4-FFF2-40B4-BE49-F238E27FC236}">
-                <a16:creationId xmlns:a16="http://schemas.microsoft.com/office/drawing/2014/main" id="{B3B7EDFE-B4E7-48CF-AF49-37E26A453EE2}"/>
+                <a16:creationId xmlns:a16="http://schemas.microsoft.com/office/drawing/2014/main" id="{CBECB9DB-4457-4AE8-9E4B-A256E6652A8D}"/>
               </a:ext>
             </a:extLst>
           </p:cNvPr>
@@ -3916,7 +3916,7 @@
           <p:cNvPr id="18" name="">
             <a:extLst xmlns:a="http://schemas.openxmlformats.org/drawingml/2006/main">
               <a:ext uri="{FF2B5EF4-FFF2-40B4-BE49-F238E27FC236}">
-                <a16:creationId xmlns:a16="http://schemas.microsoft.com/office/drawing/2014/main" id="{7090FDA0-735E-48A7-AAFB-4BC8154FECCE}"/>
+                <a16:creationId xmlns:a16="http://schemas.microsoft.com/office/drawing/2014/main" id="{22792771-B1FE-40CA-BF66-D2F3740A1C0F}"/>
               </a:ext>
             </a:extLst>
           </p:cNvPr>
@@ -3951,7 +3951,7 @@
           <p:cNvPr id="19" name="">
             <a:extLst xmlns:a="http://schemas.openxmlformats.org/drawingml/2006/main">
               <a:ext uri="{FF2B5EF4-FFF2-40B4-BE49-F238E27FC236}">
-                <a16:creationId xmlns:a16="http://schemas.microsoft.com/office/drawing/2014/main" id="{FB134441-3655-480D-B11A-47DA39935F4E}"/>
+                <a16:creationId xmlns:a16="http://schemas.microsoft.com/office/drawing/2014/main" id="{678A1101-C404-43FC-87B0-6C6400328BA4}"/>
               </a:ext>
             </a:extLst>
           </p:cNvPr>
@@ -4009,7 +4009,7 @@
           <p:cNvPr id="20" name="">
             <a:extLst xmlns:a="http://schemas.openxmlformats.org/drawingml/2006/main">
               <a:ext uri="{FF2B5EF4-FFF2-40B4-BE49-F238E27FC236}">
-                <a16:creationId xmlns:a16="http://schemas.microsoft.com/office/drawing/2014/main" id="{1F5E2742-2119-43F7-B588-399BEC74969E}"/>
+                <a16:creationId xmlns:a16="http://schemas.microsoft.com/office/drawing/2014/main" id="{7E68E497-CBDB-46E2-99A5-C7C69B5442DD}"/>
               </a:ext>
             </a:extLst>
           </p:cNvPr>
@@ -4044,7 +4044,7 @@
           <p:cNvPr id="21" name="">
             <a:extLst xmlns:a="http://schemas.openxmlformats.org/drawingml/2006/main">
               <a:ext uri="{FF2B5EF4-FFF2-40B4-BE49-F238E27FC236}">
-                <a16:creationId xmlns:a16="http://schemas.microsoft.com/office/drawing/2014/main" id="{9A476852-52F8-4841-A72D-13884E2C2F83}"/>
+                <a16:creationId xmlns:a16="http://schemas.microsoft.com/office/drawing/2014/main" id="{AAFF94C3-8ADC-4426-939F-659E46CFE73F}"/>
               </a:ext>
             </a:extLst>
           </p:cNvPr>
@@ -4102,7 +4102,7 @@
           <p:cNvPr id="22" name="">
             <a:extLst xmlns:a="http://schemas.openxmlformats.org/drawingml/2006/main">
               <a:ext uri="{FF2B5EF4-FFF2-40B4-BE49-F238E27FC236}">
-                <a16:creationId xmlns:a16="http://schemas.microsoft.com/office/drawing/2014/main" id="{BABDE052-8FF8-4A84-8D07-0F1F0EC73DC7}"/>
+                <a16:creationId xmlns:a16="http://schemas.microsoft.com/office/drawing/2014/main" id="{F40F3C09-62C0-4AA2-B95C-8DC647B81DD0}"/>
               </a:ext>
             </a:extLst>
           </p:cNvPr>
@@ -4137,7 +4137,7 @@
           <p:cNvPr id="23" name="">
             <a:extLst xmlns:a="http://schemas.openxmlformats.org/drawingml/2006/main">
               <a:ext uri="{FF2B5EF4-FFF2-40B4-BE49-F238E27FC236}">
-                <a16:creationId xmlns:a16="http://schemas.microsoft.com/office/drawing/2014/main" id="{BCC58A6A-3125-4A9D-8FAB-B281A954AAD5}"/>
+                <a16:creationId xmlns:a16="http://schemas.microsoft.com/office/drawing/2014/main" id="{B76F49F9-A8A9-41B7-8506-0AE42B878ADB}"/>
               </a:ext>
             </a:extLst>
           </p:cNvPr>
@@ -4172,7 +4172,7 @@
           <p:cNvPr id="24" name="">
             <a:extLst xmlns:a="http://schemas.openxmlformats.org/drawingml/2006/main">
               <a:ext uri="{FF2B5EF4-FFF2-40B4-BE49-F238E27FC236}">
-                <a16:creationId xmlns:a16="http://schemas.microsoft.com/office/drawing/2014/main" id="{5570E41F-7A5D-48AA-AB6A-7ED81FF3EE75}"/>
+                <a16:creationId xmlns:a16="http://schemas.microsoft.com/office/drawing/2014/main" id="{E6A8045A-3159-4C9D-95B4-D3F85FC6235F}"/>
               </a:ext>
             </a:extLst>
           </p:cNvPr>
@@ -4230,7 +4230,7 @@
           <p:cNvPr id="25" name="">
             <a:extLst xmlns:a="http://schemas.openxmlformats.org/drawingml/2006/main">
               <a:ext uri="{FF2B5EF4-FFF2-40B4-BE49-F238E27FC236}">
-                <a16:creationId xmlns:a16="http://schemas.microsoft.com/office/drawing/2014/main" id="{97E8EE44-DA04-4403-A1BD-D7B5F36F0016}"/>
+                <a16:creationId xmlns:a16="http://schemas.microsoft.com/office/drawing/2014/main" id="{0C50538E-A063-4D69-86EA-3BF6AAB9BE5E}"/>
               </a:ext>
             </a:extLst>
           </p:cNvPr>
@@ -4265,7 +4265,7 @@
           <p:cNvPr id="26" name="">
             <a:extLst xmlns:a="http://schemas.openxmlformats.org/drawingml/2006/main">
               <a:ext uri="{FF2B5EF4-FFF2-40B4-BE49-F238E27FC236}">
-                <a16:creationId xmlns:a16="http://schemas.microsoft.com/office/drawing/2014/main" id="{439C3C98-47B2-436D-94F0-5E9128B28D32}"/>
+                <a16:creationId xmlns:a16="http://schemas.microsoft.com/office/drawing/2014/main" id="{82D9BD5A-9A8A-46A4-BF24-D622F87DF78C}"/>
               </a:ext>
             </a:extLst>
           </p:cNvPr>
@@ -4323,7 +4323,7 @@
           <p:cNvPr id="27" name="">
             <a:extLst xmlns:a="http://schemas.openxmlformats.org/drawingml/2006/main">
               <a:ext uri="{FF2B5EF4-FFF2-40B4-BE49-F238E27FC236}">
-                <a16:creationId xmlns:a16="http://schemas.microsoft.com/office/drawing/2014/main" id="{765FEA43-6CDD-4C14-A432-E0CDDEFD7A3A}"/>
+                <a16:creationId xmlns:a16="http://schemas.microsoft.com/office/drawing/2014/main" id="{247E76C6-71A9-4516-B851-F1934A2CBC21}"/>
               </a:ext>
             </a:extLst>
           </p:cNvPr>
@@ -4358,7 +4358,7 @@
           <p:cNvPr id="28" name="">
             <a:extLst xmlns:a="http://schemas.openxmlformats.org/drawingml/2006/main">
               <a:ext uri="{FF2B5EF4-FFF2-40B4-BE49-F238E27FC236}">
-                <a16:creationId xmlns:a16="http://schemas.microsoft.com/office/drawing/2014/main" id="{E923D796-E8DE-4C1B-B158-4C6079510789}"/>
+                <a16:creationId xmlns:a16="http://schemas.microsoft.com/office/drawing/2014/main" id="{7305FE8E-B83D-48ED-B029-86606754D888}"/>
               </a:ext>
             </a:extLst>
           </p:cNvPr>
@@ -4433,7 +4433,7 @@
           <p:cNvPr id="29" name="">
             <a:extLst xmlns:a="http://schemas.openxmlformats.org/drawingml/2006/main">
               <a:ext uri="{FF2B5EF4-FFF2-40B4-BE49-F238E27FC236}">
-                <a16:creationId xmlns:a16="http://schemas.microsoft.com/office/drawing/2014/main" id="{44FD8905-640E-47AB-AD7E-98FF527A31B3}"/>
+                <a16:creationId xmlns:a16="http://schemas.microsoft.com/office/drawing/2014/main" id="{DE343F34-E629-45BD-B1AD-2222727DE5A9}"/>
               </a:ext>
             </a:extLst>
           </p:cNvPr>
@@ -4468,7 +4468,7 @@
           <p:cNvPr id="30" name="">
             <a:extLst xmlns:a="http://schemas.openxmlformats.org/drawingml/2006/main">
               <a:ext uri="{FF2B5EF4-FFF2-40B4-BE49-F238E27FC236}">
-                <a16:creationId xmlns:a16="http://schemas.microsoft.com/office/drawing/2014/main" id="{257D4E40-D6F8-47A2-9B62-DEAD0441C245}"/>
+                <a16:creationId xmlns:a16="http://schemas.microsoft.com/office/drawing/2014/main" id="{D9D9B761-B5A9-4D79-955C-DE32B76DFE56}"/>
               </a:ext>
             </a:extLst>
           </p:cNvPr>
@@ -4503,7 +4503,7 @@
           <p:cNvPr id="31" name="">
             <a:extLst xmlns:a="http://schemas.openxmlformats.org/drawingml/2006/main">
               <a:ext uri="{FF2B5EF4-FFF2-40B4-BE49-F238E27FC236}">
-                <a16:creationId xmlns:a16="http://schemas.microsoft.com/office/drawing/2014/main" id="{DED7FB94-8650-48AB-AF56-B4DA3E8ED921}"/>
+                <a16:creationId xmlns:a16="http://schemas.microsoft.com/office/drawing/2014/main" id="{3E1286F3-1489-4F2C-8E16-47412C6FB83B}"/>
               </a:ext>
             </a:extLst>
           </p:cNvPr>
@@ -4561,7 +4561,7 @@
           <p:cNvPr id="32" name="">
             <a:extLst xmlns:a="http://schemas.openxmlformats.org/drawingml/2006/main">
               <a:ext uri="{FF2B5EF4-FFF2-40B4-BE49-F238E27FC236}">
-                <a16:creationId xmlns:a16="http://schemas.microsoft.com/office/drawing/2014/main" id="{95FFB10B-5733-4AE5-8264-B5BD99C590F3}"/>
+                <a16:creationId xmlns:a16="http://schemas.microsoft.com/office/drawing/2014/main" id="{B130FBF7-44AA-47A6-BFD0-9084A5A9CE74}"/>
               </a:ext>
             </a:extLst>
           </p:cNvPr>
@@ -4596,7 +4596,7 @@
           <p:cNvPr id="33" name="">
             <a:extLst xmlns:a="http://schemas.openxmlformats.org/drawingml/2006/main">
               <a:ext uri="{FF2B5EF4-FFF2-40B4-BE49-F238E27FC236}">
-                <a16:creationId xmlns:a16="http://schemas.microsoft.com/office/drawing/2014/main" id="{66B81543-E66A-4483-95E9-19A8D5E98DC7}"/>
+                <a16:creationId xmlns:a16="http://schemas.microsoft.com/office/drawing/2014/main" id="{53005241-3957-475D-9546-5B762341127E}"/>
               </a:ext>
             </a:extLst>
           </p:cNvPr>
@@ -4654,7 +4654,7 @@
           <p:cNvPr id="34" name="">
             <a:extLst xmlns:a="http://schemas.openxmlformats.org/drawingml/2006/main">
               <a:ext uri="{FF2B5EF4-FFF2-40B4-BE49-F238E27FC236}">
-                <a16:creationId xmlns:a16="http://schemas.microsoft.com/office/drawing/2014/main" id="{3A28B1D1-CCC4-4744-AE80-B054DCD1414D}"/>
+                <a16:creationId xmlns:a16="http://schemas.microsoft.com/office/drawing/2014/main" id="{06A3CCF9-F5FF-4462-89CD-A7410AFAE8D7}"/>
               </a:ext>
             </a:extLst>
           </p:cNvPr>
@@ -4689,7 +4689,7 @@
           <p:cNvPr id="35" name="">
             <a:extLst xmlns:a="http://schemas.openxmlformats.org/drawingml/2006/main">
               <a:ext uri="{FF2B5EF4-FFF2-40B4-BE49-F238E27FC236}">
-                <a16:creationId xmlns:a16="http://schemas.microsoft.com/office/drawing/2014/main" id="{FD52DFA5-CE29-43DE-8FFC-189EAEAFEDFC}"/>
+                <a16:creationId xmlns:a16="http://schemas.microsoft.com/office/drawing/2014/main" id="{9F2AC842-A6C1-4550-B17F-9320AC248187}"/>
               </a:ext>
             </a:extLst>
           </p:cNvPr>
@@ -4747,7 +4747,7 @@
           <p:cNvPr id="36" name="">
             <a:extLst xmlns:a="http://schemas.openxmlformats.org/drawingml/2006/main">
               <a:ext uri="{FF2B5EF4-FFF2-40B4-BE49-F238E27FC236}">
-                <a16:creationId xmlns:a16="http://schemas.microsoft.com/office/drawing/2014/main" id="{745EDE78-99C5-41AC-849D-01320509CEBF}"/>
+                <a16:creationId xmlns:a16="http://schemas.microsoft.com/office/drawing/2014/main" id="{4EE599B9-F5E8-4431-A06A-59F79F31767D}"/>
               </a:ext>
             </a:extLst>
           </p:cNvPr>
@@ -4782,7 +4782,7 @@
           <p:cNvPr id="37" name="">
             <a:extLst xmlns:a="http://schemas.openxmlformats.org/drawingml/2006/main">
               <a:ext uri="{FF2B5EF4-FFF2-40B4-BE49-F238E27FC236}">
-                <a16:creationId xmlns:a16="http://schemas.microsoft.com/office/drawing/2014/main" id="{8147615B-F0E2-47EE-A9A2-C6D750FCCAB5}"/>
+                <a16:creationId xmlns:a16="http://schemas.microsoft.com/office/drawing/2014/main" id="{99E9008C-FAF4-4EC1-8FF0-927806B35DF5}"/>
               </a:ext>
             </a:extLst>
           </p:cNvPr>
@@ -4817,7 +4817,7 @@
           <p:cNvPr id="38" name="">
             <a:extLst xmlns:a="http://schemas.openxmlformats.org/drawingml/2006/main">
               <a:ext uri="{FF2B5EF4-FFF2-40B4-BE49-F238E27FC236}">
-                <a16:creationId xmlns:a16="http://schemas.microsoft.com/office/drawing/2014/main" id="{8D6E080A-10F1-4A6A-BA6C-1DA8E119B5A5}"/>
+                <a16:creationId xmlns:a16="http://schemas.microsoft.com/office/drawing/2014/main" id="{FAB72082-262D-440B-B230-DDE43766D2CC}"/>
               </a:ext>
             </a:extLst>
           </p:cNvPr>
@@ -4892,7 +4892,7 @@
           <p:cNvPr id="39" name="">
             <a:extLst xmlns:a="http://schemas.openxmlformats.org/drawingml/2006/main">
               <a:ext uri="{FF2B5EF4-FFF2-40B4-BE49-F238E27FC236}">
-                <a16:creationId xmlns:a16="http://schemas.microsoft.com/office/drawing/2014/main" id="{C82A6117-47C2-427B-B9D1-772C637DFD39}"/>
+                <a16:creationId xmlns:a16="http://schemas.microsoft.com/office/drawing/2014/main" id="{03AF8215-FB58-4F90-AB84-F832723E09B5}"/>
               </a:ext>
             </a:extLst>
           </p:cNvPr>
@@ -4927,7 +4927,7 @@
           <p:cNvPr id="40" name="">
             <a:extLst xmlns:a="http://schemas.openxmlformats.org/drawingml/2006/main">
               <a:ext uri="{FF2B5EF4-FFF2-40B4-BE49-F238E27FC236}">
-                <a16:creationId xmlns:a16="http://schemas.microsoft.com/office/drawing/2014/main" id="{84B141BA-0D50-4816-B1AE-87C9D9995BFF}"/>
+                <a16:creationId xmlns:a16="http://schemas.microsoft.com/office/drawing/2014/main" id="{5F910DEE-6F5B-4D9E-B684-28827558E96A}"/>
               </a:ext>
             </a:extLst>
           </p:cNvPr>
@@ -5002,7 +5002,7 @@
           <p:cNvPr id="41" name="">
             <a:extLst xmlns:a="http://schemas.openxmlformats.org/drawingml/2006/main">
               <a:ext uri="{FF2B5EF4-FFF2-40B4-BE49-F238E27FC236}">
-                <a16:creationId xmlns:a16="http://schemas.microsoft.com/office/drawing/2014/main" id="{40416A6C-A060-4D49-966B-8CFCDDD497A3}"/>
+                <a16:creationId xmlns:a16="http://schemas.microsoft.com/office/drawing/2014/main" id="{0F4CEA55-F2DF-4328-B3E6-04E1959A81E5}"/>
               </a:ext>
             </a:extLst>
           </p:cNvPr>
@@ -5037,7 +5037,7 @@
           <p:cNvPr id="42" name="">
             <a:extLst xmlns:a="http://schemas.openxmlformats.org/drawingml/2006/main">
               <a:ext uri="{FF2B5EF4-FFF2-40B4-BE49-F238E27FC236}">
-                <a16:creationId xmlns:a16="http://schemas.microsoft.com/office/drawing/2014/main" id="{83A82B8F-A4CA-400B-92DE-3BADEB8454E7}"/>
+                <a16:creationId xmlns:a16="http://schemas.microsoft.com/office/drawing/2014/main" id="{7AD5C03B-E080-424A-8E26-11F2766A1EDF}"/>
               </a:ext>
             </a:extLst>
           </p:cNvPr>
@@ -5095,7 +5095,7 @@
           <p:cNvPr id="43" name="">
             <a:extLst xmlns:a="http://schemas.openxmlformats.org/drawingml/2006/main">
               <a:ext uri="{FF2B5EF4-FFF2-40B4-BE49-F238E27FC236}">
-                <a16:creationId xmlns:a16="http://schemas.microsoft.com/office/drawing/2014/main" id="{BC90A189-8D63-4843-84C7-8A5B7CA519A5}"/>
+                <a16:creationId xmlns:a16="http://schemas.microsoft.com/office/drawing/2014/main" id="{FDF5F9A4-218E-48D7-9857-CDB429B9B08B}"/>
               </a:ext>
             </a:extLst>
           </p:cNvPr>
@@ -5130,7 +5130,7 @@
           <p:cNvPr id="44" name="">
             <a:extLst xmlns:a="http://schemas.openxmlformats.org/drawingml/2006/main">
               <a:ext uri="{FF2B5EF4-FFF2-40B4-BE49-F238E27FC236}">
-                <a16:creationId xmlns:a16="http://schemas.microsoft.com/office/drawing/2014/main" id="{63B8E077-BF67-4D09-8A8C-775220874579}"/>
+                <a16:creationId xmlns:a16="http://schemas.microsoft.com/office/drawing/2014/main" id="{31E383B4-E9CE-488B-B3D2-E73F39388277}"/>
               </a:ext>
             </a:extLst>
           </p:cNvPr>
@@ -5165,7 +5165,7 @@
           <p:cNvPr id="45" name="">
             <a:extLst xmlns:a="http://schemas.openxmlformats.org/drawingml/2006/main">
               <a:ext uri="{FF2B5EF4-FFF2-40B4-BE49-F238E27FC236}">
-                <a16:creationId xmlns:a16="http://schemas.microsoft.com/office/drawing/2014/main" id="{122476C1-F08B-4129-B5E3-B7F68343F913}"/>
+                <a16:creationId xmlns:a16="http://schemas.microsoft.com/office/drawing/2014/main" id="{E4A1A79B-2E47-469A-A05F-0A20020CDB51}"/>
               </a:ext>
             </a:extLst>
           </p:cNvPr>
@@ -5240,7 +5240,7 @@
           <p:cNvPr id="46" name="">
             <a:extLst xmlns:a="http://schemas.openxmlformats.org/drawingml/2006/main">
               <a:ext uri="{FF2B5EF4-FFF2-40B4-BE49-F238E27FC236}">
-                <a16:creationId xmlns:a16="http://schemas.microsoft.com/office/drawing/2014/main" id="{0ADAF99C-7CA3-43CF-8F72-F0A517572876}"/>
+                <a16:creationId xmlns:a16="http://schemas.microsoft.com/office/drawing/2014/main" id="{FEF7BBCC-F69C-46E1-8BB9-FD8232E2A6EE}"/>
               </a:ext>
             </a:extLst>
           </p:cNvPr>
@@ -5275,7 +5275,7 @@
           <p:cNvPr id="47" name="">
             <a:extLst xmlns:a="http://schemas.openxmlformats.org/drawingml/2006/main">
               <a:ext uri="{FF2B5EF4-FFF2-40B4-BE49-F238E27FC236}">
-                <a16:creationId xmlns:a16="http://schemas.microsoft.com/office/drawing/2014/main" id="{A95A8BCF-DD37-4CBE-A33F-1DAA470FDD94}"/>
+                <a16:creationId xmlns:a16="http://schemas.microsoft.com/office/drawing/2014/main" id="{6420A945-087C-4783-A3BA-D3B5516F0022}"/>
               </a:ext>
             </a:extLst>
           </p:cNvPr>
@@ -5350,7 +5350,7 @@
           <p:cNvPr id="48" name="">
             <a:extLst xmlns:a="http://schemas.openxmlformats.org/drawingml/2006/main">
               <a:ext uri="{FF2B5EF4-FFF2-40B4-BE49-F238E27FC236}">
-                <a16:creationId xmlns:a16="http://schemas.microsoft.com/office/drawing/2014/main" id="{313EB254-8ABD-46CD-BDF1-16DB4AFB5297}"/>
+                <a16:creationId xmlns:a16="http://schemas.microsoft.com/office/drawing/2014/main" id="{3739DE25-8D88-4FC6-A7A0-06A9B02C026E}"/>
               </a:ext>
             </a:extLst>
           </p:cNvPr>
@@ -5385,7 +5385,7 @@
           <p:cNvPr id="49" name="">
             <a:extLst xmlns:a="http://schemas.openxmlformats.org/drawingml/2006/main">
               <a:ext uri="{FF2B5EF4-FFF2-40B4-BE49-F238E27FC236}">
-                <a16:creationId xmlns:a16="http://schemas.microsoft.com/office/drawing/2014/main" id="{09F434B7-D3B5-4BB3-A947-090154FC099A}"/>
+                <a16:creationId xmlns:a16="http://schemas.microsoft.com/office/drawing/2014/main" id="{EF4C8EE8-496C-4B93-A4CE-81E79FCCCDE4}"/>
               </a:ext>
             </a:extLst>
           </p:cNvPr>
@@ -5443,7 +5443,7 @@
           <p:cNvPr id="50" name="">
             <a:extLst xmlns:a="http://schemas.openxmlformats.org/drawingml/2006/main">
               <a:ext uri="{FF2B5EF4-FFF2-40B4-BE49-F238E27FC236}">
-                <a16:creationId xmlns:a16="http://schemas.microsoft.com/office/drawing/2014/main" id="{4919C992-A318-4F26-8DE7-1DB6694E0A2A}"/>
+                <a16:creationId xmlns:a16="http://schemas.microsoft.com/office/drawing/2014/main" id="{DB9A68B2-2B56-4753-913F-D91F6923990E}"/>
               </a:ext>
             </a:extLst>
           </p:cNvPr>
@@ -5478,7 +5478,7 @@
           <p:cNvPr id="51" name="">
             <a:extLst xmlns:a="http://schemas.openxmlformats.org/drawingml/2006/main">
               <a:ext uri="{FF2B5EF4-FFF2-40B4-BE49-F238E27FC236}">
-                <a16:creationId xmlns:a16="http://schemas.microsoft.com/office/drawing/2014/main" id="{4019F6C1-9F67-4BFC-BB52-6FA064B32676}"/>
+                <a16:creationId xmlns:a16="http://schemas.microsoft.com/office/drawing/2014/main" id="{18C35CC0-A03D-495B-A234-C462B857CDA3}"/>
               </a:ext>
             </a:extLst>
           </p:cNvPr>
@@ -5513,7 +5513,7 @@
           <p:cNvPr id="52" name="">
             <a:extLst xmlns:a="http://schemas.openxmlformats.org/drawingml/2006/main">
               <a:ext uri="{FF2B5EF4-FFF2-40B4-BE49-F238E27FC236}">
-                <a16:creationId xmlns:a16="http://schemas.microsoft.com/office/drawing/2014/main" id="{23C932BD-B516-475E-9FF9-A51A0664E04B}"/>
+                <a16:creationId xmlns:a16="http://schemas.microsoft.com/office/drawing/2014/main" id="{55294335-62B0-43FA-A225-E609BF921124}"/>
               </a:ext>
             </a:extLst>
           </p:cNvPr>
@@ -5571,7 +5571,7 @@
           <p:cNvPr id="53" name="">
             <a:extLst xmlns:a="http://schemas.openxmlformats.org/drawingml/2006/main">
               <a:ext uri="{FF2B5EF4-FFF2-40B4-BE49-F238E27FC236}">
-                <a16:creationId xmlns:a16="http://schemas.microsoft.com/office/drawing/2014/main" id="{EA48C098-D3F5-44A2-907D-BB0677C7F2A5}"/>
+                <a16:creationId xmlns:a16="http://schemas.microsoft.com/office/drawing/2014/main" id="{72B7C2A6-2308-42B3-8158-90835120CE17}"/>
               </a:ext>
             </a:extLst>
           </p:cNvPr>
@@ -5606,7 +5606,7 @@
           <p:cNvPr id="54" name="">
             <a:extLst xmlns:a="http://schemas.openxmlformats.org/drawingml/2006/main">
               <a:ext uri="{FF2B5EF4-FFF2-40B4-BE49-F238E27FC236}">
-                <a16:creationId xmlns:a16="http://schemas.microsoft.com/office/drawing/2014/main" id="{C9D3F043-FD70-463F-8EAD-02D1491F5133}"/>
+                <a16:creationId xmlns:a16="http://schemas.microsoft.com/office/drawing/2014/main" id="{235F00B8-334F-45B9-BFFB-8A92F239C479}"/>
               </a:ext>
             </a:extLst>
           </p:cNvPr>
@@ -5681,7 +5681,7 @@
           <p:cNvPr id="55" name="">
             <a:extLst xmlns:a="http://schemas.openxmlformats.org/drawingml/2006/main">
               <a:ext uri="{FF2B5EF4-FFF2-40B4-BE49-F238E27FC236}">
-                <a16:creationId xmlns:a16="http://schemas.microsoft.com/office/drawing/2014/main" id="{2BE7279E-118E-41B2-A5B0-ADF542C11B59}"/>
+                <a16:creationId xmlns:a16="http://schemas.microsoft.com/office/drawing/2014/main" id="{78FB72A8-E90E-4E5C-A6D5-52DCAF37EC02}"/>
               </a:ext>
             </a:extLst>
           </p:cNvPr>
@@ -5716,7 +5716,7 @@
           <p:cNvPr id="56" name="">
             <a:extLst xmlns:a="http://schemas.openxmlformats.org/drawingml/2006/main">
               <a:ext uri="{FF2B5EF4-FFF2-40B4-BE49-F238E27FC236}">
-                <a16:creationId xmlns:a16="http://schemas.microsoft.com/office/drawing/2014/main" id="{E195ADB7-4756-40E4-84C6-39D2CEEAE455}"/>
+                <a16:creationId xmlns:a16="http://schemas.microsoft.com/office/drawing/2014/main" id="{440A0214-0BAF-436E-ADEB-C478D6E591B7}"/>
               </a:ext>
             </a:extLst>
           </p:cNvPr>
@@ -5791,7 +5791,7 @@
           <p:cNvPr id="57" name="">
             <a:extLst xmlns:a="http://schemas.openxmlformats.org/drawingml/2006/main">
               <a:ext uri="{FF2B5EF4-FFF2-40B4-BE49-F238E27FC236}">
-                <a16:creationId xmlns:a16="http://schemas.microsoft.com/office/drawing/2014/main" id="{B9460ADA-935E-4666-BEE9-6ED74235B244}"/>
+                <a16:creationId xmlns:a16="http://schemas.microsoft.com/office/drawing/2014/main" id="{E7A3C241-05DF-4436-A11D-D58E1A951A1D}"/>
               </a:ext>
             </a:extLst>
           </p:cNvPr>
@@ -5826,7 +5826,7 @@
           <p:cNvPr id="58" name="">
             <a:extLst xmlns:a="http://schemas.openxmlformats.org/drawingml/2006/main">
               <a:ext uri="{FF2B5EF4-FFF2-40B4-BE49-F238E27FC236}">
-                <a16:creationId xmlns:a16="http://schemas.microsoft.com/office/drawing/2014/main" id="{1E88A0DD-4503-495B-8A7F-7C9D03B99053}"/>
+                <a16:creationId xmlns:a16="http://schemas.microsoft.com/office/drawing/2014/main" id="{03718041-B2EB-475C-B94D-620126A9F882}"/>
               </a:ext>
             </a:extLst>
           </p:cNvPr>
@@ -5861,7 +5861,7 @@
           <p:cNvPr id="59" name="">
             <a:extLst xmlns:a="http://schemas.openxmlformats.org/drawingml/2006/main">
               <a:ext uri="{FF2B5EF4-FFF2-40B4-BE49-F238E27FC236}">
-                <a16:creationId xmlns:a16="http://schemas.microsoft.com/office/drawing/2014/main" id="{B7D17363-A531-4117-B44E-B52AE1C73374}"/>
+                <a16:creationId xmlns:a16="http://schemas.microsoft.com/office/drawing/2014/main" id="{EA7D4AC4-4E73-4411-81C8-97AE8E09E907}"/>
               </a:ext>
             </a:extLst>
           </p:cNvPr>
@@ -5919,7 +5919,7 @@
           <p:cNvPr id="60" name="">
             <a:extLst xmlns:a="http://schemas.openxmlformats.org/drawingml/2006/main">
               <a:ext uri="{FF2B5EF4-FFF2-40B4-BE49-F238E27FC236}">
-                <a16:creationId xmlns:a16="http://schemas.microsoft.com/office/drawing/2014/main" id="{700B2A19-B0FB-487A-9DF6-F209497FFD3A}"/>
+                <a16:creationId xmlns:a16="http://schemas.microsoft.com/office/drawing/2014/main" id="{64A4476A-90BB-44E2-B663-9D96BEFE2208}"/>
               </a:ext>
             </a:extLst>
           </p:cNvPr>
@@ -5954,7 +5954,7 @@
           <p:cNvPr id="61" name="">
             <a:extLst xmlns:a="http://schemas.openxmlformats.org/drawingml/2006/main">
               <a:ext uri="{FF2B5EF4-FFF2-40B4-BE49-F238E27FC236}">
-                <a16:creationId xmlns:a16="http://schemas.microsoft.com/office/drawing/2014/main" id="{D73A3C09-9A85-4EEE-9189-17A7C0A13938}"/>
+                <a16:creationId xmlns:a16="http://schemas.microsoft.com/office/drawing/2014/main" id="{F648545B-3D11-4FCF-A6DD-F081ED5FAA38}"/>
               </a:ext>
             </a:extLst>
           </p:cNvPr>
@@ -6063,7 +6063,7 @@
           <p:cNvPr id="62" name="">
             <a:extLst xmlns:a="http://schemas.openxmlformats.org/drawingml/2006/main">
               <a:ext uri="{FF2B5EF4-FFF2-40B4-BE49-F238E27FC236}">
-                <a16:creationId xmlns:a16="http://schemas.microsoft.com/office/drawing/2014/main" id="{B58EAB33-FAB9-41A3-BFAE-50FCECBFFA3C}"/>
+                <a16:creationId xmlns:a16="http://schemas.microsoft.com/office/drawing/2014/main" id="{D1B97E7C-E0E7-48C5-A7F0-D6BC4DB869DB}"/>
               </a:ext>
             </a:extLst>
           </p:cNvPr>
@@ -6098,7 +6098,7 @@
           <p:cNvPr id="63" name="">
             <a:extLst xmlns:a="http://schemas.openxmlformats.org/drawingml/2006/main">
               <a:ext uri="{FF2B5EF4-FFF2-40B4-BE49-F238E27FC236}">
-                <a16:creationId xmlns:a16="http://schemas.microsoft.com/office/drawing/2014/main" id="{ADD70AA0-2101-48D1-9FB6-552A768C5440}"/>
+                <a16:creationId xmlns:a16="http://schemas.microsoft.com/office/drawing/2014/main" id="{AA42BCFE-6E1B-4E6C-A49C-DB671FF3FFBB}"/>
               </a:ext>
             </a:extLst>
           </p:cNvPr>
@@ -6156,7 +6156,7 @@
           <p:cNvPr id="64" name="">
             <a:extLst xmlns:a="http://schemas.openxmlformats.org/drawingml/2006/main">
               <a:ext uri="{FF2B5EF4-FFF2-40B4-BE49-F238E27FC236}">
-                <a16:creationId xmlns:a16="http://schemas.microsoft.com/office/drawing/2014/main" id="{54B1C530-27B2-458D-BC1D-6579EB5B8B60}"/>
+                <a16:creationId xmlns:a16="http://schemas.microsoft.com/office/drawing/2014/main" id="{94A90F7C-7BBD-45E9-8476-3AC92C969AB4}"/>
               </a:ext>
             </a:extLst>
           </p:cNvPr>
@@ -6191,7 +6191,7 @@
           <p:cNvPr id="65" name="">
             <a:extLst xmlns:a="http://schemas.openxmlformats.org/drawingml/2006/main">
               <a:ext uri="{FF2B5EF4-FFF2-40B4-BE49-F238E27FC236}">
-                <a16:creationId xmlns:a16="http://schemas.microsoft.com/office/drawing/2014/main" id="{F7DC731C-42DA-4CA4-9B88-FF8D3B108BED}"/>
+                <a16:creationId xmlns:a16="http://schemas.microsoft.com/office/drawing/2014/main" id="{1B00C069-2E0C-4F69-ABA3-8749234D826B}"/>
               </a:ext>
             </a:extLst>
           </p:cNvPr>
@@ -6226,7 +6226,7 @@
           <p:cNvPr id="66" name="">
             <a:extLst xmlns:a="http://schemas.openxmlformats.org/drawingml/2006/main">
               <a:ext uri="{FF2B5EF4-FFF2-40B4-BE49-F238E27FC236}">
-                <a16:creationId xmlns:a16="http://schemas.microsoft.com/office/drawing/2014/main" id="{AD5826C5-DF40-41D3-B2DF-0F455F0457CC}"/>
+                <a16:creationId xmlns:a16="http://schemas.microsoft.com/office/drawing/2014/main" id="{96FA34F4-04C8-4723-83F8-35F7815F6171}"/>
               </a:ext>
             </a:extLst>
           </p:cNvPr>
@@ -6284,7 +6284,7 @@
           <p:cNvPr id="67" name="">
             <a:extLst xmlns:a="http://schemas.openxmlformats.org/drawingml/2006/main">
               <a:ext uri="{FF2B5EF4-FFF2-40B4-BE49-F238E27FC236}">
-                <a16:creationId xmlns:a16="http://schemas.microsoft.com/office/drawing/2014/main" id="{98E9E69B-AE63-453D-8B7B-EFD70E93E19F}"/>
+                <a16:creationId xmlns:a16="http://schemas.microsoft.com/office/drawing/2014/main" id="{49C31255-06E0-43B8-BA9F-704C85DA5F14}"/>
               </a:ext>
             </a:extLst>
           </p:cNvPr>
@@ -6319,7 +6319,7 @@
           <p:cNvPr id="68" name="">
             <a:extLst xmlns:a="http://schemas.openxmlformats.org/drawingml/2006/main">
               <a:ext uri="{FF2B5EF4-FFF2-40B4-BE49-F238E27FC236}">
-                <a16:creationId xmlns:a16="http://schemas.microsoft.com/office/drawing/2014/main" id="{9474B4A7-FCCB-4918-92DE-7799EB4CEAE3}"/>
+                <a16:creationId xmlns:a16="http://schemas.microsoft.com/office/drawing/2014/main" id="{CE0432EF-B188-4618-8E76-F3E3ABBB438E}"/>
               </a:ext>
             </a:extLst>
           </p:cNvPr>
@@ -6411,7 +6411,7 @@
           <p:cNvPr id="69" name="">
             <a:extLst xmlns:a="http://schemas.openxmlformats.org/drawingml/2006/main">
               <a:ext uri="{FF2B5EF4-FFF2-40B4-BE49-F238E27FC236}">
-                <a16:creationId xmlns:a16="http://schemas.microsoft.com/office/drawing/2014/main" id="{B74D7E4C-B654-4DBA-803E-95EA439A3AD0}"/>
+                <a16:creationId xmlns:a16="http://schemas.microsoft.com/office/drawing/2014/main" id="{099BAC7A-A0AE-4A0D-A91B-C0ADC6769489}"/>
               </a:ext>
             </a:extLst>
           </p:cNvPr>
@@ -6446,7 +6446,7 @@
           <p:cNvPr id="70" name="">
             <a:extLst xmlns:a="http://schemas.openxmlformats.org/drawingml/2006/main">
               <a:ext uri="{FF2B5EF4-FFF2-40B4-BE49-F238E27FC236}">
-                <a16:creationId xmlns:a16="http://schemas.microsoft.com/office/drawing/2014/main" id="{9CED0B12-FC80-4C98-BB4A-26E78EC5BF61}"/>
+                <a16:creationId xmlns:a16="http://schemas.microsoft.com/office/drawing/2014/main" id="{4992E80E-91FC-46DD-8AE0-5DC60BF574C5}"/>
               </a:ext>
             </a:extLst>
           </p:cNvPr>
@@ -6504,7 +6504,7 @@
           <p:cNvPr id="71" name="">
             <a:extLst xmlns:a="http://schemas.openxmlformats.org/drawingml/2006/main">
               <a:ext uri="{FF2B5EF4-FFF2-40B4-BE49-F238E27FC236}">
-                <a16:creationId xmlns:a16="http://schemas.microsoft.com/office/drawing/2014/main" id="{BA1C20B6-F067-48CB-A09A-3D0A9EF3218B}"/>
+                <a16:creationId xmlns:a16="http://schemas.microsoft.com/office/drawing/2014/main" id="{60BE35F5-3B00-499B-9E7D-18D1A1F7677A}"/>
               </a:ext>
             </a:extLst>
           </p:cNvPr>
@@ -6537,7 +6537,7 @@
           <p:cNvPr id="72" name="">
             <a:extLst xmlns:a="http://schemas.openxmlformats.org/drawingml/2006/main">
               <a:ext uri="{FF2B5EF4-FFF2-40B4-BE49-F238E27FC236}">
-                <a16:creationId xmlns:a16="http://schemas.microsoft.com/office/drawing/2014/main" id="{B0CE0168-56BE-494E-B696-50BDC1143C67}"/>
+                <a16:creationId xmlns:a16="http://schemas.microsoft.com/office/drawing/2014/main" id="{C132B692-E2F9-4D9C-83F2-27307D8CA192}"/>
               </a:ext>
             </a:extLst>
           </p:cNvPr>
@@ -6595,7 +6595,7 @@
           <p:cNvPr id="73" name="">
             <a:extLst xmlns:a="http://schemas.openxmlformats.org/drawingml/2006/main">
               <a:ext uri="{FF2B5EF4-FFF2-40B4-BE49-F238E27FC236}">
-                <a16:creationId xmlns:a16="http://schemas.microsoft.com/office/drawing/2014/main" id="{6E947271-8BDF-44F3-8BD1-EAD162A82D72}"/>
+                <a16:creationId xmlns:a16="http://schemas.microsoft.com/office/drawing/2014/main" id="{485DBCBA-227C-4E9F-95FD-A785C17C6EDD}"/>
               </a:ext>
             </a:extLst>
           </p:cNvPr>
@@ -6628,7 +6628,7 @@
           <p:cNvPr id="74" name="">
             <a:extLst xmlns:a="http://schemas.openxmlformats.org/drawingml/2006/main">
               <a:ext uri="{FF2B5EF4-FFF2-40B4-BE49-F238E27FC236}">
-                <a16:creationId xmlns:a16="http://schemas.microsoft.com/office/drawing/2014/main" id="{647EF2A3-0A44-4502-95DE-C01DBA948C87}"/>
+                <a16:creationId xmlns:a16="http://schemas.microsoft.com/office/drawing/2014/main" id="{0404CE21-239B-41B7-98AC-B7149B7F0D90}"/>
               </a:ext>
             </a:extLst>
           </p:cNvPr>
@@ -6686,7 +6686,7 @@
           <p:cNvPr id="75" name="">
             <a:extLst xmlns:a="http://schemas.openxmlformats.org/drawingml/2006/main">
               <a:ext uri="{FF2B5EF4-FFF2-40B4-BE49-F238E27FC236}">
-                <a16:creationId xmlns:a16="http://schemas.microsoft.com/office/drawing/2014/main" id="{4DC98A43-FD52-46E7-8E62-B3C7F5F9D86C}"/>
+                <a16:creationId xmlns:a16="http://schemas.microsoft.com/office/drawing/2014/main" id="{9BF74098-8C50-410A-9041-643808367484}"/>
               </a:ext>
             </a:extLst>
           </p:cNvPr>
@@ -6719,7 +6719,7 @@
           <p:cNvPr id="76" name="">
             <a:extLst xmlns:a="http://schemas.openxmlformats.org/drawingml/2006/main">
               <a:ext uri="{FF2B5EF4-FFF2-40B4-BE49-F238E27FC236}">
-                <a16:creationId xmlns:a16="http://schemas.microsoft.com/office/drawing/2014/main" id="{77068204-77C0-4D51-8791-797D99E86703}"/>
+                <a16:creationId xmlns:a16="http://schemas.microsoft.com/office/drawing/2014/main" id="{5718BB28-6DB5-47F9-B89F-EB395336007C}"/>
               </a:ext>
             </a:extLst>
           </p:cNvPr>
@@ -6777,7 +6777,7 @@
           <p:cNvPr id="77" name="">
             <a:extLst xmlns:a="http://schemas.openxmlformats.org/drawingml/2006/main">
               <a:ext uri="{FF2B5EF4-FFF2-40B4-BE49-F238E27FC236}">
-                <a16:creationId xmlns:a16="http://schemas.microsoft.com/office/drawing/2014/main" id="{35EE3CE6-D3FF-4AEC-8ABA-9175114F99A8}"/>
+                <a16:creationId xmlns:a16="http://schemas.microsoft.com/office/drawing/2014/main" id="{5D0BCAA4-F25A-4665-8647-3F0D21C375A6}"/>
               </a:ext>
             </a:extLst>
           </p:cNvPr>
@@ -6810,7 +6810,7 @@
           <p:cNvPr id="78" name="">
             <a:extLst xmlns:a="http://schemas.openxmlformats.org/drawingml/2006/main">
               <a:ext uri="{FF2B5EF4-FFF2-40B4-BE49-F238E27FC236}">
-                <a16:creationId xmlns:a16="http://schemas.microsoft.com/office/drawing/2014/main" id="{F2F96DCC-0462-4998-9E83-285EC473B58E}"/>
+                <a16:creationId xmlns:a16="http://schemas.microsoft.com/office/drawing/2014/main" id="{8147E48D-0066-42EB-AB83-AADD49110D2C}"/>
               </a:ext>
             </a:extLst>
           </p:cNvPr>
@@ -6868,7 +6868,7 @@
           <p:cNvPr id="79" name="">
             <a:extLst xmlns:a="http://schemas.openxmlformats.org/drawingml/2006/main">
               <a:ext uri="{FF2B5EF4-FFF2-40B4-BE49-F238E27FC236}">
-                <a16:creationId xmlns:a16="http://schemas.microsoft.com/office/drawing/2014/main" id="{8BAA20FB-1B04-4106-A173-D902554D8DCA}"/>
+                <a16:creationId xmlns:a16="http://schemas.microsoft.com/office/drawing/2014/main" id="{AC71DF4C-B20B-49C6-8ECE-CCBB5C3199AB}"/>
               </a:ext>
             </a:extLst>
           </p:cNvPr>
@@ -6901,7 +6901,7 @@
           <p:cNvPr id="80" name="">
             <a:extLst xmlns:a="http://schemas.openxmlformats.org/drawingml/2006/main">
               <a:ext uri="{FF2B5EF4-FFF2-40B4-BE49-F238E27FC236}">
-                <a16:creationId xmlns:a16="http://schemas.microsoft.com/office/drawing/2014/main" id="{F9C7058B-50CC-44E9-AAAA-608E6F92DA8F}"/>
+                <a16:creationId xmlns:a16="http://schemas.microsoft.com/office/drawing/2014/main" id="{96F51188-9D70-4432-B4BF-83B7DBB059BC}"/>
               </a:ext>
             </a:extLst>
           </p:cNvPr>
@@ -6959,7 +6959,7 @@
           <p:cNvPr id="81" name="">
             <a:extLst xmlns:a="http://schemas.openxmlformats.org/drawingml/2006/main">
               <a:ext uri="{FF2B5EF4-FFF2-40B4-BE49-F238E27FC236}">
-                <a16:creationId xmlns:a16="http://schemas.microsoft.com/office/drawing/2014/main" id="{45ED1BC5-5FA9-47CB-8A24-855E8B08E8C6}"/>
+                <a16:creationId xmlns:a16="http://schemas.microsoft.com/office/drawing/2014/main" id="{5DFC5378-F210-4981-A994-2DE81B75775B}"/>
               </a:ext>
             </a:extLst>
           </p:cNvPr>
@@ -6992,7 +6992,7 @@
           <p:cNvPr id="82" name="">
             <a:extLst xmlns:a="http://schemas.openxmlformats.org/drawingml/2006/main">
               <a:ext uri="{FF2B5EF4-FFF2-40B4-BE49-F238E27FC236}">
-                <a16:creationId xmlns:a16="http://schemas.microsoft.com/office/drawing/2014/main" id="{9B0DD272-49BF-4614-B00B-D83265524B3B}"/>
+                <a16:creationId xmlns:a16="http://schemas.microsoft.com/office/drawing/2014/main" id="{7F277CBA-4D23-4C7F-8303-E1C2857FFD43}"/>
               </a:ext>
             </a:extLst>
           </p:cNvPr>
@@ -7050,7 +7050,7 @@
           <p:cNvPr id="83" name="">
             <a:extLst xmlns:a="http://schemas.openxmlformats.org/drawingml/2006/main">
               <a:ext uri="{FF2B5EF4-FFF2-40B4-BE49-F238E27FC236}">
-                <a16:creationId xmlns:a16="http://schemas.microsoft.com/office/drawing/2014/main" id="{87D28891-DAB9-4D53-9DAA-0109BDDCBEDD}"/>
+                <a16:creationId xmlns:a16="http://schemas.microsoft.com/office/drawing/2014/main" id="{010D6CDD-1F0E-456F-AE17-B45BD1181DA0}"/>
               </a:ext>
             </a:extLst>
           </p:cNvPr>
@@ -7083,7 +7083,7 @@
           <p:cNvPr id="84" name="">
             <a:extLst xmlns:a="http://schemas.openxmlformats.org/drawingml/2006/main">
               <a:ext uri="{FF2B5EF4-FFF2-40B4-BE49-F238E27FC236}">
-                <a16:creationId xmlns:a16="http://schemas.microsoft.com/office/drawing/2014/main" id="{F72D17C0-25B3-44F0-B6E5-C659AB5D7E9A}"/>
+                <a16:creationId xmlns:a16="http://schemas.microsoft.com/office/drawing/2014/main" id="{4B0522CD-9EC7-4F98-95AF-EFBC8E344652}"/>
               </a:ext>
             </a:extLst>
           </p:cNvPr>
@@ -7141,7 +7141,7 @@
           <p:cNvPr id="85" name="">
             <a:extLst xmlns:a="http://schemas.openxmlformats.org/drawingml/2006/main">
               <a:ext uri="{FF2B5EF4-FFF2-40B4-BE49-F238E27FC236}">
-                <a16:creationId xmlns:a16="http://schemas.microsoft.com/office/drawing/2014/main" id="{58950FD3-14E0-47AF-ADF6-B3B849FF8DF2}"/>
+                <a16:creationId xmlns:a16="http://schemas.microsoft.com/office/drawing/2014/main" id="{C93AE6DC-6C03-41C3-A460-5E291F767584}"/>
               </a:ext>
             </a:extLst>
           </p:cNvPr>
@@ -7197,7 +7197,7 @@
     </p:spTree>
     <p:extLst>
       <p:ext uri="{BB962C8B-B14F-4D97-AF65-F5344CB8AC3E}">
-        <p14:creationId xmlns:p14="http://schemas.microsoft.com/office/powerpoint/2010/main" val="1854132457"/>
+        <p14:creationId xmlns:p14="http://schemas.microsoft.com/office/powerpoint/2010/main" val="269657122"/>
       </p:ext>
     </p:extLst>
   </p:cSld>
@@ -7228,7 +7228,7 @@
           <p:cNvPr id="1" name="">
             <a:extLst xmlns:a="http://schemas.openxmlformats.org/drawingml/2006/main">
               <a:ext uri="{FF2B5EF4-FFF2-40B4-BE49-F238E27FC236}">
-                <a16:creationId xmlns:a16="http://schemas.microsoft.com/office/drawing/2014/main" id="{9B21418D-8775-46E9-B214-D87735B7B6F0}"/>
+                <a16:creationId xmlns:a16="http://schemas.microsoft.com/office/drawing/2014/main" id="{ACF3C1D5-F998-4845-9597-D06CE45C4D38}"/>
               </a:ext>
             </a:extLst>
           </p:cNvPr>
@@ -7263,7 +7263,7 @@
           <p:cNvPr id="2" name="">
             <a:extLst xmlns:a="http://schemas.openxmlformats.org/drawingml/2006/main">
               <a:ext uri="{FF2B5EF4-FFF2-40B4-BE49-F238E27FC236}">
-                <a16:creationId xmlns:a16="http://schemas.microsoft.com/office/drawing/2014/main" id="{FE55FB57-B56A-4B83-A472-B09AFA062DF4}"/>
+                <a16:creationId xmlns:a16="http://schemas.microsoft.com/office/drawing/2014/main" id="{B7405F5E-6072-4ECC-B7C5-A34D9A1B908E}"/>
               </a:ext>
             </a:extLst>
           </p:cNvPr>
@@ -7298,7 +7298,7 @@
           <p:cNvPr id="3" name="">
             <a:extLst xmlns:a="http://schemas.openxmlformats.org/drawingml/2006/main">
               <a:ext uri="{FF2B5EF4-FFF2-40B4-BE49-F238E27FC236}">
-                <a16:creationId xmlns:a16="http://schemas.microsoft.com/office/drawing/2014/main" id="{89503C42-FA05-43C2-94A9-9B19478522B9}"/>
+                <a16:creationId xmlns:a16="http://schemas.microsoft.com/office/drawing/2014/main" id="{9E762F36-AA0D-4544-9968-8AD0964AF411}"/>
               </a:ext>
             </a:extLst>
           </p:cNvPr>
@@ -7356,7 +7356,7 @@
           <p:cNvPr id="4" name="">
             <a:extLst xmlns:a="http://schemas.openxmlformats.org/drawingml/2006/main">
               <a:ext uri="{FF2B5EF4-FFF2-40B4-BE49-F238E27FC236}">
-                <a16:creationId xmlns:a16="http://schemas.microsoft.com/office/drawing/2014/main" id="{7493DE88-3CE6-4D8C-AFE5-94951EA70D49}"/>
+                <a16:creationId xmlns:a16="http://schemas.microsoft.com/office/drawing/2014/main" id="{10C59D8C-7EB8-4A50-9299-45255B9479F3}"/>
               </a:ext>
             </a:extLst>
           </p:cNvPr>
@@ -7414,7 +7414,7 @@
           <p:cNvPr id="5" name="">
             <a:extLst xmlns:a="http://schemas.openxmlformats.org/drawingml/2006/main">
               <a:ext uri="{FF2B5EF4-FFF2-40B4-BE49-F238E27FC236}">
-                <a16:creationId xmlns:a16="http://schemas.microsoft.com/office/drawing/2014/main" id="{E91AB135-FD8F-480C-8473-BF69D5475461}"/>
+                <a16:creationId xmlns:a16="http://schemas.microsoft.com/office/drawing/2014/main" id="{CBE5ADFC-9BAE-4874-AFCE-2750D64B1E91}"/>
               </a:ext>
             </a:extLst>
           </p:cNvPr>
@@ -7449,7 +7449,7 @@
           <p:cNvPr id="6" name="">
             <a:extLst xmlns:a="http://schemas.openxmlformats.org/drawingml/2006/main">
               <a:ext uri="{FF2B5EF4-FFF2-40B4-BE49-F238E27FC236}">
-                <a16:creationId xmlns:a16="http://schemas.microsoft.com/office/drawing/2014/main" id="{BA9A6106-DE76-4C54-96A6-D29B7F427818}"/>
+                <a16:creationId xmlns:a16="http://schemas.microsoft.com/office/drawing/2014/main" id="{F33EF3D8-62CB-4B77-A3F7-D5E2EF5F230D}"/>
               </a:ext>
             </a:extLst>
           </p:cNvPr>
@@ -7507,7 +7507,7 @@
           <p:cNvPr id="7" name="">
             <a:extLst xmlns:a="http://schemas.openxmlformats.org/drawingml/2006/main">
               <a:ext uri="{FF2B5EF4-FFF2-40B4-BE49-F238E27FC236}">
-                <a16:creationId xmlns:a16="http://schemas.microsoft.com/office/drawing/2014/main" id="{3DA5996C-0339-4CAA-ADBF-84EDC0862BAE}"/>
+                <a16:creationId xmlns:a16="http://schemas.microsoft.com/office/drawing/2014/main" id="{557A604C-DD00-4FD7-B680-9E15706F82EF}"/>
               </a:ext>
             </a:extLst>
           </p:cNvPr>
@@ -7565,7 +7565,7 @@
           <p:cNvPr id="8" name="">
             <a:extLst xmlns:a="http://schemas.openxmlformats.org/drawingml/2006/main">
               <a:ext uri="{FF2B5EF4-FFF2-40B4-BE49-F238E27FC236}">
-                <a16:creationId xmlns:a16="http://schemas.microsoft.com/office/drawing/2014/main" id="{2358B644-A3DE-4161-A1EB-9535677CA49E}"/>
+                <a16:creationId xmlns:a16="http://schemas.microsoft.com/office/drawing/2014/main" id="{E2D97AA9-0F5A-44C5-80E2-1E973617D2B6}"/>
               </a:ext>
             </a:extLst>
           </p:cNvPr>
@@ -7600,7 +7600,7 @@
           <p:cNvPr id="9" name="">
             <a:extLst xmlns:a="http://schemas.openxmlformats.org/drawingml/2006/main">
               <a:ext uri="{FF2B5EF4-FFF2-40B4-BE49-F238E27FC236}">
-                <a16:creationId xmlns:a16="http://schemas.microsoft.com/office/drawing/2014/main" id="{7B1D0159-A262-41B2-A34F-4FF62249F79B}"/>
+                <a16:creationId xmlns:a16="http://schemas.microsoft.com/office/drawing/2014/main" id="{63D27DEC-6B05-4C67-A477-7638BE39E9D1}"/>
               </a:ext>
             </a:extLst>
           </p:cNvPr>
@@ -7635,7 +7635,7 @@
           <p:cNvPr id="10" name="">
             <a:extLst xmlns:a="http://schemas.openxmlformats.org/drawingml/2006/main">
               <a:ext uri="{FF2B5EF4-FFF2-40B4-BE49-F238E27FC236}">
-                <a16:creationId xmlns:a16="http://schemas.microsoft.com/office/drawing/2014/main" id="{13A74677-422B-45EC-9A98-C8F17C57C86B}"/>
+                <a16:creationId xmlns:a16="http://schemas.microsoft.com/office/drawing/2014/main" id="{8BE1C61C-D2ED-4994-BE1B-1F8BE8008F58}"/>
               </a:ext>
             </a:extLst>
           </p:cNvPr>
@@ -7693,7 +7693,7 @@
           <p:cNvPr id="11" name="">
             <a:extLst xmlns:a="http://schemas.openxmlformats.org/drawingml/2006/main">
               <a:ext uri="{FF2B5EF4-FFF2-40B4-BE49-F238E27FC236}">
-                <a16:creationId xmlns:a16="http://schemas.microsoft.com/office/drawing/2014/main" id="{E622AEC4-B02D-455D-8EA8-F7073C32B5C2}"/>
+                <a16:creationId xmlns:a16="http://schemas.microsoft.com/office/drawing/2014/main" id="{F12AF1F4-7B0C-47E2-9F27-193F8F78D47C}"/>
               </a:ext>
             </a:extLst>
           </p:cNvPr>
@@ -7773,7 +7773,7 @@
           <p:cNvPr id="12" name="">
             <a:extLst xmlns:a="http://schemas.openxmlformats.org/drawingml/2006/main">
               <a:ext uri="{FF2B5EF4-FFF2-40B4-BE49-F238E27FC236}">
-                <a16:creationId xmlns:a16="http://schemas.microsoft.com/office/drawing/2014/main" id="{8FFA14BC-6917-4E43-954C-6E8870169A81}"/>
+                <a16:creationId xmlns:a16="http://schemas.microsoft.com/office/drawing/2014/main" id="{8A236BB3-73B9-4D90-8215-529E74321807}"/>
               </a:ext>
             </a:extLst>
           </p:cNvPr>
@@ -7808,7 +7808,7 @@
           <p:cNvPr id="13" name="">
             <a:extLst xmlns:a="http://schemas.openxmlformats.org/drawingml/2006/main">
               <a:ext uri="{FF2B5EF4-FFF2-40B4-BE49-F238E27FC236}">
-                <a16:creationId xmlns:a16="http://schemas.microsoft.com/office/drawing/2014/main" id="{A225729A-AB6F-4CCC-9695-812A69D9E922}"/>
+                <a16:creationId xmlns:a16="http://schemas.microsoft.com/office/drawing/2014/main" id="{D2B0858F-0B0A-4AD0-B910-D2AE624A2B99}"/>
               </a:ext>
             </a:extLst>
           </p:cNvPr>
@@ -7843,7 +7843,7 @@
           <p:cNvPr id="14" name="">
             <a:extLst xmlns:a="http://schemas.openxmlformats.org/drawingml/2006/main">
               <a:ext uri="{FF2B5EF4-FFF2-40B4-BE49-F238E27FC236}">
-                <a16:creationId xmlns:a16="http://schemas.microsoft.com/office/drawing/2014/main" id="{C9CBB52B-08C7-49F8-926A-BD71E7023215}"/>
+                <a16:creationId xmlns:a16="http://schemas.microsoft.com/office/drawing/2014/main" id="{86101DFA-9852-459B-B75C-97B95749AB73}"/>
               </a:ext>
             </a:extLst>
           </p:cNvPr>
@@ -7901,7 +7901,7 @@
           <p:cNvPr id="15" name="">
             <a:extLst xmlns:a="http://schemas.openxmlformats.org/drawingml/2006/main">
               <a:ext uri="{FF2B5EF4-FFF2-40B4-BE49-F238E27FC236}">
-                <a16:creationId xmlns:a16="http://schemas.microsoft.com/office/drawing/2014/main" id="{31A8289F-18EB-46E5-B2F6-FB10D7C8CD51}"/>
+                <a16:creationId xmlns:a16="http://schemas.microsoft.com/office/drawing/2014/main" id="{D2FE6769-9707-40EC-8547-44CF714E1AE8}"/>
               </a:ext>
             </a:extLst>
           </p:cNvPr>
@@ -8015,7 +8015,7 @@
           <p:cNvPr id="16" name="">
             <a:extLst xmlns:a="http://schemas.openxmlformats.org/drawingml/2006/main">
               <a:ext uri="{FF2B5EF4-FFF2-40B4-BE49-F238E27FC236}">
-                <a16:creationId xmlns:a16="http://schemas.microsoft.com/office/drawing/2014/main" id="{B01A9F16-B7AD-4EF6-9A6B-51804007C60D}"/>
+                <a16:creationId xmlns:a16="http://schemas.microsoft.com/office/drawing/2014/main" id="{318DDFFF-A235-431C-AAEA-490D8D7E6CAC}"/>
               </a:ext>
             </a:extLst>
           </p:cNvPr>
@@ -8050,7 +8050,7 @@
           <p:cNvPr id="17" name="">
             <a:extLst xmlns:a="http://schemas.openxmlformats.org/drawingml/2006/main">
               <a:ext uri="{FF2B5EF4-FFF2-40B4-BE49-F238E27FC236}">
-                <a16:creationId xmlns:a16="http://schemas.microsoft.com/office/drawing/2014/main" id="{5A5A47A2-BAF3-40DA-831D-74FCA4A5E20A}"/>
+                <a16:creationId xmlns:a16="http://schemas.microsoft.com/office/drawing/2014/main" id="{ED7973C1-39BF-428C-A40F-7FE2EA56A892}"/>
               </a:ext>
             </a:extLst>
           </p:cNvPr>
@@ -8085,7 +8085,7 @@
           <p:cNvPr id="18" name="">
             <a:extLst xmlns:a="http://schemas.openxmlformats.org/drawingml/2006/main">
               <a:ext uri="{FF2B5EF4-FFF2-40B4-BE49-F238E27FC236}">
-                <a16:creationId xmlns:a16="http://schemas.microsoft.com/office/drawing/2014/main" id="{914E18F6-0264-4F6F-AB9C-0A34A496E809}"/>
+                <a16:creationId xmlns:a16="http://schemas.microsoft.com/office/drawing/2014/main" id="{82DA91FA-5E23-46FF-A6A2-1D0E7A894599}"/>
               </a:ext>
             </a:extLst>
           </p:cNvPr>
@@ -8143,7 +8143,7 @@
           <p:cNvPr id="19" name="">
             <a:extLst xmlns:a="http://schemas.openxmlformats.org/drawingml/2006/main">
               <a:ext uri="{FF2B5EF4-FFF2-40B4-BE49-F238E27FC236}">
-                <a16:creationId xmlns:a16="http://schemas.microsoft.com/office/drawing/2014/main" id="{E6E45B35-40CA-427D-B973-CC27AD9DA4B7}"/>
+                <a16:creationId xmlns:a16="http://schemas.microsoft.com/office/drawing/2014/main" id="{20B49210-D243-454E-A736-E9ABBAEF14EA}"/>
               </a:ext>
             </a:extLst>
           </p:cNvPr>
@@ -8252,7 +8252,7 @@
           <p:cNvPr id="20" name="">
             <a:extLst xmlns:a="http://schemas.openxmlformats.org/drawingml/2006/main">
               <a:ext uri="{FF2B5EF4-FFF2-40B4-BE49-F238E27FC236}">
-                <a16:creationId xmlns:a16="http://schemas.microsoft.com/office/drawing/2014/main" id="{F112E53B-08E4-4EE2-ADFF-25636A73DCBD}"/>
+                <a16:creationId xmlns:a16="http://schemas.microsoft.com/office/drawing/2014/main" id="{C0A7B2B6-DD8E-4B3F-B93B-A99B9F4C4C2D}"/>
               </a:ext>
             </a:extLst>
           </p:cNvPr>
@@ -8287,7 +8287,7 @@
           <p:cNvPr id="21" name="">
             <a:extLst xmlns:a="http://schemas.openxmlformats.org/drawingml/2006/main">
               <a:ext uri="{FF2B5EF4-FFF2-40B4-BE49-F238E27FC236}">
-                <a16:creationId xmlns:a16="http://schemas.microsoft.com/office/drawing/2014/main" id="{93F142E7-D013-4583-973F-12A9F2FE341D}"/>
+                <a16:creationId xmlns:a16="http://schemas.microsoft.com/office/drawing/2014/main" id="{A11DDAA1-A2ED-447A-9138-21A3CD77A80A}"/>
               </a:ext>
             </a:extLst>
           </p:cNvPr>
@@ -8345,7 +8345,7 @@
           <p:cNvPr id="22" name="">
             <a:extLst xmlns:a="http://schemas.openxmlformats.org/drawingml/2006/main">
               <a:ext uri="{FF2B5EF4-FFF2-40B4-BE49-F238E27FC236}">
-                <a16:creationId xmlns:a16="http://schemas.microsoft.com/office/drawing/2014/main" id="{18799C67-BEB8-4CF3-B3F1-8B6423E0A16E}"/>
+                <a16:creationId xmlns:a16="http://schemas.microsoft.com/office/drawing/2014/main" id="{E558AF6C-33C7-4B7A-9B78-5AD033D4A5A5}"/>
               </a:ext>
             </a:extLst>
           </p:cNvPr>
@@ -8378,7 +8378,7 @@
           <p:cNvPr id="23" name="">
             <a:extLst xmlns:a="http://schemas.openxmlformats.org/drawingml/2006/main">
               <a:ext uri="{FF2B5EF4-FFF2-40B4-BE49-F238E27FC236}">
-                <a16:creationId xmlns:a16="http://schemas.microsoft.com/office/drawing/2014/main" id="{5A949F0D-292B-4F6B-9DBA-1CB0AF62C71F}"/>
+                <a16:creationId xmlns:a16="http://schemas.microsoft.com/office/drawing/2014/main" id="{029B7255-BCA3-4868-B805-CFC532228C13}"/>
               </a:ext>
             </a:extLst>
           </p:cNvPr>
@@ -8413,7 +8413,7 @@
           <p:cNvPr id="24" name="">
             <a:extLst xmlns:a="http://schemas.openxmlformats.org/drawingml/2006/main">
               <a:ext uri="{FF2B5EF4-FFF2-40B4-BE49-F238E27FC236}">
-                <a16:creationId xmlns:a16="http://schemas.microsoft.com/office/drawing/2014/main" id="{56B8A818-DB1F-464F-8F87-ACB61421E1A0}"/>
+                <a16:creationId xmlns:a16="http://schemas.microsoft.com/office/drawing/2014/main" id="{0BD610A4-C657-4105-A5CF-A9E58859D63E}"/>
               </a:ext>
             </a:extLst>
           </p:cNvPr>
@@ -8471,7 +8471,7 @@
           <p:cNvPr id="25" name="">
             <a:extLst xmlns:a="http://schemas.openxmlformats.org/drawingml/2006/main">
               <a:ext uri="{FF2B5EF4-FFF2-40B4-BE49-F238E27FC236}">
-                <a16:creationId xmlns:a16="http://schemas.microsoft.com/office/drawing/2014/main" id="{8DE2BE2D-E3B4-4FC8-AE7B-93C6841C1A21}"/>
+                <a16:creationId xmlns:a16="http://schemas.microsoft.com/office/drawing/2014/main" id="{428D9EA6-AEA6-4AF6-B999-4EBB07F3C40A}"/>
               </a:ext>
             </a:extLst>
           </p:cNvPr>
@@ -8506,7 +8506,7 @@
           <p:cNvPr id="26" name="">
             <a:extLst xmlns:a="http://schemas.openxmlformats.org/drawingml/2006/main">
               <a:ext uri="{FF2B5EF4-FFF2-40B4-BE49-F238E27FC236}">
-                <a16:creationId xmlns:a16="http://schemas.microsoft.com/office/drawing/2014/main" id="{3495982F-EB64-480F-AED4-EC4BFBF2290E}"/>
+                <a16:creationId xmlns:a16="http://schemas.microsoft.com/office/drawing/2014/main" id="{63E9EC2B-A303-4243-BB89-D11D7FA72973}"/>
               </a:ext>
             </a:extLst>
           </p:cNvPr>
@@ -8564,7 +8564,7 @@
           <p:cNvPr id="27" name="">
             <a:extLst xmlns:a="http://schemas.openxmlformats.org/drawingml/2006/main">
               <a:ext uri="{FF2B5EF4-FFF2-40B4-BE49-F238E27FC236}">
-                <a16:creationId xmlns:a16="http://schemas.microsoft.com/office/drawing/2014/main" id="{4C5A41E2-ECD4-4BA5-A282-EEC38B8A61F8}"/>
+                <a16:creationId xmlns:a16="http://schemas.microsoft.com/office/drawing/2014/main" id="{80A9362A-C429-4659-8FD6-5D3ED8A3C8AB}"/>
               </a:ext>
             </a:extLst>
           </p:cNvPr>
@@ -8620,7 +8620,7 @@
     </p:spTree>
     <p:extLst>
       <p:ext uri="{BB962C8B-B14F-4D97-AF65-F5344CB8AC3E}">
-        <p14:creationId xmlns:p14="http://schemas.microsoft.com/office/powerpoint/2010/main" val="2082472661"/>
+        <p14:creationId xmlns:p14="http://schemas.microsoft.com/office/powerpoint/2010/main" val="868772418"/>
       </p:ext>
     </p:extLst>
   </p:cSld>
@@ -8651,7 +8651,7 @@
           <p:cNvPr id="1" name="">
             <a:extLst xmlns:a="http://schemas.openxmlformats.org/drawingml/2006/main">
               <a:ext uri="{FF2B5EF4-FFF2-40B4-BE49-F238E27FC236}">
-                <a16:creationId xmlns:a16="http://schemas.microsoft.com/office/drawing/2014/main" id="{D9EEAC5A-0CBF-46B8-B893-88DD6C454EAE}"/>
+                <a16:creationId xmlns:a16="http://schemas.microsoft.com/office/drawing/2014/main" id="{C728322D-3D86-4B09-B39C-917C2B112803}"/>
               </a:ext>
             </a:extLst>
           </p:cNvPr>
@@ -8686,7 +8686,7 @@
           <p:cNvPr id="2" name="">
             <a:extLst xmlns:a="http://schemas.openxmlformats.org/drawingml/2006/main">
               <a:ext uri="{FF2B5EF4-FFF2-40B4-BE49-F238E27FC236}">
-                <a16:creationId xmlns:a16="http://schemas.microsoft.com/office/drawing/2014/main" id="{092B2F6A-ACAC-473F-B4FF-DDA33BB4F048}"/>
+                <a16:creationId xmlns:a16="http://schemas.microsoft.com/office/drawing/2014/main" id="{AFBB68BD-2E52-4C6C-9C63-304F6D7ACE21}"/>
               </a:ext>
             </a:extLst>
           </p:cNvPr>
@@ -8721,7 +8721,7 @@
           <p:cNvPr id="3" name="">
             <a:extLst xmlns:a="http://schemas.openxmlformats.org/drawingml/2006/main">
               <a:ext uri="{FF2B5EF4-FFF2-40B4-BE49-F238E27FC236}">
-                <a16:creationId xmlns:a16="http://schemas.microsoft.com/office/drawing/2014/main" id="{87E35D70-635B-4AE7-B6FB-4E9377DC4FCE}"/>
+                <a16:creationId xmlns:a16="http://schemas.microsoft.com/office/drawing/2014/main" id="{F08D0F6B-CF2D-4D11-9F97-C807ABEB7409}"/>
               </a:ext>
             </a:extLst>
           </p:cNvPr>
@@ -8779,7 +8779,7 @@
           <p:cNvPr id="4" name="">
             <a:extLst xmlns:a="http://schemas.openxmlformats.org/drawingml/2006/main">
               <a:ext uri="{FF2B5EF4-FFF2-40B4-BE49-F238E27FC236}">
-                <a16:creationId xmlns:a16="http://schemas.microsoft.com/office/drawing/2014/main" id="{742A944D-B1F4-4CC0-8405-2DFEC980B3FF}"/>
+                <a16:creationId xmlns:a16="http://schemas.microsoft.com/office/drawing/2014/main" id="{458B74BF-30F1-43A1-B73C-16DA7C548F5B}"/>
               </a:ext>
             </a:extLst>
           </p:cNvPr>
@@ -8837,7 +8837,7 @@
           <p:cNvPr id="5" name="">
             <a:extLst xmlns:a="http://schemas.openxmlformats.org/drawingml/2006/main">
               <a:ext uri="{FF2B5EF4-FFF2-40B4-BE49-F238E27FC236}">
-                <a16:creationId xmlns:a16="http://schemas.microsoft.com/office/drawing/2014/main" id="{2ABC65D1-B35B-4393-AA31-B1B00572C7B4}"/>
+                <a16:creationId xmlns:a16="http://schemas.microsoft.com/office/drawing/2014/main" id="{FCF240D4-74A8-466F-AE56-682EAD24CD82}"/>
               </a:ext>
             </a:extLst>
           </p:cNvPr>
@@ -8872,7 +8872,7 @@
           <p:cNvPr id="6" name="">
             <a:extLst xmlns:a="http://schemas.openxmlformats.org/drawingml/2006/main">
               <a:ext uri="{FF2B5EF4-FFF2-40B4-BE49-F238E27FC236}">
-                <a16:creationId xmlns:a16="http://schemas.microsoft.com/office/drawing/2014/main" id="{DB95E3A7-0B36-4E57-B4AF-DCB2F0A7917B}"/>
+                <a16:creationId xmlns:a16="http://schemas.microsoft.com/office/drawing/2014/main" id="{965B99A4-3384-48EB-B227-11523E5F4252}"/>
               </a:ext>
             </a:extLst>
           </p:cNvPr>
@@ -8930,7 +8930,7 @@
           <p:cNvPr id="7" name="">
             <a:extLst xmlns:a="http://schemas.openxmlformats.org/drawingml/2006/main">
               <a:ext uri="{FF2B5EF4-FFF2-40B4-BE49-F238E27FC236}">
-                <a16:creationId xmlns:a16="http://schemas.microsoft.com/office/drawing/2014/main" id="{6F7F23F8-DD43-40BA-A8E5-670C2E7B032E}"/>
+                <a16:creationId xmlns:a16="http://schemas.microsoft.com/office/drawing/2014/main" id="{25435270-FA93-4477-9F64-8E1780E9F60D}"/>
               </a:ext>
             </a:extLst>
           </p:cNvPr>
@@ -8988,7 +8988,7 @@
           <p:cNvPr id="8" name="">
             <a:extLst xmlns:a="http://schemas.openxmlformats.org/drawingml/2006/main">
               <a:ext uri="{FF2B5EF4-FFF2-40B4-BE49-F238E27FC236}">
-                <a16:creationId xmlns:a16="http://schemas.microsoft.com/office/drawing/2014/main" id="{3CB2D097-0856-413C-ABAA-0933D7F70323}"/>
+                <a16:creationId xmlns:a16="http://schemas.microsoft.com/office/drawing/2014/main" id="{9CADA108-9B83-4FBC-A24D-9A36AB1715B9}"/>
               </a:ext>
             </a:extLst>
           </p:cNvPr>
@@ -9023,7 +9023,7 @@
           <p:cNvPr id="9" name="">
             <a:extLst xmlns:a="http://schemas.openxmlformats.org/drawingml/2006/main">
               <a:ext uri="{FF2B5EF4-FFF2-40B4-BE49-F238E27FC236}">
-                <a16:creationId xmlns:a16="http://schemas.microsoft.com/office/drawing/2014/main" id="{400F716C-8109-4199-9311-05BD63FB1E1E}"/>
+                <a16:creationId xmlns:a16="http://schemas.microsoft.com/office/drawing/2014/main" id="{D87C1353-F658-40A2-860E-8D09D0B1DCD6}"/>
               </a:ext>
             </a:extLst>
           </p:cNvPr>
@@ -9058,7 +9058,7 @@
           <p:cNvPr id="10" name="">
             <a:extLst xmlns:a="http://schemas.openxmlformats.org/drawingml/2006/main">
               <a:ext uri="{FF2B5EF4-FFF2-40B4-BE49-F238E27FC236}">
-                <a16:creationId xmlns:a16="http://schemas.microsoft.com/office/drawing/2014/main" id="{E814CE1B-59FF-4B48-933B-DDC8791E0AF4}"/>
+                <a16:creationId xmlns:a16="http://schemas.microsoft.com/office/drawing/2014/main" id="{3B844A5A-8EDE-4029-9D87-AB5F53CEF05C}"/>
               </a:ext>
             </a:extLst>
           </p:cNvPr>
@@ -9116,7 +9116,7 @@
           <p:cNvPr id="11" name="">
             <a:extLst xmlns:a="http://schemas.openxmlformats.org/drawingml/2006/main">
               <a:ext uri="{FF2B5EF4-FFF2-40B4-BE49-F238E27FC236}">
-                <a16:creationId xmlns:a16="http://schemas.microsoft.com/office/drawing/2014/main" id="{DC035B2D-54DC-4071-9238-3B243CFAD058}"/>
+                <a16:creationId xmlns:a16="http://schemas.microsoft.com/office/drawing/2014/main" id="{5344813E-6AB7-4F14-9F8A-733C5027B82C}"/>
               </a:ext>
             </a:extLst>
           </p:cNvPr>
@@ -9196,7 +9196,7 @@
           <p:cNvPr id="12" name="">
             <a:extLst xmlns:a="http://schemas.openxmlformats.org/drawingml/2006/main">
               <a:ext uri="{FF2B5EF4-FFF2-40B4-BE49-F238E27FC236}">
-                <a16:creationId xmlns:a16="http://schemas.microsoft.com/office/drawing/2014/main" id="{E0E2A931-F0C9-404C-9E8B-EE1CD888CEA7}"/>
+                <a16:creationId xmlns:a16="http://schemas.microsoft.com/office/drawing/2014/main" id="{B71D6A12-DB77-4686-87FE-48B2698A49B9}"/>
               </a:ext>
             </a:extLst>
           </p:cNvPr>
@@ -9231,7 +9231,7 @@
           <p:cNvPr id="13" name="">
             <a:extLst xmlns:a="http://schemas.openxmlformats.org/drawingml/2006/main">
               <a:ext uri="{FF2B5EF4-FFF2-40B4-BE49-F238E27FC236}">
-                <a16:creationId xmlns:a16="http://schemas.microsoft.com/office/drawing/2014/main" id="{29067122-85A4-4E69-A071-A8E013049AD0}"/>
+                <a16:creationId xmlns:a16="http://schemas.microsoft.com/office/drawing/2014/main" id="{945D8EA9-6A57-43B6-AC52-6B509CF56125}"/>
               </a:ext>
             </a:extLst>
           </p:cNvPr>
@@ -9266,7 +9266,7 @@
           <p:cNvPr id="14" name="">
             <a:extLst xmlns:a="http://schemas.openxmlformats.org/drawingml/2006/main">
               <a:ext uri="{FF2B5EF4-FFF2-40B4-BE49-F238E27FC236}">
-                <a16:creationId xmlns:a16="http://schemas.microsoft.com/office/drawing/2014/main" id="{B147D220-8984-4563-9D98-AB18C29A4905}"/>
+                <a16:creationId xmlns:a16="http://schemas.microsoft.com/office/drawing/2014/main" id="{983EA221-38A5-4948-843B-BF1F168B4EB3}"/>
               </a:ext>
             </a:extLst>
           </p:cNvPr>
@@ -9324,7 +9324,7 @@
           <p:cNvPr id="15" name="">
             <a:extLst xmlns:a="http://schemas.openxmlformats.org/drawingml/2006/main">
               <a:ext uri="{FF2B5EF4-FFF2-40B4-BE49-F238E27FC236}">
-                <a16:creationId xmlns:a16="http://schemas.microsoft.com/office/drawing/2014/main" id="{1BE01AE5-A9A6-4753-8B61-FC59823770BB}"/>
+                <a16:creationId xmlns:a16="http://schemas.microsoft.com/office/drawing/2014/main" id="{9D8A6B41-5336-4FBB-A464-33959291A629}"/>
               </a:ext>
             </a:extLst>
           </p:cNvPr>
@@ -9443,7 +9443,7 @@
           <p:cNvPr id="16" name="">
             <a:extLst xmlns:a="http://schemas.openxmlformats.org/drawingml/2006/main">
               <a:ext uri="{FF2B5EF4-FFF2-40B4-BE49-F238E27FC236}">
-                <a16:creationId xmlns:a16="http://schemas.microsoft.com/office/drawing/2014/main" id="{35E52E3B-AF35-4DF3-BA9B-CB2C6D8F9997}"/>
+                <a16:creationId xmlns:a16="http://schemas.microsoft.com/office/drawing/2014/main" id="{B7FA66B7-A58B-4B6C-A65D-BA8D0B277C75}"/>
               </a:ext>
             </a:extLst>
           </p:cNvPr>
@@ -9478,7 +9478,7 @@
           <p:cNvPr id="17" name="">
             <a:extLst xmlns:a="http://schemas.openxmlformats.org/drawingml/2006/main">
               <a:ext uri="{FF2B5EF4-FFF2-40B4-BE49-F238E27FC236}">
-                <a16:creationId xmlns:a16="http://schemas.microsoft.com/office/drawing/2014/main" id="{B23B4F8F-B2A4-4E3A-BC37-3BEF2EEA5B9D}"/>
+                <a16:creationId xmlns:a16="http://schemas.microsoft.com/office/drawing/2014/main" id="{134BDC0C-1929-4BEB-8CF8-EF486219E46A}"/>
               </a:ext>
             </a:extLst>
           </p:cNvPr>
@@ -9513,7 +9513,7 @@
           <p:cNvPr id="18" name="">
             <a:extLst xmlns:a="http://schemas.openxmlformats.org/drawingml/2006/main">
               <a:ext uri="{FF2B5EF4-FFF2-40B4-BE49-F238E27FC236}">
-                <a16:creationId xmlns:a16="http://schemas.microsoft.com/office/drawing/2014/main" id="{17851CFB-ABCD-4B29-9379-C1BFBFA2B108}"/>
+                <a16:creationId xmlns:a16="http://schemas.microsoft.com/office/drawing/2014/main" id="{19DADF23-1C3D-4264-9B5A-54015CB62A2D}"/>
               </a:ext>
             </a:extLst>
           </p:cNvPr>
@@ -9571,7 +9571,7 @@
           <p:cNvPr id="19" name="">
             <a:extLst xmlns:a="http://schemas.openxmlformats.org/drawingml/2006/main">
               <a:ext uri="{FF2B5EF4-FFF2-40B4-BE49-F238E27FC236}">
-                <a16:creationId xmlns:a16="http://schemas.microsoft.com/office/drawing/2014/main" id="{EF4B1087-16F3-451E-8E6E-92264AB57BBA}"/>
+                <a16:creationId xmlns:a16="http://schemas.microsoft.com/office/drawing/2014/main" id="{85F5B18F-F69C-4522-94D2-E6160700BE4C}"/>
               </a:ext>
             </a:extLst>
           </p:cNvPr>
@@ -9680,7 +9680,7 @@
           <p:cNvPr id="20" name="">
             <a:extLst xmlns:a="http://schemas.openxmlformats.org/drawingml/2006/main">
               <a:ext uri="{FF2B5EF4-FFF2-40B4-BE49-F238E27FC236}">
-                <a16:creationId xmlns:a16="http://schemas.microsoft.com/office/drawing/2014/main" id="{D8D4FBE6-D3B8-45E7-A3F1-822987FD87BF}"/>
+                <a16:creationId xmlns:a16="http://schemas.microsoft.com/office/drawing/2014/main" id="{14989240-FEBF-40CC-8DFC-377D55A04A9D}"/>
               </a:ext>
             </a:extLst>
           </p:cNvPr>
@@ -9715,7 +9715,7 @@
           <p:cNvPr id="21" name="">
             <a:extLst xmlns:a="http://schemas.openxmlformats.org/drawingml/2006/main">
               <a:ext uri="{FF2B5EF4-FFF2-40B4-BE49-F238E27FC236}">
-                <a16:creationId xmlns:a16="http://schemas.microsoft.com/office/drawing/2014/main" id="{6AA5B1FD-F204-4AFA-B5B7-3158B904DBC5}"/>
+                <a16:creationId xmlns:a16="http://schemas.microsoft.com/office/drawing/2014/main" id="{F5355225-410F-4488-B797-0CF56A8C4C32}"/>
               </a:ext>
             </a:extLst>
           </p:cNvPr>
@@ -9773,7 +9773,7 @@
           <p:cNvPr id="22" name="">
             <a:extLst xmlns:a="http://schemas.openxmlformats.org/drawingml/2006/main">
               <a:ext uri="{FF2B5EF4-FFF2-40B4-BE49-F238E27FC236}">
-                <a16:creationId xmlns:a16="http://schemas.microsoft.com/office/drawing/2014/main" id="{D07C1F75-15CD-45F7-B34B-7D5A4E1BB9B3}"/>
+                <a16:creationId xmlns:a16="http://schemas.microsoft.com/office/drawing/2014/main" id="{4A1B2ECF-6199-4F83-80C1-51043A56DA21}"/>
               </a:ext>
             </a:extLst>
           </p:cNvPr>
@@ -9806,7 +9806,7 @@
           <p:cNvPr id="23" name="">
             <a:extLst xmlns:a="http://schemas.openxmlformats.org/drawingml/2006/main">
               <a:ext uri="{FF2B5EF4-FFF2-40B4-BE49-F238E27FC236}">
-                <a16:creationId xmlns:a16="http://schemas.microsoft.com/office/drawing/2014/main" id="{25B2D020-8286-4CA9-BE9C-963E80A80C5B}"/>
+                <a16:creationId xmlns:a16="http://schemas.microsoft.com/office/drawing/2014/main" id="{FCF747A2-E8C1-4F50-AFE3-D2CDE1B8FE2D}"/>
               </a:ext>
             </a:extLst>
           </p:cNvPr>
@@ -9841,7 +9841,7 @@
           <p:cNvPr id="24" name="">
             <a:extLst xmlns:a="http://schemas.openxmlformats.org/drawingml/2006/main">
               <a:ext uri="{FF2B5EF4-FFF2-40B4-BE49-F238E27FC236}">
-                <a16:creationId xmlns:a16="http://schemas.microsoft.com/office/drawing/2014/main" id="{55987E44-68CE-4733-998E-9CF41D0AC6C8}"/>
+                <a16:creationId xmlns:a16="http://schemas.microsoft.com/office/drawing/2014/main" id="{B4367873-1A2E-45BF-8CCC-6CE00E7073ED}"/>
               </a:ext>
             </a:extLst>
           </p:cNvPr>
@@ -9899,7 +9899,7 @@
           <p:cNvPr id="25" name="">
             <a:extLst xmlns:a="http://schemas.openxmlformats.org/drawingml/2006/main">
               <a:ext uri="{FF2B5EF4-FFF2-40B4-BE49-F238E27FC236}">
-                <a16:creationId xmlns:a16="http://schemas.microsoft.com/office/drawing/2014/main" id="{64745C19-56B6-4D80-BD94-FE1350D3BB0D}"/>
+                <a16:creationId xmlns:a16="http://schemas.microsoft.com/office/drawing/2014/main" id="{11944876-9532-4289-A0C1-F426D6AF216F}"/>
               </a:ext>
             </a:extLst>
           </p:cNvPr>
@@ -9932,7 +9932,7 @@
           <p:cNvPr id="26" name="">
             <a:extLst xmlns:a="http://schemas.openxmlformats.org/drawingml/2006/main">
               <a:ext uri="{FF2B5EF4-FFF2-40B4-BE49-F238E27FC236}">
-                <a16:creationId xmlns:a16="http://schemas.microsoft.com/office/drawing/2014/main" id="{728E3B49-5F60-4D26-924A-AF0F689B7F6D}"/>
+                <a16:creationId xmlns:a16="http://schemas.microsoft.com/office/drawing/2014/main" id="{38A06DDA-77D2-4356-A012-12F680FEFE8E}"/>
               </a:ext>
             </a:extLst>
           </p:cNvPr>
@@ -9967,7 +9967,7 @@
           <p:cNvPr id="27" name="">
             <a:extLst xmlns:a="http://schemas.openxmlformats.org/drawingml/2006/main">
               <a:ext uri="{FF2B5EF4-FFF2-40B4-BE49-F238E27FC236}">
-                <a16:creationId xmlns:a16="http://schemas.microsoft.com/office/drawing/2014/main" id="{13C55250-C90E-4B8A-AEEF-4D60E4F8DE9A}"/>
+                <a16:creationId xmlns:a16="http://schemas.microsoft.com/office/drawing/2014/main" id="{F22CE732-0B00-4BBB-82CC-EAF183885EF4}"/>
               </a:ext>
             </a:extLst>
           </p:cNvPr>
@@ -10025,7 +10025,7 @@
           <p:cNvPr id="28" name="">
             <a:extLst xmlns:a="http://schemas.openxmlformats.org/drawingml/2006/main">
               <a:ext uri="{FF2B5EF4-FFF2-40B4-BE49-F238E27FC236}">
-                <a16:creationId xmlns:a16="http://schemas.microsoft.com/office/drawing/2014/main" id="{D1A20E00-4173-4F6D-B54E-94B5487B386D}"/>
+                <a16:creationId xmlns:a16="http://schemas.microsoft.com/office/drawing/2014/main" id="{F187C29D-BA7F-4ADC-ABE6-138C56C3675B}"/>
               </a:ext>
             </a:extLst>
           </p:cNvPr>
@@ -10060,7 +10060,7 @@
           <p:cNvPr id="29" name="">
             <a:extLst xmlns:a="http://schemas.openxmlformats.org/drawingml/2006/main">
               <a:ext uri="{FF2B5EF4-FFF2-40B4-BE49-F238E27FC236}">
-                <a16:creationId xmlns:a16="http://schemas.microsoft.com/office/drawing/2014/main" id="{23102483-0501-4406-B892-966C81C7A005}"/>
+                <a16:creationId xmlns:a16="http://schemas.microsoft.com/office/drawing/2014/main" id="{587BE118-3568-4149-B85D-648EFC08C8F3}"/>
               </a:ext>
             </a:extLst>
           </p:cNvPr>
@@ -10118,7 +10118,7 @@
           <p:cNvPr id="30" name="">
             <a:extLst xmlns:a="http://schemas.openxmlformats.org/drawingml/2006/main">
               <a:ext uri="{FF2B5EF4-FFF2-40B4-BE49-F238E27FC236}">
-                <a16:creationId xmlns:a16="http://schemas.microsoft.com/office/drawing/2014/main" id="{155185A2-0CF9-44D0-B6EA-AB937C51FB22}"/>
+                <a16:creationId xmlns:a16="http://schemas.microsoft.com/office/drawing/2014/main" id="{E5CD213A-40E8-4BC9-BC14-15E59170B317}"/>
               </a:ext>
             </a:extLst>
           </p:cNvPr>
@@ -10174,7 +10174,7 @@
     </p:spTree>
     <p:extLst>
       <p:ext uri="{BB962C8B-B14F-4D97-AF65-F5344CB8AC3E}">
-        <p14:creationId xmlns:p14="http://schemas.microsoft.com/office/powerpoint/2010/main" val="1905413061"/>
+        <p14:creationId xmlns:p14="http://schemas.microsoft.com/office/powerpoint/2010/main" val="741896479"/>
       </p:ext>
     </p:extLst>
   </p:cSld>
@@ -10205,7 +10205,7 @@
           <p:cNvPr id="1" name="">
             <a:extLst xmlns:a="http://schemas.openxmlformats.org/drawingml/2006/main">
               <a:ext uri="{FF2B5EF4-FFF2-40B4-BE49-F238E27FC236}">
-                <a16:creationId xmlns:a16="http://schemas.microsoft.com/office/drawing/2014/main" id="{170D95D5-A6F2-4A37-AAD9-0FD2F8BBB798}"/>
+                <a16:creationId xmlns:a16="http://schemas.microsoft.com/office/drawing/2014/main" id="{F88CBE7F-49C6-4AFE-9C71-8D2C4BD3E47F}"/>
               </a:ext>
             </a:extLst>
           </p:cNvPr>
@@ -10240,7 +10240,7 @@
           <p:cNvPr id="2" name="">
             <a:extLst xmlns:a="http://schemas.openxmlformats.org/drawingml/2006/main">
               <a:ext uri="{FF2B5EF4-FFF2-40B4-BE49-F238E27FC236}">
-                <a16:creationId xmlns:a16="http://schemas.microsoft.com/office/drawing/2014/main" id="{12E73D7F-D26D-4C04-AB43-7BA9B91CC253}"/>
+                <a16:creationId xmlns:a16="http://schemas.microsoft.com/office/drawing/2014/main" id="{17D38324-94A3-4FF0-A192-D8B1AD6F1019}"/>
               </a:ext>
             </a:extLst>
           </p:cNvPr>
@@ -10275,7 +10275,7 @@
           <p:cNvPr id="3" name="">
             <a:extLst xmlns:a="http://schemas.openxmlformats.org/drawingml/2006/main">
               <a:ext uri="{FF2B5EF4-FFF2-40B4-BE49-F238E27FC236}">
-                <a16:creationId xmlns:a16="http://schemas.microsoft.com/office/drawing/2014/main" id="{985EE043-411D-4989-9352-4812087CA45B}"/>
+                <a16:creationId xmlns:a16="http://schemas.microsoft.com/office/drawing/2014/main" id="{3114A4F5-E9CF-4807-A807-C1FFB4935E93}"/>
               </a:ext>
             </a:extLst>
           </p:cNvPr>
@@ -10333,7 +10333,7 @@
           <p:cNvPr id="4" name="">
             <a:extLst xmlns:a="http://schemas.openxmlformats.org/drawingml/2006/main">
               <a:ext uri="{FF2B5EF4-FFF2-40B4-BE49-F238E27FC236}">
-                <a16:creationId xmlns:a16="http://schemas.microsoft.com/office/drawing/2014/main" id="{50B616CF-8E16-4E4F-ADA6-98293E61CBE6}"/>
+                <a16:creationId xmlns:a16="http://schemas.microsoft.com/office/drawing/2014/main" id="{7376752F-F11E-4463-B871-EABEAAD3DC8C}"/>
               </a:ext>
             </a:extLst>
           </p:cNvPr>
@@ -10391,7 +10391,7 @@
           <p:cNvPr id="5" name="">
             <a:extLst xmlns:a="http://schemas.openxmlformats.org/drawingml/2006/main">
               <a:ext uri="{FF2B5EF4-FFF2-40B4-BE49-F238E27FC236}">
-                <a16:creationId xmlns:a16="http://schemas.microsoft.com/office/drawing/2014/main" id="{28111ACA-52AB-432A-BF3C-BF42178EB95E}"/>
+                <a16:creationId xmlns:a16="http://schemas.microsoft.com/office/drawing/2014/main" id="{5D28B633-02A4-4881-8F24-194F7028340D}"/>
               </a:ext>
             </a:extLst>
           </p:cNvPr>
@@ -10426,7 +10426,7 @@
           <p:cNvPr id="6" name="">
             <a:extLst xmlns:a="http://schemas.openxmlformats.org/drawingml/2006/main">
               <a:ext uri="{FF2B5EF4-FFF2-40B4-BE49-F238E27FC236}">
-                <a16:creationId xmlns:a16="http://schemas.microsoft.com/office/drawing/2014/main" id="{2E58F469-6F23-43C5-9817-EE47087BDAA1}"/>
+                <a16:creationId xmlns:a16="http://schemas.microsoft.com/office/drawing/2014/main" id="{9D3CBA75-671B-49D5-ABFC-C26B3934C6E6}"/>
               </a:ext>
             </a:extLst>
           </p:cNvPr>
@@ -10484,7 +10484,7 @@
           <p:cNvPr id="7" name="">
             <a:extLst xmlns:a="http://schemas.openxmlformats.org/drawingml/2006/main">
               <a:ext uri="{FF2B5EF4-FFF2-40B4-BE49-F238E27FC236}">
-                <a16:creationId xmlns:a16="http://schemas.microsoft.com/office/drawing/2014/main" id="{D955141F-8333-429E-96AE-6BF3ED6FCB96}"/>
+                <a16:creationId xmlns:a16="http://schemas.microsoft.com/office/drawing/2014/main" id="{C943BF0B-6292-40AE-9F84-EEA71354644E}"/>
               </a:ext>
             </a:extLst>
           </p:cNvPr>
@@ -10542,7 +10542,7 @@
           <p:cNvPr id="8" name="">
             <a:extLst xmlns:a="http://schemas.openxmlformats.org/drawingml/2006/main">
               <a:ext uri="{FF2B5EF4-FFF2-40B4-BE49-F238E27FC236}">
-                <a16:creationId xmlns:a16="http://schemas.microsoft.com/office/drawing/2014/main" id="{C746A9A3-4421-4457-90DE-1384E112DE34}"/>
+                <a16:creationId xmlns:a16="http://schemas.microsoft.com/office/drawing/2014/main" id="{BA6127D0-B592-49AF-8079-DD947DE67061}"/>
               </a:ext>
             </a:extLst>
           </p:cNvPr>
@@ -10577,7 +10577,7 @@
           <p:cNvPr id="9" name="">
             <a:extLst xmlns:a="http://schemas.openxmlformats.org/drawingml/2006/main">
               <a:ext uri="{FF2B5EF4-FFF2-40B4-BE49-F238E27FC236}">
-                <a16:creationId xmlns:a16="http://schemas.microsoft.com/office/drawing/2014/main" id="{EB6DB108-085E-4710-A7AA-91B9FEBBA22C}"/>
+                <a16:creationId xmlns:a16="http://schemas.microsoft.com/office/drawing/2014/main" id="{DDAAADEB-CCD9-4E17-A585-C45F42391F44}"/>
               </a:ext>
             </a:extLst>
           </p:cNvPr>
@@ -10612,7 +10612,7 @@
           <p:cNvPr id="10" name="">
             <a:extLst xmlns:a="http://schemas.openxmlformats.org/drawingml/2006/main">
               <a:ext uri="{FF2B5EF4-FFF2-40B4-BE49-F238E27FC236}">
-                <a16:creationId xmlns:a16="http://schemas.microsoft.com/office/drawing/2014/main" id="{6D4D88FA-6249-4707-A11D-272BEA48B8B1}"/>
+                <a16:creationId xmlns:a16="http://schemas.microsoft.com/office/drawing/2014/main" id="{D83E5FBA-2E27-4B3E-9DC6-8A36112E7AC0}"/>
               </a:ext>
             </a:extLst>
           </p:cNvPr>
@@ -10670,7 +10670,7 @@
           <p:cNvPr id="11" name="">
             <a:extLst xmlns:a="http://schemas.openxmlformats.org/drawingml/2006/main">
               <a:ext uri="{FF2B5EF4-FFF2-40B4-BE49-F238E27FC236}">
-                <a16:creationId xmlns:a16="http://schemas.microsoft.com/office/drawing/2014/main" id="{E610C3FF-0864-4F12-9B70-C39960CDCD31}"/>
+                <a16:creationId xmlns:a16="http://schemas.microsoft.com/office/drawing/2014/main" id="{01D10D89-3DF9-4204-8A51-3D7DB2537FD9}"/>
               </a:ext>
             </a:extLst>
           </p:cNvPr>
@@ -10750,7 +10750,7 @@
           <p:cNvPr id="12" name="">
             <a:extLst xmlns:a="http://schemas.openxmlformats.org/drawingml/2006/main">
               <a:ext uri="{FF2B5EF4-FFF2-40B4-BE49-F238E27FC236}">
-                <a16:creationId xmlns:a16="http://schemas.microsoft.com/office/drawing/2014/main" id="{7C5EBA4D-D7D9-4774-9A58-14E20ACC02B4}"/>
+                <a16:creationId xmlns:a16="http://schemas.microsoft.com/office/drawing/2014/main" id="{B2A444BB-49F5-40AB-B7C5-6069FDB349BD}"/>
               </a:ext>
             </a:extLst>
           </p:cNvPr>
@@ -10785,7 +10785,7 @@
           <p:cNvPr id="13" name="">
             <a:extLst xmlns:a="http://schemas.openxmlformats.org/drawingml/2006/main">
               <a:ext uri="{FF2B5EF4-FFF2-40B4-BE49-F238E27FC236}">
-                <a16:creationId xmlns:a16="http://schemas.microsoft.com/office/drawing/2014/main" id="{E79E1CA6-F52D-4D5C-ADE3-2292CFAFAFE1}"/>
+                <a16:creationId xmlns:a16="http://schemas.microsoft.com/office/drawing/2014/main" id="{3357086F-E8E9-455E-98B6-23111AE5BF98}"/>
               </a:ext>
             </a:extLst>
           </p:cNvPr>
@@ -10820,7 +10820,7 @@
           <p:cNvPr id="14" name="">
             <a:extLst xmlns:a="http://schemas.openxmlformats.org/drawingml/2006/main">
               <a:ext uri="{FF2B5EF4-FFF2-40B4-BE49-F238E27FC236}">
-                <a16:creationId xmlns:a16="http://schemas.microsoft.com/office/drawing/2014/main" id="{20247DA3-FBB8-4DD0-A0B0-7E211852890F}"/>
+                <a16:creationId xmlns:a16="http://schemas.microsoft.com/office/drawing/2014/main" id="{68BA03BA-2C61-44E5-8A39-FDF06FF31236}"/>
               </a:ext>
             </a:extLst>
           </p:cNvPr>
@@ -10878,7 +10878,7 @@
           <p:cNvPr id="15" name="">
             <a:extLst xmlns:a="http://schemas.openxmlformats.org/drawingml/2006/main">
               <a:ext uri="{FF2B5EF4-FFF2-40B4-BE49-F238E27FC236}">
-                <a16:creationId xmlns:a16="http://schemas.microsoft.com/office/drawing/2014/main" id="{BF0DA7C0-AF2E-41A0-8C20-7263A5F96BC2}"/>
+                <a16:creationId xmlns:a16="http://schemas.microsoft.com/office/drawing/2014/main" id="{E7BE2D90-3B7A-410A-A3D6-1FA9CD386B8B}"/>
               </a:ext>
             </a:extLst>
           </p:cNvPr>
@@ -11004,7 +11004,7 @@
           <p:cNvPr id="16" name="">
             <a:extLst xmlns:a="http://schemas.openxmlformats.org/drawingml/2006/main">
               <a:ext uri="{FF2B5EF4-FFF2-40B4-BE49-F238E27FC236}">
-                <a16:creationId xmlns:a16="http://schemas.microsoft.com/office/drawing/2014/main" id="{A8891657-2F3F-4357-A18D-66313E904AD0}"/>
+                <a16:creationId xmlns:a16="http://schemas.microsoft.com/office/drawing/2014/main" id="{3FB8AA3A-5AD0-44CB-BF0A-A45ED2421B64}"/>
               </a:ext>
             </a:extLst>
           </p:cNvPr>
@@ -11039,7 +11039,7 @@
           <p:cNvPr id="17" name="">
             <a:extLst xmlns:a="http://schemas.openxmlformats.org/drawingml/2006/main">
               <a:ext uri="{FF2B5EF4-FFF2-40B4-BE49-F238E27FC236}">
-                <a16:creationId xmlns:a16="http://schemas.microsoft.com/office/drawing/2014/main" id="{97B46D2D-3586-45B1-AE10-9D69D60C71F0}"/>
+                <a16:creationId xmlns:a16="http://schemas.microsoft.com/office/drawing/2014/main" id="{A999F122-D860-4366-AFC5-C23BDD2519A2}"/>
               </a:ext>
             </a:extLst>
           </p:cNvPr>
@@ -11074,7 +11074,7 @@
           <p:cNvPr id="18" name="">
             <a:extLst xmlns:a="http://schemas.openxmlformats.org/drawingml/2006/main">
               <a:ext uri="{FF2B5EF4-FFF2-40B4-BE49-F238E27FC236}">
-                <a16:creationId xmlns:a16="http://schemas.microsoft.com/office/drawing/2014/main" id="{80FE5EB0-FBCA-4ACF-9650-2CED763D7EF1}"/>
+                <a16:creationId xmlns:a16="http://schemas.microsoft.com/office/drawing/2014/main" id="{1D00A97B-3109-4131-9D73-DA44C44DEB35}"/>
               </a:ext>
             </a:extLst>
           </p:cNvPr>
@@ -11132,7 +11132,7 @@
           <p:cNvPr id="19" name="">
             <a:extLst xmlns:a="http://schemas.openxmlformats.org/drawingml/2006/main">
               <a:ext uri="{FF2B5EF4-FFF2-40B4-BE49-F238E27FC236}">
-                <a16:creationId xmlns:a16="http://schemas.microsoft.com/office/drawing/2014/main" id="{E3C80E48-088F-43C3-ABCA-966AA722D69F}"/>
+                <a16:creationId xmlns:a16="http://schemas.microsoft.com/office/drawing/2014/main" id="{F2FA5B15-73AE-45BD-9223-5607865939BE}"/>
               </a:ext>
             </a:extLst>
           </p:cNvPr>
@@ -11241,7 +11241,7 @@
           <p:cNvPr id="20" name="">
             <a:extLst xmlns:a="http://schemas.openxmlformats.org/drawingml/2006/main">
               <a:ext uri="{FF2B5EF4-FFF2-40B4-BE49-F238E27FC236}">
-                <a16:creationId xmlns:a16="http://schemas.microsoft.com/office/drawing/2014/main" id="{4E30FD6D-5271-4AB4-84B6-3E0E9A409BFC}"/>
+                <a16:creationId xmlns:a16="http://schemas.microsoft.com/office/drawing/2014/main" id="{F564E9F0-6D92-4843-8278-98A901F7285F}"/>
               </a:ext>
             </a:extLst>
           </p:cNvPr>
@@ -11276,7 +11276,7 @@
           <p:cNvPr id="21" name="">
             <a:extLst xmlns:a="http://schemas.openxmlformats.org/drawingml/2006/main">
               <a:ext uri="{FF2B5EF4-FFF2-40B4-BE49-F238E27FC236}">
-                <a16:creationId xmlns:a16="http://schemas.microsoft.com/office/drawing/2014/main" id="{C6C049FC-11D1-4647-AAE1-642D4E09DBAB}"/>
+                <a16:creationId xmlns:a16="http://schemas.microsoft.com/office/drawing/2014/main" id="{08197BFE-F488-4565-AE28-AD814BF6DA09}"/>
               </a:ext>
             </a:extLst>
           </p:cNvPr>
@@ -11351,7 +11351,7 @@
           <p:cNvPr id="22" name="">
             <a:extLst xmlns:a="http://schemas.openxmlformats.org/drawingml/2006/main">
               <a:ext uri="{FF2B5EF4-FFF2-40B4-BE49-F238E27FC236}">
-                <a16:creationId xmlns:a16="http://schemas.microsoft.com/office/drawing/2014/main" id="{FFA9E0E5-28E2-4A37-AAF7-7C12CD21B267}"/>
+                <a16:creationId xmlns:a16="http://schemas.microsoft.com/office/drawing/2014/main" id="{A39F1ACC-C5A2-47DB-AB7C-A764DDFA5C0D}"/>
               </a:ext>
             </a:extLst>
           </p:cNvPr>
@@ -11407,7 +11407,7 @@
     </p:spTree>
     <p:extLst>
       <p:ext uri="{BB962C8B-B14F-4D97-AF65-F5344CB8AC3E}">
-        <p14:creationId xmlns:p14="http://schemas.microsoft.com/office/powerpoint/2010/main" val="1230097801"/>
+        <p14:creationId xmlns:p14="http://schemas.microsoft.com/office/powerpoint/2010/main" val="588834169"/>
       </p:ext>
     </p:extLst>
   </p:cSld>
@@ -11438,7 +11438,7 @@
           <p:cNvPr id="1" name="">
             <a:extLst xmlns:a="http://schemas.openxmlformats.org/drawingml/2006/main">
               <a:ext uri="{FF2B5EF4-FFF2-40B4-BE49-F238E27FC236}">
-                <a16:creationId xmlns:a16="http://schemas.microsoft.com/office/drawing/2014/main" id="{E20CF119-1E5F-46FB-9FAE-11E39BE8085C}"/>
+                <a16:creationId xmlns:a16="http://schemas.microsoft.com/office/drawing/2014/main" id="{CE412002-6C77-493A-9356-F921B94C2371}"/>
               </a:ext>
             </a:extLst>
           </p:cNvPr>
@@ -11473,7 +11473,7 @@
           <p:cNvPr id="2" name="">
             <a:extLst xmlns:a="http://schemas.openxmlformats.org/drawingml/2006/main">
               <a:ext uri="{FF2B5EF4-FFF2-40B4-BE49-F238E27FC236}">
-                <a16:creationId xmlns:a16="http://schemas.microsoft.com/office/drawing/2014/main" id="{BC678622-B5D0-4DB2-A010-E6B95CC94F36}"/>
+                <a16:creationId xmlns:a16="http://schemas.microsoft.com/office/drawing/2014/main" id="{59E50301-06CF-4EB5-87F5-47364292E524}"/>
               </a:ext>
             </a:extLst>
           </p:cNvPr>
@@ -11508,7 +11508,7 @@
           <p:cNvPr id="3" name="">
             <a:extLst xmlns:a="http://schemas.openxmlformats.org/drawingml/2006/main">
               <a:ext uri="{FF2B5EF4-FFF2-40B4-BE49-F238E27FC236}">
-                <a16:creationId xmlns:a16="http://schemas.microsoft.com/office/drawing/2014/main" id="{00291531-902E-4424-9834-27667814A4E1}"/>
+                <a16:creationId xmlns:a16="http://schemas.microsoft.com/office/drawing/2014/main" id="{8A60D753-D1FC-4754-BAAB-951BCB460F4D}"/>
               </a:ext>
             </a:extLst>
           </p:cNvPr>
@@ -11566,7 +11566,7 @@
           <p:cNvPr id="4" name="">
             <a:extLst xmlns:a="http://schemas.openxmlformats.org/drawingml/2006/main">
               <a:ext uri="{FF2B5EF4-FFF2-40B4-BE49-F238E27FC236}">
-                <a16:creationId xmlns:a16="http://schemas.microsoft.com/office/drawing/2014/main" id="{9284A97C-FFB8-4F79-9F82-611E5761122E}"/>
+                <a16:creationId xmlns:a16="http://schemas.microsoft.com/office/drawing/2014/main" id="{506D1254-221F-495B-986C-CD9886FCC81A}"/>
               </a:ext>
             </a:extLst>
           </p:cNvPr>
@@ -11624,7 +11624,7 @@
           <p:cNvPr id="5" name="">
             <a:extLst xmlns:a="http://schemas.openxmlformats.org/drawingml/2006/main">
               <a:ext uri="{FF2B5EF4-FFF2-40B4-BE49-F238E27FC236}">
-                <a16:creationId xmlns:a16="http://schemas.microsoft.com/office/drawing/2014/main" id="{46E36EA9-B04A-49A8-AD27-68EA9D2A16FF}"/>
+                <a16:creationId xmlns:a16="http://schemas.microsoft.com/office/drawing/2014/main" id="{DBB980B9-5301-4F68-B62E-B3B5FCB85FBB}"/>
               </a:ext>
             </a:extLst>
           </p:cNvPr>
@@ -11659,7 +11659,7 @@
           <p:cNvPr id="6" name="">
             <a:extLst xmlns:a="http://schemas.openxmlformats.org/drawingml/2006/main">
               <a:ext uri="{FF2B5EF4-FFF2-40B4-BE49-F238E27FC236}">
-                <a16:creationId xmlns:a16="http://schemas.microsoft.com/office/drawing/2014/main" id="{0CF669BC-66DC-45DC-B24D-088754CBE0A1}"/>
+                <a16:creationId xmlns:a16="http://schemas.microsoft.com/office/drawing/2014/main" id="{D9C04112-A8E0-4CFB-9A43-DBFA40214975}"/>
               </a:ext>
             </a:extLst>
           </p:cNvPr>
@@ -11717,7 +11717,7 @@
           <p:cNvPr id="7" name="">
             <a:extLst xmlns:a="http://schemas.openxmlformats.org/drawingml/2006/main">
               <a:ext uri="{FF2B5EF4-FFF2-40B4-BE49-F238E27FC236}">
-                <a16:creationId xmlns:a16="http://schemas.microsoft.com/office/drawing/2014/main" id="{3E74BD3E-CFBC-4C39-9A38-CFF42F749358}"/>
+                <a16:creationId xmlns:a16="http://schemas.microsoft.com/office/drawing/2014/main" id="{AD1AD347-7E10-4BA3-9162-1FFD45DCF2DB}"/>
               </a:ext>
             </a:extLst>
           </p:cNvPr>
@@ -11775,7 +11775,7 @@
           <p:cNvPr id="8" name="">
             <a:extLst xmlns:a="http://schemas.openxmlformats.org/drawingml/2006/main">
               <a:ext uri="{FF2B5EF4-FFF2-40B4-BE49-F238E27FC236}">
-                <a16:creationId xmlns:a16="http://schemas.microsoft.com/office/drawing/2014/main" id="{73DA6814-9C65-44EC-B5E0-2AE99B9E8DF3}"/>
+                <a16:creationId xmlns:a16="http://schemas.microsoft.com/office/drawing/2014/main" id="{32B8F995-4F8F-4206-8718-694744641D2B}"/>
               </a:ext>
             </a:extLst>
           </p:cNvPr>
@@ -11810,7 +11810,7 @@
           <p:cNvPr id="9" name="">
             <a:extLst xmlns:a="http://schemas.openxmlformats.org/drawingml/2006/main">
               <a:ext uri="{FF2B5EF4-FFF2-40B4-BE49-F238E27FC236}">
-                <a16:creationId xmlns:a16="http://schemas.microsoft.com/office/drawing/2014/main" id="{AC4BFD26-7038-4157-9DD0-398435B3C760}"/>
+                <a16:creationId xmlns:a16="http://schemas.microsoft.com/office/drawing/2014/main" id="{7AE2C725-AE23-45F5-8FCF-B2B48BDF1C7D}"/>
               </a:ext>
             </a:extLst>
           </p:cNvPr>
@@ -11845,7 +11845,7 @@
           <p:cNvPr id="10" name="">
             <a:extLst xmlns:a="http://schemas.openxmlformats.org/drawingml/2006/main">
               <a:ext uri="{FF2B5EF4-FFF2-40B4-BE49-F238E27FC236}">
-                <a16:creationId xmlns:a16="http://schemas.microsoft.com/office/drawing/2014/main" id="{C192516D-BB01-4656-ACAB-4B144F3423A0}"/>
+                <a16:creationId xmlns:a16="http://schemas.microsoft.com/office/drawing/2014/main" id="{8FA91ECC-4D62-4E68-A00D-FA94B2404E4D}"/>
               </a:ext>
             </a:extLst>
           </p:cNvPr>
@@ -11903,7 +11903,7 @@
           <p:cNvPr id="11" name="">
             <a:extLst xmlns:a="http://schemas.openxmlformats.org/drawingml/2006/main">
               <a:ext uri="{FF2B5EF4-FFF2-40B4-BE49-F238E27FC236}">
-                <a16:creationId xmlns:a16="http://schemas.microsoft.com/office/drawing/2014/main" id="{4A0F0B07-731C-4F3F-9F94-C4EA98A1855C}"/>
+                <a16:creationId xmlns:a16="http://schemas.microsoft.com/office/drawing/2014/main" id="{5F8538D4-75C3-48D3-AA7D-327D8B5F5711}"/>
               </a:ext>
             </a:extLst>
           </p:cNvPr>
@@ -11978,7 +11978,7 @@
           <p:cNvPr id="12" name="">
             <a:extLst xmlns:a="http://schemas.openxmlformats.org/drawingml/2006/main">
               <a:ext uri="{FF2B5EF4-FFF2-40B4-BE49-F238E27FC236}">
-                <a16:creationId xmlns:a16="http://schemas.microsoft.com/office/drawing/2014/main" id="{313B2034-1399-43B8-90DE-9B8DD86625C3}"/>
+                <a16:creationId xmlns:a16="http://schemas.microsoft.com/office/drawing/2014/main" id="{7EA9FB1E-CD2B-4993-84C4-3A3D93F1D595}"/>
               </a:ext>
             </a:extLst>
           </p:cNvPr>
@@ -12013,7 +12013,7 @@
           <p:cNvPr id="13" name="">
             <a:extLst xmlns:a="http://schemas.openxmlformats.org/drawingml/2006/main">
               <a:ext uri="{FF2B5EF4-FFF2-40B4-BE49-F238E27FC236}">
-                <a16:creationId xmlns:a16="http://schemas.microsoft.com/office/drawing/2014/main" id="{F5B37A1A-3A8B-4860-B36E-A9B9BED3693C}"/>
+                <a16:creationId xmlns:a16="http://schemas.microsoft.com/office/drawing/2014/main" id="{B7EFE4AF-C4FA-4631-B8D3-6E0C8A852EB9}"/>
               </a:ext>
             </a:extLst>
           </p:cNvPr>
@@ -12048,7 +12048,7 @@
           <p:cNvPr id="14" name="">
             <a:extLst xmlns:a="http://schemas.openxmlformats.org/drawingml/2006/main">
               <a:ext uri="{FF2B5EF4-FFF2-40B4-BE49-F238E27FC236}">
-                <a16:creationId xmlns:a16="http://schemas.microsoft.com/office/drawing/2014/main" id="{E58C4470-D45A-4C87-A6D0-A0A5F1D052B8}"/>
+                <a16:creationId xmlns:a16="http://schemas.microsoft.com/office/drawing/2014/main" id="{3E43CA0A-9632-4CD2-8F04-BAB1F56D86FC}"/>
               </a:ext>
             </a:extLst>
           </p:cNvPr>
@@ -12106,7 +12106,7 @@
           <p:cNvPr id="15" name="">
             <a:extLst xmlns:a="http://schemas.openxmlformats.org/drawingml/2006/main">
               <a:ext uri="{FF2B5EF4-FFF2-40B4-BE49-F238E27FC236}">
-                <a16:creationId xmlns:a16="http://schemas.microsoft.com/office/drawing/2014/main" id="{194EAEA0-E02C-48F7-93CA-D9C08A8D5BBB}"/>
+                <a16:creationId xmlns:a16="http://schemas.microsoft.com/office/drawing/2014/main" id="{005B773C-11F3-47EA-8C5B-B40EDBB26A6E}"/>
               </a:ext>
             </a:extLst>
           </p:cNvPr>
@@ -12181,7 +12181,7 @@
           <p:cNvPr id="16" name="">
             <a:extLst xmlns:a="http://schemas.openxmlformats.org/drawingml/2006/main">
               <a:ext uri="{FF2B5EF4-FFF2-40B4-BE49-F238E27FC236}">
-                <a16:creationId xmlns:a16="http://schemas.microsoft.com/office/drawing/2014/main" id="{940B6B83-B68C-4585-8245-E27196D68A75}"/>
+                <a16:creationId xmlns:a16="http://schemas.microsoft.com/office/drawing/2014/main" id="{EF328D35-977B-450C-8FB4-D06F8142FCCF}"/>
               </a:ext>
             </a:extLst>
           </p:cNvPr>
@@ -12216,7 +12216,7 @@
           <p:cNvPr id="17" name="">
             <a:extLst xmlns:a="http://schemas.openxmlformats.org/drawingml/2006/main">
               <a:ext uri="{FF2B5EF4-FFF2-40B4-BE49-F238E27FC236}">
-                <a16:creationId xmlns:a16="http://schemas.microsoft.com/office/drawing/2014/main" id="{6BF8758D-7492-4E41-9C57-6D926BE31D59}"/>
+                <a16:creationId xmlns:a16="http://schemas.microsoft.com/office/drawing/2014/main" id="{70503406-6CB3-409F-9F97-F61AAAD4C296}"/>
               </a:ext>
             </a:extLst>
           </p:cNvPr>
@@ -12251,7 +12251,7 @@
           <p:cNvPr id="18" name="">
             <a:extLst xmlns:a="http://schemas.openxmlformats.org/drawingml/2006/main">
               <a:ext uri="{FF2B5EF4-FFF2-40B4-BE49-F238E27FC236}">
-                <a16:creationId xmlns:a16="http://schemas.microsoft.com/office/drawing/2014/main" id="{552A1840-4C22-4BE9-8C3A-FD33F862F765}"/>
+                <a16:creationId xmlns:a16="http://schemas.microsoft.com/office/drawing/2014/main" id="{6776E4DE-D8EC-4656-97F3-E168763E91AF}"/>
               </a:ext>
             </a:extLst>
           </p:cNvPr>
@@ -12309,7 +12309,7 @@
           <p:cNvPr id="19" name="">
             <a:extLst xmlns:a="http://schemas.openxmlformats.org/drawingml/2006/main">
               <a:ext uri="{FF2B5EF4-FFF2-40B4-BE49-F238E27FC236}">
-                <a16:creationId xmlns:a16="http://schemas.microsoft.com/office/drawing/2014/main" id="{90B2F6C4-56DD-47E3-886C-09242777DC77}"/>
+                <a16:creationId xmlns:a16="http://schemas.microsoft.com/office/drawing/2014/main" id="{6261B230-D22C-4857-ACEB-ADC7825C18E8}"/>
               </a:ext>
             </a:extLst>
           </p:cNvPr>
@@ -12384,7 +12384,7 @@
           <p:cNvPr id="20" name="">
             <a:extLst xmlns:a="http://schemas.openxmlformats.org/drawingml/2006/main">
               <a:ext uri="{FF2B5EF4-FFF2-40B4-BE49-F238E27FC236}">
-                <a16:creationId xmlns:a16="http://schemas.microsoft.com/office/drawing/2014/main" id="{54D7630C-A4DB-4BCC-9C9B-06EBC397A542}"/>
+                <a16:creationId xmlns:a16="http://schemas.microsoft.com/office/drawing/2014/main" id="{F75C72DD-E976-43C7-905A-3CFBD524BDD9}"/>
               </a:ext>
             </a:extLst>
           </p:cNvPr>
@@ -12419,7 +12419,7 @@
           <p:cNvPr id="21" name="">
             <a:extLst xmlns:a="http://schemas.openxmlformats.org/drawingml/2006/main">
               <a:ext uri="{FF2B5EF4-FFF2-40B4-BE49-F238E27FC236}">
-                <a16:creationId xmlns:a16="http://schemas.microsoft.com/office/drawing/2014/main" id="{C4702F43-20A6-43B0-B70B-3D8B47987592}"/>
+                <a16:creationId xmlns:a16="http://schemas.microsoft.com/office/drawing/2014/main" id="{80EE2F05-7E8E-4F1A-A611-46E47F3E37F5}"/>
               </a:ext>
             </a:extLst>
           </p:cNvPr>
@@ -12454,7 +12454,7 @@
           <p:cNvPr id="22" name="">
             <a:extLst xmlns:a="http://schemas.openxmlformats.org/drawingml/2006/main">
               <a:ext uri="{FF2B5EF4-FFF2-40B4-BE49-F238E27FC236}">
-                <a16:creationId xmlns:a16="http://schemas.microsoft.com/office/drawing/2014/main" id="{3F2E109E-DD19-4198-A9CD-86673E81EE44}"/>
+                <a16:creationId xmlns:a16="http://schemas.microsoft.com/office/drawing/2014/main" id="{F71B3FF5-DF37-4EC0-86B7-D98FEAD31FA1}"/>
               </a:ext>
             </a:extLst>
           </p:cNvPr>
@@ -12512,7 +12512,7 @@
           <p:cNvPr id="23" name="">
             <a:extLst xmlns:a="http://schemas.openxmlformats.org/drawingml/2006/main">
               <a:ext uri="{FF2B5EF4-FFF2-40B4-BE49-F238E27FC236}">
-                <a16:creationId xmlns:a16="http://schemas.microsoft.com/office/drawing/2014/main" id="{C825DBC7-39E5-423D-8F85-685DEEC8FEF9}"/>
+                <a16:creationId xmlns:a16="http://schemas.microsoft.com/office/drawing/2014/main" id="{839E8D38-CAAD-4CD9-8785-56E61548FA89}"/>
               </a:ext>
             </a:extLst>
           </p:cNvPr>
@@ -12587,7 +12587,7 @@
           <p:cNvPr id="24" name="">
             <a:extLst xmlns:a="http://schemas.openxmlformats.org/drawingml/2006/main">
               <a:ext uri="{FF2B5EF4-FFF2-40B4-BE49-F238E27FC236}">
-                <a16:creationId xmlns:a16="http://schemas.microsoft.com/office/drawing/2014/main" id="{028C7CE4-6FF7-4332-8C33-A869D3C20CC3}"/>
+                <a16:creationId xmlns:a16="http://schemas.microsoft.com/office/drawing/2014/main" id="{498A42C3-2BF2-403B-BD11-63E20FEB4DFE}"/>
               </a:ext>
             </a:extLst>
           </p:cNvPr>
@@ -12622,7 +12622,7 @@
           <p:cNvPr id="25" name="">
             <a:extLst xmlns:a="http://schemas.openxmlformats.org/drawingml/2006/main">
               <a:ext uri="{FF2B5EF4-FFF2-40B4-BE49-F238E27FC236}">
-                <a16:creationId xmlns:a16="http://schemas.microsoft.com/office/drawing/2014/main" id="{24CDE3BF-45AD-4D2D-AA3F-0317AA22B96E}"/>
+                <a16:creationId xmlns:a16="http://schemas.microsoft.com/office/drawing/2014/main" id="{5BB4AF47-6AC3-43EC-8B90-7FFE95419F70}"/>
               </a:ext>
             </a:extLst>
           </p:cNvPr>
@@ -12657,7 +12657,7 @@
           <p:cNvPr id="26" name="">
             <a:extLst xmlns:a="http://schemas.openxmlformats.org/drawingml/2006/main">
               <a:ext uri="{FF2B5EF4-FFF2-40B4-BE49-F238E27FC236}">
-                <a16:creationId xmlns:a16="http://schemas.microsoft.com/office/drawing/2014/main" id="{B2E94556-9001-44C6-B28C-3AC79C7A5986}"/>
+                <a16:creationId xmlns:a16="http://schemas.microsoft.com/office/drawing/2014/main" id="{B16EA284-8FDF-4792-83B4-3842FFF93102}"/>
               </a:ext>
             </a:extLst>
           </p:cNvPr>
@@ -12715,7 +12715,7 @@
           <p:cNvPr id="27" name="">
             <a:extLst xmlns:a="http://schemas.openxmlformats.org/drawingml/2006/main">
               <a:ext uri="{FF2B5EF4-FFF2-40B4-BE49-F238E27FC236}">
-                <a16:creationId xmlns:a16="http://schemas.microsoft.com/office/drawing/2014/main" id="{5E64AA7A-D20C-4D00-B7C5-E9A32BF24A08}"/>
+                <a16:creationId xmlns:a16="http://schemas.microsoft.com/office/drawing/2014/main" id="{FC2303DE-631E-4D02-9574-07E2AE7AED35}"/>
               </a:ext>
             </a:extLst>
           </p:cNvPr>
@@ -12790,7 +12790,7 @@
           <p:cNvPr id="28" name="">
             <a:extLst xmlns:a="http://schemas.openxmlformats.org/drawingml/2006/main">
               <a:ext uri="{FF2B5EF4-FFF2-40B4-BE49-F238E27FC236}">
-                <a16:creationId xmlns:a16="http://schemas.microsoft.com/office/drawing/2014/main" id="{BCAD1E8E-7827-409A-9A11-4248563DEA22}"/>
+                <a16:creationId xmlns:a16="http://schemas.microsoft.com/office/drawing/2014/main" id="{1E062521-5D56-470D-B6C7-4817EAE2C799}"/>
               </a:ext>
             </a:extLst>
           </p:cNvPr>
@@ -12899,7 +12899,7 @@
           <p:cNvPr id="29" name="">
             <a:extLst xmlns:a="http://schemas.openxmlformats.org/drawingml/2006/main">
               <a:ext uri="{FF2B5EF4-FFF2-40B4-BE49-F238E27FC236}">
-                <a16:creationId xmlns:a16="http://schemas.microsoft.com/office/drawing/2014/main" id="{43ACECEA-12B6-410E-A2F1-EF265993336B}"/>
+                <a16:creationId xmlns:a16="http://schemas.microsoft.com/office/drawing/2014/main" id="{8ACEFE4A-C5F1-4DD6-B2D7-0D2E26D7398A}"/>
               </a:ext>
             </a:extLst>
           </p:cNvPr>
@@ -12955,7 +12955,7 @@
     </p:spTree>
     <p:extLst>
       <p:ext uri="{BB962C8B-B14F-4D97-AF65-F5344CB8AC3E}">
-        <p14:creationId xmlns:p14="http://schemas.microsoft.com/office/powerpoint/2010/main" val="229711466"/>
+        <p14:creationId xmlns:p14="http://schemas.microsoft.com/office/powerpoint/2010/main" val="1342361533"/>
       </p:ext>
     </p:extLst>
   </p:cSld>
@@ -12986,7 +12986,7 @@
           <p:cNvPr id="1" name="">
             <a:extLst xmlns:a="http://schemas.openxmlformats.org/drawingml/2006/main">
               <a:ext uri="{FF2B5EF4-FFF2-40B4-BE49-F238E27FC236}">
-                <a16:creationId xmlns:a16="http://schemas.microsoft.com/office/drawing/2014/main" id="{4A50FDED-23CF-4024-9280-E74D7C0A51B7}"/>
+                <a16:creationId xmlns:a16="http://schemas.microsoft.com/office/drawing/2014/main" id="{D88C3037-8466-4CCE-9595-F37E43C75696}"/>
               </a:ext>
             </a:extLst>
           </p:cNvPr>
@@ -13021,7 +13021,7 @@
           <p:cNvPr id="2" name="">
             <a:extLst xmlns:a="http://schemas.openxmlformats.org/drawingml/2006/main">
               <a:ext uri="{FF2B5EF4-FFF2-40B4-BE49-F238E27FC236}">
-                <a16:creationId xmlns:a16="http://schemas.microsoft.com/office/drawing/2014/main" id="{9D1987CA-3D2A-48A1-B653-45AB76FE276F}"/>
+                <a16:creationId xmlns:a16="http://schemas.microsoft.com/office/drawing/2014/main" id="{013243D3-F12C-4F05-9112-A8BEA07E507A}"/>
               </a:ext>
             </a:extLst>
           </p:cNvPr>
@@ -13056,7 +13056,7 @@
           <p:cNvPr id="3" name="">
             <a:extLst xmlns:a="http://schemas.openxmlformats.org/drawingml/2006/main">
               <a:ext uri="{FF2B5EF4-FFF2-40B4-BE49-F238E27FC236}">
-                <a16:creationId xmlns:a16="http://schemas.microsoft.com/office/drawing/2014/main" id="{634243D5-F24A-4A79-B963-2C8C9161317C}"/>
+                <a16:creationId xmlns:a16="http://schemas.microsoft.com/office/drawing/2014/main" id="{0DC211FC-96F5-4834-A03B-304BE95373C9}"/>
               </a:ext>
             </a:extLst>
           </p:cNvPr>
@@ -13114,7 +13114,7 @@
           <p:cNvPr id="4" name="">
             <a:extLst xmlns:a="http://schemas.openxmlformats.org/drawingml/2006/main">
               <a:ext uri="{FF2B5EF4-FFF2-40B4-BE49-F238E27FC236}">
-                <a16:creationId xmlns:a16="http://schemas.microsoft.com/office/drawing/2014/main" id="{5F2E5F62-F1DD-46B4-A0C3-46948B54D849}"/>
+                <a16:creationId xmlns:a16="http://schemas.microsoft.com/office/drawing/2014/main" id="{A4DEA4B7-72CC-42F2-AC52-BB16BEFE68C9}"/>
               </a:ext>
             </a:extLst>
           </p:cNvPr>
@@ -13172,7 +13172,7 @@
           <p:cNvPr id="5" name="">
             <a:extLst xmlns:a="http://schemas.openxmlformats.org/drawingml/2006/main">
               <a:ext uri="{FF2B5EF4-FFF2-40B4-BE49-F238E27FC236}">
-                <a16:creationId xmlns:a16="http://schemas.microsoft.com/office/drawing/2014/main" id="{FE79A224-C5F3-46EA-89E1-470E94B20AD4}"/>
+                <a16:creationId xmlns:a16="http://schemas.microsoft.com/office/drawing/2014/main" id="{CDA347DC-C612-46A5-8A27-6E66683C8C26}"/>
               </a:ext>
             </a:extLst>
           </p:cNvPr>
@@ -13207,7 +13207,7 @@
           <p:cNvPr id="6" name="">
             <a:extLst xmlns:a="http://schemas.openxmlformats.org/drawingml/2006/main">
               <a:ext uri="{FF2B5EF4-FFF2-40B4-BE49-F238E27FC236}">
-                <a16:creationId xmlns:a16="http://schemas.microsoft.com/office/drawing/2014/main" id="{262B1D2B-A876-4744-AC88-28B1E340A4B1}"/>
+                <a16:creationId xmlns:a16="http://schemas.microsoft.com/office/drawing/2014/main" id="{6249E4B1-9AAF-44D8-A1A3-7A30AEC456E3}"/>
               </a:ext>
             </a:extLst>
           </p:cNvPr>
@@ -13265,7 +13265,7 @@
           <p:cNvPr id="7" name="">
             <a:extLst xmlns:a="http://schemas.openxmlformats.org/drawingml/2006/main">
               <a:ext uri="{FF2B5EF4-FFF2-40B4-BE49-F238E27FC236}">
-                <a16:creationId xmlns:a16="http://schemas.microsoft.com/office/drawing/2014/main" id="{BB0A1C9C-68DB-4DC9-9989-D4F4CC585A25}"/>
+                <a16:creationId xmlns:a16="http://schemas.microsoft.com/office/drawing/2014/main" id="{D7BDE37A-820D-4856-BBA0-E32C43C12570}"/>
               </a:ext>
             </a:extLst>
           </p:cNvPr>
@@ -13323,7 +13323,7 @@
           <p:cNvPr id="8" name="">
             <a:extLst xmlns:a="http://schemas.openxmlformats.org/drawingml/2006/main">
               <a:ext uri="{FF2B5EF4-FFF2-40B4-BE49-F238E27FC236}">
-                <a16:creationId xmlns:a16="http://schemas.microsoft.com/office/drawing/2014/main" id="{CC3C3F17-F7AD-4E05-9160-0DD6CEF2CCE0}"/>
+                <a16:creationId xmlns:a16="http://schemas.microsoft.com/office/drawing/2014/main" id="{4223C796-F091-42F4-8D0A-E792BC334898}"/>
               </a:ext>
             </a:extLst>
           </p:cNvPr>
@@ -13358,7 +13358,7 @@
           <p:cNvPr id="9" name="">
             <a:extLst xmlns:a="http://schemas.openxmlformats.org/drawingml/2006/main">
               <a:ext uri="{FF2B5EF4-FFF2-40B4-BE49-F238E27FC236}">
-                <a16:creationId xmlns:a16="http://schemas.microsoft.com/office/drawing/2014/main" id="{C548792B-1FAE-44B0-8092-C733FF06E017}"/>
+                <a16:creationId xmlns:a16="http://schemas.microsoft.com/office/drawing/2014/main" id="{7978BA7A-F23F-4DD9-B192-05117BF61569}"/>
               </a:ext>
             </a:extLst>
           </p:cNvPr>
@@ -13393,7 +13393,7 @@
           <p:cNvPr id="10" name="">
             <a:extLst xmlns:a="http://schemas.openxmlformats.org/drawingml/2006/main">
               <a:ext uri="{FF2B5EF4-FFF2-40B4-BE49-F238E27FC236}">
-                <a16:creationId xmlns:a16="http://schemas.microsoft.com/office/drawing/2014/main" id="{7BA058EC-55E5-47AF-95F8-3D22B087B145}"/>
+                <a16:creationId xmlns:a16="http://schemas.microsoft.com/office/drawing/2014/main" id="{31A491F4-C01F-44D9-AF82-02B8AEF678FC}"/>
               </a:ext>
             </a:extLst>
           </p:cNvPr>
@@ -13451,7 +13451,7 @@
           <p:cNvPr id="11" name="">
             <a:extLst xmlns:a="http://schemas.openxmlformats.org/drawingml/2006/main">
               <a:ext uri="{FF2B5EF4-FFF2-40B4-BE49-F238E27FC236}">
-                <a16:creationId xmlns:a16="http://schemas.microsoft.com/office/drawing/2014/main" id="{7E5BCC00-6401-4C23-81B6-15498A0F29CF}"/>
+                <a16:creationId xmlns:a16="http://schemas.microsoft.com/office/drawing/2014/main" id="{02BFC8AC-18E4-4D05-93D2-716016E0E9E6}"/>
               </a:ext>
             </a:extLst>
           </p:cNvPr>
@@ -13560,7 +13560,7 @@
           <p:cNvPr id="12" name="">
             <a:extLst xmlns:a="http://schemas.openxmlformats.org/drawingml/2006/main">
               <a:ext uri="{FF2B5EF4-FFF2-40B4-BE49-F238E27FC236}">
-                <a16:creationId xmlns:a16="http://schemas.microsoft.com/office/drawing/2014/main" id="{F734A75A-60FD-4476-8411-F6F7FAAD9A89}"/>
+                <a16:creationId xmlns:a16="http://schemas.microsoft.com/office/drawing/2014/main" id="{58D8309C-C047-4010-9C66-F29FAACB8000}"/>
               </a:ext>
             </a:extLst>
           </p:cNvPr>
@@ -13595,7 +13595,7 @@
           <p:cNvPr id="13" name="">
             <a:extLst xmlns:a="http://schemas.openxmlformats.org/drawingml/2006/main">
               <a:ext uri="{FF2B5EF4-FFF2-40B4-BE49-F238E27FC236}">
-                <a16:creationId xmlns:a16="http://schemas.microsoft.com/office/drawing/2014/main" id="{61099144-869E-49CB-AFEA-4A8990A3746C}"/>
+                <a16:creationId xmlns:a16="http://schemas.microsoft.com/office/drawing/2014/main" id="{20ECDD92-303D-4E0A-A2F7-F2746E14ACE3}"/>
               </a:ext>
             </a:extLst>
           </p:cNvPr>
@@ -13630,7 +13630,7 @@
           <p:cNvPr id="14" name="">
             <a:extLst xmlns:a="http://schemas.openxmlformats.org/drawingml/2006/main">
               <a:ext uri="{FF2B5EF4-FFF2-40B4-BE49-F238E27FC236}">
-                <a16:creationId xmlns:a16="http://schemas.microsoft.com/office/drawing/2014/main" id="{7A11AA9C-91B8-4EF5-868E-457DC65D9405}"/>
+                <a16:creationId xmlns:a16="http://schemas.microsoft.com/office/drawing/2014/main" id="{923BA6F4-860B-44C0-B1B5-E3FA008CC443}"/>
               </a:ext>
             </a:extLst>
           </p:cNvPr>
@@ -13688,7 +13688,7 @@
           <p:cNvPr id="15" name="">
             <a:extLst xmlns:a="http://schemas.openxmlformats.org/drawingml/2006/main">
               <a:ext uri="{FF2B5EF4-FFF2-40B4-BE49-F238E27FC236}">
-                <a16:creationId xmlns:a16="http://schemas.microsoft.com/office/drawing/2014/main" id="{83D89DFC-90C8-4ACE-9216-532DAA9090E3}"/>
+                <a16:creationId xmlns:a16="http://schemas.microsoft.com/office/drawing/2014/main" id="{740641D5-5EA9-411E-B603-E65A33A5968B}"/>
               </a:ext>
             </a:extLst>
           </p:cNvPr>
@@ -13768,7 +13768,7 @@
           <p:cNvPr id="16" name="">
             <a:extLst xmlns:a="http://schemas.openxmlformats.org/drawingml/2006/main">
               <a:ext uri="{FF2B5EF4-FFF2-40B4-BE49-F238E27FC236}">
-                <a16:creationId xmlns:a16="http://schemas.microsoft.com/office/drawing/2014/main" id="{E7CA24AD-41B2-4A80-A00C-676D46BCC853}"/>
+                <a16:creationId xmlns:a16="http://schemas.microsoft.com/office/drawing/2014/main" id="{58675558-C390-486E-9971-233D55EF3A8F}"/>
               </a:ext>
             </a:extLst>
           </p:cNvPr>
@@ -13803,7 +13803,7 @@
           <p:cNvPr id="17" name="">
             <a:extLst xmlns:a="http://schemas.openxmlformats.org/drawingml/2006/main">
               <a:ext uri="{FF2B5EF4-FFF2-40B4-BE49-F238E27FC236}">
-                <a16:creationId xmlns:a16="http://schemas.microsoft.com/office/drawing/2014/main" id="{7494A2D2-E56E-4069-A763-6238578817B8}"/>
+                <a16:creationId xmlns:a16="http://schemas.microsoft.com/office/drawing/2014/main" id="{9419AD4B-0BD4-41B4-8F8F-BD5E5A001E44}"/>
               </a:ext>
             </a:extLst>
           </p:cNvPr>
@@ -13838,7 +13838,7 @@
           <p:cNvPr id="18" name="">
             <a:extLst xmlns:a="http://schemas.openxmlformats.org/drawingml/2006/main">
               <a:ext uri="{FF2B5EF4-FFF2-40B4-BE49-F238E27FC236}">
-                <a16:creationId xmlns:a16="http://schemas.microsoft.com/office/drawing/2014/main" id="{5276BE81-02A3-4667-BCA6-7BC2D79C269C}"/>
+                <a16:creationId xmlns:a16="http://schemas.microsoft.com/office/drawing/2014/main" id="{E0360712-75D4-415F-A022-945740ED18CA}"/>
               </a:ext>
             </a:extLst>
           </p:cNvPr>
@@ -13896,7 +13896,7 @@
           <p:cNvPr id="19" name="">
             <a:extLst xmlns:a="http://schemas.openxmlformats.org/drawingml/2006/main">
               <a:ext uri="{FF2B5EF4-FFF2-40B4-BE49-F238E27FC236}">
-                <a16:creationId xmlns:a16="http://schemas.microsoft.com/office/drawing/2014/main" id="{0F3FEDFF-B126-40FE-9B79-C34171BA95B7}"/>
+                <a16:creationId xmlns:a16="http://schemas.microsoft.com/office/drawing/2014/main" id="{87F4FC8B-7EA6-458D-9ACE-1ADE15880492}"/>
               </a:ext>
             </a:extLst>
           </p:cNvPr>
@@ -14005,7 +14005,7 @@
           <p:cNvPr id="20" name="">
             <a:extLst xmlns:a="http://schemas.openxmlformats.org/drawingml/2006/main">
               <a:ext uri="{FF2B5EF4-FFF2-40B4-BE49-F238E27FC236}">
-                <a16:creationId xmlns:a16="http://schemas.microsoft.com/office/drawing/2014/main" id="{652F658B-32FA-48D5-B38B-9565BD1CB30E}"/>
+                <a16:creationId xmlns:a16="http://schemas.microsoft.com/office/drawing/2014/main" id="{10B74971-FBE5-4C25-97BA-AF8ED7B30BA2}"/>
               </a:ext>
             </a:extLst>
           </p:cNvPr>
@@ -14040,7 +14040,7 @@
           <p:cNvPr id="21" name="">
             <a:extLst xmlns:a="http://schemas.openxmlformats.org/drawingml/2006/main">
               <a:ext uri="{FF2B5EF4-FFF2-40B4-BE49-F238E27FC236}">
-                <a16:creationId xmlns:a16="http://schemas.microsoft.com/office/drawing/2014/main" id="{03F35432-3248-4BF7-99BC-DB958D825D72}"/>
+                <a16:creationId xmlns:a16="http://schemas.microsoft.com/office/drawing/2014/main" id="{DA076EEF-F430-4A01-9D49-7F353CB80217}"/>
               </a:ext>
             </a:extLst>
           </p:cNvPr>
@@ -14115,7 +14115,7 @@
           <p:cNvPr id="22" name="">
             <a:extLst xmlns:a="http://schemas.openxmlformats.org/drawingml/2006/main">
               <a:ext uri="{FF2B5EF4-FFF2-40B4-BE49-F238E27FC236}">
-                <a16:creationId xmlns:a16="http://schemas.microsoft.com/office/drawing/2014/main" id="{D9C8BB20-3A95-4C2A-BFA0-2C8A5FFEFFD9}"/>
+                <a16:creationId xmlns:a16="http://schemas.microsoft.com/office/drawing/2014/main" id="{A771683A-FC73-4C41-835F-B9665F80AA54}"/>
               </a:ext>
             </a:extLst>
           </p:cNvPr>
@@ -14148,7 +14148,7 @@
           <p:cNvPr id="23" name="">
             <a:extLst xmlns:a="http://schemas.openxmlformats.org/drawingml/2006/main">
               <a:ext uri="{FF2B5EF4-FFF2-40B4-BE49-F238E27FC236}">
-                <a16:creationId xmlns:a16="http://schemas.microsoft.com/office/drawing/2014/main" id="{2311B758-FBCE-4B37-A0FD-CC1045DC7ABD}"/>
+                <a16:creationId xmlns:a16="http://schemas.microsoft.com/office/drawing/2014/main" id="{C4B4441C-103F-4D4C-A906-053C7D7FA61A}"/>
               </a:ext>
             </a:extLst>
           </p:cNvPr>
@@ -14183,7 +14183,7 @@
           <p:cNvPr id="24" name="">
             <a:extLst xmlns:a="http://schemas.openxmlformats.org/drawingml/2006/main">
               <a:ext uri="{FF2B5EF4-FFF2-40B4-BE49-F238E27FC236}">
-                <a16:creationId xmlns:a16="http://schemas.microsoft.com/office/drawing/2014/main" id="{670093AA-E8D9-4BBD-9E09-2AAE018224FA}"/>
+                <a16:creationId xmlns:a16="http://schemas.microsoft.com/office/drawing/2014/main" id="{A0A61783-2A6C-4EA6-B1B9-AC5EA4645B2C}"/>
               </a:ext>
             </a:extLst>
           </p:cNvPr>
@@ -14258,7 +14258,7 @@
           <p:cNvPr id="25" name="">
             <a:extLst xmlns:a="http://schemas.openxmlformats.org/drawingml/2006/main">
               <a:ext uri="{FF2B5EF4-FFF2-40B4-BE49-F238E27FC236}">
-                <a16:creationId xmlns:a16="http://schemas.microsoft.com/office/drawing/2014/main" id="{5B4981BB-AF53-47AA-9FCE-B53D1728B007}"/>
+                <a16:creationId xmlns:a16="http://schemas.microsoft.com/office/drawing/2014/main" id="{FBA82F29-C336-49BD-9C29-7CE62C433711}"/>
               </a:ext>
             </a:extLst>
           </p:cNvPr>
@@ -14291,7 +14291,7 @@
           <p:cNvPr id="26" name="">
             <a:extLst xmlns:a="http://schemas.openxmlformats.org/drawingml/2006/main">
               <a:ext uri="{FF2B5EF4-FFF2-40B4-BE49-F238E27FC236}">
-                <a16:creationId xmlns:a16="http://schemas.microsoft.com/office/drawing/2014/main" id="{DF492E27-FB88-49CC-A9F1-B3844BBBCB46}"/>
+                <a16:creationId xmlns:a16="http://schemas.microsoft.com/office/drawing/2014/main" id="{CD352D9E-B477-4738-A45B-AA768DCD237C}"/>
               </a:ext>
             </a:extLst>
           </p:cNvPr>
@@ -14326,7 +14326,7 @@
           <p:cNvPr id="27" name="">
             <a:extLst xmlns:a="http://schemas.openxmlformats.org/drawingml/2006/main">
               <a:ext uri="{FF2B5EF4-FFF2-40B4-BE49-F238E27FC236}">
-                <a16:creationId xmlns:a16="http://schemas.microsoft.com/office/drawing/2014/main" id="{155101BF-9663-457B-ABE7-06379F96999D}"/>
+                <a16:creationId xmlns:a16="http://schemas.microsoft.com/office/drawing/2014/main" id="{88E1EA59-879F-4CE9-9A90-81ED12F6B5C4}"/>
               </a:ext>
             </a:extLst>
           </p:cNvPr>
@@ -14401,7 +14401,7 @@
           <p:cNvPr id="28" name="">
             <a:extLst xmlns:a="http://schemas.openxmlformats.org/drawingml/2006/main">
               <a:ext uri="{FF2B5EF4-FFF2-40B4-BE49-F238E27FC236}">
-                <a16:creationId xmlns:a16="http://schemas.microsoft.com/office/drawing/2014/main" id="{52214829-D94A-4E1C-B049-8657167D01A7}"/>
+                <a16:creationId xmlns:a16="http://schemas.microsoft.com/office/drawing/2014/main" id="{7E36869B-E6C2-40D6-B567-872CC8B8A68F}"/>
               </a:ext>
             </a:extLst>
           </p:cNvPr>
@@ -14457,7 +14457,7 @@
     </p:spTree>
     <p:extLst>
       <p:ext uri="{BB962C8B-B14F-4D97-AF65-F5344CB8AC3E}">
-        <p14:creationId xmlns:p14="http://schemas.microsoft.com/office/powerpoint/2010/main" val="406573380"/>
+        <p14:creationId xmlns:p14="http://schemas.microsoft.com/office/powerpoint/2010/main" val="1662769238"/>
       </p:ext>
     </p:extLst>
   </p:cSld>
@@ -14488,7 +14488,7 @@
           <p:cNvPr id="1" name="">
             <a:extLst xmlns:a="http://schemas.openxmlformats.org/drawingml/2006/main">
               <a:ext uri="{FF2B5EF4-FFF2-40B4-BE49-F238E27FC236}">
-                <a16:creationId xmlns:a16="http://schemas.microsoft.com/office/drawing/2014/main" id="{F3AF299F-B2CF-43D0-BA31-D9B8F3EE8952}"/>
+                <a16:creationId xmlns:a16="http://schemas.microsoft.com/office/drawing/2014/main" id="{A9FDC30B-8467-4E98-9486-3EF0A7CA75D2}"/>
               </a:ext>
             </a:extLst>
           </p:cNvPr>
@@ -14523,7 +14523,7 @@
           <p:cNvPr id="2" name="">
             <a:extLst xmlns:a="http://schemas.openxmlformats.org/drawingml/2006/main">
               <a:ext uri="{FF2B5EF4-FFF2-40B4-BE49-F238E27FC236}">
-                <a16:creationId xmlns:a16="http://schemas.microsoft.com/office/drawing/2014/main" id="{216777D2-3B28-43D6-9707-79B82AE5500D}"/>
+                <a16:creationId xmlns:a16="http://schemas.microsoft.com/office/drawing/2014/main" id="{A3DC0903-50D6-4DBD-B57B-A5AAAF7283D3}"/>
               </a:ext>
             </a:extLst>
           </p:cNvPr>
@@ -14558,7 +14558,7 @@
           <p:cNvPr id="3" name="">
             <a:extLst xmlns:a="http://schemas.openxmlformats.org/drawingml/2006/main">
               <a:ext uri="{FF2B5EF4-FFF2-40B4-BE49-F238E27FC236}">
-                <a16:creationId xmlns:a16="http://schemas.microsoft.com/office/drawing/2014/main" id="{C1CD6317-57AE-4773-A18D-8A8B1448E694}"/>
+                <a16:creationId xmlns:a16="http://schemas.microsoft.com/office/drawing/2014/main" id="{961FD91D-7199-4271-ADBC-DB5842AF3AAC}"/>
               </a:ext>
             </a:extLst>
           </p:cNvPr>
@@ -14616,7 +14616,7 @@
           <p:cNvPr id="4" name="">
             <a:extLst xmlns:a="http://schemas.openxmlformats.org/drawingml/2006/main">
               <a:ext uri="{FF2B5EF4-FFF2-40B4-BE49-F238E27FC236}">
-                <a16:creationId xmlns:a16="http://schemas.microsoft.com/office/drawing/2014/main" id="{BFE5A36D-DF7B-43D7-B328-94EF6F7871AC}"/>
+                <a16:creationId xmlns:a16="http://schemas.microsoft.com/office/drawing/2014/main" id="{9A5089C5-FD52-4ABF-B283-6CDD05CBC901}"/>
               </a:ext>
             </a:extLst>
           </p:cNvPr>
@@ -14674,7 +14674,7 @@
           <p:cNvPr id="5" name="">
             <a:extLst xmlns:a="http://schemas.openxmlformats.org/drawingml/2006/main">
               <a:ext uri="{FF2B5EF4-FFF2-40B4-BE49-F238E27FC236}">
-                <a16:creationId xmlns:a16="http://schemas.microsoft.com/office/drawing/2014/main" id="{ACAA6933-15C4-43FC-BE07-8F927E3DCF9D}"/>
+                <a16:creationId xmlns:a16="http://schemas.microsoft.com/office/drawing/2014/main" id="{28AF9D85-7871-49C5-B521-734DE16FA4A7}"/>
               </a:ext>
             </a:extLst>
           </p:cNvPr>
@@ -14709,7 +14709,7 @@
           <p:cNvPr id="6" name="">
             <a:extLst xmlns:a="http://schemas.openxmlformats.org/drawingml/2006/main">
               <a:ext uri="{FF2B5EF4-FFF2-40B4-BE49-F238E27FC236}">
-                <a16:creationId xmlns:a16="http://schemas.microsoft.com/office/drawing/2014/main" id="{7BED6D43-113B-45AB-8E4A-C54DC1EC5C14}"/>
+                <a16:creationId xmlns:a16="http://schemas.microsoft.com/office/drawing/2014/main" id="{F96A3398-A187-4D16-A86D-840A5B2F4E33}"/>
               </a:ext>
             </a:extLst>
           </p:cNvPr>
@@ -14767,7 +14767,7 @@
           <p:cNvPr id="7" name="">
             <a:extLst xmlns:a="http://schemas.openxmlformats.org/drawingml/2006/main">
               <a:ext uri="{FF2B5EF4-FFF2-40B4-BE49-F238E27FC236}">
-                <a16:creationId xmlns:a16="http://schemas.microsoft.com/office/drawing/2014/main" id="{EBE1C903-3FE1-490C-BACA-70B2ECAE98ED}"/>
+                <a16:creationId xmlns:a16="http://schemas.microsoft.com/office/drawing/2014/main" id="{0215450F-DBA6-46A3-93EB-E7C81B7CDCCD}"/>
               </a:ext>
             </a:extLst>
           </p:cNvPr>
@@ -14825,7 +14825,7 @@
           <p:cNvPr id="8" name="">
             <a:extLst xmlns:a="http://schemas.openxmlformats.org/drawingml/2006/main">
               <a:ext uri="{FF2B5EF4-FFF2-40B4-BE49-F238E27FC236}">
-                <a16:creationId xmlns:a16="http://schemas.microsoft.com/office/drawing/2014/main" id="{F7327F45-26A1-4807-8C29-DDE02FDBA193}"/>
+                <a16:creationId xmlns:a16="http://schemas.microsoft.com/office/drawing/2014/main" id="{E4FA2C97-472B-4668-B7E7-06D3F72BD6BD}"/>
               </a:ext>
             </a:extLst>
           </p:cNvPr>
@@ -14860,7 +14860,7 @@
           <p:cNvPr id="9" name="">
             <a:extLst xmlns:a="http://schemas.openxmlformats.org/drawingml/2006/main">
               <a:ext uri="{FF2B5EF4-FFF2-40B4-BE49-F238E27FC236}">
-                <a16:creationId xmlns:a16="http://schemas.microsoft.com/office/drawing/2014/main" id="{73BFABA7-4399-4139-95DE-FC7BC86EDF61}"/>
+                <a16:creationId xmlns:a16="http://schemas.microsoft.com/office/drawing/2014/main" id="{40159B5B-20F5-4E5D-97D0-17F8693E46E9}"/>
               </a:ext>
             </a:extLst>
           </p:cNvPr>
@@ -14895,7 +14895,7 @@
           <p:cNvPr id="10" name="">
             <a:extLst xmlns:a="http://schemas.openxmlformats.org/drawingml/2006/main">
               <a:ext uri="{FF2B5EF4-FFF2-40B4-BE49-F238E27FC236}">
-                <a16:creationId xmlns:a16="http://schemas.microsoft.com/office/drawing/2014/main" id="{21F21696-26E6-4F70-B062-F3D67A16364F}"/>
+                <a16:creationId xmlns:a16="http://schemas.microsoft.com/office/drawing/2014/main" id="{9069DB67-38B0-44BB-AFB0-A4FB06AF23B3}"/>
               </a:ext>
             </a:extLst>
           </p:cNvPr>
@@ -14953,7 +14953,7 @@
           <p:cNvPr id="11" name="">
             <a:extLst xmlns:a="http://schemas.openxmlformats.org/drawingml/2006/main">
               <a:ext uri="{FF2B5EF4-FFF2-40B4-BE49-F238E27FC236}">
-                <a16:creationId xmlns:a16="http://schemas.microsoft.com/office/drawing/2014/main" id="{8CAC09A8-12E7-44CB-A6B2-4DE84637EBE4}"/>
+                <a16:creationId xmlns:a16="http://schemas.microsoft.com/office/drawing/2014/main" id="{BD8087A2-3436-4857-B4F8-085B20C93E0B}"/>
               </a:ext>
             </a:extLst>
           </p:cNvPr>
@@ -15045,7 +15045,7 @@
           <p:cNvPr id="12" name="">
             <a:extLst xmlns:a="http://schemas.openxmlformats.org/drawingml/2006/main">
               <a:ext uri="{FF2B5EF4-FFF2-40B4-BE49-F238E27FC236}">
-                <a16:creationId xmlns:a16="http://schemas.microsoft.com/office/drawing/2014/main" id="{F1C0B046-ED8A-4731-B685-3487683591DD}"/>
+                <a16:creationId xmlns:a16="http://schemas.microsoft.com/office/drawing/2014/main" id="{A50E7057-3921-48B9-ABF3-251BC7193BC1}"/>
               </a:ext>
             </a:extLst>
           </p:cNvPr>
@@ -15080,7 +15080,7 @@
           <p:cNvPr id="13" name="">
             <a:extLst xmlns:a="http://schemas.openxmlformats.org/drawingml/2006/main">
               <a:ext uri="{FF2B5EF4-FFF2-40B4-BE49-F238E27FC236}">
-                <a16:creationId xmlns:a16="http://schemas.microsoft.com/office/drawing/2014/main" id="{DE0DC1A8-2F14-4D9A-ADF0-14C28603E30E}"/>
+                <a16:creationId xmlns:a16="http://schemas.microsoft.com/office/drawing/2014/main" id="{DE3C4A32-FBE5-42FE-852B-AC22B21E2427}"/>
               </a:ext>
             </a:extLst>
           </p:cNvPr>
@@ -15115,7 +15115,7 @@
           <p:cNvPr id="14" name="">
             <a:extLst xmlns:a="http://schemas.openxmlformats.org/drawingml/2006/main">
               <a:ext uri="{FF2B5EF4-FFF2-40B4-BE49-F238E27FC236}">
-                <a16:creationId xmlns:a16="http://schemas.microsoft.com/office/drawing/2014/main" id="{CD5DEF3F-350F-4BF0-BD21-CF97D534C701}"/>
+                <a16:creationId xmlns:a16="http://schemas.microsoft.com/office/drawing/2014/main" id="{3AD771D9-99C9-42A4-87C7-4F0A93F6A42A}"/>
               </a:ext>
             </a:extLst>
           </p:cNvPr>
@@ -15173,7 +15173,7 @@
           <p:cNvPr id="15" name="">
             <a:extLst xmlns:a="http://schemas.openxmlformats.org/drawingml/2006/main">
               <a:ext uri="{FF2B5EF4-FFF2-40B4-BE49-F238E27FC236}">
-                <a16:creationId xmlns:a16="http://schemas.microsoft.com/office/drawing/2014/main" id="{0EC0D9E6-5941-43FE-BBE7-2B8CE1D181DF}"/>
+                <a16:creationId xmlns:a16="http://schemas.microsoft.com/office/drawing/2014/main" id="{E382BB9E-B2AC-4FB5-9B04-AFCAA59DE45F}"/>
               </a:ext>
             </a:extLst>
           </p:cNvPr>
@@ -15265,7 +15265,7 @@
           <p:cNvPr id="16" name="">
             <a:extLst xmlns:a="http://schemas.openxmlformats.org/drawingml/2006/main">
               <a:ext uri="{FF2B5EF4-FFF2-40B4-BE49-F238E27FC236}">
-                <a16:creationId xmlns:a16="http://schemas.microsoft.com/office/drawing/2014/main" id="{0B01817F-728B-45E0-A614-7C6D92A6F021}"/>
+                <a16:creationId xmlns:a16="http://schemas.microsoft.com/office/drawing/2014/main" id="{C715FF75-73C9-4964-B06C-AC15C6E75D68}"/>
               </a:ext>
             </a:extLst>
           </p:cNvPr>
@@ -15300,7 +15300,7 @@
           <p:cNvPr id="17" name="">
             <a:extLst xmlns:a="http://schemas.openxmlformats.org/drawingml/2006/main">
               <a:ext uri="{FF2B5EF4-FFF2-40B4-BE49-F238E27FC236}">
-                <a16:creationId xmlns:a16="http://schemas.microsoft.com/office/drawing/2014/main" id="{79B96B8E-E43E-4DB8-9BF5-189C47A753D1}"/>
+                <a16:creationId xmlns:a16="http://schemas.microsoft.com/office/drawing/2014/main" id="{DCEAEB18-0F48-4B07-9B2B-6A8C5DEE0ED5}"/>
               </a:ext>
             </a:extLst>
           </p:cNvPr>
@@ -15335,7 +15335,7 @@
           <p:cNvPr id="18" name="">
             <a:extLst xmlns:a="http://schemas.openxmlformats.org/drawingml/2006/main">
               <a:ext uri="{FF2B5EF4-FFF2-40B4-BE49-F238E27FC236}">
-                <a16:creationId xmlns:a16="http://schemas.microsoft.com/office/drawing/2014/main" id="{B76EF932-6C19-4CB7-A15E-C54744293EC8}"/>
+                <a16:creationId xmlns:a16="http://schemas.microsoft.com/office/drawing/2014/main" id="{D3C3BC9C-883D-461C-8AD6-C31163C809BE}"/>
               </a:ext>
             </a:extLst>
           </p:cNvPr>
@@ -15393,7 +15393,7 @@
           <p:cNvPr id="19" name="">
             <a:extLst xmlns:a="http://schemas.openxmlformats.org/drawingml/2006/main">
               <a:ext uri="{FF2B5EF4-FFF2-40B4-BE49-F238E27FC236}">
-                <a16:creationId xmlns:a16="http://schemas.microsoft.com/office/drawing/2014/main" id="{3C7A11A1-997D-4E33-BE4C-D9C5ECA0F775}"/>
+                <a16:creationId xmlns:a16="http://schemas.microsoft.com/office/drawing/2014/main" id="{AB9200C2-806B-4AF3-A05D-83E648B06C42}"/>
               </a:ext>
             </a:extLst>
           </p:cNvPr>
@@ -15502,7 +15502,7 @@
           <p:cNvPr id="20" name="">
             <a:extLst xmlns:a="http://schemas.openxmlformats.org/drawingml/2006/main">
               <a:ext uri="{FF2B5EF4-FFF2-40B4-BE49-F238E27FC236}">
-                <a16:creationId xmlns:a16="http://schemas.microsoft.com/office/drawing/2014/main" id="{F9A40C9C-A341-4024-9334-1BF66A2D113B}"/>
+                <a16:creationId xmlns:a16="http://schemas.microsoft.com/office/drawing/2014/main" id="{95E29C9C-316B-42CA-B781-FDD70002ACF4}"/>
               </a:ext>
             </a:extLst>
           </p:cNvPr>
@@ -15537,7 +15537,7 @@
           <p:cNvPr id="21" name="">
             <a:extLst xmlns:a="http://schemas.openxmlformats.org/drawingml/2006/main">
               <a:ext uri="{FF2B5EF4-FFF2-40B4-BE49-F238E27FC236}">
-                <a16:creationId xmlns:a16="http://schemas.microsoft.com/office/drawing/2014/main" id="{0AC0FDCB-F3F6-4762-8431-227D14C4B4B2}"/>
+                <a16:creationId xmlns:a16="http://schemas.microsoft.com/office/drawing/2014/main" id="{9EEB801D-0B22-4649-A3D4-B3D1597BD077}"/>
               </a:ext>
             </a:extLst>
           </p:cNvPr>
@@ -15572,7 +15572,7 @@
           <p:cNvPr id="22" name="">
             <a:extLst xmlns:a="http://schemas.openxmlformats.org/drawingml/2006/main">
               <a:ext uri="{FF2B5EF4-FFF2-40B4-BE49-F238E27FC236}">
-                <a16:creationId xmlns:a16="http://schemas.microsoft.com/office/drawing/2014/main" id="{1C666F88-1B5C-4189-9E78-90C81D1AD458}"/>
+                <a16:creationId xmlns:a16="http://schemas.microsoft.com/office/drawing/2014/main" id="{8C844164-0664-4CEA-A33C-521187B5163A}"/>
               </a:ext>
             </a:extLst>
           </p:cNvPr>
@@ -15630,7 +15630,7 @@
           <p:cNvPr id="23" name="">
             <a:extLst xmlns:a="http://schemas.openxmlformats.org/drawingml/2006/main">
               <a:ext uri="{FF2B5EF4-FFF2-40B4-BE49-F238E27FC236}">
-                <a16:creationId xmlns:a16="http://schemas.microsoft.com/office/drawing/2014/main" id="{04E193D2-DA19-4225-8CC3-AAEA84792CEF}"/>
+                <a16:creationId xmlns:a16="http://schemas.microsoft.com/office/drawing/2014/main" id="{76E1A14D-A325-41EC-B9D2-1FE15DC97204}"/>
               </a:ext>
             </a:extLst>
           </p:cNvPr>
@@ -15739,7 +15739,7 @@
           <p:cNvPr id="24" name="">
             <a:extLst xmlns:a="http://schemas.openxmlformats.org/drawingml/2006/main">
               <a:ext uri="{FF2B5EF4-FFF2-40B4-BE49-F238E27FC236}">
-                <a16:creationId xmlns:a16="http://schemas.microsoft.com/office/drawing/2014/main" id="{05B26AA6-911B-45E2-BAC1-C19F21B19AAA}"/>
+                <a16:creationId xmlns:a16="http://schemas.microsoft.com/office/drawing/2014/main" id="{8EF52A0A-BA43-4F4D-9472-77F16CAB5EC2}"/>
               </a:ext>
             </a:extLst>
           </p:cNvPr>
@@ -15774,7 +15774,7 @@
           <p:cNvPr id="25" name="">
             <a:extLst xmlns:a="http://schemas.openxmlformats.org/drawingml/2006/main">
               <a:ext uri="{FF2B5EF4-FFF2-40B4-BE49-F238E27FC236}">
-                <a16:creationId xmlns:a16="http://schemas.microsoft.com/office/drawing/2014/main" id="{A8D654E3-AA84-4E8C-ADC8-271176C83803}"/>
+                <a16:creationId xmlns:a16="http://schemas.microsoft.com/office/drawing/2014/main" id="{817015DC-DF4E-4208-935D-FD65FC2EA9F8}"/>
               </a:ext>
             </a:extLst>
           </p:cNvPr>
@@ -15809,7 +15809,7 @@
           <p:cNvPr id="26" name="">
             <a:extLst xmlns:a="http://schemas.openxmlformats.org/drawingml/2006/main">
               <a:ext uri="{FF2B5EF4-FFF2-40B4-BE49-F238E27FC236}">
-                <a16:creationId xmlns:a16="http://schemas.microsoft.com/office/drawing/2014/main" id="{CD420781-FB58-403F-97FC-95106F71C079}"/>
+                <a16:creationId xmlns:a16="http://schemas.microsoft.com/office/drawing/2014/main" id="{E913C571-2125-43EC-81E2-BA568E5C6780}"/>
               </a:ext>
             </a:extLst>
           </p:cNvPr>
@@ -15867,7 +15867,7 @@
           <p:cNvPr id="27" name="">
             <a:extLst xmlns:a="http://schemas.openxmlformats.org/drawingml/2006/main">
               <a:ext uri="{FF2B5EF4-FFF2-40B4-BE49-F238E27FC236}">
-                <a16:creationId xmlns:a16="http://schemas.microsoft.com/office/drawing/2014/main" id="{40E3CE43-6286-49AE-AB00-173D34215491}"/>
+                <a16:creationId xmlns:a16="http://schemas.microsoft.com/office/drawing/2014/main" id="{F73ABC1C-FCCC-437F-99B7-0FF7A0CAEE6B}"/>
               </a:ext>
             </a:extLst>
           </p:cNvPr>
@@ -15942,7 +15942,7 @@
           <p:cNvPr id="28" name="">
             <a:extLst xmlns:a="http://schemas.openxmlformats.org/drawingml/2006/main">
               <a:ext uri="{FF2B5EF4-FFF2-40B4-BE49-F238E27FC236}">
-                <a16:creationId xmlns:a16="http://schemas.microsoft.com/office/drawing/2014/main" id="{3038857D-3BDE-4170-9AA5-1C6F5A50B8BF}"/>
+                <a16:creationId xmlns:a16="http://schemas.microsoft.com/office/drawing/2014/main" id="{8BCC6EC3-25FD-4A66-BE00-A57BFB65CBBA}"/>
               </a:ext>
             </a:extLst>
           </p:cNvPr>
@@ -15977,7 +15977,7 @@
           <p:cNvPr id="29" name="">
             <a:extLst xmlns:a="http://schemas.openxmlformats.org/drawingml/2006/main">
               <a:ext uri="{FF2B5EF4-FFF2-40B4-BE49-F238E27FC236}">
-                <a16:creationId xmlns:a16="http://schemas.microsoft.com/office/drawing/2014/main" id="{FCD23FF3-4612-40DD-B596-49B864278368}"/>
+                <a16:creationId xmlns:a16="http://schemas.microsoft.com/office/drawing/2014/main" id="{130F35E7-B3C1-4B83-AE15-003F0FBBCF46}"/>
               </a:ext>
             </a:extLst>
           </p:cNvPr>
@@ -16012,7 +16012,7 @@
           <p:cNvPr id="30" name="">
             <a:extLst xmlns:a="http://schemas.openxmlformats.org/drawingml/2006/main">
               <a:ext uri="{FF2B5EF4-FFF2-40B4-BE49-F238E27FC236}">
-                <a16:creationId xmlns:a16="http://schemas.microsoft.com/office/drawing/2014/main" id="{174F0524-850B-4CCF-BAE0-001B21CD9BB3}"/>
+                <a16:creationId xmlns:a16="http://schemas.microsoft.com/office/drawing/2014/main" id="{43B4097E-F21E-47A6-8345-02BF3EB45391}"/>
               </a:ext>
             </a:extLst>
           </p:cNvPr>
@@ -16070,7 +16070,7 @@
           <p:cNvPr id="31" name="">
             <a:extLst xmlns:a="http://schemas.openxmlformats.org/drawingml/2006/main">
               <a:ext uri="{FF2B5EF4-FFF2-40B4-BE49-F238E27FC236}">
-                <a16:creationId xmlns:a16="http://schemas.microsoft.com/office/drawing/2014/main" id="{394B4E75-6790-45C3-B10D-A29E6BCE1134}"/>
+                <a16:creationId xmlns:a16="http://schemas.microsoft.com/office/drawing/2014/main" id="{A9B89C4A-4D88-4F5B-BB69-45ECDC1A8A50}"/>
               </a:ext>
             </a:extLst>
           </p:cNvPr>
@@ -16179,7 +16179,7 @@
           <p:cNvPr id="32" name="">
             <a:extLst xmlns:a="http://schemas.openxmlformats.org/drawingml/2006/main">
               <a:ext uri="{FF2B5EF4-FFF2-40B4-BE49-F238E27FC236}">
-                <a16:creationId xmlns:a16="http://schemas.microsoft.com/office/drawing/2014/main" id="{A6ED3FE1-A0D0-49E0-B99F-693D31BFF802}"/>
+                <a16:creationId xmlns:a16="http://schemas.microsoft.com/office/drawing/2014/main" id="{E73EA2C9-14F1-46E5-A293-F2124683B567}"/>
               </a:ext>
             </a:extLst>
           </p:cNvPr>
@@ -16214,7 +16214,7 @@
           <p:cNvPr id="33" name="">
             <a:extLst xmlns:a="http://schemas.openxmlformats.org/drawingml/2006/main">
               <a:ext uri="{FF2B5EF4-FFF2-40B4-BE49-F238E27FC236}">
-                <a16:creationId xmlns:a16="http://schemas.microsoft.com/office/drawing/2014/main" id="{220575B7-FD2D-45A2-94FB-8985EFDCEAD0}"/>
+                <a16:creationId xmlns:a16="http://schemas.microsoft.com/office/drawing/2014/main" id="{F2FDCE54-930B-448C-BF4F-A268E8EA88AF}"/>
               </a:ext>
             </a:extLst>
           </p:cNvPr>
@@ -16249,7 +16249,7 @@
           <p:cNvPr id="34" name="">
             <a:extLst xmlns:a="http://schemas.openxmlformats.org/drawingml/2006/main">
               <a:ext uri="{FF2B5EF4-FFF2-40B4-BE49-F238E27FC236}">
-                <a16:creationId xmlns:a16="http://schemas.microsoft.com/office/drawing/2014/main" id="{00E66201-0D14-4344-881E-969D9F768736}"/>
+                <a16:creationId xmlns:a16="http://schemas.microsoft.com/office/drawing/2014/main" id="{8503290B-7CF9-4FCA-BF28-FDDF07134570}"/>
               </a:ext>
             </a:extLst>
           </p:cNvPr>
@@ -16307,7 +16307,7 @@
           <p:cNvPr id="35" name="">
             <a:extLst xmlns:a="http://schemas.openxmlformats.org/drawingml/2006/main">
               <a:ext uri="{FF2B5EF4-FFF2-40B4-BE49-F238E27FC236}">
-                <a16:creationId xmlns:a16="http://schemas.microsoft.com/office/drawing/2014/main" id="{151939B6-020C-4779-AEFF-33A74F32C8A4}"/>
+                <a16:creationId xmlns:a16="http://schemas.microsoft.com/office/drawing/2014/main" id="{9710234D-2427-40F9-BDE2-C87280774D41}"/>
               </a:ext>
             </a:extLst>
           </p:cNvPr>
@@ -16416,7 +16416,7 @@
           <p:cNvPr id="36" name="">
             <a:extLst xmlns:a="http://schemas.openxmlformats.org/drawingml/2006/main">
               <a:ext uri="{FF2B5EF4-FFF2-40B4-BE49-F238E27FC236}">
-                <a16:creationId xmlns:a16="http://schemas.microsoft.com/office/drawing/2014/main" id="{4E9AFB7E-C64F-4F9D-8A2A-30D90DF35DCE}"/>
+                <a16:creationId xmlns:a16="http://schemas.microsoft.com/office/drawing/2014/main" id="{1380A885-273F-4073-9534-20354B3BC714}"/>
               </a:ext>
             </a:extLst>
           </p:cNvPr>
@@ -16451,7 +16451,7 @@
           <p:cNvPr id="37" name="">
             <a:extLst xmlns:a="http://schemas.openxmlformats.org/drawingml/2006/main">
               <a:ext uri="{FF2B5EF4-FFF2-40B4-BE49-F238E27FC236}">
-                <a16:creationId xmlns:a16="http://schemas.microsoft.com/office/drawing/2014/main" id="{5C32EB0B-E09F-43A1-9299-E155AD923E9D}"/>
+                <a16:creationId xmlns:a16="http://schemas.microsoft.com/office/drawing/2014/main" id="{4E79B40C-E8F6-40AE-9D3E-9E2702A15C4B}"/>
               </a:ext>
             </a:extLst>
           </p:cNvPr>
@@ -16486,7 +16486,7 @@
           <p:cNvPr id="38" name="">
             <a:extLst xmlns:a="http://schemas.openxmlformats.org/drawingml/2006/main">
               <a:ext uri="{FF2B5EF4-FFF2-40B4-BE49-F238E27FC236}">
-                <a16:creationId xmlns:a16="http://schemas.microsoft.com/office/drawing/2014/main" id="{63BF0844-7162-43F1-ABE8-E6124E9ADDD5}"/>
+                <a16:creationId xmlns:a16="http://schemas.microsoft.com/office/drawing/2014/main" id="{5C4D614F-5B72-482B-A531-D5CB8FA61B2D}"/>
               </a:ext>
             </a:extLst>
           </p:cNvPr>
@@ -16544,7 +16544,7 @@
           <p:cNvPr id="39" name="">
             <a:extLst xmlns:a="http://schemas.openxmlformats.org/drawingml/2006/main">
               <a:ext uri="{FF2B5EF4-FFF2-40B4-BE49-F238E27FC236}">
-                <a16:creationId xmlns:a16="http://schemas.microsoft.com/office/drawing/2014/main" id="{D37FC68A-B06A-4801-A048-5C1DD780791F}"/>
+                <a16:creationId xmlns:a16="http://schemas.microsoft.com/office/drawing/2014/main" id="{59B89EBE-678E-4345-BDCE-9480D6FE9DAF}"/>
               </a:ext>
             </a:extLst>
           </p:cNvPr>
@@ -16653,7 +16653,7 @@
           <p:cNvPr id="40" name="">
             <a:extLst xmlns:a="http://schemas.openxmlformats.org/drawingml/2006/main">
               <a:ext uri="{FF2B5EF4-FFF2-40B4-BE49-F238E27FC236}">
-                <a16:creationId xmlns:a16="http://schemas.microsoft.com/office/drawing/2014/main" id="{C3B26855-38E8-4D95-951A-8DF211E05F3C}"/>
+                <a16:creationId xmlns:a16="http://schemas.microsoft.com/office/drawing/2014/main" id="{B2F3FB16-876F-425F-9BC6-994C1FB7E3FB}"/>
               </a:ext>
             </a:extLst>
           </p:cNvPr>
@@ -16688,7 +16688,7 @@
           <p:cNvPr id="41" name="">
             <a:extLst xmlns:a="http://schemas.openxmlformats.org/drawingml/2006/main">
               <a:ext uri="{FF2B5EF4-FFF2-40B4-BE49-F238E27FC236}">
-                <a16:creationId xmlns:a16="http://schemas.microsoft.com/office/drawing/2014/main" id="{8584D660-F360-4CBF-B00E-EDBA5C155848}"/>
+                <a16:creationId xmlns:a16="http://schemas.microsoft.com/office/drawing/2014/main" id="{91B93884-B13A-4040-912C-97ED173FA68A}"/>
               </a:ext>
             </a:extLst>
           </p:cNvPr>
@@ -16723,7 +16723,7 @@
           <p:cNvPr id="42" name="">
             <a:extLst xmlns:a="http://schemas.openxmlformats.org/drawingml/2006/main">
               <a:ext uri="{FF2B5EF4-FFF2-40B4-BE49-F238E27FC236}">
-                <a16:creationId xmlns:a16="http://schemas.microsoft.com/office/drawing/2014/main" id="{2525BE52-DFCA-40CB-9116-741330E837CB}"/>
+                <a16:creationId xmlns:a16="http://schemas.microsoft.com/office/drawing/2014/main" id="{B9B41553-5E30-4D62-B165-7C449D4FCFCD}"/>
               </a:ext>
             </a:extLst>
           </p:cNvPr>
@@ -16781,7 +16781,7 @@
           <p:cNvPr id="43" name="">
             <a:extLst xmlns:a="http://schemas.openxmlformats.org/drawingml/2006/main">
               <a:ext uri="{FF2B5EF4-FFF2-40B4-BE49-F238E27FC236}">
-                <a16:creationId xmlns:a16="http://schemas.microsoft.com/office/drawing/2014/main" id="{1FB3AEDB-5441-4C97-AF33-EC049C6D4FD7}"/>
+                <a16:creationId xmlns:a16="http://schemas.microsoft.com/office/drawing/2014/main" id="{6CB47E5D-F2E6-407E-BC15-37E62E214458}"/>
               </a:ext>
             </a:extLst>
           </p:cNvPr>
@@ -16890,7 +16890,7 @@
           <p:cNvPr id="44" name="">
             <a:extLst xmlns:a="http://schemas.openxmlformats.org/drawingml/2006/main">
               <a:ext uri="{FF2B5EF4-FFF2-40B4-BE49-F238E27FC236}">
-                <a16:creationId xmlns:a16="http://schemas.microsoft.com/office/drawing/2014/main" id="{7D2170E1-21F8-4D5A-A004-95E42F85E438}"/>
+                <a16:creationId xmlns:a16="http://schemas.microsoft.com/office/drawing/2014/main" id="{80F9EC3F-61C8-47E6-A1F6-E73266FD754F}"/>
               </a:ext>
             </a:extLst>
           </p:cNvPr>
@@ -16946,7 +16946,7 @@
     </p:spTree>
     <p:extLst>
       <p:ext uri="{BB962C8B-B14F-4D97-AF65-F5344CB8AC3E}">
-        <p14:creationId xmlns:p14="http://schemas.microsoft.com/office/powerpoint/2010/main" val="1253023795"/>
+        <p14:creationId xmlns:p14="http://schemas.microsoft.com/office/powerpoint/2010/main" val="31301214"/>
       </p:ext>
     </p:extLst>
   </p:cSld>
@@ -16977,7 +16977,7 @@
           <p:cNvPr id="1" name="">
             <a:extLst xmlns:a="http://schemas.openxmlformats.org/drawingml/2006/main">
               <a:ext uri="{FF2B5EF4-FFF2-40B4-BE49-F238E27FC236}">
-                <a16:creationId xmlns:a16="http://schemas.microsoft.com/office/drawing/2014/main" id="{F8C61C1B-88BC-4A7A-974B-9519BC61522B}"/>
+                <a16:creationId xmlns:a16="http://schemas.microsoft.com/office/drawing/2014/main" id="{3D8DCA5B-FF73-408F-A3CD-D5DEDCA94E8F}"/>
               </a:ext>
             </a:extLst>
           </p:cNvPr>
@@ -17012,7 +17012,7 @@
           <p:cNvPr id="2" name="">
             <a:extLst xmlns:a="http://schemas.openxmlformats.org/drawingml/2006/main">
               <a:ext uri="{FF2B5EF4-FFF2-40B4-BE49-F238E27FC236}">
-                <a16:creationId xmlns:a16="http://schemas.microsoft.com/office/drawing/2014/main" id="{F84A8485-F7CB-479B-90EA-DD0D5147341B}"/>
+                <a16:creationId xmlns:a16="http://schemas.microsoft.com/office/drawing/2014/main" id="{B4308184-286E-44A2-991C-CC7C3A169729}"/>
               </a:ext>
             </a:extLst>
           </p:cNvPr>
@@ -17047,7 +17047,7 @@
           <p:cNvPr id="3" name="">
             <a:extLst xmlns:a="http://schemas.openxmlformats.org/drawingml/2006/main">
               <a:ext uri="{FF2B5EF4-FFF2-40B4-BE49-F238E27FC236}">
-                <a16:creationId xmlns:a16="http://schemas.microsoft.com/office/drawing/2014/main" id="{9B0B5C20-7512-48CC-905D-43C962A5B83B}"/>
+                <a16:creationId xmlns:a16="http://schemas.microsoft.com/office/drawing/2014/main" id="{8EFD804B-1AE5-4CC0-859A-FFCD90226AA2}"/>
               </a:ext>
             </a:extLst>
           </p:cNvPr>
@@ -17105,7 +17105,7 @@
           <p:cNvPr id="4" name="">
             <a:extLst xmlns:a="http://schemas.openxmlformats.org/drawingml/2006/main">
               <a:ext uri="{FF2B5EF4-FFF2-40B4-BE49-F238E27FC236}">
-                <a16:creationId xmlns:a16="http://schemas.microsoft.com/office/drawing/2014/main" id="{BF245302-3487-405F-BFD6-BA0CF9F2CDD2}"/>
+                <a16:creationId xmlns:a16="http://schemas.microsoft.com/office/drawing/2014/main" id="{57F79E9A-7266-4A0A-A376-ABB62ADEB3E3}"/>
               </a:ext>
             </a:extLst>
           </p:cNvPr>
@@ -17163,7 +17163,7 @@
           <p:cNvPr id="5" name="">
             <a:extLst xmlns:a="http://schemas.openxmlformats.org/drawingml/2006/main">
               <a:ext uri="{FF2B5EF4-FFF2-40B4-BE49-F238E27FC236}">
-                <a16:creationId xmlns:a16="http://schemas.microsoft.com/office/drawing/2014/main" id="{E2F2766D-A13E-4B78-BD55-906D0DCB6220}"/>
+                <a16:creationId xmlns:a16="http://schemas.microsoft.com/office/drawing/2014/main" id="{9099D7DF-4132-4F63-A736-90329571A585}"/>
               </a:ext>
             </a:extLst>
           </p:cNvPr>
@@ -17198,7 +17198,7 @@
           <p:cNvPr id="6" name="">
             <a:extLst xmlns:a="http://schemas.openxmlformats.org/drawingml/2006/main">
               <a:ext uri="{FF2B5EF4-FFF2-40B4-BE49-F238E27FC236}">
-                <a16:creationId xmlns:a16="http://schemas.microsoft.com/office/drawing/2014/main" id="{7DB40A8E-2A90-4C95-818E-D7FCAA4F48AC}"/>
+                <a16:creationId xmlns:a16="http://schemas.microsoft.com/office/drawing/2014/main" id="{1BC0DF87-2824-4561-ADB7-91EA00F88C6E}"/>
               </a:ext>
             </a:extLst>
           </p:cNvPr>
@@ -17256,7 +17256,7 @@
           <p:cNvPr id="7" name="">
             <a:extLst xmlns:a="http://schemas.openxmlformats.org/drawingml/2006/main">
               <a:ext uri="{FF2B5EF4-FFF2-40B4-BE49-F238E27FC236}">
-                <a16:creationId xmlns:a16="http://schemas.microsoft.com/office/drawing/2014/main" id="{D886B736-1401-41B4-8EE0-F1484CBACF31}"/>
+                <a16:creationId xmlns:a16="http://schemas.microsoft.com/office/drawing/2014/main" id="{14AE5D72-EC2A-4ACD-A5C9-C6F9EAE52530}"/>
               </a:ext>
             </a:extLst>
           </p:cNvPr>
@@ -17304,7 +17304,7 @@
                   <a:srgbClr val="4F5B66"/>
                 </a:solidFill>
               </a:rPr>
-              <a:t>本頁以圖形表示 actor、系統邊界與主要 use cases。</a:t>
+              <a:t>本頁以 actor、subject、association 與 include 關係呈現主要 use cases。</a:t>
             </a:r>
           </a:p>
         </p:txBody>
@@ -17314,7 +17314,7 @@
           <p:cNvPr id="8" name="">
             <a:extLst xmlns:a="http://schemas.openxmlformats.org/drawingml/2006/main">
               <a:ext uri="{FF2B5EF4-FFF2-40B4-BE49-F238E27FC236}">
-                <a16:creationId xmlns:a16="http://schemas.microsoft.com/office/drawing/2014/main" id="{A61179E7-B895-44F1-A62D-F220B9D36A7C}"/>
+                <a16:creationId xmlns:a16="http://schemas.microsoft.com/office/drawing/2014/main" id="{81AA0CA4-5BA7-43EC-A644-88CDB81E2CA9}"/>
               </a:ext>
             </a:extLst>
           </p:cNvPr>
@@ -17349,7 +17349,7 @@
           <p:cNvPr id="9" name="">
             <a:extLst xmlns:a="http://schemas.openxmlformats.org/drawingml/2006/main">
               <a:ext uri="{FF2B5EF4-FFF2-40B4-BE49-F238E27FC236}">
-                <a16:creationId xmlns:a16="http://schemas.microsoft.com/office/drawing/2014/main" id="{71FE1006-2720-4E11-8C82-3CF25F509F01}"/>
+                <a16:creationId xmlns:a16="http://schemas.microsoft.com/office/drawing/2014/main" id="{95A5C232-0048-4581-8445-743474A58AF7}"/>
               </a:ext>
             </a:extLst>
           </p:cNvPr>
@@ -17407,7 +17407,7 @@
           <p:cNvPr id="10" name="">
             <a:extLst xmlns:a="http://schemas.openxmlformats.org/drawingml/2006/main">
               <a:ext uri="{FF2B5EF4-FFF2-40B4-BE49-F238E27FC236}">
-                <a16:creationId xmlns:a16="http://schemas.microsoft.com/office/drawing/2014/main" id="{BA2E4EF3-65FC-4CDC-8BF1-B346BA9C54C5}"/>
+                <a16:creationId xmlns:a16="http://schemas.microsoft.com/office/drawing/2014/main" id="{43F26666-E448-4677-82DC-FD56373E1D8A}"/>
               </a:ext>
             </a:extLst>
           </p:cNvPr>
@@ -17440,7 +17440,7 @@
           <p:cNvPr id="11" name="">
             <a:extLst xmlns:a="http://schemas.openxmlformats.org/drawingml/2006/main">
               <a:ext uri="{FF2B5EF4-FFF2-40B4-BE49-F238E27FC236}">
-                <a16:creationId xmlns:a16="http://schemas.microsoft.com/office/drawing/2014/main" id="{643AFFE5-7EA8-48F4-BD5E-7804B3ABA2C6}"/>
+                <a16:creationId xmlns:a16="http://schemas.microsoft.com/office/drawing/2014/main" id="{13AEB242-185D-4200-B7BD-ECE396DF4AE5}"/>
               </a:ext>
             </a:extLst>
           </p:cNvPr>
@@ -17475,7 +17475,7 @@
           <p:cNvPr id="12" name="">
             <a:extLst xmlns:a="http://schemas.openxmlformats.org/drawingml/2006/main">
               <a:ext uri="{FF2B5EF4-FFF2-40B4-BE49-F238E27FC236}">
-                <a16:creationId xmlns:a16="http://schemas.microsoft.com/office/drawing/2014/main" id="{CD0532FF-9C2A-4E07-B98E-74457896ADF8}"/>
+                <a16:creationId xmlns:a16="http://schemas.microsoft.com/office/drawing/2014/main" id="{2935302D-AE19-4819-B7ED-DCDD0A6C9B0F}"/>
               </a:ext>
             </a:extLst>
           </p:cNvPr>
@@ -17510,7 +17510,7 @@
           <p:cNvPr id="13" name="">
             <a:extLst xmlns:a="http://schemas.openxmlformats.org/drawingml/2006/main">
               <a:ext uri="{FF2B5EF4-FFF2-40B4-BE49-F238E27FC236}">
-                <a16:creationId xmlns:a16="http://schemas.microsoft.com/office/drawing/2014/main" id="{A715A354-D8EA-45BF-A719-043FB808EABA}"/>
+                <a16:creationId xmlns:a16="http://schemas.microsoft.com/office/drawing/2014/main" id="{6560CA74-6387-4236-A703-D850EE3B96A0}"/>
               </a:ext>
             </a:extLst>
           </p:cNvPr>
@@ -17545,7 +17545,7 @@
           <p:cNvPr id="14" name="">
             <a:extLst xmlns:a="http://schemas.openxmlformats.org/drawingml/2006/main">
               <a:ext uri="{FF2B5EF4-FFF2-40B4-BE49-F238E27FC236}">
-                <a16:creationId xmlns:a16="http://schemas.microsoft.com/office/drawing/2014/main" id="{5211CF35-1149-4874-BCA4-F49DC73721F4}"/>
+                <a16:creationId xmlns:a16="http://schemas.microsoft.com/office/drawing/2014/main" id="{EEEAF03E-EA7B-49A8-B980-B40031418C44}"/>
               </a:ext>
             </a:extLst>
           </p:cNvPr>
@@ -17580,7 +17580,7 @@
           <p:cNvPr id="15" name="">
             <a:extLst xmlns:a="http://schemas.openxmlformats.org/drawingml/2006/main">
               <a:ext uri="{FF2B5EF4-FFF2-40B4-BE49-F238E27FC236}">
-                <a16:creationId xmlns:a16="http://schemas.microsoft.com/office/drawing/2014/main" id="{8D22F0F6-3367-40FB-8EDA-30E34CE1C379}"/>
+                <a16:creationId xmlns:a16="http://schemas.microsoft.com/office/drawing/2014/main" id="{EEC96D1F-5648-4BE3-81B8-FA35DF826E1A}"/>
               </a:ext>
             </a:extLst>
           </p:cNvPr>
@@ -17615,7 +17615,7 @@
           <p:cNvPr id="16" name="">
             <a:extLst xmlns:a="http://schemas.openxmlformats.org/drawingml/2006/main">
               <a:ext uri="{FF2B5EF4-FFF2-40B4-BE49-F238E27FC236}">
-                <a16:creationId xmlns:a16="http://schemas.microsoft.com/office/drawing/2014/main" id="{25347289-E0E6-4824-A96E-850330753368}"/>
+                <a16:creationId xmlns:a16="http://schemas.microsoft.com/office/drawing/2014/main" id="{D4A62A01-DEF4-4665-BCF4-71CA061ED8CC}"/>
               </a:ext>
             </a:extLst>
           </p:cNvPr>
@@ -17673,7 +17673,7 @@
           <p:cNvPr id="17" name="">
             <a:extLst xmlns:a="http://schemas.openxmlformats.org/drawingml/2006/main">
               <a:ext uri="{FF2B5EF4-FFF2-40B4-BE49-F238E27FC236}">
-                <a16:creationId xmlns:a16="http://schemas.microsoft.com/office/drawing/2014/main" id="{B40EEF23-D96E-4DB2-96A3-4EFB4C07785F}"/>
+                <a16:creationId xmlns:a16="http://schemas.microsoft.com/office/drawing/2014/main" id="{75167F61-97EE-481C-92BD-691320191BD0}"/>
               </a:ext>
             </a:extLst>
           </p:cNvPr>
@@ -17706,7 +17706,7 @@
           <p:cNvPr id="18" name="">
             <a:extLst xmlns:a="http://schemas.openxmlformats.org/drawingml/2006/main">
               <a:ext uri="{FF2B5EF4-FFF2-40B4-BE49-F238E27FC236}">
-                <a16:creationId xmlns:a16="http://schemas.microsoft.com/office/drawing/2014/main" id="{D9A33820-02DF-4DB7-88F3-4C65F009B5B1}"/>
+                <a16:creationId xmlns:a16="http://schemas.microsoft.com/office/drawing/2014/main" id="{7C8D0629-8164-4F82-A3C5-CEA2CBF4CC80}"/>
               </a:ext>
             </a:extLst>
           </p:cNvPr>
@@ -17741,7 +17741,7 @@
           <p:cNvPr id="19" name="">
             <a:extLst xmlns:a="http://schemas.openxmlformats.org/drawingml/2006/main">
               <a:ext uri="{FF2B5EF4-FFF2-40B4-BE49-F238E27FC236}">
-                <a16:creationId xmlns:a16="http://schemas.microsoft.com/office/drawing/2014/main" id="{27F2B5D4-9396-42F2-8998-6CF9E5DD52F5}"/>
+                <a16:creationId xmlns:a16="http://schemas.microsoft.com/office/drawing/2014/main" id="{781FC8A3-80C5-472C-B07C-B24A5DD2AAE7}"/>
               </a:ext>
             </a:extLst>
           </p:cNvPr>
@@ -17776,7 +17776,7 @@
           <p:cNvPr id="20" name="">
             <a:extLst xmlns:a="http://schemas.openxmlformats.org/drawingml/2006/main">
               <a:ext uri="{FF2B5EF4-FFF2-40B4-BE49-F238E27FC236}">
-                <a16:creationId xmlns:a16="http://schemas.microsoft.com/office/drawing/2014/main" id="{1FC137DB-01AF-49B0-8EBE-507089386570}"/>
+                <a16:creationId xmlns:a16="http://schemas.microsoft.com/office/drawing/2014/main" id="{8E24DF91-F7F2-49E2-98FB-5ED054A98AC6}"/>
               </a:ext>
             </a:extLst>
           </p:cNvPr>
@@ -17811,7 +17811,7 @@
           <p:cNvPr id="21" name="">
             <a:extLst xmlns:a="http://schemas.openxmlformats.org/drawingml/2006/main">
               <a:ext uri="{FF2B5EF4-FFF2-40B4-BE49-F238E27FC236}">
-                <a16:creationId xmlns:a16="http://schemas.microsoft.com/office/drawing/2014/main" id="{924C7480-6F80-4EE2-B75A-1608795B093B}"/>
+                <a16:creationId xmlns:a16="http://schemas.microsoft.com/office/drawing/2014/main" id="{AFFAF967-6A58-4259-85CB-C93F31F5D91C}"/>
               </a:ext>
             </a:extLst>
           </p:cNvPr>
@@ -17846,7 +17846,7 @@
           <p:cNvPr id="22" name="">
             <a:extLst xmlns:a="http://schemas.openxmlformats.org/drawingml/2006/main">
               <a:ext uri="{FF2B5EF4-FFF2-40B4-BE49-F238E27FC236}">
-                <a16:creationId xmlns:a16="http://schemas.microsoft.com/office/drawing/2014/main" id="{2582121B-9D40-446E-A5C9-2A6BFE1313D2}"/>
+                <a16:creationId xmlns:a16="http://schemas.microsoft.com/office/drawing/2014/main" id="{A6AEF9E6-4BD0-4DE9-B60C-D83AC76F27D8}"/>
               </a:ext>
             </a:extLst>
           </p:cNvPr>
@@ -17881,7 +17881,7 @@
           <p:cNvPr id="23" name="">
             <a:extLst xmlns:a="http://schemas.openxmlformats.org/drawingml/2006/main">
               <a:ext uri="{FF2B5EF4-FFF2-40B4-BE49-F238E27FC236}">
-                <a16:creationId xmlns:a16="http://schemas.microsoft.com/office/drawing/2014/main" id="{E0314D2B-D901-45C1-81C8-ADF0A2DC0985}"/>
+                <a16:creationId xmlns:a16="http://schemas.microsoft.com/office/drawing/2014/main" id="{2FB86479-E327-47C9-B49D-12492822DF9B}"/>
               </a:ext>
             </a:extLst>
           </p:cNvPr>
@@ -17939,7 +17939,7 @@
           <p:cNvPr id="24" name="">
             <a:extLst xmlns:a="http://schemas.openxmlformats.org/drawingml/2006/main">
               <a:ext uri="{FF2B5EF4-FFF2-40B4-BE49-F238E27FC236}">
-                <a16:creationId xmlns:a16="http://schemas.microsoft.com/office/drawing/2014/main" id="{773B6C6F-29AC-4C77-A257-6285C53F3BA9}"/>
+                <a16:creationId xmlns:a16="http://schemas.microsoft.com/office/drawing/2014/main" id="{C0253C73-40CD-4AAC-841E-52E13574218E}"/>
               </a:ext>
             </a:extLst>
           </p:cNvPr>
@@ -17972,7 +17972,7 @@
           <p:cNvPr id="25" name="">
             <a:extLst xmlns:a="http://schemas.openxmlformats.org/drawingml/2006/main">
               <a:ext uri="{FF2B5EF4-FFF2-40B4-BE49-F238E27FC236}">
-                <a16:creationId xmlns:a16="http://schemas.microsoft.com/office/drawing/2014/main" id="{EFDD9C5C-5C3C-40B3-BC68-27E26DD3B1B9}"/>
+                <a16:creationId xmlns:a16="http://schemas.microsoft.com/office/drawing/2014/main" id="{8BF913CC-12E8-47C5-84AC-62DC016ADF10}"/>
               </a:ext>
             </a:extLst>
           </p:cNvPr>
@@ -18007,7 +18007,7 @@
           <p:cNvPr id="26" name="">
             <a:extLst xmlns:a="http://schemas.openxmlformats.org/drawingml/2006/main">
               <a:ext uri="{FF2B5EF4-FFF2-40B4-BE49-F238E27FC236}">
-                <a16:creationId xmlns:a16="http://schemas.microsoft.com/office/drawing/2014/main" id="{7D804AD8-D9DA-4983-A87F-E6E7E76A76D1}"/>
+                <a16:creationId xmlns:a16="http://schemas.microsoft.com/office/drawing/2014/main" id="{313F8857-21C7-415C-AD40-66A3C29F030F}"/>
               </a:ext>
             </a:extLst>
           </p:cNvPr>
@@ -18042,7 +18042,7 @@
           <p:cNvPr id="27" name="">
             <a:extLst xmlns:a="http://schemas.openxmlformats.org/drawingml/2006/main">
               <a:ext uri="{FF2B5EF4-FFF2-40B4-BE49-F238E27FC236}">
-                <a16:creationId xmlns:a16="http://schemas.microsoft.com/office/drawing/2014/main" id="{7FAAFC2B-28ED-40EC-9160-51AEF3E0A7C3}"/>
+                <a16:creationId xmlns:a16="http://schemas.microsoft.com/office/drawing/2014/main" id="{B40B8542-DAFA-427B-A80D-82438CA4AA1A}"/>
               </a:ext>
             </a:extLst>
           </p:cNvPr>
@@ -18077,7 +18077,7 @@
           <p:cNvPr id="28" name="">
             <a:extLst xmlns:a="http://schemas.openxmlformats.org/drawingml/2006/main">
               <a:ext uri="{FF2B5EF4-FFF2-40B4-BE49-F238E27FC236}">
-                <a16:creationId xmlns:a16="http://schemas.microsoft.com/office/drawing/2014/main" id="{E378C1FF-8616-438D-A59A-C70F02666FC3}"/>
+                <a16:creationId xmlns:a16="http://schemas.microsoft.com/office/drawing/2014/main" id="{22E58EB9-9EAB-492C-8213-E6DDB13E8E05}"/>
               </a:ext>
             </a:extLst>
           </p:cNvPr>
@@ -18112,7 +18112,7 @@
           <p:cNvPr id="29" name="">
             <a:extLst xmlns:a="http://schemas.openxmlformats.org/drawingml/2006/main">
               <a:ext uri="{FF2B5EF4-FFF2-40B4-BE49-F238E27FC236}">
-                <a16:creationId xmlns:a16="http://schemas.microsoft.com/office/drawing/2014/main" id="{71C161CD-4C8C-444D-A4A4-260985EF7E72}"/>
+                <a16:creationId xmlns:a16="http://schemas.microsoft.com/office/drawing/2014/main" id="{B886D774-09E5-4D26-A272-6DB4CB2E479A}"/>
               </a:ext>
             </a:extLst>
           </p:cNvPr>
@@ -18147,7 +18147,7 @@
           <p:cNvPr id="30" name="">
             <a:extLst xmlns:a="http://schemas.openxmlformats.org/drawingml/2006/main">
               <a:ext uri="{FF2B5EF4-FFF2-40B4-BE49-F238E27FC236}">
-                <a16:creationId xmlns:a16="http://schemas.microsoft.com/office/drawing/2014/main" id="{BB81361D-BC8F-417D-932C-2C2CD0B5C481}"/>
+                <a16:creationId xmlns:a16="http://schemas.microsoft.com/office/drawing/2014/main" id="{C72F58F6-FAC3-41CA-A94E-18B083DCBC4B}"/>
               </a:ext>
             </a:extLst>
           </p:cNvPr>
@@ -18205,19 +18205,19 @@
           <p:cNvPr id="31" name="">
             <a:extLst xmlns:a="http://schemas.openxmlformats.org/drawingml/2006/main">
               <a:ext uri="{FF2B5EF4-FFF2-40B4-BE49-F238E27FC236}">
-                <a16:creationId xmlns:a16="http://schemas.microsoft.com/office/drawing/2014/main" id="{A7337D20-18FB-4597-9F39-6FA185136BAE}"/>
-              </a:ext>
-            </a:extLst>
-          </p:cNvPr>
-          <p:cNvSpPr>
-            <a:spLocks xmlns:a="http://schemas.openxmlformats.org/drawingml/2006/main" noGrp="1"/>
-          </p:cNvSpPr>
-          <p:nvPr/>
-        </p:nvSpPr>
-        <p:spPr>
-          <a:xfrm xmlns:a="http://schemas.openxmlformats.org/drawingml/2006/main" rot="0">
-            <a:off x="2724150" y="2228850"/>
-            <a:ext cx="1790700" cy="495300"/>
+                <a16:creationId xmlns:a16="http://schemas.microsoft.com/office/drawing/2014/main" id="{DC3DDC29-BC3F-4074-BA84-CF8AEAF98945}"/>
+              </a:ext>
+            </a:extLst>
+          </p:cNvPr>
+          <p:cNvSpPr>
+            <a:spLocks xmlns:a="http://schemas.openxmlformats.org/drawingml/2006/main" noGrp="1"/>
+          </p:cNvSpPr>
+          <p:nvPr/>
+        </p:nvSpPr>
+        <p:spPr>
+          <a:xfrm xmlns:a="http://schemas.openxmlformats.org/drawingml/2006/main" rot="0">
+            <a:off x="2857500" y="2095500"/>
+            <a:ext cx="1790700" cy="457200"/>
           </a:xfrm>
           <a:prstGeom xmlns:a="http://schemas.openxmlformats.org/drawingml/2006/main" prst="ellipse">
             <a:avLst/>
@@ -18238,19 +18238,19 @@
           <p:cNvPr id="32" name="">
             <a:extLst xmlns:a="http://schemas.openxmlformats.org/drawingml/2006/main">
               <a:ext uri="{FF2B5EF4-FFF2-40B4-BE49-F238E27FC236}">
-                <a16:creationId xmlns:a16="http://schemas.microsoft.com/office/drawing/2014/main" id="{DB60C081-A2CA-4920-BAFF-F4DEB14E039D}"/>
-              </a:ext>
-            </a:extLst>
-          </p:cNvPr>
-          <p:cNvSpPr>
-            <a:spLocks xmlns:a="http://schemas.openxmlformats.org/drawingml/2006/main" noGrp="1"/>
-          </p:cNvSpPr>
-          <p:nvPr/>
-        </p:nvSpPr>
-        <p:spPr>
-          <a:xfrm xmlns:a="http://schemas.openxmlformats.org/drawingml/2006/main" rot="0">
-            <a:off x="2819400" y="2362200"/>
-            <a:ext cx="1600200" cy="228600"/>
+                <a16:creationId xmlns:a16="http://schemas.microsoft.com/office/drawing/2014/main" id="{AEA5CF77-D673-4DC4-A5F8-F2537A22AC9B}"/>
+              </a:ext>
+            </a:extLst>
+          </p:cNvPr>
+          <p:cNvSpPr>
+            <a:spLocks xmlns:a="http://schemas.openxmlformats.org/drawingml/2006/main" noGrp="1"/>
+          </p:cNvSpPr>
+          <p:nvPr/>
+        </p:nvSpPr>
+        <p:spPr>
+          <a:xfrm xmlns:a="http://schemas.openxmlformats.org/drawingml/2006/main" rot="0">
+            <a:off x="2952750" y="2228850"/>
+            <a:ext cx="1600200" cy="190500"/>
           </a:xfrm>
           <a:prstGeom xmlns:a="http://schemas.openxmlformats.org/drawingml/2006/main" prst="rect">
             <a:avLst/>
@@ -18296,19 +18296,19 @@
           <p:cNvPr id="33" name="">
             <a:extLst xmlns:a="http://schemas.openxmlformats.org/drawingml/2006/main">
               <a:ext uri="{FF2B5EF4-FFF2-40B4-BE49-F238E27FC236}">
-                <a16:creationId xmlns:a16="http://schemas.microsoft.com/office/drawing/2014/main" id="{BB5B50EB-2A3E-42F0-A3C0-25E9921F3DFF}"/>
-              </a:ext>
-            </a:extLst>
-          </p:cNvPr>
-          <p:cNvSpPr>
-            <a:spLocks xmlns:a="http://schemas.openxmlformats.org/drawingml/2006/main" noGrp="1"/>
-          </p:cNvSpPr>
-          <p:nvPr/>
-        </p:nvSpPr>
-        <p:spPr>
-          <a:xfrm xmlns:a="http://schemas.openxmlformats.org/drawingml/2006/main" rot="0">
-            <a:off x="4991100" y="2228850"/>
-            <a:ext cx="1790700" cy="495300"/>
+                <a16:creationId xmlns:a16="http://schemas.microsoft.com/office/drawing/2014/main" id="{D42F1F92-F7E9-4EC7-903D-A0EF6FF1AA18}"/>
+              </a:ext>
+            </a:extLst>
+          </p:cNvPr>
+          <p:cNvSpPr>
+            <a:spLocks xmlns:a="http://schemas.openxmlformats.org/drawingml/2006/main" noGrp="1"/>
+          </p:cNvSpPr>
+          <p:nvPr/>
+        </p:nvSpPr>
+        <p:spPr>
+          <a:xfrm xmlns:a="http://schemas.openxmlformats.org/drawingml/2006/main" rot="0">
+            <a:off x="2857500" y="2857500"/>
+            <a:ext cx="1790700" cy="457200"/>
           </a:xfrm>
           <a:prstGeom xmlns:a="http://schemas.openxmlformats.org/drawingml/2006/main" prst="ellipse">
             <a:avLst/>
@@ -18329,19 +18329,19 @@
           <p:cNvPr id="34" name="">
             <a:extLst xmlns:a="http://schemas.openxmlformats.org/drawingml/2006/main">
               <a:ext uri="{FF2B5EF4-FFF2-40B4-BE49-F238E27FC236}">
-                <a16:creationId xmlns:a16="http://schemas.microsoft.com/office/drawing/2014/main" id="{B8694DF2-73BA-4410-BD92-3B00F6BC5E4C}"/>
-              </a:ext>
-            </a:extLst>
-          </p:cNvPr>
-          <p:cNvSpPr>
-            <a:spLocks xmlns:a="http://schemas.openxmlformats.org/drawingml/2006/main" noGrp="1"/>
-          </p:cNvSpPr>
-          <p:nvPr/>
-        </p:nvSpPr>
-        <p:spPr>
-          <a:xfrm xmlns:a="http://schemas.openxmlformats.org/drawingml/2006/main" rot="0">
-            <a:off x="5086350" y="2362200"/>
-            <a:ext cx="1600200" cy="228600"/>
+                <a16:creationId xmlns:a16="http://schemas.microsoft.com/office/drawing/2014/main" id="{62CECF42-BB32-4291-AA82-BAA94C318DA5}"/>
+              </a:ext>
+            </a:extLst>
+          </p:cNvPr>
+          <p:cNvSpPr>
+            <a:spLocks xmlns:a="http://schemas.openxmlformats.org/drawingml/2006/main" noGrp="1"/>
+          </p:cNvSpPr>
+          <p:nvPr/>
+        </p:nvSpPr>
+        <p:spPr>
+          <a:xfrm xmlns:a="http://schemas.openxmlformats.org/drawingml/2006/main" rot="0">
+            <a:off x="2952750" y="2990850"/>
+            <a:ext cx="1600200" cy="190500"/>
           </a:xfrm>
           <a:prstGeom xmlns:a="http://schemas.openxmlformats.org/drawingml/2006/main" prst="rect">
             <a:avLst/>
@@ -18387,19 +18387,19 @@
           <p:cNvPr id="35" name="">
             <a:extLst xmlns:a="http://schemas.openxmlformats.org/drawingml/2006/main">
               <a:ext uri="{FF2B5EF4-FFF2-40B4-BE49-F238E27FC236}">
-                <a16:creationId xmlns:a16="http://schemas.microsoft.com/office/drawing/2014/main" id="{6F561094-EA8D-4534-A881-17DAA2272E76}"/>
-              </a:ext>
-            </a:extLst>
-          </p:cNvPr>
-          <p:cNvSpPr>
-            <a:spLocks xmlns:a="http://schemas.openxmlformats.org/drawingml/2006/main" noGrp="1"/>
-          </p:cNvSpPr>
-          <p:nvPr/>
-        </p:nvSpPr>
-        <p:spPr>
-          <a:xfrm xmlns:a="http://schemas.openxmlformats.org/drawingml/2006/main" rot="0">
-            <a:off x="7258050" y="2228850"/>
-            <a:ext cx="1790700" cy="495300"/>
+                <a16:creationId xmlns:a16="http://schemas.microsoft.com/office/drawing/2014/main" id="{709B70C9-45F1-47E5-ABDE-E08E25AD8802}"/>
+              </a:ext>
+            </a:extLst>
+          </p:cNvPr>
+          <p:cNvSpPr>
+            <a:spLocks xmlns:a="http://schemas.openxmlformats.org/drawingml/2006/main" noGrp="1"/>
+          </p:cNvSpPr>
+          <p:nvPr/>
+        </p:nvSpPr>
+        <p:spPr>
+          <a:xfrm xmlns:a="http://schemas.openxmlformats.org/drawingml/2006/main" rot="0">
+            <a:off x="5219700" y="2095500"/>
+            <a:ext cx="1790700" cy="457200"/>
           </a:xfrm>
           <a:prstGeom xmlns:a="http://schemas.openxmlformats.org/drawingml/2006/main" prst="ellipse">
             <a:avLst/>
@@ -18420,19 +18420,19 @@
           <p:cNvPr id="36" name="">
             <a:extLst xmlns:a="http://schemas.openxmlformats.org/drawingml/2006/main">
               <a:ext uri="{FF2B5EF4-FFF2-40B4-BE49-F238E27FC236}">
-                <a16:creationId xmlns:a16="http://schemas.microsoft.com/office/drawing/2014/main" id="{58D5A41A-A4CE-46DB-AF5E-63D41B2DA98E}"/>
-              </a:ext>
-            </a:extLst>
-          </p:cNvPr>
-          <p:cNvSpPr>
-            <a:spLocks xmlns:a="http://schemas.openxmlformats.org/drawingml/2006/main" noGrp="1"/>
-          </p:cNvSpPr>
-          <p:nvPr/>
-        </p:nvSpPr>
-        <p:spPr>
-          <a:xfrm xmlns:a="http://schemas.openxmlformats.org/drawingml/2006/main" rot="0">
-            <a:off x="7353300" y="2362200"/>
-            <a:ext cx="1600200" cy="228600"/>
+                <a16:creationId xmlns:a16="http://schemas.microsoft.com/office/drawing/2014/main" id="{4490E8EF-EC93-418F-BE6D-1D0F4CFFED26}"/>
+              </a:ext>
+            </a:extLst>
+          </p:cNvPr>
+          <p:cNvSpPr>
+            <a:spLocks xmlns:a="http://schemas.openxmlformats.org/drawingml/2006/main" noGrp="1"/>
+          </p:cNvSpPr>
+          <p:nvPr/>
+        </p:nvSpPr>
+        <p:spPr>
+          <a:xfrm xmlns:a="http://schemas.openxmlformats.org/drawingml/2006/main" rot="0">
+            <a:off x="5314950" y="2228850"/>
+            <a:ext cx="1600200" cy="190500"/>
           </a:xfrm>
           <a:prstGeom xmlns:a="http://schemas.openxmlformats.org/drawingml/2006/main" prst="rect">
             <a:avLst/>
@@ -18478,19 +18478,19 @@
           <p:cNvPr id="37" name="">
             <a:extLst xmlns:a="http://schemas.openxmlformats.org/drawingml/2006/main">
               <a:ext uri="{FF2B5EF4-FFF2-40B4-BE49-F238E27FC236}">
-                <a16:creationId xmlns:a16="http://schemas.microsoft.com/office/drawing/2014/main" id="{1CB0C0C5-40A7-403E-B3AA-CB702BB2C4FD}"/>
-              </a:ext>
-            </a:extLst>
-          </p:cNvPr>
-          <p:cNvSpPr>
-            <a:spLocks xmlns:a="http://schemas.openxmlformats.org/drawingml/2006/main" noGrp="1"/>
-          </p:cNvSpPr>
-          <p:nvPr/>
-        </p:nvSpPr>
-        <p:spPr>
-          <a:xfrm xmlns:a="http://schemas.openxmlformats.org/drawingml/2006/main" rot="0">
-            <a:off x="2724150" y="3009900"/>
-            <a:ext cx="1790700" cy="495300"/>
+                <a16:creationId xmlns:a16="http://schemas.microsoft.com/office/drawing/2014/main" id="{6C380AB0-F828-4E1D-A9CA-19BFD4C3F3E8}"/>
+              </a:ext>
+            </a:extLst>
+          </p:cNvPr>
+          <p:cNvSpPr>
+            <a:spLocks xmlns:a="http://schemas.openxmlformats.org/drawingml/2006/main" noGrp="1"/>
+          </p:cNvSpPr>
+          <p:nvPr/>
+        </p:nvSpPr>
+        <p:spPr>
+          <a:xfrm xmlns:a="http://schemas.openxmlformats.org/drawingml/2006/main" rot="0">
+            <a:off x="4762500" y="3048000"/>
+            <a:ext cx="1790700" cy="457200"/>
           </a:xfrm>
           <a:prstGeom xmlns:a="http://schemas.openxmlformats.org/drawingml/2006/main" prst="ellipse">
             <a:avLst/>
@@ -18511,19 +18511,19 @@
           <p:cNvPr id="38" name="">
             <a:extLst xmlns:a="http://schemas.openxmlformats.org/drawingml/2006/main">
               <a:ext uri="{FF2B5EF4-FFF2-40B4-BE49-F238E27FC236}">
-                <a16:creationId xmlns:a16="http://schemas.microsoft.com/office/drawing/2014/main" id="{9A7C8182-AE4E-4159-B935-2CB5FAEE98EF}"/>
-              </a:ext>
-            </a:extLst>
-          </p:cNvPr>
-          <p:cNvSpPr>
-            <a:spLocks xmlns:a="http://schemas.openxmlformats.org/drawingml/2006/main" noGrp="1"/>
-          </p:cNvSpPr>
-          <p:nvPr/>
-        </p:nvSpPr>
-        <p:spPr>
-          <a:xfrm xmlns:a="http://schemas.openxmlformats.org/drawingml/2006/main" rot="0">
-            <a:off x="2819400" y="3143250"/>
-            <a:ext cx="1600200" cy="228600"/>
+                <a16:creationId xmlns:a16="http://schemas.microsoft.com/office/drawing/2014/main" id="{BABD2327-7B87-4536-9E60-5AE6CDC3D5D5}"/>
+              </a:ext>
+            </a:extLst>
+          </p:cNvPr>
+          <p:cNvSpPr>
+            <a:spLocks xmlns:a="http://schemas.openxmlformats.org/drawingml/2006/main" noGrp="1"/>
+          </p:cNvSpPr>
+          <p:nvPr/>
+        </p:nvSpPr>
+        <p:spPr>
+          <a:xfrm xmlns:a="http://schemas.openxmlformats.org/drawingml/2006/main" rot="0">
+            <a:off x="4857750" y="3181350"/>
+            <a:ext cx="1600200" cy="190500"/>
           </a:xfrm>
           <a:prstGeom xmlns:a="http://schemas.openxmlformats.org/drawingml/2006/main" prst="rect">
             <a:avLst/>
@@ -18569,19 +18569,19 @@
           <p:cNvPr id="39" name="">
             <a:extLst xmlns:a="http://schemas.openxmlformats.org/drawingml/2006/main">
               <a:ext uri="{FF2B5EF4-FFF2-40B4-BE49-F238E27FC236}">
-                <a16:creationId xmlns:a16="http://schemas.microsoft.com/office/drawing/2014/main" id="{4BE5BAA6-69A7-4B0F-B21C-16444165AEF7}"/>
-              </a:ext>
-            </a:extLst>
-          </p:cNvPr>
-          <p:cNvSpPr>
-            <a:spLocks xmlns:a="http://schemas.openxmlformats.org/drawingml/2006/main" noGrp="1"/>
-          </p:cNvSpPr>
-          <p:nvPr/>
-        </p:nvSpPr>
-        <p:spPr>
-          <a:xfrm xmlns:a="http://schemas.openxmlformats.org/drawingml/2006/main" rot="0">
-            <a:off x="4991100" y="3009900"/>
-            <a:ext cx="1790700" cy="495300"/>
+                <a16:creationId xmlns:a16="http://schemas.microsoft.com/office/drawing/2014/main" id="{6536E624-6300-48CC-A999-67C9834E7D4F}"/>
+              </a:ext>
+            </a:extLst>
+          </p:cNvPr>
+          <p:cNvSpPr>
+            <a:spLocks xmlns:a="http://schemas.openxmlformats.org/drawingml/2006/main" noGrp="1"/>
+          </p:cNvSpPr>
+          <p:nvPr/>
+        </p:nvSpPr>
+        <p:spPr>
+          <a:xfrm xmlns:a="http://schemas.openxmlformats.org/drawingml/2006/main" rot="0">
+            <a:off x="5676900" y="3810000"/>
+            <a:ext cx="1866900" cy="495300"/>
           </a:xfrm>
           <a:prstGeom xmlns:a="http://schemas.openxmlformats.org/drawingml/2006/main" prst="ellipse">
             <a:avLst/>
@@ -18602,19 +18602,19 @@
           <p:cNvPr id="40" name="">
             <a:extLst xmlns:a="http://schemas.openxmlformats.org/drawingml/2006/main">
               <a:ext uri="{FF2B5EF4-FFF2-40B4-BE49-F238E27FC236}">
-                <a16:creationId xmlns:a16="http://schemas.microsoft.com/office/drawing/2014/main" id="{727447C7-157C-4A68-A53B-D12999A596F8}"/>
-              </a:ext>
-            </a:extLst>
-          </p:cNvPr>
-          <p:cNvSpPr>
-            <a:spLocks xmlns:a="http://schemas.openxmlformats.org/drawingml/2006/main" noGrp="1"/>
-          </p:cNvSpPr>
-          <p:nvPr/>
-        </p:nvSpPr>
-        <p:spPr>
-          <a:xfrm xmlns:a="http://schemas.openxmlformats.org/drawingml/2006/main" rot="0">
-            <a:off x="5086350" y="3143250"/>
-            <a:ext cx="1600200" cy="228600"/>
+                <a16:creationId xmlns:a16="http://schemas.microsoft.com/office/drawing/2014/main" id="{80F0E2D7-6B47-46B5-BAA6-F45899DA7A2E}"/>
+              </a:ext>
+            </a:extLst>
+          </p:cNvPr>
+          <p:cNvSpPr>
+            <a:spLocks xmlns:a="http://schemas.openxmlformats.org/drawingml/2006/main" noGrp="1"/>
+          </p:cNvSpPr>
+          <p:nvPr/>
+        </p:nvSpPr>
+        <p:spPr>
+          <a:xfrm xmlns:a="http://schemas.openxmlformats.org/drawingml/2006/main" rot="0">
+            <a:off x="5772150" y="3943350"/>
+            <a:ext cx="1676400" cy="228600"/>
           </a:xfrm>
           <a:prstGeom xmlns:a="http://schemas.openxmlformats.org/drawingml/2006/main" prst="rect">
             <a:avLst/>
@@ -18650,7 +18650,24 @@
                   <a:srgbClr val="172026"/>
                 </a:solidFill>
               </a:rPr>
-              <a:t>記錄賣出交易</a:t>
+              <a:t>記錄賣出交易 /</a:t>
+            </a:r>
+          </a:p>
+          <a:p xmlns:a="http://schemas.openxmlformats.org/drawingml/2006/main">
+            <a:pPr algn="ctr">
+              <a:defRPr sz="1050" b="1">
+                <a:solidFill>
+                  <a:srgbClr val="172026"/>
+                </a:solidFill>
+              </a:defRPr>
+            </a:pPr>
+            <a:r>
+              <a:rPr sz="1050" b="1">
+                <a:solidFill>
+                  <a:srgbClr val="172026"/>
+                </a:solidFill>
+              </a:rPr>
+              <a:t>驗證庫存</a:t>
             </a:r>
           </a:p>
         </p:txBody>
@@ -18660,19 +18677,19 @@
           <p:cNvPr id="41" name="">
             <a:extLst xmlns:a="http://schemas.openxmlformats.org/drawingml/2006/main">
               <a:ext uri="{FF2B5EF4-FFF2-40B4-BE49-F238E27FC236}">
-                <a16:creationId xmlns:a16="http://schemas.microsoft.com/office/drawing/2014/main" id="{39D52B7E-D6B9-4C73-B5AD-9F6BE3A84BC4}"/>
-              </a:ext>
-            </a:extLst>
-          </p:cNvPr>
-          <p:cNvSpPr>
-            <a:spLocks xmlns:a="http://schemas.openxmlformats.org/drawingml/2006/main" noGrp="1"/>
-          </p:cNvSpPr>
-          <p:nvPr/>
-        </p:nvSpPr>
-        <p:spPr>
-          <a:xfrm xmlns:a="http://schemas.openxmlformats.org/drawingml/2006/main" rot="0">
-            <a:off x="7258050" y="3009900"/>
-            <a:ext cx="1790700" cy="495300"/>
+                <a16:creationId xmlns:a16="http://schemas.microsoft.com/office/drawing/2014/main" id="{ACE013DB-43DF-443D-8084-0963597818C7}"/>
+              </a:ext>
+            </a:extLst>
+          </p:cNvPr>
+          <p:cNvSpPr>
+            <a:spLocks xmlns:a="http://schemas.openxmlformats.org/drawingml/2006/main" noGrp="1"/>
+          </p:cNvSpPr>
+          <p:nvPr/>
+        </p:nvSpPr>
+        <p:spPr>
+          <a:xfrm xmlns:a="http://schemas.openxmlformats.org/drawingml/2006/main" rot="0">
+            <a:off x="7543800" y="2095500"/>
+            <a:ext cx="1790700" cy="457200"/>
           </a:xfrm>
           <a:prstGeom xmlns:a="http://schemas.openxmlformats.org/drawingml/2006/main" prst="ellipse">
             <a:avLst/>
@@ -18693,19 +18710,19 @@
           <p:cNvPr id="42" name="">
             <a:extLst xmlns:a="http://schemas.openxmlformats.org/drawingml/2006/main">
               <a:ext uri="{FF2B5EF4-FFF2-40B4-BE49-F238E27FC236}">
-                <a16:creationId xmlns:a16="http://schemas.microsoft.com/office/drawing/2014/main" id="{2452BB9E-4E78-4FD3-BF6D-87C7E7C1D424}"/>
-              </a:ext>
-            </a:extLst>
-          </p:cNvPr>
-          <p:cNvSpPr>
-            <a:spLocks xmlns:a="http://schemas.openxmlformats.org/drawingml/2006/main" noGrp="1"/>
-          </p:cNvSpPr>
-          <p:nvPr/>
-        </p:nvSpPr>
-        <p:spPr>
-          <a:xfrm xmlns:a="http://schemas.openxmlformats.org/drawingml/2006/main" rot="0">
-            <a:off x="7353300" y="3143250"/>
-            <a:ext cx="1600200" cy="228600"/>
+                <a16:creationId xmlns:a16="http://schemas.microsoft.com/office/drawing/2014/main" id="{3B6AD5AE-77C8-4699-B84B-56B9F03093B1}"/>
+              </a:ext>
+            </a:extLst>
+          </p:cNvPr>
+          <p:cNvSpPr>
+            <a:spLocks xmlns:a="http://schemas.openxmlformats.org/drawingml/2006/main" noGrp="1"/>
+          </p:cNvSpPr>
+          <p:nvPr/>
+        </p:nvSpPr>
+        <p:spPr>
+          <a:xfrm xmlns:a="http://schemas.openxmlformats.org/drawingml/2006/main" rot="0">
+            <a:off x="7639050" y="2228850"/>
+            <a:ext cx="1600200" cy="190500"/>
           </a:xfrm>
           <a:prstGeom xmlns:a="http://schemas.openxmlformats.org/drawingml/2006/main" prst="rect">
             <a:avLst/>
@@ -18751,19 +18768,19 @@
           <p:cNvPr id="43" name="">
             <a:extLst xmlns:a="http://schemas.openxmlformats.org/drawingml/2006/main">
               <a:ext uri="{FF2B5EF4-FFF2-40B4-BE49-F238E27FC236}">
-                <a16:creationId xmlns:a16="http://schemas.microsoft.com/office/drawing/2014/main" id="{7321BEF3-9BE8-4A28-9252-AB87D6070E30}"/>
-              </a:ext>
-            </a:extLst>
-          </p:cNvPr>
-          <p:cNvSpPr>
-            <a:spLocks xmlns:a="http://schemas.openxmlformats.org/drawingml/2006/main" noGrp="1"/>
-          </p:cNvSpPr>
-          <p:nvPr/>
-        </p:nvSpPr>
-        <p:spPr>
-          <a:xfrm xmlns:a="http://schemas.openxmlformats.org/drawingml/2006/main" rot="0">
-            <a:off x="2724150" y="3790950"/>
-            <a:ext cx="1790700" cy="495300"/>
+                <a16:creationId xmlns:a16="http://schemas.microsoft.com/office/drawing/2014/main" id="{005CE433-F77B-48E8-80AC-DA26822F074D}"/>
+              </a:ext>
+            </a:extLst>
+          </p:cNvPr>
+          <p:cNvSpPr>
+            <a:spLocks xmlns:a="http://schemas.openxmlformats.org/drawingml/2006/main" noGrp="1"/>
+          </p:cNvSpPr>
+          <p:nvPr/>
+        </p:nvSpPr>
+        <p:spPr>
+          <a:xfrm xmlns:a="http://schemas.openxmlformats.org/drawingml/2006/main" rot="0">
+            <a:off x="7543800" y="2857500"/>
+            <a:ext cx="1790700" cy="457200"/>
           </a:xfrm>
           <a:prstGeom xmlns:a="http://schemas.openxmlformats.org/drawingml/2006/main" prst="ellipse">
             <a:avLst/>
@@ -18784,19 +18801,19 @@
           <p:cNvPr id="44" name="">
             <a:extLst xmlns:a="http://schemas.openxmlformats.org/drawingml/2006/main">
               <a:ext uri="{FF2B5EF4-FFF2-40B4-BE49-F238E27FC236}">
-                <a16:creationId xmlns:a16="http://schemas.microsoft.com/office/drawing/2014/main" id="{AC211B6D-5A84-4C72-A0AC-71939CDB1F23}"/>
-              </a:ext>
-            </a:extLst>
-          </p:cNvPr>
-          <p:cNvSpPr>
-            <a:spLocks xmlns:a="http://schemas.openxmlformats.org/drawingml/2006/main" noGrp="1"/>
-          </p:cNvSpPr>
-          <p:nvPr/>
-        </p:nvSpPr>
-        <p:spPr>
-          <a:xfrm xmlns:a="http://schemas.openxmlformats.org/drawingml/2006/main" rot="0">
-            <a:off x="2819400" y="3924300"/>
-            <a:ext cx="1600200" cy="228600"/>
+                <a16:creationId xmlns:a16="http://schemas.microsoft.com/office/drawing/2014/main" id="{82257BBC-3D6D-4CBB-AB9A-1EFC874F14E9}"/>
+              </a:ext>
+            </a:extLst>
+          </p:cNvPr>
+          <p:cNvSpPr>
+            <a:spLocks xmlns:a="http://schemas.openxmlformats.org/drawingml/2006/main" noGrp="1"/>
+          </p:cNvSpPr>
+          <p:nvPr/>
+        </p:nvSpPr>
+        <p:spPr>
+          <a:xfrm xmlns:a="http://schemas.openxmlformats.org/drawingml/2006/main" rot="0">
+            <a:off x="7639050" y="2990850"/>
+            <a:ext cx="1600200" cy="190500"/>
           </a:xfrm>
           <a:prstGeom xmlns:a="http://schemas.openxmlformats.org/drawingml/2006/main" prst="rect">
             <a:avLst/>
@@ -18842,19 +18859,19 @@
           <p:cNvPr id="45" name="">
             <a:extLst xmlns:a="http://schemas.openxmlformats.org/drawingml/2006/main">
               <a:ext uri="{FF2B5EF4-FFF2-40B4-BE49-F238E27FC236}">
-                <a16:creationId xmlns:a16="http://schemas.microsoft.com/office/drawing/2014/main" id="{E93AEFC3-2523-4277-A81F-09E05530AEEE}"/>
-              </a:ext>
-            </a:extLst>
-          </p:cNvPr>
-          <p:cNvSpPr>
-            <a:spLocks xmlns:a="http://schemas.openxmlformats.org/drawingml/2006/main" noGrp="1"/>
-          </p:cNvSpPr>
-          <p:nvPr/>
-        </p:nvSpPr>
-        <p:spPr>
-          <a:xfrm xmlns:a="http://schemas.openxmlformats.org/drawingml/2006/main" rot="0">
-            <a:off x="4991100" y="3790950"/>
-            <a:ext cx="1790700" cy="495300"/>
+                <a16:creationId xmlns:a16="http://schemas.microsoft.com/office/drawing/2014/main" id="{878199FD-8CDC-4081-97BE-3A6B8F7AB68C}"/>
+              </a:ext>
+            </a:extLst>
+          </p:cNvPr>
+          <p:cNvSpPr>
+            <a:spLocks xmlns:a="http://schemas.openxmlformats.org/drawingml/2006/main" noGrp="1"/>
+          </p:cNvSpPr>
+          <p:nvPr/>
+        </p:nvSpPr>
+        <p:spPr>
+          <a:xfrm xmlns:a="http://schemas.openxmlformats.org/drawingml/2006/main" rot="0">
+            <a:off x="7543800" y="3619500"/>
+            <a:ext cx="1790700" cy="457200"/>
           </a:xfrm>
           <a:prstGeom xmlns:a="http://schemas.openxmlformats.org/drawingml/2006/main" prst="ellipse">
             <a:avLst/>
@@ -18875,19 +18892,19 @@
           <p:cNvPr id="46" name="">
             <a:extLst xmlns:a="http://schemas.openxmlformats.org/drawingml/2006/main">
               <a:ext uri="{FF2B5EF4-FFF2-40B4-BE49-F238E27FC236}">
-                <a16:creationId xmlns:a16="http://schemas.microsoft.com/office/drawing/2014/main" id="{07F5D06A-DA82-4C3F-B554-F5E2587F58AA}"/>
-              </a:ext>
-            </a:extLst>
-          </p:cNvPr>
-          <p:cNvSpPr>
-            <a:spLocks xmlns:a="http://schemas.openxmlformats.org/drawingml/2006/main" noGrp="1"/>
-          </p:cNvSpPr>
-          <p:nvPr/>
-        </p:nvSpPr>
-        <p:spPr>
-          <a:xfrm xmlns:a="http://schemas.openxmlformats.org/drawingml/2006/main" rot="0">
-            <a:off x="5086350" y="3924300"/>
-            <a:ext cx="1600200" cy="228600"/>
+                <a16:creationId xmlns:a16="http://schemas.microsoft.com/office/drawing/2014/main" id="{2FCE1D5C-C761-4EFA-BFB7-D52AA02F0146}"/>
+              </a:ext>
+            </a:extLst>
+          </p:cNvPr>
+          <p:cNvSpPr>
+            <a:spLocks xmlns:a="http://schemas.openxmlformats.org/drawingml/2006/main" noGrp="1"/>
+          </p:cNvSpPr>
+          <p:nvPr/>
+        </p:nvSpPr>
+        <p:spPr>
+          <a:xfrm xmlns:a="http://schemas.openxmlformats.org/drawingml/2006/main" rot="0">
+            <a:off x="7639050" y="3752850"/>
+            <a:ext cx="1600200" cy="190500"/>
           </a:xfrm>
           <a:prstGeom xmlns:a="http://schemas.openxmlformats.org/drawingml/2006/main" prst="rect">
             <a:avLst/>
@@ -18933,19 +18950,19 @@
           <p:cNvPr id="47" name="">
             <a:extLst xmlns:a="http://schemas.openxmlformats.org/drawingml/2006/main">
               <a:ext uri="{FF2B5EF4-FFF2-40B4-BE49-F238E27FC236}">
-                <a16:creationId xmlns:a16="http://schemas.microsoft.com/office/drawing/2014/main" id="{3667AADC-CE5F-4E42-8983-BBEC39646F2F}"/>
-              </a:ext>
-            </a:extLst>
-          </p:cNvPr>
-          <p:cNvSpPr>
-            <a:spLocks xmlns:a="http://schemas.openxmlformats.org/drawingml/2006/main" noGrp="1"/>
-          </p:cNvSpPr>
-          <p:nvPr/>
-        </p:nvSpPr>
-        <p:spPr>
-          <a:xfrm xmlns:a="http://schemas.openxmlformats.org/drawingml/2006/main" rot="0">
-            <a:off x="7258050" y="3790950"/>
-            <a:ext cx="1790700" cy="495300"/>
+                <a16:creationId xmlns:a16="http://schemas.microsoft.com/office/drawing/2014/main" id="{88E6790A-BE45-46E2-9B57-000DF57305A7}"/>
+              </a:ext>
+            </a:extLst>
+          </p:cNvPr>
+          <p:cNvSpPr>
+            <a:spLocks xmlns:a="http://schemas.openxmlformats.org/drawingml/2006/main" noGrp="1"/>
+          </p:cNvSpPr>
+          <p:nvPr/>
+        </p:nvSpPr>
+        <p:spPr>
+          <a:xfrm xmlns:a="http://schemas.openxmlformats.org/drawingml/2006/main" rot="0">
+            <a:off x="2857500" y="4476750"/>
+            <a:ext cx="1790700" cy="457200"/>
           </a:xfrm>
           <a:prstGeom xmlns:a="http://schemas.openxmlformats.org/drawingml/2006/main" prst="ellipse">
             <a:avLst/>
@@ -18966,19 +18983,19 @@
           <p:cNvPr id="48" name="">
             <a:extLst xmlns:a="http://schemas.openxmlformats.org/drawingml/2006/main">
               <a:ext uri="{FF2B5EF4-FFF2-40B4-BE49-F238E27FC236}">
-                <a16:creationId xmlns:a16="http://schemas.microsoft.com/office/drawing/2014/main" id="{730AE6CC-7DEC-46B5-81CF-B6CE8A48D4F3}"/>
-              </a:ext>
-            </a:extLst>
-          </p:cNvPr>
-          <p:cNvSpPr>
-            <a:spLocks xmlns:a="http://schemas.openxmlformats.org/drawingml/2006/main" noGrp="1"/>
-          </p:cNvSpPr>
-          <p:nvPr/>
-        </p:nvSpPr>
-        <p:spPr>
-          <a:xfrm xmlns:a="http://schemas.openxmlformats.org/drawingml/2006/main" rot="0">
-            <a:off x="7353300" y="3924300"/>
-            <a:ext cx="1600200" cy="228600"/>
+                <a16:creationId xmlns:a16="http://schemas.microsoft.com/office/drawing/2014/main" id="{657A2D09-B0E8-4F89-8407-159A4B04A25B}"/>
+              </a:ext>
+            </a:extLst>
+          </p:cNvPr>
+          <p:cNvSpPr>
+            <a:spLocks xmlns:a="http://schemas.openxmlformats.org/drawingml/2006/main" noGrp="1"/>
+          </p:cNvSpPr>
+          <p:nvPr/>
+        </p:nvSpPr>
+        <p:spPr>
+          <a:xfrm xmlns:a="http://schemas.openxmlformats.org/drawingml/2006/main" rot="0">
+            <a:off x="2952750" y="4610100"/>
+            <a:ext cx="1600200" cy="190500"/>
           </a:xfrm>
           <a:prstGeom xmlns:a="http://schemas.openxmlformats.org/drawingml/2006/main" prst="rect">
             <a:avLst/>
@@ -19024,19 +19041,19 @@
           <p:cNvPr id="49" name="">
             <a:extLst xmlns:a="http://schemas.openxmlformats.org/drawingml/2006/main">
               <a:ext uri="{FF2B5EF4-FFF2-40B4-BE49-F238E27FC236}">
-                <a16:creationId xmlns:a16="http://schemas.microsoft.com/office/drawing/2014/main" id="{96E52A52-FEC4-4263-A83D-BD79FF0E3067}"/>
-              </a:ext>
-            </a:extLst>
-          </p:cNvPr>
-          <p:cNvSpPr>
-            <a:spLocks xmlns:a="http://schemas.openxmlformats.org/drawingml/2006/main" noGrp="1"/>
-          </p:cNvSpPr>
-          <p:nvPr/>
-        </p:nvSpPr>
-        <p:spPr>
-          <a:xfrm xmlns:a="http://schemas.openxmlformats.org/drawingml/2006/main" rot="0">
-            <a:off x="3867150" y="4572000"/>
-            <a:ext cx="1866900" cy="495300"/>
+                <a16:creationId xmlns:a16="http://schemas.microsoft.com/office/drawing/2014/main" id="{9A884A3D-934F-4408-B873-CB1D62A214AE}"/>
+              </a:ext>
+            </a:extLst>
+          </p:cNvPr>
+          <p:cNvSpPr>
+            <a:spLocks xmlns:a="http://schemas.openxmlformats.org/drawingml/2006/main" noGrp="1"/>
+          </p:cNvSpPr>
+          <p:nvPr/>
+        </p:nvSpPr>
+        <p:spPr>
+          <a:xfrm xmlns:a="http://schemas.openxmlformats.org/drawingml/2006/main" rot="0">
+            <a:off x="5219700" y="4476750"/>
+            <a:ext cx="1790700" cy="457200"/>
           </a:xfrm>
           <a:prstGeom xmlns:a="http://schemas.openxmlformats.org/drawingml/2006/main" prst="ellipse">
             <a:avLst/>
@@ -19057,19 +19074,19 @@
           <p:cNvPr id="50" name="">
             <a:extLst xmlns:a="http://schemas.openxmlformats.org/drawingml/2006/main">
               <a:ext uri="{FF2B5EF4-FFF2-40B4-BE49-F238E27FC236}">
-                <a16:creationId xmlns:a16="http://schemas.microsoft.com/office/drawing/2014/main" id="{BCED8A82-EAAD-4A4F-BA84-DD598CF65E11}"/>
-              </a:ext>
-            </a:extLst>
-          </p:cNvPr>
-          <p:cNvSpPr>
-            <a:spLocks xmlns:a="http://schemas.openxmlformats.org/drawingml/2006/main" noGrp="1"/>
-          </p:cNvSpPr>
-          <p:nvPr/>
-        </p:nvSpPr>
-        <p:spPr>
-          <a:xfrm xmlns:a="http://schemas.openxmlformats.org/drawingml/2006/main" rot="0">
-            <a:off x="3962400" y="4705350"/>
-            <a:ext cx="1676400" cy="228600"/>
+                <a16:creationId xmlns:a16="http://schemas.microsoft.com/office/drawing/2014/main" id="{70D50F4A-BADA-447B-876E-4FF54AD0F3EE}"/>
+              </a:ext>
+            </a:extLst>
+          </p:cNvPr>
+          <p:cNvSpPr>
+            <a:spLocks xmlns:a="http://schemas.openxmlformats.org/drawingml/2006/main" noGrp="1"/>
+          </p:cNvSpPr>
+          <p:nvPr/>
+        </p:nvSpPr>
+        <p:spPr>
+          <a:xfrm xmlns:a="http://schemas.openxmlformats.org/drawingml/2006/main" rot="0">
+            <a:off x="5314950" y="4610100"/>
+            <a:ext cx="1600200" cy="190500"/>
           </a:xfrm>
           <a:prstGeom xmlns:a="http://schemas.openxmlformats.org/drawingml/2006/main" prst="rect">
             <a:avLst/>
@@ -19115,19 +19132,19 @@
           <p:cNvPr id="51" name="">
             <a:extLst xmlns:a="http://schemas.openxmlformats.org/drawingml/2006/main">
               <a:ext uri="{FF2B5EF4-FFF2-40B4-BE49-F238E27FC236}">
-                <a16:creationId xmlns:a16="http://schemas.microsoft.com/office/drawing/2014/main" id="{74E1C01A-9236-4E8A-9825-3CC00AACA2A0}"/>
-              </a:ext>
-            </a:extLst>
-          </p:cNvPr>
-          <p:cNvSpPr>
-            <a:spLocks xmlns:a="http://schemas.openxmlformats.org/drawingml/2006/main" noGrp="1"/>
-          </p:cNvSpPr>
-          <p:nvPr/>
-        </p:nvSpPr>
-        <p:spPr>
-          <a:xfrm xmlns:a="http://schemas.openxmlformats.org/drawingml/2006/main" rot="0">
-            <a:off x="6324600" y="4572000"/>
-            <a:ext cx="1866900" cy="495300"/>
+                <a16:creationId xmlns:a16="http://schemas.microsoft.com/office/drawing/2014/main" id="{55ADE83E-1792-41B3-9DE8-AF9071FA3FBA}"/>
+              </a:ext>
+            </a:extLst>
+          </p:cNvPr>
+          <p:cNvSpPr>
+            <a:spLocks xmlns:a="http://schemas.openxmlformats.org/drawingml/2006/main" noGrp="1"/>
+          </p:cNvSpPr>
+          <p:nvPr/>
+        </p:nvSpPr>
+        <p:spPr>
+          <a:xfrm xmlns:a="http://schemas.openxmlformats.org/drawingml/2006/main" rot="0">
+            <a:off x="7543800" y="4476750"/>
+            <a:ext cx="1790700" cy="457200"/>
           </a:xfrm>
           <a:prstGeom xmlns:a="http://schemas.openxmlformats.org/drawingml/2006/main" prst="ellipse">
             <a:avLst/>
@@ -19148,19 +19165,19 @@
           <p:cNvPr id="52" name="">
             <a:extLst xmlns:a="http://schemas.openxmlformats.org/drawingml/2006/main">
               <a:ext uri="{FF2B5EF4-FFF2-40B4-BE49-F238E27FC236}">
-                <a16:creationId xmlns:a16="http://schemas.microsoft.com/office/drawing/2014/main" id="{CF413C09-7505-4922-9EDA-EFC6E1DDE227}"/>
-              </a:ext>
-            </a:extLst>
-          </p:cNvPr>
-          <p:cNvSpPr>
-            <a:spLocks xmlns:a="http://schemas.openxmlformats.org/drawingml/2006/main" noGrp="1"/>
-          </p:cNvSpPr>
-          <p:nvPr/>
-        </p:nvSpPr>
-        <p:spPr>
-          <a:xfrm xmlns:a="http://schemas.openxmlformats.org/drawingml/2006/main" rot="0">
-            <a:off x="6419850" y="4705350"/>
-            <a:ext cx="1676400" cy="228600"/>
+                <a16:creationId xmlns:a16="http://schemas.microsoft.com/office/drawing/2014/main" id="{9355A2E7-D151-4823-8534-18B98E34FA88}"/>
+              </a:ext>
+            </a:extLst>
+          </p:cNvPr>
+          <p:cNvSpPr>
+            <a:spLocks xmlns:a="http://schemas.openxmlformats.org/drawingml/2006/main" noGrp="1"/>
+          </p:cNvSpPr>
+          <p:nvPr/>
+        </p:nvSpPr>
+        <p:spPr>
+          <a:xfrm xmlns:a="http://schemas.openxmlformats.org/drawingml/2006/main" rot="0">
+            <a:off x="7639050" y="4610100"/>
+            <a:ext cx="1600200" cy="190500"/>
           </a:xfrm>
           <a:prstGeom xmlns:a="http://schemas.openxmlformats.org/drawingml/2006/main" prst="rect">
             <a:avLst/>
@@ -19206,29 +19223,31 @@
           <p:cNvPr id="53" name="">
             <a:extLst xmlns:a="http://schemas.openxmlformats.org/drawingml/2006/main">
               <a:ext uri="{FF2B5EF4-FFF2-40B4-BE49-F238E27FC236}">
-                <a16:creationId xmlns:a16="http://schemas.microsoft.com/office/drawing/2014/main" id="{CB28EDBF-654A-4E21-92CB-5FDEB1BBFCB7}"/>
-              </a:ext>
-            </a:extLst>
-          </p:cNvPr>
-          <p:cNvSpPr>
-            <a:spLocks xmlns:a="http://schemas.openxmlformats.org/drawingml/2006/main" noGrp="1"/>
-          </p:cNvSpPr>
-          <p:nvPr/>
-        </p:nvSpPr>
-        <p:spPr>
-          <a:xfrm xmlns:a="http://schemas.openxmlformats.org/drawingml/2006/main" rot="0">
-            <a:off x="1847850" y="2400300"/>
-            <a:ext cx="800100" cy="190500"/>
-          </a:xfrm>
-          <a:prstGeom xmlns:a="http://schemas.openxmlformats.org/drawingml/2006/main" prst="rightArrow">
-            <a:avLst/>
-          </a:prstGeom>
-          <a:solidFill xmlns:a="http://schemas.openxmlformats.org/drawingml/2006/main">
-            <a:srgbClr val="172026"/>
-          </a:solidFill>
-          <a:ln xmlns:a="http://schemas.openxmlformats.org/drawingml/2006/main" w="0">
-            <a:solidFill>
-              <a:srgbClr val="172026"/>
+                <a16:creationId xmlns:a16="http://schemas.microsoft.com/office/drawing/2014/main" id="{DED2ECB1-118D-4560-875B-B4BD65CDB9E3}"/>
+              </a:ext>
+            </a:extLst>
+          </p:cNvPr>
+          <p:cNvSpPr>
+            <a:spLocks xmlns:a="http://schemas.openxmlformats.org/drawingml/2006/main" noGrp="1"/>
+          </p:cNvSpPr>
+          <p:nvPr/>
+        </p:nvSpPr>
+        <p:spPr>
+          <a:xfrm xmlns:a="http://schemas.openxmlformats.org/drawingml/2006/main" rot="0">
+            <a:off x="1847850" y="2313623"/>
+            <a:ext cx="1009650" cy="20955"/>
+          </a:xfrm>
+          <a:prstGeom xmlns:a="http://schemas.openxmlformats.org/drawingml/2006/main" prst="rect">
+            <a:avLst/>
+          </a:prstGeom>
+          <a:solidFill xmlns:a="http://schemas.openxmlformats.org/drawingml/2006/main">
+            <a:srgbClr val="23313B"/>
+          </a:solidFill>
+          <a:ln xmlns:a="http://schemas.openxmlformats.org/drawingml/2006/main" w="0">
+            <a:solidFill>
+              <a:srgbClr val="000000">
+                <a:alpha val="0"/>
+              </a:srgbClr>
             </a:solidFill>
             <a:prstDash val="solid"/>
           </a:ln>
@@ -19239,29 +19258,31 @@
           <p:cNvPr id="54" name="">
             <a:extLst xmlns:a="http://schemas.openxmlformats.org/drawingml/2006/main">
               <a:ext uri="{FF2B5EF4-FFF2-40B4-BE49-F238E27FC236}">
-                <a16:creationId xmlns:a16="http://schemas.microsoft.com/office/drawing/2014/main" id="{73815CF1-5852-4917-BB90-76561BBCDAA7}"/>
-              </a:ext>
-            </a:extLst>
-          </p:cNvPr>
-          <p:cNvSpPr>
-            <a:spLocks xmlns:a="http://schemas.openxmlformats.org/drawingml/2006/main" noGrp="1"/>
-          </p:cNvSpPr>
-          <p:nvPr/>
-        </p:nvSpPr>
-        <p:spPr>
-          <a:xfrm xmlns:a="http://schemas.openxmlformats.org/drawingml/2006/main" rot="0">
-            <a:off x="1847850" y="3181350"/>
-            <a:ext cx="800100" cy="190500"/>
-          </a:xfrm>
-          <a:prstGeom xmlns:a="http://schemas.openxmlformats.org/drawingml/2006/main" prst="rightArrow">
-            <a:avLst/>
-          </a:prstGeom>
-          <a:solidFill xmlns:a="http://schemas.openxmlformats.org/drawingml/2006/main">
-            <a:srgbClr val="172026"/>
-          </a:solidFill>
-          <a:ln xmlns:a="http://schemas.openxmlformats.org/drawingml/2006/main" w="0">
-            <a:solidFill>
-              <a:srgbClr val="172026"/>
+                <a16:creationId xmlns:a16="http://schemas.microsoft.com/office/drawing/2014/main" id="{4668CE99-C9DA-4D07-90EF-72DBB0BE95D5}"/>
+              </a:ext>
+            </a:extLst>
+          </p:cNvPr>
+          <p:cNvSpPr>
+            <a:spLocks xmlns:a="http://schemas.openxmlformats.org/drawingml/2006/main" noGrp="1"/>
+          </p:cNvSpPr>
+          <p:nvPr/>
+        </p:nvSpPr>
+        <p:spPr>
+          <a:xfrm xmlns:a="http://schemas.openxmlformats.org/drawingml/2006/main" rot="0">
+            <a:off x="1847850" y="3075623"/>
+            <a:ext cx="1009650" cy="20955"/>
+          </a:xfrm>
+          <a:prstGeom xmlns:a="http://schemas.openxmlformats.org/drawingml/2006/main" prst="rect">
+            <a:avLst/>
+          </a:prstGeom>
+          <a:solidFill xmlns:a="http://schemas.openxmlformats.org/drawingml/2006/main">
+            <a:srgbClr val="23313B"/>
+          </a:solidFill>
+          <a:ln xmlns:a="http://schemas.openxmlformats.org/drawingml/2006/main" w="0">
+            <a:solidFill>
+              <a:srgbClr val="000000">
+                <a:alpha val="0"/>
+              </a:srgbClr>
             </a:solidFill>
             <a:prstDash val="solid"/>
           </a:ln>
@@ -19272,29 +19293,31 @@
           <p:cNvPr id="55" name="">
             <a:extLst xmlns:a="http://schemas.openxmlformats.org/drawingml/2006/main">
               <a:ext uri="{FF2B5EF4-FFF2-40B4-BE49-F238E27FC236}">
-                <a16:creationId xmlns:a16="http://schemas.microsoft.com/office/drawing/2014/main" id="{E0A2E91D-CE43-4342-81EE-296A93238DD4}"/>
-              </a:ext>
-            </a:extLst>
-          </p:cNvPr>
-          <p:cNvSpPr>
-            <a:spLocks xmlns:a="http://schemas.openxmlformats.org/drawingml/2006/main" noGrp="1"/>
-          </p:cNvSpPr>
-          <p:nvPr/>
-        </p:nvSpPr>
-        <p:spPr>
-          <a:xfrm xmlns:a="http://schemas.openxmlformats.org/drawingml/2006/main" rot="0">
-            <a:off x="1847850" y="3962400"/>
-            <a:ext cx="800100" cy="190500"/>
-          </a:xfrm>
-          <a:prstGeom xmlns:a="http://schemas.openxmlformats.org/drawingml/2006/main" prst="rightArrow">
-            <a:avLst/>
-          </a:prstGeom>
-          <a:solidFill xmlns:a="http://schemas.openxmlformats.org/drawingml/2006/main">
-            <a:srgbClr val="172026"/>
-          </a:solidFill>
-          <a:ln xmlns:a="http://schemas.openxmlformats.org/drawingml/2006/main" w="0">
-            <a:solidFill>
-              <a:srgbClr val="172026"/>
+                <a16:creationId xmlns:a16="http://schemas.microsoft.com/office/drawing/2014/main" id="{BBA46A47-6B13-4512-8A42-6929C9DDAF5A}"/>
+              </a:ext>
+            </a:extLst>
+          </p:cNvPr>
+          <p:cNvSpPr>
+            <a:spLocks xmlns:a="http://schemas.openxmlformats.org/drawingml/2006/main" noGrp="1"/>
+          </p:cNvSpPr>
+          <p:nvPr/>
+        </p:nvSpPr>
+        <p:spPr>
+          <a:xfrm xmlns:a="http://schemas.openxmlformats.org/drawingml/2006/main" rot="0">
+            <a:off x="1847850" y="2313623"/>
+            <a:ext cx="3371850" cy="20955"/>
+          </a:xfrm>
+          <a:prstGeom xmlns:a="http://schemas.openxmlformats.org/drawingml/2006/main" prst="rect">
+            <a:avLst/>
+          </a:prstGeom>
+          <a:solidFill xmlns:a="http://schemas.openxmlformats.org/drawingml/2006/main">
+            <a:srgbClr val="23313B"/>
+          </a:solidFill>
+          <a:ln xmlns:a="http://schemas.openxmlformats.org/drawingml/2006/main" w="0">
+            <a:solidFill>
+              <a:srgbClr val="000000">
+                <a:alpha val="0"/>
+              </a:srgbClr>
             </a:solidFill>
             <a:prstDash val="solid"/>
           </a:ln>
@@ -19305,29 +19328,31 @@
           <p:cNvPr id="56" name="">
             <a:extLst xmlns:a="http://schemas.openxmlformats.org/drawingml/2006/main">
               <a:ext uri="{FF2B5EF4-FFF2-40B4-BE49-F238E27FC236}">
-                <a16:creationId xmlns:a16="http://schemas.microsoft.com/office/drawing/2014/main" id="{78FFE7B4-2723-4E49-8349-022A9B0640BC}"/>
-              </a:ext>
-            </a:extLst>
-          </p:cNvPr>
-          <p:cNvSpPr>
-            <a:spLocks xmlns:a="http://schemas.openxmlformats.org/drawingml/2006/main" noGrp="1"/>
-          </p:cNvSpPr>
-          <p:nvPr/>
-        </p:nvSpPr>
-        <p:spPr>
-          <a:xfrm xmlns:a="http://schemas.openxmlformats.org/drawingml/2006/main" rot="0">
-            <a:off x="1847850" y="4762500"/>
-            <a:ext cx="1066800" cy="190500"/>
-          </a:xfrm>
-          <a:prstGeom xmlns:a="http://schemas.openxmlformats.org/drawingml/2006/main" prst="rightArrow">
-            <a:avLst/>
-          </a:prstGeom>
-          <a:solidFill xmlns:a="http://schemas.openxmlformats.org/drawingml/2006/main">
-            <a:srgbClr val="172026"/>
-          </a:solidFill>
-          <a:ln xmlns:a="http://schemas.openxmlformats.org/drawingml/2006/main" w="0">
-            <a:solidFill>
-              <a:srgbClr val="172026"/>
+                <a16:creationId xmlns:a16="http://schemas.microsoft.com/office/drawing/2014/main" id="{416F5BF1-12CF-499D-B78B-8E90E7C82CF1}"/>
+              </a:ext>
+            </a:extLst>
+          </p:cNvPr>
+          <p:cNvSpPr>
+            <a:spLocks xmlns:a="http://schemas.openxmlformats.org/drawingml/2006/main" noGrp="1"/>
+          </p:cNvSpPr>
+          <p:nvPr/>
+        </p:nvSpPr>
+        <p:spPr>
+          <a:xfrm xmlns:a="http://schemas.openxmlformats.org/drawingml/2006/main" rot="0">
+            <a:off x="1847850" y="3075623"/>
+            <a:ext cx="5695950" cy="20955"/>
+          </a:xfrm>
+          <a:prstGeom xmlns:a="http://schemas.openxmlformats.org/drawingml/2006/main" prst="rect">
+            <a:avLst/>
+          </a:prstGeom>
+          <a:solidFill xmlns:a="http://schemas.openxmlformats.org/drawingml/2006/main">
+            <a:srgbClr val="23313B"/>
+          </a:solidFill>
+          <a:ln xmlns:a="http://schemas.openxmlformats.org/drawingml/2006/main" w="0">
+            <a:solidFill>
+              <a:srgbClr val="000000">
+                <a:alpha val="0"/>
+              </a:srgbClr>
             </a:solidFill>
             <a:prstDash val="solid"/>
           </a:ln>
@@ -19338,29 +19363,31 @@
           <p:cNvPr id="57" name="">
             <a:extLst xmlns:a="http://schemas.openxmlformats.org/drawingml/2006/main">
               <a:ext uri="{FF2B5EF4-FFF2-40B4-BE49-F238E27FC236}">
-                <a16:creationId xmlns:a16="http://schemas.microsoft.com/office/drawing/2014/main" id="{C0577D70-E6BF-438C-8FC4-01F3EC2B920A}"/>
-              </a:ext>
-            </a:extLst>
-          </p:cNvPr>
-          <p:cNvSpPr>
-            <a:spLocks xmlns:a="http://schemas.openxmlformats.org/drawingml/2006/main" noGrp="1"/>
-          </p:cNvSpPr>
-          <p:nvPr/>
-        </p:nvSpPr>
-        <p:spPr>
-          <a:xfrm xmlns:a="http://schemas.openxmlformats.org/drawingml/2006/main" rot="0">
-            <a:off x="9163050" y="4762500"/>
-            <a:ext cx="876300" cy="190500"/>
-          </a:xfrm>
-          <a:prstGeom xmlns:a="http://schemas.openxmlformats.org/drawingml/2006/main" prst="rightArrow">
-            <a:avLst/>
-          </a:prstGeom>
-          <a:solidFill xmlns:a="http://schemas.openxmlformats.org/drawingml/2006/main">
-            <a:srgbClr val="172026"/>
-          </a:solidFill>
-          <a:ln xmlns:a="http://schemas.openxmlformats.org/drawingml/2006/main" w="0">
-            <a:solidFill>
-              <a:srgbClr val="172026"/>
+                <a16:creationId xmlns:a16="http://schemas.microsoft.com/office/drawing/2014/main" id="{5A7A7F3C-F5E0-4B70-B585-4D9DF7B0DF09}"/>
+              </a:ext>
+            </a:extLst>
+          </p:cNvPr>
+          <p:cNvSpPr>
+            <a:spLocks xmlns:a="http://schemas.openxmlformats.org/drawingml/2006/main" noGrp="1"/>
+          </p:cNvSpPr>
+          <p:nvPr/>
+        </p:nvSpPr>
+        <p:spPr>
+          <a:xfrm xmlns:a="http://schemas.openxmlformats.org/drawingml/2006/main" rot="0">
+            <a:off x="1847850" y="3837623"/>
+            <a:ext cx="5695950" cy="20955"/>
+          </a:xfrm>
+          <a:prstGeom xmlns:a="http://schemas.openxmlformats.org/drawingml/2006/main" prst="rect">
+            <a:avLst/>
+          </a:prstGeom>
+          <a:solidFill xmlns:a="http://schemas.openxmlformats.org/drawingml/2006/main">
+            <a:srgbClr val="23313B"/>
+          </a:solidFill>
+          <a:ln xmlns:a="http://schemas.openxmlformats.org/drawingml/2006/main" w="0">
+            <a:solidFill>
+              <a:srgbClr val="000000">
+                <a:alpha val="0"/>
+              </a:srgbClr>
             </a:solidFill>
             <a:prstDash val="solid"/>
           </a:ln>
@@ -19371,29 +19398,31 @@
           <p:cNvPr id="58" name="">
             <a:extLst xmlns:a="http://schemas.openxmlformats.org/drawingml/2006/main">
               <a:ext uri="{FF2B5EF4-FFF2-40B4-BE49-F238E27FC236}">
-                <a16:creationId xmlns:a16="http://schemas.microsoft.com/office/drawing/2014/main" id="{0A4E2953-8E6F-476A-950A-E1698171F6B6}"/>
-              </a:ext>
-            </a:extLst>
-          </p:cNvPr>
-          <p:cNvSpPr>
-            <a:spLocks xmlns:a="http://schemas.openxmlformats.org/drawingml/2006/main" noGrp="1"/>
-          </p:cNvSpPr>
-          <p:nvPr/>
-        </p:nvSpPr>
-        <p:spPr>
-          <a:xfrm xmlns:a="http://schemas.openxmlformats.org/drawingml/2006/main" rot="0">
-            <a:off x="9353550" y="4762500"/>
-            <a:ext cx="685800" cy="190500"/>
-          </a:xfrm>
-          <a:prstGeom xmlns:a="http://schemas.openxmlformats.org/drawingml/2006/main" prst="rightArrow">
-            <a:avLst/>
-          </a:prstGeom>
-          <a:solidFill xmlns:a="http://schemas.openxmlformats.org/drawingml/2006/main">
-            <a:srgbClr val="172026"/>
-          </a:solidFill>
-          <a:ln xmlns:a="http://schemas.openxmlformats.org/drawingml/2006/main" w="0">
-            <a:solidFill>
-              <a:srgbClr val="172026"/>
+                <a16:creationId xmlns:a16="http://schemas.microsoft.com/office/drawing/2014/main" id="{5FC759D1-43D2-450F-92CA-D5C17DC594E3}"/>
+              </a:ext>
+            </a:extLst>
+          </p:cNvPr>
+          <p:cNvSpPr>
+            <a:spLocks xmlns:a="http://schemas.openxmlformats.org/drawingml/2006/main" noGrp="1"/>
+          </p:cNvSpPr>
+          <p:nvPr/>
+        </p:nvSpPr>
+        <p:spPr>
+          <a:xfrm xmlns:a="http://schemas.openxmlformats.org/drawingml/2006/main" rot="0">
+            <a:off x="1847850" y="4694873"/>
+            <a:ext cx="1009650" cy="20955"/>
+          </a:xfrm>
+          <a:prstGeom xmlns:a="http://schemas.openxmlformats.org/drawingml/2006/main" prst="rect">
+            <a:avLst/>
+          </a:prstGeom>
+          <a:solidFill xmlns:a="http://schemas.openxmlformats.org/drawingml/2006/main">
+            <a:srgbClr val="23313B"/>
+          </a:solidFill>
+          <a:ln xmlns:a="http://schemas.openxmlformats.org/drawingml/2006/main" w="0">
+            <a:solidFill>
+              <a:srgbClr val="000000">
+                <a:alpha val="0"/>
+              </a:srgbClr>
             </a:solidFill>
             <a:prstDash val="solid"/>
           </a:ln>
@@ -19404,19 +19433,332 @@
           <p:cNvPr id="59" name="">
             <a:extLst xmlns:a="http://schemas.openxmlformats.org/drawingml/2006/main">
               <a:ext uri="{FF2B5EF4-FFF2-40B4-BE49-F238E27FC236}">
-                <a16:creationId xmlns:a16="http://schemas.microsoft.com/office/drawing/2014/main" id="{C21C71DC-6A81-40BB-BE3C-3A4E9F1DBB6D}"/>
-              </a:ext>
-            </a:extLst>
-          </p:cNvPr>
-          <p:cNvSpPr>
-            <a:spLocks xmlns:a="http://schemas.openxmlformats.org/drawingml/2006/main" noGrp="1"/>
-          </p:cNvSpPr>
-          <p:nvPr/>
-        </p:nvSpPr>
-        <p:spPr>
-          <a:xfrm xmlns:a="http://schemas.openxmlformats.org/drawingml/2006/main" rot="0">
-            <a:off x="609600" y="6000750"/>
-            <a:ext cx="6667500" cy="342900"/>
+                <a16:creationId xmlns:a16="http://schemas.microsoft.com/office/drawing/2014/main" id="{25F38FD1-9118-4F97-A90D-035D1CF6AF27}"/>
+              </a:ext>
+            </a:extLst>
+          </p:cNvPr>
+          <p:cNvSpPr>
+            <a:spLocks xmlns:a="http://schemas.openxmlformats.org/drawingml/2006/main" noGrp="1"/>
+          </p:cNvSpPr>
+          <p:nvPr/>
+        </p:nvSpPr>
+        <p:spPr>
+          <a:xfrm xmlns:a="http://schemas.openxmlformats.org/drawingml/2006/main" rot="0">
+            <a:off x="9334500" y="4694873"/>
+            <a:ext cx="742950" cy="20955"/>
+          </a:xfrm>
+          <a:prstGeom xmlns:a="http://schemas.openxmlformats.org/drawingml/2006/main" prst="rect">
+            <a:avLst/>
+          </a:prstGeom>
+          <a:solidFill xmlns:a="http://schemas.openxmlformats.org/drawingml/2006/main">
+            <a:srgbClr val="23313B"/>
+          </a:solidFill>
+          <a:ln xmlns:a="http://schemas.openxmlformats.org/drawingml/2006/main" w="0">
+            <a:solidFill>
+              <a:srgbClr val="000000">
+                <a:alpha val="0"/>
+              </a:srgbClr>
+            </a:solidFill>
+            <a:prstDash val="solid"/>
+          </a:ln>
+        </p:spPr>
+      </p:sp>
+      <p:sp>
+        <p:nvSpPr>
+          <p:cNvPr id="60" name="">
+            <a:extLst xmlns:a="http://schemas.openxmlformats.org/drawingml/2006/main">
+              <a:ext uri="{FF2B5EF4-FFF2-40B4-BE49-F238E27FC236}">
+                <a16:creationId xmlns:a16="http://schemas.microsoft.com/office/drawing/2014/main" id="{5DCC0354-6ADE-47EE-BFFF-3AD4B78F93D1}"/>
+              </a:ext>
+            </a:extLst>
+          </p:cNvPr>
+          <p:cNvSpPr>
+            <a:spLocks xmlns:a="http://schemas.openxmlformats.org/drawingml/2006/main" noGrp="1"/>
+          </p:cNvSpPr>
+          <p:nvPr/>
+        </p:nvSpPr>
+        <p:spPr>
+          <a:xfrm xmlns:a="http://schemas.openxmlformats.org/drawingml/2006/main" rot="5400000">
+            <a:off x="1628775" y="4913948"/>
+            <a:ext cx="438150" cy="20955"/>
+          </a:xfrm>
+          <a:prstGeom xmlns:a="http://schemas.openxmlformats.org/drawingml/2006/main" prst="rect">
+            <a:avLst/>
+          </a:prstGeom>
+          <a:solidFill xmlns:a="http://schemas.openxmlformats.org/drawingml/2006/main">
+            <a:srgbClr val="23313B"/>
+          </a:solidFill>
+          <a:ln xmlns:a="http://schemas.openxmlformats.org/drawingml/2006/main" w="0">
+            <a:solidFill>
+              <a:srgbClr val="000000">
+                <a:alpha val="0"/>
+              </a:srgbClr>
+            </a:solidFill>
+            <a:prstDash val="solid"/>
+          </a:ln>
+        </p:spPr>
+      </p:sp>
+      <p:sp>
+        <p:nvSpPr>
+          <p:cNvPr id="61" name="">
+            <a:extLst xmlns:a="http://schemas.openxmlformats.org/drawingml/2006/main">
+              <a:ext uri="{FF2B5EF4-FFF2-40B4-BE49-F238E27FC236}">
+                <a16:creationId xmlns:a16="http://schemas.microsoft.com/office/drawing/2014/main" id="{EDA38E26-DC63-4F9B-9F05-C21DF705BDB6}"/>
+              </a:ext>
+            </a:extLst>
+          </p:cNvPr>
+          <p:cNvSpPr>
+            <a:spLocks xmlns:a="http://schemas.openxmlformats.org/drawingml/2006/main" noGrp="1"/>
+          </p:cNvSpPr>
+          <p:nvPr/>
+        </p:nvSpPr>
+        <p:spPr>
+          <a:xfrm xmlns:a="http://schemas.openxmlformats.org/drawingml/2006/main" rot="0">
+            <a:off x="1847850" y="5133023"/>
+            <a:ext cx="5695950" cy="20955"/>
+          </a:xfrm>
+          <a:prstGeom xmlns:a="http://schemas.openxmlformats.org/drawingml/2006/main" prst="rect">
+            <a:avLst/>
+          </a:prstGeom>
+          <a:solidFill xmlns:a="http://schemas.openxmlformats.org/drawingml/2006/main">
+            <a:srgbClr val="23313B"/>
+          </a:solidFill>
+          <a:ln xmlns:a="http://schemas.openxmlformats.org/drawingml/2006/main" w="0">
+            <a:solidFill>
+              <a:srgbClr val="000000">
+                <a:alpha val="0"/>
+              </a:srgbClr>
+            </a:solidFill>
+            <a:prstDash val="solid"/>
+          </a:ln>
+        </p:spPr>
+      </p:sp>
+      <p:sp>
+        <p:nvSpPr>
+          <p:cNvPr id="62" name="">
+            <a:extLst xmlns:a="http://schemas.openxmlformats.org/drawingml/2006/main">
+              <a:ext uri="{FF2B5EF4-FFF2-40B4-BE49-F238E27FC236}">
+                <a16:creationId xmlns:a16="http://schemas.microsoft.com/office/drawing/2014/main" id="{813DE90E-F2CE-47E5-87C0-91FC660EB256}"/>
+              </a:ext>
+            </a:extLst>
+          </p:cNvPr>
+          <p:cNvSpPr>
+            <a:spLocks xmlns:a="http://schemas.openxmlformats.org/drawingml/2006/main" noGrp="1"/>
+          </p:cNvSpPr>
+          <p:nvPr/>
+        </p:nvSpPr>
+        <p:spPr>
+          <a:xfrm xmlns:a="http://schemas.openxmlformats.org/drawingml/2006/main" rot="-5400000">
+            <a:off x="7324725" y="4913948"/>
+            <a:ext cx="438150" cy="20955"/>
+          </a:xfrm>
+          <a:prstGeom xmlns:a="http://schemas.openxmlformats.org/drawingml/2006/main" prst="rect">
+            <a:avLst/>
+          </a:prstGeom>
+          <a:solidFill xmlns:a="http://schemas.openxmlformats.org/drawingml/2006/main">
+            <a:srgbClr val="23313B"/>
+          </a:solidFill>
+          <a:ln xmlns:a="http://schemas.openxmlformats.org/drawingml/2006/main" w="0">
+            <a:solidFill>
+              <a:srgbClr val="000000">
+                <a:alpha val="0"/>
+              </a:srgbClr>
+            </a:solidFill>
+            <a:prstDash val="solid"/>
+          </a:ln>
+        </p:spPr>
+      </p:sp>
+      <p:sp>
+        <p:nvSpPr>
+          <p:cNvPr id="63" name="">
+            <a:extLst xmlns:a="http://schemas.openxmlformats.org/drawingml/2006/main">
+              <a:ext uri="{FF2B5EF4-FFF2-40B4-BE49-F238E27FC236}">
+                <a16:creationId xmlns:a16="http://schemas.microsoft.com/office/drawing/2014/main" id="{8446D444-8512-41C3-B065-61B80C444E86}"/>
+              </a:ext>
+            </a:extLst>
+          </p:cNvPr>
+          <p:cNvSpPr>
+            <a:spLocks xmlns:a="http://schemas.openxmlformats.org/drawingml/2006/main" noGrp="1"/>
+          </p:cNvSpPr>
+          <p:nvPr/>
+        </p:nvSpPr>
+        <p:spPr>
+          <a:xfrm xmlns:a="http://schemas.openxmlformats.org/drawingml/2006/main" rot="7962563">
+            <a:off x="6035122" y="2578170"/>
+            <a:ext cx="95250" cy="19050"/>
+          </a:xfrm>
+          <a:prstGeom xmlns:a="http://schemas.openxmlformats.org/drawingml/2006/main" prst="rect">
+            <a:avLst/>
+          </a:prstGeom>
+          <a:solidFill xmlns:a="http://schemas.openxmlformats.org/drawingml/2006/main">
+            <a:srgbClr val="23313B"/>
+          </a:solidFill>
+          <a:ln xmlns:a="http://schemas.openxmlformats.org/drawingml/2006/main" w="0">
+            <a:solidFill>
+              <a:srgbClr val="000000">
+                <a:alpha val="0"/>
+              </a:srgbClr>
+            </a:solidFill>
+            <a:prstDash val="solid"/>
+          </a:ln>
+        </p:spPr>
+      </p:sp>
+      <p:sp>
+        <p:nvSpPr>
+          <p:cNvPr id="64" name="">
+            <a:extLst xmlns:a="http://schemas.openxmlformats.org/drawingml/2006/main">
+              <a:ext uri="{FF2B5EF4-FFF2-40B4-BE49-F238E27FC236}">
+                <a16:creationId xmlns:a16="http://schemas.microsoft.com/office/drawing/2014/main" id="{9BB09B01-A5BE-4C2B-81B8-97A22F5AE7E7}"/>
+              </a:ext>
+            </a:extLst>
+          </p:cNvPr>
+          <p:cNvSpPr>
+            <a:spLocks xmlns:a="http://schemas.openxmlformats.org/drawingml/2006/main" noGrp="1"/>
+          </p:cNvSpPr>
+          <p:nvPr/>
+        </p:nvSpPr>
+        <p:spPr>
+          <a:xfrm xmlns:a="http://schemas.openxmlformats.org/drawingml/2006/main" rot="7962563">
+            <a:off x="5925291" y="2697153"/>
+            <a:ext cx="95250" cy="19050"/>
+          </a:xfrm>
+          <a:prstGeom xmlns:a="http://schemas.openxmlformats.org/drawingml/2006/main" prst="rect">
+            <a:avLst/>
+          </a:prstGeom>
+          <a:solidFill xmlns:a="http://schemas.openxmlformats.org/drawingml/2006/main">
+            <a:srgbClr val="23313B"/>
+          </a:solidFill>
+          <a:ln xmlns:a="http://schemas.openxmlformats.org/drawingml/2006/main" w="0">
+            <a:solidFill>
+              <a:srgbClr val="000000">
+                <a:alpha val="0"/>
+              </a:srgbClr>
+            </a:solidFill>
+            <a:prstDash val="solid"/>
+          </a:ln>
+        </p:spPr>
+      </p:sp>
+      <p:sp>
+        <p:nvSpPr>
+          <p:cNvPr id="65" name="">
+            <a:extLst xmlns:a="http://schemas.openxmlformats.org/drawingml/2006/main">
+              <a:ext uri="{FF2B5EF4-FFF2-40B4-BE49-F238E27FC236}">
+                <a16:creationId xmlns:a16="http://schemas.microsoft.com/office/drawing/2014/main" id="{59061C9B-C452-4485-8B3C-0F67EC2DEE1C}"/>
+              </a:ext>
+            </a:extLst>
+          </p:cNvPr>
+          <p:cNvSpPr>
+            <a:spLocks xmlns:a="http://schemas.openxmlformats.org/drawingml/2006/main" noGrp="1"/>
+          </p:cNvSpPr>
+          <p:nvPr/>
+        </p:nvSpPr>
+        <p:spPr>
+          <a:xfrm xmlns:a="http://schemas.openxmlformats.org/drawingml/2006/main" rot="7962563">
+            <a:off x="5815461" y="2816136"/>
+            <a:ext cx="95250" cy="19050"/>
+          </a:xfrm>
+          <a:prstGeom xmlns:a="http://schemas.openxmlformats.org/drawingml/2006/main" prst="rect">
+            <a:avLst/>
+          </a:prstGeom>
+          <a:solidFill xmlns:a="http://schemas.openxmlformats.org/drawingml/2006/main">
+            <a:srgbClr val="23313B"/>
+          </a:solidFill>
+          <a:ln xmlns:a="http://schemas.openxmlformats.org/drawingml/2006/main" w="0">
+            <a:solidFill>
+              <a:srgbClr val="000000">
+                <a:alpha val="0"/>
+              </a:srgbClr>
+            </a:solidFill>
+            <a:prstDash val="solid"/>
+          </a:ln>
+        </p:spPr>
+      </p:sp>
+      <p:sp>
+        <p:nvSpPr>
+          <p:cNvPr id="66" name="">
+            <a:extLst xmlns:a="http://schemas.openxmlformats.org/drawingml/2006/main">
+              <a:ext uri="{FF2B5EF4-FFF2-40B4-BE49-F238E27FC236}">
+                <a16:creationId xmlns:a16="http://schemas.microsoft.com/office/drawing/2014/main" id="{90F591BC-A0C6-4F7E-BCB8-39D4139F365E}"/>
+              </a:ext>
+            </a:extLst>
+          </p:cNvPr>
+          <p:cNvSpPr>
+            <a:spLocks xmlns:a="http://schemas.openxmlformats.org/drawingml/2006/main" noGrp="1"/>
+          </p:cNvSpPr>
+          <p:nvPr/>
+        </p:nvSpPr>
+        <p:spPr>
+          <a:xfrm xmlns:a="http://schemas.openxmlformats.org/drawingml/2006/main" rot="7962563">
+            <a:off x="5739462" y="2920307"/>
+            <a:ext cx="54933" cy="19050"/>
+          </a:xfrm>
+          <a:prstGeom xmlns:a="http://schemas.openxmlformats.org/drawingml/2006/main" prst="rect">
+            <a:avLst/>
+          </a:prstGeom>
+          <a:solidFill xmlns:a="http://schemas.openxmlformats.org/drawingml/2006/main">
+            <a:srgbClr val="23313B"/>
+          </a:solidFill>
+          <a:ln xmlns:a="http://schemas.openxmlformats.org/drawingml/2006/main" w="0">
+            <a:solidFill>
+              <a:srgbClr val="000000">
+                <a:alpha val="0"/>
+              </a:srgbClr>
+            </a:solidFill>
+            <a:prstDash val="solid"/>
+          </a:ln>
+        </p:spPr>
+      </p:sp>
+      <p:sp>
+        <p:nvSpPr>
+          <p:cNvPr id="67" name="">
+            <a:extLst xmlns:a="http://schemas.openxmlformats.org/drawingml/2006/main">
+              <a:ext uri="{FF2B5EF4-FFF2-40B4-BE49-F238E27FC236}">
+                <a16:creationId xmlns:a16="http://schemas.microsoft.com/office/drawing/2014/main" id="{40EAADDB-7B0D-4156-8489-641CFD88599E}"/>
+              </a:ext>
+            </a:extLst>
+          </p:cNvPr>
+          <p:cNvSpPr>
+            <a:spLocks xmlns:a="http://schemas.openxmlformats.org/drawingml/2006/main" noGrp="1"/>
+          </p:cNvSpPr>
+          <p:nvPr/>
+        </p:nvSpPr>
+        <p:spPr>
+          <a:xfrm xmlns:a="http://schemas.openxmlformats.org/drawingml/2006/main" rot="13362563">
+            <a:off x="5524500" y="2981325"/>
+            <a:ext cx="133350" cy="133350"/>
+          </a:xfrm>
+          <a:prstGeom xmlns:a="http://schemas.openxmlformats.org/drawingml/2006/main" prst="triangle">
+            <a:avLst/>
+          </a:prstGeom>
+          <a:solidFill xmlns:a="http://schemas.openxmlformats.org/drawingml/2006/main">
+            <a:srgbClr val="F5F1E8"/>
+          </a:solidFill>
+          <a:ln xmlns:a="http://schemas.openxmlformats.org/drawingml/2006/main" w="13335">
+            <a:solidFill>
+              <a:srgbClr val="23313B"/>
+            </a:solidFill>
+            <a:prstDash val="solid"/>
+          </a:ln>
+        </p:spPr>
+      </p:sp>
+      <p:sp>
+        <p:nvSpPr>
+          <p:cNvPr id="68" name="">
+            <a:extLst xmlns:a="http://schemas.openxmlformats.org/drawingml/2006/main">
+              <a:ext uri="{FF2B5EF4-FFF2-40B4-BE49-F238E27FC236}">
+                <a16:creationId xmlns:a16="http://schemas.microsoft.com/office/drawing/2014/main" id="{648B4309-E463-471B-8B16-F3B052321CC8}"/>
+              </a:ext>
+            </a:extLst>
+          </p:cNvPr>
+          <p:cNvSpPr>
+            <a:spLocks xmlns:a="http://schemas.openxmlformats.org/drawingml/2006/main" noGrp="1"/>
+          </p:cNvSpPr>
+          <p:nvPr/>
+        </p:nvSpPr>
+        <p:spPr>
+          <a:xfrm xmlns:a="http://schemas.openxmlformats.org/drawingml/2006/main" rot="0">
+            <a:off x="5543550" y="2628900"/>
+            <a:ext cx="685800" cy="171450"/>
           </a:xfrm>
           <a:prstGeom xmlns:a="http://schemas.openxmlformats.org/drawingml/2006/main" prst="rect">
             <a:avLst/>
@@ -19439,42 +19781,355 @@
           <a:bodyPr xmlns:a="http://schemas.openxmlformats.org/drawingml/2006/main" lIns="0" tIns="0" rIns="0" bIns="0" anchor="t"/>
           <a:lstStyle xmlns:a="http://schemas.openxmlformats.org/drawingml/2006/main"/>
           <a:p xmlns:a="http://schemas.openxmlformats.org/drawingml/2006/main">
-            <a:pPr algn="l">
-              <a:defRPr sz="975" b="0">
+            <a:pPr algn="ctr">
+              <a:defRPr sz="750" b="0">
                 <a:solidFill>
                   <a:srgbClr val="4F5B66"/>
                 </a:solidFill>
               </a:defRPr>
             </a:pPr>
             <a:r>
-              <a:rPr sz="975" b="0">
+              <a:rPr sz="750" b="0">
                 <a:solidFill>
                   <a:srgbClr val="4F5B66"/>
                 </a:solidFill>
               </a:rPr>
-              <a:t>主清單共 11 個 use cases，已涵蓋查詢、交易、警示、通知、回測與資料維護。</a:t>
+              <a:t>&lt;&lt;include&gt;&gt;</a:t>
             </a:r>
           </a:p>
         </p:txBody>
       </p:sp>
       <p:sp>
         <p:nvSpPr>
-          <p:cNvPr id="60" name="">
-            <a:extLst xmlns:a="http://schemas.openxmlformats.org/drawingml/2006/main">
-              <a:ext uri="{FF2B5EF4-FFF2-40B4-BE49-F238E27FC236}">
-                <a16:creationId xmlns:a16="http://schemas.microsoft.com/office/drawing/2014/main" id="{A5B8FC9B-CC74-4C2C-9DD0-8E47F5C058A4}"/>
-              </a:ext>
-            </a:extLst>
-          </p:cNvPr>
-          <p:cNvSpPr>
-            <a:spLocks xmlns:a="http://schemas.openxmlformats.org/drawingml/2006/main" noGrp="1"/>
-          </p:cNvSpPr>
-          <p:nvPr/>
-        </p:nvSpPr>
-        <p:spPr>
-          <a:xfrm xmlns:a="http://schemas.openxmlformats.org/drawingml/2006/main" rot="0">
-            <a:off x="6724650" y="6000750"/>
-            <a:ext cx="4857750" cy="342900"/>
+          <p:cNvPr id="69" name="">
+            <a:extLst xmlns:a="http://schemas.openxmlformats.org/drawingml/2006/main">
+              <a:ext uri="{FF2B5EF4-FFF2-40B4-BE49-F238E27FC236}">
+                <a16:creationId xmlns:a16="http://schemas.microsoft.com/office/drawing/2014/main" id="{C07962FD-311A-4FA8-B80A-DA030D4AB94D}"/>
+              </a:ext>
+            </a:extLst>
+          </p:cNvPr>
+          <p:cNvSpPr>
+            <a:spLocks xmlns:a="http://schemas.openxmlformats.org/drawingml/2006/main" noGrp="1"/>
+          </p:cNvSpPr>
+          <p:nvPr/>
+        </p:nvSpPr>
+        <p:spPr>
+          <a:xfrm xmlns:a="http://schemas.openxmlformats.org/drawingml/2006/main" rot="4340993">
+            <a:off x="6177115" y="2588558"/>
+            <a:ext cx="95250" cy="19050"/>
+          </a:xfrm>
+          <a:prstGeom xmlns:a="http://schemas.openxmlformats.org/drawingml/2006/main" prst="rect">
+            <a:avLst/>
+          </a:prstGeom>
+          <a:solidFill xmlns:a="http://schemas.openxmlformats.org/drawingml/2006/main">
+            <a:srgbClr val="23313B"/>
+          </a:solidFill>
+          <a:ln xmlns:a="http://schemas.openxmlformats.org/drawingml/2006/main" w="0">
+            <a:solidFill>
+              <a:srgbClr val="000000">
+                <a:alpha val="0"/>
+              </a:srgbClr>
+            </a:solidFill>
+            <a:prstDash val="solid"/>
+          </a:ln>
+        </p:spPr>
+      </p:sp>
+      <p:sp>
+        <p:nvSpPr>
+          <p:cNvPr id="70" name="">
+            <a:extLst xmlns:a="http://schemas.openxmlformats.org/drawingml/2006/main">
+              <a:ext uri="{FF2B5EF4-FFF2-40B4-BE49-F238E27FC236}">
+                <a16:creationId xmlns:a16="http://schemas.microsoft.com/office/drawing/2014/main" id="{B5A6D243-0A29-43EF-AED2-77E6345D81C2}"/>
+              </a:ext>
+            </a:extLst>
+          </p:cNvPr>
+          <p:cNvSpPr>
+            <a:spLocks xmlns:a="http://schemas.openxmlformats.org/drawingml/2006/main" noGrp="1"/>
+          </p:cNvSpPr>
+          <p:nvPr/>
+        </p:nvSpPr>
+        <p:spPr>
+          <a:xfrm xmlns:a="http://schemas.openxmlformats.org/drawingml/2006/main" rot="4340993">
+            <a:off x="6226211" y="2742861"/>
+            <a:ext cx="95250" cy="19050"/>
+          </a:xfrm>
+          <a:prstGeom xmlns:a="http://schemas.openxmlformats.org/drawingml/2006/main" prst="rect">
+            <a:avLst/>
+          </a:prstGeom>
+          <a:solidFill xmlns:a="http://schemas.openxmlformats.org/drawingml/2006/main">
+            <a:srgbClr val="23313B"/>
+          </a:solidFill>
+          <a:ln xmlns:a="http://schemas.openxmlformats.org/drawingml/2006/main" w="0">
+            <a:solidFill>
+              <a:srgbClr val="000000">
+                <a:alpha val="0"/>
+              </a:srgbClr>
+            </a:solidFill>
+            <a:prstDash val="solid"/>
+          </a:ln>
+        </p:spPr>
+      </p:sp>
+      <p:sp>
+        <p:nvSpPr>
+          <p:cNvPr id="71" name="">
+            <a:extLst xmlns:a="http://schemas.openxmlformats.org/drawingml/2006/main">
+              <a:ext uri="{FF2B5EF4-FFF2-40B4-BE49-F238E27FC236}">
+                <a16:creationId xmlns:a16="http://schemas.microsoft.com/office/drawing/2014/main" id="{A0A48832-706A-4AB7-90EB-96E3C4EBFE52}"/>
+              </a:ext>
+            </a:extLst>
+          </p:cNvPr>
+          <p:cNvSpPr>
+            <a:spLocks xmlns:a="http://schemas.openxmlformats.org/drawingml/2006/main" noGrp="1"/>
+          </p:cNvSpPr>
+          <p:nvPr/>
+        </p:nvSpPr>
+        <p:spPr>
+          <a:xfrm xmlns:a="http://schemas.openxmlformats.org/drawingml/2006/main" rot="4340993">
+            <a:off x="6275308" y="2897163"/>
+            <a:ext cx="95250" cy="19050"/>
+          </a:xfrm>
+          <a:prstGeom xmlns:a="http://schemas.openxmlformats.org/drawingml/2006/main" prst="rect">
+            <a:avLst/>
+          </a:prstGeom>
+          <a:solidFill xmlns:a="http://schemas.openxmlformats.org/drawingml/2006/main">
+            <a:srgbClr val="23313B"/>
+          </a:solidFill>
+          <a:ln xmlns:a="http://schemas.openxmlformats.org/drawingml/2006/main" w="0">
+            <a:solidFill>
+              <a:srgbClr val="000000">
+                <a:alpha val="0"/>
+              </a:srgbClr>
+            </a:solidFill>
+            <a:prstDash val="solid"/>
+          </a:ln>
+        </p:spPr>
+      </p:sp>
+      <p:sp>
+        <p:nvSpPr>
+          <p:cNvPr id="72" name="">
+            <a:extLst xmlns:a="http://schemas.openxmlformats.org/drawingml/2006/main">
+              <a:ext uri="{FF2B5EF4-FFF2-40B4-BE49-F238E27FC236}">
+                <a16:creationId xmlns:a16="http://schemas.microsoft.com/office/drawing/2014/main" id="{909E7AE0-24EC-49E2-8FCC-DCECC13D1549}"/>
+              </a:ext>
+            </a:extLst>
+          </p:cNvPr>
+          <p:cNvSpPr>
+            <a:spLocks xmlns:a="http://schemas.openxmlformats.org/drawingml/2006/main" noGrp="1"/>
+          </p:cNvSpPr>
+          <p:nvPr/>
+        </p:nvSpPr>
+        <p:spPr>
+          <a:xfrm xmlns:a="http://schemas.openxmlformats.org/drawingml/2006/main" rot="4340993">
+            <a:off x="6324404" y="3051466"/>
+            <a:ext cx="95250" cy="19050"/>
+          </a:xfrm>
+          <a:prstGeom xmlns:a="http://schemas.openxmlformats.org/drawingml/2006/main" prst="rect">
+            <a:avLst/>
+          </a:prstGeom>
+          <a:solidFill xmlns:a="http://schemas.openxmlformats.org/drawingml/2006/main">
+            <a:srgbClr val="23313B"/>
+          </a:solidFill>
+          <a:ln xmlns:a="http://schemas.openxmlformats.org/drawingml/2006/main" w="0">
+            <a:solidFill>
+              <a:srgbClr val="000000">
+                <a:alpha val="0"/>
+              </a:srgbClr>
+            </a:solidFill>
+            <a:prstDash val="solid"/>
+          </a:ln>
+        </p:spPr>
+      </p:sp>
+      <p:sp>
+        <p:nvSpPr>
+          <p:cNvPr id="73" name="">
+            <a:extLst xmlns:a="http://schemas.openxmlformats.org/drawingml/2006/main">
+              <a:ext uri="{FF2B5EF4-FFF2-40B4-BE49-F238E27FC236}">
+                <a16:creationId xmlns:a16="http://schemas.microsoft.com/office/drawing/2014/main" id="{8B1B50D8-5E9A-40F3-BB25-6ED064B7270A}"/>
+              </a:ext>
+            </a:extLst>
+          </p:cNvPr>
+          <p:cNvSpPr>
+            <a:spLocks xmlns:a="http://schemas.openxmlformats.org/drawingml/2006/main" noGrp="1"/>
+          </p:cNvSpPr>
+          <p:nvPr/>
+        </p:nvSpPr>
+        <p:spPr>
+          <a:xfrm xmlns:a="http://schemas.openxmlformats.org/drawingml/2006/main" rot="4340993">
+            <a:off x="6373500" y="3205768"/>
+            <a:ext cx="95250" cy="19050"/>
+          </a:xfrm>
+          <a:prstGeom xmlns:a="http://schemas.openxmlformats.org/drawingml/2006/main" prst="rect">
+            <a:avLst/>
+          </a:prstGeom>
+          <a:solidFill xmlns:a="http://schemas.openxmlformats.org/drawingml/2006/main">
+            <a:srgbClr val="23313B"/>
+          </a:solidFill>
+          <a:ln xmlns:a="http://schemas.openxmlformats.org/drawingml/2006/main" w="0">
+            <a:solidFill>
+              <a:srgbClr val="000000">
+                <a:alpha val="0"/>
+              </a:srgbClr>
+            </a:solidFill>
+            <a:prstDash val="solid"/>
+          </a:ln>
+        </p:spPr>
+      </p:sp>
+      <p:sp>
+        <p:nvSpPr>
+          <p:cNvPr id="74" name="">
+            <a:extLst xmlns:a="http://schemas.openxmlformats.org/drawingml/2006/main">
+              <a:ext uri="{FF2B5EF4-FFF2-40B4-BE49-F238E27FC236}">
+                <a16:creationId xmlns:a16="http://schemas.microsoft.com/office/drawing/2014/main" id="{4148BDFF-6409-40B7-8090-7273C54222F4}"/>
+              </a:ext>
+            </a:extLst>
+          </p:cNvPr>
+          <p:cNvSpPr>
+            <a:spLocks xmlns:a="http://schemas.openxmlformats.org/drawingml/2006/main" noGrp="1"/>
+          </p:cNvSpPr>
+          <p:nvPr/>
+        </p:nvSpPr>
+        <p:spPr>
+          <a:xfrm xmlns:a="http://schemas.openxmlformats.org/drawingml/2006/main" rot="4340993">
+            <a:off x="6422596" y="3360071"/>
+            <a:ext cx="95250" cy="19050"/>
+          </a:xfrm>
+          <a:prstGeom xmlns:a="http://schemas.openxmlformats.org/drawingml/2006/main" prst="rect">
+            <a:avLst/>
+          </a:prstGeom>
+          <a:solidFill xmlns:a="http://schemas.openxmlformats.org/drawingml/2006/main">
+            <a:srgbClr val="23313B"/>
+          </a:solidFill>
+          <a:ln xmlns:a="http://schemas.openxmlformats.org/drawingml/2006/main" w="0">
+            <a:solidFill>
+              <a:srgbClr val="000000">
+                <a:alpha val="0"/>
+              </a:srgbClr>
+            </a:solidFill>
+            <a:prstDash val="solid"/>
+          </a:ln>
+        </p:spPr>
+      </p:sp>
+      <p:sp>
+        <p:nvSpPr>
+          <p:cNvPr id="75" name="">
+            <a:extLst xmlns:a="http://schemas.openxmlformats.org/drawingml/2006/main">
+              <a:ext uri="{FF2B5EF4-FFF2-40B4-BE49-F238E27FC236}">
+                <a16:creationId xmlns:a16="http://schemas.microsoft.com/office/drawing/2014/main" id="{2E8C684E-A61E-49E6-AFAA-B41BB3273402}"/>
+              </a:ext>
+            </a:extLst>
+          </p:cNvPr>
+          <p:cNvSpPr>
+            <a:spLocks xmlns:a="http://schemas.openxmlformats.org/drawingml/2006/main" noGrp="1"/>
+          </p:cNvSpPr>
+          <p:nvPr/>
+        </p:nvSpPr>
+        <p:spPr>
+          <a:xfrm xmlns:a="http://schemas.openxmlformats.org/drawingml/2006/main" rot="4340993">
+            <a:off x="6471693" y="3514373"/>
+            <a:ext cx="95250" cy="19050"/>
+          </a:xfrm>
+          <a:prstGeom xmlns:a="http://schemas.openxmlformats.org/drawingml/2006/main" prst="rect">
+            <a:avLst/>
+          </a:prstGeom>
+          <a:solidFill xmlns:a="http://schemas.openxmlformats.org/drawingml/2006/main">
+            <a:srgbClr val="23313B"/>
+          </a:solidFill>
+          <a:ln xmlns:a="http://schemas.openxmlformats.org/drawingml/2006/main" w="0">
+            <a:solidFill>
+              <a:srgbClr val="000000">
+                <a:alpha val="0"/>
+              </a:srgbClr>
+            </a:solidFill>
+            <a:prstDash val="solid"/>
+          </a:ln>
+        </p:spPr>
+      </p:sp>
+      <p:sp>
+        <p:nvSpPr>
+          <p:cNvPr id="76" name="">
+            <a:extLst xmlns:a="http://schemas.openxmlformats.org/drawingml/2006/main">
+              <a:ext uri="{FF2B5EF4-FFF2-40B4-BE49-F238E27FC236}">
+                <a16:creationId xmlns:a16="http://schemas.microsoft.com/office/drawing/2014/main" id="{EDB27B35-EA03-4B18-846D-B66006D1CEA3}"/>
+              </a:ext>
+            </a:extLst>
+          </p:cNvPr>
+          <p:cNvSpPr>
+            <a:spLocks xmlns:a="http://schemas.openxmlformats.org/drawingml/2006/main" noGrp="1"/>
+          </p:cNvSpPr>
+          <p:nvPr/>
+        </p:nvSpPr>
+        <p:spPr>
+          <a:xfrm xmlns:a="http://schemas.openxmlformats.org/drawingml/2006/main" rot="4340993">
+            <a:off x="6535653" y="3648347"/>
+            <a:ext cx="52585" cy="19050"/>
+          </a:xfrm>
+          <a:prstGeom xmlns:a="http://schemas.openxmlformats.org/drawingml/2006/main" prst="rect">
+            <a:avLst/>
+          </a:prstGeom>
+          <a:solidFill xmlns:a="http://schemas.openxmlformats.org/drawingml/2006/main">
+            <a:srgbClr val="23313B"/>
+          </a:solidFill>
+          <a:ln xmlns:a="http://schemas.openxmlformats.org/drawingml/2006/main" w="0">
+            <a:solidFill>
+              <a:srgbClr val="000000">
+                <a:alpha val="0"/>
+              </a:srgbClr>
+            </a:solidFill>
+            <a:prstDash val="solid"/>
+          </a:ln>
+        </p:spPr>
+      </p:sp>
+      <p:sp>
+        <p:nvSpPr>
+          <p:cNvPr id="77" name="">
+            <a:extLst xmlns:a="http://schemas.openxmlformats.org/drawingml/2006/main">
+              <a:ext uri="{FF2B5EF4-FFF2-40B4-BE49-F238E27FC236}">
+                <a16:creationId xmlns:a16="http://schemas.microsoft.com/office/drawing/2014/main" id="{D8E8493F-8AA6-451E-BE96-000F70FF0AD2}"/>
+              </a:ext>
+            </a:extLst>
+          </p:cNvPr>
+          <p:cNvSpPr>
+            <a:spLocks xmlns:a="http://schemas.openxmlformats.org/drawingml/2006/main" noGrp="1"/>
+          </p:cNvSpPr>
+          <p:nvPr/>
+        </p:nvSpPr>
+        <p:spPr>
+          <a:xfrm xmlns:a="http://schemas.openxmlformats.org/drawingml/2006/main" rot="9740993">
+            <a:off x="6477000" y="3743325"/>
+            <a:ext cx="133350" cy="133350"/>
+          </a:xfrm>
+          <a:prstGeom xmlns:a="http://schemas.openxmlformats.org/drawingml/2006/main" prst="triangle">
+            <a:avLst/>
+          </a:prstGeom>
+          <a:solidFill xmlns:a="http://schemas.openxmlformats.org/drawingml/2006/main">
+            <a:srgbClr val="F5F1E8"/>
+          </a:solidFill>
+          <a:ln xmlns:a="http://schemas.openxmlformats.org/drawingml/2006/main" w="13335">
+            <a:solidFill>
+              <a:srgbClr val="23313B"/>
+            </a:solidFill>
+            <a:prstDash val="solid"/>
+          </a:ln>
+        </p:spPr>
+      </p:sp>
+      <p:sp>
+        <p:nvSpPr>
+          <p:cNvPr id="78" name="">
+            <a:extLst xmlns:a="http://schemas.openxmlformats.org/drawingml/2006/main">
+              <a:ext uri="{FF2B5EF4-FFF2-40B4-BE49-F238E27FC236}">
+                <a16:creationId xmlns:a16="http://schemas.microsoft.com/office/drawing/2014/main" id="{830E1FEB-2A92-482B-809A-DB9AF3445B0A}"/>
+              </a:ext>
+            </a:extLst>
+          </p:cNvPr>
+          <p:cNvSpPr>
+            <a:spLocks xmlns:a="http://schemas.openxmlformats.org/drawingml/2006/main" noGrp="1"/>
+          </p:cNvSpPr>
+          <p:nvPr/>
+        </p:nvSpPr>
+        <p:spPr>
+          <a:xfrm xmlns:a="http://schemas.openxmlformats.org/drawingml/2006/main" rot="0">
+            <a:off x="6067425" y="3009900"/>
+            <a:ext cx="685800" cy="171450"/>
           </a:xfrm>
           <a:prstGeom xmlns:a="http://schemas.openxmlformats.org/drawingml/2006/main" prst="rect">
             <a:avLst/>
@@ -19497,42 +20152,180 @@
           <a:bodyPr xmlns:a="http://schemas.openxmlformats.org/drawingml/2006/main" lIns="0" tIns="0" rIns="0" bIns="0" anchor="t"/>
           <a:lstStyle xmlns:a="http://schemas.openxmlformats.org/drawingml/2006/main"/>
           <a:p xmlns:a="http://schemas.openxmlformats.org/drawingml/2006/main">
-            <a:pPr algn="r">
-              <a:defRPr sz="975" b="0">
+            <a:pPr algn="ctr">
+              <a:defRPr sz="750" b="0">
                 <a:solidFill>
                   <a:srgbClr val="4F5B66"/>
                 </a:solidFill>
               </a:defRPr>
             </a:pPr>
             <a:r>
-              <a:rPr sz="975" b="0">
+              <a:rPr sz="750" b="0">
                 <a:solidFill>
                   <a:srgbClr val="4F5B66"/>
                 </a:solidFill>
               </a:rPr>
-              <a:t>其中交易驗證與警示啟停能更明確展示 OOAD 的流程與物件責任。</a:t>
+              <a:t>&lt;&lt;include&gt;&gt;</a:t>
             </a:r>
           </a:p>
         </p:txBody>
       </p:sp>
       <p:sp>
         <p:nvSpPr>
-          <p:cNvPr id="61" name="">
-            <a:extLst xmlns:a="http://schemas.openxmlformats.org/drawingml/2006/main">
-              <a:ext uri="{FF2B5EF4-FFF2-40B4-BE49-F238E27FC236}">
-                <a16:creationId xmlns:a16="http://schemas.microsoft.com/office/drawing/2014/main" id="{0804F08C-EB1C-4333-800A-AC87E5379CB2}"/>
-              </a:ext>
-            </a:extLst>
-          </p:cNvPr>
-          <p:cNvSpPr>
-            <a:spLocks xmlns:a="http://schemas.openxmlformats.org/drawingml/2006/main" noGrp="1"/>
-          </p:cNvSpPr>
-          <p:nvPr/>
-        </p:nvSpPr>
-        <p:spPr>
-          <a:xfrm xmlns:a="http://schemas.openxmlformats.org/drawingml/2006/main" rot="0">
-            <a:off x="609600" y="6534150"/>
-            <a:ext cx="9715500" cy="171450"/>
+          <p:cNvPr id="79" name="">
+            <a:extLst xmlns:a="http://schemas.openxmlformats.org/drawingml/2006/main">
+              <a:ext uri="{FF2B5EF4-FFF2-40B4-BE49-F238E27FC236}">
+                <a16:creationId xmlns:a16="http://schemas.microsoft.com/office/drawing/2014/main" id="{63B5066D-E58A-4338-950D-425132262DB1}"/>
+              </a:ext>
+            </a:extLst>
+          </p:cNvPr>
+          <p:cNvSpPr>
+            <a:spLocks xmlns:a="http://schemas.openxmlformats.org/drawingml/2006/main" noGrp="1"/>
+          </p:cNvSpPr>
+          <p:nvPr/>
+        </p:nvSpPr>
+        <p:spPr>
+          <a:xfrm xmlns:a="http://schemas.openxmlformats.org/drawingml/2006/main" rot="0">
+            <a:off x="4648200" y="4695825"/>
+            <a:ext cx="95250" cy="19050"/>
+          </a:xfrm>
+          <a:prstGeom xmlns:a="http://schemas.openxmlformats.org/drawingml/2006/main" prst="rect">
+            <a:avLst/>
+          </a:prstGeom>
+          <a:solidFill xmlns:a="http://schemas.openxmlformats.org/drawingml/2006/main">
+            <a:srgbClr val="23313B"/>
+          </a:solidFill>
+          <a:ln xmlns:a="http://schemas.openxmlformats.org/drawingml/2006/main" w="0">
+            <a:solidFill>
+              <a:srgbClr val="000000">
+                <a:alpha val="0"/>
+              </a:srgbClr>
+            </a:solidFill>
+            <a:prstDash val="solid"/>
+          </a:ln>
+        </p:spPr>
+      </p:sp>
+      <p:sp>
+        <p:nvSpPr>
+          <p:cNvPr id="80" name="">
+            <a:extLst xmlns:a="http://schemas.openxmlformats.org/drawingml/2006/main">
+              <a:ext uri="{FF2B5EF4-FFF2-40B4-BE49-F238E27FC236}">
+                <a16:creationId xmlns:a16="http://schemas.microsoft.com/office/drawing/2014/main" id="{318D44CB-3C2A-4E26-9968-983A76D75D23}"/>
+              </a:ext>
+            </a:extLst>
+          </p:cNvPr>
+          <p:cNvSpPr>
+            <a:spLocks xmlns:a="http://schemas.openxmlformats.org/drawingml/2006/main" noGrp="1"/>
+          </p:cNvSpPr>
+          <p:nvPr/>
+        </p:nvSpPr>
+        <p:spPr>
+          <a:xfrm xmlns:a="http://schemas.openxmlformats.org/drawingml/2006/main" rot="0">
+            <a:off x="4810125" y="4695825"/>
+            <a:ext cx="95250" cy="19050"/>
+          </a:xfrm>
+          <a:prstGeom xmlns:a="http://schemas.openxmlformats.org/drawingml/2006/main" prst="rect">
+            <a:avLst/>
+          </a:prstGeom>
+          <a:solidFill xmlns:a="http://schemas.openxmlformats.org/drawingml/2006/main">
+            <a:srgbClr val="23313B"/>
+          </a:solidFill>
+          <a:ln xmlns:a="http://schemas.openxmlformats.org/drawingml/2006/main" w="0">
+            <a:solidFill>
+              <a:srgbClr val="000000">
+                <a:alpha val="0"/>
+              </a:srgbClr>
+            </a:solidFill>
+            <a:prstDash val="solid"/>
+          </a:ln>
+        </p:spPr>
+      </p:sp>
+      <p:sp>
+        <p:nvSpPr>
+          <p:cNvPr id="81" name="">
+            <a:extLst xmlns:a="http://schemas.openxmlformats.org/drawingml/2006/main">
+              <a:ext uri="{FF2B5EF4-FFF2-40B4-BE49-F238E27FC236}">
+                <a16:creationId xmlns:a16="http://schemas.microsoft.com/office/drawing/2014/main" id="{BB6FCDC7-E8E0-4118-B1A2-7D869B758439}"/>
+              </a:ext>
+            </a:extLst>
+          </p:cNvPr>
+          <p:cNvSpPr>
+            <a:spLocks xmlns:a="http://schemas.openxmlformats.org/drawingml/2006/main" noGrp="1"/>
+          </p:cNvSpPr>
+          <p:nvPr/>
+        </p:nvSpPr>
+        <p:spPr>
+          <a:xfrm xmlns:a="http://schemas.openxmlformats.org/drawingml/2006/main" rot="0">
+            <a:off x="4972050" y="4695825"/>
+            <a:ext cx="95250" cy="19050"/>
+          </a:xfrm>
+          <a:prstGeom xmlns:a="http://schemas.openxmlformats.org/drawingml/2006/main" prst="rect">
+            <a:avLst/>
+          </a:prstGeom>
+          <a:solidFill xmlns:a="http://schemas.openxmlformats.org/drawingml/2006/main">
+            <a:srgbClr val="23313B"/>
+          </a:solidFill>
+          <a:ln xmlns:a="http://schemas.openxmlformats.org/drawingml/2006/main" w="0">
+            <a:solidFill>
+              <a:srgbClr val="000000">
+                <a:alpha val="0"/>
+              </a:srgbClr>
+            </a:solidFill>
+            <a:prstDash val="solid"/>
+          </a:ln>
+        </p:spPr>
+      </p:sp>
+      <p:sp>
+        <p:nvSpPr>
+          <p:cNvPr id="82" name="">
+            <a:extLst xmlns:a="http://schemas.openxmlformats.org/drawingml/2006/main">
+              <a:ext uri="{FF2B5EF4-FFF2-40B4-BE49-F238E27FC236}">
+                <a16:creationId xmlns:a16="http://schemas.microsoft.com/office/drawing/2014/main" id="{AD3E250D-58E2-41B1-B4C2-D828FA1F94F3}"/>
+              </a:ext>
+            </a:extLst>
+          </p:cNvPr>
+          <p:cNvSpPr>
+            <a:spLocks xmlns:a="http://schemas.openxmlformats.org/drawingml/2006/main" noGrp="1"/>
+          </p:cNvSpPr>
+          <p:nvPr/>
+        </p:nvSpPr>
+        <p:spPr>
+          <a:xfrm xmlns:a="http://schemas.openxmlformats.org/drawingml/2006/main" rot="5400000">
+            <a:off x="5086350" y="4638675"/>
+            <a:ext cx="133350" cy="133350"/>
+          </a:xfrm>
+          <a:prstGeom xmlns:a="http://schemas.openxmlformats.org/drawingml/2006/main" prst="triangle">
+            <a:avLst/>
+          </a:prstGeom>
+          <a:solidFill xmlns:a="http://schemas.openxmlformats.org/drawingml/2006/main">
+            <a:srgbClr val="F5F1E8"/>
+          </a:solidFill>
+          <a:ln xmlns:a="http://schemas.openxmlformats.org/drawingml/2006/main" w="13335">
+            <a:solidFill>
+              <a:srgbClr val="23313B"/>
+            </a:solidFill>
+            <a:prstDash val="solid"/>
+          </a:ln>
+        </p:spPr>
+      </p:sp>
+      <p:sp>
+        <p:nvSpPr>
+          <p:cNvPr id="83" name="">
+            <a:extLst xmlns:a="http://schemas.openxmlformats.org/drawingml/2006/main">
+              <a:ext uri="{FF2B5EF4-FFF2-40B4-BE49-F238E27FC236}">
+                <a16:creationId xmlns:a16="http://schemas.microsoft.com/office/drawing/2014/main" id="{F79D9AF6-68A1-4653-8FC4-82F262130AE0}"/>
+              </a:ext>
+            </a:extLst>
+          </p:cNvPr>
+          <p:cNvSpPr>
+            <a:spLocks xmlns:a="http://schemas.openxmlformats.org/drawingml/2006/main" noGrp="1"/>
+          </p:cNvSpPr>
+          <p:nvPr/>
+        </p:nvSpPr>
+        <p:spPr>
+          <a:xfrm xmlns:a="http://schemas.openxmlformats.org/drawingml/2006/main" rot="0">
+            <a:off x="4591050" y="4533900"/>
+            <a:ext cx="685800" cy="171450"/>
           </a:xfrm>
           <a:prstGeom xmlns:a="http://schemas.openxmlformats.org/drawingml/2006/main" prst="rect">
             <a:avLst/>
@@ -19555,6 +20348,180 @@
           <a:bodyPr xmlns:a="http://schemas.openxmlformats.org/drawingml/2006/main" lIns="0" tIns="0" rIns="0" bIns="0" anchor="t"/>
           <a:lstStyle xmlns:a="http://schemas.openxmlformats.org/drawingml/2006/main"/>
           <a:p xmlns:a="http://schemas.openxmlformats.org/drawingml/2006/main">
+            <a:pPr algn="ctr">
+              <a:defRPr sz="750" b="0">
+                <a:solidFill>
+                  <a:srgbClr val="4F5B66"/>
+                </a:solidFill>
+              </a:defRPr>
+            </a:pPr>
+            <a:r>
+              <a:rPr sz="750" b="0">
+                <a:solidFill>
+                  <a:srgbClr val="4F5B66"/>
+                </a:solidFill>
+              </a:rPr>
+              <a:t>&lt;&lt;include&gt;&gt;</a:t>
+            </a:r>
+          </a:p>
+        </p:txBody>
+      </p:sp>
+      <p:sp>
+        <p:nvSpPr>
+          <p:cNvPr id="84" name="">
+            <a:extLst xmlns:a="http://schemas.openxmlformats.org/drawingml/2006/main">
+              <a:ext uri="{FF2B5EF4-FFF2-40B4-BE49-F238E27FC236}">
+                <a16:creationId xmlns:a16="http://schemas.microsoft.com/office/drawing/2014/main" id="{6B2EA71D-5860-47D0-9F95-D81750E97ACD}"/>
+              </a:ext>
+            </a:extLst>
+          </p:cNvPr>
+          <p:cNvSpPr>
+            <a:spLocks xmlns:a="http://schemas.openxmlformats.org/drawingml/2006/main" noGrp="1"/>
+          </p:cNvSpPr>
+          <p:nvPr/>
+        </p:nvSpPr>
+        <p:spPr>
+          <a:xfrm xmlns:a="http://schemas.openxmlformats.org/drawingml/2006/main" rot="0">
+            <a:off x="609600" y="6000750"/>
+            <a:ext cx="6667500" cy="342900"/>
+          </a:xfrm>
+          <a:prstGeom xmlns:a="http://schemas.openxmlformats.org/drawingml/2006/main" prst="rect">
+            <a:avLst/>
+          </a:prstGeom>
+          <a:solidFill xmlns:a="http://schemas.openxmlformats.org/drawingml/2006/main">
+            <a:srgbClr val="000000">
+              <a:alpha val="0"/>
+            </a:srgbClr>
+          </a:solidFill>
+          <a:ln xmlns:a="http://schemas.openxmlformats.org/drawingml/2006/main" w="0">
+            <a:solidFill>
+              <a:srgbClr val="000000">
+                <a:alpha val="0"/>
+              </a:srgbClr>
+            </a:solidFill>
+            <a:prstDash val="solid"/>
+          </a:ln>
+        </p:spPr>
+        <p:txBody>
+          <a:bodyPr xmlns:a="http://schemas.openxmlformats.org/drawingml/2006/main" lIns="0" tIns="0" rIns="0" bIns="0" anchor="t"/>
+          <a:lstStyle xmlns:a="http://schemas.openxmlformats.org/drawingml/2006/main"/>
+          <a:p xmlns:a="http://schemas.openxmlformats.org/drawingml/2006/main">
+            <a:pPr algn="l">
+              <a:defRPr sz="975" b="0">
+                <a:solidFill>
+                  <a:srgbClr val="4F5B66"/>
+                </a:solidFill>
+              </a:defRPr>
+            </a:pPr>
+            <a:r>
+              <a:rPr sz="975" b="0">
+                <a:solidFill>
+                  <a:srgbClr val="4F5B66"/>
+                </a:solidFill>
+              </a:rPr>
+              <a:t>主清單共 11 個 use cases，並以 association 呈現 actor 與主要任務的關聯。</a:t>
+            </a:r>
+          </a:p>
+        </p:txBody>
+      </p:sp>
+      <p:sp>
+        <p:nvSpPr>
+          <p:cNvPr id="85" name="">
+            <a:extLst xmlns:a="http://schemas.openxmlformats.org/drawingml/2006/main">
+              <a:ext uri="{FF2B5EF4-FFF2-40B4-BE49-F238E27FC236}">
+                <a16:creationId xmlns:a16="http://schemas.microsoft.com/office/drawing/2014/main" id="{74FF8502-3727-411A-BF72-E35AA56CE834}"/>
+              </a:ext>
+            </a:extLst>
+          </p:cNvPr>
+          <p:cNvSpPr>
+            <a:spLocks xmlns:a="http://schemas.openxmlformats.org/drawingml/2006/main" noGrp="1"/>
+          </p:cNvSpPr>
+          <p:nvPr/>
+        </p:nvSpPr>
+        <p:spPr>
+          <a:xfrm xmlns:a="http://schemas.openxmlformats.org/drawingml/2006/main" rot="0">
+            <a:off x="6724650" y="6000750"/>
+            <a:ext cx="4857750" cy="342900"/>
+          </a:xfrm>
+          <a:prstGeom xmlns:a="http://schemas.openxmlformats.org/drawingml/2006/main" prst="rect">
+            <a:avLst/>
+          </a:prstGeom>
+          <a:solidFill xmlns:a="http://schemas.openxmlformats.org/drawingml/2006/main">
+            <a:srgbClr val="000000">
+              <a:alpha val="0"/>
+            </a:srgbClr>
+          </a:solidFill>
+          <a:ln xmlns:a="http://schemas.openxmlformats.org/drawingml/2006/main" w="0">
+            <a:solidFill>
+              <a:srgbClr val="000000">
+                <a:alpha val="0"/>
+              </a:srgbClr>
+            </a:solidFill>
+            <a:prstDash val="solid"/>
+          </a:ln>
+        </p:spPr>
+        <p:txBody>
+          <a:bodyPr xmlns:a="http://schemas.openxmlformats.org/drawingml/2006/main" lIns="0" tIns="0" rIns="0" bIns="0" anchor="t"/>
+          <a:lstStyle xmlns:a="http://schemas.openxmlformats.org/drawingml/2006/main"/>
+          <a:p xmlns:a="http://schemas.openxmlformats.org/drawingml/2006/main">
+            <a:pPr algn="r">
+              <a:defRPr sz="975" b="0">
+                <a:solidFill>
+                  <a:srgbClr val="4F5B66"/>
+                </a:solidFill>
+              </a:defRPr>
+            </a:pPr>
+            <a:r>
+              <a:rPr sz="975" b="0">
+                <a:solidFill>
+                  <a:srgbClr val="4F5B66"/>
+                </a:solidFill>
+              </a:rPr>
+              <a:t>其中以 include 表示投資組合管理包含買賣交易；回測執行則包含結果查看。</a:t>
+            </a:r>
+          </a:p>
+        </p:txBody>
+      </p:sp>
+      <p:sp>
+        <p:nvSpPr>
+          <p:cNvPr id="86" name="">
+            <a:extLst xmlns:a="http://schemas.openxmlformats.org/drawingml/2006/main">
+              <a:ext uri="{FF2B5EF4-FFF2-40B4-BE49-F238E27FC236}">
+                <a16:creationId xmlns:a16="http://schemas.microsoft.com/office/drawing/2014/main" id="{BB2C1765-D779-418E-8398-AFC8E74315E8}"/>
+              </a:ext>
+            </a:extLst>
+          </p:cNvPr>
+          <p:cNvSpPr>
+            <a:spLocks xmlns:a="http://schemas.openxmlformats.org/drawingml/2006/main" noGrp="1"/>
+          </p:cNvSpPr>
+          <p:nvPr/>
+        </p:nvSpPr>
+        <p:spPr>
+          <a:xfrm xmlns:a="http://schemas.openxmlformats.org/drawingml/2006/main" rot="0">
+            <a:off x="609600" y="6534150"/>
+            <a:ext cx="9715500" cy="171450"/>
+          </a:xfrm>
+          <a:prstGeom xmlns:a="http://schemas.openxmlformats.org/drawingml/2006/main" prst="rect">
+            <a:avLst/>
+          </a:prstGeom>
+          <a:solidFill xmlns:a="http://schemas.openxmlformats.org/drawingml/2006/main">
+            <a:srgbClr val="000000">
+              <a:alpha val="0"/>
+            </a:srgbClr>
+          </a:solidFill>
+          <a:ln xmlns:a="http://schemas.openxmlformats.org/drawingml/2006/main" w="0">
+            <a:solidFill>
+              <a:srgbClr val="000000">
+                <a:alpha val="0"/>
+              </a:srgbClr>
+            </a:solidFill>
+            <a:prstDash val="solid"/>
+          </a:ln>
+        </p:spPr>
+        <p:txBody>
+          <a:bodyPr xmlns:a="http://schemas.openxmlformats.org/drawingml/2006/main" lIns="0" tIns="0" rIns="0" bIns="0" anchor="t"/>
+          <a:lstStyle xmlns:a="http://schemas.openxmlformats.org/drawingml/2006/main"/>
+          <a:p xmlns:a="http://schemas.openxmlformats.org/drawingml/2006/main">
             <a:pPr algn="l">
               <a:defRPr sz="750" b="0">
                 <a:solidFill>
@@ -19576,7 +20543,7 @@
     </p:spTree>
     <p:extLst>
       <p:ext uri="{BB962C8B-B14F-4D97-AF65-F5344CB8AC3E}">
-        <p14:creationId xmlns:p14="http://schemas.microsoft.com/office/powerpoint/2010/main" val="145715124"/>
+        <p14:creationId xmlns:p14="http://schemas.microsoft.com/office/powerpoint/2010/main" val="1918262048"/>
       </p:ext>
     </p:extLst>
   </p:cSld>
@@ -19607,7 +20574,7 @@
           <p:cNvPr id="1" name="">
             <a:extLst xmlns:a="http://schemas.openxmlformats.org/drawingml/2006/main">
               <a:ext uri="{FF2B5EF4-FFF2-40B4-BE49-F238E27FC236}">
-                <a16:creationId xmlns:a16="http://schemas.microsoft.com/office/drawing/2014/main" id="{2011C0B1-25D5-4528-AB09-6AFBF94ACB53}"/>
+                <a16:creationId xmlns:a16="http://schemas.microsoft.com/office/drawing/2014/main" id="{179DF22E-D912-4704-959A-0F57B5D32E70}"/>
               </a:ext>
             </a:extLst>
           </p:cNvPr>
@@ -19642,7 +20609,7 @@
           <p:cNvPr id="2" name="">
             <a:extLst xmlns:a="http://schemas.openxmlformats.org/drawingml/2006/main">
               <a:ext uri="{FF2B5EF4-FFF2-40B4-BE49-F238E27FC236}">
-                <a16:creationId xmlns:a16="http://schemas.microsoft.com/office/drawing/2014/main" id="{98076106-144A-4286-B0BB-14E568BC1845}"/>
+                <a16:creationId xmlns:a16="http://schemas.microsoft.com/office/drawing/2014/main" id="{B31ADCEF-95B3-4D45-9BE8-242E485149EF}"/>
               </a:ext>
             </a:extLst>
           </p:cNvPr>
@@ -19677,7 +20644,7 @@
           <p:cNvPr id="3" name="">
             <a:extLst xmlns:a="http://schemas.openxmlformats.org/drawingml/2006/main">
               <a:ext uri="{FF2B5EF4-FFF2-40B4-BE49-F238E27FC236}">
-                <a16:creationId xmlns:a16="http://schemas.microsoft.com/office/drawing/2014/main" id="{EE963A0A-0A76-4795-8F79-17D4467BFB7B}"/>
+                <a16:creationId xmlns:a16="http://schemas.microsoft.com/office/drawing/2014/main" id="{31BB2B8B-9B60-408A-96BD-BB3D23015C1D}"/>
               </a:ext>
             </a:extLst>
           </p:cNvPr>
@@ -19735,7 +20702,7 @@
           <p:cNvPr id="4" name="">
             <a:extLst xmlns:a="http://schemas.openxmlformats.org/drawingml/2006/main">
               <a:ext uri="{FF2B5EF4-FFF2-40B4-BE49-F238E27FC236}">
-                <a16:creationId xmlns:a16="http://schemas.microsoft.com/office/drawing/2014/main" id="{7B4F6DD1-C7B6-47D6-97FD-B36B3E2EBD69}"/>
+                <a16:creationId xmlns:a16="http://schemas.microsoft.com/office/drawing/2014/main" id="{5D2A96CC-72AA-4780-B6E2-245E2510040D}"/>
               </a:ext>
             </a:extLst>
           </p:cNvPr>
@@ -19793,7 +20760,7 @@
           <p:cNvPr id="5" name="">
             <a:extLst xmlns:a="http://schemas.openxmlformats.org/drawingml/2006/main">
               <a:ext uri="{FF2B5EF4-FFF2-40B4-BE49-F238E27FC236}">
-                <a16:creationId xmlns:a16="http://schemas.microsoft.com/office/drawing/2014/main" id="{57CF2469-5160-4A76-8E73-9A388C22D5F1}"/>
+                <a16:creationId xmlns:a16="http://schemas.microsoft.com/office/drawing/2014/main" id="{4B6B5AA3-F8D7-478B-B31C-7B5B9F743A6C}"/>
               </a:ext>
             </a:extLst>
           </p:cNvPr>
@@ -19828,7 +20795,7 @@
           <p:cNvPr id="6" name="">
             <a:extLst xmlns:a="http://schemas.openxmlformats.org/drawingml/2006/main">
               <a:ext uri="{FF2B5EF4-FFF2-40B4-BE49-F238E27FC236}">
-                <a16:creationId xmlns:a16="http://schemas.microsoft.com/office/drawing/2014/main" id="{D8A53CDC-0C1D-4407-882A-2D8D61B1BF21}"/>
+                <a16:creationId xmlns:a16="http://schemas.microsoft.com/office/drawing/2014/main" id="{23719C83-A7E5-4787-9CE6-25B2E268ED42}"/>
               </a:ext>
             </a:extLst>
           </p:cNvPr>
@@ -19886,7 +20853,7 @@
           <p:cNvPr id="7" name="">
             <a:extLst xmlns:a="http://schemas.openxmlformats.org/drawingml/2006/main">
               <a:ext uri="{FF2B5EF4-FFF2-40B4-BE49-F238E27FC236}">
-                <a16:creationId xmlns:a16="http://schemas.microsoft.com/office/drawing/2014/main" id="{19F03DA3-C5E0-4178-B1E1-1AE9C07D79F6}"/>
+                <a16:creationId xmlns:a16="http://schemas.microsoft.com/office/drawing/2014/main" id="{3FED936D-A404-4A17-A147-91B83E259035}"/>
               </a:ext>
             </a:extLst>
           </p:cNvPr>
@@ -19944,7 +20911,7 @@
           <p:cNvPr id="8" name="">
             <a:extLst xmlns:a="http://schemas.openxmlformats.org/drawingml/2006/main">
               <a:ext uri="{FF2B5EF4-FFF2-40B4-BE49-F238E27FC236}">
-                <a16:creationId xmlns:a16="http://schemas.microsoft.com/office/drawing/2014/main" id="{FDF19786-9130-4C22-A785-D455F995AD80}"/>
+                <a16:creationId xmlns:a16="http://schemas.microsoft.com/office/drawing/2014/main" id="{1E6453BE-374C-4E83-8825-DBB9D2D3BBF7}"/>
               </a:ext>
             </a:extLst>
           </p:cNvPr>
@@ -19977,7 +20944,7 @@
           <p:cNvPr id="9" name="">
             <a:extLst xmlns:a="http://schemas.openxmlformats.org/drawingml/2006/main">
               <a:ext uri="{FF2B5EF4-FFF2-40B4-BE49-F238E27FC236}">
-                <a16:creationId xmlns:a16="http://schemas.microsoft.com/office/drawing/2014/main" id="{1150B94E-EFE6-497B-B1AE-A4805304EBF0}"/>
+                <a16:creationId xmlns:a16="http://schemas.microsoft.com/office/drawing/2014/main" id="{FE710326-9A99-4FB0-84FF-724330A60B25}"/>
               </a:ext>
             </a:extLst>
           </p:cNvPr>
@@ -20035,7 +21002,7 @@
           <p:cNvPr id="10" name="">
             <a:extLst xmlns:a="http://schemas.openxmlformats.org/drawingml/2006/main">
               <a:ext uri="{FF2B5EF4-FFF2-40B4-BE49-F238E27FC236}">
-                <a16:creationId xmlns:a16="http://schemas.microsoft.com/office/drawing/2014/main" id="{F4FA7594-DFF6-47EB-8214-D9BF8A526270}"/>
+                <a16:creationId xmlns:a16="http://schemas.microsoft.com/office/drawing/2014/main" id="{6FA311CF-2530-4A5A-8487-71CE5A5C0403}"/>
               </a:ext>
             </a:extLst>
           </p:cNvPr>
@@ -20070,7 +21037,7 @@
           <p:cNvPr id="11" name="">
             <a:extLst xmlns:a="http://schemas.openxmlformats.org/drawingml/2006/main">
               <a:ext uri="{FF2B5EF4-FFF2-40B4-BE49-F238E27FC236}">
-                <a16:creationId xmlns:a16="http://schemas.microsoft.com/office/drawing/2014/main" id="{788BC0BA-894F-42E2-835C-28F7F515FAC9}"/>
+                <a16:creationId xmlns:a16="http://schemas.microsoft.com/office/drawing/2014/main" id="{25657E99-311F-4174-A498-6F217CAA45DF}"/>
               </a:ext>
             </a:extLst>
           </p:cNvPr>
@@ -20145,7 +21112,7 @@
           <p:cNvPr id="12" name="">
             <a:extLst xmlns:a="http://schemas.openxmlformats.org/drawingml/2006/main">
               <a:ext uri="{FF2B5EF4-FFF2-40B4-BE49-F238E27FC236}">
-                <a16:creationId xmlns:a16="http://schemas.microsoft.com/office/drawing/2014/main" id="{9D3EAA5D-37CF-4704-91F3-C58286F10098}"/>
+                <a16:creationId xmlns:a16="http://schemas.microsoft.com/office/drawing/2014/main" id="{DAA3157B-44CB-42E0-BA25-7F538F438B97}"/>
               </a:ext>
             </a:extLst>
           </p:cNvPr>
@@ -20180,7 +21147,7 @@
           <p:cNvPr id="13" name="">
             <a:extLst xmlns:a="http://schemas.openxmlformats.org/drawingml/2006/main">
               <a:ext uri="{FF2B5EF4-FFF2-40B4-BE49-F238E27FC236}">
-                <a16:creationId xmlns:a16="http://schemas.microsoft.com/office/drawing/2014/main" id="{0DE9C79D-B0FE-40CE-897C-7155232C14DF}"/>
+                <a16:creationId xmlns:a16="http://schemas.microsoft.com/office/drawing/2014/main" id="{8994065A-987C-4882-AA70-604BFBCA18C3}"/>
               </a:ext>
             </a:extLst>
           </p:cNvPr>
@@ -20255,7 +21222,7 @@
           <p:cNvPr id="14" name="">
             <a:extLst xmlns:a="http://schemas.openxmlformats.org/drawingml/2006/main">
               <a:ext uri="{FF2B5EF4-FFF2-40B4-BE49-F238E27FC236}">
-                <a16:creationId xmlns:a16="http://schemas.microsoft.com/office/drawing/2014/main" id="{685F6DE7-56A6-4EE2-8330-A9E11C7F5D95}"/>
+                <a16:creationId xmlns:a16="http://schemas.microsoft.com/office/drawing/2014/main" id="{F078D34C-98DC-48C2-A326-37A8C44A9149}"/>
               </a:ext>
             </a:extLst>
           </p:cNvPr>
@@ -20290,7 +21257,7 @@
           <p:cNvPr id="15" name="">
             <a:extLst xmlns:a="http://schemas.openxmlformats.org/drawingml/2006/main">
               <a:ext uri="{FF2B5EF4-FFF2-40B4-BE49-F238E27FC236}">
-                <a16:creationId xmlns:a16="http://schemas.microsoft.com/office/drawing/2014/main" id="{DB1CD3F7-AC7D-4476-A615-8E61E6119F5E}"/>
+                <a16:creationId xmlns:a16="http://schemas.microsoft.com/office/drawing/2014/main" id="{DAA27950-D225-408A-96B7-63EF0C671172}"/>
               </a:ext>
             </a:extLst>
           </p:cNvPr>
@@ -20365,7 +21332,7 @@
           <p:cNvPr id="16" name="">
             <a:extLst xmlns:a="http://schemas.openxmlformats.org/drawingml/2006/main">
               <a:ext uri="{FF2B5EF4-FFF2-40B4-BE49-F238E27FC236}">
-                <a16:creationId xmlns:a16="http://schemas.microsoft.com/office/drawing/2014/main" id="{27FC736B-BADA-4195-B5A8-E471223C58FD}"/>
+                <a16:creationId xmlns:a16="http://schemas.microsoft.com/office/drawing/2014/main" id="{1FCE046E-0827-481C-998C-FD7B5E840BD2}"/>
               </a:ext>
             </a:extLst>
           </p:cNvPr>
@@ -20400,7 +21367,7 @@
           <p:cNvPr id="17" name="">
             <a:extLst xmlns:a="http://schemas.openxmlformats.org/drawingml/2006/main">
               <a:ext uri="{FF2B5EF4-FFF2-40B4-BE49-F238E27FC236}">
-                <a16:creationId xmlns:a16="http://schemas.microsoft.com/office/drawing/2014/main" id="{12CF84F6-35CB-4681-ABB1-D0240E7D05DC}"/>
+                <a16:creationId xmlns:a16="http://schemas.microsoft.com/office/drawing/2014/main" id="{BCAFEEC9-BB35-44D2-AD9B-11D0B7AC1A08}"/>
               </a:ext>
             </a:extLst>
           </p:cNvPr>
@@ -20475,7 +21442,7 @@
           <p:cNvPr id="18" name="">
             <a:extLst xmlns:a="http://schemas.openxmlformats.org/drawingml/2006/main">
               <a:ext uri="{FF2B5EF4-FFF2-40B4-BE49-F238E27FC236}">
-                <a16:creationId xmlns:a16="http://schemas.microsoft.com/office/drawing/2014/main" id="{EB8E0B10-D85F-44FC-8939-25D40FE84D5E}"/>
+                <a16:creationId xmlns:a16="http://schemas.microsoft.com/office/drawing/2014/main" id="{86F48A36-A5ED-489A-AF53-C79F001C3B7E}"/>
               </a:ext>
             </a:extLst>
           </p:cNvPr>
@@ -20510,7 +21477,7 @@
           <p:cNvPr id="19" name="">
             <a:extLst xmlns:a="http://schemas.openxmlformats.org/drawingml/2006/main">
               <a:ext uri="{FF2B5EF4-FFF2-40B4-BE49-F238E27FC236}">
-                <a16:creationId xmlns:a16="http://schemas.microsoft.com/office/drawing/2014/main" id="{AC55290F-20EC-4DD2-98C5-5A1C3863A720}"/>
+                <a16:creationId xmlns:a16="http://schemas.microsoft.com/office/drawing/2014/main" id="{94E46505-4D78-4189-BB3F-F3E18AF872FF}"/>
               </a:ext>
             </a:extLst>
           </p:cNvPr>
@@ -20585,7 +21552,7 @@
           <p:cNvPr id="20" name="">
             <a:extLst xmlns:a="http://schemas.openxmlformats.org/drawingml/2006/main">
               <a:ext uri="{FF2B5EF4-FFF2-40B4-BE49-F238E27FC236}">
-                <a16:creationId xmlns:a16="http://schemas.microsoft.com/office/drawing/2014/main" id="{1990E682-1695-47AE-913B-906EC75F61F4}"/>
+                <a16:creationId xmlns:a16="http://schemas.microsoft.com/office/drawing/2014/main" id="{A71047E0-DBB5-40E5-BC87-F28B455B6E40}"/>
               </a:ext>
             </a:extLst>
           </p:cNvPr>
@@ -20618,7 +21585,7 @@
           <p:cNvPr id="21" name="">
             <a:extLst xmlns:a="http://schemas.openxmlformats.org/drawingml/2006/main">
               <a:ext uri="{FF2B5EF4-FFF2-40B4-BE49-F238E27FC236}">
-                <a16:creationId xmlns:a16="http://schemas.microsoft.com/office/drawing/2014/main" id="{9805781A-8F30-4078-8B80-C09E50DC2790}"/>
+                <a16:creationId xmlns:a16="http://schemas.microsoft.com/office/drawing/2014/main" id="{72A1624B-78E0-43DB-85F0-072DD0834639}"/>
               </a:ext>
             </a:extLst>
           </p:cNvPr>
@@ -20651,7 +21618,7 @@
           <p:cNvPr id="22" name="">
             <a:extLst xmlns:a="http://schemas.openxmlformats.org/drawingml/2006/main">
               <a:ext uri="{FF2B5EF4-FFF2-40B4-BE49-F238E27FC236}">
-                <a16:creationId xmlns:a16="http://schemas.microsoft.com/office/drawing/2014/main" id="{DF38A121-E58E-4F75-AFAC-1F690AF2CC3A}"/>
+                <a16:creationId xmlns:a16="http://schemas.microsoft.com/office/drawing/2014/main" id="{E6AE587C-D4CB-4E92-A98D-265849725648}"/>
               </a:ext>
             </a:extLst>
           </p:cNvPr>
@@ -20726,7 +21693,7 @@
           <p:cNvPr id="23" name="">
             <a:extLst xmlns:a="http://schemas.openxmlformats.org/drawingml/2006/main">
               <a:ext uri="{FF2B5EF4-FFF2-40B4-BE49-F238E27FC236}">
-                <a16:creationId xmlns:a16="http://schemas.microsoft.com/office/drawing/2014/main" id="{EAA3AC0A-4719-4D58-A0B6-D6ACFB1F7970}"/>
+                <a16:creationId xmlns:a16="http://schemas.microsoft.com/office/drawing/2014/main" id="{68CAF045-7C66-49B8-A99C-CE1E2DD3A942}"/>
               </a:ext>
             </a:extLst>
           </p:cNvPr>
@@ -20759,7 +21726,7 @@
           <p:cNvPr id="24" name="">
             <a:extLst xmlns:a="http://schemas.openxmlformats.org/drawingml/2006/main">
               <a:ext uri="{FF2B5EF4-FFF2-40B4-BE49-F238E27FC236}">
-                <a16:creationId xmlns:a16="http://schemas.microsoft.com/office/drawing/2014/main" id="{1B4AA71B-66E8-483B-A6AA-8D70BFD910AA}"/>
+                <a16:creationId xmlns:a16="http://schemas.microsoft.com/office/drawing/2014/main" id="{46415378-C391-4274-A890-36F590D2622C}"/>
               </a:ext>
             </a:extLst>
           </p:cNvPr>
@@ -20792,7 +21759,7 @@
           <p:cNvPr id="25" name="">
             <a:extLst xmlns:a="http://schemas.openxmlformats.org/drawingml/2006/main">
               <a:ext uri="{FF2B5EF4-FFF2-40B4-BE49-F238E27FC236}">
-                <a16:creationId xmlns:a16="http://schemas.microsoft.com/office/drawing/2014/main" id="{3EBF6CD5-D4D2-4D57-8C24-84BE9E3AD6A8}"/>
+                <a16:creationId xmlns:a16="http://schemas.microsoft.com/office/drawing/2014/main" id="{8F7A3C81-CAC9-47F3-A397-31807368A3AC}"/>
               </a:ext>
             </a:extLst>
           </p:cNvPr>
@@ -20825,7 +21792,7 @@
           <p:cNvPr id="26" name="">
             <a:extLst xmlns:a="http://schemas.openxmlformats.org/drawingml/2006/main">
               <a:ext uri="{FF2B5EF4-FFF2-40B4-BE49-F238E27FC236}">
-                <a16:creationId xmlns:a16="http://schemas.microsoft.com/office/drawing/2014/main" id="{8662A542-F371-4261-AE9E-5F99886A601E}"/>
+                <a16:creationId xmlns:a16="http://schemas.microsoft.com/office/drawing/2014/main" id="{1897C283-C8DF-424B-A213-762F3ACBA45B}"/>
               </a:ext>
             </a:extLst>
           </p:cNvPr>
@@ -20900,7 +21867,7 @@
           <p:cNvPr id="27" name="">
             <a:extLst xmlns:a="http://schemas.openxmlformats.org/drawingml/2006/main">
               <a:ext uri="{FF2B5EF4-FFF2-40B4-BE49-F238E27FC236}">
-                <a16:creationId xmlns:a16="http://schemas.microsoft.com/office/drawing/2014/main" id="{FF657398-DC01-438D-92C2-2E84C1AA5BD2}"/>
+                <a16:creationId xmlns:a16="http://schemas.microsoft.com/office/drawing/2014/main" id="{FF5106B2-942B-44E8-9228-73509942F26C}"/>
               </a:ext>
             </a:extLst>
           </p:cNvPr>
@@ -20933,7 +21900,7 @@
           <p:cNvPr id="28" name="">
             <a:extLst xmlns:a="http://schemas.openxmlformats.org/drawingml/2006/main">
               <a:ext uri="{FF2B5EF4-FFF2-40B4-BE49-F238E27FC236}">
-                <a16:creationId xmlns:a16="http://schemas.microsoft.com/office/drawing/2014/main" id="{4425CBD8-34A5-4913-ABB0-492EF54BD5EF}"/>
+                <a16:creationId xmlns:a16="http://schemas.microsoft.com/office/drawing/2014/main" id="{C27A684A-CA39-4D81-ADED-783C769F53D7}"/>
               </a:ext>
             </a:extLst>
           </p:cNvPr>
@@ -20966,7 +21933,7 @@
           <p:cNvPr id="29" name="">
             <a:extLst xmlns:a="http://schemas.openxmlformats.org/drawingml/2006/main">
               <a:ext uri="{FF2B5EF4-FFF2-40B4-BE49-F238E27FC236}">
-                <a16:creationId xmlns:a16="http://schemas.microsoft.com/office/drawing/2014/main" id="{F47B96E4-C51A-4C2C-B96D-29A5F989F70E}"/>
+                <a16:creationId xmlns:a16="http://schemas.microsoft.com/office/drawing/2014/main" id="{3DEEFC26-6D17-4513-9CE6-FCA7C06BD737}"/>
               </a:ext>
             </a:extLst>
           </p:cNvPr>
@@ -20999,7 +21966,7 @@
           <p:cNvPr id="30" name="">
             <a:extLst xmlns:a="http://schemas.openxmlformats.org/drawingml/2006/main">
               <a:ext uri="{FF2B5EF4-FFF2-40B4-BE49-F238E27FC236}">
-                <a16:creationId xmlns:a16="http://schemas.microsoft.com/office/drawing/2014/main" id="{F935307B-2607-403A-B5B4-F4B066417F99}"/>
+                <a16:creationId xmlns:a16="http://schemas.microsoft.com/office/drawing/2014/main" id="{7641351A-4861-4B6B-B07D-F27975EC8CCD}"/>
               </a:ext>
             </a:extLst>
           </p:cNvPr>
@@ -21032,7 +21999,7 @@
           <p:cNvPr id="31" name="">
             <a:extLst xmlns:a="http://schemas.openxmlformats.org/drawingml/2006/main">
               <a:ext uri="{FF2B5EF4-FFF2-40B4-BE49-F238E27FC236}">
-                <a16:creationId xmlns:a16="http://schemas.microsoft.com/office/drawing/2014/main" id="{708521E8-60E5-412D-89AB-9986A8DD6ABC}"/>
+                <a16:creationId xmlns:a16="http://schemas.microsoft.com/office/drawing/2014/main" id="{33059F7D-BC4B-49C9-B686-958FA5D1D891}"/>
               </a:ext>
             </a:extLst>
           </p:cNvPr>
@@ -21065,7 +22032,7 @@
           <p:cNvPr id="32" name="">
             <a:extLst xmlns:a="http://schemas.openxmlformats.org/drawingml/2006/main">
               <a:ext uri="{FF2B5EF4-FFF2-40B4-BE49-F238E27FC236}">
-                <a16:creationId xmlns:a16="http://schemas.microsoft.com/office/drawing/2014/main" id="{974FF0E4-C0A8-4633-9327-CCBF00C0D7ED}"/>
+                <a16:creationId xmlns:a16="http://schemas.microsoft.com/office/drawing/2014/main" id="{33B1B53C-FF80-4C81-96E6-F893A01B22DA}"/>
               </a:ext>
             </a:extLst>
           </p:cNvPr>
@@ -21123,7 +22090,7 @@
           <p:cNvPr id="33" name="">
             <a:extLst xmlns:a="http://schemas.openxmlformats.org/drawingml/2006/main">
               <a:ext uri="{FF2B5EF4-FFF2-40B4-BE49-F238E27FC236}">
-                <a16:creationId xmlns:a16="http://schemas.microsoft.com/office/drawing/2014/main" id="{9EFF2710-8DEC-4265-A156-084ED3971EEF}"/>
+                <a16:creationId xmlns:a16="http://schemas.microsoft.com/office/drawing/2014/main" id="{5ACABE78-3FA6-47E5-A03B-B6666E0EE6F3}"/>
               </a:ext>
             </a:extLst>
           </p:cNvPr>
@@ -21158,7 +22125,7 @@
           <p:cNvPr id="34" name="">
             <a:extLst xmlns:a="http://schemas.openxmlformats.org/drawingml/2006/main">
               <a:ext uri="{FF2B5EF4-FFF2-40B4-BE49-F238E27FC236}">
-                <a16:creationId xmlns:a16="http://schemas.microsoft.com/office/drawing/2014/main" id="{AC3FB187-5F6E-4BB6-92F1-32454FF95F46}"/>
+                <a16:creationId xmlns:a16="http://schemas.microsoft.com/office/drawing/2014/main" id="{430ED030-231C-4EDA-B627-CC531FA4164B}"/>
               </a:ext>
             </a:extLst>
           </p:cNvPr>
@@ -21193,7 +22160,7 @@
           <p:cNvPr id="35" name="">
             <a:extLst xmlns:a="http://schemas.openxmlformats.org/drawingml/2006/main">
               <a:ext uri="{FF2B5EF4-FFF2-40B4-BE49-F238E27FC236}">
-                <a16:creationId xmlns:a16="http://schemas.microsoft.com/office/drawing/2014/main" id="{68D11BDD-4FAB-429C-B08B-C7A8E40A9D45}"/>
+                <a16:creationId xmlns:a16="http://schemas.microsoft.com/office/drawing/2014/main" id="{D168FC04-8E5A-4026-82F2-611A830C3973}"/>
               </a:ext>
             </a:extLst>
           </p:cNvPr>
@@ -21251,7 +22218,7 @@
           <p:cNvPr id="36" name="">
             <a:extLst xmlns:a="http://schemas.openxmlformats.org/drawingml/2006/main">
               <a:ext uri="{FF2B5EF4-FFF2-40B4-BE49-F238E27FC236}">
-                <a16:creationId xmlns:a16="http://schemas.microsoft.com/office/drawing/2014/main" id="{7B570279-100F-4D37-A1F9-02E70F1DC640}"/>
+                <a16:creationId xmlns:a16="http://schemas.microsoft.com/office/drawing/2014/main" id="{01621518-8D39-4F04-A64F-0EFCBBC55560}"/>
               </a:ext>
             </a:extLst>
           </p:cNvPr>
@@ -21309,7 +22276,7 @@
           <p:cNvPr id="37" name="">
             <a:extLst xmlns:a="http://schemas.openxmlformats.org/drawingml/2006/main">
               <a:ext uri="{FF2B5EF4-FFF2-40B4-BE49-F238E27FC236}">
-                <a16:creationId xmlns:a16="http://schemas.microsoft.com/office/drawing/2014/main" id="{3088F80B-6DB2-4E40-9BE1-DC26D1F3F64D}"/>
+                <a16:creationId xmlns:a16="http://schemas.microsoft.com/office/drawing/2014/main" id="{CFA19EC2-0BC2-4D9B-BBCD-3892D1DFF46F}"/>
               </a:ext>
             </a:extLst>
           </p:cNvPr>
@@ -21342,7 +22309,7 @@
           <p:cNvPr id="38" name="">
             <a:extLst xmlns:a="http://schemas.openxmlformats.org/drawingml/2006/main">
               <a:ext uri="{FF2B5EF4-FFF2-40B4-BE49-F238E27FC236}">
-                <a16:creationId xmlns:a16="http://schemas.microsoft.com/office/drawing/2014/main" id="{96FFAFF8-E007-4F63-AA3F-9424B2BE7E1A}"/>
+                <a16:creationId xmlns:a16="http://schemas.microsoft.com/office/drawing/2014/main" id="{F8074764-27CC-4EFE-BBCC-2A2374BF6C38}"/>
               </a:ext>
             </a:extLst>
           </p:cNvPr>
@@ -21377,7 +22344,7 @@
           <p:cNvPr id="39" name="">
             <a:extLst xmlns:a="http://schemas.openxmlformats.org/drawingml/2006/main">
               <a:ext uri="{FF2B5EF4-FFF2-40B4-BE49-F238E27FC236}">
-                <a16:creationId xmlns:a16="http://schemas.microsoft.com/office/drawing/2014/main" id="{C3595A7D-5CEE-43D4-B884-D0F90D2C7C91}"/>
+                <a16:creationId xmlns:a16="http://schemas.microsoft.com/office/drawing/2014/main" id="{2847B790-D92D-4DB2-90C7-483024A1F1D5}"/>
               </a:ext>
             </a:extLst>
           </p:cNvPr>
@@ -21412,7 +22379,7 @@
           <p:cNvPr id="40" name="">
             <a:extLst xmlns:a="http://schemas.openxmlformats.org/drawingml/2006/main">
               <a:ext uri="{FF2B5EF4-FFF2-40B4-BE49-F238E27FC236}">
-                <a16:creationId xmlns:a16="http://schemas.microsoft.com/office/drawing/2014/main" id="{BFC0789C-5365-47B1-8580-DC3A3D3F757A}"/>
+                <a16:creationId xmlns:a16="http://schemas.microsoft.com/office/drawing/2014/main" id="{262611AE-31C7-440F-BA3E-C5FEA2DC281D}"/>
               </a:ext>
             </a:extLst>
           </p:cNvPr>
@@ -21470,7 +22437,7 @@
           <p:cNvPr id="41" name="">
             <a:extLst xmlns:a="http://schemas.openxmlformats.org/drawingml/2006/main">
               <a:ext uri="{FF2B5EF4-FFF2-40B4-BE49-F238E27FC236}">
-                <a16:creationId xmlns:a16="http://schemas.microsoft.com/office/drawing/2014/main" id="{0B85A26D-85D7-443A-8EF8-D5D9E6EC4CA0}"/>
+                <a16:creationId xmlns:a16="http://schemas.microsoft.com/office/drawing/2014/main" id="{19CA8525-EA53-4BC2-81D2-8C2C6FED36EF}"/>
               </a:ext>
             </a:extLst>
           </p:cNvPr>
@@ -21528,7 +22495,7 @@
           <p:cNvPr id="42" name="">
             <a:extLst xmlns:a="http://schemas.openxmlformats.org/drawingml/2006/main">
               <a:ext uri="{FF2B5EF4-FFF2-40B4-BE49-F238E27FC236}">
-                <a16:creationId xmlns:a16="http://schemas.microsoft.com/office/drawing/2014/main" id="{CE7C1E14-995A-42B3-A4A1-3F7A7ADC18F4}"/>
+                <a16:creationId xmlns:a16="http://schemas.microsoft.com/office/drawing/2014/main" id="{E0098708-DFFD-4684-B19C-9B6B3D606CAD}"/>
               </a:ext>
             </a:extLst>
           </p:cNvPr>
@@ -21561,7 +22528,7 @@
           <p:cNvPr id="43" name="">
             <a:extLst xmlns:a="http://schemas.openxmlformats.org/drawingml/2006/main">
               <a:ext uri="{FF2B5EF4-FFF2-40B4-BE49-F238E27FC236}">
-                <a16:creationId xmlns:a16="http://schemas.microsoft.com/office/drawing/2014/main" id="{AF9FFCC3-0621-45D0-9D71-2FBCDDFF7380}"/>
+                <a16:creationId xmlns:a16="http://schemas.microsoft.com/office/drawing/2014/main" id="{9362DCB8-739D-4669-997A-0307BA92D31D}"/>
               </a:ext>
             </a:extLst>
           </p:cNvPr>
@@ -21619,7 +22586,7 @@
           <p:cNvPr id="44" name="">
             <a:extLst xmlns:a="http://schemas.openxmlformats.org/drawingml/2006/main">
               <a:ext uri="{FF2B5EF4-FFF2-40B4-BE49-F238E27FC236}">
-                <a16:creationId xmlns:a16="http://schemas.microsoft.com/office/drawing/2014/main" id="{B0EC54CE-6615-4427-B7BA-9C9BCC33B2AC}"/>
+                <a16:creationId xmlns:a16="http://schemas.microsoft.com/office/drawing/2014/main" id="{15A19602-FAD6-4333-B70B-CDAB2DCCF02E}"/>
               </a:ext>
             </a:extLst>
           </p:cNvPr>
@@ -21677,7 +22644,7 @@
           <p:cNvPr id="45" name="">
             <a:extLst xmlns:a="http://schemas.openxmlformats.org/drawingml/2006/main">
               <a:ext uri="{FF2B5EF4-FFF2-40B4-BE49-F238E27FC236}">
-                <a16:creationId xmlns:a16="http://schemas.microsoft.com/office/drawing/2014/main" id="{67A13272-7E2B-4DE8-B22C-4B1D85716FD7}"/>
+                <a16:creationId xmlns:a16="http://schemas.microsoft.com/office/drawing/2014/main" id="{39815952-8147-4DA5-8220-86D0D78A7E8D}"/>
               </a:ext>
             </a:extLst>
           </p:cNvPr>
@@ -21735,7 +22702,7 @@
           <p:cNvPr id="46" name="">
             <a:extLst xmlns:a="http://schemas.openxmlformats.org/drawingml/2006/main">
               <a:ext uri="{FF2B5EF4-FFF2-40B4-BE49-F238E27FC236}">
-                <a16:creationId xmlns:a16="http://schemas.microsoft.com/office/drawing/2014/main" id="{15705F20-8D0B-4FF0-A1A6-A5313C13026F}"/>
+                <a16:creationId xmlns:a16="http://schemas.microsoft.com/office/drawing/2014/main" id="{0402C206-D42E-44AF-8D0C-4567DD321AFD}"/>
               </a:ext>
             </a:extLst>
           </p:cNvPr>
@@ -21793,7 +22760,7 @@
           <p:cNvPr id="47" name="">
             <a:extLst xmlns:a="http://schemas.openxmlformats.org/drawingml/2006/main">
               <a:ext uri="{FF2B5EF4-FFF2-40B4-BE49-F238E27FC236}">
-                <a16:creationId xmlns:a16="http://schemas.microsoft.com/office/drawing/2014/main" id="{CA70C09A-B502-42D5-A7C4-A60150121232}"/>
+                <a16:creationId xmlns:a16="http://schemas.microsoft.com/office/drawing/2014/main" id="{28549F70-B2BA-4A46-9758-CA2DA92F1F05}"/>
               </a:ext>
             </a:extLst>
           </p:cNvPr>
@@ -21849,7 +22816,7 @@
     </p:spTree>
     <p:extLst>
       <p:ext uri="{BB962C8B-B14F-4D97-AF65-F5344CB8AC3E}">
-        <p14:creationId xmlns:p14="http://schemas.microsoft.com/office/powerpoint/2010/main" val="685037781"/>
+        <p14:creationId xmlns:p14="http://schemas.microsoft.com/office/powerpoint/2010/main" val="2045414675"/>
       </p:ext>
     </p:extLst>
   </p:cSld>
@@ -21880,7 +22847,7 @@
           <p:cNvPr id="1" name="">
             <a:extLst xmlns:a="http://schemas.openxmlformats.org/drawingml/2006/main">
               <a:ext uri="{FF2B5EF4-FFF2-40B4-BE49-F238E27FC236}">
-                <a16:creationId xmlns:a16="http://schemas.microsoft.com/office/drawing/2014/main" id="{E45E15DC-0CB7-4001-A54A-0DA2EA6A9309}"/>
+                <a16:creationId xmlns:a16="http://schemas.microsoft.com/office/drawing/2014/main" id="{51F9B40D-AF0D-4644-B5FD-07EBDC006465}"/>
               </a:ext>
             </a:extLst>
           </p:cNvPr>
@@ -21915,7 +22882,7 @@
           <p:cNvPr id="2" name="">
             <a:extLst xmlns:a="http://schemas.openxmlformats.org/drawingml/2006/main">
               <a:ext uri="{FF2B5EF4-FFF2-40B4-BE49-F238E27FC236}">
-                <a16:creationId xmlns:a16="http://schemas.microsoft.com/office/drawing/2014/main" id="{0E332337-692B-446D-864A-D48D8B779902}"/>
+                <a16:creationId xmlns:a16="http://schemas.microsoft.com/office/drawing/2014/main" id="{781F03B8-6B02-4679-A7CA-9563EE981FC8}"/>
               </a:ext>
             </a:extLst>
           </p:cNvPr>
@@ -21950,7 +22917,7 @@
           <p:cNvPr id="3" name="">
             <a:extLst xmlns:a="http://schemas.openxmlformats.org/drawingml/2006/main">
               <a:ext uri="{FF2B5EF4-FFF2-40B4-BE49-F238E27FC236}">
-                <a16:creationId xmlns:a16="http://schemas.microsoft.com/office/drawing/2014/main" id="{E9C27ECC-A339-468F-AD3C-14E93D80BBFA}"/>
+                <a16:creationId xmlns:a16="http://schemas.microsoft.com/office/drawing/2014/main" id="{371E3501-2E3E-41E4-81F3-F3C871F05FAC}"/>
               </a:ext>
             </a:extLst>
           </p:cNvPr>
@@ -22008,7 +22975,7 @@
           <p:cNvPr id="4" name="">
             <a:extLst xmlns:a="http://schemas.openxmlformats.org/drawingml/2006/main">
               <a:ext uri="{FF2B5EF4-FFF2-40B4-BE49-F238E27FC236}">
-                <a16:creationId xmlns:a16="http://schemas.microsoft.com/office/drawing/2014/main" id="{07427D9B-41EE-41F1-A3A8-AE0CFB1DBF8C}"/>
+                <a16:creationId xmlns:a16="http://schemas.microsoft.com/office/drawing/2014/main" id="{81150E00-BB06-4C67-AFFA-6187478D682F}"/>
               </a:ext>
             </a:extLst>
           </p:cNvPr>
@@ -22066,7 +23033,7 @@
           <p:cNvPr id="5" name="">
             <a:extLst xmlns:a="http://schemas.openxmlformats.org/drawingml/2006/main">
               <a:ext uri="{FF2B5EF4-FFF2-40B4-BE49-F238E27FC236}">
-                <a16:creationId xmlns:a16="http://schemas.microsoft.com/office/drawing/2014/main" id="{569E293D-C6AC-4FBE-AC0E-BDA7A51B0C75}"/>
+                <a16:creationId xmlns:a16="http://schemas.microsoft.com/office/drawing/2014/main" id="{A6F6341E-3D9D-46B1-92D5-BCAD18BAA69C}"/>
               </a:ext>
             </a:extLst>
           </p:cNvPr>
@@ -22101,7 +23068,7 @@
           <p:cNvPr id="6" name="">
             <a:extLst xmlns:a="http://schemas.openxmlformats.org/drawingml/2006/main">
               <a:ext uri="{FF2B5EF4-FFF2-40B4-BE49-F238E27FC236}">
-                <a16:creationId xmlns:a16="http://schemas.microsoft.com/office/drawing/2014/main" id="{5C13601C-B7A9-42A2-A057-D9E12A5EA0CA}"/>
+                <a16:creationId xmlns:a16="http://schemas.microsoft.com/office/drawing/2014/main" id="{C8151C0E-CEBA-464E-9CF6-FA2C4C9FAB79}"/>
               </a:ext>
             </a:extLst>
           </p:cNvPr>
@@ -22159,7 +23126,7 @@
           <p:cNvPr id="7" name="">
             <a:extLst xmlns:a="http://schemas.openxmlformats.org/drawingml/2006/main">
               <a:ext uri="{FF2B5EF4-FFF2-40B4-BE49-F238E27FC236}">
-                <a16:creationId xmlns:a16="http://schemas.microsoft.com/office/drawing/2014/main" id="{BD104FC3-78B7-48E4-82F7-D29A30FED0EC}"/>
+                <a16:creationId xmlns:a16="http://schemas.microsoft.com/office/drawing/2014/main" id="{90B83655-D342-4168-A186-43C0EB87F997}"/>
               </a:ext>
             </a:extLst>
           </p:cNvPr>
@@ -22217,7 +23184,7 @@
           <p:cNvPr id="8" name="">
             <a:extLst xmlns:a="http://schemas.openxmlformats.org/drawingml/2006/main">
               <a:ext uri="{FF2B5EF4-FFF2-40B4-BE49-F238E27FC236}">
-                <a16:creationId xmlns:a16="http://schemas.microsoft.com/office/drawing/2014/main" id="{5B083BD0-92E7-4B16-8F09-6ABFB6BFEB81}"/>
+                <a16:creationId xmlns:a16="http://schemas.microsoft.com/office/drawing/2014/main" id="{BEB3B011-8709-4E52-A35D-6739F7F5202F}"/>
               </a:ext>
             </a:extLst>
           </p:cNvPr>
@@ -22252,7 +23219,7 @@
           <p:cNvPr id="9" name="">
             <a:extLst xmlns:a="http://schemas.openxmlformats.org/drawingml/2006/main">
               <a:ext uri="{FF2B5EF4-FFF2-40B4-BE49-F238E27FC236}">
-                <a16:creationId xmlns:a16="http://schemas.microsoft.com/office/drawing/2014/main" id="{4BEB6991-15FC-4052-8ABD-F7E157FB9D3C}"/>
+                <a16:creationId xmlns:a16="http://schemas.microsoft.com/office/drawing/2014/main" id="{E4C5B993-98E0-4626-8121-8899DC481C7D}"/>
               </a:ext>
             </a:extLst>
           </p:cNvPr>
@@ -22310,7 +23277,7 @@
           <p:cNvPr id="10" name="">
             <a:extLst xmlns:a="http://schemas.openxmlformats.org/drawingml/2006/main">
               <a:ext uri="{FF2B5EF4-FFF2-40B4-BE49-F238E27FC236}">
-                <a16:creationId xmlns:a16="http://schemas.microsoft.com/office/drawing/2014/main" id="{942AC705-1FF4-4728-8030-BBC7FC0157F2}"/>
+                <a16:creationId xmlns:a16="http://schemas.microsoft.com/office/drawing/2014/main" id="{8E16159A-4F83-4424-94A6-D99FECC9BDC0}"/>
               </a:ext>
             </a:extLst>
           </p:cNvPr>
@@ -22345,7 +23312,7 @@
           <p:cNvPr id="11" name="">
             <a:extLst xmlns:a="http://schemas.openxmlformats.org/drawingml/2006/main">
               <a:ext uri="{FF2B5EF4-FFF2-40B4-BE49-F238E27FC236}">
-                <a16:creationId xmlns:a16="http://schemas.microsoft.com/office/drawing/2014/main" id="{52113313-6DE4-41E0-ADFC-8F7705993FBC}"/>
+                <a16:creationId xmlns:a16="http://schemas.microsoft.com/office/drawing/2014/main" id="{98CE70E8-36ED-49BF-9456-9FE6DC917466}"/>
               </a:ext>
             </a:extLst>
           </p:cNvPr>
@@ -22420,7 +23387,7 @@
           <p:cNvPr id="12" name="">
             <a:extLst xmlns:a="http://schemas.openxmlformats.org/drawingml/2006/main">
               <a:ext uri="{FF2B5EF4-FFF2-40B4-BE49-F238E27FC236}">
-                <a16:creationId xmlns:a16="http://schemas.microsoft.com/office/drawing/2014/main" id="{E5967FFB-BE48-4E73-B00B-E686A427EFDD}"/>
+                <a16:creationId xmlns:a16="http://schemas.microsoft.com/office/drawing/2014/main" id="{2880B6DC-07A4-4A2D-B994-60C8C95DCD25}"/>
               </a:ext>
             </a:extLst>
           </p:cNvPr>
@@ -22455,7 +23422,7 @@
           <p:cNvPr id="13" name="">
             <a:extLst xmlns:a="http://schemas.openxmlformats.org/drawingml/2006/main">
               <a:ext uri="{FF2B5EF4-FFF2-40B4-BE49-F238E27FC236}">
-                <a16:creationId xmlns:a16="http://schemas.microsoft.com/office/drawing/2014/main" id="{490FBFE1-BC8C-414D-978C-626A94DC9C6F}"/>
+                <a16:creationId xmlns:a16="http://schemas.microsoft.com/office/drawing/2014/main" id="{7DC1A411-8466-4338-B620-6E466E24E6D7}"/>
               </a:ext>
             </a:extLst>
           </p:cNvPr>
@@ -22530,7 +23497,7 @@
           <p:cNvPr id="14" name="">
             <a:extLst xmlns:a="http://schemas.openxmlformats.org/drawingml/2006/main">
               <a:ext uri="{FF2B5EF4-FFF2-40B4-BE49-F238E27FC236}">
-                <a16:creationId xmlns:a16="http://schemas.microsoft.com/office/drawing/2014/main" id="{23DFD602-1192-44B5-9D04-C04BC3F1BD59}"/>
+                <a16:creationId xmlns:a16="http://schemas.microsoft.com/office/drawing/2014/main" id="{E889858A-1590-4856-9623-0C9DB23BA82E}"/>
               </a:ext>
             </a:extLst>
           </p:cNvPr>
@@ -22565,7 +23532,7 @@
           <p:cNvPr id="15" name="">
             <a:extLst xmlns:a="http://schemas.openxmlformats.org/drawingml/2006/main">
               <a:ext uri="{FF2B5EF4-FFF2-40B4-BE49-F238E27FC236}">
-                <a16:creationId xmlns:a16="http://schemas.microsoft.com/office/drawing/2014/main" id="{1138CEC4-3DCA-40C7-A92C-8C2B3BCA713B}"/>
+                <a16:creationId xmlns:a16="http://schemas.microsoft.com/office/drawing/2014/main" id="{F175899D-0C04-4E09-BB14-65372ED768EC}"/>
               </a:ext>
             </a:extLst>
           </p:cNvPr>
@@ -22657,7 +23624,7 @@
           <p:cNvPr id="16" name="">
             <a:extLst xmlns:a="http://schemas.openxmlformats.org/drawingml/2006/main">
               <a:ext uri="{FF2B5EF4-FFF2-40B4-BE49-F238E27FC236}">
-                <a16:creationId xmlns:a16="http://schemas.microsoft.com/office/drawing/2014/main" id="{97EB50F5-6E71-4185-A099-F5C9575F047E}"/>
+                <a16:creationId xmlns:a16="http://schemas.microsoft.com/office/drawing/2014/main" id="{AA2A296E-779B-4BEF-9DA9-92581E269143}"/>
               </a:ext>
             </a:extLst>
           </p:cNvPr>
@@ -22692,7 +23659,7 @@
           <p:cNvPr id="17" name="">
             <a:extLst xmlns:a="http://schemas.openxmlformats.org/drawingml/2006/main">
               <a:ext uri="{FF2B5EF4-FFF2-40B4-BE49-F238E27FC236}">
-                <a16:creationId xmlns:a16="http://schemas.microsoft.com/office/drawing/2014/main" id="{FB699A5A-17DA-445A-8516-3762F9C1E268}"/>
+                <a16:creationId xmlns:a16="http://schemas.microsoft.com/office/drawing/2014/main" id="{08F323A9-1CEB-40CC-9D10-C436F610A9C7}"/>
               </a:ext>
             </a:extLst>
           </p:cNvPr>
@@ -22750,7 +23717,7 @@
           <p:cNvPr id="18" name="">
             <a:extLst xmlns:a="http://schemas.openxmlformats.org/drawingml/2006/main">
               <a:ext uri="{FF2B5EF4-FFF2-40B4-BE49-F238E27FC236}">
-                <a16:creationId xmlns:a16="http://schemas.microsoft.com/office/drawing/2014/main" id="{60F7C28C-9116-44C8-8238-ADB07AF569B0}"/>
+                <a16:creationId xmlns:a16="http://schemas.microsoft.com/office/drawing/2014/main" id="{CD706DED-D75E-48F0-B95F-CE340E6EE37C}"/>
               </a:ext>
             </a:extLst>
           </p:cNvPr>
@@ -22785,7 +23752,7 @@
           <p:cNvPr id="19" name="">
             <a:extLst xmlns:a="http://schemas.openxmlformats.org/drawingml/2006/main">
               <a:ext uri="{FF2B5EF4-FFF2-40B4-BE49-F238E27FC236}">
-                <a16:creationId xmlns:a16="http://schemas.microsoft.com/office/drawing/2014/main" id="{18366414-1FDF-4686-88C3-3AA878FAFEB3}"/>
+                <a16:creationId xmlns:a16="http://schemas.microsoft.com/office/drawing/2014/main" id="{B4232138-7317-4BF9-B879-6E69F83F41F4}"/>
               </a:ext>
             </a:extLst>
           </p:cNvPr>
@@ -22843,7 +23810,7 @@
           <p:cNvPr id="20" name="">
             <a:extLst xmlns:a="http://schemas.openxmlformats.org/drawingml/2006/main">
               <a:ext uri="{FF2B5EF4-FFF2-40B4-BE49-F238E27FC236}">
-                <a16:creationId xmlns:a16="http://schemas.microsoft.com/office/drawing/2014/main" id="{FEC457B9-C91C-493B-AA4C-07C5EF50C733}"/>
+                <a16:creationId xmlns:a16="http://schemas.microsoft.com/office/drawing/2014/main" id="{958969FC-08B0-47F9-A493-76EACB871104}"/>
               </a:ext>
             </a:extLst>
           </p:cNvPr>
@@ -22876,7 +23843,7 @@
           <p:cNvPr id="21" name="">
             <a:extLst xmlns:a="http://schemas.openxmlformats.org/drawingml/2006/main">
               <a:ext uri="{FF2B5EF4-FFF2-40B4-BE49-F238E27FC236}">
-                <a16:creationId xmlns:a16="http://schemas.microsoft.com/office/drawing/2014/main" id="{0C086B12-ECD0-4DB9-B26D-28E629343ECA}"/>
+                <a16:creationId xmlns:a16="http://schemas.microsoft.com/office/drawing/2014/main" id="{AEDC6610-D5A4-45C6-B66D-20781D7127F5}"/>
               </a:ext>
             </a:extLst>
           </p:cNvPr>
@@ -22909,7 +23876,7 @@
           <p:cNvPr id="22" name="">
             <a:extLst xmlns:a="http://schemas.openxmlformats.org/drawingml/2006/main">
               <a:ext uri="{FF2B5EF4-FFF2-40B4-BE49-F238E27FC236}">
-                <a16:creationId xmlns:a16="http://schemas.microsoft.com/office/drawing/2014/main" id="{AB0D897A-EEF3-4866-9B58-BF2FB8B4F9DC}"/>
+                <a16:creationId xmlns:a16="http://schemas.microsoft.com/office/drawing/2014/main" id="{DA353550-75BE-41CB-9780-A309FE79A5E4}"/>
               </a:ext>
             </a:extLst>
           </p:cNvPr>
@@ -22942,7 +23909,7 @@
           <p:cNvPr id="23" name="">
             <a:extLst xmlns:a="http://schemas.openxmlformats.org/drawingml/2006/main">
               <a:ext uri="{FF2B5EF4-FFF2-40B4-BE49-F238E27FC236}">
-                <a16:creationId xmlns:a16="http://schemas.microsoft.com/office/drawing/2014/main" id="{F11FB06A-8F05-4D39-873B-47BDF9977BDF}"/>
+                <a16:creationId xmlns:a16="http://schemas.microsoft.com/office/drawing/2014/main" id="{D9DB99C8-FE91-4C96-A7E6-8A881E059FBD}"/>
               </a:ext>
             </a:extLst>
           </p:cNvPr>
@@ -22975,7 +23942,7 @@
           <p:cNvPr id="24" name="">
             <a:extLst xmlns:a="http://schemas.openxmlformats.org/drawingml/2006/main">
               <a:ext uri="{FF2B5EF4-FFF2-40B4-BE49-F238E27FC236}">
-                <a16:creationId xmlns:a16="http://schemas.microsoft.com/office/drawing/2014/main" id="{0773D871-9279-46E4-91BE-0644B8E6512C}"/>
+                <a16:creationId xmlns:a16="http://schemas.microsoft.com/office/drawing/2014/main" id="{5499EEAC-D782-41F3-949B-253F2411322C}"/>
               </a:ext>
             </a:extLst>
           </p:cNvPr>
@@ -23008,7 +23975,7 @@
           <p:cNvPr id="25" name="">
             <a:extLst xmlns:a="http://schemas.openxmlformats.org/drawingml/2006/main">
               <a:ext uri="{FF2B5EF4-FFF2-40B4-BE49-F238E27FC236}">
-                <a16:creationId xmlns:a16="http://schemas.microsoft.com/office/drawing/2014/main" id="{800A4795-3585-4E48-93AE-06406598FE20}"/>
+                <a16:creationId xmlns:a16="http://schemas.microsoft.com/office/drawing/2014/main" id="{C05CF98F-0068-4A58-A5FA-3BDE77F86A1D}"/>
               </a:ext>
             </a:extLst>
           </p:cNvPr>
@@ -23043,7 +24010,7 @@
           <p:cNvPr id="26" name="">
             <a:extLst xmlns:a="http://schemas.openxmlformats.org/drawingml/2006/main">
               <a:ext uri="{FF2B5EF4-FFF2-40B4-BE49-F238E27FC236}">
-                <a16:creationId xmlns:a16="http://schemas.microsoft.com/office/drawing/2014/main" id="{2A1E711C-7A41-467B-9B85-63F9F289F869}"/>
+                <a16:creationId xmlns:a16="http://schemas.microsoft.com/office/drawing/2014/main" id="{5269FDA3-C675-4927-9D9B-A2DCA7DC9281}"/>
               </a:ext>
             </a:extLst>
           </p:cNvPr>
@@ -23078,7 +24045,7 @@
           <p:cNvPr id="27" name="">
             <a:extLst xmlns:a="http://schemas.openxmlformats.org/drawingml/2006/main">
               <a:ext uri="{FF2B5EF4-FFF2-40B4-BE49-F238E27FC236}">
-                <a16:creationId xmlns:a16="http://schemas.microsoft.com/office/drawing/2014/main" id="{D77B25E3-12F2-41DF-AAAE-4838C05746B2}"/>
+                <a16:creationId xmlns:a16="http://schemas.microsoft.com/office/drawing/2014/main" id="{1C947656-EB13-4B83-ADEF-F335C00AC147}"/>
               </a:ext>
             </a:extLst>
           </p:cNvPr>
@@ -23136,7 +24103,7 @@
           <p:cNvPr id="28" name="">
             <a:extLst xmlns:a="http://schemas.openxmlformats.org/drawingml/2006/main">
               <a:ext uri="{FF2B5EF4-FFF2-40B4-BE49-F238E27FC236}">
-                <a16:creationId xmlns:a16="http://schemas.microsoft.com/office/drawing/2014/main" id="{7C57C0C3-6686-44BA-9E4F-5591801472A7}"/>
+                <a16:creationId xmlns:a16="http://schemas.microsoft.com/office/drawing/2014/main" id="{16B900CB-1914-409D-96E2-13D565DFF4F3}"/>
               </a:ext>
             </a:extLst>
           </p:cNvPr>
@@ -23194,7 +24161,7 @@
           <p:cNvPr id="29" name="">
             <a:extLst xmlns:a="http://schemas.openxmlformats.org/drawingml/2006/main">
               <a:ext uri="{FF2B5EF4-FFF2-40B4-BE49-F238E27FC236}">
-                <a16:creationId xmlns:a16="http://schemas.microsoft.com/office/drawing/2014/main" id="{833F3350-3128-4840-842C-4E29E782D6E7}"/>
+                <a16:creationId xmlns:a16="http://schemas.microsoft.com/office/drawing/2014/main" id="{1F307BD8-14AA-4C85-863D-B54D51695004}"/>
               </a:ext>
             </a:extLst>
           </p:cNvPr>
@@ -23227,7 +24194,7 @@
           <p:cNvPr id="30" name="">
             <a:extLst xmlns:a="http://schemas.openxmlformats.org/drawingml/2006/main">
               <a:ext uri="{FF2B5EF4-FFF2-40B4-BE49-F238E27FC236}">
-                <a16:creationId xmlns:a16="http://schemas.microsoft.com/office/drawing/2014/main" id="{B9F6DD15-75B3-4FEB-89D2-E9B5AB46CAA7}"/>
+                <a16:creationId xmlns:a16="http://schemas.microsoft.com/office/drawing/2014/main" id="{7BB227FE-C4CD-48F1-B9B3-46F9C3EF2A4A}"/>
               </a:ext>
             </a:extLst>
           </p:cNvPr>
@@ -23262,7 +24229,7 @@
           <p:cNvPr id="31" name="">
             <a:extLst xmlns:a="http://schemas.openxmlformats.org/drawingml/2006/main">
               <a:ext uri="{FF2B5EF4-FFF2-40B4-BE49-F238E27FC236}">
-                <a16:creationId xmlns:a16="http://schemas.microsoft.com/office/drawing/2014/main" id="{DEF05109-5C3E-4E7A-9A3B-47FAF3D405E7}"/>
+                <a16:creationId xmlns:a16="http://schemas.microsoft.com/office/drawing/2014/main" id="{E441EB1D-14C7-4770-B3EF-44073F0656B1}"/>
               </a:ext>
             </a:extLst>
           </p:cNvPr>
@@ -23297,7 +24264,7 @@
           <p:cNvPr id="32" name="">
             <a:extLst xmlns:a="http://schemas.openxmlformats.org/drawingml/2006/main">
               <a:ext uri="{FF2B5EF4-FFF2-40B4-BE49-F238E27FC236}">
-                <a16:creationId xmlns:a16="http://schemas.microsoft.com/office/drawing/2014/main" id="{E0096F74-0A85-420D-B5B9-9D9ADA1148EB}"/>
+                <a16:creationId xmlns:a16="http://schemas.microsoft.com/office/drawing/2014/main" id="{67C52F82-909B-45E5-AEBD-5028E4B0DDBB}"/>
               </a:ext>
             </a:extLst>
           </p:cNvPr>
@@ -23355,7 +24322,7 @@
           <p:cNvPr id="33" name="">
             <a:extLst xmlns:a="http://schemas.openxmlformats.org/drawingml/2006/main">
               <a:ext uri="{FF2B5EF4-FFF2-40B4-BE49-F238E27FC236}">
-                <a16:creationId xmlns:a16="http://schemas.microsoft.com/office/drawing/2014/main" id="{1AB5FD47-45FF-4A1A-8723-9A8FE4D37762}"/>
+                <a16:creationId xmlns:a16="http://schemas.microsoft.com/office/drawing/2014/main" id="{847035B9-0868-4C77-A6B2-93A026F64C1B}"/>
               </a:ext>
             </a:extLst>
           </p:cNvPr>
@@ -23413,7 +24380,7 @@
           <p:cNvPr id="34" name="">
             <a:extLst xmlns:a="http://schemas.openxmlformats.org/drawingml/2006/main">
               <a:ext uri="{FF2B5EF4-FFF2-40B4-BE49-F238E27FC236}">
-                <a16:creationId xmlns:a16="http://schemas.microsoft.com/office/drawing/2014/main" id="{19387B73-7AA6-47A9-9230-8A1F6E1F60EC}"/>
+                <a16:creationId xmlns:a16="http://schemas.microsoft.com/office/drawing/2014/main" id="{22D0AEAB-653A-4025-A4F7-6F262F15BC93}"/>
               </a:ext>
             </a:extLst>
           </p:cNvPr>
@@ -23446,7 +24413,7 @@
           <p:cNvPr id="35" name="">
             <a:extLst xmlns:a="http://schemas.openxmlformats.org/drawingml/2006/main">
               <a:ext uri="{FF2B5EF4-FFF2-40B4-BE49-F238E27FC236}">
-                <a16:creationId xmlns:a16="http://schemas.microsoft.com/office/drawing/2014/main" id="{C9D8C9BC-3173-4621-9879-183E0F475EF7}"/>
+                <a16:creationId xmlns:a16="http://schemas.microsoft.com/office/drawing/2014/main" id="{15C0DD32-B826-4F44-B936-371291C142EC}"/>
               </a:ext>
             </a:extLst>
           </p:cNvPr>
@@ -23504,7 +24471,7 @@
           <p:cNvPr id="36" name="">
             <a:extLst xmlns:a="http://schemas.openxmlformats.org/drawingml/2006/main">
               <a:ext uri="{FF2B5EF4-FFF2-40B4-BE49-F238E27FC236}">
-                <a16:creationId xmlns:a16="http://schemas.microsoft.com/office/drawing/2014/main" id="{90DB29F4-8F16-4ACC-BCFD-FA50FD2FA1CD}"/>
+                <a16:creationId xmlns:a16="http://schemas.microsoft.com/office/drawing/2014/main" id="{670780BD-F740-4A88-9A85-64E36E29DC98}"/>
               </a:ext>
             </a:extLst>
           </p:cNvPr>
@@ -23562,7 +24529,7 @@
           <p:cNvPr id="37" name="">
             <a:extLst xmlns:a="http://schemas.openxmlformats.org/drawingml/2006/main">
               <a:ext uri="{FF2B5EF4-FFF2-40B4-BE49-F238E27FC236}">
-                <a16:creationId xmlns:a16="http://schemas.microsoft.com/office/drawing/2014/main" id="{88A3A801-3BA1-4FC9-8A58-99B77D1A7875}"/>
+                <a16:creationId xmlns:a16="http://schemas.microsoft.com/office/drawing/2014/main" id="{86213693-E9B1-4379-8C29-748D6370EC6B}"/>
               </a:ext>
             </a:extLst>
           </p:cNvPr>
@@ -23618,7 +24585,7 @@
     </p:spTree>
     <p:extLst>
       <p:ext uri="{BB962C8B-B14F-4D97-AF65-F5344CB8AC3E}">
-        <p14:creationId xmlns:p14="http://schemas.microsoft.com/office/powerpoint/2010/main" val="616794121"/>
+        <p14:creationId xmlns:p14="http://schemas.microsoft.com/office/powerpoint/2010/main" val="1658634961"/>
       </p:ext>
     </p:extLst>
   </p:cSld>
@@ -23649,7 +24616,7 @@
           <p:cNvPr id="1" name="">
             <a:extLst xmlns:a="http://schemas.openxmlformats.org/drawingml/2006/main">
               <a:ext uri="{FF2B5EF4-FFF2-40B4-BE49-F238E27FC236}">
-                <a16:creationId xmlns:a16="http://schemas.microsoft.com/office/drawing/2014/main" id="{A6A43C98-DA15-40F2-9B0C-5EE9093ABE20}"/>
+                <a16:creationId xmlns:a16="http://schemas.microsoft.com/office/drawing/2014/main" id="{A04C1F8A-7344-4BDF-A9D7-2CEA9B687AED}"/>
               </a:ext>
             </a:extLst>
           </p:cNvPr>
@@ -23684,7 +24651,7 @@
           <p:cNvPr id="2" name="">
             <a:extLst xmlns:a="http://schemas.openxmlformats.org/drawingml/2006/main">
               <a:ext uri="{FF2B5EF4-FFF2-40B4-BE49-F238E27FC236}">
-                <a16:creationId xmlns:a16="http://schemas.microsoft.com/office/drawing/2014/main" id="{8FCF8DBF-C2B0-41B0-920F-6455E7D5A255}"/>
+                <a16:creationId xmlns:a16="http://schemas.microsoft.com/office/drawing/2014/main" id="{A90729AF-5C96-4284-B673-8AE8B5E34759}"/>
               </a:ext>
             </a:extLst>
           </p:cNvPr>
@@ -23719,7 +24686,7 @@
           <p:cNvPr id="3" name="">
             <a:extLst xmlns:a="http://schemas.openxmlformats.org/drawingml/2006/main">
               <a:ext uri="{FF2B5EF4-FFF2-40B4-BE49-F238E27FC236}">
-                <a16:creationId xmlns:a16="http://schemas.microsoft.com/office/drawing/2014/main" id="{91290DA8-A51D-48D6-BB6B-F4EA174CB630}"/>
+                <a16:creationId xmlns:a16="http://schemas.microsoft.com/office/drawing/2014/main" id="{83193B96-B452-4BE0-91BD-79197D84D507}"/>
               </a:ext>
             </a:extLst>
           </p:cNvPr>
@@ -23777,7 +24744,7 @@
           <p:cNvPr id="4" name="">
             <a:extLst xmlns:a="http://schemas.openxmlformats.org/drawingml/2006/main">
               <a:ext uri="{FF2B5EF4-FFF2-40B4-BE49-F238E27FC236}">
-                <a16:creationId xmlns:a16="http://schemas.microsoft.com/office/drawing/2014/main" id="{5E63C5CC-6B2D-4898-8910-3D608E1E8E2A}"/>
+                <a16:creationId xmlns:a16="http://schemas.microsoft.com/office/drawing/2014/main" id="{ECDC6D4D-550F-45E7-A46D-9D7AAD14A3A4}"/>
               </a:ext>
             </a:extLst>
           </p:cNvPr>
@@ -23835,7 +24802,7 @@
           <p:cNvPr id="5" name="">
             <a:extLst xmlns:a="http://schemas.openxmlformats.org/drawingml/2006/main">
               <a:ext uri="{FF2B5EF4-FFF2-40B4-BE49-F238E27FC236}">
-                <a16:creationId xmlns:a16="http://schemas.microsoft.com/office/drawing/2014/main" id="{D3A1829B-87B8-4ECF-B12D-3A6504C4A75D}"/>
+                <a16:creationId xmlns:a16="http://schemas.microsoft.com/office/drawing/2014/main" id="{A8B72771-B664-46E8-9B11-2D8A046BFBC2}"/>
               </a:ext>
             </a:extLst>
           </p:cNvPr>
@@ -23870,7 +24837,7 @@
           <p:cNvPr id="6" name="">
             <a:extLst xmlns:a="http://schemas.openxmlformats.org/drawingml/2006/main">
               <a:ext uri="{FF2B5EF4-FFF2-40B4-BE49-F238E27FC236}">
-                <a16:creationId xmlns:a16="http://schemas.microsoft.com/office/drawing/2014/main" id="{3506C0EA-0DB0-4473-9197-21CF25E5FD9F}"/>
+                <a16:creationId xmlns:a16="http://schemas.microsoft.com/office/drawing/2014/main" id="{4003D11B-2B55-4A38-87F5-288763DD5541}"/>
               </a:ext>
             </a:extLst>
           </p:cNvPr>
@@ -23928,7 +24895,7 @@
           <p:cNvPr id="7" name="">
             <a:extLst xmlns:a="http://schemas.openxmlformats.org/drawingml/2006/main">
               <a:ext uri="{FF2B5EF4-FFF2-40B4-BE49-F238E27FC236}">
-                <a16:creationId xmlns:a16="http://schemas.microsoft.com/office/drawing/2014/main" id="{D33E7ACE-6E80-4943-94B6-28777081F56B}"/>
+                <a16:creationId xmlns:a16="http://schemas.microsoft.com/office/drawing/2014/main" id="{2953B418-14FB-4371-A5AC-5DE34F67D038}"/>
               </a:ext>
             </a:extLst>
           </p:cNvPr>
@@ -23986,7 +24953,7 @@
           <p:cNvPr id="8" name="">
             <a:extLst xmlns:a="http://schemas.openxmlformats.org/drawingml/2006/main">
               <a:ext uri="{FF2B5EF4-FFF2-40B4-BE49-F238E27FC236}">
-                <a16:creationId xmlns:a16="http://schemas.microsoft.com/office/drawing/2014/main" id="{73829EFA-E4B1-4738-B078-0CC1DA1AF9CC}"/>
+                <a16:creationId xmlns:a16="http://schemas.microsoft.com/office/drawing/2014/main" id="{D44AEF21-1C9A-428B-AF1C-3739987D2DF9}"/>
               </a:ext>
             </a:extLst>
           </p:cNvPr>
@@ -24021,7 +24988,7 @@
           <p:cNvPr id="9" name="">
             <a:extLst xmlns:a="http://schemas.openxmlformats.org/drawingml/2006/main">
               <a:ext uri="{FF2B5EF4-FFF2-40B4-BE49-F238E27FC236}">
-                <a16:creationId xmlns:a16="http://schemas.microsoft.com/office/drawing/2014/main" id="{7D285EF0-1867-4CE2-93CE-332D5625A22E}"/>
+                <a16:creationId xmlns:a16="http://schemas.microsoft.com/office/drawing/2014/main" id="{B12CDAC3-CB62-46D6-9182-7AF5694326A4}"/>
               </a:ext>
             </a:extLst>
           </p:cNvPr>
@@ -24056,7 +25023,7 @@
           <p:cNvPr id="10" name="">
             <a:extLst xmlns:a="http://schemas.openxmlformats.org/drawingml/2006/main">
               <a:ext uri="{FF2B5EF4-FFF2-40B4-BE49-F238E27FC236}">
-                <a16:creationId xmlns:a16="http://schemas.microsoft.com/office/drawing/2014/main" id="{9D7B463A-796F-466B-A479-AB3114E31496}"/>
+                <a16:creationId xmlns:a16="http://schemas.microsoft.com/office/drawing/2014/main" id="{8DCC719F-0436-4468-92CD-4E5EBA733D9F}"/>
               </a:ext>
             </a:extLst>
           </p:cNvPr>
@@ -24114,7 +25081,7 @@
           <p:cNvPr id="11" name="">
             <a:extLst xmlns:a="http://schemas.openxmlformats.org/drawingml/2006/main">
               <a:ext uri="{FF2B5EF4-FFF2-40B4-BE49-F238E27FC236}">
-                <a16:creationId xmlns:a16="http://schemas.microsoft.com/office/drawing/2014/main" id="{AEF12CBB-AE5E-47A0-824F-A8D9DFEC220A}"/>
+                <a16:creationId xmlns:a16="http://schemas.microsoft.com/office/drawing/2014/main" id="{62D893D4-5679-4E89-9942-8C24C267CE46}"/>
               </a:ext>
             </a:extLst>
           </p:cNvPr>
@@ -24330,7 +25297,7 @@
           <p:cNvPr id="12" name="">
             <a:extLst xmlns:a="http://schemas.openxmlformats.org/drawingml/2006/main">
               <a:ext uri="{FF2B5EF4-FFF2-40B4-BE49-F238E27FC236}">
-                <a16:creationId xmlns:a16="http://schemas.microsoft.com/office/drawing/2014/main" id="{7E946E97-F95B-4812-808F-F83C16F0FC35}"/>
+                <a16:creationId xmlns:a16="http://schemas.microsoft.com/office/drawing/2014/main" id="{B5F7BBC2-9A65-4D33-9691-18687089E30F}"/>
               </a:ext>
             </a:extLst>
           </p:cNvPr>
@@ -24365,7 +25332,7 @@
           <p:cNvPr id="13" name="">
             <a:extLst xmlns:a="http://schemas.openxmlformats.org/drawingml/2006/main">
               <a:ext uri="{FF2B5EF4-FFF2-40B4-BE49-F238E27FC236}">
-                <a16:creationId xmlns:a16="http://schemas.microsoft.com/office/drawing/2014/main" id="{ED5EBDB0-9E1C-48FB-90E8-845636241B2A}"/>
+                <a16:creationId xmlns:a16="http://schemas.microsoft.com/office/drawing/2014/main" id="{1718F681-3967-44E0-A834-6475AD2D89FB}"/>
               </a:ext>
             </a:extLst>
           </p:cNvPr>
@@ -24400,7 +25367,7 @@
           <p:cNvPr id="14" name="">
             <a:extLst xmlns:a="http://schemas.openxmlformats.org/drawingml/2006/main">
               <a:ext uri="{FF2B5EF4-FFF2-40B4-BE49-F238E27FC236}">
-                <a16:creationId xmlns:a16="http://schemas.microsoft.com/office/drawing/2014/main" id="{5E74BBA9-AA40-45BE-A551-2B59EBFA2126}"/>
+                <a16:creationId xmlns:a16="http://schemas.microsoft.com/office/drawing/2014/main" id="{B2850578-12E0-4AD1-B6AC-E7A90A7578D8}"/>
               </a:ext>
             </a:extLst>
           </p:cNvPr>
@@ -24458,7 +25425,7 @@
           <p:cNvPr id="15" name="">
             <a:extLst xmlns:a="http://schemas.openxmlformats.org/drawingml/2006/main">
               <a:ext uri="{FF2B5EF4-FFF2-40B4-BE49-F238E27FC236}">
-                <a16:creationId xmlns:a16="http://schemas.microsoft.com/office/drawing/2014/main" id="{8C75B1DA-11F8-430B-A5CF-834077189719}"/>
+                <a16:creationId xmlns:a16="http://schemas.microsoft.com/office/drawing/2014/main" id="{B3896E32-392E-4E30-A695-8E3353ED70DE}"/>
               </a:ext>
             </a:extLst>
           </p:cNvPr>
@@ -24674,7 +25641,7 @@
           <p:cNvPr id="16" name="">
             <a:extLst xmlns:a="http://schemas.openxmlformats.org/drawingml/2006/main">
               <a:ext uri="{FF2B5EF4-FFF2-40B4-BE49-F238E27FC236}">
-                <a16:creationId xmlns:a16="http://schemas.microsoft.com/office/drawing/2014/main" id="{D8A16FC7-45DD-4780-92D2-993705FE7FAC}"/>
+                <a16:creationId xmlns:a16="http://schemas.microsoft.com/office/drawing/2014/main" id="{19981B14-89BF-4CD7-9DB1-9A6C3B8A46FB}"/>
               </a:ext>
             </a:extLst>
           </p:cNvPr>
@@ -24709,7 +25676,7 @@
           <p:cNvPr id="17" name="">
             <a:extLst xmlns:a="http://schemas.openxmlformats.org/drawingml/2006/main">
               <a:ext uri="{FF2B5EF4-FFF2-40B4-BE49-F238E27FC236}">
-                <a16:creationId xmlns:a16="http://schemas.microsoft.com/office/drawing/2014/main" id="{C1E45036-EEB0-46DE-AFDC-0CC7AB5BF929}"/>
+                <a16:creationId xmlns:a16="http://schemas.microsoft.com/office/drawing/2014/main" id="{58520D4F-7E97-4072-A476-671BA2BF4B7A}"/>
               </a:ext>
             </a:extLst>
           </p:cNvPr>
@@ -24744,7 +25711,7 @@
           <p:cNvPr id="18" name="">
             <a:extLst xmlns:a="http://schemas.openxmlformats.org/drawingml/2006/main">
               <a:ext uri="{FF2B5EF4-FFF2-40B4-BE49-F238E27FC236}">
-                <a16:creationId xmlns:a16="http://schemas.microsoft.com/office/drawing/2014/main" id="{FCF95626-2BFD-4F12-9148-65446E40BD5C}"/>
+                <a16:creationId xmlns:a16="http://schemas.microsoft.com/office/drawing/2014/main" id="{029885FC-F53E-4F8A-AEBE-62AA7A0FB78A}"/>
               </a:ext>
             </a:extLst>
           </p:cNvPr>
@@ -24802,7 +25769,7 @@
           <p:cNvPr id="19" name="">
             <a:extLst xmlns:a="http://schemas.openxmlformats.org/drawingml/2006/main">
               <a:ext uri="{FF2B5EF4-FFF2-40B4-BE49-F238E27FC236}">
-                <a16:creationId xmlns:a16="http://schemas.microsoft.com/office/drawing/2014/main" id="{320CA42A-0B10-41B7-9179-7BCE384ACDF5}"/>
+                <a16:creationId xmlns:a16="http://schemas.microsoft.com/office/drawing/2014/main" id="{6FF2FB9E-494A-41DB-A424-A4C2E4B8B651}"/>
               </a:ext>
             </a:extLst>
           </p:cNvPr>
@@ -24967,7 +25934,7 @@
           <p:cNvPr id="20" name="">
             <a:extLst xmlns:a="http://schemas.openxmlformats.org/drawingml/2006/main">
               <a:ext uri="{FF2B5EF4-FFF2-40B4-BE49-F238E27FC236}">
-                <a16:creationId xmlns:a16="http://schemas.microsoft.com/office/drawing/2014/main" id="{C91DB50F-18BC-4CC6-BF9C-A39A1FA710EC}"/>
+                <a16:creationId xmlns:a16="http://schemas.microsoft.com/office/drawing/2014/main" id="{27037ED8-4EFA-4341-AF76-699FC4D5B320}"/>
               </a:ext>
             </a:extLst>
           </p:cNvPr>
@@ -25002,7 +25969,7 @@
           <p:cNvPr id="21" name="">
             <a:extLst xmlns:a="http://schemas.openxmlformats.org/drawingml/2006/main">
               <a:ext uri="{FF2B5EF4-FFF2-40B4-BE49-F238E27FC236}">
-                <a16:creationId xmlns:a16="http://schemas.microsoft.com/office/drawing/2014/main" id="{090A7672-9BB1-444D-AFE0-FD00605D8DCF}"/>
+                <a16:creationId xmlns:a16="http://schemas.microsoft.com/office/drawing/2014/main" id="{238704C8-2D78-4864-9CF2-6156E748EACE}"/>
               </a:ext>
             </a:extLst>
           </p:cNvPr>
@@ -25037,7 +26004,7 @@
           <p:cNvPr id="22" name="">
             <a:extLst xmlns:a="http://schemas.openxmlformats.org/drawingml/2006/main">
               <a:ext uri="{FF2B5EF4-FFF2-40B4-BE49-F238E27FC236}">
-                <a16:creationId xmlns:a16="http://schemas.microsoft.com/office/drawing/2014/main" id="{75446035-9C07-47F9-9EE5-DC2DC337E834}"/>
+                <a16:creationId xmlns:a16="http://schemas.microsoft.com/office/drawing/2014/main" id="{6BD4DEAB-8497-461A-894B-226EEA218D85}"/>
               </a:ext>
             </a:extLst>
           </p:cNvPr>
@@ -25095,7 +26062,7 @@
           <p:cNvPr id="23" name="">
             <a:extLst xmlns:a="http://schemas.openxmlformats.org/drawingml/2006/main">
               <a:ext uri="{FF2B5EF4-FFF2-40B4-BE49-F238E27FC236}">
-                <a16:creationId xmlns:a16="http://schemas.microsoft.com/office/drawing/2014/main" id="{B181E2A8-C798-48D9-AD87-13F4FB170A2A}"/>
+                <a16:creationId xmlns:a16="http://schemas.microsoft.com/office/drawing/2014/main" id="{5F59A07E-2800-466C-B4E0-D0D7786B4524}"/>
               </a:ext>
             </a:extLst>
           </p:cNvPr>
@@ -25260,7 +26227,7 @@
           <p:cNvPr id="24" name="">
             <a:extLst xmlns:a="http://schemas.openxmlformats.org/drawingml/2006/main">
               <a:ext uri="{FF2B5EF4-FFF2-40B4-BE49-F238E27FC236}">
-                <a16:creationId xmlns:a16="http://schemas.microsoft.com/office/drawing/2014/main" id="{A2B9D314-0D2D-4A72-B8BE-E71C0A269B7D}"/>
+                <a16:creationId xmlns:a16="http://schemas.microsoft.com/office/drawing/2014/main" id="{AF3022E8-1FF5-426B-A48F-10BA21C4BF9C}"/>
               </a:ext>
             </a:extLst>
           </p:cNvPr>
@@ -25316,7 +26283,7 @@
     </p:spTree>
     <p:extLst>
       <p:ext uri="{BB962C8B-B14F-4D97-AF65-F5344CB8AC3E}">
-        <p14:creationId xmlns:p14="http://schemas.microsoft.com/office/powerpoint/2010/main" val="742910272"/>
+        <p14:creationId xmlns:p14="http://schemas.microsoft.com/office/powerpoint/2010/main" val="1825500143"/>
       </p:ext>
     </p:extLst>
   </p:cSld>
@@ -25347,7 +26314,7 @@
           <p:cNvPr id="1" name="">
             <a:extLst xmlns:a="http://schemas.openxmlformats.org/drawingml/2006/main">
               <a:ext uri="{FF2B5EF4-FFF2-40B4-BE49-F238E27FC236}">
-                <a16:creationId xmlns:a16="http://schemas.microsoft.com/office/drawing/2014/main" id="{EC811446-25B7-4787-B512-8C6116382EE6}"/>
+                <a16:creationId xmlns:a16="http://schemas.microsoft.com/office/drawing/2014/main" id="{B983997E-F341-4A42-B86B-BFD7BE7FF024}"/>
               </a:ext>
             </a:extLst>
           </p:cNvPr>
@@ -25382,7 +26349,7 @@
           <p:cNvPr id="2" name="">
             <a:extLst xmlns:a="http://schemas.openxmlformats.org/drawingml/2006/main">
               <a:ext uri="{FF2B5EF4-FFF2-40B4-BE49-F238E27FC236}">
-                <a16:creationId xmlns:a16="http://schemas.microsoft.com/office/drawing/2014/main" id="{CC19FB27-9B97-4084-9091-B7703EDB45E1}"/>
+                <a16:creationId xmlns:a16="http://schemas.microsoft.com/office/drawing/2014/main" id="{8F51D358-3D56-4A4D-A393-39E83C224FD4}"/>
               </a:ext>
             </a:extLst>
           </p:cNvPr>
@@ -25417,7 +26384,7 @@
           <p:cNvPr id="3" name="">
             <a:extLst xmlns:a="http://schemas.openxmlformats.org/drawingml/2006/main">
               <a:ext uri="{FF2B5EF4-FFF2-40B4-BE49-F238E27FC236}">
-                <a16:creationId xmlns:a16="http://schemas.microsoft.com/office/drawing/2014/main" id="{A51446A2-C894-4742-A4F9-344722249C32}"/>
+                <a16:creationId xmlns:a16="http://schemas.microsoft.com/office/drawing/2014/main" id="{564CF953-B7DE-4179-92AB-2518FA6DA03E}"/>
               </a:ext>
             </a:extLst>
           </p:cNvPr>
@@ -25475,7 +26442,7 @@
           <p:cNvPr id="4" name="">
             <a:extLst xmlns:a="http://schemas.openxmlformats.org/drawingml/2006/main">
               <a:ext uri="{FF2B5EF4-FFF2-40B4-BE49-F238E27FC236}">
-                <a16:creationId xmlns:a16="http://schemas.microsoft.com/office/drawing/2014/main" id="{B321EF17-BFC9-4F52-AA4F-4CEA11ED4C56}"/>
+                <a16:creationId xmlns:a16="http://schemas.microsoft.com/office/drawing/2014/main" id="{E1A1236F-8F39-42FF-91C9-71C3F64EBE3E}"/>
               </a:ext>
             </a:extLst>
           </p:cNvPr>
@@ -25533,7 +26500,7 @@
           <p:cNvPr id="5" name="">
             <a:extLst xmlns:a="http://schemas.openxmlformats.org/drawingml/2006/main">
               <a:ext uri="{FF2B5EF4-FFF2-40B4-BE49-F238E27FC236}">
-                <a16:creationId xmlns:a16="http://schemas.microsoft.com/office/drawing/2014/main" id="{A7AD87BC-581F-4E29-B379-B2B1B808B73D}"/>
+                <a16:creationId xmlns:a16="http://schemas.microsoft.com/office/drawing/2014/main" id="{8BEF36F4-CDAB-4A3C-BD6C-37F7A018610C}"/>
               </a:ext>
             </a:extLst>
           </p:cNvPr>
@@ -25568,7 +26535,7 @@
           <p:cNvPr id="6" name="">
             <a:extLst xmlns:a="http://schemas.openxmlformats.org/drawingml/2006/main">
               <a:ext uri="{FF2B5EF4-FFF2-40B4-BE49-F238E27FC236}">
-                <a16:creationId xmlns:a16="http://schemas.microsoft.com/office/drawing/2014/main" id="{1E27C21E-ED38-48D4-B13D-57FDA39F44FA}"/>
+                <a16:creationId xmlns:a16="http://schemas.microsoft.com/office/drawing/2014/main" id="{4508A350-D9F6-4D7F-AB51-FF51F761F85B}"/>
               </a:ext>
             </a:extLst>
           </p:cNvPr>
@@ -25626,7 +26593,7 @@
           <p:cNvPr id="7" name="">
             <a:extLst xmlns:a="http://schemas.openxmlformats.org/drawingml/2006/main">
               <a:ext uri="{FF2B5EF4-FFF2-40B4-BE49-F238E27FC236}">
-                <a16:creationId xmlns:a16="http://schemas.microsoft.com/office/drawing/2014/main" id="{6B6C7EA7-3DA4-4AD0-AE60-455132D92DB9}"/>
+                <a16:creationId xmlns:a16="http://schemas.microsoft.com/office/drawing/2014/main" id="{7B577BB2-91AB-4ADB-B67C-9B620EF70F9C}"/>
               </a:ext>
             </a:extLst>
           </p:cNvPr>
@@ -25684,7 +26651,7 @@
           <p:cNvPr id="8" name="">
             <a:extLst xmlns:a="http://schemas.openxmlformats.org/drawingml/2006/main">
               <a:ext uri="{FF2B5EF4-FFF2-40B4-BE49-F238E27FC236}">
-                <a16:creationId xmlns:a16="http://schemas.microsoft.com/office/drawing/2014/main" id="{29FC0FCB-A9AA-4C1E-8CA5-E556296844E5}"/>
+                <a16:creationId xmlns:a16="http://schemas.microsoft.com/office/drawing/2014/main" id="{6886367D-636B-459E-91EA-31A790F6E01F}"/>
               </a:ext>
             </a:extLst>
           </p:cNvPr>
@@ -25719,7 +26686,7 @@
           <p:cNvPr id="9" name="">
             <a:extLst xmlns:a="http://schemas.openxmlformats.org/drawingml/2006/main">
               <a:ext uri="{FF2B5EF4-FFF2-40B4-BE49-F238E27FC236}">
-                <a16:creationId xmlns:a16="http://schemas.microsoft.com/office/drawing/2014/main" id="{1BF2EAC2-DCCD-4A46-92C3-12FEA9B09C0F}"/>
+                <a16:creationId xmlns:a16="http://schemas.microsoft.com/office/drawing/2014/main" id="{44A98816-92C3-49D1-973C-B91BDDA7ADD8}"/>
               </a:ext>
             </a:extLst>
           </p:cNvPr>
@@ -25754,7 +26721,7 @@
           <p:cNvPr id="10" name="">
             <a:extLst xmlns:a="http://schemas.openxmlformats.org/drawingml/2006/main">
               <a:ext uri="{FF2B5EF4-FFF2-40B4-BE49-F238E27FC236}">
-                <a16:creationId xmlns:a16="http://schemas.microsoft.com/office/drawing/2014/main" id="{EAC36960-F293-446E-A512-50FF5C55221E}"/>
+                <a16:creationId xmlns:a16="http://schemas.microsoft.com/office/drawing/2014/main" id="{A4FB83C8-B813-4C70-8146-E5078D3E9688}"/>
               </a:ext>
             </a:extLst>
           </p:cNvPr>
@@ -25812,7 +26779,7 @@
           <p:cNvPr id="11" name="">
             <a:extLst xmlns:a="http://schemas.openxmlformats.org/drawingml/2006/main">
               <a:ext uri="{FF2B5EF4-FFF2-40B4-BE49-F238E27FC236}">
-                <a16:creationId xmlns:a16="http://schemas.microsoft.com/office/drawing/2014/main" id="{B7918791-3169-4F3C-8587-1A2C88340CC8}"/>
+                <a16:creationId xmlns:a16="http://schemas.microsoft.com/office/drawing/2014/main" id="{D835E9AC-E40B-4969-BD46-6722DC166FB6}"/>
               </a:ext>
             </a:extLst>
           </p:cNvPr>
@@ -25849,7 +26816,7 @@
           <p:cNvPr id="12" name="">
             <a:extLst xmlns:a="http://schemas.openxmlformats.org/drawingml/2006/main">
               <a:ext uri="{FF2B5EF4-FFF2-40B4-BE49-F238E27FC236}">
-                <a16:creationId xmlns:a16="http://schemas.microsoft.com/office/drawing/2014/main" id="{60CEEA1E-A9F4-4D49-BDA6-6D38E5BFCE25}"/>
+                <a16:creationId xmlns:a16="http://schemas.microsoft.com/office/drawing/2014/main" id="{03830406-66A4-45E9-B544-EC2D299040CE}"/>
               </a:ext>
             </a:extLst>
           </p:cNvPr>
@@ -25884,7 +26851,7 @@
           <p:cNvPr id="13" name="">
             <a:extLst xmlns:a="http://schemas.openxmlformats.org/drawingml/2006/main">
               <a:ext uri="{FF2B5EF4-FFF2-40B4-BE49-F238E27FC236}">
-                <a16:creationId xmlns:a16="http://schemas.microsoft.com/office/drawing/2014/main" id="{5278C42D-DBA6-4EC6-B6A8-2538C38B8BDC}"/>
+                <a16:creationId xmlns:a16="http://schemas.microsoft.com/office/drawing/2014/main" id="{EBE1A5F9-2AD4-4E32-AA02-FAE05E1C6D2F}"/>
               </a:ext>
             </a:extLst>
           </p:cNvPr>
@@ -25919,7 +26886,7 @@
           <p:cNvPr id="14" name="">
             <a:extLst xmlns:a="http://schemas.openxmlformats.org/drawingml/2006/main">
               <a:ext uri="{FF2B5EF4-FFF2-40B4-BE49-F238E27FC236}">
-                <a16:creationId xmlns:a16="http://schemas.microsoft.com/office/drawing/2014/main" id="{D0D170DC-ACEE-4995-9458-D8545B7730BE}"/>
+                <a16:creationId xmlns:a16="http://schemas.microsoft.com/office/drawing/2014/main" id="{7C1D55BB-E55C-4F89-95FB-81CA2BA14698}"/>
               </a:ext>
             </a:extLst>
           </p:cNvPr>
@@ -25954,7 +26921,7 @@
           <p:cNvPr id="15" name="">
             <a:extLst xmlns:a="http://schemas.openxmlformats.org/drawingml/2006/main">
               <a:ext uri="{FF2B5EF4-FFF2-40B4-BE49-F238E27FC236}">
-                <a16:creationId xmlns:a16="http://schemas.microsoft.com/office/drawing/2014/main" id="{D2A88678-2021-406F-A6A9-457302625A84}"/>
+                <a16:creationId xmlns:a16="http://schemas.microsoft.com/office/drawing/2014/main" id="{842B4C25-7ED4-4F49-91A6-FB9505608558}"/>
               </a:ext>
             </a:extLst>
           </p:cNvPr>
@@ -25989,7 +26956,7 @@
           <p:cNvPr id="16" name="">
             <a:extLst xmlns:a="http://schemas.openxmlformats.org/drawingml/2006/main">
               <a:ext uri="{FF2B5EF4-FFF2-40B4-BE49-F238E27FC236}">
-                <a16:creationId xmlns:a16="http://schemas.microsoft.com/office/drawing/2014/main" id="{C0B1588E-81BA-4387-93D3-17036AB73CC6}"/>
+                <a16:creationId xmlns:a16="http://schemas.microsoft.com/office/drawing/2014/main" id="{0300CD8F-F5F3-423C-B993-8F70E2559F21}"/>
               </a:ext>
             </a:extLst>
           </p:cNvPr>
@@ -26024,7 +26991,7 @@
           <p:cNvPr id="17" name="">
             <a:extLst xmlns:a="http://schemas.openxmlformats.org/drawingml/2006/main">
               <a:ext uri="{FF2B5EF4-FFF2-40B4-BE49-F238E27FC236}">
-                <a16:creationId xmlns:a16="http://schemas.microsoft.com/office/drawing/2014/main" id="{B0B72200-2B64-4D41-BB12-2573823A1351}"/>
+                <a16:creationId xmlns:a16="http://schemas.microsoft.com/office/drawing/2014/main" id="{1C3908AC-CC4C-4A14-A34E-35DD363E59D1}"/>
               </a:ext>
             </a:extLst>
           </p:cNvPr>
@@ -26059,7 +27026,7 @@
           <p:cNvPr id="18" name="">
             <a:extLst xmlns:a="http://schemas.openxmlformats.org/drawingml/2006/main">
               <a:ext uri="{FF2B5EF4-FFF2-40B4-BE49-F238E27FC236}">
-                <a16:creationId xmlns:a16="http://schemas.microsoft.com/office/drawing/2014/main" id="{C9979E3D-1C54-4056-BD71-607E0EAFBF9A}"/>
+                <a16:creationId xmlns:a16="http://schemas.microsoft.com/office/drawing/2014/main" id="{00B480F5-47DF-4737-A3DD-F38528B46AC1}"/>
               </a:ext>
             </a:extLst>
           </p:cNvPr>
@@ -26094,7 +27061,7 @@
           <p:cNvPr id="19" name="">
             <a:extLst xmlns:a="http://schemas.openxmlformats.org/drawingml/2006/main">
               <a:ext uri="{FF2B5EF4-FFF2-40B4-BE49-F238E27FC236}">
-                <a16:creationId xmlns:a16="http://schemas.microsoft.com/office/drawing/2014/main" id="{2C8FECD1-F07C-40BE-A834-7882D7324ED5}"/>
+                <a16:creationId xmlns:a16="http://schemas.microsoft.com/office/drawing/2014/main" id="{73D4F1E9-6248-41E6-9BD4-DBB565FAB818}"/>
               </a:ext>
             </a:extLst>
           </p:cNvPr>
@@ -26129,7 +27096,7 @@
           <p:cNvPr id="20" name="">
             <a:extLst xmlns:a="http://schemas.openxmlformats.org/drawingml/2006/main">
               <a:ext uri="{FF2B5EF4-FFF2-40B4-BE49-F238E27FC236}">
-                <a16:creationId xmlns:a16="http://schemas.microsoft.com/office/drawing/2014/main" id="{8A2A9D68-02CB-4D4F-9EA2-CE3AFD72CC09}"/>
+                <a16:creationId xmlns:a16="http://schemas.microsoft.com/office/drawing/2014/main" id="{6B8501F3-90BC-4AD2-8F40-84FB3BE8F043}"/>
               </a:ext>
             </a:extLst>
           </p:cNvPr>
@@ -26187,7 +27154,7 @@
           <p:cNvPr id="21" name="">
             <a:extLst xmlns:a="http://schemas.openxmlformats.org/drawingml/2006/main">
               <a:ext uri="{FF2B5EF4-FFF2-40B4-BE49-F238E27FC236}">
-                <a16:creationId xmlns:a16="http://schemas.microsoft.com/office/drawing/2014/main" id="{A72A63C7-6BBB-41A8-B111-261AC8294A66}"/>
+                <a16:creationId xmlns:a16="http://schemas.microsoft.com/office/drawing/2014/main" id="{B751BBC5-7137-4801-B52E-975A7847507F}"/>
               </a:ext>
             </a:extLst>
           </p:cNvPr>
@@ -26224,7 +27191,7 @@
           <p:cNvPr id="22" name="">
             <a:extLst xmlns:a="http://schemas.openxmlformats.org/drawingml/2006/main">
               <a:ext uri="{FF2B5EF4-FFF2-40B4-BE49-F238E27FC236}">
-                <a16:creationId xmlns:a16="http://schemas.microsoft.com/office/drawing/2014/main" id="{ADB1A4DF-5293-4E21-B5CE-64499316BEEF}"/>
+                <a16:creationId xmlns:a16="http://schemas.microsoft.com/office/drawing/2014/main" id="{17F6B1B4-660C-4A8E-81BC-4ACDE28D4775}"/>
               </a:ext>
             </a:extLst>
           </p:cNvPr>
@@ -26259,7 +27226,7 @@
           <p:cNvPr id="23" name="">
             <a:extLst xmlns:a="http://schemas.openxmlformats.org/drawingml/2006/main">
               <a:ext uri="{FF2B5EF4-FFF2-40B4-BE49-F238E27FC236}">
-                <a16:creationId xmlns:a16="http://schemas.microsoft.com/office/drawing/2014/main" id="{1A780F80-F120-485C-B4A5-93561FE77751}"/>
+                <a16:creationId xmlns:a16="http://schemas.microsoft.com/office/drawing/2014/main" id="{B7810543-22FB-432F-9A98-2154E20C951F}"/>
               </a:ext>
             </a:extLst>
           </p:cNvPr>
@@ -26294,7 +27261,7 @@
           <p:cNvPr id="24" name="">
             <a:extLst xmlns:a="http://schemas.openxmlformats.org/drawingml/2006/main">
               <a:ext uri="{FF2B5EF4-FFF2-40B4-BE49-F238E27FC236}">
-                <a16:creationId xmlns:a16="http://schemas.microsoft.com/office/drawing/2014/main" id="{FAB7E890-519B-4A34-BA9C-99BEF937A404}"/>
+                <a16:creationId xmlns:a16="http://schemas.microsoft.com/office/drawing/2014/main" id="{A619974B-F5E8-4B95-9C53-5049B828113E}"/>
               </a:ext>
             </a:extLst>
           </p:cNvPr>
@@ -26329,7 +27296,7 @@
           <p:cNvPr id="25" name="">
             <a:extLst xmlns:a="http://schemas.openxmlformats.org/drawingml/2006/main">
               <a:ext uri="{FF2B5EF4-FFF2-40B4-BE49-F238E27FC236}">
-                <a16:creationId xmlns:a16="http://schemas.microsoft.com/office/drawing/2014/main" id="{71770583-577E-4A13-952E-23753D8E4977}"/>
+                <a16:creationId xmlns:a16="http://schemas.microsoft.com/office/drawing/2014/main" id="{B0394BDD-A617-437D-A5A1-0A4AC693CBE9}"/>
               </a:ext>
             </a:extLst>
           </p:cNvPr>
@@ -26364,7 +27331,7 @@
           <p:cNvPr id="26" name="">
             <a:extLst xmlns:a="http://schemas.openxmlformats.org/drawingml/2006/main">
               <a:ext uri="{FF2B5EF4-FFF2-40B4-BE49-F238E27FC236}">
-                <a16:creationId xmlns:a16="http://schemas.microsoft.com/office/drawing/2014/main" id="{98459232-744F-4C19-B252-A07DB84D0DF1}"/>
+                <a16:creationId xmlns:a16="http://schemas.microsoft.com/office/drawing/2014/main" id="{018F1465-2744-404A-9BD5-289ED4546C1B}"/>
               </a:ext>
             </a:extLst>
           </p:cNvPr>
@@ -26399,7 +27366,7 @@
           <p:cNvPr id="27" name="">
             <a:extLst xmlns:a="http://schemas.openxmlformats.org/drawingml/2006/main">
               <a:ext uri="{FF2B5EF4-FFF2-40B4-BE49-F238E27FC236}">
-                <a16:creationId xmlns:a16="http://schemas.microsoft.com/office/drawing/2014/main" id="{01BBB13D-0B27-47AE-BA39-03334FD7352D}"/>
+                <a16:creationId xmlns:a16="http://schemas.microsoft.com/office/drawing/2014/main" id="{82AC0942-63AA-4BF1-B1FB-37E7074F6C1C}"/>
               </a:ext>
             </a:extLst>
           </p:cNvPr>
@@ -26434,7 +27401,7 @@
           <p:cNvPr id="28" name="">
             <a:extLst xmlns:a="http://schemas.openxmlformats.org/drawingml/2006/main">
               <a:ext uri="{FF2B5EF4-FFF2-40B4-BE49-F238E27FC236}">
-                <a16:creationId xmlns:a16="http://schemas.microsoft.com/office/drawing/2014/main" id="{EE83334A-01F2-4AB2-AF7C-512F25B10173}"/>
+                <a16:creationId xmlns:a16="http://schemas.microsoft.com/office/drawing/2014/main" id="{4DBAB625-3CD7-47BB-979B-CAEB3BC34DBE}"/>
               </a:ext>
             </a:extLst>
           </p:cNvPr>
@@ -26469,7 +27436,7 @@
           <p:cNvPr id="29" name="">
             <a:extLst xmlns:a="http://schemas.openxmlformats.org/drawingml/2006/main">
               <a:ext uri="{FF2B5EF4-FFF2-40B4-BE49-F238E27FC236}">
-                <a16:creationId xmlns:a16="http://schemas.microsoft.com/office/drawing/2014/main" id="{DF5BF74A-F7CC-491F-8807-3E4D771C2FAE}"/>
+                <a16:creationId xmlns:a16="http://schemas.microsoft.com/office/drawing/2014/main" id="{5895026E-5BAF-425C-9A12-9E1EE19501DB}"/>
               </a:ext>
             </a:extLst>
           </p:cNvPr>
@@ -26504,7 +27471,7 @@
           <p:cNvPr id="30" name="">
             <a:extLst xmlns:a="http://schemas.openxmlformats.org/drawingml/2006/main">
               <a:ext uri="{FF2B5EF4-FFF2-40B4-BE49-F238E27FC236}">
-                <a16:creationId xmlns:a16="http://schemas.microsoft.com/office/drawing/2014/main" id="{896117C0-8A4E-4BB9-AC8C-C1F4F7F72846}"/>
+                <a16:creationId xmlns:a16="http://schemas.microsoft.com/office/drawing/2014/main" id="{FBA034F7-D5AB-4322-AF7C-E078B170E602}"/>
               </a:ext>
             </a:extLst>
           </p:cNvPr>
@@ -26539,7 +27506,7 @@
           <p:cNvPr id="31" name="">
             <a:extLst xmlns:a="http://schemas.openxmlformats.org/drawingml/2006/main">
               <a:ext uri="{FF2B5EF4-FFF2-40B4-BE49-F238E27FC236}">
-                <a16:creationId xmlns:a16="http://schemas.microsoft.com/office/drawing/2014/main" id="{BA557A06-244B-46BF-946C-81951AE59332}"/>
+                <a16:creationId xmlns:a16="http://schemas.microsoft.com/office/drawing/2014/main" id="{C9D69039-7F0C-4410-98CF-2B36CCE29F88}"/>
               </a:ext>
             </a:extLst>
           </p:cNvPr>
@@ -26597,7 +27564,7 @@
           <p:cNvPr id="32" name="">
             <a:extLst xmlns:a="http://schemas.openxmlformats.org/drawingml/2006/main">
               <a:ext uri="{FF2B5EF4-FFF2-40B4-BE49-F238E27FC236}">
-                <a16:creationId xmlns:a16="http://schemas.microsoft.com/office/drawing/2014/main" id="{7E369FF5-5332-4250-A25C-00E2DBA3E7C6}"/>
+                <a16:creationId xmlns:a16="http://schemas.microsoft.com/office/drawing/2014/main" id="{7DEECDE3-9C82-44B7-8A9D-D49DDB054A38}"/>
               </a:ext>
             </a:extLst>
           </p:cNvPr>
@@ -26634,7 +27601,7 @@
           <p:cNvPr id="33" name="">
             <a:extLst xmlns:a="http://schemas.openxmlformats.org/drawingml/2006/main">
               <a:ext uri="{FF2B5EF4-FFF2-40B4-BE49-F238E27FC236}">
-                <a16:creationId xmlns:a16="http://schemas.microsoft.com/office/drawing/2014/main" id="{E9AA7C04-906E-4548-BBA6-9FB34E4E8FD7}"/>
+                <a16:creationId xmlns:a16="http://schemas.microsoft.com/office/drawing/2014/main" id="{9F7C3857-C331-4E05-8E17-F4B605AE8B93}"/>
               </a:ext>
             </a:extLst>
           </p:cNvPr>
@@ -26669,7 +27636,7 @@
           <p:cNvPr id="34" name="">
             <a:extLst xmlns:a="http://schemas.openxmlformats.org/drawingml/2006/main">
               <a:ext uri="{FF2B5EF4-FFF2-40B4-BE49-F238E27FC236}">
-                <a16:creationId xmlns:a16="http://schemas.microsoft.com/office/drawing/2014/main" id="{A4F286B0-D8C5-467D-B794-B7A19613A412}"/>
+                <a16:creationId xmlns:a16="http://schemas.microsoft.com/office/drawing/2014/main" id="{DF49ED4D-A778-481F-9F1C-4A6F05A10469}"/>
               </a:ext>
             </a:extLst>
           </p:cNvPr>
@@ -26704,7 +27671,7 @@
           <p:cNvPr id="35" name="">
             <a:extLst xmlns:a="http://schemas.openxmlformats.org/drawingml/2006/main">
               <a:ext uri="{FF2B5EF4-FFF2-40B4-BE49-F238E27FC236}">
-                <a16:creationId xmlns:a16="http://schemas.microsoft.com/office/drawing/2014/main" id="{58C2138A-6C3E-43E5-83B1-61B9FABF07A3}"/>
+                <a16:creationId xmlns:a16="http://schemas.microsoft.com/office/drawing/2014/main" id="{EA17FBE1-A24D-465F-88E4-39F424D9FC5E}"/>
               </a:ext>
             </a:extLst>
           </p:cNvPr>
@@ -26739,7 +27706,7 @@
           <p:cNvPr id="36" name="">
             <a:extLst xmlns:a="http://schemas.openxmlformats.org/drawingml/2006/main">
               <a:ext uri="{FF2B5EF4-FFF2-40B4-BE49-F238E27FC236}">
-                <a16:creationId xmlns:a16="http://schemas.microsoft.com/office/drawing/2014/main" id="{F862D49C-A031-4A67-AAB4-3B7BC194F88F}"/>
+                <a16:creationId xmlns:a16="http://schemas.microsoft.com/office/drawing/2014/main" id="{D4C0AAED-8864-420F-84C6-341FAEB21349}"/>
               </a:ext>
             </a:extLst>
           </p:cNvPr>
@@ -26774,7 +27741,7 @@
           <p:cNvPr id="37" name="">
             <a:extLst xmlns:a="http://schemas.openxmlformats.org/drawingml/2006/main">
               <a:ext uri="{FF2B5EF4-FFF2-40B4-BE49-F238E27FC236}">
-                <a16:creationId xmlns:a16="http://schemas.microsoft.com/office/drawing/2014/main" id="{795A64F5-2BC0-4C6A-B2CB-00FC90D7FC7C}"/>
+                <a16:creationId xmlns:a16="http://schemas.microsoft.com/office/drawing/2014/main" id="{81EE2A9E-F0D2-4FA1-A583-920A3D85B395}"/>
               </a:ext>
             </a:extLst>
           </p:cNvPr>
@@ -26809,7 +27776,7 @@
           <p:cNvPr id="38" name="">
             <a:extLst xmlns:a="http://schemas.openxmlformats.org/drawingml/2006/main">
               <a:ext uri="{FF2B5EF4-FFF2-40B4-BE49-F238E27FC236}">
-                <a16:creationId xmlns:a16="http://schemas.microsoft.com/office/drawing/2014/main" id="{A643E42C-E9CD-428B-B847-BF9035414E1C}"/>
+                <a16:creationId xmlns:a16="http://schemas.microsoft.com/office/drawing/2014/main" id="{5E10C0C1-D310-4E1C-B60E-2A33D418A7C8}"/>
               </a:ext>
             </a:extLst>
           </p:cNvPr>
@@ -26844,7 +27811,7 @@
           <p:cNvPr id="39" name="">
             <a:extLst xmlns:a="http://schemas.openxmlformats.org/drawingml/2006/main">
               <a:ext uri="{FF2B5EF4-FFF2-40B4-BE49-F238E27FC236}">
-                <a16:creationId xmlns:a16="http://schemas.microsoft.com/office/drawing/2014/main" id="{D0261506-7192-40A8-8D99-937CF465FADE}"/>
+                <a16:creationId xmlns:a16="http://schemas.microsoft.com/office/drawing/2014/main" id="{D9983AC1-147D-44E8-936B-54C59C793030}"/>
               </a:ext>
             </a:extLst>
           </p:cNvPr>
@@ -26879,7 +27846,7 @@
           <p:cNvPr id="40" name="">
             <a:extLst xmlns:a="http://schemas.openxmlformats.org/drawingml/2006/main">
               <a:ext uri="{FF2B5EF4-FFF2-40B4-BE49-F238E27FC236}">
-                <a16:creationId xmlns:a16="http://schemas.microsoft.com/office/drawing/2014/main" id="{7683058A-8278-4251-A06B-BA1CE33B3B74}"/>
+                <a16:creationId xmlns:a16="http://schemas.microsoft.com/office/drawing/2014/main" id="{A1385D7E-41F6-4E90-B985-F04BA9ABC877}"/>
               </a:ext>
             </a:extLst>
           </p:cNvPr>
@@ -26914,7 +27881,7 @@
           <p:cNvPr id="41" name="">
             <a:extLst xmlns:a="http://schemas.openxmlformats.org/drawingml/2006/main">
               <a:ext uri="{FF2B5EF4-FFF2-40B4-BE49-F238E27FC236}">
-                <a16:creationId xmlns:a16="http://schemas.microsoft.com/office/drawing/2014/main" id="{0ED71157-32C9-4D1F-A02E-59CE15C252E6}"/>
+                <a16:creationId xmlns:a16="http://schemas.microsoft.com/office/drawing/2014/main" id="{926640F0-97BD-4665-9392-89C579C070A9}"/>
               </a:ext>
             </a:extLst>
           </p:cNvPr>
@@ -26972,7 +27939,7 @@
           <p:cNvPr id="42" name="">
             <a:extLst xmlns:a="http://schemas.openxmlformats.org/drawingml/2006/main">
               <a:ext uri="{FF2B5EF4-FFF2-40B4-BE49-F238E27FC236}">
-                <a16:creationId xmlns:a16="http://schemas.microsoft.com/office/drawing/2014/main" id="{0C2B44FA-5757-484A-B458-2FE7CB7C0526}"/>
+                <a16:creationId xmlns:a16="http://schemas.microsoft.com/office/drawing/2014/main" id="{30118457-7631-4712-8198-9E74E3E02ED7}"/>
               </a:ext>
             </a:extLst>
           </p:cNvPr>
@@ -27009,7 +27976,7 @@
           <p:cNvPr id="43" name="">
             <a:extLst xmlns:a="http://schemas.openxmlformats.org/drawingml/2006/main">
               <a:ext uri="{FF2B5EF4-FFF2-40B4-BE49-F238E27FC236}">
-                <a16:creationId xmlns:a16="http://schemas.microsoft.com/office/drawing/2014/main" id="{8B5E8E49-2772-47F9-AEC2-DF421808F602}"/>
+                <a16:creationId xmlns:a16="http://schemas.microsoft.com/office/drawing/2014/main" id="{74A22058-9A7D-45AB-B8CB-DB5F14CB7518}"/>
               </a:ext>
             </a:extLst>
           </p:cNvPr>
@@ -27044,7 +28011,7 @@
           <p:cNvPr id="44" name="">
             <a:extLst xmlns:a="http://schemas.openxmlformats.org/drawingml/2006/main">
               <a:ext uri="{FF2B5EF4-FFF2-40B4-BE49-F238E27FC236}">
-                <a16:creationId xmlns:a16="http://schemas.microsoft.com/office/drawing/2014/main" id="{80F15E1B-6D27-4DE1-B710-B206CCFB301A}"/>
+                <a16:creationId xmlns:a16="http://schemas.microsoft.com/office/drawing/2014/main" id="{3CE2914F-777C-4E41-841F-4A74A72CD300}"/>
               </a:ext>
             </a:extLst>
           </p:cNvPr>
@@ -27079,7 +28046,7 @@
           <p:cNvPr id="45" name="">
             <a:extLst xmlns:a="http://schemas.openxmlformats.org/drawingml/2006/main">
               <a:ext uri="{FF2B5EF4-FFF2-40B4-BE49-F238E27FC236}">
-                <a16:creationId xmlns:a16="http://schemas.microsoft.com/office/drawing/2014/main" id="{6B073F9A-AC01-427A-A8F3-3C21F35AA75D}"/>
+                <a16:creationId xmlns:a16="http://schemas.microsoft.com/office/drawing/2014/main" id="{F5764C63-0275-469B-8933-7C8F35057A07}"/>
               </a:ext>
             </a:extLst>
           </p:cNvPr>
@@ -27114,7 +28081,7 @@
           <p:cNvPr id="46" name="">
             <a:extLst xmlns:a="http://schemas.openxmlformats.org/drawingml/2006/main">
               <a:ext uri="{FF2B5EF4-FFF2-40B4-BE49-F238E27FC236}">
-                <a16:creationId xmlns:a16="http://schemas.microsoft.com/office/drawing/2014/main" id="{6A6FDB4E-A80F-40A0-8067-DBE2E7D59395}"/>
+                <a16:creationId xmlns:a16="http://schemas.microsoft.com/office/drawing/2014/main" id="{38F4DA2C-1BB2-4C9B-BE11-C228EF7AAD9D}"/>
               </a:ext>
             </a:extLst>
           </p:cNvPr>
@@ -27149,7 +28116,7 @@
           <p:cNvPr id="47" name="">
             <a:extLst xmlns:a="http://schemas.openxmlformats.org/drawingml/2006/main">
               <a:ext uri="{FF2B5EF4-FFF2-40B4-BE49-F238E27FC236}">
-                <a16:creationId xmlns:a16="http://schemas.microsoft.com/office/drawing/2014/main" id="{3F08D246-DC8C-4F04-B09E-749DF49FEDB8}"/>
+                <a16:creationId xmlns:a16="http://schemas.microsoft.com/office/drawing/2014/main" id="{3C254329-1602-4465-9AEC-BC32D21FC709}"/>
               </a:ext>
             </a:extLst>
           </p:cNvPr>
@@ -27184,7 +28151,7 @@
           <p:cNvPr id="48" name="">
             <a:extLst xmlns:a="http://schemas.openxmlformats.org/drawingml/2006/main">
               <a:ext uri="{FF2B5EF4-FFF2-40B4-BE49-F238E27FC236}">
-                <a16:creationId xmlns:a16="http://schemas.microsoft.com/office/drawing/2014/main" id="{19FCA1E4-87E7-4B5E-AEDC-A476067309CD}"/>
+                <a16:creationId xmlns:a16="http://schemas.microsoft.com/office/drawing/2014/main" id="{C300E2A9-D661-44C8-B805-11ECC3E771F4}"/>
               </a:ext>
             </a:extLst>
           </p:cNvPr>
@@ -27219,7 +28186,7 @@
           <p:cNvPr id="49" name="">
             <a:extLst xmlns:a="http://schemas.openxmlformats.org/drawingml/2006/main">
               <a:ext uri="{FF2B5EF4-FFF2-40B4-BE49-F238E27FC236}">
-                <a16:creationId xmlns:a16="http://schemas.microsoft.com/office/drawing/2014/main" id="{D1D3DD9E-F445-46BB-A09C-6EC5A114CA2A}"/>
+                <a16:creationId xmlns:a16="http://schemas.microsoft.com/office/drawing/2014/main" id="{54FAA0C1-F0D8-4124-8E50-0739BE21C90E}"/>
               </a:ext>
             </a:extLst>
           </p:cNvPr>
@@ -27254,7 +28221,7 @@
           <p:cNvPr id="50" name="">
             <a:extLst xmlns:a="http://schemas.openxmlformats.org/drawingml/2006/main">
               <a:ext uri="{FF2B5EF4-FFF2-40B4-BE49-F238E27FC236}">
-                <a16:creationId xmlns:a16="http://schemas.microsoft.com/office/drawing/2014/main" id="{55A7767B-B505-4AC6-8634-718943145610}"/>
+                <a16:creationId xmlns:a16="http://schemas.microsoft.com/office/drawing/2014/main" id="{A0917C05-630A-4D07-99D8-F26F6282C8DE}"/>
               </a:ext>
             </a:extLst>
           </p:cNvPr>
@@ -27289,7 +28256,7 @@
           <p:cNvPr id="51" name="">
             <a:extLst xmlns:a="http://schemas.openxmlformats.org/drawingml/2006/main">
               <a:ext uri="{FF2B5EF4-FFF2-40B4-BE49-F238E27FC236}">
-                <a16:creationId xmlns:a16="http://schemas.microsoft.com/office/drawing/2014/main" id="{9B431D67-2763-4D53-A1B3-C3E41FE7DED4}"/>
+                <a16:creationId xmlns:a16="http://schemas.microsoft.com/office/drawing/2014/main" id="{0B142623-B7B7-4ACA-96E0-C4ABC694F830}"/>
               </a:ext>
             </a:extLst>
           </p:cNvPr>
@@ -27347,7 +28314,7 @@
           <p:cNvPr id="52" name="">
             <a:extLst xmlns:a="http://schemas.openxmlformats.org/drawingml/2006/main">
               <a:ext uri="{FF2B5EF4-FFF2-40B4-BE49-F238E27FC236}">
-                <a16:creationId xmlns:a16="http://schemas.microsoft.com/office/drawing/2014/main" id="{6F444D8C-1F3A-429C-ADCB-9C0A93606233}"/>
+                <a16:creationId xmlns:a16="http://schemas.microsoft.com/office/drawing/2014/main" id="{26A64C81-A8B2-4D73-B014-118EA816496F}"/>
               </a:ext>
             </a:extLst>
           </p:cNvPr>
@@ -27405,7 +28372,7 @@
           <p:cNvPr id="53" name="">
             <a:extLst xmlns:a="http://schemas.openxmlformats.org/drawingml/2006/main">
               <a:ext uri="{FF2B5EF4-FFF2-40B4-BE49-F238E27FC236}">
-                <a16:creationId xmlns:a16="http://schemas.microsoft.com/office/drawing/2014/main" id="{9B80B9E8-D2D5-47BC-8663-AD80741F6649}"/>
+                <a16:creationId xmlns:a16="http://schemas.microsoft.com/office/drawing/2014/main" id="{0CA433E4-EC10-4143-9051-12371C8F7A93}"/>
               </a:ext>
             </a:extLst>
           </p:cNvPr>
@@ -27440,7 +28407,7 @@
           <p:cNvPr id="54" name="">
             <a:extLst xmlns:a="http://schemas.openxmlformats.org/drawingml/2006/main">
               <a:ext uri="{FF2B5EF4-FFF2-40B4-BE49-F238E27FC236}">
-                <a16:creationId xmlns:a16="http://schemas.microsoft.com/office/drawing/2014/main" id="{9507E0A1-C8F4-4C9A-AAE1-D03B0FD72D09}"/>
+                <a16:creationId xmlns:a16="http://schemas.microsoft.com/office/drawing/2014/main" id="{DDB0D109-5AB1-41DB-9F2C-D012E68CEBFE}"/>
               </a:ext>
             </a:extLst>
           </p:cNvPr>
@@ -27475,7 +28442,7 @@
           <p:cNvPr id="55" name="">
             <a:extLst xmlns:a="http://schemas.openxmlformats.org/drawingml/2006/main">
               <a:ext uri="{FF2B5EF4-FFF2-40B4-BE49-F238E27FC236}">
-                <a16:creationId xmlns:a16="http://schemas.microsoft.com/office/drawing/2014/main" id="{95F5C05A-EBAB-4A2D-B3CA-1733FCF0990A}"/>
+                <a16:creationId xmlns:a16="http://schemas.microsoft.com/office/drawing/2014/main" id="{5DB7CA86-4C0E-46C9-BCB8-F65A6B308ED1}"/>
               </a:ext>
             </a:extLst>
           </p:cNvPr>
@@ -27533,7 +28500,7 @@
           <p:cNvPr id="56" name="">
             <a:extLst xmlns:a="http://schemas.openxmlformats.org/drawingml/2006/main">
               <a:ext uri="{FF2B5EF4-FFF2-40B4-BE49-F238E27FC236}">
-                <a16:creationId xmlns:a16="http://schemas.microsoft.com/office/drawing/2014/main" id="{5DB5FA23-DFF4-42AA-962C-70ECD7067E87}"/>
+                <a16:creationId xmlns:a16="http://schemas.microsoft.com/office/drawing/2014/main" id="{BEDE146F-3C87-4795-99BE-27296468F2E7}"/>
               </a:ext>
             </a:extLst>
           </p:cNvPr>
@@ -27591,7 +28558,7 @@
           <p:cNvPr id="57" name="">
             <a:extLst xmlns:a="http://schemas.openxmlformats.org/drawingml/2006/main">
               <a:ext uri="{FF2B5EF4-FFF2-40B4-BE49-F238E27FC236}">
-                <a16:creationId xmlns:a16="http://schemas.microsoft.com/office/drawing/2014/main" id="{9BFFE4A3-3F96-48DF-B477-604B467A5985}"/>
+                <a16:creationId xmlns:a16="http://schemas.microsoft.com/office/drawing/2014/main" id="{E58BAE32-AFC5-4148-A279-33FD342C2565}"/>
               </a:ext>
             </a:extLst>
           </p:cNvPr>
@@ -27626,7 +28593,7 @@
           <p:cNvPr id="58" name="">
             <a:extLst xmlns:a="http://schemas.openxmlformats.org/drawingml/2006/main">
               <a:ext uri="{FF2B5EF4-FFF2-40B4-BE49-F238E27FC236}">
-                <a16:creationId xmlns:a16="http://schemas.microsoft.com/office/drawing/2014/main" id="{45034719-9B6C-4DA6-992B-8E0868A385FE}"/>
+                <a16:creationId xmlns:a16="http://schemas.microsoft.com/office/drawing/2014/main" id="{37463D14-1372-45E4-AD9F-EA0B7ACCEA70}"/>
               </a:ext>
             </a:extLst>
           </p:cNvPr>
@@ -27661,7 +28628,7 @@
           <p:cNvPr id="59" name="">
             <a:extLst xmlns:a="http://schemas.openxmlformats.org/drawingml/2006/main">
               <a:ext uri="{FF2B5EF4-FFF2-40B4-BE49-F238E27FC236}">
-                <a16:creationId xmlns:a16="http://schemas.microsoft.com/office/drawing/2014/main" id="{28C5667C-0E27-465F-AB76-35383000F452}"/>
+                <a16:creationId xmlns:a16="http://schemas.microsoft.com/office/drawing/2014/main" id="{E4423A29-E15E-4487-A5E0-6222952C9464}"/>
               </a:ext>
             </a:extLst>
           </p:cNvPr>
@@ -27719,7 +28686,7 @@
           <p:cNvPr id="60" name="">
             <a:extLst xmlns:a="http://schemas.openxmlformats.org/drawingml/2006/main">
               <a:ext uri="{FF2B5EF4-FFF2-40B4-BE49-F238E27FC236}">
-                <a16:creationId xmlns:a16="http://schemas.microsoft.com/office/drawing/2014/main" id="{7333AC3B-1F65-4198-A056-D630CE41DF10}"/>
+                <a16:creationId xmlns:a16="http://schemas.microsoft.com/office/drawing/2014/main" id="{4420D924-56DE-4080-8D04-A7C2BCEA98DF}"/>
               </a:ext>
             </a:extLst>
           </p:cNvPr>
@@ -27777,7 +28744,7 @@
           <p:cNvPr id="61" name="">
             <a:extLst xmlns:a="http://schemas.openxmlformats.org/drawingml/2006/main">
               <a:ext uri="{FF2B5EF4-FFF2-40B4-BE49-F238E27FC236}">
-                <a16:creationId xmlns:a16="http://schemas.microsoft.com/office/drawing/2014/main" id="{A7297DFF-03E1-467C-84AC-B3E61CB0C857}"/>
+                <a16:creationId xmlns:a16="http://schemas.microsoft.com/office/drawing/2014/main" id="{6F9675B1-6BCD-4979-9939-77BBA5C03704}"/>
               </a:ext>
             </a:extLst>
           </p:cNvPr>
@@ -27833,7 +28800,7 @@
     </p:spTree>
     <p:extLst>
       <p:ext uri="{BB962C8B-B14F-4D97-AF65-F5344CB8AC3E}">
-        <p14:creationId xmlns:p14="http://schemas.microsoft.com/office/powerpoint/2010/main" val="1651058901"/>
+        <p14:creationId xmlns:p14="http://schemas.microsoft.com/office/powerpoint/2010/main" val="58089498"/>
       </p:ext>
     </p:extLst>
   </p:cSld>
@@ -27864,7 +28831,7 @@
           <p:cNvPr id="1" name="">
             <a:extLst xmlns:a="http://schemas.openxmlformats.org/drawingml/2006/main">
               <a:ext uri="{FF2B5EF4-FFF2-40B4-BE49-F238E27FC236}">
-                <a16:creationId xmlns:a16="http://schemas.microsoft.com/office/drawing/2014/main" id="{62561C3C-9BFD-4146-81EB-F84ECFE2F52C}"/>
+                <a16:creationId xmlns:a16="http://schemas.microsoft.com/office/drawing/2014/main" id="{4760BA04-7361-49C9-8C57-BB1D882940DC}"/>
               </a:ext>
             </a:extLst>
           </p:cNvPr>
@@ -27899,7 +28866,7 @@
           <p:cNvPr id="2" name="">
             <a:extLst xmlns:a="http://schemas.openxmlformats.org/drawingml/2006/main">
               <a:ext uri="{FF2B5EF4-FFF2-40B4-BE49-F238E27FC236}">
-                <a16:creationId xmlns:a16="http://schemas.microsoft.com/office/drawing/2014/main" id="{BAEF7522-B16D-473A-B051-97320EAABF92}"/>
+                <a16:creationId xmlns:a16="http://schemas.microsoft.com/office/drawing/2014/main" id="{668B402A-7166-4C78-A4E0-575B187C46DA}"/>
               </a:ext>
             </a:extLst>
           </p:cNvPr>
@@ -27934,7 +28901,7 @@
           <p:cNvPr id="3" name="">
             <a:extLst xmlns:a="http://schemas.openxmlformats.org/drawingml/2006/main">
               <a:ext uri="{FF2B5EF4-FFF2-40B4-BE49-F238E27FC236}">
-                <a16:creationId xmlns:a16="http://schemas.microsoft.com/office/drawing/2014/main" id="{9CEC5F0B-B758-4B9C-89DC-1785B5B7876D}"/>
+                <a16:creationId xmlns:a16="http://schemas.microsoft.com/office/drawing/2014/main" id="{B2174A94-612C-4232-A4CD-1EF15F5571F7}"/>
               </a:ext>
             </a:extLst>
           </p:cNvPr>
@@ -27992,7 +28959,7 @@
           <p:cNvPr id="4" name="">
             <a:extLst xmlns:a="http://schemas.openxmlformats.org/drawingml/2006/main">
               <a:ext uri="{FF2B5EF4-FFF2-40B4-BE49-F238E27FC236}">
-                <a16:creationId xmlns:a16="http://schemas.microsoft.com/office/drawing/2014/main" id="{4AA192A2-3FE2-4C02-8644-997F9FAD440E}"/>
+                <a16:creationId xmlns:a16="http://schemas.microsoft.com/office/drawing/2014/main" id="{1DB7CCF6-1CB6-4119-A3B3-570FB7EF3CF9}"/>
               </a:ext>
             </a:extLst>
           </p:cNvPr>
@@ -28050,7 +29017,7 @@
           <p:cNvPr id="5" name="">
             <a:extLst xmlns:a="http://schemas.openxmlformats.org/drawingml/2006/main">
               <a:ext uri="{FF2B5EF4-FFF2-40B4-BE49-F238E27FC236}">
-                <a16:creationId xmlns:a16="http://schemas.microsoft.com/office/drawing/2014/main" id="{DFF259C2-38A5-4580-B7CC-DB658DB3E723}"/>
+                <a16:creationId xmlns:a16="http://schemas.microsoft.com/office/drawing/2014/main" id="{A66BFF60-6B8C-4044-B3A2-FBBBCC5924A1}"/>
               </a:ext>
             </a:extLst>
           </p:cNvPr>
@@ -28085,7 +29052,7 @@
           <p:cNvPr id="6" name="">
             <a:extLst xmlns:a="http://schemas.openxmlformats.org/drawingml/2006/main">
               <a:ext uri="{FF2B5EF4-FFF2-40B4-BE49-F238E27FC236}">
-                <a16:creationId xmlns:a16="http://schemas.microsoft.com/office/drawing/2014/main" id="{4435C296-D510-47CD-8472-4F5D9B1958C1}"/>
+                <a16:creationId xmlns:a16="http://schemas.microsoft.com/office/drawing/2014/main" id="{C5E9BC66-DFAD-4756-98E4-A002E486BD75}"/>
               </a:ext>
             </a:extLst>
           </p:cNvPr>
@@ -28143,7 +29110,7 @@
           <p:cNvPr id="7" name="">
             <a:extLst xmlns:a="http://schemas.openxmlformats.org/drawingml/2006/main">
               <a:ext uri="{FF2B5EF4-FFF2-40B4-BE49-F238E27FC236}">
-                <a16:creationId xmlns:a16="http://schemas.microsoft.com/office/drawing/2014/main" id="{1D35A973-F5DB-4C59-82EA-9AA7F5C17AA4}"/>
+                <a16:creationId xmlns:a16="http://schemas.microsoft.com/office/drawing/2014/main" id="{72F2909C-9CAF-446C-AFEB-B6589EE4F8CA}"/>
               </a:ext>
             </a:extLst>
           </p:cNvPr>
@@ -28201,7 +29168,7 @@
           <p:cNvPr id="8" name="">
             <a:extLst xmlns:a="http://schemas.openxmlformats.org/drawingml/2006/main">
               <a:ext uri="{FF2B5EF4-FFF2-40B4-BE49-F238E27FC236}">
-                <a16:creationId xmlns:a16="http://schemas.microsoft.com/office/drawing/2014/main" id="{8CC0DA16-FF80-4D8F-9EE4-8556960F7B69}"/>
+                <a16:creationId xmlns:a16="http://schemas.microsoft.com/office/drawing/2014/main" id="{EC6D7F4B-C1AC-4FBC-9EE0-A542DF5CE083}"/>
               </a:ext>
             </a:extLst>
           </p:cNvPr>
@@ -28236,7 +29203,7 @@
           <p:cNvPr id="9" name="">
             <a:extLst xmlns:a="http://schemas.openxmlformats.org/drawingml/2006/main">
               <a:ext uri="{FF2B5EF4-FFF2-40B4-BE49-F238E27FC236}">
-                <a16:creationId xmlns:a16="http://schemas.microsoft.com/office/drawing/2014/main" id="{CCD723CB-8F02-41BA-9F75-730419BB5CF5}"/>
+                <a16:creationId xmlns:a16="http://schemas.microsoft.com/office/drawing/2014/main" id="{4BEA6D1D-D56D-4741-AA9A-3B74F3C67AE2}"/>
               </a:ext>
             </a:extLst>
           </p:cNvPr>
@@ -28271,7 +29238,7 @@
           <p:cNvPr id="10" name="">
             <a:extLst xmlns:a="http://schemas.openxmlformats.org/drawingml/2006/main">
               <a:ext uri="{FF2B5EF4-FFF2-40B4-BE49-F238E27FC236}">
-                <a16:creationId xmlns:a16="http://schemas.microsoft.com/office/drawing/2014/main" id="{C78A88E5-2A86-492A-920D-0728BF4E9BDF}"/>
+                <a16:creationId xmlns:a16="http://schemas.microsoft.com/office/drawing/2014/main" id="{2B3DC276-78C2-4D8E-A1E3-C88F69CF16D6}"/>
               </a:ext>
             </a:extLst>
           </p:cNvPr>
@@ -28329,7 +29296,7 @@
           <p:cNvPr id="11" name="">
             <a:extLst xmlns:a="http://schemas.openxmlformats.org/drawingml/2006/main">
               <a:ext uri="{FF2B5EF4-FFF2-40B4-BE49-F238E27FC236}">
-                <a16:creationId xmlns:a16="http://schemas.microsoft.com/office/drawing/2014/main" id="{FECAC0D8-D47F-45DB-8395-8EA0F2DF094B}"/>
+                <a16:creationId xmlns:a16="http://schemas.microsoft.com/office/drawing/2014/main" id="{8C0E2C94-144D-4AC7-A582-03200C050E64}"/>
               </a:ext>
             </a:extLst>
           </p:cNvPr>
@@ -28364,7 +29331,7 @@
           <p:cNvPr id="12" name="">
             <a:extLst xmlns:a="http://schemas.openxmlformats.org/drawingml/2006/main">
               <a:ext uri="{FF2B5EF4-FFF2-40B4-BE49-F238E27FC236}">
-                <a16:creationId xmlns:a16="http://schemas.microsoft.com/office/drawing/2014/main" id="{5E86641C-C4A5-4BAC-9D5A-00F060BE0D78}"/>
+                <a16:creationId xmlns:a16="http://schemas.microsoft.com/office/drawing/2014/main" id="{72C4BA9E-393B-4F83-A332-5B3C5C23480E}"/>
               </a:ext>
             </a:extLst>
           </p:cNvPr>
@@ -28456,7 +29423,7 @@
           <p:cNvPr id="13" name="">
             <a:extLst xmlns:a="http://schemas.openxmlformats.org/drawingml/2006/main">
               <a:ext uri="{FF2B5EF4-FFF2-40B4-BE49-F238E27FC236}">
-                <a16:creationId xmlns:a16="http://schemas.microsoft.com/office/drawing/2014/main" id="{116A1E3E-E010-4B3B-A04B-1B48D9500B18}"/>
+                <a16:creationId xmlns:a16="http://schemas.microsoft.com/office/drawing/2014/main" id="{453220A2-D501-4AC3-AA8E-1459FB475750}"/>
               </a:ext>
             </a:extLst>
           </p:cNvPr>
@@ -28491,7 +29458,7 @@
           <p:cNvPr id="14" name="">
             <a:extLst xmlns:a="http://schemas.openxmlformats.org/drawingml/2006/main">
               <a:ext uri="{FF2B5EF4-FFF2-40B4-BE49-F238E27FC236}">
-                <a16:creationId xmlns:a16="http://schemas.microsoft.com/office/drawing/2014/main" id="{0BBCB35D-E97D-42F9-AE0D-9B971991566A}"/>
+                <a16:creationId xmlns:a16="http://schemas.microsoft.com/office/drawing/2014/main" id="{E47015DD-C008-48A4-AD9A-5EEA2FC14104}"/>
               </a:ext>
             </a:extLst>
           </p:cNvPr>
@@ -28566,7 +29533,7 @@
           <p:cNvPr id="15" name="">
             <a:extLst xmlns:a="http://schemas.openxmlformats.org/drawingml/2006/main">
               <a:ext uri="{FF2B5EF4-FFF2-40B4-BE49-F238E27FC236}">
-                <a16:creationId xmlns:a16="http://schemas.microsoft.com/office/drawing/2014/main" id="{1BE78B58-BE2D-4AB2-93C1-44D8970735B0}"/>
+                <a16:creationId xmlns:a16="http://schemas.microsoft.com/office/drawing/2014/main" id="{4295BD5E-641B-4383-B490-A573DC2DF51B}"/>
               </a:ext>
             </a:extLst>
           </p:cNvPr>
@@ -28601,7 +29568,7 @@
           <p:cNvPr id="16" name="">
             <a:extLst xmlns:a="http://schemas.openxmlformats.org/drawingml/2006/main">
               <a:ext uri="{FF2B5EF4-FFF2-40B4-BE49-F238E27FC236}">
-                <a16:creationId xmlns:a16="http://schemas.microsoft.com/office/drawing/2014/main" id="{027F51A6-3D51-4952-8A78-F270D4E11A4F}"/>
+                <a16:creationId xmlns:a16="http://schemas.microsoft.com/office/drawing/2014/main" id="{EE1B95D2-3FF9-4AA0-B325-EEE7AC62FDE0}"/>
               </a:ext>
             </a:extLst>
           </p:cNvPr>
@@ -28636,7 +29603,7 @@
           <p:cNvPr id="17" name="">
             <a:extLst xmlns:a="http://schemas.openxmlformats.org/drawingml/2006/main">
               <a:ext uri="{FF2B5EF4-FFF2-40B4-BE49-F238E27FC236}">
-                <a16:creationId xmlns:a16="http://schemas.microsoft.com/office/drawing/2014/main" id="{0B72300F-E082-4CE4-AA4A-F93526D0846D}"/>
+                <a16:creationId xmlns:a16="http://schemas.microsoft.com/office/drawing/2014/main" id="{131E7C7E-084E-4301-AAF9-1C14B65866B9}"/>
               </a:ext>
             </a:extLst>
           </p:cNvPr>
@@ -28694,7 +29661,7 @@
           <p:cNvPr id="18" name="">
             <a:extLst xmlns:a="http://schemas.openxmlformats.org/drawingml/2006/main">
               <a:ext uri="{FF2B5EF4-FFF2-40B4-BE49-F238E27FC236}">
-                <a16:creationId xmlns:a16="http://schemas.microsoft.com/office/drawing/2014/main" id="{34B694A7-A48F-4042-83F1-B907F669C83D}"/>
+                <a16:creationId xmlns:a16="http://schemas.microsoft.com/office/drawing/2014/main" id="{378D71C6-2D76-455D-8DC9-71FB00F8AD42}"/>
               </a:ext>
             </a:extLst>
           </p:cNvPr>
@@ -28729,7 +29696,7 @@
           <p:cNvPr id="19" name="">
             <a:extLst xmlns:a="http://schemas.openxmlformats.org/drawingml/2006/main">
               <a:ext uri="{FF2B5EF4-FFF2-40B4-BE49-F238E27FC236}">
-                <a16:creationId xmlns:a16="http://schemas.microsoft.com/office/drawing/2014/main" id="{05073124-B3FD-4204-A95C-9EB0312981DF}"/>
+                <a16:creationId xmlns:a16="http://schemas.microsoft.com/office/drawing/2014/main" id="{6848C8AB-EC68-4BEF-9115-8C50D73C6F82}"/>
               </a:ext>
             </a:extLst>
           </p:cNvPr>
@@ -28838,7 +29805,7 @@
           <p:cNvPr id="20" name="">
             <a:extLst xmlns:a="http://schemas.openxmlformats.org/drawingml/2006/main">
               <a:ext uri="{FF2B5EF4-FFF2-40B4-BE49-F238E27FC236}">
-                <a16:creationId xmlns:a16="http://schemas.microsoft.com/office/drawing/2014/main" id="{454797D6-6202-410F-B182-B4ABCB3E70C2}"/>
+                <a16:creationId xmlns:a16="http://schemas.microsoft.com/office/drawing/2014/main" id="{B3FC62A5-6276-41CA-BFA7-C595591F00D8}"/>
               </a:ext>
             </a:extLst>
           </p:cNvPr>
@@ -28873,7 +29840,7 @@
           <p:cNvPr id="21" name="">
             <a:extLst xmlns:a="http://schemas.openxmlformats.org/drawingml/2006/main">
               <a:ext uri="{FF2B5EF4-FFF2-40B4-BE49-F238E27FC236}">
-                <a16:creationId xmlns:a16="http://schemas.microsoft.com/office/drawing/2014/main" id="{934AA5CC-DC1F-4922-B0AD-DBCC572A11CB}"/>
+                <a16:creationId xmlns:a16="http://schemas.microsoft.com/office/drawing/2014/main" id="{3C1156EB-69CC-430E-9985-0FBE2AF133C0}"/>
               </a:ext>
             </a:extLst>
           </p:cNvPr>
@@ -28965,7 +29932,7 @@
           <p:cNvPr id="22" name="">
             <a:extLst xmlns:a="http://schemas.openxmlformats.org/drawingml/2006/main">
               <a:ext uri="{FF2B5EF4-FFF2-40B4-BE49-F238E27FC236}">
-                <a16:creationId xmlns:a16="http://schemas.microsoft.com/office/drawing/2014/main" id="{1DB80D11-E05D-4661-874D-6DA4AE6C423E}"/>
+                <a16:creationId xmlns:a16="http://schemas.microsoft.com/office/drawing/2014/main" id="{76CB3D56-B4BB-4C30-92E5-1A4B1B6B180A}"/>
               </a:ext>
             </a:extLst>
           </p:cNvPr>
@@ -29000,7 +29967,7 @@
           <p:cNvPr id="23" name="">
             <a:extLst xmlns:a="http://schemas.openxmlformats.org/drawingml/2006/main">
               <a:ext uri="{FF2B5EF4-FFF2-40B4-BE49-F238E27FC236}">
-                <a16:creationId xmlns:a16="http://schemas.microsoft.com/office/drawing/2014/main" id="{17CEFAAA-1416-4478-B66F-397B063F7463}"/>
+                <a16:creationId xmlns:a16="http://schemas.microsoft.com/office/drawing/2014/main" id="{02C7FFE0-EFA3-47D5-886A-B740FB8CB750}"/>
               </a:ext>
             </a:extLst>
           </p:cNvPr>
@@ -29035,7 +30002,7 @@
           <p:cNvPr id="24" name="">
             <a:extLst xmlns:a="http://schemas.openxmlformats.org/drawingml/2006/main">
               <a:ext uri="{FF2B5EF4-FFF2-40B4-BE49-F238E27FC236}">
-                <a16:creationId xmlns:a16="http://schemas.microsoft.com/office/drawing/2014/main" id="{91519103-B3B2-467C-BCDF-1CE15C2B80A4}"/>
+                <a16:creationId xmlns:a16="http://schemas.microsoft.com/office/drawing/2014/main" id="{0436A19B-1816-4D61-918B-6D4FE4C9E7DB}"/>
               </a:ext>
             </a:extLst>
           </p:cNvPr>
@@ -29093,7 +30060,7 @@
           <p:cNvPr id="25" name="">
             <a:extLst xmlns:a="http://schemas.openxmlformats.org/drawingml/2006/main">
               <a:ext uri="{FF2B5EF4-FFF2-40B4-BE49-F238E27FC236}">
-                <a16:creationId xmlns:a16="http://schemas.microsoft.com/office/drawing/2014/main" id="{8EC4EDA1-9A97-4FF1-9B9F-7AB4BF67FC64}"/>
+                <a16:creationId xmlns:a16="http://schemas.microsoft.com/office/drawing/2014/main" id="{222F9183-5FF6-4FFD-AAE0-E9C44F862B6B}"/>
               </a:ext>
             </a:extLst>
           </p:cNvPr>
@@ -29128,7 +30095,7 @@
           <p:cNvPr id="26" name="">
             <a:extLst xmlns:a="http://schemas.openxmlformats.org/drawingml/2006/main">
               <a:ext uri="{FF2B5EF4-FFF2-40B4-BE49-F238E27FC236}">
-                <a16:creationId xmlns:a16="http://schemas.microsoft.com/office/drawing/2014/main" id="{93F28923-D444-4C24-8BB2-3F9D2ADCCB57}"/>
+                <a16:creationId xmlns:a16="http://schemas.microsoft.com/office/drawing/2014/main" id="{0C031E57-47F0-4CF2-BB46-286871F71E68}"/>
               </a:ext>
             </a:extLst>
           </p:cNvPr>
@@ -29237,7 +30204,7 @@
           <p:cNvPr id="27" name="">
             <a:extLst xmlns:a="http://schemas.openxmlformats.org/drawingml/2006/main">
               <a:ext uri="{FF2B5EF4-FFF2-40B4-BE49-F238E27FC236}">
-                <a16:creationId xmlns:a16="http://schemas.microsoft.com/office/drawing/2014/main" id="{690EC6F2-8ACA-47DE-8494-32030A237943}"/>
+                <a16:creationId xmlns:a16="http://schemas.microsoft.com/office/drawing/2014/main" id="{FE626243-CDA3-4AE5-AB9F-2D1580E67DFE}"/>
               </a:ext>
             </a:extLst>
           </p:cNvPr>
@@ -29272,7 +30239,7 @@
           <p:cNvPr id="28" name="">
             <a:extLst xmlns:a="http://schemas.openxmlformats.org/drawingml/2006/main">
               <a:ext uri="{FF2B5EF4-FFF2-40B4-BE49-F238E27FC236}">
-                <a16:creationId xmlns:a16="http://schemas.microsoft.com/office/drawing/2014/main" id="{7CA2BB61-A9D1-4CCF-A39C-AC8C8D46E74F}"/>
+                <a16:creationId xmlns:a16="http://schemas.microsoft.com/office/drawing/2014/main" id="{2EF0E3D7-C6E5-44F1-9435-15F578C23282}"/>
               </a:ext>
             </a:extLst>
           </p:cNvPr>
@@ -29347,7 +30314,7 @@
           <p:cNvPr id="29" name="">
             <a:extLst xmlns:a="http://schemas.openxmlformats.org/drawingml/2006/main">
               <a:ext uri="{FF2B5EF4-FFF2-40B4-BE49-F238E27FC236}">
-                <a16:creationId xmlns:a16="http://schemas.microsoft.com/office/drawing/2014/main" id="{B4BA9E4A-9464-4918-8D1F-9FD4D613BED6}"/>
+                <a16:creationId xmlns:a16="http://schemas.microsoft.com/office/drawing/2014/main" id="{4059528A-3C90-4443-9BCC-1FEFA800CFA6}"/>
               </a:ext>
             </a:extLst>
           </p:cNvPr>
@@ -29382,7 +30349,7 @@
           <p:cNvPr id="30" name="">
             <a:extLst xmlns:a="http://schemas.openxmlformats.org/drawingml/2006/main">
               <a:ext uri="{FF2B5EF4-FFF2-40B4-BE49-F238E27FC236}">
-                <a16:creationId xmlns:a16="http://schemas.microsoft.com/office/drawing/2014/main" id="{ED7D59E2-224C-4BD5-8141-B0835B98D48F}"/>
+                <a16:creationId xmlns:a16="http://schemas.microsoft.com/office/drawing/2014/main" id="{8F2590F5-8576-47FE-BFC5-14B96448198C}"/>
               </a:ext>
             </a:extLst>
           </p:cNvPr>
@@ -29417,7 +30384,7 @@
           <p:cNvPr id="31" name="">
             <a:extLst xmlns:a="http://schemas.openxmlformats.org/drawingml/2006/main">
               <a:ext uri="{FF2B5EF4-FFF2-40B4-BE49-F238E27FC236}">
-                <a16:creationId xmlns:a16="http://schemas.microsoft.com/office/drawing/2014/main" id="{ABC79949-7ABB-4319-AA71-E538437D1D9E}"/>
+                <a16:creationId xmlns:a16="http://schemas.microsoft.com/office/drawing/2014/main" id="{D1E03748-9CC8-4F2A-9B28-FA8F5229F5BC}"/>
               </a:ext>
             </a:extLst>
           </p:cNvPr>
@@ -29475,7 +30442,7 @@
           <p:cNvPr id="32" name="">
             <a:extLst xmlns:a="http://schemas.openxmlformats.org/drawingml/2006/main">
               <a:ext uri="{FF2B5EF4-FFF2-40B4-BE49-F238E27FC236}">
-                <a16:creationId xmlns:a16="http://schemas.microsoft.com/office/drawing/2014/main" id="{3CFE29E2-D0CC-42E4-9A4D-2038C2DC45C9}"/>
+                <a16:creationId xmlns:a16="http://schemas.microsoft.com/office/drawing/2014/main" id="{B1F5F956-DECD-41E3-BF81-F417D338C187}"/>
               </a:ext>
             </a:extLst>
           </p:cNvPr>
@@ -29510,7 +30477,7 @@
           <p:cNvPr id="33" name="">
             <a:extLst xmlns:a="http://schemas.openxmlformats.org/drawingml/2006/main">
               <a:ext uri="{FF2B5EF4-FFF2-40B4-BE49-F238E27FC236}">
-                <a16:creationId xmlns:a16="http://schemas.microsoft.com/office/drawing/2014/main" id="{FE6F0345-958E-4328-8D71-369592C58B9C}"/>
+                <a16:creationId xmlns:a16="http://schemas.microsoft.com/office/drawing/2014/main" id="{401992CA-F9D5-4249-B2FB-CFE300A6F24B}"/>
               </a:ext>
             </a:extLst>
           </p:cNvPr>
@@ -29636,7 +30603,7 @@
           <p:cNvPr id="34" name="">
             <a:extLst xmlns:a="http://schemas.openxmlformats.org/drawingml/2006/main">
               <a:ext uri="{FF2B5EF4-FFF2-40B4-BE49-F238E27FC236}">
-                <a16:creationId xmlns:a16="http://schemas.microsoft.com/office/drawing/2014/main" id="{842B9AC9-7CDF-4F47-8F8D-A570934406E7}"/>
+                <a16:creationId xmlns:a16="http://schemas.microsoft.com/office/drawing/2014/main" id="{3417376D-AB3B-4685-B731-A436E66D3682}"/>
               </a:ext>
             </a:extLst>
           </p:cNvPr>
@@ -29671,7 +30638,7 @@
           <p:cNvPr id="35" name="">
             <a:extLst xmlns:a="http://schemas.openxmlformats.org/drawingml/2006/main">
               <a:ext uri="{FF2B5EF4-FFF2-40B4-BE49-F238E27FC236}">
-                <a16:creationId xmlns:a16="http://schemas.microsoft.com/office/drawing/2014/main" id="{6D75AE86-2CA3-4600-ADBF-5F258FD0AF45}"/>
+                <a16:creationId xmlns:a16="http://schemas.microsoft.com/office/drawing/2014/main" id="{14984B3B-4EA2-46AB-BD71-537180672D06}"/>
               </a:ext>
             </a:extLst>
           </p:cNvPr>
@@ -29746,7 +30713,7 @@
           <p:cNvPr id="36" name="">
             <a:extLst xmlns:a="http://schemas.openxmlformats.org/drawingml/2006/main">
               <a:ext uri="{FF2B5EF4-FFF2-40B4-BE49-F238E27FC236}">
-                <a16:creationId xmlns:a16="http://schemas.microsoft.com/office/drawing/2014/main" id="{90024478-A71F-4672-B010-85CEC60D448C}"/>
+                <a16:creationId xmlns:a16="http://schemas.microsoft.com/office/drawing/2014/main" id="{5EFA8710-B138-481C-9A78-D20B7C14AC5E}"/>
               </a:ext>
             </a:extLst>
           </p:cNvPr>
@@ -29781,7 +30748,7 @@
           <p:cNvPr id="37" name="">
             <a:extLst xmlns:a="http://schemas.openxmlformats.org/drawingml/2006/main">
               <a:ext uri="{FF2B5EF4-FFF2-40B4-BE49-F238E27FC236}">
-                <a16:creationId xmlns:a16="http://schemas.microsoft.com/office/drawing/2014/main" id="{A3D55BBD-0B25-44C5-A2CE-8DF8812615CE}"/>
+                <a16:creationId xmlns:a16="http://schemas.microsoft.com/office/drawing/2014/main" id="{F1CA227F-0C45-46E9-8006-28B4FCF7E1C2}"/>
               </a:ext>
             </a:extLst>
           </p:cNvPr>
@@ -29816,7 +30783,7 @@
           <p:cNvPr id="38" name="">
             <a:extLst xmlns:a="http://schemas.openxmlformats.org/drawingml/2006/main">
               <a:ext uri="{FF2B5EF4-FFF2-40B4-BE49-F238E27FC236}">
-                <a16:creationId xmlns:a16="http://schemas.microsoft.com/office/drawing/2014/main" id="{9633EF25-8476-493C-B503-8BEBCBD173E5}"/>
+                <a16:creationId xmlns:a16="http://schemas.microsoft.com/office/drawing/2014/main" id="{B8F72A00-BE38-4CE0-B151-385D505A686E}"/>
               </a:ext>
             </a:extLst>
           </p:cNvPr>
@@ -29874,7 +30841,7 @@
           <p:cNvPr id="39" name="">
             <a:extLst xmlns:a="http://schemas.openxmlformats.org/drawingml/2006/main">
               <a:ext uri="{FF2B5EF4-FFF2-40B4-BE49-F238E27FC236}">
-                <a16:creationId xmlns:a16="http://schemas.microsoft.com/office/drawing/2014/main" id="{A97C085C-14AF-4C94-A903-6801A148B354}"/>
+                <a16:creationId xmlns:a16="http://schemas.microsoft.com/office/drawing/2014/main" id="{ADCC14D6-9C78-4F18-B0A4-70117A188DF0}"/>
               </a:ext>
             </a:extLst>
           </p:cNvPr>
@@ -29909,7 +30876,7 @@
           <p:cNvPr id="40" name="">
             <a:extLst xmlns:a="http://schemas.openxmlformats.org/drawingml/2006/main">
               <a:ext uri="{FF2B5EF4-FFF2-40B4-BE49-F238E27FC236}">
-                <a16:creationId xmlns:a16="http://schemas.microsoft.com/office/drawing/2014/main" id="{03894404-BE2A-4267-AC2C-D08183061C52}"/>
+                <a16:creationId xmlns:a16="http://schemas.microsoft.com/office/drawing/2014/main" id="{44AC1C4F-9CC1-4319-B0F2-521F6A5E975C}"/>
               </a:ext>
             </a:extLst>
           </p:cNvPr>
@@ -29984,7 +30951,7 @@
           <p:cNvPr id="41" name="">
             <a:extLst xmlns:a="http://schemas.openxmlformats.org/drawingml/2006/main">
               <a:ext uri="{FF2B5EF4-FFF2-40B4-BE49-F238E27FC236}">
-                <a16:creationId xmlns:a16="http://schemas.microsoft.com/office/drawing/2014/main" id="{755A3143-A3D3-4A88-ABEF-C09ADE810903}"/>
+                <a16:creationId xmlns:a16="http://schemas.microsoft.com/office/drawing/2014/main" id="{1873CDC5-F9B1-4C2A-8B64-835157E53E22}"/>
               </a:ext>
             </a:extLst>
           </p:cNvPr>
@@ -30019,7 +30986,7 @@
           <p:cNvPr id="42" name="">
             <a:extLst xmlns:a="http://schemas.openxmlformats.org/drawingml/2006/main">
               <a:ext uri="{FF2B5EF4-FFF2-40B4-BE49-F238E27FC236}">
-                <a16:creationId xmlns:a16="http://schemas.microsoft.com/office/drawing/2014/main" id="{A87A8A2E-EF53-45CD-A1F4-08EDD28EA914}"/>
+                <a16:creationId xmlns:a16="http://schemas.microsoft.com/office/drawing/2014/main" id="{62CC4348-C1DF-401C-B9D2-C8CF0A01A6A3}"/>
               </a:ext>
             </a:extLst>
           </p:cNvPr>
@@ -30094,7 +31061,7 @@
           <p:cNvPr id="43" name="">
             <a:extLst xmlns:a="http://schemas.openxmlformats.org/drawingml/2006/main">
               <a:ext uri="{FF2B5EF4-FFF2-40B4-BE49-F238E27FC236}">
-                <a16:creationId xmlns:a16="http://schemas.microsoft.com/office/drawing/2014/main" id="{FA350A11-1ED7-42E5-93F8-AE21E0CD7EEF}"/>
+                <a16:creationId xmlns:a16="http://schemas.microsoft.com/office/drawing/2014/main" id="{4AAADB8B-FC42-4127-BB5E-8D50F9FEEAE9}"/>
               </a:ext>
             </a:extLst>
           </p:cNvPr>
@@ -30129,7 +31096,7 @@
           <p:cNvPr id="44" name="">
             <a:extLst xmlns:a="http://schemas.openxmlformats.org/drawingml/2006/main">
               <a:ext uri="{FF2B5EF4-FFF2-40B4-BE49-F238E27FC236}">
-                <a16:creationId xmlns:a16="http://schemas.microsoft.com/office/drawing/2014/main" id="{73B7DE29-1E71-4B35-8307-70391ADFD7AA}"/>
+                <a16:creationId xmlns:a16="http://schemas.microsoft.com/office/drawing/2014/main" id="{003E4699-AF91-4B4F-BFE1-0F885A2DE260}"/>
               </a:ext>
             </a:extLst>
           </p:cNvPr>
@@ -30164,7 +31131,7 @@
           <p:cNvPr id="45" name="">
             <a:extLst xmlns:a="http://schemas.openxmlformats.org/drawingml/2006/main">
               <a:ext uri="{FF2B5EF4-FFF2-40B4-BE49-F238E27FC236}">
-                <a16:creationId xmlns:a16="http://schemas.microsoft.com/office/drawing/2014/main" id="{0420DA8F-25C5-4B34-A9D7-8BC15B6500EA}"/>
+                <a16:creationId xmlns:a16="http://schemas.microsoft.com/office/drawing/2014/main" id="{7CBB6AD0-F565-4295-8C78-75D4D6191433}"/>
               </a:ext>
             </a:extLst>
           </p:cNvPr>
@@ -30222,7 +31189,7 @@
           <p:cNvPr id="46" name="">
             <a:extLst xmlns:a="http://schemas.openxmlformats.org/drawingml/2006/main">
               <a:ext uri="{FF2B5EF4-FFF2-40B4-BE49-F238E27FC236}">
-                <a16:creationId xmlns:a16="http://schemas.microsoft.com/office/drawing/2014/main" id="{CB8C13FE-F836-4E8E-8335-78FC7786BF28}"/>
+                <a16:creationId xmlns:a16="http://schemas.microsoft.com/office/drawing/2014/main" id="{15961C47-5431-496B-B34A-F9BD3DFC53C4}"/>
               </a:ext>
             </a:extLst>
           </p:cNvPr>
@@ -30257,7 +31224,7 @@
           <p:cNvPr id="47" name="">
             <a:extLst xmlns:a="http://schemas.openxmlformats.org/drawingml/2006/main">
               <a:ext uri="{FF2B5EF4-FFF2-40B4-BE49-F238E27FC236}">
-                <a16:creationId xmlns:a16="http://schemas.microsoft.com/office/drawing/2014/main" id="{35D01210-1DFB-4840-A0CB-C377FBF407BE}"/>
+                <a16:creationId xmlns:a16="http://schemas.microsoft.com/office/drawing/2014/main" id="{E0E73BDA-8934-4CB0-95BD-610A5BEEF0AA}"/>
               </a:ext>
             </a:extLst>
           </p:cNvPr>
@@ -30315,7 +31282,7 @@
           <p:cNvPr id="48" name="">
             <a:extLst xmlns:a="http://schemas.openxmlformats.org/drawingml/2006/main">
               <a:ext uri="{FF2B5EF4-FFF2-40B4-BE49-F238E27FC236}">
-                <a16:creationId xmlns:a16="http://schemas.microsoft.com/office/drawing/2014/main" id="{942B4A0F-4B1D-4A5C-90F2-6826EC5D67E7}"/>
+                <a16:creationId xmlns:a16="http://schemas.microsoft.com/office/drawing/2014/main" id="{5E2D19FA-9DA6-4D00-BB72-2A836C0C43F8}"/>
               </a:ext>
             </a:extLst>
           </p:cNvPr>
@@ -30350,7 +31317,7 @@
           <p:cNvPr id="49" name="">
             <a:extLst xmlns:a="http://schemas.openxmlformats.org/drawingml/2006/main">
               <a:ext uri="{FF2B5EF4-FFF2-40B4-BE49-F238E27FC236}">
-                <a16:creationId xmlns:a16="http://schemas.microsoft.com/office/drawing/2014/main" id="{30E4A6B7-4738-484F-992F-08825F9F08B3}"/>
+                <a16:creationId xmlns:a16="http://schemas.microsoft.com/office/drawing/2014/main" id="{591B8768-28E7-4599-8208-6E65EE69B27E}"/>
               </a:ext>
             </a:extLst>
           </p:cNvPr>
@@ -30408,7 +31375,7 @@
           <p:cNvPr id="50" name="">
             <a:extLst xmlns:a="http://schemas.openxmlformats.org/drawingml/2006/main">
               <a:ext uri="{FF2B5EF4-FFF2-40B4-BE49-F238E27FC236}">
-                <a16:creationId xmlns:a16="http://schemas.microsoft.com/office/drawing/2014/main" id="{F6AB818B-E848-417D-8EE6-C66D3A3DA2DA}"/>
+                <a16:creationId xmlns:a16="http://schemas.microsoft.com/office/drawing/2014/main" id="{12785C58-F5B9-467C-99E3-A8758E8E25A8}"/>
               </a:ext>
             </a:extLst>
           </p:cNvPr>
@@ -30441,7 +31408,7 @@
           <p:cNvPr id="51" name="">
             <a:extLst xmlns:a="http://schemas.openxmlformats.org/drawingml/2006/main">
               <a:ext uri="{FF2B5EF4-FFF2-40B4-BE49-F238E27FC236}">
-                <a16:creationId xmlns:a16="http://schemas.microsoft.com/office/drawing/2014/main" id="{122DD1E8-A79D-434E-974E-3B68D03E4243}"/>
+                <a16:creationId xmlns:a16="http://schemas.microsoft.com/office/drawing/2014/main" id="{412EA2E3-01FB-4230-87CA-3BD4E3B81162}"/>
               </a:ext>
             </a:extLst>
           </p:cNvPr>
@@ -30499,7 +31466,7 @@
           <p:cNvPr id="52" name="">
             <a:extLst xmlns:a="http://schemas.openxmlformats.org/drawingml/2006/main">
               <a:ext uri="{FF2B5EF4-FFF2-40B4-BE49-F238E27FC236}">
-                <a16:creationId xmlns:a16="http://schemas.microsoft.com/office/drawing/2014/main" id="{CB6A4165-A7EB-4BF3-807D-7A5D82C9A483}"/>
+                <a16:creationId xmlns:a16="http://schemas.microsoft.com/office/drawing/2014/main" id="{BCACA1D1-9C0F-4D54-B217-889E4E4C376E}"/>
               </a:ext>
             </a:extLst>
           </p:cNvPr>
@@ -30532,7 +31499,7 @@
           <p:cNvPr id="53" name="">
             <a:extLst xmlns:a="http://schemas.openxmlformats.org/drawingml/2006/main">
               <a:ext uri="{FF2B5EF4-FFF2-40B4-BE49-F238E27FC236}">
-                <a16:creationId xmlns:a16="http://schemas.microsoft.com/office/drawing/2014/main" id="{6D8E5CAA-165F-4B97-B652-D0EE34E0EE1F}"/>
+                <a16:creationId xmlns:a16="http://schemas.microsoft.com/office/drawing/2014/main" id="{7FD8F7AE-9571-48C5-A94B-1B4CE3EE9C65}"/>
               </a:ext>
             </a:extLst>
           </p:cNvPr>
@@ -30590,7 +31557,7 @@
           <p:cNvPr id="54" name="">
             <a:extLst xmlns:a="http://schemas.openxmlformats.org/drawingml/2006/main">
               <a:ext uri="{FF2B5EF4-FFF2-40B4-BE49-F238E27FC236}">
-                <a16:creationId xmlns:a16="http://schemas.microsoft.com/office/drawing/2014/main" id="{C8999737-9F33-433F-934A-62F2E788B675}"/>
+                <a16:creationId xmlns:a16="http://schemas.microsoft.com/office/drawing/2014/main" id="{766AA6E8-0ED6-4844-B683-A055EB9C33DA}"/>
               </a:ext>
             </a:extLst>
           </p:cNvPr>
@@ -30623,7 +31590,7 @@
           <p:cNvPr id="55" name="">
             <a:extLst xmlns:a="http://schemas.openxmlformats.org/drawingml/2006/main">
               <a:ext uri="{FF2B5EF4-FFF2-40B4-BE49-F238E27FC236}">
-                <a16:creationId xmlns:a16="http://schemas.microsoft.com/office/drawing/2014/main" id="{BA900B2F-316A-44CD-8A73-82D7D09BE1D0}"/>
+                <a16:creationId xmlns:a16="http://schemas.microsoft.com/office/drawing/2014/main" id="{8AEA6E77-B9DB-4EDD-BC98-CF2488A3A155}"/>
               </a:ext>
             </a:extLst>
           </p:cNvPr>
@@ -30681,7 +31648,7 @@
           <p:cNvPr id="56" name="">
             <a:extLst xmlns:a="http://schemas.openxmlformats.org/drawingml/2006/main">
               <a:ext uri="{FF2B5EF4-FFF2-40B4-BE49-F238E27FC236}">
-                <a16:creationId xmlns:a16="http://schemas.microsoft.com/office/drawing/2014/main" id="{C9D6AA0B-1A0B-47A6-8046-3BFA7F830ED2}"/>
+                <a16:creationId xmlns:a16="http://schemas.microsoft.com/office/drawing/2014/main" id="{660C15F4-726D-44AD-ACDE-A830A96CA800}"/>
               </a:ext>
             </a:extLst>
           </p:cNvPr>
@@ -30714,7 +31681,7 @@
           <p:cNvPr id="57" name="">
             <a:extLst xmlns:a="http://schemas.openxmlformats.org/drawingml/2006/main">
               <a:ext uri="{FF2B5EF4-FFF2-40B4-BE49-F238E27FC236}">
-                <a16:creationId xmlns:a16="http://schemas.microsoft.com/office/drawing/2014/main" id="{86B84DD5-5277-49AE-98D4-FE4BD5B15FFF}"/>
+                <a16:creationId xmlns:a16="http://schemas.microsoft.com/office/drawing/2014/main" id="{D027F500-D035-4E4C-BA91-163776D673E6}"/>
               </a:ext>
             </a:extLst>
           </p:cNvPr>
@@ -30747,7 +31714,7 @@
           <p:cNvPr id="58" name="">
             <a:extLst xmlns:a="http://schemas.openxmlformats.org/drawingml/2006/main">
               <a:ext uri="{FF2B5EF4-FFF2-40B4-BE49-F238E27FC236}">
-                <a16:creationId xmlns:a16="http://schemas.microsoft.com/office/drawing/2014/main" id="{3E5C90BE-709C-47C3-8A73-7B775D418C31}"/>
+                <a16:creationId xmlns:a16="http://schemas.microsoft.com/office/drawing/2014/main" id="{3D7C027E-CF72-449B-822C-A2916590EA7C}"/>
               </a:ext>
             </a:extLst>
           </p:cNvPr>
@@ -30822,7 +31789,7 @@
           <p:cNvPr id="59" name="">
             <a:extLst xmlns:a="http://schemas.openxmlformats.org/drawingml/2006/main">
               <a:ext uri="{FF2B5EF4-FFF2-40B4-BE49-F238E27FC236}">
-                <a16:creationId xmlns:a16="http://schemas.microsoft.com/office/drawing/2014/main" id="{AB13C597-5D3D-4CBF-B906-87FC1C936635}"/>
+                <a16:creationId xmlns:a16="http://schemas.microsoft.com/office/drawing/2014/main" id="{488982DF-9BB9-4984-828B-47F19948EB49}"/>
               </a:ext>
             </a:extLst>
           </p:cNvPr>
@@ -30878,7 +31845,7 @@
     </p:spTree>
     <p:extLst>
       <p:ext uri="{BB962C8B-B14F-4D97-AF65-F5344CB8AC3E}">
-        <p14:creationId xmlns:p14="http://schemas.microsoft.com/office/powerpoint/2010/main" val="2038650734"/>
+        <p14:creationId xmlns:p14="http://schemas.microsoft.com/office/powerpoint/2010/main" val="39656923"/>
       </p:ext>
     </p:extLst>
   </p:cSld>

--- a/output/slides/ooad-checkpoint-draft/OOAD_Checkpoint_ZH_Draft.pptx
+++ b/output/slides/ooad-checkpoint-draft/OOAD_Checkpoint_ZH_Draft.pptx
@@ -605,7 +605,7 @@
 </file>
 
 <file path=ppt/notesSlides/notesSlide11.xml><?xml version="1.0" encoding="utf-8"?>
-<p:notes xmlns:p="http://schemas.openxmlformats.org/presentationml/2006/main">
+<p:notes xmlns:a="http://schemas.openxmlformats.org/drawingml/2006/main" xmlns:p="http://schemas.openxmlformats.org/presentationml/2006/main">
   <p:cSld>
     <p:spTree>
       <p:nvGrpSpPr>
@@ -614,13 +614,13 @@
         <p:nvPr/>
       </p:nvGrpSpPr>
       <p:grpSpPr>
-        <a:xfrm xmlns:a="http://schemas.openxmlformats.org/drawingml/2006/main"/>
+        <a:xfrm/>
       </p:grpSpPr>
       <p:sp>
         <p:nvSpPr>
           <p:cNvPr id="2" name="Slide Image Placeholder 1"/>
           <p:cNvSpPr>
-            <a:spLocks xmlns:a="http://schemas.openxmlformats.org/drawingml/2006/main" noGrp="1"/>
+            <a:spLocks noGrp="1"/>
           </p:cNvSpPr>
           <p:nvPr>
             <p:ph type="sldImg" idx="0"/>
@@ -632,7 +632,7 @@
         <p:nvSpPr>
           <p:cNvPr id="3" name="Notes Placeholder 2"/>
           <p:cNvSpPr>
-            <a:spLocks xmlns:a="http://schemas.openxmlformats.org/drawingml/2006/main" noGrp="1"/>
+            <a:spLocks noGrp="1"/>
           </p:cNvSpPr>
           <p:nvPr>
             <p:ph type="body" idx="1"/>
@@ -640,11 +640,11 @@
         </p:nvSpPr>
         <p:spPr/>
         <p:txBody>
-          <a:bodyPr xmlns:a="http://schemas.openxmlformats.org/drawingml/2006/main"/>
-          <a:lstStyle xmlns:a="http://schemas.openxmlformats.org/drawingml/2006/main"/>
-          <a:p xmlns:a="http://schemas.openxmlformats.org/drawingml/2006/main">
-            <a:r>
-              <a:t>說明 Strategy Pattern 不只是理論，而是用在警示規則與回測策略，解決未來擴充不同規則與策略的問題。</a:t>
+          <a:bodyPr/>
+          <a:lstStyle/>
+          <a:p>
+            <a:r>
+              <a:t>說明 Strategy Pattern 在回測領域的角色。BacktestEngine 不知道每種策略的演算法細節，只透過 TradingStrategy 共同介面取得 warmup period 與交易訊號，因此 MovingAverageCross、RSI 或突破策略都能套用同一個回測流程。</a:t>
             </a:r>
           </a:p>
         </p:txBody>
@@ -653,7 +653,7 @@
         <p:nvSpPr>
           <p:cNvPr id="4" name="Slide Number Placeholder 3"/>
           <p:cNvSpPr>
-            <a:spLocks xmlns:a="http://schemas.openxmlformats.org/drawingml/2006/main" noGrp="1"/>
+            <a:spLocks noGrp="1"/>
           </p:cNvSpPr>
           <p:nvPr>
             <p:ph type="sldNum" idx="5"/>
@@ -661,21 +661,21 @@
         </p:nvSpPr>
         <p:spPr/>
         <p:txBody>
-          <a:bodyPr xmlns:a="http://schemas.openxmlformats.org/drawingml/2006/main"/>
-          <a:lstStyle xmlns:a="http://schemas.openxmlformats.org/drawingml/2006/main"/>
-          <a:p xmlns:a="http://schemas.openxmlformats.org/drawingml/2006/main"/>
+          <a:bodyPr/>
+          <a:lstStyle/>
+          <a:p/>
         </p:txBody>
       </p:sp>
     </p:spTree>
   </p:cSld>
   <p:clrMapOvr>
-    <a:masterClrMapping xmlns:a="http://schemas.openxmlformats.org/drawingml/2006/main"/>
+    <a:masterClrMapping/>
   </p:clrMapOvr>
 </p:notes>
 </file>
 
 <file path=ppt/notesSlides/notesSlide12.xml><?xml version="1.0" encoding="utf-8"?>
-<p:notes xmlns:p="http://schemas.openxmlformats.org/presentationml/2006/main">
+<p:notes xmlns:a="http://schemas.openxmlformats.org/drawingml/2006/main" xmlns:p="http://schemas.openxmlformats.org/presentationml/2006/main">
   <p:cSld>
     <p:spTree>
       <p:nvGrpSpPr>
@@ -684,13 +684,13 @@
         <p:nvPr/>
       </p:nvGrpSpPr>
       <p:grpSpPr>
-        <a:xfrm xmlns:a="http://schemas.openxmlformats.org/drawingml/2006/main"/>
+        <a:xfrm/>
       </p:grpSpPr>
       <p:sp>
         <p:nvSpPr>
           <p:cNvPr id="2" name="Slide Image Placeholder 1"/>
           <p:cNvSpPr>
-            <a:spLocks xmlns:a="http://schemas.openxmlformats.org/drawingml/2006/main" noGrp="1"/>
+            <a:spLocks noGrp="1"/>
           </p:cNvSpPr>
           <p:nvPr>
             <p:ph type="sldImg" idx="0"/>
@@ -702,7 +702,7 @@
         <p:nvSpPr>
           <p:cNvPr id="3" name="Notes Placeholder 2"/>
           <p:cNvSpPr>
-            <a:spLocks xmlns:a="http://schemas.openxmlformats.org/drawingml/2006/main" noGrp="1"/>
+            <a:spLocks noGrp="1"/>
           </p:cNvSpPr>
           <p:nvPr>
             <p:ph type="body" idx="1"/>
@@ -710,11 +710,11 @@
         </p:nvSpPr>
         <p:spPr/>
         <p:txBody>
-          <a:bodyPr xmlns:a="http://schemas.openxmlformats.org/drawingml/2006/main"/>
-          <a:lstStyle xmlns:a="http://schemas.openxmlformats.org/drawingml/2006/main"/>
-          <a:p xmlns:a="http://schemas.openxmlformats.org/drawingml/2006/main">
-            <a:r>
-              <a:t>說明 Factory Pattern 負責把資料庫儲存的設定轉成正確的 AlertRule 物件，讓 API 不需要知道每個具體類別。</a:t>
+          <a:bodyPr/>
+          <a:lstStyle/>
+          <a:p>
+            <a:r>
+              <a:t>說明 Template Method Pattern 與 Strategy 的差異。AlertRule 的 buildNotification 固定通知產生流程，但會呼叫 getConditionLabel，讓 PriceAboveAlertRule、PriceBelowAlertRule 等子類別補上不同條件文字與觸發判斷。</a:t>
             </a:r>
           </a:p>
         </p:txBody>
@@ -723,7 +723,7 @@
         <p:nvSpPr>
           <p:cNvPr id="4" name="Slide Number Placeholder 3"/>
           <p:cNvSpPr>
-            <a:spLocks xmlns:a="http://schemas.openxmlformats.org/drawingml/2006/main" noGrp="1"/>
+            <a:spLocks noGrp="1"/>
           </p:cNvSpPr>
           <p:nvPr>
             <p:ph type="sldNum" idx="5"/>
@@ -731,15 +731,15 @@
         </p:nvSpPr>
         <p:spPr/>
         <p:txBody>
-          <a:bodyPr xmlns:a="http://schemas.openxmlformats.org/drawingml/2006/main"/>
-          <a:lstStyle xmlns:a="http://schemas.openxmlformats.org/drawingml/2006/main"/>
-          <a:p xmlns:a="http://schemas.openxmlformats.org/drawingml/2006/main"/>
+          <a:bodyPr/>
+          <a:lstStyle/>
+          <a:p/>
         </p:txBody>
       </p:sp>
     </p:spTree>
   </p:cSld>
   <p:clrMapOvr>
-    <a:masterClrMapping xmlns:a="http://schemas.openxmlformats.org/drawingml/2006/main"/>
+    <a:masterClrMapping/>
   </p:clrMapOvr>
 </p:notes>
 </file>
@@ -7205,11 +7205,11 @@
 </file>
 
 <file path=ppt/slides/slide11.xml><?xml version="1.0" encoding="utf-8"?>
-<p:sld xmlns:p="http://schemas.openxmlformats.org/presentationml/2006/main">
+<p:sld xmlns:a="http://schemas.openxmlformats.org/drawingml/2006/main" xmlns:ns2="http://schemas.microsoft.com/office/drawing/2014/main" xmlns:ns3="http://schemas.microsoft.com/office/powerpoint/2010/main" xmlns:p="http://schemas.openxmlformats.org/presentationml/2006/main">
   <p:cSld>
     <p:bg>
       <p:bgPr>
-        <a:solidFill xmlns:a="http://schemas.openxmlformats.org/drawingml/2006/main">
+        <a:solidFill>
           <a:srgbClr val="F5F1E8"/>
         </a:solidFill>
       </p:bgPr>
@@ -7221,34 +7221,34 @@
         <p:nvPr/>
       </p:nvGrpSpPr>
       <p:grpSpPr>
-        <a:xfrm xmlns:a="http://schemas.openxmlformats.org/drawingml/2006/main"/>
+        <a:xfrm/>
       </p:grpSpPr>
       <p:sp>
         <p:nvSpPr>
           <p:cNvPr id="1" name="">
-            <a:extLst xmlns:a="http://schemas.openxmlformats.org/drawingml/2006/main">
-              <a:ext uri="{FF2B5EF4-FFF2-40B4-BE49-F238E27FC236}">
-                <a16:creationId xmlns:a16="http://schemas.microsoft.com/office/drawing/2014/main" id="{ACF3C1D5-F998-4845-9597-D06CE45C4D38}"/>
-              </a:ext>
-            </a:extLst>
-          </p:cNvPr>
-          <p:cNvSpPr>
-            <a:spLocks xmlns:a="http://schemas.openxmlformats.org/drawingml/2006/main" noGrp="1"/>
-          </p:cNvSpPr>
-          <p:nvPr/>
-        </p:nvSpPr>
-        <p:spPr>
-          <a:xfrm xmlns:a="http://schemas.openxmlformats.org/drawingml/2006/main" rot="0">
+            <a:extLst>
+              <a:ext uri="{FF2B5EF4-FFF2-40B4-BE49-F238E27FC236}">
+                <ns2:creationId id="{ACF3C1D5-F998-4845-9597-D06CE45C4D38}"/>
+              </a:ext>
+            </a:extLst>
+          </p:cNvPr>
+          <p:cNvSpPr>
+            <a:spLocks noGrp="1"/>
+          </p:cNvSpPr>
+          <p:nvPr/>
+        </p:nvSpPr>
+        <p:spPr>
+          <a:xfrm rot="0">
             <a:off x="9620250" y="-857250"/>
             <a:ext cx="3429000" cy="3429000"/>
           </a:xfrm>
-          <a:prstGeom xmlns:a="http://schemas.openxmlformats.org/drawingml/2006/main" prst="ellipse">
-            <a:avLst/>
-          </a:prstGeom>
-          <a:solidFill xmlns:a="http://schemas.openxmlformats.org/drawingml/2006/main">
+          <a:prstGeom prst="ellipse">
+            <a:avLst/>
+          </a:prstGeom>
+          <a:solidFill>
             <a:srgbClr val="DFF5EC"/>
           </a:solidFill>
-          <a:ln xmlns:a="http://schemas.openxmlformats.org/drawingml/2006/main" w="0">
+          <a:ln w="0">
             <a:solidFill>
               <a:srgbClr val="000000">
                 <a:alpha val="0"/>
@@ -7261,29 +7261,29 @@
       <p:sp>
         <p:nvSpPr>
           <p:cNvPr id="2" name="">
-            <a:extLst xmlns:a="http://schemas.openxmlformats.org/drawingml/2006/main">
-              <a:ext uri="{FF2B5EF4-FFF2-40B4-BE49-F238E27FC236}">
-                <a16:creationId xmlns:a16="http://schemas.microsoft.com/office/drawing/2014/main" id="{B7405F5E-6072-4ECC-B7C5-A34D9A1B908E}"/>
-              </a:ext>
-            </a:extLst>
-          </p:cNvPr>
-          <p:cNvSpPr>
-            <a:spLocks xmlns:a="http://schemas.openxmlformats.org/drawingml/2006/main" noGrp="1"/>
-          </p:cNvSpPr>
-          <p:nvPr/>
-        </p:nvSpPr>
-        <p:spPr>
-          <a:xfrm xmlns:a="http://schemas.openxmlformats.org/drawingml/2006/main" rot="0">
+            <a:extLst>
+              <a:ext uri="{FF2B5EF4-FFF2-40B4-BE49-F238E27FC236}">
+                <ns2:creationId id="{B7405F5E-6072-4ECC-B7C5-A34D9A1B908E}"/>
+              </a:ext>
+            </a:extLst>
+          </p:cNvPr>
+          <p:cNvSpPr>
+            <a:spLocks noGrp="1"/>
+          </p:cNvSpPr>
+          <p:nvPr/>
+        </p:nvSpPr>
+        <p:spPr>
+          <a:xfrm rot="0">
             <a:off x="-857250" y="5334000"/>
             <a:ext cx="2286000" cy="2286000"/>
           </a:xfrm>
-          <a:prstGeom xmlns:a="http://schemas.openxmlformats.org/drawingml/2006/main" prst="ellipse">
-            <a:avLst/>
-          </a:prstGeom>
-          <a:solidFill xmlns:a="http://schemas.openxmlformats.org/drawingml/2006/main">
+          <a:prstGeom prst="ellipse">
+            <a:avLst/>
+          </a:prstGeom>
+          <a:solidFill>
             <a:srgbClr val="FAEFD9"/>
           </a:solidFill>
-          <a:ln xmlns:a="http://schemas.openxmlformats.org/drawingml/2006/main" w="0">
+          <a:ln w="0">
             <a:solidFill>
               <a:srgbClr val="000000">
                 <a:alpha val="0"/>
@@ -7296,31 +7296,31 @@
       <p:sp>
         <p:nvSpPr>
           <p:cNvPr id="3" name="">
-            <a:extLst xmlns:a="http://schemas.openxmlformats.org/drawingml/2006/main">
-              <a:ext uri="{FF2B5EF4-FFF2-40B4-BE49-F238E27FC236}">
-                <a16:creationId xmlns:a16="http://schemas.microsoft.com/office/drawing/2014/main" id="{9E762F36-AA0D-4544-9968-8AD0964AF411}"/>
-              </a:ext>
-            </a:extLst>
-          </p:cNvPr>
-          <p:cNvSpPr>
-            <a:spLocks xmlns:a="http://schemas.openxmlformats.org/drawingml/2006/main" noGrp="1"/>
-          </p:cNvSpPr>
-          <p:nvPr/>
-        </p:nvSpPr>
-        <p:spPr>
-          <a:xfrm xmlns:a="http://schemas.openxmlformats.org/drawingml/2006/main" rot="0">
+            <a:extLst>
+              <a:ext uri="{FF2B5EF4-FFF2-40B4-BE49-F238E27FC236}">
+                <ns2:creationId id="{9E762F36-AA0D-4544-9968-8AD0964AF411}"/>
+              </a:ext>
+            </a:extLst>
+          </p:cNvPr>
+          <p:cNvSpPr>
+            <a:spLocks noGrp="1"/>
+          </p:cNvSpPr>
+          <p:nvPr/>
+        </p:nvSpPr>
+        <p:spPr>
+          <a:xfrm rot="0">
             <a:off x="609600" y="266700"/>
             <a:ext cx="3429000" cy="171450"/>
           </a:xfrm>
-          <a:prstGeom xmlns:a="http://schemas.openxmlformats.org/drawingml/2006/main" prst="rect">
-            <a:avLst/>
-          </a:prstGeom>
-          <a:solidFill xmlns:a="http://schemas.openxmlformats.org/drawingml/2006/main">
+          <a:prstGeom prst="rect">
+            <a:avLst/>
+          </a:prstGeom>
+          <a:solidFill>
             <a:srgbClr val="000000">
               <a:alpha val="0"/>
             </a:srgbClr>
           </a:solidFill>
-          <a:ln xmlns:a="http://schemas.openxmlformats.org/drawingml/2006/main" w="0">
+          <a:ln w="0">
             <a:solidFill>
               <a:srgbClr val="000000">
                 <a:alpha val="0"/>
@@ -7330,9 +7330,9 @@
           </a:ln>
         </p:spPr>
         <p:txBody>
-          <a:bodyPr xmlns:a="http://schemas.openxmlformats.org/drawingml/2006/main" lIns="0" tIns="0" rIns="0" bIns="0" anchor="t"/>
-          <a:lstStyle xmlns:a="http://schemas.openxmlformats.org/drawingml/2006/main"/>
-          <a:p xmlns:a="http://schemas.openxmlformats.org/drawingml/2006/main">
+          <a:bodyPr lIns="0" tIns="0" rIns="0" bIns="0" anchor="t"/>
+          <a:lstStyle/>
+          <a:p>
             <a:pPr algn="l">
               <a:defRPr sz="825" b="1">
                 <a:solidFill>
@@ -7354,31 +7354,31 @@
       <p:sp>
         <p:nvSpPr>
           <p:cNvPr id="4" name="">
-            <a:extLst xmlns:a="http://schemas.openxmlformats.org/drawingml/2006/main">
-              <a:ext uri="{FF2B5EF4-FFF2-40B4-BE49-F238E27FC236}">
-                <a16:creationId xmlns:a16="http://schemas.microsoft.com/office/drawing/2014/main" id="{10C59D8C-7EB8-4A50-9299-45255B9479F3}"/>
-              </a:ext>
-            </a:extLst>
-          </p:cNvPr>
-          <p:cNvSpPr>
-            <a:spLocks xmlns:a="http://schemas.openxmlformats.org/drawingml/2006/main" noGrp="1"/>
-          </p:cNvSpPr>
-          <p:nvPr/>
-        </p:nvSpPr>
-        <p:spPr>
-          <a:xfrm xmlns:a="http://schemas.openxmlformats.org/drawingml/2006/main" rot="0">
+            <a:extLst>
+              <a:ext uri="{FF2B5EF4-FFF2-40B4-BE49-F238E27FC236}">
+                <ns2:creationId id="{10C59D8C-7EB8-4A50-9299-45255B9479F3}"/>
+              </a:ext>
+            </a:extLst>
+          </p:cNvPr>
+          <p:cNvSpPr>
+            <a:spLocks noGrp="1"/>
+          </p:cNvSpPr>
+          <p:nvPr/>
+        </p:nvSpPr>
+        <p:spPr>
+          <a:xfrm rot="0">
             <a:off x="11163300" y="247650"/>
             <a:ext cx="419100" cy="190500"/>
           </a:xfrm>
-          <a:prstGeom xmlns:a="http://schemas.openxmlformats.org/drawingml/2006/main" prst="rect">
-            <a:avLst/>
-          </a:prstGeom>
-          <a:solidFill xmlns:a="http://schemas.openxmlformats.org/drawingml/2006/main">
+          <a:prstGeom prst="rect">
+            <a:avLst/>
+          </a:prstGeom>
+          <a:solidFill>
             <a:srgbClr val="000000">
               <a:alpha val="0"/>
             </a:srgbClr>
           </a:solidFill>
-          <a:ln xmlns:a="http://schemas.openxmlformats.org/drawingml/2006/main" w="0">
+          <a:ln w="0">
             <a:solidFill>
               <a:srgbClr val="000000">
                 <a:alpha val="0"/>
@@ -7388,9 +7388,9 @@
           </a:ln>
         </p:spPr>
         <p:txBody>
-          <a:bodyPr xmlns:a="http://schemas.openxmlformats.org/drawingml/2006/main" lIns="0" tIns="0" rIns="0" bIns="0" anchor="t"/>
-          <a:lstStyle xmlns:a="http://schemas.openxmlformats.org/drawingml/2006/main"/>
-          <a:p xmlns:a="http://schemas.openxmlformats.org/drawingml/2006/main">
+          <a:bodyPr lIns="0" tIns="0" rIns="0" bIns="0" anchor="t"/>
+          <a:lstStyle/>
+          <a:p>
             <a:pPr algn="r">
               <a:defRPr sz="900" b="1">
                 <a:solidFill>
@@ -7412,29 +7412,29 @@
       <p:sp>
         <p:nvSpPr>
           <p:cNvPr id="5" name="">
-            <a:extLst xmlns:a="http://schemas.openxmlformats.org/drawingml/2006/main">
-              <a:ext uri="{FF2B5EF4-FFF2-40B4-BE49-F238E27FC236}">
-                <a16:creationId xmlns:a16="http://schemas.microsoft.com/office/drawing/2014/main" id="{CBE5ADFC-9BAE-4874-AFCE-2750D64B1E91}"/>
-              </a:ext>
-            </a:extLst>
-          </p:cNvPr>
-          <p:cNvSpPr>
-            <a:spLocks xmlns:a="http://schemas.openxmlformats.org/drawingml/2006/main" noGrp="1"/>
-          </p:cNvSpPr>
-          <p:nvPr/>
-        </p:nvSpPr>
-        <p:spPr>
-          <a:xfrm xmlns:a="http://schemas.openxmlformats.org/drawingml/2006/main" rot="0">
+            <a:extLst>
+              <a:ext uri="{FF2B5EF4-FFF2-40B4-BE49-F238E27FC236}">
+                <ns2:creationId id="{CBE5ADFC-9BAE-4874-AFCE-2750D64B1E91}"/>
+              </a:ext>
+            </a:extLst>
+          </p:cNvPr>
+          <p:cNvSpPr>
+            <a:spLocks noGrp="1"/>
+          </p:cNvSpPr>
+          <p:nvPr/>
+        </p:nvSpPr>
+        <p:spPr>
+          <a:xfrm rot="0">
             <a:off x="609600" y="514350"/>
             <a:ext cx="10972800" cy="19050"/>
           </a:xfrm>
-          <a:prstGeom xmlns:a="http://schemas.openxmlformats.org/drawingml/2006/main" prst="rect">
-            <a:avLst/>
-          </a:prstGeom>
-          <a:solidFill xmlns:a="http://schemas.openxmlformats.org/drawingml/2006/main">
+          <a:prstGeom prst="rect">
+            <a:avLst/>
+          </a:prstGeom>
+          <a:solidFill>
             <a:srgbClr val="23313B"/>
           </a:solidFill>
-          <a:ln xmlns:a="http://schemas.openxmlformats.org/drawingml/2006/main" w="0">
+          <a:ln w="0">
             <a:solidFill>
               <a:srgbClr val="000000">
                 <a:alpha val="0"/>
@@ -7447,31 +7447,31 @@
       <p:sp>
         <p:nvSpPr>
           <p:cNvPr id="6" name="">
-            <a:extLst xmlns:a="http://schemas.openxmlformats.org/drawingml/2006/main">
-              <a:ext uri="{FF2B5EF4-FFF2-40B4-BE49-F238E27FC236}">
-                <a16:creationId xmlns:a16="http://schemas.microsoft.com/office/drawing/2014/main" id="{F33EF3D8-62CB-4B77-A3F7-D5E2EF5F230D}"/>
-              </a:ext>
-            </a:extLst>
-          </p:cNvPr>
-          <p:cNvSpPr>
-            <a:spLocks xmlns:a="http://schemas.openxmlformats.org/drawingml/2006/main" noGrp="1"/>
-          </p:cNvSpPr>
-          <p:nvPr/>
-        </p:nvSpPr>
-        <p:spPr>
-          <a:xfrm xmlns:a="http://schemas.openxmlformats.org/drawingml/2006/main" rot="0">
+            <a:extLst>
+              <a:ext uri="{FF2B5EF4-FFF2-40B4-BE49-F238E27FC236}">
+                <ns2:creationId id="{F33EF3D8-62CB-4B77-A3F7-D5E2EF5F230D}"/>
+              </a:ext>
+            </a:extLst>
+          </p:cNvPr>
+          <p:cNvSpPr>
+            <a:spLocks noGrp="1"/>
+          </p:cNvSpPr>
+          <p:nvPr/>
+        </p:nvSpPr>
+        <p:spPr>
+          <a:xfrm rot="0">
             <a:off x="609600" y="781050"/>
             <a:ext cx="8858250" cy="514350"/>
           </a:xfrm>
-          <a:prstGeom xmlns:a="http://schemas.openxmlformats.org/drawingml/2006/main" prst="rect">
-            <a:avLst/>
-          </a:prstGeom>
-          <a:solidFill xmlns:a="http://schemas.openxmlformats.org/drawingml/2006/main">
+          <a:prstGeom prst="rect">
+            <a:avLst/>
+          </a:prstGeom>
+          <a:solidFill>
             <a:srgbClr val="000000">
               <a:alpha val="0"/>
             </a:srgbClr>
           </a:solidFill>
-          <a:ln xmlns:a="http://schemas.openxmlformats.org/drawingml/2006/main" w="0">
+          <a:ln w="0">
             <a:solidFill>
               <a:srgbClr val="000000">
                 <a:alpha val="0"/>
@@ -7481,9 +7481,9 @@
           </a:ln>
         </p:spPr>
         <p:txBody>
-          <a:bodyPr xmlns:a="http://schemas.openxmlformats.org/drawingml/2006/main" lIns="0" tIns="0" rIns="0" bIns="0" anchor="t"/>
-          <a:lstStyle xmlns:a="http://schemas.openxmlformats.org/drawingml/2006/main"/>
-          <a:p xmlns:a="http://schemas.openxmlformats.org/drawingml/2006/main">
+          <a:bodyPr lIns="0" tIns="0" rIns="0" bIns="0" anchor="t"/>
+          <a:lstStyle/>
+          <a:p>
             <a:pPr algn="l">
               <a:defRPr sz="2400" b="1">
                 <a:solidFill>
@@ -7505,31 +7505,31 @@
       <p:sp>
         <p:nvSpPr>
           <p:cNvPr id="7" name="">
-            <a:extLst xmlns:a="http://schemas.openxmlformats.org/drawingml/2006/main">
-              <a:ext uri="{FF2B5EF4-FFF2-40B4-BE49-F238E27FC236}">
-                <a16:creationId xmlns:a16="http://schemas.microsoft.com/office/drawing/2014/main" id="{557A604C-DD00-4FD7-B680-9E15706F82EF}"/>
-              </a:ext>
-            </a:extLst>
-          </p:cNvPr>
-          <p:cNvSpPr>
-            <a:spLocks xmlns:a="http://schemas.openxmlformats.org/drawingml/2006/main" noGrp="1"/>
-          </p:cNvSpPr>
-          <p:nvPr/>
-        </p:nvSpPr>
-        <p:spPr>
-          <a:xfrm xmlns:a="http://schemas.openxmlformats.org/drawingml/2006/main" rot="0">
+            <a:extLst>
+              <a:ext uri="{FF2B5EF4-FFF2-40B4-BE49-F238E27FC236}">
+                <ns2:creationId id="{557A604C-DD00-4FD7-B680-9E15706F82EF}"/>
+              </a:ext>
+            </a:extLst>
+          </p:cNvPr>
+          <p:cNvSpPr>
+            <a:spLocks noGrp="1"/>
+          </p:cNvSpPr>
+          <p:nvPr/>
+        </p:nvSpPr>
+        <p:spPr>
+          <a:xfrm rot="0">
             <a:off x="628650" y="1257300"/>
             <a:ext cx="9334500" cy="400050"/>
           </a:xfrm>
-          <a:prstGeom xmlns:a="http://schemas.openxmlformats.org/drawingml/2006/main" prst="rect">
-            <a:avLst/>
-          </a:prstGeom>
-          <a:solidFill xmlns:a="http://schemas.openxmlformats.org/drawingml/2006/main">
+          <a:prstGeom prst="rect">
+            <a:avLst/>
+          </a:prstGeom>
+          <a:solidFill>
             <a:srgbClr val="000000">
               <a:alpha val="0"/>
             </a:srgbClr>
           </a:solidFill>
-          <a:ln xmlns:a="http://schemas.openxmlformats.org/drawingml/2006/main" w="0">
+          <a:ln w="0">
             <a:solidFill>
               <a:srgbClr val="000000">
                 <a:alpha val="0"/>
@@ -7539,9 +7539,9 @@
           </a:ln>
         </p:spPr>
         <p:txBody>
-          <a:bodyPr xmlns:a="http://schemas.openxmlformats.org/drawingml/2006/main" lIns="0" tIns="0" rIns="0" bIns="0" anchor="t"/>
-          <a:lstStyle xmlns:a="http://schemas.openxmlformats.org/drawingml/2006/main"/>
-          <a:p xmlns:a="http://schemas.openxmlformats.org/drawingml/2006/main">
+          <a:bodyPr lIns="0" tIns="0" rIns="0" bIns="0" anchor="t"/>
+          <a:lstStyle/>
+          <a:p>
             <a:pPr algn="l">
               <a:defRPr sz="1200" b="0">
                 <a:solidFill>
@@ -7555,7 +7555,7 @@
                   <a:srgbClr val="4F5B66"/>
                 </a:solidFill>
               </a:rPr>
-              <a:t>說明設計意圖、實際使用位置，以及對原型的影響。</a:t>
+              <a:t>以回測策略說明：引擎固定流程，策略演算法可替換。</a:t>
             </a:r>
           </a:p>
         </p:txBody>
@@ -7563,31 +7563,31 @@
       <p:sp>
         <p:nvSpPr>
           <p:cNvPr id="8" name="">
-            <a:extLst xmlns:a="http://schemas.openxmlformats.org/drawingml/2006/main">
-              <a:ext uri="{FF2B5EF4-FFF2-40B4-BE49-F238E27FC236}">
-                <a16:creationId xmlns:a16="http://schemas.microsoft.com/office/drawing/2014/main" id="{E2D97AA9-0F5A-44C5-80E2-1E973617D2B6}"/>
-              </a:ext>
-            </a:extLst>
-          </p:cNvPr>
-          <p:cNvSpPr>
-            <a:spLocks xmlns:a="http://schemas.openxmlformats.org/drawingml/2006/main" noGrp="1"/>
-          </p:cNvSpPr>
-          <p:nvPr/>
-        </p:nvSpPr>
-        <p:spPr>
-          <a:xfrm xmlns:a="http://schemas.openxmlformats.org/drawingml/2006/main" rot="0">
+            <a:extLst>
+              <a:ext uri="{FF2B5EF4-FFF2-40B4-BE49-F238E27FC236}">
+                <ns2:creationId id="{E2D97AA9-0F5A-44C5-80E2-1E973617D2B6}"/>
+              </a:ext>
+            </a:extLst>
+          </p:cNvPr>
+          <p:cNvSpPr>
+            <a:spLocks noGrp="1"/>
+          </p:cNvSpPr>
+          <p:nvPr/>
+        </p:nvSpPr>
+        <p:spPr>
+          <a:xfrm rot="0">
             <a:off x="609600" y="1866900"/>
             <a:ext cx="3086100" cy="3829050"/>
           </a:xfrm>
-          <a:prstGeom xmlns:a="http://schemas.openxmlformats.org/drawingml/2006/main" prst="roundRect">
+          <a:prstGeom prst="roundRect">
             <a:avLst>
               <a:gd name="adj" fmla="val 2469"/>
             </a:avLst>
           </a:prstGeom>
-          <a:solidFill xmlns:a="http://schemas.openxmlformats.org/drawingml/2006/main">
+          <a:solidFill>
             <a:srgbClr val="FFFDF8"/>
           </a:solidFill>
-          <a:ln xmlns:a="http://schemas.openxmlformats.org/drawingml/2006/main" w="11430">
+          <a:ln w="11430">
             <a:solidFill>
               <a:srgbClr val="23313B"/>
             </a:solidFill>
@@ -7598,29 +7598,29 @@
       <p:sp>
         <p:nvSpPr>
           <p:cNvPr id="9" name="">
-            <a:extLst xmlns:a="http://schemas.openxmlformats.org/drawingml/2006/main">
-              <a:ext uri="{FF2B5EF4-FFF2-40B4-BE49-F238E27FC236}">
-                <a16:creationId xmlns:a16="http://schemas.microsoft.com/office/drawing/2014/main" id="{63D27DEC-6B05-4C67-A477-7638BE39E9D1}"/>
-              </a:ext>
-            </a:extLst>
-          </p:cNvPr>
-          <p:cNvSpPr>
-            <a:spLocks xmlns:a="http://schemas.openxmlformats.org/drawingml/2006/main" noGrp="1"/>
-          </p:cNvSpPr>
-          <p:nvPr/>
-        </p:nvSpPr>
-        <p:spPr>
-          <a:xfrm xmlns:a="http://schemas.openxmlformats.org/drawingml/2006/main" rot="0">
+            <a:extLst>
+              <a:ext uri="{FF2B5EF4-FFF2-40B4-BE49-F238E27FC236}">
+                <ns2:creationId id="{63D27DEC-6B05-4C67-A477-7638BE39E9D1}"/>
+              </a:ext>
+            </a:extLst>
+          </p:cNvPr>
+          <p:cNvSpPr>
+            <a:spLocks noGrp="1"/>
+          </p:cNvSpPr>
+          <p:nvPr/>
+        </p:nvSpPr>
+        <p:spPr>
+          <a:xfrm rot="0">
             <a:off x="609600" y="1866900"/>
             <a:ext cx="3086100" cy="76200"/>
           </a:xfrm>
-          <a:prstGeom xmlns:a="http://schemas.openxmlformats.org/drawingml/2006/main" prst="rect">
-            <a:avLst/>
-          </a:prstGeom>
-          <a:solidFill xmlns:a="http://schemas.openxmlformats.org/drawingml/2006/main">
+          <a:prstGeom prst="rect">
+            <a:avLst/>
+          </a:prstGeom>
+          <a:solidFill>
             <a:srgbClr val="38B58A"/>
           </a:solidFill>
-          <a:ln xmlns:a="http://schemas.openxmlformats.org/drawingml/2006/main" w="0">
+          <a:ln w="0">
             <a:solidFill>
               <a:srgbClr val="000000">
                 <a:alpha val="0"/>
@@ -7633,31 +7633,31 @@
       <p:sp>
         <p:nvSpPr>
           <p:cNvPr id="10" name="">
-            <a:extLst xmlns:a="http://schemas.openxmlformats.org/drawingml/2006/main">
-              <a:ext uri="{FF2B5EF4-FFF2-40B4-BE49-F238E27FC236}">
-                <a16:creationId xmlns:a16="http://schemas.microsoft.com/office/drawing/2014/main" id="{8BE1C61C-D2ED-4994-BE1B-1F8BE8008F58}"/>
-              </a:ext>
-            </a:extLst>
-          </p:cNvPr>
-          <p:cNvSpPr>
-            <a:spLocks xmlns:a="http://schemas.openxmlformats.org/drawingml/2006/main" noGrp="1"/>
-          </p:cNvSpPr>
-          <p:nvPr/>
-        </p:nvSpPr>
-        <p:spPr>
-          <a:xfrm xmlns:a="http://schemas.openxmlformats.org/drawingml/2006/main" rot="0">
+            <a:extLst>
+              <a:ext uri="{FF2B5EF4-FFF2-40B4-BE49-F238E27FC236}">
+                <ns2:creationId id="{8BE1C61C-D2ED-4994-BE1B-1F8BE8008F58}"/>
+              </a:ext>
+            </a:extLst>
+          </p:cNvPr>
+          <p:cNvSpPr>
+            <a:spLocks noGrp="1"/>
+          </p:cNvSpPr>
+          <p:nvPr/>
+        </p:nvSpPr>
+        <p:spPr>
+          <a:xfrm rot="0">
             <a:off x="800100" y="2038350"/>
             <a:ext cx="2705100" cy="266700"/>
           </a:xfrm>
-          <a:prstGeom xmlns:a="http://schemas.openxmlformats.org/drawingml/2006/main" prst="rect">
-            <a:avLst/>
-          </a:prstGeom>
-          <a:solidFill xmlns:a="http://schemas.openxmlformats.org/drawingml/2006/main">
+          <a:prstGeom prst="rect">
+            <a:avLst/>
+          </a:prstGeom>
+          <a:solidFill>
             <a:srgbClr val="000000">
               <a:alpha val="0"/>
             </a:srgbClr>
           </a:solidFill>
-          <a:ln xmlns:a="http://schemas.openxmlformats.org/drawingml/2006/main" w="0">
+          <a:ln w="0">
             <a:solidFill>
               <a:srgbClr val="000000">
                 <a:alpha val="0"/>
@@ -7667,9 +7667,9 @@
           </a:ln>
         </p:spPr>
         <p:txBody>
-          <a:bodyPr xmlns:a="http://schemas.openxmlformats.org/drawingml/2006/main" lIns="0" tIns="0" rIns="0" bIns="0" anchor="t"/>
-          <a:lstStyle xmlns:a="http://schemas.openxmlformats.org/drawingml/2006/main"/>
-          <a:p xmlns:a="http://schemas.openxmlformats.org/drawingml/2006/main">
+          <a:bodyPr lIns="0" tIns="0" rIns="0" bIns="0" anchor="t"/>
+          <a:lstStyle/>
+          <a:p>
             <a:pPr algn="l">
               <a:defRPr sz="1350" b="1">
                 <a:solidFill>
@@ -7691,31 +7691,31 @@
       <p:sp>
         <p:nvSpPr>
           <p:cNvPr id="11" name="">
-            <a:extLst xmlns:a="http://schemas.openxmlformats.org/drawingml/2006/main">
-              <a:ext uri="{FF2B5EF4-FFF2-40B4-BE49-F238E27FC236}">
-                <a16:creationId xmlns:a16="http://schemas.microsoft.com/office/drawing/2014/main" id="{F12AF1F4-7B0C-47E2-9F27-193F8F78D47C}"/>
-              </a:ext>
-            </a:extLst>
-          </p:cNvPr>
-          <p:cNvSpPr>
-            <a:spLocks xmlns:a="http://schemas.openxmlformats.org/drawingml/2006/main" noGrp="1"/>
-          </p:cNvSpPr>
-          <p:nvPr/>
-        </p:nvSpPr>
-        <p:spPr>
-          <a:xfrm xmlns:a="http://schemas.openxmlformats.org/drawingml/2006/main" rot="0">
+            <a:extLst>
+              <a:ext uri="{FF2B5EF4-FFF2-40B4-BE49-F238E27FC236}">
+                <ns2:creationId id="{F12AF1F4-7B0C-47E2-9F27-193F8F78D47C}"/>
+              </a:ext>
+            </a:extLst>
+          </p:cNvPr>
+          <p:cNvSpPr>
+            <a:spLocks noGrp="1"/>
+          </p:cNvSpPr>
+          <p:nvPr/>
+        </p:nvSpPr>
+        <p:spPr>
+          <a:xfrm rot="0">
             <a:off x="857250" y="2400300"/>
             <a:ext cx="2590800" cy="1943100"/>
           </a:xfrm>
-          <a:prstGeom xmlns:a="http://schemas.openxmlformats.org/drawingml/2006/main" prst="rect">
-            <a:avLst/>
-          </a:prstGeom>
-          <a:solidFill xmlns:a="http://schemas.openxmlformats.org/drawingml/2006/main">
+          <a:prstGeom prst="rect">
+            <a:avLst/>
+          </a:prstGeom>
+          <a:solidFill>
             <a:srgbClr val="000000">
               <a:alpha val="0"/>
             </a:srgbClr>
           </a:solidFill>
-          <a:ln xmlns:a="http://schemas.openxmlformats.org/drawingml/2006/main" w="0">
+          <a:ln w="0">
             <a:solidFill>
               <a:srgbClr val="000000">
                 <a:alpha val="0"/>
@@ -7725,9 +7725,9 @@
           </a:ln>
         </p:spPr>
         <p:txBody>
-          <a:bodyPr xmlns:a="http://schemas.openxmlformats.org/drawingml/2006/main" lIns="0" tIns="0" rIns="0" bIns="0" anchor="t"/>
-          <a:lstStyle xmlns:a="http://schemas.openxmlformats.org/drawingml/2006/main"/>
-          <a:p xmlns:a="http://schemas.openxmlformats.org/drawingml/2006/main">
+          <a:bodyPr lIns="0" tIns="0" rIns="0" bIns="0" anchor="t"/>
+          <a:lstStyle/>
+          <a:p>
             <a:pPr algn="l">
               <a:defRPr sz="1275" b="0">
                 <a:solidFill>
@@ -7741,15 +7741,27 @@
                   <a:srgbClr val="172026"/>
                 </a:solidFill>
               </a:rPr>
-              <a:t>把可替換的演算法封裝在共同介面後面，讓主要執行流程不依賴特定實作。</a:t>
-            </a:r>
-          </a:p>
-          <a:p xmlns:a="http://schemas.openxmlformats.org/drawingml/2006/main">
-            <a:r>
+              <a:t>把不同交易訊號演算法封裝在 TradingStrategy 介面後面。</a:t>
+            </a:r>
+          </a:p>
+          <a:p>
+            <a:pPr algn="l">
+              <a:defRPr sz="1275" b="0">
+                <a:solidFill>
+                  <a:srgbClr val="172026"/>
+                </a:solidFill>
+              </a:defRPr>
+            </a:pPr>
+            <a:r>
+              <a:rPr sz="1275" b="0">
+                <a:solidFill>
+                  <a:srgbClr val="172026"/>
+                </a:solidFill>
+              </a:rPr>
               <a:t/>
             </a:r>
           </a:p>
-          <a:p xmlns:a="http://schemas.openxmlformats.org/drawingml/2006/main">
+          <a:p>
             <a:pPr algn="l">
               <a:defRPr sz="1275" b="0">
                 <a:solidFill>
@@ -7763,7 +7775,7 @@
                   <a:srgbClr val="172026"/>
                 </a:solidFill>
               </a:rPr>
-              <a:t>因此系統可以切換行為，而不必修改 controller 或 service 的主流程。</a:t>
+              <a:t>BacktestEngine 只負責回測流程，不需要知道每種策略如何產生 BUY / SELL 訊號。</a:t>
             </a:r>
           </a:p>
         </p:txBody>
@@ -7771,31 +7783,31 @@
       <p:sp>
         <p:nvSpPr>
           <p:cNvPr id="12" name="">
-            <a:extLst xmlns:a="http://schemas.openxmlformats.org/drawingml/2006/main">
-              <a:ext uri="{FF2B5EF4-FFF2-40B4-BE49-F238E27FC236}">
-                <a16:creationId xmlns:a16="http://schemas.microsoft.com/office/drawing/2014/main" id="{8A236BB3-73B9-4D90-8215-529E74321807}"/>
-              </a:ext>
-            </a:extLst>
-          </p:cNvPr>
-          <p:cNvSpPr>
-            <a:spLocks xmlns:a="http://schemas.openxmlformats.org/drawingml/2006/main" noGrp="1"/>
-          </p:cNvSpPr>
-          <p:nvPr/>
-        </p:nvSpPr>
-        <p:spPr>
-          <a:xfrm xmlns:a="http://schemas.openxmlformats.org/drawingml/2006/main" rot="0">
+            <a:extLst>
+              <a:ext uri="{FF2B5EF4-FFF2-40B4-BE49-F238E27FC236}">
+                <ns2:creationId id="{8A236BB3-73B9-4D90-8215-529E74321807}"/>
+              </a:ext>
+            </a:extLst>
+          </p:cNvPr>
+          <p:cNvSpPr>
+            <a:spLocks noGrp="1"/>
+          </p:cNvSpPr>
+          <p:nvPr/>
+        </p:nvSpPr>
+        <p:spPr>
+          <a:xfrm rot="0">
             <a:off x="4533900" y="1866900"/>
             <a:ext cx="3162300" cy="3829050"/>
           </a:xfrm>
-          <a:prstGeom xmlns:a="http://schemas.openxmlformats.org/drawingml/2006/main" prst="roundRect">
+          <a:prstGeom prst="roundRect">
             <a:avLst>
               <a:gd name="adj" fmla="val 2410"/>
             </a:avLst>
           </a:prstGeom>
-          <a:solidFill xmlns:a="http://schemas.openxmlformats.org/drawingml/2006/main">
+          <a:solidFill>
             <a:srgbClr val="FFFDF8"/>
           </a:solidFill>
-          <a:ln xmlns:a="http://schemas.openxmlformats.org/drawingml/2006/main" w="11430">
+          <a:ln w="11430">
             <a:solidFill>
               <a:srgbClr val="23313B"/>
             </a:solidFill>
@@ -7806,29 +7818,29 @@
       <p:sp>
         <p:nvSpPr>
           <p:cNvPr id="13" name="">
-            <a:extLst xmlns:a="http://schemas.openxmlformats.org/drawingml/2006/main">
-              <a:ext uri="{FF2B5EF4-FFF2-40B4-BE49-F238E27FC236}">
-                <a16:creationId xmlns:a16="http://schemas.microsoft.com/office/drawing/2014/main" id="{D2B0858F-0B0A-4AD0-B910-D2AE624A2B99}"/>
-              </a:ext>
-            </a:extLst>
-          </p:cNvPr>
-          <p:cNvSpPr>
-            <a:spLocks xmlns:a="http://schemas.openxmlformats.org/drawingml/2006/main" noGrp="1"/>
-          </p:cNvSpPr>
-          <p:nvPr/>
-        </p:nvSpPr>
-        <p:spPr>
-          <a:xfrm xmlns:a="http://schemas.openxmlformats.org/drawingml/2006/main" rot="0">
+            <a:extLst>
+              <a:ext uri="{FF2B5EF4-FFF2-40B4-BE49-F238E27FC236}">
+                <ns2:creationId id="{D2B0858F-0B0A-4AD0-B910-D2AE624A2B99}"/>
+              </a:ext>
+            </a:extLst>
+          </p:cNvPr>
+          <p:cNvSpPr>
+            <a:spLocks noGrp="1"/>
+          </p:cNvSpPr>
+          <p:nvPr/>
+        </p:nvSpPr>
+        <p:spPr>
+          <a:xfrm rot="0">
             <a:off x="4533900" y="1866900"/>
             <a:ext cx="3162300" cy="76200"/>
           </a:xfrm>
-          <a:prstGeom xmlns:a="http://schemas.openxmlformats.org/drawingml/2006/main" prst="rect">
-            <a:avLst/>
-          </a:prstGeom>
-          <a:solidFill xmlns:a="http://schemas.openxmlformats.org/drawingml/2006/main">
+          <a:prstGeom prst="rect">
+            <a:avLst/>
+          </a:prstGeom>
+          <a:solidFill>
             <a:srgbClr val="5E9BFF"/>
           </a:solidFill>
-          <a:ln xmlns:a="http://schemas.openxmlformats.org/drawingml/2006/main" w="0">
+          <a:ln w="0">
             <a:solidFill>
               <a:srgbClr val="000000">
                 <a:alpha val="0"/>
@@ -7841,31 +7853,31 @@
       <p:sp>
         <p:nvSpPr>
           <p:cNvPr id="14" name="">
-            <a:extLst xmlns:a="http://schemas.openxmlformats.org/drawingml/2006/main">
-              <a:ext uri="{FF2B5EF4-FFF2-40B4-BE49-F238E27FC236}">
-                <a16:creationId xmlns:a16="http://schemas.microsoft.com/office/drawing/2014/main" id="{86101DFA-9852-459B-B75C-97B95749AB73}"/>
-              </a:ext>
-            </a:extLst>
-          </p:cNvPr>
-          <p:cNvSpPr>
-            <a:spLocks xmlns:a="http://schemas.openxmlformats.org/drawingml/2006/main" noGrp="1"/>
-          </p:cNvSpPr>
-          <p:nvPr/>
-        </p:nvSpPr>
-        <p:spPr>
-          <a:xfrm xmlns:a="http://schemas.openxmlformats.org/drawingml/2006/main" rot="0">
+            <a:extLst>
+              <a:ext uri="{FF2B5EF4-FFF2-40B4-BE49-F238E27FC236}">
+                <ns2:creationId id="{86101DFA-9852-459B-B75C-97B95749AB73}"/>
+              </a:ext>
+            </a:extLst>
+          </p:cNvPr>
+          <p:cNvSpPr>
+            <a:spLocks noGrp="1"/>
+          </p:cNvSpPr>
+          <p:nvPr/>
+        </p:nvSpPr>
+        <p:spPr>
+          <a:xfrm rot="0">
             <a:off x="4724400" y="2038350"/>
             <a:ext cx="2781300" cy="266700"/>
           </a:xfrm>
-          <a:prstGeom xmlns:a="http://schemas.openxmlformats.org/drawingml/2006/main" prst="rect">
-            <a:avLst/>
-          </a:prstGeom>
-          <a:solidFill xmlns:a="http://schemas.openxmlformats.org/drawingml/2006/main">
+          <a:prstGeom prst="rect">
+            <a:avLst/>
+          </a:prstGeom>
+          <a:solidFill>
             <a:srgbClr val="000000">
               <a:alpha val="0"/>
             </a:srgbClr>
           </a:solidFill>
-          <a:ln xmlns:a="http://schemas.openxmlformats.org/drawingml/2006/main" w="0">
+          <a:ln w="0">
             <a:solidFill>
               <a:srgbClr val="000000">
                 <a:alpha val="0"/>
@@ -7875,9 +7887,9 @@
           </a:ln>
         </p:spPr>
         <p:txBody>
-          <a:bodyPr xmlns:a="http://schemas.openxmlformats.org/drawingml/2006/main" lIns="0" tIns="0" rIns="0" bIns="0" anchor="t"/>
-          <a:lstStyle xmlns:a="http://schemas.openxmlformats.org/drawingml/2006/main"/>
-          <a:p xmlns:a="http://schemas.openxmlformats.org/drawingml/2006/main">
+          <a:bodyPr lIns="0" tIns="0" rIns="0" bIns="0" anchor="t"/>
+          <a:lstStyle/>
+          <a:p>
             <a:pPr algn="l">
               <a:defRPr sz="1350" b="1">
                 <a:solidFill>
@@ -7899,31 +7911,31 @@
       <p:sp>
         <p:nvSpPr>
           <p:cNvPr id="15" name="">
-            <a:extLst xmlns:a="http://schemas.openxmlformats.org/drawingml/2006/main">
-              <a:ext uri="{FF2B5EF4-FFF2-40B4-BE49-F238E27FC236}">
-                <a16:creationId xmlns:a16="http://schemas.microsoft.com/office/drawing/2014/main" id="{D2FE6769-9707-40EC-8547-44CF714E1AE8}"/>
-              </a:ext>
-            </a:extLst>
-          </p:cNvPr>
-          <p:cNvSpPr>
-            <a:spLocks xmlns:a="http://schemas.openxmlformats.org/drawingml/2006/main" noGrp="1"/>
-          </p:cNvSpPr>
-          <p:nvPr/>
-        </p:nvSpPr>
-        <p:spPr>
-          <a:xfrm xmlns:a="http://schemas.openxmlformats.org/drawingml/2006/main" rot="0">
+            <a:extLst>
+              <a:ext uri="{FF2B5EF4-FFF2-40B4-BE49-F238E27FC236}">
+                <ns2:creationId id="{D2FE6769-9707-40EC-8547-44CF714E1AE8}"/>
+              </a:ext>
+            </a:extLst>
+          </p:cNvPr>
+          <p:cNvSpPr>
+            <a:spLocks noGrp="1"/>
+          </p:cNvSpPr>
+          <p:nvPr/>
+        </p:nvSpPr>
+        <p:spPr>
+          <a:xfrm rot="0">
             <a:off x="4781550" y="2400300"/>
             <a:ext cx="2667000" cy="2038350"/>
           </a:xfrm>
-          <a:prstGeom xmlns:a="http://schemas.openxmlformats.org/drawingml/2006/main" prst="rect">
-            <a:avLst/>
-          </a:prstGeom>
-          <a:solidFill xmlns:a="http://schemas.openxmlformats.org/drawingml/2006/main">
+          <a:prstGeom prst="rect">
+            <a:avLst/>
+          </a:prstGeom>
+          <a:solidFill>
             <a:srgbClr val="000000">
               <a:alpha val="0"/>
             </a:srgbClr>
           </a:solidFill>
-          <a:ln xmlns:a="http://schemas.openxmlformats.org/drawingml/2006/main" w="0">
+          <a:ln w="0">
             <a:solidFill>
               <a:srgbClr val="000000">
                 <a:alpha val="0"/>
@@ -7933,9 +7945,9 @@
           </a:ln>
         </p:spPr>
         <p:txBody>
-          <a:bodyPr xmlns:a="http://schemas.openxmlformats.org/drawingml/2006/main" lIns="0" tIns="0" rIns="0" bIns="0" anchor="t"/>
-          <a:lstStyle xmlns:a="http://schemas.openxmlformats.org/drawingml/2006/main"/>
-          <a:p xmlns:a="http://schemas.openxmlformats.org/drawingml/2006/main">
+          <a:bodyPr lIns="0" tIns="0" rIns="0" bIns="0" anchor="t"/>
+          <a:lstStyle/>
+          <a:p>
             <a:pPr algn="l">
               <a:defRPr sz="1275" b="0">
                 <a:solidFill>
@@ -7949,10 +7961,10 @@
                   <a:srgbClr val="172026"/>
                 </a:solidFill>
               </a:rPr>
-              <a:t>1. 警示規則</a:t>
-            </a:r>
-          </a:p>
-          <a:p xmlns:a="http://schemas.openxmlformats.org/drawingml/2006/main">
+              <a:t>主要 class 對應</a:t>
+            </a:r>
+          </a:p>
+          <a:p>
             <a:pPr algn="l">
               <a:defRPr sz="1275" b="0">
                 <a:solidFill>
@@ -7966,15 +7978,27 @@
                   <a:srgbClr val="172026"/>
                 </a:solidFill>
               </a:rPr>
-              <a:t>AlertRule -&gt; PriceAboveAlertRule / PriceBelowAlertRule / PercentChange rules</a:t>
-            </a:r>
-          </a:p>
-          <a:p xmlns:a="http://schemas.openxmlformats.org/drawingml/2006/main">
-            <a:r>
+              <a:t>TradingStrategy：定義 getWarmupPeriod() 與 generateSignals()</a:t>
+            </a:r>
+          </a:p>
+          <a:p>
+            <a:pPr algn="l">
+              <a:defRPr sz="1275" b="0">
+                <a:solidFill>
+                  <a:srgbClr val="172026"/>
+                </a:solidFill>
+              </a:defRPr>
+            </a:pPr>
+            <a:r>
+              <a:rPr sz="1275" b="0">
+                <a:solidFill>
+                  <a:srgbClr val="172026"/>
+                </a:solidFill>
+              </a:rPr>
               <a:t/>
             </a:r>
           </a:p>
-          <a:p xmlns:a="http://schemas.openxmlformats.org/drawingml/2006/main">
+          <a:p>
             <a:pPr algn="l">
               <a:defRPr sz="1275" b="0">
                 <a:solidFill>
@@ -7988,10 +8012,10 @@
                   <a:srgbClr val="172026"/>
                 </a:solidFill>
               </a:rPr>
-              <a:t>2. 回測策略</a:t>
-            </a:r>
-          </a:p>
-          <a:p xmlns:a="http://schemas.openxmlformats.org/drawingml/2006/main">
+              <a:t>BacktestEngine：只呼叫 strategy.getWarmupPeriod() 和 strategy.generateSignals()</a:t>
+            </a:r>
+          </a:p>
+          <a:p>
             <a:pPr algn="l">
               <a:defRPr sz="1275" b="0">
                 <a:solidFill>
@@ -8005,7 +8029,24 @@
                   <a:srgbClr val="172026"/>
                 </a:solidFill>
               </a:rPr>
-              <a:t>MovingAverageCrossStrategy 由 BacktestEngine 執行，未來可擴充 RSI 或突破策略。</a:t>
+              <a:t/>
+            </a:r>
+          </a:p>
+          <a:p>
+            <a:pPr algn="l">
+              <a:defRPr sz="1275" b="0">
+                <a:solidFill>
+                  <a:srgbClr val="172026"/>
+                </a:solidFill>
+              </a:defRPr>
+            </a:pPr>
+            <a:r>
+              <a:rPr sz="1275" b="0">
+                <a:solidFill>
+                  <a:srgbClr val="172026"/>
+                </a:solidFill>
+              </a:rPr>
+              <a:t>具體策略：MovingAverageCrossStrategy、RsiReversionStrategy、BreakoutStrategy 等</a:t>
             </a:r>
           </a:p>
         </p:txBody>
@@ -8013,31 +8054,31 @@
       <p:sp>
         <p:nvSpPr>
           <p:cNvPr id="16" name="">
-            <a:extLst xmlns:a="http://schemas.openxmlformats.org/drawingml/2006/main">
-              <a:ext uri="{FF2B5EF4-FFF2-40B4-BE49-F238E27FC236}">
-                <a16:creationId xmlns:a16="http://schemas.microsoft.com/office/drawing/2014/main" id="{318DDFFF-A235-431C-AAEA-490D8D7E6CAC}"/>
-              </a:ext>
-            </a:extLst>
-          </p:cNvPr>
-          <p:cNvSpPr>
-            <a:spLocks xmlns:a="http://schemas.openxmlformats.org/drawingml/2006/main" noGrp="1"/>
-          </p:cNvSpPr>
-          <p:nvPr/>
-        </p:nvSpPr>
-        <p:spPr>
-          <a:xfrm xmlns:a="http://schemas.openxmlformats.org/drawingml/2006/main" rot="0">
+            <a:extLst>
+              <a:ext uri="{FF2B5EF4-FFF2-40B4-BE49-F238E27FC236}">
+                <ns2:creationId id="{318DDFFF-A235-431C-AAEA-490D8D7E6CAC}"/>
+              </a:ext>
+            </a:extLst>
+          </p:cNvPr>
+          <p:cNvSpPr>
+            <a:spLocks noGrp="1"/>
+          </p:cNvSpPr>
+          <p:nvPr/>
+        </p:nvSpPr>
+        <p:spPr>
+          <a:xfrm rot="0">
             <a:off x="8534400" y="1866900"/>
             <a:ext cx="3048000" cy="3829050"/>
           </a:xfrm>
-          <a:prstGeom xmlns:a="http://schemas.openxmlformats.org/drawingml/2006/main" prst="roundRect">
+          <a:prstGeom prst="roundRect">
             <a:avLst>
               <a:gd name="adj" fmla="val 2500"/>
             </a:avLst>
           </a:prstGeom>
-          <a:solidFill xmlns:a="http://schemas.openxmlformats.org/drawingml/2006/main">
+          <a:solidFill>
             <a:srgbClr val="FFFDF8"/>
           </a:solidFill>
-          <a:ln xmlns:a="http://schemas.openxmlformats.org/drawingml/2006/main" w="11430">
+          <a:ln w="11430">
             <a:solidFill>
               <a:srgbClr val="23313B"/>
             </a:solidFill>
@@ -8048,29 +8089,29 @@
       <p:sp>
         <p:nvSpPr>
           <p:cNvPr id="17" name="">
-            <a:extLst xmlns:a="http://schemas.openxmlformats.org/drawingml/2006/main">
-              <a:ext uri="{FF2B5EF4-FFF2-40B4-BE49-F238E27FC236}">
-                <a16:creationId xmlns:a16="http://schemas.microsoft.com/office/drawing/2014/main" id="{ED7973C1-39BF-428C-A40F-7FE2EA56A892}"/>
-              </a:ext>
-            </a:extLst>
-          </p:cNvPr>
-          <p:cNvSpPr>
-            <a:spLocks xmlns:a="http://schemas.openxmlformats.org/drawingml/2006/main" noGrp="1"/>
-          </p:cNvSpPr>
-          <p:nvPr/>
-        </p:nvSpPr>
-        <p:spPr>
-          <a:xfrm xmlns:a="http://schemas.openxmlformats.org/drawingml/2006/main" rot="0">
+            <a:extLst>
+              <a:ext uri="{FF2B5EF4-FFF2-40B4-BE49-F238E27FC236}">
+                <ns2:creationId id="{ED7973C1-39BF-428C-A40F-7FE2EA56A892}"/>
+              </a:ext>
+            </a:extLst>
+          </p:cNvPr>
+          <p:cNvSpPr>
+            <a:spLocks noGrp="1"/>
+          </p:cNvSpPr>
+          <p:nvPr/>
+        </p:nvSpPr>
+        <p:spPr>
+          <a:xfrm rot="0">
             <a:off x="8534400" y="1866900"/>
             <a:ext cx="3048000" cy="76200"/>
           </a:xfrm>
-          <a:prstGeom xmlns:a="http://schemas.openxmlformats.org/drawingml/2006/main" prst="rect">
-            <a:avLst/>
-          </a:prstGeom>
-          <a:solidFill xmlns:a="http://schemas.openxmlformats.org/drawingml/2006/main">
+          <a:prstGeom prst="rect">
+            <a:avLst/>
+          </a:prstGeom>
+          <a:solidFill>
             <a:srgbClr val="D6A04B"/>
           </a:solidFill>
-          <a:ln xmlns:a="http://schemas.openxmlformats.org/drawingml/2006/main" w="0">
+          <a:ln w="0">
             <a:solidFill>
               <a:srgbClr val="000000">
                 <a:alpha val="0"/>
@@ -8083,31 +8124,31 @@
       <p:sp>
         <p:nvSpPr>
           <p:cNvPr id="18" name="">
-            <a:extLst xmlns:a="http://schemas.openxmlformats.org/drawingml/2006/main">
-              <a:ext uri="{FF2B5EF4-FFF2-40B4-BE49-F238E27FC236}">
-                <a16:creationId xmlns:a16="http://schemas.microsoft.com/office/drawing/2014/main" id="{82DA91FA-5E23-46FF-A6A2-1D0E7A894599}"/>
-              </a:ext>
-            </a:extLst>
-          </p:cNvPr>
-          <p:cNvSpPr>
-            <a:spLocks xmlns:a="http://schemas.openxmlformats.org/drawingml/2006/main" noGrp="1"/>
-          </p:cNvSpPr>
-          <p:nvPr/>
-        </p:nvSpPr>
-        <p:spPr>
-          <a:xfrm xmlns:a="http://schemas.openxmlformats.org/drawingml/2006/main" rot="0">
+            <a:extLst>
+              <a:ext uri="{FF2B5EF4-FFF2-40B4-BE49-F238E27FC236}">
+                <ns2:creationId id="{82DA91FA-5E23-46FF-A6A2-1D0E7A894599}"/>
+              </a:ext>
+            </a:extLst>
+          </p:cNvPr>
+          <p:cNvSpPr>
+            <a:spLocks noGrp="1"/>
+          </p:cNvSpPr>
+          <p:nvPr/>
+        </p:nvSpPr>
+        <p:spPr>
+          <a:xfrm rot="0">
             <a:off x="8724900" y="2038350"/>
             <a:ext cx="2667000" cy="266700"/>
           </a:xfrm>
-          <a:prstGeom xmlns:a="http://schemas.openxmlformats.org/drawingml/2006/main" prst="rect">
-            <a:avLst/>
-          </a:prstGeom>
-          <a:solidFill xmlns:a="http://schemas.openxmlformats.org/drawingml/2006/main">
+          <a:prstGeom prst="rect">
+            <a:avLst/>
+          </a:prstGeom>
+          <a:solidFill>
             <a:srgbClr val="000000">
               <a:alpha val="0"/>
             </a:srgbClr>
           </a:solidFill>
-          <a:ln xmlns:a="http://schemas.openxmlformats.org/drawingml/2006/main" w="0">
+          <a:ln w="0">
             <a:solidFill>
               <a:srgbClr val="000000">
                 <a:alpha val="0"/>
@@ -8117,9 +8158,9 @@
           </a:ln>
         </p:spPr>
         <p:txBody>
-          <a:bodyPr xmlns:a="http://schemas.openxmlformats.org/drawingml/2006/main" lIns="0" tIns="0" rIns="0" bIns="0" anchor="t"/>
-          <a:lstStyle xmlns:a="http://schemas.openxmlformats.org/drawingml/2006/main"/>
-          <a:p xmlns:a="http://schemas.openxmlformats.org/drawingml/2006/main">
+          <a:bodyPr lIns="0" tIns="0" rIns="0" bIns="0" anchor="t"/>
+          <a:lstStyle/>
+          <a:p>
             <a:pPr algn="l">
               <a:defRPr sz="1350" b="1">
                 <a:solidFill>
@@ -8141,31 +8182,31 @@
       <p:sp>
         <p:nvSpPr>
           <p:cNvPr id="19" name="">
-            <a:extLst xmlns:a="http://schemas.openxmlformats.org/drawingml/2006/main">
-              <a:ext uri="{FF2B5EF4-FFF2-40B4-BE49-F238E27FC236}">
-                <a16:creationId xmlns:a16="http://schemas.microsoft.com/office/drawing/2014/main" id="{20B49210-D243-454E-A736-E9ABBAEF14EA}"/>
-              </a:ext>
-            </a:extLst>
-          </p:cNvPr>
-          <p:cNvSpPr>
-            <a:spLocks xmlns:a="http://schemas.openxmlformats.org/drawingml/2006/main" noGrp="1"/>
-          </p:cNvSpPr>
-          <p:nvPr/>
-        </p:nvSpPr>
-        <p:spPr>
-          <a:xfrm xmlns:a="http://schemas.openxmlformats.org/drawingml/2006/main" rot="0">
+            <a:extLst>
+              <a:ext uri="{FF2B5EF4-FFF2-40B4-BE49-F238E27FC236}">
+                <ns2:creationId id="{20B49210-D243-454E-A736-E9ABBAEF14EA}"/>
+              </a:ext>
+            </a:extLst>
+          </p:cNvPr>
+          <p:cNvSpPr>
+            <a:spLocks noGrp="1"/>
+          </p:cNvSpPr>
+          <p:nvPr/>
+        </p:nvSpPr>
+        <p:spPr>
+          <a:xfrm rot="0">
             <a:off x="8782050" y="2400300"/>
             <a:ext cx="2552700" cy="1790700"/>
           </a:xfrm>
-          <a:prstGeom xmlns:a="http://schemas.openxmlformats.org/drawingml/2006/main" prst="rect">
-            <a:avLst/>
-          </a:prstGeom>
-          <a:solidFill xmlns:a="http://schemas.openxmlformats.org/drawingml/2006/main">
+          <a:prstGeom prst="rect">
+            <a:avLst/>
+          </a:prstGeom>
+          <a:solidFill>
             <a:srgbClr val="000000">
               <a:alpha val="0"/>
             </a:srgbClr>
           </a:solidFill>
-          <a:ln xmlns:a="http://schemas.openxmlformats.org/drawingml/2006/main" w="0">
+          <a:ln w="0">
             <a:solidFill>
               <a:srgbClr val="000000">
                 <a:alpha val="0"/>
@@ -8175,9 +8216,9 @@
           </a:ln>
         </p:spPr>
         <p:txBody>
-          <a:bodyPr xmlns:a="http://schemas.openxmlformats.org/drawingml/2006/main" lIns="0" tIns="0" rIns="0" bIns="0" anchor="t"/>
-          <a:lstStyle xmlns:a="http://schemas.openxmlformats.org/drawingml/2006/main"/>
-          <a:p xmlns:a="http://schemas.openxmlformats.org/drawingml/2006/main">
+          <a:bodyPr lIns="0" tIns="0" rIns="0" bIns="0" anchor="t"/>
+          <a:lstStyle/>
+          <a:p>
             <a:pPr algn="l">
               <a:defRPr sz="1275" b="0">
                 <a:solidFill>
@@ -8191,10 +8232,10 @@
                   <a:srgbClr val="172026"/>
                 </a:solidFill>
               </a:rPr>
-              <a:t>1. 減少大型 if-else 判斷</a:t>
-            </a:r>
-          </a:p>
-          <a:p xmlns:a="http://schemas.openxmlformats.org/drawingml/2006/main">
+              <a:t>1. 回測流程與策略邏輯分離</a:t>
+            </a:r>
+          </a:p>
+          <a:p>
             <a:pPr algn="l">
               <a:defRPr sz="1275" b="0">
                 <a:solidFill>
@@ -8208,10 +8249,10 @@
                   <a:srgbClr val="172026"/>
                 </a:solidFill>
               </a:rPr>
-              <a:t>2. 提升擴充性</a:t>
-            </a:r>
-          </a:p>
-          <a:p xmlns:a="http://schemas.openxmlformats.org/drawingml/2006/main">
+              <a:t>2. 新增策略時不改 BacktestEngine</a:t>
+            </a:r>
+          </a:p>
+          <a:p>
             <a:pPr algn="l">
               <a:defRPr sz="1275" b="0">
                 <a:solidFill>
@@ -8225,10 +8266,10 @@
                   <a:srgbClr val="172026"/>
                 </a:solidFill>
               </a:rPr>
-              <a:t>3. 讓物件設計更明確</a:t>
-            </a:r>
-          </a:p>
-          <a:p xmlns:a="http://schemas.openxmlformats.org/drawingml/2006/main">
+              <a:t>3. 不同策略可用同一套交易模擬流程</a:t>
+            </a:r>
+          </a:p>
+          <a:p>
             <a:pPr algn="l">
               <a:defRPr sz="1275" b="0">
                 <a:solidFill>
@@ -8242,7 +8283,7 @@
                   <a:srgbClr val="172026"/>
                 </a:solidFill>
               </a:rPr>
-              <a:t>4. 評估器與引擎可保持穩定，只替換演算法</a:t>
+              <a:t>4. 比 Factory 更強調「演算法替換」</a:t>
             </a:r>
           </a:p>
         </p:txBody>
@@ -8250,31 +8291,31 @@
       <p:sp>
         <p:nvSpPr>
           <p:cNvPr id="20" name="">
-            <a:extLst xmlns:a="http://schemas.openxmlformats.org/drawingml/2006/main">
-              <a:ext uri="{FF2B5EF4-FFF2-40B4-BE49-F238E27FC236}">
-                <a16:creationId xmlns:a16="http://schemas.microsoft.com/office/drawing/2014/main" id="{C0A7B2B6-DD8E-4B3F-B93B-A99B9F4C4C2D}"/>
-              </a:ext>
-            </a:extLst>
-          </p:cNvPr>
-          <p:cNvSpPr>
-            <a:spLocks xmlns:a="http://schemas.openxmlformats.org/drawingml/2006/main" noGrp="1"/>
-          </p:cNvSpPr>
-          <p:nvPr/>
-        </p:nvSpPr>
-        <p:spPr>
-          <a:xfrm xmlns:a="http://schemas.openxmlformats.org/drawingml/2006/main" rot="0">
+            <a:extLst>
+              <a:ext uri="{FF2B5EF4-FFF2-40B4-BE49-F238E27FC236}">
+                <ns2:creationId id="{C0A7B2B6-DD8E-4B3F-B93B-A99B9F4C4C2D}"/>
+              </a:ext>
+            </a:extLst>
+          </p:cNvPr>
+          <p:cNvSpPr>
+            <a:spLocks noGrp="1"/>
+          </p:cNvSpPr>
+          <p:nvPr/>
+        </p:nvSpPr>
+        <p:spPr>
+          <a:xfrm rot="0">
             <a:off x="4743450" y="4838700"/>
             <a:ext cx="1085850" cy="457200"/>
           </a:xfrm>
-          <a:prstGeom xmlns:a="http://schemas.openxmlformats.org/drawingml/2006/main" prst="roundRect">
+          <a:prstGeom prst="roundRect">
             <a:avLst>
               <a:gd name="adj" fmla="val 16667"/>
             </a:avLst>
           </a:prstGeom>
-          <a:solidFill xmlns:a="http://schemas.openxmlformats.org/drawingml/2006/main">
+          <a:solidFill>
             <a:srgbClr val="FAEFD9"/>
           </a:solidFill>
-          <a:ln xmlns:a="http://schemas.openxmlformats.org/drawingml/2006/main" w="10478">
+          <a:ln w="10478">
             <a:solidFill>
               <a:srgbClr val="23313B"/>
             </a:solidFill>
@@ -8285,31 +8326,31 @@
       <p:sp>
         <p:nvSpPr>
           <p:cNvPr id="21" name="">
-            <a:extLst xmlns:a="http://schemas.openxmlformats.org/drawingml/2006/main">
-              <a:ext uri="{FF2B5EF4-FFF2-40B4-BE49-F238E27FC236}">
-                <a16:creationId xmlns:a16="http://schemas.microsoft.com/office/drawing/2014/main" id="{A11DDAA1-A2ED-447A-9138-21A3CD77A80A}"/>
-              </a:ext>
-            </a:extLst>
-          </p:cNvPr>
-          <p:cNvSpPr>
-            <a:spLocks xmlns:a="http://schemas.openxmlformats.org/drawingml/2006/main" noGrp="1"/>
-          </p:cNvSpPr>
-          <p:nvPr/>
-        </p:nvSpPr>
-        <p:spPr>
-          <a:xfrm xmlns:a="http://schemas.openxmlformats.org/drawingml/2006/main" rot="0">
+            <a:extLst>
+              <a:ext uri="{FF2B5EF4-FFF2-40B4-BE49-F238E27FC236}">
+                <ns2:creationId id="{A11DDAA1-A2ED-447A-9138-21A3CD77A80A}"/>
+              </a:ext>
+            </a:extLst>
+          </p:cNvPr>
+          <p:cNvSpPr>
+            <a:spLocks noGrp="1"/>
+          </p:cNvSpPr>
+          <p:nvPr/>
+        </p:nvSpPr>
+        <p:spPr>
+          <a:xfrm rot="0">
             <a:off x="4743450" y="4953000"/>
             <a:ext cx="1085850" cy="190500"/>
           </a:xfrm>
-          <a:prstGeom xmlns:a="http://schemas.openxmlformats.org/drawingml/2006/main" prst="rect">
-            <a:avLst/>
-          </a:prstGeom>
-          <a:solidFill xmlns:a="http://schemas.openxmlformats.org/drawingml/2006/main">
+          <a:prstGeom prst="rect">
+            <a:avLst/>
+          </a:prstGeom>
+          <a:solidFill>
             <a:srgbClr val="000000">
               <a:alpha val="0"/>
             </a:srgbClr>
           </a:solidFill>
-          <a:ln xmlns:a="http://schemas.openxmlformats.org/drawingml/2006/main" w="0">
+          <a:ln w="0">
             <a:solidFill>
               <a:srgbClr val="000000">
                 <a:alpha val="0"/>
@@ -8319,9 +8360,9 @@
           </a:ln>
         </p:spPr>
         <p:txBody>
-          <a:bodyPr xmlns:a="http://schemas.openxmlformats.org/drawingml/2006/main" lIns="0" tIns="0" rIns="0" bIns="0" anchor="t"/>
-          <a:lstStyle xmlns:a="http://schemas.openxmlformats.org/drawingml/2006/main"/>
-          <a:p xmlns:a="http://schemas.openxmlformats.org/drawingml/2006/main">
+          <a:bodyPr lIns="0" tIns="0" rIns="0" bIns="0" anchor="t"/>
+          <a:lstStyle/>
+          <a:p>
             <a:pPr algn="ctr">
               <a:defRPr sz="1200" b="1">
                 <a:solidFill>
@@ -8335,7 +8376,7 @@
                   <a:srgbClr val="172026"/>
                 </a:solidFill>
               </a:rPr>
-              <a:t>AlertRule</a:t>
+              <a:t>TradingStrategy</a:t>
             </a:r>
           </a:p>
         </p:txBody>
@@ -8343,29 +8384,29 @@
       <p:sp>
         <p:nvSpPr>
           <p:cNvPr id="22" name="">
-            <a:extLst xmlns:a="http://schemas.openxmlformats.org/drawingml/2006/main">
-              <a:ext uri="{FF2B5EF4-FFF2-40B4-BE49-F238E27FC236}">
-                <a16:creationId xmlns:a16="http://schemas.microsoft.com/office/drawing/2014/main" id="{E558AF6C-33C7-4B7A-9B78-5AD033D4A5A5}"/>
-              </a:ext>
-            </a:extLst>
-          </p:cNvPr>
-          <p:cNvSpPr>
-            <a:spLocks xmlns:a="http://schemas.openxmlformats.org/drawingml/2006/main" noGrp="1"/>
-          </p:cNvSpPr>
-          <p:nvPr/>
-        </p:nvSpPr>
-        <p:spPr>
-          <a:xfrm xmlns:a="http://schemas.openxmlformats.org/drawingml/2006/main" rot="0">
+            <a:extLst>
+              <a:ext uri="{FF2B5EF4-FFF2-40B4-BE49-F238E27FC236}">
+                <ns2:creationId id="{E558AF6C-33C7-4B7A-9B78-5AD033D4A5A5}"/>
+              </a:ext>
+            </a:extLst>
+          </p:cNvPr>
+          <p:cNvSpPr>
+            <a:spLocks noGrp="1"/>
+          </p:cNvSpPr>
+          <p:nvPr/>
+        </p:nvSpPr>
+        <p:spPr>
+          <a:xfrm rot="0">
             <a:off x="5867400" y="4972050"/>
             <a:ext cx="552450" cy="133350"/>
           </a:xfrm>
-          <a:prstGeom xmlns:a="http://schemas.openxmlformats.org/drawingml/2006/main" prst="rightArrow">
-            <a:avLst/>
-          </a:prstGeom>
-          <a:solidFill xmlns:a="http://schemas.openxmlformats.org/drawingml/2006/main">
+          <a:prstGeom prst="rightArrow">
+            <a:avLst/>
+          </a:prstGeom>
+          <a:solidFill>
             <a:srgbClr val="172026"/>
           </a:solidFill>
-          <a:ln xmlns:a="http://schemas.openxmlformats.org/drawingml/2006/main" w="0">
+          <a:ln w="0">
             <a:solidFill>
               <a:srgbClr val="172026"/>
             </a:solidFill>
@@ -8376,31 +8417,31 @@
       <p:sp>
         <p:nvSpPr>
           <p:cNvPr id="23" name="">
-            <a:extLst xmlns:a="http://schemas.openxmlformats.org/drawingml/2006/main">
-              <a:ext uri="{FF2B5EF4-FFF2-40B4-BE49-F238E27FC236}">
-                <a16:creationId xmlns:a16="http://schemas.microsoft.com/office/drawing/2014/main" id="{029B7255-BCA3-4868-B805-CFC532228C13}"/>
-              </a:ext>
-            </a:extLst>
-          </p:cNvPr>
-          <p:cNvSpPr>
-            <a:spLocks xmlns:a="http://schemas.openxmlformats.org/drawingml/2006/main" noGrp="1"/>
-          </p:cNvSpPr>
-          <p:nvPr/>
-        </p:nvSpPr>
-        <p:spPr>
-          <a:xfrm xmlns:a="http://schemas.openxmlformats.org/drawingml/2006/main" rot="0">
+            <a:extLst>
+              <a:ext uri="{FF2B5EF4-FFF2-40B4-BE49-F238E27FC236}">
+                <ns2:creationId id="{029B7255-BCA3-4868-B805-CFC532228C13}"/>
+              </a:ext>
+            </a:extLst>
+          </p:cNvPr>
+          <p:cNvSpPr>
+            <a:spLocks noGrp="1"/>
+          </p:cNvSpPr>
+          <p:nvPr/>
+        </p:nvSpPr>
+        <p:spPr>
+          <a:xfrm rot="0">
             <a:off x="6553200" y="4686300"/>
             <a:ext cx="952500" cy="342900"/>
           </a:xfrm>
-          <a:prstGeom xmlns:a="http://schemas.openxmlformats.org/drawingml/2006/main" prst="roundRect">
+          <a:prstGeom prst="roundRect">
             <a:avLst>
               <a:gd name="adj" fmla="val 22222"/>
             </a:avLst>
           </a:prstGeom>
-          <a:solidFill xmlns:a="http://schemas.openxmlformats.org/drawingml/2006/main">
+          <a:solidFill>
             <a:srgbClr val="DFF5EC"/>
           </a:solidFill>
-          <a:ln xmlns:a="http://schemas.openxmlformats.org/drawingml/2006/main" w="10478">
+          <a:ln w="10478">
             <a:solidFill>
               <a:srgbClr val="23313B"/>
             </a:solidFill>
@@ -8411,31 +8452,31 @@
       <p:sp>
         <p:nvSpPr>
           <p:cNvPr id="24" name="">
-            <a:extLst xmlns:a="http://schemas.openxmlformats.org/drawingml/2006/main">
-              <a:ext uri="{FF2B5EF4-FFF2-40B4-BE49-F238E27FC236}">
-                <a16:creationId xmlns:a16="http://schemas.microsoft.com/office/drawing/2014/main" id="{0BD610A4-C657-4105-A5CF-A9E58859D63E}"/>
-              </a:ext>
-            </a:extLst>
-          </p:cNvPr>
-          <p:cNvSpPr>
-            <a:spLocks xmlns:a="http://schemas.openxmlformats.org/drawingml/2006/main" noGrp="1"/>
-          </p:cNvSpPr>
-          <p:nvPr/>
-        </p:nvSpPr>
-        <p:spPr>
-          <a:xfrm xmlns:a="http://schemas.openxmlformats.org/drawingml/2006/main" rot="0">
+            <a:extLst>
+              <a:ext uri="{FF2B5EF4-FFF2-40B4-BE49-F238E27FC236}">
+                <ns2:creationId id="{0BD610A4-C657-4105-A5CF-A9E58859D63E}"/>
+              </a:ext>
+            </a:extLst>
+          </p:cNvPr>
+          <p:cNvSpPr>
+            <a:spLocks noGrp="1"/>
+          </p:cNvSpPr>
+          <p:nvPr/>
+        </p:nvSpPr>
+        <p:spPr>
+          <a:xfrm rot="0">
             <a:off x="6553200" y="4772025"/>
             <a:ext cx="952500" cy="171450"/>
           </a:xfrm>
-          <a:prstGeom xmlns:a="http://schemas.openxmlformats.org/drawingml/2006/main" prst="rect">
-            <a:avLst/>
-          </a:prstGeom>
-          <a:solidFill xmlns:a="http://schemas.openxmlformats.org/drawingml/2006/main">
+          <a:prstGeom prst="rect">
+            <a:avLst/>
+          </a:prstGeom>
+          <a:solidFill>
             <a:srgbClr val="000000">
               <a:alpha val="0"/>
             </a:srgbClr>
           </a:solidFill>
-          <a:ln xmlns:a="http://schemas.openxmlformats.org/drawingml/2006/main" w="0">
+          <a:ln w="0">
             <a:solidFill>
               <a:srgbClr val="000000">
                 <a:alpha val="0"/>
@@ -8445,9 +8486,9 @@
           </a:ln>
         </p:spPr>
         <p:txBody>
-          <a:bodyPr xmlns:a="http://schemas.openxmlformats.org/drawingml/2006/main" lIns="0" tIns="0" rIns="0" bIns="0" anchor="t"/>
-          <a:lstStyle xmlns:a="http://schemas.openxmlformats.org/drawingml/2006/main"/>
-          <a:p xmlns:a="http://schemas.openxmlformats.org/drawingml/2006/main">
+          <a:bodyPr lIns="0" tIns="0" rIns="0" bIns="0" anchor="t"/>
+          <a:lstStyle/>
+          <a:p>
             <a:pPr algn="ctr">
               <a:defRPr sz="975" b="1">
                 <a:solidFill>
@@ -8461,7 +8502,7 @@
                   <a:srgbClr val="172026"/>
                 </a:solidFill>
               </a:rPr>
-              <a:t>PriceAbove</a:t>
+              <a:t>MA Cross</a:t>
             </a:r>
           </a:p>
         </p:txBody>
@@ -8469,31 +8510,31 @@
       <p:sp>
         <p:nvSpPr>
           <p:cNvPr id="25" name="">
-            <a:extLst xmlns:a="http://schemas.openxmlformats.org/drawingml/2006/main">
-              <a:ext uri="{FF2B5EF4-FFF2-40B4-BE49-F238E27FC236}">
-                <a16:creationId xmlns:a16="http://schemas.microsoft.com/office/drawing/2014/main" id="{428D9EA6-AEA6-4AF6-B999-4EBB07F3C40A}"/>
-              </a:ext>
-            </a:extLst>
-          </p:cNvPr>
-          <p:cNvSpPr>
-            <a:spLocks xmlns:a="http://schemas.openxmlformats.org/drawingml/2006/main" noGrp="1"/>
-          </p:cNvSpPr>
-          <p:nvPr/>
-        </p:nvSpPr>
-        <p:spPr>
-          <a:xfrm xmlns:a="http://schemas.openxmlformats.org/drawingml/2006/main" rot="0">
+            <a:extLst>
+              <a:ext uri="{FF2B5EF4-FFF2-40B4-BE49-F238E27FC236}">
+                <ns2:creationId id="{428D9EA6-AEA6-4AF6-B999-4EBB07F3C40A}"/>
+              </a:ext>
+            </a:extLst>
+          </p:cNvPr>
+          <p:cNvSpPr>
+            <a:spLocks noGrp="1"/>
+          </p:cNvSpPr>
+          <p:nvPr/>
+        </p:nvSpPr>
+        <p:spPr>
+          <a:xfrm rot="0">
             <a:off x="6553200" y="5105400"/>
             <a:ext cx="952500" cy="342900"/>
           </a:xfrm>
-          <a:prstGeom xmlns:a="http://schemas.openxmlformats.org/drawingml/2006/main" prst="roundRect">
+          <a:prstGeom prst="roundRect">
             <a:avLst>
               <a:gd name="adj" fmla="val 22222"/>
             </a:avLst>
           </a:prstGeom>
-          <a:solidFill xmlns:a="http://schemas.openxmlformats.org/drawingml/2006/main">
+          <a:solidFill>
             <a:srgbClr val="E5EEFF"/>
           </a:solidFill>
-          <a:ln xmlns:a="http://schemas.openxmlformats.org/drawingml/2006/main" w="10478">
+          <a:ln w="10478">
             <a:solidFill>
               <a:srgbClr val="23313B"/>
             </a:solidFill>
@@ -8504,31 +8545,31 @@
       <p:sp>
         <p:nvSpPr>
           <p:cNvPr id="26" name="">
-            <a:extLst xmlns:a="http://schemas.openxmlformats.org/drawingml/2006/main">
-              <a:ext uri="{FF2B5EF4-FFF2-40B4-BE49-F238E27FC236}">
-                <a16:creationId xmlns:a16="http://schemas.microsoft.com/office/drawing/2014/main" id="{63E9EC2B-A303-4243-BB89-D11D7FA72973}"/>
-              </a:ext>
-            </a:extLst>
-          </p:cNvPr>
-          <p:cNvSpPr>
-            <a:spLocks xmlns:a="http://schemas.openxmlformats.org/drawingml/2006/main" noGrp="1"/>
-          </p:cNvSpPr>
-          <p:nvPr/>
-        </p:nvSpPr>
-        <p:spPr>
-          <a:xfrm xmlns:a="http://schemas.openxmlformats.org/drawingml/2006/main" rot="0">
+            <a:extLst>
+              <a:ext uri="{FF2B5EF4-FFF2-40B4-BE49-F238E27FC236}">
+                <ns2:creationId id="{63E9EC2B-A303-4243-BB89-D11D7FA72973}"/>
+              </a:ext>
+            </a:extLst>
+          </p:cNvPr>
+          <p:cNvSpPr>
+            <a:spLocks noGrp="1"/>
+          </p:cNvSpPr>
+          <p:nvPr/>
+        </p:nvSpPr>
+        <p:spPr>
+          <a:xfrm rot="0">
             <a:off x="6553200" y="5191125"/>
             <a:ext cx="952500" cy="171450"/>
           </a:xfrm>
-          <a:prstGeom xmlns:a="http://schemas.openxmlformats.org/drawingml/2006/main" prst="rect">
-            <a:avLst/>
-          </a:prstGeom>
-          <a:solidFill xmlns:a="http://schemas.openxmlformats.org/drawingml/2006/main">
+          <a:prstGeom prst="rect">
+            <a:avLst/>
+          </a:prstGeom>
+          <a:solidFill>
             <a:srgbClr val="000000">
               <a:alpha val="0"/>
             </a:srgbClr>
           </a:solidFill>
-          <a:ln xmlns:a="http://schemas.openxmlformats.org/drawingml/2006/main" w="0">
+          <a:ln w="0">
             <a:solidFill>
               <a:srgbClr val="000000">
                 <a:alpha val="0"/>
@@ -8538,9 +8579,9 @@
           </a:ln>
         </p:spPr>
         <p:txBody>
-          <a:bodyPr xmlns:a="http://schemas.openxmlformats.org/drawingml/2006/main" lIns="0" tIns="0" rIns="0" bIns="0" anchor="t"/>
-          <a:lstStyle xmlns:a="http://schemas.openxmlformats.org/drawingml/2006/main"/>
-          <a:p xmlns:a="http://schemas.openxmlformats.org/drawingml/2006/main">
+          <a:bodyPr lIns="0" tIns="0" rIns="0" bIns="0" anchor="t"/>
+          <a:lstStyle/>
+          <a:p>
             <a:pPr algn="ctr">
               <a:defRPr sz="975" b="1">
                 <a:solidFill>
@@ -8554,7 +8595,7 @@
                   <a:srgbClr val="172026"/>
                 </a:solidFill>
               </a:rPr>
-              <a:t>PercentChange</a:t>
+              <a:t>RSI / Breakout</a:t>
             </a:r>
           </a:p>
         </p:txBody>
@@ -8562,31 +8603,31 @@
       <p:sp>
         <p:nvSpPr>
           <p:cNvPr id="27" name="">
-            <a:extLst xmlns:a="http://schemas.openxmlformats.org/drawingml/2006/main">
-              <a:ext uri="{FF2B5EF4-FFF2-40B4-BE49-F238E27FC236}">
-                <a16:creationId xmlns:a16="http://schemas.microsoft.com/office/drawing/2014/main" id="{80A9362A-C429-4659-8FD6-5D3ED8A3C8AB}"/>
-              </a:ext>
-            </a:extLst>
-          </p:cNvPr>
-          <p:cNvSpPr>
-            <a:spLocks xmlns:a="http://schemas.openxmlformats.org/drawingml/2006/main" noGrp="1"/>
-          </p:cNvSpPr>
-          <p:nvPr/>
-        </p:nvSpPr>
-        <p:spPr>
-          <a:xfrm xmlns:a="http://schemas.openxmlformats.org/drawingml/2006/main" rot="0">
+            <a:extLst>
+              <a:ext uri="{FF2B5EF4-FFF2-40B4-BE49-F238E27FC236}">
+                <ns2:creationId id="{80A9362A-C429-4659-8FD6-5D3ED8A3C8AB}"/>
+              </a:ext>
+            </a:extLst>
+          </p:cNvPr>
+          <p:cNvSpPr>
+            <a:spLocks noGrp="1"/>
+          </p:cNvSpPr>
+          <p:nvPr/>
+        </p:nvSpPr>
+        <p:spPr>
+          <a:xfrm rot="0">
             <a:off x="609600" y="6534150"/>
             <a:ext cx="9715500" cy="171450"/>
           </a:xfrm>
-          <a:prstGeom xmlns:a="http://schemas.openxmlformats.org/drawingml/2006/main" prst="rect">
-            <a:avLst/>
-          </a:prstGeom>
-          <a:solidFill xmlns:a="http://schemas.openxmlformats.org/drawingml/2006/main">
+          <a:prstGeom prst="rect">
+            <a:avLst/>
+          </a:prstGeom>
+          <a:solidFill>
             <a:srgbClr val="000000">
               <a:alpha val="0"/>
             </a:srgbClr>
           </a:solidFill>
-          <a:ln xmlns:a="http://schemas.openxmlformats.org/drawingml/2006/main" w="0">
+          <a:ln w="0">
             <a:solidFill>
               <a:srgbClr val="000000">
                 <a:alpha val="0"/>
@@ -8596,9 +8637,9 @@
           </a:ln>
         </p:spPr>
         <p:txBody>
-          <a:bodyPr xmlns:a="http://schemas.openxmlformats.org/drawingml/2006/main" lIns="0" tIns="0" rIns="0" bIns="0" anchor="t"/>
-          <a:lstStyle xmlns:a="http://schemas.openxmlformats.org/drawingml/2006/main"/>
-          <a:p xmlns:a="http://schemas.openxmlformats.org/drawingml/2006/main">
+          <a:bodyPr lIns="0" tIns="0" rIns="0" bIns="0" anchor="t"/>
+          <a:lstStyle/>
+          <a:p>
             <a:pPr algn="l">
               <a:defRPr sz="750" b="0">
                 <a:solidFill>
@@ -8620,7 +8661,7 @@
     </p:spTree>
     <p:extLst>
       <p:ext uri="{BB962C8B-B14F-4D97-AF65-F5344CB8AC3E}">
-        <p14:creationId xmlns:p14="http://schemas.microsoft.com/office/powerpoint/2010/main" val="868772418"/>
+        <ns3:creationId val="868772418"/>
       </p:ext>
     </p:extLst>
   </p:cSld>
@@ -8628,11 +8669,11 @@
 </file>
 
 <file path=ppt/slides/slide12.xml><?xml version="1.0" encoding="utf-8"?>
-<p:sld xmlns:p="http://schemas.openxmlformats.org/presentationml/2006/main">
+<p:sld xmlns:a="http://schemas.openxmlformats.org/drawingml/2006/main" xmlns:ns2="http://schemas.microsoft.com/office/drawing/2014/main" xmlns:ns3="http://schemas.microsoft.com/office/powerpoint/2010/main" xmlns:p="http://schemas.openxmlformats.org/presentationml/2006/main">
   <p:cSld>
     <p:bg>
       <p:bgPr>
-        <a:solidFill xmlns:a="http://schemas.openxmlformats.org/drawingml/2006/main">
+        <a:solidFill>
           <a:srgbClr val="F5F1E8"/>
         </a:solidFill>
       </p:bgPr>
@@ -8644,34 +8685,34 @@
         <p:nvPr/>
       </p:nvGrpSpPr>
       <p:grpSpPr>
-        <a:xfrm xmlns:a="http://schemas.openxmlformats.org/drawingml/2006/main"/>
+        <a:xfrm/>
       </p:grpSpPr>
       <p:sp>
         <p:nvSpPr>
           <p:cNvPr id="1" name="">
-            <a:extLst xmlns:a="http://schemas.openxmlformats.org/drawingml/2006/main">
-              <a:ext uri="{FF2B5EF4-FFF2-40B4-BE49-F238E27FC236}">
-                <a16:creationId xmlns:a16="http://schemas.microsoft.com/office/drawing/2014/main" id="{C728322D-3D86-4B09-B39C-917C2B112803}"/>
-              </a:ext>
-            </a:extLst>
-          </p:cNvPr>
-          <p:cNvSpPr>
-            <a:spLocks xmlns:a="http://schemas.openxmlformats.org/drawingml/2006/main" noGrp="1"/>
-          </p:cNvSpPr>
-          <p:nvPr/>
-        </p:nvSpPr>
-        <p:spPr>
-          <a:xfrm xmlns:a="http://schemas.openxmlformats.org/drawingml/2006/main" rot="0">
+            <a:extLst>
+              <a:ext uri="{FF2B5EF4-FFF2-40B4-BE49-F238E27FC236}">
+                <ns2:creationId id="{C728322D-3D86-4B09-B39C-917C2B112803}"/>
+              </a:ext>
+            </a:extLst>
+          </p:cNvPr>
+          <p:cNvSpPr>
+            <a:spLocks noGrp="1"/>
+          </p:cNvSpPr>
+          <p:nvPr/>
+        </p:nvSpPr>
+        <p:spPr>
+          <a:xfrm rot="0">
             <a:off x="9620250" y="-857250"/>
             <a:ext cx="3429000" cy="3429000"/>
           </a:xfrm>
-          <a:prstGeom xmlns:a="http://schemas.openxmlformats.org/drawingml/2006/main" prst="ellipse">
-            <a:avLst/>
-          </a:prstGeom>
-          <a:solidFill xmlns:a="http://schemas.openxmlformats.org/drawingml/2006/main">
+          <a:prstGeom prst="ellipse">
+            <a:avLst/>
+          </a:prstGeom>
+          <a:solidFill>
             <a:srgbClr val="DFF5EC"/>
           </a:solidFill>
-          <a:ln xmlns:a="http://schemas.openxmlformats.org/drawingml/2006/main" w="0">
+          <a:ln w="0">
             <a:solidFill>
               <a:srgbClr val="000000">
                 <a:alpha val="0"/>
@@ -8684,29 +8725,29 @@
       <p:sp>
         <p:nvSpPr>
           <p:cNvPr id="2" name="">
-            <a:extLst xmlns:a="http://schemas.openxmlformats.org/drawingml/2006/main">
-              <a:ext uri="{FF2B5EF4-FFF2-40B4-BE49-F238E27FC236}">
-                <a16:creationId xmlns:a16="http://schemas.microsoft.com/office/drawing/2014/main" id="{AFBB68BD-2E52-4C6C-9C63-304F6D7ACE21}"/>
-              </a:ext>
-            </a:extLst>
-          </p:cNvPr>
-          <p:cNvSpPr>
-            <a:spLocks xmlns:a="http://schemas.openxmlformats.org/drawingml/2006/main" noGrp="1"/>
-          </p:cNvSpPr>
-          <p:nvPr/>
-        </p:nvSpPr>
-        <p:spPr>
-          <a:xfrm xmlns:a="http://schemas.openxmlformats.org/drawingml/2006/main" rot="0">
+            <a:extLst>
+              <a:ext uri="{FF2B5EF4-FFF2-40B4-BE49-F238E27FC236}">
+                <ns2:creationId id="{AFBB68BD-2E52-4C6C-9C63-304F6D7ACE21}"/>
+              </a:ext>
+            </a:extLst>
+          </p:cNvPr>
+          <p:cNvSpPr>
+            <a:spLocks noGrp="1"/>
+          </p:cNvSpPr>
+          <p:nvPr/>
+        </p:nvSpPr>
+        <p:spPr>
+          <a:xfrm rot="0">
             <a:off x="-857250" y="5334000"/>
             <a:ext cx="2286000" cy="2286000"/>
           </a:xfrm>
-          <a:prstGeom xmlns:a="http://schemas.openxmlformats.org/drawingml/2006/main" prst="ellipse">
-            <a:avLst/>
-          </a:prstGeom>
-          <a:solidFill xmlns:a="http://schemas.openxmlformats.org/drawingml/2006/main">
+          <a:prstGeom prst="ellipse">
+            <a:avLst/>
+          </a:prstGeom>
+          <a:solidFill>
             <a:srgbClr val="FAEFD9"/>
           </a:solidFill>
-          <a:ln xmlns:a="http://schemas.openxmlformats.org/drawingml/2006/main" w="0">
+          <a:ln w="0">
             <a:solidFill>
               <a:srgbClr val="000000">
                 <a:alpha val="0"/>
@@ -8719,31 +8760,31 @@
       <p:sp>
         <p:nvSpPr>
           <p:cNvPr id="3" name="">
-            <a:extLst xmlns:a="http://schemas.openxmlformats.org/drawingml/2006/main">
-              <a:ext uri="{FF2B5EF4-FFF2-40B4-BE49-F238E27FC236}">
-                <a16:creationId xmlns:a16="http://schemas.microsoft.com/office/drawing/2014/main" id="{F08D0F6B-CF2D-4D11-9F97-C807ABEB7409}"/>
-              </a:ext>
-            </a:extLst>
-          </p:cNvPr>
-          <p:cNvSpPr>
-            <a:spLocks xmlns:a="http://schemas.openxmlformats.org/drawingml/2006/main" noGrp="1"/>
-          </p:cNvSpPr>
-          <p:nvPr/>
-        </p:nvSpPr>
-        <p:spPr>
-          <a:xfrm xmlns:a="http://schemas.openxmlformats.org/drawingml/2006/main" rot="0">
+            <a:extLst>
+              <a:ext uri="{FF2B5EF4-FFF2-40B4-BE49-F238E27FC236}">
+                <ns2:creationId id="{F08D0F6B-CF2D-4D11-9F97-C807ABEB7409}"/>
+              </a:ext>
+            </a:extLst>
+          </p:cNvPr>
+          <p:cNvSpPr>
+            <a:spLocks noGrp="1"/>
+          </p:cNvSpPr>
+          <p:nvPr/>
+        </p:nvSpPr>
+        <p:spPr>
+          <a:xfrm rot="0">
             <a:off x="609600" y="266700"/>
             <a:ext cx="3429000" cy="171450"/>
           </a:xfrm>
-          <a:prstGeom xmlns:a="http://schemas.openxmlformats.org/drawingml/2006/main" prst="rect">
-            <a:avLst/>
-          </a:prstGeom>
-          <a:solidFill xmlns:a="http://schemas.openxmlformats.org/drawingml/2006/main">
+          <a:prstGeom prst="rect">
+            <a:avLst/>
+          </a:prstGeom>
+          <a:solidFill>
             <a:srgbClr val="000000">
               <a:alpha val="0"/>
             </a:srgbClr>
           </a:solidFill>
-          <a:ln xmlns:a="http://schemas.openxmlformats.org/drawingml/2006/main" w="0">
+          <a:ln w="0">
             <a:solidFill>
               <a:srgbClr val="000000">
                 <a:alpha val="0"/>
@@ -8753,9 +8794,9 @@
           </a:ln>
         </p:spPr>
         <p:txBody>
-          <a:bodyPr xmlns:a="http://schemas.openxmlformats.org/drawingml/2006/main" lIns="0" tIns="0" rIns="0" bIns="0" anchor="t"/>
-          <a:lstStyle xmlns:a="http://schemas.openxmlformats.org/drawingml/2006/main"/>
-          <a:p xmlns:a="http://schemas.openxmlformats.org/drawingml/2006/main">
+          <a:bodyPr lIns="0" tIns="0" rIns="0" bIns="0" anchor="t"/>
+          <a:lstStyle/>
+          <a:p>
             <a:pPr algn="l">
               <a:defRPr sz="825" b="1">
                 <a:solidFill>
@@ -8777,31 +8818,31 @@
       <p:sp>
         <p:nvSpPr>
           <p:cNvPr id="4" name="">
-            <a:extLst xmlns:a="http://schemas.openxmlformats.org/drawingml/2006/main">
-              <a:ext uri="{FF2B5EF4-FFF2-40B4-BE49-F238E27FC236}">
-                <a16:creationId xmlns:a16="http://schemas.microsoft.com/office/drawing/2014/main" id="{458B74BF-30F1-43A1-B73C-16DA7C548F5B}"/>
-              </a:ext>
-            </a:extLst>
-          </p:cNvPr>
-          <p:cNvSpPr>
-            <a:spLocks xmlns:a="http://schemas.openxmlformats.org/drawingml/2006/main" noGrp="1"/>
-          </p:cNvSpPr>
-          <p:nvPr/>
-        </p:nvSpPr>
-        <p:spPr>
-          <a:xfrm xmlns:a="http://schemas.openxmlformats.org/drawingml/2006/main" rot="0">
+            <a:extLst>
+              <a:ext uri="{FF2B5EF4-FFF2-40B4-BE49-F238E27FC236}">
+                <ns2:creationId id="{458B74BF-30F1-43A1-B73C-16DA7C548F5B}"/>
+              </a:ext>
+            </a:extLst>
+          </p:cNvPr>
+          <p:cNvSpPr>
+            <a:spLocks noGrp="1"/>
+          </p:cNvSpPr>
+          <p:nvPr/>
+        </p:nvSpPr>
+        <p:spPr>
+          <a:xfrm rot="0">
             <a:off x="11163300" y="247650"/>
             <a:ext cx="419100" cy="190500"/>
           </a:xfrm>
-          <a:prstGeom xmlns:a="http://schemas.openxmlformats.org/drawingml/2006/main" prst="rect">
-            <a:avLst/>
-          </a:prstGeom>
-          <a:solidFill xmlns:a="http://schemas.openxmlformats.org/drawingml/2006/main">
+          <a:prstGeom prst="rect">
+            <a:avLst/>
+          </a:prstGeom>
+          <a:solidFill>
             <a:srgbClr val="000000">
               <a:alpha val="0"/>
             </a:srgbClr>
           </a:solidFill>
-          <a:ln xmlns:a="http://schemas.openxmlformats.org/drawingml/2006/main" w="0">
+          <a:ln w="0">
             <a:solidFill>
               <a:srgbClr val="000000">
                 <a:alpha val="0"/>
@@ -8811,9 +8852,9 @@
           </a:ln>
         </p:spPr>
         <p:txBody>
-          <a:bodyPr xmlns:a="http://schemas.openxmlformats.org/drawingml/2006/main" lIns="0" tIns="0" rIns="0" bIns="0" anchor="t"/>
-          <a:lstStyle xmlns:a="http://schemas.openxmlformats.org/drawingml/2006/main"/>
-          <a:p xmlns:a="http://schemas.openxmlformats.org/drawingml/2006/main">
+          <a:bodyPr lIns="0" tIns="0" rIns="0" bIns="0" anchor="t"/>
+          <a:lstStyle/>
+          <a:p>
             <a:pPr algn="r">
               <a:defRPr sz="900" b="1">
                 <a:solidFill>
@@ -8835,29 +8876,29 @@
       <p:sp>
         <p:nvSpPr>
           <p:cNvPr id="5" name="">
-            <a:extLst xmlns:a="http://schemas.openxmlformats.org/drawingml/2006/main">
-              <a:ext uri="{FF2B5EF4-FFF2-40B4-BE49-F238E27FC236}">
-                <a16:creationId xmlns:a16="http://schemas.microsoft.com/office/drawing/2014/main" id="{FCF240D4-74A8-466F-AE56-682EAD24CD82}"/>
-              </a:ext>
-            </a:extLst>
-          </p:cNvPr>
-          <p:cNvSpPr>
-            <a:spLocks xmlns:a="http://schemas.openxmlformats.org/drawingml/2006/main" noGrp="1"/>
-          </p:cNvSpPr>
-          <p:nvPr/>
-        </p:nvSpPr>
-        <p:spPr>
-          <a:xfrm xmlns:a="http://schemas.openxmlformats.org/drawingml/2006/main" rot="0">
+            <a:extLst>
+              <a:ext uri="{FF2B5EF4-FFF2-40B4-BE49-F238E27FC236}">
+                <ns2:creationId id="{FCF240D4-74A8-466F-AE56-682EAD24CD82}"/>
+              </a:ext>
+            </a:extLst>
+          </p:cNvPr>
+          <p:cNvSpPr>
+            <a:spLocks noGrp="1"/>
+          </p:cNvSpPr>
+          <p:nvPr/>
+        </p:nvSpPr>
+        <p:spPr>
+          <a:xfrm rot="0">
             <a:off x="609600" y="514350"/>
             <a:ext cx="10972800" cy="19050"/>
           </a:xfrm>
-          <a:prstGeom xmlns:a="http://schemas.openxmlformats.org/drawingml/2006/main" prst="rect">
-            <a:avLst/>
-          </a:prstGeom>
-          <a:solidFill xmlns:a="http://schemas.openxmlformats.org/drawingml/2006/main">
+          <a:prstGeom prst="rect">
+            <a:avLst/>
+          </a:prstGeom>
+          <a:solidFill>
             <a:srgbClr val="23313B"/>
           </a:solidFill>
-          <a:ln xmlns:a="http://schemas.openxmlformats.org/drawingml/2006/main" w="0">
+          <a:ln w="0">
             <a:solidFill>
               <a:srgbClr val="000000">
                 <a:alpha val="0"/>
@@ -8870,31 +8911,31 @@
       <p:sp>
         <p:nvSpPr>
           <p:cNvPr id="6" name="">
-            <a:extLst xmlns:a="http://schemas.openxmlformats.org/drawingml/2006/main">
-              <a:ext uri="{FF2B5EF4-FFF2-40B4-BE49-F238E27FC236}">
-                <a16:creationId xmlns:a16="http://schemas.microsoft.com/office/drawing/2014/main" id="{965B99A4-3384-48EB-B227-11523E5F4252}"/>
-              </a:ext>
-            </a:extLst>
-          </p:cNvPr>
-          <p:cNvSpPr>
-            <a:spLocks xmlns:a="http://schemas.openxmlformats.org/drawingml/2006/main" noGrp="1"/>
-          </p:cNvSpPr>
-          <p:nvPr/>
-        </p:nvSpPr>
-        <p:spPr>
-          <a:xfrm xmlns:a="http://schemas.openxmlformats.org/drawingml/2006/main" rot="0">
+            <a:extLst>
+              <a:ext uri="{FF2B5EF4-FFF2-40B4-BE49-F238E27FC236}">
+                <ns2:creationId id="{965B99A4-3384-48EB-B227-11523E5F4252}"/>
+              </a:ext>
+            </a:extLst>
+          </p:cNvPr>
+          <p:cNvSpPr>
+            <a:spLocks noGrp="1"/>
+          </p:cNvSpPr>
+          <p:nvPr/>
+        </p:nvSpPr>
+        <p:spPr>
+          <a:xfrm rot="0">
             <a:off x="609600" y="781050"/>
             <a:ext cx="8858250" cy="514350"/>
           </a:xfrm>
-          <a:prstGeom xmlns:a="http://schemas.openxmlformats.org/drawingml/2006/main" prst="rect">
-            <a:avLst/>
-          </a:prstGeom>
-          <a:solidFill xmlns:a="http://schemas.openxmlformats.org/drawingml/2006/main">
+          <a:prstGeom prst="rect">
+            <a:avLst/>
+          </a:prstGeom>
+          <a:solidFill>
             <a:srgbClr val="000000">
               <a:alpha val="0"/>
             </a:srgbClr>
           </a:solidFill>
-          <a:ln xmlns:a="http://schemas.openxmlformats.org/drawingml/2006/main" w="0">
+          <a:ln w="0">
             <a:solidFill>
               <a:srgbClr val="000000">
                 <a:alpha val="0"/>
@@ -8904,9 +8945,9 @@
           </a:ln>
         </p:spPr>
         <p:txBody>
-          <a:bodyPr xmlns:a="http://schemas.openxmlformats.org/drawingml/2006/main" lIns="0" tIns="0" rIns="0" bIns="0" anchor="t"/>
-          <a:lstStyle xmlns:a="http://schemas.openxmlformats.org/drawingml/2006/main"/>
-          <a:p xmlns:a="http://schemas.openxmlformats.org/drawingml/2006/main">
+          <a:bodyPr lIns="0" tIns="0" rIns="0" bIns="0" anchor="t"/>
+          <a:lstStyle/>
+          <a:p>
             <a:pPr algn="l">
               <a:defRPr sz="2400" b="1">
                 <a:solidFill>
@@ -8920,7 +8961,7 @@
                   <a:srgbClr val="172026"/>
                 </a:solidFill>
               </a:rPr>
-              <a:t>設計模式 2 - Factory Pattern</a:t>
+              <a:t>設計模式 2 - Template Method Pattern</a:t>
             </a:r>
           </a:p>
         </p:txBody>
@@ -8928,31 +8969,31 @@
       <p:sp>
         <p:nvSpPr>
           <p:cNvPr id="7" name="">
-            <a:extLst xmlns:a="http://schemas.openxmlformats.org/drawingml/2006/main">
-              <a:ext uri="{FF2B5EF4-FFF2-40B4-BE49-F238E27FC236}">
-                <a16:creationId xmlns:a16="http://schemas.microsoft.com/office/drawing/2014/main" id="{25435270-FA93-4477-9F64-8E1780E9F60D}"/>
-              </a:ext>
-            </a:extLst>
-          </p:cNvPr>
-          <p:cNvSpPr>
-            <a:spLocks xmlns:a="http://schemas.openxmlformats.org/drawingml/2006/main" noGrp="1"/>
-          </p:cNvSpPr>
-          <p:nvPr/>
-        </p:nvSpPr>
-        <p:spPr>
-          <a:xfrm xmlns:a="http://schemas.openxmlformats.org/drawingml/2006/main" rot="0">
+            <a:extLst>
+              <a:ext uri="{FF2B5EF4-FFF2-40B4-BE49-F238E27FC236}">
+                <ns2:creationId id="{25435270-FA93-4477-9F64-8E1780E9F60D}"/>
+              </a:ext>
+            </a:extLst>
+          </p:cNvPr>
+          <p:cNvSpPr>
+            <a:spLocks noGrp="1"/>
+          </p:cNvSpPr>
+          <p:nvPr/>
+        </p:nvSpPr>
+        <p:spPr>
+          <a:xfrm rot="0">
             <a:off x="628650" y="1257300"/>
             <a:ext cx="9334500" cy="400050"/>
           </a:xfrm>
-          <a:prstGeom xmlns:a="http://schemas.openxmlformats.org/drawingml/2006/main" prst="rect">
-            <a:avLst/>
-          </a:prstGeom>
-          <a:solidFill xmlns:a="http://schemas.openxmlformats.org/drawingml/2006/main">
+          <a:prstGeom prst="rect">
+            <a:avLst/>
+          </a:prstGeom>
+          <a:solidFill>
             <a:srgbClr val="000000">
               <a:alpha val="0"/>
             </a:srgbClr>
           </a:solidFill>
-          <a:ln xmlns:a="http://schemas.openxmlformats.org/drawingml/2006/main" w="0">
+          <a:ln w="0">
             <a:solidFill>
               <a:srgbClr val="000000">
                 <a:alpha val="0"/>
@@ -8962,9 +9003,9 @@
           </a:ln>
         </p:spPr>
         <p:txBody>
-          <a:bodyPr xmlns:a="http://schemas.openxmlformats.org/drawingml/2006/main" lIns="0" tIns="0" rIns="0" bIns="0" anchor="t"/>
-          <a:lstStyle xmlns:a="http://schemas.openxmlformats.org/drawingml/2006/main"/>
-          <a:p xmlns:a="http://schemas.openxmlformats.org/drawingml/2006/main">
+          <a:bodyPr lIns="0" tIns="0" rIns="0" bIns="0" anchor="t"/>
+          <a:lstStyle/>
+          <a:p>
             <a:pPr algn="l">
               <a:defRPr sz="1200" b="0">
                 <a:solidFill>
@@ -8978,7 +9019,7 @@
                   <a:srgbClr val="4F5B66"/>
                 </a:solidFill>
               </a:rPr>
-              <a:t>設計模式必須對專題有實際作用，而不是只在理論上提到。</a:t>
+              <a:t>用 AlertRule 說明：父類別固定通知流程，子類別補上可變步驟。</a:t>
             </a:r>
           </a:p>
         </p:txBody>
@@ -8986,31 +9027,31 @@
       <p:sp>
         <p:nvSpPr>
           <p:cNvPr id="8" name="">
-            <a:extLst xmlns:a="http://schemas.openxmlformats.org/drawingml/2006/main">
-              <a:ext uri="{FF2B5EF4-FFF2-40B4-BE49-F238E27FC236}">
-                <a16:creationId xmlns:a16="http://schemas.microsoft.com/office/drawing/2014/main" id="{9CADA108-9B83-4FBC-A24D-9A36AB1715B9}"/>
-              </a:ext>
-            </a:extLst>
-          </p:cNvPr>
-          <p:cNvSpPr>
-            <a:spLocks xmlns:a="http://schemas.openxmlformats.org/drawingml/2006/main" noGrp="1"/>
-          </p:cNvSpPr>
-          <p:nvPr/>
-        </p:nvSpPr>
-        <p:spPr>
-          <a:xfrm xmlns:a="http://schemas.openxmlformats.org/drawingml/2006/main" rot="0">
+            <a:extLst>
+              <a:ext uri="{FF2B5EF4-FFF2-40B4-BE49-F238E27FC236}">
+                <ns2:creationId id="{9CADA108-9B83-4FBC-A24D-9A36AB1715B9}"/>
+              </a:ext>
+            </a:extLst>
+          </p:cNvPr>
+          <p:cNvSpPr>
+            <a:spLocks noGrp="1"/>
+          </p:cNvSpPr>
+          <p:nvPr/>
+        </p:nvSpPr>
+        <p:spPr>
+          <a:xfrm rot="0">
             <a:off x="609600" y="1866900"/>
             <a:ext cx="3143250" cy="3790950"/>
           </a:xfrm>
-          <a:prstGeom xmlns:a="http://schemas.openxmlformats.org/drawingml/2006/main" prst="roundRect">
+          <a:prstGeom prst="roundRect">
             <a:avLst>
               <a:gd name="adj" fmla="val 2424"/>
             </a:avLst>
           </a:prstGeom>
-          <a:solidFill xmlns:a="http://schemas.openxmlformats.org/drawingml/2006/main">
+          <a:solidFill>
             <a:srgbClr val="FFFDF8"/>
           </a:solidFill>
-          <a:ln xmlns:a="http://schemas.openxmlformats.org/drawingml/2006/main" w="11430">
+          <a:ln w="11430">
             <a:solidFill>
               <a:srgbClr val="23313B"/>
             </a:solidFill>
@@ -9021,29 +9062,29 @@
       <p:sp>
         <p:nvSpPr>
           <p:cNvPr id="9" name="">
-            <a:extLst xmlns:a="http://schemas.openxmlformats.org/drawingml/2006/main">
-              <a:ext uri="{FF2B5EF4-FFF2-40B4-BE49-F238E27FC236}">
-                <a16:creationId xmlns:a16="http://schemas.microsoft.com/office/drawing/2014/main" id="{D87C1353-F658-40A2-860E-8D09D0B1DCD6}"/>
-              </a:ext>
-            </a:extLst>
-          </p:cNvPr>
-          <p:cNvSpPr>
-            <a:spLocks xmlns:a="http://schemas.openxmlformats.org/drawingml/2006/main" noGrp="1"/>
-          </p:cNvSpPr>
-          <p:nvPr/>
-        </p:nvSpPr>
-        <p:spPr>
-          <a:xfrm xmlns:a="http://schemas.openxmlformats.org/drawingml/2006/main" rot="0">
+            <a:extLst>
+              <a:ext uri="{FF2B5EF4-FFF2-40B4-BE49-F238E27FC236}">
+                <ns2:creationId id="{D87C1353-F658-40A2-860E-8D09D0B1DCD6}"/>
+              </a:ext>
+            </a:extLst>
+          </p:cNvPr>
+          <p:cNvSpPr>
+            <a:spLocks noGrp="1"/>
+          </p:cNvSpPr>
+          <p:nvPr/>
+        </p:nvSpPr>
+        <p:spPr>
+          <a:xfrm rot="0">
             <a:off x="609600" y="1866900"/>
             <a:ext cx="3143250" cy="76200"/>
           </a:xfrm>
-          <a:prstGeom xmlns:a="http://schemas.openxmlformats.org/drawingml/2006/main" prst="rect">
-            <a:avLst/>
-          </a:prstGeom>
-          <a:solidFill xmlns:a="http://schemas.openxmlformats.org/drawingml/2006/main">
+          <a:prstGeom prst="rect">
+            <a:avLst/>
+          </a:prstGeom>
+          <a:solidFill>
             <a:srgbClr val="E57B62"/>
           </a:solidFill>
-          <a:ln xmlns:a="http://schemas.openxmlformats.org/drawingml/2006/main" w="0">
+          <a:ln w="0">
             <a:solidFill>
               <a:srgbClr val="000000">
                 <a:alpha val="0"/>
@@ -9056,31 +9097,31 @@
       <p:sp>
         <p:nvSpPr>
           <p:cNvPr id="10" name="">
-            <a:extLst xmlns:a="http://schemas.openxmlformats.org/drawingml/2006/main">
-              <a:ext uri="{FF2B5EF4-FFF2-40B4-BE49-F238E27FC236}">
-                <a16:creationId xmlns:a16="http://schemas.microsoft.com/office/drawing/2014/main" id="{3B844A5A-8EDE-4029-9D87-AB5F53CEF05C}"/>
-              </a:ext>
-            </a:extLst>
-          </p:cNvPr>
-          <p:cNvSpPr>
-            <a:spLocks xmlns:a="http://schemas.openxmlformats.org/drawingml/2006/main" noGrp="1"/>
-          </p:cNvSpPr>
-          <p:nvPr/>
-        </p:nvSpPr>
-        <p:spPr>
-          <a:xfrm xmlns:a="http://schemas.openxmlformats.org/drawingml/2006/main" rot="0">
+            <a:extLst>
+              <a:ext uri="{FF2B5EF4-FFF2-40B4-BE49-F238E27FC236}">
+                <ns2:creationId id="{3B844A5A-8EDE-4029-9D87-AB5F53CEF05C}"/>
+              </a:ext>
+            </a:extLst>
+          </p:cNvPr>
+          <p:cNvSpPr>
+            <a:spLocks noGrp="1"/>
+          </p:cNvSpPr>
+          <p:nvPr/>
+        </p:nvSpPr>
+        <p:spPr>
+          <a:xfrm rot="0">
             <a:off x="800100" y="2038350"/>
             <a:ext cx="2762250" cy="266700"/>
           </a:xfrm>
-          <a:prstGeom xmlns:a="http://schemas.openxmlformats.org/drawingml/2006/main" prst="rect">
-            <a:avLst/>
-          </a:prstGeom>
-          <a:solidFill xmlns:a="http://schemas.openxmlformats.org/drawingml/2006/main">
+          <a:prstGeom prst="rect">
+            <a:avLst/>
+          </a:prstGeom>
+          <a:solidFill>
             <a:srgbClr val="000000">
               <a:alpha val="0"/>
             </a:srgbClr>
           </a:solidFill>
-          <a:ln xmlns:a="http://schemas.openxmlformats.org/drawingml/2006/main" w="0">
+          <a:ln w="0">
             <a:solidFill>
               <a:srgbClr val="000000">
                 <a:alpha val="0"/>
@@ -9090,9 +9131,9 @@
           </a:ln>
         </p:spPr>
         <p:txBody>
-          <a:bodyPr xmlns:a="http://schemas.openxmlformats.org/drawingml/2006/main" lIns="0" tIns="0" rIns="0" bIns="0" anchor="t"/>
-          <a:lstStyle xmlns:a="http://schemas.openxmlformats.org/drawingml/2006/main"/>
-          <a:p xmlns:a="http://schemas.openxmlformats.org/drawingml/2006/main">
+          <a:bodyPr lIns="0" tIns="0" rIns="0" bIns="0" anchor="t"/>
+          <a:lstStyle/>
+          <a:p>
             <a:pPr algn="l">
               <a:defRPr sz="1350" b="1">
                 <a:solidFill>
@@ -9114,31 +9155,31 @@
       <p:sp>
         <p:nvSpPr>
           <p:cNvPr id="11" name="">
-            <a:extLst xmlns:a="http://schemas.openxmlformats.org/drawingml/2006/main">
-              <a:ext uri="{FF2B5EF4-FFF2-40B4-BE49-F238E27FC236}">
-                <a16:creationId xmlns:a16="http://schemas.microsoft.com/office/drawing/2014/main" id="{5344813E-6AB7-4F14-9F8A-733C5027B82C}"/>
-              </a:ext>
-            </a:extLst>
-          </p:cNvPr>
-          <p:cNvSpPr>
-            <a:spLocks xmlns:a="http://schemas.openxmlformats.org/drawingml/2006/main" noGrp="1"/>
-          </p:cNvSpPr>
-          <p:nvPr/>
-        </p:nvSpPr>
-        <p:spPr>
-          <a:xfrm xmlns:a="http://schemas.openxmlformats.org/drawingml/2006/main" rot="0">
+            <a:extLst>
+              <a:ext uri="{FF2B5EF4-FFF2-40B4-BE49-F238E27FC236}">
+                <ns2:creationId id="{5344813E-6AB7-4F14-9F8A-733C5027B82C}"/>
+              </a:ext>
+            </a:extLst>
+          </p:cNvPr>
+          <p:cNvSpPr>
+            <a:spLocks noGrp="1"/>
+          </p:cNvSpPr>
+          <p:nvPr/>
+        </p:nvSpPr>
+        <p:spPr>
+          <a:xfrm rot="0">
             <a:off x="857250" y="2400300"/>
             <a:ext cx="2647950" cy="1657350"/>
           </a:xfrm>
-          <a:prstGeom xmlns:a="http://schemas.openxmlformats.org/drawingml/2006/main" prst="rect">
-            <a:avLst/>
-          </a:prstGeom>
-          <a:solidFill xmlns:a="http://schemas.openxmlformats.org/drawingml/2006/main">
+          <a:prstGeom prst="rect">
+            <a:avLst/>
+          </a:prstGeom>
+          <a:solidFill>
             <a:srgbClr val="000000">
               <a:alpha val="0"/>
             </a:srgbClr>
           </a:solidFill>
-          <a:ln xmlns:a="http://schemas.openxmlformats.org/drawingml/2006/main" w="0">
+          <a:ln w="0">
             <a:solidFill>
               <a:srgbClr val="000000">
                 <a:alpha val="0"/>
@@ -9148,9 +9189,9 @@
           </a:ln>
         </p:spPr>
         <p:txBody>
-          <a:bodyPr xmlns:a="http://schemas.openxmlformats.org/drawingml/2006/main" lIns="0" tIns="0" rIns="0" bIns="0" anchor="t"/>
-          <a:lstStyle xmlns:a="http://schemas.openxmlformats.org/drawingml/2006/main"/>
-          <a:p xmlns:a="http://schemas.openxmlformats.org/drawingml/2006/main">
+          <a:bodyPr lIns="0" tIns="0" rIns="0" bIns="0" anchor="t"/>
+          <a:lstStyle/>
+          <a:p>
             <a:pPr algn="l">
               <a:defRPr sz="1275" b="0">
                 <a:solidFill>
@@ -9164,15 +9205,27 @@
                   <a:srgbClr val="172026"/>
                 </a:solidFill>
               </a:rPr>
-              <a:t>集中物件建立邏輯，讓上層不直接依賴具體類別。</a:t>
-            </a:r>
-          </a:p>
-          <a:p xmlns:a="http://schemas.openxmlformats.org/drawingml/2006/main">
-            <a:r>
+              <a:t>父類別定義演算法骨架，並在固定流程中呼叫由子類別實作的步驟。</a:t>
+            </a:r>
+          </a:p>
+          <a:p>
+            <a:pPr algn="l">
+              <a:defRPr sz="1275" b="0">
+                <a:solidFill>
+                  <a:srgbClr val="172026"/>
+                </a:solidFill>
+              </a:defRPr>
+            </a:pPr>
+            <a:r>
+              <a:rPr sz="1275" b="0">
+                <a:solidFill>
+                  <a:srgbClr val="172026"/>
+                </a:solidFill>
+              </a:rPr>
               <a:t/>
             </a:r>
           </a:p>
-          <a:p xmlns:a="http://schemas.openxmlformats.org/drawingml/2006/main">
+          <a:p>
             <a:pPr algn="l">
               <a:defRPr sz="1275" b="0">
                 <a:solidFill>
@@ -9186,7 +9239,7 @@
                   <a:srgbClr val="172026"/>
                 </a:solidFill>
               </a:rPr>
-              <a:t>API layer 不應該自己判斷要建立哪一種具體警示規則物件。</a:t>
+              <a:t>AlertRule.buildNotification() 固定通知格式，但條件文字由 getConditionLabel() 決定。</a:t>
             </a:r>
           </a:p>
         </p:txBody>
@@ -9194,31 +9247,31 @@
       <p:sp>
         <p:nvSpPr>
           <p:cNvPr id="12" name="">
-            <a:extLst xmlns:a="http://schemas.openxmlformats.org/drawingml/2006/main">
-              <a:ext uri="{FF2B5EF4-FFF2-40B4-BE49-F238E27FC236}">
-                <a16:creationId xmlns:a16="http://schemas.microsoft.com/office/drawing/2014/main" id="{B71D6A12-DB77-4686-87FE-48B2698A49B9}"/>
-              </a:ext>
-            </a:extLst>
-          </p:cNvPr>
-          <p:cNvSpPr>
-            <a:spLocks xmlns:a="http://schemas.openxmlformats.org/drawingml/2006/main" noGrp="1"/>
-          </p:cNvSpPr>
-          <p:nvPr/>
-        </p:nvSpPr>
-        <p:spPr>
-          <a:xfrm xmlns:a="http://schemas.openxmlformats.org/drawingml/2006/main" rot="0">
+            <a:extLst>
+              <a:ext uri="{FF2B5EF4-FFF2-40B4-BE49-F238E27FC236}">
+                <ns2:creationId id="{B71D6A12-DB77-4686-87FE-48B2698A49B9}"/>
+              </a:ext>
+            </a:extLst>
+          </p:cNvPr>
+          <p:cNvSpPr>
+            <a:spLocks noGrp="1"/>
+          </p:cNvSpPr>
+          <p:nvPr/>
+        </p:nvSpPr>
+        <p:spPr>
+          <a:xfrm rot="0">
             <a:off x="4514850" y="1866900"/>
             <a:ext cx="3295650" cy="3790950"/>
           </a:xfrm>
-          <a:prstGeom xmlns:a="http://schemas.openxmlformats.org/drawingml/2006/main" prst="roundRect">
+          <a:prstGeom prst="roundRect">
             <a:avLst>
               <a:gd name="adj" fmla="val 2312"/>
             </a:avLst>
           </a:prstGeom>
-          <a:solidFill xmlns:a="http://schemas.openxmlformats.org/drawingml/2006/main">
+          <a:solidFill>
             <a:srgbClr val="FFFDF8"/>
           </a:solidFill>
-          <a:ln xmlns:a="http://schemas.openxmlformats.org/drawingml/2006/main" w="11430">
+          <a:ln w="11430">
             <a:solidFill>
               <a:srgbClr val="23313B"/>
             </a:solidFill>
@@ -9229,29 +9282,29 @@
       <p:sp>
         <p:nvSpPr>
           <p:cNvPr id="13" name="">
-            <a:extLst xmlns:a="http://schemas.openxmlformats.org/drawingml/2006/main">
-              <a:ext uri="{FF2B5EF4-FFF2-40B4-BE49-F238E27FC236}">
-                <a16:creationId xmlns:a16="http://schemas.microsoft.com/office/drawing/2014/main" id="{945D8EA9-6A57-43B6-AC52-6B509CF56125}"/>
-              </a:ext>
-            </a:extLst>
-          </p:cNvPr>
-          <p:cNvSpPr>
-            <a:spLocks xmlns:a="http://schemas.openxmlformats.org/drawingml/2006/main" noGrp="1"/>
-          </p:cNvSpPr>
-          <p:nvPr/>
-        </p:nvSpPr>
-        <p:spPr>
-          <a:xfrm xmlns:a="http://schemas.openxmlformats.org/drawingml/2006/main" rot="0">
+            <a:extLst>
+              <a:ext uri="{FF2B5EF4-FFF2-40B4-BE49-F238E27FC236}">
+                <ns2:creationId id="{945D8EA9-6A57-43B6-AC52-6B509CF56125}"/>
+              </a:ext>
+            </a:extLst>
+          </p:cNvPr>
+          <p:cNvSpPr>
+            <a:spLocks noGrp="1"/>
+          </p:cNvSpPr>
+          <p:nvPr/>
+        </p:nvSpPr>
+        <p:spPr>
+          <a:xfrm rot="0">
             <a:off x="4514850" y="1866900"/>
             <a:ext cx="3295650" cy="76200"/>
           </a:xfrm>
-          <a:prstGeom xmlns:a="http://schemas.openxmlformats.org/drawingml/2006/main" prst="rect">
-            <a:avLst/>
-          </a:prstGeom>
-          <a:solidFill xmlns:a="http://schemas.openxmlformats.org/drawingml/2006/main">
+          <a:prstGeom prst="rect">
+            <a:avLst/>
+          </a:prstGeom>
+          <a:solidFill>
             <a:srgbClr val="38B58A"/>
           </a:solidFill>
-          <a:ln xmlns:a="http://schemas.openxmlformats.org/drawingml/2006/main" w="0">
+          <a:ln w="0">
             <a:solidFill>
               <a:srgbClr val="000000">
                 <a:alpha val="0"/>
@@ -9264,31 +9317,31 @@
       <p:sp>
         <p:nvSpPr>
           <p:cNvPr id="14" name="">
-            <a:extLst xmlns:a="http://schemas.openxmlformats.org/drawingml/2006/main">
-              <a:ext uri="{FF2B5EF4-FFF2-40B4-BE49-F238E27FC236}">
-                <a16:creationId xmlns:a16="http://schemas.microsoft.com/office/drawing/2014/main" id="{983EA221-38A5-4948-843B-BF1F168B4EB3}"/>
-              </a:ext>
-            </a:extLst>
-          </p:cNvPr>
-          <p:cNvSpPr>
-            <a:spLocks xmlns:a="http://schemas.openxmlformats.org/drawingml/2006/main" noGrp="1"/>
-          </p:cNvSpPr>
-          <p:nvPr/>
-        </p:nvSpPr>
-        <p:spPr>
-          <a:xfrm xmlns:a="http://schemas.openxmlformats.org/drawingml/2006/main" rot="0">
+            <a:extLst>
+              <a:ext uri="{FF2B5EF4-FFF2-40B4-BE49-F238E27FC236}">
+                <ns2:creationId id="{983EA221-38A5-4948-843B-BF1F168B4EB3}"/>
+              </a:ext>
+            </a:extLst>
+          </p:cNvPr>
+          <p:cNvSpPr>
+            <a:spLocks noGrp="1"/>
+          </p:cNvSpPr>
+          <p:nvPr/>
+        </p:nvSpPr>
+        <p:spPr>
+          <a:xfrm rot="0">
             <a:off x="4705350" y="2038350"/>
             <a:ext cx="2914650" cy="266700"/>
           </a:xfrm>
-          <a:prstGeom xmlns:a="http://schemas.openxmlformats.org/drawingml/2006/main" prst="rect">
-            <a:avLst/>
-          </a:prstGeom>
-          <a:solidFill xmlns:a="http://schemas.openxmlformats.org/drawingml/2006/main">
+          <a:prstGeom prst="rect">
+            <a:avLst/>
+          </a:prstGeom>
+          <a:solidFill>
             <a:srgbClr val="000000">
               <a:alpha val="0"/>
             </a:srgbClr>
           </a:solidFill>
-          <a:ln xmlns:a="http://schemas.openxmlformats.org/drawingml/2006/main" w="0">
+          <a:ln w="0">
             <a:solidFill>
               <a:srgbClr val="000000">
                 <a:alpha val="0"/>
@@ -9298,9 +9351,9 @@
           </a:ln>
         </p:spPr>
         <p:txBody>
-          <a:bodyPr xmlns:a="http://schemas.openxmlformats.org/drawingml/2006/main" lIns="0" tIns="0" rIns="0" bIns="0" anchor="t"/>
-          <a:lstStyle xmlns:a="http://schemas.openxmlformats.org/drawingml/2006/main"/>
-          <a:p xmlns:a="http://schemas.openxmlformats.org/drawingml/2006/main">
+          <a:bodyPr lIns="0" tIns="0" rIns="0" bIns="0" anchor="t"/>
+          <a:lstStyle/>
+          <a:p>
             <a:pPr algn="l">
               <a:defRPr sz="1350" b="1">
                 <a:solidFill>
@@ -9322,31 +9375,31 @@
       <p:sp>
         <p:nvSpPr>
           <p:cNvPr id="15" name="">
-            <a:extLst xmlns:a="http://schemas.openxmlformats.org/drawingml/2006/main">
-              <a:ext uri="{FF2B5EF4-FFF2-40B4-BE49-F238E27FC236}">
-                <a16:creationId xmlns:a16="http://schemas.microsoft.com/office/drawing/2014/main" id="{9D8A6B41-5336-4FBB-A464-33959291A629}"/>
-              </a:ext>
-            </a:extLst>
-          </p:cNvPr>
-          <p:cNvSpPr>
-            <a:spLocks xmlns:a="http://schemas.openxmlformats.org/drawingml/2006/main" noGrp="1"/>
-          </p:cNvSpPr>
-          <p:nvPr/>
-        </p:nvSpPr>
-        <p:spPr>
-          <a:xfrm xmlns:a="http://schemas.openxmlformats.org/drawingml/2006/main" rot="0">
+            <a:extLst>
+              <a:ext uri="{FF2B5EF4-FFF2-40B4-BE49-F238E27FC236}">
+                <ns2:creationId id="{9D8A6B41-5336-4FBB-A464-33959291A629}"/>
+              </a:ext>
+            </a:extLst>
+          </p:cNvPr>
+          <p:cNvSpPr>
+            <a:spLocks noGrp="1"/>
+          </p:cNvSpPr>
+          <p:nvPr/>
+        </p:nvSpPr>
+        <p:spPr>
+          <a:xfrm rot="0">
             <a:off x="4762500" y="2400300"/>
             <a:ext cx="2800350" cy="1771650"/>
           </a:xfrm>
-          <a:prstGeom xmlns:a="http://schemas.openxmlformats.org/drawingml/2006/main" prst="rect">
-            <a:avLst/>
-          </a:prstGeom>
-          <a:solidFill xmlns:a="http://schemas.openxmlformats.org/drawingml/2006/main">
+          <a:prstGeom prst="rect">
+            <a:avLst/>
+          </a:prstGeom>
+          <a:solidFill>
             <a:srgbClr val="000000">
               <a:alpha val="0"/>
             </a:srgbClr>
           </a:solidFill>
-          <a:ln xmlns:a="http://schemas.openxmlformats.org/drawingml/2006/main" w="0">
+          <a:ln w="0">
             <a:solidFill>
               <a:srgbClr val="000000">
                 <a:alpha val="0"/>
@@ -9356,9 +9409,9 @@
           </a:ln>
         </p:spPr>
         <p:txBody>
-          <a:bodyPr xmlns:a="http://schemas.openxmlformats.org/drawingml/2006/main" lIns="0" tIns="0" rIns="0" bIns="0" anchor="t"/>
-          <a:lstStyle xmlns:a="http://schemas.openxmlformats.org/drawingml/2006/main"/>
-          <a:p xmlns:a="http://schemas.openxmlformats.org/drawingml/2006/main">
+          <a:bodyPr lIns="0" tIns="0" rIns="0" bIns="0" anchor="t"/>
+          <a:lstStyle/>
+          <a:p>
             <a:pPr algn="l">
               <a:defRPr sz="1275" b="0">
                 <a:solidFill>
@@ -9372,15 +9425,44 @@
                   <a:srgbClr val="172026"/>
                 </a:solidFill>
               </a:rPr>
-              <a:t>Function: createAlertRule(...)</a:t>
-            </a:r>
-          </a:p>
-          <a:p xmlns:a="http://schemas.openxmlformats.org/drawingml/2006/main">
-            <a:r>
+              <a:t>主要 class 對應</a:t>
+            </a:r>
+          </a:p>
+          <a:p>
+            <a:pPr algn="l">
+              <a:defRPr sz="1275" b="0">
+                <a:solidFill>
+                  <a:srgbClr val="172026"/>
+                </a:solidFill>
+              </a:defRPr>
+            </a:pPr>
+            <a:r>
+              <a:rPr sz="1275" b="0">
+                <a:solidFill>
+                  <a:srgbClr val="172026"/>
+                </a:solidFill>
+              </a:rPr>
+              <a:t>AlertRule：提供 buildNotification(snapshot) 通知產生流程</a:t>
+            </a:r>
+          </a:p>
+          <a:p>
+            <a:pPr algn="l">
+              <a:defRPr sz="1275" b="0">
+                <a:solidFill>
+                  <a:srgbClr val="172026"/>
+                </a:solidFill>
+              </a:defRPr>
+            </a:pPr>
+            <a:r>
+              <a:rPr sz="1275" b="0">
+                <a:solidFill>
+                  <a:srgbClr val="172026"/>
+                </a:solidFill>
+              </a:rPr>
               <a:t/>
             </a:r>
           </a:p>
-          <a:p xmlns:a="http://schemas.openxmlformats.org/drawingml/2006/main">
+          <a:p>
             <a:pPr algn="l">
               <a:defRPr sz="1275" b="0">
                 <a:solidFill>
@@ -9394,10 +9476,10 @@
                   <a:srgbClr val="172026"/>
                 </a:solidFill>
               </a:rPr>
-              <a:t>Input: 資料庫中的 alert rule record</a:t>
-            </a:r>
-          </a:p>
-          <a:p xmlns:a="http://schemas.openxmlformats.org/drawingml/2006/main">
+              <a:t>子類別：PriceAboveAlertRule / PriceBelowAlertRule</a:t>
+            </a:r>
+          </a:p>
+          <a:p>
             <a:pPr algn="l">
               <a:defRPr sz="1275" b="0">
                 <a:solidFill>
@@ -9411,15 +9493,10 @@
                   <a:srgbClr val="172026"/>
                 </a:solidFill>
               </a:rPr>
-              <a:t>Output: 具體 AlertRule object</a:t>
-            </a:r>
-          </a:p>
-          <a:p xmlns:a="http://schemas.openxmlformats.org/drawingml/2006/main">
-            <a:r>
               <a:t/>
             </a:r>
           </a:p>
-          <a:p xmlns:a="http://schemas.openxmlformats.org/drawingml/2006/main">
+          <a:p>
             <a:pPr algn="l">
               <a:defRPr sz="1275" b="0">
                 <a:solidFill>
@@ -9433,7 +9510,7 @@
                   <a:srgbClr val="172026"/>
                 </a:solidFill>
               </a:rPr>
-              <a:t>在評估前，先把儲存設定轉成可執行的 domain object。</a:t>
+              <a:t>可變步驟：各自實作 getConditionLabel() 與 isTriggered(snapshot)</a:t>
             </a:r>
           </a:p>
         </p:txBody>
@@ -9441,31 +9518,31 @@
       <p:sp>
         <p:nvSpPr>
           <p:cNvPr id="16" name="">
-            <a:extLst xmlns:a="http://schemas.openxmlformats.org/drawingml/2006/main">
-              <a:ext uri="{FF2B5EF4-FFF2-40B4-BE49-F238E27FC236}">
-                <a16:creationId xmlns:a16="http://schemas.microsoft.com/office/drawing/2014/main" id="{B7FA66B7-A58B-4B6C-A65D-BA8D0B277C75}"/>
-              </a:ext>
-            </a:extLst>
-          </p:cNvPr>
-          <p:cNvSpPr>
-            <a:spLocks xmlns:a="http://schemas.openxmlformats.org/drawingml/2006/main" noGrp="1"/>
-          </p:cNvSpPr>
-          <p:nvPr/>
-        </p:nvSpPr>
-        <p:spPr>
-          <a:xfrm xmlns:a="http://schemas.openxmlformats.org/drawingml/2006/main" rot="0">
+            <a:extLst>
+              <a:ext uri="{FF2B5EF4-FFF2-40B4-BE49-F238E27FC236}">
+                <ns2:creationId id="{B7FA66B7-A58B-4B6C-A65D-BA8D0B277C75}"/>
+              </a:ext>
+            </a:extLst>
+          </p:cNvPr>
+          <p:cNvSpPr>
+            <a:spLocks noGrp="1"/>
+          </p:cNvSpPr>
+          <p:nvPr/>
+        </p:nvSpPr>
+        <p:spPr>
+          <a:xfrm rot="0">
             <a:off x="8572500" y="1866900"/>
             <a:ext cx="3009900" cy="3790950"/>
           </a:xfrm>
-          <a:prstGeom xmlns:a="http://schemas.openxmlformats.org/drawingml/2006/main" prst="roundRect">
+          <a:prstGeom prst="roundRect">
             <a:avLst>
               <a:gd name="adj" fmla="val 2532"/>
             </a:avLst>
           </a:prstGeom>
-          <a:solidFill xmlns:a="http://schemas.openxmlformats.org/drawingml/2006/main">
+          <a:solidFill>
             <a:srgbClr val="FFFDF8"/>
           </a:solidFill>
-          <a:ln xmlns:a="http://schemas.openxmlformats.org/drawingml/2006/main" w="11430">
+          <a:ln w="11430">
             <a:solidFill>
               <a:srgbClr val="23313B"/>
             </a:solidFill>
@@ -9476,29 +9553,29 @@
       <p:sp>
         <p:nvSpPr>
           <p:cNvPr id="17" name="">
-            <a:extLst xmlns:a="http://schemas.openxmlformats.org/drawingml/2006/main">
-              <a:ext uri="{FF2B5EF4-FFF2-40B4-BE49-F238E27FC236}">
-                <a16:creationId xmlns:a16="http://schemas.microsoft.com/office/drawing/2014/main" id="{134BDC0C-1929-4BEB-8CF8-EF486219E46A}"/>
-              </a:ext>
-            </a:extLst>
-          </p:cNvPr>
-          <p:cNvSpPr>
-            <a:spLocks xmlns:a="http://schemas.openxmlformats.org/drawingml/2006/main" noGrp="1"/>
-          </p:cNvSpPr>
-          <p:nvPr/>
-        </p:nvSpPr>
-        <p:spPr>
-          <a:xfrm xmlns:a="http://schemas.openxmlformats.org/drawingml/2006/main" rot="0">
+            <a:extLst>
+              <a:ext uri="{FF2B5EF4-FFF2-40B4-BE49-F238E27FC236}">
+                <ns2:creationId id="{134BDC0C-1929-4BEB-8CF8-EF486219E46A}"/>
+              </a:ext>
+            </a:extLst>
+          </p:cNvPr>
+          <p:cNvSpPr>
+            <a:spLocks noGrp="1"/>
+          </p:cNvSpPr>
+          <p:nvPr/>
+        </p:nvSpPr>
+        <p:spPr>
+          <a:xfrm rot="0">
             <a:off x="8572500" y="1866900"/>
             <a:ext cx="3009900" cy="76200"/>
           </a:xfrm>
-          <a:prstGeom xmlns:a="http://schemas.openxmlformats.org/drawingml/2006/main" prst="rect">
-            <a:avLst/>
-          </a:prstGeom>
-          <a:solidFill xmlns:a="http://schemas.openxmlformats.org/drawingml/2006/main">
+          <a:prstGeom prst="rect">
+            <a:avLst/>
+          </a:prstGeom>
+          <a:solidFill>
             <a:srgbClr val="D6A04B"/>
           </a:solidFill>
-          <a:ln xmlns:a="http://schemas.openxmlformats.org/drawingml/2006/main" w="0">
+          <a:ln w="0">
             <a:solidFill>
               <a:srgbClr val="000000">
                 <a:alpha val="0"/>
@@ -9511,31 +9588,31 @@
       <p:sp>
         <p:nvSpPr>
           <p:cNvPr id="18" name="">
-            <a:extLst xmlns:a="http://schemas.openxmlformats.org/drawingml/2006/main">
-              <a:ext uri="{FF2B5EF4-FFF2-40B4-BE49-F238E27FC236}">
-                <a16:creationId xmlns:a16="http://schemas.microsoft.com/office/drawing/2014/main" id="{19DADF23-1C3D-4264-9B5A-54015CB62A2D}"/>
-              </a:ext>
-            </a:extLst>
-          </p:cNvPr>
-          <p:cNvSpPr>
-            <a:spLocks xmlns:a="http://schemas.openxmlformats.org/drawingml/2006/main" noGrp="1"/>
-          </p:cNvSpPr>
-          <p:nvPr/>
-        </p:nvSpPr>
-        <p:spPr>
-          <a:xfrm xmlns:a="http://schemas.openxmlformats.org/drawingml/2006/main" rot="0">
+            <a:extLst>
+              <a:ext uri="{FF2B5EF4-FFF2-40B4-BE49-F238E27FC236}">
+                <ns2:creationId id="{19DADF23-1C3D-4264-9B5A-54015CB62A2D}"/>
+              </a:ext>
+            </a:extLst>
+          </p:cNvPr>
+          <p:cNvSpPr>
+            <a:spLocks noGrp="1"/>
+          </p:cNvSpPr>
+          <p:nvPr/>
+        </p:nvSpPr>
+        <p:spPr>
+          <a:xfrm rot="0">
             <a:off x="8763000" y="2038350"/>
             <a:ext cx="2628900" cy="266700"/>
           </a:xfrm>
-          <a:prstGeom xmlns:a="http://schemas.openxmlformats.org/drawingml/2006/main" prst="rect">
-            <a:avLst/>
-          </a:prstGeom>
-          <a:solidFill xmlns:a="http://schemas.openxmlformats.org/drawingml/2006/main">
+          <a:prstGeom prst="rect">
+            <a:avLst/>
+          </a:prstGeom>
+          <a:solidFill>
             <a:srgbClr val="000000">
               <a:alpha val="0"/>
             </a:srgbClr>
           </a:solidFill>
-          <a:ln xmlns:a="http://schemas.openxmlformats.org/drawingml/2006/main" w="0">
+          <a:ln w="0">
             <a:solidFill>
               <a:srgbClr val="000000">
                 <a:alpha val="0"/>
@@ -9545,9 +9622,9 @@
           </a:ln>
         </p:spPr>
         <p:txBody>
-          <a:bodyPr xmlns:a="http://schemas.openxmlformats.org/drawingml/2006/main" lIns="0" tIns="0" rIns="0" bIns="0" anchor="t"/>
-          <a:lstStyle xmlns:a="http://schemas.openxmlformats.org/drawingml/2006/main"/>
-          <a:p xmlns:a="http://schemas.openxmlformats.org/drawingml/2006/main">
+          <a:bodyPr lIns="0" tIns="0" rIns="0" bIns="0" anchor="t"/>
+          <a:lstStyle/>
+          <a:p>
             <a:pPr algn="l">
               <a:defRPr sz="1350" b="1">
                 <a:solidFill>
@@ -9569,31 +9646,31 @@
       <p:sp>
         <p:nvSpPr>
           <p:cNvPr id="19" name="">
-            <a:extLst xmlns:a="http://schemas.openxmlformats.org/drawingml/2006/main">
-              <a:ext uri="{FF2B5EF4-FFF2-40B4-BE49-F238E27FC236}">
-                <a16:creationId xmlns:a16="http://schemas.microsoft.com/office/drawing/2014/main" id="{85F5B18F-F69C-4522-94D2-E6160700BE4C}"/>
-              </a:ext>
-            </a:extLst>
-          </p:cNvPr>
-          <p:cNvSpPr>
-            <a:spLocks xmlns:a="http://schemas.openxmlformats.org/drawingml/2006/main" noGrp="1"/>
-          </p:cNvSpPr>
-          <p:nvPr/>
-        </p:nvSpPr>
-        <p:spPr>
-          <a:xfrm xmlns:a="http://schemas.openxmlformats.org/drawingml/2006/main" rot="0">
+            <a:extLst>
+              <a:ext uri="{FF2B5EF4-FFF2-40B4-BE49-F238E27FC236}">
+                <ns2:creationId id="{85F5B18F-F69C-4522-94D2-E6160700BE4C}"/>
+              </a:ext>
+            </a:extLst>
+          </p:cNvPr>
+          <p:cNvSpPr>
+            <a:spLocks noGrp="1"/>
+          </p:cNvSpPr>
+          <p:nvPr/>
+        </p:nvSpPr>
+        <p:spPr>
+          <a:xfrm rot="0">
             <a:off x="8820150" y="2400300"/>
             <a:ext cx="2514600" cy="1790700"/>
           </a:xfrm>
-          <a:prstGeom xmlns:a="http://schemas.openxmlformats.org/drawingml/2006/main" prst="rect">
-            <a:avLst/>
-          </a:prstGeom>
-          <a:solidFill xmlns:a="http://schemas.openxmlformats.org/drawingml/2006/main">
+          <a:prstGeom prst="rect">
+            <a:avLst/>
+          </a:prstGeom>
+          <a:solidFill>
             <a:srgbClr val="000000">
               <a:alpha val="0"/>
             </a:srgbClr>
           </a:solidFill>
-          <a:ln xmlns:a="http://schemas.openxmlformats.org/drawingml/2006/main" w="0">
+          <a:ln w="0">
             <a:solidFill>
               <a:srgbClr val="000000">
                 <a:alpha val="0"/>
@@ -9603,9 +9680,9 @@
           </a:ln>
         </p:spPr>
         <p:txBody>
-          <a:bodyPr xmlns:a="http://schemas.openxmlformats.org/drawingml/2006/main" lIns="0" tIns="0" rIns="0" bIns="0" anchor="t"/>
-          <a:lstStyle xmlns:a="http://schemas.openxmlformats.org/drawingml/2006/main"/>
-          <a:p xmlns:a="http://schemas.openxmlformats.org/drawingml/2006/main">
+          <a:bodyPr lIns="0" tIns="0" rIns="0" bIns="0" anchor="t"/>
+          <a:lstStyle/>
+          <a:p>
             <a:pPr algn="l">
               <a:defRPr sz="1275" b="0">
                 <a:solidFill>
@@ -9619,10 +9696,10 @@
                   <a:srgbClr val="172026"/>
                 </a:solidFill>
               </a:rPr>
-              <a:t>1. API code 保持簡潔</a:t>
-            </a:r>
-          </a:p>
-          <a:p xmlns:a="http://schemas.openxmlformats.org/drawingml/2006/main">
+              <a:t>1. 通知格式集中在父類別</a:t>
+            </a:r>
+          </a:p>
+          <a:p>
             <a:pPr algn="l">
               <a:defRPr sz="1275" b="0">
                 <a:solidFill>
@@ -9636,10 +9713,10 @@
                   <a:srgbClr val="172026"/>
                 </a:solidFill>
               </a:rPr>
-              <a:t>2. 物件建立邏輯可重用</a:t>
-            </a:r>
-          </a:p>
-          <a:p xmlns:a="http://schemas.openxmlformats.org/drawingml/2006/main">
+              <a:t>2. 不同警示條件保留自己的判斷邏輯</a:t>
+            </a:r>
+          </a:p>
+          <a:p>
             <a:pPr algn="l">
               <a:defRPr sz="1275" b="0">
                 <a:solidFill>
@@ -9653,10 +9730,10 @@
                   <a:srgbClr val="172026"/>
                 </a:solidFill>
               </a:rPr>
-              <a:t>3. 更容易新增規則類型</a:t>
-            </a:r>
-          </a:p>
-          <a:p xmlns:a="http://schemas.openxmlformats.org/drawingml/2006/main">
+              <a:t>3. 新增規則時只補子類別步驟</a:t>
+            </a:r>
+          </a:p>
+          <a:p>
             <a:pPr algn="l">
               <a:defRPr sz="1275" b="0">
                 <a:solidFill>
@@ -9670,7 +9747,7 @@
                   <a:srgbClr val="172026"/>
                 </a:solidFill>
               </a:rPr>
-              <a:t>4. 未來可擴充為 StrategyFactory，支援多種回測策略</a:t>
+              <a:t>4. 和 Strategy 區隔：重點是「固定流程 + 延遲步驟」</a:t>
             </a:r>
           </a:p>
         </p:txBody>
@@ -9678,31 +9755,31 @@
       <p:sp>
         <p:nvSpPr>
           <p:cNvPr id="20" name="">
-            <a:extLst xmlns:a="http://schemas.openxmlformats.org/drawingml/2006/main">
-              <a:ext uri="{FF2B5EF4-FFF2-40B4-BE49-F238E27FC236}">
-                <a16:creationId xmlns:a16="http://schemas.microsoft.com/office/drawing/2014/main" id="{14989240-FEBF-40CC-8DFC-377D55A04A9D}"/>
-              </a:ext>
-            </a:extLst>
-          </p:cNvPr>
-          <p:cNvSpPr>
-            <a:spLocks xmlns:a="http://schemas.openxmlformats.org/drawingml/2006/main" noGrp="1"/>
-          </p:cNvSpPr>
-          <p:nvPr/>
-        </p:nvSpPr>
-        <p:spPr>
-          <a:xfrm xmlns:a="http://schemas.openxmlformats.org/drawingml/2006/main" rot="0">
+            <a:extLst>
+              <a:ext uri="{FF2B5EF4-FFF2-40B4-BE49-F238E27FC236}">
+                <ns2:creationId id="{14989240-FEBF-40CC-8DFC-377D55A04A9D}"/>
+              </a:ext>
+            </a:extLst>
+          </p:cNvPr>
+          <p:cNvSpPr>
+            <a:spLocks noGrp="1"/>
+          </p:cNvSpPr>
+          <p:nvPr/>
+        </p:nvSpPr>
+        <p:spPr>
+          <a:xfrm rot="0">
             <a:off x="4800600" y="4610100"/>
             <a:ext cx="1428750" cy="438150"/>
           </a:xfrm>
-          <a:prstGeom xmlns:a="http://schemas.openxmlformats.org/drawingml/2006/main" prst="roundRect">
+          <a:prstGeom prst="roundRect">
             <a:avLst>
               <a:gd name="adj" fmla="val 17391"/>
             </a:avLst>
           </a:prstGeom>
-          <a:solidFill xmlns:a="http://schemas.openxmlformats.org/drawingml/2006/main">
+          <a:solidFill>
             <a:srgbClr val="FBE5DF"/>
           </a:solidFill>
-          <a:ln xmlns:a="http://schemas.openxmlformats.org/drawingml/2006/main" w="10478">
+          <a:ln w="10478">
             <a:solidFill>
               <a:srgbClr val="23313B"/>
             </a:solidFill>
@@ -9713,31 +9790,31 @@
       <p:sp>
         <p:nvSpPr>
           <p:cNvPr id="21" name="">
-            <a:extLst xmlns:a="http://schemas.openxmlformats.org/drawingml/2006/main">
-              <a:ext uri="{FF2B5EF4-FFF2-40B4-BE49-F238E27FC236}">
-                <a16:creationId xmlns:a16="http://schemas.microsoft.com/office/drawing/2014/main" id="{F5355225-410F-4488-B797-0CF56A8C4C32}"/>
-              </a:ext>
-            </a:extLst>
-          </p:cNvPr>
-          <p:cNvSpPr>
-            <a:spLocks xmlns:a="http://schemas.openxmlformats.org/drawingml/2006/main" noGrp="1"/>
-          </p:cNvSpPr>
-          <p:nvPr/>
-        </p:nvSpPr>
-        <p:spPr>
-          <a:xfrm xmlns:a="http://schemas.openxmlformats.org/drawingml/2006/main" rot="0">
+            <a:extLst>
+              <a:ext uri="{FF2B5EF4-FFF2-40B4-BE49-F238E27FC236}">
+                <ns2:creationId id="{F5355225-410F-4488-B797-0CF56A8C4C32}"/>
+              </a:ext>
+            </a:extLst>
+          </p:cNvPr>
+          <p:cNvSpPr>
+            <a:spLocks noGrp="1"/>
+          </p:cNvSpPr>
+          <p:nvPr/>
+        </p:nvSpPr>
+        <p:spPr>
+          <a:xfrm rot="0">
             <a:off x="4800600" y="4724400"/>
             <a:ext cx="1428750" cy="171450"/>
           </a:xfrm>
-          <a:prstGeom xmlns:a="http://schemas.openxmlformats.org/drawingml/2006/main" prst="rect">
-            <a:avLst/>
-          </a:prstGeom>
-          <a:solidFill xmlns:a="http://schemas.openxmlformats.org/drawingml/2006/main">
+          <a:prstGeom prst="rect">
+            <a:avLst/>
+          </a:prstGeom>
+          <a:solidFill>
             <a:srgbClr val="000000">
               <a:alpha val="0"/>
             </a:srgbClr>
           </a:solidFill>
-          <a:ln xmlns:a="http://schemas.openxmlformats.org/drawingml/2006/main" w="0">
+          <a:ln w="0">
             <a:solidFill>
               <a:srgbClr val="000000">
                 <a:alpha val="0"/>
@@ -9747,9 +9824,9 @@
           </a:ln>
         </p:spPr>
         <p:txBody>
-          <a:bodyPr xmlns:a="http://schemas.openxmlformats.org/drawingml/2006/main" lIns="0" tIns="0" rIns="0" bIns="0" anchor="t"/>
-          <a:lstStyle xmlns:a="http://schemas.openxmlformats.org/drawingml/2006/main"/>
-          <a:p xmlns:a="http://schemas.openxmlformats.org/drawingml/2006/main">
+          <a:bodyPr lIns="0" tIns="0" rIns="0" bIns="0" anchor="t"/>
+          <a:lstStyle/>
+          <a:p>
             <a:pPr algn="ctr">
               <a:defRPr sz="1125" b="1">
                 <a:solidFill>
@@ -9763,7 +9840,7 @@
                   <a:srgbClr val="172026"/>
                 </a:solidFill>
               </a:rPr>
-              <a:t>DB 規則紀錄</a:t>
+              <a:t>AlertRule</a:t>
             </a:r>
           </a:p>
         </p:txBody>
@@ -9771,29 +9848,29 @@
       <p:sp>
         <p:nvSpPr>
           <p:cNvPr id="22" name="">
-            <a:extLst xmlns:a="http://schemas.openxmlformats.org/drawingml/2006/main">
-              <a:ext uri="{FF2B5EF4-FFF2-40B4-BE49-F238E27FC236}">
-                <a16:creationId xmlns:a16="http://schemas.microsoft.com/office/drawing/2014/main" id="{4A1B2ECF-6199-4F83-80C1-51043A56DA21}"/>
-              </a:ext>
-            </a:extLst>
-          </p:cNvPr>
-          <p:cNvSpPr>
-            <a:spLocks xmlns:a="http://schemas.openxmlformats.org/drawingml/2006/main" noGrp="1"/>
-          </p:cNvSpPr>
-          <p:nvPr/>
-        </p:nvSpPr>
-        <p:spPr>
-          <a:xfrm xmlns:a="http://schemas.openxmlformats.org/drawingml/2006/main" rot="0">
+            <a:extLst>
+              <a:ext uri="{FF2B5EF4-FFF2-40B4-BE49-F238E27FC236}">
+                <ns2:creationId id="{4A1B2ECF-6199-4F83-80C1-51043A56DA21}"/>
+              </a:ext>
+            </a:extLst>
+          </p:cNvPr>
+          <p:cNvSpPr>
+            <a:spLocks noGrp="1"/>
+          </p:cNvSpPr>
+          <p:nvPr/>
+        </p:nvSpPr>
+        <p:spPr>
+          <a:xfrm rot="0">
             <a:off x="6305550" y="4752975"/>
             <a:ext cx="704850" cy="133350"/>
           </a:xfrm>
-          <a:prstGeom xmlns:a="http://schemas.openxmlformats.org/drawingml/2006/main" prst="rightArrow">
-            <a:avLst/>
-          </a:prstGeom>
-          <a:solidFill xmlns:a="http://schemas.openxmlformats.org/drawingml/2006/main">
+          <a:prstGeom prst="rightArrow">
+            <a:avLst/>
+          </a:prstGeom>
+          <a:solidFill>
             <a:srgbClr val="172026"/>
           </a:solidFill>
-          <a:ln xmlns:a="http://schemas.openxmlformats.org/drawingml/2006/main" w="0">
+          <a:ln w="0">
             <a:solidFill>
               <a:srgbClr val="172026"/>
             </a:solidFill>
@@ -9804,31 +9881,31 @@
       <p:sp>
         <p:nvSpPr>
           <p:cNvPr id="23" name="">
-            <a:extLst xmlns:a="http://schemas.openxmlformats.org/drawingml/2006/main">
-              <a:ext uri="{FF2B5EF4-FFF2-40B4-BE49-F238E27FC236}">
-                <a16:creationId xmlns:a16="http://schemas.microsoft.com/office/drawing/2014/main" id="{FCF747A2-E8C1-4F50-AFE3-D2CDE1B8FE2D}"/>
-              </a:ext>
-            </a:extLst>
-          </p:cNvPr>
-          <p:cNvSpPr>
-            <a:spLocks xmlns:a="http://schemas.openxmlformats.org/drawingml/2006/main" noGrp="1"/>
-          </p:cNvSpPr>
-          <p:nvPr/>
-        </p:nvSpPr>
-        <p:spPr>
-          <a:xfrm xmlns:a="http://schemas.openxmlformats.org/drawingml/2006/main" rot="0">
+            <a:extLst>
+              <a:ext uri="{FF2B5EF4-FFF2-40B4-BE49-F238E27FC236}">
+                <ns2:creationId id="{FCF747A2-E8C1-4F50-AFE3-D2CDE1B8FE2D}"/>
+              </a:ext>
+            </a:extLst>
+          </p:cNvPr>
+          <p:cNvSpPr>
+            <a:spLocks noGrp="1"/>
+          </p:cNvSpPr>
+          <p:nvPr/>
+        </p:nvSpPr>
+        <p:spPr>
+          <a:xfrm rot="0">
             <a:off x="7067550" y="4514850"/>
             <a:ext cx="1485900" cy="628650"/>
           </a:xfrm>
-          <a:prstGeom xmlns:a="http://schemas.openxmlformats.org/drawingml/2006/main" prst="roundRect">
+          <a:prstGeom prst="roundRect">
             <a:avLst>
               <a:gd name="adj" fmla="val 12121"/>
             </a:avLst>
           </a:prstGeom>
-          <a:solidFill xmlns:a="http://schemas.openxmlformats.org/drawingml/2006/main">
+          <a:solidFill>
             <a:srgbClr val="DFF5EC"/>
           </a:solidFill>
-          <a:ln xmlns:a="http://schemas.openxmlformats.org/drawingml/2006/main" w="10478">
+          <a:ln w="10478">
             <a:solidFill>
               <a:srgbClr val="23313B"/>
             </a:solidFill>
@@ -9839,31 +9916,31 @@
       <p:sp>
         <p:nvSpPr>
           <p:cNvPr id="24" name="">
-            <a:extLst xmlns:a="http://schemas.openxmlformats.org/drawingml/2006/main">
-              <a:ext uri="{FF2B5EF4-FFF2-40B4-BE49-F238E27FC236}">
-                <a16:creationId xmlns:a16="http://schemas.microsoft.com/office/drawing/2014/main" id="{B4367873-1A2E-45BF-8CCC-6CE00E7073ED}"/>
-              </a:ext>
-            </a:extLst>
-          </p:cNvPr>
-          <p:cNvSpPr>
-            <a:spLocks xmlns:a="http://schemas.openxmlformats.org/drawingml/2006/main" noGrp="1"/>
-          </p:cNvSpPr>
-          <p:nvPr/>
-        </p:nvSpPr>
-        <p:spPr>
-          <a:xfrm xmlns:a="http://schemas.openxmlformats.org/drawingml/2006/main" rot="0">
+            <a:extLst>
+              <a:ext uri="{FF2B5EF4-FFF2-40B4-BE49-F238E27FC236}">
+                <ns2:creationId id="{B4367873-1A2E-45BF-8CCC-6CE00E7073ED}"/>
+              </a:ext>
+            </a:extLst>
+          </p:cNvPr>
+          <p:cNvSpPr>
+            <a:spLocks noGrp="1"/>
+          </p:cNvSpPr>
+          <p:nvPr/>
+        </p:nvSpPr>
+        <p:spPr>
+          <a:xfrm rot="0">
             <a:off x="7067550" y="4667250"/>
             <a:ext cx="1485900" cy="171450"/>
           </a:xfrm>
-          <a:prstGeom xmlns:a="http://schemas.openxmlformats.org/drawingml/2006/main" prst="rect">
-            <a:avLst/>
-          </a:prstGeom>
-          <a:solidFill xmlns:a="http://schemas.openxmlformats.org/drawingml/2006/main">
+          <a:prstGeom prst="rect">
+            <a:avLst/>
+          </a:prstGeom>
+          <a:solidFill>
             <a:srgbClr val="000000">
               <a:alpha val="0"/>
             </a:srgbClr>
           </a:solidFill>
-          <a:ln xmlns:a="http://schemas.openxmlformats.org/drawingml/2006/main" w="0">
+          <a:ln w="0">
             <a:solidFill>
               <a:srgbClr val="000000">
                 <a:alpha val="0"/>
@@ -9873,9 +9950,9 @@
           </a:ln>
         </p:spPr>
         <p:txBody>
-          <a:bodyPr xmlns:a="http://schemas.openxmlformats.org/drawingml/2006/main" lIns="0" tIns="0" rIns="0" bIns="0" anchor="t"/>
-          <a:lstStyle xmlns:a="http://schemas.openxmlformats.org/drawingml/2006/main"/>
-          <a:p xmlns:a="http://schemas.openxmlformats.org/drawingml/2006/main">
+          <a:bodyPr lIns="0" tIns="0" rIns="0" bIns="0" anchor="t"/>
+          <a:lstStyle/>
+          <a:p>
             <a:pPr algn="ctr">
               <a:defRPr sz="1125" b="1">
                 <a:solidFill>
@@ -9889,7 +9966,7 @@
                   <a:srgbClr val="172026"/>
                 </a:solidFill>
               </a:rPr>
-              <a:t>createAlertRule(...)</a:t>
+              <a:t>buildNotification()</a:t>
             </a:r>
           </a:p>
         </p:txBody>
@@ -9897,29 +9974,29 @@
       <p:sp>
         <p:nvSpPr>
           <p:cNvPr id="25" name="">
-            <a:extLst xmlns:a="http://schemas.openxmlformats.org/drawingml/2006/main">
-              <a:ext uri="{FF2B5EF4-FFF2-40B4-BE49-F238E27FC236}">
-                <a16:creationId xmlns:a16="http://schemas.microsoft.com/office/drawing/2014/main" id="{11944876-9532-4289-A0C1-F426D6AF216F}"/>
-              </a:ext>
-            </a:extLst>
-          </p:cNvPr>
-          <p:cNvSpPr>
-            <a:spLocks xmlns:a="http://schemas.openxmlformats.org/drawingml/2006/main" noGrp="1"/>
-          </p:cNvSpPr>
-          <p:nvPr/>
-        </p:nvSpPr>
-        <p:spPr>
-          <a:xfrm xmlns:a="http://schemas.openxmlformats.org/drawingml/2006/main" rot="0">
+            <a:extLst>
+              <a:ext uri="{FF2B5EF4-FFF2-40B4-BE49-F238E27FC236}">
+                <ns2:creationId id="{11944876-9532-4289-A0C1-F426D6AF216F}"/>
+              </a:ext>
+            </a:extLst>
+          </p:cNvPr>
+          <p:cNvSpPr>
+            <a:spLocks noGrp="1"/>
+          </p:cNvSpPr>
+          <p:nvPr/>
+        </p:nvSpPr>
+        <p:spPr>
+          <a:xfrm rot="0">
             <a:off x="8610600" y="4752975"/>
             <a:ext cx="704850" cy="133350"/>
           </a:xfrm>
-          <a:prstGeom xmlns:a="http://schemas.openxmlformats.org/drawingml/2006/main" prst="rightArrow">
-            <a:avLst/>
-          </a:prstGeom>
-          <a:solidFill xmlns:a="http://schemas.openxmlformats.org/drawingml/2006/main">
+          <a:prstGeom prst="rightArrow">
+            <a:avLst/>
+          </a:prstGeom>
+          <a:solidFill>
             <a:srgbClr val="172026"/>
           </a:solidFill>
-          <a:ln xmlns:a="http://schemas.openxmlformats.org/drawingml/2006/main" w="0">
+          <a:ln w="0">
             <a:solidFill>
               <a:srgbClr val="172026"/>
             </a:solidFill>
@@ -9930,31 +10007,31 @@
       <p:sp>
         <p:nvSpPr>
           <p:cNvPr id="26" name="">
-            <a:extLst xmlns:a="http://schemas.openxmlformats.org/drawingml/2006/main">
-              <a:ext uri="{FF2B5EF4-FFF2-40B4-BE49-F238E27FC236}">
-                <a16:creationId xmlns:a16="http://schemas.microsoft.com/office/drawing/2014/main" id="{38A06DDA-77D2-4356-A012-12F680FEFE8E}"/>
-              </a:ext>
-            </a:extLst>
-          </p:cNvPr>
-          <p:cNvSpPr>
-            <a:spLocks xmlns:a="http://schemas.openxmlformats.org/drawingml/2006/main" noGrp="1"/>
-          </p:cNvSpPr>
-          <p:nvPr/>
-        </p:nvSpPr>
-        <p:spPr>
-          <a:xfrm xmlns:a="http://schemas.openxmlformats.org/drawingml/2006/main" rot="0">
+            <a:extLst>
+              <a:ext uri="{FF2B5EF4-FFF2-40B4-BE49-F238E27FC236}">
+                <ns2:creationId id="{38A06DDA-77D2-4356-A012-12F680FEFE8E}"/>
+              </a:ext>
+            </a:extLst>
+          </p:cNvPr>
+          <p:cNvSpPr>
+            <a:spLocks noGrp="1"/>
+          </p:cNvSpPr>
+          <p:nvPr/>
+        </p:nvSpPr>
+        <p:spPr>
+          <a:xfrm rot="0">
             <a:off x="9391650" y="4400550"/>
             <a:ext cx="1733550" cy="381000"/>
           </a:xfrm>
-          <a:prstGeom xmlns:a="http://schemas.openxmlformats.org/drawingml/2006/main" prst="roundRect">
+          <a:prstGeom prst="roundRect">
             <a:avLst>
               <a:gd name="adj" fmla="val 20000"/>
             </a:avLst>
           </a:prstGeom>
-          <a:solidFill xmlns:a="http://schemas.openxmlformats.org/drawingml/2006/main">
+          <a:solidFill>
             <a:srgbClr val="FAEFD9"/>
           </a:solidFill>
-          <a:ln xmlns:a="http://schemas.openxmlformats.org/drawingml/2006/main" w="10478">
+          <a:ln w="10478">
             <a:solidFill>
               <a:srgbClr val="23313B"/>
             </a:solidFill>
@@ -9965,31 +10042,31 @@
       <p:sp>
         <p:nvSpPr>
           <p:cNvPr id="27" name="">
-            <a:extLst xmlns:a="http://schemas.openxmlformats.org/drawingml/2006/main">
-              <a:ext uri="{FF2B5EF4-FFF2-40B4-BE49-F238E27FC236}">
-                <a16:creationId xmlns:a16="http://schemas.microsoft.com/office/drawing/2014/main" id="{F22CE732-0B00-4BBB-82CC-EAF183885EF4}"/>
-              </a:ext>
-            </a:extLst>
-          </p:cNvPr>
-          <p:cNvSpPr>
-            <a:spLocks xmlns:a="http://schemas.openxmlformats.org/drawingml/2006/main" noGrp="1"/>
-          </p:cNvSpPr>
-          <p:nvPr/>
-        </p:nvSpPr>
-        <p:spPr>
-          <a:xfrm xmlns:a="http://schemas.openxmlformats.org/drawingml/2006/main" rot="0">
+            <a:extLst>
+              <a:ext uri="{FF2B5EF4-FFF2-40B4-BE49-F238E27FC236}">
+                <ns2:creationId id="{F22CE732-0B00-4BBB-82CC-EAF183885EF4}"/>
+              </a:ext>
+            </a:extLst>
+          </p:cNvPr>
+          <p:cNvSpPr>
+            <a:spLocks noGrp="1"/>
+          </p:cNvSpPr>
+          <p:nvPr/>
+        </p:nvSpPr>
+        <p:spPr>
+          <a:xfrm rot="0">
             <a:off x="9391650" y="4495800"/>
             <a:ext cx="1733550" cy="171450"/>
           </a:xfrm>
-          <a:prstGeom xmlns:a="http://schemas.openxmlformats.org/drawingml/2006/main" prst="rect">
-            <a:avLst/>
-          </a:prstGeom>
-          <a:solidFill xmlns:a="http://schemas.openxmlformats.org/drawingml/2006/main">
+          <a:prstGeom prst="rect">
+            <a:avLst/>
+          </a:prstGeom>
+          <a:solidFill>
             <a:srgbClr val="000000">
               <a:alpha val="0"/>
             </a:srgbClr>
           </a:solidFill>
-          <a:ln xmlns:a="http://schemas.openxmlformats.org/drawingml/2006/main" w="0">
+          <a:ln w="0">
             <a:solidFill>
               <a:srgbClr val="000000">
                 <a:alpha val="0"/>
@@ -9999,9 +10076,9 @@
           </a:ln>
         </p:spPr>
         <p:txBody>
-          <a:bodyPr xmlns:a="http://schemas.openxmlformats.org/drawingml/2006/main" lIns="0" tIns="0" rIns="0" bIns="0" anchor="t"/>
-          <a:lstStyle xmlns:a="http://schemas.openxmlformats.org/drawingml/2006/main"/>
-          <a:p xmlns:a="http://schemas.openxmlformats.org/drawingml/2006/main">
+          <a:bodyPr lIns="0" tIns="0" rIns="0" bIns="0" anchor="t"/>
+          <a:lstStyle/>
+          <a:p>
             <a:pPr algn="ctr">
               <a:defRPr sz="975" b="1">
                 <a:solidFill>
@@ -10015,7 +10092,7 @@
                   <a:srgbClr val="172026"/>
                 </a:solidFill>
               </a:rPr>
-              <a:t>PriceAboveAlertRule</a:t>
+              <a:t>PriceAboveRule</a:t>
             </a:r>
           </a:p>
         </p:txBody>
@@ -10023,31 +10100,31 @@
       <p:sp>
         <p:nvSpPr>
           <p:cNvPr id="28" name="">
-            <a:extLst xmlns:a="http://schemas.openxmlformats.org/drawingml/2006/main">
-              <a:ext uri="{FF2B5EF4-FFF2-40B4-BE49-F238E27FC236}">
-                <a16:creationId xmlns:a16="http://schemas.microsoft.com/office/drawing/2014/main" id="{F187C29D-BA7F-4ADC-ABE6-138C56C3675B}"/>
-              </a:ext>
-            </a:extLst>
-          </p:cNvPr>
-          <p:cNvSpPr>
-            <a:spLocks xmlns:a="http://schemas.openxmlformats.org/drawingml/2006/main" noGrp="1"/>
-          </p:cNvSpPr>
-          <p:nvPr/>
-        </p:nvSpPr>
-        <p:spPr>
-          <a:xfrm xmlns:a="http://schemas.openxmlformats.org/drawingml/2006/main" rot="0">
+            <a:extLst>
+              <a:ext uri="{FF2B5EF4-FFF2-40B4-BE49-F238E27FC236}">
+                <ns2:creationId id="{F187C29D-BA7F-4ADC-ABE6-138C56C3675B}"/>
+              </a:ext>
+            </a:extLst>
+          </p:cNvPr>
+          <p:cNvSpPr>
+            <a:spLocks noGrp="1"/>
+          </p:cNvSpPr>
+          <p:nvPr/>
+        </p:nvSpPr>
+        <p:spPr>
+          <a:xfrm rot="0">
             <a:off x="9391650" y="4876800"/>
             <a:ext cx="1733550" cy="381000"/>
           </a:xfrm>
-          <a:prstGeom xmlns:a="http://schemas.openxmlformats.org/drawingml/2006/main" prst="roundRect">
+          <a:prstGeom prst="roundRect">
             <a:avLst>
               <a:gd name="adj" fmla="val 20000"/>
             </a:avLst>
           </a:prstGeom>
-          <a:solidFill xmlns:a="http://schemas.openxmlformats.org/drawingml/2006/main">
+          <a:solidFill>
             <a:srgbClr val="E5EEFF"/>
           </a:solidFill>
-          <a:ln xmlns:a="http://schemas.openxmlformats.org/drawingml/2006/main" w="10478">
+          <a:ln w="10478">
             <a:solidFill>
               <a:srgbClr val="23313B"/>
             </a:solidFill>
@@ -10058,31 +10135,31 @@
       <p:sp>
         <p:nvSpPr>
           <p:cNvPr id="29" name="">
-            <a:extLst xmlns:a="http://schemas.openxmlformats.org/drawingml/2006/main">
-              <a:ext uri="{FF2B5EF4-FFF2-40B4-BE49-F238E27FC236}">
-                <a16:creationId xmlns:a16="http://schemas.microsoft.com/office/drawing/2014/main" id="{587BE118-3568-4149-B85D-648EFC08C8F3}"/>
-              </a:ext>
-            </a:extLst>
-          </p:cNvPr>
-          <p:cNvSpPr>
-            <a:spLocks xmlns:a="http://schemas.openxmlformats.org/drawingml/2006/main" noGrp="1"/>
-          </p:cNvSpPr>
-          <p:nvPr/>
-        </p:nvSpPr>
-        <p:spPr>
-          <a:xfrm xmlns:a="http://schemas.openxmlformats.org/drawingml/2006/main" rot="0">
+            <a:extLst>
+              <a:ext uri="{FF2B5EF4-FFF2-40B4-BE49-F238E27FC236}">
+                <ns2:creationId id="{587BE118-3568-4149-B85D-648EFC08C8F3}"/>
+              </a:ext>
+            </a:extLst>
+          </p:cNvPr>
+          <p:cNvSpPr>
+            <a:spLocks noGrp="1"/>
+          </p:cNvSpPr>
+          <p:nvPr/>
+        </p:nvSpPr>
+        <p:spPr>
+          <a:xfrm rot="0">
             <a:off x="9391650" y="4972050"/>
             <a:ext cx="1733550" cy="171450"/>
           </a:xfrm>
-          <a:prstGeom xmlns:a="http://schemas.openxmlformats.org/drawingml/2006/main" prst="rect">
-            <a:avLst/>
-          </a:prstGeom>
-          <a:solidFill xmlns:a="http://schemas.openxmlformats.org/drawingml/2006/main">
+          <a:prstGeom prst="rect">
+            <a:avLst/>
+          </a:prstGeom>
+          <a:solidFill>
             <a:srgbClr val="000000">
               <a:alpha val="0"/>
             </a:srgbClr>
           </a:solidFill>
-          <a:ln xmlns:a="http://schemas.openxmlformats.org/drawingml/2006/main" w="0">
+          <a:ln w="0">
             <a:solidFill>
               <a:srgbClr val="000000">
                 <a:alpha val="0"/>
@@ -10092,9 +10169,9 @@
           </a:ln>
         </p:spPr>
         <p:txBody>
-          <a:bodyPr xmlns:a="http://schemas.openxmlformats.org/drawingml/2006/main" lIns="0" tIns="0" rIns="0" bIns="0" anchor="t"/>
-          <a:lstStyle xmlns:a="http://schemas.openxmlformats.org/drawingml/2006/main"/>
-          <a:p xmlns:a="http://schemas.openxmlformats.org/drawingml/2006/main">
+          <a:bodyPr lIns="0" tIns="0" rIns="0" bIns="0" anchor="t"/>
+          <a:lstStyle/>
+          <a:p>
             <a:pPr algn="ctr">
               <a:defRPr sz="975" b="1">
                 <a:solidFill>
@@ -10108,7 +10185,7 @@
                   <a:srgbClr val="172026"/>
                 </a:solidFill>
               </a:rPr>
-              <a:t>PercentChangeUpAlertRule</a:t>
+              <a:t>PriceBelowRule</a:t>
             </a:r>
           </a:p>
         </p:txBody>
@@ -10116,31 +10193,31 @@
       <p:sp>
         <p:nvSpPr>
           <p:cNvPr id="30" name="">
-            <a:extLst xmlns:a="http://schemas.openxmlformats.org/drawingml/2006/main">
-              <a:ext uri="{FF2B5EF4-FFF2-40B4-BE49-F238E27FC236}">
-                <a16:creationId xmlns:a16="http://schemas.microsoft.com/office/drawing/2014/main" id="{E5CD213A-40E8-4BC9-BC14-15E59170B317}"/>
-              </a:ext>
-            </a:extLst>
-          </p:cNvPr>
-          <p:cNvSpPr>
-            <a:spLocks xmlns:a="http://schemas.openxmlformats.org/drawingml/2006/main" noGrp="1"/>
-          </p:cNvSpPr>
-          <p:nvPr/>
-        </p:nvSpPr>
-        <p:spPr>
-          <a:xfrm xmlns:a="http://schemas.openxmlformats.org/drawingml/2006/main" rot="0">
+            <a:extLst>
+              <a:ext uri="{FF2B5EF4-FFF2-40B4-BE49-F238E27FC236}">
+                <ns2:creationId id="{E5CD213A-40E8-4BC9-BC14-15E59170B317}"/>
+              </a:ext>
+            </a:extLst>
+          </p:cNvPr>
+          <p:cNvSpPr>
+            <a:spLocks noGrp="1"/>
+          </p:cNvSpPr>
+          <p:nvPr/>
+        </p:nvSpPr>
+        <p:spPr>
+          <a:xfrm rot="0">
             <a:off x="609600" y="6534150"/>
             <a:ext cx="9715500" cy="171450"/>
           </a:xfrm>
-          <a:prstGeom xmlns:a="http://schemas.openxmlformats.org/drawingml/2006/main" prst="rect">
-            <a:avLst/>
-          </a:prstGeom>
-          <a:solidFill xmlns:a="http://schemas.openxmlformats.org/drawingml/2006/main">
+          <a:prstGeom prst="rect">
+            <a:avLst/>
+          </a:prstGeom>
+          <a:solidFill>
             <a:srgbClr val="000000">
               <a:alpha val="0"/>
             </a:srgbClr>
           </a:solidFill>
-          <a:ln xmlns:a="http://schemas.openxmlformats.org/drawingml/2006/main" w="0">
+          <a:ln w="0">
             <a:solidFill>
               <a:srgbClr val="000000">
                 <a:alpha val="0"/>
@@ -10150,9 +10227,9 @@
           </a:ln>
         </p:spPr>
         <p:txBody>
-          <a:bodyPr xmlns:a="http://schemas.openxmlformats.org/drawingml/2006/main" lIns="0" tIns="0" rIns="0" bIns="0" anchor="t"/>
-          <a:lstStyle xmlns:a="http://schemas.openxmlformats.org/drawingml/2006/main"/>
-          <a:p xmlns:a="http://schemas.openxmlformats.org/drawingml/2006/main">
+          <a:bodyPr lIns="0" tIns="0" rIns="0" bIns="0" anchor="t"/>
+          <a:lstStyle/>
+          <a:p>
             <a:pPr algn="l">
               <a:defRPr sz="750" b="0">
                 <a:solidFill>
@@ -10174,7 +10251,7 @@
     </p:spTree>
     <p:extLst>
       <p:ext uri="{BB962C8B-B14F-4D97-AF65-F5344CB8AC3E}">
-        <p14:creationId xmlns:p14="http://schemas.microsoft.com/office/powerpoint/2010/main" val="741896479"/>
+        <ns3:creationId val="741896479"/>
       </p:ext>
     </p:extLst>
   </p:cSld>
